--- a/slides/AI_Agent_Explainability.pptx
+++ b/slides/AI_Agent_Explainability.pptx
@@ -8,6 +8,9 @@
   <p:sldIdLst>
     <p:sldId id="297" r:id="rId3"/>
     <p:sldId id="298" r:id="rId4"/>
+    <p:sldId id="299" r:id="rId5"/>
+    <p:sldId id="301" r:id="rId6"/>
+    <p:sldId id="300" r:id="rId7"/>
   </p:sldIdLst>
   <p:sldSz cx="9144000" cy="6858000" type="screen4x3"/>
   <p:notesSz cx="7559675" cy="10691813"/>
@@ -185,130 +188,6 @@
     </pc:docChg>
   </pc:docChgLst>
   <pc:docChgLst>
-    <pc:chgData name="Tiago Janela" userId="ee1a79fe-c79c-4f34-9602-7f6f2f0482b3" providerId="ADAL" clId="{771048AC-4F55-42D8-AA6A-766F659A7530}"/>
-    <pc:docChg chg="undo custSel addSld delSld modSld sldOrd">
-      <pc:chgData name="Tiago Janela" userId="ee1a79fe-c79c-4f34-9602-7f6f2f0482b3" providerId="ADAL" clId="{771048AC-4F55-42D8-AA6A-766F659A7530}" dt="2026-02-05T14:24:21.198" v="2967" actId="20577"/>
-      <pc:docMkLst>
-        <pc:docMk/>
-      </pc:docMkLst>
-      <pc:sldChg chg="delSp modSp add mod">
-        <pc:chgData name="Tiago Janela" userId="ee1a79fe-c79c-4f34-9602-7f6f2f0482b3" providerId="ADAL" clId="{771048AC-4F55-42D8-AA6A-766F659A7530}" dt="2026-02-05T14:24:21.198" v="2967" actId="20577"/>
-        <pc:sldMkLst>
-          <pc:docMk/>
-          <pc:sldMk cId="901468915" sldId="296"/>
-        </pc:sldMkLst>
-        <pc:spChg chg="mod">
-          <ac:chgData name="Tiago Janela" userId="ee1a79fe-c79c-4f34-9602-7f6f2f0482b3" providerId="ADAL" clId="{771048AC-4F55-42D8-AA6A-766F659A7530}" dt="2026-02-05T10:58:00.218" v="1144" actId="20577"/>
-          <ac:spMkLst>
-            <pc:docMk/>
-            <pc:sldMk cId="901468915" sldId="296"/>
-            <ac:spMk id="163" creationId="{CBF44E8C-8654-71A0-B86B-E9D342AC2D4D}"/>
-          </ac:spMkLst>
-        </pc:spChg>
-        <pc:spChg chg="mod">
-          <ac:chgData name="Tiago Janela" userId="ee1a79fe-c79c-4f34-9602-7f6f2f0482b3" providerId="ADAL" clId="{771048AC-4F55-42D8-AA6A-766F659A7530}" dt="2026-02-05T14:24:21.198" v="2967" actId="20577"/>
-          <ac:spMkLst>
-            <pc:docMk/>
-            <pc:sldMk cId="901468915" sldId="296"/>
-            <ac:spMk id="164" creationId="{B6FA4745-5BA4-2D80-2549-988AFFB4E146}"/>
-          </ac:spMkLst>
-        </pc:spChg>
-      </pc:sldChg>
-      <pc:sldChg chg="modSp add mod ord">
-        <pc:chgData name="Tiago Janela" userId="ee1a79fe-c79c-4f34-9602-7f6f2f0482b3" providerId="ADAL" clId="{771048AC-4F55-42D8-AA6A-766F659A7530}" dt="2026-02-05T12:59:57.611" v="1910" actId="20577"/>
-        <pc:sldMkLst>
-          <pc:docMk/>
-          <pc:sldMk cId="829672710" sldId="297"/>
-        </pc:sldMkLst>
-        <pc:spChg chg="mod">
-          <ac:chgData name="Tiago Janela" userId="ee1a79fe-c79c-4f34-9602-7f6f2f0482b3" providerId="ADAL" clId="{771048AC-4F55-42D8-AA6A-766F659A7530}" dt="2026-02-05T12:59:57.611" v="1910" actId="20577"/>
-          <ac:spMkLst>
-            <pc:docMk/>
-            <pc:sldMk cId="829672710" sldId="297"/>
-            <ac:spMk id="156" creationId="{00000000-0000-0000-0000-000000000000}"/>
-          </ac:spMkLst>
-        </pc:spChg>
-      </pc:sldChg>
-      <pc:sldChg chg="delSp modSp add mod ord">
-        <pc:chgData name="Tiago Janela" userId="ee1a79fe-c79c-4f34-9602-7f6f2f0482b3" providerId="ADAL" clId="{771048AC-4F55-42D8-AA6A-766F659A7530}" dt="2026-02-05T14:23:46.564" v="2966" actId="20577"/>
-        <pc:sldMkLst>
-          <pc:docMk/>
-          <pc:sldMk cId="721732568" sldId="298"/>
-        </pc:sldMkLst>
-        <pc:spChg chg="mod">
-          <ac:chgData name="Tiago Janela" userId="ee1a79fe-c79c-4f34-9602-7f6f2f0482b3" providerId="ADAL" clId="{771048AC-4F55-42D8-AA6A-766F659A7530}" dt="2026-02-05T14:23:46.564" v="2966" actId="20577"/>
-          <ac:spMkLst>
-            <pc:docMk/>
-            <pc:sldMk cId="721732568" sldId="298"/>
-            <ac:spMk id="2" creationId="{870990D0-7AC5-46BA-6FC4-274F8E0A3ABE}"/>
-          </ac:spMkLst>
-        </pc:spChg>
-        <pc:spChg chg="mod">
-          <ac:chgData name="Tiago Janela" userId="ee1a79fe-c79c-4f34-9602-7f6f2f0482b3" providerId="ADAL" clId="{771048AC-4F55-42D8-AA6A-766F659A7530}" dt="2026-02-05T13:01:46.094" v="1930" actId="20577"/>
-          <ac:spMkLst>
-            <pc:docMk/>
-            <pc:sldMk cId="721732568" sldId="298"/>
-            <ac:spMk id="163" creationId="{57944F4B-F502-E7CC-8790-8737702BC6AC}"/>
-          </ac:spMkLst>
-        </pc:spChg>
-      </pc:sldChg>
-    </pc:docChg>
-  </pc:docChgLst>
-  <pc:docChgLst>
-    <pc:chgData name="Tiago Janela" userId="ee1a79fe-c79c-4f34-9602-7f6f2f0482b3" providerId="ADAL" clId="{A1A622BE-A8AD-47B7-8802-BAC61BCE5126}"/>
-    <pc:docChg chg="undo custSel modSld">
-      <pc:chgData name="Tiago Janela" userId="ee1a79fe-c79c-4f34-9602-7f6f2f0482b3" providerId="ADAL" clId="{A1A622BE-A8AD-47B7-8802-BAC61BCE5126}" dt="2026-03-04T13:21:40.843" v="48" actId="403"/>
-      <pc:docMkLst>
-        <pc:docMk/>
-      </pc:docMkLst>
-      <pc:sldChg chg="modSp mod">
-        <pc:chgData name="Tiago Janela" userId="ee1a79fe-c79c-4f34-9602-7f6f2f0482b3" providerId="ADAL" clId="{A1A622BE-A8AD-47B7-8802-BAC61BCE5126}" dt="2026-03-04T13:20:02.161" v="40" actId="20577"/>
-        <pc:sldMkLst>
-          <pc:docMk/>
-          <pc:sldMk cId="114778141" sldId="303"/>
-        </pc:sldMkLst>
-        <pc:spChg chg="mod">
-          <ac:chgData name="Tiago Janela" userId="ee1a79fe-c79c-4f34-9602-7f6f2f0482b3" providerId="ADAL" clId="{A1A622BE-A8AD-47B7-8802-BAC61BCE5126}" dt="2026-03-04T13:20:02.161" v="40" actId="20577"/>
-          <ac:spMkLst>
-            <pc:docMk/>
-            <pc:sldMk cId="114778141" sldId="303"/>
-            <ac:spMk id="2" creationId="{3A594187-BB0C-FE87-8E79-972F5DD9EAE2}"/>
-          </ac:spMkLst>
-        </pc:spChg>
-      </pc:sldChg>
-      <pc:sldChg chg="modSp mod">
-        <pc:chgData name="Tiago Janela" userId="ee1a79fe-c79c-4f34-9602-7f6f2f0482b3" providerId="ADAL" clId="{A1A622BE-A8AD-47B7-8802-BAC61BCE5126}" dt="2026-03-04T13:21:32.291" v="47" actId="20577"/>
-        <pc:sldMkLst>
-          <pc:docMk/>
-          <pc:sldMk cId="1211845523" sldId="306"/>
-        </pc:sldMkLst>
-        <pc:spChg chg="mod">
-          <ac:chgData name="Tiago Janela" userId="ee1a79fe-c79c-4f34-9602-7f6f2f0482b3" providerId="ADAL" clId="{A1A622BE-A8AD-47B7-8802-BAC61BCE5126}" dt="2026-03-04T13:21:32.291" v="47" actId="20577"/>
-          <ac:spMkLst>
-            <pc:docMk/>
-            <pc:sldMk cId="1211845523" sldId="306"/>
-            <ac:spMk id="2" creationId="{3A594187-BB0C-FE87-8E79-972F5DD9EAE2}"/>
-          </ac:spMkLst>
-        </pc:spChg>
-      </pc:sldChg>
-      <pc:sldChg chg="modSp mod">
-        <pc:chgData name="Tiago Janela" userId="ee1a79fe-c79c-4f34-9602-7f6f2f0482b3" providerId="ADAL" clId="{A1A622BE-A8AD-47B7-8802-BAC61BCE5126}" dt="2026-03-04T13:21:40.843" v="48" actId="403"/>
-        <pc:sldMkLst>
-          <pc:docMk/>
-          <pc:sldMk cId="4258501269" sldId="307"/>
-        </pc:sldMkLst>
-        <pc:spChg chg="mod">
-          <ac:chgData name="Tiago Janela" userId="ee1a79fe-c79c-4f34-9602-7f6f2f0482b3" providerId="ADAL" clId="{A1A622BE-A8AD-47B7-8802-BAC61BCE5126}" dt="2026-03-04T13:21:40.843" v="48" actId="403"/>
-          <ac:spMkLst>
-            <pc:docMk/>
-            <pc:sldMk cId="4258501269" sldId="307"/>
-            <ac:spMk id="2" creationId="{3A594187-BB0C-FE87-8E79-972F5DD9EAE2}"/>
-          </ac:spMkLst>
-        </pc:spChg>
-      </pc:sldChg>
-    </pc:docChg>
-  </pc:docChgLst>
-  <pc:docChgLst>
     <pc:chgData name="Tiago Janela" userId="ee1a79fe-c79c-4f34-9602-7f6f2f0482b3" providerId="ADAL" clId="{67D2C233-DF3C-4C6D-9040-D7553E3BCB8A}"/>
     <pc:docChg chg="delSld modSld">
       <pc:chgData name="Tiago Janela" userId="ee1a79fe-c79c-4f34-9602-7f6f2f0482b3" providerId="ADAL" clId="{67D2C233-DF3C-4C6D-9040-D7553E3BCB8A}" dt="2026-03-16T14:03:02.466" v="54" actId="20577"/>
@@ -386,6 +265,201 @@
           <pc:docMk/>
           <pc:sldMk cId="1772121027" sldId="311"/>
         </pc:sldMkLst>
+      </pc:sldChg>
+    </pc:docChg>
+  </pc:docChgLst>
+  <pc:docChgLst>
+    <pc:chgData name="Tiago Janela" userId="ee1a79fe-c79c-4f34-9602-7f6f2f0482b3" providerId="ADAL" clId="{A1A622BE-A8AD-47B7-8802-BAC61BCE5126}"/>
+    <pc:docChg chg="undo custSel modSld">
+      <pc:chgData name="Tiago Janela" userId="ee1a79fe-c79c-4f34-9602-7f6f2f0482b3" providerId="ADAL" clId="{A1A622BE-A8AD-47B7-8802-BAC61BCE5126}" dt="2026-03-04T13:21:40.843" v="48" actId="403"/>
+      <pc:docMkLst>
+        <pc:docMk/>
+      </pc:docMkLst>
+      <pc:sldChg chg="modSp mod">
+        <pc:chgData name="Tiago Janela" userId="ee1a79fe-c79c-4f34-9602-7f6f2f0482b3" providerId="ADAL" clId="{A1A622BE-A8AD-47B7-8802-BAC61BCE5126}" dt="2026-03-04T13:20:02.161" v="40" actId="20577"/>
+        <pc:sldMkLst>
+          <pc:docMk/>
+          <pc:sldMk cId="114778141" sldId="303"/>
+        </pc:sldMkLst>
+        <pc:spChg chg="mod">
+          <ac:chgData name="Tiago Janela" userId="ee1a79fe-c79c-4f34-9602-7f6f2f0482b3" providerId="ADAL" clId="{A1A622BE-A8AD-47B7-8802-BAC61BCE5126}" dt="2026-03-04T13:20:02.161" v="40" actId="20577"/>
+          <ac:spMkLst>
+            <pc:docMk/>
+            <pc:sldMk cId="114778141" sldId="303"/>
+            <ac:spMk id="2" creationId="{3A594187-BB0C-FE87-8E79-972F5DD9EAE2}"/>
+          </ac:spMkLst>
+        </pc:spChg>
+      </pc:sldChg>
+      <pc:sldChg chg="modSp mod">
+        <pc:chgData name="Tiago Janela" userId="ee1a79fe-c79c-4f34-9602-7f6f2f0482b3" providerId="ADAL" clId="{A1A622BE-A8AD-47B7-8802-BAC61BCE5126}" dt="2026-03-04T13:21:32.291" v="47" actId="20577"/>
+        <pc:sldMkLst>
+          <pc:docMk/>
+          <pc:sldMk cId="1211845523" sldId="306"/>
+        </pc:sldMkLst>
+        <pc:spChg chg="mod">
+          <ac:chgData name="Tiago Janela" userId="ee1a79fe-c79c-4f34-9602-7f6f2f0482b3" providerId="ADAL" clId="{A1A622BE-A8AD-47B7-8802-BAC61BCE5126}" dt="2026-03-04T13:21:32.291" v="47" actId="20577"/>
+          <ac:spMkLst>
+            <pc:docMk/>
+            <pc:sldMk cId="1211845523" sldId="306"/>
+            <ac:spMk id="2" creationId="{3A594187-BB0C-FE87-8E79-972F5DD9EAE2}"/>
+          </ac:spMkLst>
+        </pc:spChg>
+      </pc:sldChg>
+      <pc:sldChg chg="modSp mod">
+        <pc:chgData name="Tiago Janela" userId="ee1a79fe-c79c-4f34-9602-7f6f2f0482b3" providerId="ADAL" clId="{A1A622BE-A8AD-47B7-8802-BAC61BCE5126}" dt="2026-03-04T13:21:40.843" v="48" actId="403"/>
+        <pc:sldMkLst>
+          <pc:docMk/>
+          <pc:sldMk cId="4258501269" sldId="307"/>
+        </pc:sldMkLst>
+        <pc:spChg chg="mod">
+          <ac:chgData name="Tiago Janela" userId="ee1a79fe-c79c-4f34-9602-7f6f2f0482b3" providerId="ADAL" clId="{A1A622BE-A8AD-47B7-8802-BAC61BCE5126}" dt="2026-03-04T13:21:40.843" v="48" actId="403"/>
+          <ac:spMkLst>
+            <pc:docMk/>
+            <pc:sldMk cId="4258501269" sldId="307"/>
+            <ac:spMk id="2" creationId="{3A594187-BB0C-FE87-8E79-972F5DD9EAE2}"/>
+          </ac:spMkLst>
+        </pc:spChg>
+      </pc:sldChg>
+    </pc:docChg>
+  </pc:docChgLst>
+  <pc:docChgLst>
+    <pc:chgData name="Tiago Janela" userId="ee1a79fe-c79c-4f34-9602-7f6f2f0482b3" providerId="ADAL" clId="{6BE67FA1-4A27-48B9-BA6A-E25A9786A9CC}"/>
+    <pc:docChg chg="undo custSel addSld modSld sldOrd">
+      <pc:chgData name="Tiago Janela" userId="ee1a79fe-c79c-4f34-9602-7f6f2f0482b3" providerId="ADAL" clId="{6BE67FA1-4A27-48B9-BA6A-E25A9786A9CC}" dt="2026-03-20T13:52:23.099" v="1063" actId="20577"/>
+      <pc:docMkLst>
+        <pc:docMk/>
+      </pc:docMkLst>
+      <pc:sldChg chg="addSp modSp mod">
+        <pc:chgData name="Tiago Janela" userId="ee1a79fe-c79c-4f34-9602-7f6f2f0482b3" providerId="ADAL" clId="{6BE67FA1-4A27-48B9-BA6A-E25A9786A9CC}" dt="2026-03-19T10:54:12.398" v="162" actId="1076"/>
+        <pc:sldMkLst>
+          <pc:docMk/>
+          <pc:sldMk cId="721732568" sldId="298"/>
+        </pc:sldMkLst>
+        <pc:spChg chg="mod">
+          <ac:chgData name="Tiago Janela" userId="ee1a79fe-c79c-4f34-9602-7f6f2f0482b3" providerId="ADAL" clId="{6BE67FA1-4A27-48B9-BA6A-E25A9786A9CC}" dt="2026-03-19T10:51:19.221" v="88" actId="20577"/>
+          <ac:spMkLst>
+            <pc:docMk/>
+            <pc:sldMk cId="721732568" sldId="298"/>
+            <ac:spMk id="2" creationId="{870990D0-7AC5-46BA-6FC4-274F8E0A3ABE}"/>
+          </ac:spMkLst>
+        </pc:spChg>
+        <pc:spChg chg="mod">
+          <ac:chgData name="Tiago Janela" userId="ee1a79fe-c79c-4f34-9602-7f6f2f0482b3" providerId="ADAL" clId="{6BE67FA1-4A27-48B9-BA6A-E25A9786A9CC}" dt="2026-03-19T10:37:44.329" v="9" actId="20577"/>
+          <ac:spMkLst>
+            <pc:docMk/>
+            <pc:sldMk cId="721732568" sldId="298"/>
+            <ac:spMk id="163" creationId="{57944F4B-F502-E7CC-8790-8737702BC6AC}"/>
+          </ac:spMkLst>
+        </pc:spChg>
+        <pc:picChg chg="add mod">
+          <ac:chgData name="Tiago Janela" userId="ee1a79fe-c79c-4f34-9602-7f6f2f0482b3" providerId="ADAL" clId="{6BE67FA1-4A27-48B9-BA6A-E25A9786A9CC}" dt="2026-03-19T10:54:12.398" v="162" actId="1076"/>
+          <ac:picMkLst>
+            <pc:docMk/>
+            <pc:sldMk cId="721732568" sldId="298"/>
+            <ac:picMk id="4" creationId="{A9172708-06AB-AE7A-4BC0-05B1328EE700}"/>
+          </ac:picMkLst>
+        </pc:picChg>
+      </pc:sldChg>
+      <pc:sldChg chg="delSp modSp add mod">
+        <pc:chgData name="Tiago Janela" userId="ee1a79fe-c79c-4f34-9602-7f6f2f0482b3" providerId="ADAL" clId="{6BE67FA1-4A27-48B9-BA6A-E25A9786A9CC}" dt="2026-03-19T10:59:23.180" v="500" actId="20577"/>
+        <pc:sldMkLst>
+          <pc:docMk/>
+          <pc:sldMk cId="1707478755" sldId="299"/>
+        </pc:sldMkLst>
+        <pc:spChg chg="mod">
+          <ac:chgData name="Tiago Janela" userId="ee1a79fe-c79c-4f34-9602-7f6f2f0482b3" providerId="ADAL" clId="{6BE67FA1-4A27-48B9-BA6A-E25A9786A9CC}" dt="2026-03-19T10:59:23.180" v="500" actId="20577"/>
+          <ac:spMkLst>
+            <pc:docMk/>
+            <pc:sldMk cId="1707478755" sldId="299"/>
+            <ac:spMk id="2" creationId="{870990D0-7AC5-46BA-6FC4-274F8E0A3ABE}"/>
+          </ac:spMkLst>
+        </pc:spChg>
+        <pc:picChg chg="del mod">
+          <ac:chgData name="Tiago Janela" userId="ee1a79fe-c79c-4f34-9602-7f6f2f0482b3" providerId="ADAL" clId="{6BE67FA1-4A27-48B9-BA6A-E25A9786A9CC}" dt="2026-03-19T10:51:55.896" v="93" actId="478"/>
+          <ac:picMkLst>
+            <pc:docMk/>
+            <pc:sldMk cId="1707478755" sldId="299"/>
+            <ac:picMk id="4" creationId="{A9172708-06AB-AE7A-4BC0-05B1328EE700}"/>
+          </ac:picMkLst>
+        </pc:picChg>
+      </pc:sldChg>
+      <pc:sldChg chg="addSp delSp modSp add mod">
+        <pc:chgData name="Tiago Janela" userId="ee1a79fe-c79c-4f34-9602-7f6f2f0482b3" providerId="ADAL" clId="{6BE67FA1-4A27-48B9-BA6A-E25A9786A9CC}" dt="2026-03-20T13:21:59.221" v="1059" actId="20577"/>
+        <pc:sldMkLst>
+          <pc:docMk/>
+          <pc:sldMk cId="457486825" sldId="300"/>
+        </pc:sldMkLst>
+        <pc:spChg chg="add del mod">
+          <ac:chgData name="Tiago Janela" userId="ee1a79fe-c79c-4f34-9602-7f6f2f0482b3" providerId="ADAL" clId="{6BE67FA1-4A27-48B9-BA6A-E25A9786A9CC}" dt="2026-03-20T13:19:05.879" v="819" actId="478"/>
+          <ac:spMkLst>
+            <pc:docMk/>
+            <pc:sldMk cId="457486825" sldId="300"/>
+            <ac:spMk id="2" creationId="{870990D0-7AC5-46BA-6FC4-274F8E0A3ABE}"/>
+          </ac:spMkLst>
+        </pc:spChg>
+        <pc:spChg chg="add mod">
+          <ac:chgData name="Tiago Janela" userId="ee1a79fe-c79c-4f34-9602-7f6f2f0482b3" providerId="ADAL" clId="{6BE67FA1-4A27-48B9-BA6A-E25A9786A9CC}" dt="2026-03-20T13:21:59.221" v="1059" actId="20577"/>
+          <ac:spMkLst>
+            <pc:docMk/>
+            <pc:sldMk cId="457486825" sldId="300"/>
+            <ac:spMk id="7" creationId="{66DE14D4-64D4-6D1F-DD92-BC16D674C58B}"/>
+          </ac:spMkLst>
+        </pc:spChg>
+        <pc:spChg chg="mod">
+          <ac:chgData name="Tiago Janela" userId="ee1a79fe-c79c-4f34-9602-7f6f2f0482b3" providerId="ADAL" clId="{6BE67FA1-4A27-48B9-BA6A-E25A9786A9CC}" dt="2026-03-20T13:08:59.412" v="584" actId="20577"/>
+          <ac:spMkLst>
+            <pc:docMk/>
+            <pc:sldMk cId="457486825" sldId="300"/>
+            <ac:spMk id="163" creationId="{57944F4B-F502-E7CC-8790-8737702BC6AC}"/>
+          </ac:spMkLst>
+        </pc:spChg>
+        <pc:picChg chg="add mod">
+          <ac:chgData name="Tiago Janela" userId="ee1a79fe-c79c-4f34-9602-7f6f2f0482b3" providerId="ADAL" clId="{6BE67FA1-4A27-48B9-BA6A-E25A9786A9CC}" dt="2026-03-20T13:19:08.305" v="821" actId="1076"/>
+          <ac:picMkLst>
+            <pc:docMk/>
+            <pc:sldMk cId="457486825" sldId="300"/>
+            <ac:picMk id="4" creationId="{0F3D5BC1-9264-881D-CF39-9525F816570A}"/>
+          </ac:picMkLst>
+        </pc:picChg>
+        <pc:picChg chg="add del">
+          <ac:chgData name="Tiago Janela" userId="ee1a79fe-c79c-4f34-9602-7f6f2f0482b3" providerId="ADAL" clId="{6BE67FA1-4A27-48B9-BA6A-E25A9786A9CC}" dt="2026-03-20T13:16:59.024" v="605" actId="478"/>
+          <ac:picMkLst>
+            <pc:docMk/>
+            <pc:sldMk cId="457486825" sldId="300"/>
+            <ac:picMk id="6" creationId="{D3BA145D-265C-C0B1-7C0E-2EE32552E491}"/>
+          </ac:picMkLst>
+        </pc:picChg>
+      </pc:sldChg>
+      <pc:sldChg chg="delSp modSp add mod ord">
+        <pc:chgData name="Tiago Janela" userId="ee1a79fe-c79c-4f34-9602-7f6f2f0482b3" providerId="ADAL" clId="{6BE67FA1-4A27-48B9-BA6A-E25A9786A9CC}" dt="2026-03-20T13:52:23.099" v="1063" actId="20577"/>
+        <pc:sldMkLst>
+          <pc:docMk/>
+          <pc:sldMk cId="2375808848" sldId="301"/>
+        </pc:sldMkLst>
+        <pc:spChg chg="mod">
+          <ac:chgData name="Tiago Janela" userId="ee1a79fe-c79c-4f34-9602-7f6f2f0482b3" providerId="ADAL" clId="{6BE67FA1-4A27-48B9-BA6A-E25A9786A9CC}" dt="2026-03-20T13:52:23.099" v="1063" actId="20577"/>
+          <ac:spMkLst>
+            <pc:docMk/>
+            <pc:sldMk cId="2375808848" sldId="301"/>
+            <ac:spMk id="2" creationId="{870990D0-7AC5-46BA-6FC4-274F8E0A3ABE}"/>
+          </ac:spMkLst>
+        </pc:spChg>
+        <pc:picChg chg="del">
+          <ac:chgData name="Tiago Janela" userId="ee1a79fe-c79c-4f34-9602-7f6f2f0482b3" providerId="ADAL" clId="{6BE67FA1-4A27-48B9-BA6A-E25A9786A9CC}" dt="2026-03-20T13:16:48.406" v="599" actId="478"/>
+          <ac:picMkLst>
+            <pc:docMk/>
+            <pc:sldMk cId="2375808848" sldId="301"/>
+            <ac:picMk id="4" creationId="{0F3D5BC1-9264-881D-CF39-9525F816570A}"/>
+          </ac:picMkLst>
+        </pc:picChg>
+        <pc:picChg chg="mod">
+          <ac:chgData name="Tiago Janela" userId="ee1a79fe-c79c-4f34-9602-7f6f2f0482b3" providerId="ADAL" clId="{6BE67FA1-4A27-48B9-BA6A-E25A9786A9CC}" dt="2026-03-20T13:17:16.190" v="611" actId="1076"/>
+          <ac:picMkLst>
+            <pc:docMk/>
+            <pc:sldMk cId="2375808848" sldId="301"/>
+            <ac:picMk id="6" creationId="{D3BA145D-265C-C0B1-7C0E-2EE32552E491}"/>
+          </ac:picMkLst>
+        </pc:picChg>
       </pc:sldChg>
     </pc:docChg>
   </pc:docChgLst>
@@ -843,6 +917,76 @@
       </pc:sldChg>
     </pc:docChg>
   </pc:docChgLst>
+  <pc:docChgLst>
+    <pc:chgData name="Tiago Janela" userId="ee1a79fe-c79c-4f34-9602-7f6f2f0482b3" providerId="ADAL" clId="{771048AC-4F55-42D8-AA6A-766F659A7530}"/>
+    <pc:docChg chg="undo custSel addSld delSld modSld sldOrd">
+      <pc:chgData name="Tiago Janela" userId="ee1a79fe-c79c-4f34-9602-7f6f2f0482b3" providerId="ADAL" clId="{771048AC-4F55-42D8-AA6A-766F659A7530}" dt="2026-02-05T14:24:21.198" v="2967" actId="20577"/>
+      <pc:docMkLst>
+        <pc:docMk/>
+      </pc:docMkLst>
+      <pc:sldChg chg="delSp modSp add mod">
+        <pc:chgData name="Tiago Janela" userId="ee1a79fe-c79c-4f34-9602-7f6f2f0482b3" providerId="ADAL" clId="{771048AC-4F55-42D8-AA6A-766F659A7530}" dt="2026-02-05T14:24:21.198" v="2967" actId="20577"/>
+        <pc:sldMkLst>
+          <pc:docMk/>
+          <pc:sldMk cId="901468915" sldId="296"/>
+        </pc:sldMkLst>
+        <pc:spChg chg="mod">
+          <ac:chgData name="Tiago Janela" userId="ee1a79fe-c79c-4f34-9602-7f6f2f0482b3" providerId="ADAL" clId="{771048AC-4F55-42D8-AA6A-766F659A7530}" dt="2026-02-05T10:58:00.218" v="1144" actId="20577"/>
+          <ac:spMkLst>
+            <pc:docMk/>
+            <pc:sldMk cId="901468915" sldId="296"/>
+            <ac:spMk id="163" creationId="{CBF44E8C-8654-71A0-B86B-E9D342AC2D4D}"/>
+          </ac:spMkLst>
+        </pc:spChg>
+        <pc:spChg chg="mod">
+          <ac:chgData name="Tiago Janela" userId="ee1a79fe-c79c-4f34-9602-7f6f2f0482b3" providerId="ADAL" clId="{771048AC-4F55-42D8-AA6A-766F659A7530}" dt="2026-02-05T14:24:21.198" v="2967" actId="20577"/>
+          <ac:spMkLst>
+            <pc:docMk/>
+            <pc:sldMk cId="901468915" sldId="296"/>
+            <ac:spMk id="164" creationId="{B6FA4745-5BA4-2D80-2549-988AFFB4E146}"/>
+          </ac:spMkLst>
+        </pc:spChg>
+      </pc:sldChg>
+      <pc:sldChg chg="modSp add mod ord">
+        <pc:chgData name="Tiago Janela" userId="ee1a79fe-c79c-4f34-9602-7f6f2f0482b3" providerId="ADAL" clId="{771048AC-4F55-42D8-AA6A-766F659A7530}" dt="2026-02-05T12:59:57.611" v="1910" actId="20577"/>
+        <pc:sldMkLst>
+          <pc:docMk/>
+          <pc:sldMk cId="829672710" sldId="297"/>
+        </pc:sldMkLst>
+        <pc:spChg chg="mod">
+          <ac:chgData name="Tiago Janela" userId="ee1a79fe-c79c-4f34-9602-7f6f2f0482b3" providerId="ADAL" clId="{771048AC-4F55-42D8-AA6A-766F659A7530}" dt="2026-02-05T12:59:57.611" v="1910" actId="20577"/>
+          <ac:spMkLst>
+            <pc:docMk/>
+            <pc:sldMk cId="829672710" sldId="297"/>
+            <ac:spMk id="156" creationId="{00000000-0000-0000-0000-000000000000}"/>
+          </ac:spMkLst>
+        </pc:spChg>
+      </pc:sldChg>
+      <pc:sldChg chg="delSp modSp add mod ord">
+        <pc:chgData name="Tiago Janela" userId="ee1a79fe-c79c-4f34-9602-7f6f2f0482b3" providerId="ADAL" clId="{771048AC-4F55-42D8-AA6A-766F659A7530}" dt="2026-02-05T14:23:46.564" v="2966" actId="20577"/>
+        <pc:sldMkLst>
+          <pc:docMk/>
+          <pc:sldMk cId="721732568" sldId="298"/>
+        </pc:sldMkLst>
+        <pc:spChg chg="mod">
+          <ac:chgData name="Tiago Janela" userId="ee1a79fe-c79c-4f34-9602-7f6f2f0482b3" providerId="ADAL" clId="{771048AC-4F55-42D8-AA6A-766F659A7530}" dt="2026-02-05T14:23:46.564" v="2966" actId="20577"/>
+          <ac:spMkLst>
+            <pc:docMk/>
+            <pc:sldMk cId="721732568" sldId="298"/>
+            <ac:spMk id="2" creationId="{870990D0-7AC5-46BA-6FC4-274F8E0A3ABE}"/>
+          </ac:spMkLst>
+        </pc:spChg>
+        <pc:spChg chg="mod">
+          <ac:chgData name="Tiago Janela" userId="ee1a79fe-c79c-4f34-9602-7f6f2f0482b3" providerId="ADAL" clId="{771048AC-4F55-42D8-AA6A-766F659A7530}" dt="2026-02-05T13:01:46.094" v="1930" actId="20577"/>
+          <ac:spMkLst>
+            <pc:docMk/>
+            <pc:sldMk cId="721732568" sldId="298"/>
+            <ac:spMk id="163" creationId="{57944F4B-F502-E7CC-8790-8737702BC6AC}"/>
+          </ac:spMkLst>
+        </pc:spChg>
+      </pc:sldChg>
+    </pc:docChg>
+  </pc:docChgLst>
 </pc:chgInfo>
 </file>
 
@@ -9955,7 +10099,7 @@
                 </a:solidFill>
                 <a:latin typeface="Century Gothic"/>
               </a:rPr>
-              <a:t>Analysis steps</a:t>
+              <a:t>Study idea</a:t>
             </a:r>
             <a:endParaRPr lang="en-US" sz="3200" b="0" strike="noStrike" spc="-1" dirty="0">
               <a:solidFill>
@@ -10038,8 +10182,8 @@
         </p:nvSpPr>
         <p:spPr>
           <a:xfrm>
-            <a:off x="382680" y="1371598"/>
-            <a:ext cx="8380080" cy="4685761"/>
+            <a:off x="380880" y="1371599"/>
+            <a:ext cx="8380080" cy="713065"/>
           </a:xfrm>
           <a:prstGeom prst="rect">
             <a:avLst/>
@@ -10241,7 +10385,7 @@
                 </a:solidFill>
                 <a:latin typeface="Century Gothic"/>
               </a:rPr>
-              <a:t>From</a:t>
+              <a:t>MCP-based Agent for ML compound explainability </a:t>
             </a:r>
             <a:endParaRPr lang="en-US" sz="2000" b="1" spc="-1" dirty="0">
               <a:solidFill>
@@ -10252,10 +10396,2004 @@
           </a:p>
         </p:txBody>
       </p:sp>
+      <p:pic>
+        <p:nvPicPr>
+          <p:cNvPr id="4" name="Picture 3" descr="A diagram of different types of chemistry&#10;&#10;AI-generated content may be incorrect.">
+            <a:extLst>
+              <a:ext uri="{FF2B5EF4-FFF2-40B4-BE49-F238E27FC236}">
+                <a16:creationId xmlns:a16="http://schemas.microsoft.com/office/drawing/2014/main" id="{A9172708-06AB-AE7A-4BC0-05B1328EE700}"/>
+              </a:ext>
+            </a:extLst>
+          </p:cNvPr>
+          <p:cNvPicPr>
+            <a:picLocks noChangeAspect="1"/>
+          </p:cNvPicPr>
+          <p:nvPr/>
+        </p:nvPicPr>
+        <p:blipFill>
+          <a:blip r:embed="rId2">
+            <a:extLst>
+              <a:ext uri="{28A0092B-C50C-407E-A947-70E740481C1C}">
+                <a14:useLocalDpi xmlns:a14="http://schemas.microsoft.com/office/drawing/2010/main" val="0"/>
+              </a:ext>
+            </a:extLst>
+          </a:blip>
+          <a:stretch>
+            <a:fillRect/>
+          </a:stretch>
+        </p:blipFill>
+        <p:spPr>
+          <a:xfrm>
+            <a:off x="665429" y="2123180"/>
+            <a:ext cx="7810981" cy="3363221"/>
+          </a:xfrm>
+          <a:prstGeom prst="rect">
+            <a:avLst/>
+          </a:prstGeom>
+        </p:spPr>
+      </p:pic>
     </p:spTree>
     <p:extLst>
       <p:ext uri="{BB962C8B-B14F-4D97-AF65-F5344CB8AC3E}">
         <p14:creationId xmlns:p14="http://schemas.microsoft.com/office/powerpoint/2010/main" val="721732568"/>
+      </p:ext>
+    </p:extLst>
+  </p:cSld>
+  <p:clrMapOvr>
+    <a:masterClrMapping/>
+  </p:clrMapOvr>
+  <mc:AlternateContent xmlns:mc="http://schemas.openxmlformats.org/markup-compatibility/2006" xmlns:p14="http://schemas.microsoft.com/office/powerpoint/2010/main">
+    <mc:Choice Requires="p14">
+      <p:transition spd="med" p14:dur="700">
+        <p:fade/>
+      </p:transition>
+    </mc:Choice>
+    <mc:Fallback xmlns:p15="http://schemas.microsoft.com/office/powerpoint/2012/main" xmlns="">
+      <p:transition spd="med">
+        <p:fade/>
+      </p:transition>
+    </mc:Fallback>
+  </mc:AlternateContent>
+</p:sld>
+</file>
+
+<file path=ppt/slides/slide3.xml><?xml version="1.0" encoding="utf-8"?>
+<p:sld xmlns:a="http://schemas.openxmlformats.org/drawingml/2006/main" xmlns:r="http://schemas.openxmlformats.org/officeDocument/2006/relationships" xmlns:p="http://schemas.openxmlformats.org/presentationml/2006/main">
+  <p:cSld>
+    <p:spTree>
+      <p:nvGrpSpPr>
+        <p:cNvPr id="1" name="">
+          <a:extLst>
+            <a:ext uri="{FF2B5EF4-FFF2-40B4-BE49-F238E27FC236}">
+              <a16:creationId xmlns:a16="http://schemas.microsoft.com/office/drawing/2014/main" id="{A6515F23-0912-A838-23CE-B8F00573A2DA}"/>
+            </a:ext>
+          </a:extLst>
+        </p:cNvPr>
+        <p:cNvGrpSpPr/>
+        <p:nvPr/>
+      </p:nvGrpSpPr>
+      <p:grpSpPr>
+        <a:xfrm>
+          <a:off x="0" y="0"/>
+          <a:ext cx="0" cy="0"/>
+          <a:chOff x="0" y="0"/>
+          <a:chExt cx="0" cy="0"/>
+        </a:xfrm>
+      </p:grpSpPr>
+      <p:sp>
+        <p:nvSpPr>
+          <p:cNvPr id="163" name="PlaceHolder 1">
+            <a:extLst>
+              <a:ext uri="{FF2B5EF4-FFF2-40B4-BE49-F238E27FC236}">
+                <a16:creationId xmlns:a16="http://schemas.microsoft.com/office/drawing/2014/main" id="{57944F4B-F502-E7CC-8790-8737702BC6AC}"/>
+              </a:ext>
+            </a:extLst>
+          </p:cNvPr>
+          <p:cNvSpPr>
+            <a:spLocks noGrp="1"/>
+          </p:cNvSpPr>
+          <p:nvPr>
+            <p:ph type="title"/>
+          </p:nvPr>
+        </p:nvSpPr>
+        <p:spPr>
+          <a:xfrm>
+            <a:off x="380880" y="228600"/>
+            <a:ext cx="8380080" cy="837720"/>
+          </a:xfrm>
+          <a:prstGeom prst="rect">
+            <a:avLst/>
+          </a:prstGeom>
+          <a:noFill/>
+          <a:ln w="0">
+            <a:noFill/>
+          </a:ln>
+        </p:spPr>
+        <p:txBody>
+          <a:bodyPr numCol="1" spcCol="0" anchor="ctr">
+            <a:noAutofit/>
+          </a:bodyPr>
+          <a:lstStyle/>
+          <a:p>
+            <a:pPr>
+              <a:lnSpc>
+                <a:spcPct val="100000"/>
+              </a:lnSpc>
+              <a:buNone/>
+            </a:pPr>
+            <a:r>
+              <a:rPr lang="en-US" sz="3200" b="0" strike="noStrike" spc="-1" dirty="0">
+                <a:solidFill>
+                  <a:srgbClr val="0064C8"/>
+                </a:solidFill>
+                <a:latin typeface="Century Gothic"/>
+              </a:rPr>
+              <a:t>Study idea</a:t>
+            </a:r>
+            <a:endParaRPr lang="en-US" sz="3200" b="0" strike="noStrike" spc="-1" dirty="0">
+              <a:solidFill>
+                <a:srgbClr val="000000"/>
+              </a:solidFill>
+              <a:latin typeface="Century Gothic"/>
+            </a:endParaRPr>
+          </a:p>
+        </p:txBody>
+      </p:sp>
+      <p:sp>
+        <p:nvSpPr>
+          <p:cNvPr id="165" name="PlaceHolder 3">
+            <a:extLst>
+              <a:ext uri="{FF2B5EF4-FFF2-40B4-BE49-F238E27FC236}">
+                <a16:creationId xmlns:a16="http://schemas.microsoft.com/office/drawing/2014/main" id="{2EFBEA53-7B78-D9A1-93EF-9608A3193D27}"/>
+              </a:ext>
+            </a:extLst>
+          </p:cNvPr>
+          <p:cNvSpPr>
+            <a:spLocks noGrp="1"/>
+          </p:cNvSpPr>
+          <p:nvPr>
+            <p:ph type="sldNum"/>
+          </p:nvPr>
+        </p:nvSpPr>
+        <p:spPr>
+          <a:xfrm>
+            <a:off x="8376840" y="5692680"/>
+            <a:ext cx="384120" cy="364680"/>
+          </a:xfrm>
+          <a:prstGeom prst="rect">
+            <a:avLst/>
+          </a:prstGeom>
+          <a:noFill/>
+          <a:ln w="0">
+            <a:noFill/>
+          </a:ln>
+        </p:spPr>
+        <p:txBody>
+          <a:bodyPr anchor="ctr">
+            <a:noAutofit/>
+          </a:bodyPr>
+          <a:lstStyle/>
+          <a:p>
+            <a:pPr algn="r">
+              <a:lnSpc>
+                <a:spcPct val="100000"/>
+              </a:lnSpc>
+              <a:buNone/>
+            </a:pPr>
+            <a:fld id="{8BD7C522-1E12-40C3-B25E-5F0462E20B22}" type="slidenum">
+              <a:rPr lang="en-US" sz="1200" b="0" strike="noStrike" spc="-1">
+                <a:solidFill>
+                  <a:srgbClr val="8B8B8B"/>
+                </a:solidFill>
+                <a:latin typeface="Century Gothic"/>
+              </a:rPr>
+              <a:t>3</a:t>
+            </a:fld>
+            <a:endParaRPr lang="en-GB" sz="1200" b="0" strike="noStrike" spc="-1" dirty="0">
+              <a:latin typeface="Times New Roman"/>
+            </a:endParaRPr>
+          </a:p>
+        </p:txBody>
+      </p:sp>
+      <p:sp>
+        <p:nvSpPr>
+          <p:cNvPr id="2" name="PlaceHolder 2">
+            <a:extLst>
+              <a:ext uri="{FF2B5EF4-FFF2-40B4-BE49-F238E27FC236}">
+                <a16:creationId xmlns:a16="http://schemas.microsoft.com/office/drawing/2014/main" id="{870990D0-7AC5-46BA-6FC4-274F8E0A3ABE}"/>
+              </a:ext>
+            </a:extLst>
+          </p:cNvPr>
+          <p:cNvSpPr txBox="1">
+            <a:spLocks/>
+          </p:cNvSpPr>
+          <p:nvPr/>
+        </p:nvSpPr>
+        <p:spPr>
+          <a:xfrm>
+            <a:off x="380880" y="1371599"/>
+            <a:ext cx="8380080" cy="4643307"/>
+          </a:xfrm>
+          <a:prstGeom prst="rect">
+            <a:avLst/>
+          </a:prstGeom>
+          <a:noFill/>
+          <a:ln w="0">
+            <a:noFill/>
+          </a:ln>
+        </p:spPr>
+        <p:txBody>
+          <a:bodyPr numCol="1" spcCol="0" anchor="t">
+            <a:noAutofit/>
+          </a:bodyPr>
+          <a:lstStyle>
+            <a:lvl1pPr marL="228600" indent="-228600" algn="l" defTabSz="914400" rtl="0" eaLnBrk="1" latinLnBrk="0" hangingPunct="1">
+              <a:lnSpc>
+                <a:spcPct val="90000"/>
+              </a:lnSpc>
+              <a:spcBef>
+                <a:spcPts val="1000"/>
+              </a:spcBef>
+              <a:buFont typeface="Arial" panose="020B0604020202020204" pitchFamily="34" charset="0"/>
+              <a:buChar char="•"/>
+              <a:defRPr sz="2800" kern="1200">
+                <a:solidFill>
+                  <a:schemeClr val="tx1"/>
+                </a:solidFill>
+                <a:latin typeface="+mn-lt"/>
+                <a:ea typeface="+mn-ea"/>
+                <a:cs typeface="+mn-cs"/>
+              </a:defRPr>
+            </a:lvl1pPr>
+            <a:lvl2pPr marL="685800" indent="-228600" algn="l" defTabSz="914400" rtl="0" eaLnBrk="1" latinLnBrk="0" hangingPunct="1">
+              <a:lnSpc>
+                <a:spcPct val="90000"/>
+              </a:lnSpc>
+              <a:spcBef>
+                <a:spcPts val="500"/>
+              </a:spcBef>
+              <a:buFont typeface="Arial" panose="020B0604020202020204" pitchFamily="34" charset="0"/>
+              <a:buChar char="•"/>
+              <a:defRPr sz="2400" kern="1200">
+                <a:solidFill>
+                  <a:schemeClr val="tx1"/>
+                </a:solidFill>
+                <a:latin typeface="+mn-lt"/>
+                <a:ea typeface="+mn-ea"/>
+                <a:cs typeface="+mn-cs"/>
+              </a:defRPr>
+            </a:lvl2pPr>
+            <a:lvl3pPr marL="1143000" indent="-228600" algn="l" defTabSz="914400" rtl="0" eaLnBrk="1" latinLnBrk="0" hangingPunct="1">
+              <a:lnSpc>
+                <a:spcPct val="90000"/>
+              </a:lnSpc>
+              <a:spcBef>
+                <a:spcPts val="500"/>
+              </a:spcBef>
+              <a:buFont typeface="Arial" panose="020B0604020202020204" pitchFamily="34" charset="0"/>
+              <a:buChar char="•"/>
+              <a:defRPr sz="2000" kern="1200">
+                <a:solidFill>
+                  <a:schemeClr val="tx1"/>
+                </a:solidFill>
+                <a:latin typeface="+mn-lt"/>
+                <a:ea typeface="+mn-ea"/>
+                <a:cs typeface="+mn-cs"/>
+              </a:defRPr>
+            </a:lvl3pPr>
+            <a:lvl4pPr marL="1600200" indent="-228600" algn="l" defTabSz="914400" rtl="0" eaLnBrk="1" latinLnBrk="0" hangingPunct="1">
+              <a:lnSpc>
+                <a:spcPct val="90000"/>
+              </a:lnSpc>
+              <a:spcBef>
+                <a:spcPts val="500"/>
+              </a:spcBef>
+              <a:buFont typeface="Arial" panose="020B0604020202020204" pitchFamily="34" charset="0"/>
+              <a:buChar char="•"/>
+              <a:defRPr sz="1800" kern="1200">
+                <a:solidFill>
+                  <a:schemeClr val="tx1"/>
+                </a:solidFill>
+                <a:latin typeface="+mn-lt"/>
+                <a:ea typeface="+mn-ea"/>
+                <a:cs typeface="+mn-cs"/>
+              </a:defRPr>
+            </a:lvl4pPr>
+            <a:lvl5pPr marL="2057400" indent="-228600" algn="l" defTabSz="914400" rtl="0" eaLnBrk="1" latinLnBrk="0" hangingPunct="1">
+              <a:lnSpc>
+                <a:spcPct val="90000"/>
+              </a:lnSpc>
+              <a:spcBef>
+                <a:spcPts val="500"/>
+              </a:spcBef>
+              <a:buFont typeface="Arial" panose="020B0604020202020204" pitchFamily="34" charset="0"/>
+              <a:buChar char="•"/>
+              <a:defRPr sz="1800" kern="1200">
+                <a:solidFill>
+                  <a:schemeClr val="tx1"/>
+                </a:solidFill>
+                <a:latin typeface="+mn-lt"/>
+                <a:ea typeface="+mn-ea"/>
+                <a:cs typeface="+mn-cs"/>
+              </a:defRPr>
+            </a:lvl5pPr>
+            <a:lvl6pPr marL="2514600" indent="-228600" algn="l" defTabSz="914400" rtl="0" eaLnBrk="1" latinLnBrk="0" hangingPunct="1">
+              <a:lnSpc>
+                <a:spcPct val="90000"/>
+              </a:lnSpc>
+              <a:spcBef>
+                <a:spcPts val="500"/>
+              </a:spcBef>
+              <a:buFont typeface="Arial" panose="020B0604020202020204" pitchFamily="34" charset="0"/>
+              <a:buChar char="•"/>
+              <a:defRPr sz="1800" kern="1200">
+                <a:solidFill>
+                  <a:schemeClr val="tx1"/>
+                </a:solidFill>
+                <a:latin typeface="+mn-lt"/>
+                <a:ea typeface="+mn-ea"/>
+                <a:cs typeface="+mn-cs"/>
+              </a:defRPr>
+            </a:lvl6pPr>
+            <a:lvl7pPr marL="2971800" indent="-228600" algn="l" defTabSz="914400" rtl="0" eaLnBrk="1" latinLnBrk="0" hangingPunct="1">
+              <a:lnSpc>
+                <a:spcPct val="90000"/>
+              </a:lnSpc>
+              <a:spcBef>
+                <a:spcPts val="500"/>
+              </a:spcBef>
+              <a:buFont typeface="Arial" panose="020B0604020202020204" pitchFamily="34" charset="0"/>
+              <a:buChar char="•"/>
+              <a:defRPr sz="1800" kern="1200">
+                <a:solidFill>
+                  <a:schemeClr val="tx1"/>
+                </a:solidFill>
+                <a:latin typeface="+mn-lt"/>
+                <a:ea typeface="+mn-ea"/>
+                <a:cs typeface="+mn-cs"/>
+              </a:defRPr>
+            </a:lvl7pPr>
+            <a:lvl8pPr marL="3429000" indent="-228600" algn="l" defTabSz="914400" rtl="0" eaLnBrk="1" latinLnBrk="0" hangingPunct="1">
+              <a:lnSpc>
+                <a:spcPct val="90000"/>
+              </a:lnSpc>
+              <a:spcBef>
+                <a:spcPts val="500"/>
+              </a:spcBef>
+              <a:buFont typeface="Arial" panose="020B0604020202020204" pitchFamily="34" charset="0"/>
+              <a:buChar char="•"/>
+              <a:defRPr sz="1800" kern="1200">
+                <a:solidFill>
+                  <a:schemeClr val="tx1"/>
+                </a:solidFill>
+                <a:latin typeface="+mn-lt"/>
+                <a:ea typeface="+mn-ea"/>
+                <a:cs typeface="+mn-cs"/>
+              </a:defRPr>
+            </a:lvl8pPr>
+            <a:lvl9pPr marL="3886200" indent="-228600" algn="l" defTabSz="914400" rtl="0" eaLnBrk="1" latinLnBrk="0" hangingPunct="1">
+              <a:lnSpc>
+                <a:spcPct val="90000"/>
+              </a:lnSpc>
+              <a:spcBef>
+                <a:spcPts val="500"/>
+              </a:spcBef>
+              <a:buFont typeface="Arial" panose="020B0604020202020204" pitchFamily="34" charset="0"/>
+              <a:buChar char="•"/>
+              <a:defRPr sz="1800" kern="1200">
+                <a:solidFill>
+                  <a:schemeClr val="tx1"/>
+                </a:solidFill>
+                <a:latin typeface="+mn-lt"/>
+                <a:ea typeface="+mn-ea"/>
+                <a:cs typeface="+mn-cs"/>
+              </a:defRPr>
+            </a:lvl9pPr>
+          </a:lstStyle>
+          <a:p>
+            <a:pPr marL="343080" indent="-343080">
+              <a:lnSpc>
+                <a:spcPct val="100000"/>
+              </a:lnSpc>
+              <a:spcBef>
+                <a:spcPts val="400"/>
+              </a:spcBef>
+              <a:buClr>
+                <a:srgbClr val="0064C8"/>
+              </a:buClr>
+              <a:buFont typeface="Wingdings 2" charset="2"/>
+              <a:buChar char=""/>
+            </a:pPr>
+            <a:r>
+              <a:rPr lang="en-US" sz="2000" spc="-1" dirty="0">
+                <a:solidFill>
+                  <a:srgbClr val="000000"/>
+                </a:solidFill>
+                <a:latin typeface="Century Gothic"/>
+              </a:rPr>
+              <a:t>Framework</a:t>
+            </a:r>
+          </a:p>
+          <a:p>
+            <a:pPr lvl="1">
+              <a:lnSpc>
+                <a:spcPct val="100000"/>
+              </a:lnSpc>
+              <a:spcBef>
+                <a:spcPts val="400"/>
+              </a:spcBef>
+              <a:buClr>
+                <a:srgbClr val="0064C8"/>
+              </a:buClr>
+              <a:buFont typeface="Symbol" panose="05050102010706020507" pitchFamily="18" charset="2"/>
+              <a:buChar char="-"/>
+            </a:pPr>
+            <a:r>
+              <a:rPr lang="en-US" sz="1600" spc="-1" dirty="0">
+                <a:solidFill>
+                  <a:srgbClr val="000000"/>
+                </a:solidFill>
+                <a:latin typeface="Century Gothic"/>
+              </a:rPr>
+              <a:t>LM Studio + Open Source LLM (GPT-OSS, </a:t>
+            </a:r>
+            <a:r>
+              <a:rPr lang="en-US" sz="1600" spc="-1" dirty="0" err="1">
+                <a:solidFill>
+                  <a:srgbClr val="000000"/>
+                </a:solidFill>
+                <a:latin typeface="Century Gothic"/>
+              </a:rPr>
+              <a:t>Qwen</a:t>
+            </a:r>
+            <a:r>
+              <a:rPr lang="en-US" sz="1600" spc="-1" dirty="0">
+                <a:solidFill>
+                  <a:srgbClr val="000000"/>
+                </a:solidFill>
+                <a:latin typeface="Century Gothic"/>
+              </a:rPr>
+              <a:t> 3.5, </a:t>
+            </a:r>
+            <a:r>
+              <a:rPr lang="en-US" sz="1600" spc="-1" dirty="0" err="1">
+                <a:solidFill>
+                  <a:srgbClr val="000000"/>
+                </a:solidFill>
+                <a:latin typeface="Century Gothic"/>
+              </a:rPr>
+              <a:t>etc</a:t>
+            </a:r>
+            <a:r>
+              <a:rPr lang="en-US" sz="1600" spc="-1" dirty="0">
+                <a:solidFill>
+                  <a:srgbClr val="000000"/>
+                </a:solidFill>
+                <a:latin typeface="Century Gothic"/>
+              </a:rPr>
+              <a:t>)</a:t>
+            </a:r>
+            <a:br>
+              <a:rPr lang="en-US" sz="1600" spc="-1" dirty="0">
+                <a:solidFill>
+                  <a:srgbClr val="000000"/>
+                </a:solidFill>
+                <a:latin typeface="Century Gothic"/>
+              </a:rPr>
+            </a:br>
+            <a:endParaRPr lang="en-US" sz="2000" spc="-1" dirty="0">
+              <a:solidFill>
+                <a:srgbClr val="000000"/>
+              </a:solidFill>
+              <a:latin typeface="Century Gothic"/>
+            </a:endParaRPr>
+          </a:p>
+          <a:p>
+            <a:pPr>
+              <a:lnSpc>
+                <a:spcPct val="100000"/>
+              </a:lnSpc>
+              <a:spcBef>
+                <a:spcPts val="400"/>
+              </a:spcBef>
+              <a:buClr>
+                <a:srgbClr val="0064C8"/>
+              </a:buClr>
+              <a:buFont typeface="Wingdings" panose="05000000000000000000" pitchFamily="2" charset="2"/>
+              <a:buChar char="§"/>
+            </a:pPr>
+            <a:r>
+              <a:rPr lang="en-US" sz="2000" spc="-1" dirty="0">
+                <a:solidFill>
+                  <a:srgbClr val="000000"/>
+                </a:solidFill>
+                <a:latin typeface="Century Gothic"/>
+              </a:rPr>
+              <a:t>Explainability methods</a:t>
+            </a:r>
+          </a:p>
+          <a:p>
+            <a:pPr lvl="1">
+              <a:lnSpc>
+                <a:spcPct val="100000"/>
+              </a:lnSpc>
+              <a:spcBef>
+                <a:spcPts val="400"/>
+              </a:spcBef>
+              <a:buClr>
+                <a:srgbClr val="0064C8"/>
+              </a:buClr>
+              <a:buFont typeface="Symbol" panose="05050102010706020507" pitchFamily="18" charset="2"/>
+              <a:buChar char="-"/>
+            </a:pPr>
+            <a:r>
+              <a:rPr lang="en-US" sz="1600" spc="-1" dirty="0">
+                <a:solidFill>
+                  <a:srgbClr val="000000"/>
+                </a:solidFill>
+                <a:latin typeface="Century Gothic"/>
+              </a:rPr>
+              <a:t>SHAP</a:t>
+            </a:r>
+          </a:p>
+          <a:p>
+            <a:pPr lvl="1">
+              <a:lnSpc>
+                <a:spcPct val="100000"/>
+              </a:lnSpc>
+              <a:spcBef>
+                <a:spcPts val="400"/>
+              </a:spcBef>
+              <a:buClr>
+                <a:srgbClr val="0064C8"/>
+              </a:buClr>
+              <a:buFont typeface="Symbol" panose="05050102010706020507" pitchFamily="18" charset="2"/>
+              <a:buChar char="-"/>
+            </a:pPr>
+            <a:r>
+              <a:rPr lang="en-US" sz="1600" spc="-1" dirty="0" err="1">
+                <a:solidFill>
+                  <a:srgbClr val="000000"/>
+                </a:solidFill>
+                <a:latin typeface="Century Gothic"/>
+              </a:rPr>
+              <a:t>MolAnchor</a:t>
+            </a:r>
+            <a:endParaRPr lang="en-US" sz="1600" spc="-1" dirty="0">
+              <a:solidFill>
+                <a:srgbClr val="000000"/>
+              </a:solidFill>
+              <a:latin typeface="Century Gothic"/>
+            </a:endParaRPr>
+          </a:p>
+          <a:p>
+            <a:pPr lvl="1">
+              <a:lnSpc>
+                <a:spcPct val="100000"/>
+              </a:lnSpc>
+              <a:spcBef>
+                <a:spcPts val="400"/>
+              </a:spcBef>
+              <a:buClr>
+                <a:srgbClr val="0064C8"/>
+              </a:buClr>
+              <a:buFont typeface="Symbol" panose="05050102010706020507" pitchFamily="18" charset="2"/>
+              <a:buChar char="-"/>
+            </a:pPr>
+            <a:r>
+              <a:rPr lang="en-US" sz="1600" spc="-1" dirty="0">
+                <a:solidFill>
+                  <a:srgbClr val="000000"/>
+                </a:solidFill>
+                <a:latin typeface="Century Gothic"/>
+              </a:rPr>
+              <a:t>Counterfactuals</a:t>
+            </a:r>
+          </a:p>
+          <a:p>
+            <a:pPr lvl="1">
+              <a:lnSpc>
+                <a:spcPct val="100000"/>
+              </a:lnSpc>
+              <a:spcBef>
+                <a:spcPts val="400"/>
+              </a:spcBef>
+              <a:buClr>
+                <a:srgbClr val="0064C8"/>
+              </a:buClr>
+              <a:buFont typeface="Symbol" panose="05050102010706020507" pitchFamily="18" charset="2"/>
+              <a:buChar char="-"/>
+            </a:pPr>
+            <a:r>
+              <a:rPr lang="en-US" sz="1600" spc="-1" dirty="0" err="1">
+                <a:solidFill>
+                  <a:srgbClr val="000000"/>
+                </a:solidFill>
+                <a:latin typeface="Century Gothic"/>
+              </a:rPr>
+              <a:t>ContrastiveExplain</a:t>
+            </a:r>
+            <a:r>
+              <a:rPr lang="en-US" sz="1600" spc="-1" dirty="0">
+                <a:solidFill>
+                  <a:srgbClr val="000000"/>
+                </a:solidFill>
+                <a:latin typeface="Century Gothic"/>
+              </a:rPr>
+              <a:t>. (?)</a:t>
+            </a:r>
+          </a:p>
+          <a:p>
+            <a:pPr lvl="1">
+              <a:lnSpc>
+                <a:spcPct val="100000"/>
+              </a:lnSpc>
+              <a:spcBef>
+                <a:spcPts val="400"/>
+              </a:spcBef>
+              <a:buClr>
+                <a:srgbClr val="0064C8"/>
+              </a:buClr>
+              <a:buFont typeface="Symbol" panose="05050102010706020507" pitchFamily="18" charset="2"/>
+              <a:buChar char="-"/>
+            </a:pPr>
+            <a:r>
+              <a:rPr lang="en-US" sz="1600" spc="-1" dirty="0" err="1">
+                <a:solidFill>
+                  <a:srgbClr val="000000"/>
+                </a:solidFill>
+                <a:latin typeface="Century Gothic"/>
+              </a:rPr>
+              <a:t>EdgeShaper</a:t>
+            </a:r>
+            <a:endParaRPr lang="en-US" sz="1600" spc="-1" dirty="0">
+              <a:solidFill>
+                <a:srgbClr val="000000"/>
+              </a:solidFill>
+              <a:latin typeface="Century Gothic"/>
+            </a:endParaRPr>
+          </a:p>
+          <a:p>
+            <a:pPr lvl="1">
+              <a:lnSpc>
+                <a:spcPct val="100000"/>
+              </a:lnSpc>
+              <a:spcBef>
+                <a:spcPts val="400"/>
+              </a:spcBef>
+              <a:buClr>
+                <a:srgbClr val="0064C8"/>
+              </a:buClr>
+              <a:buFont typeface="Symbol" panose="05050102010706020507" pitchFamily="18" charset="2"/>
+              <a:buChar char="-"/>
+            </a:pPr>
+            <a:endParaRPr lang="en-US" sz="1600" spc="-1" dirty="0">
+              <a:solidFill>
+                <a:srgbClr val="000000"/>
+              </a:solidFill>
+              <a:latin typeface="Century Gothic"/>
+            </a:endParaRPr>
+          </a:p>
+          <a:p>
+            <a:pPr>
+              <a:lnSpc>
+                <a:spcPct val="100000"/>
+              </a:lnSpc>
+              <a:spcBef>
+                <a:spcPts val="400"/>
+              </a:spcBef>
+              <a:buClr>
+                <a:srgbClr val="0064C8"/>
+              </a:buClr>
+              <a:buFont typeface="Wingdings" panose="05000000000000000000" pitchFamily="2" charset="2"/>
+              <a:buChar char="§"/>
+            </a:pPr>
+            <a:r>
+              <a:rPr lang="en-US" sz="2000" spc="-1" dirty="0">
+                <a:solidFill>
+                  <a:srgbClr val="000000"/>
+                </a:solidFill>
+                <a:latin typeface="Century Gothic"/>
+              </a:rPr>
+              <a:t>ML models</a:t>
+            </a:r>
+          </a:p>
+          <a:p>
+            <a:pPr lvl="1">
+              <a:lnSpc>
+                <a:spcPct val="100000"/>
+              </a:lnSpc>
+              <a:spcBef>
+                <a:spcPts val="400"/>
+              </a:spcBef>
+              <a:buClr>
+                <a:srgbClr val="0064C8"/>
+              </a:buClr>
+              <a:buFont typeface="Symbol" panose="05050102010706020507" pitchFamily="18" charset="2"/>
+              <a:buChar char="-"/>
+            </a:pPr>
+            <a:r>
+              <a:rPr lang="en-US" sz="1600" spc="-1" dirty="0">
+                <a:solidFill>
+                  <a:srgbClr val="000000"/>
+                </a:solidFill>
+                <a:latin typeface="Century Gothic"/>
+              </a:rPr>
+              <a:t>Traditional ML – RF, SVM</a:t>
+            </a:r>
+          </a:p>
+          <a:p>
+            <a:pPr lvl="1">
+              <a:lnSpc>
+                <a:spcPct val="100000"/>
+              </a:lnSpc>
+              <a:spcBef>
+                <a:spcPts val="400"/>
+              </a:spcBef>
+              <a:buClr>
+                <a:srgbClr val="0064C8"/>
+              </a:buClr>
+              <a:buFont typeface="Symbol" panose="05050102010706020507" pitchFamily="18" charset="2"/>
+              <a:buChar char="-"/>
+            </a:pPr>
+            <a:r>
+              <a:rPr lang="en-US" sz="1600" spc="-1" dirty="0">
+                <a:solidFill>
+                  <a:srgbClr val="000000"/>
+                </a:solidFill>
+                <a:latin typeface="Century Gothic"/>
+              </a:rPr>
+              <a:t>NNs – DNN, GNN</a:t>
+            </a:r>
+          </a:p>
+          <a:p>
+            <a:pPr lvl="1">
+              <a:lnSpc>
+                <a:spcPct val="100000"/>
+              </a:lnSpc>
+              <a:spcBef>
+                <a:spcPts val="400"/>
+              </a:spcBef>
+              <a:spcAft>
+                <a:spcPts val="601"/>
+              </a:spcAft>
+              <a:buClr>
+                <a:srgbClr val="0064C8"/>
+              </a:buClr>
+              <a:buFont typeface="Wingdings" panose="05000000000000000000" pitchFamily="2" charset="2"/>
+              <a:buChar char="§"/>
+            </a:pPr>
+            <a:endParaRPr lang="en-US" sz="1600" spc="-1" dirty="0">
+              <a:solidFill>
+                <a:srgbClr val="000000"/>
+              </a:solidFill>
+              <a:latin typeface="Century Gothic"/>
+            </a:endParaRPr>
+          </a:p>
+          <a:p>
+            <a:pPr marL="343080" indent="-343080">
+              <a:lnSpc>
+                <a:spcPct val="100000"/>
+              </a:lnSpc>
+              <a:spcBef>
+                <a:spcPts val="400"/>
+              </a:spcBef>
+              <a:spcAft>
+                <a:spcPts val="601"/>
+              </a:spcAft>
+              <a:buClr>
+                <a:srgbClr val="0064C8"/>
+              </a:buClr>
+              <a:buFont typeface="Wingdings 2" charset="2"/>
+              <a:buChar char=""/>
+            </a:pPr>
+            <a:endParaRPr lang="en-US" sz="2000" b="1" spc="-1" dirty="0">
+              <a:solidFill>
+                <a:srgbClr val="000000"/>
+              </a:solidFill>
+              <a:latin typeface="Century Gothic"/>
+            </a:endParaRPr>
+          </a:p>
+        </p:txBody>
+      </p:sp>
+    </p:spTree>
+    <p:extLst>
+      <p:ext uri="{BB962C8B-B14F-4D97-AF65-F5344CB8AC3E}">
+        <p14:creationId xmlns:p14="http://schemas.microsoft.com/office/powerpoint/2010/main" val="1707478755"/>
+      </p:ext>
+    </p:extLst>
+  </p:cSld>
+  <p:clrMapOvr>
+    <a:masterClrMapping/>
+  </p:clrMapOvr>
+  <mc:AlternateContent xmlns:mc="http://schemas.openxmlformats.org/markup-compatibility/2006" xmlns:p14="http://schemas.microsoft.com/office/powerpoint/2010/main">
+    <mc:Choice Requires="p14">
+      <p:transition spd="med" p14:dur="700">
+        <p:fade/>
+      </p:transition>
+    </mc:Choice>
+    <mc:Fallback xmlns:p15="http://schemas.microsoft.com/office/powerpoint/2012/main" xmlns="">
+      <p:transition spd="med">
+        <p:fade/>
+      </p:transition>
+    </mc:Fallback>
+  </mc:AlternateContent>
+</p:sld>
+</file>
+
+<file path=ppt/slides/slide4.xml><?xml version="1.0" encoding="utf-8"?>
+<p:sld xmlns:a="http://schemas.openxmlformats.org/drawingml/2006/main" xmlns:r="http://schemas.openxmlformats.org/officeDocument/2006/relationships" xmlns:p="http://schemas.openxmlformats.org/presentationml/2006/main">
+  <p:cSld>
+    <p:spTree>
+      <p:nvGrpSpPr>
+        <p:cNvPr id="1" name="">
+          <a:extLst>
+            <a:ext uri="{FF2B5EF4-FFF2-40B4-BE49-F238E27FC236}">
+              <a16:creationId xmlns:a16="http://schemas.microsoft.com/office/drawing/2014/main" id="{A6515F23-0912-A838-23CE-B8F00573A2DA}"/>
+            </a:ext>
+          </a:extLst>
+        </p:cNvPr>
+        <p:cNvGrpSpPr/>
+        <p:nvPr/>
+      </p:nvGrpSpPr>
+      <p:grpSpPr>
+        <a:xfrm>
+          <a:off x="0" y="0"/>
+          <a:ext cx="0" cy="0"/>
+          <a:chOff x="0" y="0"/>
+          <a:chExt cx="0" cy="0"/>
+        </a:xfrm>
+      </p:grpSpPr>
+      <p:sp>
+        <p:nvSpPr>
+          <p:cNvPr id="163" name="PlaceHolder 1">
+            <a:extLst>
+              <a:ext uri="{FF2B5EF4-FFF2-40B4-BE49-F238E27FC236}">
+                <a16:creationId xmlns:a16="http://schemas.microsoft.com/office/drawing/2014/main" id="{57944F4B-F502-E7CC-8790-8737702BC6AC}"/>
+              </a:ext>
+            </a:extLst>
+          </p:cNvPr>
+          <p:cNvSpPr>
+            <a:spLocks noGrp="1"/>
+          </p:cNvSpPr>
+          <p:nvPr>
+            <p:ph type="title"/>
+          </p:nvPr>
+        </p:nvSpPr>
+        <p:spPr>
+          <a:xfrm>
+            <a:off x="380880" y="228600"/>
+            <a:ext cx="8380080" cy="837720"/>
+          </a:xfrm>
+          <a:prstGeom prst="rect">
+            <a:avLst/>
+          </a:prstGeom>
+          <a:noFill/>
+          <a:ln w="0">
+            <a:noFill/>
+          </a:ln>
+        </p:spPr>
+        <p:txBody>
+          <a:bodyPr numCol="1" spcCol="0" anchor="ctr">
+            <a:noAutofit/>
+          </a:bodyPr>
+          <a:lstStyle/>
+          <a:p>
+            <a:pPr>
+              <a:lnSpc>
+                <a:spcPct val="100000"/>
+              </a:lnSpc>
+              <a:buNone/>
+            </a:pPr>
+            <a:r>
+              <a:rPr lang="en-US" sz="3200" b="0" strike="noStrike" spc="-1" dirty="0">
+                <a:solidFill>
+                  <a:srgbClr val="0064C8"/>
+                </a:solidFill>
+                <a:latin typeface="Century Gothic"/>
+              </a:rPr>
+              <a:t>Exemplary answer output</a:t>
+            </a:r>
+            <a:endParaRPr lang="en-US" sz="3200" b="0" strike="noStrike" spc="-1" dirty="0">
+              <a:solidFill>
+                <a:srgbClr val="000000"/>
+              </a:solidFill>
+              <a:latin typeface="Century Gothic"/>
+            </a:endParaRPr>
+          </a:p>
+        </p:txBody>
+      </p:sp>
+      <p:sp>
+        <p:nvSpPr>
+          <p:cNvPr id="165" name="PlaceHolder 3">
+            <a:extLst>
+              <a:ext uri="{FF2B5EF4-FFF2-40B4-BE49-F238E27FC236}">
+                <a16:creationId xmlns:a16="http://schemas.microsoft.com/office/drawing/2014/main" id="{2EFBEA53-7B78-D9A1-93EF-9608A3193D27}"/>
+              </a:ext>
+            </a:extLst>
+          </p:cNvPr>
+          <p:cNvSpPr>
+            <a:spLocks noGrp="1"/>
+          </p:cNvSpPr>
+          <p:nvPr>
+            <p:ph type="sldNum"/>
+          </p:nvPr>
+        </p:nvSpPr>
+        <p:spPr>
+          <a:xfrm>
+            <a:off x="8376840" y="5692680"/>
+            <a:ext cx="384120" cy="364680"/>
+          </a:xfrm>
+          <a:prstGeom prst="rect">
+            <a:avLst/>
+          </a:prstGeom>
+          <a:noFill/>
+          <a:ln w="0">
+            <a:noFill/>
+          </a:ln>
+        </p:spPr>
+        <p:txBody>
+          <a:bodyPr anchor="ctr">
+            <a:noAutofit/>
+          </a:bodyPr>
+          <a:lstStyle/>
+          <a:p>
+            <a:pPr algn="r">
+              <a:lnSpc>
+                <a:spcPct val="100000"/>
+              </a:lnSpc>
+              <a:buNone/>
+            </a:pPr>
+            <a:fld id="{8BD7C522-1E12-40C3-B25E-5F0462E20B22}" type="slidenum">
+              <a:rPr lang="en-US" sz="1200" b="0" strike="noStrike" spc="-1">
+                <a:solidFill>
+                  <a:srgbClr val="8B8B8B"/>
+                </a:solidFill>
+                <a:latin typeface="Century Gothic"/>
+              </a:rPr>
+              <a:t>4</a:t>
+            </a:fld>
+            <a:endParaRPr lang="en-GB" sz="1200" b="0" strike="noStrike" spc="-1" dirty="0">
+              <a:latin typeface="Times New Roman"/>
+            </a:endParaRPr>
+          </a:p>
+        </p:txBody>
+      </p:sp>
+      <p:sp>
+        <p:nvSpPr>
+          <p:cNvPr id="2" name="PlaceHolder 2">
+            <a:extLst>
+              <a:ext uri="{FF2B5EF4-FFF2-40B4-BE49-F238E27FC236}">
+                <a16:creationId xmlns:a16="http://schemas.microsoft.com/office/drawing/2014/main" id="{870990D0-7AC5-46BA-6FC4-274F8E0A3ABE}"/>
+              </a:ext>
+            </a:extLst>
+          </p:cNvPr>
+          <p:cNvSpPr txBox="1">
+            <a:spLocks/>
+          </p:cNvSpPr>
+          <p:nvPr/>
+        </p:nvSpPr>
+        <p:spPr>
+          <a:xfrm>
+            <a:off x="380880" y="1371598"/>
+            <a:ext cx="3306353" cy="4559301"/>
+          </a:xfrm>
+          <a:prstGeom prst="rect">
+            <a:avLst/>
+          </a:prstGeom>
+          <a:noFill/>
+          <a:ln w="0">
+            <a:noFill/>
+          </a:ln>
+        </p:spPr>
+        <p:txBody>
+          <a:bodyPr numCol="1" spcCol="0" anchor="t">
+            <a:noAutofit/>
+          </a:bodyPr>
+          <a:lstStyle>
+            <a:lvl1pPr marL="228600" indent="-228600" algn="l" defTabSz="914400" rtl="0" eaLnBrk="1" latinLnBrk="0" hangingPunct="1">
+              <a:lnSpc>
+                <a:spcPct val="90000"/>
+              </a:lnSpc>
+              <a:spcBef>
+                <a:spcPts val="1000"/>
+              </a:spcBef>
+              <a:buFont typeface="Arial" panose="020B0604020202020204" pitchFamily="34" charset="0"/>
+              <a:buChar char="•"/>
+              <a:defRPr sz="2800" kern="1200">
+                <a:solidFill>
+                  <a:schemeClr val="tx1"/>
+                </a:solidFill>
+                <a:latin typeface="+mn-lt"/>
+                <a:ea typeface="+mn-ea"/>
+                <a:cs typeface="+mn-cs"/>
+              </a:defRPr>
+            </a:lvl1pPr>
+            <a:lvl2pPr marL="685800" indent="-228600" algn="l" defTabSz="914400" rtl="0" eaLnBrk="1" latinLnBrk="0" hangingPunct="1">
+              <a:lnSpc>
+                <a:spcPct val="90000"/>
+              </a:lnSpc>
+              <a:spcBef>
+                <a:spcPts val="500"/>
+              </a:spcBef>
+              <a:buFont typeface="Arial" panose="020B0604020202020204" pitchFamily="34" charset="0"/>
+              <a:buChar char="•"/>
+              <a:defRPr sz="2400" kern="1200">
+                <a:solidFill>
+                  <a:schemeClr val="tx1"/>
+                </a:solidFill>
+                <a:latin typeface="+mn-lt"/>
+                <a:ea typeface="+mn-ea"/>
+                <a:cs typeface="+mn-cs"/>
+              </a:defRPr>
+            </a:lvl2pPr>
+            <a:lvl3pPr marL="1143000" indent="-228600" algn="l" defTabSz="914400" rtl="0" eaLnBrk="1" latinLnBrk="0" hangingPunct="1">
+              <a:lnSpc>
+                <a:spcPct val="90000"/>
+              </a:lnSpc>
+              <a:spcBef>
+                <a:spcPts val="500"/>
+              </a:spcBef>
+              <a:buFont typeface="Arial" panose="020B0604020202020204" pitchFamily="34" charset="0"/>
+              <a:buChar char="•"/>
+              <a:defRPr sz="2000" kern="1200">
+                <a:solidFill>
+                  <a:schemeClr val="tx1"/>
+                </a:solidFill>
+                <a:latin typeface="+mn-lt"/>
+                <a:ea typeface="+mn-ea"/>
+                <a:cs typeface="+mn-cs"/>
+              </a:defRPr>
+            </a:lvl3pPr>
+            <a:lvl4pPr marL="1600200" indent="-228600" algn="l" defTabSz="914400" rtl="0" eaLnBrk="1" latinLnBrk="0" hangingPunct="1">
+              <a:lnSpc>
+                <a:spcPct val="90000"/>
+              </a:lnSpc>
+              <a:spcBef>
+                <a:spcPts val="500"/>
+              </a:spcBef>
+              <a:buFont typeface="Arial" panose="020B0604020202020204" pitchFamily="34" charset="0"/>
+              <a:buChar char="•"/>
+              <a:defRPr sz="1800" kern="1200">
+                <a:solidFill>
+                  <a:schemeClr val="tx1"/>
+                </a:solidFill>
+                <a:latin typeface="+mn-lt"/>
+                <a:ea typeface="+mn-ea"/>
+                <a:cs typeface="+mn-cs"/>
+              </a:defRPr>
+            </a:lvl4pPr>
+            <a:lvl5pPr marL="2057400" indent="-228600" algn="l" defTabSz="914400" rtl="0" eaLnBrk="1" latinLnBrk="0" hangingPunct="1">
+              <a:lnSpc>
+                <a:spcPct val="90000"/>
+              </a:lnSpc>
+              <a:spcBef>
+                <a:spcPts val="500"/>
+              </a:spcBef>
+              <a:buFont typeface="Arial" panose="020B0604020202020204" pitchFamily="34" charset="0"/>
+              <a:buChar char="•"/>
+              <a:defRPr sz="1800" kern="1200">
+                <a:solidFill>
+                  <a:schemeClr val="tx1"/>
+                </a:solidFill>
+                <a:latin typeface="+mn-lt"/>
+                <a:ea typeface="+mn-ea"/>
+                <a:cs typeface="+mn-cs"/>
+              </a:defRPr>
+            </a:lvl5pPr>
+            <a:lvl6pPr marL="2514600" indent="-228600" algn="l" defTabSz="914400" rtl="0" eaLnBrk="1" latinLnBrk="0" hangingPunct="1">
+              <a:lnSpc>
+                <a:spcPct val="90000"/>
+              </a:lnSpc>
+              <a:spcBef>
+                <a:spcPts val="500"/>
+              </a:spcBef>
+              <a:buFont typeface="Arial" panose="020B0604020202020204" pitchFamily="34" charset="0"/>
+              <a:buChar char="•"/>
+              <a:defRPr sz="1800" kern="1200">
+                <a:solidFill>
+                  <a:schemeClr val="tx1"/>
+                </a:solidFill>
+                <a:latin typeface="+mn-lt"/>
+                <a:ea typeface="+mn-ea"/>
+                <a:cs typeface="+mn-cs"/>
+              </a:defRPr>
+            </a:lvl6pPr>
+            <a:lvl7pPr marL="2971800" indent="-228600" algn="l" defTabSz="914400" rtl="0" eaLnBrk="1" latinLnBrk="0" hangingPunct="1">
+              <a:lnSpc>
+                <a:spcPct val="90000"/>
+              </a:lnSpc>
+              <a:spcBef>
+                <a:spcPts val="500"/>
+              </a:spcBef>
+              <a:buFont typeface="Arial" panose="020B0604020202020204" pitchFamily="34" charset="0"/>
+              <a:buChar char="•"/>
+              <a:defRPr sz="1800" kern="1200">
+                <a:solidFill>
+                  <a:schemeClr val="tx1"/>
+                </a:solidFill>
+                <a:latin typeface="+mn-lt"/>
+                <a:ea typeface="+mn-ea"/>
+                <a:cs typeface="+mn-cs"/>
+              </a:defRPr>
+            </a:lvl7pPr>
+            <a:lvl8pPr marL="3429000" indent="-228600" algn="l" defTabSz="914400" rtl="0" eaLnBrk="1" latinLnBrk="0" hangingPunct="1">
+              <a:lnSpc>
+                <a:spcPct val="90000"/>
+              </a:lnSpc>
+              <a:spcBef>
+                <a:spcPts val="500"/>
+              </a:spcBef>
+              <a:buFont typeface="Arial" panose="020B0604020202020204" pitchFamily="34" charset="0"/>
+              <a:buChar char="•"/>
+              <a:defRPr sz="1800" kern="1200">
+                <a:solidFill>
+                  <a:schemeClr val="tx1"/>
+                </a:solidFill>
+                <a:latin typeface="+mn-lt"/>
+                <a:ea typeface="+mn-ea"/>
+                <a:cs typeface="+mn-cs"/>
+              </a:defRPr>
+            </a:lvl8pPr>
+            <a:lvl9pPr marL="3886200" indent="-228600" algn="l" defTabSz="914400" rtl="0" eaLnBrk="1" latinLnBrk="0" hangingPunct="1">
+              <a:lnSpc>
+                <a:spcPct val="90000"/>
+              </a:lnSpc>
+              <a:spcBef>
+                <a:spcPts val="500"/>
+              </a:spcBef>
+              <a:buFont typeface="Arial" panose="020B0604020202020204" pitchFamily="34" charset="0"/>
+              <a:buChar char="•"/>
+              <a:defRPr sz="1800" kern="1200">
+                <a:solidFill>
+                  <a:schemeClr val="tx1"/>
+                </a:solidFill>
+                <a:latin typeface="+mn-lt"/>
+                <a:ea typeface="+mn-ea"/>
+                <a:cs typeface="+mn-cs"/>
+              </a:defRPr>
+            </a:lvl9pPr>
+          </a:lstStyle>
+          <a:p>
+            <a:pPr>
+              <a:lnSpc>
+                <a:spcPct val="100000"/>
+              </a:lnSpc>
+              <a:spcBef>
+                <a:spcPts val="400"/>
+              </a:spcBef>
+              <a:buClr>
+                <a:srgbClr val="0064C8"/>
+              </a:buClr>
+              <a:buFont typeface="Wingdings" panose="05000000000000000000" pitchFamily="2" charset="2"/>
+              <a:buChar char="§"/>
+            </a:pPr>
+            <a:r>
+              <a:rPr lang="en-US" sz="2000" spc="-1" dirty="0">
+                <a:solidFill>
+                  <a:srgbClr val="000000"/>
+                </a:solidFill>
+                <a:latin typeface="Century Gothic"/>
+              </a:rPr>
+              <a:t>Build an ML model for a given dataset</a:t>
+            </a:r>
+          </a:p>
+          <a:p>
+            <a:pPr>
+              <a:lnSpc>
+                <a:spcPct val="100000"/>
+              </a:lnSpc>
+              <a:spcBef>
+                <a:spcPts val="400"/>
+              </a:spcBef>
+              <a:buClr>
+                <a:srgbClr val="0064C8"/>
+              </a:buClr>
+              <a:buFont typeface="Wingdings" panose="05000000000000000000" pitchFamily="2" charset="2"/>
+              <a:buChar char="§"/>
+            </a:pPr>
+            <a:endParaRPr lang="en-US" sz="2000" spc="-1" dirty="0">
+              <a:solidFill>
+                <a:srgbClr val="000000"/>
+              </a:solidFill>
+              <a:latin typeface="Century Gothic"/>
+            </a:endParaRPr>
+          </a:p>
+          <a:p>
+            <a:pPr>
+              <a:lnSpc>
+                <a:spcPct val="100000"/>
+              </a:lnSpc>
+              <a:spcBef>
+                <a:spcPts val="400"/>
+              </a:spcBef>
+              <a:buClr>
+                <a:srgbClr val="0064C8"/>
+              </a:buClr>
+              <a:buFont typeface="Wingdings" panose="05000000000000000000" pitchFamily="2" charset="2"/>
+              <a:buChar char="§"/>
+            </a:pPr>
+            <a:r>
+              <a:rPr lang="en-US" sz="2000" spc="-1" dirty="0">
+                <a:solidFill>
+                  <a:srgbClr val="000000"/>
+                </a:solidFill>
+                <a:latin typeface="Century Gothic"/>
+              </a:rPr>
+              <a:t>Get a complete report</a:t>
+            </a:r>
+          </a:p>
+          <a:p>
+            <a:pPr lvl="1">
+              <a:lnSpc>
+                <a:spcPct val="100000"/>
+              </a:lnSpc>
+              <a:spcBef>
+                <a:spcPts val="400"/>
+              </a:spcBef>
+              <a:buClr>
+                <a:srgbClr val="0064C8"/>
+              </a:buClr>
+              <a:buFont typeface="Symbol" panose="05050102010706020507" pitchFamily="18" charset="2"/>
+              <a:buChar char="-"/>
+            </a:pPr>
+            <a:r>
+              <a:rPr lang="en-US" sz="1800" spc="-1" dirty="0">
+                <a:solidFill>
+                  <a:srgbClr val="000000"/>
+                </a:solidFill>
+                <a:latin typeface="Century Gothic"/>
+              </a:rPr>
+              <a:t>Dataset summary</a:t>
+            </a:r>
+          </a:p>
+          <a:p>
+            <a:pPr lvl="1">
+              <a:lnSpc>
+                <a:spcPct val="100000"/>
+              </a:lnSpc>
+              <a:spcBef>
+                <a:spcPts val="400"/>
+              </a:spcBef>
+              <a:buClr>
+                <a:srgbClr val="0064C8"/>
+              </a:buClr>
+              <a:buFont typeface="Symbol" panose="05050102010706020507" pitchFamily="18" charset="2"/>
+              <a:buChar char="-"/>
+            </a:pPr>
+            <a:r>
+              <a:rPr lang="en-US" sz="1800" spc="-1" dirty="0">
+                <a:solidFill>
+                  <a:srgbClr val="000000"/>
+                </a:solidFill>
+                <a:latin typeface="Century Gothic"/>
+              </a:rPr>
+              <a:t>Data split statistics</a:t>
+            </a:r>
+          </a:p>
+          <a:p>
+            <a:pPr lvl="1">
+              <a:lnSpc>
+                <a:spcPct val="100000"/>
+              </a:lnSpc>
+              <a:spcBef>
+                <a:spcPts val="400"/>
+              </a:spcBef>
+              <a:buClr>
+                <a:srgbClr val="0064C8"/>
+              </a:buClr>
+              <a:buFont typeface="Symbol" panose="05050102010706020507" pitchFamily="18" charset="2"/>
+              <a:buChar char="-"/>
+            </a:pPr>
+            <a:r>
+              <a:rPr lang="en-US" sz="1800" spc="-1" dirty="0">
+                <a:solidFill>
+                  <a:srgbClr val="000000"/>
+                </a:solidFill>
+                <a:latin typeface="Century Gothic"/>
+              </a:rPr>
+              <a:t>Model training information</a:t>
+            </a:r>
+          </a:p>
+          <a:p>
+            <a:pPr lvl="1">
+              <a:lnSpc>
+                <a:spcPct val="100000"/>
+              </a:lnSpc>
+              <a:spcBef>
+                <a:spcPts val="400"/>
+              </a:spcBef>
+              <a:buClr>
+                <a:srgbClr val="0064C8"/>
+              </a:buClr>
+              <a:buFont typeface="Symbol" panose="05050102010706020507" pitchFamily="18" charset="2"/>
+              <a:buChar char="-"/>
+            </a:pPr>
+            <a:r>
+              <a:rPr lang="en-US" sz="1800" spc="-1" dirty="0">
+                <a:solidFill>
+                  <a:srgbClr val="000000"/>
+                </a:solidFill>
+                <a:latin typeface="Century Gothic"/>
+              </a:rPr>
+              <a:t>Test set performance </a:t>
+            </a:r>
+          </a:p>
+          <a:p>
+            <a:pPr marL="343080" indent="-343080">
+              <a:lnSpc>
+                <a:spcPct val="100000"/>
+              </a:lnSpc>
+              <a:spcBef>
+                <a:spcPts val="400"/>
+              </a:spcBef>
+              <a:spcAft>
+                <a:spcPts val="601"/>
+              </a:spcAft>
+              <a:buClr>
+                <a:srgbClr val="0064C8"/>
+              </a:buClr>
+              <a:buFont typeface="Wingdings 2" charset="2"/>
+              <a:buChar char=""/>
+            </a:pPr>
+            <a:endParaRPr lang="en-US" sz="2000" b="1" spc="-1" dirty="0">
+              <a:solidFill>
+                <a:srgbClr val="000000"/>
+              </a:solidFill>
+              <a:latin typeface="Century Gothic"/>
+            </a:endParaRPr>
+          </a:p>
+        </p:txBody>
+      </p:sp>
+      <p:pic>
+        <p:nvPicPr>
+          <p:cNvPr id="6" name="Picture 5">
+            <a:extLst>
+              <a:ext uri="{FF2B5EF4-FFF2-40B4-BE49-F238E27FC236}">
+                <a16:creationId xmlns:a16="http://schemas.microsoft.com/office/drawing/2014/main" id="{D3BA145D-265C-C0B1-7C0E-2EE32552E491}"/>
+              </a:ext>
+            </a:extLst>
+          </p:cNvPr>
+          <p:cNvPicPr>
+            <a:picLocks noChangeAspect="1"/>
+          </p:cNvPicPr>
+          <p:nvPr/>
+        </p:nvPicPr>
+        <p:blipFill>
+          <a:blip r:embed="rId2"/>
+          <a:stretch>
+            <a:fillRect/>
+          </a:stretch>
+        </p:blipFill>
+        <p:spPr>
+          <a:xfrm>
+            <a:off x="3817354" y="1196437"/>
+            <a:ext cx="4943606" cy="4598149"/>
+          </a:xfrm>
+          <a:prstGeom prst="rect">
+            <a:avLst/>
+          </a:prstGeom>
+        </p:spPr>
+      </p:pic>
+    </p:spTree>
+    <p:extLst>
+      <p:ext uri="{BB962C8B-B14F-4D97-AF65-F5344CB8AC3E}">
+        <p14:creationId xmlns:p14="http://schemas.microsoft.com/office/powerpoint/2010/main" val="2375808848"/>
+      </p:ext>
+    </p:extLst>
+  </p:cSld>
+  <p:clrMapOvr>
+    <a:masterClrMapping/>
+  </p:clrMapOvr>
+  <mc:AlternateContent xmlns:mc="http://schemas.openxmlformats.org/markup-compatibility/2006" xmlns:p14="http://schemas.microsoft.com/office/powerpoint/2010/main">
+    <mc:Choice Requires="p14">
+      <p:transition spd="med" p14:dur="700">
+        <p:fade/>
+      </p:transition>
+    </mc:Choice>
+    <mc:Fallback xmlns:p15="http://schemas.microsoft.com/office/powerpoint/2012/main" xmlns="">
+      <p:transition spd="med">
+        <p:fade/>
+      </p:transition>
+    </mc:Fallback>
+  </mc:AlternateContent>
+</p:sld>
+</file>
+
+<file path=ppt/slides/slide5.xml><?xml version="1.0" encoding="utf-8"?>
+<p:sld xmlns:a="http://schemas.openxmlformats.org/drawingml/2006/main" xmlns:r="http://schemas.openxmlformats.org/officeDocument/2006/relationships" xmlns:p="http://schemas.openxmlformats.org/presentationml/2006/main">
+  <p:cSld>
+    <p:spTree>
+      <p:nvGrpSpPr>
+        <p:cNvPr id="1" name="">
+          <a:extLst>
+            <a:ext uri="{FF2B5EF4-FFF2-40B4-BE49-F238E27FC236}">
+              <a16:creationId xmlns:a16="http://schemas.microsoft.com/office/drawing/2014/main" id="{A6515F23-0912-A838-23CE-B8F00573A2DA}"/>
+            </a:ext>
+          </a:extLst>
+        </p:cNvPr>
+        <p:cNvGrpSpPr/>
+        <p:nvPr/>
+      </p:nvGrpSpPr>
+      <p:grpSpPr>
+        <a:xfrm>
+          <a:off x="0" y="0"/>
+          <a:ext cx="0" cy="0"/>
+          <a:chOff x="0" y="0"/>
+          <a:chExt cx="0" cy="0"/>
+        </a:xfrm>
+      </p:grpSpPr>
+      <p:sp>
+        <p:nvSpPr>
+          <p:cNvPr id="163" name="PlaceHolder 1">
+            <a:extLst>
+              <a:ext uri="{FF2B5EF4-FFF2-40B4-BE49-F238E27FC236}">
+                <a16:creationId xmlns:a16="http://schemas.microsoft.com/office/drawing/2014/main" id="{57944F4B-F502-E7CC-8790-8737702BC6AC}"/>
+              </a:ext>
+            </a:extLst>
+          </p:cNvPr>
+          <p:cNvSpPr>
+            <a:spLocks noGrp="1"/>
+          </p:cNvSpPr>
+          <p:nvPr>
+            <p:ph type="title"/>
+          </p:nvPr>
+        </p:nvSpPr>
+        <p:spPr>
+          <a:xfrm>
+            <a:off x="380880" y="228600"/>
+            <a:ext cx="8380080" cy="837720"/>
+          </a:xfrm>
+          <a:prstGeom prst="rect">
+            <a:avLst/>
+          </a:prstGeom>
+          <a:noFill/>
+          <a:ln w="0">
+            <a:noFill/>
+          </a:ln>
+        </p:spPr>
+        <p:txBody>
+          <a:bodyPr numCol="1" spcCol="0" anchor="ctr">
+            <a:noAutofit/>
+          </a:bodyPr>
+          <a:lstStyle/>
+          <a:p>
+            <a:pPr>
+              <a:lnSpc>
+                <a:spcPct val="100000"/>
+              </a:lnSpc>
+              <a:buNone/>
+            </a:pPr>
+            <a:r>
+              <a:rPr lang="en-US" sz="3200" b="0" strike="noStrike" spc="-1" dirty="0">
+                <a:solidFill>
+                  <a:srgbClr val="0064C8"/>
+                </a:solidFill>
+                <a:latin typeface="Century Gothic"/>
+              </a:rPr>
+              <a:t>Exemplary answer output</a:t>
+            </a:r>
+            <a:endParaRPr lang="en-US" sz="3200" b="0" strike="noStrike" spc="-1" dirty="0">
+              <a:solidFill>
+                <a:srgbClr val="000000"/>
+              </a:solidFill>
+              <a:latin typeface="Century Gothic"/>
+            </a:endParaRPr>
+          </a:p>
+        </p:txBody>
+      </p:sp>
+      <p:sp>
+        <p:nvSpPr>
+          <p:cNvPr id="165" name="PlaceHolder 3">
+            <a:extLst>
+              <a:ext uri="{FF2B5EF4-FFF2-40B4-BE49-F238E27FC236}">
+                <a16:creationId xmlns:a16="http://schemas.microsoft.com/office/drawing/2014/main" id="{2EFBEA53-7B78-D9A1-93EF-9608A3193D27}"/>
+              </a:ext>
+            </a:extLst>
+          </p:cNvPr>
+          <p:cNvSpPr>
+            <a:spLocks noGrp="1"/>
+          </p:cNvSpPr>
+          <p:nvPr>
+            <p:ph type="sldNum"/>
+          </p:nvPr>
+        </p:nvSpPr>
+        <p:spPr>
+          <a:xfrm>
+            <a:off x="8376840" y="5692680"/>
+            <a:ext cx="384120" cy="364680"/>
+          </a:xfrm>
+          <a:prstGeom prst="rect">
+            <a:avLst/>
+          </a:prstGeom>
+          <a:noFill/>
+          <a:ln w="0">
+            <a:noFill/>
+          </a:ln>
+        </p:spPr>
+        <p:txBody>
+          <a:bodyPr anchor="ctr">
+            <a:noAutofit/>
+          </a:bodyPr>
+          <a:lstStyle/>
+          <a:p>
+            <a:pPr algn="r">
+              <a:lnSpc>
+                <a:spcPct val="100000"/>
+              </a:lnSpc>
+              <a:buNone/>
+            </a:pPr>
+            <a:fld id="{8BD7C522-1E12-40C3-B25E-5F0462E20B22}" type="slidenum">
+              <a:rPr lang="en-US" sz="1200" b="0" strike="noStrike" spc="-1">
+                <a:solidFill>
+                  <a:srgbClr val="8B8B8B"/>
+                </a:solidFill>
+                <a:latin typeface="Century Gothic"/>
+              </a:rPr>
+              <a:t>5</a:t>
+            </a:fld>
+            <a:endParaRPr lang="en-GB" sz="1200" b="0" strike="noStrike" spc="-1" dirty="0">
+              <a:latin typeface="Times New Roman"/>
+            </a:endParaRPr>
+          </a:p>
+        </p:txBody>
+      </p:sp>
+      <p:pic>
+        <p:nvPicPr>
+          <p:cNvPr id="4" name="Picture 3">
+            <a:extLst>
+              <a:ext uri="{FF2B5EF4-FFF2-40B4-BE49-F238E27FC236}">
+                <a16:creationId xmlns:a16="http://schemas.microsoft.com/office/drawing/2014/main" id="{0F3D5BC1-9264-881D-CF39-9525F816570A}"/>
+              </a:ext>
+            </a:extLst>
+          </p:cNvPr>
+          <p:cNvPicPr>
+            <a:picLocks noChangeAspect="1"/>
+          </p:cNvPicPr>
+          <p:nvPr/>
+        </p:nvPicPr>
+        <p:blipFill>
+          <a:blip r:embed="rId2"/>
+          <a:stretch>
+            <a:fillRect/>
+          </a:stretch>
+        </p:blipFill>
+        <p:spPr>
+          <a:xfrm>
+            <a:off x="4059608" y="970759"/>
+            <a:ext cx="4618726" cy="4817482"/>
+          </a:xfrm>
+          <a:prstGeom prst="rect">
+            <a:avLst/>
+          </a:prstGeom>
+        </p:spPr>
+      </p:pic>
+      <p:sp>
+        <p:nvSpPr>
+          <p:cNvPr id="7" name="PlaceHolder 2">
+            <a:extLst>
+              <a:ext uri="{FF2B5EF4-FFF2-40B4-BE49-F238E27FC236}">
+                <a16:creationId xmlns:a16="http://schemas.microsoft.com/office/drawing/2014/main" id="{66DE14D4-64D4-6D1F-DD92-BC16D674C58B}"/>
+              </a:ext>
+            </a:extLst>
+          </p:cNvPr>
+          <p:cNvSpPr txBox="1">
+            <a:spLocks/>
+          </p:cNvSpPr>
+          <p:nvPr/>
+        </p:nvSpPr>
+        <p:spPr>
+          <a:xfrm>
+            <a:off x="380880" y="1371598"/>
+            <a:ext cx="3556120" cy="4559301"/>
+          </a:xfrm>
+          <a:prstGeom prst="rect">
+            <a:avLst/>
+          </a:prstGeom>
+          <a:noFill/>
+          <a:ln w="0">
+            <a:noFill/>
+          </a:ln>
+        </p:spPr>
+        <p:txBody>
+          <a:bodyPr numCol="1" spcCol="0" anchor="t">
+            <a:noAutofit/>
+          </a:bodyPr>
+          <a:lstStyle>
+            <a:lvl1pPr marL="228600" indent="-228600" algn="l" defTabSz="914400" rtl="0" eaLnBrk="1" latinLnBrk="0" hangingPunct="1">
+              <a:lnSpc>
+                <a:spcPct val="90000"/>
+              </a:lnSpc>
+              <a:spcBef>
+                <a:spcPts val="1000"/>
+              </a:spcBef>
+              <a:buFont typeface="Arial" panose="020B0604020202020204" pitchFamily="34" charset="0"/>
+              <a:buChar char="•"/>
+              <a:defRPr sz="2800" kern="1200">
+                <a:solidFill>
+                  <a:schemeClr val="tx1"/>
+                </a:solidFill>
+                <a:latin typeface="+mn-lt"/>
+                <a:ea typeface="+mn-ea"/>
+                <a:cs typeface="+mn-cs"/>
+              </a:defRPr>
+            </a:lvl1pPr>
+            <a:lvl2pPr marL="685800" indent="-228600" algn="l" defTabSz="914400" rtl="0" eaLnBrk="1" latinLnBrk="0" hangingPunct="1">
+              <a:lnSpc>
+                <a:spcPct val="90000"/>
+              </a:lnSpc>
+              <a:spcBef>
+                <a:spcPts val="500"/>
+              </a:spcBef>
+              <a:buFont typeface="Arial" panose="020B0604020202020204" pitchFamily="34" charset="0"/>
+              <a:buChar char="•"/>
+              <a:defRPr sz="2400" kern="1200">
+                <a:solidFill>
+                  <a:schemeClr val="tx1"/>
+                </a:solidFill>
+                <a:latin typeface="+mn-lt"/>
+                <a:ea typeface="+mn-ea"/>
+                <a:cs typeface="+mn-cs"/>
+              </a:defRPr>
+            </a:lvl2pPr>
+            <a:lvl3pPr marL="1143000" indent="-228600" algn="l" defTabSz="914400" rtl="0" eaLnBrk="1" latinLnBrk="0" hangingPunct="1">
+              <a:lnSpc>
+                <a:spcPct val="90000"/>
+              </a:lnSpc>
+              <a:spcBef>
+                <a:spcPts val="500"/>
+              </a:spcBef>
+              <a:buFont typeface="Arial" panose="020B0604020202020204" pitchFamily="34" charset="0"/>
+              <a:buChar char="•"/>
+              <a:defRPr sz="2000" kern="1200">
+                <a:solidFill>
+                  <a:schemeClr val="tx1"/>
+                </a:solidFill>
+                <a:latin typeface="+mn-lt"/>
+                <a:ea typeface="+mn-ea"/>
+                <a:cs typeface="+mn-cs"/>
+              </a:defRPr>
+            </a:lvl3pPr>
+            <a:lvl4pPr marL="1600200" indent="-228600" algn="l" defTabSz="914400" rtl="0" eaLnBrk="1" latinLnBrk="0" hangingPunct="1">
+              <a:lnSpc>
+                <a:spcPct val="90000"/>
+              </a:lnSpc>
+              <a:spcBef>
+                <a:spcPts val="500"/>
+              </a:spcBef>
+              <a:buFont typeface="Arial" panose="020B0604020202020204" pitchFamily="34" charset="0"/>
+              <a:buChar char="•"/>
+              <a:defRPr sz="1800" kern="1200">
+                <a:solidFill>
+                  <a:schemeClr val="tx1"/>
+                </a:solidFill>
+                <a:latin typeface="+mn-lt"/>
+                <a:ea typeface="+mn-ea"/>
+                <a:cs typeface="+mn-cs"/>
+              </a:defRPr>
+            </a:lvl4pPr>
+            <a:lvl5pPr marL="2057400" indent="-228600" algn="l" defTabSz="914400" rtl="0" eaLnBrk="1" latinLnBrk="0" hangingPunct="1">
+              <a:lnSpc>
+                <a:spcPct val="90000"/>
+              </a:lnSpc>
+              <a:spcBef>
+                <a:spcPts val="500"/>
+              </a:spcBef>
+              <a:buFont typeface="Arial" panose="020B0604020202020204" pitchFamily="34" charset="0"/>
+              <a:buChar char="•"/>
+              <a:defRPr sz="1800" kern="1200">
+                <a:solidFill>
+                  <a:schemeClr val="tx1"/>
+                </a:solidFill>
+                <a:latin typeface="+mn-lt"/>
+                <a:ea typeface="+mn-ea"/>
+                <a:cs typeface="+mn-cs"/>
+              </a:defRPr>
+            </a:lvl5pPr>
+            <a:lvl6pPr marL="2514600" indent="-228600" algn="l" defTabSz="914400" rtl="0" eaLnBrk="1" latinLnBrk="0" hangingPunct="1">
+              <a:lnSpc>
+                <a:spcPct val="90000"/>
+              </a:lnSpc>
+              <a:spcBef>
+                <a:spcPts val="500"/>
+              </a:spcBef>
+              <a:buFont typeface="Arial" panose="020B0604020202020204" pitchFamily="34" charset="0"/>
+              <a:buChar char="•"/>
+              <a:defRPr sz="1800" kern="1200">
+                <a:solidFill>
+                  <a:schemeClr val="tx1"/>
+                </a:solidFill>
+                <a:latin typeface="+mn-lt"/>
+                <a:ea typeface="+mn-ea"/>
+                <a:cs typeface="+mn-cs"/>
+              </a:defRPr>
+            </a:lvl6pPr>
+            <a:lvl7pPr marL="2971800" indent="-228600" algn="l" defTabSz="914400" rtl="0" eaLnBrk="1" latinLnBrk="0" hangingPunct="1">
+              <a:lnSpc>
+                <a:spcPct val="90000"/>
+              </a:lnSpc>
+              <a:spcBef>
+                <a:spcPts val="500"/>
+              </a:spcBef>
+              <a:buFont typeface="Arial" panose="020B0604020202020204" pitchFamily="34" charset="0"/>
+              <a:buChar char="•"/>
+              <a:defRPr sz="1800" kern="1200">
+                <a:solidFill>
+                  <a:schemeClr val="tx1"/>
+                </a:solidFill>
+                <a:latin typeface="+mn-lt"/>
+                <a:ea typeface="+mn-ea"/>
+                <a:cs typeface="+mn-cs"/>
+              </a:defRPr>
+            </a:lvl7pPr>
+            <a:lvl8pPr marL="3429000" indent="-228600" algn="l" defTabSz="914400" rtl="0" eaLnBrk="1" latinLnBrk="0" hangingPunct="1">
+              <a:lnSpc>
+                <a:spcPct val="90000"/>
+              </a:lnSpc>
+              <a:spcBef>
+                <a:spcPts val="500"/>
+              </a:spcBef>
+              <a:buFont typeface="Arial" panose="020B0604020202020204" pitchFamily="34" charset="0"/>
+              <a:buChar char="•"/>
+              <a:defRPr sz="1800" kern="1200">
+                <a:solidFill>
+                  <a:schemeClr val="tx1"/>
+                </a:solidFill>
+                <a:latin typeface="+mn-lt"/>
+                <a:ea typeface="+mn-ea"/>
+                <a:cs typeface="+mn-cs"/>
+              </a:defRPr>
+            </a:lvl8pPr>
+            <a:lvl9pPr marL="3886200" indent="-228600" algn="l" defTabSz="914400" rtl="0" eaLnBrk="1" latinLnBrk="0" hangingPunct="1">
+              <a:lnSpc>
+                <a:spcPct val="90000"/>
+              </a:lnSpc>
+              <a:spcBef>
+                <a:spcPts val="500"/>
+              </a:spcBef>
+              <a:buFont typeface="Arial" panose="020B0604020202020204" pitchFamily="34" charset="0"/>
+              <a:buChar char="•"/>
+              <a:defRPr sz="1800" kern="1200">
+                <a:solidFill>
+                  <a:schemeClr val="tx1"/>
+                </a:solidFill>
+                <a:latin typeface="+mn-lt"/>
+                <a:ea typeface="+mn-ea"/>
+                <a:cs typeface="+mn-cs"/>
+              </a:defRPr>
+            </a:lvl9pPr>
+          </a:lstStyle>
+          <a:p>
+            <a:pPr>
+              <a:lnSpc>
+                <a:spcPct val="100000"/>
+              </a:lnSpc>
+              <a:spcBef>
+                <a:spcPts val="400"/>
+              </a:spcBef>
+              <a:buClr>
+                <a:srgbClr val="0064C8"/>
+              </a:buClr>
+              <a:buFont typeface="Wingdings" panose="05000000000000000000" pitchFamily="2" charset="2"/>
+              <a:buChar char="§"/>
+            </a:pPr>
+            <a:r>
+              <a:rPr lang="en-US" sz="2000" spc="-1" dirty="0">
+                <a:solidFill>
+                  <a:srgbClr val="000000"/>
+                </a:solidFill>
+                <a:latin typeface="Century Gothic"/>
+              </a:rPr>
+              <a:t>Ask the model to explain an ML prediction n for a given compound</a:t>
+            </a:r>
+          </a:p>
+          <a:p>
+            <a:pPr>
+              <a:lnSpc>
+                <a:spcPct val="100000"/>
+              </a:lnSpc>
+              <a:spcBef>
+                <a:spcPts val="400"/>
+              </a:spcBef>
+              <a:buClr>
+                <a:srgbClr val="0064C8"/>
+              </a:buClr>
+              <a:buFont typeface="Wingdings" panose="05000000000000000000" pitchFamily="2" charset="2"/>
+              <a:buChar char="§"/>
+            </a:pPr>
+            <a:endParaRPr lang="en-US" sz="2000" spc="-1" dirty="0">
+              <a:solidFill>
+                <a:srgbClr val="000000"/>
+              </a:solidFill>
+              <a:latin typeface="Century Gothic"/>
+            </a:endParaRPr>
+          </a:p>
+          <a:p>
+            <a:pPr>
+              <a:lnSpc>
+                <a:spcPct val="100000"/>
+              </a:lnSpc>
+              <a:spcBef>
+                <a:spcPts val="400"/>
+              </a:spcBef>
+              <a:buClr>
+                <a:srgbClr val="0064C8"/>
+              </a:buClr>
+              <a:buFont typeface="Wingdings" panose="05000000000000000000" pitchFamily="2" charset="2"/>
+              <a:buChar char="§"/>
+            </a:pPr>
+            <a:r>
+              <a:rPr lang="en-US" sz="2000" spc="-1" dirty="0">
+                <a:solidFill>
+                  <a:srgbClr val="000000"/>
+                </a:solidFill>
+                <a:latin typeface="Century Gothic"/>
+              </a:rPr>
+              <a:t>Get explanation statistics</a:t>
+            </a:r>
+          </a:p>
+          <a:p>
+            <a:pPr>
+              <a:lnSpc>
+                <a:spcPct val="100000"/>
+              </a:lnSpc>
+              <a:spcBef>
+                <a:spcPts val="400"/>
+              </a:spcBef>
+              <a:buClr>
+                <a:srgbClr val="0064C8"/>
+              </a:buClr>
+              <a:buFont typeface="Wingdings" panose="05000000000000000000" pitchFamily="2" charset="2"/>
+              <a:buChar char="§"/>
+            </a:pPr>
+            <a:endParaRPr lang="en-US" sz="2000" spc="-1" dirty="0">
+              <a:solidFill>
+                <a:srgbClr val="000000"/>
+              </a:solidFill>
+              <a:latin typeface="Century Gothic"/>
+            </a:endParaRPr>
+          </a:p>
+          <a:p>
+            <a:pPr>
+              <a:lnSpc>
+                <a:spcPct val="100000"/>
+              </a:lnSpc>
+              <a:spcBef>
+                <a:spcPts val="400"/>
+              </a:spcBef>
+              <a:buClr>
+                <a:srgbClr val="0064C8"/>
+              </a:buClr>
+              <a:buFont typeface="Wingdings" panose="05000000000000000000" pitchFamily="2" charset="2"/>
+              <a:buChar char="§"/>
+            </a:pPr>
+            <a:r>
+              <a:rPr lang="en-US" sz="2000" spc="-1" dirty="0">
+                <a:solidFill>
+                  <a:srgbClr val="000000"/>
+                </a:solidFill>
+                <a:latin typeface="Century Gothic"/>
+              </a:rPr>
+              <a:t>Display explanation mapping</a:t>
+            </a:r>
+          </a:p>
+          <a:p>
+            <a:pPr>
+              <a:lnSpc>
+                <a:spcPct val="100000"/>
+              </a:lnSpc>
+              <a:spcBef>
+                <a:spcPts val="400"/>
+              </a:spcBef>
+              <a:buClr>
+                <a:srgbClr val="0064C8"/>
+              </a:buClr>
+              <a:buFont typeface="Wingdings" panose="05000000000000000000" pitchFamily="2" charset="2"/>
+              <a:buChar char="§"/>
+            </a:pPr>
+            <a:endParaRPr lang="en-US" sz="2000" spc="-1" dirty="0">
+              <a:solidFill>
+                <a:srgbClr val="000000"/>
+              </a:solidFill>
+              <a:latin typeface="Century Gothic"/>
+            </a:endParaRPr>
+          </a:p>
+          <a:p>
+            <a:pPr>
+              <a:lnSpc>
+                <a:spcPct val="100000"/>
+              </a:lnSpc>
+              <a:spcBef>
+                <a:spcPts val="400"/>
+              </a:spcBef>
+              <a:buClr>
+                <a:srgbClr val="0064C8"/>
+              </a:buClr>
+              <a:buFont typeface="Wingdings" panose="05000000000000000000" pitchFamily="2" charset="2"/>
+              <a:buChar char="§"/>
+            </a:pPr>
+            <a:r>
+              <a:rPr lang="en-US" sz="2000" spc="-1" dirty="0">
+                <a:solidFill>
+                  <a:srgbClr val="000000"/>
+                </a:solidFill>
+                <a:latin typeface="Century Gothic"/>
+              </a:rPr>
+              <a:t>Rationalize explanations (LLM)</a:t>
+            </a:r>
+          </a:p>
+          <a:p>
+            <a:pPr>
+              <a:lnSpc>
+                <a:spcPct val="100000"/>
+              </a:lnSpc>
+              <a:spcBef>
+                <a:spcPts val="400"/>
+              </a:spcBef>
+              <a:buClr>
+                <a:srgbClr val="0064C8"/>
+              </a:buClr>
+              <a:buFont typeface="Wingdings" panose="05000000000000000000" pitchFamily="2" charset="2"/>
+              <a:buChar char="§"/>
+            </a:pPr>
+            <a:endParaRPr lang="en-US" sz="2000" spc="-1" dirty="0">
+              <a:solidFill>
+                <a:srgbClr val="000000"/>
+              </a:solidFill>
+              <a:latin typeface="Century Gothic"/>
+            </a:endParaRPr>
+          </a:p>
+          <a:p>
+            <a:pPr>
+              <a:lnSpc>
+                <a:spcPct val="100000"/>
+              </a:lnSpc>
+              <a:spcBef>
+                <a:spcPts val="400"/>
+              </a:spcBef>
+              <a:buClr>
+                <a:srgbClr val="0064C8"/>
+              </a:buClr>
+              <a:buFont typeface="Wingdings" panose="05000000000000000000" pitchFamily="2" charset="2"/>
+              <a:buChar char="§"/>
+            </a:pPr>
+            <a:endParaRPr lang="en-US" sz="1800" spc="-1" dirty="0">
+              <a:solidFill>
+                <a:srgbClr val="000000"/>
+              </a:solidFill>
+              <a:latin typeface="Century Gothic"/>
+            </a:endParaRPr>
+          </a:p>
+          <a:p>
+            <a:pPr marL="343080" indent="-343080">
+              <a:lnSpc>
+                <a:spcPct val="100000"/>
+              </a:lnSpc>
+              <a:spcBef>
+                <a:spcPts val="400"/>
+              </a:spcBef>
+              <a:spcAft>
+                <a:spcPts val="601"/>
+              </a:spcAft>
+              <a:buClr>
+                <a:srgbClr val="0064C8"/>
+              </a:buClr>
+              <a:buFont typeface="Wingdings 2" charset="2"/>
+              <a:buChar char=""/>
+            </a:pPr>
+            <a:endParaRPr lang="en-US" sz="2000" b="1" spc="-1" dirty="0">
+              <a:solidFill>
+                <a:srgbClr val="000000"/>
+              </a:solidFill>
+              <a:latin typeface="Century Gothic"/>
+            </a:endParaRPr>
+          </a:p>
+        </p:txBody>
+      </p:sp>
+    </p:spTree>
+    <p:extLst>
+      <p:ext uri="{BB962C8B-B14F-4D97-AF65-F5344CB8AC3E}">
+        <p14:creationId xmlns:p14="http://schemas.microsoft.com/office/powerpoint/2010/main" val="457486825"/>
       </p:ext>
     </p:extLst>
   </p:cSld>

--- a/slides/AI_Agent_Explainability.pptx
+++ b/slides/AI_Agent_Explainability.pptx
@@ -11,6 +11,9 @@
     <p:sldId id="299" r:id="rId5"/>
     <p:sldId id="301" r:id="rId6"/>
     <p:sldId id="300" r:id="rId7"/>
+    <p:sldId id="302" r:id="rId8"/>
+    <p:sldId id="303" r:id="rId9"/>
+    <p:sldId id="304" r:id="rId10"/>
   </p:sldIdLst>
   <p:sldSz cx="9144000" cy="6858000" type="screen4x3"/>
   <p:notesSz cx="7559675" cy="10691813"/>
@@ -120,74 +123,6 @@
 <file path=ppt/changesInfos/changesInfo1.xml><?xml version="1.0" encoding="utf-8"?>
 <pc:chgInfo xmlns:a="http://schemas.openxmlformats.org/drawingml/2006/main" xmlns:r="http://schemas.openxmlformats.org/officeDocument/2006/relationships" xmlns:ac="http://schemas.microsoft.com/office/drawing/2013/main/command" xmlns:pc="http://schemas.microsoft.com/office/powerpoint/2013/main/command">
   <pc:docChgLst>
-    <pc:chgData name="Tiago Janela" userId="ee1a79fe-c79c-4f34-9602-7f6f2f0482b3" providerId="ADAL" clId="{143C78B0-29AB-41F6-944B-45926E54C361}"/>
-    <pc:docChg chg="undo custSel addSld delSld modSld">
-      <pc:chgData name="Tiago Janela" userId="ee1a79fe-c79c-4f34-9602-7f6f2f0482b3" providerId="ADAL" clId="{143C78B0-29AB-41F6-944B-45926E54C361}" dt="2026-02-06T15:56:52.044" v="1423" actId="20577"/>
-      <pc:docMkLst>
-        <pc:docMk/>
-      </pc:docMkLst>
-      <pc:sldChg chg="del">
-        <pc:chgData name="Tiago Janela" userId="ee1a79fe-c79c-4f34-9602-7f6f2f0482b3" providerId="ADAL" clId="{143C78B0-29AB-41F6-944B-45926E54C361}" dt="2026-02-06T11:02:26.764" v="8" actId="47"/>
-        <pc:sldMkLst>
-          <pc:docMk/>
-          <pc:sldMk cId="237093369" sldId="283"/>
-        </pc:sldMkLst>
-      </pc:sldChg>
-      <pc:sldChg chg="del">
-        <pc:chgData name="Tiago Janela" userId="ee1a79fe-c79c-4f34-9602-7f6f2f0482b3" providerId="ADAL" clId="{143C78B0-29AB-41F6-944B-45926E54C361}" dt="2026-02-06T11:02:27.633" v="9" actId="47"/>
-        <pc:sldMkLst>
-          <pc:docMk/>
-          <pc:sldMk cId="1512688275" sldId="289"/>
-        </pc:sldMkLst>
-      </pc:sldChg>
-      <pc:sldChg chg="modSp mod">
-        <pc:chgData name="Tiago Janela" userId="ee1a79fe-c79c-4f34-9602-7f6f2f0482b3" providerId="ADAL" clId="{143C78B0-29AB-41F6-944B-45926E54C361}" dt="2026-02-06T15:49:13.450" v="1174" actId="20577"/>
-        <pc:sldMkLst>
-          <pc:docMk/>
-          <pc:sldMk cId="901468915" sldId="296"/>
-        </pc:sldMkLst>
-        <pc:spChg chg="mod">
-          <ac:chgData name="Tiago Janela" userId="ee1a79fe-c79c-4f34-9602-7f6f2f0482b3" providerId="ADAL" clId="{143C78B0-29AB-41F6-944B-45926E54C361}" dt="2026-02-06T15:49:13.450" v="1174" actId="20577"/>
-          <ac:spMkLst>
-            <pc:docMk/>
-            <pc:sldMk cId="901468915" sldId="296"/>
-            <ac:spMk id="164" creationId="{B6FA4745-5BA4-2D80-2549-988AFFB4E146}"/>
-          </ac:spMkLst>
-        </pc:spChg>
-      </pc:sldChg>
-      <pc:sldChg chg="modSp mod">
-        <pc:chgData name="Tiago Janela" userId="ee1a79fe-c79c-4f34-9602-7f6f2f0482b3" providerId="ADAL" clId="{143C78B0-29AB-41F6-944B-45926E54C361}" dt="2026-02-06T13:27:15.929" v="215" actId="20577"/>
-        <pc:sldMkLst>
-          <pc:docMk/>
-          <pc:sldMk cId="829672710" sldId="297"/>
-        </pc:sldMkLst>
-        <pc:spChg chg="mod">
-          <ac:chgData name="Tiago Janela" userId="ee1a79fe-c79c-4f34-9602-7f6f2f0482b3" providerId="ADAL" clId="{143C78B0-29AB-41F6-944B-45926E54C361}" dt="2026-02-06T13:27:15.929" v="215" actId="20577"/>
-          <ac:spMkLst>
-            <pc:docMk/>
-            <pc:sldMk cId="829672710" sldId="297"/>
-            <ac:spMk id="156" creationId="{00000000-0000-0000-0000-000000000000}"/>
-          </ac:spMkLst>
-        </pc:spChg>
-      </pc:sldChg>
-      <pc:sldChg chg="modSp mod">
-        <pc:chgData name="Tiago Janela" userId="ee1a79fe-c79c-4f34-9602-7f6f2f0482b3" providerId="ADAL" clId="{143C78B0-29AB-41F6-944B-45926E54C361}" dt="2026-02-06T15:55:25.972" v="1391" actId="20577"/>
-        <pc:sldMkLst>
-          <pc:docMk/>
-          <pc:sldMk cId="721732568" sldId="298"/>
-        </pc:sldMkLst>
-        <pc:spChg chg="mod">
-          <ac:chgData name="Tiago Janela" userId="ee1a79fe-c79c-4f34-9602-7f6f2f0482b3" providerId="ADAL" clId="{143C78B0-29AB-41F6-944B-45926E54C361}" dt="2026-02-06T15:55:25.972" v="1391" actId="20577"/>
-          <ac:spMkLst>
-            <pc:docMk/>
-            <pc:sldMk cId="721732568" sldId="298"/>
-            <ac:spMk id="2" creationId="{870990D0-7AC5-46BA-6FC4-274F8E0A3ABE}"/>
-          </ac:spMkLst>
-        </pc:spChg>
-      </pc:sldChg>
-    </pc:docChg>
-  </pc:docChgLst>
-  <pc:docChgLst>
     <pc:chgData name="Tiago Janela" userId="ee1a79fe-c79c-4f34-9602-7f6f2f0482b3" providerId="ADAL" clId="{67D2C233-DF3C-4C6D-9040-D7553E3BCB8A}"/>
     <pc:docChg chg="delSld modSld">
       <pc:chgData name="Tiago Janela" userId="ee1a79fe-c79c-4f34-9602-7f6f2f0482b3" providerId="ADAL" clId="{67D2C233-DF3C-4C6D-9040-D7553E3BCB8A}" dt="2026-03-16T14:03:02.466" v="54" actId="20577"/>
@@ -265,60 +200,6 @@
           <pc:docMk/>
           <pc:sldMk cId="1772121027" sldId="311"/>
         </pc:sldMkLst>
-      </pc:sldChg>
-    </pc:docChg>
-  </pc:docChgLst>
-  <pc:docChgLst>
-    <pc:chgData name="Tiago Janela" userId="ee1a79fe-c79c-4f34-9602-7f6f2f0482b3" providerId="ADAL" clId="{A1A622BE-A8AD-47B7-8802-BAC61BCE5126}"/>
-    <pc:docChg chg="undo custSel modSld">
-      <pc:chgData name="Tiago Janela" userId="ee1a79fe-c79c-4f34-9602-7f6f2f0482b3" providerId="ADAL" clId="{A1A622BE-A8AD-47B7-8802-BAC61BCE5126}" dt="2026-03-04T13:21:40.843" v="48" actId="403"/>
-      <pc:docMkLst>
-        <pc:docMk/>
-      </pc:docMkLst>
-      <pc:sldChg chg="modSp mod">
-        <pc:chgData name="Tiago Janela" userId="ee1a79fe-c79c-4f34-9602-7f6f2f0482b3" providerId="ADAL" clId="{A1A622BE-A8AD-47B7-8802-BAC61BCE5126}" dt="2026-03-04T13:20:02.161" v="40" actId="20577"/>
-        <pc:sldMkLst>
-          <pc:docMk/>
-          <pc:sldMk cId="114778141" sldId="303"/>
-        </pc:sldMkLst>
-        <pc:spChg chg="mod">
-          <ac:chgData name="Tiago Janela" userId="ee1a79fe-c79c-4f34-9602-7f6f2f0482b3" providerId="ADAL" clId="{A1A622BE-A8AD-47B7-8802-BAC61BCE5126}" dt="2026-03-04T13:20:02.161" v="40" actId="20577"/>
-          <ac:spMkLst>
-            <pc:docMk/>
-            <pc:sldMk cId="114778141" sldId="303"/>
-            <ac:spMk id="2" creationId="{3A594187-BB0C-FE87-8E79-972F5DD9EAE2}"/>
-          </ac:spMkLst>
-        </pc:spChg>
-      </pc:sldChg>
-      <pc:sldChg chg="modSp mod">
-        <pc:chgData name="Tiago Janela" userId="ee1a79fe-c79c-4f34-9602-7f6f2f0482b3" providerId="ADAL" clId="{A1A622BE-A8AD-47B7-8802-BAC61BCE5126}" dt="2026-03-04T13:21:32.291" v="47" actId="20577"/>
-        <pc:sldMkLst>
-          <pc:docMk/>
-          <pc:sldMk cId="1211845523" sldId="306"/>
-        </pc:sldMkLst>
-        <pc:spChg chg="mod">
-          <ac:chgData name="Tiago Janela" userId="ee1a79fe-c79c-4f34-9602-7f6f2f0482b3" providerId="ADAL" clId="{A1A622BE-A8AD-47B7-8802-BAC61BCE5126}" dt="2026-03-04T13:21:32.291" v="47" actId="20577"/>
-          <ac:spMkLst>
-            <pc:docMk/>
-            <pc:sldMk cId="1211845523" sldId="306"/>
-            <ac:spMk id="2" creationId="{3A594187-BB0C-FE87-8E79-972F5DD9EAE2}"/>
-          </ac:spMkLst>
-        </pc:spChg>
-      </pc:sldChg>
-      <pc:sldChg chg="modSp mod">
-        <pc:chgData name="Tiago Janela" userId="ee1a79fe-c79c-4f34-9602-7f6f2f0482b3" providerId="ADAL" clId="{A1A622BE-A8AD-47B7-8802-BAC61BCE5126}" dt="2026-03-04T13:21:40.843" v="48" actId="403"/>
-        <pc:sldMkLst>
-          <pc:docMk/>
-          <pc:sldMk cId="4258501269" sldId="307"/>
-        </pc:sldMkLst>
-        <pc:spChg chg="mod">
-          <ac:chgData name="Tiago Janela" userId="ee1a79fe-c79c-4f34-9602-7f6f2f0482b3" providerId="ADAL" clId="{A1A622BE-A8AD-47B7-8802-BAC61BCE5126}" dt="2026-03-04T13:21:40.843" v="48" actId="403"/>
-          <ac:spMkLst>
-            <pc:docMk/>
-            <pc:sldMk cId="4258501269" sldId="307"/>
-            <ac:spMk id="2" creationId="{3A594187-BB0C-FE87-8E79-972F5DD9EAE2}"/>
-          </ac:spMkLst>
-        </pc:spChg>
       </pc:sldChg>
     </pc:docChg>
   </pc:docChgLst>
@@ -470,6 +351,198 @@
       <pc:docMkLst>
         <pc:docMk/>
       </pc:docMkLst>
+    </pc:docChg>
+  </pc:docChgLst>
+  <pc:docChgLst>
+    <pc:chgData name="Tiago Janela" userId="ee1a79fe-c79c-4f34-9602-7f6f2f0482b3" providerId="ADAL" clId="{771048AC-4F55-42D8-AA6A-766F659A7530}"/>
+    <pc:docChg chg="undo custSel addSld delSld modSld sldOrd">
+      <pc:chgData name="Tiago Janela" userId="ee1a79fe-c79c-4f34-9602-7f6f2f0482b3" providerId="ADAL" clId="{771048AC-4F55-42D8-AA6A-766F659A7530}" dt="2026-02-05T14:24:21.198" v="2967" actId="20577"/>
+      <pc:docMkLst>
+        <pc:docMk/>
+      </pc:docMkLst>
+      <pc:sldChg chg="delSp modSp add mod">
+        <pc:chgData name="Tiago Janela" userId="ee1a79fe-c79c-4f34-9602-7f6f2f0482b3" providerId="ADAL" clId="{771048AC-4F55-42D8-AA6A-766F659A7530}" dt="2026-02-05T14:24:21.198" v="2967" actId="20577"/>
+        <pc:sldMkLst>
+          <pc:docMk/>
+          <pc:sldMk cId="901468915" sldId="296"/>
+        </pc:sldMkLst>
+        <pc:spChg chg="mod">
+          <ac:chgData name="Tiago Janela" userId="ee1a79fe-c79c-4f34-9602-7f6f2f0482b3" providerId="ADAL" clId="{771048AC-4F55-42D8-AA6A-766F659A7530}" dt="2026-02-05T10:58:00.218" v="1144" actId="20577"/>
+          <ac:spMkLst>
+            <pc:docMk/>
+            <pc:sldMk cId="901468915" sldId="296"/>
+            <ac:spMk id="163" creationId="{CBF44E8C-8654-71A0-B86B-E9D342AC2D4D}"/>
+          </ac:spMkLst>
+        </pc:spChg>
+        <pc:spChg chg="mod">
+          <ac:chgData name="Tiago Janela" userId="ee1a79fe-c79c-4f34-9602-7f6f2f0482b3" providerId="ADAL" clId="{771048AC-4F55-42D8-AA6A-766F659A7530}" dt="2026-02-05T14:24:21.198" v="2967" actId="20577"/>
+          <ac:spMkLst>
+            <pc:docMk/>
+            <pc:sldMk cId="901468915" sldId="296"/>
+            <ac:spMk id="164" creationId="{B6FA4745-5BA4-2D80-2549-988AFFB4E146}"/>
+          </ac:spMkLst>
+        </pc:spChg>
+      </pc:sldChg>
+      <pc:sldChg chg="modSp add mod ord">
+        <pc:chgData name="Tiago Janela" userId="ee1a79fe-c79c-4f34-9602-7f6f2f0482b3" providerId="ADAL" clId="{771048AC-4F55-42D8-AA6A-766F659A7530}" dt="2026-02-05T12:59:57.611" v="1910" actId="20577"/>
+        <pc:sldMkLst>
+          <pc:docMk/>
+          <pc:sldMk cId="829672710" sldId="297"/>
+        </pc:sldMkLst>
+        <pc:spChg chg="mod">
+          <ac:chgData name="Tiago Janela" userId="ee1a79fe-c79c-4f34-9602-7f6f2f0482b3" providerId="ADAL" clId="{771048AC-4F55-42D8-AA6A-766F659A7530}" dt="2026-02-05T12:59:57.611" v="1910" actId="20577"/>
+          <ac:spMkLst>
+            <pc:docMk/>
+            <pc:sldMk cId="829672710" sldId="297"/>
+            <ac:spMk id="156" creationId="{00000000-0000-0000-0000-000000000000}"/>
+          </ac:spMkLst>
+        </pc:spChg>
+      </pc:sldChg>
+      <pc:sldChg chg="delSp modSp add mod ord">
+        <pc:chgData name="Tiago Janela" userId="ee1a79fe-c79c-4f34-9602-7f6f2f0482b3" providerId="ADAL" clId="{771048AC-4F55-42D8-AA6A-766F659A7530}" dt="2026-02-05T14:23:46.564" v="2966" actId="20577"/>
+        <pc:sldMkLst>
+          <pc:docMk/>
+          <pc:sldMk cId="721732568" sldId="298"/>
+        </pc:sldMkLst>
+        <pc:spChg chg="mod">
+          <ac:chgData name="Tiago Janela" userId="ee1a79fe-c79c-4f34-9602-7f6f2f0482b3" providerId="ADAL" clId="{771048AC-4F55-42D8-AA6A-766F659A7530}" dt="2026-02-05T14:23:46.564" v="2966" actId="20577"/>
+          <ac:spMkLst>
+            <pc:docMk/>
+            <pc:sldMk cId="721732568" sldId="298"/>
+            <ac:spMk id="2" creationId="{870990D0-7AC5-46BA-6FC4-274F8E0A3ABE}"/>
+          </ac:spMkLst>
+        </pc:spChg>
+        <pc:spChg chg="mod">
+          <ac:chgData name="Tiago Janela" userId="ee1a79fe-c79c-4f34-9602-7f6f2f0482b3" providerId="ADAL" clId="{771048AC-4F55-42D8-AA6A-766F659A7530}" dt="2026-02-05T13:01:46.094" v="1930" actId="20577"/>
+          <ac:spMkLst>
+            <pc:docMk/>
+            <pc:sldMk cId="721732568" sldId="298"/>
+            <ac:spMk id="163" creationId="{57944F4B-F502-E7CC-8790-8737702BC6AC}"/>
+          </ac:spMkLst>
+        </pc:spChg>
+      </pc:sldChg>
+    </pc:docChg>
+  </pc:docChgLst>
+  <pc:docChgLst>
+    <pc:chgData name="Tiago Janela" userId="ee1a79fe-c79c-4f34-9602-7f6f2f0482b3" providerId="ADAL" clId="{A1A622BE-A8AD-47B7-8802-BAC61BCE5126}"/>
+    <pc:docChg chg="undo custSel modSld">
+      <pc:chgData name="Tiago Janela" userId="ee1a79fe-c79c-4f34-9602-7f6f2f0482b3" providerId="ADAL" clId="{A1A622BE-A8AD-47B7-8802-BAC61BCE5126}" dt="2026-03-04T13:21:40.843" v="48" actId="403"/>
+      <pc:docMkLst>
+        <pc:docMk/>
+      </pc:docMkLst>
+      <pc:sldChg chg="modSp mod">
+        <pc:chgData name="Tiago Janela" userId="ee1a79fe-c79c-4f34-9602-7f6f2f0482b3" providerId="ADAL" clId="{A1A622BE-A8AD-47B7-8802-BAC61BCE5126}" dt="2026-03-04T13:20:02.161" v="40" actId="20577"/>
+        <pc:sldMkLst>
+          <pc:docMk/>
+          <pc:sldMk cId="114778141" sldId="303"/>
+        </pc:sldMkLst>
+        <pc:spChg chg="mod">
+          <ac:chgData name="Tiago Janela" userId="ee1a79fe-c79c-4f34-9602-7f6f2f0482b3" providerId="ADAL" clId="{A1A622BE-A8AD-47B7-8802-BAC61BCE5126}" dt="2026-03-04T13:20:02.161" v="40" actId="20577"/>
+          <ac:spMkLst>
+            <pc:docMk/>
+            <pc:sldMk cId="114778141" sldId="303"/>
+            <ac:spMk id="2" creationId="{3A594187-BB0C-FE87-8E79-972F5DD9EAE2}"/>
+          </ac:spMkLst>
+        </pc:spChg>
+      </pc:sldChg>
+      <pc:sldChg chg="modSp mod">
+        <pc:chgData name="Tiago Janela" userId="ee1a79fe-c79c-4f34-9602-7f6f2f0482b3" providerId="ADAL" clId="{A1A622BE-A8AD-47B7-8802-BAC61BCE5126}" dt="2026-03-04T13:21:32.291" v="47" actId="20577"/>
+        <pc:sldMkLst>
+          <pc:docMk/>
+          <pc:sldMk cId="1211845523" sldId="306"/>
+        </pc:sldMkLst>
+        <pc:spChg chg="mod">
+          <ac:chgData name="Tiago Janela" userId="ee1a79fe-c79c-4f34-9602-7f6f2f0482b3" providerId="ADAL" clId="{A1A622BE-A8AD-47B7-8802-BAC61BCE5126}" dt="2026-03-04T13:21:32.291" v="47" actId="20577"/>
+          <ac:spMkLst>
+            <pc:docMk/>
+            <pc:sldMk cId="1211845523" sldId="306"/>
+            <ac:spMk id="2" creationId="{3A594187-BB0C-FE87-8E79-972F5DD9EAE2}"/>
+          </ac:spMkLst>
+        </pc:spChg>
+      </pc:sldChg>
+      <pc:sldChg chg="modSp mod">
+        <pc:chgData name="Tiago Janela" userId="ee1a79fe-c79c-4f34-9602-7f6f2f0482b3" providerId="ADAL" clId="{A1A622BE-A8AD-47B7-8802-BAC61BCE5126}" dt="2026-03-04T13:21:40.843" v="48" actId="403"/>
+        <pc:sldMkLst>
+          <pc:docMk/>
+          <pc:sldMk cId="4258501269" sldId="307"/>
+        </pc:sldMkLst>
+        <pc:spChg chg="mod">
+          <ac:chgData name="Tiago Janela" userId="ee1a79fe-c79c-4f34-9602-7f6f2f0482b3" providerId="ADAL" clId="{A1A622BE-A8AD-47B7-8802-BAC61BCE5126}" dt="2026-03-04T13:21:40.843" v="48" actId="403"/>
+          <ac:spMkLst>
+            <pc:docMk/>
+            <pc:sldMk cId="4258501269" sldId="307"/>
+            <ac:spMk id="2" creationId="{3A594187-BB0C-FE87-8E79-972F5DD9EAE2}"/>
+          </ac:spMkLst>
+        </pc:spChg>
+      </pc:sldChg>
+    </pc:docChg>
+  </pc:docChgLst>
+  <pc:docChgLst>
+    <pc:chgData name="Tiago Janela" userId="ee1a79fe-c79c-4f34-9602-7f6f2f0482b3" providerId="ADAL" clId="{143C78B0-29AB-41F6-944B-45926E54C361}"/>
+    <pc:docChg chg="undo custSel addSld delSld modSld">
+      <pc:chgData name="Tiago Janela" userId="ee1a79fe-c79c-4f34-9602-7f6f2f0482b3" providerId="ADAL" clId="{143C78B0-29AB-41F6-944B-45926E54C361}" dt="2026-02-06T15:56:52.044" v="1423" actId="20577"/>
+      <pc:docMkLst>
+        <pc:docMk/>
+      </pc:docMkLst>
+      <pc:sldChg chg="del">
+        <pc:chgData name="Tiago Janela" userId="ee1a79fe-c79c-4f34-9602-7f6f2f0482b3" providerId="ADAL" clId="{143C78B0-29AB-41F6-944B-45926E54C361}" dt="2026-02-06T11:02:26.764" v="8" actId="47"/>
+        <pc:sldMkLst>
+          <pc:docMk/>
+          <pc:sldMk cId="237093369" sldId="283"/>
+        </pc:sldMkLst>
+      </pc:sldChg>
+      <pc:sldChg chg="del">
+        <pc:chgData name="Tiago Janela" userId="ee1a79fe-c79c-4f34-9602-7f6f2f0482b3" providerId="ADAL" clId="{143C78B0-29AB-41F6-944B-45926E54C361}" dt="2026-02-06T11:02:27.633" v="9" actId="47"/>
+        <pc:sldMkLst>
+          <pc:docMk/>
+          <pc:sldMk cId="1512688275" sldId="289"/>
+        </pc:sldMkLst>
+      </pc:sldChg>
+      <pc:sldChg chg="modSp mod">
+        <pc:chgData name="Tiago Janela" userId="ee1a79fe-c79c-4f34-9602-7f6f2f0482b3" providerId="ADAL" clId="{143C78B0-29AB-41F6-944B-45926E54C361}" dt="2026-02-06T15:49:13.450" v="1174" actId="20577"/>
+        <pc:sldMkLst>
+          <pc:docMk/>
+          <pc:sldMk cId="901468915" sldId="296"/>
+        </pc:sldMkLst>
+        <pc:spChg chg="mod">
+          <ac:chgData name="Tiago Janela" userId="ee1a79fe-c79c-4f34-9602-7f6f2f0482b3" providerId="ADAL" clId="{143C78B0-29AB-41F6-944B-45926E54C361}" dt="2026-02-06T15:49:13.450" v="1174" actId="20577"/>
+          <ac:spMkLst>
+            <pc:docMk/>
+            <pc:sldMk cId="901468915" sldId="296"/>
+            <ac:spMk id="164" creationId="{B6FA4745-5BA4-2D80-2549-988AFFB4E146}"/>
+          </ac:spMkLst>
+        </pc:spChg>
+      </pc:sldChg>
+      <pc:sldChg chg="modSp mod">
+        <pc:chgData name="Tiago Janela" userId="ee1a79fe-c79c-4f34-9602-7f6f2f0482b3" providerId="ADAL" clId="{143C78B0-29AB-41F6-944B-45926E54C361}" dt="2026-02-06T13:27:15.929" v="215" actId="20577"/>
+        <pc:sldMkLst>
+          <pc:docMk/>
+          <pc:sldMk cId="829672710" sldId="297"/>
+        </pc:sldMkLst>
+        <pc:spChg chg="mod">
+          <ac:chgData name="Tiago Janela" userId="ee1a79fe-c79c-4f34-9602-7f6f2f0482b3" providerId="ADAL" clId="{143C78B0-29AB-41F6-944B-45926E54C361}" dt="2026-02-06T13:27:15.929" v="215" actId="20577"/>
+          <ac:spMkLst>
+            <pc:docMk/>
+            <pc:sldMk cId="829672710" sldId="297"/>
+            <ac:spMk id="156" creationId="{00000000-0000-0000-0000-000000000000}"/>
+          </ac:spMkLst>
+        </pc:spChg>
+      </pc:sldChg>
+      <pc:sldChg chg="modSp mod">
+        <pc:chgData name="Tiago Janela" userId="ee1a79fe-c79c-4f34-9602-7f6f2f0482b3" providerId="ADAL" clId="{143C78B0-29AB-41F6-944B-45926E54C361}" dt="2026-02-06T15:55:25.972" v="1391" actId="20577"/>
+        <pc:sldMkLst>
+          <pc:docMk/>
+          <pc:sldMk cId="721732568" sldId="298"/>
+        </pc:sldMkLst>
+        <pc:spChg chg="mod">
+          <ac:chgData name="Tiago Janela" userId="ee1a79fe-c79c-4f34-9602-7f6f2f0482b3" providerId="ADAL" clId="{143C78B0-29AB-41F6-944B-45926E54C361}" dt="2026-02-06T15:55:25.972" v="1391" actId="20577"/>
+          <ac:spMkLst>
+            <pc:docMk/>
+            <pc:sldMk cId="721732568" sldId="298"/>
+            <ac:spMk id="2" creationId="{870990D0-7AC5-46BA-6FC4-274F8E0A3ABE}"/>
+          </ac:spMkLst>
+        </pc:spChg>
+      </pc:sldChg>
     </pc:docChg>
   </pc:docChgLst>
   <pc:docChgLst>
@@ -917,76 +990,6 @@
       </pc:sldChg>
     </pc:docChg>
   </pc:docChgLst>
-  <pc:docChgLst>
-    <pc:chgData name="Tiago Janela" userId="ee1a79fe-c79c-4f34-9602-7f6f2f0482b3" providerId="ADAL" clId="{771048AC-4F55-42D8-AA6A-766F659A7530}"/>
-    <pc:docChg chg="undo custSel addSld delSld modSld sldOrd">
-      <pc:chgData name="Tiago Janela" userId="ee1a79fe-c79c-4f34-9602-7f6f2f0482b3" providerId="ADAL" clId="{771048AC-4F55-42D8-AA6A-766F659A7530}" dt="2026-02-05T14:24:21.198" v="2967" actId="20577"/>
-      <pc:docMkLst>
-        <pc:docMk/>
-      </pc:docMkLst>
-      <pc:sldChg chg="delSp modSp add mod">
-        <pc:chgData name="Tiago Janela" userId="ee1a79fe-c79c-4f34-9602-7f6f2f0482b3" providerId="ADAL" clId="{771048AC-4F55-42D8-AA6A-766F659A7530}" dt="2026-02-05T14:24:21.198" v="2967" actId="20577"/>
-        <pc:sldMkLst>
-          <pc:docMk/>
-          <pc:sldMk cId="901468915" sldId="296"/>
-        </pc:sldMkLst>
-        <pc:spChg chg="mod">
-          <ac:chgData name="Tiago Janela" userId="ee1a79fe-c79c-4f34-9602-7f6f2f0482b3" providerId="ADAL" clId="{771048AC-4F55-42D8-AA6A-766F659A7530}" dt="2026-02-05T10:58:00.218" v="1144" actId="20577"/>
-          <ac:spMkLst>
-            <pc:docMk/>
-            <pc:sldMk cId="901468915" sldId="296"/>
-            <ac:spMk id="163" creationId="{CBF44E8C-8654-71A0-B86B-E9D342AC2D4D}"/>
-          </ac:spMkLst>
-        </pc:spChg>
-        <pc:spChg chg="mod">
-          <ac:chgData name="Tiago Janela" userId="ee1a79fe-c79c-4f34-9602-7f6f2f0482b3" providerId="ADAL" clId="{771048AC-4F55-42D8-AA6A-766F659A7530}" dt="2026-02-05T14:24:21.198" v="2967" actId="20577"/>
-          <ac:spMkLst>
-            <pc:docMk/>
-            <pc:sldMk cId="901468915" sldId="296"/>
-            <ac:spMk id="164" creationId="{B6FA4745-5BA4-2D80-2549-988AFFB4E146}"/>
-          </ac:spMkLst>
-        </pc:spChg>
-      </pc:sldChg>
-      <pc:sldChg chg="modSp add mod ord">
-        <pc:chgData name="Tiago Janela" userId="ee1a79fe-c79c-4f34-9602-7f6f2f0482b3" providerId="ADAL" clId="{771048AC-4F55-42D8-AA6A-766F659A7530}" dt="2026-02-05T12:59:57.611" v="1910" actId="20577"/>
-        <pc:sldMkLst>
-          <pc:docMk/>
-          <pc:sldMk cId="829672710" sldId="297"/>
-        </pc:sldMkLst>
-        <pc:spChg chg="mod">
-          <ac:chgData name="Tiago Janela" userId="ee1a79fe-c79c-4f34-9602-7f6f2f0482b3" providerId="ADAL" clId="{771048AC-4F55-42D8-AA6A-766F659A7530}" dt="2026-02-05T12:59:57.611" v="1910" actId="20577"/>
-          <ac:spMkLst>
-            <pc:docMk/>
-            <pc:sldMk cId="829672710" sldId="297"/>
-            <ac:spMk id="156" creationId="{00000000-0000-0000-0000-000000000000}"/>
-          </ac:spMkLst>
-        </pc:spChg>
-      </pc:sldChg>
-      <pc:sldChg chg="delSp modSp add mod ord">
-        <pc:chgData name="Tiago Janela" userId="ee1a79fe-c79c-4f34-9602-7f6f2f0482b3" providerId="ADAL" clId="{771048AC-4F55-42D8-AA6A-766F659A7530}" dt="2026-02-05T14:23:46.564" v="2966" actId="20577"/>
-        <pc:sldMkLst>
-          <pc:docMk/>
-          <pc:sldMk cId="721732568" sldId="298"/>
-        </pc:sldMkLst>
-        <pc:spChg chg="mod">
-          <ac:chgData name="Tiago Janela" userId="ee1a79fe-c79c-4f34-9602-7f6f2f0482b3" providerId="ADAL" clId="{771048AC-4F55-42D8-AA6A-766F659A7530}" dt="2026-02-05T14:23:46.564" v="2966" actId="20577"/>
-          <ac:spMkLst>
-            <pc:docMk/>
-            <pc:sldMk cId="721732568" sldId="298"/>
-            <ac:spMk id="2" creationId="{870990D0-7AC5-46BA-6FC4-274F8E0A3ABE}"/>
-          </ac:spMkLst>
-        </pc:spChg>
-        <pc:spChg chg="mod">
-          <ac:chgData name="Tiago Janela" userId="ee1a79fe-c79c-4f34-9602-7f6f2f0482b3" providerId="ADAL" clId="{771048AC-4F55-42D8-AA6A-766F659A7530}" dt="2026-02-05T13:01:46.094" v="1930" actId="20577"/>
-          <ac:spMkLst>
-            <pc:docMk/>
-            <pc:sldMk cId="721732568" sldId="298"/>
-            <ac:spMk id="163" creationId="{57944F4B-F502-E7CC-8790-8737702BC6AC}"/>
-          </ac:spMkLst>
-        </pc:spChg>
-      </pc:sldChg>
-    </pc:docChg>
-  </pc:docChgLst>
 </pc:chgInfo>
 </file>
 
@@ -10019,7 +10022,7 @@
         <p:fade/>
       </p:transition>
     </mc:Choice>
-    <mc:Fallback xmlns:p15="http://schemas.microsoft.com/office/powerpoint/2012/main" xmlns="">
+    <mc:Fallback xmlns="" xmlns:p15="http://schemas.microsoft.com/office/powerpoint/2012/main">
       <p:transition spd="med">
         <p:fade/>
       </p:transition>
@@ -10411,7 +10414,7 @@
           <p:nvPr/>
         </p:nvPicPr>
         <p:blipFill>
-          <a:blip r:embed="rId2">
+          <a:blip r:embed="rId2" cstate="print">
             <a:extLst>
               <a:ext uri="{28A0092B-C50C-407E-A947-70E740481C1C}">
                 <a14:useLocalDpi xmlns:a14="http://schemas.microsoft.com/office/drawing/2010/main" val="0"/>
@@ -10448,7 +10451,7 @@
         <p:fade/>
       </p:transition>
     </mc:Choice>
-    <mc:Fallback xmlns:p15="http://schemas.microsoft.com/office/powerpoint/2012/main" xmlns="">
+    <mc:Fallback xmlns="" xmlns:p15="http://schemas.microsoft.com/office/powerpoint/2012/main">
       <p:transition spd="med">
         <p:fade/>
       </p:transition>
@@ -11011,17 +11014,14 @@
                 </a:solidFill>
                 <a:latin typeface="Century Gothic"/>
               </a:rPr>
-              <a:t>ContrastiveExplain</a:t>
+              <a:t>MolCE</a:t>
             </a:r>
-            <a:r>
-              <a:rPr lang="en-US" sz="1600" spc="-1" dirty="0">
-                <a:solidFill>
-                  <a:srgbClr val="000000"/>
-                </a:solidFill>
-                <a:latin typeface="Century Gothic"/>
-              </a:rPr>
-              <a:t>. (?)</a:t>
-            </a:r>
+            <a:endParaRPr lang="en-US" sz="1600" spc="-1" dirty="0">
+              <a:solidFill>
+                <a:srgbClr val="000000"/>
+              </a:solidFill>
+              <a:latin typeface="Century Gothic"/>
+            </a:endParaRPr>
           </a:p>
           <a:p>
             <a:pPr lvl="1">
@@ -11212,7 +11212,7 @@
         <p:fade/>
       </p:transition>
     </mc:Choice>
-    <mc:Fallback xmlns:p15="http://schemas.microsoft.com/office/powerpoint/2012/main" xmlns="">
+    <mc:Fallback xmlns="" xmlns:p15="http://schemas.microsoft.com/office/powerpoint/2012/main">
       <p:transition spd="med">
         <p:fade/>
       </p:transition>
@@ -11791,7 +11791,7 @@
         <p:fade/>
       </p:transition>
     </mc:Choice>
-    <mc:Fallback xmlns:p15="http://schemas.microsoft.com/office/powerpoint/2012/main" xmlns="">
+    <mc:Fallback xmlns="" xmlns:p15="http://schemas.microsoft.com/office/powerpoint/2012/main">
       <p:transition spd="med">
         <p:fade/>
       </p:transition>
@@ -12184,7 +12184,7 @@
                 </a:solidFill>
                 <a:latin typeface="Century Gothic"/>
               </a:rPr>
-              <a:t>Ask the model to explain an ML prediction n for a given compound</a:t>
+              <a:t>Ask the model to explain an ML prediction for a given compound with SHAP</a:t>
             </a:r>
           </a:p>
           <a:p>
@@ -12406,7 +12406,1829 @@
         <p:fade/>
       </p:transition>
     </mc:Choice>
-    <mc:Fallback xmlns:p15="http://schemas.microsoft.com/office/powerpoint/2012/main" xmlns="">
+    <mc:Fallback xmlns="" xmlns:p15="http://schemas.microsoft.com/office/powerpoint/2012/main">
+      <p:transition spd="med">
+        <p:fade/>
+      </p:transition>
+    </mc:Fallback>
+  </mc:AlternateContent>
+</p:sld>
+</file>
+
+<file path=ppt/slides/slide6.xml><?xml version="1.0" encoding="utf-8"?>
+<p:sld xmlns:a="http://schemas.openxmlformats.org/drawingml/2006/main" xmlns:r="http://schemas.openxmlformats.org/officeDocument/2006/relationships" xmlns:p="http://schemas.openxmlformats.org/presentationml/2006/main">
+  <p:cSld>
+    <p:spTree>
+      <p:nvGrpSpPr>
+        <p:cNvPr id="1" name="">
+          <a:extLst>
+            <a:ext uri="{FF2B5EF4-FFF2-40B4-BE49-F238E27FC236}">
+              <a16:creationId xmlns:a16="http://schemas.microsoft.com/office/drawing/2014/main" id="{A6515F23-0912-A838-23CE-B8F00573A2DA}"/>
+            </a:ext>
+          </a:extLst>
+        </p:cNvPr>
+        <p:cNvGrpSpPr/>
+        <p:nvPr/>
+      </p:nvGrpSpPr>
+      <p:grpSpPr>
+        <a:xfrm>
+          <a:off x="0" y="0"/>
+          <a:ext cx="0" cy="0"/>
+          <a:chOff x="0" y="0"/>
+          <a:chExt cx="0" cy="0"/>
+        </a:xfrm>
+      </p:grpSpPr>
+      <p:sp>
+        <p:nvSpPr>
+          <p:cNvPr id="163" name="PlaceHolder 1">
+            <a:extLst>
+              <a:ext uri="{FF2B5EF4-FFF2-40B4-BE49-F238E27FC236}">
+                <a16:creationId xmlns:a16="http://schemas.microsoft.com/office/drawing/2014/main" id="{57944F4B-F502-E7CC-8790-8737702BC6AC}"/>
+              </a:ext>
+            </a:extLst>
+          </p:cNvPr>
+          <p:cNvSpPr>
+            <a:spLocks noGrp="1"/>
+          </p:cNvSpPr>
+          <p:nvPr>
+            <p:ph type="title"/>
+          </p:nvPr>
+        </p:nvSpPr>
+        <p:spPr>
+          <a:xfrm>
+            <a:off x="380880" y="228600"/>
+            <a:ext cx="8380080" cy="837720"/>
+          </a:xfrm>
+          <a:prstGeom prst="rect">
+            <a:avLst/>
+          </a:prstGeom>
+          <a:noFill/>
+          <a:ln w="0">
+            <a:noFill/>
+          </a:ln>
+        </p:spPr>
+        <p:txBody>
+          <a:bodyPr numCol="1" spcCol="0" anchor="ctr">
+            <a:noAutofit/>
+          </a:bodyPr>
+          <a:lstStyle/>
+          <a:p>
+            <a:pPr>
+              <a:lnSpc>
+                <a:spcPct val="100000"/>
+              </a:lnSpc>
+              <a:buNone/>
+            </a:pPr>
+            <a:r>
+              <a:rPr lang="en-US" sz="3200" b="0" strike="noStrike" spc="-1" dirty="0">
+                <a:solidFill>
+                  <a:srgbClr val="0064C8"/>
+                </a:solidFill>
+                <a:latin typeface="Century Gothic"/>
+              </a:rPr>
+              <a:t>Exemplary answer output</a:t>
+            </a:r>
+            <a:endParaRPr lang="en-US" sz="3200" b="0" strike="noStrike" spc="-1" dirty="0">
+              <a:solidFill>
+                <a:srgbClr val="000000"/>
+              </a:solidFill>
+              <a:latin typeface="Century Gothic"/>
+            </a:endParaRPr>
+          </a:p>
+        </p:txBody>
+      </p:sp>
+      <p:sp>
+        <p:nvSpPr>
+          <p:cNvPr id="165" name="PlaceHolder 3">
+            <a:extLst>
+              <a:ext uri="{FF2B5EF4-FFF2-40B4-BE49-F238E27FC236}">
+                <a16:creationId xmlns:a16="http://schemas.microsoft.com/office/drawing/2014/main" id="{2EFBEA53-7B78-D9A1-93EF-9608A3193D27}"/>
+              </a:ext>
+            </a:extLst>
+          </p:cNvPr>
+          <p:cNvSpPr>
+            <a:spLocks noGrp="1"/>
+          </p:cNvSpPr>
+          <p:nvPr>
+            <p:ph type="sldNum"/>
+          </p:nvPr>
+        </p:nvSpPr>
+        <p:spPr>
+          <a:xfrm>
+            <a:off x="8376840" y="5692680"/>
+            <a:ext cx="384120" cy="364680"/>
+          </a:xfrm>
+          <a:prstGeom prst="rect">
+            <a:avLst/>
+          </a:prstGeom>
+          <a:noFill/>
+          <a:ln w="0">
+            <a:noFill/>
+          </a:ln>
+        </p:spPr>
+        <p:txBody>
+          <a:bodyPr anchor="ctr">
+            <a:noAutofit/>
+          </a:bodyPr>
+          <a:lstStyle/>
+          <a:p>
+            <a:pPr algn="r">
+              <a:lnSpc>
+                <a:spcPct val="100000"/>
+              </a:lnSpc>
+              <a:buNone/>
+            </a:pPr>
+            <a:fld id="{8BD7C522-1E12-40C3-B25E-5F0462E20B22}" type="slidenum">
+              <a:rPr lang="en-US" sz="1200" b="0" strike="noStrike" spc="-1">
+                <a:solidFill>
+                  <a:srgbClr val="8B8B8B"/>
+                </a:solidFill>
+                <a:latin typeface="Century Gothic"/>
+              </a:rPr>
+              <a:t>6</a:t>
+            </a:fld>
+            <a:endParaRPr lang="en-GB" sz="1200" b="0" strike="noStrike" spc="-1" dirty="0">
+              <a:latin typeface="Times New Roman"/>
+            </a:endParaRPr>
+          </a:p>
+        </p:txBody>
+      </p:sp>
+      <p:sp>
+        <p:nvSpPr>
+          <p:cNvPr id="7" name="PlaceHolder 2">
+            <a:extLst>
+              <a:ext uri="{FF2B5EF4-FFF2-40B4-BE49-F238E27FC236}">
+                <a16:creationId xmlns:a16="http://schemas.microsoft.com/office/drawing/2014/main" id="{66DE14D4-64D4-6D1F-DD92-BC16D674C58B}"/>
+              </a:ext>
+            </a:extLst>
+          </p:cNvPr>
+          <p:cNvSpPr txBox="1">
+            <a:spLocks/>
+          </p:cNvSpPr>
+          <p:nvPr/>
+        </p:nvSpPr>
+        <p:spPr>
+          <a:xfrm>
+            <a:off x="380880" y="1371598"/>
+            <a:ext cx="3556120" cy="4559301"/>
+          </a:xfrm>
+          <a:prstGeom prst="rect">
+            <a:avLst/>
+          </a:prstGeom>
+          <a:noFill/>
+          <a:ln w="0">
+            <a:noFill/>
+          </a:ln>
+        </p:spPr>
+        <p:txBody>
+          <a:bodyPr numCol="1" spcCol="0" anchor="t">
+            <a:noAutofit/>
+          </a:bodyPr>
+          <a:lstStyle>
+            <a:lvl1pPr marL="228600" indent="-228600" algn="l" defTabSz="914400" rtl="0" eaLnBrk="1" latinLnBrk="0" hangingPunct="1">
+              <a:lnSpc>
+                <a:spcPct val="90000"/>
+              </a:lnSpc>
+              <a:spcBef>
+                <a:spcPts val="1000"/>
+              </a:spcBef>
+              <a:buFont typeface="Arial" panose="020B0604020202020204" pitchFamily="34" charset="0"/>
+              <a:buChar char="•"/>
+              <a:defRPr sz="2800" kern="1200">
+                <a:solidFill>
+                  <a:schemeClr val="tx1"/>
+                </a:solidFill>
+                <a:latin typeface="+mn-lt"/>
+                <a:ea typeface="+mn-ea"/>
+                <a:cs typeface="+mn-cs"/>
+              </a:defRPr>
+            </a:lvl1pPr>
+            <a:lvl2pPr marL="685800" indent="-228600" algn="l" defTabSz="914400" rtl="0" eaLnBrk="1" latinLnBrk="0" hangingPunct="1">
+              <a:lnSpc>
+                <a:spcPct val="90000"/>
+              </a:lnSpc>
+              <a:spcBef>
+                <a:spcPts val="500"/>
+              </a:spcBef>
+              <a:buFont typeface="Arial" panose="020B0604020202020204" pitchFamily="34" charset="0"/>
+              <a:buChar char="•"/>
+              <a:defRPr sz="2400" kern="1200">
+                <a:solidFill>
+                  <a:schemeClr val="tx1"/>
+                </a:solidFill>
+                <a:latin typeface="+mn-lt"/>
+                <a:ea typeface="+mn-ea"/>
+                <a:cs typeface="+mn-cs"/>
+              </a:defRPr>
+            </a:lvl2pPr>
+            <a:lvl3pPr marL="1143000" indent="-228600" algn="l" defTabSz="914400" rtl="0" eaLnBrk="1" latinLnBrk="0" hangingPunct="1">
+              <a:lnSpc>
+                <a:spcPct val="90000"/>
+              </a:lnSpc>
+              <a:spcBef>
+                <a:spcPts val="500"/>
+              </a:spcBef>
+              <a:buFont typeface="Arial" panose="020B0604020202020204" pitchFamily="34" charset="0"/>
+              <a:buChar char="•"/>
+              <a:defRPr sz="2000" kern="1200">
+                <a:solidFill>
+                  <a:schemeClr val="tx1"/>
+                </a:solidFill>
+                <a:latin typeface="+mn-lt"/>
+                <a:ea typeface="+mn-ea"/>
+                <a:cs typeface="+mn-cs"/>
+              </a:defRPr>
+            </a:lvl3pPr>
+            <a:lvl4pPr marL="1600200" indent="-228600" algn="l" defTabSz="914400" rtl="0" eaLnBrk="1" latinLnBrk="0" hangingPunct="1">
+              <a:lnSpc>
+                <a:spcPct val="90000"/>
+              </a:lnSpc>
+              <a:spcBef>
+                <a:spcPts val="500"/>
+              </a:spcBef>
+              <a:buFont typeface="Arial" panose="020B0604020202020204" pitchFamily="34" charset="0"/>
+              <a:buChar char="•"/>
+              <a:defRPr sz="1800" kern="1200">
+                <a:solidFill>
+                  <a:schemeClr val="tx1"/>
+                </a:solidFill>
+                <a:latin typeface="+mn-lt"/>
+                <a:ea typeface="+mn-ea"/>
+                <a:cs typeface="+mn-cs"/>
+              </a:defRPr>
+            </a:lvl4pPr>
+            <a:lvl5pPr marL="2057400" indent="-228600" algn="l" defTabSz="914400" rtl="0" eaLnBrk="1" latinLnBrk="0" hangingPunct="1">
+              <a:lnSpc>
+                <a:spcPct val="90000"/>
+              </a:lnSpc>
+              <a:spcBef>
+                <a:spcPts val="500"/>
+              </a:spcBef>
+              <a:buFont typeface="Arial" panose="020B0604020202020204" pitchFamily="34" charset="0"/>
+              <a:buChar char="•"/>
+              <a:defRPr sz="1800" kern="1200">
+                <a:solidFill>
+                  <a:schemeClr val="tx1"/>
+                </a:solidFill>
+                <a:latin typeface="+mn-lt"/>
+                <a:ea typeface="+mn-ea"/>
+                <a:cs typeface="+mn-cs"/>
+              </a:defRPr>
+            </a:lvl5pPr>
+            <a:lvl6pPr marL="2514600" indent="-228600" algn="l" defTabSz="914400" rtl="0" eaLnBrk="1" latinLnBrk="0" hangingPunct="1">
+              <a:lnSpc>
+                <a:spcPct val="90000"/>
+              </a:lnSpc>
+              <a:spcBef>
+                <a:spcPts val="500"/>
+              </a:spcBef>
+              <a:buFont typeface="Arial" panose="020B0604020202020204" pitchFamily="34" charset="0"/>
+              <a:buChar char="•"/>
+              <a:defRPr sz="1800" kern="1200">
+                <a:solidFill>
+                  <a:schemeClr val="tx1"/>
+                </a:solidFill>
+                <a:latin typeface="+mn-lt"/>
+                <a:ea typeface="+mn-ea"/>
+                <a:cs typeface="+mn-cs"/>
+              </a:defRPr>
+            </a:lvl6pPr>
+            <a:lvl7pPr marL="2971800" indent="-228600" algn="l" defTabSz="914400" rtl="0" eaLnBrk="1" latinLnBrk="0" hangingPunct="1">
+              <a:lnSpc>
+                <a:spcPct val="90000"/>
+              </a:lnSpc>
+              <a:spcBef>
+                <a:spcPts val="500"/>
+              </a:spcBef>
+              <a:buFont typeface="Arial" panose="020B0604020202020204" pitchFamily="34" charset="0"/>
+              <a:buChar char="•"/>
+              <a:defRPr sz="1800" kern="1200">
+                <a:solidFill>
+                  <a:schemeClr val="tx1"/>
+                </a:solidFill>
+                <a:latin typeface="+mn-lt"/>
+                <a:ea typeface="+mn-ea"/>
+                <a:cs typeface="+mn-cs"/>
+              </a:defRPr>
+            </a:lvl7pPr>
+            <a:lvl8pPr marL="3429000" indent="-228600" algn="l" defTabSz="914400" rtl="0" eaLnBrk="1" latinLnBrk="0" hangingPunct="1">
+              <a:lnSpc>
+                <a:spcPct val="90000"/>
+              </a:lnSpc>
+              <a:spcBef>
+                <a:spcPts val="500"/>
+              </a:spcBef>
+              <a:buFont typeface="Arial" panose="020B0604020202020204" pitchFamily="34" charset="0"/>
+              <a:buChar char="•"/>
+              <a:defRPr sz="1800" kern="1200">
+                <a:solidFill>
+                  <a:schemeClr val="tx1"/>
+                </a:solidFill>
+                <a:latin typeface="+mn-lt"/>
+                <a:ea typeface="+mn-ea"/>
+                <a:cs typeface="+mn-cs"/>
+              </a:defRPr>
+            </a:lvl8pPr>
+            <a:lvl9pPr marL="3886200" indent="-228600" algn="l" defTabSz="914400" rtl="0" eaLnBrk="1" latinLnBrk="0" hangingPunct="1">
+              <a:lnSpc>
+                <a:spcPct val="90000"/>
+              </a:lnSpc>
+              <a:spcBef>
+                <a:spcPts val="500"/>
+              </a:spcBef>
+              <a:buFont typeface="Arial" panose="020B0604020202020204" pitchFamily="34" charset="0"/>
+              <a:buChar char="•"/>
+              <a:defRPr sz="1800" kern="1200">
+                <a:solidFill>
+                  <a:schemeClr val="tx1"/>
+                </a:solidFill>
+                <a:latin typeface="+mn-lt"/>
+                <a:ea typeface="+mn-ea"/>
+                <a:cs typeface="+mn-cs"/>
+              </a:defRPr>
+            </a:lvl9pPr>
+          </a:lstStyle>
+          <a:p>
+            <a:pPr>
+              <a:lnSpc>
+                <a:spcPct val="100000"/>
+              </a:lnSpc>
+              <a:spcBef>
+                <a:spcPts val="400"/>
+              </a:spcBef>
+              <a:buClr>
+                <a:srgbClr val="0064C8"/>
+              </a:buClr>
+              <a:buFont typeface="Wingdings" panose="05000000000000000000" pitchFamily="2" charset="2"/>
+              <a:buChar char="§"/>
+            </a:pPr>
+            <a:r>
+              <a:rPr lang="en-US" sz="2000" spc="-1" dirty="0">
+                <a:solidFill>
+                  <a:srgbClr val="000000"/>
+                </a:solidFill>
+                <a:latin typeface="Century Gothic"/>
+              </a:rPr>
+              <a:t>Ask the model to explain an ML prediction n for a given compound with </a:t>
+            </a:r>
+            <a:r>
+              <a:rPr lang="en-US" sz="2000" spc="-1" dirty="0" err="1">
+                <a:solidFill>
+                  <a:srgbClr val="000000"/>
+                </a:solidFill>
+                <a:latin typeface="Century Gothic"/>
+              </a:rPr>
+              <a:t>MolAnchor</a:t>
+            </a:r>
+            <a:endParaRPr lang="en-US" sz="2000" spc="-1" dirty="0">
+              <a:solidFill>
+                <a:srgbClr val="000000"/>
+              </a:solidFill>
+              <a:latin typeface="Century Gothic"/>
+            </a:endParaRPr>
+          </a:p>
+          <a:p>
+            <a:pPr>
+              <a:lnSpc>
+                <a:spcPct val="100000"/>
+              </a:lnSpc>
+              <a:spcBef>
+                <a:spcPts val="400"/>
+              </a:spcBef>
+              <a:buClr>
+                <a:srgbClr val="0064C8"/>
+              </a:buClr>
+              <a:buFont typeface="Wingdings" panose="05000000000000000000" pitchFamily="2" charset="2"/>
+              <a:buChar char="§"/>
+            </a:pPr>
+            <a:endParaRPr lang="en-US" sz="2000" spc="-1" dirty="0">
+              <a:solidFill>
+                <a:srgbClr val="000000"/>
+              </a:solidFill>
+              <a:latin typeface="Century Gothic"/>
+            </a:endParaRPr>
+          </a:p>
+          <a:p>
+            <a:pPr>
+              <a:lnSpc>
+                <a:spcPct val="100000"/>
+              </a:lnSpc>
+              <a:spcBef>
+                <a:spcPts val="400"/>
+              </a:spcBef>
+              <a:buClr>
+                <a:srgbClr val="0064C8"/>
+              </a:buClr>
+              <a:buFont typeface="Wingdings" panose="05000000000000000000" pitchFamily="2" charset="2"/>
+              <a:buChar char="§"/>
+            </a:pPr>
+            <a:r>
+              <a:rPr lang="en-US" sz="2000" spc="-1" dirty="0">
+                <a:solidFill>
+                  <a:srgbClr val="000000"/>
+                </a:solidFill>
+                <a:latin typeface="Century Gothic"/>
+              </a:rPr>
+              <a:t>Get explanation statistics</a:t>
+            </a:r>
+          </a:p>
+          <a:p>
+            <a:pPr>
+              <a:lnSpc>
+                <a:spcPct val="100000"/>
+              </a:lnSpc>
+              <a:spcBef>
+                <a:spcPts val="400"/>
+              </a:spcBef>
+              <a:buClr>
+                <a:srgbClr val="0064C8"/>
+              </a:buClr>
+              <a:buFont typeface="Wingdings" panose="05000000000000000000" pitchFamily="2" charset="2"/>
+              <a:buChar char="§"/>
+            </a:pPr>
+            <a:endParaRPr lang="en-US" sz="2000" spc="-1" dirty="0">
+              <a:solidFill>
+                <a:srgbClr val="000000"/>
+              </a:solidFill>
+              <a:latin typeface="Century Gothic"/>
+            </a:endParaRPr>
+          </a:p>
+          <a:p>
+            <a:pPr>
+              <a:lnSpc>
+                <a:spcPct val="100000"/>
+              </a:lnSpc>
+              <a:spcBef>
+                <a:spcPts val="400"/>
+              </a:spcBef>
+              <a:buClr>
+                <a:srgbClr val="0064C8"/>
+              </a:buClr>
+              <a:buFont typeface="Wingdings" panose="05000000000000000000" pitchFamily="2" charset="2"/>
+              <a:buChar char="§"/>
+            </a:pPr>
+            <a:r>
+              <a:rPr lang="en-US" sz="2000" spc="-1" dirty="0">
+                <a:solidFill>
+                  <a:srgbClr val="000000"/>
+                </a:solidFill>
+                <a:latin typeface="Century Gothic"/>
+              </a:rPr>
+              <a:t>Display explanation mapping</a:t>
+            </a:r>
+          </a:p>
+          <a:p>
+            <a:pPr>
+              <a:lnSpc>
+                <a:spcPct val="100000"/>
+              </a:lnSpc>
+              <a:spcBef>
+                <a:spcPts val="400"/>
+              </a:spcBef>
+              <a:buClr>
+                <a:srgbClr val="0064C8"/>
+              </a:buClr>
+              <a:buFont typeface="Wingdings" panose="05000000000000000000" pitchFamily="2" charset="2"/>
+              <a:buChar char="§"/>
+            </a:pPr>
+            <a:endParaRPr lang="en-US" sz="2000" spc="-1" dirty="0">
+              <a:solidFill>
+                <a:srgbClr val="000000"/>
+              </a:solidFill>
+              <a:latin typeface="Century Gothic"/>
+            </a:endParaRPr>
+          </a:p>
+          <a:p>
+            <a:pPr>
+              <a:lnSpc>
+                <a:spcPct val="100000"/>
+              </a:lnSpc>
+              <a:spcBef>
+                <a:spcPts val="400"/>
+              </a:spcBef>
+              <a:buClr>
+                <a:srgbClr val="0064C8"/>
+              </a:buClr>
+              <a:buFont typeface="Wingdings" panose="05000000000000000000" pitchFamily="2" charset="2"/>
+              <a:buChar char="§"/>
+            </a:pPr>
+            <a:r>
+              <a:rPr lang="en-US" sz="2000" spc="-1" dirty="0">
+                <a:solidFill>
+                  <a:srgbClr val="000000"/>
+                </a:solidFill>
+                <a:latin typeface="Century Gothic"/>
+              </a:rPr>
+              <a:t>Rationalize explanations (LLM)</a:t>
+            </a:r>
+          </a:p>
+          <a:p>
+            <a:pPr>
+              <a:lnSpc>
+                <a:spcPct val="100000"/>
+              </a:lnSpc>
+              <a:spcBef>
+                <a:spcPts val="400"/>
+              </a:spcBef>
+              <a:buClr>
+                <a:srgbClr val="0064C8"/>
+              </a:buClr>
+              <a:buFont typeface="Wingdings" panose="05000000000000000000" pitchFamily="2" charset="2"/>
+              <a:buChar char="§"/>
+            </a:pPr>
+            <a:endParaRPr lang="en-US" sz="2000" spc="-1" dirty="0">
+              <a:solidFill>
+                <a:srgbClr val="000000"/>
+              </a:solidFill>
+              <a:latin typeface="Century Gothic"/>
+            </a:endParaRPr>
+          </a:p>
+          <a:p>
+            <a:pPr>
+              <a:lnSpc>
+                <a:spcPct val="100000"/>
+              </a:lnSpc>
+              <a:spcBef>
+                <a:spcPts val="400"/>
+              </a:spcBef>
+              <a:buClr>
+                <a:srgbClr val="0064C8"/>
+              </a:buClr>
+              <a:buFont typeface="Wingdings" panose="05000000000000000000" pitchFamily="2" charset="2"/>
+              <a:buChar char="§"/>
+            </a:pPr>
+            <a:endParaRPr lang="en-US" sz="1800" spc="-1" dirty="0">
+              <a:solidFill>
+                <a:srgbClr val="000000"/>
+              </a:solidFill>
+              <a:latin typeface="Century Gothic"/>
+            </a:endParaRPr>
+          </a:p>
+          <a:p>
+            <a:pPr marL="343080" indent="-343080">
+              <a:lnSpc>
+                <a:spcPct val="100000"/>
+              </a:lnSpc>
+              <a:spcBef>
+                <a:spcPts val="400"/>
+              </a:spcBef>
+              <a:spcAft>
+                <a:spcPts val="601"/>
+              </a:spcAft>
+              <a:buClr>
+                <a:srgbClr val="0064C8"/>
+              </a:buClr>
+              <a:buFont typeface="Wingdings 2" charset="2"/>
+              <a:buChar char=""/>
+            </a:pPr>
+            <a:endParaRPr lang="en-US" sz="2000" b="1" spc="-1" dirty="0">
+              <a:solidFill>
+                <a:srgbClr val="000000"/>
+              </a:solidFill>
+              <a:latin typeface="Century Gothic"/>
+            </a:endParaRPr>
+          </a:p>
+        </p:txBody>
+      </p:sp>
+      <p:pic>
+        <p:nvPicPr>
+          <p:cNvPr id="3" name="Picture 2">
+            <a:extLst>
+              <a:ext uri="{FF2B5EF4-FFF2-40B4-BE49-F238E27FC236}">
+                <a16:creationId xmlns:a16="http://schemas.microsoft.com/office/drawing/2014/main" id="{CABC6A26-9CF7-7B03-D767-F8B5CB557E1B}"/>
+              </a:ext>
+            </a:extLst>
+          </p:cNvPr>
+          <p:cNvPicPr>
+            <a:picLocks noChangeAspect="1"/>
+          </p:cNvPicPr>
+          <p:nvPr/>
+        </p:nvPicPr>
+        <p:blipFill>
+          <a:blip r:embed="rId2"/>
+          <a:srcRect l="-3811" t="-1266" r="-2705" b="-5248"/>
+          <a:stretch/>
+        </p:blipFill>
+        <p:spPr>
+          <a:xfrm>
+            <a:off x="4313911" y="1075604"/>
+            <a:ext cx="4307305" cy="4025986"/>
+          </a:xfrm>
+          <a:prstGeom prst="rect">
+            <a:avLst/>
+          </a:prstGeom>
+        </p:spPr>
+      </p:pic>
+      <p:pic>
+        <p:nvPicPr>
+          <p:cNvPr id="6" name="Picture 5">
+            <a:extLst>
+              <a:ext uri="{FF2B5EF4-FFF2-40B4-BE49-F238E27FC236}">
+                <a16:creationId xmlns:a16="http://schemas.microsoft.com/office/drawing/2014/main" id="{C0F84ACB-0B25-83EE-C843-9841A30F787F}"/>
+              </a:ext>
+            </a:extLst>
+          </p:cNvPr>
+          <p:cNvPicPr>
+            <a:picLocks noChangeAspect="1"/>
+          </p:cNvPicPr>
+          <p:nvPr/>
+        </p:nvPicPr>
+        <p:blipFill>
+          <a:blip r:embed="rId3"/>
+          <a:stretch>
+            <a:fillRect/>
+          </a:stretch>
+        </p:blipFill>
+        <p:spPr>
+          <a:xfrm>
+            <a:off x="4464050" y="4862478"/>
+            <a:ext cx="4051300" cy="1083662"/>
+          </a:xfrm>
+          <a:prstGeom prst="rect">
+            <a:avLst/>
+          </a:prstGeom>
+        </p:spPr>
+      </p:pic>
+    </p:spTree>
+    <p:extLst>
+      <p:ext uri="{BB962C8B-B14F-4D97-AF65-F5344CB8AC3E}">
+        <p14:creationId xmlns:p14="http://schemas.microsoft.com/office/powerpoint/2010/main" val="4267688927"/>
+      </p:ext>
+    </p:extLst>
+  </p:cSld>
+  <p:clrMapOvr>
+    <a:masterClrMapping/>
+  </p:clrMapOvr>
+  <mc:AlternateContent xmlns:mc="http://schemas.openxmlformats.org/markup-compatibility/2006">
+    <mc:Choice xmlns:p14="http://schemas.microsoft.com/office/powerpoint/2010/main" Requires="p14">
+      <p:transition spd="med" p14:dur="700">
+        <p:fade/>
+      </p:transition>
+    </mc:Choice>
+    <mc:Fallback>
+      <p:transition spd="med">
+        <p:fade/>
+      </p:transition>
+    </mc:Fallback>
+  </mc:AlternateContent>
+</p:sld>
+</file>
+
+<file path=ppt/slides/slide7.xml><?xml version="1.0" encoding="utf-8"?>
+<p:sld xmlns:a="http://schemas.openxmlformats.org/drawingml/2006/main" xmlns:r="http://schemas.openxmlformats.org/officeDocument/2006/relationships" xmlns:p="http://schemas.openxmlformats.org/presentationml/2006/main">
+  <p:cSld>
+    <p:spTree>
+      <p:nvGrpSpPr>
+        <p:cNvPr id="1" name="">
+          <a:extLst>
+            <a:ext uri="{FF2B5EF4-FFF2-40B4-BE49-F238E27FC236}">
+              <a16:creationId xmlns:a16="http://schemas.microsoft.com/office/drawing/2014/main" id="{A6515F23-0912-A838-23CE-B8F00573A2DA}"/>
+            </a:ext>
+          </a:extLst>
+        </p:cNvPr>
+        <p:cNvGrpSpPr/>
+        <p:nvPr/>
+      </p:nvGrpSpPr>
+      <p:grpSpPr>
+        <a:xfrm>
+          <a:off x="0" y="0"/>
+          <a:ext cx="0" cy="0"/>
+          <a:chOff x="0" y="0"/>
+          <a:chExt cx="0" cy="0"/>
+        </a:xfrm>
+      </p:grpSpPr>
+      <p:sp>
+        <p:nvSpPr>
+          <p:cNvPr id="163" name="PlaceHolder 1">
+            <a:extLst>
+              <a:ext uri="{FF2B5EF4-FFF2-40B4-BE49-F238E27FC236}">
+                <a16:creationId xmlns:a16="http://schemas.microsoft.com/office/drawing/2014/main" id="{57944F4B-F502-E7CC-8790-8737702BC6AC}"/>
+              </a:ext>
+            </a:extLst>
+          </p:cNvPr>
+          <p:cNvSpPr>
+            <a:spLocks noGrp="1"/>
+          </p:cNvSpPr>
+          <p:nvPr>
+            <p:ph type="title"/>
+          </p:nvPr>
+        </p:nvSpPr>
+        <p:spPr>
+          <a:xfrm>
+            <a:off x="380880" y="228600"/>
+            <a:ext cx="8380080" cy="837720"/>
+          </a:xfrm>
+          <a:prstGeom prst="rect">
+            <a:avLst/>
+          </a:prstGeom>
+          <a:noFill/>
+          <a:ln w="0">
+            <a:noFill/>
+          </a:ln>
+        </p:spPr>
+        <p:txBody>
+          <a:bodyPr numCol="1" spcCol="0" anchor="ctr">
+            <a:noAutofit/>
+          </a:bodyPr>
+          <a:lstStyle/>
+          <a:p>
+            <a:pPr>
+              <a:lnSpc>
+                <a:spcPct val="100000"/>
+              </a:lnSpc>
+              <a:buNone/>
+            </a:pPr>
+            <a:r>
+              <a:rPr lang="en-US" sz="3200" b="0" strike="noStrike" spc="-1" dirty="0">
+                <a:solidFill>
+                  <a:srgbClr val="0064C8"/>
+                </a:solidFill>
+                <a:latin typeface="Century Gothic"/>
+              </a:rPr>
+              <a:t>To do list</a:t>
+            </a:r>
+            <a:endParaRPr lang="en-US" sz="3200" b="0" strike="noStrike" spc="-1" dirty="0">
+              <a:solidFill>
+                <a:srgbClr val="000000"/>
+              </a:solidFill>
+              <a:latin typeface="Century Gothic"/>
+            </a:endParaRPr>
+          </a:p>
+        </p:txBody>
+      </p:sp>
+      <p:sp>
+        <p:nvSpPr>
+          <p:cNvPr id="165" name="PlaceHolder 3">
+            <a:extLst>
+              <a:ext uri="{FF2B5EF4-FFF2-40B4-BE49-F238E27FC236}">
+                <a16:creationId xmlns:a16="http://schemas.microsoft.com/office/drawing/2014/main" id="{2EFBEA53-7B78-D9A1-93EF-9608A3193D27}"/>
+              </a:ext>
+            </a:extLst>
+          </p:cNvPr>
+          <p:cNvSpPr>
+            <a:spLocks noGrp="1"/>
+          </p:cNvSpPr>
+          <p:nvPr>
+            <p:ph type="sldNum"/>
+          </p:nvPr>
+        </p:nvSpPr>
+        <p:spPr>
+          <a:xfrm>
+            <a:off x="8376840" y="5692680"/>
+            <a:ext cx="384120" cy="364680"/>
+          </a:xfrm>
+          <a:prstGeom prst="rect">
+            <a:avLst/>
+          </a:prstGeom>
+          <a:noFill/>
+          <a:ln w="0">
+            <a:noFill/>
+          </a:ln>
+        </p:spPr>
+        <p:txBody>
+          <a:bodyPr anchor="ctr">
+            <a:noAutofit/>
+          </a:bodyPr>
+          <a:lstStyle/>
+          <a:p>
+            <a:pPr algn="r">
+              <a:lnSpc>
+                <a:spcPct val="100000"/>
+              </a:lnSpc>
+              <a:buNone/>
+            </a:pPr>
+            <a:fld id="{8BD7C522-1E12-40C3-B25E-5F0462E20B22}" type="slidenum">
+              <a:rPr lang="en-US" sz="1200" b="0" strike="noStrike" spc="-1">
+                <a:solidFill>
+                  <a:srgbClr val="8B8B8B"/>
+                </a:solidFill>
+                <a:latin typeface="Century Gothic"/>
+              </a:rPr>
+              <a:t>7</a:t>
+            </a:fld>
+            <a:endParaRPr lang="en-GB" sz="1200" b="0" strike="noStrike" spc="-1" dirty="0">
+              <a:latin typeface="Times New Roman"/>
+            </a:endParaRPr>
+          </a:p>
+        </p:txBody>
+      </p:sp>
+      <p:sp>
+        <p:nvSpPr>
+          <p:cNvPr id="7" name="PlaceHolder 2">
+            <a:extLst>
+              <a:ext uri="{FF2B5EF4-FFF2-40B4-BE49-F238E27FC236}">
+                <a16:creationId xmlns:a16="http://schemas.microsoft.com/office/drawing/2014/main" id="{66DE14D4-64D4-6D1F-DD92-BC16D674C58B}"/>
+              </a:ext>
+            </a:extLst>
+          </p:cNvPr>
+          <p:cNvSpPr txBox="1">
+            <a:spLocks/>
+          </p:cNvSpPr>
+          <p:nvPr/>
+        </p:nvSpPr>
+        <p:spPr>
+          <a:xfrm>
+            <a:off x="380880" y="1371598"/>
+            <a:ext cx="8109070" cy="4559301"/>
+          </a:xfrm>
+          <a:prstGeom prst="rect">
+            <a:avLst/>
+          </a:prstGeom>
+          <a:noFill/>
+          <a:ln w="0">
+            <a:noFill/>
+          </a:ln>
+        </p:spPr>
+        <p:txBody>
+          <a:bodyPr numCol="1" spcCol="0" anchor="t">
+            <a:noAutofit/>
+          </a:bodyPr>
+          <a:lstStyle>
+            <a:lvl1pPr marL="228600" indent="-228600" algn="l" defTabSz="914400" rtl="0" eaLnBrk="1" latinLnBrk="0" hangingPunct="1">
+              <a:lnSpc>
+                <a:spcPct val="90000"/>
+              </a:lnSpc>
+              <a:spcBef>
+                <a:spcPts val="1000"/>
+              </a:spcBef>
+              <a:buFont typeface="Arial" panose="020B0604020202020204" pitchFamily="34" charset="0"/>
+              <a:buChar char="•"/>
+              <a:defRPr sz="2800" kern="1200">
+                <a:solidFill>
+                  <a:schemeClr val="tx1"/>
+                </a:solidFill>
+                <a:latin typeface="+mn-lt"/>
+                <a:ea typeface="+mn-ea"/>
+                <a:cs typeface="+mn-cs"/>
+              </a:defRPr>
+            </a:lvl1pPr>
+            <a:lvl2pPr marL="685800" indent="-228600" algn="l" defTabSz="914400" rtl="0" eaLnBrk="1" latinLnBrk="0" hangingPunct="1">
+              <a:lnSpc>
+                <a:spcPct val="90000"/>
+              </a:lnSpc>
+              <a:spcBef>
+                <a:spcPts val="500"/>
+              </a:spcBef>
+              <a:buFont typeface="Arial" panose="020B0604020202020204" pitchFamily="34" charset="0"/>
+              <a:buChar char="•"/>
+              <a:defRPr sz="2400" kern="1200">
+                <a:solidFill>
+                  <a:schemeClr val="tx1"/>
+                </a:solidFill>
+                <a:latin typeface="+mn-lt"/>
+                <a:ea typeface="+mn-ea"/>
+                <a:cs typeface="+mn-cs"/>
+              </a:defRPr>
+            </a:lvl2pPr>
+            <a:lvl3pPr marL="1143000" indent="-228600" algn="l" defTabSz="914400" rtl="0" eaLnBrk="1" latinLnBrk="0" hangingPunct="1">
+              <a:lnSpc>
+                <a:spcPct val="90000"/>
+              </a:lnSpc>
+              <a:spcBef>
+                <a:spcPts val="500"/>
+              </a:spcBef>
+              <a:buFont typeface="Arial" panose="020B0604020202020204" pitchFamily="34" charset="0"/>
+              <a:buChar char="•"/>
+              <a:defRPr sz="2000" kern="1200">
+                <a:solidFill>
+                  <a:schemeClr val="tx1"/>
+                </a:solidFill>
+                <a:latin typeface="+mn-lt"/>
+                <a:ea typeface="+mn-ea"/>
+                <a:cs typeface="+mn-cs"/>
+              </a:defRPr>
+            </a:lvl3pPr>
+            <a:lvl4pPr marL="1600200" indent="-228600" algn="l" defTabSz="914400" rtl="0" eaLnBrk="1" latinLnBrk="0" hangingPunct="1">
+              <a:lnSpc>
+                <a:spcPct val="90000"/>
+              </a:lnSpc>
+              <a:spcBef>
+                <a:spcPts val="500"/>
+              </a:spcBef>
+              <a:buFont typeface="Arial" panose="020B0604020202020204" pitchFamily="34" charset="0"/>
+              <a:buChar char="•"/>
+              <a:defRPr sz="1800" kern="1200">
+                <a:solidFill>
+                  <a:schemeClr val="tx1"/>
+                </a:solidFill>
+                <a:latin typeface="+mn-lt"/>
+                <a:ea typeface="+mn-ea"/>
+                <a:cs typeface="+mn-cs"/>
+              </a:defRPr>
+            </a:lvl4pPr>
+            <a:lvl5pPr marL="2057400" indent="-228600" algn="l" defTabSz="914400" rtl="0" eaLnBrk="1" latinLnBrk="0" hangingPunct="1">
+              <a:lnSpc>
+                <a:spcPct val="90000"/>
+              </a:lnSpc>
+              <a:spcBef>
+                <a:spcPts val="500"/>
+              </a:spcBef>
+              <a:buFont typeface="Arial" panose="020B0604020202020204" pitchFamily="34" charset="0"/>
+              <a:buChar char="•"/>
+              <a:defRPr sz="1800" kern="1200">
+                <a:solidFill>
+                  <a:schemeClr val="tx1"/>
+                </a:solidFill>
+                <a:latin typeface="+mn-lt"/>
+                <a:ea typeface="+mn-ea"/>
+                <a:cs typeface="+mn-cs"/>
+              </a:defRPr>
+            </a:lvl5pPr>
+            <a:lvl6pPr marL="2514600" indent="-228600" algn="l" defTabSz="914400" rtl="0" eaLnBrk="1" latinLnBrk="0" hangingPunct="1">
+              <a:lnSpc>
+                <a:spcPct val="90000"/>
+              </a:lnSpc>
+              <a:spcBef>
+                <a:spcPts val="500"/>
+              </a:spcBef>
+              <a:buFont typeface="Arial" panose="020B0604020202020204" pitchFamily="34" charset="0"/>
+              <a:buChar char="•"/>
+              <a:defRPr sz="1800" kern="1200">
+                <a:solidFill>
+                  <a:schemeClr val="tx1"/>
+                </a:solidFill>
+                <a:latin typeface="+mn-lt"/>
+                <a:ea typeface="+mn-ea"/>
+                <a:cs typeface="+mn-cs"/>
+              </a:defRPr>
+            </a:lvl6pPr>
+            <a:lvl7pPr marL="2971800" indent="-228600" algn="l" defTabSz="914400" rtl="0" eaLnBrk="1" latinLnBrk="0" hangingPunct="1">
+              <a:lnSpc>
+                <a:spcPct val="90000"/>
+              </a:lnSpc>
+              <a:spcBef>
+                <a:spcPts val="500"/>
+              </a:spcBef>
+              <a:buFont typeface="Arial" panose="020B0604020202020204" pitchFamily="34" charset="0"/>
+              <a:buChar char="•"/>
+              <a:defRPr sz="1800" kern="1200">
+                <a:solidFill>
+                  <a:schemeClr val="tx1"/>
+                </a:solidFill>
+                <a:latin typeface="+mn-lt"/>
+                <a:ea typeface="+mn-ea"/>
+                <a:cs typeface="+mn-cs"/>
+              </a:defRPr>
+            </a:lvl7pPr>
+            <a:lvl8pPr marL="3429000" indent="-228600" algn="l" defTabSz="914400" rtl="0" eaLnBrk="1" latinLnBrk="0" hangingPunct="1">
+              <a:lnSpc>
+                <a:spcPct val="90000"/>
+              </a:lnSpc>
+              <a:spcBef>
+                <a:spcPts val="500"/>
+              </a:spcBef>
+              <a:buFont typeface="Arial" panose="020B0604020202020204" pitchFamily="34" charset="0"/>
+              <a:buChar char="•"/>
+              <a:defRPr sz="1800" kern="1200">
+                <a:solidFill>
+                  <a:schemeClr val="tx1"/>
+                </a:solidFill>
+                <a:latin typeface="+mn-lt"/>
+                <a:ea typeface="+mn-ea"/>
+                <a:cs typeface="+mn-cs"/>
+              </a:defRPr>
+            </a:lvl8pPr>
+            <a:lvl9pPr marL="3886200" indent="-228600" algn="l" defTabSz="914400" rtl="0" eaLnBrk="1" latinLnBrk="0" hangingPunct="1">
+              <a:lnSpc>
+                <a:spcPct val="90000"/>
+              </a:lnSpc>
+              <a:spcBef>
+                <a:spcPts val="500"/>
+              </a:spcBef>
+              <a:buFont typeface="Arial" panose="020B0604020202020204" pitchFamily="34" charset="0"/>
+              <a:buChar char="•"/>
+              <a:defRPr sz="1800" kern="1200">
+                <a:solidFill>
+                  <a:schemeClr val="tx1"/>
+                </a:solidFill>
+                <a:latin typeface="+mn-lt"/>
+                <a:ea typeface="+mn-ea"/>
+                <a:cs typeface="+mn-cs"/>
+              </a:defRPr>
+            </a:lvl9pPr>
+          </a:lstStyle>
+          <a:p>
+            <a:pPr>
+              <a:lnSpc>
+                <a:spcPct val="100000"/>
+              </a:lnSpc>
+              <a:spcBef>
+                <a:spcPts val="400"/>
+              </a:spcBef>
+              <a:buClr>
+                <a:srgbClr val="0064C8"/>
+              </a:buClr>
+              <a:buFont typeface="Wingdings" panose="05000000000000000000" pitchFamily="2" charset="2"/>
+              <a:buChar char="§"/>
+            </a:pPr>
+            <a:r>
+              <a:rPr lang="en-US" sz="2000" spc="-1" dirty="0">
+                <a:solidFill>
+                  <a:srgbClr val="000000"/>
+                </a:solidFill>
+                <a:latin typeface="Century Gothic"/>
+              </a:rPr>
+              <a:t>Add and properly implement missing XAI methods (</a:t>
+            </a:r>
+            <a:r>
+              <a:rPr lang="en-US" sz="2000" spc="-1" dirty="0" err="1">
+                <a:solidFill>
+                  <a:srgbClr val="000000"/>
+                </a:solidFill>
+                <a:latin typeface="Century Gothic"/>
+              </a:rPr>
+              <a:t>MolCE</a:t>
+            </a:r>
+            <a:r>
+              <a:rPr lang="en-US" sz="2000" spc="-1" dirty="0">
+                <a:solidFill>
+                  <a:srgbClr val="000000"/>
+                </a:solidFill>
+                <a:latin typeface="Century Gothic"/>
+              </a:rPr>
+              <a:t>, </a:t>
+            </a:r>
+            <a:r>
+              <a:rPr lang="en-US" sz="2000" spc="-1" dirty="0" err="1">
+                <a:solidFill>
+                  <a:srgbClr val="000000"/>
+                </a:solidFill>
+                <a:latin typeface="Century Gothic"/>
+              </a:rPr>
+              <a:t>EdgeSHaper</a:t>
+            </a:r>
+            <a:r>
+              <a:rPr lang="en-US" sz="2000" spc="-1" dirty="0">
+                <a:solidFill>
+                  <a:srgbClr val="000000"/>
+                </a:solidFill>
+                <a:latin typeface="Century Gothic"/>
+              </a:rPr>
+              <a:t>, Counterfactuals)</a:t>
+            </a:r>
+          </a:p>
+          <a:p>
+            <a:pPr>
+              <a:lnSpc>
+                <a:spcPct val="100000"/>
+              </a:lnSpc>
+              <a:spcBef>
+                <a:spcPts val="400"/>
+              </a:spcBef>
+              <a:buClr>
+                <a:srgbClr val="0064C8"/>
+              </a:buClr>
+              <a:buFont typeface="Wingdings" panose="05000000000000000000" pitchFamily="2" charset="2"/>
+              <a:buChar char="§"/>
+            </a:pPr>
+            <a:endParaRPr lang="en-US" sz="2000" spc="-1" dirty="0">
+              <a:solidFill>
+                <a:srgbClr val="000000"/>
+              </a:solidFill>
+              <a:latin typeface="Century Gothic"/>
+            </a:endParaRPr>
+          </a:p>
+          <a:p>
+            <a:pPr>
+              <a:lnSpc>
+                <a:spcPct val="100000"/>
+              </a:lnSpc>
+              <a:spcBef>
+                <a:spcPts val="400"/>
+              </a:spcBef>
+              <a:buClr>
+                <a:srgbClr val="0064C8"/>
+              </a:buClr>
+              <a:buFont typeface="Wingdings" panose="05000000000000000000" pitchFamily="2" charset="2"/>
+              <a:buChar char="§"/>
+            </a:pPr>
+            <a:r>
+              <a:rPr lang="en-US" sz="2000" spc="-1" dirty="0">
+                <a:solidFill>
+                  <a:srgbClr val="000000"/>
+                </a:solidFill>
+                <a:latin typeface="Century Gothic"/>
+              </a:rPr>
+              <a:t>Integrate with cluster for faster inference and explore larger LLM’s</a:t>
+            </a:r>
+          </a:p>
+          <a:p>
+            <a:pPr marL="0" indent="0">
+              <a:lnSpc>
+                <a:spcPct val="100000"/>
+              </a:lnSpc>
+              <a:spcBef>
+                <a:spcPts val="400"/>
+              </a:spcBef>
+              <a:buClr>
+                <a:srgbClr val="0064C8"/>
+              </a:buClr>
+              <a:buNone/>
+            </a:pPr>
+            <a:endParaRPr lang="en-US" sz="2000" spc="-1" dirty="0">
+              <a:solidFill>
+                <a:srgbClr val="000000"/>
+              </a:solidFill>
+              <a:latin typeface="Century Gothic"/>
+            </a:endParaRPr>
+          </a:p>
+          <a:p>
+            <a:pPr>
+              <a:lnSpc>
+                <a:spcPct val="100000"/>
+              </a:lnSpc>
+              <a:spcBef>
+                <a:spcPts val="400"/>
+              </a:spcBef>
+              <a:buClr>
+                <a:srgbClr val="0064C8"/>
+              </a:buClr>
+              <a:buFont typeface="Wingdings" panose="05000000000000000000" pitchFamily="2" charset="2"/>
+              <a:buChar char="§"/>
+            </a:pPr>
+            <a:r>
+              <a:rPr lang="en-US" sz="2000" spc="-1" dirty="0">
+                <a:solidFill>
+                  <a:srgbClr val="000000"/>
+                </a:solidFill>
+                <a:latin typeface="Century Gothic"/>
+              </a:rPr>
+              <a:t>Clean up the repository and make it available</a:t>
+            </a:r>
+          </a:p>
+          <a:p>
+            <a:pPr>
+              <a:lnSpc>
+                <a:spcPct val="100000"/>
+              </a:lnSpc>
+              <a:spcBef>
+                <a:spcPts val="400"/>
+              </a:spcBef>
+              <a:buClr>
+                <a:srgbClr val="0064C8"/>
+              </a:buClr>
+              <a:buFont typeface="Wingdings" panose="05000000000000000000" pitchFamily="2" charset="2"/>
+              <a:buChar char="§"/>
+            </a:pPr>
+            <a:endParaRPr lang="en-US" sz="2000" spc="-1" dirty="0">
+              <a:solidFill>
+                <a:srgbClr val="000000"/>
+              </a:solidFill>
+              <a:latin typeface="Century Gothic"/>
+            </a:endParaRPr>
+          </a:p>
+          <a:p>
+            <a:pPr>
+              <a:lnSpc>
+                <a:spcPct val="100000"/>
+              </a:lnSpc>
+              <a:spcBef>
+                <a:spcPts val="400"/>
+              </a:spcBef>
+              <a:buClr>
+                <a:srgbClr val="0064C8"/>
+              </a:buClr>
+              <a:buFont typeface="Wingdings" panose="05000000000000000000" pitchFamily="2" charset="2"/>
+              <a:buChar char="§"/>
+            </a:pPr>
+            <a:r>
+              <a:rPr lang="en-US" sz="2000" spc="-1" dirty="0">
+                <a:solidFill>
+                  <a:srgbClr val="000000"/>
+                </a:solidFill>
+                <a:latin typeface="Century Gothic"/>
+              </a:rPr>
+              <a:t>Make a guide for lab members for the implementation of AI agents</a:t>
+            </a:r>
+          </a:p>
+          <a:p>
+            <a:pPr>
+              <a:lnSpc>
+                <a:spcPct val="100000"/>
+              </a:lnSpc>
+              <a:spcBef>
+                <a:spcPts val="400"/>
+              </a:spcBef>
+              <a:buClr>
+                <a:srgbClr val="0064C8"/>
+              </a:buClr>
+              <a:buFont typeface="Wingdings" panose="05000000000000000000" pitchFamily="2" charset="2"/>
+              <a:buChar char="§"/>
+            </a:pPr>
+            <a:endParaRPr lang="en-US" sz="2000" spc="-1" dirty="0">
+              <a:solidFill>
+                <a:srgbClr val="000000"/>
+              </a:solidFill>
+              <a:latin typeface="Century Gothic"/>
+            </a:endParaRPr>
+          </a:p>
+          <a:p>
+            <a:pPr>
+              <a:lnSpc>
+                <a:spcPct val="100000"/>
+              </a:lnSpc>
+              <a:spcBef>
+                <a:spcPts val="400"/>
+              </a:spcBef>
+              <a:buClr>
+                <a:srgbClr val="0064C8"/>
+              </a:buClr>
+              <a:buFont typeface="Wingdings" panose="05000000000000000000" pitchFamily="2" charset="2"/>
+              <a:buChar char="§"/>
+            </a:pPr>
+            <a:endParaRPr lang="en-US" sz="1800" spc="-1" dirty="0">
+              <a:solidFill>
+                <a:srgbClr val="000000"/>
+              </a:solidFill>
+              <a:latin typeface="Century Gothic"/>
+            </a:endParaRPr>
+          </a:p>
+          <a:p>
+            <a:pPr marL="343080" indent="-343080">
+              <a:lnSpc>
+                <a:spcPct val="100000"/>
+              </a:lnSpc>
+              <a:spcBef>
+                <a:spcPts val="400"/>
+              </a:spcBef>
+              <a:spcAft>
+                <a:spcPts val="601"/>
+              </a:spcAft>
+              <a:buClr>
+                <a:srgbClr val="0064C8"/>
+              </a:buClr>
+              <a:buFont typeface="Wingdings 2" charset="2"/>
+              <a:buChar char=""/>
+            </a:pPr>
+            <a:endParaRPr lang="en-US" sz="2000" b="1" spc="-1" dirty="0">
+              <a:solidFill>
+                <a:srgbClr val="000000"/>
+              </a:solidFill>
+              <a:latin typeface="Century Gothic"/>
+            </a:endParaRPr>
+          </a:p>
+        </p:txBody>
+      </p:sp>
+    </p:spTree>
+    <p:extLst>
+      <p:ext uri="{BB962C8B-B14F-4D97-AF65-F5344CB8AC3E}">
+        <p14:creationId xmlns:p14="http://schemas.microsoft.com/office/powerpoint/2010/main" val="3727029337"/>
+      </p:ext>
+    </p:extLst>
+  </p:cSld>
+  <p:clrMapOvr>
+    <a:masterClrMapping/>
+  </p:clrMapOvr>
+  <mc:AlternateContent xmlns:mc="http://schemas.openxmlformats.org/markup-compatibility/2006">
+    <mc:Choice xmlns:p14="http://schemas.microsoft.com/office/powerpoint/2010/main" Requires="p14">
+      <p:transition spd="med" p14:dur="700">
+        <p:fade/>
+      </p:transition>
+    </mc:Choice>
+    <mc:Fallback>
+      <p:transition spd="med">
+        <p:fade/>
+      </p:transition>
+    </mc:Fallback>
+  </mc:AlternateContent>
+</p:sld>
+</file>
+
+<file path=ppt/slides/slide8.xml><?xml version="1.0" encoding="utf-8"?>
+<p:sld xmlns:a="http://schemas.openxmlformats.org/drawingml/2006/main" xmlns:r="http://schemas.openxmlformats.org/officeDocument/2006/relationships" xmlns:p="http://schemas.openxmlformats.org/presentationml/2006/main">
+  <p:cSld>
+    <p:spTree>
+      <p:nvGrpSpPr>
+        <p:cNvPr id="1" name="">
+          <a:extLst>
+            <a:ext uri="{FF2B5EF4-FFF2-40B4-BE49-F238E27FC236}">
+              <a16:creationId xmlns:a16="http://schemas.microsoft.com/office/drawing/2014/main" id="{A6515F23-0912-A838-23CE-B8F00573A2DA}"/>
+            </a:ext>
+          </a:extLst>
+        </p:cNvPr>
+        <p:cNvGrpSpPr/>
+        <p:nvPr/>
+      </p:nvGrpSpPr>
+      <p:grpSpPr>
+        <a:xfrm>
+          <a:off x="0" y="0"/>
+          <a:ext cx="0" cy="0"/>
+          <a:chOff x="0" y="0"/>
+          <a:chExt cx="0" cy="0"/>
+        </a:xfrm>
+      </p:grpSpPr>
+      <p:sp>
+        <p:nvSpPr>
+          <p:cNvPr id="163" name="PlaceHolder 1">
+            <a:extLst>
+              <a:ext uri="{FF2B5EF4-FFF2-40B4-BE49-F238E27FC236}">
+                <a16:creationId xmlns:a16="http://schemas.microsoft.com/office/drawing/2014/main" id="{57944F4B-F502-E7CC-8790-8737702BC6AC}"/>
+              </a:ext>
+            </a:extLst>
+          </p:cNvPr>
+          <p:cNvSpPr>
+            <a:spLocks noGrp="1"/>
+          </p:cNvSpPr>
+          <p:nvPr>
+            <p:ph type="title"/>
+          </p:nvPr>
+        </p:nvSpPr>
+        <p:spPr>
+          <a:xfrm>
+            <a:off x="380880" y="228600"/>
+            <a:ext cx="8380080" cy="837720"/>
+          </a:xfrm>
+          <a:prstGeom prst="rect">
+            <a:avLst/>
+          </a:prstGeom>
+          <a:noFill/>
+          <a:ln w="0">
+            <a:noFill/>
+          </a:ln>
+        </p:spPr>
+        <p:txBody>
+          <a:bodyPr numCol="1" spcCol="0" anchor="ctr">
+            <a:noAutofit/>
+          </a:bodyPr>
+          <a:lstStyle/>
+          <a:p>
+            <a:pPr>
+              <a:lnSpc>
+                <a:spcPct val="100000"/>
+              </a:lnSpc>
+              <a:buNone/>
+            </a:pPr>
+            <a:r>
+              <a:rPr lang="en-US" sz="3200" b="0" strike="noStrike" spc="-1" dirty="0">
+                <a:solidFill>
+                  <a:srgbClr val="0064C8"/>
+                </a:solidFill>
+                <a:latin typeface="Century Gothic"/>
+              </a:rPr>
+              <a:t>Framing</a:t>
+            </a:r>
+            <a:endParaRPr lang="en-US" sz="3200" b="0" strike="noStrike" spc="-1" dirty="0">
+              <a:solidFill>
+                <a:srgbClr val="000000"/>
+              </a:solidFill>
+              <a:latin typeface="Century Gothic"/>
+            </a:endParaRPr>
+          </a:p>
+        </p:txBody>
+      </p:sp>
+      <p:sp>
+        <p:nvSpPr>
+          <p:cNvPr id="165" name="PlaceHolder 3">
+            <a:extLst>
+              <a:ext uri="{FF2B5EF4-FFF2-40B4-BE49-F238E27FC236}">
+                <a16:creationId xmlns:a16="http://schemas.microsoft.com/office/drawing/2014/main" id="{2EFBEA53-7B78-D9A1-93EF-9608A3193D27}"/>
+              </a:ext>
+            </a:extLst>
+          </p:cNvPr>
+          <p:cNvSpPr>
+            <a:spLocks noGrp="1"/>
+          </p:cNvSpPr>
+          <p:nvPr>
+            <p:ph type="sldNum"/>
+          </p:nvPr>
+        </p:nvSpPr>
+        <p:spPr>
+          <a:xfrm>
+            <a:off x="8376840" y="5692680"/>
+            <a:ext cx="384120" cy="364680"/>
+          </a:xfrm>
+          <a:prstGeom prst="rect">
+            <a:avLst/>
+          </a:prstGeom>
+          <a:noFill/>
+          <a:ln w="0">
+            <a:noFill/>
+          </a:ln>
+        </p:spPr>
+        <p:txBody>
+          <a:bodyPr anchor="ctr">
+            <a:noAutofit/>
+          </a:bodyPr>
+          <a:lstStyle/>
+          <a:p>
+            <a:pPr algn="r">
+              <a:lnSpc>
+                <a:spcPct val="100000"/>
+              </a:lnSpc>
+              <a:buNone/>
+            </a:pPr>
+            <a:fld id="{8BD7C522-1E12-40C3-B25E-5F0462E20B22}" type="slidenum">
+              <a:rPr lang="en-US" sz="1200" b="0" strike="noStrike" spc="-1">
+                <a:solidFill>
+                  <a:srgbClr val="8B8B8B"/>
+                </a:solidFill>
+                <a:latin typeface="Century Gothic"/>
+              </a:rPr>
+              <a:t>8</a:t>
+            </a:fld>
+            <a:endParaRPr lang="en-GB" sz="1200" b="0" strike="noStrike" spc="-1" dirty="0">
+              <a:latin typeface="Times New Roman"/>
+            </a:endParaRPr>
+          </a:p>
+        </p:txBody>
+      </p:sp>
+      <p:sp>
+        <p:nvSpPr>
+          <p:cNvPr id="7" name="PlaceHolder 2">
+            <a:extLst>
+              <a:ext uri="{FF2B5EF4-FFF2-40B4-BE49-F238E27FC236}">
+                <a16:creationId xmlns:a16="http://schemas.microsoft.com/office/drawing/2014/main" id="{66DE14D4-64D4-6D1F-DD92-BC16D674C58B}"/>
+              </a:ext>
+            </a:extLst>
+          </p:cNvPr>
+          <p:cNvSpPr txBox="1">
+            <a:spLocks/>
+          </p:cNvSpPr>
+          <p:nvPr/>
+        </p:nvSpPr>
+        <p:spPr>
+          <a:xfrm>
+            <a:off x="380880" y="1371598"/>
+            <a:ext cx="8109070" cy="4559301"/>
+          </a:xfrm>
+          <a:prstGeom prst="rect">
+            <a:avLst/>
+          </a:prstGeom>
+          <a:noFill/>
+          <a:ln w="0">
+            <a:noFill/>
+          </a:ln>
+        </p:spPr>
+        <p:txBody>
+          <a:bodyPr numCol="1" spcCol="0" anchor="t">
+            <a:noAutofit/>
+          </a:bodyPr>
+          <a:lstStyle>
+            <a:lvl1pPr marL="228600" indent="-228600" algn="l" defTabSz="914400" rtl="0" eaLnBrk="1" latinLnBrk="0" hangingPunct="1">
+              <a:lnSpc>
+                <a:spcPct val="90000"/>
+              </a:lnSpc>
+              <a:spcBef>
+                <a:spcPts val="1000"/>
+              </a:spcBef>
+              <a:buFont typeface="Arial" panose="020B0604020202020204" pitchFamily="34" charset="0"/>
+              <a:buChar char="•"/>
+              <a:defRPr sz="2800" kern="1200">
+                <a:solidFill>
+                  <a:schemeClr val="tx1"/>
+                </a:solidFill>
+                <a:latin typeface="+mn-lt"/>
+                <a:ea typeface="+mn-ea"/>
+                <a:cs typeface="+mn-cs"/>
+              </a:defRPr>
+            </a:lvl1pPr>
+            <a:lvl2pPr marL="685800" indent="-228600" algn="l" defTabSz="914400" rtl="0" eaLnBrk="1" latinLnBrk="0" hangingPunct="1">
+              <a:lnSpc>
+                <a:spcPct val="90000"/>
+              </a:lnSpc>
+              <a:spcBef>
+                <a:spcPts val="500"/>
+              </a:spcBef>
+              <a:buFont typeface="Arial" panose="020B0604020202020204" pitchFamily="34" charset="0"/>
+              <a:buChar char="•"/>
+              <a:defRPr sz="2400" kern="1200">
+                <a:solidFill>
+                  <a:schemeClr val="tx1"/>
+                </a:solidFill>
+                <a:latin typeface="+mn-lt"/>
+                <a:ea typeface="+mn-ea"/>
+                <a:cs typeface="+mn-cs"/>
+              </a:defRPr>
+            </a:lvl2pPr>
+            <a:lvl3pPr marL="1143000" indent="-228600" algn="l" defTabSz="914400" rtl="0" eaLnBrk="1" latinLnBrk="0" hangingPunct="1">
+              <a:lnSpc>
+                <a:spcPct val="90000"/>
+              </a:lnSpc>
+              <a:spcBef>
+                <a:spcPts val="500"/>
+              </a:spcBef>
+              <a:buFont typeface="Arial" panose="020B0604020202020204" pitchFamily="34" charset="0"/>
+              <a:buChar char="•"/>
+              <a:defRPr sz="2000" kern="1200">
+                <a:solidFill>
+                  <a:schemeClr val="tx1"/>
+                </a:solidFill>
+                <a:latin typeface="+mn-lt"/>
+                <a:ea typeface="+mn-ea"/>
+                <a:cs typeface="+mn-cs"/>
+              </a:defRPr>
+            </a:lvl3pPr>
+            <a:lvl4pPr marL="1600200" indent="-228600" algn="l" defTabSz="914400" rtl="0" eaLnBrk="1" latinLnBrk="0" hangingPunct="1">
+              <a:lnSpc>
+                <a:spcPct val="90000"/>
+              </a:lnSpc>
+              <a:spcBef>
+                <a:spcPts val="500"/>
+              </a:spcBef>
+              <a:buFont typeface="Arial" panose="020B0604020202020204" pitchFamily="34" charset="0"/>
+              <a:buChar char="•"/>
+              <a:defRPr sz="1800" kern="1200">
+                <a:solidFill>
+                  <a:schemeClr val="tx1"/>
+                </a:solidFill>
+                <a:latin typeface="+mn-lt"/>
+                <a:ea typeface="+mn-ea"/>
+                <a:cs typeface="+mn-cs"/>
+              </a:defRPr>
+            </a:lvl4pPr>
+            <a:lvl5pPr marL="2057400" indent="-228600" algn="l" defTabSz="914400" rtl="0" eaLnBrk="1" latinLnBrk="0" hangingPunct="1">
+              <a:lnSpc>
+                <a:spcPct val="90000"/>
+              </a:lnSpc>
+              <a:spcBef>
+                <a:spcPts val="500"/>
+              </a:spcBef>
+              <a:buFont typeface="Arial" panose="020B0604020202020204" pitchFamily="34" charset="0"/>
+              <a:buChar char="•"/>
+              <a:defRPr sz="1800" kern="1200">
+                <a:solidFill>
+                  <a:schemeClr val="tx1"/>
+                </a:solidFill>
+                <a:latin typeface="+mn-lt"/>
+                <a:ea typeface="+mn-ea"/>
+                <a:cs typeface="+mn-cs"/>
+              </a:defRPr>
+            </a:lvl5pPr>
+            <a:lvl6pPr marL="2514600" indent="-228600" algn="l" defTabSz="914400" rtl="0" eaLnBrk="1" latinLnBrk="0" hangingPunct="1">
+              <a:lnSpc>
+                <a:spcPct val="90000"/>
+              </a:lnSpc>
+              <a:spcBef>
+                <a:spcPts val="500"/>
+              </a:spcBef>
+              <a:buFont typeface="Arial" panose="020B0604020202020204" pitchFamily="34" charset="0"/>
+              <a:buChar char="•"/>
+              <a:defRPr sz="1800" kern="1200">
+                <a:solidFill>
+                  <a:schemeClr val="tx1"/>
+                </a:solidFill>
+                <a:latin typeface="+mn-lt"/>
+                <a:ea typeface="+mn-ea"/>
+                <a:cs typeface="+mn-cs"/>
+              </a:defRPr>
+            </a:lvl6pPr>
+            <a:lvl7pPr marL="2971800" indent="-228600" algn="l" defTabSz="914400" rtl="0" eaLnBrk="1" latinLnBrk="0" hangingPunct="1">
+              <a:lnSpc>
+                <a:spcPct val="90000"/>
+              </a:lnSpc>
+              <a:spcBef>
+                <a:spcPts val="500"/>
+              </a:spcBef>
+              <a:buFont typeface="Arial" panose="020B0604020202020204" pitchFamily="34" charset="0"/>
+              <a:buChar char="•"/>
+              <a:defRPr sz="1800" kern="1200">
+                <a:solidFill>
+                  <a:schemeClr val="tx1"/>
+                </a:solidFill>
+                <a:latin typeface="+mn-lt"/>
+                <a:ea typeface="+mn-ea"/>
+                <a:cs typeface="+mn-cs"/>
+              </a:defRPr>
+            </a:lvl7pPr>
+            <a:lvl8pPr marL="3429000" indent="-228600" algn="l" defTabSz="914400" rtl="0" eaLnBrk="1" latinLnBrk="0" hangingPunct="1">
+              <a:lnSpc>
+                <a:spcPct val="90000"/>
+              </a:lnSpc>
+              <a:spcBef>
+                <a:spcPts val="500"/>
+              </a:spcBef>
+              <a:buFont typeface="Arial" panose="020B0604020202020204" pitchFamily="34" charset="0"/>
+              <a:buChar char="•"/>
+              <a:defRPr sz="1800" kern="1200">
+                <a:solidFill>
+                  <a:schemeClr val="tx1"/>
+                </a:solidFill>
+                <a:latin typeface="+mn-lt"/>
+                <a:ea typeface="+mn-ea"/>
+                <a:cs typeface="+mn-cs"/>
+              </a:defRPr>
+            </a:lvl8pPr>
+            <a:lvl9pPr marL="3886200" indent="-228600" algn="l" defTabSz="914400" rtl="0" eaLnBrk="1" latinLnBrk="0" hangingPunct="1">
+              <a:lnSpc>
+                <a:spcPct val="90000"/>
+              </a:lnSpc>
+              <a:spcBef>
+                <a:spcPts val="500"/>
+              </a:spcBef>
+              <a:buFont typeface="Arial" panose="020B0604020202020204" pitchFamily="34" charset="0"/>
+              <a:buChar char="•"/>
+              <a:defRPr sz="1800" kern="1200">
+                <a:solidFill>
+                  <a:schemeClr val="tx1"/>
+                </a:solidFill>
+                <a:latin typeface="+mn-lt"/>
+                <a:ea typeface="+mn-ea"/>
+                <a:cs typeface="+mn-cs"/>
+              </a:defRPr>
+            </a:lvl9pPr>
+          </a:lstStyle>
+          <a:p>
+            <a:pPr>
+              <a:lnSpc>
+                <a:spcPct val="100000"/>
+              </a:lnSpc>
+              <a:spcBef>
+                <a:spcPts val="400"/>
+              </a:spcBef>
+              <a:buClr>
+                <a:srgbClr val="0064C8"/>
+              </a:buClr>
+              <a:buFont typeface="Wingdings" panose="05000000000000000000" pitchFamily="2" charset="2"/>
+              <a:buChar char="§"/>
+            </a:pPr>
+            <a:r>
+              <a:rPr lang="en-US" sz="2000" spc="-1" dirty="0">
+                <a:solidFill>
+                  <a:srgbClr val="000000"/>
+                </a:solidFill>
+                <a:latin typeface="Century Gothic"/>
+              </a:rPr>
+              <a:t>How to frame the project:</a:t>
+            </a:r>
+          </a:p>
+          <a:p>
+            <a:pPr lvl="1">
+              <a:lnSpc>
+                <a:spcPct val="100000"/>
+              </a:lnSpc>
+              <a:spcBef>
+                <a:spcPts val="400"/>
+              </a:spcBef>
+              <a:buClr>
+                <a:srgbClr val="0064C8"/>
+              </a:buClr>
+              <a:buFont typeface="Wingdings" panose="05000000000000000000" pitchFamily="2" charset="2"/>
+              <a:buChar char="§"/>
+            </a:pPr>
+            <a:r>
+              <a:rPr lang="en-US" sz="1600" spc="-1" dirty="0">
+                <a:solidFill>
+                  <a:srgbClr val="000000"/>
+                </a:solidFill>
+                <a:latin typeface="Century Gothic"/>
+              </a:rPr>
+              <a:t>A proof-of-concept study?</a:t>
+            </a:r>
+          </a:p>
+          <a:p>
+            <a:pPr lvl="1">
+              <a:lnSpc>
+                <a:spcPct val="100000"/>
+              </a:lnSpc>
+              <a:spcBef>
+                <a:spcPts val="400"/>
+              </a:spcBef>
+              <a:buClr>
+                <a:srgbClr val="0064C8"/>
+              </a:buClr>
+              <a:buFont typeface="Wingdings" panose="05000000000000000000" pitchFamily="2" charset="2"/>
+              <a:buChar char="§"/>
+            </a:pPr>
+            <a:r>
+              <a:rPr lang="en-US" sz="1600" spc="-1" dirty="0">
+                <a:solidFill>
+                  <a:srgbClr val="000000"/>
+                </a:solidFill>
+                <a:latin typeface="Century Gothic"/>
+              </a:rPr>
+              <a:t>A explainability platform for XAI applied to molecular design?</a:t>
+            </a:r>
+          </a:p>
+          <a:p>
+            <a:pPr lvl="1">
+              <a:lnSpc>
+                <a:spcPct val="100000"/>
+              </a:lnSpc>
+              <a:spcBef>
+                <a:spcPts val="400"/>
+              </a:spcBef>
+              <a:buClr>
+                <a:srgbClr val="0064C8"/>
+              </a:buClr>
+              <a:buFont typeface="Wingdings" panose="05000000000000000000" pitchFamily="2" charset="2"/>
+              <a:buChar char="§"/>
+            </a:pPr>
+            <a:r>
+              <a:rPr lang="en-US" sz="1600" spc="-1" dirty="0">
+                <a:solidFill>
+                  <a:srgbClr val="000000"/>
+                </a:solidFill>
+                <a:latin typeface="Century Gothic"/>
+              </a:rPr>
+              <a:t> A explainability platform for XAI specific to molecular selectivity?</a:t>
+            </a:r>
+          </a:p>
+          <a:p>
+            <a:pPr lvl="1">
+              <a:lnSpc>
+                <a:spcPct val="100000"/>
+              </a:lnSpc>
+              <a:spcBef>
+                <a:spcPts val="400"/>
+              </a:spcBef>
+              <a:buClr>
+                <a:srgbClr val="0064C8"/>
+              </a:buClr>
+              <a:buFont typeface="Wingdings" panose="05000000000000000000" pitchFamily="2" charset="2"/>
+              <a:buChar char="§"/>
+            </a:pPr>
+            <a:endParaRPr lang="en-US" sz="1600" spc="-1" dirty="0">
+              <a:solidFill>
+                <a:srgbClr val="000000"/>
+              </a:solidFill>
+              <a:latin typeface="Century Gothic"/>
+            </a:endParaRPr>
+          </a:p>
+          <a:p>
+            <a:pPr>
+              <a:lnSpc>
+                <a:spcPct val="100000"/>
+              </a:lnSpc>
+              <a:spcBef>
+                <a:spcPts val="400"/>
+              </a:spcBef>
+              <a:buClr>
+                <a:srgbClr val="0064C8"/>
+              </a:buClr>
+              <a:buFont typeface="Wingdings" panose="05000000000000000000" pitchFamily="2" charset="2"/>
+              <a:buChar char="§"/>
+            </a:pPr>
+            <a:endParaRPr lang="en-US" sz="2000" spc="-1" dirty="0">
+              <a:solidFill>
+                <a:srgbClr val="000000"/>
+              </a:solidFill>
+              <a:latin typeface="Century Gothic"/>
+            </a:endParaRPr>
+          </a:p>
+          <a:p>
+            <a:pPr>
+              <a:lnSpc>
+                <a:spcPct val="100000"/>
+              </a:lnSpc>
+              <a:spcBef>
+                <a:spcPts val="400"/>
+              </a:spcBef>
+              <a:buClr>
+                <a:srgbClr val="0064C8"/>
+              </a:buClr>
+              <a:buFont typeface="Wingdings" panose="05000000000000000000" pitchFamily="2" charset="2"/>
+              <a:buChar char="§"/>
+            </a:pPr>
+            <a:endParaRPr lang="en-US" sz="1800" spc="-1" dirty="0">
+              <a:solidFill>
+                <a:srgbClr val="000000"/>
+              </a:solidFill>
+              <a:latin typeface="Century Gothic"/>
+            </a:endParaRPr>
+          </a:p>
+          <a:p>
+            <a:pPr marL="343080" indent="-343080">
+              <a:lnSpc>
+                <a:spcPct val="100000"/>
+              </a:lnSpc>
+              <a:spcBef>
+                <a:spcPts val="400"/>
+              </a:spcBef>
+              <a:spcAft>
+                <a:spcPts val="601"/>
+              </a:spcAft>
+              <a:buClr>
+                <a:srgbClr val="0064C8"/>
+              </a:buClr>
+              <a:buFont typeface="Wingdings 2" charset="2"/>
+              <a:buChar char=""/>
+            </a:pPr>
+            <a:endParaRPr lang="en-US" sz="2000" b="1" spc="-1" dirty="0">
+              <a:solidFill>
+                <a:srgbClr val="000000"/>
+              </a:solidFill>
+              <a:latin typeface="Century Gothic"/>
+            </a:endParaRPr>
+          </a:p>
+        </p:txBody>
+      </p:sp>
+    </p:spTree>
+    <p:extLst>
+      <p:ext uri="{BB962C8B-B14F-4D97-AF65-F5344CB8AC3E}">
+        <p14:creationId xmlns:p14="http://schemas.microsoft.com/office/powerpoint/2010/main" val="1594879052"/>
+      </p:ext>
+    </p:extLst>
+  </p:cSld>
+  <p:clrMapOvr>
+    <a:masterClrMapping/>
+  </p:clrMapOvr>
+  <mc:AlternateContent xmlns:mc="http://schemas.openxmlformats.org/markup-compatibility/2006">
+    <mc:Choice xmlns:p14="http://schemas.microsoft.com/office/powerpoint/2010/main" Requires="p14">
+      <p:transition spd="med" p14:dur="700">
+        <p:fade/>
+      </p:transition>
+    </mc:Choice>
+    <mc:Fallback>
       <p:transition spd="med">
         <p:fade/>
       </p:transition>

--- a/slides/AI_Agent_Explainability.pptx
+++ b/slides/AI_Agent_Explainability.pptx
@@ -10022,7 +10022,7 @@
         <p:fade/>
       </p:transition>
     </mc:Choice>
-    <mc:Fallback xmlns="" xmlns:p15="http://schemas.microsoft.com/office/powerpoint/2012/main">
+    <mc:Fallback xmlns:p15="http://schemas.microsoft.com/office/powerpoint/2012/main" xmlns="">
       <p:transition spd="med">
         <p:fade/>
       </p:transition>
@@ -10451,7 +10451,7 @@
         <p:fade/>
       </p:transition>
     </mc:Choice>
-    <mc:Fallback xmlns="" xmlns:p15="http://schemas.microsoft.com/office/powerpoint/2012/main">
+    <mc:Fallback xmlns:p15="http://schemas.microsoft.com/office/powerpoint/2012/main" xmlns="">
       <p:transition spd="med">
         <p:fade/>
       </p:transition>
@@ -11044,7 +11044,7 @@
                 </a:solidFill>
                 <a:latin typeface="Century Gothic"/>
               </a:rPr>
-              <a:t>EdgeShaper</a:t>
+              <a:t>EdgeSHAPer</a:t>
             </a:r>
             <a:endParaRPr lang="en-US" sz="1600" spc="-1" dirty="0">
               <a:solidFill>
@@ -11212,7 +11212,7 @@
         <p:fade/>
       </p:transition>
     </mc:Choice>
-    <mc:Fallback xmlns="" xmlns:p15="http://schemas.microsoft.com/office/powerpoint/2012/main">
+    <mc:Fallback xmlns:p15="http://schemas.microsoft.com/office/powerpoint/2012/main" xmlns="">
       <p:transition spd="med">
         <p:fade/>
       </p:transition>
@@ -11791,7 +11791,7 @@
         <p:fade/>
       </p:transition>
     </mc:Choice>
-    <mc:Fallback xmlns="" xmlns:p15="http://schemas.microsoft.com/office/powerpoint/2012/main">
+    <mc:Fallback xmlns:p15="http://schemas.microsoft.com/office/powerpoint/2012/main" xmlns="">
       <p:transition spd="med">
         <p:fade/>
       </p:transition>
@@ -12406,7 +12406,7 @@
         <p:fade/>
       </p:transition>
     </mc:Choice>
-    <mc:Fallback xmlns="" xmlns:p15="http://schemas.microsoft.com/office/powerpoint/2012/main">
+    <mc:Fallback xmlns:p15="http://schemas.microsoft.com/office/powerpoint/2012/main" xmlns="">
       <p:transition spd="med">
         <p:fade/>
       </p:transition>
@@ -13059,13 +13059,13 @@
   <p:clrMapOvr>
     <a:masterClrMapping/>
   </p:clrMapOvr>
-  <mc:AlternateContent xmlns:mc="http://schemas.openxmlformats.org/markup-compatibility/2006">
-    <mc:Choice xmlns:p14="http://schemas.microsoft.com/office/powerpoint/2010/main" Requires="p14">
+  <mc:AlternateContent xmlns:mc="http://schemas.openxmlformats.org/markup-compatibility/2006" xmlns:p14="http://schemas.microsoft.com/office/powerpoint/2010/main">
+    <mc:Choice Requires="p14">
       <p:transition spd="med" p14:dur="700">
         <p:fade/>
       </p:transition>
     </mc:Choice>
-    <mc:Fallback>
+    <mc:Fallback xmlns="">
       <p:transition spd="med">
         <p:fade/>
       </p:transition>
@@ -13455,7 +13455,7 @@
                 </a:solidFill>
                 <a:latin typeface="Century Gothic"/>
               </a:rPr>
-              <a:t>EdgeSHaper</a:t>
+              <a:t>EdgeSHAPer</a:t>
             </a:r>
             <a:r>
               <a:rPr lang="en-US" sz="2000" spc="-1" dirty="0">
@@ -13509,7 +13509,7 @@
                 </a:solidFill>
                 <a:latin typeface="Century Gothic"/>
               </a:rPr>
-              <a:t>Integrate with cluster for faster inference and explore larger LLM’s</a:t>
+              <a:t>Integrate with cluster for faster inference and explore larger LLMs</a:t>
             </a:r>
           </a:p>
           <a:p>
@@ -13553,7 +13553,52 @@
                 </a:solidFill>
                 <a:latin typeface="Century Gothic"/>
               </a:rPr>
-              <a:t>Clean up the repository and make it available</a:t>
+              <a:t>Clean up the repository and make it available </a:t>
+            </a:r>
+          </a:p>
+          <a:p>
+            <a:pPr>
+              <a:lnSpc>
+                <a:spcPct val="100000"/>
+              </a:lnSpc>
+              <a:spcBef>
+                <a:spcPts val="400"/>
+              </a:spcBef>
+              <a:buClr>
+                <a:srgbClr val="0064C8"/>
+              </a:buClr>
+              <a:buFont typeface="Wingdings" panose="05000000000000000000" pitchFamily="2" charset="2"/>
+              <a:buChar char="§"/>
+            </a:pPr>
+            <a:endParaRPr lang="en-US" sz="2000" spc="-1" dirty="0">
+              <a:solidFill>
+                <a:srgbClr val="000000"/>
+              </a:solidFill>
+              <a:latin typeface="Century Gothic"/>
+            </a:endParaRPr>
+          </a:p>
+          <a:p>
+            <a:pPr lvl="1">
+              <a:lnSpc>
+                <a:spcPct val="100000"/>
+              </a:lnSpc>
+              <a:spcBef>
+                <a:spcPts val="400"/>
+              </a:spcBef>
+              <a:buClr>
+                <a:srgbClr val="0064C8"/>
+              </a:buClr>
+              <a:buFont typeface="Wingdings" panose="05000000000000000000" pitchFamily="2" charset="2"/>
+              <a:buChar char="§"/>
+            </a:pPr>
+            <a:r>
+              <a:rPr lang="en-US" sz="1600" spc="-1" dirty="0">
+                <a:solidFill>
+                  <a:srgbClr val="000000"/>
+                </a:solidFill>
+                <a:latin typeface="Century Gothic"/>
+              </a:rPr>
+              <a:t>An “organization repository” is available for the whole lab to ease the integration of new components</a:t>
             </a:r>
           </a:p>
           <a:p>
@@ -13679,13 +13724,13 @@
   <p:clrMapOvr>
     <a:masterClrMapping/>
   </p:clrMapOvr>
-  <mc:AlternateContent xmlns:mc="http://schemas.openxmlformats.org/markup-compatibility/2006">
-    <mc:Choice xmlns:p14="http://schemas.microsoft.com/office/powerpoint/2010/main" Requires="p14">
+  <mc:AlternateContent xmlns:mc="http://schemas.openxmlformats.org/markup-compatibility/2006" xmlns:p14="http://schemas.microsoft.com/office/powerpoint/2010/main">
+    <mc:Choice Requires="p14">
       <p:transition spd="med" p14:dur="700">
         <p:fade/>
       </p:transition>
     </mc:Choice>
-    <mc:Fallback>
+    <mc:Fallback xmlns="">
       <p:transition spd="med">
         <p:fade/>
       </p:transition>
@@ -14096,7 +14141,7 @@
                 </a:solidFill>
                 <a:latin typeface="Century Gothic"/>
               </a:rPr>
-              <a:t>A explainability platform for XAI applied to molecular design?</a:t>
+              <a:t>An explainability platform for XAI applied to molecular design?</a:t>
             </a:r>
           </a:p>
           <a:p>
@@ -14120,8 +14165,89 @@
                 </a:solidFill>
                 <a:latin typeface="Century Gothic"/>
               </a:rPr>
-              <a:t> A explainability platform for XAI specific to molecular selectivity?</a:t>
+              <a:t>An explainability platform for XAI specific to molecular selectivity?</a:t>
             </a:r>
+          </a:p>
+          <a:p>
+            <a:pPr lvl="1">
+              <a:lnSpc>
+                <a:spcPct val="100000"/>
+              </a:lnSpc>
+              <a:spcBef>
+                <a:spcPts val="400"/>
+              </a:spcBef>
+              <a:buClr>
+                <a:srgbClr val="0064C8"/>
+              </a:buClr>
+              <a:buFont typeface="Wingdings" panose="05000000000000000000" pitchFamily="2" charset="2"/>
+              <a:buChar char="§"/>
+            </a:pPr>
+            <a:r>
+              <a:rPr lang="en-US" sz="1600" spc="-1" dirty="0">
+                <a:solidFill>
+                  <a:srgbClr val="000000"/>
+                </a:solidFill>
+                <a:latin typeface="Century Gothic"/>
+              </a:rPr>
+              <a:t>A modular </a:t>
+            </a:r>
+            <a:r>
+              <a:rPr lang="en-US" sz="1600" spc="-1" dirty="0" err="1">
+                <a:solidFill>
+                  <a:srgbClr val="000000"/>
+                </a:solidFill>
+                <a:latin typeface="Century Gothic"/>
+              </a:rPr>
+              <a:t>explainability</a:t>
+            </a:r>
+            <a:r>
+              <a:rPr lang="en-US" sz="1600" spc="-1" dirty="0">
+                <a:solidFill>
+                  <a:srgbClr val="000000"/>
+                </a:solidFill>
+                <a:latin typeface="Century Gothic"/>
+              </a:rPr>
+              <a:t>-enhanced platform for </a:t>
+            </a:r>
+            <a:r>
+              <a:rPr lang="en-US" sz="1600" spc="-1" dirty="0" err="1">
+                <a:solidFill>
+                  <a:srgbClr val="000000"/>
+                </a:solidFill>
+                <a:latin typeface="Century Gothic"/>
+              </a:rPr>
+              <a:t>chemoinformatics</a:t>
+            </a:r>
+            <a:r>
+              <a:rPr lang="en-US" sz="1600" spc="-1" dirty="0">
+                <a:solidFill>
+                  <a:srgbClr val="000000"/>
+                </a:solidFill>
+                <a:latin typeface="Century Gothic"/>
+              </a:rPr>
+              <a:t>? </a:t>
+            </a:r>
+          </a:p>
+          <a:p>
+            <a:pPr lvl="1">
+              <a:lnSpc>
+                <a:spcPct val="100000"/>
+              </a:lnSpc>
+              <a:spcBef>
+                <a:spcPts val="400"/>
+              </a:spcBef>
+              <a:buClr>
+                <a:srgbClr val="0064C8"/>
+              </a:buClr>
+              <a:buFont typeface="Wingdings" panose="05000000000000000000" pitchFamily="2" charset="2"/>
+              <a:buChar char="§"/>
+            </a:pPr>
+            <a:endParaRPr lang="en-US" sz="1600" spc="-1" dirty="0">
+              <a:solidFill>
+                <a:srgbClr val="000000"/>
+              </a:solidFill>
+              <a:latin typeface="Century Gothic"/>
+            </a:endParaRPr>
           </a:p>
           <a:p>
             <a:pPr lvl="1">
@@ -14222,13 +14348,13 @@
   <p:clrMapOvr>
     <a:masterClrMapping/>
   </p:clrMapOvr>
-  <mc:AlternateContent xmlns:mc="http://schemas.openxmlformats.org/markup-compatibility/2006">
-    <mc:Choice xmlns:p14="http://schemas.microsoft.com/office/powerpoint/2010/main" Requires="p14">
+  <mc:AlternateContent xmlns:mc="http://schemas.openxmlformats.org/markup-compatibility/2006" xmlns:p14="http://schemas.microsoft.com/office/powerpoint/2010/main">
+    <mc:Choice Requires="p14">
       <p:transition spd="med" p14:dur="700">
         <p:fade/>
       </p:transition>
     </mc:Choice>
-    <mc:Fallback>
+    <mc:Fallback xmlns="">
       <p:transition spd="med">
         <p:fade/>
       </p:transition>

--- a/slides/AI_Agent_Explainability.pptx
+++ b/slides/AI_Agent_Explainability.pptx
@@ -12,8 +12,9 @@
     <p:sldId id="301" r:id="rId6"/>
     <p:sldId id="300" r:id="rId7"/>
     <p:sldId id="302" r:id="rId8"/>
-    <p:sldId id="303" r:id="rId9"/>
-    <p:sldId id="304" r:id="rId10"/>
+    <p:sldId id="305" r:id="rId9"/>
+    <p:sldId id="303" r:id="rId10"/>
+    <p:sldId id="304" r:id="rId11"/>
   </p:sldIdLst>
   <p:sldSz cx="9144000" cy="6858000" type="screen4x3"/>
   <p:notesSz cx="7559675" cy="10691813"/>
@@ -10022,7 +10023,7 @@
         <p:fade/>
       </p:transition>
     </mc:Choice>
-    <mc:Fallback xmlns:p15="http://schemas.microsoft.com/office/powerpoint/2012/main" xmlns="">
+    <mc:Fallback xmlns="" xmlns:p15="http://schemas.microsoft.com/office/powerpoint/2012/main">
       <p:transition spd="med">
         <p:fade/>
       </p:transition>
@@ -10451,7 +10452,7 @@
         <p:fade/>
       </p:transition>
     </mc:Choice>
-    <mc:Fallback xmlns:p15="http://schemas.microsoft.com/office/powerpoint/2012/main" xmlns="">
+    <mc:Fallback xmlns="" xmlns:p15="http://schemas.microsoft.com/office/powerpoint/2012/main">
       <p:transition spd="med">
         <p:fade/>
       </p:transition>
@@ -11212,7 +11213,7 @@
         <p:fade/>
       </p:transition>
     </mc:Choice>
-    <mc:Fallback xmlns:p15="http://schemas.microsoft.com/office/powerpoint/2012/main" xmlns="">
+    <mc:Fallback xmlns="" xmlns:p15="http://schemas.microsoft.com/office/powerpoint/2012/main">
       <p:transition spd="med">
         <p:fade/>
       </p:transition>
@@ -11791,7 +11792,7 @@
         <p:fade/>
       </p:transition>
     </mc:Choice>
-    <mc:Fallback xmlns:p15="http://schemas.microsoft.com/office/powerpoint/2012/main" xmlns="">
+    <mc:Fallback xmlns="" xmlns:p15="http://schemas.microsoft.com/office/powerpoint/2012/main">
       <p:transition spd="med">
         <p:fade/>
       </p:transition>
@@ -11871,7 +11872,7 @@
                 </a:solidFill>
                 <a:latin typeface="Century Gothic"/>
               </a:rPr>
-              <a:t>Exemplary answer output</a:t>
+              <a:t>Exemplary answer output SHAP</a:t>
             </a:r>
             <a:endParaRPr lang="en-US" sz="3200" b="0" strike="noStrike" spc="-1" dirty="0">
               <a:solidFill>
@@ -12406,7 +12407,7 @@
         <p:fade/>
       </p:transition>
     </mc:Choice>
-    <mc:Fallback xmlns:p15="http://schemas.microsoft.com/office/powerpoint/2012/main" xmlns="">
+    <mc:Fallback xmlns="" xmlns:p15="http://schemas.microsoft.com/office/powerpoint/2012/main">
       <p:transition spd="med">
         <p:fade/>
       </p:transition>
@@ -12486,7 +12487,16 @@
                 </a:solidFill>
                 <a:latin typeface="Century Gothic"/>
               </a:rPr>
-              <a:t>Exemplary answer output</a:t>
+              <a:t>Exemplary answer output </a:t>
+            </a:r>
+            <a:r>
+              <a:rPr lang="en-US" sz="3200" b="0" strike="noStrike" spc="-1" dirty="0" err="1">
+                <a:solidFill>
+                  <a:srgbClr val="0064C8"/>
+                </a:solidFill>
+                <a:latin typeface="Century Gothic"/>
+              </a:rPr>
+              <a:t>MolAnchor</a:t>
             </a:r>
             <a:endParaRPr lang="en-US" sz="3200" b="0" strike="noStrike" spc="-1" dirty="0">
               <a:solidFill>
@@ -12829,7 +12839,7 @@
                 </a:solidFill>
                 <a:latin typeface="Century Gothic"/>
               </a:rPr>
-              <a:t>Get explanation statistics</a:t>
+              <a:t>Get explanation statistics (Anchor and substructure occurrence)</a:t>
             </a:r>
           </a:p>
           <a:p>
@@ -12874,7 +12884,7 @@
                 </a:solidFill>
                 <a:latin typeface="Century Gothic"/>
               </a:rPr>
-              <a:t>Display explanation mapping</a:t>
+              <a:t>Global explanations also available</a:t>
             </a:r>
           </a:p>
           <a:p>
@@ -13145,7 +13155,16 @@
                 </a:solidFill>
                 <a:latin typeface="Century Gothic"/>
               </a:rPr>
-              <a:t>To do list</a:t>
+              <a:t>Exemplary answer output </a:t>
+            </a:r>
+            <a:r>
+              <a:rPr lang="en-US" sz="3200" b="0" strike="noStrike" spc="-1" dirty="0" err="1">
+                <a:solidFill>
+                  <a:srgbClr val="0064C8"/>
+                </a:solidFill>
+                <a:latin typeface="Century Gothic"/>
+              </a:rPr>
+              <a:t>MolCE</a:t>
             </a:r>
             <a:endParaRPr lang="en-US" sz="3200" b="0" strike="noStrike" spc="-1" dirty="0">
               <a:solidFill>
@@ -13228,8 +13247,8 @@
         </p:nvSpPr>
         <p:spPr>
           <a:xfrm>
-            <a:off x="380880" y="1371598"/>
-            <a:ext cx="8109070" cy="4559301"/>
+            <a:off x="374530" y="1371598"/>
+            <a:ext cx="3556120" cy="4559301"/>
           </a:xfrm>
           <a:prstGeom prst="rect">
             <a:avLst/>
@@ -13428,43 +13447,7 @@
                 </a:solidFill>
                 <a:latin typeface="Century Gothic"/>
               </a:rPr>
-              <a:t>Add and properly implement missing XAI methods (</a:t>
-            </a:r>
-            <a:r>
-              <a:rPr lang="en-US" sz="2000" spc="-1" dirty="0" err="1">
-                <a:solidFill>
-                  <a:srgbClr val="000000"/>
-                </a:solidFill>
-                <a:latin typeface="Century Gothic"/>
-              </a:rPr>
-              <a:t>MolCE</a:t>
-            </a:r>
-            <a:r>
-              <a:rPr lang="en-US" sz="2000" spc="-1" dirty="0">
-                <a:solidFill>
-                  <a:srgbClr val="000000"/>
-                </a:solidFill>
-                <a:latin typeface="Century Gothic"/>
-              </a:rPr>
-              <a:t>, </a:t>
-            </a:r>
-            <a:r>
-              <a:rPr lang="en-US" sz="2000" spc="-1" dirty="0" err="1">
-                <a:solidFill>
-                  <a:srgbClr val="000000"/>
-                </a:solidFill>
-                <a:latin typeface="Century Gothic"/>
-              </a:rPr>
-              <a:t>EdgeSHAPer</a:t>
-            </a:r>
-            <a:r>
-              <a:rPr lang="en-US" sz="2000" spc="-1" dirty="0">
-                <a:solidFill>
-                  <a:srgbClr val="000000"/>
-                </a:solidFill>
-                <a:latin typeface="Century Gothic"/>
-              </a:rPr>
-              <a:t>, Counterfactuals)</a:t>
+              <a:t>For instances: See both substituent and scaffold foils</a:t>
             </a:r>
           </a:p>
           <a:p>
@@ -13509,51 +13492,7 @@
                 </a:solidFill>
                 <a:latin typeface="Century Gothic"/>
               </a:rPr>
-              <a:t>Integrate with cluster for faster inference and explore larger LLMs</a:t>
-            </a:r>
-          </a:p>
-          <a:p>
-            <a:pPr marL="0" indent="0">
-              <a:lnSpc>
-                <a:spcPct val="100000"/>
-              </a:lnSpc>
-              <a:spcBef>
-                <a:spcPts val="400"/>
-              </a:spcBef>
-              <a:buClr>
-                <a:srgbClr val="0064C8"/>
-              </a:buClr>
-              <a:buNone/>
-            </a:pPr>
-            <a:endParaRPr lang="en-US" sz="2000" spc="-1" dirty="0">
-              <a:solidFill>
-                <a:srgbClr val="000000"/>
-              </a:solidFill>
-              <a:latin typeface="Century Gothic"/>
-            </a:endParaRPr>
-          </a:p>
-          <a:p>
-            <a:pPr>
-              <a:lnSpc>
-                <a:spcPct val="100000"/>
-              </a:lnSpc>
-              <a:spcBef>
-                <a:spcPts val="400"/>
-              </a:spcBef>
-              <a:buClr>
-                <a:srgbClr val="0064C8"/>
-              </a:buClr>
-              <a:buFont typeface="Wingdings" panose="05000000000000000000" pitchFamily="2" charset="2"/>
-              <a:buChar char="§"/>
-            </a:pPr>
-            <a:r>
-              <a:rPr lang="en-US" sz="2000" spc="-1" dirty="0">
-                <a:solidFill>
-                  <a:srgbClr val="000000"/>
-                </a:solidFill>
-                <a:latin typeface="Century Gothic"/>
-              </a:rPr>
-              <a:t>Clean up the repository and make it available </a:t>
+              <a:t>Get explanation statistics (occurrence, contrastive score)</a:t>
             </a:r>
           </a:p>
           <a:p>
@@ -13578,7 +13517,7 @@
             </a:endParaRPr>
           </a:p>
           <a:p>
-            <a:pPr lvl="1">
+            <a:pPr>
               <a:lnSpc>
                 <a:spcPct val="100000"/>
               </a:lnSpc>
@@ -13592,13 +13531,13 @@
               <a:buChar char="§"/>
             </a:pPr>
             <a:r>
-              <a:rPr lang="en-US" sz="1600" spc="-1" dirty="0">
+              <a:rPr lang="en-US" sz="2000" spc="-1" dirty="0">
                 <a:solidFill>
                   <a:srgbClr val="000000"/>
                 </a:solidFill>
                 <a:latin typeface="Century Gothic"/>
               </a:rPr>
-              <a:t>An “organization repository” is available for the whole lab to ease the integration of new components</a:t>
+              <a:t>Global explanations also available</a:t>
             </a:r>
           </a:p>
           <a:p>
@@ -13643,7 +13582,7 @@
                 </a:solidFill>
                 <a:latin typeface="Century Gothic"/>
               </a:rPr>
-              <a:t>Make a guide for lab members for the implementation of AI agents</a:t>
+              <a:t>Rationalize explanations (LLM)</a:t>
             </a:r>
           </a:p>
           <a:p>
@@ -13714,23 +13653,83 @@
           </a:p>
         </p:txBody>
       </p:sp>
+      <p:pic>
+        <p:nvPicPr>
+          <p:cNvPr id="4" name="Picture 3">
+            <a:extLst>
+              <a:ext uri="{FF2B5EF4-FFF2-40B4-BE49-F238E27FC236}">
+                <a16:creationId xmlns:a16="http://schemas.microsoft.com/office/drawing/2014/main" id="{A6448BF6-C81C-6C8D-8F4B-2F0B75A53E81}"/>
+              </a:ext>
+            </a:extLst>
+          </p:cNvPr>
+          <p:cNvPicPr>
+            <a:picLocks noChangeAspect="1"/>
+          </p:cNvPicPr>
+          <p:nvPr/>
+        </p:nvPicPr>
+        <p:blipFill>
+          <a:blip r:embed="rId2"/>
+          <a:stretch>
+            <a:fillRect/>
+          </a:stretch>
+        </p:blipFill>
+        <p:spPr>
+          <a:xfrm>
+            <a:off x="4343622" y="990120"/>
+            <a:ext cx="4557038" cy="3008146"/>
+          </a:xfrm>
+          <a:prstGeom prst="rect">
+            <a:avLst/>
+          </a:prstGeom>
+        </p:spPr>
+      </p:pic>
+      <p:pic>
+        <p:nvPicPr>
+          <p:cNvPr id="8" name="Picture 7">
+            <a:extLst>
+              <a:ext uri="{FF2B5EF4-FFF2-40B4-BE49-F238E27FC236}">
+                <a16:creationId xmlns:a16="http://schemas.microsoft.com/office/drawing/2014/main" id="{F267D0B5-80AA-A015-D6E0-17D1621B9965}"/>
+              </a:ext>
+            </a:extLst>
+          </p:cNvPr>
+          <p:cNvPicPr>
+            <a:picLocks noChangeAspect="1"/>
+          </p:cNvPicPr>
+          <p:nvPr/>
+        </p:nvPicPr>
+        <p:blipFill>
+          <a:blip r:embed="rId3"/>
+          <a:stretch>
+            <a:fillRect/>
+          </a:stretch>
+        </p:blipFill>
+        <p:spPr>
+          <a:xfrm>
+            <a:off x="4343622" y="3998266"/>
+            <a:ext cx="4557038" cy="2149192"/>
+          </a:xfrm>
+          <a:prstGeom prst="rect">
+            <a:avLst/>
+          </a:prstGeom>
+        </p:spPr>
+      </p:pic>
     </p:spTree>
     <p:extLst>
       <p:ext uri="{BB962C8B-B14F-4D97-AF65-F5344CB8AC3E}">
-        <p14:creationId xmlns:p14="http://schemas.microsoft.com/office/powerpoint/2010/main" val="3727029337"/>
+        <p14:creationId xmlns:p14="http://schemas.microsoft.com/office/powerpoint/2010/main" val="755729670"/>
       </p:ext>
     </p:extLst>
   </p:cSld>
   <p:clrMapOvr>
     <a:masterClrMapping/>
   </p:clrMapOvr>
-  <mc:AlternateContent xmlns:mc="http://schemas.openxmlformats.org/markup-compatibility/2006" xmlns:p14="http://schemas.microsoft.com/office/powerpoint/2010/main">
-    <mc:Choice Requires="p14">
+  <mc:AlternateContent xmlns:mc="http://schemas.openxmlformats.org/markup-compatibility/2006">
+    <mc:Choice xmlns:p14="http://schemas.microsoft.com/office/powerpoint/2010/main" Requires="p14">
       <p:transition spd="med" p14:dur="700">
         <p:fade/>
       </p:transition>
     </mc:Choice>
-    <mc:Fallback xmlns="">
+    <mc:Fallback>
       <p:transition spd="med">
         <p:fade/>
       </p:transition>
@@ -13810,7 +13809,7 @@
                 </a:solidFill>
                 <a:latin typeface="Century Gothic"/>
               </a:rPr>
-              <a:t>Framing</a:t>
+              <a:t>To do list</a:t>
             </a:r>
             <a:endParaRPr lang="en-US" sz="3200" b="0" strike="noStrike" spc="-1" dirty="0">
               <a:solidFill>
@@ -13870,6 +13869,653 @@
                 <a:latin typeface="Century Gothic"/>
               </a:rPr>
               <a:t>8</a:t>
+            </a:fld>
+            <a:endParaRPr lang="en-GB" sz="1200" b="0" strike="noStrike" spc="-1" dirty="0">
+              <a:latin typeface="Times New Roman"/>
+            </a:endParaRPr>
+          </a:p>
+        </p:txBody>
+      </p:sp>
+      <p:sp>
+        <p:nvSpPr>
+          <p:cNvPr id="7" name="PlaceHolder 2">
+            <a:extLst>
+              <a:ext uri="{FF2B5EF4-FFF2-40B4-BE49-F238E27FC236}">
+                <a16:creationId xmlns:a16="http://schemas.microsoft.com/office/drawing/2014/main" id="{66DE14D4-64D4-6D1F-DD92-BC16D674C58B}"/>
+              </a:ext>
+            </a:extLst>
+          </p:cNvPr>
+          <p:cNvSpPr txBox="1">
+            <a:spLocks/>
+          </p:cNvSpPr>
+          <p:nvPr/>
+        </p:nvSpPr>
+        <p:spPr>
+          <a:xfrm>
+            <a:off x="380880" y="1371598"/>
+            <a:ext cx="8109070" cy="4559301"/>
+          </a:xfrm>
+          <a:prstGeom prst="rect">
+            <a:avLst/>
+          </a:prstGeom>
+          <a:noFill/>
+          <a:ln w="0">
+            <a:noFill/>
+          </a:ln>
+        </p:spPr>
+        <p:txBody>
+          <a:bodyPr numCol="1" spcCol="0" anchor="t">
+            <a:noAutofit/>
+          </a:bodyPr>
+          <a:lstStyle>
+            <a:lvl1pPr marL="228600" indent="-228600" algn="l" defTabSz="914400" rtl="0" eaLnBrk="1" latinLnBrk="0" hangingPunct="1">
+              <a:lnSpc>
+                <a:spcPct val="90000"/>
+              </a:lnSpc>
+              <a:spcBef>
+                <a:spcPts val="1000"/>
+              </a:spcBef>
+              <a:buFont typeface="Arial" panose="020B0604020202020204" pitchFamily="34" charset="0"/>
+              <a:buChar char="•"/>
+              <a:defRPr sz="2800" kern="1200">
+                <a:solidFill>
+                  <a:schemeClr val="tx1"/>
+                </a:solidFill>
+                <a:latin typeface="+mn-lt"/>
+                <a:ea typeface="+mn-ea"/>
+                <a:cs typeface="+mn-cs"/>
+              </a:defRPr>
+            </a:lvl1pPr>
+            <a:lvl2pPr marL="685800" indent="-228600" algn="l" defTabSz="914400" rtl="0" eaLnBrk="1" latinLnBrk="0" hangingPunct="1">
+              <a:lnSpc>
+                <a:spcPct val="90000"/>
+              </a:lnSpc>
+              <a:spcBef>
+                <a:spcPts val="500"/>
+              </a:spcBef>
+              <a:buFont typeface="Arial" panose="020B0604020202020204" pitchFamily="34" charset="0"/>
+              <a:buChar char="•"/>
+              <a:defRPr sz="2400" kern="1200">
+                <a:solidFill>
+                  <a:schemeClr val="tx1"/>
+                </a:solidFill>
+                <a:latin typeface="+mn-lt"/>
+                <a:ea typeface="+mn-ea"/>
+                <a:cs typeface="+mn-cs"/>
+              </a:defRPr>
+            </a:lvl2pPr>
+            <a:lvl3pPr marL="1143000" indent="-228600" algn="l" defTabSz="914400" rtl="0" eaLnBrk="1" latinLnBrk="0" hangingPunct="1">
+              <a:lnSpc>
+                <a:spcPct val="90000"/>
+              </a:lnSpc>
+              <a:spcBef>
+                <a:spcPts val="500"/>
+              </a:spcBef>
+              <a:buFont typeface="Arial" panose="020B0604020202020204" pitchFamily="34" charset="0"/>
+              <a:buChar char="•"/>
+              <a:defRPr sz="2000" kern="1200">
+                <a:solidFill>
+                  <a:schemeClr val="tx1"/>
+                </a:solidFill>
+                <a:latin typeface="+mn-lt"/>
+                <a:ea typeface="+mn-ea"/>
+                <a:cs typeface="+mn-cs"/>
+              </a:defRPr>
+            </a:lvl3pPr>
+            <a:lvl4pPr marL="1600200" indent="-228600" algn="l" defTabSz="914400" rtl="0" eaLnBrk="1" latinLnBrk="0" hangingPunct="1">
+              <a:lnSpc>
+                <a:spcPct val="90000"/>
+              </a:lnSpc>
+              <a:spcBef>
+                <a:spcPts val="500"/>
+              </a:spcBef>
+              <a:buFont typeface="Arial" panose="020B0604020202020204" pitchFamily="34" charset="0"/>
+              <a:buChar char="•"/>
+              <a:defRPr sz="1800" kern="1200">
+                <a:solidFill>
+                  <a:schemeClr val="tx1"/>
+                </a:solidFill>
+                <a:latin typeface="+mn-lt"/>
+                <a:ea typeface="+mn-ea"/>
+                <a:cs typeface="+mn-cs"/>
+              </a:defRPr>
+            </a:lvl4pPr>
+            <a:lvl5pPr marL="2057400" indent="-228600" algn="l" defTabSz="914400" rtl="0" eaLnBrk="1" latinLnBrk="0" hangingPunct="1">
+              <a:lnSpc>
+                <a:spcPct val="90000"/>
+              </a:lnSpc>
+              <a:spcBef>
+                <a:spcPts val="500"/>
+              </a:spcBef>
+              <a:buFont typeface="Arial" panose="020B0604020202020204" pitchFamily="34" charset="0"/>
+              <a:buChar char="•"/>
+              <a:defRPr sz="1800" kern="1200">
+                <a:solidFill>
+                  <a:schemeClr val="tx1"/>
+                </a:solidFill>
+                <a:latin typeface="+mn-lt"/>
+                <a:ea typeface="+mn-ea"/>
+                <a:cs typeface="+mn-cs"/>
+              </a:defRPr>
+            </a:lvl5pPr>
+            <a:lvl6pPr marL="2514600" indent="-228600" algn="l" defTabSz="914400" rtl="0" eaLnBrk="1" latinLnBrk="0" hangingPunct="1">
+              <a:lnSpc>
+                <a:spcPct val="90000"/>
+              </a:lnSpc>
+              <a:spcBef>
+                <a:spcPts val="500"/>
+              </a:spcBef>
+              <a:buFont typeface="Arial" panose="020B0604020202020204" pitchFamily="34" charset="0"/>
+              <a:buChar char="•"/>
+              <a:defRPr sz="1800" kern="1200">
+                <a:solidFill>
+                  <a:schemeClr val="tx1"/>
+                </a:solidFill>
+                <a:latin typeface="+mn-lt"/>
+                <a:ea typeface="+mn-ea"/>
+                <a:cs typeface="+mn-cs"/>
+              </a:defRPr>
+            </a:lvl6pPr>
+            <a:lvl7pPr marL="2971800" indent="-228600" algn="l" defTabSz="914400" rtl="0" eaLnBrk="1" latinLnBrk="0" hangingPunct="1">
+              <a:lnSpc>
+                <a:spcPct val="90000"/>
+              </a:lnSpc>
+              <a:spcBef>
+                <a:spcPts val="500"/>
+              </a:spcBef>
+              <a:buFont typeface="Arial" panose="020B0604020202020204" pitchFamily="34" charset="0"/>
+              <a:buChar char="•"/>
+              <a:defRPr sz="1800" kern="1200">
+                <a:solidFill>
+                  <a:schemeClr val="tx1"/>
+                </a:solidFill>
+                <a:latin typeface="+mn-lt"/>
+                <a:ea typeface="+mn-ea"/>
+                <a:cs typeface="+mn-cs"/>
+              </a:defRPr>
+            </a:lvl7pPr>
+            <a:lvl8pPr marL="3429000" indent="-228600" algn="l" defTabSz="914400" rtl="0" eaLnBrk="1" latinLnBrk="0" hangingPunct="1">
+              <a:lnSpc>
+                <a:spcPct val="90000"/>
+              </a:lnSpc>
+              <a:spcBef>
+                <a:spcPts val="500"/>
+              </a:spcBef>
+              <a:buFont typeface="Arial" panose="020B0604020202020204" pitchFamily="34" charset="0"/>
+              <a:buChar char="•"/>
+              <a:defRPr sz="1800" kern="1200">
+                <a:solidFill>
+                  <a:schemeClr val="tx1"/>
+                </a:solidFill>
+                <a:latin typeface="+mn-lt"/>
+                <a:ea typeface="+mn-ea"/>
+                <a:cs typeface="+mn-cs"/>
+              </a:defRPr>
+            </a:lvl8pPr>
+            <a:lvl9pPr marL="3886200" indent="-228600" algn="l" defTabSz="914400" rtl="0" eaLnBrk="1" latinLnBrk="0" hangingPunct="1">
+              <a:lnSpc>
+                <a:spcPct val="90000"/>
+              </a:lnSpc>
+              <a:spcBef>
+                <a:spcPts val="500"/>
+              </a:spcBef>
+              <a:buFont typeface="Arial" panose="020B0604020202020204" pitchFamily="34" charset="0"/>
+              <a:buChar char="•"/>
+              <a:defRPr sz="1800" kern="1200">
+                <a:solidFill>
+                  <a:schemeClr val="tx1"/>
+                </a:solidFill>
+                <a:latin typeface="+mn-lt"/>
+                <a:ea typeface="+mn-ea"/>
+                <a:cs typeface="+mn-cs"/>
+              </a:defRPr>
+            </a:lvl9pPr>
+          </a:lstStyle>
+          <a:p>
+            <a:pPr>
+              <a:lnSpc>
+                <a:spcPct val="100000"/>
+              </a:lnSpc>
+              <a:spcBef>
+                <a:spcPts val="400"/>
+              </a:spcBef>
+              <a:buClr>
+                <a:srgbClr val="0064C8"/>
+              </a:buClr>
+              <a:buFont typeface="Wingdings" panose="05000000000000000000" pitchFamily="2" charset="2"/>
+              <a:buChar char="§"/>
+            </a:pPr>
+            <a:r>
+              <a:rPr lang="en-US" sz="2000" spc="-1" dirty="0">
+                <a:solidFill>
+                  <a:srgbClr val="000000"/>
+                </a:solidFill>
+                <a:latin typeface="Century Gothic"/>
+              </a:rPr>
+              <a:t>Add and properly implement missing XAI methods (</a:t>
+            </a:r>
+            <a:r>
+              <a:rPr lang="en-US" sz="2000" spc="-1" dirty="0" err="1">
+                <a:solidFill>
+                  <a:srgbClr val="000000"/>
+                </a:solidFill>
+                <a:latin typeface="Century Gothic"/>
+              </a:rPr>
+              <a:t>EdgeSHAPer</a:t>
+            </a:r>
+            <a:r>
+              <a:rPr lang="en-US" sz="2000" spc="-1" dirty="0">
+                <a:solidFill>
+                  <a:srgbClr val="000000"/>
+                </a:solidFill>
+                <a:latin typeface="Century Gothic"/>
+              </a:rPr>
+              <a:t> and Counterfactuals)</a:t>
+            </a:r>
+          </a:p>
+          <a:p>
+            <a:pPr>
+              <a:lnSpc>
+                <a:spcPct val="100000"/>
+              </a:lnSpc>
+              <a:spcBef>
+                <a:spcPts val="400"/>
+              </a:spcBef>
+              <a:buClr>
+                <a:srgbClr val="0064C8"/>
+              </a:buClr>
+              <a:buFont typeface="Wingdings" panose="05000000000000000000" pitchFamily="2" charset="2"/>
+              <a:buChar char="§"/>
+            </a:pPr>
+            <a:endParaRPr lang="en-US" sz="2000" spc="-1" dirty="0">
+              <a:solidFill>
+                <a:srgbClr val="000000"/>
+              </a:solidFill>
+              <a:latin typeface="Century Gothic"/>
+            </a:endParaRPr>
+          </a:p>
+          <a:p>
+            <a:pPr>
+              <a:lnSpc>
+                <a:spcPct val="100000"/>
+              </a:lnSpc>
+              <a:spcBef>
+                <a:spcPts val="400"/>
+              </a:spcBef>
+              <a:buClr>
+                <a:srgbClr val="0064C8"/>
+              </a:buClr>
+              <a:buFont typeface="Wingdings" panose="05000000000000000000" pitchFamily="2" charset="2"/>
+              <a:buChar char="§"/>
+            </a:pPr>
+            <a:r>
+              <a:rPr lang="en-US" sz="2000" spc="-1" dirty="0">
+                <a:solidFill>
+                  <a:srgbClr val="000000"/>
+                </a:solidFill>
+                <a:latin typeface="Century Gothic"/>
+              </a:rPr>
+              <a:t>Integrate with cluster for faster inference and explore larger LLMs</a:t>
+            </a:r>
+          </a:p>
+          <a:p>
+            <a:pPr marL="0" indent="0">
+              <a:lnSpc>
+                <a:spcPct val="100000"/>
+              </a:lnSpc>
+              <a:spcBef>
+                <a:spcPts val="400"/>
+              </a:spcBef>
+              <a:buClr>
+                <a:srgbClr val="0064C8"/>
+              </a:buClr>
+              <a:buNone/>
+            </a:pPr>
+            <a:endParaRPr lang="en-US" sz="2000" spc="-1" dirty="0">
+              <a:solidFill>
+                <a:srgbClr val="000000"/>
+              </a:solidFill>
+              <a:latin typeface="Century Gothic"/>
+            </a:endParaRPr>
+          </a:p>
+          <a:p>
+            <a:pPr>
+              <a:lnSpc>
+                <a:spcPct val="100000"/>
+              </a:lnSpc>
+              <a:spcBef>
+                <a:spcPts val="400"/>
+              </a:spcBef>
+              <a:buClr>
+                <a:srgbClr val="0064C8"/>
+              </a:buClr>
+              <a:buFont typeface="Wingdings" panose="05000000000000000000" pitchFamily="2" charset="2"/>
+              <a:buChar char="§"/>
+            </a:pPr>
+            <a:r>
+              <a:rPr lang="en-US" sz="2000" spc="-1" dirty="0">
+                <a:solidFill>
+                  <a:srgbClr val="000000"/>
+                </a:solidFill>
+                <a:latin typeface="Century Gothic"/>
+              </a:rPr>
+              <a:t>Clean up the repository and make it available </a:t>
+            </a:r>
+          </a:p>
+          <a:p>
+            <a:pPr>
+              <a:lnSpc>
+                <a:spcPct val="100000"/>
+              </a:lnSpc>
+              <a:spcBef>
+                <a:spcPts val="400"/>
+              </a:spcBef>
+              <a:buClr>
+                <a:srgbClr val="0064C8"/>
+              </a:buClr>
+              <a:buFont typeface="Wingdings" panose="05000000000000000000" pitchFamily="2" charset="2"/>
+              <a:buChar char="§"/>
+            </a:pPr>
+            <a:endParaRPr lang="en-US" sz="2000" spc="-1" dirty="0">
+              <a:solidFill>
+                <a:srgbClr val="000000"/>
+              </a:solidFill>
+              <a:latin typeface="Century Gothic"/>
+            </a:endParaRPr>
+          </a:p>
+          <a:p>
+            <a:pPr lvl="1">
+              <a:lnSpc>
+                <a:spcPct val="100000"/>
+              </a:lnSpc>
+              <a:spcBef>
+                <a:spcPts val="400"/>
+              </a:spcBef>
+              <a:buClr>
+                <a:srgbClr val="0064C8"/>
+              </a:buClr>
+              <a:buFont typeface="Wingdings" panose="05000000000000000000" pitchFamily="2" charset="2"/>
+              <a:buChar char="§"/>
+            </a:pPr>
+            <a:r>
+              <a:rPr lang="en-US" sz="1600" spc="-1" dirty="0">
+                <a:solidFill>
+                  <a:srgbClr val="000000"/>
+                </a:solidFill>
+                <a:latin typeface="Century Gothic"/>
+              </a:rPr>
+              <a:t>An “organization repository” is available for the whole lab to ease the integration of new components</a:t>
+            </a:r>
+          </a:p>
+          <a:p>
+            <a:pPr>
+              <a:lnSpc>
+                <a:spcPct val="100000"/>
+              </a:lnSpc>
+              <a:spcBef>
+                <a:spcPts val="400"/>
+              </a:spcBef>
+              <a:buClr>
+                <a:srgbClr val="0064C8"/>
+              </a:buClr>
+              <a:buFont typeface="Wingdings" panose="05000000000000000000" pitchFamily="2" charset="2"/>
+              <a:buChar char="§"/>
+            </a:pPr>
+            <a:endParaRPr lang="en-US" sz="2000" spc="-1" dirty="0">
+              <a:solidFill>
+                <a:srgbClr val="000000"/>
+              </a:solidFill>
+              <a:latin typeface="Century Gothic"/>
+            </a:endParaRPr>
+          </a:p>
+          <a:p>
+            <a:pPr>
+              <a:lnSpc>
+                <a:spcPct val="100000"/>
+              </a:lnSpc>
+              <a:spcBef>
+                <a:spcPts val="400"/>
+              </a:spcBef>
+              <a:buClr>
+                <a:srgbClr val="0064C8"/>
+              </a:buClr>
+              <a:buFont typeface="Wingdings" panose="05000000000000000000" pitchFamily="2" charset="2"/>
+              <a:buChar char="§"/>
+            </a:pPr>
+            <a:r>
+              <a:rPr lang="en-US" sz="2000" spc="-1" dirty="0">
+                <a:solidFill>
+                  <a:srgbClr val="000000"/>
+                </a:solidFill>
+                <a:latin typeface="Century Gothic"/>
+              </a:rPr>
+              <a:t>Make a guide for lab members for the implementation of AI agents</a:t>
+            </a:r>
+          </a:p>
+          <a:p>
+            <a:pPr>
+              <a:lnSpc>
+                <a:spcPct val="100000"/>
+              </a:lnSpc>
+              <a:spcBef>
+                <a:spcPts val="400"/>
+              </a:spcBef>
+              <a:buClr>
+                <a:srgbClr val="0064C8"/>
+              </a:buClr>
+              <a:buFont typeface="Wingdings" panose="05000000000000000000" pitchFamily="2" charset="2"/>
+              <a:buChar char="§"/>
+            </a:pPr>
+            <a:endParaRPr lang="en-US" sz="2000" spc="-1" dirty="0">
+              <a:solidFill>
+                <a:srgbClr val="000000"/>
+              </a:solidFill>
+              <a:latin typeface="Century Gothic"/>
+            </a:endParaRPr>
+          </a:p>
+          <a:p>
+            <a:pPr>
+              <a:lnSpc>
+                <a:spcPct val="100000"/>
+              </a:lnSpc>
+              <a:spcBef>
+                <a:spcPts val="400"/>
+              </a:spcBef>
+              <a:buClr>
+                <a:srgbClr val="0064C8"/>
+              </a:buClr>
+              <a:buFont typeface="Wingdings" panose="05000000000000000000" pitchFamily="2" charset="2"/>
+              <a:buChar char="§"/>
+            </a:pPr>
+            <a:endParaRPr lang="en-US" sz="1800" spc="-1" dirty="0">
+              <a:solidFill>
+                <a:srgbClr val="000000"/>
+              </a:solidFill>
+              <a:latin typeface="Century Gothic"/>
+            </a:endParaRPr>
+          </a:p>
+          <a:p>
+            <a:pPr marL="343080" indent="-343080">
+              <a:lnSpc>
+                <a:spcPct val="100000"/>
+              </a:lnSpc>
+              <a:spcBef>
+                <a:spcPts val="400"/>
+              </a:spcBef>
+              <a:spcAft>
+                <a:spcPts val="601"/>
+              </a:spcAft>
+              <a:buClr>
+                <a:srgbClr val="0064C8"/>
+              </a:buClr>
+              <a:buFont typeface="Wingdings 2" charset="2"/>
+              <a:buChar char=""/>
+            </a:pPr>
+            <a:endParaRPr lang="en-US" sz="2000" b="1" spc="-1" dirty="0">
+              <a:solidFill>
+                <a:srgbClr val="000000"/>
+              </a:solidFill>
+              <a:latin typeface="Century Gothic"/>
+            </a:endParaRPr>
+          </a:p>
+        </p:txBody>
+      </p:sp>
+    </p:spTree>
+    <p:extLst>
+      <p:ext uri="{BB962C8B-B14F-4D97-AF65-F5344CB8AC3E}">
+        <p14:creationId xmlns:p14="http://schemas.microsoft.com/office/powerpoint/2010/main" val="3727029337"/>
+      </p:ext>
+    </p:extLst>
+  </p:cSld>
+  <p:clrMapOvr>
+    <a:masterClrMapping/>
+  </p:clrMapOvr>
+  <mc:AlternateContent xmlns:mc="http://schemas.openxmlformats.org/markup-compatibility/2006" xmlns:p14="http://schemas.microsoft.com/office/powerpoint/2010/main">
+    <mc:Choice Requires="p14">
+      <p:transition spd="med" p14:dur="700">
+        <p:fade/>
+      </p:transition>
+    </mc:Choice>
+    <mc:Fallback xmlns="">
+      <p:transition spd="med">
+        <p:fade/>
+      </p:transition>
+    </mc:Fallback>
+  </mc:AlternateContent>
+</p:sld>
+</file>
+
+<file path=ppt/slides/slide9.xml><?xml version="1.0" encoding="utf-8"?>
+<p:sld xmlns:a="http://schemas.openxmlformats.org/drawingml/2006/main" xmlns:r="http://schemas.openxmlformats.org/officeDocument/2006/relationships" xmlns:p="http://schemas.openxmlformats.org/presentationml/2006/main">
+  <p:cSld>
+    <p:spTree>
+      <p:nvGrpSpPr>
+        <p:cNvPr id="1" name="">
+          <a:extLst>
+            <a:ext uri="{FF2B5EF4-FFF2-40B4-BE49-F238E27FC236}">
+              <a16:creationId xmlns:a16="http://schemas.microsoft.com/office/drawing/2014/main" id="{A6515F23-0912-A838-23CE-B8F00573A2DA}"/>
+            </a:ext>
+          </a:extLst>
+        </p:cNvPr>
+        <p:cNvGrpSpPr/>
+        <p:nvPr/>
+      </p:nvGrpSpPr>
+      <p:grpSpPr>
+        <a:xfrm>
+          <a:off x="0" y="0"/>
+          <a:ext cx="0" cy="0"/>
+          <a:chOff x="0" y="0"/>
+          <a:chExt cx="0" cy="0"/>
+        </a:xfrm>
+      </p:grpSpPr>
+      <p:sp>
+        <p:nvSpPr>
+          <p:cNvPr id="163" name="PlaceHolder 1">
+            <a:extLst>
+              <a:ext uri="{FF2B5EF4-FFF2-40B4-BE49-F238E27FC236}">
+                <a16:creationId xmlns:a16="http://schemas.microsoft.com/office/drawing/2014/main" id="{57944F4B-F502-E7CC-8790-8737702BC6AC}"/>
+              </a:ext>
+            </a:extLst>
+          </p:cNvPr>
+          <p:cNvSpPr>
+            <a:spLocks noGrp="1"/>
+          </p:cNvSpPr>
+          <p:nvPr>
+            <p:ph type="title"/>
+          </p:nvPr>
+        </p:nvSpPr>
+        <p:spPr>
+          <a:xfrm>
+            <a:off x="380880" y="228600"/>
+            <a:ext cx="8380080" cy="837720"/>
+          </a:xfrm>
+          <a:prstGeom prst="rect">
+            <a:avLst/>
+          </a:prstGeom>
+          <a:noFill/>
+          <a:ln w="0">
+            <a:noFill/>
+          </a:ln>
+        </p:spPr>
+        <p:txBody>
+          <a:bodyPr numCol="1" spcCol="0" anchor="ctr">
+            <a:noAutofit/>
+          </a:bodyPr>
+          <a:lstStyle/>
+          <a:p>
+            <a:pPr>
+              <a:lnSpc>
+                <a:spcPct val="100000"/>
+              </a:lnSpc>
+              <a:buNone/>
+            </a:pPr>
+            <a:r>
+              <a:rPr lang="en-US" sz="3200" b="0" strike="noStrike" spc="-1" dirty="0">
+                <a:solidFill>
+                  <a:srgbClr val="0064C8"/>
+                </a:solidFill>
+                <a:latin typeface="Century Gothic"/>
+              </a:rPr>
+              <a:t>Framing</a:t>
+            </a:r>
+            <a:endParaRPr lang="en-US" sz="3200" b="0" strike="noStrike" spc="-1" dirty="0">
+              <a:solidFill>
+                <a:srgbClr val="000000"/>
+              </a:solidFill>
+              <a:latin typeface="Century Gothic"/>
+            </a:endParaRPr>
+          </a:p>
+        </p:txBody>
+      </p:sp>
+      <p:sp>
+        <p:nvSpPr>
+          <p:cNvPr id="165" name="PlaceHolder 3">
+            <a:extLst>
+              <a:ext uri="{FF2B5EF4-FFF2-40B4-BE49-F238E27FC236}">
+                <a16:creationId xmlns:a16="http://schemas.microsoft.com/office/drawing/2014/main" id="{2EFBEA53-7B78-D9A1-93EF-9608A3193D27}"/>
+              </a:ext>
+            </a:extLst>
+          </p:cNvPr>
+          <p:cNvSpPr>
+            <a:spLocks noGrp="1"/>
+          </p:cNvSpPr>
+          <p:nvPr>
+            <p:ph type="sldNum"/>
+          </p:nvPr>
+        </p:nvSpPr>
+        <p:spPr>
+          <a:xfrm>
+            <a:off x="8376840" y="5692680"/>
+            <a:ext cx="384120" cy="364680"/>
+          </a:xfrm>
+          <a:prstGeom prst="rect">
+            <a:avLst/>
+          </a:prstGeom>
+          <a:noFill/>
+          <a:ln w="0">
+            <a:noFill/>
+          </a:ln>
+        </p:spPr>
+        <p:txBody>
+          <a:bodyPr anchor="ctr">
+            <a:noAutofit/>
+          </a:bodyPr>
+          <a:lstStyle/>
+          <a:p>
+            <a:pPr algn="r">
+              <a:lnSpc>
+                <a:spcPct val="100000"/>
+              </a:lnSpc>
+              <a:buNone/>
+            </a:pPr>
+            <a:fld id="{8BD7C522-1E12-40C3-B25E-5F0462E20B22}" type="slidenum">
+              <a:rPr lang="en-US" sz="1200" b="0" strike="noStrike" spc="-1">
+                <a:solidFill>
+                  <a:srgbClr val="8B8B8B"/>
+                </a:solidFill>
+                <a:latin typeface="Century Gothic"/>
+              </a:rPr>
+              <a:t>9</a:t>
             </a:fld>
             <a:endParaRPr lang="en-GB" sz="1200" b="0" strike="noStrike" spc="-1" dirty="0">
               <a:latin typeface="Times New Roman"/>

--- a/slides/AI_Agent_Explainability.pptx
+++ b/slides/AI_Agent_Explainability.pptx
@@ -130,13 +130,6 @@
       <pc:docMkLst>
         <pc:docMk/>
       </pc:docMkLst>
-      <pc:sldChg chg="del">
-        <pc:chgData name="Tiago Janela" userId="ee1a79fe-c79c-4f34-9602-7f6f2f0482b3" providerId="ADAL" clId="{67D2C233-DF3C-4C6D-9040-D7553E3BCB8A}" dt="2026-03-16T14:02:41.446" v="6" actId="47"/>
-        <pc:sldMkLst>
-          <pc:docMk/>
-          <pc:sldMk cId="901468915" sldId="296"/>
-        </pc:sldMkLst>
-      </pc:sldChg>
       <pc:sldChg chg="modSp mod">
         <pc:chgData name="Tiago Janela" userId="ee1a79fe-c79c-4f34-9602-7f6f2f0482b3" providerId="ADAL" clId="{67D2C233-DF3C-4C6D-9040-D7553E3BCB8A}" dt="2026-03-16T14:03:02.466" v="54" actId="20577"/>
         <pc:sldMkLst>
@@ -167,40 +160,29 @@
           </ac:spMkLst>
         </pc:spChg>
       </pc:sldChg>
-      <pc:sldChg chg="del">
-        <pc:chgData name="Tiago Janela" userId="ee1a79fe-c79c-4f34-9602-7f6f2f0482b3" providerId="ADAL" clId="{67D2C233-DF3C-4C6D-9040-D7553E3BCB8A}" dt="2026-03-16T14:02:36.535" v="1" actId="47"/>
+    </pc:docChg>
+  </pc:docChgLst>
+  <pc:docChgLst>
+    <pc:chgData name="Tiago Janela" userId="ee1a79fe-c79c-4f34-9602-7f6f2f0482b3" providerId="ADAL" clId="{A1A622BE-A8AD-47B7-8802-BAC61BCE5126}"/>
+    <pc:docChg chg="undo custSel modSld">
+      <pc:chgData name="Tiago Janela" userId="ee1a79fe-c79c-4f34-9602-7f6f2f0482b3" providerId="ADAL" clId="{A1A622BE-A8AD-47B7-8802-BAC61BCE5126}" dt="2026-04-02T12:40:40.607" v="50" actId="478"/>
+      <pc:docMkLst>
+        <pc:docMk/>
+      </pc:docMkLst>
+      <pc:sldChg chg="addSp delSp modSp mod">
+        <pc:chgData name="Tiago Janela" userId="ee1a79fe-c79c-4f34-9602-7f6f2f0482b3" providerId="ADAL" clId="{A1A622BE-A8AD-47B7-8802-BAC61BCE5126}" dt="2026-04-02T12:40:40.607" v="50" actId="478"/>
         <pc:sldMkLst>
           <pc:docMk/>
-          <pc:sldMk cId="114778141" sldId="303"/>
+          <pc:sldMk cId="1707478755" sldId="299"/>
         </pc:sldMkLst>
-      </pc:sldChg>
-      <pc:sldChg chg="del">
-        <pc:chgData name="Tiago Janela" userId="ee1a79fe-c79c-4f34-9602-7f6f2f0482b3" providerId="ADAL" clId="{67D2C233-DF3C-4C6D-9040-D7553E3BCB8A}" dt="2026-03-16T14:02:37.693" v="2" actId="47"/>
-        <pc:sldMkLst>
-          <pc:docMk/>
-          <pc:sldMk cId="1211845523" sldId="306"/>
-        </pc:sldMkLst>
-      </pc:sldChg>
-      <pc:sldChg chg="del">
-        <pc:chgData name="Tiago Janela" userId="ee1a79fe-c79c-4f34-9602-7f6f2f0482b3" providerId="ADAL" clId="{67D2C233-DF3C-4C6D-9040-D7553E3BCB8A}" dt="2026-03-16T14:02:37.999" v="3" actId="47"/>
-        <pc:sldMkLst>
-          <pc:docMk/>
-          <pc:sldMk cId="4258501269" sldId="307"/>
-        </pc:sldMkLst>
-      </pc:sldChg>
-      <pc:sldChg chg="del">
-        <pc:chgData name="Tiago Janela" userId="ee1a79fe-c79c-4f34-9602-7f6f2f0482b3" providerId="ADAL" clId="{67D2C233-DF3C-4C6D-9040-D7553E3BCB8A}" dt="2026-03-16T14:02:38.398" v="4" actId="47"/>
-        <pc:sldMkLst>
-          <pc:docMk/>
-          <pc:sldMk cId="467547607" sldId="308"/>
-        </pc:sldMkLst>
-      </pc:sldChg>
-      <pc:sldChg chg="del">
-        <pc:chgData name="Tiago Janela" userId="ee1a79fe-c79c-4f34-9602-7f6f2f0482b3" providerId="ADAL" clId="{67D2C233-DF3C-4C6D-9040-D7553E3BCB8A}" dt="2026-03-16T14:02:38.965" v="5" actId="47"/>
-        <pc:sldMkLst>
-          <pc:docMk/>
-          <pc:sldMk cId="1772121027" sldId="311"/>
-        </pc:sldMkLst>
+        <pc:graphicFrameChg chg="add del modGraphic">
+          <ac:chgData name="Tiago Janela" userId="ee1a79fe-c79c-4f34-9602-7f6f2f0482b3" providerId="ADAL" clId="{A1A622BE-A8AD-47B7-8802-BAC61BCE5126}" dt="2026-04-02T12:40:40.607" v="50" actId="478"/>
+          <ac:graphicFrameMkLst>
+            <pc:docMk/>
+            <pc:sldMk cId="1707478755" sldId="299"/>
+            <ac:graphicFrameMk id="4" creationId="{689F2044-8E26-DCF5-DE2D-9AD979C8C1EE}"/>
+          </ac:graphicFrameMkLst>
+        </pc:graphicFrameChg>
       </pc:sldChg>
     </pc:docChg>
   </pc:docChgLst>
@@ -256,14 +238,6 @@
             <ac:spMk id="2" creationId="{870990D0-7AC5-46BA-6FC4-274F8E0A3ABE}"/>
           </ac:spMkLst>
         </pc:spChg>
-        <pc:picChg chg="del mod">
-          <ac:chgData name="Tiago Janela" userId="ee1a79fe-c79c-4f34-9602-7f6f2f0482b3" providerId="ADAL" clId="{6BE67FA1-4A27-48B9-BA6A-E25A9786A9CC}" dt="2026-03-19T10:51:55.896" v="93" actId="478"/>
-          <ac:picMkLst>
-            <pc:docMk/>
-            <pc:sldMk cId="1707478755" sldId="299"/>
-            <ac:picMk id="4" creationId="{A9172708-06AB-AE7A-4BC0-05B1328EE700}"/>
-          </ac:picMkLst>
-        </pc:picChg>
       </pc:sldChg>
       <pc:sldChg chg="addSp delSp modSp add mod">
         <pc:chgData name="Tiago Janela" userId="ee1a79fe-c79c-4f34-9602-7f6f2f0482b3" providerId="ADAL" clId="{6BE67FA1-4A27-48B9-BA6A-E25A9786A9CC}" dt="2026-03-20T13:21:59.221" v="1059" actId="20577"/>
@@ -271,14 +245,6 @@
           <pc:docMk/>
           <pc:sldMk cId="457486825" sldId="300"/>
         </pc:sldMkLst>
-        <pc:spChg chg="add del mod">
-          <ac:chgData name="Tiago Janela" userId="ee1a79fe-c79c-4f34-9602-7f6f2f0482b3" providerId="ADAL" clId="{6BE67FA1-4A27-48B9-BA6A-E25A9786A9CC}" dt="2026-03-20T13:19:05.879" v="819" actId="478"/>
-          <ac:spMkLst>
-            <pc:docMk/>
-            <pc:sldMk cId="457486825" sldId="300"/>
-            <ac:spMk id="2" creationId="{870990D0-7AC5-46BA-6FC4-274F8E0A3ABE}"/>
-          </ac:spMkLst>
-        </pc:spChg>
         <pc:spChg chg="add mod">
           <ac:chgData name="Tiago Janela" userId="ee1a79fe-c79c-4f34-9602-7f6f2f0482b3" providerId="ADAL" clId="{6BE67FA1-4A27-48B9-BA6A-E25A9786A9CC}" dt="2026-03-20T13:21:59.221" v="1059" actId="20577"/>
           <ac:spMkLst>
@@ -303,14 +269,6 @@
             <ac:picMk id="4" creationId="{0F3D5BC1-9264-881D-CF39-9525F816570A}"/>
           </ac:picMkLst>
         </pc:picChg>
-        <pc:picChg chg="add del">
-          <ac:chgData name="Tiago Janela" userId="ee1a79fe-c79c-4f34-9602-7f6f2f0482b3" providerId="ADAL" clId="{6BE67FA1-4A27-48B9-BA6A-E25A9786A9CC}" dt="2026-03-20T13:16:59.024" v="605" actId="478"/>
-          <ac:picMkLst>
-            <pc:docMk/>
-            <pc:sldMk cId="457486825" sldId="300"/>
-            <ac:picMk id="6" creationId="{D3BA145D-265C-C0B1-7C0E-2EE32552E491}"/>
-          </ac:picMkLst>
-        </pc:picChg>
       </pc:sldChg>
       <pc:sldChg chg="delSp modSp add mod ord">
         <pc:chgData name="Tiago Janela" userId="ee1a79fe-c79c-4f34-9602-7f6f2f0482b3" providerId="ADAL" clId="{6BE67FA1-4A27-48B9-BA6A-E25A9786A9CC}" dt="2026-03-20T13:52:23.099" v="1063" actId="20577"/>
@@ -326,14 +284,6 @@
             <ac:spMk id="2" creationId="{870990D0-7AC5-46BA-6FC4-274F8E0A3ABE}"/>
           </ac:spMkLst>
         </pc:spChg>
-        <pc:picChg chg="del">
-          <ac:chgData name="Tiago Janela" userId="ee1a79fe-c79c-4f34-9602-7f6f2f0482b3" providerId="ADAL" clId="{6BE67FA1-4A27-48B9-BA6A-E25A9786A9CC}" dt="2026-03-20T13:16:48.406" v="599" actId="478"/>
-          <ac:picMkLst>
-            <pc:docMk/>
-            <pc:sldMk cId="2375808848" sldId="301"/>
-            <ac:picMk id="4" creationId="{0F3D5BC1-9264-881D-CF39-9525F816570A}"/>
-          </ac:picMkLst>
-        </pc:picChg>
         <pc:picChg chg="mod">
           <ac:chgData name="Tiago Janela" userId="ee1a79fe-c79c-4f34-9602-7f6f2f0482b3" providerId="ADAL" clId="{6BE67FA1-4A27-48B9-BA6A-E25A9786A9CC}" dt="2026-03-20T13:17:16.190" v="611" actId="1076"/>
           <ac:picMkLst>
@@ -346,312 +296,12 @@
     </pc:docChg>
   </pc:docChgLst>
   <pc:docChgLst>
-    <pc:chgData name="Tiago Janela" userId="ee1a79fe-c79c-4f34-9602-7f6f2f0482b3" providerId="ADAL" clId="{0E7D8533-49DC-4BED-8D2D-C8EE6F23A854}"/>
-    <pc:docChg chg="undo custSel addSld delSld modSld sldOrd modMainMaster">
-      <pc:chgData name="Tiago Janela" userId="ee1a79fe-c79c-4f34-9602-7f6f2f0482b3" providerId="ADAL" clId="{0E7D8533-49DC-4BED-8D2D-C8EE6F23A854}" dt="2026-02-03T14:21:45.404" v="3954" actId="478"/>
-      <pc:docMkLst>
-        <pc:docMk/>
-      </pc:docMkLst>
-    </pc:docChg>
-  </pc:docChgLst>
-  <pc:docChgLst>
-    <pc:chgData name="Tiago Janela" userId="ee1a79fe-c79c-4f34-9602-7f6f2f0482b3" providerId="ADAL" clId="{771048AC-4F55-42D8-AA6A-766F659A7530}"/>
-    <pc:docChg chg="undo custSel addSld delSld modSld sldOrd">
-      <pc:chgData name="Tiago Janela" userId="ee1a79fe-c79c-4f34-9602-7f6f2f0482b3" providerId="ADAL" clId="{771048AC-4F55-42D8-AA6A-766F659A7530}" dt="2026-02-05T14:24:21.198" v="2967" actId="20577"/>
-      <pc:docMkLst>
-        <pc:docMk/>
-      </pc:docMkLst>
-      <pc:sldChg chg="delSp modSp add mod">
-        <pc:chgData name="Tiago Janela" userId="ee1a79fe-c79c-4f34-9602-7f6f2f0482b3" providerId="ADAL" clId="{771048AC-4F55-42D8-AA6A-766F659A7530}" dt="2026-02-05T14:24:21.198" v="2967" actId="20577"/>
-        <pc:sldMkLst>
-          <pc:docMk/>
-          <pc:sldMk cId="901468915" sldId="296"/>
-        </pc:sldMkLst>
-        <pc:spChg chg="mod">
-          <ac:chgData name="Tiago Janela" userId="ee1a79fe-c79c-4f34-9602-7f6f2f0482b3" providerId="ADAL" clId="{771048AC-4F55-42D8-AA6A-766F659A7530}" dt="2026-02-05T10:58:00.218" v="1144" actId="20577"/>
-          <ac:spMkLst>
-            <pc:docMk/>
-            <pc:sldMk cId="901468915" sldId="296"/>
-            <ac:spMk id="163" creationId="{CBF44E8C-8654-71A0-B86B-E9D342AC2D4D}"/>
-          </ac:spMkLst>
-        </pc:spChg>
-        <pc:spChg chg="mod">
-          <ac:chgData name="Tiago Janela" userId="ee1a79fe-c79c-4f34-9602-7f6f2f0482b3" providerId="ADAL" clId="{771048AC-4F55-42D8-AA6A-766F659A7530}" dt="2026-02-05T14:24:21.198" v="2967" actId="20577"/>
-          <ac:spMkLst>
-            <pc:docMk/>
-            <pc:sldMk cId="901468915" sldId="296"/>
-            <ac:spMk id="164" creationId="{B6FA4745-5BA4-2D80-2549-988AFFB4E146}"/>
-          </ac:spMkLst>
-        </pc:spChg>
-      </pc:sldChg>
-      <pc:sldChg chg="modSp add mod ord">
-        <pc:chgData name="Tiago Janela" userId="ee1a79fe-c79c-4f34-9602-7f6f2f0482b3" providerId="ADAL" clId="{771048AC-4F55-42D8-AA6A-766F659A7530}" dt="2026-02-05T12:59:57.611" v="1910" actId="20577"/>
-        <pc:sldMkLst>
-          <pc:docMk/>
-          <pc:sldMk cId="829672710" sldId="297"/>
-        </pc:sldMkLst>
-        <pc:spChg chg="mod">
-          <ac:chgData name="Tiago Janela" userId="ee1a79fe-c79c-4f34-9602-7f6f2f0482b3" providerId="ADAL" clId="{771048AC-4F55-42D8-AA6A-766F659A7530}" dt="2026-02-05T12:59:57.611" v="1910" actId="20577"/>
-          <ac:spMkLst>
-            <pc:docMk/>
-            <pc:sldMk cId="829672710" sldId="297"/>
-            <ac:spMk id="156" creationId="{00000000-0000-0000-0000-000000000000}"/>
-          </ac:spMkLst>
-        </pc:spChg>
-      </pc:sldChg>
-      <pc:sldChg chg="delSp modSp add mod ord">
-        <pc:chgData name="Tiago Janela" userId="ee1a79fe-c79c-4f34-9602-7f6f2f0482b3" providerId="ADAL" clId="{771048AC-4F55-42D8-AA6A-766F659A7530}" dt="2026-02-05T14:23:46.564" v="2966" actId="20577"/>
-        <pc:sldMkLst>
-          <pc:docMk/>
-          <pc:sldMk cId="721732568" sldId="298"/>
-        </pc:sldMkLst>
-        <pc:spChg chg="mod">
-          <ac:chgData name="Tiago Janela" userId="ee1a79fe-c79c-4f34-9602-7f6f2f0482b3" providerId="ADAL" clId="{771048AC-4F55-42D8-AA6A-766F659A7530}" dt="2026-02-05T14:23:46.564" v="2966" actId="20577"/>
-          <ac:spMkLst>
-            <pc:docMk/>
-            <pc:sldMk cId="721732568" sldId="298"/>
-            <ac:spMk id="2" creationId="{870990D0-7AC5-46BA-6FC4-274F8E0A3ABE}"/>
-          </ac:spMkLst>
-        </pc:spChg>
-        <pc:spChg chg="mod">
-          <ac:chgData name="Tiago Janela" userId="ee1a79fe-c79c-4f34-9602-7f6f2f0482b3" providerId="ADAL" clId="{771048AC-4F55-42D8-AA6A-766F659A7530}" dt="2026-02-05T13:01:46.094" v="1930" actId="20577"/>
-          <ac:spMkLst>
-            <pc:docMk/>
-            <pc:sldMk cId="721732568" sldId="298"/>
-            <ac:spMk id="163" creationId="{57944F4B-F502-E7CC-8790-8737702BC6AC}"/>
-          </ac:spMkLst>
-        </pc:spChg>
-      </pc:sldChg>
-    </pc:docChg>
-  </pc:docChgLst>
-  <pc:docChgLst>
-    <pc:chgData name="Tiago Janela" userId="ee1a79fe-c79c-4f34-9602-7f6f2f0482b3" providerId="ADAL" clId="{A1A622BE-A8AD-47B7-8802-BAC61BCE5126}"/>
-    <pc:docChg chg="undo custSel modSld">
-      <pc:chgData name="Tiago Janela" userId="ee1a79fe-c79c-4f34-9602-7f6f2f0482b3" providerId="ADAL" clId="{A1A622BE-A8AD-47B7-8802-BAC61BCE5126}" dt="2026-03-04T13:21:40.843" v="48" actId="403"/>
-      <pc:docMkLst>
-        <pc:docMk/>
-      </pc:docMkLst>
-      <pc:sldChg chg="modSp mod">
-        <pc:chgData name="Tiago Janela" userId="ee1a79fe-c79c-4f34-9602-7f6f2f0482b3" providerId="ADAL" clId="{A1A622BE-A8AD-47B7-8802-BAC61BCE5126}" dt="2026-03-04T13:20:02.161" v="40" actId="20577"/>
-        <pc:sldMkLst>
-          <pc:docMk/>
-          <pc:sldMk cId="114778141" sldId="303"/>
-        </pc:sldMkLst>
-        <pc:spChg chg="mod">
-          <ac:chgData name="Tiago Janela" userId="ee1a79fe-c79c-4f34-9602-7f6f2f0482b3" providerId="ADAL" clId="{A1A622BE-A8AD-47B7-8802-BAC61BCE5126}" dt="2026-03-04T13:20:02.161" v="40" actId="20577"/>
-          <ac:spMkLst>
-            <pc:docMk/>
-            <pc:sldMk cId="114778141" sldId="303"/>
-            <ac:spMk id="2" creationId="{3A594187-BB0C-FE87-8E79-972F5DD9EAE2}"/>
-          </ac:spMkLst>
-        </pc:spChg>
-      </pc:sldChg>
-      <pc:sldChg chg="modSp mod">
-        <pc:chgData name="Tiago Janela" userId="ee1a79fe-c79c-4f34-9602-7f6f2f0482b3" providerId="ADAL" clId="{A1A622BE-A8AD-47B7-8802-BAC61BCE5126}" dt="2026-03-04T13:21:32.291" v="47" actId="20577"/>
-        <pc:sldMkLst>
-          <pc:docMk/>
-          <pc:sldMk cId="1211845523" sldId="306"/>
-        </pc:sldMkLst>
-        <pc:spChg chg="mod">
-          <ac:chgData name="Tiago Janela" userId="ee1a79fe-c79c-4f34-9602-7f6f2f0482b3" providerId="ADAL" clId="{A1A622BE-A8AD-47B7-8802-BAC61BCE5126}" dt="2026-03-04T13:21:32.291" v="47" actId="20577"/>
-          <ac:spMkLst>
-            <pc:docMk/>
-            <pc:sldMk cId="1211845523" sldId="306"/>
-            <ac:spMk id="2" creationId="{3A594187-BB0C-FE87-8E79-972F5DD9EAE2}"/>
-          </ac:spMkLst>
-        </pc:spChg>
-      </pc:sldChg>
-      <pc:sldChg chg="modSp mod">
-        <pc:chgData name="Tiago Janela" userId="ee1a79fe-c79c-4f34-9602-7f6f2f0482b3" providerId="ADAL" clId="{A1A622BE-A8AD-47B7-8802-BAC61BCE5126}" dt="2026-03-04T13:21:40.843" v="48" actId="403"/>
-        <pc:sldMkLst>
-          <pc:docMk/>
-          <pc:sldMk cId="4258501269" sldId="307"/>
-        </pc:sldMkLst>
-        <pc:spChg chg="mod">
-          <ac:chgData name="Tiago Janela" userId="ee1a79fe-c79c-4f34-9602-7f6f2f0482b3" providerId="ADAL" clId="{A1A622BE-A8AD-47B7-8802-BAC61BCE5126}" dt="2026-03-04T13:21:40.843" v="48" actId="403"/>
-          <ac:spMkLst>
-            <pc:docMk/>
-            <pc:sldMk cId="4258501269" sldId="307"/>
-            <ac:spMk id="2" creationId="{3A594187-BB0C-FE87-8E79-972F5DD9EAE2}"/>
-          </ac:spMkLst>
-        </pc:spChg>
-      </pc:sldChg>
-    </pc:docChg>
-  </pc:docChgLst>
-  <pc:docChgLst>
-    <pc:chgData name="Tiago Janela" userId="ee1a79fe-c79c-4f34-9602-7f6f2f0482b3" providerId="ADAL" clId="{143C78B0-29AB-41F6-944B-45926E54C361}"/>
-    <pc:docChg chg="undo custSel addSld delSld modSld">
-      <pc:chgData name="Tiago Janela" userId="ee1a79fe-c79c-4f34-9602-7f6f2f0482b3" providerId="ADAL" clId="{143C78B0-29AB-41F6-944B-45926E54C361}" dt="2026-02-06T15:56:52.044" v="1423" actId="20577"/>
-      <pc:docMkLst>
-        <pc:docMk/>
-      </pc:docMkLst>
-      <pc:sldChg chg="del">
-        <pc:chgData name="Tiago Janela" userId="ee1a79fe-c79c-4f34-9602-7f6f2f0482b3" providerId="ADAL" clId="{143C78B0-29AB-41F6-944B-45926E54C361}" dt="2026-02-06T11:02:26.764" v="8" actId="47"/>
-        <pc:sldMkLst>
-          <pc:docMk/>
-          <pc:sldMk cId="237093369" sldId="283"/>
-        </pc:sldMkLst>
-      </pc:sldChg>
-      <pc:sldChg chg="del">
-        <pc:chgData name="Tiago Janela" userId="ee1a79fe-c79c-4f34-9602-7f6f2f0482b3" providerId="ADAL" clId="{143C78B0-29AB-41F6-944B-45926E54C361}" dt="2026-02-06T11:02:27.633" v="9" actId="47"/>
-        <pc:sldMkLst>
-          <pc:docMk/>
-          <pc:sldMk cId="1512688275" sldId="289"/>
-        </pc:sldMkLst>
-      </pc:sldChg>
-      <pc:sldChg chg="modSp mod">
-        <pc:chgData name="Tiago Janela" userId="ee1a79fe-c79c-4f34-9602-7f6f2f0482b3" providerId="ADAL" clId="{143C78B0-29AB-41F6-944B-45926E54C361}" dt="2026-02-06T15:49:13.450" v="1174" actId="20577"/>
-        <pc:sldMkLst>
-          <pc:docMk/>
-          <pc:sldMk cId="901468915" sldId="296"/>
-        </pc:sldMkLst>
-        <pc:spChg chg="mod">
-          <ac:chgData name="Tiago Janela" userId="ee1a79fe-c79c-4f34-9602-7f6f2f0482b3" providerId="ADAL" clId="{143C78B0-29AB-41F6-944B-45926E54C361}" dt="2026-02-06T15:49:13.450" v="1174" actId="20577"/>
-          <ac:spMkLst>
-            <pc:docMk/>
-            <pc:sldMk cId="901468915" sldId="296"/>
-            <ac:spMk id="164" creationId="{B6FA4745-5BA4-2D80-2549-988AFFB4E146}"/>
-          </ac:spMkLst>
-        </pc:spChg>
-      </pc:sldChg>
-      <pc:sldChg chg="modSp mod">
-        <pc:chgData name="Tiago Janela" userId="ee1a79fe-c79c-4f34-9602-7f6f2f0482b3" providerId="ADAL" clId="{143C78B0-29AB-41F6-944B-45926E54C361}" dt="2026-02-06T13:27:15.929" v="215" actId="20577"/>
-        <pc:sldMkLst>
-          <pc:docMk/>
-          <pc:sldMk cId="829672710" sldId="297"/>
-        </pc:sldMkLst>
-        <pc:spChg chg="mod">
-          <ac:chgData name="Tiago Janela" userId="ee1a79fe-c79c-4f34-9602-7f6f2f0482b3" providerId="ADAL" clId="{143C78B0-29AB-41F6-944B-45926E54C361}" dt="2026-02-06T13:27:15.929" v="215" actId="20577"/>
-          <ac:spMkLst>
-            <pc:docMk/>
-            <pc:sldMk cId="829672710" sldId="297"/>
-            <ac:spMk id="156" creationId="{00000000-0000-0000-0000-000000000000}"/>
-          </ac:spMkLst>
-        </pc:spChg>
-      </pc:sldChg>
-      <pc:sldChg chg="modSp mod">
-        <pc:chgData name="Tiago Janela" userId="ee1a79fe-c79c-4f34-9602-7f6f2f0482b3" providerId="ADAL" clId="{143C78B0-29AB-41F6-944B-45926E54C361}" dt="2026-02-06T15:55:25.972" v="1391" actId="20577"/>
-        <pc:sldMkLst>
-          <pc:docMk/>
-          <pc:sldMk cId="721732568" sldId="298"/>
-        </pc:sldMkLst>
-        <pc:spChg chg="mod">
-          <ac:chgData name="Tiago Janela" userId="ee1a79fe-c79c-4f34-9602-7f6f2f0482b3" providerId="ADAL" clId="{143C78B0-29AB-41F6-944B-45926E54C361}" dt="2026-02-06T15:55:25.972" v="1391" actId="20577"/>
-          <ac:spMkLst>
-            <pc:docMk/>
-            <pc:sldMk cId="721732568" sldId="298"/>
-            <ac:spMk id="2" creationId="{870990D0-7AC5-46BA-6FC4-274F8E0A3ABE}"/>
-          </ac:spMkLst>
-        </pc:spChg>
-      </pc:sldChg>
-    </pc:docChg>
-  </pc:docChgLst>
-  <pc:docChgLst>
     <pc:chgData name="Tiago Janela" userId="ee1a79fe-c79c-4f34-9602-7f6f2f0482b3" providerId="ADAL" clId="{97693404-9C1B-400A-95DF-A7B72570E7A0}"/>
     <pc:docChg chg="undo custSel addSld delSld modSld sldOrd">
       <pc:chgData name="Tiago Janela" userId="ee1a79fe-c79c-4f34-9602-7f6f2f0482b3" providerId="ADAL" clId="{97693404-9C1B-400A-95DF-A7B72570E7A0}" dt="2026-03-09T10:33:25.226" v="5259" actId="20577"/>
       <pc:docMkLst>
         <pc:docMk/>
       </pc:docMkLst>
-      <pc:sldChg chg="addSp delSp modSp add del mod ord modShow">
-        <pc:chgData name="Tiago Janela" userId="ee1a79fe-c79c-4f34-9602-7f6f2f0482b3" providerId="ADAL" clId="{97693404-9C1B-400A-95DF-A7B72570E7A0}" dt="2026-03-04T15:49:46.058" v="3107" actId="47"/>
-        <pc:sldMkLst>
-          <pc:docMk/>
-          <pc:sldMk cId="237093369" sldId="283"/>
-        </pc:sldMkLst>
-        <pc:spChg chg="mod">
-          <ac:chgData name="Tiago Janela" userId="ee1a79fe-c79c-4f34-9602-7f6f2f0482b3" providerId="ADAL" clId="{97693404-9C1B-400A-95DF-A7B72570E7A0}" dt="2026-02-18T10:48:32.233" v="764" actId="20577"/>
-          <ac:spMkLst>
-            <pc:docMk/>
-            <pc:sldMk cId="237093369" sldId="283"/>
-            <ac:spMk id="2" creationId="{A233ED7C-B6A5-4EE5-B53E-783F754D3347}"/>
-          </ac:spMkLst>
-        </pc:spChg>
-        <pc:picChg chg="add mod">
-          <ac:chgData name="Tiago Janela" userId="ee1a79fe-c79c-4f34-9602-7f6f2f0482b3" providerId="ADAL" clId="{97693404-9C1B-400A-95DF-A7B72570E7A0}" dt="2026-02-17T11:10:19.140" v="217" actId="1076"/>
-          <ac:picMkLst>
-            <pc:docMk/>
-            <pc:sldMk cId="237093369" sldId="283"/>
-            <ac:picMk id="4" creationId="{4FA090B0-7C9B-9822-E35B-620E002E37C5}"/>
-          </ac:picMkLst>
-        </pc:picChg>
-        <pc:picChg chg="add mod">
-          <ac:chgData name="Tiago Janela" userId="ee1a79fe-c79c-4f34-9602-7f6f2f0482b3" providerId="ADAL" clId="{97693404-9C1B-400A-95DF-A7B72570E7A0}" dt="2026-02-17T11:12:23.236" v="223" actId="1076"/>
-          <ac:picMkLst>
-            <pc:docMk/>
-            <pc:sldMk cId="237093369" sldId="283"/>
-            <ac:picMk id="8" creationId="{EEE00D1D-8814-4A51-2880-2E6DEA971096}"/>
-          </ac:picMkLst>
-        </pc:picChg>
-      </pc:sldChg>
-      <pc:sldChg chg="addSp delSp modSp add del mod">
-        <pc:chgData name="Tiago Janela" userId="ee1a79fe-c79c-4f34-9602-7f6f2f0482b3" providerId="ADAL" clId="{97693404-9C1B-400A-95DF-A7B72570E7A0}" dt="2026-03-04T12:56:57.437" v="1506" actId="47"/>
-        <pc:sldMkLst>
-          <pc:docMk/>
-          <pc:sldMk cId="2286645179" sldId="284"/>
-        </pc:sldMkLst>
-      </pc:sldChg>
-      <pc:sldChg chg="addSp delSp modSp add del mod modShow">
-        <pc:chgData name="Tiago Janela" userId="ee1a79fe-c79c-4f34-9602-7f6f2f0482b3" providerId="ADAL" clId="{97693404-9C1B-400A-95DF-A7B72570E7A0}" dt="2026-03-09T10:28:34.266" v="5109" actId="47"/>
-        <pc:sldMkLst>
-          <pc:docMk/>
-          <pc:sldMk cId="1512688275" sldId="289"/>
-        </pc:sldMkLst>
-        <pc:spChg chg="mod">
-          <ac:chgData name="Tiago Janela" userId="ee1a79fe-c79c-4f34-9602-7f6f2f0482b3" providerId="ADAL" clId="{97693404-9C1B-400A-95DF-A7B72570E7A0}" dt="2026-03-04T13:32:03.522" v="2558" actId="20577"/>
-          <ac:spMkLst>
-            <pc:docMk/>
-            <pc:sldMk cId="1512688275" sldId="289"/>
-            <ac:spMk id="5" creationId="{E8A7F028-74CF-6C54-4DD5-3B4B5B71E2D8}"/>
-          </ac:spMkLst>
-        </pc:spChg>
-        <pc:spChg chg="mod">
-          <ac:chgData name="Tiago Janela" userId="ee1a79fe-c79c-4f34-9602-7f6f2f0482b3" providerId="ADAL" clId="{97693404-9C1B-400A-95DF-A7B72570E7A0}" dt="2026-02-18T13:37:13.121" v="874"/>
-          <ac:spMkLst>
-            <pc:docMk/>
-            <pc:sldMk cId="1512688275" sldId="289"/>
-            <ac:spMk id="163" creationId="{FCB0975A-D008-0F54-1C32-ED7E3F322A93}"/>
-          </ac:spMkLst>
-        </pc:spChg>
-        <pc:picChg chg="add mod">
-          <ac:chgData name="Tiago Janela" userId="ee1a79fe-c79c-4f34-9602-7f6f2f0482b3" providerId="ADAL" clId="{97693404-9C1B-400A-95DF-A7B72570E7A0}" dt="2026-03-04T14:15:47.569" v="3078" actId="1076"/>
-          <ac:picMkLst>
-            <pc:docMk/>
-            <pc:sldMk cId="1512688275" sldId="289"/>
-            <ac:picMk id="3" creationId="{F8FE564D-C14A-D361-F39B-D2C4FD46193B}"/>
-          </ac:picMkLst>
-        </pc:picChg>
-      </pc:sldChg>
-      <pc:sldChg chg="modSp mod ord">
-        <pc:chgData name="Tiago Janela" userId="ee1a79fe-c79c-4f34-9602-7f6f2f0482b3" providerId="ADAL" clId="{97693404-9C1B-400A-95DF-A7B72570E7A0}" dt="2026-03-09T10:33:25.226" v="5259" actId="20577"/>
-        <pc:sldMkLst>
-          <pc:docMk/>
-          <pc:sldMk cId="901468915" sldId="296"/>
-        </pc:sldMkLst>
-        <pc:spChg chg="mod">
-          <ac:chgData name="Tiago Janela" userId="ee1a79fe-c79c-4f34-9602-7f6f2f0482b3" providerId="ADAL" clId="{97693404-9C1B-400A-95DF-A7B72570E7A0}" dt="2026-03-09T10:33:25.226" v="5259" actId="20577"/>
-          <ac:spMkLst>
-            <pc:docMk/>
-            <pc:sldMk cId="901468915" sldId="296"/>
-            <ac:spMk id="164" creationId="{B6FA4745-5BA4-2D80-2549-988AFFB4E146}"/>
-          </ac:spMkLst>
-        </pc:spChg>
-      </pc:sldChg>
-      <pc:sldChg chg="modSp mod">
-        <pc:chgData name="Tiago Janela" userId="ee1a79fe-c79c-4f34-9602-7f6f2f0482b3" providerId="ADAL" clId="{97693404-9C1B-400A-95DF-A7B72570E7A0}" dt="2026-02-17T10:42:44.707" v="22" actId="20577"/>
-        <pc:sldMkLst>
-          <pc:docMk/>
-          <pc:sldMk cId="829672710" sldId="297"/>
-        </pc:sldMkLst>
-        <pc:spChg chg="mod">
-          <ac:chgData name="Tiago Janela" userId="ee1a79fe-c79c-4f34-9602-7f6f2f0482b3" providerId="ADAL" clId="{97693404-9C1B-400A-95DF-A7B72570E7A0}" dt="2026-02-17T10:42:44.707" v="22" actId="20577"/>
-          <ac:spMkLst>
-            <pc:docMk/>
-            <pc:sldMk cId="829672710" sldId="297"/>
-            <ac:spMk id="156" creationId="{00000000-0000-0000-0000-000000000000}"/>
-          </ac:spMkLst>
-        </pc:spChg>
-      </pc:sldChg>
       <pc:sldChg chg="modSp mod">
         <pc:chgData name="Tiago Janela" userId="ee1a79fe-c79c-4f34-9602-7f6f2f0482b3" providerId="ADAL" clId="{97693404-9C1B-400A-95DF-A7B72570E7A0}" dt="2026-03-09T10:32:29.235" v="5249" actId="20577"/>
         <pc:sldMkLst>
@@ -666,328 +316,6 @@
             <ac:spMk id="2" creationId="{870990D0-7AC5-46BA-6FC4-274F8E0A3ABE}"/>
           </ac:spMkLst>
         </pc:spChg>
-      </pc:sldChg>
-      <pc:sldChg chg="modSp add del mod">
-        <pc:chgData name="Tiago Janela" userId="ee1a79fe-c79c-4f34-9602-7f6f2f0482b3" providerId="ADAL" clId="{97693404-9C1B-400A-95DF-A7B72570E7A0}" dt="2026-03-04T12:57:02.180" v="1508" actId="47"/>
-        <pc:sldMkLst>
-          <pc:docMk/>
-          <pc:sldMk cId="3325464043" sldId="300"/>
-        </pc:sldMkLst>
-      </pc:sldChg>
-      <pc:sldChg chg="addSp delSp modSp add del mod">
-        <pc:chgData name="Tiago Janela" userId="ee1a79fe-c79c-4f34-9602-7f6f2f0482b3" providerId="ADAL" clId="{97693404-9C1B-400A-95DF-A7B72570E7A0}" dt="2026-03-04T12:56:58.303" v="1507" actId="47"/>
-        <pc:sldMkLst>
-          <pc:docMk/>
-          <pc:sldMk cId="1549526940" sldId="301"/>
-        </pc:sldMkLst>
-      </pc:sldChg>
-      <pc:sldChg chg="modSp add del mod ord modShow">
-        <pc:chgData name="Tiago Janela" userId="ee1a79fe-c79c-4f34-9602-7f6f2f0482b3" providerId="ADAL" clId="{97693404-9C1B-400A-95DF-A7B72570E7A0}" dt="2026-03-04T15:49:47.418" v="3108" actId="47"/>
-        <pc:sldMkLst>
-          <pc:docMk/>
-          <pc:sldMk cId="1735901252" sldId="302"/>
-        </pc:sldMkLst>
-        <pc:spChg chg="mod">
-          <ac:chgData name="Tiago Janela" userId="ee1a79fe-c79c-4f34-9602-7f6f2f0482b3" providerId="ADAL" clId="{97693404-9C1B-400A-95DF-A7B72570E7A0}" dt="2026-02-18T14:57:20.851" v="1269" actId="6549"/>
-          <ac:spMkLst>
-            <pc:docMk/>
-            <pc:sldMk cId="1735901252" sldId="302"/>
-            <ac:spMk id="5" creationId="{E8A7F028-74CF-6C54-4DD5-3B4B5B71E2D8}"/>
-          </ac:spMkLst>
-        </pc:spChg>
-      </pc:sldChg>
-      <pc:sldChg chg="addSp delSp modSp add mod ord">
-        <pc:chgData name="Tiago Janela" userId="ee1a79fe-c79c-4f34-9602-7f6f2f0482b3" providerId="ADAL" clId="{97693404-9C1B-400A-95DF-A7B72570E7A0}" dt="2026-03-05T10:55:03.980" v="3510" actId="6549"/>
-        <pc:sldMkLst>
-          <pc:docMk/>
-          <pc:sldMk cId="114778141" sldId="303"/>
-        </pc:sldMkLst>
-        <pc:spChg chg="add mod">
-          <ac:chgData name="Tiago Janela" userId="ee1a79fe-c79c-4f34-9602-7f6f2f0482b3" providerId="ADAL" clId="{97693404-9C1B-400A-95DF-A7B72570E7A0}" dt="2026-03-05T10:55:03.980" v="3510" actId="6549"/>
-          <ac:spMkLst>
-            <pc:docMk/>
-            <pc:sldMk cId="114778141" sldId="303"/>
-            <ac:spMk id="2" creationId="{3A594187-BB0C-FE87-8E79-972F5DD9EAE2}"/>
-          </ac:spMkLst>
-        </pc:spChg>
-        <pc:spChg chg="mod">
-          <ac:chgData name="Tiago Janela" userId="ee1a79fe-c79c-4f34-9602-7f6f2f0482b3" providerId="ADAL" clId="{97693404-9C1B-400A-95DF-A7B72570E7A0}" dt="2026-03-04T13:14:00.403" v="2164" actId="20577"/>
-          <ac:spMkLst>
-            <pc:docMk/>
-            <pc:sldMk cId="114778141" sldId="303"/>
-            <ac:spMk id="166" creationId="{73C6FAEE-CE23-BB36-58B3-A5E5504E1C3B}"/>
-          </ac:spMkLst>
-        </pc:spChg>
-        <pc:picChg chg="add mod">
-          <ac:chgData name="Tiago Janela" userId="ee1a79fe-c79c-4f34-9602-7f6f2f0482b3" providerId="ADAL" clId="{97693404-9C1B-400A-95DF-A7B72570E7A0}" dt="2026-03-05T10:53:17.064" v="3461"/>
-          <ac:picMkLst>
-            <pc:docMk/>
-            <pc:sldMk cId="114778141" sldId="303"/>
-            <ac:picMk id="3" creationId="{F7A1CE92-8480-32AA-303B-900FB583DC9A}"/>
-          </ac:picMkLst>
-        </pc:picChg>
-        <pc:picChg chg="add del mod">
-          <ac:chgData name="Tiago Janela" userId="ee1a79fe-c79c-4f34-9602-7f6f2f0482b3" providerId="ADAL" clId="{97693404-9C1B-400A-95DF-A7B72570E7A0}" dt="2026-03-05T10:53:28.398" v="3462" actId="478"/>
-          <ac:picMkLst>
-            <pc:docMk/>
-            <pc:sldMk cId="114778141" sldId="303"/>
-            <ac:picMk id="5" creationId="{16C4F416-280C-5702-243E-680D20284ADD}"/>
-          </ac:picMkLst>
-        </pc:picChg>
-      </pc:sldChg>
-      <pc:sldChg chg="addSp delSp modSp add del mod">
-        <pc:chgData name="Tiago Janela" userId="ee1a79fe-c79c-4f34-9602-7f6f2f0482b3" providerId="ADAL" clId="{97693404-9C1B-400A-95DF-A7B72570E7A0}" dt="2026-03-04T13:01:43.503" v="1711" actId="47"/>
-        <pc:sldMkLst>
-          <pc:docMk/>
-          <pc:sldMk cId="821539772" sldId="304"/>
-        </pc:sldMkLst>
-      </pc:sldChg>
-      <pc:sldChg chg="modSp add del mod">
-        <pc:chgData name="Tiago Janela" userId="ee1a79fe-c79c-4f34-9602-7f6f2f0482b3" providerId="ADAL" clId="{97693404-9C1B-400A-95DF-A7B72570E7A0}" dt="2026-03-04T13:23:29.410" v="2203" actId="47"/>
-        <pc:sldMkLst>
-          <pc:docMk/>
-          <pc:sldMk cId="2309601796" sldId="305"/>
-        </pc:sldMkLst>
-        <pc:spChg chg="mod">
-          <ac:chgData name="Tiago Janela" userId="ee1a79fe-c79c-4f34-9602-7f6f2f0482b3" providerId="ADAL" clId="{97693404-9C1B-400A-95DF-A7B72570E7A0}" dt="2026-02-27T11:05:59.764" v="1458" actId="15"/>
-          <ac:spMkLst>
-            <pc:docMk/>
-            <pc:sldMk cId="2309601796" sldId="305"/>
-            <ac:spMk id="2" creationId="{870990D0-7AC5-46BA-6FC4-274F8E0A3ABE}"/>
-          </ac:spMkLst>
-        </pc:spChg>
-        <pc:spChg chg="mod">
-          <ac:chgData name="Tiago Janela" userId="ee1a79fe-c79c-4f34-9602-7f6f2f0482b3" providerId="ADAL" clId="{97693404-9C1B-400A-95DF-A7B72570E7A0}" dt="2026-02-27T11:03:52.458" v="1363" actId="20577"/>
-          <ac:spMkLst>
-            <pc:docMk/>
-            <pc:sldMk cId="2309601796" sldId="305"/>
-            <ac:spMk id="163" creationId="{57944F4B-F502-E7CC-8790-8737702BC6AC}"/>
-          </ac:spMkLst>
-        </pc:spChg>
-      </pc:sldChg>
-      <pc:sldChg chg="modSp add mod">
-        <pc:chgData name="Tiago Janela" userId="ee1a79fe-c79c-4f34-9602-7f6f2f0482b3" providerId="ADAL" clId="{97693404-9C1B-400A-95DF-A7B72570E7A0}" dt="2026-03-09T10:32:38.571" v="5250" actId="113"/>
-        <pc:sldMkLst>
-          <pc:docMk/>
-          <pc:sldMk cId="1211845523" sldId="306"/>
-        </pc:sldMkLst>
-        <pc:spChg chg="mod">
-          <ac:chgData name="Tiago Janela" userId="ee1a79fe-c79c-4f34-9602-7f6f2f0482b3" providerId="ADAL" clId="{97693404-9C1B-400A-95DF-A7B72570E7A0}" dt="2026-03-09T10:32:38.571" v="5250" actId="113"/>
-          <ac:spMkLst>
-            <pc:docMk/>
-            <pc:sldMk cId="1211845523" sldId="306"/>
-            <ac:spMk id="2" creationId="{3A594187-BB0C-FE87-8E79-972F5DD9EAE2}"/>
-          </ac:spMkLst>
-        </pc:spChg>
-        <pc:spChg chg="mod">
-          <ac:chgData name="Tiago Janela" userId="ee1a79fe-c79c-4f34-9602-7f6f2f0482b3" providerId="ADAL" clId="{97693404-9C1B-400A-95DF-A7B72570E7A0}" dt="2026-03-04T13:13:51.930" v="2155" actId="20577"/>
-          <ac:spMkLst>
-            <pc:docMk/>
-            <pc:sldMk cId="1211845523" sldId="306"/>
-            <ac:spMk id="166" creationId="{73C6FAEE-CE23-BB36-58B3-A5E5504E1C3B}"/>
-          </ac:spMkLst>
-        </pc:spChg>
-        <pc:picChg chg="mod">
-          <ac:chgData name="Tiago Janela" userId="ee1a79fe-c79c-4f34-9602-7f6f2f0482b3" providerId="ADAL" clId="{97693404-9C1B-400A-95DF-A7B72570E7A0}" dt="2026-03-05T10:52:53.748" v="3459" actId="1076"/>
-          <ac:picMkLst>
-            <pc:docMk/>
-            <pc:sldMk cId="1211845523" sldId="306"/>
-            <ac:picMk id="5" creationId="{16C4F416-280C-5702-243E-680D20284ADD}"/>
-          </ac:picMkLst>
-        </pc:picChg>
-      </pc:sldChg>
-      <pc:sldChg chg="addSp delSp modSp add mod">
-        <pc:chgData name="Tiago Janela" userId="ee1a79fe-c79c-4f34-9602-7f6f2f0482b3" providerId="ADAL" clId="{97693404-9C1B-400A-95DF-A7B72570E7A0}" dt="2026-03-05T10:55:12.788" v="3513" actId="20577"/>
-        <pc:sldMkLst>
-          <pc:docMk/>
-          <pc:sldMk cId="4258501269" sldId="307"/>
-        </pc:sldMkLst>
-        <pc:spChg chg="mod">
-          <ac:chgData name="Tiago Janela" userId="ee1a79fe-c79c-4f34-9602-7f6f2f0482b3" providerId="ADAL" clId="{97693404-9C1B-400A-95DF-A7B72570E7A0}" dt="2026-03-05T10:55:12.788" v="3513" actId="20577"/>
-          <ac:spMkLst>
-            <pc:docMk/>
-            <pc:sldMk cId="4258501269" sldId="307"/>
-            <ac:spMk id="2" creationId="{3A594187-BB0C-FE87-8E79-972F5DD9EAE2}"/>
-          </ac:spMkLst>
-        </pc:spChg>
-        <pc:spChg chg="mod">
-          <ac:chgData name="Tiago Janela" userId="ee1a79fe-c79c-4f34-9602-7f6f2f0482b3" providerId="ADAL" clId="{97693404-9C1B-400A-95DF-A7B72570E7A0}" dt="2026-03-04T13:13:41.592" v="2147"/>
-          <ac:spMkLst>
-            <pc:docMk/>
-            <pc:sldMk cId="4258501269" sldId="307"/>
-            <ac:spMk id="166" creationId="{73C6FAEE-CE23-BB36-58B3-A5E5504E1C3B}"/>
-          </ac:spMkLst>
-        </pc:spChg>
-        <pc:picChg chg="add mod">
-          <ac:chgData name="Tiago Janela" userId="ee1a79fe-c79c-4f34-9602-7f6f2f0482b3" providerId="ADAL" clId="{97693404-9C1B-400A-95DF-A7B72570E7A0}" dt="2026-03-04T13:08:27.808" v="2136" actId="1076"/>
-          <ac:picMkLst>
-            <pc:docMk/>
-            <pc:sldMk cId="4258501269" sldId="307"/>
-            <ac:picMk id="3" creationId="{8E704CBB-B9BA-C9D1-3227-A6CD3868AFE7}"/>
-          </ac:picMkLst>
-        </pc:picChg>
-        <pc:picChg chg="del">
-          <ac:chgData name="Tiago Janela" userId="ee1a79fe-c79c-4f34-9602-7f6f2f0482b3" providerId="ADAL" clId="{97693404-9C1B-400A-95DF-A7B72570E7A0}" dt="2026-03-04T13:01:40.953" v="1709" actId="478"/>
-          <ac:picMkLst>
-            <pc:docMk/>
-            <pc:sldMk cId="4258501269" sldId="307"/>
-            <ac:picMk id="5" creationId="{16C4F416-280C-5702-243E-680D20284ADD}"/>
-          </ac:picMkLst>
-        </pc:picChg>
-      </pc:sldChg>
-      <pc:sldChg chg="addSp delSp modSp add mod">
-        <pc:chgData name="Tiago Janela" userId="ee1a79fe-c79c-4f34-9602-7f6f2f0482b3" providerId="ADAL" clId="{97693404-9C1B-400A-95DF-A7B72570E7A0}" dt="2026-03-09T10:32:58.339" v="5256" actId="113"/>
-        <pc:sldMkLst>
-          <pc:docMk/>
-          <pc:sldMk cId="467547607" sldId="308"/>
-        </pc:sldMkLst>
-        <pc:spChg chg="mod">
-          <ac:chgData name="Tiago Janela" userId="ee1a79fe-c79c-4f34-9602-7f6f2f0482b3" providerId="ADAL" clId="{97693404-9C1B-400A-95DF-A7B72570E7A0}" dt="2026-03-09T10:32:58.339" v="5256" actId="113"/>
-          <ac:spMkLst>
-            <pc:docMk/>
-            <pc:sldMk cId="467547607" sldId="308"/>
-            <ac:spMk id="2" creationId="{3A594187-BB0C-FE87-8E79-972F5DD9EAE2}"/>
-          </ac:spMkLst>
-        </pc:spChg>
-        <pc:spChg chg="mod">
-          <ac:chgData name="Tiago Janela" userId="ee1a79fe-c79c-4f34-9602-7f6f2f0482b3" providerId="ADAL" clId="{97693404-9C1B-400A-95DF-A7B72570E7A0}" dt="2026-03-04T13:13:33.588" v="2145" actId="20577"/>
-          <ac:spMkLst>
-            <pc:docMk/>
-            <pc:sldMk cId="467547607" sldId="308"/>
-            <ac:spMk id="166" creationId="{73C6FAEE-CE23-BB36-58B3-A5E5504E1C3B}"/>
-          </ac:spMkLst>
-        </pc:spChg>
-        <pc:picChg chg="del">
-          <ac:chgData name="Tiago Janela" userId="ee1a79fe-c79c-4f34-9602-7f6f2f0482b3" providerId="ADAL" clId="{97693404-9C1B-400A-95DF-A7B72570E7A0}" dt="2026-03-04T13:08:32.120" v="2137" actId="478"/>
-          <ac:picMkLst>
-            <pc:docMk/>
-            <pc:sldMk cId="467547607" sldId="308"/>
-            <ac:picMk id="3" creationId="{8E704CBB-B9BA-C9D1-3227-A6CD3868AFE7}"/>
-          </ac:picMkLst>
-        </pc:picChg>
-        <pc:picChg chg="add mod">
-          <ac:chgData name="Tiago Janela" userId="ee1a79fe-c79c-4f34-9602-7f6f2f0482b3" providerId="ADAL" clId="{97693404-9C1B-400A-95DF-A7B72570E7A0}" dt="2026-03-05T11:04:31.708" v="3761" actId="1076"/>
-          <ac:picMkLst>
-            <pc:docMk/>
-            <pc:sldMk cId="467547607" sldId="308"/>
-            <ac:picMk id="4" creationId="{088487E6-6EDF-5379-BFE0-AE14A850C52A}"/>
-          </ac:picMkLst>
-        </pc:picChg>
-      </pc:sldChg>
-      <pc:sldChg chg="modSp add del mod">
-        <pc:chgData name="Tiago Janela" userId="ee1a79fe-c79c-4f34-9602-7f6f2f0482b3" providerId="ADAL" clId="{97693404-9C1B-400A-95DF-A7B72570E7A0}" dt="2026-03-04T13:46:26.076" v="3074" actId="47"/>
-        <pc:sldMkLst>
-          <pc:docMk/>
-          <pc:sldMk cId="3166687561" sldId="309"/>
-        </pc:sldMkLst>
-        <pc:spChg chg="mod">
-          <ac:chgData name="Tiago Janela" userId="ee1a79fe-c79c-4f34-9602-7f6f2f0482b3" providerId="ADAL" clId="{97693404-9C1B-400A-95DF-A7B72570E7A0}" dt="2026-03-04T13:42:35.307" v="2999" actId="404"/>
-          <ac:spMkLst>
-            <pc:docMk/>
-            <pc:sldMk cId="3166687561" sldId="309"/>
-            <ac:spMk id="5" creationId="{E8A7F028-74CF-6C54-4DD5-3B4B5B71E2D8}"/>
-          </ac:spMkLst>
-        </pc:spChg>
-      </pc:sldChg>
-      <pc:sldChg chg="addSp delSp modSp add del mod modShow">
-        <pc:chgData name="Tiago Janela" userId="ee1a79fe-c79c-4f34-9602-7f6f2f0482b3" providerId="ADAL" clId="{97693404-9C1B-400A-95DF-A7B72570E7A0}" dt="2026-03-09T10:28:35" v="5110" actId="47"/>
-        <pc:sldMkLst>
-          <pc:docMk/>
-          <pc:sldMk cId="1164058602" sldId="310"/>
-        </pc:sldMkLst>
-        <pc:spChg chg="mod">
-          <ac:chgData name="Tiago Janela" userId="ee1a79fe-c79c-4f34-9602-7f6f2f0482b3" providerId="ADAL" clId="{97693404-9C1B-400A-95DF-A7B72570E7A0}" dt="2026-03-04T14:15:29.937" v="3077" actId="14100"/>
-          <ac:spMkLst>
-            <pc:docMk/>
-            <pc:sldMk cId="1164058602" sldId="310"/>
-            <ac:spMk id="5" creationId="{E8A7F028-74CF-6C54-4DD5-3B4B5B71E2D8}"/>
-          </ac:spMkLst>
-        </pc:spChg>
-        <pc:graphicFrameChg chg="add mod modGraphic">
-          <ac:chgData name="Tiago Janela" userId="ee1a79fe-c79c-4f34-9602-7f6f2f0482b3" providerId="ADAL" clId="{97693404-9C1B-400A-95DF-A7B72570E7A0}" dt="2026-03-04T13:45:45.143" v="3066" actId="1076"/>
-          <ac:graphicFrameMkLst>
-            <pc:docMk/>
-            <pc:sldMk cId="1164058602" sldId="310"/>
-            <ac:graphicFrameMk id="6" creationId="{9DFEAA2A-A89F-EE13-4797-3A5DD610ED30}"/>
-          </ac:graphicFrameMkLst>
-        </pc:graphicFrameChg>
-        <pc:picChg chg="mod">
-          <ac:chgData name="Tiago Janela" userId="ee1a79fe-c79c-4f34-9602-7f6f2f0482b3" providerId="ADAL" clId="{97693404-9C1B-400A-95DF-A7B72570E7A0}" dt="2026-03-04T13:46:57.531" v="3076" actId="1076"/>
-          <ac:picMkLst>
-            <pc:docMk/>
-            <pc:sldMk cId="1164058602" sldId="310"/>
-            <ac:picMk id="3" creationId="{F8FE564D-C14A-D361-F39B-D2C4FD46193B}"/>
-          </ac:picMkLst>
-        </pc:picChg>
-        <pc:picChg chg="add del">
-          <ac:chgData name="Tiago Janela" userId="ee1a79fe-c79c-4f34-9602-7f6f2f0482b3" providerId="ADAL" clId="{97693404-9C1B-400A-95DF-A7B72570E7A0}" dt="2026-03-04T13:33:49.807" v="2723" actId="22"/>
-          <ac:picMkLst>
-            <pc:docMk/>
-            <pc:sldMk cId="1164058602" sldId="310"/>
-            <ac:picMk id="4" creationId="{D89A0267-3387-94D3-598E-476090DAE2B8}"/>
-          </ac:picMkLst>
-        </pc:picChg>
-      </pc:sldChg>
-      <pc:sldChg chg="addSp delSp modSp add mod">
-        <pc:chgData name="Tiago Janela" userId="ee1a79fe-c79c-4f34-9602-7f6f2f0482b3" providerId="ADAL" clId="{97693404-9C1B-400A-95DF-A7B72570E7A0}" dt="2026-03-05T13:51:09.867" v="4389" actId="207"/>
-        <pc:sldMkLst>
-          <pc:docMk/>
-          <pc:sldMk cId="1772121027" sldId="311"/>
-        </pc:sldMkLst>
-        <pc:spChg chg="mod">
-          <ac:chgData name="Tiago Janela" userId="ee1a79fe-c79c-4f34-9602-7f6f2f0482b3" providerId="ADAL" clId="{97693404-9C1B-400A-95DF-A7B72570E7A0}" dt="2026-03-05T13:51:09.867" v="4389" actId="207"/>
-          <ac:spMkLst>
-            <pc:docMk/>
-            <pc:sldMk cId="1772121027" sldId="311"/>
-            <ac:spMk id="170" creationId="{2B43687A-3834-1918-AA00-F4656042D038}"/>
-          </ac:spMkLst>
-        </pc:spChg>
-        <pc:grpChg chg="del">
-          <ac:chgData name="Tiago Janela" userId="ee1a79fe-c79c-4f34-9602-7f6f2f0482b3" providerId="ADAL" clId="{97693404-9C1B-400A-95DF-A7B72570E7A0}" dt="2026-03-05T11:20:01.605" v="3926" actId="478"/>
-          <ac:grpSpMkLst>
-            <pc:docMk/>
-            <pc:sldMk cId="1772121027" sldId="311"/>
-            <ac:grpSpMk id="8" creationId="{B81890E7-8BF7-7B83-7AA2-CCCFC1B52654}"/>
-          </ac:grpSpMkLst>
-        </pc:grpChg>
-        <pc:picChg chg="add mod modCrop">
-          <ac:chgData name="Tiago Janela" userId="ee1a79fe-c79c-4f34-9602-7f6f2f0482b3" providerId="ADAL" clId="{97693404-9C1B-400A-95DF-A7B72570E7A0}" dt="2026-03-05T11:45:45.752" v="4347" actId="1076"/>
-          <ac:picMkLst>
-            <pc:docMk/>
-            <pc:sldMk cId="1772121027" sldId="311"/>
-            <ac:picMk id="10" creationId="{5E2BD8C7-1DEE-FFD6-A4F6-CF1BAC02919F}"/>
-          </ac:picMkLst>
-        </pc:picChg>
-        <pc:picChg chg="add mod modCrop">
-          <ac:chgData name="Tiago Janela" userId="ee1a79fe-c79c-4f34-9602-7f6f2f0482b3" providerId="ADAL" clId="{97693404-9C1B-400A-95DF-A7B72570E7A0}" dt="2026-03-05T11:45:55.200" v="4350" actId="1076"/>
-          <ac:picMkLst>
-            <pc:docMk/>
-            <pc:sldMk cId="1772121027" sldId="311"/>
-            <ac:picMk id="13" creationId="{C6E47417-9E80-A00A-554F-834C3597206A}"/>
-          </ac:picMkLst>
-        </pc:picChg>
-        <pc:picChg chg="add mod modCrop">
-          <ac:chgData name="Tiago Janela" userId="ee1a79fe-c79c-4f34-9602-7f6f2f0482b3" providerId="ADAL" clId="{97693404-9C1B-400A-95DF-A7B72570E7A0}" dt="2026-03-05T11:45:52.184" v="4349" actId="1076"/>
-          <ac:picMkLst>
-            <pc:docMk/>
-            <pc:sldMk cId="1772121027" sldId="311"/>
-            <ac:picMk id="15" creationId="{476DDCBA-FBEF-3BA4-1FAB-879D873364E7}"/>
-          </ac:picMkLst>
-        </pc:picChg>
-      </pc:sldChg>
-      <pc:sldChg chg="add del mod modShow">
-        <pc:chgData name="Tiago Janela" userId="ee1a79fe-c79c-4f34-9602-7f6f2f0482b3" providerId="ADAL" clId="{97693404-9C1B-400A-95DF-A7B72570E7A0}" dt="2026-03-05T11:09:04.534" v="3920" actId="47"/>
-        <pc:sldMkLst>
-          <pc:docMk/>
-          <pc:sldMk cId="3374331074" sldId="311"/>
-        </pc:sldMkLst>
-      </pc:sldChg>
-      <pc:sldChg chg="add del ord">
-        <pc:chgData name="Tiago Janela" userId="ee1a79fe-c79c-4f34-9602-7f6f2f0482b3" providerId="ADAL" clId="{97693404-9C1B-400A-95DF-A7B72570E7A0}" dt="2026-03-05T11:00:14.847" v="3550" actId="47"/>
-        <pc:sldMkLst>
-          <pc:docMk/>
-          <pc:sldMk cId="3658891486" sldId="311"/>
-        </pc:sldMkLst>
       </pc:sldChg>
     </pc:docChg>
   </pc:docChgLst>
@@ -9457,7 +8785,7 @@
                 </a:solidFill>
                 <a:latin typeface="Century Gothic"/>
               </a:rPr>
-              <a:t>‹#›</a:t>
+              <a:t>‹nº›</a:t>
             </a:fld>
             <a:endParaRPr lang="en-GB" sz="1200" b="0" strike="noStrike" spc="-1">
               <a:latin typeface="Times New Roman"/>
@@ -10023,7 +9351,7 @@
         <p:fade/>
       </p:transition>
     </mc:Choice>
-    <mc:Fallback xmlns="" xmlns:p15="http://schemas.microsoft.com/office/powerpoint/2012/main">
+    <mc:Fallback xmlns:p15="http://schemas.microsoft.com/office/powerpoint/2012/main" xmlns="">
       <p:transition spd="med">
         <p:fade/>
       </p:transition>
@@ -10452,7 +9780,7 @@
         <p:fade/>
       </p:transition>
     </mc:Choice>
-    <mc:Fallback xmlns="" xmlns:p15="http://schemas.microsoft.com/office/powerpoint/2012/main">
+    <mc:Fallback xmlns:p15="http://schemas.microsoft.com/office/powerpoint/2012/main" xmlns="">
       <p:transition spd="med">
         <p:fade/>
       </p:transition>
@@ -11213,7 +10541,7 @@
         <p:fade/>
       </p:transition>
     </mc:Choice>
-    <mc:Fallback xmlns="" xmlns:p15="http://schemas.microsoft.com/office/powerpoint/2012/main">
+    <mc:Fallback xmlns:p15="http://schemas.microsoft.com/office/powerpoint/2012/main" xmlns="">
       <p:transition spd="med">
         <p:fade/>
       </p:transition>
@@ -11792,7 +11120,7 @@
         <p:fade/>
       </p:transition>
     </mc:Choice>
-    <mc:Fallback xmlns="" xmlns:p15="http://schemas.microsoft.com/office/powerpoint/2012/main">
+    <mc:Fallback xmlns:p15="http://schemas.microsoft.com/office/powerpoint/2012/main" xmlns="">
       <p:transition spd="med">
         <p:fade/>
       </p:transition>
@@ -12407,7 +11735,7 @@
         <p:fade/>
       </p:transition>
     </mc:Choice>
-    <mc:Fallback xmlns="" xmlns:p15="http://schemas.microsoft.com/office/powerpoint/2012/main">
+    <mc:Fallback xmlns:p15="http://schemas.microsoft.com/office/powerpoint/2012/main" xmlns="">
       <p:transition spd="med">
         <p:fade/>
       </p:transition>
@@ -13723,13 +13051,13 @@
   <p:clrMapOvr>
     <a:masterClrMapping/>
   </p:clrMapOvr>
-  <mc:AlternateContent xmlns:mc="http://schemas.openxmlformats.org/markup-compatibility/2006">
-    <mc:Choice xmlns:p14="http://schemas.microsoft.com/office/powerpoint/2010/main" Requires="p14">
+  <mc:AlternateContent xmlns:mc="http://schemas.openxmlformats.org/markup-compatibility/2006" xmlns:p14="http://schemas.microsoft.com/office/powerpoint/2010/main">
+    <mc:Choice Requires="p14">
       <p:transition spd="med" p14:dur="700">
         <p:fade/>
       </p:transition>
     </mc:Choice>
-    <mc:Fallback>
+    <mc:Fallback xmlns="">
       <p:transition spd="med">
         <p:fade/>
       </p:transition>

--- a/slides/AI_Agent_Explainability.pptx
+++ b/slides/AI_Agent_Explainability.pptx
@@ -13,8 +13,10 @@
     <p:sldId id="300" r:id="rId7"/>
     <p:sldId id="302" r:id="rId8"/>
     <p:sldId id="305" r:id="rId9"/>
-    <p:sldId id="303" r:id="rId10"/>
-    <p:sldId id="304" r:id="rId11"/>
+    <p:sldId id="306" r:id="rId10"/>
+    <p:sldId id="307" r:id="rId11"/>
+    <p:sldId id="303" r:id="rId12"/>
+    <p:sldId id="304" r:id="rId13"/>
   </p:sldIdLst>
   <p:sldSz cx="9144000" cy="6858000" type="screen4x3"/>
   <p:notesSz cx="7559675" cy="10691813"/>
@@ -163,30 +165,6 @@
     </pc:docChg>
   </pc:docChgLst>
   <pc:docChgLst>
-    <pc:chgData name="Tiago Janela" userId="ee1a79fe-c79c-4f34-9602-7f6f2f0482b3" providerId="ADAL" clId="{A1A622BE-A8AD-47B7-8802-BAC61BCE5126}"/>
-    <pc:docChg chg="undo custSel modSld">
-      <pc:chgData name="Tiago Janela" userId="ee1a79fe-c79c-4f34-9602-7f6f2f0482b3" providerId="ADAL" clId="{A1A622BE-A8AD-47B7-8802-BAC61BCE5126}" dt="2026-04-02T12:40:40.607" v="50" actId="478"/>
-      <pc:docMkLst>
-        <pc:docMk/>
-      </pc:docMkLst>
-      <pc:sldChg chg="addSp delSp modSp mod">
-        <pc:chgData name="Tiago Janela" userId="ee1a79fe-c79c-4f34-9602-7f6f2f0482b3" providerId="ADAL" clId="{A1A622BE-A8AD-47B7-8802-BAC61BCE5126}" dt="2026-04-02T12:40:40.607" v="50" actId="478"/>
-        <pc:sldMkLst>
-          <pc:docMk/>
-          <pc:sldMk cId="1707478755" sldId="299"/>
-        </pc:sldMkLst>
-        <pc:graphicFrameChg chg="add del modGraphic">
-          <ac:chgData name="Tiago Janela" userId="ee1a79fe-c79c-4f34-9602-7f6f2f0482b3" providerId="ADAL" clId="{A1A622BE-A8AD-47B7-8802-BAC61BCE5126}" dt="2026-04-02T12:40:40.607" v="50" actId="478"/>
-          <ac:graphicFrameMkLst>
-            <pc:docMk/>
-            <pc:sldMk cId="1707478755" sldId="299"/>
-            <ac:graphicFrameMk id="4" creationId="{689F2044-8E26-DCF5-DE2D-9AD979C8C1EE}"/>
-          </ac:graphicFrameMkLst>
-        </pc:graphicFrameChg>
-      </pc:sldChg>
-    </pc:docChg>
-  </pc:docChgLst>
-  <pc:docChgLst>
     <pc:chgData name="Tiago Janela" userId="ee1a79fe-c79c-4f34-9602-7f6f2f0482b3" providerId="ADAL" clId="{6BE67FA1-4A27-48B9-BA6A-E25A9786A9CC}"/>
     <pc:docChg chg="undo custSel addSld modSld sldOrd">
       <pc:chgData name="Tiago Janela" userId="ee1a79fe-c79c-4f34-9602-7f6f2f0482b3" providerId="ADAL" clId="{6BE67FA1-4A27-48B9-BA6A-E25A9786A9CC}" dt="2026-03-20T13:52:23.099" v="1063" actId="20577"/>
@@ -292,6 +270,30 @@
             <ac:picMk id="6" creationId="{D3BA145D-265C-C0B1-7C0E-2EE32552E491}"/>
           </ac:picMkLst>
         </pc:picChg>
+      </pc:sldChg>
+    </pc:docChg>
+  </pc:docChgLst>
+  <pc:docChgLst>
+    <pc:chgData name="Tiago Janela" userId="ee1a79fe-c79c-4f34-9602-7f6f2f0482b3" providerId="ADAL" clId="{A1A622BE-A8AD-47B7-8802-BAC61BCE5126}"/>
+    <pc:docChg chg="undo custSel modSld">
+      <pc:chgData name="Tiago Janela" userId="ee1a79fe-c79c-4f34-9602-7f6f2f0482b3" providerId="ADAL" clId="{A1A622BE-A8AD-47B7-8802-BAC61BCE5126}" dt="2026-04-02T12:40:40.607" v="50" actId="478"/>
+      <pc:docMkLst>
+        <pc:docMk/>
+      </pc:docMkLst>
+      <pc:sldChg chg="addSp delSp modSp mod">
+        <pc:chgData name="Tiago Janela" userId="ee1a79fe-c79c-4f34-9602-7f6f2f0482b3" providerId="ADAL" clId="{A1A622BE-A8AD-47B7-8802-BAC61BCE5126}" dt="2026-04-02T12:40:40.607" v="50" actId="478"/>
+        <pc:sldMkLst>
+          <pc:docMk/>
+          <pc:sldMk cId="1707478755" sldId="299"/>
+        </pc:sldMkLst>
+        <pc:graphicFrameChg chg="add del modGraphic">
+          <ac:chgData name="Tiago Janela" userId="ee1a79fe-c79c-4f34-9602-7f6f2f0482b3" providerId="ADAL" clId="{A1A622BE-A8AD-47B7-8802-BAC61BCE5126}" dt="2026-04-02T12:40:40.607" v="50" actId="478"/>
+          <ac:graphicFrameMkLst>
+            <pc:docMk/>
+            <pc:sldMk cId="1707478755" sldId="299"/>
+            <ac:graphicFrameMk id="4" creationId="{689F2044-8E26-DCF5-DE2D-9AD979C8C1EE}"/>
+          </ac:graphicFrameMkLst>
+        </pc:graphicFrameChg>
       </pc:sldChg>
     </pc:docChg>
   </pc:docChgLst>
@@ -8785,7 +8787,7 @@
                 </a:solidFill>
                 <a:latin typeface="Century Gothic"/>
               </a:rPr>
-              <a:t>‹nº›</a:t>
+              <a:t>‹#›</a:t>
             </a:fld>
             <a:endParaRPr lang="en-GB" sz="1200" b="0" strike="noStrike" spc="-1">
               <a:latin typeface="Times New Roman"/>
@@ -9345,18 +9347,1235 @@
   <p:clrMapOvr>
     <a:masterClrMapping/>
   </p:clrMapOvr>
-  <mc:AlternateContent xmlns:mc="http://schemas.openxmlformats.org/markup-compatibility/2006" xmlns:p14="http://schemas.microsoft.com/office/powerpoint/2010/main">
-    <mc:Choice Requires="p14">
-      <p:transition spd="med" p14:dur="700">
-        <p:fade/>
-      </p:transition>
-    </mc:Choice>
-    <mc:Fallback xmlns:p15="http://schemas.microsoft.com/office/powerpoint/2012/main" xmlns="">
-      <p:transition spd="med">
-        <p:fade/>
-      </p:transition>
-    </mc:Fallback>
-  </mc:AlternateContent>
+</p:sld>
+</file>
+
+<file path=ppt/slides/slide10.xml><?xml version="1.0" encoding="utf-8"?>
+<p:sld xmlns:a="http://schemas.openxmlformats.org/drawingml/2006/main" xmlns:r="http://schemas.openxmlformats.org/officeDocument/2006/relationships" xmlns:p="http://schemas.openxmlformats.org/presentationml/2006/main">
+  <p:cSld>
+    <p:spTree>
+      <p:nvGrpSpPr>
+        <p:cNvPr id="1" name="">
+          <a:extLst>
+            <a:ext uri="{FF2B5EF4-FFF2-40B4-BE49-F238E27FC236}">
+              <a16:creationId xmlns:a16="http://schemas.microsoft.com/office/drawing/2014/main" id="{A6515F23-0912-A838-23CE-B8F00573A2DA}"/>
+            </a:ext>
+          </a:extLst>
+        </p:cNvPr>
+        <p:cNvGrpSpPr/>
+        <p:nvPr/>
+      </p:nvGrpSpPr>
+      <p:grpSpPr>
+        <a:xfrm>
+          <a:off x="0" y="0"/>
+          <a:ext cx="0" cy="0"/>
+          <a:chOff x="0" y="0"/>
+          <a:chExt cx="0" cy="0"/>
+        </a:xfrm>
+      </p:grpSpPr>
+      <p:sp>
+        <p:nvSpPr>
+          <p:cNvPr id="163" name="PlaceHolder 1">
+            <a:extLst>
+              <a:ext uri="{FF2B5EF4-FFF2-40B4-BE49-F238E27FC236}">
+                <a16:creationId xmlns:a16="http://schemas.microsoft.com/office/drawing/2014/main" id="{57944F4B-F502-E7CC-8790-8737702BC6AC}"/>
+              </a:ext>
+            </a:extLst>
+          </p:cNvPr>
+          <p:cNvSpPr>
+            <a:spLocks noGrp="1"/>
+          </p:cNvSpPr>
+          <p:nvPr>
+            <p:ph type="title"/>
+          </p:nvPr>
+        </p:nvSpPr>
+        <p:spPr>
+          <a:xfrm>
+            <a:off x="380880" y="228600"/>
+            <a:ext cx="8380080" cy="837720"/>
+          </a:xfrm>
+          <a:prstGeom prst="rect">
+            <a:avLst/>
+          </a:prstGeom>
+          <a:noFill/>
+          <a:ln w="0">
+            <a:noFill/>
+          </a:ln>
+        </p:spPr>
+        <p:txBody>
+          <a:bodyPr numCol="1" spcCol="0" anchor="ctr">
+            <a:noAutofit/>
+          </a:bodyPr>
+          <a:lstStyle/>
+          <a:p>
+            <a:pPr>
+              <a:lnSpc>
+                <a:spcPct val="100000"/>
+              </a:lnSpc>
+              <a:buNone/>
+            </a:pPr>
+            <a:r>
+              <a:rPr lang="en-US" sz="3200" b="0" strike="noStrike" spc="-1" dirty="0">
+                <a:solidFill>
+                  <a:srgbClr val="0064C8"/>
+                </a:solidFill>
+                <a:latin typeface="Century Gothic"/>
+              </a:rPr>
+              <a:t>To do list</a:t>
+            </a:r>
+            <a:endParaRPr lang="en-US" sz="3200" b="0" strike="noStrike" spc="-1" dirty="0">
+              <a:solidFill>
+                <a:srgbClr val="000000"/>
+              </a:solidFill>
+              <a:latin typeface="Century Gothic"/>
+            </a:endParaRPr>
+          </a:p>
+        </p:txBody>
+      </p:sp>
+      <p:sp>
+        <p:nvSpPr>
+          <p:cNvPr id="165" name="PlaceHolder 3">
+            <a:extLst>
+              <a:ext uri="{FF2B5EF4-FFF2-40B4-BE49-F238E27FC236}">
+                <a16:creationId xmlns:a16="http://schemas.microsoft.com/office/drawing/2014/main" id="{2EFBEA53-7B78-D9A1-93EF-9608A3193D27}"/>
+              </a:ext>
+            </a:extLst>
+          </p:cNvPr>
+          <p:cNvSpPr>
+            <a:spLocks noGrp="1"/>
+          </p:cNvSpPr>
+          <p:nvPr>
+            <p:ph type="sldNum"/>
+          </p:nvPr>
+        </p:nvSpPr>
+        <p:spPr>
+          <a:xfrm>
+            <a:off x="8376840" y="5692680"/>
+            <a:ext cx="384120" cy="364680"/>
+          </a:xfrm>
+          <a:prstGeom prst="rect">
+            <a:avLst/>
+          </a:prstGeom>
+          <a:noFill/>
+          <a:ln w="0">
+            <a:noFill/>
+          </a:ln>
+        </p:spPr>
+        <p:txBody>
+          <a:bodyPr anchor="ctr">
+            <a:noAutofit/>
+          </a:bodyPr>
+          <a:lstStyle/>
+          <a:p>
+            <a:pPr algn="r">
+              <a:lnSpc>
+                <a:spcPct val="100000"/>
+              </a:lnSpc>
+              <a:buNone/>
+            </a:pPr>
+            <a:fld id="{8BD7C522-1E12-40C3-B25E-5F0462E20B22}" type="slidenum">
+              <a:rPr lang="en-US" sz="1200" b="0" strike="noStrike" spc="-1">
+                <a:solidFill>
+                  <a:srgbClr val="8B8B8B"/>
+                </a:solidFill>
+                <a:latin typeface="Century Gothic"/>
+              </a:rPr>
+              <a:t>10</a:t>
+            </a:fld>
+            <a:endParaRPr lang="en-GB" sz="1200" b="0" strike="noStrike" spc="-1" dirty="0">
+              <a:latin typeface="Times New Roman"/>
+            </a:endParaRPr>
+          </a:p>
+        </p:txBody>
+      </p:sp>
+      <p:sp>
+        <p:nvSpPr>
+          <p:cNvPr id="7" name="PlaceHolder 2">
+            <a:extLst>
+              <a:ext uri="{FF2B5EF4-FFF2-40B4-BE49-F238E27FC236}">
+                <a16:creationId xmlns:a16="http://schemas.microsoft.com/office/drawing/2014/main" id="{66DE14D4-64D4-6D1F-DD92-BC16D674C58B}"/>
+              </a:ext>
+            </a:extLst>
+          </p:cNvPr>
+          <p:cNvSpPr txBox="1">
+            <a:spLocks/>
+          </p:cNvSpPr>
+          <p:nvPr/>
+        </p:nvSpPr>
+        <p:spPr>
+          <a:xfrm>
+            <a:off x="380880" y="1371598"/>
+            <a:ext cx="8109070" cy="4559301"/>
+          </a:xfrm>
+          <a:prstGeom prst="rect">
+            <a:avLst/>
+          </a:prstGeom>
+          <a:noFill/>
+          <a:ln w="0">
+            <a:noFill/>
+          </a:ln>
+        </p:spPr>
+        <p:txBody>
+          <a:bodyPr numCol="1" spcCol="0" anchor="t">
+            <a:noAutofit/>
+          </a:bodyPr>
+          <a:lstStyle>
+            <a:lvl1pPr marL="228600" indent="-228600" algn="l" defTabSz="914400" rtl="0" eaLnBrk="1" latinLnBrk="0" hangingPunct="1">
+              <a:lnSpc>
+                <a:spcPct val="90000"/>
+              </a:lnSpc>
+              <a:spcBef>
+                <a:spcPts val="1000"/>
+              </a:spcBef>
+              <a:buFont typeface="Arial" panose="020B0604020202020204" pitchFamily="34" charset="0"/>
+              <a:buChar char="•"/>
+              <a:defRPr sz="2800" kern="1200">
+                <a:solidFill>
+                  <a:schemeClr val="tx1"/>
+                </a:solidFill>
+                <a:latin typeface="+mn-lt"/>
+                <a:ea typeface="+mn-ea"/>
+                <a:cs typeface="+mn-cs"/>
+              </a:defRPr>
+            </a:lvl1pPr>
+            <a:lvl2pPr marL="685800" indent="-228600" algn="l" defTabSz="914400" rtl="0" eaLnBrk="1" latinLnBrk="0" hangingPunct="1">
+              <a:lnSpc>
+                <a:spcPct val="90000"/>
+              </a:lnSpc>
+              <a:spcBef>
+                <a:spcPts val="500"/>
+              </a:spcBef>
+              <a:buFont typeface="Arial" panose="020B0604020202020204" pitchFamily="34" charset="0"/>
+              <a:buChar char="•"/>
+              <a:defRPr sz="2400" kern="1200">
+                <a:solidFill>
+                  <a:schemeClr val="tx1"/>
+                </a:solidFill>
+                <a:latin typeface="+mn-lt"/>
+                <a:ea typeface="+mn-ea"/>
+                <a:cs typeface="+mn-cs"/>
+              </a:defRPr>
+            </a:lvl2pPr>
+            <a:lvl3pPr marL="1143000" indent="-228600" algn="l" defTabSz="914400" rtl="0" eaLnBrk="1" latinLnBrk="0" hangingPunct="1">
+              <a:lnSpc>
+                <a:spcPct val="90000"/>
+              </a:lnSpc>
+              <a:spcBef>
+                <a:spcPts val="500"/>
+              </a:spcBef>
+              <a:buFont typeface="Arial" panose="020B0604020202020204" pitchFamily="34" charset="0"/>
+              <a:buChar char="•"/>
+              <a:defRPr sz="2000" kern="1200">
+                <a:solidFill>
+                  <a:schemeClr val="tx1"/>
+                </a:solidFill>
+                <a:latin typeface="+mn-lt"/>
+                <a:ea typeface="+mn-ea"/>
+                <a:cs typeface="+mn-cs"/>
+              </a:defRPr>
+            </a:lvl3pPr>
+            <a:lvl4pPr marL="1600200" indent="-228600" algn="l" defTabSz="914400" rtl="0" eaLnBrk="1" latinLnBrk="0" hangingPunct="1">
+              <a:lnSpc>
+                <a:spcPct val="90000"/>
+              </a:lnSpc>
+              <a:spcBef>
+                <a:spcPts val="500"/>
+              </a:spcBef>
+              <a:buFont typeface="Arial" panose="020B0604020202020204" pitchFamily="34" charset="0"/>
+              <a:buChar char="•"/>
+              <a:defRPr sz="1800" kern="1200">
+                <a:solidFill>
+                  <a:schemeClr val="tx1"/>
+                </a:solidFill>
+                <a:latin typeface="+mn-lt"/>
+                <a:ea typeface="+mn-ea"/>
+                <a:cs typeface="+mn-cs"/>
+              </a:defRPr>
+            </a:lvl4pPr>
+            <a:lvl5pPr marL="2057400" indent="-228600" algn="l" defTabSz="914400" rtl="0" eaLnBrk="1" latinLnBrk="0" hangingPunct="1">
+              <a:lnSpc>
+                <a:spcPct val="90000"/>
+              </a:lnSpc>
+              <a:spcBef>
+                <a:spcPts val="500"/>
+              </a:spcBef>
+              <a:buFont typeface="Arial" panose="020B0604020202020204" pitchFamily="34" charset="0"/>
+              <a:buChar char="•"/>
+              <a:defRPr sz="1800" kern="1200">
+                <a:solidFill>
+                  <a:schemeClr val="tx1"/>
+                </a:solidFill>
+                <a:latin typeface="+mn-lt"/>
+                <a:ea typeface="+mn-ea"/>
+                <a:cs typeface="+mn-cs"/>
+              </a:defRPr>
+            </a:lvl5pPr>
+            <a:lvl6pPr marL="2514600" indent="-228600" algn="l" defTabSz="914400" rtl="0" eaLnBrk="1" latinLnBrk="0" hangingPunct="1">
+              <a:lnSpc>
+                <a:spcPct val="90000"/>
+              </a:lnSpc>
+              <a:spcBef>
+                <a:spcPts val="500"/>
+              </a:spcBef>
+              <a:buFont typeface="Arial" panose="020B0604020202020204" pitchFamily="34" charset="0"/>
+              <a:buChar char="•"/>
+              <a:defRPr sz="1800" kern="1200">
+                <a:solidFill>
+                  <a:schemeClr val="tx1"/>
+                </a:solidFill>
+                <a:latin typeface="+mn-lt"/>
+                <a:ea typeface="+mn-ea"/>
+                <a:cs typeface="+mn-cs"/>
+              </a:defRPr>
+            </a:lvl6pPr>
+            <a:lvl7pPr marL="2971800" indent="-228600" algn="l" defTabSz="914400" rtl="0" eaLnBrk="1" latinLnBrk="0" hangingPunct="1">
+              <a:lnSpc>
+                <a:spcPct val="90000"/>
+              </a:lnSpc>
+              <a:spcBef>
+                <a:spcPts val="500"/>
+              </a:spcBef>
+              <a:buFont typeface="Arial" panose="020B0604020202020204" pitchFamily="34" charset="0"/>
+              <a:buChar char="•"/>
+              <a:defRPr sz="1800" kern="1200">
+                <a:solidFill>
+                  <a:schemeClr val="tx1"/>
+                </a:solidFill>
+                <a:latin typeface="+mn-lt"/>
+                <a:ea typeface="+mn-ea"/>
+                <a:cs typeface="+mn-cs"/>
+              </a:defRPr>
+            </a:lvl7pPr>
+            <a:lvl8pPr marL="3429000" indent="-228600" algn="l" defTabSz="914400" rtl="0" eaLnBrk="1" latinLnBrk="0" hangingPunct="1">
+              <a:lnSpc>
+                <a:spcPct val="90000"/>
+              </a:lnSpc>
+              <a:spcBef>
+                <a:spcPts val="500"/>
+              </a:spcBef>
+              <a:buFont typeface="Arial" panose="020B0604020202020204" pitchFamily="34" charset="0"/>
+              <a:buChar char="•"/>
+              <a:defRPr sz="1800" kern="1200">
+                <a:solidFill>
+                  <a:schemeClr val="tx1"/>
+                </a:solidFill>
+                <a:latin typeface="+mn-lt"/>
+                <a:ea typeface="+mn-ea"/>
+                <a:cs typeface="+mn-cs"/>
+              </a:defRPr>
+            </a:lvl8pPr>
+            <a:lvl9pPr marL="3886200" indent="-228600" algn="l" defTabSz="914400" rtl="0" eaLnBrk="1" latinLnBrk="0" hangingPunct="1">
+              <a:lnSpc>
+                <a:spcPct val="90000"/>
+              </a:lnSpc>
+              <a:spcBef>
+                <a:spcPts val="500"/>
+              </a:spcBef>
+              <a:buFont typeface="Arial" panose="020B0604020202020204" pitchFamily="34" charset="0"/>
+              <a:buChar char="•"/>
+              <a:defRPr sz="1800" kern="1200">
+                <a:solidFill>
+                  <a:schemeClr val="tx1"/>
+                </a:solidFill>
+                <a:latin typeface="+mn-lt"/>
+                <a:ea typeface="+mn-ea"/>
+                <a:cs typeface="+mn-cs"/>
+              </a:defRPr>
+            </a:lvl9pPr>
+          </a:lstStyle>
+          <a:p>
+            <a:pPr>
+              <a:lnSpc>
+                <a:spcPct val="100000"/>
+              </a:lnSpc>
+              <a:spcBef>
+                <a:spcPts val="400"/>
+              </a:spcBef>
+              <a:buClr>
+                <a:srgbClr val="0064C8"/>
+              </a:buClr>
+              <a:buFont typeface="Wingdings" panose="05000000000000000000" pitchFamily="2" charset="2"/>
+              <a:buChar char="§"/>
+            </a:pPr>
+            <a:r>
+              <a:rPr lang="en-US" sz="2000" spc="-1" dirty="0">
+                <a:solidFill>
+                  <a:srgbClr val="000000"/>
+                </a:solidFill>
+                <a:latin typeface="Century Gothic"/>
+              </a:rPr>
+              <a:t>Integrate with cluster for faster inference and explore larger LLMs</a:t>
+            </a:r>
+          </a:p>
+          <a:p>
+            <a:pPr>
+              <a:lnSpc>
+                <a:spcPct val="100000"/>
+              </a:lnSpc>
+              <a:spcBef>
+                <a:spcPts val="400"/>
+              </a:spcBef>
+              <a:buClr>
+                <a:srgbClr val="0064C8"/>
+              </a:buClr>
+              <a:buFont typeface="Wingdings" panose="05000000000000000000" pitchFamily="2" charset="2"/>
+              <a:buChar char="§"/>
+            </a:pPr>
+            <a:endParaRPr lang="en-US" sz="2000" spc="-1" dirty="0">
+              <a:solidFill>
+                <a:srgbClr val="000000"/>
+              </a:solidFill>
+              <a:latin typeface="Century Gothic"/>
+            </a:endParaRPr>
+          </a:p>
+          <a:p>
+            <a:pPr lvl="1">
+              <a:lnSpc>
+                <a:spcPct val="100000"/>
+              </a:lnSpc>
+              <a:spcBef>
+                <a:spcPts val="400"/>
+              </a:spcBef>
+              <a:buClr>
+                <a:srgbClr val="0064C8"/>
+              </a:buClr>
+              <a:buFont typeface="Wingdings" panose="05000000000000000000" pitchFamily="2" charset="2"/>
+              <a:buChar char="§"/>
+            </a:pPr>
+            <a:r>
+              <a:rPr lang="en-US" sz="1600" spc="-1" dirty="0">
+                <a:solidFill>
+                  <a:srgbClr val="000000"/>
+                </a:solidFill>
+                <a:latin typeface="Century Gothic"/>
+              </a:rPr>
+              <a:t>It works already on the workstations with medium-to-large LLMs</a:t>
+            </a:r>
+          </a:p>
+          <a:p>
+            <a:pPr marL="0" indent="0">
+              <a:lnSpc>
+                <a:spcPct val="100000"/>
+              </a:lnSpc>
+              <a:spcBef>
+                <a:spcPts val="400"/>
+              </a:spcBef>
+              <a:buClr>
+                <a:srgbClr val="0064C8"/>
+              </a:buClr>
+              <a:buNone/>
+            </a:pPr>
+            <a:endParaRPr lang="en-US" sz="2000" spc="-1" dirty="0">
+              <a:solidFill>
+                <a:srgbClr val="000000"/>
+              </a:solidFill>
+              <a:latin typeface="Century Gothic"/>
+            </a:endParaRPr>
+          </a:p>
+          <a:p>
+            <a:pPr>
+              <a:lnSpc>
+                <a:spcPct val="100000"/>
+              </a:lnSpc>
+              <a:spcBef>
+                <a:spcPts val="400"/>
+              </a:spcBef>
+              <a:buClr>
+                <a:srgbClr val="0064C8"/>
+              </a:buClr>
+              <a:buFont typeface="Wingdings" panose="05000000000000000000" pitchFamily="2" charset="2"/>
+              <a:buChar char="§"/>
+            </a:pPr>
+            <a:r>
+              <a:rPr lang="en-US" sz="2000" spc="-1" dirty="0">
+                <a:solidFill>
+                  <a:srgbClr val="000000"/>
+                </a:solidFill>
+                <a:latin typeface="Century Gothic"/>
+              </a:rPr>
+              <a:t>Clean up the repository and make it available </a:t>
+            </a:r>
+          </a:p>
+          <a:p>
+            <a:pPr>
+              <a:lnSpc>
+                <a:spcPct val="100000"/>
+              </a:lnSpc>
+              <a:spcBef>
+                <a:spcPts val="400"/>
+              </a:spcBef>
+              <a:buClr>
+                <a:srgbClr val="0064C8"/>
+              </a:buClr>
+              <a:buFont typeface="Wingdings" panose="05000000000000000000" pitchFamily="2" charset="2"/>
+              <a:buChar char="§"/>
+            </a:pPr>
+            <a:endParaRPr lang="en-US" sz="2000" spc="-1" dirty="0">
+              <a:solidFill>
+                <a:srgbClr val="000000"/>
+              </a:solidFill>
+              <a:latin typeface="Century Gothic"/>
+            </a:endParaRPr>
+          </a:p>
+          <a:p>
+            <a:pPr lvl="1">
+              <a:lnSpc>
+                <a:spcPct val="100000"/>
+              </a:lnSpc>
+              <a:spcBef>
+                <a:spcPts val="400"/>
+              </a:spcBef>
+              <a:buClr>
+                <a:srgbClr val="0064C8"/>
+              </a:buClr>
+              <a:buFont typeface="Wingdings" panose="05000000000000000000" pitchFamily="2" charset="2"/>
+              <a:buChar char="§"/>
+            </a:pPr>
+            <a:r>
+              <a:rPr lang="en-US" sz="1600" spc="-1" dirty="0">
+                <a:solidFill>
+                  <a:srgbClr val="000000"/>
+                </a:solidFill>
+                <a:latin typeface="Century Gothic"/>
+              </a:rPr>
+              <a:t>An “organization repository” is available for the whole lab to ease the integration of new components</a:t>
+            </a:r>
+          </a:p>
+          <a:p>
+            <a:pPr>
+              <a:lnSpc>
+                <a:spcPct val="100000"/>
+              </a:lnSpc>
+              <a:spcBef>
+                <a:spcPts val="400"/>
+              </a:spcBef>
+              <a:buClr>
+                <a:srgbClr val="0064C8"/>
+              </a:buClr>
+              <a:buFont typeface="Wingdings" panose="05000000000000000000" pitchFamily="2" charset="2"/>
+              <a:buChar char="§"/>
+            </a:pPr>
+            <a:endParaRPr lang="en-US" sz="2000" spc="-1" dirty="0">
+              <a:solidFill>
+                <a:srgbClr val="000000"/>
+              </a:solidFill>
+              <a:latin typeface="Century Gothic"/>
+            </a:endParaRPr>
+          </a:p>
+          <a:p>
+            <a:pPr>
+              <a:lnSpc>
+                <a:spcPct val="100000"/>
+              </a:lnSpc>
+              <a:spcBef>
+                <a:spcPts val="400"/>
+              </a:spcBef>
+              <a:buClr>
+                <a:srgbClr val="0064C8"/>
+              </a:buClr>
+              <a:buFont typeface="Wingdings" panose="05000000000000000000" pitchFamily="2" charset="2"/>
+              <a:buChar char="§"/>
+            </a:pPr>
+            <a:r>
+              <a:rPr lang="en-US" sz="2000" spc="-1" dirty="0">
+                <a:solidFill>
+                  <a:srgbClr val="000000"/>
+                </a:solidFill>
+                <a:latin typeface="Century Gothic"/>
+              </a:rPr>
+              <a:t>Make a guide for lab members for the implementation of AI agents</a:t>
+            </a:r>
+          </a:p>
+          <a:p>
+            <a:pPr>
+              <a:lnSpc>
+                <a:spcPct val="100000"/>
+              </a:lnSpc>
+              <a:spcBef>
+                <a:spcPts val="400"/>
+              </a:spcBef>
+              <a:buClr>
+                <a:srgbClr val="0064C8"/>
+              </a:buClr>
+              <a:buFont typeface="Wingdings" panose="05000000000000000000" pitchFamily="2" charset="2"/>
+              <a:buChar char="§"/>
+            </a:pPr>
+            <a:endParaRPr lang="en-US" sz="2000" spc="-1" dirty="0">
+              <a:solidFill>
+                <a:srgbClr val="000000"/>
+              </a:solidFill>
+              <a:latin typeface="Century Gothic"/>
+            </a:endParaRPr>
+          </a:p>
+          <a:p>
+            <a:pPr>
+              <a:lnSpc>
+                <a:spcPct val="100000"/>
+              </a:lnSpc>
+              <a:spcBef>
+                <a:spcPts val="400"/>
+              </a:spcBef>
+              <a:buClr>
+                <a:srgbClr val="0064C8"/>
+              </a:buClr>
+              <a:buFont typeface="Wingdings" panose="05000000000000000000" pitchFamily="2" charset="2"/>
+              <a:buChar char="§"/>
+            </a:pPr>
+            <a:endParaRPr lang="en-US" sz="1800" spc="-1" dirty="0">
+              <a:solidFill>
+                <a:srgbClr val="000000"/>
+              </a:solidFill>
+              <a:latin typeface="Century Gothic"/>
+            </a:endParaRPr>
+          </a:p>
+          <a:p>
+            <a:pPr marL="343080" indent="-343080">
+              <a:lnSpc>
+                <a:spcPct val="100000"/>
+              </a:lnSpc>
+              <a:spcBef>
+                <a:spcPts val="400"/>
+              </a:spcBef>
+              <a:spcAft>
+                <a:spcPts val="601"/>
+              </a:spcAft>
+              <a:buClr>
+                <a:srgbClr val="0064C8"/>
+              </a:buClr>
+              <a:buFont typeface="Wingdings 2" charset="2"/>
+              <a:buChar char=""/>
+            </a:pPr>
+            <a:endParaRPr lang="en-US" sz="2000" b="1" spc="-1" dirty="0">
+              <a:solidFill>
+                <a:srgbClr val="000000"/>
+              </a:solidFill>
+              <a:latin typeface="Century Gothic"/>
+            </a:endParaRPr>
+          </a:p>
+        </p:txBody>
+      </p:sp>
+    </p:spTree>
+    <p:extLst>
+      <p:ext uri="{BB962C8B-B14F-4D97-AF65-F5344CB8AC3E}">
+        <p14:creationId xmlns:p14="http://schemas.microsoft.com/office/powerpoint/2010/main" val="3727029337"/>
+      </p:ext>
+    </p:extLst>
+  </p:cSld>
+  <p:clrMapOvr>
+    <a:masterClrMapping/>
+  </p:clrMapOvr>
+</p:sld>
+</file>
+
+<file path=ppt/slides/slide11.xml><?xml version="1.0" encoding="utf-8"?>
+<p:sld xmlns:a="http://schemas.openxmlformats.org/drawingml/2006/main" xmlns:r="http://schemas.openxmlformats.org/officeDocument/2006/relationships" xmlns:p="http://schemas.openxmlformats.org/presentationml/2006/main">
+  <p:cSld>
+    <p:spTree>
+      <p:nvGrpSpPr>
+        <p:cNvPr id="1" name="">
+          <a:extLst>
+            <a:ext uri="{FF2B5EF4-FFF2-40B4-BE49-F238E27FC236}">
+              <a16:creationId xmlns:a16="http://schemas.microsoft.com/office/drawing/2014/main" id="{A6515F23-0912-A838-23CE-B8F00573A2DA}"/>
+            </a:ext>
+          </a:extLst>
+        </p:cNvPr>
+        <p:cNvGrpSpPr/>
+        <p:nvPr/>
+      </p:nvGrpSpPr>
+      <p:grpSpPr>
+        <a:xfrm>
+          <a:off x="0" y="0"/>
+          <a:ext cx="0" cy="0"/>
+          <a:chOff x="0" y="0"/>
+          <a:chExt cx="0" cy="0"/>
+        </a:xfrm>
+      </p:grpSpPr>
+      <p:sp>
+        <p:nvSpPr>
+          <p:cNvPr id="163" name="PlaceHolder 1">
+            <a:extLst>
+              <a:ext uri="{FF2B5EF4-FFF2-40B4-BE49-F238E27FC236}">
+                <a16:creationId xmlns:a16="http://schemas.microsoft.com/office/drawing/2014/main" id="{57944F4B-F502-E7CC-8790-8737702BC6AC}"/>
+              </a:ext>
+            </a:extLst>
+          </p:cNvPr>
+          <p:cNvSpPr>
+            <a:spLocks noGrp="1"/>
+          </p:cNvSpPr>
+          <p:nvPr>
+            <p:ph type="title"/>
+          </p:nvPr>
+        </p:nvSpPr>
+        <p:spPr>
+          <a:xfrm>
+            <a:off x="380880" y="228600"/>
+            <a:ext cx="8380080" cy="837720"/>
+          </a:xfrm>
+          <a:prstGeom prst="rect">
+            <a:avLst/>
+          </a:prstGeom>
+          <a:noFill/>
+          <a:ln w="0">
+            <a:noFill/>
+          </a:ln>
+        </p:spPr>
+        <p:txBody>
+          <a:bodyPr numCol="1" spcCol="0" anchor="ctr">
+            <a:noAutofit/>
+          </a:bodyPr>
+          <a:lstStyle/>
+          <a:p>
+            <a:pPr>
+              <a:lnSpc>
+                <a:spcPct val="100000"/>
+              </a:lnSpc>
+              <a:buNone/>
+            </a:pPr>
+            <a:r>
+              <a:rPr lang="en-US" sz="3200" b="0" strike="noStrike" spc="-1" dirty="0">
+                <a:solidFill>
+                  <a:srgbClr val="0064C8"/>
+                </a:solidFill>
+                <a:latin typeface="Century Gothic"/>
+              </a:rPr>
+              <a:t>Framing</a:t>
+            </a:r>
+            <a:endParaRPr lang="en-US" sz="3200" b="0" strike="noStrike" spc="-1" dirty="0">
+              <a:solidFill>
+                <a:srgbClr val="000000"/>
+              </a:solidFill>
+              <a:latin typeface="Century Gothic"/>
+            </a:endParaRPr>
+          </a:p>
+        </p:txBody>
+      </p:sp>
+      <p:sp>
+        <p:nvSpPr>
+          <p:cNvPr id="165" name="PlaceHolder 3">
+            <a:extLst>
+              <a:ext uri="{FF2B5EF4-FFF2-40B4-BE49-F238E27FC236}">
+                <a16:creationId xmlns:a16="http://schemas.microsoft.com/office/drawing/2014/main" id="{2EFBEA53-7B78-D9A1-93EF-9608A3193D27}"/>
+              </a:ext>
+            </a:extLst>
+          </p:cNvPr>
+          <p:cNvSpPr>
+            <a:spLocks noGrp="1"/>
+          </p:cNvSpPr>
+          <p:nvPr>
+            <p:ph type="sldNum"/>
+          </p:nvPr>
+        </p:nvSpPr>
+        <p:spPr>
+          <a:xfrm>
+            <a:off x="8376840" y="5692680"/>
+            <a:ext cx="384120" cy="364680"/>
+          </a:xfrm>
+          <a:prstGeom prst="rect">
+            <a:avLst/>
+          </a:prstGeom>
+          <a:noFill/>
+          <a:ln w="0">
+            <a:noFill/>
+          </a:ln>
+        </p:spPr>
+        <p:txBody>
+          <a:bodyPr anchor="ctr">
+            <a:noAutofit/>
+          </a:bodyPr>
+          <a:lstStyle/>
+          <a:p>
+            <a:pPr algn="r">
+              <a:lnSpc>
+                <a:spcPct val="100000"/>
+              </a:lnSpc>
+              <a:buNone/>
+            </a:pPr>
+            <a:fld id="{8BD7C522-1E12-40C3-B25E-5F0462E20B22}" type="slidenum">
+              <a:rPr lang="en-US" sz="1200" b="0" strike="noStrike" spc="-1">
+                <a:solidFill>
+                  <a:srgbClr val="8B8B8B"/>
+                </a:solidFill>
+                <a:latin typeface="Century Gothic"/>
+              </a:rPr>
+              <a:t>11</a:t>
+            </a:fld>
+            <a:endParaRPr lang="en-GB" sz="1200" b="0" strike="noStrike" spc="-1" dirty="0">
+              <a:latin typeface="Times New Roman"/>
+            </a:endParaRPr>
+          </a:p>
+        </p:txBody>
+      </p:sp>
+      <p:sp>
+        <p:nvSpPr>
+          <p:cNvPr id="7" name="PlaceHolder 2">
+            <a:extLst>
+              <a:ext uri="{FF2B5EF4-FFF2-40B4-BE49-F238E27FC236}">
+                <a16:creationId xmlns:a16="http://schemas.microsoft.com/office/drawing/2014/main" id="{66DE14D4-64D4-6D1F-DD92-BC16D674C58B}"/>
+              </a:ext>
+            </a:extLst>
+          </p:cNvPr>
+          <p:cNvSpPr txBox="1">
+            <a:spLocks/>
+          </p:cNvSpPr>
+          <p:nvPr/>
+        </p:nvSpPr>
+        <p:spPr>
+          <a:xfrm>
+            <a:off x="380880" y="1371598"/>
+            <a:ext cx="8109070" cy="4559301"/>
+          </a:xfrm>
+          <a:prstGeom prst="rect">
+            <a:avLst/>
+          </a:prstGeom>
+          <a:noFill/>
+          <a:ln w="0">
+            <a:noFill/>
+          </a:ln>
+        </p:spPr>
+        <p:txBody>
+          <a:bodyPr numCol="1" spcCol="0" anchor="t">
+            <a:noAutofit/>
+          </a:bodyPr>
+          <a:lstStyle>
+            <a:lvl1pPr marL="228600" indent="-228600" algn="l" defTabSz="914400" rtl="0" eaLnBrk="1" latinLnBrk="0" hangingPunct="1">
+              <a:lnSpc>
+                <a:spcPct val="90000"/>
+              </a:lnSpc>
+              <a:spcBef>
+                <a:spcPts val="1000"/>
+              </a:spcBef>
+              <a:buFont typeface="Arial" panose="020B0604020202020204" pitchFamily="34" charset="0"/>
+              <a:buChar char="•"/>
+              <a:defRPr sz="2800" kern="1200">
+                <a:solidFill>
+                  <a:schemeClr val="tx1"/>
+                </a:solidFill>
+                <a:latin typeface="+mn-lt"/>
+                <a:ea typeface="+mn-ea"/>
+                <a:cs typeface="+mn-cs"/>
+              </a:defRPr>
+            </a:lvl1pPr>
+            <a:lvl2pPr marL="685800" indent="-228600" algn="l" defTabSz="914400" rtl="0" eaLnBrk="1" latinLnBrk="0" hangingPunct="1">
+              <a:lnSpc>
+                <a:spcPct val="90000"/>
+              </a:lnSpc>
+              <a:spcBef>
+                <a:spcPts val="500"/>
+              </a:spcBef>
+              <a:buFont typeface="Arial" panose="020B0604020202020204" pitchFamily="34" charset="0"/>
+              <a:buChar char="•"/>
+              <a:defRPr sz="2400" kern="1200">
+                <a:solidFill>
+                  <a:schemeClr val="tx1"/>
+                </a:solidFill>
+                <a:latin typeface="+mn-lt"/>
+                <a:ea typeface="+mn-ea"/>
+                <a:cs typeface="+mn-cs"/>
+              </a:defRPr>
+            </a:lvl2pPr>
+            <a:lvl3pPr marL="1143000" indent="-228600" algn="l" defTabSz="914400" rtl="0" eaLnBrk="1" latinLnBrk="0" hangingPunct="1">
+              <a:lnSpc>
+                <a:spcPct val="90000"/>
+              </a:lnSpc>
+              <a:spcBef>
+                <a:spcPts val="500"/>
+              </a:spcBef>
+              <a:buFont typeface="Arial" panose="020B0604020202020204" pitchFamily="34" charset="0"/>
+              <a:buChar char="•"/>
+              <a:defRPr sz="2000" kern="1200">
+                <a:solidFill>
+                  <a:schemeClr val="tx1"/>
+                </a:solidFill>
+                <a:latin typeface="+mn-lt"/>
+                <a:ea typeface="+mn-ea"/>
+                <a:cs typeface="+mn-cs"/>
+              </a:defRPr>
+            </a:lvl3pPr>
+            <a:lvl4pPr marL="1600200" indent="-228600" algn="l" defTabSz="914400" rtl="0" eaLnBrk="1" latinLnBrk="0" hangingPunct="1">
+              <a:lnSpc>
+                <a:spcPct val="90000"/>
+              </a:lnSpc>
+              <a:spcBef>
+                <a:spcPts val="500"/>
+              </a:spcBef>
+              <a:buFont typeface="Arial" panose="020B0604020202020204" pitchFamily="34" charset="0"/>
+              <a:buChar char="•"/>
+              <a:defRPr sz="1800" kern="1200">
+                <a:solidFill>
+                  <a:schemeClr val="tx1"/>
+                </a:solidFill>
+                <a:latin typeface="+mn-lt"/>
+                <a:ea typeface="+mn-ea"/>
+                <a:cs typeface="+mn-cs"/>
+              </a:defRPr>
+            </a:lvl4pPr>
+            <a:lvl5pPr marL="2057400" indent="-228600" algn="l" defTabSz="914400" rtl="0" eaLnBrk="1" latinLnBrk="0" hangingPunct="1">
+              <a:lnSpc>
+                <a:spcPct val="90000"/>
+              </a:lnSpc>
+              <a:spcBef>
+                <a:spcPts val="500"/>
+              </a:spcBef>
+              <a:buFont typeface="Arial" panose="020B0604020202020204" pitchFamily="34" charset="0"/>
+              <a:buChar char="•"/>
+              <a:defRPr sz="1800" kern="1200">
+                <a:solidFill>
+                  <a:schemeClr val="tx1"/>
+                </a:solidFill>
+                <a:latin typeface="+mn-lt"/>
+                <a:ea typeface="+mn-ea"/>
+                <a:cs typeface="+mn-cs"/>
+              </a:defRPr>
+            </a:lvl5pPr>
+            <a:lvl6pPr marL="2514600" indent="-228600" algn="l" defTabSz="914400" rtl="0" eaLnBrk="1" latinLnBrk="0" hangingPunct="1">
+              <a:lnSpc>
+                <a:spcPct val="90000"/>
+              </a:lnSpc>
+              <a:spcBef>
+                <a:spcPts val="500"/>
+              </a:spcBef>
+              <a:buFont typeface="Arial" panose="020B0604020202020204" pitchFamily="34" charset="0"/>
+              <a:buChar char="•"/>
+              <a:defRPr sz="1800" kern="1200">
+                <a:solidFill>
+                  <a:schemeClr val="tx1"/>
+                </a:solidFill>
+                <a:latin typeface="+mn-lt"/>
+                <a:ea typeface="+mn-ea"/>
+                <a:cs typeface="+mn-cs"/>
+              </a:defRPr>
+            </a:lvl6pPr>
+            <a:lvl7pPr marL="2971800" indent="-228600" algn="l" defTabSz="914400" rtl="0" eaLnBrk="1" latinLnBrk="0" hangingPunct="1">
+              <a:lnSpc>
+                <a:spcPct val="90000"/>
+              </a:lnSpc>
+              <a:spcBef>
+                <a:spcPts val="500"/>
+              </a:spcBef>
+              <a:buFont typeface="Arial" panose="020B0604020202020204" pitchFamily="34" charset="0"/>
+              <a:buChar char="•"/>
+              <a:defRPr sz="1800" kern="1200">
+                <a:solidFill>
+                  <a:schemeClr val="tx1"/>
+                </a:solidFill>
+                <a:latin typeface="+mn-lt"/>
+                <a:ea typeface="+mn-ea"/>
+                <a:cs typeface="+mn-cs"/>
+              </a:defRPr>
+            </a:lvl7pPr>
+            <a:lvl8pPr marL="3429000" indent="-228600" algn="l" defTabSz="914400" rtl="0" eaLnBrk="1" latinLnBrk="0" hangingPunct="1">
+              <a:lnSpc>
+                <a:spcPct val="90000"/>
+              </a:lnSpc>
+              <a:spcBef>
+                <a:spcPts val="500"/>
+              </a:spcBef>
+              <a:buFont typeface="Arial" panose="020B0604020202020204" pitchFamily="34" charset="0"/>
+              <a:buChar char="•"/>
+              <a:defRPr sz="1800" kern="1200">
+                <a:solidFill>
+                  <a:schemeClr val="tx1"/>
+                </a:solidFill>
+                <a:latin typeface="+mn-lt"/>
+                <a:ea typeface="+mn-ea"/>
+                <a:cs typeface="+mn-cs"/>
+              </a:defRPr>
+            </a:lvl8pPr>
+            <a:lvl9pPr marL="3886200" indent="-228600" algn="l" defTabSz="914400" rtl="0" eaLnBrk="1" latinLnBrk="0" hangingPunct="1">
+              <a:lnSpc>
+                <a:spcPct val="90000"/>
+              </a:lnSpc>
+              <a:spcBef>
+                <a:spcPts val="500"/>
+              </a:spcBef>
+              <a:buFont typeface="Arial" panose="020B0604020202020204" pitchFamily="34" charset="0"/>
+              <a:buChar char="•"/>
+              <a:defRPr sz="1800" kern="1200">
+                <a:solidFill>
+                  <a:schemeClr val="tx1"/>
+                </a:solidFill>
+                <a:latin typeface="+mn-lt"/>
+                <a:ea typeface="+mn-ea"/>
+                <a:cs typeface="+mn-cs"/>
+              </a:defRPr>
+            </a:lvl9pPr>
+          </a:lstStyle>
+          <a:p>
+            <a:pPr>
+              <a:lnSpc>
+                <a:spcPct val="100000"/>
+              </a:lnSpc>
+              <a:spcBef>
+                <a:spcPts val="400"/>
+              </a:spcBef>
+              <a:buClr>
+                <a:srgbClr val="0064C8"/>
+              </a:buClr>
+              <a:buFont typeface="Wingdings" panose="05000000000000000000" pitchFamily="2" charset="2"/>
+              <a:buChar char="§"/>
+            </a:pPr>
+            <a:r>
+              <a:rPr lang="en-US" sz="2000" spc="-1" dirty="0">
+                <a:solidFill>
+                  <a:srgbClr val="000000"/>
+                </a:solidFill>
+                <a:latin typeface="Century Gothic"/>
+              </a:rPr>
+              <a:t>How to frame the project:</a:t>
+            </a:r>
+          </a:p>
+          <a:p>
+            <a:pPr lvl="1">
+              <a:lnSpc>
+                <a:spcPct val="100000"/>
+              </a:lnSpc>
+              <a:spcBef>
+                <a:spcPts val="400"/>
+              </a:spcBef>
+              <a:buClr>
+                <a:srgbClr val="0064C8"/>
+              </a:buClr>
+              <a:buFont typeface="Wingdings" panose="05000000000000000000" pitchFamily="2" charset="2"/>
+              <a:buChar char="§"/>
+            </a:pPr>
+            <a:r>
+              <a:rPr lang="en-US" sz="1600" spc="-1" dirty="0">
+                <a:solidFill>
+                  <a:srgbClr val="000000"/>
+                </a:solidFill>
+                <a:latin typeface="Century Gothic"/>
+              </a:rPr>
+              <a:t>A proof-of-concept study?</a:t>
+            </a:r>
+          </a:p>
+          <a:p>
+            <a:pPr lvl="1">
+              <a:lnSpc>
+                <a:spcPct val="100000"/>
+              </a:lnSpc>
+              <a:spcBef>
+                <a:spcPts val="400"/>
+              </a:spcBef>
+              <a:buClr>
+                <a:srgbClr val="0064C8"/>
+              </a:buClr>
+              <a:buFont typeface="Wingdings" panose="05000000000000000000" pitchFamily="2" charset="2"/>
+              <a:buChar char="§"/>
+            </a:pPr>
+            <a:r>
+              <a:rPr lang="en-US" sz="1600" spc="-1" dirty="0">
+                <a:solidFill>
+                  <a:srgbClr val="000000"/>
+                </a:solidFill>
+                <a:latin typeface="Century Gothic"/>
+              </a:rPr>
+              <a:t>An explainability platform for XAI applied to molecular design?</a:t>
+            </a:r>
+          </a:p>
+          <a:p>
+            <a:pPr lvl="1">
+              <a:lnSpc>
+                <a:spcPct val="100000"/>
+              </a:lnSpc>
+              <a:spcBef>
+                <a:spcPts val="400"/>
+              </a:spcBef>
+              <a:buClr>
+                <a:srgbClr val="0064C8"/>
+              </a:buClr>
+              <a:buFont typeface="Wingdings" panose="05000000000000000000" pitchFamily="2" charset="2"/>
+              <a:buChar char="§"/>
+            </a:pPr>
+            <a:r>
+              <a:rPr lang="en-US" sz="1600" spc="-1" dirty="0">
+                <a:solidFill>
+                  <a:srgbClr val="000000"/>
+                </a:solidFill>
+                <a:latin typeface="Century Gothic"/>
+              </a:rPr>
+              <a:t>An explainability platform for XAI specific to molecular selectivity?</a:t>
+            </a:r>
+          </a:p>
+          <a:p>
+            <a:pPr lvl="1">
+              <a:lnSpc>
+                <a:spcPct val="100000"/>
+              </a:lnSpc>
+              <a:spcBef>
+                <a:spcPts val="400"/>
+              </a:spcBef>
+              <a:buClr>
+                <a:srgbClr val="0064C8"/>
+              </a:buClr>
+              <a:buFont typeface="Wingdings" panose="05000000000000000000" pitchFamily="2" charset="2"/>
+              <a:buChar char="§"/>
+            </a:pPr>
+            <a:r>
+              <a:rPr lang="en-US" sz="1600" spc="-1" dirty="0">
+                <a:solidFill>
+                  <a:srgbClr val="000000"/>
+                </a:solidFill>
+                <a:latin typeface="Century Gothic"/>
+              </a:rPr>
+              <a:t>A modular </a:t>
+            </a:r>
+            <a:r>
+              <a:rPr lang="en-US" sz="1600" spc="-1" dirty="0" err="1">
+                <a:solidFill>
+                  <a:srgbClr val="000000"/>
+                </a:solidFill>
+                <a:latin typeface="Century Gothic"/>
+              </a:rPr>
+              <a:t>explainability</a:t>
+            </a:r>
+            <a:r>
+              <a:rPr lang="en-US" sz="1600" spc="-1" dirty="0">
+                <a:solidFill>
+                  <a:srgbClr val="000000"/>
+                </a:solidFill>
+                <a:latin typeface="Century Gothic"/>
+              </a:rPr>
+              <a:t>-enhanced platform for </a:t>
+            </a:r>
+            <a:r>
+              <a:rPr lang="en-US" sz="1600" spc="-1" dirty="0" err="1">
+                <a:solidFill>
+                  <a:srgbClr val="000000"/>
+                </a:solidFill>
+                <a:latin typeface="Century Gothic"/>
+              </a:rPr>
+              <a:t>chemoinformatics</a:t>
+            </a:r>
+            <a:r>
+              <a:rPr lang="en-US" sz="1600" spc="-1" dirty="0">
+                <a:solidFill>
+                  <a:srgbClr val="000000"/>
+                </a:solidFill>
+                <a:latin typeface="Century Gothic"/>
+              </a:rPr>
+              <a:t>? </a:t>
+            </a:r>
+          </a:p>
+          <a:p>
+            <a:pPr lvl="1">
+              <a:lnSpc>
+                <a:spcPct val="100000"/>
+              </a:lnSpc>
+              <a:spcBef>
+                <a:spcPts val="400"/>
+              </a:spcBef>
+              <a:buClr>
+                <a:srgbClr val="0064C8"/>
+              </a:buClr>
+              <a:buFont typeface="Wingdings" panose="05000000000000000000" pitchFamily="2" charset="2"/>
+              <a:buChar char="§"/>
+            </a:pPr>
+            <a:endParaRPr lang="en-US" sz="1600" spc="-1" dirty="0">
+              <a:solidFill>
+                <a:srgbClr val="000000"/>
+              </a:solidFill>
+              <a:latin typeface="Century Gothic"/>
+            </a:endParaRPr>
+          </a:p>
+          <a:p>
+            <a:pPr lvl="1">
+              <a:lnSpc>
+                <a:spcPct val="100000"/>
+              </a:lnSpc>
+              <a:spcBef>
+                <a:spcPts val="400"/>
+              </a:spcBef>
+              <a:buClr>
+                <a:srgbClr val="0064C8"/>
+              </a:buClr>
+              <a:buFont typeface="Wingdings" panose="05000000000000000000" pitchFamily="2" charset="2"/>
+              <a:buChar char="§"/>
+            </a:pPr>
+            <a:endParaRPr lang="en-US" sz="1600" spc="-1" dirty="0">
+              <a:solidFill>
+                <a:srgbClr val="000000"/>
+              </a:solidFill>
+              <a:latin typeface="Century Gothic"/>
+            </a:endParaRPr>
+          </a:p>
+          <a:p>
+            <a:pPr>
+              <a:lnSpc>
+                <a:spcPct val="100000"/>
+              </a:lnSpc>
+              <a:spcBef>
+                <a:spcPts val="400"/>
+              </a:spcBef>
+              <a:buClr>
+                <a:srgbClr val="0064C8"/>
+              </a:buClr>
+              <a:buFont typeface="Wingdings" panose="05000000000000000000" pitchFamily="2" charset="2"/>
+              <a:buChar char="§"/>
+            </a:pPr>
+            <a:endParaRPr lang="en-US" sz="2000" spc="-1" dirty="0">
+              <a:solidFill>
+                <a:srgbClr val="000000"/>
+              </a:solidFill>
+              <a:latin typeface="Century Gothic"/>
+            </a:endParaRPr>
+          </a:p>
+          <a:p>
+            <a:pPr>
+              <a:lnSpc>
+                <a:spcPct val="100000"/>
+              </a:lnSpc>
+              <a:spcBef>
+                <a:spcPts val="400"/>
+              </a:spcBef>
+              <a:buClr>
+                <a:srgbClr val="0064C8"/>
+              </a:buClr>
+              <a:buFont typeface="Wingdings" panose="05000000000000000000" pitchFamily="2" charset="2"/>
+              <a:buChar char="§"/>
+            </a:pPr>
+            <a:endParaRPr lang="en-US" sz="1800" spc="-1" dirty="0">
+              <a:solidFill>
+                <a:srgbClr val="000000"/>
+              </a:solidFill>
+              <a:latin typeface="Century Gothic"/>
+            </a:endParaRPr>
+          </a:p>
+          <a:p>
+            <a:pPr marL="343080" indent="-343080">
+              <a:lnSpc>
+                <a:spcPct val="100000"/>
+              </a:lnSpc>
+              <a:spcBef>
+                <a:spcPts val="400"/>
+              </a:spcBef>
+              <a:spcAft>
+                <a:spcPts val="601"/>
+              </a:spcAft>
+              <a:buClr>
+                <a:srgbClr val="0064C8"/>
+              </a:buClr>
+              <a:buFont typeface="Wingdings 2" charset="2"/>
+              <a:buChar char=""/>
+            </a:pPr>
+            <a:endParaRPr lang="en-US" sz="2000" b="1" spc="-1" dirty="0">
+              <a:solidFill>
+                <a:srgbClr val="000000"/>
+              </a:solidFill>
+              <a:latin typeface="Century Gothic"/>
+            </a:endParaRPr>
+          </a:p>
+        </p:txBody>
+      </p:sp>
+    </p:spTree>
+    <p:extLst>
+      <p:ext uri="{BB962C8B-B14F-4D97-AF65-F5344CB8AC3E}">
+        <p14:creationId xmlns:p14="http://schemas.microsoft.com/office/powerpoint/2010/main" val="1594879052"/>
+      </p:ext>
+    </p:extLst>
+  </p:cSld>
+  <p:clrMapOvr>
+    <a:masterClrMapping/>
+  </p:clrMapOvr>
 </p:sld>
 </file>
 
@@ -9730,7 +10949,7 @@
       </p:sp>
       <p:pic>
         <p:nvPicPr>
-          <p:cNvPr id="4" name="Picture 3" descr="A diagram of different types of chemistry&#10;&#10;AI-generated content may be incorrect.">
+          <p:cNvPr id="4" name="Picture 3">
             <a:extLst>
               <a:ext uri="{FF2B5EF4-FFF2-40B4-BE49-F238E27FC236}">
                 <a16:creationId xmlns:a16="http://schemas.microsoft.com/office/drawing/2014/main" id="{A9172708-06AB-AE7A-4BC0-05B1328EE700}"/>
@@ -9750,14 +10969,13 @@
               </a:ext>
             </a:extLst>
           </a:blip>
-          <a:stretch>
-            <a:fillRect/>
-          </a:stretch>
+          <a:srcRect/>
+          <a:stretch/>
         </p:blipFill>
         <p:spPr>
           <a:xfrm>
-            <a:off x="665429" y="2123180"/>
-            <a:ext cx="7810981" cy="3363221"/>
+            <a:off x="666509" y="2127309"/>
+            <a:ext cx="7810981" cy="3354962"/>
           </a:xfrm>
           <a:prstGeom prst="rect">
             <a:avLst/>
@@ -9774,18 +10992,6 @@
   <p:clrMapOvr>
     <a:masterClrMapping/>
   </p:clrMapOvr>
-  <mc:AlternateContent xmlns:mc="http://schemas.openxmlformats.org/markup-compatibility/2006" xmlns:p14="http://schemas.microsoft.com/office/powerpoint/2010/main">
-    <mc:Choice Requires="p14">
-      <p:transition spd="med" p14:dur="700">
-        <p:fade/>
-      </p:transition>
-    </mc:Choice>
-    <mc:Fallback xmlns:p15="http://schemas.microsoft.com/office/powerpoint/2012/main" xmlns="">
-      <p:transition spd="med">
-        <p:fade/>
-      </p:transition>
-    </mc:Fallback>
-  </mc:AlternateContent>
 </p:sld>
 </file>
 
@@ -10170,7 +11376,7 @@
               <a:t>LM Studio + Open Source LLM (GPT-OSS, </a:t>
             </a:r>
             <a:r>
-              <a:rPr lang="en-US" sz="1600" spc="-1" dirty="0" err="1">
+              <a:rPr lang="en-US" sz="1600" b="1" spc="-1" dirty="0" err="1">
                 <a:solidFill>
                   <a:srgbClr val="000000"/>
                 </a:solidFill>
@@ -10179,22 +11385,13 @@
               <a:t>Qwen</a:t>
             </a:r>
             <a:r>
-              <a:rPr lang="en-US" sz="1600" spc="-1" dirty="0">
+              <a:rPr lang="en-US" sz="1600" b="1" spc="-1" dirty="0">
                 <a:solidFill>
                   <a:srgbClr val="000000"/>
                 </a:solidFill>
                 <a:latin typeface="Century Gothic"/>
               </a:rPr>
-              <a:t> 3.5, </a:t>
-            </a:r>
-            <a:r>
-              <a:rPr lang="en-US" sz="1600" spc="-1" dirty="0" err="1">
-                <a:solidFill>
-                  <a:srgbClr val="000000"/>
-                </a:solidFill>
-                <a:latin typeface="Century Gothic"/>
-              </a:rPr>
-              <a:t>etc</a:t>
+              <a:t> 3.5</a:t>
             </a:r>
             <a:r>
               <a:rPr lang="en-US" sz="1600" spc="-1" dirty="0">
@@ -10203,7 +11400,7 @@
                 </a:solidFill>
                 <a:latin typeface="Century Gothic"/>
               </a:rPr>
-              <a:t>)</a:t>
+              <a:t>, Gemma 4, etc.)</a:t>
             </a:r>
             <a:br>
               <a:rPr lang="en-US" sz="1600" spc="-1" dirty="0">
@@ -10213,7 +11410,7 @@
                 <a:latin typeface="Century Gothic"/>
               </a:rPr>
             </a:br>
-            <a:endParaRPr lang="en-US" sz="2000" spc="-1" dirty="0">
+            <a:endParaRPr lang="en-US" sz="1600" spc="-1" dirty="0">
               <a:solidFill>
                 <a:srgbClr val="000000"/>
               </a:solidFill>
@@ -10241,7 +11438,7 @@
                 </a:solidFill>
                 <a:latin typeface="Century Gothic"/>
               </a:rPr>
-              <a:t>Explainability methods</a:t>
+              <a:t>ML models</a:t>
             </a:r>
           </a:p>
           <a:p>
@@ -10265,38 +11462,8 @@
                 </a:solidFill>
                 <a:latin typeface="Century Gothic"/>
               </a:rPr>
-              <a:t>SHAP</a:t>
+              <a:t>Traditional ML – RF, SVM</a:t>
             </a:r>
-          </a:p>
-          <a:p>
-            <a:pPr lvl="1">
-              <a:lnSpc>
-                <a:spcPct val="100000"/>
-              </a:lnSpc>
-              <a:spcBef>
-                <a:spcPts val="400"/>
-              </a:spcBef>
-              <a:buClr>
-                <a:srgbClr val="0064C8"/>
-              </a:buClr>
-              <a:buFont typeface="Symbol" panose="05050102010706020507" pitchFamily="18" charset="2"/>
-              <a:buChar char="-"/>
-            </a:pPr>
-            <a:r>
-              <a:rPr lang="en-US" sz="1600" spc="-1" dirty="0" err="1">
-                <a:solidFill>
-                  <a:srgbClr val="000000"/>
-                </a:solidFill>
-                <a:latin typeface="Century Gothic"/>
-              </a:rPr>
-              <a:t>MolAnchor</a:t>
-            </a:r>
-            <a:endParaRPr lang="en-US" sz="1600" spc="-1" dirty="0">
-              <a:solidFill>
-                <a:srgbClr val="000000"/>
-              </a:solidFill>
-              <a:latin typeface="Century Gothic"/>
-            </a:endParaRPr>
           </a:p>
           <a:p>
             <a:pPr lvl="1">
@@ -10319,68 +11486,8 @@
                 </a:solidFill>
                 <a:latin typeface="Century Gothic"/>
               </a:rPr>
-              <a:t>Counterfactuals</a:t>
+              <a:t>NNs – DNN, GNN</a:t>
             </a:r>
-          </a:p>
-          <a:p>
-            <a:pPr lvl="1">
-              <a:lnSpc>
-                <a:spcPct val="100000"/>
-              </a:lnSpc>
-              <a:spcBef>
-                <a:spcPts val="400"/>
-              </a:spcBef>
-              <a:buClr>
-                <a:srgbClr val="0064C8"/>
-              </a:buClr>
-              <a:buFont typeface="Symbol" panose="05050102010706020507" pitchFamily="18" charset="2"/>
-              <a:buChar char="-"/>
-            </a:pPr>
-            <a:r>
-              <a:rPr lang="en-US" sz="1600" spc="-1" dirty="0" err="1">
-                <a:solidFill>
-                  <a:srgbClr val="000000"/>
-                </a:solidFill>
-                <a:latin typeface="Century Gothic"/>
-              </a:rPr>
-              <a:t>MolCE</a:t>
-            </a:r>
-            <a:endParaRPr lang="en-US" sz="1600" spc="-1" dirty="0">
-              <a:solidFill>
-                <a:srgbClr val="000000"/>
-              </a:solidFill>
-              <a:latin typeface="Century Gothic"/>
-            </a:endParaRPr>
-          </a:p>
-          <a:p>
-            <a:pPr lvl="1">
-              <a:lnSpc>
-                <a:spcPct val="100000"/>
-              </a:lnSpc>
-              <a:spcBef>
-                <a:spcPts val="400"/>
-              </a:spcBef>
-              <a:buClr>
-                <a:srgbClr val="0064C8"/>
-              </a:buClr>
-              <a:buFont typeface="Symbol" panose="05050102010706020507" pitchFamily="18" charset="2"/>
-              <a:buChar char="-"/>
-            </a:pPr>
-            <a:r>
-              <a:rPr lang="en-US" sz="1600" spc="-1" dirty="0" err="1">
-                <a:solidFill>
-                  <a:srgbClr val="000000"/>
-                </a:solidFill>
-                <a:latin typeface="Century Gothic"/>
-              </a:rPr>
-              <a:t>EdgeSHAPer</a:t>
-            </a:r>
-            <a:endParaRPr lang="en-US" sz="1600" spc="-1" dirty="0">
-              <a:solidFill>
-                <a:srgbClr val="000000"/>
-              </a:solidFill>
-              <a:latin typeface="Century Gothic"/>
-            </a:endParaRPr>
           </a:p>
           <a:p>
             <a:pPr lvl="1">
@@ -10418,13 +11525,22 @@
               <a:buChar char="§"/>
             </a:pPr>
             <a:r>
-              <a:rPr lang="en-US" sz="2000" spc="-1" dirty="0">
+              <a:rPr lang="en-US" sz="2000" spc="-1" dirty="0" err="1">
                 <a:solidFill>
                   <a:srgbClr val="000000"/>
                 </a:solidFill>
                 <a:latin typeface="Century Gothic"/>
               </a:rPr>
-              <a:t>ML models</a:t>
+              <a:t>Explainability</a:t>
+            </a:r>
+            <a:r>
+              <a:rPr lang="en-US" sz="2000" spc="-1" dirty="0">
+                <a:solidFill>
+                  <a:srgbClr val="000000"/>
+                </a:solidFill>
+                <a:latin typeface="Century Gothic"/>
+              </a:rPr>
+              <a:t> methods</a:t>
             </a:r>
           </a:p>
           <a:p>
@@ -10448,8 +11564,38 @@
                 </a:solidFill>
                 <a:latin typeface="Century Gothic"/>
               </a:rPr>
-              <a:t>Traditional ML – RF, SVM</a:t>
+              <a:t>SHAP</a:t>
             </a:r>
+          </a:p>
+          <a:p>
+            <a:pPr lvl="1">
+              <a:lnSpc>
+                <a:spcPct val="100000"/>
+              </a:lnSpc>
+              <a:spcBef>
+                <a:spcPts val="400"/>
+              </a:spcBef>
+              <a:buClr>
+                <a:srgbClr val="0064C8"/>
+              </a:buClr>
+              <a:buFont typeface="Symbol" panose="05050102010706020507" pitchFamily="18" charset="2"/>
+              <a:buChar char="-"/>
+            </a:pPr>
+            <a:r>
+              <a:rPr lang="en-US" sz="1600" spc="-1" dirty="0" err="1">
+                <a:solidFill>
+                  <a:srgbClr val="000000"/>
+                </a:solidFill>
+                <a:latin typeface="Century Gothic"/>
+              </a:rPr>
+              <a:t>MolAnchor</a:t>
+            </a:r>
+            <a:endParaRPr lang="en-US" sz="1600" spc="-1" dirty="0">
+              <a:solidFill>
+                <a:srgbClr val="000000"/>
+              </a:solidFill>
+              <a:latin typeface="Century Gothic"/>
+            </a:endParaRPr>
           </a:p>
           <a:p>
             <a:pPr lvl="1">
@@ -10472,11 +11618,71 @@
                 </a:solidFill>
                 <a:latin typeface="Century Gothic"/>
               </a:rPr>
-              <a:t>NNs – DNN, GNN</a:t>
+              <a:t>Counterfactuals</a:t>
             </a:r>
           </a:p>
           <a:p>
             <a:pPr lvl="1">
+              <a:lnSpc>
+                <a:spcPct val="100000"/>
+              </a:lnSpc>
+              <a:spcBef>
+                <a:spcPts val="400"/>
+              </a:spcBef>
+              <a:buClr>
+                <a:srgbClr val="0064C8"/>
+              </a:buClr>
+              <a:buFont typeface="Symbol" panose="05050102010706020507" pitchFamily="18" charset="2"/>
+              <a:buChar char="-"/>
+            </a:pPr>
+            <a:r>
+              <a:rPr lang="en-US" sz="1600" spc="-1" dirty="0" err="1">
+                <a:solidFill>
+                  <a:srgbClr val="000000"/>
+                </a:solidFill>
+                <a:latin typeface="Century Gothic"/>
+              </a:rPr>
+              <a:t>MolCE</a:t>
+            </a:r>
+            <a:endParaRPr lang="en-US" sz="1600" spc="-1" dirty="0">
+              <a:solidFill>
+                <a:srgbClr val="000000"/>
+              </a:solidFill>
+              <a:latin typeface="Century Gothic"/>
+            </a:endParaRPr>
+          </a:p>
+          <a:p>
+            <a:pPr lvl="1">
+              <a:lnSpc>
+                <a:spcPct val="100000"/>
+              </a:lnSpc>
+              <a:spcBef>
+                <a:spcPts val="400"/>
+              </a:spcBef>
+              <a:buClr>
+                <a:srgbClr val="0064C8"/>
+              </a:buClr>
+              <a:buFont typeface="Symbol" panose="05050102010706020507" pitchFamily="18" charset="2"/>
+              <a:buChar char="-"/>
+            </a:pPr>
+            <a:r>
+              <a:rPr lang="en-US" sz="1600" spc="-1" dirty="0" err="1">
+                <a:solidFill>
+                  <a:srgbClr val="000000"/>
+                </a:solidFill>
+                <a:latin typeface="Century Gothic"/>
+              </a:rPr>
+              <a:t>EdgeSHAPer</a:t>
+            </a:r>
+            <a:endParaRPr lang="en-US" sz="1600" spc="-1" dirty="0">
+              <a:solidFill>
+                <a:srgbClr val="000000"/>
+              </a:solidFill>
+              <a:latin typeface="Century Gothic"/>
+            </a:endParaRPr>
+          </a:p>
+          <a:p>
+            <a:pPr marL="457200" lvl="1" indent="0">
               <a:lnSpc>
                 <a:spcPct val="100000"/>
               </a:lnSpc>
@@ -10489,8 +11695,7 @@
               <a:buClr>
                 <a:srgbClr val="0064C8"/>
               </a:buClr>
-              <a:buFont typeface="Wingdings" panose="05000000000000000000" pitchFamily="2" charset="2"/>
-              <a:buChar char="§"/>
+              <a:buNone/>
             </a:pPr>
             <a:endParaRPr lang="en-US" sz="1600" spc="-1" dirty="0">
               <a:solidFill>
@@ -10535,18 +11740,6 @@
   <p:clrMapOvr>
     <a:masterClrMapping/>
   </p:clrMapOvr>
-  <mc:AlternateContent xmlns:mc="http://schemas.openxmlformats.org/markup-compatibility/2006" xmlns:p14="http://schemas.microsoft.com/office/powerpoint/2010/main">
-    <mc:Choice Requires="p14">
-      <p:transition spd="med" p14:dur="700">
-        <p:fade/>
-      </p:transition>
-    </mc:Choice>
-    <mc:Fallback xmlns:p15="http://schemas.microsoft.com/office/powerpoint/2012/main" xmlns="">
-      <p:transition spd="med">
-        <p:fade/>
-      </p:transition>
-    </mc:Fallback>
-  </mc:AlternateContent>
 </p:sld>
 </file>
 
@@ -11114,18 +12307,6 @@
   <p:clrMapOvr>
     <a:masterClrMapping/>
   </p:clrMapOvr>
-  <mc:AlternateContent xmlns:mc="http://schemas.openxmlformats.org/markup-compatibility/2006" xmlns:p14="http://schemas.microsoft.com/office/powerpoint/2010/main">
-    <mc:Choice Requires="p14">
-      <p:transition spd="med" p14:dur="700">
-        <p:fade/>
-      </p:transition>
-    </mc:Choice>
-    <mc:Fallback xmlns:p15="http://schemas.microsoft.com/office/powerpoint/2012/main" xmlns="">
-      <p:transition spd="med">
-        <p:fade/>
-      </p:transition>
-    </mc:Fallback>
-  </mc:AlternateContent>
 </p:sld>
 </file>
 
@@ -11729,18 +12910,6 @@
   <p:clrMapOvr>
     <a:masterClrMapping/>
   </p:clrMapOvr>
-  <mc:AlternateContent xmlns:mc="http://schemas.openxmlformats.org/markup-compatibility/2006" xmlns:p14="http://schemas.microsoft.com/office/powerpoint/2010/main">
-    <mc:Choice Requires="p14">
-      <p:transition spd="med" p14:dur="700">
-        <p:fade/>
-      </p:transition>
-    </mc:Choice>
-    <mc:Fallback xmlns:p15="http://schemas.microsoft.com/office/powerpoint/2012/main" xmlns="">
-      <p:transition spd="med">
-        <p:fade/>
-      </p:transition>
-    </mc:Fallback>
-  </mc:AlternateContent>
 </p:sld>
 </file>
 
@@ -12397,18 +13566,6 @@
   <p:clrMapOvr>
     <a:masterClrMapping/>
   </p:clrMapOvr>
-  <mc:AlternateContent xmlns:mc="http://schemas.openxmlformats.org/markup-compatibility/2006" xmlns:p14="http://schemas.microsoft.com/office/powerpoint/2010/main">
-    <mc:Choice Requires="p14">
-      <p:transition spd="med" p14:dur="700">
-        <p:fade/>
-      </p:transition>
-    </mc:Choice>
-    <mc:Fallback xmlns="">
-      <p:transition spd="med">
-        <p:fade/>
-      </p:transition>
-    </mc:Fallback>
-  </mc:AlternateContent>
 </p:sld>
 </file>
 
@@ -13051,18 +14208,6 @@
   <p:clrMapOvr>
     <a:masterClrMapping/>
   </p:clrMapOvr>
-  <mc:AlternateContent xmlns:mc="http://schemas.openxmlformats.org/markup-compatibility/2006" xmlns:p14="http://schemas.microsoft.com/office/powerpoint/2010/main">
-    <mc:Choice Requires="p14">
-      <p:transition spd="med" p14:dur="700">
-        <p:fade/>
-      </p:transition>
-    </mc:Choice>
-    <mc:Fallback xmlns="">
-      <p:transition spd="med">
-        <p:fade/>
-      </p:transition>
-    </mc:Fallback>
-  </mc:AlternateContent>
 </p:sld>
 </file>
 
@@ -13137,7 +14282,16 @@
                 </a:solidFill>
                 <a:latin typeface="Century Gothic"/>
               </a:rPr>
-              <a:t>To do list</a:t>
+              <a:t>Exemplary answer output </a:t>
+            </a:r>
+            <a:r>
+              <a:rPr lang="en-US" sz="3200" b="0" strike="noStrike" spc="-1" dirty="0" err="1">
+                <a:solidFill>
+                  <a:srgbClr val="0064C8"/>
+                </a:solidFill>
+                <a:latin typeface="Century Gothic"/>
+              </a:rPr>
+              <a:t>EdgeSHAPer</a:t>
             </a:r>
             <a:endParaRPr lang="en-US" sz="3200" b="0" strike="noStrike" spc="-1" dirty="0">
               <a:solidFill>
@@ -13220,8 +14374,8 @@
         </p:nvSpPr>
         <p:spPr>
           <a:xfrm>
-            <a:off x="380880" y="1371598"/>
-            <a:ext cx="8109070" cy="4559301"/>
+            <a:off x="374529" y="1371598"/>
+            <a:ext cx="4251523" cy="4559301"/>
           </a:xfrm>
           <a:prstGeom prst="rect">
             <a:avLst/>
@@ -13420,25 +14574,7 @@
                 </a:solidFill>
                 <a:latin typeface="Century Gothic"/>
               </a:rPr>
-              <a:t>Add and properly implement missing XAI methods (</a:t>
-            </a:r>
-            <a:r>
-              <a:rPr lang="en-US" sz="2000" spc="-1" dirty="0" err="1">
-                <a:solidFill>
-                  <a:srgbClr val="000000"/>
-                </a:solidFill>
-                <a:latin typeface="Century Gothic"/>
-              </a:rPr>
-              <a:t>EdgeSHAPer</a:t>
-            </a:r>
-            <a:r>
-              <a:rPr lang="en-US" sz="2000" spc="-1" dirty="0">
-                <a:solidFill>
-                  <a:srgbClr val="000000"/>
-                </a:solidFill>
-                <a:latin typeface="Century Gothic"/>
-              </a:rPr>
-              <a:t> and Counterfactuals)</a:t>
+              <a:t>Prompt: Train a GNN model on a binary dataset and explain a correctly predicted active compound</a:t>
             </a:r>
           </a:p>
           <a:p>
@@ -13476,29 +14612,6 @@
               <a:buFont typeface="Wingdings" panose="05000000000000000000" pitchFamily="2" charset="2"/>
               <a:buChar char="§"/>
             </a:pPr>
-            <a:r>
-              <a:rPr lang="en-US" sz="2000" spc="-1" dirty="0">
-                <a:solidFill>
-                  <a:srgbClr val="000000"/>
-                </a:solidFill>
-                <a:latin typeface="Century Gothic"/>
-              </a:rPr>
-              <a:t>Integrate with cluster for faster inference and explore larger LLMs</a:t>
-            </a:r>
-          </a:p>
-          <a:p>
-            <a:pPr marL="0" indent="0">
-              <a:lnSpc>
-                <a:spcPct val="100000"/>
-              </a:lnSpc>
-              <a:spcBef>
-                <a:spcPts val="400"/>
-              </a:spcBef>
-              <a:buClr>
-                <a:srgbClr val="0064C8"/>
-              </a:buClr>
-              <a:buNone/>
-            </a:pPr>
             <a:endParaRPr lang="en-US" sz="2000" spc="-1" dirty="0">
               <a:solidFill>
                 <a:srgbClr val="000000"/>
@@ -13527,7 +14640,7 @@
                 </a:solidFill>
                 <a:latin typeface="Century Gothic"/>
               </a:rPr>
-              <a:t>Clean up the repository and make it available </a:t>
+              <a:t>LLM selects the architecture</a:t>
             </a:r>
           </a:p>
           <a:p>
@@ -13552,30 +14665,6 @@
             </a:endParaRPr>
           </a:p>
           <a:p>
-            <a:pPr lvl="1">
-              <a:lnSpc>
-                <a:spcPct val="100000"/>
-              </a:lnSpc>
-              <a:spcBef>
-                <a:spcPts val="400"/>
-              </a:spcBef>
-              <a:buClr>
-                <a:srgbClr val="0064C8"/>
-              </a:buClr>
-              <a:buFont typeface="Wingdings" panose="05000000000000000000" pitchFamily="2" charset="2"/>
-              <a:buChar char="§"/>
-            </a:pPr>
-            <a:r>
-              <a:rPr lang="en-US" sz="1600" spc="-1" dirty="0">
-                <a:solidFill>
-                  <a:srgbClr val="000000"/>
-                </a:solidFill>
-                <a:latin typeface="Century Gothic"/>
-              </a:rPr>
-              <a:t>An “organization repository” is available for the whole lab to ease the integration of new components</a:t>
-            </a:r>
-          </a:p>
-          <a:p>
             <a:pPr>
               <a:lnSpc>
                 <a:spcPct val="100000"/>
@@ -13617,8 +14706,49 @@
                 </a:solidFill>
                 <a:latin typeface="Century Gothic"/>
               </a:rPr>
-              <a:t>Make a guide for lab members for the implementation of AI agents</a:t>
+              <a:t>Reports results</a:t>
             </a:r>
+          </a:p>
+          <a:p>
+            <a:pPr>
+              <a:lnSpc>
+                <a:spcPct val="100000"/>
+              </a:lnSpc>
+              <a:spcBef>
+                <a:spcPts val="400"/>
+              </a:spcBef>
+              <a:buClr>
+                <a:srgbClr val="0064C8"/>
+              </a:buClr>
+              <a:buFont typeface="Wingdings" panose="05000000000000000000" pitchFamily="2" charset="2"/>
+              <a:buChar char="§"/>
+            </a:pPr>
+            <a:endParaRPr lang="en-US" sz="2000" spc="-1" dirty="0">
+              <a:solidFill>
+                <a:srgbClr val="000000"/>
+              </a:solidFill>
+              <a:latin typeface="Century Gothic"/>
+            </a:endParaRPr>
+          </a:p>
+          <a:p>
+            <a:pPr marL="0" indent="0">
+              <a:lnSpc>
+                <a:spcPct val="100000"/>
+              </a:lnSpc>
+              <a:spcBef>
+                <a:spcPts val="400"/>
+              </a:spcBef>
+              <a:buClr>
+                <a:srgbClr val="0064C8"/>
+              </a:buClr>
+              <a:buNone/>
+            </a:pPr>
+            <a:endParaRPr lang="en-US" sz="2000" spc="-1" dirty="0">
+              <a:solidFill>
+                <a:srgbClr val="000000"/>
+              </a:solidFill>
+              <a:latin typeface="Century Gothic"/>
+            </a:endParaRPr>
           </a:p>
           <a:p>
             <a:pPr>
@@ -13688,28 +14818,106 @@
           </a:p>
         </p:txBody>
       </p:sp>
+      <p:pic>
+        <p:nvPicPr>
+          <p:cNvPr id="3" name="Picture 2">
+            <a:extLst>
+              <a:ext uri="{FF2B5EF4-FFF2-40B4-BE49-F238E27FC236}">
+                <a16:creationId xmlns:a16="http://schemas.microsoft.com/office/drawing/2014/main" id="{9DA85E66-1EFD-47C3-862B-21979C1F5C6F}"/>
+              </a:ext>
+            </a:extLst>
+          </p:cNvPr>
+          <p:cNvPicPr>
+            <a:picLocks noChangeAspect="1"/>
+          </p:cNvPicPr>
+          <p:nvPr/>
+        </p:nvPicPr>
+        <p:blipFill>
+          <a:blip r:embed="rId2"/>
+          <a:stretch>
+            <a:fillRect/>
+          </a:stretch>
+        </p:blipFill>
+        <p:spPr>
+          <a:xfrm>
+            <a:off x="4875563" y="1174421"/>
+            <a:ext cx="3804481" cy="2612989"/>
+          </a:xfrm>
+          <a:prstGeom prst="rect">
+            <a:avLst/>
+          </a:prstGeom>
+        </p:spPr>
+      </p:pic>
+      <p:pic>
+        <p:nvPicPr>
+          <p:cNvPr id="6" name="Picture 5">
+            <a:extLst>
+              <a:ext uri="{FF2B5EF4-FFF2-40B4-BE49-F238E27FC236}">
+                <a16:creationId xmlns:a16="http://schemas.microsoft.com/office/drawing/2014/main" id="{CBEE4EBE-BE81-4F15-9C55-5A2351D36FE7}"/>
+              </a:ext>
+            </a:extLst>
+          </p:cNvPr>
+          <p:cNvPicPr>
+            <a:picLocks noChangeAspect="1"/>
+          </p:cNvPicPr>
+          <p:nvPr/>
+        </p:nvPicPr>
+        <p:blipFill>
+          <a:blip r:embed="rId3"/>
+          <a:stretch>
+            <a:fillRect/>
+          </a:stretch>
+        </p:blipFill>
+        <p:spPr>
+          <a:xfrm>
+            <a:off x="4875563" y="4610647"/>
+            <a:ext cx="3804480" cy="1131062"/>
+          </a:xfrm>
+          <a:prstGeom prst="rect">
+            <a:avLst/>
+          </a:prstGeom>
+        </p:spPr>
+      </p:pic>
+      <p:pic>
+        <p:nvPicPr>
+          <p:cNvPr id="10" name="Picture 9">
+            <a:extLst>
+              <a:ext uri="{FF2B5EF4-FFF2-40B4-BE49-F238E27FC236}">
+                <a16:creationId xmlns:a16="http://schemas.microsoft.com/office/drawing/2014/main" id="{AFB3B521-7DFA-48D0-AB2D-3890673F8FD3}"/>
+              </a:ext>
+            </a:extLst>
+          </p:cNvPr>
+          <p:cNvPicPr>
+            <a:picLocks noChangeAspect="1"/>
+          </p:cNvPicPr>
+          <p:nvPr/>
+        </p:nvPicPr>
+        <p:blipFill>
+          <a:blip r:embed="rId4"/>
+          <a:stretch>
+            <a:fillRect/>
+          </a:stretch>
+        </p:blipFill>
+        <p:spPr>
+          <a:xfrm>
+            <a:off x="4875563" y="3786896"/>
+            <a:ext cx="3804480" cy="833290"/>
+          </a:xfrm>
+          <a:prstGeom prst="rect">
+            <a:avLst/>
+          </a:prstGeom>
+        </p:spPr>
+      </p:pic>
     </p:spTree>
     <p:extLst>
       <p:ext uri="{BB962C8B-B14F-4D97-AF65-F5344CB8AC3E}">
-        <p14:creationId xmlns:p14="http://schemas.microsoft.com/office/powerpoint/2010/main" val="3727029337"/>
+        <p14:creationId xmlns:p14="http://schemas.microsoft.com/office/powerpoint/2010/main" val="1512285611"/>
       </p:ext>
     </p:extLst>
   </p:cSld>
   <p:clrMapOvr>
     <a:masterClrMapping/>
   </p:clrMapOvr>
-  <mc:AlternateContent xmlns:mc="http://schemas.openxmlformats.org/markup-compatibility/2006" xmlns:p14="http://schemas.microsoft.com/office/powerpoint/2010/main">
-    <mc:Choice Requires="p14">
-      <p:transition spd="med" p14:dur="700">
-        <p:fade/>
-      </p:transition>
-    </mc:Choice>
-    <mc:Fallback xmlns="">
-      <p:transition spd="med">
-        <p:fade/>
-      </p:transition>
-    </mc:Fallback>
-  </mc:AlternateContent>
 </p:sld>
 </file>
 
@@ -13784,7 +14992,16 @@
                 </a:solidFill>
                 <a:latin typeface="Century Gothic"/>
               </a:rPr>
-              <a:t>Framing</a:t>
+              <a:t>Exemplary answer output </a:t>
+            </a:r>
+            <a:r>
+              <a:rPr lang="en-US" sz="3200" b="0" strike="noStrike" spc="-1" dirty="0" err="1">
+                <a:solidFill>
+                  <a:srgbClr val="0064C8"/>
+                </a:solidFill>
+                <a:latin typeface="Century Gothic"/>
+              </a:rPr>
+              <a:t>EdgeSHAPer</a:t>
             </a:r>
             <a:endParaRPr lang="en-US" sz="3200" b="0" strike="noStrike" spc="-1" dirty="0">
               <a:solidFill>
@@ -13867,8 +15084,8 @@
         </p:nvSpPr>
         <p:spPr>
           <a:xfrm>
-            <a:off x="380880" y="1371598"/>
-            <a:ext cx="8109070" cy="4559301"/>
+            <a:off x="374529" y="1371598"/>
+            <a:ext cx="4251523" cy="4559301"/>
           </a:xfrm>
           <a:prstGeom prst="rect">
             <a:avLst/>
@@ -14067,11 +15284,68 @@
                 </a:solidFill>
                 <a:latin typeface="Century Gothic"/>
               </a:rPr>
-              <a:t>How to frame the project:</a:t>
+              <a:t>Explanation with </a:t>
             </a:r>
-          </a:p>
-          <a:p>
-            <a:pPr lvl="1">
+            <a:r>
+              <a:rPr lang="en-US" sz="2000" spc="-1" dirty="0" err="1">
+                <a:solidFill>
+                  <a:srgbClr val="000000"/>
+                </a:solidFill>
+                <a:latin typeface="Century Gothic"/>
+              </a:rPr>
+              <a:t>EdgeSHAPer</a:t>
+            </a:r>
+            <a:endParaRPr lang="en-US" sz="2000" spc="-1" dirty="0">
+              <a:solidFill>
+                <a:srgbClr val="000000"/>
+              </a:solidFill>
+              <a:latin typeface="Century Gothic"/>
+            </a:endParaRPr>
+          </a:p>
+          <a:p>
+            <a:pPr>
+              <a:lnSpc>
+                <a:spcPct val="100000"/>
+              </a:lnSpc>
+              <a:spcBef>
+                <a:spcPts val="400"/>
+              </a:spcBef>
+              <a:buClr>
+                <a:srgbClr val="0064C8"/>
+              </a:buClr>
+              <a:buFont typeface="Wingdings" panose="05000000000000000000" pitchFamily="2" charset="2"/>
+              <a:buChar char="§"/>
+            </a:pPr>
+            <a:endParaRPr lang="en-US" sz="2000" spc="-1" dirty="0">
+              <a:solidFill>
+                <a:srgbClr val="000000"/>
+              </a:solidFill>
+              <a:latin typeface="Century Gothic"/>
+            </a:endParaRPr>
+          </a:p>
+          <a:p>
+            <a:pPr>
+              <a:lnSpc>
+                <a:spcPct val="100000"/>
+              </a:lnSpc>
+              <a:spcBef>
+                <a:spcPts val="400"/>
+              </a:spcBef>
+              <a:buClr>
+                <a:srgbClr val="0064C8"/>
+              </a:buClr>
+              <a:buFont typeface="Wingdings" panose="05000000000000000000" pitchFamily="2" charset="2"/>
+              <a:buChar char="§"/>
+            </a:pPr>
+            <a:endParaRPr lang="en-US" sz="2000" spc="-1" dirty="0">
+              <a:solidFill>
+                <a:srgbClr val="000000"/>
+              </a:solidFill>
+              <a:latin typeface="Century Gothic"/>
+            </a:endParaRPr>
+          </a:p>
+          <a:p>
+            <a:pPr>
               <a:lnSpc>
                 <a:spcPct val="100000"/>
               </a:lnSpc>
@@ -14085,17 +15359,59 @@
               <a:buChar char="§"/>
             </a:pPr>
             <a:r>
-              <a:rPr lang="en-US" sz="1600" spc="-1" dirty="0">
+              <a:rPr lang="en-US" sz="2000" spc="-1" dirty="0">
                 <a:solidFill>
                   <a:srgbClr val="000000"/>
                 </a:solidFill>
                 <a:latin typeface="Century Gothic"/>
               </a:rPr>
-              <a:t>A proof-of-concept study?</a:t>
+              <a:t>Visualization</a:t>
             </a:r>
           </a:p>
           <a:p>
-            <a:pPr lvl="1">
+            <a:pPr>
+              <a:lnSpc>
+                <a:spcPct val="100000"/>
+              </a:lnSpc>
+              <a:spcBef>
+                <a:spcPts val="400"/>
+              </a:spcBef>
+              <a:buClr>
+                <a:srgbClr val="0064C8"/>
+              </a:buClr>
+              <a:buFont typeface="Wingdings" panose="05000000000000000000" pitchFamily="2" charset="2"/>
+              <a:buChar char="§"/>
+            </a:pPr>
+            <a:endParaRPr lang="en-US" sz="2000" spc="-1" dirty="0">
+              <a:solidFill>
+                <a:srgbClr val="000000"/>
+              </a:solidFill>
+              <a:latin typeface="Century Gothic"/>
+            </a:endParaRPr>
+          </a:p>
+          <a:p>
+            <a:pPr>
+              <a:lnSpc>
+                <a:spcPct val="100000"/>
+              </a:lnSpc>
+              <a:spcBef>
+                <a:spcPts val="400"/>
+              </a:spcBef>
+              <a:buClr>
+                <a:srgbClr val="0064C8"/>
+              </a:buClr>
+              <a:buFont typeface="Wingdings" panose="05000000000000000000" pitchFamily="2" charset="2"/>
+              <a:buChar char="§"/>
+            </a:pPr>
+            <a:endParaRPr lang="en-US" sz="2000" spc="-1" dirty="0">
+              <a:solidFill>
+                <a:srgbClr val="000000"/>
+              </a:solidFill>
+              <a:latin typeface="Century Gothic"/>
+            </a:endParaRPr>
+          </a:p>
+          <a:p>
+            <a:pPr>
               <a:lnSpc>
                 <a:spcPct val="100000"/>
               </a:lnSpc>
@@ -14109,17 +15425,17 @@
               <a:buChar char="§"/>
             </a:pPr>
             <a:r>
-              <a:rPr lang="en-US" sz="1600" spc="-1" dirty="0">
+              <a:rPr lang="en-US" sz="2000" b="1" spc="-1" dirty="0">
                 <a:solidFill>
                   <a:srgbClr val="000000"/>
                 </a:solidFill>
                 <a:latin typeface="Century Gothic"/>
               </a:rPr>
-              <a:t>An explainability platform for XAI applied to molecular design?</a:t>
+              <a:t>Interpretation by LLM </a:t>
             </a:r>
           </a:p>
           <a:p>
-            <a:pPr lvl="1">
+            <a:pPr>
               <a:lnSpc>
                 <a:spcPct val="100000"/>
               </a:lnSpc>
@@ -14132,91 +15448,7 @@
               <a:buFont typeface="Wingdings" panose="05000000000000000000" pitchFamily="2" charset="2"/>
               <a:buChar char="§"/>
             </a:pPr>
-            <a:r>
-              <a:rPr lang="en-US" sz="1600" spc="-1" dirty="0">
-                <a:solidFill>
-                  <a:srgbClr val="000000"/>
-                </a:solidFill>
-                <a:latin typeface="Century Gothic"/>
-              </a:rPr>
-              <a:t>An explainability platform for XAI specific to molecular selectivity?</a:t>
-            </a:r>
-          </a:p>
-          <a:p>
-            <a:pPr lvl="1">
-              <a:lnSpc>
-                <a:spcPct val="100000"/>
-              </a:lnSpc>
-              <a:spcBef>
-                <a:spcPts val="400"/>
-              </a:spcBef>
-              <a:buClr>
-                <a:srgbClr val="0064C8"/>
-              </a:buClr>
-              <a:buFont typeface="Wingdings" panose="05000000000000000000" pitchFamily="2" charset="2"/>
-              <a:buChar char="§"/>
-            </a:pPr>
-            <a:r>
-              <a:rPr lang="en-US" sz="1600" spc="-1" dirty="0">
-                <a:solidFill>
-                  <a:srgbClr val="000000"/>
-                </a:solidFill>
-                <a:latin typeface="Century Gothic"/>
-              </a:rPr>
-              <a:t>A modular </a:t>
-            </a:r>
-            <a:r>
-              <a:rPr lang="en-US" sz="1600" spc="-1" dirty="0" err="1">
-                <a:solidFill>
-                  <a:srgbClr val="000000"/>
-                </a:solidFill>
-                <a:latin typeface="Century Gothic"/>
-              </a:rPr>
-              <a:t>explainability</a:t>
-            </a:r>
-            <a:r>
-              <a:rPr lang="en-US" sz="1600" spc="-1" dirty="0">
-                <a:solidFill>
-                  <a:srgbClr val="000000"/>
-                </a:solidFill>
-                <a:latin typeface="Century Gothic"/>
-              </a:rPr>
-              <a:t>-enhanced platform for </a:t>
-            </a:r>
-            <a:r>
-              <a:rPr lang="en-US" sz="1600" spc="-1" dirty="0" err="1">
-                <a:solidFill>
-                  <a:srgbClr val="000000"/>
-                </a:solidFill>
-                <a:latin typeface="Century Gothic"/>
-              </a:rPr>
-              <a:t>chemoinformatics</a:t>
-            </a:r>
-            <a:r>
-              <a:rPr lang="en-US" sz="1600" spc="-1" dirty="0">
-                <a:solidFill>
-                  <a:srgbClr val="000000"/>
-                </a:solidFill>
-                <a:latin typeface="Century Gothic"/>
-              </a:rPr>
-              <a:t>? </a:t>
-            </a:r>
-          </a:p>
-          <a:p>
-            <a:pPr lvl="1">
-              <a:lnSpc>
-                <a:spcPct val="100000"/>
-              </a:lnSpc>
-              <a:spcBef>
-                <a:spcPts val="400"/>
-              </a:spcBef>
-              <a:buClr>
-                <a:srgbClr val="0064C8"/>
-              </a:buClr>
-              <a:buFont typeface="Wingdings" panose="05000000000000000000" pitchFamily="2" charset="2"/>
-              <a:buChar char="§"/>
-            </a:pPr>
-            <a:endParaRPr lang="en-US" sz="1600" spc="-1" dirty="0">
+            <a:endParaRPr lang="en-US" sz="2000" spc="-1" dirty="0">
               <a:solidFill>
                 <a:srgbClr val="000000"/>
               </a:solidFill>
@@ -14224,7 +15456,7 @@
             </a:endParaRPr>
           </a:p>
           <a:p>
-            <a:pPr lvl="1">
+            <a:pPr marL="0" indent="0">
               <a:lnSpc>
                 <a:spcPct val="100000"/>
               </a:lnSpc>
@@ -14234,10 +15466,9 @@
               <a:buClr>
                 <a:srgbClr val="0064C8"/>
               </a:buClr>
-              <a:buFont typeface="Wingdings" panose="05000000000000000000" pitchFamily="2" charset="2"/>
-              <a:buChar char="§"/>
+              <a:buNone/>
             </a:pPr>
-            <a:endParaRPr lang="en-US" sz="1600" spc="-1" dirty="0">
+            <a:endParaRPr lang="en-US" sz="2000" spc="-1" dirty="0">
               <a:solidFill>
                 <a:srgbClr val="000000"/>
               </a:solidFill>
@@ -14312,28 +15543,114 @@
           </a:p>
         </p:txBody>
       </p:sp>
+      <p:pic>
+        <p:nvPicPr>
+          <p:cNvPr id="4" name="Graphic 3" descr="Warning with solid fill">
+            <a:extLst>
+              <a:ext uri="{FF2B5EF4-FFF2-40B4-BE49-F238E27FC236}">
+                <a16:creationId xmlns:a16="http://schemas.microsoft.com/office/drawing/2014/main" id="{E98D6943-8123-432E-B888-F72E412B7491}"/>
+              </a:ext>
+            </a:extLst>
+          </p:cNvPr>
+          <p:cNvPicPr>
+            <a:picLocks noChangeAspect="1"/>
+          </p:cNvPicPr>
+          <p:nvPr/>
+        </p:nvPicPr>
+        <p:blipFill>
+          <a:blip r:embed="rId2">
+            <a:extLst>
+              <a:ext uri="{28A0092B-C50C-407E-A947-70E740481C1C}">
+                <a14:useLocalDpi xmlns:a14="http://schemas.microsoft.com/office/drawing/2010/main" val="0"/>
+              </a:ext>
+              <a:ext uri="{96DAC541-7B7A-43D3-8B79-37D633B846F1}">
+                <asvg:svgBlip xmlns:asvg="http://schemas.microsoft.com/office/drawing/2016/SVG/main" r:embed="rId3"/>
+              </a:ext>
+            </a:extLst>
+          </a:blip>
+          <a:stretch>
+            <a:fillRect/>
+          </a:stretch>
+        </p:blipFill>
+        <p:spPr>
+          <a:xfrm>
+            <a:off x="3452648" y="3342695"/>
+            <a:ext cx="657242" cy="657242"/>
+          </a:xfrm>
+          <a:prstGeom prst="rect">
+            <a:avLst/>
+          </a:prstGeom>
+        </p:spPr>
+      </p:pic>
+      <p:pic>
+        <p:nvPicPr>
+          <p:cNvPr id="8" name="Picture 7">
+            <a:extLst>
+              <a:ext uri="{FF2B5EF4-FFF2-40B4-BE49-F238E27FC236}">
+                <a16:creationId xmlns:a16="http://schemas.microsoft.com/office/drawing/2014/main" id="{5867E8F3-108A-471B-965A-75C4C333D304}"/>
+              </a:ext>
+            </a:extLst>
+          </p:cNvPr>
+          <p:cNvPicPr>
+            <a:picLocks noChangeAspect="1"/>
+          </p:cNvPicPr>
+          <p:nvPr/>
+        </p:nvPicPr>
+        <p:blipFill rotWithShape="1">
+          <a:blip r:embed="rId4"/>
+          <a:srcRect b="25455"/>
+          <a:stretch/>
+        </p:blipFill>
+        <p:spPr>
+          <a:xfrm>
+            <a:off x="4698409" y="1007015"/>
+            <a:ext cx="3927583" cy="2081278"/>
+          </a:xfrm>
+          <a:prstGeom prst="rect">
+            <a:avLst/>
+          </a:prstGeom>
+        </p:spPr>
+      </p:pic>
+      <p:pic>
+        <p:nvPicPr>
+          <p:cNvPr id="11" name="Picture 10">
+            <a:extLst>
+              <a:ext uri="{FF2B5EF4-FFF2-40B4-BE49-F238E27FC236}">
+                <a16:creationId xmlns:a16="http://schemas.microsoft.com/office/drawing/2014/main" id="{9C2944AD-320D-42C0-A96F-022974D408EA}"/>
+              </a:ext>
+            </a:extLst>
+          </p:cNvPr>
+          <p:cNvPicPr>
+            <a:picLocks noChangeAspect="1"/>
+          </p:cNvPicPr>
+          <p:nvPr/>
+        </p:nvPicPr>
+        <p:blipFill>
+          <a:blip r:embed="rId5"/>
+          <a:stretch>
+            <a:fillRect/>
+          </a:stretch>
+        </p:blipFill>
+        <p:spPr>
+          <a:xfrm>
+            <a:off x="4698409" y="3088293"/>
+            <a:ext cx="3927582" cy="3038243"/>
+          </a:xfrm>
+          <a:prstGeom prst="rect">
+            <a:avLst/>
+          </a:prstGeom>
+        </p:spPr>
+      </p:pic>
     </p:spTree>
     <p:extLst>
       <p:ext uri="{BB962C8B-B14F-4D97-AF65-F5344CB8AC3E}">
-        <p14:creationId xmlns:p14="http://schemas.microsoft.com/office/powerpoint/2010/main" val="1594879052"/>
+        <p14:creationId xmlns:p14="http://schemas.microsoft.com/office/powerpoint/2010/main" val="44043232"/>
       </p:ext>
     </p:extLst>
   </p:cSld>
   <p:clrMapOvr>
     <a:masterClrMapping/>
   </p:clrMapOvr>
-  <mc:AlternateContent xmlns:mc="http://schemas.openxmlformats.org/markup-compatibility/2006" xmlns:p14="http://schemas.microsoft.com/office/powerpoint/2010/main">
-    <mc:Choice Requires="p14">
-      <p:transition spd="med" p14:dur="700">
-        <p:fade/>
-      </p:transition>
-    </mc:Choice>
-    <mc:Fallback xmlns="">
-      <p:transition spd="med">
-        <p:fade/>
-      </p:transition>
-    </mc:Fallback>
-  </mc:AlternateContent>
 </p:sld>
 </file>
 

--- a/slides/AI_Agent_Explainability.pptx
+++ b/slides/AI_Agent_Explainability.pptx
@@ -5,18 +5,23 @@
     <p:sldMasterId id="2147483648" r:id="rId1"/>
     <p:sldMasterId id="2147483661" r:id="rId2"/>
   </p:sldMasterIdLst>
+  <p:notesMasterIdLst>
+    <p:notesMasterId r:id="rId16"/>
+  </p:notesMasterIdLst>
   <p:sldIdLst>
     <p:sldId id="297" r:id="rId3"/>
     <p:sldId id="298" r:id="rId4"/>
     <p:sldId id="299" r:id="rId5"/>
-    <p:sldId id="301" r:id="rId6"/>
+    <p:sldId id="519" r:id="rId6"/>
     <p:sldId id="300" r:id="rId7"/>
     <p:sldId id="302" r:id="rId8"/>
     <p:sldId id="305" r:id="rId9"/>
     <p:sldId id="306" r:id="rId10"/>
     <p:sldId id="307" r:id="rId11"/>
-    <p:sldId id="303" r:id="rId12"/>
-    <p:sldId id="304" r:id="rId13"/>
+    <p:sldId id="556" r:id="rId12"/>
+    <p:sldId id="303" r:id="rId13"/>
+    <p:sldId id="304" r:id="rId14"/>
+    <p:sldId id="301" r:id="rId15"/>
   </p:sldIdLst>
   <p:sldSz cx="9144000" cy="6858000" type="screen4x3"/>
   <p:notesSz cx="7559675" cy="10691813"/>
@@ -125,45 +130,6 @@
 
 <file path=ppt/changesInfos/changesInfo1.xml><?xml version="1.0" encoding="utf-8"?>
 <pc:chgInfo xmlns:a="http://schemas.openxmlformats.org/drawingml/2006/main" xmlns:r="http://schemas.openxmlformats.org/officeDocument/2006/relationships" xmlns:ac="http://schemas.microsoft.com/office/drawing/2013/main/command" xmlns:pc="http://schemas.microsoft.com/office/powerpoint/2013/main/command">
-  <pc:docChgLst>
-    <pc:chgData name="Tiago Janela" userId="ee1a79fe-c79c-4f34-9602-7f6f2f0482b3" providerId="ADAL" clId="{67D2C233-DF3C-4C6D-9040-D7553E3BCB8A}"/>
-    <pc:docChg chg="delSld modSld">
-      <pc:chgData name="Tiago Janela" userId="ee1a79fe-c79c-4f34-9602-7f6f2f0482b3" providerId="ADAL" clId="{67D2C233-DF3C-4C6D-9040-D7553E3BCB8A}" dt="2026-03-16T14:03:02.466" v="54" actId="20577"/>
-      <pc:docMkLst>
-        <pc:docMk/>
-      </pc:docMkLst>
-      <pc:sldChg chg="modSp mod">
-        <pc:chgData name="Tiago Janela" userId="ee1a79fe-c79c-4f34-9602-7f6f2f0482b3" providerId="ADAL" clId="{67D2C233-DF3C-4C6D-9040-D7553E3BCB8A}" dt="2026-03-16T14:03:02.466" v="54" actId="20577"/>
-        <pc:sldMkLst>
-          <pc:docMk/>
-          <pc:sldMk cId="829672710" sldId="297"/>
-        </pc:sldMkLst>
-        <pc:spChg chg="mod">
-          <ac:chgData name="Tiago Janela" userId="ee1a79fe-c79c-4f34-9602-7f6f2f0482b3" providerId="ADAL" clId="{67D2C233-DF3C-4C6D-9040-D7553E3BCB8A}" dt="2026-03-16T14:03:02.466" v="54" actId="20577"/>
-          <ac:spMkLst>
-            <pc:docMk/>
-            <pc:sldMk cId="829672710" sldId="297"/>
-            <ac:spMk id="156" creationId="{00000000-0000-0000-0000-000000000000}"/>
-          </ac:spMkLst>
-        </pc:spChg>
-      </pc:sldChg>
-      <pc:sldChg chg="modSp mod">
-        <pc:chgData name="Tiago Janela" userId="ee1a79fe-c79c-4f34-9602-7f6f2f0482b3" providerId="ADAL" clId="{67D2C233-DF3C-4C6D-9040-D7553E3BCB8A}" dt="2026-03-16T14:02:34.148" v="0" actId="20577"/>
-        <pc:sldMkLst>
-          <pc:docMk/>
-          <pc:sldMk cId="721732568" sldId="298"/>
-        </pc:sldMkLst>
-        <pc:spChg chg="mod">
-          <ac:chgData name="Tiago Janela" userId="ee1a79fe-c79c-4f34-9602-7f6f2f0482b3" providerId="ADAL" clId="{67D2C233-DF3C-4C6D-9040-D7553E3BCB8A}" dt="2026-03-16T14:02:34.148" v="0" actId="20577"/>
-          <ac:spMkLst>
-            <pc:docMk/>
-            <pc:sldMk cId="721732568" sldId="298"/>
-            <ac:spMk id="2" creationId="{870990D0-7AC5-46BA-6FC4-274F8E0A3ABE}"/>
-          </ac:spMkLst>
-        </pc:spChg>
-      </pc:sldChg>
-    </pc:docChg>
-  </pc:docChgLst>
   <pc:docChgLst>
     <pc:chgData name="Tiago Janela" userId="ee1a79fe-c79c-4f34-9602-7f6f2f0482b3" providerId="ADAL" clId="{6BE67FA1-4A27-48B9-BA6A-E25A9786A9CC}"/>
     <pc:docChg chg="undo custSel addSld modSld sldOrd">
@@ -298,6 +264,90 @@
     </pc:docChg>
   </pc:docChgLst>
   <pc:docChgLst>
+    <pc:chgData name="Tiago Janela" userId="ee1a79fe-c79c-4f34-9602-7f6f2f0482b3" providerId="ADAL" clId="{FF6951D0-D029-4985-BC76-70E5B4A62478}"/>
+    <pc:docChg chg="addSld modSld sldOrd">
+      <pc:chgData name="Tiago Janela" userId="ee1a79fe-c79c-4f34-9602-7f6f2f0482b3" providerId="ADAL" clId="{FF6951D0-D029-4985-BC76-70E5B4A62478}" dt="2026-04-24T09:48:18.185" v="6"/>
+      <pc:docMkLst>
+        <pc:docMk/>
+      </pc:docMkLst>
+      <pc:sldChg chg="modSp mod">
+        <pc:chgData name="Tiago Janela" userId="ee1a79fe-c79c-4f34-9602-7f6f2f0482b3" providerId="ADAL" clId="{FF6951D0-D029-4985-BC76-70E5B4A62478}" dt="2026-04-24T09:45:33.131" v="1" actId="20577"/>
+        <pc:sldMkLst>
+          <pc:docMk/>
+          <pc:sldMk cId="1707478755" sldId="299"/>
+        </pc:sldMkLst>
+        <pc:spChg chg="mod">
+          <ac:chgData name="Tiago Janela" userId="ee1a79fe-c79c-4f34-9602-7f6f2f0482b3" providerId="ADAL" clId="{FF6951D0-D029-4985-BC76-70E5B4A62478}" dt="2026-04-24T09:45:33.131" v="1" actId="20577"/>
+          <ac:spMkLst>
+            <pc:docMk/>
+            <pc:sldMk cId="1707478755" sldId="299"/>
+            <ac:spMk id="2" creationId="{870990D0-7AC5-46BA-6FC4-274F8E0A3ABE}"/>
+          </ac:spMkLst>
+        </pc:spChg>
+      </pc:sldChg>
+      <pc:sldChg chg="mod ord modShow">
+        <pc:chgData name="Tiago Janela" userId="ee1a79fe-c79c-4f34-9602-7f6f2f0482b3" providerId="ADAL" clId="{FF6951D0-D029-4985-BC76-70E5B4A62478}" dt="2026-04-24T09:47:45.785" v="5"/>
+        <pc:sldMkLst>
+          <pc:docMk/>
+          <pc:sldMk cId="2375808848" sldId="301"/>
+        </pc:sldMkLst>
+      </pc:sldChg>
+      <pc:sldChg chg="add">
+        <pc:chgData name="Tiago Janela" userId="ee1a79fe-c79c-4f34-9602-7f6f2f0482b3" providerId="ADAL" clId="{FF6951D0-D029-4985-BC76-70E5B4A62478}" dt="2026-04-24T09:47:35.256" v="2"/>
+        <pc:sldMkLst>
+          <pc:docMk/>
+          <pc:sldMk cId="921095034" sldId="519"/>
+        </pc:sldMkLst>
+      </pc:sldChg>
+      <pc:sldChg chg="add">
+        <pc:chgData name="Tiago Janela" userId="ee1a79fe-c79c-4f34-9602-7f6f2f0482b3" providerId="ADAL" clId="{FF6951D0-D029-4985-BC76-70E5B4A62478}" dt="2026-04-24T09:48:18.185" v="6"/>
+        <pc:sldMkLst>
+          <pc:docMk/>
+          <pc:sldMk cId="2674446027" sldId="556"/>
+        </pc:sldMkLst>
+      </pc:sldChg>
+    </pc:docChg>
+  </pc:docChgLst>
+  <pc:docChgLst>
+    <pc:chgData name="Tiago Janela" userId="ee1a79fe-c79c-4f34-9602-7f6f2f0482b3" providerId="ADAL" clId="{67D2C233-DF3C-4C6D-9040-D7553E3BCB8A}"/>
+    <pc:docChg chg="delSld modSld">
+      <pc:chgData name="Tiago Janela" userId="ee1a79fe-c79c-4f34-9602-7f6f2f0482b3" providerId="ADAL" clId="{67D2C233-DF3C-4C6D-9040-D7553E3BCB8A}" dt="2026-03-16T14:03:02.466" v="54" actId="20577"/>
+      <pc:docMkLst>
+        <pc:docMk/>
+      </pc:docMkLst>
+      <pc:sldChg chg="modSp mod">
+        <pc:chgData name="Tiago Janela" userId="ee1a79fe-c79c-4f34-9602-7f6f2f0482b3" providerId="ADAL" clId="{67D2C233-DF3C-4C6D-9040-D7553E3BCB8A}" dt="2026-03-16T14:03:02.466" v="54" actId="20577"/>
+        <pc:sldMkLst>
+          <pc:docMk/>
+          <pc:sldMk cId="829672710" sldId="297"/>
+        </pc:sldMkLst>
+        <pc:spChg chg="mod">
+          <ac:chgData name="Tiago Janela" userId="ee1a79fe-c79c-4f34-9602-7f6f2f0482b3" providerId="ADAL" clId="{67D2C233-DF3C-4C6D-9040-D7553E3BCB8A}" dt="2026-03-16T14:03:02.466" v="54" actId="20577"/>
+          <ac:spMkLst>
+            <pc:docMk/>
+            <pc:sldMk cId="829672710" sldId="297"/>
+            <ac:spMk id="156" creationId="{00000000-0000-0000-0000-000000000000}"/>
+          </ac:spMkLst>
+        </pc:spChg>
+      </pc:sldChg>
+      <pc:sldChg chg="modSp mod">
+        <pc:chgData name="Tiago Janela" userId="ee1a79fe-c79c-4f34-9602-7f6f2f0482b3" providerId="ADAL" clId="{67D2C233-DF3C-4C6D-9040-D7553E3BCB8A}" dt="2026-03-16T14:02:34.148" v="0" actId="20577"/>
+        <pc:sldMkLst>
+          <pc:docMk/>
+          <pc:sldMk cId="721732568" sldId="298"/>
+        </pc:sldMkLst>
+        <pc:spChg chg="mod">
+          <ac:chgData name="Tiago Janela" userId="ee1a79fe-c79c-4f34-9602-7f6f2f0482b3" providerId="ADAL" clId="{67D2C233-DF3C-4C6D-9040-D7553E3BCB8A}" dt="2026-03-16T14:02:34.148" v="0" actId="20577"/>
+          <ac:spMkLst>
+            <pc:docMk/>
+            <pc:sldMk cId="721732568" sldId="298"/>
+            <ac:spMk id="2" creationId="{870990D0-7AC5-46BA-6FC4-274F8E0A3ABE}"/>
+          </ac:spMkLst>
+        </pc:spChg>
+      </pc:sldChg>
+    </pc:docChg>
+  </pc:docChgLst>
+  <pc:docChgLst>
     <pc:chgData name="Tiago Janela" userId="ee1a79fe-c79c-4f34-9602-7f6f2f0482b3" providerId="ADAL" clId="{97693404-9C1B-400A-95DF-A7B72570E7A0}"/>
     <pc:docChg chg="undo custSel addSld delSld modSld sldOrd">
       <pc:chgData name="Tiago Janela" userId="ee1a79fe-c79c-4f34-9602-7f6f2f0482b3" providerId="ADAL" clId="{97693404-9C1B-400A-95DF-A7B72570E7A0}" dt="2026-03-09T10:33:25.226" v="5259" actId="20577"/>
@@ -322,6 +372,592 @@
     </pc:docChg>
   </pc:docChgLst>
 </pc:chgInfo>
+</file>
+
+<file path=ppt/notesMasters/notesMaster1.xml><?xml version="1.0" encoding="utf-8"?>
+<p:notesMaster xmlns:a="http://schemas.openxmlformats.org/drawingml/2006/main" xmlns:r="http://schemas.openxmlformats.org/officeDocument/2006/relationships" xmlns:p="http://schemas.openxmlformats.org/presentationml/2006/main">
+  <p:cSld>
+    <p:bg>
+      <p:bgRef idx="1001">
+        <a:schemeClr val="bg1"/>
+      </p:bgRef>
+    </p:bg>
+    <p:spTree>
+      <p:nvGrpSpPr>
+        <p:cNvPr id="1" name=""/>
+        <p:cNvGrpSpPr/>
+        <p:nvPr/>
+      </p:nvGrpSpPr>
+      <p:grpSpPr>
+        <a:xfrm>
+          <a:off x="0" y="0"/>
+          <a:ext cx="0" cy="0"/>
+          <a:chOff x="0" y="0"/>
+          <a:chExt cx="0" cy="0"/>
+        </a:xfrm>
+      </p:grpSpPr>
+      <p:sp>
+        <p:nvSpPr>
+          <p:cNvPr id="2" name="Header Placeholder 1"/>
+          <p:cNvSpPr>
+            <a:spLocks noGrp="1"/>
+          </p:cNvSpPr>
+          <p:nvPr>
+            <p:ph type="hdr" sz="quarter"/>
+          </p:nvPr>
+        </p:nvSpPr>
+        <p:spPr>
+          <a:xfrm>
+            <a:off x="0" y="0"/>
+            <a:ext cx="3276600" cy="536575"/>
+          </a:xfrm>
+          <a:prstGeom prst="rect">
+            <a:avLst/>
+          </a:prstGeom>
+        </p:spPr>
+        <p:txBody>
+          <a:bodyPr vert="horz" lIns="91440" tIns="45720" rIns="91440" bIns="45720" rtlCol="0"/>
+          <a:lstStyle>
+            <a:lvl1pPr algn="l">
+              <a:defRPr sz="1200"/>
+            </a:lvl1pPr>
+          </a:lstStyle>
+          <a:p>
+            <a:endParaRPr lang="de-DE"/>
+          </a:p>
+        </p:txBody>
+      </p:sp>
+      <p:sp>
+        <p:nvSpPr>
+          <p:cNvPr id="3" name="Date Placeholder 2"/>
+          <p:cNvSpPr>
+            <a:spLocks noGrp="1"/>
+          </p:cNvSpPr>
+          <p:nvPr>
+            <p:ph type="dt" idx="1"/>
+          </p:nvPr>
+        </p:nvSpPr>
+        <p:spPr>
+          <a:xfrm>
+            <a:off x="4281488" y="0"/>
+            <a:ext cx="3276600" cy="536575"/>
+          </a:xfrm>
+          <a:prstGeom prst="rect">
+            <a:avLst/>
+          </a:prstGeom>
+        </p:spPr>
+        <p:txBody>
+          <a:bodyPr vert="horz" lIns="91440" tIns="45720" rIns="91440" bIns="45720" rtlCol="0"/>
+          <a:lstStyle>
+            <a:lvl1pPr algn="r">
+              <a:defRPr sz="1200"/>
+            </a:lvl1pPr>
+          </a:lstStyle>
+          <a:p>
+            <a:fld id="{8895F6FA-647C-4311-838E-A4FEC80CEF77}" type="datetimeFigureOut">
+              <a:rPr lang="de-DE" smtClean="0"/>
+              <a:t>24.04.2026</a:t>
+            </a:fld>
+            <a:endParaRPr lang="de-DE"/>
+          </a:p>
+        </p:txBody>
+      </p:sp>
+      <p:sp>
+        <p:nvSpPr>
+          <p:cNvPr id="4" name="Slide Image Placeholder 3"/>
+          <p:cNvSpPr>
+            <a:spLocks noGrp="1" noRot="1" noChangeAspect="1"/>
+          </p:cNvSpPr>
+          <p:nvPr>
+            <p:ph type="sldImg" idx="2"/>
+          </p:nvPr>
+        </p:nvSpPr>
+        <p:spPr>
+          <a:xfrm>
+            <a:off x="1374775" y="1336675"/>
+            <a:ext cx="4810125" cy="3608388"/>
+          </a:xfrm>
+          <a:prstGeom prst="rect">
+            <a:avLst/>
+          </a:prstGeom>
+          <a:noFill/>
+          <a:ln w="12700">
+            <a:solidFill>
+              <a:prstClr val="black"/>
+            </a:solidFill>
+          </a:ln>
+        </p:spPr>
+        <p:txBody>
+          <a:bodyPr vert="horz" lIns="91440" tIns="45720" rIns="91440" bIns="45720" rtlCol="0" anchor="ctr"/>
+          <a:lstStyle/>
+          <a:p>
+            <a:endParaRPr lang="de-DE"/>
+          </a:p>
+        </p:txBody>
+      </p:sp>
+      <p:sp>
+        <p:nvSpPr>
+          <p:cNvPr id="5" name="Notes Placeholder 4"/>
+          <p:cNvSpPr>
+            <a:spLocks noGrp="1"/>
+          </p:cNvSpPr>
+          <p:nvPr>
+            <p:ph type="body" sz="quarter" idx="3"/>
+          </p:nvPr>
+        </p:nvSpPr>
+        <p:spPr>
+          <a:xfrm>
+            <a:off x="755650" y="5145088"/>
+            <a:ext cx="6048375" cy="4210050"/>
+          </a:xfrm>
+          <a:prstGeom prst="rect">
+            <a:avLst/>
+          </a:prstGeom>
+        </p:spPr>
+        <p:txBody>
+          <a:bodyPr vert="horz" lIns="91440" tIns="45720" rIns="91440" bIns="45720" rtlCol="0"/>
+          <a:lstStyle/>
+          <a:p>
+            <a:pPr lvl="0"/>
+            <a:r>
+              <a:rPr lang="en-US"/>
+              <a:t>Click to edit Master text styles</a:t>
+            </a:r>
+          </a:p>
+          <a:p>
+            <a:pPr lvl="1"/>
+            <a:r>
+              <a:rPr lang="en-US"/>
+              <a:t>Second level</a:t>
+            </a:r>
+          </a:p>
+          <a:p>
+            <a:pPr lvl="2"/>
+            <a:r>
+              <a:rPr lang="en-US"/>
+              <a:t>Third level</a:t>
+            </a:r>
+          </a:p>
+          <a:p>
+            <a:pPr lvl="3"/>
+            <a:r>
+              <a:rPr lang="en-US"/>
+              <a:t>Fourth level</a:t>
+            </a:r>
+          </a:p>
+          <a:p>
+            <a:pPr lvl="4"/>
+            <a:r>
+              <a:rPr lang="en-US"/>
+              <a:t>Fifth level</a:t>
+            </a:r>
+            <a:endParaRPr lang="de-DE"/>
+          </a:p>
+        </p:txBody>
+      </p:sp>
+      <p:sp>
+        <p:nvSpPr>
+          <p:cNvPr id="6" name="Footer Placeholder 5"/>
+          <p:cNvSpPr>
+            <a:spLocks noGrp="1"/>
+          </p:cNvSpPr>
+          <p:nvPr>
+            <p:ph type="ftr" sz="quarter" idx="4"/>
+          </p:nvPr>
+        </p:nvSpPr>
+        <p:spPr>
+          <a:xfrm>
+            <a:off x="0" y="10155238"/>
+            <a:ext cx="3276600" cy="536575"/>
+          </a:xfrm>
+          <a:prstGeom prst="rect">
+            <a:avLst/>
+          </a:prstGeom>
+        </p:spPr>
+        <p:txBody>
+          <a:bodyPr vert="horz" lIns="91440" tIns="45720" rIns="91440" bIns="45720" rtlCol="0" anchor="b"/>
+          <a:lstStyle>
+            <a:lvl1pPr algn="l">
+              <a:defRPr sz="1200"/>
+            </a:lvl1pPr>
+          </a:lstStyle>
+          <a:p>
+            <a:endParaRPr lang="de-DE"/>
+          </a:p>
+        </p:txBody>
+      </p:sp>
+      <p:sp>
+        <p:nvSpPr>
+          <p:cNvPr id="7" name="Slide Number Placeholder 6"/>
+          <p:cNvSpPr>
+            <a:spLocks noGrp="1"/>
+          </p:cNvSpPr>
+          <p:nvPr>
+            <p:ph type="sldNum" sz="quarter" idx="5"/>
+          </p:nvPr>
+        </p:nvSpPr>
+        <p:spPr>
+          <a:xfrm>
+            <a:off x="4281488" y="10155238"/>
+            <a:ext cx="3276600" cy="536575"/>
+          </a:xfrm>
+          <a:prstGeom prst="rect">
+            <a:avLst/>
+          </a:prstGeom>
+        </p:spPr>
+        <p:txBody>
+          <a:bodyPr vert="horz" lIns="91440" tIns="45720" rIns="91440" bIns="45720" rtlCol="0" anchor="b"/>
+          <a:lstStyle>
+            <a:lvl1pPr algn="r">
+              <a:defRPr sz="1200"/>
+            </a:lvl1pPr>
+          </a:lstStyle>
+          <a:p>
+            <a:fld id="{B1CB59DE-A395-4FE1-AF6E-B266016DC7B6}" type="slidenum">
+              <a:rPr lang="de-DE" smtClean="0"/>
+              <a:t>‹#›</a:t>
+            </a:fld>
+            <a:endParaRPr lang="de-DE"/>
+          </a:p>
+        </p:txBody>
+      </p:sp>
+    </p:spTree>
+    <p:extLst>
+      <p:ext uri="{BB962C8B-B14F-4D97-AF65-F5344CB8AC3E}">
+        <p14:creationId xmlns:p14="http://schemas.microsoft.com/office/powerpoint/2010/main" val="3301869723"/>
+      </p:ext>
+    </p:extLst>
+  </p:cSld>
+  <p:clrMap bg1="lt1" tx1="dk1" bg2="lt2" tx2="dk2" accent1="accent1" accent2="accent2" accent3="accent3" accent4="accent4" accent5="accent5" accent6="accent6" hlink="hlink" folHlink="folHlink"/>
+  <p:notesStyle>
+    <a:lvl1pPr marL="0" algn="l" defTabSz="914400" rtl="0" eaLnBrk="1" latinLnBrk="0" hangingPunct="1">
+      <a:defRPr sz="1200" kern="1200">
+        <a:solidFill>
+          <a:schemeClr val="tx1"/>
+        </a:solidFill>
+        <a:latin typeface="+mn-lt"/>
+        <a:ea typeface="+mn-ea"/>
+        <a:cs typeface="+mn-cs"/>
+      </a:defRPr>
+    </a:lvl1pPr>
+    <a:lvl2pPr marL="457200" algn="l" defTabSz="914400" rtl="0" eaLnBrk="1" latinLnBrk="0" hangingPunct="1">
+      <a:defRPr sz="1200" kern="1200">
+        <a:solidFill>
+          <a:schemeClr val="tx1"/>
+        </a:solidFill>
+        <a:latin typeface="+mn-lt"/>
+        <a:ea typeface="+mn-ea"/>
+        <a:cs typeface="+mn-cs"/>
+      </a:defRPr>
+    </a:lvl2pPr>
+    <a:lvl3pPr marL="914400" algn="l" defTabSz="914400" rtl="0" eaLnBrk="1" latinLnBrk="0" hangingPunct="1">
+      <a:defRPr sz="1200" kern="1200">
+        <a:solidFill>
+          <a:schemeClr val="tx1"/>
+        </a:solidFill>
+        <a:latin typeface="+mn-lt"/>
+        <a:ea typeface="+mn-ea"/>
+        <a:cs typeface="+mn-cs"/>
+      </a:defRPr>
+    </a:lvl3pPr>
+    <a:lvl4pPr marL="1371600" algn="l" defTabSz="914400" rtl="0" eaLnBrk="1" latinLnBrk="0" hangingPunct="1">
+      <a:defRPr sz="1200" kern="1200">
+        <a:solidFill>
+          <a:schemeClr val="tx1"/>
+        </a:solidFill>
+        <a:latin typeface="+mn-lt"/>
+        <a:ea typeface="+mn-ea"/>
+        <a:cs typeface="+mn-cs"/>
+      </a:defRPr>
+    </a:lvl4pPr>
+    <a:lvl5pPr marL="1828800" algn="l" defTabSz="914400" rtl="0" eaLnBrk="1" latinLnBrk="0" hangingPunct="1">
+      <a:defRPr sz="1200" kern="1200">
+        <a:solidFill>
+          <a:schemeClr val="tx1"/>
+        </a:solidFill>
+        <a:latin typeface="+mn-lt"/>
+        <a:ea typeface="+mn-ea"/>
+        <a:cs typeface="+mn-cs"/>
+      </a:defRPr>
+    </a:lvl5pPr>
+    <a:lvl6pPr marL="2286000" algn="l" defTabSz="914400" rtl="0" eaLnBrk="1" latinLnBrk="0" hangingPunct="1">
+      <a:defRPr sz="1200" kern="1200">
+        <a:solidFill>
+          <a:schemeClr val="tx1"/>
+        </a:solidFill>
+        <a:latin typeface="+mn-lt"/>
+        <a:ea typeface="+mn-ea"/>
+        <a:cs typeface="+mn-cs"/>
+      </a:defRPr>
+    </a:lvl6pPr>
+    <a:lvl7pPr marL="2743200" algn="l" defTabSz="914400" rtl="0" eaLnBrk="1" latinLnBrk="0" hangingPunct="1">
+      <a:defRPr sz="1200" kern="1200">
+        <a:solidFill>
+          <a:schemeClr val="tx1"/>
+        </a:solidFill>
+        <a:latin typeface="+mn-lt"/>
+        <a:ea typeface="+mn-ea"/>
+        <a:cs typeface="+mn-cs"/>
+      </a:defRPr>
+    </a:lvl7pPr>
+    <a:lvl8pPr marL="3200400" algn="l" defTabSz="914400" rtl="0" eaLnBrk="1" latinLnBrk="0" hangingPunct="1">
+      <a:defRPr sz="1200" kern="1200">
+        <a:solidFill>
+          <a:schemeClr val="tx1"/>
+        </a:solidFill>
+        <a:latin typeface="+mn-lt"/>
+        <a:ea typeface="+mn-ea"/>
+        <a:cs typeface="+mn-cs"/>
+      </a:defRPr>
+    </a:lvl8pPr>
+    <a:lvl9pPr marL="3657600" algn="l" defTabSz="914400" rtl="0" eaLnBrk="1" latinLnBrk="0" hangingPunct="1">
+      <a:defRPr sz="1200" kern="1200">
+        <a:solidFill>
+          <a:schemeClr val="tx1"/>
+        </a:solidFill>
+        <a:latin typeface="+mn-lt"/>
+        <a:ea typeface="+mn-ea"/>
+        <a:cs typeface="+mn-cs"/>
+      </a:defRPr>
+    </a:lvl9pPr>
+  </p:notesStyle>
+</p:notesMaster>
+</file>
+
+<file path=ppt/notesSlides/notesSlide1.xml><?xml version="1.0" encoding="utf-8"?>
+<p:notes xmlns:a="http://schemas.openxmlformats.org/drawingml/2006/main" xmlns:r="http://schemas.openxmlformats.org/officeDocument/2006/relationships" xmlns:p="http://schemas.openxmlformats.org/presentationml/2006/main">
+  <p:cSld>
+    <p:spTree>
+      <p:nvGrpSpPr>
+        <p:cNvPr id="1" name=""/>
+        <p:cNvGrpSpPr/>
+        <p:nvPr/>
+      </p:nvGrpSpPr>
+      <p:grpSpPr>
+        <a:xfrm>
+          <a:off x="0" y="0"/>
+          <a:ext cx="0" cy="0"/>
+          <a:chOff x="0" y="0"/>
+          <a:chExt cx="0" cy="0"/>
+        </a:xfrm>
+      </p:grpSpPr>
+      <p:sp>
+        <p:nvSpPr>
+          <p:cNvPr id="2" name="Marcador de Posição da Imagem do Diapositivo 1"/>
+          <p:cNvSpPr>
+            <a:spLocks noGrp="1" noRot="1" noChangeAspect="1"/>
+          </p:cNvSpPr>
+          <p:nvPr>
+            <p:ph type="sldImg"/>
+          </p:nvPr>
+        </p:nvSpPr>
+        <p:spPr/>
+      </p:sp>
+      <p:sp>
+        <p:nvSpPr>
+          <p:cNvPr id="3" name="Marcador de Posição de Notas 2"/>
+          <p:cNvSpPr>
+            <a:spLocks noGrp="1"/>
+          </p:cNvSpPr>
+          <p:nvPr>
+            <p:ph type="body" idx="1"/>
+          </p:nvPr>
+        </p:nvSpPr>
+        <p:spPr/>
+        <p:txBody>
+          <a:bodyPr/>
+          <a:lstStyle/>
+          <a:p>
+            <a:r>
+              <a:rPr lang="en-US" dirty="0"/>
+              <a:t>Here's a concrete example. </a:t>
+            </a:r>
+          </a:p>
+          <a:p>
+            <a:endParaRPr lang="en-US" dirty="0"/>
+          </a:p>
+          <a:p>
+            <a:r>
+              <a:rPr lang="en-US" dirty="0"/>
+              <a:t>The user asks the system to take a kinase selectivity dataset, split it using scaffold partitioning, train a random forest with cross-validated hyperparameter optimization, and report performance. </a:t>
+            </a:r>
+          </a:p>
+          <a:p>
+            <a:endParaRPr lang="en-US" dirty="0"/>
+          </a:p>
+          <a:p>
+            <a:r>
+              <a:rPr lang="en-US" dirty="0"/>
+              <a:t>The agent handles all of this autonomously. This workflow would normally require writing and debugging a Python script — here it's done through a text prompt.</a:t>
+            </a:r>
+            <a:endParaRPr lang="pt-PT" dirty="0"/>
+          </a:p>
+        </p:txBody>
+      </p:sp>
+      <p:sp>
+        <p:nvSpPr>
+          <p:cNvPr id="4" name="Marcador de Posição do Número do Diapositivo 3"/>
+          <p:cNvSpPr>
+            <a:spLocks noGrp="1"/>
+          </p:cNvSpPr>
+          <p:nvPr>
+            <p:ph type="sldNum" sz="quarter" idx="5"/>
+          </p:nvPr>
+        </p:nvSpPr>
+        <p:spPr/>
+        <p:txBody>
+          <a:bodyPr/>
+          <a:lstStyle/>
+          <a:p>
+            <a:fld id="{A8F1D436-8E8C-482D-8D71-F0E649122FF1}" type="slidenum">
+              <a:rPr lang="de-DE" smtClean="0"/>
+              <a:t>4</a:t>
+            </a:fld>
+            <a:endParaRPr lang="de-DE"/>
+          </a:p>
+        </p:txBody>
+      </p:sp>
+    </p:spTree>
+    <p:extLst>
+      <p:ext uri="{BB962C8B-B14F-4D97-AF65-F5344CB8AC3E}">
+        <p14:creationId xmlns:p14="http://schemas.microsoft.com/office/powerpoint/2010/main" val="2609654911"/>
+      </p:ext>
+    </p:extLst>
+  </p:cSld>
+  <p:clrMapOvr>
+    <a:masterClrMapping/>
+  </p:clrMapOvr>
+</p:notes>
+</file>
+
+<file path=ppt/notesSlides/notesSlide2.xml><?xml version="1.0" encoding="utf-8"?>
+<p:notes xmlns:a="http://schemas.openxmlformats.org/drawingml/2006/main" xmlns:r="http://schemas.openxmlformats.org/officeDocument/2006/relationships" xmlns:p="http://schemas.openxmlformats.org/presentationml/2006/main">
+  <p:cSld>
+    <p:spTree>
+      <p:nvGrpSpPr>
+        <p:cNvPr id="1" name="">
+          <a:extLst>
+            <a:ext uri="{FF2B5EF4-FFF2-40B4-BE49-F238E27FC236}">
+              <a16:creationId xmlns:a16="http://schemas.microsoft.com/office/drawing/2014/main" id="{3545D11D-EA46-9A83-3E55-EA32102FD929}"/>
+            </a:ext>
+          </a:extLst>
+        </p:cNvPr>
+        <p:cNvGrpSpPr/>
+        <p:nvPr/>
+      </p:nvGrpSpPr>
+      <p:grpSpPr>
+        <a:xfrm>
+          <a:off x="0" y="0"/>
+          <a:ext cx="0" cy="0"/>
+          <a:chOff x="0" y="0"/>
+          <a:chExt cx="0" cy="0"/>
+        </a:xfrm>
+      </p:grpSpPr>
+      <p:sp>
+        <p:nvSpPr>
+          <p:cNvPr id="2" name="Marcador de Posição da Imagem do Diapositivo 1">
+            <a:extLst>
+              <a:ext uri="{FF2B5EF4-FFF2-40B4-BE49-F238E27FC236}">
+                <a16:creationId xmlns:a16="http://schemas.microsoft.com/office/drawing/2014/main" id="{82B54D5D-CDA7-0157-77E7-1FDE8EDD9C48}"/>
+              </a:ext>
+            </a:extLst>
+          </p:cNvPr>
+          <p:cNvSpPr>
+            <a:spLocks noGrp="1" noRot="1" noChangeAspect="1"/>
+          </p:cNvSpPr>
+          <p:nvPr>
+            <p:ph type="sldImg"/>
+          </p:nvPr>
+        </p:nvSpPr>
+        <p:spPr/>
+      </p:sp>
+      <p:sp>
+        <p:nvSpPr>
+          <p:cNvPr id="3" name="Marcador de Posição de Notas 2">
+            <a:extLst>
+              <a:ext uri="{FF2B5EF4-FFF2-40B4-BE49-F238E27FC236}">
+                <a16:creationId xmlns:a16="http://schemas.microsoft.com/office/drawing/2014/main" id="{15DF8A04-46B2-BA00-FB5D-DACB585F0168}"/>
+              </a:ext>
+            </a:extLst>
+          </p:cNvPr>
+          <p:cNvSpPr>
+            <a:spLocks noGrp="1"/>
+          </p:cNvSpPr>
+          <p:nvPr>
+            <p:ph type="body" idx="1"/>
+          </p:nvPr>
+        </p:nvSpPr>
+        <p:spPr/>
+        <p:txBody>
+          <a:bodyPr/>
+          <a:lstStyle/>
+          <a:p>
+            <a:r>
+              <a:rPr lang="en-US" dirty="0"/>
+              <a:t>The practical advantages: it serves as a visual aid for medicinal chemists, increasing trust in ML predictions through transparency. </a:t>
+            </a:r>
+          </a:p>
+          <a:p>
+            <a:endParaRPr lang="en-US" dirty="0"/>
+          </a:p>
+          <a:p>
+            <a:r>
+              <a:rPr lang="en-US" dirty="0"/>
+              <a:t>It's fully integrated with an LLM, so it's ready to use. </a:t>
+            </a:r>
+          </a:p>
+          <a:p>
+            <a:endParaRPr lang="en-US" dirty="0"/>
+          </a:p>
+          <a:p>
+            <a:r>
+              <a:rPr lang="en-US" dirty="0"/>
+              <a:t>And it's built on open-source models, making it accessible and adaptable to different needs</a:t>
+            </a:r>
+            <a:endParaRPr lang="pt-PT" dirty="0"/>
+          </a:p>
+        </p:txBody>
+      </p:sp>
+      <p:sp>
+        <p:nvSpPr>
+          <p:cNvPr id="4" name="Marcador de Posição do Número do Diapositivo 3">
+            <a:extLst>
+              <a:ext uri="{FF2B5EF4-FFF2-40B4-BE49-F238E27FC236}">
+                <a16:creationId xmlns:a16="http://schemas.microsoft.com/office/drawing/2014/main" id="{A3FB29BA-E2DC-742B-7EFE-FDB07589800A}"/>
+              </a:ext>
+            </a:extLst>
+          </p:cNvPr>
+          <p:cNvSpPr>
+            <a:spLocks noGrp="1"/>
+          </p:cNvSpPr>
+          <p:nvPr>
+            <p:ph type="sldNum" sz="quarter" idx="5"/>
+          </p:nvPr>
+        </p:nvSpPr>
+        <p:spPr/>
+        <p:txBody>
+          <a:bodyPr/>
+          <a:lstStyle/>
+          <a:p>
+            <a:fld id="{A8F1D436-8E8C-482D-8D71-F0E649122FF1}" type="slidenum">
+              <a:rPr lang="de-DE" smtClean="0"/>
+              <a:t>10</a:t>
+            </a:fld>
+            <a:endParaRPr lang="de-DE"/>
+          </a:p>
+        </p:txBody>
+      </p:sp>
+    </p:spTree>
+    <p:extLst>
+      <p:ext uri="{BB962C8B-B14F-4D97-AF65-F5344CB8AC3E}">
+        <p14:creationId xmlns:p14="http://schemas.microsoft.com/office/powerpoint/2010/main" val="2535246732"/>
+      </p:ext>
+    </p:extLst>
+  </p:cSld>
+  <p:clrMapOvr>
+    <a:masterClrMapping/>
+  </p:clrMapOvr>
+</p:notes>
 </file>
 
 <file path=ppt/slideLayouts/slideLayout1.xml><?xml version="1.0" encoding="utf-8"?>
@@ -9358,7 +9994,7 @@
         <p:cNvPr id="1" name="">
           <a:extLst>
             <a:ext uri="{FF2B5EF4-FFF2-40B4-BE49-F238E27FC236}">
-              <a16:creationId xmlns:a16="http://schemas.microsoft.com/office/drawing/2014/main" id="{A6515F23-0912-A838-23CE-B8F00573A2DA}"/>
+              <a16:creationId xmlns:a16="http://schemas.microsoft.com/office/drawing/2014/main" id="{BBB5A1B2-7A92-53AE-94A1-C4092E55B578}"/>
             </a:ext>
           </a:extLst>
         </p:cNvPr>
@@ -9375,10 +10011,10 @@
       </p:grpSpPr>
       <p:sp>
         <p:nvSpPr>
-          <p:cNvPr id="163" name="PlaceHolder 1">
+          <p:cNvPr id="158" name="PlaceHolder 1">
             <a:extLst>
               <a:ext uri="{FF2B5EF4-FFF2-40B4-BE49-F238E27FC236}">
-                <a16:creationId xmlns:a16="http://schemas.microsoft.com/office/drawing/2014/main" id="{57944F4B-F502-E7CC-8790-8737702BC6AC}"/>
+                <a16:creationId xmlns:a16="http://schemas.microsoft.com/office/drawing/2014/main" id="{F4F64255-0CB6-D441-EB42-A827943DC4A3}"/>
               </a:ext>
             </a:extLst>
           </p:cNvPr>
@@ -9412,16 +10048,15 @@
               <a:lnSpc>
                 <a:spcPct val="100000"/>
               </a:lnSpc>
-              <a:buNone/>
             </a:pPr>
             <a:r>
-              <a:rPr lang="en-US" sz="3200" b="0" strike="noStrike" spc="-1" dirty="0">
+              <a:rPr lang="en-US" sz="3200" spc="-1" dirty="0">
                 <a:solidFill>
                   <a:srgbClr val="0064C8"/>
                 </a:solidFill>
                 <a:latin typeface="Century Gothic"/>
               </a:rPr>
-              <a:t>To do list</a:t>
+              <a:t>Agent Advantages and Improvements</a:t>
             </a:r>
             <a:endParaRPr lang="en-US" sz="3200" b="0" strike="noStrike" spc="-1" dirty="0">
               <a:solidFill>
@@ -9434,10 +10069,235 @@
       </p:sp>
       <p:sp>
         <p:nvSpPr>
-          <p:cNvPr id="165" name="PlaceHolder 3">
+          <p:cNvPr id="159" name="PlaceHolder 2">
             <a:extLst>
               <a:ext uri="{FF2B5EF4-FFF2-40B4-BE49-F238E27FC236}">
-                <a16:creationId xmlns:a16="http://schemas.microsoft.com/office/drawing/2014/main" id="{2EFBEA53-7B78-D9A1-93EF-9608A3193D27}"/>
+                <a16:creationId xmlns:a16="http://schemas.microsoft.com/office/drawing/2014/main" id="{D59FF44B-6222-67BD-CD20-4D01B6DF9761}"/>
+              </a:ext>
+            </a:extLst>
+          </p:cNvPr>
+          <p:cNvSpPr>
+            <a:spLocks noGrp="1"/>
+          </p:cNvSpPr>
+          <p:nvPr>
+            <p:ph/>
+          </p:nvPr>
+        </p:nvSpPr>
+        <p:spPr>
+          <a:xfrm>
+            <a:off x="382679" y="1371600"/>
+            <a:ext cx="8378281" cy="4321079"/>
+          </a:xfrm>
+          <a:prstGeom prst="rect">
+            <a:avLst/>
+          </a:prstGeom>
+          <a:noFill/>
+          <a:ln w="0">
+            <a:noFill/>
+          </a:ln>
+        </p:spPr>
+        <p:txBody>
+          <a:bodyPr numCol="1" spcCol="0" anchor="t">
+            <a:noAutofit/>
+          </a:bodyPr>
+          <a:lstStyle/>
+          <a:p>
+            <a:pPr marL="0" indent="0">
+              <a:spcBef>
+                <a:spcPts val="400"/>
+              </a:spcBef>
+              <a:spcAft>
+                <a:spcPts val="2400"/>
+              </a:spcAft>
+              <a:buClr>
+                <a:srgbClr val="0070C0"/>
+              </a:buClr>
+              <a:buNone/>
+            </a:pPr>
+            <a:r>
+              <a:rPr lang="en-US" sz="2000" b="1" strike="noStrike" spc="-1" dirty="0">
+                <a:latin typeface="Century Gothic"/>
+              </a:rPr>
+              <a:t>Practical advantages</a:t>
+            </a:r>
+            <a:r>
+              <a:rPr lang="en-US" sz="2000" strike="noStrike" spc="-1" dirty="0">
+                <a:latin typeface="Century Gothic"/>
+              </a:rPr>
+              <a:t> </a:t>
+            </a:r>
+          </a:p>
+          <a:p>
+            <a:pPr>
+              <a:spcBef>
+                <a:spcPts val="400"/>
+              </a:spcBef>
+              <a:spcAft>
+                <a:spcPts val="2400"/>
+              </a:spcAft>
+              <a:buClr>
+                <a:srgbClr val="0070C0"/>
+              </a:buClr>
+              <a:buFont typeface="Wingdings" panose="05000000000000000000" pitchFamily="2" charset="2"/>
+              <a:buChar char="§"/>
+            </a:pPr>
+            <a:r>
+              <a:rPr lang="en-US" sz="1800" spc="-1" dirty="0">
+                <a:latin typeface="Century Gothic"/>
+              </a:rPr>
+              <a:t>Visual aid for chemists → Increase transparency in ML predictions  </a:t>
+            </a:r>
+          </a:p>
+          <a:p>
+            <a:pPr>
+              <a:spcBef>
+                <a:spcPts val="400"/>
+              </a:spcBef>
+              <a:spcAft>
+                <a:spcPts val="2400"/>
+              </a:spcAft>
+              <a:buClr>
+                <a:srgbClr val="0070C0"/>
+              </a:buClr>
+              <a:buFont typeface="Wingdings" panose="05000000000000000000" pitchFamily="2" charset="2"/>
+              <a:buChar char="§"/>
+            </a:pPr>
+            <a:r>
+              <a:rPr lang="en-US" sz="1800" spc="-1" dirty="0">
+                <a:latin typeface="Century Gothic"/>
+              </a:rPr>
+              <a:t>Built on Open-source LLMs → Accessible to the community</a:t>
+            </a:r>
+          </a:p>
+          <a:p>
+            <a:pPr marL="0" indent="0">
+              <a:spcBef>
+                <a:spcPts val="400"/>
+              </a:spcBef>
+              <a:spcAft>
+                <a:spcPts val="2400"/>
+              </a:spcAft>
+              <a:buClr>
+                <a:srgbClr val="0070C0"/>
+              </a:buClr>
+              <a:buNone/>
+            </a:pPr>
+            <a:r>
+              <a:rPr lang="en-US" sz="2000" b="1" spc="-1" dirty="0">
+                <a:latin typeface="Century Gothic"/>
+              </a:rPr>
+              <a:t>Points to evaluate and improve</a:t>
+            </a:r>
+          </a:p>
+          <a:p>
+            <a:pPr>
+              <a:spcBef>
+                <a:spcPts val="400"/>
+              </a:spcBef>
+              <a:spcAft>
+                <a:spcPts val="2400"/>
+              </a:spcAft>
+              <a:buClr>
+                <a:srgbClr val="0070C0"/>
+              </a:buClr>
+              <a:buFont typeface="Wingdings" panose="05000000000000000000" pitchFamily="2" charset="2"/>
+              <a:buChar char="§"/>
+            </a:pPr>
+            <a:r>
+              <a:rPr lang="en-US" sz="1800" spc="-1" dirty="0">
+                <a:latin typeface="Century Gothic"/>
+              </a:rPr>
+              <a:t>Susceptibility to LLM hallucinations →  Use domain-specific models</a:t>
+            </a:r>
+            <a:endParaRPr lang="en-US" sz="1800" b="1" spc="-1" dirty="0">
+              <a:latin typeface="Century Gothic"/>
+            </a:endParaRPr>
+          </a:p>
+          <a:p>
+            <a:pPr>
+              <a:spcBef>
+                <a:spcPts val="400"/>
+              </a:spcBef>
+              <a:spcAft>
+                <a:spcPts val="2400"/>
+              </a:spcAft>
+              <a:buClr>
+                <a:srgbClr val="0070C0"/>
+              </a:buClr>
+              <a:buFont typeface="Wingdings" panose="05000000000000000000" pitchFamily="2" charset="2"/>
+              <a:buChar char="§"/>
+            </a:pPr>
+            <a:r>
+              <a:rPr lang="en-US" sz="1800" spc="-1" dirty="0">
+                <a:latin typeface="Century Gothic"/>
+              </a:rPr>
+              <a:t>Requires careful prompt curation → Addition of interactive chat feature</a:t>
+            </a:r>
+            <a:endParaRPr lang="en-US" sz="1800" b="1" spc="-1" dirty="0">
+              <a:latin typeface="Century Gothic"/>
+            </a:endParaRPr>
+          </a:p>
+          <a:p>
+            <a:pPr>
+              <a:spcBef>
+                <a:spcPts val="400"/>
+              </a:spcBef>
+              <a:spcAft>
+                <a:spcPts val="2400"/>
+              </a:spcAft>
+              <a:buClr>
+                <a:srgbClr val="0070C0"/>
+              </a:buClr>
+              <a:buFont typeface="Wingdings" panose="05000000000000000000" pitchFamily="2" charset="2"/>
+              <a:buChar char="§"/>
+            </a:pPr>
+            <a:endParaRPr lang="en-US" sz="1800" spc="-1" dirty="0">
+              <a:latin typeface="Century Gothic"/>
+            </a:endParaRPr>
+          </a:p>
+          <a:p>
+            <a:pPr marL="0" indent="0">
+              <a:spcBef>
+                <a:spcPts val="400"/>
+              </a:spcBef>
+              <a:spcAft>
+                <a:spcPts val="2400"/>
+              </a:spcAft>
+              <a:buClr>
+                <a:srgbClr val="0070C0"/>
+              </a:buClr>
+              <a:buNone/>
+            </a:pPr>
+            <a:endParaRPr lang="en-US" sz="2000" spc="-1" dirty="0">
+              <a:latin typeface="Century Gothic"/>
+            </a:endParaRPr>
+          </a:p>
+          <a:p>
+            <a:pPr lvl="1">
+              <a:spcBef>
+                <a:spcPts val="400"/>
+              </a:spcBef>
+              <a:spcAft>
+                <a:spcPts val="2400"/>
+              </a:spcAft>
+              <a:buClr>
+                <a:srgbClr val="0070C0"/>
+              </a:buClr>
+              <a:buFont typeface="Wingdings" panose="05000000000000000000" pitchFamily="2" charset="2"/>
+              <a:buChar char="§"/>
+            </a:pPr>
+            <a:endParaRPr lang="en-US" sz="1400" strike="noStrike" spc="-1" dirty="0">
+              <a:latin typeface="Century Gothic"/>
+            </a:endParaRPr>
+          </a:p>
+        </p:txBody>
+      </p:sp>
+      <p:sp>
+        <p:nvSpPr>
+          <p:cNvPr id="160" name="PlaceHolder 3">
+            <a:extLst>
+              <a:ext uri="{FF2B5EF4-FFF2-40B4-BE49-F238E27FC236}">
+                <a16:creationId xmlns:a16="http://schemas.microsoft.com/office/drawing/2014/main" id="{0DF1A3F0-772D-A247-0D44-2C215E694721}"/>
               </a:ext>
             </a:extLst>
           </p:cNvPr>
@@ -9473,7 +10333,7 @@
               </a:lnSpc>
               <a:buNone/>
             </a:pPr>
-            <a:fld id="{8BD7C522-1E12-40C3-B25E-5F0462E20B22}" type="slidenum">
+            <a:fld id="{7D48D3EA-1A87-4EB3-8072-3AEE88103579}" type="slidenum">
               <a:rPr lang="en-US" sz="1200" b="0" strike="noStrike" spc="-1">
                 <a:solidFill>
                   <a:srgbClr val="8B8B8B"/>
@@ -9482,474 +10342,8 @@
               </a:rPr>
               <a:t>10</a:t>
             </a:fld>
-            <a:endParaRPr lang="en-GB" sz="1200" b="0" strike="noStrike" spc="-1" dirty="0">
+            <a:endParaRPr lang="en-GB" sz="1200" b="0" strike="noStrike" spc="-1">
               <a:latin typeface="Times New Roman"/>
-            </a:endParaRPr>
-          </a:p>
-        </p:txBody>
-      </p:sp>
-      <p:sp>
-        <p:nvSpPr>
-          <p:cNvPr id="7" name="PlaceHolder 2">
-            <a:extLst>
-              <a:ext uri="{FF2B5EF4-FFF2-40B4-BE49-F238E27FC236}">
-                <a16:creationId xmlns:a16="http://schemas.microsoft.com/office/drawing/2014/main" id="{66DE14D4-64D4-6D1F-DD92-BC16D674C58B}"/>
-              </a:ext>
-            </a:extLst>
-          </p:cNvPr>
-          <p:cNvSpPr txBox="1">
-            <a:spLocks/>
-          </p:cNvSpPr>
-          <p:nvPr/>
-        </p:nvSpPr>
-        <p:spPr>
-          <a:xfrm>
-            <a:off x="380880" y="1371598"/>
-            <a:ext cx="8109070" cy="4559301"/>
-          </a:xfrm>
-          <a:prstGeom prst="rect">
-            <a:avLst/>
-          </a:prstGeom>
-          <a:noFill/>
-          <a:ln w="0">
-            <a:noFill/>
-          </a:ln>
-        </p:spPr>
-        <p:txBody>
-          <a:bodyPr numCol="1" spcCol="0" anchor="t">
-            <a:noAutofit/>
-          </a:bodyPr>
-          <a:lstStyle>
-            <a:lvl1pPr marL="228600" indent="-228600" algn="l" defTabSz="914400" rtl="0" eaLnBrk="1" latinLnBrk="0" hangingPunct="1">
-              <a:lnSpc>
-                <a:spcPct val="90000"/>
-              </a:lnSpc>
-              <a:spcBef>
-                <a:spcPts val="1000"/>
-              </a:spcBef>
-              <a:buFont typeface="Arial" panose="020B0604020202020204" pitchFamily="34" charset="0"/>
-              <a:buChar char="•"/>
-              <a:defRPr sz="2800" kern="1200">
-                <a:solidFill>
-                  <a:schemeClr val="tx1"/>
-                </a:solidFill>
-                <a:latin typeface="+mn-lt"/>
-                <a:ea typeface="+mn-ea"/>
-                <a:cs typeface="+mn-cs"/>
-              </a:defRPr>
-            </a:lvl1pPr>
-            <a:lvl2pPr marL="685800" indent="-228600" algn="l" defTabSz="914400" rtl="0" eaLnBrk="1" latinLnBrk="0" hangingPunct="1">
-              <a:lnSpc>
-                <a:spcPct val="90000"/>
-              </a:lnSpc>
-              <a:spcBef>
-                <a:spcPts val="500"/>
-              </a:spcBef>
-              <a:buFont typeface="Arial" panose="020B0604020202020204" pitchFamily="34" charset="0"/>
-              <a:buChar char="•"/>
-              <a:defRPr sz="2400" kern="1200">
-                <a:solidFill>
-                  <a:schemeClr val="tx1"/>
-                </a:solidFill>
-                <a:latin typeface="+mn-lt"/>
-                <a:ea typeface="+mn-ea"/>
-                <a:cs typeface="+mn-cs"/>
-              </a:defRPr>
-            </a:lvl2pPr>
-            <a:lvl3pPr marL="1143000" indent="-228600" algn="l" defTabSz="914400" rtl="0" eaLnBrk="1" latinLnBrk="0" hangingPunct="1">
-              <a:lnSpc>
-                <a:spcPct val="90000"/>
-              </a:lnSpc>
-              <a:spcBef>
-                <a:spcPts val="500"/>
-              </a:spcBef>
-              <a:buFont typeface="Arial" panose="020B0604020202020204" pitchFamily="34" charset="0"/>
-              <a:buChar char="•"/>
-              <a:defRPr sz="2000" kern="1200">
-                <a:solidFill>
-                  <a:schemeClr val="tx1"/>
-                </a:solidFill>
-                <a:latin typeface="+mn-lt"/>
-                <a:ea typeface="+mn-ea"/>
-                <a:cs typeface="+mn-cs"/>
-              </a:defRPr>
-            </a:lvl3pPr>
-            <a:lvl4pPr marL="1600200" indent="-228600" algn="l" defTabSz="914400" rtl="0" eaLnBrk="1" latinLnBrk="0" hangingPunct="1">
-              <a:lnSpc>
-                <a:spcPct val="90000"/>
-              </a:lnSpc>
-              <a:spcBef>
-                <a:spcPts val="500"/>
-              </a:spcBef>
-              <a:buFont typeface="Arial" panose="020B0604020202020204" pitchFamily="34" charset="0"/>
-              <a:buChar char="•"/>
-              <a:defRPr sz="1800" kern="1200">
-                <a:solidFill>
-                  <a:schemeClr val="tx1"/>
-                </a:solidFill>
-                <a:latin typeface="+mn-lt"/>
-                <a:ea typeface="+mn-ea"/>
-                <a:cs typeface="+mn-cs"/>
-              </a:defRPr>
-            </a:lvl4pPr>
-            <a:lvl5pPr marL="2057400" indent="-228600" algn="l" defTabSz="914400" rtl="0" eaLnBrk="1" latinLnBrk="0" hangingPunct="1">
-              <a:lnSpc>
-                <a:spcPct val="90000"/>
-              </a:lnSpc>
-              <a:spcBef>
-                <a:spcPts val="500"/>
-              </a:spcBef>
-              <a:buFont typeface="Arial" panose="020B0604020202020204" pitchFamily="34" charset="0"/>
-              <a:buChar char="•"/>
-              <a:defRPr sz="1800" kern="1200">
-                <a:solidFill>
-                  <a:schemeClr val="tx1"/>
-                </a:solidFill>
-                <a:latin typeface="+mn-lt"/>
-                <a:ea typeface="+mn-ea"/>
-                <a:cs typeface="+mn-cs"/>
-              </a:defRPr>
-            </a:lvl5pPr>
-            <a:lvl6pPr marL="2514600" indent="-228600" algn="l" defTabSz="914400" rtl="0" eaLnBrk="1" latinLnBrk="0" hangingPunct="1">
-              <a:lnSpc>
-                <a:spcPct val="90000"/>
-              </a:lnSpc>
-              <a:spcBef>
-                <a:spcPts val="500"/>
-              </a:spcBef>
-              <a:buFont typeface="Arial" panose="020B0604020202020204" pitchFamily="34" charset="0"/>
-              <a:buChar char="•"/>
-              <a:defRPr sz="1800" kern="1200">
-                <a:solidFill>
-                  <a:schemeClr val="tx1"/>
-                </a:solidFill>
-                <a:latin typeface="+mn-lt"/>
-                <a:ea typeface="+mn-ea"/>
-                <a:cs typeface="+mn-cs"/>
-              </a:defRPr>
-            </a:lvl6pPr>
-            <a:lvl7pPr marL="2971800" indent="-228600" algn="l" defTabSz="914400" rtl="0" eaLnBrk="1" latinLnBrk="0" hangingPunct="1">
-              <a:lnSpc>
-                <a:spcPct val="90000"/>
-              </a:lnSpc>
-              <a:spcBef>
-                <a:spcPts val="500"/>
-              </a:spcBef>
-              <a:buFont typeface="Arial" panose="020B0604020202020204" pitchFamily="34" charset="0"/>
-              <a:buChar char="•"/>
-              <a:defRPr sz="1800" kern="1200">
-                <a:solidFill>
-                  <a:schemeClr val="tx1"/>
-                </a:solidFill>
-                <a:latin typeface="+mn-lt"/>
-                <a:ea typeface="+mn-ea"/>
-                <a:cs typeface="+mn-cs"/>
-              </a:defRPr>
-            </a:lvl7pPr>
-            <a:lvl8pPr marL="3429000" indent="-228600" algn="l" defTabSz="914400" rtl="0" eaLnBrk="1" latinLnBrk="0" hangingPunct="1">
-              <a:lnSpc>
-                <a:spcPct val="90000"/>
-              </a:lnSpc>
-              <a:spcBef>
-                <a:spcPts val="500"/>
-              </a:spcBef>
-              <a:buFont typeface="Arial" panose="020B0604020202020204" pitchFamily="34" charset="0"/>
-              <a:buChar char="•"/>
-              <a:defRPr sz="1800" kern="1200">
-                <a:solidFill>
-                  <a:schemeClr val="tx1"/>
-                </a:solidFill>
-                <a:latin typeface="+mn-lt"/>
-                <a:ea typeface="+mn-ea"/>
-                <a:cs typeface="+mn-cs"/>
-              </a:defRPr>
-            </a:lvl8pPr>
-            <a:lvl9pPr marL="3886200" indent="-228600" algn="l" defTabSz="914400" rtl="0" eaLnBrk="1" latinLnBrk="0" hangingPunct="1">
-              <a:lnSpc>
-                <a:spcPct val="90000"/>
-              </a:lnSpc>
-              <a:spcBef>
-                <a:spcPts val="500"/>
-              </a:spcBef>
-              <a:buFont typeface="Arial" panose="020B0604020202020204" pitchFamily="34" charset="0"/>
-              <a:buChar char="•"/>
-              <a:defRPr sz="1800" kern="1200">
-                <a:solidFill>
-                  <a:schemeClr val="tx1"/>
-                </a:solidFill>
-                <a:latin typeface="+mn-lt"/>
-                <a:ea typeface="+mn-ea"/>
-                <a:cs typeface="+mn-cs"/>
-              </a:defRPr>
-            </a:lvl9pPr>
-          </a:lstStyle>
-          <a:p>
-            <a:pPr>
-              <a:lnSpc>
-                <a:spcPct val="100000"/>
-              </a:lnSpc>
-              <a:spcBef>
-                <a:spcPts val="400"/>
-              </a:spcBef>
-              <a:buClr>
-                <a:srgbClr val="0064C8"/>
-              </a:buClr>
-              <a:buFont typeface="Wingdings" panose="05000000000000000000" pitchFamily="2" charset="2"/>
-              <a:buChar char="§"/>
-            </a:pPr>
-            <a:r>
-              <a:rPr lang="en-US" sz="2000" spc="-1" dirty="0">
-                <a:solidFill>
-                  <a:srgbClr val="000000"/>
-                </a:solidFill>
-                <a:latin typeface="Century Gothic"/>
-              </a:rPr>
-              <a:t>Integrate with cluster for faster inference and explore larger LLMs</a:t>
-            </a:r>
-          </a:p>
-          <a:p>
-            <a:pPr>
-              <a:lnSpc>
-                <a:spcPct val="100000"/>
-              </a:lnSpc>
-              <a:spcBef>
-                <a:spcPts val="400"/>
-              </a:spcBef>
-              <a:buClr>
-                <a:srgbClr val="0064C8"/>
-              </a:buClr>
-              <a:buFont typeface="Wingdings" panose="05000000000000000000" pitchFamily="2" charset="2"/>
-              <a:buChar char="§"/>
-            </a:pPr>
-            <a:endParaRPr lang="en-US" sz="2000" spc="-1" dirty="0">
-              <a:solidFill>
-                <a:srgbClr val="000000"/>
-              </a:solidFill>
-              <a:latin typeface="Century Gothic"/>
-            </a:endParaRPr>
-          </a:p>
-          <a:p>
-            <a:pPr lvl="1">
-              <a:lnSpc>
-                <a:spcPct val="100000"/>
-              </a:lnSpc>
-              <a:spcBef>
-                <a:spcPts val="400"/>
-              </a:spcBef>
-              <a:buClr>
-                <a:srgbClr val="0064C8"/>
-              </a:buClr>
-              <a:buFont typeface="Wingdings" panose="05000000000000000000" pitchFamily="2" charset="2"/>
-              <a:buChar char="§"/>
-            </a:pPr>
-            <a:r>
-              <a:rPr lang="en-US" sz="1600" spc="-1" dirty="0">
-                <a:solidFill>
-                  <a:srgbClr val="000000"/>
-                </a:solidFill>
-                <a:latin typeface="Century Gothic"/>
-              </a:rPr>
-              <a:t>It works already on the workstations with medium-to-large LLMs</a:t>
-            </a:r>
-          </a:p>
-          <a:p>
-            <a:pPr marL="0" indent="0">
-              <a:lnSpc>
-                <a:spcPct val="100000"/>
-              </a:lnSpc>
-              <a:spcBef>
-                <a:spcPts val="400"/>
-              </a:spcBef>
-              <a:buClr>
-                <a:srgbClr val="0064C8"/>
-              </a:buClr>
-              <a:buNone/>
-            </a:pPr>
-            <a:endParaRPr lang="en-US" sz="2000" spc="-1" dirty="0">
-              <a:solidFill>
-                <a:srgbClr val="000000"/>
-              </a:solidFill>
-              <a:latin typeface="Century Gothic"/>
-            </a:endParaRPr>
-          </a:p>
-          <a:p>
-            <a:pPr>
-              <a:lnSpc>
-                <a:spcPct val="100000"/>
-              </a:lnSpc>
-              <a:spcBef>
-                <a:spcPts val="400"/>
-              </a:spcBef>
-              <a:buClr>
-                <a:srgbClr val="0064C8"/>
-              </a:buClr>
-              <a:buFont typeface="Wingdings" panose="05000000000000000000" pitchFamily="2" charset="2"/>
-              <a:buChar char="§"/>
-            </a:pPr>
-            <a:r>
-              <a:rPr lang="en-US" sz="2000" spc="-1" dirty="0">
-                <a:solidFill>
-                  <a:srgbClr val="000000"/>
-                </a:solidFill>
-                <a:latin typeface="Century Gothic"/>
-              </a:rPr>
-              <a:t>Clean up the repository and make it available </a:t>
-            </a:r>
-          </a:p>
-          <a:p>
-            <a:pPr>
-              <a:lnSpc>
-                <a:spcPct val="100000"/>
-              </a:lnSpc>
-              <a:spcBef>
-                <a:spcPts val="400"/>
-              </a:spcBef>
-              <a:buClr>
-                <a:srgbClr val="0064C8"/>
-              </a:buClr>
-              <a:buFont typeface="Wingdings" panose="05000000000000000000" pitchFamily="2" charset="2"/>
-              <a:buChar char="§"/>
-            </a:pPr>
-            <a:endParaRPr lang="en-US" sz="2000" spc="-1" dirty="0">
-              <a:solidFill>
-                <a:srgbClr val="000000"/>
-              </a:solidFill>
-              <a:latin typeface="Century Gothic"/>
-            </a:endParaRPr>
-          </a:p>
-          <a:p>
-            <a:pPr lvl="1">
-              <a:lnSpc>
-                <a:spcPct val="100000"/>
-              </a:lnSpc>
-              <a:spcBef>
-                <a:spcPts val="400"/>
-              </a:spcBef>
-              <a:buClr>
-                <a:srgbClr val="0064C8"/>
-              </a:buClr>
-              <a:buFont typeface="Wingdings" panose="05000000000000000000" pitchFamily="2" charset="2"/>
-              <a:buChar char="§"/>
-            </a:pPr>
-            <a:r>
-              <a:rPr lang="en-US" sz="1600" spc="-1" dirty="0">
-                <a:solidFill>
-                  <a:srgbClr val="000000"/>
-                </a:solidFill>
-                <a:latin typeface="Century Gothic"/>
-              </a:rPr>
-              <a:t>An “organization repository” is available for the whole lab to ease the integration of new components</a:t>
-            </a:r>
-          </a:p>
-          <a:p>
-            <a:pPr>
-              <a:lnSpc>
-                <a:spcPct val="100000"/>
-              </a:lnSpc>
-              <a:spcBef>
-                <a:spcPts val="400"/>
-              </a:spcBef>
-              <a:buClr>
-                <a:srgbClr val="0064C8"/>
-              </a:buClr>
-              <a:buFont typeface="Wingdings" panose="05000000000000000000" pitchFamily="2" charset="2"/>
-              <a:buChar char="§"/>
-            </a:pPr>
-            <a:endParaRPr lang="en-US" sz="2000" spc="-1" dirty="0">
-              <a:solidFill>
-                <a:srgbClr val="000000"/>
-              </a:solidFill>
-              <a:latin typeface="Century Gothic"/>
-            </a:endParaRPr>
-          </a:p>
-          <a:p>
-            <a:pPr>
-              <a:lnSpc>
-                <a:spcPct val="100000"/>
-              </a:lnSpc>
-              <a:spcBef>
-                <a:spcPts val="400"/>
-              </a:spcBef>
-              <a:buClr>
-                <a:srgbClr val="0064C8"/>
-              </a:buClr>
-              <a:buFont typeface="Wingdings" panose="05000000000000000000" pitchFamily="2" charset="2"/>
-              <a:buChar char="§"/>
-            </a:pPr>
-            <a:r>
-              <a:rPr lang="en-US" sz="2000" spc="-1" dirty="0">
-                <a:solidFill>
-                  <a:srgbClr val="000000"/>
-                </a:solidFill>
-                <a:latin typeface="Century Gothic"/>
-              </a:rPr>
-              <a:t>Make a guide for lab members for the implementation of AI agents</a:t>
-            </a:r>
-          </a:p>
-          <a:p>
-            <a:pPr>
-              <a:lnSpc>
-                <a:spcPct val="100000"/>
-              </a:lnSpc>
-              <a:spcBef>
-                <a:spcPts val="400"/>
-              </a:spcBef>
-              <a:buClr>
-                <a:srgbClr val="0064C8"/>
-              </a:buClr>
-              <a:buFont typeface="Wingdings" panose="05000000000000000000" pitchFamily="2" charset="2"/>
-              <a:buChar char="§"/>
-            </a:pPr>
-            <a:endParaRPr lang="en-US" sz="2000" spc="-1" dirty="0">
-              <a:solidFill>
-                <a:srgbClr val="000000"/>
-              </a:solidFill>
-              <a:latin typeface="Century Gothic"/>
-            </a:endParaRPr>
-          </a:p>
-          <a:p>
-            <a:pPr>
-              <a:lnSpc>
-                <a:spcPct val="100000"/>
-              </a:lnSpc>
-              <a:spcBef>
-                <a:spcPts val="400"/>
-              </a:spcBef>
-              <a:buClr>
-                <a:srgbClr val="0064C8"/>
-              </a:buClr>
-              <a:buFont typeface="Wingdings" panose="05000000000000000000" pitchFamily="2" charset="2"/>
-              <a:buChar char="§"/>
-            </a:pPr>
-            <a:endParaRPr lang="en-US" sz="1800" spc="-1" dirty="0">
-              <a:solidFill>
-                <a:srgbClr val="000000"/>
-              </a:solidFill>
-              <a:latin typeface="Century Gothic"/>
-            </a:endParaRPr>
-          </a:p>
-          <a:p>
-            <a:pPr marL="343080" indent="-343080">
-              <a:lnSpc>
-                <a:spcPct val="100000"/>
-              </a:lnSpc>
-              <a:spcBef>
-                <a:spcPts val="400"/>
-              </a:spcBef>
-              <a:spcAft>
-                <a:spcPts val="601"/>
-              </a:spcAft>
-              <a:buClr>
-                <a:srgbClr val="0064C8"/>
-              </a:buClr>
-              <a:buFont typeface="Wingdings 2" charset="2"/>
-              <a:buChar char=""/>
-            </a:pPr>
-            <a:endParaRPr lang="en-US" sz="2000" b="1" spc="-1" dirty="0">
-              <a:solidFill>
-                <a:srgbClr val="000000"/>
-              </a:solidFill>
-              <a:latin typeface="Century Gothic"/>
             </a:endParaRPr>
           </a:p>
         </p:txBody>
@@ -9957,7 +10351,7 @@
     </p:spTree>
     <p:extLst>
       <p:ext uri="{BB962C8B-B14F-4D97-AF65-F5344CB8AC3E}">
-        <p14:creationId xmlns:p14="http://schemas.microsoft.com/office/powerpoint/2010/main" val="3727029337"/>
+        <p14:creationId xmlns:p14="http://schemas.microsoft.com/office/powerpoint/2010/main" val="2674446027"/>
       </p:ext>
     </p:extLst>
   </p:cSld>
@@ -10038,7 +10432,7 @@
                 </a:solidFill>
                 <a:latin typeface="Century Gothic"/>
               </a:rPr>
-              <a:t>Framing</a:t>
+              <a:t>To do list</a:t>
             </a:r>
             <a:endParaRPr lang="en-US" sz="3200" b="0" strike="noStrike" spc="-1" dirty="0">
               <a:solidFill>
@@ -10321,8 +10715,29 @@
                 </a:solidFill>
                 <a:latin typeface="Century Gothic"/>
               </a:rPr>
-              <a:t>How to frame the project:</a:t>
+              <a:t>Integrate with cluster for faster inference and explore larger LLMs</a:t>
             </a:r>
+          </a:p>
+          <a:p>
+            <a:pPr>
+              <a:lnSpc>
+                <a:spcPct val="100000"/>
+              </a:lnSpc>
+              <a:spcBef>
+                <a:spcPts val="400"/>
+              </a:spcBef>
+              <a:buClr>
+                <a:srgbClr val="0064C8"/>
+              </a:buClr>
+              <a:buFont typeface="Wingdings" panose="05000000000000000000" pitchFamily="2" charset="2"/>
+              <a:buChar char="§"/>
+            </a:pPr>
+            <a:endParaRPr lang="en-US" sz="2000" spc="-1" dirty="0">
+              <a:solidFill>
+                <a:srgbClr val="000000"/>
+              </a:solidFill>
+              <a:latin typeface="Century Gothic"/>
+            </a:endParaRPr>
           </a:p>
           <a:p>
             <a:pPr lvl="1">
@@ -10345,8 +10760,73 @@
                 </a:solidFill>
                 <a:latin typeface="Century Gothic"/>
               </a:rPr>
-              <a:t>A proof-of-concept study?</a:t>
+              <a:t>It works already on the workstations with medium-to-large LLMs</a:t>
             </a:r>
+          </a:p>
+          <a:p>
+            <a:pPr marL="0" indent="0">
+              <a:lnSpc>
+                <a:spcPct val="100000"/>
+              </a:lnSpc>
+              <a:spcBef>
+                <a:spcPts val="400"/>
+              </a:spcBef>
+              <a:buClr>
+                <a:srgbClr val="0064C8"/>
+              </a:buClr>
+              <a:buNone/>
+            </a:pPr>
+            <a:endParaRPr lang="en-US" sz="2000" spc="-1" dirty="0">
+              <a:solidFill>
+                <a:srgbClr val="000000"/>
+              </a:solidFill>
+              <a:latin typeface="Century Gothic"/>
+            </a:endParaRPr>
+          </a:p>
+          <a:p>
+            <a:pPr>
+              <a:lnSpc>
+                <a:spcPct val="100000"/>
+              </a:lnSpc>
+              <a:spcBef>
+                <a:spcPts val="400"/>
+              </a:spcBef>
+              <a:buClr>
+                <a:srgbClr val="0064C8"/>
+              </a:buClr>
+              <a:buFont typeface="Wingdings" panose="05000000000000000000" pitchFamily="2" charset="2"/>
+              <a:buChar char="§"/>
+            </a:pPr>
+            <a:r>
+              <a:rPr lang="en-US" sz="2000" spc="-1" dirty="0">
+                <a:solidFill>
+                  <a:srgbClr val="000000"/>
+                </a:solidFill>
+                <a:latin typeface="Century Gothic"/>
+              </a:rPr>
+              <a:t>Clean up the repository and make it available </a:t>
+            </a:r>
+          </a:p>
+          <a:p>
+            <a:pPr>
+              <a:lnSpc>
+                <a:spcPct val="100000"/>
+              </a:lnSpc>
+              <a:spcBef>
+                <a:spcPts val="400"/>
+              </a:spcBef>
+              <a:buClr>
+                <a:srgbClr val="0064C8"/>
+              </a:buClr>
+              <a:buFont typeface="Wingdings" panose="05000000000000000000" pitchFamily="2" charset="2"/>
+              <a:buChar char="§"/>
+            </a:pPr>
+            <a:endParaRPr lang="en-US" sz="2000" spc="-1" dirty="0">
+              <a:solidFill>
+                <a:srgbClr val="000000"/>
+              </a:solidFill>
+              <a:latin typeface="Century Gothic"/>
+            </a:endParaRPr>
           </a:p>
           <a:p>
             <a:pPr lvl="1">
@@ -10369,11 +10849,32 @@
                 </a:solidFill>
                 <a:latin typeface="Century Gothic"/>
               </a:rPr>
-              <a:t>An explainability platform for XAI applied to molecular design?</a:t>
+              <a:t>An “organization repository” is available for the whole lab to ease the integration of new components</a:t>
             </a:r>
           </a:p>
           <a:p>
-            <a:pPr lvl="1">
+            <a:pPr>
+              <a:lnSpc>
+                <a:spcPct val="100000"/>
+              </a:lnSpc>
+              <a:spcBef>
+                <a:spcPts val="400"/>
+              </a:spcBef>
+              <a:buClr>
+                <a:srgbClr val="0064C8"/>
+              </a:buClr>
+              <a:buFont typeface="Wingdings" panose="05000000000000000000" pitchFamily="2" charset="2"/>
+              <a:buChar char="§"/>
+            </a:pPr>
+            <a:endParaRPr lang="en-US" sz="2000" spc="-1" dirty="0">
+              <a:solidFill>
+                <a:srgbClr val="000000"/>
+              </a:solidFill>
+              <a:latin typeface="Century Gothic"/>
+            </a:endParaRPr>
+          </a:p>
+          <a:p>
+            <a:pPr>
               <a:lnSpc>
                 <a:spcPct val="100000"/>
               </a:lnSpc>
@@ -10387,116 +10888,14 @@
               <a:buChar char="§"/>
             </a:pPr>
             <a:r>
-              <a:rPr lang="en-US" sz="1600" spc="-1" dirty="0">
+              <a:rPr lang="en-US" sz="2000" spc="-1" dirty="0">
                 <a:solidFill>
                   <a:srgbClr val="000000"/>
                 </a:solidFill>
                 <a:latin typeface="Century Gothic"/>
               </a:rPr>
-              <a:t>An explainability platform for XAI specific to molecular selectivity?</a:t>
+              <a:t>Make a guide for lab members for the implementation of AI agents</a:t>
             </a:r>
-          </a:p>
-          <a:p>
-            <a:pPr lvl="1">
-              <a:lnSpc>
-                <a:spcPct val="100000"/>
-              </a:lnSpc>
-              <a:spcBef>
-                <a:spcPts val="400"/>
-              </a:spcBef>
-              <a:buClr>
-                <a:srgbClr val="0064C8"/>
-              </a:buClr>
-              <a:buFont typeface="Wingdings" panose="05000000000000000000" pitchFamily="2" charset="2"/>
-              <a:buChar char="§"/>
-            </a:pPr>
-            <a:r>
-              <a:rPr lang="en-US" sz="1600" spc="-1" dirty="0">
-                <a:solidFill>
-                  <a:srgbClr val="000000"/>
-                </a:solidFill>
-                <a:latin typeface="Century Gothic"/>
-              </a:rPr>
-              <a:t>A modular </a:t>
-            </a:r>
-            <a:r>
-              <a:rPr lang="en-US" sz="1600" spc="-1" dirty="0" err="1">
-                <a:solidFill>
-                  <a:srgbClr val="000000"/>
-                </a:solidFill>
-                <a:latin typeface="Century Gothic"/>
-              </a:rPr>
-              <a:t>explainability</a:t>
-            </a:r>
-            <a:r>
-              <a:rPr lang="en-US" sz="1600" spc="-1" dirty="0">
-                <a:solidFill>
-                  <a:srgbClr val="000000"/>
-                </a:solidFill>
-                <a:latin typeface="Century Gothic"/>
-              </a:rPr>
-              <a:t>-enhanced platform for </a:t>
-            </a:r>
-            <a:r>
-              <a:rPr lang="en-US" sz="1600" spc="-1" dirty="0" err="1">
-                <a:solidFill>
-                  <a:srgbClr val="000000"/>
-                </a:solidFill>
-                <a:latin typeface="Century Gothic"/>
-              </a:rPr>
-              <a:t>chemoinformatics</a:t>
-            </a:r>
-            <a:r>
-              <a:rPr lang="en-US" sz="1600" spc="-1" dirty="0">
-                <a:solidFill>
-                  <a:srgbClr val="000000"/>
-                </a:solidFill>
-                <a:latin typeface="Century Gothic"/>
-              </a:rPr>
-              <a:t>? </a:t>
-            </a:r>
-          </a:p>
-          <a:p>
-            <a:pPr lvl="1">
-              <a:lnSpc>
-                <a:spcPct val="100000"/>
-              </a:lnSpc>
-              <a:spcBef>
-                <a:spcPts val="400"/>
-              </a:spcBef>
-              <a:buClr>
-                <a:srgbClr val="0064C8"/>
-              </a:buClr>
-              <a:buFont typeface="Wingdings" panose="05000000000000000000" pitchFamily="2" charset="2"/>
-              <a:buChar char="§"/>
-            </a:pPr>
-            <a:endParaRPr lang="en-US" sz="1600" spc="-1" dirty="0">
-              <a:solidFill>
-                <a:srgbClr val="000000"/>
-              </a:solidFill>
-              <a:latin typeface="Century Gothic"/>
-            </a:endParaRPr>
-          </a:p>
-          <a:p>
-            <a:pPr lvl="1">
-              <a:lnSpc>
-                <a:spcPct val="100000"/>
-              </a:lnSpc>
-              <a:spcBef>
-                <a:spcPts val="400"/>
-              </a:spcBef>
-              <a:buClr>
-                <a:srgbClr val="0064C8"/>
-              </a:buClr>
-              <a:buFont typeface="Wingdings" panose="05000000000000000000" pitchFamily="2" charset="2"/>
-              <a:buChar char="§"/>
-            </a:pPr>
-            <a:endParaRPr lang="en-US" sz="1600" spc="-1" dirty="0">
-              <a:solidFill>
-                <a:srgbClr val="000000"/>
-              </a:solidFill>
-              <a:latin typeface="Century Gothic"/>
-            </a:endParaRPr>
           </a:p>
           <a:p>
             <a:pPr>
@@ -10569,7 +10968,1186 @@
     </p:spTree>
     <p:extLst>
       <p:ext uri="{BB962C8B-B14F-4D97-AF65-F5344CB8AC3E}">
+        <p14:creationId xmlns:p14="http://schemas.microsoft.com/office/powerpoint/2010/main" val="3727029337"/>
+      </p:ext>
+    </p:extLst>
+  </p:cSld>
+  <p:clrMapOvr>
+    <a:masterClrMapping/>
+  </p:clrMapOvr>
+</p:sld>
+</file>
+
+<file path=ppt/slides/slide12.xml><?xml version="1.0" encoding="utf-8"?>
+<p:sld xmlns:a="http://schemas.openxmlformats.org/drawingml/2006/main" xmlns:r="http://schemas.openxmlformats.org/officeDocument/2006/relationships" xmlns:p="http://schemas.openxmlformats.org/presentationml/2006/main">
+  <p:cSld>
+    <p:spTree>
+      <p:nvGrpSpPr>
+        <p:cNvPr id="1" name="">
+          <a:extLst>
+            <a:ext uri="{FF2B5EF4-FFF2-40B4-BE49-F238E27FC236}">
+              <a16:creationId xmlns:a16="http://schemas.microsoft.com/office/drawing/2014/main" id="{A6515F23-0912-A838-23CE-B8F00573A2DA}"/>
+            </a:ext>
+          </a:extLst>
+        </p:cNvPr>
+        <p:cNvGrpSpPr/>
+        <p:nvPr/>
+      </p:nvGrpSpPr>
+      <p:grpSpPr>
+        <a:xfrm>
+          <a:off x="0" y="0"/>
+          <a:ext cx="0" cy="0"/>
+          <a:chOff x="0" y="0"/>
+          <a:chExt cx="0" cy="0"/>
+        </a:xfrm>
+      </p:grpSpPr>
+      <p:sp>
+        <p:nvSpPr>
+          <p:cNvPr id="163" name="PlaceHolder 1">
+            <a:extLst>
+              <a:ext uri="{FF2B5EF4-FFF2-40B4-BE49-F238E27FC236}">
+                <a16:creationId xmlns:a16="http://schemas.microsoft.com/office/drawing/2014/main" id="{57944F4B-F502-E7CC-8790-8737702BC6AC}"/>
+              </a:ext>
+            </a:extLst>
+          </p:cNvPr>
+          <p:cNvSpPr>
+            <a:spLocks noGrp="1"/>
+          </p:cNvSpPr>
+          <p:nvPr>
+            <p:ph type="title"/>
+          </p:nvPr>
+        </p:nvSpPr>
+        <p:spPr>
+          <a:xfrm>
+            <a:off x="380880" y="228600"/>
+            <a:ext cx="8380080" cy="837720"/>
+          </a:xfrm>
+          <a:prstGeom prst="rect">
+            <a:avLst/>
+          </a:prstGeom>
+          <a:noFill/>
+          <a:ln w="0">
+            <a:noFill/>
+          </a:ln>
+        </p:spPr>
+        <p:txBody>
+          <a:bodyPr numCol="1" spcCol="0" anchor="ctr">
+            <a:noAutofit/>
+          </a:bodyPr>
+          <a:lstStyle/>
+          <a:p>
+            <a:pPr>
+              <a:lnSpc>
+                <a:spcPct val="100000"/>
+              </a:lnSpc>
+              <a:buNone/>
+            </a:pPr>
+            <a:r>
+              <a:rPr lang="en-US" sz="3200" b="0" strike="noStrike" spc="-1" dirty="0">
+                <a:solidFill>
+                  <a:srgbClr val="0064C8"/>
+                </a:solidFill>
+                <a:latin typeface="Century Gothic"/>
+              </a:rPr>
+              <a:t>Framing</a:t>
+            </a:r>
+            <a:endParaRPr lang="en-US" sz="3200" b="0" strike="noStrike" spc="-1" dirty="0">
+              <a:solidFill>
+                <a:srgbClr val="000000"/>
+              </a:solidFill>
+              <a:latin typeface="Century Gothic"/>
+            </a:endParaRPr>
+          </a:p>
+        </p:txBody>
+      </p:sp>
+      <p:sp>
+        <p:nvSpPr>
+          <p:cNvPr id="165" name="PlaceHolder 3">
+            <a:extLst>
+              <a:ext uri="{FF2B5EF4-FFF2-40B4-BE49-F238E27FC236}">
+                <a16:creationId xmlns:a16="http://schemas.microsoft.com/office/drawing/2014/main" id="{2EFBEA53-7B78-D9A1-93EF-9608A3193D27}"/>
+              </a:ext>
+            </a:extLst>
+          </p:cNvPr>
+          <p:cNvSpPr>
+            <a:spLocks noGrp="1"/>
+          </p:cNvSpPr>
+          <p:nvPr>
+            <p:ph type="sldNum"/>
+          </p:nvPr>
+        </p:nvSpPr>
+        <p:spPr>
+          <a:xfrm>
+            <a:off x="8376840" y="5692680"/>
+            <a:ext cx="384120" cy="364680"/>
+          </a:xfrm>
+          <a:prstGeom prst="rect">
+            <a:avLst/>
+          </a:prstGeom>
+          <a:noFill/>
+          <a:ln w="0">
+            <a:noFill/>
+          </a:ln>
+        </p:spPr>
+        <p:txBody>
+          <a:bodyPr anchor="ctr">
+            <a:noAutofit/>
+          </a:bodyPr>
+          <a:lstStyle/>
+          <a:p>
+            <a:pPr algn="r">
+              <a:lnSpc>
+                <a:spcPct val="100000"/>
+              </a:lnSpc>
+              <a:buNone/>
+            </a:pPr>
+            <a:fld id="{8BD7C522-1E12-40C3-B25E-5F0462E20B22}" type="slidenum">
+              <a:rPr lang="en-US" sz="1200" b="0" strike="noStrike" spc="-1">
+                <a:solidFill>
+                  <a:srgbClr val="8B8B8B"/>
+                </a:solidFill>
+                <a:latin typeface="Century Gothic"/>
+              </a:rPr>
+              <a:t>12</a:t>
+            </a:fld>
+            <a:endParaRPr lang="en-GB" sz="1200" b="0" strike="noStrike" spc="-1" dirty="0">
+              <a:latin typeface="Times New Roman"/>
+            </a:endParaRPr>
+          </a:p>
+        </p:txBody>
+      </p:sp>
+      <p:sp>
+        <p:nvSpPr>
+          <p:cNvPr id="7" name="PlaceHolder 2">
+            <a:extLst>
+              <a:ext uri="{FF2B5EF4-FFF2-40B4-BE49-F238E27FC236}">
+                <a16:creationId xmlns:a16="http://schemas.microsoft.com/office/drawing/2014/main" id="{66DE14D4-64D4-6D1F-DD92-BC16D674C58B}"/>
+              </a:ext>
+            </a:extLst>
+          </p:cNvPr>
+          <p:cNvSpPr txBox="1">
+            <a:spLocks/>
+          </p:cNvSpPr>
+          <p:nvPr/>
+        </p:nvSpPr>
+        <p:spPr>
+          <a:xfrm>
+            <a:off x="380880" y="1371598"/>
+            <a:ext cx="8109070" cy="4559301"/>
+          </a:xfrm>
+          <a:prstGeom prst="rect">
+            <a:avLst/>
+          </a:prstGeom>
+          <a:noFill/>
+          <a:ln w="0">
+            <a:noFill/>
+          </a:ln>
+        </p:spPr>
+        <p:txBody>
+          <a:bodyPr numCol="1" spcCol="0" anchor="t">
+            <a:noAutofit/>
+          </a:bodyPr>
+          <a:lstStyle>
+            <a:lvl1pPr marL="228600" indent="-228600" algn="l" defTabSz="914400" rtl="0" eaLnBrk="1" latinLnBrk="0" hangingPunct="1">
+              <a:lnSpc>
+                <a:spcPct val="90000"/>
+              </a:lnSpc>
+              <a:spcBef>
+                <a:spcPts val="1000"/>
+              </a:spcBef>
+              <a:buFont typeface="Arial" panose="020B0604020202020204" pitchFamily="34" charset="0"/>
+              <a:buChar char="•"/>
+              <a:defRPr sz="2800" kern="1200">
+                <a:solidFill>
+                  <a:schemeClr val="tx1"/>
+                </a:solidFill>
+                <a:latin typeface="+mn-lt"/>
+                <a:ea typeface="+mn-ea"/>
+                <a:cs typeface="+mn-cs"/>
+              </a:defRPr>
+            </a:lvl1pPr>
+            <a:lvl2pPr marL="685800" indent="-228600" algn="l" defTabSz="914400" rtl="0" eaLnBrk="1" latinLnBrk="0" hangingPunct="1">
+              <a:lnSpc>
+                <a:spcPct val="90000"/>
+              </a:lnSpc>
+              <a:spcBef>
+                <a:spcPts val="500"/>
+              </a:spcBef>
+              <a:buFont typeface="Arial" panose="020B0604020202020204" pitchFamily="34" charset="0"/>
+              <a:buChar char="•"/>
+              <a:defRPr sz="2400" kern="1200">
+                <a:solidFill>
+                  <a:schemeClr val="tx1"/>
+                </a:solidFill>
+                <a:latin typeface="+mn-lt"/>
+                <a:ea typeface="+mn-ea"/>
+                <a:cs typeface="+mn-cs"/>
+              </a:defRPr>
+            </a:lvl2pPr>
+            <a:lvl3pPr marL="1143000" indent="-228600" algn="l" defTabSz="914400" rtl="0" eaLnBrk="1" latinLnBrk="0" hangingPunct="1">
+              <a:lnSpc>
+                <a:spcPct val="90000"/>
+              </a:lnSpc>
+              <a:spcBef>
+                <a:spcPts val="500"/>
+              </a:spcBef>
+              <a:buFont typeface="Arial" panose="020B0604020202020204" pitchFamily="34" charset="0"/>
+              <a:buChar char="•"/>
+              <a:defRPr sz="2000" kern="1200">
+                <a:solidFill>
+                  <a:schemeClr val="tx1"/>
+                </a:solidFill>
+                <a:latin typeface="+mn-lt"/>
+                <a:ea typeface="+mn-ea"/>
+                <a:cs typeface="+mn-cs"/>
+              </a:defRPr>
+            </a:lvl3pPr>
+            <a:lvl4pPr marL="1600200" indent="-228600" algn="l" defTabSz="914400" rtl="0" eaLnBrk="1" latinLnBrk="0" hangingPunct="1">
+              <a:lnSpc>
+                <a:spcPct val="90000"/>
+              </a:lnSpc>
+              <a:spcBef>
+                <a:spcPts val="500"/>
+              </a:spcBef>
+              <a:buFont typeface="Arial" panose="020B0604020202020204" pitchFamily="34" charset="0"/>
+              <a:buChar char="•"/>
+              <a:defRPr sz="1800" kern="1200">
+                <a:solidFill>
+                  <a:schemeClr val="tx1"/>
+                </a:solidFill>
+                <a:latin typeface="+mn-lt"/>
+                <a:ea typeface="+mn-ea"/>
+                <a:cs typeface="+mn-cs"/>
+              </a:defRPr>
+            </a:lvl4pPr>
+            <a:lvl5pPr marL="2057400" indent="-228600" algn="l" defTabSz="914400" rtl="0" eaLnBrk="1" latinLnBrk="0" hangingPunct="1">
+              <a:lnSpc>
+                <a:spcPct val="90000"/>
+              </a:lnSpc>
+              <a:spcBef>
+                <a:spcPts val="500"/>
+              </a:spcBef>
+              <a:buFont typeface="Arial" panose="020B0604020202020204" pitchFamily="34" charset="0"/>
+              <a:buChar char="•"/>
+              <a:defRPr sz="1800" kern="1200">
+                <a:solidFill>
+                  <a:schemeClr val="tx1"/>
+                </a:solidFill>
+                <a:latin typeface="+mn-lt"/>
+                <a:ea typeface="+mn-ea"/>
+                <a:cs typeface="+mn-cs"/>
+              </a:defRPr>
+            </a:lvl5pPr>
+            <a:lvl6pPr marL="2514600" indent="-228600" algn="l" defTabSz="914400" rtl="0" eaLnBrk="1" latinLnBrk="0" hangingPunct="1">
+              <a:lnSpc>
+                <a:spcPct val="90000"/>
+              </a:lnSpc>
+              <a:spcBef>
+                <a:spcPts val="500"/>
+              </a:spcBef>
+              <a:buFont typeface="Arial" panose="020B0604020202020204" pitchFamily="34" charset="0"/>
+              <a:buChar char="•"/>
+              <a:defRPr sz="1800" kern="1200">
+                <a:solidFill>
+                  <a:schemeClr val="tx1"/>
+                </a:solidFill>
+                <a:latin typeface="+mn-lt"/>
+                <a:ea typeface="+mn-ea"/>
+                <a:cs typeface="+mn-cs"/>
+              </a:defRPr>
+            </a:lvl6pPr>
+            <a:lvl7pPr marL="2971800" indent="-228600" algn="l" defTabSz="914400" rtl="0" eaLnBrk="1" latinLnBrk="0" hangingPunct="1">
+              <a:lnSpc>
+                <a:spcPct val="90000"/>
+              </a:lnSpc>
+              <a:spcBef>
+                <a:spcPts val="500"/>
+              </a:spcBef>
+              <a:buFont typeface="Arial" panose="020B0604020202020204" pitchFamily="34" charset="0"/>
+              <a:buChar char="•"/>
+              <a:defRPr sz="1800" kern="1200">
+                <a:solidFill>
+                  <a:schemeClr val="tx1"/>
+                </a:solidFill>
+                <a:latin typeface="+mn-lt"/>
+                <a:ea typeface="+mn-ea"/>
+                <a:cs typeface="+mn-cs"/>
+              </a:defRPr>
+            </a:lvl7pPr>
+            <a:lvl8pPr marL="3429000" indent="-228600" algn="l" defTabSz="914400" rtl="0" eaLnBrk="1" latinLnBrk="0" hangingPunct="1">
+              <a:lnSpc>
+                <a:spcPct val="90000"/>
+              </a:lnSpc>
+              <a:spcBef>
+                <a:spcPts val="500"/>
+              </a:spcBef>
+              <a:buFont typeface="Arial" panose="020B0604020202020204" pitchFamily="34" charset="0"/>
+              <a:buChar char="•"/>
+              <a:defRPr sz="1800" kern="1200">
+                <a:solidFill>
+                  <a:schemeClr val="tx1"/>
+                </a:solidFill>
+                <a:latin typeface="+mn-lt"/>
+                <a:ea typeface="+mn-ea"/>
+                <a:cs typeface="+mn-cs"/>
+              </a:defRPr>
+            </a:lvl8pPr>
+            <a:lvl9pPr marL="3886200" indent="-228600" algn="l" defTabSz="914400" rtl="0" eaLnBrk="1" latinLnBrk="0" hangingPunct="1">
+              <a:lnSpc>
+                <a:spcPct val="90000"/>
+              </a:lnSpc>
+              <a:spcBef>
+                <a:spcPts val="500"/>
+              </a:spcBef>
+              <a:buFont typeface="Arial" panose="020B0604020202020204" pitchFamily="34" charset="0"/>
+              <a:buChar char="•"/>
+              <a:defRPr sz="1800" kern="1200">
+                <a:solidFill>
+                  <a:schemeClr val="tx1"/>
+                </a:solidFill>
+                <a:latin typeface="+mn-lt"/>
+                <a:ea typeface="+mn-ea"/>
+                <a:cs typeface="+mn-cs"/>
+              </a:defRPr>
+            </a:lvl9pPr>
+          </a:lstStyle>
+          <a:p>
+            <a:pPr>
+              <a:lnSpc>
+                <a:spcPct val="100000"/>
+              </a:lnSpc>
+              <a:spcBef>
+                <a:spcPts val="400"/>
+              </a:spcBef>
+              <a:buClr>
+                <a:srgbClr val="0064C8"/>
+              </a:buClr>
+              <a:buFont typeface="Wingdings" panose="05000000000000000000" pitchFamily="2" charset="2"/>
+              <a:buChar char="§"/>
+            </a:pPr>
+            <a:r>
+              <a:rPr lang="en-US" sz="2000" spc="-1" dirty="0">
+                <a:solidFill>
+                  <a:srgbClr val="000000"/>
+                </a:solidFill>
+                <a:latin typeface="Century Gothic"/>
+              </a:rPr>
+              <a:t>How to frame the project:</a:t>
+            </a:r>
+          </a:p>
+          <a:p>
+            <a:pPr lvl="1">
+              <a:lnSpc>
+                <a:spcPct val="100000"/>
+              </a:lnSpc>
+              <a:spcBef>
+                <a:spcPts val="400"/>
+              </a:spcBef>
+              <a:buClr>
+                <a:srgbClr val="0064C8"/>
+              </a:buClr>
+              <a:buFont typeface="Wingdings" panose="05000000000000000000" pitchFamily="2" charset="2"/>
+              <a:buChar char="§"/>
+            </a:pPr>
+            <a:r>
+              <a:rPr lang="en-US" sz="1600" spc="-1" dirty="0">
+                <a:solidFill>
+                  <a:srgbClr val="000000"/>
+                </a:solidFill>
+                <a:latin typeface="Century Gothic"/>
+              </a:rPr>
+              <a:t>A proof-of-concept study?</a:t>
+            </a:r>
+          </a:p>
+          <a:p>
+            <a:pPr lvl="1">
+              <a:lnSpc>
+                <a:spcPct val="100000"/>
+              </a:lnSpc>
+              <a:spcBef>
+                <a:spcPts val="400"/>
+              </a:spcBef>
+              <a:buClr>
+                <a:srgbClr val="0064C8"/>
+              </a:buClr>
+              <a:buFont typeface="Wingdings" panose="05000000000000000000" pitchFamily="2" charset="2"/>
+              <a:buChar char="§"/>
+            </a:pPr>
+            <a:r>
+              <a:rPr lang="en-US" sz="1600" spc="-1" dirty="0">
+                <a:solidFill>
+                  <a:srgbClr val="000000"/>
+                </a:solidFill>
+                <a:latin typeface="Century Gothic"/>
+              </a:rPr>
+              <a:t>An explainability platform for XAI applied to molecular design?</a:t>
+            </a:r>
+          </a:p>
+          <a:p>
+            <a:pPr lvl="1">
+              <a:lnSpc>
+                <a:spcPct val="100000"/>
+              </a:lnSpc>
+              <a:spcBef>
+                <a:spcPts val="400"/>
+              </a:spcBef>
+              <a:buClr>
+                <a:srgbClr val="0064C8"/>
+              </a:buClr>
+              <a:buFont typeface="Wingdings" panose="05000000000000000000" pitchFamily="2" charset="2"/>
+              <a:buChar char="§"/>
+            </a:pPr>
+            <a:r>
+              <a:rPr lang="en-US" sz="1600" spc="-1" dirty="0">
+                <a:solidFill>
+                  <a:srgbClr val="000000"/>
+                </a:solidFill>
+                <a:latin typeface="Century Gothic"/>
+              </a:rPr>
+              <a:t>An explainability platform for XAI specific to molecular selectivity?</a:t>
+            </a:r>
+          </a:p>
+          <a:p>
+            <a:pPr lvl="1">
+              <a:lnSpc>
+                <a:spcPct val="100000"/>
+              </a:lnSpc>
+              <a:spcBef>
+                <a:spcPts val="400"/>
+              </a:spcBef>
+              <a:buClr>
+                <a:srgbClr val="0064C8"/>
+              </a:buClr>
+              <a:buFont typeface="Wingdings" panose="05000000000000000000" pitchFamily="2" charset="2"/>
+              <a:buChar char="§"/>
+            </a:pPr>
+            <a:r>
+              <a:rPr lang="en-US" sz="1600" spc="-1" dirty="0">
+                <a:solidFill>
+                  <a:srgbClr val="000000"/>
+                </a:solidFill>
+                <a:latin typeface="Century Gothic"/>
+              </a:rPr>
+              <a:t>A modular </a:t>
+            </a:r>
+            <a:r>
+              <a:rPr lang="en-US" sz="1600" spc="-1" dirty="0" err="1">
+                <a:solidFill>
+                  <a:srgbClr val="000000"/>
+                </a:solidFill>
+                <a:latin typeface="Century Gothic"/>
+              </a:rPr>
+              <a:t>explainability</a:t>
+            </a:r>
+            <a:r>
+              <a:rPr lang="en-US" sz="1600" spc="-1" dirty="0">
+                <a:solidFill>
+                  <a:srgbClr val="000000"/>
+                </a:solidFill>
+                <a:latin typeface="Century Gothic"/>
+              </a:rPr>
+              <a:t>-enhanced platform for </a:t>
+            </a:r>
+            <a:r>
+              <a:rPr lang="en-US" sz="1600" spc="-1" dirty="0" err="1">
+                <a:solidFill>
+                  <a:srgbClr val="000000"/>
+                </a:solidFill>
+                <a:latin typeface="Century Gothic"/>
+              </a:rPr>
+              <a:t>chemoinformatics</a:t>
+            </a:r>
+            <a:r>
+              <a:rPr lang="en-US" sz="1600" spc="-1" dirty="0">
+                <a:solidFill>
+                  <a:srgbClr val="000000"/>
+                </a:solidFill>
+                <a:latin typeface="Century Gothic"/>
+              </a:rPr>
+              <a:t>? </a:t>
+            </a:r>
+          </a:p>
+          <a:p>
+            <a:pPr lvl="1">
+              <a:lnSpc>
+                <a:spcPct val="100000"/>
+              </a:lnSpc>
+              <a:spcBef>
+                <a:spcPts val="400"/>
+              </a:spcBef>
+              <a:buClr>
+                <a:srgbClr val="0064C8"/>
+              </a:buClr>
+              <a:buFont typeface="Wingdings" panose="05000000000000000000" pitchFamily="2" charset="2"/>
+              <a:buChar char="§"/>
+            </a:pPr>
+            <a:endParaRPr lang="en-US" sz="1600" spc="-1" dirty="0">
+              <a:solidFill>
+                <a:srgbClr val="000000"/>
+              </a:solidFill>
+              <a:latin typeface="Century Gothic"/>
+            </a:endParaRPr>
+          </a:p>
+          <a:p>
+            <a:pPr lvl="1">
+              <a:lnSpc>
+                <a:spcPct val="100000"/>
+              </a:lnSpc>
+              <a:spcBef>
+                <a:spcPts val="400"/>
+              </a:spcBef>
+              <a:buClr>
+                <a:srgbClr val="0064C8"/>
+              </a:buClr>
+              <a:buFont typeface="Wingdings" panose="05000000000000000000" pitchFamily="2" charset="2"/>
+              <a:buChar char="§"/>
+            </a:pPr>
+            <a:endParaRPr lang="en-US" sz="1600" spc="-1" dirty="0">
+              <a:solidFill>
+                <a:srgbClr val="000000"/>
+              </a:solidFill>
+              <a:latin typeface="Century Gothic"/>
+            </a:endParaRPr>
+          </a:p>
+          <a:p>
+            <a:pPr>
+              <a:lnSpc>
+                <a:spcPct val="100000"/>
+              </a:lnSpc>
+              <a:spcBef>
+                <a:spcPts val="400"/>
+              </a:spcBef>
+              <a:buClr>
+                <a:srgbClr val="0064C8"/>
+              </a:buClr>
+              <a:buFont typeface="Wingdings" panose="05000000000000000000" pitchFamily="2" charset="2"/>
+              <a:buChar char="§"/>
+            </a:pPr>
+            <a:endParaRPr lang="en-US" sz="2000" spc="-1" dirty="0">
+              <a:solidFill>
+                <a:srgbClr val="000000"/>
+              </a:solidFill>
+              <a:latin typeface="Century Gothic"/>
+            </a:endParaRPr>
+          </a:p>
+          <a:p>
+            <a:pPr>
+              <a:lnSpc>
+                <a:spcPct val="100000"/>
+              </a:lnSpc>
+              <a:spcBef>
+                <a:spcPts val="400"/>
+              </a:spcBef>
+              <a:buClr>
+                <a:srgbClr val="0064C8"/>
+              </a:buClr>
+              <a:buFont typeface="Wingdings" panose="05000000000000000000" pitchFamily="2" charset="2"/>
+              <a:buChar char="§"/>
+            </a:pPr>
+            <a:endParaRPr lang="en-US" sz="1800" spc="-1" dirty="0">
+              <a:solidFill>
+                <a:srgbClr val="000000"/>
+              </a:solidFill>
+              <a:latin typeface="Century Gothic"/>
+            </a:endParaRPr>
+          </a:p>
+          <a:p>
+            <a:pPr marL="343080" indent="-343080">
+              <a:lnSpc>
+                <a:spcPct val="100000"/>
+              </a:lnSpc>
+              <a:spcBef>
+                <a:spcPts val="400"/>
+              </a:spcBef>
+              <a:spcAft>
+                <a:spcPts val="601"/>
+              </a:spcAft>
+              <a:buClr>
+                <a:srgbClr val="0064C8"/>
+              </a:buClr>
+              <a:buFont typeface="Wingdings 2" charset="2"/>
+              <a:buChar char=""/>
+            </a:pPr>
+            <a:endParaRPr lang="en-US" sz="2000" b="1" spc="-1" dirty="0">
+              <a:solidFill>
+                <a:srgbClr val="000000"/>
+              </a:solidFill>
+              <a:latin typeface="Century Gothic"/>
+            </a:endParaRPr>
+          </a:p>
+        </p:txBody>
+      </p:sp>
+    </p:spTree>
+    <p:extLst>
+      <p:ext uri="{BB962C8B-B14F-4D97-AF65-F5344CB8AC3E}">
         <p14:creationId xmlns:p14="http://schemas.microsoft.com/office/powerpoint/2010/main" val="1594879052"/>
+      </p:ext>
+    </p:extLst>
+  </p:cSld>
+  <p:clrMapOvr>
+    <a:masterClrMapping/>
+  </p:clrMapOvr>
+</p:sld>
+</file>
+
+<file path=ppt/slides/slide13.xml><?xml version="1.0" encoding="utf-8"?>
+<p:sld xmlns:a="http://schemas.openxmlformats.org/drawingml/2006/main" xmlns:r="http://schemas.openxmlformats.org/officeDocument/2006/relationships" xmlns:p="http://schemas.openxmlformats.org/presentationml/2006/main" show="0">
+  <p:cSld>
+    <p:spTree>
+      <p:nvGrpSpPr>
+        <p:cNvPr id="1" name="">
+          <a:extLst>
+            <a:ext uri="{FF2B5EF4-FFF2-40B4-BE49-F238E27FC236}">
+              <a16:creationId xmlns:a16="http://schemas.microsoft.com/office/drawing/2014/main" id="{A6515F23-0912-A838-23CE-B8F00573A2DA}"/>
+            </a:ext>
+          </a:extLst>
+        </p:cNvPr>
+        <p:cNvGrpSpPr/>
+        <p:nvPr/>
+      </p:nvGrpSpPr>
+      <p:grpSpPr>
+        <a:xfrm>
+          <a:off x="0" y="0"/>
+          <a:ext cx="0" cy="0"/>
+          <a:chOff x="0" y="0"/>
+          <a:chExt cx="0" cy="0"/>
+        </a:xfrm>
+      </p:grpSpPr>
+      <p:sp>
+        <p:nvSpPr>
+          <p:cNvPr id="163" name="PlaceHolder 1">
+            <a:extLst>
+              <a:ext uri="{FF2B5EF4-FFF2-40B4-BE49-F238E27FC236}">
+                <a16:creationId xmlns:a16="http://schemas.microsoft.com/office/drawing/2014/main" id="{57944F4B-F502-E7CC-8790-8737702BC6AC}"/>
+              </a:ext>
+            </a:extLst>
+          </p:cNvPr>
+          <p:cNvSpPr>
+            <a:spLocks noGrp="1"/>
+          </p:cNvSpPr>
+          <p:nvPr>
+            <p:ph type="title"/>
+          </p:nvPr>
+        </p:nvSpPr>
+        <p:spPr>
+          <a:xfrm>
+            <a:off x="380880" y="228600"/>
+            <a:ext cx="8380080" cy="837720"/>
+          </a:xfrm>
+          <a:prstGeom prst="rect">
+            <a:avLst/>
+          </a:prstGeom>
+          <a:noFill/>
+          <a:ln w="0">
+            <a:noFill/>
+          </a:ln>
+        </p:spPr>
+        <p:txBody>
+          <a:bodyPr numCol="1" spcCol="0" anchor="ctr">
+            <a:noAutofit/>
+          </a:bodyPr>
+          <a:lstStyle/>
+          <a:p>
+            <a:pPr>
+              <a:lnSpc>
+                <a:spcPct val="100000"/>
+              </a:lnSpc>
+              <a:buNone/>
+            </a:pPr>
+            <a:r>
+              <a:rPr lang="en-US" sz="3200" b="0" strike="noStrike" spc="-1" dirty="0">
+                <a:solidFill>
+                  <a:srgbClr val="0064C8"/>
+                </a:solidFill>
+                <a:latin typeface="Century Gothic"/>
+              </a:rPr>
+              <a:t>Exemplary answer output</a:t>
+            </a:r>
+            <a:endParaRPr lang="en-US" sz="3200" b="0" strike="noStrike" spc="-1" dirty="0">
+              <a:solidFill>
+                <a:srgbClr val="000000"/>
+              </a:solidFill>
+              <a:latin typeface="Century Gothic"/>
+            </a:endParaRPr>
+          </a:p>
+        </p:txBody>
+      </p:sp>
+      <p:sp>
+        <p:nvSpPr>
+          <p:cNvPr id="165" name="PlaceHolder 3">
+            <a:extLst>
+              <a:ext uri="{FF2B5EF4-FFF2-40B4-BE49-F238E27FC236}">
+                <a16:creationId xmlns:a16="http://schemas.microsoft.com/office/drawing/2014/main" id="{2EFBEA53-7B78-D9A1-93EF-9608A3193D27}"/>
+              </a:ext>
+            </a:extLst>
+          </p:cNvPr>
+          <p:cNvSpPr>
+            <a:spLocks noGrp="1"/>
+          </p:cNvSpPr>
+          <p:nvPr>
+            <p:ph type="sldNum"/>
+          </p:nvPr>
+        </p:nvSpPr>
+        <p:spPr>
+          <a:xfrm>
+            <a:off x="8376840" y="5692680"/>
+            <a:ext cx="384120" cy="364680"/>
+          </a:xfrm>
+          <a:prstGeom prst="rect">
+            <a:avLst/>
+          </a:prstGeom>
+          <a:noFill/>
+          <a:ln w="0">
+            <a:noFill/>
+          </a:ln>
+        </p:spPr>
+        <p:txBody>
+          <a:bodyPr anchor="ctr">
+            <a:noAutofit/>
+          </a:bodyPr>
+          <a:lstStyle/>
+          <a:p>
+            <a:pPr algn="r">
+              <a:lnSpc>
+                <a:spcPct val="100000"/>
+              </a:lnSpc>
+              <a:buNone/>
+            </a:pPr>
+            <a:fld id="{8BD7C522-1E12-40C3-B25E-5F0462E20B22}" type="slidenum">
+              <a:rPr lang="en-US" sz="1200" b="0" strike="noStrike" spc="-1">
+                <a:solidFill>
+                  <a:srgbClr val="8B8B8B"/>
+                </a:solidFill>
+                <a:latin typeface="Century Gothic"/>
+              </a:rPr>
+              <a:t>13</a:t>
+            </a:fld>
+            <a:endParaRPr lang="en-GB" sz="1200" b="0" strike="noStrike" spc="-1" dirty="0">
+              <a:latin typeface="Times New Roman"/>
+            </a:endParaRPr>
+          </a:p>
+        </p:txBody>
+      </p:sp>
+      <p:sp>
+        <p:nvSpPr>
+          <p:cNvPr id="2" name="PlaceHolder 2">
+            <a:extLst>
+              <a:ext uri="{FF2B5EF4-FFF2-40B4-BE49-F238E27FC236}">
+                <a16:creationId xmlns:a16="http://schemas.microsoft.com/office/drawing/2014/main" id="{870990D0-7AC5-46BA-6FC4-274F8E0A3ABE}"/>
+              </a:ext>
+            </a:extLst>
+          </p:cNvPr>
+          <p:cNvSpPr txBox="1">
+            <a:spLocks/>
+          </p:cNvSpPr>
+          <p:nvPr/>
+        </p:nvSpPr>
+        <p:spPr>
+          <a:xfrm>
+            <a:off x="380880" y="1371598"/>
+            <a:ext cx="3306353" cy="4559301"/>
+          </a:xfrm>
+          <a:prstGeom prst="rect">
+            <a:avLst/>
+          </a:prstGeom>
+          <a:noFill/>
+          <a:ln w="0">
+            <a:noFill/>
+          </a:ln>
+        </p:spPr>
+        <p:txBody>
+          <a:bodyPr numCol="1" spcCol="0" anchor="t">
+            <a:noAutofit/>
+          </a:bodyPr>
+          <a:lstStyle>
+            <a:lvl1pPr marL="228600" indent="-228600" algn="l" defTabSz="914400" rtl="0" eaLnBrk="1" latinLnBrk="0" hangingPunct="1">
+              <a:lnSpc>
+                <a:spcPct val="90000"/>
+              </a:lnSpc>
+              <a:spcBef>
+                <a:spcPts val="1000"/>
+              </a:spcBef>
+              <a:buFont typeface="Arial" panose="020B0604020202020204" pitchFamily="34" charset="0"/>
+              <a:buChar char="•"/>
+              <a:defRPr sz="2800" kern="1200">
+                <a:solidFill>
+                  <a:schemeClr val="tx1"/>
+                </a:solidFill>
+                <a:latin typeface="+mn-lt"/>
+                <a:ea typeface="+mn-ea"/>
+                <a:cs typeface="+mn-cs"/>
+              </a:defRPr>
+            </a:lvl1pPr>
+            <a:lvl2pPr marL="685800" indent="-228600" algn="l" defTabSz="914400" rtl="0" eaLnBrk="1" latinLnBrk="0" hangingPunct="1">
+              <a:lnSpc>
+                <a:spcPct val="90000"/>
+              </a:lnSpc>
+              <a:spcBef>
+                <a:spcPts val="500"/>
+              </a:spcBef>
+              <a:buFont typeface="Arial" panose="020B0604020202020204" pitchFamily="34" charset="0"/>
+              <a:buChar char="•"/>
+              <a:defRPr sz="2400" kern="1200">
+                <a:solidFill>
+                  <a:schemeClr val="tx1"/>
+                </a:solidFill>
+                <a:latin typeface="+mn-lt"/>
+                <a:ea typeface="+mn-ea"/>
+                <a:cs typeface="+mn-cs"/>
+              </a:defRPr>
+            </a:lvl2pPr>
+            <a:lvl3pPr marL="1143000" indent="-228600" algn="l" defTabSz="914400" rtl="0" eaLnBrk="1" latinLnBrk="0" hangingPunct="1">
+              <a:lnSpc>
+                <a:spcPct val="90000"/>
+              </a:lnSpc>
+              <a:spcBef>
+                <a:spcPts val="500"/>
+              </a:spcBef>
+              <a:buFont typeface="Arial" panose="020B0604020202020204" pitchFamily="34" charset="0"/>
+              <a:buChar char="•"/>
+              <a:defRPr sz="2000" kern="1200">
+                <a:solidFill>
+                  <a:schemeClr val="tx1"/>
+                </a:solidFill>
+                <a:latin typeface="+mn-lt"/>
+                <a:ea typeface="+mn-ea"/>
+                <a:cs typeface="+mn-cs"/>
+              </a:defRPr>
+            </a:lvl3pPr>
+            <a:lvl4pPr marL="1600200" indent="-228600" algn="l" defTabSz="914400" rtl="0" eaLnBrk="1" latinLnBrk="0" hangingPunct="1">
+              <a:lnSpc>
+                <a:spcPct val="90000"/>
+              </a:lnSpc>
+              <a:spcBef>
+                <a:spcPts val="500"/>
+              </a:spcBef>
+              <a:buFont typeface="Arial" panose="020B0604020202020204" pitchFamily="34" charset="0"/>
+              <a:buChar char="•"/>
+              <a:defRPr sz="1800" kern="1200">
+                <a:solidFill>
+                  <a:schemeClr val="tx1"/>
+                </a:solidFill>
+                <a:latin typeface="+mn-lt"/>
+                <a:ea typeface="+mn-ea"/>
+                <a:cs typeface="+mn-cs"/>
+              </a:defRPr>
+            </a:lvl4pPr>
+            <a:lvl5pPr marL="2057400" indent="-228600" algn="l" defTabSz="914400" rtl="0" eaLnBrk="1" latinLnBrk="0" hangingPunct="1">
+              <a:lnSpc>
+                <a:spcPct val="90000"/>
+              </a:lnSpc>
+              <a:spcBef>
+                <a:spcPts val="500"/>
+              </a:spcBef>
+              <a:buFont typeface="Arial" panose="020B0604020202020204" pitchFamily="34" charset="0"/>
+              <a:buChar char="•"/>
+              <a:defRPr sz="1800" kern="1200">
+                <a:solidFill>
+                  <a:schemeClr val="tx1"/>
+                </a:solidFill>
+                <a:latin typeface="+mn-lt"/>
+                <a:ea typeface="+mn-ea"/>
+                <a:cs typeface="+mn-cs"/>
+              </a:defRPr>
+            </a:lvl5pPr>
+            <a:lvl6pPr marL="2514600" indent="-228600" algn="l" defTabSz="914400" rtl="0" eaLnBrk="1" latinLnBrk="0" hangingPunct="1">
+              <a:lnSpc>
+                <a:spcPct val="90000"/>
+              </a:lnSpc>
+              <a:spcBef>
+                <a:spcPts val="500"/>
+              </a:spcBef>
+              <a:buFont typeface="Arial" panose="020B0604020202020204" pitchFamily="34" charset="0"/>
+              <a:buChar char="•"/>
+              <a:defRPr sz="1800" kern="1200">
+                <a:solidFill>
+                  <a:schemeClr val="tx1"/>
+                </a:solidFill>
+                <a:latin typeface="+mn-lt"/>
+                <a:ea typeface="+mn-ea"/>
+                <a:cs typeface="+mn-cs"/>
+              </a:defRPr>
+            </a:lvl6pPr>
+            <a:lvl7pPr marL="2971800" indent="-228600" algn="l" defTabSz="914400" rtl="0" eaLnBrk="1" latinLnBrk="0" hangingPunct="1">
+              <a:lnSpc>
+                <a:spcPct val="90000"/>
+              </a:lnSpc>
+              <a:spcBef>
+                <a:spcPts val="500"/>
+              </a:spcBef>
+              <a:buFont typeface="Arial" panose="020B0604020202020204" pitchFamily="34" charset="0"/>
+              <a:buChar char="•"/>
+              <a:defRPr sz="1800" kern="1200">
+                <a:solidFill>
+                  <a:schemeClr val="tx1"/>
+                </a:solidFill>
+                <a:latin typeface="+mn-lt"/>
+                <a:ea typeface="+mn-ea"/>
+                <a:cs typeface="+mn-cs"/>
+              </a:defRPr>
+            </a:lvl7pPr>
+            <a:lvl8pPr marL="3429000" indent="-228600" algn="l" defTabSz="914400" rtl="0" eaLnBrk="1" latinLnBrk="0" hangingPunct="1">
+              <a:lnSpc>
+                <a:spcPct val="90000"/>
+              </a:lnSpc>
+              <a:spcBef>
+                <a:spcPts val="500"/>
+              </a:spcBef>
+              <a:buFont typeface="Arial" panose="020B0604020202020204" pitchFamily="34" charset="0"/>
+              <a:buChar char="•"/>
+              <a:defRPr sz="1800" kern="1200">
+                <a:solidFill>
+                  <a:schemeClr val="tx1"/>
+                </a:solidFill>
+                <a:latin typeface="+mn-lt"/>
+                <a:ea typeface="+mn-ea"/>
+                <a:cs typeface="+mn-cs"/>
+              </a:defRPr>
+            </a:lvl8pPr>
+            <a:lvl9pPr marL="3886200" indent="-228600" algn="l" defTabSz="914400" rtl="0" eaLnBrk="1" latinLnBrk="0" hangingPunct="1">
+              <a:lnSpc>
+                <a:spcPct val="90000"/>
+              </a:lnSpc>
+              <a:spcBef>
+                <a:spcPts val="500"/>
+              </a:spcBef>
+              <a:buFont typeface="Arial" panose="020B0604020202020204" pitchFamily="34" charset="0"/>
+              <a:buChar char="•"/>
+              <a:defRPr sz="1800" kern="1200">
+                <a:solidFill>
+                  <a:schemeClr val="tx1"/>
+                </a:solidFill>
+                <a:latin typeface="+mn-lt"/>
+                <a:ea typeface="+mn-ea"/>
+                <a:cs typeface="+mn-cs"/>
+              </a:defRPr>
+            </a:lvl9pPr>
+          </a:lstStyle>
+          <a:p>
+            <a:pPr>
+              <a:lnSpc>
+                <a:spcPct val="100000"/>
+              </a:lnSpc>
+              <a:spcBef>
+                <a:spcPts val="400"/>
+              </a:spcBef>
+              <a:buClr>
+                <a:srgbClr val="0064C8"/>
+              </a:buClr>
+              <a:buFont typeface="Wingdings" panose="05000000000000000000" pitchFamily="2" charset="2"/>
+              <a:buChar char="§"/>
+            </a:pPr>
+            <a:r>
+              <a:rPr lang="en-US" sz="2000" spc="-1" dirty="0">
+                <a:solidFill>
+                  <a:srgbClr val="000000"/>
+                </a:solidFill>
+                <a:latin typeface="Century Gothic"/>
+              </a:rPr>
+              <a:t>Build an ML model for a given dataset</a:t>
+            </a:r>
+          </a:p>
+          <a:p>
+            <a:pPr>
+              <a:lnSpc>
+                <a:spcPct val="100000"/>
+              </a:lnSpc>
+              <a:spcBef>
+                <a:spcPts val="400"/>
+              </a:spcBef>
+              <a:buClr>
+                <a:srgbClr val="0064C8"/>
+              </a:buClr>
+              <a:buFont typeface="Wingdings" panose="05000000000000000000" pitchFamily="2" charset="2"/>
+              <a:buChar char="§"/>
+            </a:pPr>
+            <a:endParaRPr lang="en-US" sz="2000" spc="-1" dirty="0">
+              <a:solidFill>
+                <a:srgbClr val="000000"/>
+              </a:solidFill>
+              <a:latin typeface="Century Gothic"/>
+            </a:endParaRPr>
+          </a:p>
+          <a:p>
+            <a:pPr>
+              <a:lnSpc>
+                <a:spcPct val="100000"/>
+              </a:lnSpc>
+              <a:spcBef>
+                <a:spcPts val="400"/>
+              </a:spcBef>
+              <a:buClr>
+                <a:srgbClr val="0064C8"/>
+              </a:buClr>
+              <a:buFont typeface="Wingdings" panose="05000000000000000000" pitchFamily="2" charset="2"/>
+              <a:buChar char="§"/>
+            </a:pPr>
+            <a:r>
+              <a:rPr lang="en-US" sz="2000" spc="-1" dirty="0">
+                <a:solidFill>
+                  <a:srgbClr val="000000"/>
+                </a:solidFill>
+                <a:latin typeface="Century Gothic"/>
+              </a:rPr>
+              <a:t>Get a complete report</a:t>
+            </a:r>
+          </a:p>
+          <a:p>
+            <a:pPr lvl="1">
+              <a:lnSpc>
+                <a:spcPct val="100000"/>
+              </a:lnSpc>
+              <a:spcBef>
+                <a:spcPts val="400"/>
+              </a:spcBef>
+              <a:buClr>
+                <a:srgbClr val="0064C8"/>
+              </a:buClr>
+              <a:buFont typeface="Symbol" panose="05050102010706020507" pitchFamily="18" charset="2"/>
+              <a:buChar char="-"/>
+            </a:pPr>
+            <a:r>
+              <a:rPr lang="en-US" sz="1800" spc="-1" dirty="0">
+                <a:solidFill>
+                  <a:srgbClr val="000000"/>
+                </a:solidFill>
+                <a:latin typeface="Century Gothic"/>
+              </a:rPr>
+              <a:t>Dataset summary</a:t>
+            </a:r>
+          </a:p>
+          <a:p>
+            <a:pPr lvl="1">
+              <a:lnSpc>
+                <a:spcPct val="100000"/>
+              </a:lnSpc>
+              <a:spcBef>
+                <a:spcPts val="400"/>
+              </a:spcBef>
+              <a:buClr>
+                <a:srgbClr val="0064C8"/>
+              </a:buClr>
+              <a:buFont typeface="Symbol" panose="05050102010706020507" pitchFamily="18" charset="2"/>
+              <a:buChar char="-"/>
+            </a:pPr>
+            <a:r>
+              <a:rPr lang="en-US" sz="1800" spc="-1" dirty="0">
+                <a:solidFill>
+                  <a:srgbClr val="000000"/>
+                </a:solidFill>
+                <a:latin typeface="Century Gothic"/>
+              </a:rPr>
+              <a:t>Data split statistics</a:t>
+            </a:r>
+          </a:p>
+          <a:p>
+            <a:pPr lvl="1">
+              <a:lnSpc>
+                <a:spcPct val="100000"/>
+              </a:lnSpc>
+              <a:spcBef>
+                <a:spcPts val="400"/>
+              </a:spcBef>
+              <a:buClr>
+                <a:srgbClr val="0064C8"/>
+              </a:buClr>
+              <a:buFont typeface="Symbol" panose="05050102010706020507" pitchFamily="18" charset="2"/>
+              <a:buChar char="-"/>
+            </a:pPr>
+            <a:r>
+              <a:rPr lang="en-US" sz="1800" spc="-1" dirty="0">
+                <a:solidFill>
+                  <a:srgbClr val="000000"/>
+                </a:solidFill>
+                <a:latin typeface="Century Gothic"/>
+              </a:rPr>
+              <a:t>Model training information</a:t>
+            </a:r>
+          </a:p>
+          <a:p>
+            <a:pPr lvl="1">
+              <a:lnSpc>
+                <a:spcPct val="100000"/>
+              </a:lnSpc>
+              <a:spcBef>
+                <a:spcPts val="400"/>
+              </a:spcBef>
+              <a:buClr>
+                <a:srgbClr val="0064C8"/>
+              </a:buClr>
+              <a:buFont typeface="Symbol" panose="05050102010706020507" pitchFamily="18" charset="2"/>
+              <a:buChar char="-"/>
+            </a:pPr>
+            <a:r>
+              <a:rPr lang="en-US" sz="1800" spc="-1" dirty="0">
+                <a:solidFill>
+                  <a:srgbClr val="000000"/>
+                </a:solidFill>
+                <a:latin typeface="Century Gothic"/>
+              </a:rPr>
+              <a:t>Test set performance </a:t>
+            </a:r>
+          </a:p>
+          <a:p>
+            <a:pPr marL="343080" indent="-343080">
+              <a:lnSpc>
+                <a:spcPct val="100000"/>
+              </a:lnSpc>
+              <a:spcBef>
+                <a:spcPts val="400"/>
+              </a:spcBef>
+              <a:spcAft>
+                <a:spcPts val="601"/>
+              </a:spcAft>
+              <a:buClr>
+                <a:srgbClr val="0064C8"/>
+              </a:buClr>
+              <a:buFont typeface="Wingdings 2" charset="2"/>
+              <a:buChar char=""/>
+            </a:pPr>
+            <a:endParaRPr lang="en-US" sz="2000" b="1" spc="-1" dirty="0">
+              <a:solidFill>
+                <a:srgbClr val="000000"/>
+              </a:solidFill>
+              <a:latin typeface="Century Gothic"/>
+            </a:endParaRPr>
+          </a:p>
+        </p:txBody>
+      </p:sp>
+      <p:pic>
+        <p:nvPicPr>
+          <p:cNvPr id="6" name="Picture 5">
+            <a:extLst>
+              <a:ext uri="{FF2B5EF4-FFF2-40B4-BE49-F238E27FC236}">
+                <a16:creationId xmlns:a16="http://schemas.microsoft.com/office/drawing/2014/main" id="{D3BA145D-265C-C0B1-7C0E-2EE32552E491}"/>
+              </a:ext>
+            </a:extLst>
+          </p:cNvPr>
+          <p:cNvPicPr>
+            <a:picLocks noChangeAspect="1"/>
+          </p:cNvPicPr>
+          <p:nvPr/>
+        </p:nvPicPr>
+        <p:blipFill>
+          <a:blip r:embed="rId2"/>
+          <a:stretch>
+            <a:fillRect/>
+          </a:stretch>
+        </p:blipFill>
+        <p:spPr>
+          <a:xfrm>
+            <a:off x="3817354" y="1196437"/>
+            <a:ext cx="4943606" cy="4598149"/>
+          </a:xfrm>
+          <a:prstGeom prst="rect">
+            <a:avLst/>
+          </a:prstGeom>
+        </p:spPr>
+      </p:pic>
+    </p:spTree>
+    <p:extLst>
+      <p:ext uri="{BB962C8B-B14F-4D97-AF65-F5344CB8AC3E}">
+        <p14:creationId xmlns:p14="http://schemas.microsoft.com/office/powerpoint/2010/main" val="2375808848"/>
       </p:ext>
     </p:extLst>
   </p:cSld>
@@ -11391,7 +12969,7 @@
                 </a:solidFill>
                 <a:latin typeface="Century Gothic"/>
               </a:rPr>
-              <a:t> 3.5</a:t>
+              <a:t> 3.6</a:t>
             </a:r>
             <a:r>
               <a:rPr lang="en-US" sz="1600" spc="-1" dirty="0">
@@ -11751,7 +13329,7 @@
         <p:cNvPr id="1" name="">
           <a:extLst>
             <a:ext uri="{FF2B5EF4-FFF2-40B4-BE49-F238E27FC236}">
-              <a16:creationId xmlns:a16="http://schemas.microsoft.com/office/drawing/2014/main" id="{A6515F23-0912-A838-23CE-B8F00573A2DA}"/>
+              <a16:creationId xmlns:a16="http://schemas.microsoft.com/office/drawing/2014/main" id="{C3CB66AB-4C34-335D-C637-6159F7C9EC35}"/>
             </a:ext>
           </a:extLst>
         </p:cNvPr>
@@ -11771,7 +13349,7 @@
           <p:cNvPr id="163" name="PlaceHolder 1">
             <a:extLst>
               <a:ext uri="{FF2B5EF4-FFF2-40B4-BE49-F238E27FC236}">
-                <a16:creationId xmlns:a16="http://schemas.microsoft.com/office/drawing/2014/main" id="{57944F4B-F502-E7CC-8790-8737702BC6AC}"/>
+                <a16:creationId xmlns:a16="http://schemas.microsoft.com/office/drawing/2014/main" id="{F82143BD-207C-0F21-595D-2BC5AB956A76}"/>
               </a:ext>
             </a:extLst>
           </p:cNvPr>
@@ -11808,13 +13386,40 @@
               <a:buNone/>
             </a:pPr>
             <a:r>
-              <a:rPr lang="en-US" sz="3200" b="0" strike="noStrike" spc="-1" dirty="0">
+              <a:rPr lang="pt-PT" sz="3200" b="0" strike="noStrike" spc="-1" dirty="0" err="1">
                 <a:solidFill>
                   <a:srgbClr val="0064C8"/>
                 </a:solidFill>
                 <a:latin typeface="Century Gothic"/>
               </a:rPr>
-              <a:t>Exemplary answer output</a:t>
+              <a:t>Practical</a:t>
+            </a:r>
+            <a:r>
+              <a:rPr lang="pt-PT" sz="3200" b="0" strike="noStrike" spc="-1" dirty="0">
+                <a:solidFill>
+                  <a:srgbClr val="0064C8"/>
+                </a:solidFill>
+                <a:latin typeface="Century Gothic"/>
+              </a:rPr>
+              <a:t> </a:t>
+            </a:r>
+            <a:r>
+              <a:rPr lang="pt-PT" sz="3200" b="0" strike="noStrike" spc="-1" dirty="0" err="1">
+                <a:solidFill>
+                  <a:srgbClr val="0064C8"/>
+                </a:solidFill>
+                <a:latin typeface="Century Gothic"/>
+              </a:rPr>
+              <a:t>Example</a:t>
+            </a:r>
+            <a:r>
+              <a:rPr lang="pt-PT" sz="3200" b="0" strike="noStrike" spc="-1" dirty="0">
+                <a:solidFill>
+                  <a:srgbClr val="0064C8"/>
+                </a:solidFill>
+                <a:latin typeface="Century Gothic"/>
+              </a:rPr>
+              <a:t> - ML</a:t>
             </a:r>
             <a:endParaRPr lang="en-US" sz="3200" b="0" strike="noStrike" spc="-1" dirty="0">
               <a:solidFill>
@@ -11830,7 +13435,7 @@
           <p:cNvPr id="165" name="PlaceHolder 3">
             <a:extLst>
               <a:ext uri="{FF2B5EF4-FFF2-40B4-BE49-F238E27FC236}">
-                <a16:creationId xmlns:a16="http://schemas.microsoft.com/office/drawing/2014/main" id="{2EFBEA53-7B78-D9A1-93EF-9608A3193D27}"/>
+                <a16:creationId xmlns:a16="http://schemas.microsoft.com/office/drawing/2014/main" id="{44B88D20-671C-6A36-AD5A-B00142FEB557}"/>
               </a:ext>
             </a:extLst>
           </p:cNvPr>
@@ -11883,10 +13488,10 @@
       </p:sp>
       <p:sp>
         <p:nvSpPr>
-          <p:cNvPr id="2" name="PlaceHolder 2">
+          <p:cNvPr id="7" name="PlaceHolder 2">
             <a:extLst>
               <a:ext uri="{FF2B5EF4-FFF2-40B4-BE49-F238E27FC236}">
-                <a16:creationId xmlns:a16="http://schemas.microsoft.com/office/drawing/2014/main" id="{870990D0-7AC5-46BA-6FC4-274F8E0A3ABE}"/>
+                <a16:creationId xmlns:a16="http://schemas.microsoft.com/office/drawing/2014/main" id="{CFDAB819-6BAF-B7C7-0B20-F55019CACA6B}"/>
               </a:ext>
             </a:extLst>
           </p:cNvPr>
@@ -11898,7 +13503,7 @@
         <p:spPr>
           <a:xfrm>
             <a:off x="380880" y="1371598"/>
-            <a:ext cx="3306353" cy="4559301"/>
+            <a:ext cx="4190040" cy="4559301"/>
           </a:xfrm>
           <a:prstGeom prst="rect">
             <a:avLst/>
@@ -12077,6 +13682,46 @@
             </a:lvl9pPr>
           </a:lstStyle>
           <a:p>
+            <a:pPr marL="0" indent="0">
+              <a:lnSpc>
+                <a:spcPct val="100000"/>
+              </a:lnSpc>
+              <a:spcBef>
+                <a:spcPts val="400"/>
+              </a:spcBef>
+              <a:buClr>
+                <a:srgbClr val="0064C8"/>
+              </a:buClr>
+              <a:buNone/>
+            </a:pPr>
+            <a:r>
+              <a:rPr lang="en-US" sz="2000" b="1" strike="noStrike" spc="-1" dirty="0">
+                <a:latin typeface="Century Gothic"/>
+              </a:rPr>
+              <a:t>ML prompt</a:t>
+            </a:r>
+          </a:p>
+          <a:p>
+            <a:pPr marL="0" indent="0">
+              <a:lnSpc>
+                <a:spcPct val="100000"/>
+              </a:lnSpc>
+              <a:spcBef>
+                <a:spcPts val="400"/>
+              </a:spcBef>
+              <a:buClr>
+                <a:srgbClr val="0064C8"/>
+              </a:buClr>
+              <a:buNone/>
+            </a:pPr>
+            <a:endParaRPr lang="en-US" sz="2000" spc="-1" dirty="0">
+              <a:solidFill>
+                <a:srgbClr val="000000"/>
+              </a:solidFill>
+              <a:latin typeface="Century Gothic"/>
+            </a:endParaRPr>
+          </a:p>
+          <a:p>
             <a:pPr>
               <a:lnSpc>
                 <a:spcPct val="100000"/>
@@ -12091,13 +13736,13 @@
               <a:buChar char="§"/>
             </a:pPr>
             <a:r>
-              <a:rPr lang="en-US" sz="2000" spc="-1" dirty="0">
+              <a:rPr lang="en-US" sz="1400" spc="-1" dirty="0">
                 <a:solidFill>
                   <a:srgbClr val="000000"/>
                 </a:solidFill>
                 <a:latin typeface="Century Gothic"/>
               </a:rPr>
-              <a:t>Build an ML model for a given dataset</a:t>
+              <a:t>For the given curated dataset ‘kinase_selectivity.csv’</a:t>
             </a:r>
           </a:p>
           <a:p>
@@ -12114,7 +13759,7 @@
               <a:buFont typeface="Wingdings" panose="05000000000000000000" pitchFamily="2" charset="2"/>
               <a:buChar char="§"/>
             </a:pPr>
-            <a:endParaRPr lang="en-US" sz="2000" spc="-1" dirty="0">
+            <a:endParaRPr lang="en-US" sz="1400" spc="-1" dirty="0">
               <a:solidFill>
                 <a:srgbClr val="000000"/>
               </a:solidFill>
@@ -12136,17 +13781,17 @@
               <a:buChar char="§"/>
             </a:pPr>
             <a:r>
-              <a:rPr lang="en-US" sz="2000" spc="-1" dirty="0">
+              <a:rPr lang="en-US" sz="1400" spc="-1" dirty="0">
                 <a:solidFill>
                   <a:srgbClr val="000000"/>
                 </a:solidFill>
                 <a:latin typeface="Century Gothic"/>
               </a:rPr>
-              <a:t>Get a complete report</a:t>
+              <a:t>Split the data using a scaffold split using a ratio of  80%/20% train/test</a:t>
             </a:r>
           </a:p>
           <a:p>
-            <a:pPr lvl="1">
+            <a:pPr>
               <a:lnSpc>
                 <a:spcPct val="100000"/>
               </a:lnSpc>
@@ -12156,21 +13801,18 @@
               <a:buClr>
                 <a:srgbClr val="0064C8"/>
               </a:buClr>
-              <a:buFont typeface="Symbol" panose="05050102010706020507" pitchFamily="18" charset="2"/>
-              <a:buChar char="-"/>
+              <a:buFont typeface="Wingdings" panose="05000000000000000000" pitchFamily="2" charset="2"/>
+              <a:buChar char="§"/>
             </a:pPr>
-            <a:r>
-              <a:rPr lang="en-US" sz="1800" spc="-1" dirty="0">
-                <a:solidFill>
-                  <a:srgbClr val="000000"/>
-                </a:solidFill>
-                <a:latin typeface="Century Gothic"/>
-              </a:rPr>
-              <a:t>Dataset summary</a:t>
-            </a:r>
-          </a:p>
-          <a:p>
-            <a:pPr lvl="1">
+            <a:endParaRPr lang="en-US" sz="1400" spc="-1" dirty="0">
+              <a:solidFill>
+                <a:srgbClr val="000000"/>
+              </a:solidFill>
+              <a:latin typeface="Century Gothic"/>
+            </a:endParaRPr>
+          </a:p>
+          <a:p>
+            <a:pPr>
               <a:lnSpc>
                 <a:spcPct val="100000"/>
               </a:lnSpc>
@@ -12180,21 +13822,21 @@
               <a:buClr>
                 <a:srgbClr val="0064C8"/>
               </a:buClr>
-              <a:buFont typeface="Symbol" panose="05050102010706020507" pitchFamily="18" charset="2"/>
-              <a:buChar char="-"/>
+              <a:buFont typeface="Wingdings" panose="05000000000000000000" pitchFamily="2" charset="2"/>
+              <a:buChar char="§"/>
             </a:pPr>
             <a:r>
-              <a:rPr lang="en-US" sz="1800" spc="-1" dirty="0">
+              <a:rPr lang="en-US" sz="1400" spc="-1" dirty="0">
                 <a:solidFill>
                   <a:srgbClr val="000000"/>
                 </a:solidFill>
                 <a:latin typeface="Century Gothic"/>
               </a:rPr>
-              <a:t>Data split statistics</a:t>
+              <a:t>Train an RF model and perform a 5-fold CV for hyperparameter optimization</a:t>
             </a:r>
           </a:p>
           <a:p>
-            <a:pPr lvl="1">
+            <a:pPr>
               <a:lnSpc>
                 <a:spcPct val="100000"/>
               </a:lnSpc>
@@ -12204,21 +13846,18 @@
               <a:buClr>
                 <a:srgbClr val="0064C8"/>
               </a:buClr>
-              <a:buFont typeface="Symbol" panose="05050102010706020507" pitchFamily="18" charset="2"/>
-              <a:buChar char="-"/>
+              <a:buFont typeface="Wingdings" panose="05000000000000000000" pitchFamily="2" charset="2"/>
+              <a:buChar char="§"/>
             </a:pPr>
-            <a:r>
-              <a:rPr lang="en-US" sz="1800" spc="-1" dirty="0">
-                <a:solidFill>
-                  <a:srgbClr val="000000"/>
-                </a:solidFill>
-                <a:latin typeface="Century Gothic"/>
-              </a:rPr>
-              <a:t>Model training information</a:t>
-            </a:r>
-          </a:p>
-          <a:p>
-            <a:pPr lvl="1">
+            <a:endParaRPr lang="en-US" sz="1400" spc="-1" dirty="0">
+              <a:solidFill>
+                <a:srgbClr val="000000"/>
+              </a:solidFill>
+              <a:latin typeface="Century Gothic"/>
+            </a:endParaRPr>
+          </a:p>
+          <a:p>
+            <a:pPr>
               <a:lnSpc>
                 <a:spcPct val="100000"/>
               </a:lnSpc>
@@ -12228,18 +13867,45 @@
               <a:buClr>
                 <a:srgbClr val="0064C8"/>
               </a:buClr>
-              <a:buFont typeface="Symbol" panose="05050102010706020507" pitchFamily="18" charset="2"/>
-              <a:buChar char="-"/>
+              <a:buFont typeface="Wingdings" panose="05000000000000000000" pitchFamily="2" charset="2"/>
+              <a:buChar char="§"/>
             </a:pPr>
             <a:r>
-              <a:rPr lang="en-US" sz="1800" spc="-1" dirty="0">
+              <a:rPr lang="en-US" sz="1400" spc="-1" dirty="0">
                 <a:solidFill>
                   <a:srgbClr val="000000"/>
                 </a:solidFill>
                 <a:latin typeface="Century Gothic"/>
               </a:rPr>
-              <a:t>Test set performance </a:t>
+              <a:t>Calculate and display the test set performance using appropriate metrics</a:t>
             </a:r>
+            <a:endParaRPr lang="en-US" sz="1600" spc="-1" dirty="0">
+              <a:solidFill>
+                <a:srgbClr val="000000"/>
+              </a:solidFill>
+              <a:latin typeface="Century Gothic"/>
+            </a:endParaRPr>
+          </a:p>
+          <a:p>
+            <a:pPr>
+              <a:lnSpc>
+                <a:spcPct val="100000"/>
+              </a:lnSpc>
+              <a:spcBef>
+                <a:spcPts val="400"/>
+              </a:spcBef>
+              <a:buClr>
+                <a:srgbClr val="0064C8"/>
+              </a:buClr>
+              <a:buFont typeface="Wingdings" panose="05000000000000000000" pitchFamily="2" charset="2"/>
+              <a:buChar char="§"/>
+            </a:pPr>
+            <a:endParaRPr lang="en-US" sz="1800" spc="-1" dirty="0">
+              <a:solidFill>
+                <a:srgbClr val="000000"/>
+              </a:solidFill>
+              <a:latin typeface="Century Gothic"/>
+            </a:endParaRPr>
           </a:p>
           <a:p>
             <a:pPr marL="343080" indent="-343080">
@@ -12269,10 +13935,10 @@
       </p:sp>
       <p:pic>
         <p:nvPicPr>
-          <p:cNvPr id="6" name="Picture 5">
+          <p:cNvPr id="3" name="Picture 2">
             <a:extLst>
               <a:ext uri="{FF2B5EF4-FFF2-40B4-BE49-F238E27FC236}">
-                <a16:creationId xmlns:a16="http://schemas.microsoft.com/office/drawing/2014/main" id="{D3BA145D-265C-C0B1-7C0E-2EE32552E491}"/>
+                <a16:creationId xmlns:a16="http://schemas.microsoft.com/office/drawing/2014/main" id="{26877CA3-72FB-5BAD-B036-17D15BFC3DA0}"/>
               </a:ext>
             </a:extLst>
           </p:cNvPr>
@@ -12282,15 +13948,15 @@
           <p:nvPr/>
         </p:nvPicPr>
         <p:blipFill>
-          <a:blip r:embed="rId2"/>
+          <a:blip r:embed="rId3"/>
           <a:stretch>
             <a:fillRect/>
           </a:stretch>
         </p:blipFill>
         <p:spPr>
           <a:xfrm>
-            <a:off x="3817354" y="1196437"/>
-            <a:ext cx="4943606" cy="4598149"/>
+            <a:off x="4480608" y="1246234"/>
+            <a:ext cx="4140000" cy="4420744"/>
           </a:xfrm>
           <a:prstGeom prst="rect">
             <a:avLst/>
@@ -12300,7 +13966,7 @@
     </p:spTree>
     <p:extLst>
       <p:ext uri="{BB962C8B-B14F-4D97-AF65-F5344CB8AC3E}">
-        <p14:creationId xmlns:p14="http://schemas.microsoft.com/office/powerpoint/2010/main" val="2375808848"/>
+        <p14:creationId xmlns:p14="http://schemas.microsoft.com/office/powerpoint/2010/main" val="921095034"/>
       </p:ext>
     </p:extLst>
   </p:cSld>
@@ -16108,4 +17774,319 @@
   <a:objectDefaults/>
   <a:extraClrSchemeLst/>
 </a:theme>
+</file>
+
+<file path=ppt/theme/theme3.xml><?xml version="1.0" encoding="utf-8"?>
+<a:theme xmlns:a="http://schemas.openxmlformats.org/drawingml/2006/main" name="Office Theme">
+  <a:themeElements>
+    <a:clrScheme name="Office">
+      <a:dk1>
+        <a:sysClr val="windowText" lastClr="000000"/>
+      </a:dk1>
+      <a:lt1>
+        <a:sysClr val="window" lastClr="FFFFFF"/>
+      </a:lt1>
+      <a:dk2>
+        <a:srgbClr val="0E2841"/>
+      </a:dk2>
+      <a:lt2>
+        <a:srgbClr val="E8E8E8"/>
+      </a:lt2>
+      <a:accent1>
+        <a:srgbClr val="156082"/>
+      </a:accent1>
+      <a:accent2>
+        <a:srgbClr val="E97132"/>
+      </a:accent2>
+      <a:accent3>
+        <a:srgbClr val="196B24"/>
+      </a:accent3>
+      <a:accent4>
+        <a:srgbClr val="0F9ED5"/>
+      </a:accent4>
+      <a:accent5>
+        <a:srgbClr val="A02B93"/>
+      </a:accent5>
+      <a:accent6>
+        <a:srgbClr val="4EA72E"/>
+      </a:accent6>
+      <a:hlink>
+        <a:srgbClr val="467886"/>
+      </a:hlink>
+      <a:folHlink>
+        <a:srgbClr val="96607D"/>
+      </a:folHlink>
+    </a:clrScheme>
+    <a:fontScheme name="Office">
+      <a:majorFont>
+        <a:latin typeface="Aptos Display" panose="02110004020202020204"/>
+        <a:ea typeface=""/>
+        <a:cs typeface=""/>
+        <a:font script="Jpan" typeface="游ゴシック Light"/>
+        <a:font script="Hang" typeface="맑은 고딕"/>
+        <a:font script="Hans" typeface="等线 Light"/>
+        <a:font script="Hant" typeface="新細明體"/>
+        <a:font script="Arab" typeface="Times New Roman"/>
+        <a:font script="Hebr" typeface="Times New Roman"/>
+        <a:font script="Thai" typeface="Angsana New"/>
+        <a:font script="Ethi" typeface="Nyala"/>
+        <a:font script="Beng" typeface="Vrinda"/>
+        <a:font script="Gujr" typeface="Shruti"/>
+        <a:font script="Khmr" typeface="MoolBoran"/>
+        <a:font script="Knda" typeface="Tunga"/>
+        <a:font script="Guru" typeface="Raavi"/>
+        <a:font script="Cans" typeface="Euphemia"/>
+        <a:font script="Cher" typeface="Plantagenet Cherokee"/>
+        <a:font script="Yiii" typeface="Microsoft Yi Baiti"/>
+        <a:font script="Tibt" typeface="Microsoft Himalaya"/>
+        <a:font script="Thaa" typeface="MV Boli"/>
+        <a:font script="Deva" typeface="Mangal"/>
+        <a:font script="Telu" typeface="Gautami"/>
+        <a:font script="Taml" typeface="Latha"/>
+        <a:font script="Syrc" typeface="Estrangelo Edessa"/>
+        <a:font script="Orya" typeface="Kalinga"/>
+        <a:font script="Mlym" typeface="Kartika"/>
+        <a:font script="Laoo" typeface="DokChampa"/>
+        <a:font script="Sinh" typeface="Iskoola Pota"/>
+        <a:font script="Mong" typeface="Mongolian Baiti"/>
+        <a:font script="Viet" typeface="Times New Roman"/>
+        <a:font script="Uigh" typeface="Microsoft Uighur"/>
+        <a:font script="Geor" typeface="Sylfaen"/>
+        <a:font script="Armn" typeface="Arial"/>
+        <a:font script="Bugi" typeface="Leelawadee UI"/>
+        <a:font script="Bopo" typeface="Microsoft JhengHei"/>
+        <a:font script="Java" typeface="Javanese Text"/>
+        <a:font script="Lisu" typeface="Segoe UI"/>
+        <a:font script="Mymr" typeface="Myanmar Text"/>
+        <a:font script="Nkoo" typeface="Ebrima"/>
+        <a:font script="Olck" typeface="Nirmala UI"/>
+        <a:font script="Osma" typeface="Ebrima"/>
+        <a:font script="Phag" typeface="Phagspa"/>
+        <a:font script="Syrn" typeface="Estrangelo Edessa"/>
+        <a:font script="Syrj" typeface="Estrangelo Edessa"/>
+        <a:font script="Syre" typeface="Estrangelo Edessa"/>
+        <a:font script="Sora" typeface="Nirmala UI"/>
+        <a:font script="Tale" typeface="Microsoft Tai Le"/>
+        <a:font script="Talu" typeface="Microsoft New Tai Lue"/>
+        <a:font script="Tfng" typeface="Ebrima"/>
+      </a:majorFont>
+      <a:minorFont>
+        <a:latin typeface="Aptos" panose="02110004020202020204"/>
+        <a:ea typeface=""/>
+        <a:cs typeface=""/>
+        <a:font script="Jpan" typeface="游ゴシック"/>
+        <a:font script="Hang" typeface="맑은 고딕"/>
+        <a:font script="Hans" typeface="等线"/>
+        <a:font script="Hant" typeface="新細明體"/>
+        <a:font script="Arab" typeface="Arial"/>
+        <a:font script="Hebr" typeface="Arial"/>
+        <a:font script="Thai" typeface="Cordia New"/>
+        <a:font script="Ethi" typeface="Nyala"/>
+        <a:font script="Beng" typeface="Vrinda"/>
+        <a:font script="Gujr" typeface="Shruti"/>
+        <a:font script="Khmr" typeface="DaunPenh"/>
+        <a:font script="Knda" typeface="Tunga"/>
+        <a:font script="Guru" typeface="Raavi"/>
+        <a:font script="Cans" typeface="Euphemia"/>
+        <a:font script="Cher" typeface="Plantagenet Cherokee"/>
+        <a:font script="Yiii" typeface="Microsoft Yi Baiti"/>
+        <a:font script="Tibt" typeface="Microsoft Himalaya"/>
+        <a:font script="Thaa" typeface="MV Boli"/>
+        <a:font script="Deva" typeface="Mangal"/>
+        <a:font script="Telu" typeface="Gautami"/>
+        <a:font script="Taml" typeface="Latha"/>
+        <a:font script="Syrc" typeface="Estrangelo Edessa"/>
+        <a:font script="Orya" typeface="Kalinga"/>
+        <a:font script="Mlym" typeface="Kartika"/>
+        <a:font script="Laoo" typeface="DokChampa"/>
+        <a:font script="Sinh" typeface="Iskoola Pota"/>
+        <a:font script="Mong" typeface="Mongolian Baiti"/>
+        <a:font script="Viet" typeface="Arial"/>
+        <a:font script="Uigh" typeface="Microsoft Uighur"/>
+        <a:font script="Geor" typeface="Sylfaen"/>
+        <a:font script="Armn" typeface="Arial"/>
+        <a:font script="Bugi" typeface="Leelawadee UI"/>
+        <a:font script="Bopo" typeface="Microsoft JhengHei"/>
+        <a:font script="Java" typeface="Javanese Text"/>
+        <a:font script="Lisu" typeface="Segoe UI"/>
+        <a:font script="Mymr" typeface="Myanmar Text"/>
+        <a:font script="Nkoo" typeface="Ebrima"/>
+        <a:font script="Olck" typeface="Nirmala UI"/>
+        <a:font script="Osma" typeface="Ebrima"/>
+        <a:font script="Phag" typeface="Phagspa"/>
+        <a:font script="Syrn" typeface="Estrangelo Edessa"/>
+        <a:font script="Syrj" typeface="Estrangelo Edessa"/>
+        <a:font script="Syre" typeface="Estrangelo Edessa"/>
+        <a:font script="Sora" typeface="Nirmala UI"/>
+        <a:font script="Tale" typeface="Microsoft Tai Le"/>
+        <a:font script="Talu" typeface="Microsoft New Tai Lue"/>
+        <a:font script="Tfng" typeface="Ebrima"/>
+      </a:minorFont>
+    </a:fontScheme>
+    <a:fmtScheme name="Office">
+      <a:fillStyleLst>
+        <a:solidFill>
+          <a:schemeClr val="phClr"/>
+        </a:solidFill>
+        <a:gradFill rotWithShape="1">
+          <a:gsLst>
+            <a:gs pos="0">
+              <a:schemeClr val="phClr">
+                <a:lumMod val="110000"/>
+                <a:satMod val="105000"/>
+                <a:tint val="67000"/>
+              </a:schemeClr>
+            </a:gs>
+            <a:gs pos="50000">
+              <a:schemeClr val="phClr">
+                <a:lumMod val="105000"/>
+                <a:satMod val="103000"/>
+                <a:tint val="73000"/>
+              </a:schemeClr>
+            </a:gs>
+            <a:gs pos="100000">
+              <a:schemeClr val="phClr">
+                <a:lumMod val="105000"/>
+                <a:satMod val="109000"/>
+                <a:tint val="81000"/>
+              </a:schemeClr>
+            </a:gs>
+          </a:gsLst>
+          <a:lin ang="5400000" scaled="0"/>
+        </a:gradFill>
+        <a:gradFill rotWithShape="1">
+          <a:gsLst>
+            <a:gs pos="0">
+              <a:schemeClr val="phClr">
+                <a:satMod val="103000"/>
+                <a:lumMod val="102000"/>
+                <a:tint val="94000"/>
+              </a:schemeClr>
+            </a:gs>
+            <a:gs pos="50000">
+              <a:schemeClr val="phClr">
+                <a:satMod val="110000"/>
+                <a:lumMod val="100000"/>
+                <a:shade val="100000"/>
+              </a:schemeClr>
+            </a:gs>
+            <a:gs pos="100000">
+              <a:schemeClr val="phClr">
+                <a:lumMod val="99000"/>
+                <a:satMod val="120000"/>
+                <a:shade val="78000"/>
+              </a:schemeClr>
+            </a:gs>
+          </a:gsLst>
+          <a:lin ang="5400000" scaled="0"/>
+        </a:gradFill>
+      </a:fillStyleLst>
+      <a:lnStyleLst>
+        <a:ln w="12700" cap="flat" cmpd="sng" algn="ctr">
+          <a:solidFill>
+            <a:schemeClr val="phClr"/>
+          </a:solidFill>
+          <a:prstDash val="solid"/>
+          <a:miter lim="800000"/>
+        </a:ln>
+        <a:ln w="19050" cap="flat" cmpd="sng" algn="ctr">
+          <a:solidFill>
+            <a:schemeClr val="phClr"/>
+          </a:solidFill>
+          <a:prstDash val="solid"/>
+          <a:miter lim="800000"/>
+        </a:ln>
+        <a:ln w="25400" cap="flat" cmpd="sng" algn="ctr">
+          <a:solidFill>
+            <a:schemeClr val="phClr"/>
+          </a:solidFill>
+          <a:prstDash val="solid"/>
+          <a:miter lim="800000"/>
+        </a:ln>
+      </a:lnStyleLst>
+      <a:effectStyleLst>
+        <a:effectStyle>
+          <a:effectLst/>
+        </a:effectStyle>
+        <a:effectStyle>
+          <a:effectLst/>
+        </a:effectStyle>
+        <a:effectStyle>
+          <a:effectLst>
+            <a:outerShdw blurRad="57150" dist="19050" dir="5400000" algn="ctr" rotWithShape="0">
+              <a:srgbClr val="000000">
+                <a:alpha val="63000"/>
+              </a:srgbClr>
+            </a:outerShdw>
+          </a:effectLst>
+        </a:effectStyle>
+      </a:effectStyleLst>
+      <a:bgFillStyleLst>
+        <a:solidFill>
+          <a:schemeClr val="phClr"/>
+        </a:solidFill>
+        <a:solidFill>
+          <a:schemeClr val="phClr">
+            <a:tint val="95000"/>
+            <a:satMod val="170000"/>
+          </a:schemeClr>
+        </a:solidFill>
+        <a:gradFill rotWithShape="1">
+          <a:gsLst>
+            <a:gs pos="0">
+              <a:schemeClr val="phClr">
+                <a:tint val="93000"/>
+                <a:satMod val="150000"/>
+                <a:shade val="98000"/>
+                <a:lumMod val="102000"/>
+              </a:schemeClr>
+            </a:gs>
+            <a:gs pos="50000">
+              <a:schemeClr val="phClr">
+                <a:tint val="98000"/>
+                <a:satMod val="130000"/>
+                <a:shade val="90000"/>
+                <a:lumMod val="103000"/>
+              </a:schemeClr>
+            </a:gs>
+            <a:gs pos="100000">
+              <a:schemeClr val="phClr">
+                <a:shade val="63000"/>
+                <a:satMod val="120000"/>
+              </a:schemeClr>
+            </a:gs>
+          </a:gsLst>
+          <a:lin ang="5400000" scaled="0"/>
+        </a:gradFill>
+      </a:bgFillStyleLst>
+    </a:fmtScheme>
+  </a:themeElements>
+  <a:objectDefaults>
+    <a:lnDef>
+      <a:spPr/>
+      <a:bodyPr/>
+      <a:lstStyle/>
+      <a:style>
+        <a:lnRef idx="2">
+          <a:schemeClr val="accent1"/>
+        </a:lnRef>
+        <a:fillRef idx="0">
+          <a:schemeClr val="accent1"/>
+        </a:fillRef>
+        <a:effectRef idx="1">
+          <a:schemeClr val="accent1"/>
+        </a:effectRef>
+        <a:fontRef idx="minor">
+          <a:schemeClr val="tx1"/>
+        </a:fontRef>
+      </a:style>
+    </a:lnDef>
+  </a:objectDefaults>
+  <a:extraClrSchemeLst/>
+  <a:extLst>
+    <a:ext uri="{05A4C25C-085E-4340-85A3-A5531E510DB2}">
+      <thm15:themeFamily xmlns:thm15="http://schemas.microsoft.com/office/thememl/2012/main" name="Office Theme" id="{2E142A2C-CD16-42D6-873A-C26D2A0506FA}" vid="{1BDDFF52-6CD6-40A5-AB3C-68EB2F1E4D0A}"/>
+    </a:ext>
+  </a:extLst>
+</a:theme>
 </file>
--- a/slides/AI_Agent_Explainability.pptx
+++ b/slides/AI_Agent_Explainability.pptx
@@ -11,17 +11,17 @@
   <p:sldIdLst>
     <p:sldId id="297" r:id="rId3"/>
     <p:sldId id="298" r:id="rId4"/>
-    <p:sldId id="299" r:id="rId5"/>
-    <p:sldId id="519" r:id="rId6"/>
-    <p:sldId id="300" r:id="rId7"/>
-    <p:sldId id="302" r:id="rId8"/>
-    <p:sldId id="305" r:id="rId9"/>
-    <p:sldId id="306" r:id="rId10"/>
-    <p:sldId id="307" r:id="rId11"/>
-    <p:sldId id="556" r:id="rId12"/>
-    <p:sldId id="303" r:id="rId13"/>
-    <p:sldId id="304" r:id="rId14"/>
-    <p:sldId id="301" r:id="rId15"/>
+    <p:sldId id="308" r:id="rId5"/>
+    <p:sldId id="299" r:id="rId6"/>
+    <p:sldId id="310" r:id="rId7"/>
+    <p:sldId id="309" r:id="rId8"/>
+    <p:sldId id="311" r:id="rId9"/>
+    <p:sldId id="312" r:id="rId10"/>
+    <p:sldId id="313" r:id="rId11"/>
+    <p:sldId id="314" r:id="rId12"/>
+    <p:sldId id="315" r:id="rId13"/>
+    <p:sldId id="316" r:id="rId14"/>
+    <p:sldId id="303" r:id="rId15"/>
   </p:sldIdLst>
   <p:sldSz cx="9144000" cy="6858000" type="screen4x3"/>
   <p:notesSz cx="7559675" cy="10691813"/>
@@ -130,6 +130,45 @@
 
 <file path=ppt/changesInfos/changesInfo1.xml><?xml version="1.0" encoding="utf-8"?>
 <pc:chgInfo xmlns:a="http://schemas.openxmlformats.org/drawingml/2006/main" xmlns:r="http://schemas.openxmlformats.org/officeDocument/2006/relationships" xmlns:ac="http://schemas.microsoft.com/office/drawing/2013/main/command" xmlns:pc="http://schemas.microsoft.com/office/powerpoint/2013/main/command">
+  <pc:docChgLst>
+    <pc:chgData name="Tiago Janela" userId="ee1a79fe-c79c-4f34-9602-7f6f2f0482b3" providerId="ADAL" clId="{67D2C233-DF3C-4C6D-9040-D7553E3BCB8A}"/>
+    <pc:docChg chg="delSld modSld">
+      <pc:chgData name="Tiago Janela" userId="ee1a79fe-c79c-4f34-9602-7f6f2f0482b3" providerId="ADAL" clId="{67D2C233-DF3C-4C6D-9040-D7553E3BCB8A}" dt="2026-03-16T14:03:02.466" v="54" actId="20577"/>
+      <pc:docMkLst>
+        <pc:docMk/>
+      </pc:docMkLst>
+      <pc:sldChg chg="modSp mod">
+        <pc:chgData name="Tiago Janela" userId="ee1a79fe-c79c-4f34-9602-7f6f2f0482b3" providerId="ADAL" clId="{67D2C233-DF3C-4C6D-9040-D7553E3BCB8A}" dt="2026-03-16T14:03:02.466" v="54" actId="20577"/>
+        <pc:sldMkLst>
+          <pc:docMk/>
+          <pc:sldMk cId="829672710" sldId="297"/>
+        </pc:sldMkLst>
+        <pc:spChg chg="mod">
+          <ac:chgData name="Tiago Janela" userId="ee1a79fe-c79c-4f34-9602-7f6f2f0482b3" providerId="ADAL" clId="{67D2C233-DF3C-4C6D-9040-D7553E3BCB8A}" dt="2026-03-16T14:03:02.466" v="54" actId="20577"/>
+          <ac:spMkLst>
+            <pc:docMk/>
+            <pc:sldMk cId="829672710" sldId="297"/>
+            <ac:spMk id="156" creationId="{00000000-0000-0000-0000-000000000000}"/>
+          </ac:spMkLst>
+        </pc:spChg>
+      </pc:sldChg>
+      <pc:sldChg chg="modSp mod">
+        <pc:chgData name="Tiago Janela" userId="ee1a79fe-c79c-4f34-9602-7f6f2f0482b3" providerId="ADAL" clId="{67D2C233-DF3C-4C6D-9040-D7553E3BCB8A}" dt="2026-03-16T14:02:34.148" v="0" actId="20577"/>
+        <pc:sldMkLst>
+          <pc:docMk/>
+          <pc:sldMk cId="721732568" sldId="298"/>
+        </pc:sldMkLst>
+        <pc:spChg chg="mod">
+          <ac:chgData name="Tiago Janela" userId="ee1a79fe-c79c-4f34-9602-7f6f2f0482b3" providerId="ADAL" clId="{67D2C233-DF3C-4C6D-9040-D7553E3BCB8A}" dt="2026-03-16T14:02:34.148" v="0" actId="20577"/>
+          <ac:spMkLst>
+            <pc:docMk/>
+            <pc:sldMk cId="721732568" sldId="298"/>
+            <ac:spMk id="2" creationId="{870990D0-7AC5-46BA-6FC4-274F8E0A3ABE}"/>
+          </ac:spMkLst>
+        </pc:spChg>
+      </pc:sldChg>
+    </pc:docChg>
+  </pc:docChgLst>
   <pc:docChgLst>
     <pc:chgData name="Tiago Janela" userId="ee1a79fe-c79c-4f34-9602-7f6f2f0482b3" providerId="ADAL" clId="{6BE67FA1-4A27-48B9-BA6A-E25A9786A9CC}"/>
     <pc:docChg chg="undo custSel addSld modSld sldOrd">
@@ -264,90 +303,6 @@
     </pc:docChg>
   </pc:docChgLst>
   <pc:docChgLst>
-    <pc:chgData name="Tiago Janela" userId="ee1a79fe-c79c-4f34-9602-7f6f2f0482b3" providerId="ADAL" clId="{FF6951D0-D029-4985-BC76-70E5B4A62478}"/>
-    <pc:docChg chg="addSld modSld sldOrd">
-      <pc:chgData name="Tiago Janela" userId="ee1a79fe-c79c-4f34-9602-7f6f2f0482b3" providerId="ADAL" clId="{FF6951D0-D029-4985-BC76-70E5B4A62478}" dt="2026-04-24T09:48:18.185" v="6"/>
-      <pc:docMkLst>
-        <pc:docMk/>
-      </pc:docMkLst>
-      <pc:sldChg chg="modSp mod">
-        <pc:chgData name="Tiago Janela" userId="ee1a79fe-c79c-4f34-9602-7f6f2f0482b3" providerId="ADAL" clId="{FF6951D0-D029-4985-BC76-70E5B4A62478}" dt="2026-04-24T09:45:33.131" v="1" actId="20577"/>
-        <pc:sldMkLst>
-          <pc:docMk/>
-          <pc:sldMk cId="1707478755" sldId="299"/>
-        </pc:sldMkLst>
-        <pc:spChg chg="mod">
-          <ac:chgData name="Tiago Janela" userId="ee1a79fe-c79c-4f34-9602-7f6f2f0482b3" providerId="ADAL" clId="{FF6951D0-D029-4985-BC76-70E5B4A62478}" dt="2026-04-24T09:45:33.131" v="1" actId="20577"/>
-          <ac:spMkLst>
-            <pc:docMk/>
-            <pc:sldMk cId="1707478755" sldId="299"/>
-            <ac:spMk id="2" creationId="{870990D0-7AC5-46BA-6FC4-274F8E0A3ABE}"/>
-          </ac:spMkLst>
-        </pc:spChg>
-      </pc:sldChg>
-      <pc:sldChg chg="mod ord modShow">
-        <pc:chgData name="Tiago Janela" userId="ee1a79fe-c79c-4f34-9602-7f6f2f0482b3" providerId="ADAL" clId="{FF6951D0-D029-4985-BC76-70E5B4A62478}" dt="2026-04-24T09:47:45.785" v="5"/>
-        <pc:sldMkLst>
-          <pc:docMk/>
-          <pc:sldMk cId="2375808848" sldId="301"/>
-        </pc:sldMkLst>
-      </pc:sldChg>
-      <pc:sldChg chg="add">
-        <pc:chgData name="Tiago Janela" userId="ee1a79fe-c79c-4f34-9602-7f6f2f0482b3" providerId="ADAL" clId="{FF6951D0-D029-4985-BC76-70E5B4A62478}" dt="2026-04-24T09:47:35.256" v="2"/>
-        <pc:sldMkLst>
-          <pc:docMk/>
-          <pc:sldMk cId="921095034" sldId="519"/>
-        </pc:sldMkLst>
-      </pc:sldChg>
-      <pc:sldChg chg="add">
-        <pc:chgData name="Tiago Janela" userId="ee1a79fe-c79c-4f34-9602-7f6f2f0482b3" providerId="ADAL" clId="{FF6951D0-D029-4985-BC76-70E5B4A62478}" dt="2026-04-24T09:48:18.185" v="6"/>
-        <pc:sldMkLst>
-          <pc:docMk/>
-          <pc:sldMk cId="2674446027" sldId="556"/>
-        </pc:sldMkLst>
-      </pc:sldChg>
-    </pc:docChg>
-  </pc:docChgLst>
-  <pc:docChgLst>
-    <pc:chgData name="Tiago Janela" userId="ee1a79fe-c79c-4f34-9602-7f6f2f0482b3" providerId="ADAL" clId="{67D2C233-DF3C-4C6D-9040-D7553E3BCB8A}"/>
-    <pc:docChg chg="delSld modSld">
-      <pc:chgData name="Tiago Janela" userId="ee1a79fe-c79c-4f34-9602-7f6f2f0482b3" providerId="ADAL" clId="{67D2C233-DF3C-4C6D-9040-D7553E3BCB8A}" dt="2026-03-16T14:03:02.466" v="54" actId="20577"/>
-      <pc:docMkLst>
-        <pc:docMk/>
-      </pc:docMkLst>
-      <pc:sldChg chg="modSp mod">
-        <pc:chgData name="Tiago Janela" userId="ee1a79fe-c79c-4f34-9602-7f6f2f0482b3" providerId="ADAL" clId="{67D2C233-DF3C-4C6D-9040-D7553E3BCB8A}" dt="2026-03-16T14:03:02.466" v="54" actId="20577"/>
-        <pc:sldMkLst>
-          <pc:docMk/>
-          <pc:sldMk cId="829672710" sldId="297"/>
-        </pc:sldMkLst>
-        <pc:spChg chg="mod">
-          <ac:chgData name="Tiago Janela" userId="ee1a79fe-c79c-4f34-9602-7f6f2f0482b3" providerId="ADAL" clId="{67D2C233-DF3C-4C6D-9040-D7553E3BCB8A}" dt="2026-03-16T14:03:02.466" v="54" actId="20577"/>
-          <ac:spMkLst>
-            <pc:docMk/>
-            <pc:sldMk cId="829672710" sldId="297"/>
-            <ac:spMk id="156" creationId="{00000000-0000-0000-0000-000000000000}"/>
-          </ac:spMkLst>
-        </pc:spChg>
-      </pc:sldChg>
-      <pc:sldChg chg="modSp mod">
-        <pc:chgData name="Tiago Janela" userId="ee1a79fe-c79c-4f34-9602-7f6f2f0482b3" providerId="ADAL" clId="{67D2C233-DF3C-4C6D-9040-D7553E3BCB8A}" dt="2026-03-16T14:02:34.148" v="0" actId="20577"/>
-        <pc:sldMkLst>
-          <pc:docMk/>
-          <pc:sldMk cId="721732568" sldId="298"/>
-        </pc:sldMkLst>
-        <pc:spChg chg="mod">
-          <ac:chgData name="Tiago Janela" userId="ee1a79fe-c79c-4f34-9602-7f6f2f0482b3" providerId="ADAL" clId="{67D2C233-DF3C-4C6D-9040-D7553E3BCB8A}" dt="2026-03-16T14:02:34.148" v="0" actId="20577"/>
-          <ac:spMkLst>
-            <pc:docMk/>
-            <pc:sldMk cId="721732568" sldId="298"/>
-            <ac:spMk id="2" creationId="{870990D0-7AC5-46BA-6FC4-274F8E0A3ABE}"/>
-          </ac:spMkLst>
-        </pc:spChg>
-      </pc:sldChg>
-    </pc:docChg>
-  </pc:docChgLst>
-  <pc:docChgLst>
     <pc:chgData name="Tiago Janela" userId="ee1a79fe-c79c-4f34-9602-7f6f2f0482b3" providerId="ADAL" clId="{97693404-9C1B-400A-95DF-A7B72570E7A0}"/>
     <pc:docChg chg="undo custSel addSld delSld modSld sldOrd">
       <pc:chgData name="Tiago Janela" userId="ee1a79fe-c79c-4f34-9602-7f6f2f0482b3" providerId="ADAL" clId="{97693404-9C1B-400A-95DF-A7B72570E7A0}" dt="2026-03-09T10:33:25.226" v="5259" actId="20577"/>
@@ -423,7 +378,7 @@
             </a:lvl1pPr>
           </a:lstStyle>
           <a:p>
-            <a:endParaRPr lang="de-DE"/>
+            <a:endParaRPr lang="en-US"/>
           </a:p>
         </p:txBody>
       </p:sp>
@@ -454,11 +409,11 @@
             </a:lvl1pPr>
           </a:lstStyle>
           <a:p>
-            <a:fld id="{8895F6FA-647C-4311-838E-A4FEC80CEF77}" type="datetimeFigureOut">
-              <a:rPr lang="de-DE" smtClean="0"/>
-              <a:t>24.04.2026</a:t>
+            <a:fld id="{83EC3DE1-3765-45C5-94E7-BC41A6E38B2C}" type="datetimeFigureOut">
+              <a:rPr lang="en-US" smtClean="0"/>
+              <a:t>4/29/2026</a:t>
             </a:fld>
-            <a:endParaRPr lang="de-DE"/>
+            <a:endParaRPr lang="en-US"/>
           </a:p>
         </p:txBody>
       </p:sp>
@@ -491,7 +446,7 @@
           <a:bodyPr vert="horz" lIns="91440" tIns="45720" rIns="91440" bIns="45720" rtlCol="0" anchor="ctr"/>
           <a:lstStyle/>
           <a:p>
-            <a:endParaRPr lang="de-DE"/>
+            <a:endParaRPr lang="en-US"/>
           </a:p>
         </p:txBody>
       </p:sp>
@@ -551,7 +506,6 @@
               <a:rPr lang="en-US"/>
               <a:t>Fifth level</a:t>
             </a:r>
-            <a:endParaRPr lang="de-DE"/>
           </a:p>
         </p:txBody>
       </p:sp>
@@ -582,7 +536,7 @@
             </a:lvl1pPr>
           </a:lstStyle>
           <a:p>
-            <a:endParaRPr lang="de-DE"/>
+            <a:endParaRPr lang="en-US"/>
           </a:p>
         </p:txBody>
       </p:sp>
@@ -613,18 +567,18 @@
             </a:lvl1pPr>
           </a:lstStyle>
           <a:p>
-            <a:fld id="{B1CB59DE-A395-4FE1-AF6E-B266016DC7B6}" type="slidenum">
-              <a:rPr lang="de-DE" smtClean="0"/>
+            <a:fld id="{90EBC085-3709-4EED-9401-54C6FC7AFFB6}" type="slidenum">
+              <a:rPr lang="en-US" smtClean="0"/>
               <a:t>‹#›</a:t>
             </a:fld>
-            <a:endParaRPr lang="de-DE"/>
+            <a:endParaRPr lang="en-US"/>
           </a:p>
         </p:txBody>
       </p:sp>
     </p:spTree>
     <p:extLst>
       <p:ext uri="{BB962C8B-B14F-4D97-AF65-F5344CB8AC3E}">
-        <p14:creationId xmlns:p14="http://schemas.microsoft.com/office/powerpoint/2010/main" val="3301869723"/>
+        <p14:creationId xmlns:p14="http://schemas.microsoft.com/office/powerpoint/2010/main" val="1265496885"/>
       </p:ext>
     </p:extLst>
   </p:cSld>
@@ -743,7 +697,7 @@
       </p:grpSpPr>
       <p:sp>
         <p:nvSpPr>
-          <p:cNvPr id="2" name="Marcador de Posição da Imagem do Diapositivo 1"/>
+          <p:cNvPr id="2" name="Slide Image Placeholder 1"/>
           <p:cNvSpPr>
             <a:spLocks noGrp="1" noRot="1" noChangeAspect="1"/>
           </p:cNvSpPr>
@@ -755,7 +709,7 @@
       </p:sp>
       <p:sp>
         <p:nvSpPr>
-          <p:cNvPr id="3" name="Marcador de Posição de Notas 2"/>
+          <p:cNvPr id="3" name="Notes Placeholder 2"/>
           <p:cNvSpPr>
             <a:spLocks noGrp="1"/>
           </p:cNvSpPr>
@@ -768,35 +722,13 @@
           <a:bodyPr/>
           <a:lstStyle/>
           <a:p>
-            <a:r>
-              <a:rPr lang="en-US" dirty="0"/>
-              <a:t>Here's a concrete example. </a:t>
-            </a:r>
-          </a:p>
-          <a:p>
             <a:endParaRPr lang="en-US" dirty="0"/>
-          </a:p>
-          <a:p>
-            <a:r>
-              <a:rPr lang="en-US" dirty="0"/>
-              <a:t>The user asks the system to take a kinase selectivity dataset, split it using scaffold partitioning, train a random forest with cross-validated hyperparameter optimization, and report performance. </a:t>
-            </a:r>
-          </a:p>
-          <a:p>
-            <a:endParaRPr lang="en-US" dirty="0"/>
-          </a:p>
-          <a:p>
-            <a:r>
-              <a:rPr lang="en-US" dirty="0"/>
-              <a:t>The agent handles all of this autonomously. This workflow would normally require writing and debugging a Python script — here it's done through a text prompt.</a:t>
-            </a:r>
-            <a:endParaRPr lang="pt-PT" dirty="0"/>
           </a:p>
         </p:txBody>
       </p:sp>
       <p:sp>
         <p:nvSpPr>
-          <p:cNvPr id="4" name="Marcador de Posição do Número do Diapositivo 3"/>
+          <p:cNvPr id="4" name="Slide Number Placeholder 3"/>
           <p:cNvSpPr>
             <a:spLocks noGrp="1"/>
           </p:cNvSpPr>
@@ -809,18 +741,18 @@
           <a:bodyPr/>
           <a:lstStyle/>
           <a:p>
-            <a:fld id="{A8F1D436-8E8C-482D-8D71-F0E649122FF1}" type="slidenum">
-              <a:rPr lang="de-DE" smtClean="0"/>
-              <a:t>4</a:t>
+            <a:fld id="{90EBC085-3709-4EED-9401-54C6FC7AFFB6}" type="slidenum">
+              <a:rPr lang="en-US" smtClean="0"/>
+              <a:t>6</a:t>
             </a:fld>
-            <a:endParaRPr lang="de-DE"/>
+            <a:endParaRPr lang="en-US"/>
           </a:p>
         </p:txBody>
       </p:sp>
     </p:spTree>
     <p:extLst>
       <p:ext uri="{BB962C8B-B14F-4D97-AF65-F5344CB8AC3E}">
-        <p14:creationId xmlns:p14="http://schemas.microsoft.com/office/powerpoint/2010/main" val="2609654911"/>
+        <p14:creationId xmlns:p14="http://schemas.microsoft.com/office/powerpoint/2010/main" val="3622632623"/>
       </p:ext>
     </p:extLst>
   </p:cSld>
@@ -835,13 +767,7 @@
   <p:cSld>
     <p:spTree>
       <p:nvGrpSpPr>
-        <p:cNvPr id="1" name="">
-          <a:extLst>
-            <a:ext uri="{FF2B5EF4-FFF2-40B4-BE49-F238E27FC236}">
-              <a16:creationId xmlns:a16="http://schemas.microsoft.com/office/drawing/2014/main" id="{3545D11D-EA46-9A83-3E55-EA32102FD929}"/>
-            </a:ext>
-          </a:extLst>
-        </p:cNvPr>
+        <p:cNvPr id="1" name=""/>
         <p:cNvGrpSpPr/>
         <p:nvPr/>
       </p:nvGrpSpPr>
@@ -855,13 +781,7 @@
       </p:grpSpPr>
       <p:sp>
         <p:nvSpPr>
-          <p:cNvPr id="2" name="Marcador de Posição da Imagem do Diapositivo 1">
-            <a:extLst>
-              <a:ext uri="{FF2B5EF4-FFF2-40B4-BE49-F238E27FC236}">
-                <a16:creationId xmlns:a16="http://schemas.microsoft.com/office/drawing/2014/main" id="{82B54D5D-CDA7-0157-77E7-1FDE8EDD9C48}"/>
-              </a:ext>
-            </a:extLst>
-          </p:cNvPr>
+          <p:cNvPr id="2" name="Slide Image Placeholder 1"/>
           <p:cNvSpPr>
             <a:spLocks noGrp="1" noRot="1" noChangeAspect="1"/>
           </p:cNvSpPr>
@@ -873,13 +793,7 @@
       </p:sp>
       <p:sp>
         <p:nvSpPr>
-          <p:cNvPr id="3" name="Marcador de Posição de Notas 2">
-            <a:extLst>
-              <a:ext uri="{FF2B5EF4-FFF2-40B4-BE49-F238E27FC236}">
-                <a16:creationId xmlns:a16="http://schemas.microsoft.com/office/drawing/2014/main" id="{15DF8A04-46B2-BA00-FB5D-DACB585F0168}"/>
-              </a:ext>
-            </a:extLst>
-          </p:cNvPr>
+          <p:cNvPr id="3" name="Notes Placeholder 2"/>
           <p:cNvSpPr>
             <a:spLocks noGrp="1"/>
           </p:cNvSpPr>
@@ -892,41 +806,13 @@
           <a:bodyPr/>
           <a:lstStyle/>
           <a:p>
-            <a:r>
-              <a:rPr lang="en-US" dirty="0"/>
-              <a:t>The practical advantages: it serves as a visual aid for medicinal chemists, increasing trust in ML predictions through transparency. </a:t>
-            </a:r>
-          </a:p>
-          <a:p>
             <a:endParaRPr lang="en-US" dirty="0"/>
-          </a:p>
-          <a:p>
-            <a:r>
-              <a:rPr lang="en-US" dirty="0"/>
-              <a:t>It's fully integrated with an LLM, so it's ready to use. </a:t>
-            </a:r>
-          </a:p>
-          <a:p>
-            <a:endParaRPr lang="en-US" dirty="0"/>
-          </a:p>
-          <a:p>
-            <a:r>
-              <a:rPr lang="en-US" dirty="0"/>
-              <a:t>And it's built on open-source models, making it accessible and adaptable to different needs</a:t>
-            </a:r>
-            <a:endParaRPr lang="pt-PT" dirty="0"/>
           </a:p>
         </p:txBody>
       </p:sp>
       <p:sp>
         <p:nvSpPr>
-          <p:cNvPr id="4" name="Marcador de Posição do Número do Diapositivo 3">
-            <a:extLst>
-              <a:ext uri="{FF2B5EF4-FFF2-40B4-BE49-F238E27FC236}">
-                <a16:creationId xmlns:a16="http://schemas.microsoft.com/office/drawing/2014/main" id="{A3FB29BA-E2DC-742B-7EFE-FDB07589800A}"/>
-              </a:ext>
-            </a:extLst>
-          </p:cNvPr>
+          <p:cNvPr id="4" name="Slide Number Placeholder 3"/>
           <p:cNvSpPr>
             <a:spLocks noGrp="1"/>
           </p:cNvSpPr>
@@ -939,18 +825,102 @@
           <a:bodyPr/>
           <a:lstStyle/>
           <a:p>
-            <a:fld id="{A8F1D436-8E8C-482D-8D71-F0E649122FF1}" type="slidenum">
-              <a:rPr lang="de-DE" smtClean="0"/>
-              <a:t>10</a:t>
+            <a:fld id="{90EBC085-3709-4EED-9401-54C6FC7AFFB6}" type="slidenum">
+              <a:rPr lang="en-US" smtClean="0"/>
+              <a:t>8</a:t>
             </a:fld>
-            <a:endParaRPr lang="de-DE"/>
+            <a:endParaRPr lang="en-US"/>
           </a:p>
         </p:txBody>
       </p:sp>
     </p:spTree>
     <p:extLst>
       <p:ext uri="{BB962C8B-B14F-4D97-AF65-F5344CB8AC3E}">
-        <p14:creationId xmlns:p14="http://schemas.microsoft.com/office/powerpoint/2010/main" val="2535246732"/>
+        <p14:creationId xmlns:p14="http://schemas.microsoft.com/office/powerpoint/2010/main" val="2203819319"/>
+      </p:ext>
+    </p:extLst>
+  </p:cSld>
+  <p:clrMapOvr>
+    <a:masterClrMapping/>
+  </p:clrMapOvr>
+</p:notes>
+</file>
+
+<file path=ppt/notesSlides/notesSlide3.xml><?xml version="1.0" encoding="utf-8"?>
+<p:notes xmlns:a="http://schemas.openxmlformats.org/drawingml/2006/main" xmlns:r="http://schemas.openxmlformats.org/officeDocument/2006/relationships" xmlns:p="http://schemas.openxmlformats.org/presentationml/2006/main">
+  <p:cSld>
+    <p:spTree>
+      <p:nvGrpSpPr>
+        <p:cNvPr id="1" name=""/>
+        <p:cNvGrpSpPr/>
+        <p:nvPr/>
+      </p:nvGrpSpPr>
+      <p:grpSpPr>
+        <a:xfrm>
+          <a:off x="0" y="0"/>
+          <a:ext cx="0" cy="0"/>
+          <a:chOff x="0" y="0"/>
+          <a:chExt cx="0" cy="0"/>
+        </a:xfrm>
+      </p:grpSpPr>
+      <p:sp>
+        <p:nvSpPr>
+          <p:cNvPr id="2" name="Slide Image Placeholder 1"/>
+          <p:cNvSpPr>
+            <a:spLocks noGrp="1" noRot="1" noChangeAspect="1"/>
+          </p:cNvSpPr>
+          <p:nvPr>
+            <p:ph type="sldImg"/>
+          </p:nvPr>
+        </p:nvSpPr>
+        <p:spPr/>
+      </p:sp>
+      <p:sp>
+        <p:nvSpPr>
+          <p:cNvPr id="3" name="Notes Placeholder 2"/>
+          <p:cNvSpPr>
+            <a:spLocks noGrp="1"/>
+          </p:cNvSpPr>
+          <p:nvPr>
+            <p:ph type="body" idx="1"/>
+          </p:nvPr>
+        </p:nvSpPr>
+        <p:spPr/>
+        <p:txBody>
+          <a:bodyPr/>
+          <a:lstStyle/>
+          <a:p>
+            <a:endParaRPr lang="en-US" dirty="0"/>
+          </a:p>
+        </p:txBody>
+      </p:sp>
+      <p:sp>
+        <p:nvSpPr>
+          <p:cNvPr id="4" name="Slide Number Placeholder 3"/>
+          <p:cNvSpPr>
+            <a:spLocks noGrp="1"/>
+          </p:cNvSpPr>
+          <p:nvPr>
+            <p:ph type="sldNum" sz="quarter" idx="5"/>
+          </p:nvPr>
+        </p:nvSpPr>
+        <p:spPr/>
+        <p:txBody>
+          <a:bodyPr/>
+          <a:lstStyle/>
+          <a:p>
+            <a:fld id="{90EBC085-3709-4EED-9401-54C6FC7AFFB6}" type="slidenum">
+              <a:rPr lang="en-US" smtClean="0"/>
+              <a:t>9</a:t>
+            </a:fld>
+            <a:endParaRPr lang="en-US"/>
+          </a:p>
+        </p:txBody>
+      </p:sp>
+    </p:spTree>
+    <p:extLst>
+      <p:ext uri="{BB962C8B-B14F-4D97-AF65-F5344CB8AC3E}">
+        <p14:creationId xmlns:p14="http://schemas.microsoft.com/office/powerpoint/2010/main" val="2148738134"/>
       </p:ext>
     </p:extLst>
   </p:cSld>
@@ -9994,7 +9964,7 @@
         <p:cNvPr id="1" name="">
           <a:extLst>
             <a:ext uri="{FF2B5EF4-FFF2-40B4-BE49-F238E27FC236}">
-              <a16:creationId xmlns:a16="http://schemas.microsoft.com/office/drawing/2014/main" id="{BBB5A1B2-7A92-53AE-94A1-C4092E55B578}"/>
+              <a16:creationId xmlns:a16="http://schemas.microsoft.com/office/drawing/2014/main" id="{A6515F23-0912-A838-23CE-B8F00573A2DA}"/>
             </a:ext>
           </a:extLst>
         </p:cNvPr>
@@ -10011,10 +9981,10 @@
       </p:grpSpPr>
       <p:sp>
         <p:nvSpPr>
-          <p:cNvPr id="158" name="PlaceHolder 1">
+          <p:cNvPr id="163" name="PlaceHolder 1">
             <a:extLst>
               <a:ext uri="{FF2B5EF4-FFF2-40B4-BE49-F238E27FC236}">
-                <a16:creationId xmlns:a16="http://schemas.microsoft.com/office/drawing/2014/main" id="{F4F64255-0CB6-D441-EB42-A827943DC4A3}"/>
+                <a16:creationId xmlns:a16="http://schemas.microsoft.com/office/drawing/2014/main" id="{57944F4B-F502-E7CC-8790-8737702BC6AC}"/>
               </a:ext>
             </a:extLst>
           </p:cNvPr>
@@ -10048,15 +10018,25 @@
               <a:lnSpc>
                 <a:spcPct val="100000"/>
               </a:lnSpc>
+              <a:buNone/>
             </a:pPr>
             <a:r>
-              <a:rPr lang="en-US" sz="3200" spc="-1" dirty="0">
+              <a:rPr lang="en-US" sz="3200" b="0" strike="noStrike" spc="-1" dirty="0">
                 <a:solidFill>
                   <a:srgbClr val="0064C8"/>
                 </a:solidFill>
                 <a:latin typeface="Century Gothic"/>
               </a:rPr>
-              <a:t>Agent Advantages and Improvements</a:t>
+              <a:t>Prompt </a:t>
+            </a:r>
+            <a:r>
+              <a:rPr lang="en-US" sz="3200" spc="-1" dirty="0">
+                <a:solidFill>
+                  <a:srgbClr val="0064C8"/>
+                </a:solidFill>
+                <a:latin typeface="Century Gothic"/>
+              </a:rPr>
+              <a:t>3</a:t>
             </a:r>
             <a:endParaRPr lang="en-US" sz="3200" b="0" strike="noStrike" spc="-1" dirty="0">
               <a:solidFill>
@@ -10069,24 +10049,22 @@
       </p:sp>
       <p:sp>
         <p:nvSpPr>
-          <p:cNvPr id="159" name="PlaceHolder 2">
+          <p:cNvPr id="2" name="PlaceHolder 2">
             <a:extLst>
               <a:ext uri="{FF2B5EF4-FFF2-40B4-BE49-F238E27FC236}">
-                <a16:creationId xmlns:a16="http://schemas.microsoft.com/office/drawing/2014/main" id="{D59FF44B-6222-67BD-CD20-4D01B6DF9761}"/>
+                <a16:creationId xmlns:a16="http://schemas.microsoft.com/office/drawing/2014/main" id="{9FA20452-FA65-AFDC-8768-AEF2985C28BC}"/>
               </a:ext>
             </a:extLst>
           </p:cNvPr>
-          <p:cNvSpPr>
-            <a:spLocks noGrp="1"/>
+          <p:cNvSpPr txBox="1">
+            <a:spLocks/>
           </p:cNvSpPr>
-          <p:nvPr>
-            <p:ph/>
-          </p:nvPr>
+          <p:nvPr/>
         </p:nvSpPr>
         <p:spPr>
           <a:xfrm>
-            <a:off x="382679" y="1371600"/>
-            <a:ext cx="8378281" cy="4321079"/>
+            <a:off x="380880" y="1375729"/>
+            <a:ext cx="8380080" cy="1836598"/>
           </a:xfrm>
           <a:prstGeom prst="rect">
             <a:avLst/>
@@ -10100,258 +10078,202 @@
           <a:bodyPr numCol="1" spcCol="0" anchor="t">
             <a:noAutofit/>
           </a:bodyPr>
-          <a:lstStyle/>
+          <a:lstStyle>
+            <a:lvl1pPr marL="228600" indent="-228600" algn="l" defTabSz="914400" rtl="0" eaLnBrk="1" latinLnBrk="0" hangingPunct="1">
+              <a:lnSpc>
+                <a:spcPct val="90000"/>
+              </a:lnSpc>
+              <a:spcBef>
+                <a:spcPts val="1000"/>
+              </a:spcBef>
+              <a:buFont typeface="Arial" panose="020B0604020202020204" pitchFamily="34" charset="0"/>
+              <a:buChar char="•"/>
+              <a:defRPr sz="2800" kern="1200">
+                <a:solidFill>
+                  <a:schemeClr val="tx1"/>
+                </a:solidFill>
+                <a:latin typeface="+mn-lt"/>
+                <a:ea typeface="+mn-ea"/>
+                <a:cs typeface="+mn-cs"/>
+              </a:defRPr>
+            </a:lvl1pPr>
+            <a:lvl2pPr marL="685800" indent="-228600" algn="l" defTabSz="914400" rtl="0" eaLnBrk="1" latinLnBrk="0" hangingPunct="1">
+              <a:lnSpc>
+                <a:spcPct val="90000"/>
+              </a:lnSpc>
+              <a:spcBef>
+                <a:spcPts val="500"/>
+              </a:spcBef>
+              <a:buFont typeface="Arial" panose="020B0604020202020204" pitchFamily="34" charset="0"/>
+              <a:buChar char="•"/>
+              <a:defRPr sz="2400" kern="1200">
+                <a:solidFill>
+                  <a:schemeClr val="tx1"/>
+                </a:solidFill>
+                <a:latin typeface="+mn-lt"/>
+                <a:ea typeface="+mn-ea"/>
+                <a:cs typeface="+mn-cs"/>
+              </a:defRPr>
+            </a:lvl2pPr>
+            <a:lvl3pPr marL="1143000" indent="-228600" algn="l" defTabSz="914400" rtl="0" eaLnBrk="1" latinLnBrk="0" hangingPunct="1">
+              <a:lnSpc>
+                <a:spcPct val="90000"/>
+              </a:lnSpc>
+              <a:spcBef>
+                <a:spcPts val="500"/>
+              </a:spcBef>
+              <a:buFont typeface="Arial" panose="020B0604020202020204" pitchFamily="34" charset="0"/>
+              <a:buChar char="•"/>
+              <a:defRPr sz="2000" kern="1200">
+                <a:solidFill>
+                  <a:schemeClr val="tx1"/>
+                </a:solidFill>
+                <a:latin typeface="+mn-lt"/>
+                <a:ea typeface="+mn-ea"/>
+                <a:cs typeface="+mn-cs"/>
+              </a:defRPr>
+            </a:lvl3pPr>
+            <a:lvl4pPr marL="1600200" indent="-228600" algn="l" defTabSz="914400" rtl="0" eaLnBrk="1" latinLnBrk="0" hangingPunct="1">
+              <a:lnSpc>
+                <a:spcPct val="90000"/>
+              </a:lnSpc>
+              <a:spcBef>
+                <a:spcPts val="500"/>
+              </a:spcBef>
+              <a:buFont typeface="Arial" panose="020B0604020202020204" pitchFamily="34" charset="0"/>
+              <a:buChar char="•"/>
+              <a:defRPr sz="1800" kern="1200">
+                <a:solidFill>
+                  <a:schemeClr val="tx1"/>
+                </a:solidFill>
+                <a:latin typeface="+mn-lt"/>
+                <a:ea typeface="+mn-ea"/>
+                <a:cs typeface="+mn-cs"/>
+              </a:defRPr>
+            </a:lvl4pPr>
+            <a:lvl5pPr marL="2057400" indent="-228600" algn="l" defTabSz="914400" rtl="0" eaLnBrk="1" latinLnBrk="0" hangingPunct="1">
+              <a:lnSpc>
+                <a:spcPct val="90000"/>
+              </a:lnSpc>
+              <a:spcBef>
+                <a:spcPts val="500"/>
+              </a:spcBef>
+              <a:buFont typeface="Arial" panose="020B0604020202020204" pitchFamily="34" charset="0"/>
+              <a:buChar char="•"/>
+              <a:defRPr sz="1800" kern="1200">
+                <a:solidFill>
+                  <a:schemeClr val="tx1"/>
+                </a:solidFill>
+                <a:latin typeface="+mn-lt"/>
+                <a:ea typeface="+mn-ea"/>
+                <a:cs typeface="+mn-cs"/>
+              </a:defRPr>
+            </a:lvl5pPr>
+            <a:lvl6pPr marL="2514600" indent="-228600" algn="l" defTabSz="914400" rtl="0" eaLnBrk="1" latinLnBrk="0" hangingPunct="1">
+              <a:lnSpc>
+                <a:spcPct val="90000"/>
+              </a:lnSpc>
+              <a:spcBef>
+                <a:spcPts val="500"/>
+              </a:spcBef>
+              <a:buFont typeface="Arial" panose="020B0604020202020204" pitchFamily="34" charset="0"/>
+              <a:buChar char="•"/>
+              <a:defRPr sz="1800" kern="1200">
+                <a:solidFill>
+                  <a:schemeClr val="tx1"/>
+                </a:solidFill>
+                <a:latin typeface="+mn-lt"/>
+                <a:ea typeface="+mn-ea"/>
+                <a:cs typeface="+mn-cs"/>
+              </a:defRPr>
+            </a:lvl6pPr>
+            <a:lvl7pPr marL="2971800" indent="-228600" algn="l" defTabSz="914400" rtl="0" eaLnBrk="1" latinLnBrk="0" hangingPunct="1">
+              <a:lnSpc>
+                <a:spcPct val="90000"/>
+              </a:lnSpc>
+              <a:spcBef>
+                <a:spcPts val="500"/>
+              </a:spcBef>
+              <a:buFont typeface="Arial" panose="020B0604020202020204" pitchFamily="34" charset="0"/>
+              <a:buChar char="•"/>
+              <a:defRPr sz="1800" kern="1200">
+                <a:solidFill>
+                  <a:schemeClr val="tx1"/>
+                </a:solidFill>
+                <a:latin typeface="+mn-lt"/>
+                <a:ea typeface="+mn-ea"/>
+                <a:cs typeface="+mn-cs"/>
+              </a:defRPr>
+            </a:lvl7pPr>
+            <a:lvl8pPr marL="3429000" indent="-228600" algn="l" defTabSz="914400" rtl="0" eaLnBrk="1" latinLnBrk="0" hangingPunct="1">
+              <a:lnSpc>
+                <a:spcPct val="90000"/>
+              </a:lnSpc>
+              <a:spcBef>
+                <a:spcPts val="500"/>
+              </a:spcBef>
+              <a:buFont typeface="Arial" panose="020B0604020202020204" pitchFamily="34" charset="0"/>
+              <a:buChar char="•"/>
+              <a:defRPr sz="1800" kern="1200">
+                <a:solidFill>
+                  <a:schemeClr val="tx1"/>
+                </a:solidFill>
+                <a:latin typeface="+mn-lt"/>
+                <a:ea typeface="+mn-ea"/>
+                <a:cs typeface="+mn-cs"/>
+              </a:defRPr>
+            </a:lvl8pPr>
+            <a:lvl9pPr marL="3886200" indent="-228600" algn="l" defTabSz="914400" rtl="0" eaLnBrk="1" latinLnBrk="0" hangingPunct="1">
+              <a:lnSpc>
+                <a:spcPct val="90000"/>
+              </a:lnSpc>
+              <a:spcBef>
+                <a:spcPts val="500"/>
+              </a:spcBef>
+              <a:buFont typeface="Arial" panose="020B0604020202020204" pitchFamily="34" charset="0"/>
+              <a:buChar char="•"/>
+              <a:defRPr sz="1800" kern="1200">
+                <a:solidFill>
+                  <a:schemeClr val="tx1"/>
+                </a:solidFill>
+                <a:latin typeface="+mn-lt"/>
+                <a:ea typeface="+mn-ea"/>
+                <a:cs typeface="+mn-cs"/>
+              </a:defRPr>
+            </a:lvl9pPr>
+          </a:lstStyle>
           <a:p>
             <a:pPr marL="0" indent="0">
+              <a:lnSpc>
+                <a:spcPct val="100000"/>
+              </a:lnSpc>
               <a:spcBef>
                 <a:spcPts val="400"/>
               </a:spcBef>
               <a:spcAft>
-                <a:spcPts val="2400"/>
+                <a:spcPts val="601"/>
               </a:spcAft>
               <a:buClr>
-                <a:srgbClr val="0070C0"/>
+                <a:srgbClr val="0064C8"/>
               </a:buClr>
               <a:buNone/>
             </a:pPr>
             <a:r>
-              <a:rPr lang="en-US" sz="2000" b="1" strike="noStrike" spc="-1" dirty="0">
+              <a:rPr lang="en-US" sz="2000" spc="-1" dirty="0">
+                <a:solidFill>
+                  <a:srgbClr val="000000"/>
+                </a:solidFill>
                 <a:latin typeface="Century Gothic"/>
               </a:rPr>
-              <a:t>Practical advantages</a:t>
+              <a:t># Provided by the best junior research group leader I know</a:t>
             </a:r>
-            <a:r>
-              <a:rPr lang="en-US" sz="2000" strike="noStrike" spc="-1" dirty="0">
-                <a:latin typeface="Century Gothic"/>
-              </a:rPr>
-              <a:t> </a:t>
-            </a:r>
-          </a:p>
-          <a:p>
-            <a:pPr>
-              <a:spcBef>
-                <a:spcPts val="400"/>
-              </a:spcBef>
-              <a:spcAft>
-                <a:spcPts val="2400"/>
-              </a:spcAft>
-              <a:buClr>
-                <a:srgbClr val="0070C0"/>
-              </a:buClr>
-              <a:buFont typeface="Wingdings" panose="05000000000000000000" pitchFamily="2" charset="2"/>
-              <a:buChar char="§"/>
-            </a:pPr>
-            <a:r>
-              <a:rPr lang="en-US" sz="1800" spc="-1" dirty="0">
-                <a:latin typeface="Century Gothic"/>
-              </a:rPr>
-              <a:t>Visual aid for chemists → Increase transparency in ML predictions  </a:t>
-            </a:r>
-          </a:p>
-          <a:p>
-            <a:pPr>
-              <a:spcBef>
-                <a:spcPts val="400"/>
-              </a:spcBef>
-              <a:spcAft>
-                <a:spcPts val="2400"/>
-              </a:spcAft>
-              <a:buClr>
-                <a:srgbClr val="0070C0"/>
-              </a:buClr>
-              <a:buFont typeface="Wingdings" panose="05000000000000000000" pitchFamily="2" charset="2"/>
-              <a:buChar char="§"/>
-            </a:pPr>
-            <a:r>
-              <a:rPr lang="en-US" sz="1800" spc="-1" dirty="0">
-                <a:latin typeface="Century Gothic"/>
-              </a:rPr>
-              <a:t>Built on Open-source LLMs → Accessible to the community</a:t>
-            </a:r>
-          </a:p>
-          <a:p>
-            <a:pPr marL="0" indent="0">
-              <a:spcBef>
-                <a:spcPts val="400"/>
-              </a:spcBef>
-              <a:spcAft>
-                <a:spcPts val="2400"/>
-              </a:spcAft>
-              <a:buClr>
-                <a:srgbClr val="0070C0"/>
-              </a:buClr>
-              <a:buNone/>
-            </a:pPr>
-            <a:r>
-              <a:rPr lang="en-US" sz="2000" b="1" spc="-1" dirty="0">
-                <a:latin typeface="Century Gothic"/>
-              </a:rPr>
-              <a:t>Points to evaluate and improve</a:t>
-            </a:r>
-          </a:p>
-          <a:p>
-            <a:pPr>
-              <a:spcBef>
-                <a:spcPts val="400"/>
-              </a:spcBef>
-              <a:spcAft>
-                <a:spcPts val="2400"/>
-              </a:spcAft>
-              <a:buClr>
-                <a:srgbClr val="0070C0"/>
-              </a:buClr>
-              <a:buFont typeface="Wingdings" panose="05000000000000000000" pitchFamily="2" charset="2"/>
-              <a:buChar char="§"/>
-            </a:pPr>
-            <a:r>
-              <a:rPr lang="en-US" sz="1800" spc="-1" dirty="0">
-                <a:latin typeface="Century Gothic"/>
-              </a:rPr>
-              <a:t>Susceptibility to LLM hallucinations →  Use domain-specific models</a:t>
-            </a:r>
-            <a:endParaRPr lang="en-US" sz="1800" b="1" spc="-1" dirty="0">
-              <a:latin typeface="Century Gothic"/>
-            </a:endParaRPr>
-          </a:p>
-          <a:p>
-            <a:pPr>
-              <a:spcBef>
-                <a:spcPts val="400"/>
-              </a:spcBef>
-              <a:spcAft>
-                <a:spcPts val="2400"/>
-              </a:spcAft>
-              <a:buClr>
-                <a:srgbClr val="0070C0"/>
-              </a:buClr>
-              <a:buFont typeface="Wingdings" panose="05000000000000000000" pitchFamily="2" charset="2"/>
-              <a:buChar char="§"/>
-            </a:pPr>
-            <a:r>
-              <a:rPr lang="en-US" sz="1800" spc="-1" dirty="0">
-                <a:latin typeface="Century Gothic"/>
-              </a:rPr>
-              <a:t>Requires careful prompt curation → Addition of interactive chat feature</a:t>
-            </a:r>
-            <a:endParaRPr lang="en-US" sz="1800" b="1" spc="-1" dirty="0">
-              <a:latin typeface="Century Gothic"/>
-            </a:endParaRPr>
-          </a:p>
-          <a:p>
-            <a:pPr>
-              <a:spcBef>
-                <a:spcPts val="400"/>
-              </a:spcBef>
-              <a:spcAft>
-                <a:spcPts val="2400"/>
-              </a:spcAft>
-              <a:buClr>
-                <a:srgbClr val="0070C0"/>
-              </a:buClr>
-              <a:buFont typeface="Wingdings" panose="05000000000000000000" pitchFamily="2" charset="2"/>
-              <a:buChar char="§"/>
-            </a:pPr>
-            <a:endParaRPr lang="en-US" sz="1800" spc="-1" dirty="0">
-              <a:latin typeface="Century Gothic"/>
-            </a:endParaRPr>
-          </a:p>
-          <a:p>
-            <a:pPr marL="0" indent="0">
-              <a:spcBef>
-                <a:spcPts val="400"/>
-              </a:spcBef>
-              <a:spcAft>
-                <a:spcPts val="2400"/>
-              </a:spcAft>
-              <a:buClr>
-                <a:srgbClr val="0070C0"/>
-              </a:buClr>
-              <a:buNone/>
-            </a:pPr>
-            <a:endParaRPr lang="en-US" sz="2000" spc="-1" dirty="0">
-              <a:latin typeface="Century Gothic"/>
-            </a:endParaRPr>
-          </a:p>
-          <a:p>
-            <a:pPr lvl="1">
-              <a:spcBef>
-                <a:spcPts val="400"/>
-              </a:spcBef>
-              <a:spcAft>
-                <a:spcPts val="2400"/>
-              </a:spcAft>
-              <a:buClr>
-                <a:srgbClr val="0070C0"/>
-              </a:buClr>
-              <a:buFont typeface="Wingdings" panose="05000000000000000000" pitchFamily="2" charset="2"/>
-              <a:buChar char="§"/>
-            </a:pPr>
-            <a:endParaRPr lang="en-US" sz="1400" strike="noStrike" spc="-1" dirty="0">
-              <a:latin typeface="Century Gothic"/>
-            </a:endParaRPr>
-          </a:p>
-        </p:txBody>
-      </p:sp>
-      <p:sp>
-        <p:nvSpPr>
-          <p:cNvPr id="160" name="PlaceHolder 3">
-            <a:extLst>
-              <a:ext uri="{FF2B5EF4-FFF2-40B4-BE49-F238E27FC236}">
-                <a16:creationId xmlns:a16="http://schemas.microsoft.com/office/drawing/2014/main" id="{0DF1A3F0-772D-A247-0D44-2C215E694721}"/>
-              </a:ext>
-            </a:extLst>
-          </p:cNvPr>
-          <p:cNvSpPr>
-            <a:spLocks noGrp="1"/>
-          </p:cNvSpPr>
-          <p:nvPr>
-            <p:ph type="sldNum"/>
-          </p:nvPr>
-        </p:nvSpPr>
-        <p:spPr>
-          <a:xfrm>
-            <a:off x="8376840" y="5692680"/>
-            <a:ext cx="384120" cy="364680"/>
-          </a:xfrm>
-          <a:prstGeom prst="rect">
-            <a:avLst/>
-          </a:prstGeom>
-          <a:noFill/>
-          <a:ln w="0">
-            <a:noFill/>
-          </a:ln>
-        </p:spPr>
-        <p:txBody>
-          <a:bodyPr anchor="ctr">
-            <a:noAutofit/>
-          </a:bodyPr>
-          <a:lstStyle/>
-          <a:p>
-            <a:pPr algn="r">
-              <a:lnSpc>
-                <a:spcPct val="100000"/>
-              </a:lnSpc>
-              <a:buNone/>
-            </a:pPr>
-            <a:fld id="{7D48D3EA-1A87-4EB3-8072-3AEE88103579}" type="slidenum">
-              <a:rPr lang="en-US" sz="1200" b="0" strike="noStrike" spc="-1">
-                <a:solidFill>
-                  <a:srgbClr val="8B8B8B"/>
-                </a:solidFill>
-                <a:latin typeface="Century Gothic"/>
-              </a:rPr>
-              <a:t>10</a:t>
-            </a:fld>
-            <a:endParaRPr lang="en-GB" sz="1200" b="0" strike="noStrike" spc="-1">
-              <a:latin typeface="Times New Roman"/>
-            </a:endParaRPr>
           </a:p>
         </p:txBody>
       </p:sp>
     </p:spTree>
     <p:extLst>
       <p:ext uri="{BB962C8B-B14F-4D97-AF65-F5344CB8AC3E}">
-        <p14:creationId xmlns:p14="http://schemas.microsoft.com/office/powerpoint/2010/main" val="2674446027"/>
+        <p14:creationId xmlns:p14="http://schemas.microsoft.com/office/powerpoint/2010/main" val="2667024758"/>
       </p:ext>
     </p:extLst>
   </p:cSld>
@@ -10432,7 +10354,7 @@
                 </a:solidFill>
                 <a:latin typeface="Century Gothic"/>
               </a:rPr>
-              <a:t>To do list</a:t>
+              <a:t>Conclusion</a:t>
             </a:r>
             <a:endParaRPr lang="en-US" sz="3200" b="0" strike="noStrike" spc="-1" dirty="0">
               <a:solidFill>
@@ -10501,10 +10423,10 @@
       </p:sp>
       <p:sp>
         <p:nvSpPr>
-          <p:cNvPr id="7" name="PlaceHolder 2">
+          <p:cNvPr id="2" name="PlaceHolder 2">
             <a:extLst>
               <a:ext uri="{FF2B5EF4-FFF2-40B4-BE49-F238E27FC236}">
-                <a16:creationId xmlns:a16="http://schemas.microsoft.com/office/drawing/2014/main" id="{66DE14D4-64D4-6D1F-DD92-BC16D674C58B}"/>
+                <a16:creationId xmlns:a16="http://schemas.microsoft.com/office/drawing/2014/main" id="{870990D0-7AC5-46BA-6FC4-274F8E0A3ABE}"/>
               </a:ext>
             </a:extLst>
           </p:cNvPr>
@@ -10515,8 +10437,8 @@
         </p:nvSpPr>
         <p:spPr>
           <a:xfrm>
-            <a:off x="380880" y="1371598"/>
-            <a:ext cx="8109070" cy="4559301"/>
+            <a:off x="380880" y="1375729"/>
+            <a:ext cx="8380080" cy="4468480"/>
           </a:xfrm>
           <a:prstGeom prst="rect">
             <a:avLst/>
@@ -10695,252 +10617,7 @@
             </a:lvl9pPr>
           </a:lstStyle>
           <a:p>
-            <a:pPr>
-              <a:lnSpc>
-                <a:spcPct val="100000"/>
-              </a:lnSpc>
-              <a:spcBef>
-                <a:spcPts val="400"/>
-              </a:spcBef>
-              <a:buClr>
-                <a:srgbClr val="0064C8"/>
-              </a:buClr>
-              <a:buFont typeface="Wingdings" panose="05000000000000000000" pitchFamily="2" charset="2"/>
-              <a:buChar char="§"/>
-            </a:pPr>
-            <a:r>
-              <a:rPr lang="en-US" sz="2000" spc="-1" dirty="0">
-                <a:solidFill>
-                  <a:srgbClr val="000000"/>
-                </a:solidFill>
-                <a:latin typeface="Century Gothic"/>
-              </a:rPr>
-              <a:t>Integrate with cluster for faster inference and explore larger LLMs</a:t>
-            </a:r>
-          </a:p>
-          <a:p>
-            <a:pPr>
-              <a:lnSpc>
-                <a:spcPct val="100000"/>
-              </a:lnSpc>
-              <a:spcBef>
-                <a:spcPts val="400"/>
-              </a:spcBef>
-              <a:buClr>
-                <a:srgbClr val="0064C8"/>
-              </a:buClr>
-              <a:buFont typeface="Wingdings" panose="05000000000000000000" pitchFamily="2" charset="2"/>
-              <a:buChar char="§"/>
-            </a:pPr>
-            <a:endParaRPr lang="en-US" sz="2000" spc="-1" dirty="0">
-              <a:solidFill>
-                <a:srgbClr val="000000"/>
-              </a:solidFill>
-              <a:latin typeface="Century Gothic"/>
-            </a:endParaRPr>
-          </a:p>
-          <a:p>
-            <a:pPr lvl="1">
-              <a:lnSpc>
-                <a:spcPct val="100000"/>
-              </a:lnSpc>
-              <a:spcBef>
-                <a:spcPts val="400"/>
-              </a:spcBef>
-              <a:buClr>
-                <a:srgbClr val="0064C8"/>
-              </a:buClr>
-              <a:buFont typeface="Wingdings" panose="05000000000000000000" pitchFamily="2" charset="2"/>
-              <a:buChar char="§"/>
-            </a:pPr>
-            <a:r>
-              <a:rPr lang="en-US" sz="1600" spc="-1" dirty="0">
-                <a:solidFill>
-                  <a:srgbClr val="000000"/>
-                </a:solidFill>
-                <a:latin typeface="Century Gothic"/>
-              </a:rPr>
-              <a:t>It works already on the workstations with medium-to-large LLMs</a:t>
-            </a:r>
-          </a:p>
-          <a:p>
             <a:pPr marL="0" indent="0">
-              <a:lnSpc>
-                <a:spcPct val="100000"/>
-              </a:lnSpc>
-              <a:spcBef>
-                <a:spcPts val="400"/>
-              </a:spcBef>
-              <a:buClr>
-                <a:srgbClr val="0064C8"/>
-              </a:buClr>
-              <a:buNone/>
-            </a:pPr>
-            <a:endParaRPr lang="en-US" sz="2000" spc="-1" dirty="0">
-              <a:solidFill>
-                <a:srgbClr val="000000"/>
-              </a:solidFill>
-              <a:latin typeface="Century Gothic"/>
-            </a:endParaRPr>
-          </a:p>
-          <a:p>
-            <a:pPr>
-              <a:lnSpc>
-                <a:spcPct val="100000"/>
-              </a:lnSpc>
-              <a:spcBef>
-                <a:spcPts val="400"/>
-              </a:spcBef>
-              <a:buClr>
-                <a:srgbClr val="0064C8"/>
-              </a:buClr>
-              <a:buFont typeface="Wingdings" panose="05000000000000000000" pitchFamily="2" charset="2"/>
-              <a:buChar char="§"/>
-            </a:pPr>
-            <a:r>
-              <a:rPr lang="en-US" sz="2000" spc="-1" dirty="0">
-                <a:solidFill>
-                  <a:srgbClr val="000000"/>
-                </a:solidFill>
-                <a:latin typeface="Century Gothic"/>
-              </a:rPr>
-              <a:t>Clean up the repository and make it available </a:t>
-            </a:r>
-          </a:p>
-          <a:p>
-            <a:pPr>
-              <a:lnSpc>
-                <a:spcPct val="100000"/>
-              </a:lnSpc>
-              <a:spcBef>
-                <a:spcPts val="400"/>
-              </a:spcBef>
-              <a:buClr>
-                <a:srgbClr val="0064C8"/>
-              </a:buClr>
-              <a:buFont typeface="Wingdings" panose="05000000000000000000" pitchFamily="2" charset="2"/>
-              <a:buChar char="§"/>
-            </a:pPr>
-            <a:endParaRPr lang="en-US" sz="2000" spc="-1" dirty="0">
-              <a:solidFill>
-                <a:srgbClr val="000000"/>
-              </a:solidFill>
-              <a:latin typeface="Century Gothic"/>
-            </a:endParaRPr>
-          </a:p>
-          <a:p>
-            <a:pPr lvl="1">
-              <a:lnSpc>
-                <a:spcPct val="100000"/>
-              </a:lnSpc>
-              <a:spcBef>
-                <a:spcPts val="400"/>
-              </a:spcBef>
-              <a:buClr>
-                <a:srgbClr val="0064C8"/>
-              </a:buClr>
-              <a:buFont typeface="Wingdings" panose="05000000000000000000" pitchFamily="2" charset="2"/>
-              <a:buChar char="§"/>
-            </a:pPr>
-            <a:r>
-              <a:rPr lang="en-US" sz="1600" spc="-1" dirty="0">
-                <a:solidFill>
-                  <a:srgbClr val="000000"/>
-                </a:solidFill>
-                <a:latin typeface="Century Gothic"/>
-              </a:rPr>
-              <a:t>An “organization repository” is available for the whole lab to ease the integration of new components</a:t>
-            </a:r>
-          </a:p>
-          <a:p>
-            <a:pPr>
-              <a:lnSpc>
-                <a:spcPct val="100000"/>
-              </a:lnSpc>
-              <a:spcBef>
-                <a:spcPts val="400"/>
-              </a:spcBef>
-              <a:buClr>
-                <a:srgbClr val="0064C8"/>
-              </a:buClr>
-              <a:buFont typeface="Wingdings" panose="05000000000000000000" pitchFamily="2" charset="2"/>
-              <a:buChar char="§"/>
-            </a:pPr>
-            <a:endParaRPr lang="en-US" sz="2000" spc="-1" dirty="0">
-              <a:solidFill>
-                <a:srgbClr val="000000"/>
-              </a:solidFill>
-              <a:latin typeface="Century Gothic"/>
-            </a:endParaRPr>
-          </a:p>
-          <a:p>
-            <a:pPr>
-              <a:lnSpc>
-                <a:spcPct val="100000"/>
-              </a:lnSpc>
-              <a:spcBef>
-                <a:spcPts val="400"/>
-              </a:spcBef>
-              <a:buClr>
-                <a:srgbClr val="0064C8"/>
-              </a:buClr>
-              <a:buFont typeface="Wingdings" panose="05000000000000000000" pitchFamily="2" charset="2"/>
-              <a:buChar char="§"/>
-            </a:pPr>
-            <a:r>
-              <a:rPr lang="en-US" sz="2000" spc="-1" dirty="0">
-                <a:solidFill>
-                  <a:srgbClr val="000000"/>
-                </a:solidFill>
-                <a:latin typeface="Century Gothic"/>
-              </a:rPr>
-              <a:t>Make a guide for lab members for the implementation of AI agents</a:t>
-            </a:r>
-          </a:p>
-          <a:p>
-            <a:pPr>
-              <a:lnSpc>
-                <a:spcPct val="100000"/>
-              </a:lnSpc>
-              <a:spcBef>
-                <a:spcPts val="400"/>
-              </a:spcBef>
-              <a:buClr>
-                <a:srgbClr val="0064C8"/>
-              </a:buClr>
-              <a:buFont typeface="Wingdings" panose="05000000000000000000" pitchFamily="2" charset="2"/>
-              <a:buChar char="§"/>
-            </a:pPr>
-            <a:endParaRPr lang="en-US" sz="2000" spc="-1" dirty="0">
-              <a:solidFill>
-                <a:srgbClr val="000000"/>
-              </a:solidFill>
-              <a:latin typeface="Century Gothic"/>
-            </a:endParaRPr>
-          </a:p>
-          <a:p>
-            <a:pPr>
-              <a:lnSpc>
-                <a:spcPct val="100000"/>
-              </a:lnSpc>
-              <a:spcBef>
-                <a:spcPts val="400"/>
-              </a:spcBef>
-              <a:buClr>
-                <a:srgbClr val="0064C8"/>
-              </a:buClr>
-              <a:buFont typeface="Wingdings" panose="05000000000000000000" pitchFamily="2" charset="2"/>
-              <a:buChar char="§"/>
-            </a:pPr>
-            <a:endParaRPr lang="en-US" sz="1800" spc="-1" dirty="0">
-              <a:solidFill>
-                <a:srgbClr val="000000"/>
-              </a:solidFill>
-              <a:latin typeface="Century Gothic"/>
-            </a:endParaRPr>
-          </a:p>
-          <a:p>
-            <a:pPr marL="343080" indent="-343080">
               <a:lnSpc>
                 <a:spcPct val="100000"/>
               </a:lnSpc>
@@ -10953,8 +10630,196 @@
               <a:buClr>
                 <a:srgbClr val="0064C8"/>
               </a:buClr>
-              <a:buFont typeface="Wingdings 2" charset="2"/>
-              <a:buChar char=""/>
+              <a:buNone/>
+            </a:pPr>
+            <a:r>
+              <a:rPr lang="en-US" sz="2000" spc="-1" dirty="0">
+                <a:solidFill>
+                  <a:srgbClr val="0064C8"/>
+                </a:solidFill>
+                <a:latin typeface="Century Gothic"/>
+              </a:rPr>
+              <a:t>Aim: </a:t>
+            </a:r>
+            <a:r>
+              <a:rPr lang="en-US" sz="2000" spc="-1" dirty="0">
+                <a:solidFill>
+                  <a:srgbClr val="000000"/>
+                </a:solidFill>
+                <a:latin typeface="Century Gothic"/>
+              </a:rPr>
+              <a:t>Design an agentic AI framework for interpretable AI applied to QSAR tasks 	</a:t>
+            </a:r>
+          </a:p>
+          <a:p>
+            <a:pPr>
+              <a:lnSpc>
+                <a:spcPct val="100000"/>
+              </a:lnSpc>
+              <a:spcBef>
+                <a:spcPts val="400"/>
+              </a:spcBef>
+              <a:buClr>
+                <a:srgbClr val="0064C8"/>
+              </a:buClr>
+            </a:pPr>
+            <a:r>
+              <a:rPr lang="en-US" sz="2000" spc="-1" dirty="0">
+                <a:solidFill>
+                  <a:srgbClr val="000000"/>
+                </a:solidFill>
+                <a:latin typeface="Century Gothic"/>
+              </a:rPr>
+              <a:t>The framework allows for the building of interpretable AI without coding experience</a:t>
+            </a:r>
+          </a:p>
+          <a:p>
+            <a:pPr>
+              <a:lnSpc>
+                <a:spcPct val="100000"/>
+              </a:lnSpc>
+              <a:spcBef>
+                <a:spcPts val="400"/>
+              </a:spcBef>
+              <a:buClr>
+                <a:srgbClr val="0064C8"/>
+              </a:buClr>
+            </a:pPr>
+            <a:r>
+              <a:rPr lang="en-US" sz="2000" spc="-1" dirty="0" err="1">
+                <a:solidFill>
+                  <a:srgbClr val="000000"/>
+                </a:solidFill>
+                <a:latin typeface="Century Gothic"/>
+              </a:rPr>
+              <a:t>ChemicHAL</a:t>
+            </a:r>
+            <a:r>
+              <a:rPr lang="en-US" sz="2000" spc="-1" dirty="0">
+                <a:solidFill>
+                  <a:srgbClr val="000000"/>
+                </a:solidFill>
+                <a:latin typeface="Century Gothic"/>
+              </a:rPr>
+              <a:t> was able to correctly choose tools and reproduce known results</a:t>
+            </a:r>
+          </a:p>
+          <a:p>
+            <a:pPr>
+              <a:lnSpc>
+                <a:spcPct val="100000"/>
+              </a:lnSpc>
+              <a:spcBef>
+                <a:spcPts val="400"/>
+              </a:spcBef>
+              <a:buClr>
+                <a:srgbClr val="0064C8"/>
+              </a:buClr>
+            </a:pPr>
+            <a:r>
+              <a:rPr lang="en-US" sz="2000" spc="-1" dirty="0">
+                <a:solidFill>
+                  <a:srgbClr val="000000"/>
+                </a:solidFill>
+                <a:latin typeface="Century Gothic"/>
+              </a:rPr>
+              <a:t>The agent provided chemical interpretation for explanations</a:t>
+            </a:r>
+          </a:p>
+          <a:p>
+            <a:pPr>
+              <a:lnSpc>
+                <a:spcPct val="100000"/>
+              </a:lnSpc>
+              <a:spcBef>
+                <a:spcPts val="400"/>
+              </a:spcBef>
+              <a:buClr>
+                <a:srgbClr val="0064C8"/>
+              </a:buClr>
+            </a:pPr>
+            <a:r>
+              <a:rPr lang="en-US" sz="2000" spc="-1" dirty="0">
+                <a:solidFill>
+                  <a:srgbClr val="000000"/>
+                </a:solidFill>
+                <a:latin typeface="Century Gothic"/>
+              </a:rPr>
+              <a:t>Concluded by our Japanese emissary </a:t>
+            </a:r>
+          </a:p>
+          <a:p>
+            <a:pPr>
+              <a:lnSpc>
+                <a:spcPct val="100000"/>
+              </a:lnSpc>
+              <a:spcBef>
+                <a:spcPts val="400"/>
+              </a:spcBef>
+              <a:buClr>
+                <a:srgbClr val="0064C8"/>
+              </a:buClr>
+            </a:pPr>
+            <a:endParaRPr lang="en-US" sz="2000" spc="-1" dirty="0">
+              <a:solidFill>
+                <a:srgbClr val="000000"/>
+              </a:solidFill>
+              <a:latin typeface="Century Gothic"/>
+            </a:endParaRPr>
+          </a:p>
+          <a:p>
+            <a:pPr>
+              <a:lnSpc>
+                <a:spcPct val="100000"/>
+              </a:lnSpc>
+              <a:spcBef>
+                <a:spcPts val="400"/>
+              </a:spcBef>
+              <a:buClr>
+                <a:srgbClr val="0064C8"/>
+              </a:buClr>
+            </a:pPr>
+            <a:endParaRPr lang="en-US" sz="2000" spc="-1" dirty="0">
+              <a:solidFill>
+                <a:srgbClr val="000000"/>
+              </a:solidFill>
+              <a:latin typeface="Century Gothic"/>
+            </a:endParaRPr>
+          </a:p>
+          <a:p>
+            <a:pPr>
+              <a:lnSpc>
+                <a:spcPct val="100000"/>
+              </a:lnSpc>
+              <a:spcBef>
+                <a:spcPts val="400"/>
+              </a:spcBef>
+              <a:buClr>
+                <a:srgbClr val="0064C8"/>
+              </a:buClr>
+            </a:pPr>
+            <a:endParaRPr lang="en-US" sz="2000" spc="-1" dirty="0">
+              <a:solidFill>
+                <a:srgbClr val="000000"/>
+              </a:solidFill>
+              <a:latin typeface="Century Gothic"/>
+            </a:endParaRPr>
+          </a:p>
+          <a:p>
+            <a:pPr marL="0" indent="0">
+              <a:lnSpc>
+                <a:spcPct val="100000"/>
+              </a:lnSpc>
+              <a:spcBef>
+                <a:spcPts val="400"/>
+              </a:spcBef>
+              <a:spcAft>
+                <a:spcPts val="601"/>
+              </a:spcAft>
+              <a:buClr>
+                <a:srgbClr val="0064C8"/>
+              </a:buClr>
+              <a:buNone/>
             </a:pPr>
             <a:endParaRPr lang="en-US" sz="2000" b="1" spc="-1" dirty="0">
               <a:solidFill>
@@ -10968,7 +10833,7 @@
     </p:spTree>
     <p:extLst>
       <p:ext uri="{BB962C8B-B14F-4D97-AF65-F5344CB8AC3E}">
-        <p14:creationId xmlns:p14="http://schemas.microsoft.com/office/powerpoint/2010/main" val="3727029337"/>
+        <p14:creationId xmlns:p14="http://schemas.microsoft.com/office/powerpoint/2010/main" val="975240416"/>
       </p:ext>
     </p:extLst>
   </p:cSld>
@@ -11049,7 +10914,7 @@
                 </a:solidFill>
                 <a:latin typeface="Century Gothic"/>
               </a:rPr>
-              <a:t>Framing</a:t>
+              <a:t>Future perspective</a:t>
             </a:r>
             <a:endParaRPr lang="en-US" sz="3200" b="0" strike="noStrike" spc="-1" dirty="0">
               <a:solidFill>
@@ -11118,10 +10983,10 @@
       </p:sp>
       <p:sp>
         <p:nvSpPr>
-          <p:cNvPr id="7" name="PlaceHolder 2">
+          <p:cNvPr id="2" name="PlaceHolder 2">
             <a:extLst>
               <a:ext uri="{FF2B5EF4-FFF2-40B4-BE49-F238E27FC236}">
-                <a16:creationId xmlns:a16="http://schemas.microsoft.com/office/drawing/2014/main" id="{66DE14D4-64D4-6D1F-DD92-BC16D674C58B}"/>
+                <a16:creationId xmlns:a16="http://schemas.microsoft.com/office/drawing/2014/main" id="{870990D0-7AC5-46BA-6FC4-274F8E0A3ABE}"/>
               </a:ext>
             </a:extLst>
           </p:cNvPr>
@@ -11132,8 +10997,8 @@
         </p:nvSpPr>
         <p:spPr>
           <a:xfrm>
-            <a:off x="380880" y="1371598"/>
-            <a:ext cx="8109070" cy="4559301"/>
+            <a:off x="380880" y="1375729"/>
+            <a:ext cx="8380080" cy="4468480"/>
           </a:xfrm>
           <a:prstGeom prst="rect">
             <a:avLst/>
@@ -11322,8 +11187,6 @@
               <a:buClr>
                 <a:srgbClr val="0064C8"/>
               </a:buClr>
-              <a:buFont typeface="Wingdings" panose="05000000000000000000" pitchFamily="2" charset="2"/>
-              <a:buChar char="§"/>
             </a:pPr>
             <a:r>
               <a:rPr lang="en-US" sz="2000" spc="-1" dirty="0">
@@ -11332,11 +11195,11 @@
                 </a:solidFill>
                 <a:latin typeface="Century Gothic"/>
               </a:rPr>
-              <a:t>How to frame the project:</a:t>
+              <a:t>Make an “organization repository” available for the whole lab to ease the integration of new components</a:t>
             </a:r>
           </a:p>
           <a:p>
-            <a:pPr lvl="1">
+            <a:pPr>
               <a:lnSpc>
                 <a:spcPct val="100000"/>
               </a:lnSpc>
@@ -11346,21 +11209,19 @@
               <a:buClr>
                 <a:srgbClr val="0064C8"/>
               </a:buClr>
-              <a:buFont typeface="Wingdings" panose="05000000000000000000" pitchFamily="2" charset="2"/>
-              <a:buChar char="§"/>
             </a:pPr>
             <a:r>
-              <a:rPr lang="en-US" sz="1600" spc="-1" dirty="0">
+              <a:rPr lang="en-US" sz="2000" spc="-1" dirty="0">
                 <a:solidFill>
                   <a:srgbClr val="000000"/>
                 </a:solidFill>
                 <a:latin typeface="Century Gothic"/>
               </a:rPr>
-              <a:t>A proof-of-concept study?</a:t>
+              <a:t>Create a guide for lab members for the implementation of AI agents</a:t>
             </a:r>
           </a:p>
           <a:p>
-            <a:pPr lvl="1">
+            <a:pPr marL="0" indent="0">
               <a:lnSpc>
                 <a:spcPct val="100000"/>
               </a:lnSpc>
@@ -11370,158 +11231,7 @@
               <a:buClr>
                 <a:srgbClr val="0064C8"/>
               </a:buClr>
-              <a:buFont typeface="Wingdings" panose="05000000000000000000" pitchFamily="2" charset="2"/>
-              <a:buChar char="§"/>
-            </a:pPr>
-            <a:r>
-              <a:rPr lang="en-US" sz="1600" spc="-1" dirty="0">
-                <a:solidFill>
-                  <a:srgbClr val="000000"/>
-                </a:solidFill>
-                <a:latin typeface="Century Gothic"/>
-              </a:rPr>
-              <a:t>An explainability platform for XAI applied to molecular design?</a:t>
-            </a:r>
-          </a:p>
-          <a:p>
-            <a:pPr lvl="1">
-              <a:lnSpc>
-                <a:spcPct val="100000"/>
-              </a:lnSpc>
-              <a:spcBef>
-                <a:spcPts val="400"/>
-              </a:spcBef>
-              <a:buClr>
-                <a:srgbClr val="0064C8"/>
-              </a:buClr>
-              <a:buFont typeface="Wingdings" panose="05000000000000000000" pitchFamily="2" charset="2"/>
-              <a:buChar char="§"/>
-            </a:pPr>
-            <a:r>
-              <a:rPr lang="en-US" sz="1600" spc="-1" dirty="0">
-                <a:solidFill>
-                  <a:srgbClr val="000000"/>
-                </a:solidFill>
-                <a:latin typeface="Century Gothic"/>
-              </a:rPr>
-              <a:t>An explainability platform for XAI specific to molecular selectivity?</a:t>
-            </a:r>
-          </a:p>
-          <a:p>
-            <a:pPr lvl="1">
-              <a:lnSpc>
-                <a:spcPct val="100000"/>
-              </a:lnSpc>
-              <a:spcBef>
-                <a:spcPts val="400"/>
-              </a:spcBef>
-              <a:buClr>
-                <a:srgbClr val="0064C8"/>
-              </a:buClr>
-              <a:buFont typeface="Wingdings" panose="05000000000000000000" pitchFamily="2" charset="2"/>
-              <a:buChar char="§"/>
-            </a:pPr>
-            <a:r>
-              <a:rPr lang="en-US" sz="1600" spc="-1" dirty="0">
-                <a:solidFill>
-                  <a:srgbClr val="000000"/>
-                </a:solidFill>
-                <a:latin typeface="Century Gothic"/>
-              </a:rPr>
-              <a:t>A modular </a:t>
-            </a:r>
-            <a:r>
-              <a:rPr lang="en-US" sz="1600" spc="-1" dirty="0" err="1">
-                <a:solidFill>
-                  <a:srgbClr val="000000"/>
-                </a:solidFill>
-                <a:latin typeface="Century Gothic"/>
-              </a:rPr>
-              <a:t>explainability</a:t>
-            </a:r>
-            <a:r>
-              <a:rPr lang="en-US" sz="1600" spc="-1" dirty="0">
-                <a:solidFill>
-                  <a:srgbClr val="000000"/>
-                </a:solidFill>
-                <a:latin typeface="Century Gothic"/>
-              </a:rPr>
-              <a:t>-enhanced platform for </a:t>
-            </a:r>
-            <a:r>
-              <a:rPr lang="en-US" sz="1600" spc="-1" dirty="0" err="1">
-                <a:solidFill>
-                  <a:srgbClr val="000000"/>
-                </a:solidFill>
-                <a:latin typeface="Century Gothic"/>
-              </a:rPr>
-              <a:t>chemoinformatics</a:t>
-            </a:r>
-            <a:r>
-              <a:rPr lang="en-US" sz="1600" spc="-1" dirty="0">
-                <a:solidFill>
-                  <a:srgbClr val="000000"/>
-                </a:solidFill>
-                <a:latin typeface="Century Gothic"/>
-              </a:rPr>
-              <a:t>? </a:t>
-            </a:r>
-          </a:p>
-          <a:p>
-            <a:pPr lvl="1">
-              <a:lnSpc>
-                <a:spcPct val="100000"/>
-              </a:lnSpc>
-              <a:spcBef>
-                <a:spcPts val="400"/>
-              </a:spcBef>
-              <a:buClr>
-                <a:srgbClr val="0064C8"/>
-              </a:buClr>
-              <a:buFont typeface="Wingdings" panose="05000000000000000000" pitchFamily="2" charset="2"/>
-              <a:buChar char="§"/>
-            </a:pPr>
-            <a:endParaRPr lang="en-US" sz="1600" spc="-1" dirty="0">
-              <a:solidFill>
-                <a:srgbClr val="000000"/>
-              </a:solidFill>
-              <a:latin typeface="Century Gothic"/>
-            </a:endParaRPr>
-          </a:p>
-          <a:p>
-            <a:pPr lvl="1">
-              <a:lnSpc>
-                <a:spcPct val="100000"/>
-              </a:lnSpc>
-              <a:spcBef>
-                <a:spcPts val="400"/>
-              </a:spcBef>
-              <a:buClr>
-                <a:srgbClr val="0064C8"/>
-              </a:buClr>
-              <a:buFont typeface="Wingdings" panose="05000000000000000000" pitchFamily="2" charset="2"/>
-              <a:buChar char="§"/>
-            </a:pPr>
-            <a:endParaRPr lang="en-US" sz="1600" spc="-1" dirty="0">
-              <a:solidFill>
-                <a:srgbClr val="000000"/>
-              </a:solidFill>
-              <a:latin typeface="Century Gothic"/>
-            </a:endParaRPr>
-          </a:p>
-          <a:p>
-            <a:pPr>
-              <a:lnSpc>
-                <a:spcPct val="100000"/>
-              </a:lnSpc>
-              <a:spcBef>
-                <a:spcPts val="400"/>
-              </a:spcBef>
-              <a:buClr>
-                <a:srgbClr val="0064C8"/>
-              </a:buClr>
-              <a:buFont typeface="Wingdings" panose="05000000000000000000" pitchFamily="2" charset="2"/>
-              <a:buChar char="§"/>
+              <a:buNone/>
             </a:pPr>
             <a:endParaRPr lang="en-US" sz="2000" spc="-1" dirty="0">
               <a:solidFill>
@@ -11541,10 +11251,8 @@
               <a:buClr>
                 <a:srgbClr val="0064C8"/>
               </a:buClr>
-              <a:buFont typeface="Wingdings" panose="05000000000000000000" pitchFamily="2" charset="2"/>
-              <a:buChar char="§"/>
             </a:pPr>
-            <a:endParaRPr lang="en-US" sz="1800" spc="-1" dirty="0">
+            <a:endParaRPr lang="en-US" sz="2000" spc="-1" dirty="0">
               <a:solidFill>
                 <a:srgbClr val="000000"/>
               </a:solidFill>
@@ -11552,7 +11260,26 @@
             </a:endParaRPr>
           </a:p>
           <a:p>
-            <a:pPr marL="343080" indent="-343080">
+            <a:pPr>
+              <a:lnSpc>
+                <a:spcPct val="100000"/>
+              </a:lnSpc>
+              <a:spcBef>
+                <a:spcPts val="400"/>
+              </a:spcBef>
+              <a:buClr>
+                <a:srgbClr val="0064C8"/>
+              </a:buClr>
+            </a:pPr>
+            <a:endParaRPr lang="en-US" sz="2000" spc="-1" dirty="0">
+              <a:solidFill>
+                <a:srgbClr val="000000"/>
+              </a:solidFill>
+              <a:latin typeface="Century Gothic"/>
+            </a:endParaRPr>
+          </a:p>
+          <a:p>
+            <a:pPr marL="0" indent="0">
               <a:lnSpc>
                 <a:spcPct val="100000"/>
               </a:lnSpc>
@@ -11565,8 +11292,7 @@
               <a:buClr>
                 <a:srgbClr val="0064C8"/>
               </a:buClr>
-              <a:buFont typeface="Wingdings 2" charset="2"/>
-              <a:buChar char=""/>
+              <a:buNone/>
             </a:pPr>
             <a:endParaRPr lang="en-US" sz="2000" b="1" spc="-1" dirty="0">
               <a:solidFill>
@@ -11577,10 +11303,45 @@
           </a:p>
         </p:txBody>
       </p:sp>
+      <p:pic>
+        <p:nvPicPr>
+          <p:cNvPr id="4" name="Picture 3">
+            <a:extLst>
+              <a:ext uri="{FF2B5EF4-FFF2-40B4-BE49-F238E27FC236}">
+                <a16:creationId xmlns:a16="http://schemas.microsoft.com/office/drawing/2014/main" id="{A9172708-06AB-AE7A-4BC0-05B1328EE700}"/>
+              </a:ext>
+            </a:extLst>
+          </p:cNvPr>
+          <p:cNvPicPr>
+            <a:picLocks noChangeAspect="1"/>
+          </p:cNvPicPr>
+          <p:nvPr/>
+        </p:nvPicPr>
+        <p:blipFill>
+          <a:blip r:embed="rId2" cstate="print">
+            <a:extLst>
+              <a:ext uri="{28A0092B-C50C-407E-A947-70E740481C1C}">
+                <a14:useLocalDpi xmlns:a14="http://schemas.microsoft.com/office/drawing/2010/main" val="0"/>
+              </a:ext>
+            </a:extLst>
+          </a:blip>
+          <a:srcRect/>
+          <a:stretch/>
+        </p:blipFill>
+        <p:spPr>
+          <a:xfrm>
+            <a:off x="982609" y="2941982"/>
+            <a:ext cx="7176621" cy="3082493"/>
+          </a:xfrm>
+          <a:prstGeom prst="rect">
+            <a:avLst/>
+          </a:prstGeom>
+        </p:spPr>
+      </p:pic>
     </p:spTree>
     <p:extLst>
       <p:ext uri="{BB962C8B-B14F-4D97-AF65-F5344CB8AC3E}">
-        <p14:creationId xmlns:p14="http://schemas.microsoft.com/office/powerpoint/2010/main" val="1594879052"/>
+        <p14:creationId xmlns:p14="http://schemas.microsoft.com/office/powerpoint/2010/main" val="754724518"/>
       </p:ext>
     </p:extLst>
   </p:cSld>
@@ -11591,7 +11352,7 @@
 </file>
 
 <file path=ppt/slides/slide13.xml><?xml version="1.0" encoding="utf-8"?>
-<p:sld xmlns:a="http://schemas.openxmlformats.org/drawingml/2006/main" xmlns:r="http://schemas.openxmlformats.org/officeDocument/2006/relationships" xmlns:p="http://schemas.openxmlformats.org/presentationml/2006/main" show="0">
+<p:sld xmlns:a="http://schemas.openxmlformats.org/drawingml/2006/main" xmlns:r="http://schemas.openxmlformats.org/officeDocument/2006/relationships" xmlns:p="http://schemas.openxmlformats.org/presentationml/2006/main">
   <p:cSld>
     <p:spTree>
       <p:nvGrpSpPr>
@@ -11661,7 +11422,7 @@
                 </a:solidFill>
                 <a:latin typeface="Century Gothic"/>
               </a:rPr>
-              <a:t>Exemplary answer output</a:t>
+              <a:t>Lessons learned</a:t>
             </a:r>
             <a:endParaRPr lang="en-US" sz="3200" b="0" strike="noStrike" spc="-1" dirty="0">
               <a:solidFill>
@@ -11730,10 +11491,10 @@
       </p:sp>
       <p:sp>
         <p:nvSpPr>
-          <p:cNvPr id="2" name="PlaceHolder 2">
+          <p:cNvPr id="7" name="PlaceHolder 2">
             <a:extLst>
               <a:ext uri="{FF2B5EF4-FFF2-40B4-BE49-F238E27FC236}">
-                <a16:creationId xmlns:a16="http://schemas.microsoft.com/office/drawing/2014/main" id="{870990D0-7AC5-46BA-6FC4-274F8E0A3ABE}"/>
+                <a16:creationId xmlns:a16="http://schemas.microsoft.com/office/drawing/2014/main" id="{66DE14D4-64D4-6D1F-DD92-BC16D674C58B}"/>
               </a:ext>
             </a:extLst>
           </p:cNvPr>
@@ -11745,7 +11506,7 @@
         <p:spPr>
           <a:xfrm>
             <a:off x="380880" y="1371598"/>
-            <a:ext cx="3306353" cy="4559301"/>
+            <a:ext cx="8109070" cy="4559301"/>
           </a:xfrm>
           <a:prstGeom prst="rect">
             <a:avLst/>
@@ -11944,7 +11705,7 @@
                 </a:solidFill>
                 <a:latin typeface="Century Gothic"/>
               </a:rPr>
-              <a:t>Build an ML model for a given dataset</a:t>
+              <a:t>Setup inference on a work-station (hopefully cluster in future)</a:t>
             </a:r>
           </a:p>
           <a:p>
@@ -11989,11 +11750,11 @@
                 </a:solidFill>
                 <a:latin typeface="Century Gothic"/>
               </a:rPr>
-              <a:t>Get a complete report</a:t>
+              <a:t>The quality and choice of LLM matters a lot</a:t>
             </a:r>
           </a:p>
           <a:p>
-            <a:pPr lvl="1">
+            <a:pPr marL="0" indent="0">
               <a:lnSpc>
                 <a:spcPct val="100000"/>
               </a:lnSpc>
@@ -12003,21 +11764,17 @@
               <a:buClr>
                 <a:srgbClr val="0064C8"/>
               </a:buClr>
-              <a:buFont typeface="Symbol" panose="05050102010706020507" pitchFamily="18" charset="2"/>
-              <a:buChar char="-"/>
+              <a:buNone/>
             </a:pPr>
-            <a:r>
-              <a:rPr lang="en-US" sz="1800" spc="-1" dirty="0">
-                <a:solidFill>
-                  <a:srgbClr val="000000"/>
-                </a:solidFill>
-                <a:latin typeface="Century Gothic"/>
-              </a:rPr>
-              <a:t>Dataset summary</a:t>
-            </a:r>
-          </a:p>
-          <a:p>
-            <a:pPr lvl="1">
+            <a:endParaRPr lang="en-US" sz="2000" spc="-1" dirty="0">
+              <a:solidFill>
+                <a:srgbClr val="000000"/>
+              </a:solidFill>
+              <a:latin typeface="Century Gothic"/>
+            </a:endParaRPr>
+          </a:p>
+          <a:p>
+            <a:pPr>
               <a:lnSpc>
                 <a:spcPct val="100000"/>
               </a:lnSpc>
@@ -12027,21 +11784,21 @@
               <a:buClr>
                 <a:srgbClr val="0064C8"/>
               </a:buClr>
-              <a:buFont typeface="Symbol" panose="05050102010706020507" pitchFamily="18" charset="2"/>
-              <a:buChar char="-"/>
+              <a:buFont typeface="Wingdings" panose="05000000000000000000" pitchFamily="2" charset="2"/>
+              <a:buChar char="§"/>
             </a:pPr>
             <a:r>
-              <a:rPr lang="en-US" sz="1800" spc="-1" dirty="0">
+              <a:rPr lang="en-US" sz="2000" spc="-1" dirty="0">
                 <a:solidFill>
                   <a:srgbClr val="000000"/>
                 </a:solidFill>
                 <a:latin typeface="Century Gothic"/>
               </a:rPr>
-              <a:t>Data split statistics</a:t>
+              <a:t>Proper design of docstrings and documentation is essential</a:t>
             </a:r>
           </a:p>
           <a:p>
-            <a:pPr lvl="1">
+            <a:pPr>
               <a:lnSpc>
                 <a:spcPct val="100000"/>
               </a:lnSpc>
@@ -12051,21 +11808,18 @@
               <a:buClr>
                 <a:srgbClr val="0064C8"/>
               </a:buClr>
-              <a:buFont typeface="Symbol" panose="05050102010706020507" pitchFamily="18" charset="2"/>
-              <a:buChar char="-"/>
+              <a:buFont typeface="Wingdings" panose="05000000000000000000" pitchFamily="2" charset="2"/>
+              <a:buChar char="§"/>
             </a:pPr>
-            <a:r>
-              <a:rPr lang="en-US" sz="1800" spc="-1" dirty="0">
-                <a:solidFill>
-                  <a:srgbClr val="000000"/>
-                </a:solidFill>
-                <a:latin typeface="Century Gothic"/>
-              </a:rPr>
-              <a:t>Model training information</a:t>
-            </a:r>
-          </a:p>
-          <a:p>
-            <a:pPr lvl="1">
+            <a:endParaRPr lang="en-US" sz="2000" spc="-1" dirty="0">
+              <a:solidFill>
+                <a:srgbClr val="000000"/>
+              </a:solidFill>
+              <a:latin typeface="Century Gothic"/>
+            </a:endParaRPr>
+          </a:p>
+          <a:p>
+            <a:pPr marL="0" indent="0">
               <a:lnSpc>
                 <a:spcPct val="100000"/>
               </a:lnSpc>
@@ -12075,18 +11829,35 @@
               <a:buClr>
                 <a:srgbClr val="0064C8"/>
               </a:buClr>
-              <a:buFont typeface="Symbol" panose="05050102010706020507" pitchFamily="18" charset="2"/>
-              <a:buChar char="-"/>
+              <a:buNone/>
             </a:pPr>
-            <a:r>
-              <a:rPr lang="en-US" sz="1800" spc="-1" dirty="0">
-                <a:solidFill>
-                  <a:srgbClr val="000000"/>
-                </a:solidFill>
-                <a:latin typeface="Century Gothic"/>
-              </a:rPr>
-              <a:t>Test set performance </a:t>
-            </a:r>
+            <a:endParaRPr lang="en-US" sz="2000" spc="-1" dirty="0">
+              <a:solidFill>
+                <a:srgbClr val="000000"/>
+              </a:solidFill>
+              <a:latin typeface="Century Gothic"/>
+            </a:endParaRPr>
+          </a:p>
+          <a:p>
+            <a:pPr>
+              <a:lnSpc>
+                <a:spcPct val="100000"/>
+              </a:lnSpc>
+              <a:spcBef>
+                <a:spcPts val="400"/>
+              </a:spcBef>
+              <a:buClr>
+                <a:srgbClr val="0064C8"/>
+              </a:buClr>
+              <a:buFont typeface="Wingdings" panose="05000000000000000000" pitchFamily="2" charset="2"/>
+              <a:buChar char="§"/>
+            </a:pPr>
+            <a:endParaRPr lang="en-US" sz="1800" spc="-1" dirty="0">
+              <a:solidFill>
+                <a:srgbClr val="000000"/>
+              </a:solidFill>
+              <a:latin typeface="Century Gothic"/>
+            </a:endParaRPr>
           </a:p>
           <a:p>
             <a:pPr marL="343080" indent="-343080">
@@ -12114,40 +11885,10 @@
           </a:p>
         </p:txBody>
       </p:sp>
-      <p:pic>
-        <p:nvPicPr>
-          <p:cNvPr id="6" name="Picture 5">
-            <a:extLst>
-              <a:ext uri="{FF2B5EF4-FFF2-40B4-BE49-F238E27FC236}">
-                <a16:creationId xmlns:a16="http://schemas.microsoft.com/office/drawing/2014/main" id="{D3BA145D-265C-C0B1-7C0E-2EE32552E491}"/>
-              </a:ext>
-            </a:extLst>
-          </p:cNvPr>
-          <p:cNvPicPr>
-            <a:picLocks noChangeAspect="1"/>
-          </p:cNvPicPr>
-          <p:nvPr/>
-        </p:nvPicPr>
-        <p:blipFill>
-          <a:blip r:embed="rId2"/>
-          <a:stretch>
-            <a:fillRect/>
-          </a:stretch>
-        </p:blipFill>
-        <p:spPr>
-          <a:xfrm>
-            <a:off x="3817354" y="1196437"/>
-            <a:ext cx="4943606" cy="4598149"/>
-          </a:xfrm>
-          <a:prstGeom prst="rect">
-            <a:avLst/>
-          </a:prstGeom>
-        </p:spPr>
-      </p:pic>
     </p:spTree>
     <p:extLst>
       <p:ext uri="{BB962C8B-B14F-4D97-AF65-F5344CB8AC3E}">
-        <p14:creationId xmlns:p14="http://schemas.microsoft.com/office/powerpoint/2010/main" val="2375808848"/>
+        <p14:creationId xmlns:p14="http://schemas.microsoft.com/office/powerpoint/2010/main" val="3727029337"/>
       </p:ext>
     </p:extLst>
   </p:cSld>
@@ -12228,7 +11969,7 @@
                 </a:solidFill>
                 <a:latin typeface="Century Gothic"/>
               </a:rPr>
-              <a:t>Study idea</a:t>
+              <a:t>Project description</a:t>
             </a:r>
             <a:endParaRPr lang="en-US" sz="3200" b="0" strike="noStrike" spc="-1" dirty="0">
               <a:solidFill>
@@ -12311,7 +12052,7 @@
         </p:nvSpPr>
         <p:spPr>
           <a:xfrm>
-            <a:off x="380880" y="1371599"/>
+            <a:off x="380880" y="1375729"/>
             <a:ext cx="8380080" cy="713065"/>
           </a:xfrm>
           <a:prstGeom prst="rect">
@@ -12491,7 +12232,7 @@
             </a:lvl9pPr>
           </a:lstStyle>
           <a:p>
-            <a:pPr marL="343080" indent="-343080">
+            <a:pPr marL="0" indent="0">
               <a:lnSpc>
                 <a:spcPct val="100000"/>
               </a:lnSpc>
@@ -12504,17 +12245,25 @@
               <a:buClr>
                 <a:srgbClr val="0064C8"/>
               </a:buClr>
-              <a:buFont typeface="Wingdings 2" charset="2"/>
-              <a:buChar char=""/>
+              <a:buNone/>
             </a:pPr>
             <a:r>
               <a:rPr lang="en-US" sz="2000" spc="-1" dirty="0">
                 <a:solidFill>
-                  <a:srgbClr val="000000"/>
+                  <a:srgbClr val="0064C8"/>
                 </a:solidFill>
                 <a:latin typeface="Century Gothic"/>
               </a:rPr>
-              <a:t>MCP-based Agent for ML compound explainability </a:t>
+              <a:t>Aim: </a:t>
+            </a:r>
+            <a:r>
+              <a:rPr lang="en-US" sz="2000" spc="-1" dirty="0">
+                <a:solidFill>
+                  <a:srgbClr val="000000"/>
+                </a:solidFill>
+                <a:latin typeface="Century Gothic"/>
+              </a:rPr>
+              <a:t>Design an agentic AI framework for interpretable AI applied to QSAR tasks  </a:t>
             </a:r>
             <a:endParaRPr lang="en-US" sz="2000" b="1" spc="-1" dirty="0">
               <a:solidFill>
@@ -12644,7 +12393,7 @@
                 </a:solidFill>
                 <a:latin typeface="Century Gothic"/>
               </a:rPr>
-              <a:t>Study idea</a:t>
+              <a:t>Project goals</a:t>
             </a:r>
             <a:endParaRPr lang="en-US" sz="3200" b="0" strike="noStrike" spc="-1" dirty="0">
               <a:solidFill>
@@ -12727,8 +12476,8 @@
         </p:nvSpPr>
         <p:spPr>
           <a:xfrm>
-            <a:off x="380880" y="1371599"/>
-            <a:ext cx="8380080" cy="4643307"/>
+            <a:off x="380880" y="1375729"/>
+            <a:ext cx="8380080" cy="1836598"/>
           </a:xfrm>
           <a:prstGeom prst="rect">
             <a:avLst/>
@@ -12907,360 +12656,7 @@
             </a:lvl9pPr>
           </a:lstStyle>
           <a:p>
-            <a:pPr marL="343080" indent="-343080">
-              <a:lnSpc>
-                <a:spcPct val="100000"/>
-              </a:lnSpc>
-              <a:spcBef>
-                <a:spcPts val="400"/>
-              </a:spcBef>
-              <a:buClr>
-                <a:srgbClr val="0064C8"/>
-              </a:buClr>
-              <a:buFont typeface="Wingdings 2" charset="2"/>
-              <a:buChar char=""/>
-            </a:pPr>
-            <a:r>
-              <a:rPr lang="en-US" sz="2000" spc="-1" dirty="0">
-                <a:solidFill>
-                  <a:srgbClr val="000000"/>
-                </a:solidFill>
-                <a:latin typeface="Century Gothic"/>
-              </a:rPr>
-              <a:t>Framework</a:t>
-            </a:r>
-          </a:p>
-          <a:p>
-            <a:pPr lvl="1">
-              <a:lnSpc>
-                <a:spcPct val="100000"/>
-              </a:lnSpc>
-              <a:spcBef>
-                <a:spcPts val="400"/>
-              </a:spcBef>
-              <a:buClr>
-                <a:srgbClr val="0064C8"/>
-              </a:buClr>
-              <a:buFont typeface="Symbol" panose="05050102010706020507" pitchFamily="18" charset="2"/>
-              <a:buChar char="-"/>
-            </a:pPr>
-            <a:r>
-              <a:rPr lang="en-US" sz="1600" spc="-1" dirty="0">
-                <a:solidFill>
-                  <a:srgbClr val="000000"/>
-                </a:solidFill>
-                <a:latin typeface="Century Gothic"/>
-              </a:rPr>
-              <a:t>LM Studio + Open Source LLM (GPT-OSS, </a:t>
-            </a:r>
-            <a:r>
-              <a:rPr lang="en-US" sz="1600" b="1" spc="-1" dirty="0" err="1">
-                <a:solidFill>
-                  <a:srgbClr val="000000"/>
-                </a:solidFill>
-                <a:latin typeface="Century Gothic"/>
-              </a:rPr>
-              <a:t>Qwen</a:t>
-            </a:r>
-            <a:r>
-              <a:rPr lang="en-US" sz="1600" b="1" spc="-1" dirty="0">
-                <a:solidFill>
-                  <a:srgbClr val="000000"/>
-                </a:solidFill>
-                <a:latin typeface="Century Gothic"/>
-              </a:rPr>
-              <a:t> 3.6</a:t>
-            </a:r>
-            <a:r>
-              <a:rPr lang="en-US" sz="1600" spc="-1" dirty="0">
-                <a:solidFill>
-                  <a:srgbClr val="000000"/>
-                </a:solidFill>
-                <a:latin typeface="Century Gothic"/>
-              </a:rPr>
-              <a:t>, Gemma 4, etc.)</a:t>
-            </a:r>
-            <a:br>
-              <a:rPr lang="en-US" sz="1600" spc="-1" dirty="0">
-                <a:solidFill>
-                  <a:srgbClr val="000000"/>
-                </a:solidFill>
-                <a:latin typeface="Century Gothic"/>
-              </a:rPr>
-            </a:br>
-            <a:endParaRPr lang="en-US" sz="1600" spc="-1" dirty="0">
-              <a:solidFill>
-                <a:srgbClr val="000000"/>
-              </a:solidFill>
-              <a:latin typeface="Century Gothic"/>
-            </a:endParaRPr>
-          </a:p>
-          <a:p>
-            <a:pPr>
-              <a:lnSpc>
-                <a:spcPct val="100000"/>
-              </a:lnSpc>
-              <a:spcBef>
-                <a:spcPts val="400"/>
-              </a:spcBef>
-              <a:buClr>
-                <a:srgbClr val="0064C8"/>
-              </a:buClr>
-              <a:buFont typeface="Wingdings" panose="05000000000000000000" pitchFamily="2" charset="2"/>
-              <a:buChar char="§"/>
-            </a:pPr>
-            <a:r>
-              <a:rPr lang="en-US" sz="2000" spc="-1" dirty="0">
-                <a:solidFill>
-                  <a:srgbClr val="000000"/>
-                </a:solidFill>
-                <a:latin typeface="Century Gothic"/>
-              </a:rPr>
-              <a:t>ML models</a:t>
-            </a:r>
-          </a:p>
-          <a:p>
-            <a:pPr lvl="1">
-              <a:lnSpc>
-                <a:spcPct val="100000"/>
-              </a:lnSpc>
-              <a:spcBef>
-                <a:spcPts val="400"/>
-              </a:spcBef>
-              <a:buClr>
-                <a:srgbClr val="0064C8"/>
-              </a:buClr>
-              <a:buFont typeface="Symbol" panose="05050102010706020507" pitchFamily="18" charset="2"/>
-              <a:buChar char="-"/>
-            </a:pPr>
-            <a:r>
-              <a:rPr lang="en-US" sz="1600" spc="-1" dirty="0">
-                <a:solidFill>
-                  <a:srgbClr val="000000"/>
-                </a:solidFill>
-                <a:latin typeface="Century Gothic"/>
-              </a:rPr>
-              <a:t>Traditional ML – RF, SVM</a:t>
-            </a:r>
-          </a:p>
-          <a:p>
-            <a:pPr lvl="1">
-              <a:lnSpc>
-                <a:spcPct val="100000"/>
-              </a:lnSpc>
-              <a:spcBef>
-                <a:spcPts val="400"/>
-              </a:spcBef>
-              <a:buClr>
-                <a:srgbClr val="0064C8"/>
-              </a:buClr>
-              <a:buFont typeface="Symbol" panose="05050102010706020507" pitchFamily="18" charset="2"/>
-              <a:buChar char="-"/>
-            </a:pPr>
-            <a:r>
-              <a:rPr lang="en-US" sz="1600" spc="-1" dirty="0">
-                <a:solidFill>
-                  <a:srgbClr val="000000"/>
-                </a:solidFill>
-                <a:latin typeface="Century Gothic"/>
-              </a:rPr>
-              <a:t>NNs – DNN, GNN</a:t>
-            </a:r>
-          </a:p>
-          <a:p>
-            <a:pPr lvl="1">
-              <a:lnSpc>
-                <a:spcPct val="100000"/>
-              </a:lnSpc>
-              <a:spcBef>
-                <a:spcPts val="400"/>
-              </a:spcBef>
-              <a:buClr>
-                <a:srgbClr val="0064C8"/>
-              </a:buClr>
-              <a:buFont typeface="Symbol" panose="05050102010706020507" pitchFamily="18" charset="2"/>
-              <a:buChar char="-"/>
-            </a:pPr>
-            <a:endParaRPr lang="en-US" sz="1600" spc="-1" dirty="0">
-              <a:solidFill>
-                <a:srgbClr val="000000"/>
-              </a:solidFill>
-              <a:latin typeface="Century Gothic"/>
-            </a:endParaRPr>
-          </a:p>
-          <a:p>
-            <a:pPr>
-              <a:lnSpc>
-                <a:spcPct val="100000"/>
-              </a:lnSpc>
-              <a:spcBef>
-                <a:spcPts val="400"/>
-              </a:spcBef>
-              <a:buClr>
-                <a:srgbClr val="0064C8"/>
-              </a:buClr>
-              <a:buFont typeface="Wingdings" panose="05000000000000000000" pitchFamily="2" charset="2"/>
-              <a:buChar char="§"/>
-            </a:pPr>
-            <a:r>
-              <a:rPr lang="en-US" sz="2000" spc="-1" dirty="0" err="1">
-                <a:solidFill>
-                  <a:srgbClr val="000000"/>
-                </a:solidFill>
-                <a:latin typeface="Century Gothic"/>
-              </a:rPr>
-              <a:t>Explainability</a:t>
-            </a:r>
-            <a:r>
-              <a:rPr lang="en-US" sz="2000" spc="-1" dirty="0">
-                <a:solidFill>
-                  <a:srgbClr val="000000"/>
-                </a:solidFill>
-                <a:latin typeface="Century Gothic"/>
-              </a:rPr>
-              <a:t> methods</a:t>
-            </a:r>
-          </a:p>
-          <a:p>
-            <a:pPr lvl="1">
-              <a:lnSpc>
-                <a:spcPct val="100000"/>
-              </a:lnSpc>
-              <a:spcBef>
-                <a:spcPts val="400"/>
-              </a:spcBef>
-              <a:buClr>
-                <a:srgbClr val="0064C8"/>
-              </a:buClr>
-              <a:buFont typeface="Symbol" panose="05050102010706020507" pitchFamily="18" charset="2"/>
-              <a:buChar char="-"/>
-            </a:pPr>
-            <a:r>
-              <a:rPr lang="en-US" sz="1600" spc="-1" dirty="0">
-                <a:solidFill>
-                  <a:srgbClr val="000000"/>
-                </a:solidFill>
-                <a:latin typeface="Century Gothic"/>
-              </a:rPr>
-              <a:t>SHAP</a:t>
-            </a:r>
-          </a:p>
-          <a:p>
-            <a:pPr lvl="1">
-              <a:lnSpc>
-                <a:spcPct val="100000"/>
-              </a:lnSpc>
-              <a:spcBef>
-                <a:spcPts val="400"/>
-              </a:spcBef>
-              <a:buClr>
-                <a:srgbClr val="0064C8"/>
-              </a:buClr>
-              <a:buFont typeface="Symbol" panose="05050102010706020507" pitchFamily="18" charset="2"/>
-              <a:buChar char="-"/>
-            </a:pPr>
-            <a:r>
-              <a:rPr lang="en-US" sz="1600" spc="-1" dirty="0" err="1">
-                <a:solidFill>
-                  <a:srgbClr val="000000"/>
-                </a:solidFill>
-                <a:latin typeface="Century Gothic"/>
-              </a:rPr>
-              <a:t>MolAnchor</a:t>
-            </a:r>
-            <a:endParaRPr lang="en-US" sz="1600" spc="-1" dirty="0">
-              <a:solidFill>
-                <a:srgbClr val="000000"/>
-              </a:solidFill>
-              <a:latin typeface="Century Gothic"/>
-            </a:endParaRPr>
-          </a:p>
-          <a:p>
-            <a:pPr lvl="1">
-              <a:lnSpc>
-                <a:spcPct val="100000"/>
-              </a:lnSpc>
-              <a:spcBef>
-                <a:spcPts val="400"/>
-              </a:spcBef>
-              <a:buClr>
-                <a:srgbClr val="0064C8"/>
-              </a:buClr>
-              <a:buFont typeface="Symbol" panose="05050102010706020507" pitchFamily="18" charset="2"/>
-              <a:buChar char="-"/>
-            </a:pPr>
-            <a:r>
-              <a:rPr lang="en-US" sz="1600" spc="-1" dirty="0">
-                <a:solidFill>
-                  <a:srgbClr val="000000"/>
-                </a:solidFill>
-                <a:latin typeface="Century Gothic"/>
-              </a:rPr>
-              <a:t>Counterfactuals</a:t>
-            </a:r>
-          </a:p>
-          <a:p>
-            <a:pPr lvl="1">
-              <a:lnSpc>
-                <a:spcPct val="100000"/>
-              </a:lnSpc>
-              <a:spcBef>
-                <a:spcPts val="400"/>
-              </a:spcBef>
-              <a:buClr>
-                <a:srgbClr val="0064C8"/>
-              </a:buClr>
-              <a:buFont typeface="Symbol" panose="05050102010706020507" pitchFamily="18" charset="2"/>
-              <a:buChar char="-"/>
-            </a:pPr>
-            <a:r>
-              <a:rPr lang="en-US" sz="1600" spc="-1" dirty="0" err="1">
-                <a:solidFill>
-                  <a:srgbClr val="000000"/>
-                </a:solidFill>
-                <a:latin typeface="Century Gothic"/>
-              </a:rPr>
-              <a:t>MolCE</a:t>
-            </a:r>
-            <a:endParaRPr lang="en-US" sz="1600" spc="-1" dirty="0">
-              <a:solidFill>
-                <a:srgbClr val="000000"/>
-              </a:solidFill>
-              <a:latin typeface="Century Gothic"/>
-            </a:endParaRPr>
-          </a:p>
-          <a:p>
-            <a:pPr lvl="1">
-              <a:lnSpc>
-                <a:spcPct val="100000"/>
-              </a:lnSpc>
-              <a:spcBef>
-                <a:spcPts val="400"/>
-              </a:spcBef>
-              <a:buClr>
-                <a:srgbClr val="0064C8"/>
-              </a:buClr>
-              <a:buFont typeface="Symbol" panose="05050102010706020507" pitchFamily="18" charset="2"/>
-              <a:buChar char="-"/>
-            </a:pPr>
-            <a:r>
-              <a:rPr lang="en-US" sz="1600" spc="-1" dirty="0" err="1">
-                <a:solidFill>
-                  <a:srgbClr val="000000"/>
-                </a:solidFill>
-                <a:latin typeface="Century Gothic"/>
-              </a:rPr>
-              <a:t>EdgeSHAPer</a:t>
-            </a:r>
-            <a:endParaRPr lang="en-US" sz="1600" spc="-1" dirty="0">
-              <a:solidFill>
-                <a:srgbClr val="000000"/>
-              </a:solidFill>
-              <a:latin typeface="Century Gothic"/>
-            </a:endParaRPr>
-          </a:p>
-          <a:p>
-            <a:pPr marL="457200" lvl="1" indent="0">
+            <a:pPr marL="0" indent="0">
               <a:lnSpc>
                 <a:spcPct val="100000"/>
               </a:lnSpc>
@@ -13275,15 +12671,27 @@
               </a:buClr>
               <a:buNone/>
             </a:pPr>
-            <a:endParaRPr lang="en-US" sz="1600" spc="-1" dirty="0">
-              <a:solidFill>
-                <a:srgbClr val="000000"/>
-              </a:solidFill>
-              <a:latin typeface="Century Gothic"/>
-            </a:endParaRPr>
-          </a:p>
-          <a:p>
-            <a:pPr marL="343080" indent="-343080">
+            <a:r>
+              <a:rPr lang="en-US" sz="2000" spc="-1" dirty="0">
+                <a:solidFill>
+                  <a:srgbClr val="0064C8"/>
+                </a:solidFill>
+                <a:latin typeface="Century Gothic"/>
+              </a:rPr>
+              <a:t>Goal: </a:t>
+            </a:r>
+            <a:r>
+              <a:rPr lang="en-US" sz="2000" spc="-1" dirty="0">
+                <a:solidFill>
+                  <a:srgbClr val="000000"/>
+                </a:solidFill>
+                <a:latin typeface="Century Gothic"/>
+              </a:rPr>
+              <a:t>Showcase the utility of Agentic AI combined with XAI:</a:t>
+            </a:r>
+          </a:p>
+          <a:p>
+            <a:pPr>
               <a:lnSpc>
                 <a:spcPct val="100000"/>
               </a:lnSpc>
@@ -13296,10 +12704,58 @@
               <a:buClr>
                 <a:srgbClr val="0064C8"/>
               </a:buClr>
-              <a:buFont typeface="Wingdings 2" charset="2"/>
-              <a:buChar char=""/>
             </a:pPr>
-            <a:endParaRPr lang="en-US" sz="2000" b="1" spc="-1" dirty="0">
+            <a:r>
+              <a:rPr lang="en-US" sz="2000" spc="-1" dirty="0">
+                <a:solidFill>
+                  <a:srgbClr val="000000"/>
+                </a:solidFill>
+                <a:latin typeface="Century Gothic"/>
+              </a:rPr>
+              <a:t>Provide access to interpretable AI for non-coding chemists</a:t>
+            </a:r>
+          </a:p>
+          <a:p>
+            <a:pPr>
+              <a:lnSpc>
+                <a:spcPct val="100000"/>
+              </a:lnSpc>
+              <a:spcBef>
+                <a:spcPts val="400"/>
+              </a:spcBef>
+              <a:spcAft>
+                <a:spcPts val="601"/>
+              </a:spcAft>
+              <a:buClr>
+                <a:srgbClr val="0064C8"/>
+              </a:buClr>
+            </a:pPr>
+            <a:r>
+              <a:rPr lang="en-US" sz="2000" spc="-1" dirty="0">
+                <a:solidFill>
+                  <a:srgbClr val="000000"/>
+                </a:solidFill>
+                <a:latin typeface="Century Gothic"/>
+              </a:rPr>
+              <a:t>Highlight where using agentic AI can be a advantage over running analysis manually</a:t>
+            </a:r>
+          </a:p>
+          <a:p>
+            <a:pPr>
+              <a:lnSpc>
+                <a:spcPct val="100000"/>
+              </a:lnSpc>
+              <a:spcBef>
+                <a:spcPts val="400"/>
+              </a:spcBef>
+              <a:spcAft>
+                <a:spcPts val="601"/>
+              </a:spcAft>
+              <a:buClr>
+                <a:srgbClr val="0064C8"/>
+              </a:buClr>
+            </a:pPr>
+            <a:endParaRPr lang="en-US" sz="2000" spc="-1" dirty="0">
               <a:solidFill>
                 <a:srgbClr val="000000"/>
               </a:solidFill>
@@ -13308,10 +12764,45 @@
           </a:p>
         </p:txBody>
       </p:sp>
+      <p:pic>
+        <p:nvPicPr>
+          <p:cNvPr id="4" name="Picture 3">
+            <a:extLst>
+              <a:ext uri="{FF2B5EF4-FFF2-40B4-BE49-F238E27FC236}">
+                <a16:creationId xmlns:a16="http://schemas.microsoft.com/office/drawing/2014/main" id="{A9172708-06AB-AE7A-4BC0-05B1328EE700}"/>
+              </a:ext>
+            </a:extLst>
+          </p:cNvPr>
+          <p:cNvPicPr>
+            <a:picLocks noChangeAspect="1"/>
+          </p:cNvPicPr>
+          <p:nvPr/>
+        </p:nvPicPr>
+        <p:blipFill>
+          <a:blip r:embed="rId2" cstate="print">
+            <a:extLst>
+              <a:ext uri="{28A0092B-C50C-407E-A947-70E740481C1C}">
+                <a14:useLocalDpi xmlns:a14="http://schemas.microsoft.com/office/drawing/2010/main" val="0"/>
+              </a:ext>
+            </a:extLst>
+          </a:blip>
+          <a:srcRect/>
+          <a:stretch/>
+        </p:blipFill>
+        <p:spPr>
+          <a:xfrm>
+            <a:off x="992106" y="2982097"/>
+            <a:ext cx="7159787" cy="3075263"/>
+          </a:xfrm>
+          <a:prstGeom prst="rect">
+            <a:avLst/>
+          </a:prstGeom>
+        </p:spPr>
+      </p:pic>
     </p:spTree>
     <p:extLst>
       <p:ext uri="{BB962C8B-B14F-4D97-AF65-F5344CB8AC3E}">
-        <p14:creationId xmlns:p14="http://schemas.microsoft.com/office/powerpoint/2010/main" val="1707478755"/>
+        <p14:creationId xmlns:p14="http://schemas.microsoft.com/office/powerpoint/2010/main" val="999010184"/>
       </p:ext>
     </p:extLst>
   </p:cSld>
@@ -13329,7 +12820,7 @@
         <p:cNvPr id="1" name="">
           <a:extLst>
             <a:ext uri="{FF2B5EF4-FFF2-40B4-BE49-F238E27FC236}">
-              <a16:creationId xmlns:a16="http://schemas.microsoft.com/office/drawing/2014/main" id="{C3CB66AB-4C34-335D-C637-6159F7C9EC35}"/>
+              <a16:creationId xmlns:a16="http://schemas.microsoft.com/office/drawing/2014/main" id="{A6515F23-0912-A838-23CE-B8F00573A2DA}"/>
             </a:ext>
           </a:extLst>
         </p:cNvPr>
@@ -13349,7 +12840,7 @@
           <p:cNvPr id="163" name="PlaceHolder 1">
             <a:extLst>
               <a:ext uri="{FF2B5EF4-FFF2-40B4-BE49-F238E27FC236}">
-                <a16:creationId xmlns:a16="http://schemas.microsoft.com/office/drawing/2014/main" id="{F82143BD-207C-0F21-595D-2BC5AB956A76}"/>
+                <a16:creationId xmlns:a16="http://schemas.microsoft.com/office/drawing/2014/main" id="{57944F4B-F502-E7CC-8790-8737702BC6AC}"/>
               </a:ext>
             </a:extLst>
           </p:cNvPr>
@@ -13386,40 +12877,13 @@
               <a:buNone/>
             </a:pPr>
             <a:r>
-              <a:rPr lang="pt-PT" sz="3200" b="0" strike="noStrike" spc="-1" dirty="0" err="1">
+              <a:rPr lang="en-US" sz="3200" b="0" strike="noStrike" spc="-1" dirty="0">
                 <a:solidFill>
                   <a:srgbClr val="0064C8"/>
                 </a:solidFill>
                 <a:latin typeface="Century Gothic"/>
               </a:rPr>
-              <a:t>Practical</a:t>
-            </a:r>
-            <a:r>
-              <a:rPr lang="pt-PT" sz="3200" b="0" strike="noStrike" spc="-1" dirty="0">
-                <a:solidFill>
-                  <a:srgbClr val="0064C8"/>
-                </a:solidFill>
-                <a:latin typeface="Century Gothic"/>
-              </a:rPr>
-              <a:t> </a:t>
-            </a:r>
-            <a:r>
-              <a:rPr lang="pt-PT" sz="3200" b="0" strike="noStrike" spc="-1" dirty="0" err="1">
-                <a:solidFill>
-                  <a:srgbClr val="0064C8"/>
-                </a:solidFill>
-                <a:latin typeface="Century Gothic"/>
-              </a:rPr>
-              <a:t>Example</a:t>
-            </a:r>
-            <a:r>
-              <a:rPr lang="pt-PT" sz="3200" b="0" strike="noStrike" spc="-1" dirty="0">
-                <a:solidFill>
-                  <a:srgbClr val="0064C8"/>
-                </a:solidFill>
-                <a:latin typeface="Century Gothic"/>
-              </a:rPr>
-              <a:t> - ML</a:t>
+              <a:t>Project setup</a:t>
             </a:r>
             <a:endParaRPr lang="en-US" sz="3200" b="0" strike="noStrike" spc="-1" dirty="0">
               <a:solidFill>
@@ -13435,7 +12899,7 @@
           <p:cNvPr id="165" name="PlaceHolder 3">
             <a:extLst>
               <a:ext uri="{FF2B5EF4-FFF2-40B4-BE49-F238E27FC236}">
-                <a16:creationId xmlns:a16="http://schemas.microsoft.com/office/drawing/2014/main" id="{44B88D20-671C-6A36-AD5A-B00142FEB557}"/>
+                <a16:creationId xmlns:a16="http://schemas.microsoft.com/office/drawing/2014/main" id="{2EFBEA53-7B78-D9A1-93EF-9608A3193D27}"/>
               </a:ext>
             </a:extLst>
           </p:cNvPr>
@@ -13488,10 +12952,10 @@
       </p:sp>
       <p:sp>
         <p:nvSpPr>
-          <p:cNvPr id="7" name="PlaceHolder 2">
+          <p:cNvPr id="2" name="PlaceHolder 2">
             <a:extLst>
               <a:ext uri="{FF2B5EF4-FFF2-40B4-BE49-F238E27FC236}">
-                <a16:creationId xmlns:a16="http://schemas.microsoft.com/office/drawing/2014/main" id="{CFDAB819-6BAF-B7C7-0B20-F55019CACA6B}"/>
+                <a16:creationId xmlns:a16="http://schemas.microsoft.com/office/drawing/2014/main" id="{870990D0-7AC5-46BA-6FC4-274F8E0A3ABE}"/>
               </a:ext>
             </a:extLst>
           </p:cNvPr>
@@ -13502,8 +12966,8 @@
         </p:nvSpPr>
         <p:spPr>
           <a:xfrm>
-            <a:off x="380880" y="1371598"/>
-            <a:ext cx="4190040" cy="4559301"/>
+            <a:off x="380879" y="1355697"/>
+            <a:ext cx="5248644" cy="4643307"/>
           </a:xfrm>
           <a:prstGeom prst="rect">
             <a:avLst/>
@@ -13695,10 +13159,62 @@
               <a:buNone/>
             </a:pPr>
             <a:r>
-              <a:rPr lang="en-US" sz="2000" b="1" strike="noStrike" spc="-1" dirty="0">
+              <a:rPr lang="en-US" sz="2000" spc="-1" dirty="0">
+                <a:solidFill>
+                  <a:srgbClr val="000000"/>
+                </a:solidFill>
                 <a:latin typeface="Century Gothic"/>
               </a:rPr>
-              <a:t>ML prompt</a:t>
+              <a:t>Framework</a:t>
+            </a:r>
+          </a:p>
+          <a:p>
+            <a:pPr>
+              <a:lnSpc>
+                <a:spcPct val="100000"/>
+              </a:lnSpc>
+              <a:spcBef>
+                <a:spcPts val="400"/>
+              </a:spcBef>
+              <a:buClr>
+                <a:srgbClr val="0064C8"/>
+              </a:buClr>
+            </a:pPr>
+            <a:r>
+              <a:rPr lang="en-US" sz="1600" spc="-1" dirty="0">
+                <a:solidFill>
+                  <a:srgbClr val="000000"/>
+                </a:solidFill>
+                <a:latin typeface="Century Gothic"/>
+              </a:rPr>
+              <a:t>LM Studio + Open Source LLM  (</a:t>
+            </a:r>
+            <a:r>
+              <a:rPr lang="en-US" sz="1600" b="1" spc="-1" dirty="0" err="1">
+                <a:solidFill>
+                  <a:srgbClr val="000000"/>
+                </a:solidFill>
+                <a:latin typeface="Century Gothic"/>
+              </a:rPr>
+              <a:t>Qwen</a:t>
+            </a:r>
+            <a:r>
+              <a:rPr lang="en-US" sz="1600" b="1" spc="-1" dirty="0">
+                <a:solidFill>
+                  <a:srgbClr val="000000"/>
+                </a:solidFill>
+                <a:latin typeface="Century Gothic"/>
+              </a:rPr>
+              <a:t> 3.6</a:t>
+            </a:r>
+            <a:r>
+              <a:rPr lang="en-US" sz="1600" spc="-1" dirty="0">
+                <a:solidFill>
+                  <a:srgbClr val="000000"/>
+                </a:solidFill>
+                <a:latin typeface="Century Gothic"/>
+              </a:rPr>
+              <a:t>)</a:t>
             </a:r>
           </a:p>
           <a:p>
@@ -13714,12 +13230,15 @@
               </a:buClr>
               <a:buNone/>
             </a:pPr>
-            <a:endParaRPr lang="en-US" sz="2000" spc="-1" dirty="0">
-              <a:solidFill>
-                <a:srgbClr val="000000"/>
-              </a:solidFill>
-              <a:latin typeface="Century Gothic"/>
-            </a:endParaRPr>
+            <a:r>
+              <a:rPr lang="en-US" sz="2000" spc="-1" dirty="0">
+                <a:solidFill>
+                  <a:srgbClr val="000000"/>
+                </a:solidFill>
+                <a:latin typeface="Century Gothic"/>
+              </a:rPr>
+              <a:t>ML models</a:t>
+            </a:r>
           </a:p>
           <a:p>
             <a:pPr>
@@ -13732,17 +13251,15 @@
               <a:buClr>
                 <a:srgbClr val="0064C8"/>
               </a:buClr>
-              <a:buFont typeface="Wingdings" panose="05000000000000000000" pitchFamily="2" charset="2"/>
-              <a:buChar char="§"/>
             </a:pPr>
             <a:r>
-              <a:rPr lang="en-US" sz="1400" spc="-1" dirty="0">
+              <a:rPr lang="en-US" sz="1600" spc="-1" dirty="0">
                 <a:solidFill>
                   <a:srgbClr val="000000"/>
                 </a:solidFill>
                 <a:latin typeface="Century Gothic"/>
               </a:rPr>
-              <a:t>For the given curated dataset ‘kinase_selectivity.csv’</a:t>
+              <a:t>Traditional ML – RF, BRF, SVM</a:t>
             </a:r>
           </a:p>
           <a:p>
@@ -13756,18 +13273,19 @@
               <a:buClr>
                 <a:srgbClr val="0064C8"/>
               </a:buClr>
-              <a:buFont typeface="Wingdings" panose="05000000000000000000" pitchFamily="2" charset="2"/>
-              <a:buChar char="§"/>
             </a:pPr>
-            <a:endParaRPr lang="en-US" sz="1400" spc="-1" dirty="0">
-              <a:solidFill>
-                <a:srgbClr val="000000"/>
-              </a:solidFill>
-              <a:latin typeface="Century Gothic"/>
-            </a:endParaRPr>
-          </a:p>
-          <a:p>
-            <a:pPr>
+            <a:r>
+              <a:rPr lang="en-US" sz="1600" spc="-1" dirty="0">
+                <a:solidFill>
+                  <a:srgbClr val="000000"/>
+                </a:solidFill>
+                <a:latin typeface="Century Gothic"/>
+              </a:rPr>
+              <a:t>Deep learning – DNN, GNN (GCN, GAT etc.)</a:t>
+            </a:r>
+          </a:p>
+          <a:p>
+            <a:pPr marL="0" indent="0">
               <a:lnSpc>
                 <a:spcPct val="100000"/>
               </a:lnSpc>
@@ -13777,17 +13295,16 @@
               <a:buClr>
                 <a:srgbClr val="0064C8"/>
               </a:buClr>
-              <a:buFont typeface="Wingdings" panose="05000000000000000000" pitchFamily="2" charset="2"/>
-              <a:buChar char="§"/>
+              <a:buNone/>
             </a:pPr>
             <a:r>
-              <a:rPr lang="en-US" sz="1400" spc="-1" dirty="0">
+              <a:rPr lang="en-US" sz="2000" spc="-1" dirty="0">
                 <a:solidFill>
                   <a:srgbClr val="000000"/>
                 </a:solidFill>
                 <a:latin typeface="Century Gothic"/>
               </a:rPr>
-              <a:t>Split the data using a scaffold split using a ratio of  80%/20% train/test</a:t>
+              <a:t>Datasets</a:t>
             </a:r>
           </a:p>
           <a:p>
@@ -13801,15 +13318,16 @@
               <a:buClr>
                 <a:srgbClr val="0064C8"/>
               </a:buClr>
-              <a:buFont typeface="Wingdings" panose="05000000000000000000" pitchFamily="2" charset="2"/>
-              <a:buChar char="§"/>
             </a:pPr>
-            <a:endParaRPr lang="en-US" sz="1400" spc="-1" dirty="0">
-              <a:solidFill>
-                <a:srgbClr val="000000"/>
-              </a:solidFill>
-              <a:latin typeface="Century Gothic"/>
-            </a:endParaRPr>
+            <a:r>
+              <a:rPr lang="en-US" sz="1600" spc="-1" dirty="0">
+                <a:solidFill>
+                  <a:srgbClr val="000000"/>
+                </a:solidFill>
+                <a:latin typeface="Century Gothic"/>
+              </a:rPr>
+              <a:t>Binary bioactivity classification</a:t>
+            </a:r>
           </a:p>
           <a:p>
             <a:pPr>
@@ -13822,21 +13340,19 @@
               <a:buClr>
                 <a:srgbClr val="0064C8"/>
               </a:buClr>
-              <a:buFont typeface="Wingdings" panose="05000000000000000000" pitchFamily="2" charset="2"/>
-              <a:buChar char="§"/>
             </a:pPr>
             <a:r>
-              <a:rPr lang="en-US" sz="1400" spc="-1" dirty="0">
+              <a:rPr lang="en-US" sz="1600" spc="-1" dirty="0">
                 <a:solidFill>
                   <a:srgbClr val="000000"/>
                 </a:solidFill>
                 <a:latin typeface="Century Gothic"/>
               </a:rPr>
-              <a:t>Train an RF model and perform a 5-fold CV for hyperparameter optimization</a:t>
+              <a:t>Multiclass selectivity prediction</a:t>
             </a:r>
           </a:p>
           <a:p>
-            <a:pPr>
+            <a:pPr marL="0" indent="0">
               <a:lnSpc>
                 <a:spcPct val="100000"/>
               </a:lnSpc>
@@ -13846,15 +13362,17 @@
               <a:buClr>
                 <a:srgbClr val="0064C8"/>
               </a:buClr>
-              <a:buFont typeface="Wingdings" panose="05000000000000000000" pitchFamily="2" charset="2"/>
-              <a:buChar char="§"/>
+              <a:buNone/>
             </a:pPr>
-            <a:endParaRPr lang="en-US" sz="1400" spc="-1" dirty="0">
-              <a:solidFill>
-                <a:srgbClr val="000000"/>
-              </a:solidFill>
-              <a:latin typeface="Century Gothic"/>
-            </a:endParaRPr>
+            <a:r>
+              <a:rPr lang="en-US" sz="2000" spc="-1" dirty="0">
+                <a:solidFill>
+                  <a:srgbClr val="000000"/>
+                </a:solidFill>
+                <a:latin typeface="Century Gothic"/>
+              </a:rPr>
+              <a:t>Splitting strategies</a:t>
+            </a:r>
           </a:p>
           <a:p>
             <a:pPr>
@@ -13867,17 +13385,131 @@
               <a:buClr>
                 <a:srgbClr val="0064C8"/>
               </a:buClr>
-              <a:buFont typeface="Wingdings" panose="05000000000000000000" pitchFamily="2" charset="2"/>
-              <a:buChar char="§"/>
             </a:pPr>
             <a:r>
-              <a:rPr lang="en-US" sz="1400" spc="-1" dirty="0">
+              <a:rPr lang="en-US" sz="1600" spc="-1" dirty="0">
                 <a:solidFill>
                   <a:srgbClr val="000000"/>
                 </a:solidFill>
                 <a:latin typeface="Century Gothic"/>
               </a:rPr>
-              <a:t>Calculate and display the test set performance using appropriate metrics</a:t>
+              <a:t>Random</a:t>
+            </a:r>
+          </a:p>
+          <a:p>
+            <a:pPr>
+              <a:lnSpc>
+                <a:spcPct val="100000"/>
+              </a:lnSpc>
+              <a:spcBef>
+                <a:spcPts val="400"/>
+              </a:spcBef>
+              <a:buClr>
+                <a:srgbClr val="0064C8"/>
+              </a:buClr>
+            </a:pPr>
+            <a:r>
+              <a:rPr lang="en-US" sz="1600" spc="-1" dirty="0">
+                <a:solidFill>
+                  <a:srgbClr val="000000"/>
+                </a:solidFill>
+                <a:latin typeface="Century Gothic"/>
+              </a:rPr>
+              <a:t>Scaffold</a:t>
+            </a:r>
+          </a:p>
+          <a:p>
+            <a:pPr marL="0" indent="0">
+              <a:lnSpc>
+                <a:spcPct val="100000"/>
+              </a:lnSpc>
+              <a:spcBef>
+                <a:spcPts val="400"/>
+              </a:spcBef>
+              <a:buClr>
+                <a:srgbClr val="0064C8"/>
+              </a:buClr>
+              <a:buNone/>
+            </a:pPr>
+            <a:r>
+              <a:rPr lang="en-US" sz="2000" spc="-1" dirty="0" err="1">
+                <a:solidFill>
+                  <a:srgbClr val="000000"/>
+                </a:solidFill>
+                <a:latin typeface="Century Gothic"/>
+              </a:rPr>
+              <a:t>Explainability</a:t>
+            </a:r>
+            <a:r>
+              <a:rPr lang="en-US" sz="2000" spc="-1" dirty="0">
+                <a:solidFill>
+                  <a:srgbClr val="000000"/>
+                </a:solidFill>
+                <a:latin typeface="Century Gothic"/>
+              </a:rPr>
+              <a:t> methods</a:t>
+            </a:r>
+          </a:p>
+          <a:p>
+            <a:pPr>
+              <a:lnSpc>
+                <a:spcPct val="100000"/>
+              </a:lnSpc>
+              <a:spcBef>
+                <a:spcPts val="400"/>
+              </a:spcBef>
+              <a:buClr>
+                <a:srgbClr val="0064C8"/>
+              </a:buClr>
+            </a:pPr>
+            <a:r>
+              <a:rPr lang="en-US" sz="1600" spc="-1" dirty="0">
+                <a:solidFill>
+                  <a:srgbClr val="000000"/>
+                </a:solidFill>
+                <a:latin typeface="Century Gothic"/>
+              </a:rPr>
+              <a:t>SHAP (</a:t>
+            </a:r>
+            <a:r>
+              <a:rPr lang="en-US" sz="1600" spc="-1" dirty="0" err="1">
+                <a:solidFill>
+                  <a:srgbClr val="000000"/>
+                </a:solidFill>
+                <a:latin typeface="Century Gothic"/>
+              </a:rPr>
+              <a:t>EdgeSHAPer</a:t>
+            </a:r>
+            <a:r>
+              <a:rPr lang="en-US" sz="1600" spc="-1" dirty="0">
+                <a:solidFill>
+                  <a:srgbClr val="000000"/>
+                </a:solidFill>
+                <a:latin typeface="Century Gothic"/>
+              </a:rPr>
+              <a:t>)</a:t>
+            </a:r>
+          </a:p>
+          <a:p>
+            <a:pPr>
+              <a:lnSpc>
+                <a:spcPct val="100000"/>
+              </a:lnSpc>
+              <a:spcBef>
+                <a:spcPts val="400"/>
+              </a:spcBef>
+              <a:buClr>
+                <a:srgbClr val="0064C8"/>
+              </a:buClr>
+            </a:pPr>
+            <a:r>
+              <a:rPr lang="en-US" sz="1600" spc="-1" dirty="0" err="1">
+                <a:solidFill>
+                  <a:srgbClr val="000000"/>
+                </a:solidFill>
+                <a:latin typeface="Century Gothic"/>
+              </a:rPr>
+              <a:t>MolAnchor</a:t>
             </a:r>
             <a:endParaRPr lang="en-US" sz="1600" spc="-1" dirty="0">
               <a:solidFill>
@@ -13897,10 +13529,90 @@
               <a:buClr>
                 <a:srgbClr val="0064C8"/>
               </a:buClr>
-              <a:buFont typeface="Wingdings" panose="05000000000000000000" pitchFamily="2" charset="2"/>
-              <a:buChar char="§"/>
             </a:pPr>
-            <a:endParaRPr lang="en-US" sz="1800" spc="-1" dirty="0">
+            <a:r>
+              <a:rPr lang="en-US" sz="1600" spc="-1" dirty="0">
+                <a:solidFill>
+                  <a:srgbClr val="000000"/>
+                </a:solidFill>
+                <a:latin typeface="Century Gothic"/>
+              </a:rPr>
+              <a:t>Contrastive (Counterfactuals, </a:t>
+            </a:r>
+            <a:r>
+              <a:rPr lang="en-US" sz="1600" spc="-1" dirty="0" err="1">
+                <a:solidFill>
+                  <a:srgbClr val="000000"/>
+                </a:solidFill>
+                <a:latin typeface="Century Gothic"/>
+              </a:rPr>
+              <a:t>MolCE</a:t>
+            </a:r>
+            <a:r>
+              <a:rPr lang="en-US" sz="1600" spc="-1" dirty="0">
+                <a:solidFill>
+                  <a:srgbClr val="000000"/>
+                </a:solidFill>
+                <a:latin typeface="Century Gothic"/>
+              </a:rPr>
+              <a:t>)</a:t>
+            </a:r>
+          </a:p>
+          <a:p>
+            <a:pPr lvl="1">
+              <a:lnSpc>
+                <a:spcPct val="100000"/>
+              </a:lnSpc>
+              <a:spcBef>
+                <a:spcPts val="400"/>
+              </a:spcBef>
+              <a:buClr>
+                <a:srgbClr val="0064C8"/>
+              </a:buClr>
+            </a:pPr>
+            <a:endParaRPr lang="en-US" sz="1600" spc="-1" dirty="0">
+              <a:solidFill>
+                <a:srgbClr val="000000"/>
+              </a:solidFill>
+              <a:latin typeface="Century Gothic"/>
+            </a:endParaRPr>
+          </a:p>
+          <a:p>
+            <a:pPr lvl="1">
+              <a:lnSpc>
+                <a:spcPct val="100000"/>
+              </a:lnSpc>
+              <a:spcBef>
+                <a:spcPts val="400"/>
+              </a:spcBef>
+              <a:buClr>
+                <a:srgbClr val="0064C8"/>
+              </a:buClr>
+            </a:pPr>
+            <a:endParaRPr lang="en-US" sz="1600" spc="-1" dirty="0">
+              <a:solidFill>
+                <a:srgbClr val="000000"/>
+              </a:solidFill>
+              <a:latin typeface="Century Gothic"/>
+            </a:endParaRPr>
+          </a:p>
+          <a:p>
+            <a:pPr marL="457200" lvl="1" indent="0">
+              <a:lnSpc>
+                <a:spcPct val="100000"/>
+              </a:lnSpc>
+              <a:spcBef>
+                <a:spcPts val="400"/>
+              </a:spcBef>
+              <a:spcAft>
+                <a:spcPts val="601"/>
+              </a:spcAft>
+              <a:buClr>
+                <a:srgbClr val="0064C8"/>
+              </a:buClr>
+              <a:buNone/>
+            </a:pPr>
+            <a:endParaRPr lang="en-US" sz="1600" spc="-1" dirty="0">
               <a:solidFill>
                 <a:srgbClr val="000000"/>
               </a:solidFill>
@@ -13933,12 +13645,72 @@
           </a:p>
         </p:txBody>
       </p:sp>
+      <p:sp>
+        <p:nvSpPr>
+          <p:cNvPr id="8" name="Rectangle 7">
+            <a:extLst>
+              <a:ext uri="{FF2B5EF4-FFF2-40B4-BE49-F238E27FC236}">
+                <a16:creationId xmlns:a16="http://schemas.microsoft.com/office/drawing/2014/main" id="{A220120A-93C6-EC45-A145-4081B130C30E}"/>
+              </a:ext>
+            </a:extLst>
+          </p:cNvPr>
+          <p:cNvSpPr/>
+          <p:nvPr/>
+        </p:nvSpPr>
+        <p:spPr>
+          <a:xfrm>
+            <a:off x="6394432" y="2383926"/>
+            <a:ext cx="1774658" cy="2310063"/>
+          </a:xfrm>
+          <a:prstGeom prst="rect">
+            <a:avLst/>
+          </a:prstGeom>
+          <a:solidFill>
+            <a:schemeClr val="accent1">
+              <a:lumMod val="20000"/>
+              <a:lumOff val="80000"/>
+            </a:schemeClr>
+          </a:solidFill>
+          <a:ln>
+            <a:solidFill>
+              <a:schemeClr val="tx2">
+                <a:lumMod val="25000"/>
+                <a:lumOff val="75000"/>
+              </a:schemeClr>
+            </a:solidFill>
+          </a:ln>
+        </p:spPr>
+        <p:style>
+          <a:lnRef idx="2">
+            <a:schemeClr val="accent1">
+              <a:shade val="15000"/>
+            </a:schemeClr>
+          </a:lnRef>
+          <a:fillRef idx="1">
+            <a:schemeClr val="accent1"/>
+          </a:fillRef>
+          <a:effectRef idx="0">
+            <a:schemeClr val="accent1"/>
+          </a:effectRef>
+          <a:fontRef idx="minor">
+            <a:schemeClr val="lt1"/>
+          </a:fontRef>
+        </p:style>
+        <p:txBody>
+          <a:bodyPr rtlCol="0" anchor="ctr"/>
+          <a:lstStyle/>
+          <a:p>
+            <a:pPr algn="ctr"/>
+            <a:endParaRPr lang="en-US" dirty="0"/>
+          </a:p>
+        </p:txBody>
+      </p:sp>
       <p:pic>
         <p:nvPicPr>
-          <p:cNvPr id="3" name="Picture 2">
+          <p:cNvPr id="9" name="Graphic 8" descr="Customer review with solid fill">
             <a:extLst>
               <a:ext uri="{FF2B5EF4-FFF2-40B4-BE49-F238E27FC236}">
-                <a16:creationId xmlns:a16="http://schemas.microsoft.com/office/drawing/2014/main" id="{26877CA3-72FB-5BAD-B036-17D15BFC3DA0}"/>
+                <a16:creationId xmlns:a16="http://schemas.microsoft.com/office/drawing/2014/main" id="{EDEA14B7-C0BC-9848-C63F-327BCC90C2A2}"/>
               </a:ext>
             </a:extLst>
           </p:cNvPr>
@@ -13948,25 +13720,106 @@
           <p:nvPr/>
         </p:nvPicPr>
         <p:blipFill>
-          <a:blip r:embed="rId3"/>
+          <a:blip r:embed="rId2">
+            <a:extLst>
+              <a:ext uri="{96DAC541-7B7A-43D3-8B79-37D633B846F1}">
+                <asvg:svgBlip xmlns:asvg="http://schemas.microsoft.com/office/drawing/2016/SVG/main" r:embed="rId3"/>
+              </a:ext>
+            </a:extLst>
+          </a:blip>
           <a:stretch>
             <a:fillRect/>
           </a:stretch>
         </p:blipFill>
         <p:spPr>
           <a:xfrm>
-            <a:off x="4480608" y="1246234"/>
-            <a:ext cx="4140000" cy="4420744"/>
+            <a:off x="6803967" y="3573203"/>
+            <a:ext cx="965534" cy="965534"/>
           </a:xfrm>
           <a:prstGeom prst="rect">
             <a:avLst/>
           </a:prstGeom>
         </p:spPr>
       </p:pic>
+      <p:pic>
+        <p:nvPicPr>
+          <p:cNvPr id="10" name="Picture 9">
+            <a:extLst>
+              <a:ext uri="{FF2B5EF4-FFF2-40B4-BE49-F238E27FC236}">
+                <a16:creationId xmlns:a16="http://schemas.microsoft.com/office/drawing/2014/main" id="{AEC186C5-E5F9-A5FB-266D-877A0F3143EA}"/>
+              </a:ext>
+            </a:extLst>
+          </p:cNvPr>
+          <p:cNvPicPr>
+            <a:picLocks noChangeAspect="1"/>
+          </p:cNvPicPr>
+          <p:nvPr/>
+        </p:nvPicPr>
+        <p:blipFill>
+          <a:blip r:embed="rId4"/>
+          <a:stretch>
+            <a:fillRect/>
+          </a:stretch>
+        </p:blipFill>
+        <p:spPr>
+          <a:xfrm>
+            <a:off x="6530822" y="2480129"/>
+            <a:ext cx="1525117" cy="996871"/>
+          </a:xfrm>
+          <a:prstGeom prst="rect">
+            <a:avLst/>
+          </a:prstGeom>
+        </p:spPr>
+      </p:pic>
+      <p:cxnSp>
+        <p:nvCxnSpPr>
+          <p:cNvPr id="11" name="Connector: Elbow 10">
+            <a:extLst>
+              <a:ext uri="{FF2B5EF4-FFF2-40B4-BE49-F238E27FC236}">
+                <a16:creationId xmlns:a16="http://schemas.microsoft.com/office/drawing/2014/main" id="{800D65FB-8069-2F90-2859-B2A57A9BB2C4}"/>
+              </a:ext>
+            </a:extLst>
+          </p:cNvPr>
+          <p:cNvCxnSpPr>
+            <a:cxnSpLocks/>
+            <a:endCxn id="8" idx="1"/>
+          </p:cNvCxnSpPr>
+          <p:nvPr/>
+        </p:nvCxnSpPr>
+        <p:spPr>
+          <a:xfrm>
+            <a:off x="4969565" y="1868557"/>
+            <a:ext cx="1424867" cy="1670401"/>
+          </a:xfrm>
+          <a:prstGeom prst="bentConnector3">
+            <a:avLst>
+              <a:gd name="adj1" fmla="val 50000"/>
+            </a:avLst>
+          </a:prstGeom>
+          <a:ln>
+            <a:prstDash val="sysDash"/>
+            <a:tailEnd type="triangle"/>
+          </a:ln>
+        </p:spPr>
+        <p:style>
+          <a:lnRef idx="2">
+            <a:schemeClr val="dk1"/>
+          </a:lnRef>
+          <a:fillRef idx="0">
+            <a:schemeClr val="dk1"/>
+          </a:fillRef>
+          <a:effectRef idx="1">
+            <a:schemeClr val="dk1"/>
+          </a:effectRef>
+          <a:fontRef idx="minor">
+            <a:schemeClr val="tx1"/>
+          </a:fontRef>
+        </p:style>
+      </p:cxnSp>
     </p:spTree>
     <p:extLst>
       <p:ext uri="{BB962C8B-B14F-4D97-AF65-F5344CB8AC3E}">
-        <p14:creationId xmlns:p14="http://schemas.microsoft.com/office/powerpoint/2010/main" val="921095034"/>
+        <p14:creationId xmlns:p14="http://schemas.microsoft.com/office/powerpoint/2010/main" val="1707478755"/>
       </p:ext>
     </p:extLst>
   </p:cSld>
@@ -14047,7 +13900,7 @@
                 </a:solidFill>
                 <a:latin typeface="Century Gothic"/>
               </a:rPr>
-              <a:t>Exemplary answer output SHAP</a:t>
+              <a:t>Prompt 1</a:t>
             </a:r>
             <a:endParaRPr lang="en-US" sz="3200" b="0" strike="noStrike" spc="-1" dirty="0">
               <a:solidFill>
@@ -14060,96 +13913,10 @@
       </p:sp>
       <p:sp>
         <p:nvSpPr>
-          <p:cNvPr id="165" name="PlaceHolder 3">
+          <p:cNvPr id="2" name="PlaceHolder 2">
             <a:extLst>
               <a:ext uri="{FF2B5EF4-FFF2-40B4-BE49-F238E27FC236}">
-                <a16:creationId xmlns:a16="http://schemas.microsoft.com/office/drawing/2014/main" id="{2EFBEA53-7B78-D9A1-93EF-9608A3193D27}"/>
-              </a:ext>
-            </a:extLst>
-          </p:cNvPr>
-          <p:cNvSpPr>
-            <a:spLocks noGrp="1"/>
-          </p:cNvSpPr>
-          <p:nvPr>
-            <p:ph type="sldNum"/>
-          </p:nvPr>
-        </p:nvSpPr>
-        <p:spPr>
-          <a:xfrm>
-            <a:off x="8376840" y="5692680"/>
-            <a:ext cx="384120" cy="364680"/>
-          </a:xfrm>
-          <a:prstGeom prst="rect">
-            <a:avLst/>
-          </a:prstGeom>
-          <a:noFill/>
-          <a:ln w="0">
-            <a:noFill/>
-          </a:ln>
-        </p:spPr>
-        <p:txBody>
-          <a:bodyPr anchor="ctr">
-            <a:noAutofit/>
-          </a:bodyPr>
-          <a:lstStyle/>
-          <a:p>
-            <a:pPr algn="r">
-              <a:lnSpc>
-                <a:spcPct val="100000"/>
-              </a:lnSpc>
-              <a:buNone/>
-            </a:pPr>
-            <a:fld id="{8BD7C522-1E12-40C3-B25E-5F0462E20B22}" type="slidenum">
-              <a:rPr lang="en-US" sz="1200" b="0" strike="noStrike" spc="-1">
-                <a:solidFill>
-                  <a:srgbClr val="8B8B8B"/>
-                </a:solidFill>
-                <a:latin typeface="Century Gothic"/>
-              </a:rPr>
-              <a:t>5</a:t>
-            </a:fld>
-            <a:endParaRPr lang="en-GB" sz="1200" b="0" strike="noStrike" spc="-1" dirty="0">
-              <a:latin typeface="Times New Roman"/>
-            </a:endParaRPr>
-          </a:p>
-        </p:txBody>
-      </p:sp>
-      <p:pic>
-        <p:nvPicPr>
-          <p:cNvPr id="4" name="Picture 3">
-            <a:extLst>
-              <a:ext uri="{FF2B5EF4-FFF2-40B4-BE49-F238E27FC236}">
-                <a16:creationId xmlns:a16="http://schemas.microsoft.com/office/drawing/2014/main" id="{0F3D5BC1-9264-881D-CF39-9525F816570A}"/>
-              </a:ext>
-            </a:extLst>
-          </p:cNvPr>
-          <p:cNvPicPr>
-            <a:picLocks noChangeAspect="1"/>
-          </p:cNvPicPr>
-          <p:nvPr/>
-        </p:nvPicPr>
-        <p:blipFill>
-          <a:blip r:embed="rId2"/>
-          <a:stretch>
-            <a:fillRect/>
-          </a:stretch>
-        </p:blipFill>
-        <p:spPr>
-          <a:xfrm>
-            <a:off x="4059608" y="970759"/>
-            <a:ext cx="4618726" cy="4817482"/>
-          </a:xfrm>
-          <a:prstGeom prst="rect">
-            <a:avLst/>
-          </a:prstGeom>
-        </p:spPr>
-      </p:pic>
-      <p:sp>
-        <p:nvSpPr>
-          <p:cNvPr id="7" name="PlaceHolder 2">
-            <a:extLst>
-              <a:ext uri="{FF2B5EF4-FFF2-40B4-BE49-F238E27FC236}">
-                <a16:creationId xmlns:a16="http://schemas.microsoft.com/office/drawing/2014/main" id="{66DE14D4-64D4-6D1F-DD92-BC16D674C58B}"/>
+                <a16:creationId xmlns:a16="http://schemas.microsoft.com/office/drawing/2014/main" id="{9FA20452-FA65-AFDC-8768-AEF2985C28BC}"/>
               </a:ext>
             </a:extLst>
           </p:cNvPr>
@@ -14160,8 +13927,8 @@
         </p:nvSpPr>
         <p:spPr>
           <a:xfrm>
-            <a:off x="380880" y="1371598"/>
-            <a:ext cx="3556120" cy="4559301"/>
+            <a:off x="380880" y="1375729"/>
+            <a:ext cx="8380080" cy="1836598"/>
           </a:xfrm>
           <a:prstGeom prst="rect">
             <a:avLst/>
@@ -14340,208 +14107,7 @@
             </a:lvl9pPr>
           </a:lstStyle>
           <a:p>
-            <a:pPr>
-              <a:lnSpc>
-                <a:spcPct val="100000"/>
-              </a:lnSpc>
-              <a:spcBef>
-                <a:spcPts val="400"/>
-              </a:spcBef>
-              <a:buClr>
-                <a:srgbClr val="0064C8"/>
-              </a:buClr>
-              <a:buFont typeface="Wingdings" panose="05000000000000000000" pitchFamily="2" charset="2"/>
-              <a:buChar char="§"/>
-            </a:pPr>
-            <a:r>
-              <a:rPr lang="en-US" sz="2000" spc="-1" dirty="0">
-                <a:solidFill>
-                  <a:srgbClr val="000000"/>
-                </a:solidFill>
-                <a:latin typeface="Century Gothic"/>
-              </a:rPr>
-              <a:t>Ask the model to explain an ML prediction for a given compound with SHAP</a:t>
-            </a:r>
-          </a:p>
-          <a:p>
-            <a:pPr>
-              <a:lnSpc>
-                <a:spcPct val="100000"/>
-              </a:lnSpc>
-              <a:spcBef>
-                <a:spcPts val="400"/>
-              </a:spcBef>
-              <a:buClr>
-                <a:srgbClr val="0064C8"/>
-              </a:buClr>
-              <a:buFont typeface="Wingdings" panose="05000000000000000000" pitchFamily="2" charset="2"/>
-              <a:buChar char="§"/>
-            </a:pPr>
-            <a:endParaRPr lang="en-US" sz="2000" spc="-1" dirty="0">
-              <a:solidFill>
-                <a:srgbClr val="000000"/>
-              </a:solidFill>
-              <a:latin typeface="Century Gothic"/>
-            </a:endParaRPr>
-          </a:p>
-          <a:p>
-            <a:pPr>
-              <a:lnSpc>
-                <a:spcPct val="100000"/>
-              </a:lnSpc>
-              <a:spcBef>
-                <a:spcPts val="400"/>
-              </a:spcBef>
-              <a:buClr>
-                <a:srgbClr val="0064C8"/>
-              </a:buClr>
-              <a:buFont typeface="Wingdings" panose="05000000000000000000" pitchFamily="2" charset="2"/>
-              <a:buChar char="§"/>
-            </a:pPr>
-            <a:r>
-              <a:rPr lang="en-US" sz="2000" spc="-1" dirty="0">
-                <a:solidFill>
-                  <a:srgbClr val="000000"/>
-                </a:solidFill>
-                <a:latin typeface="Century Gothic"/>
-              </a:rPr>
-              <a:t>Get explanation statistics</a:t>
-            </a:r>
-          </a:p>
-          <a:p>
-            <a:pPr>
-              <a:lnSpc>
-                <a:spcPct val="100000"/>
-              </a:lnSpc>
-              <a:spcBef>
-                <a:spcPts val="400"/>
-              </a:spcBef>
-              <a:buClr>
-                <a:srgbClr val="0064C8"/>
-              </a:buClr>
-              <a:buFont typeface="Wingdings" panose="05000000000000000000" pitchFamily="2" charset="2"/>
-              <a:buChar char="§"/>
-            </a:pPr>
-            <a:endParaRPr lang="en-US" sz="2000" spc="-1" dirty="0">
-              <a:solidFill>
-                <a:srgbClr val="000000"/>
-              </a:solidFill>
-              <a:latin typeface="Century Gothic"/>
-            </a:endParaRPr>
-          </a:p>
-          <a:p>
-            <a:pPr>
-              <a:lnSpc>
-                <a:spcPct val="100000"/>
-              </a:lnSpc>
-              <a:spcBef>
-                <a:spcPts val="400"/>
-              </a:spcBef>
-              <a:buClr>
-                <a:srgbClr val="0064C8"/>
-              </a:buClr>
-              <a:buFont typeface="Wingdings" panose="05000000000000000000" pitchFamily="2" charset="2"/>
-              <a:buChar char="§"/>
-            </a:pPr>
-            <a:r>
-              <a:rPr lang="en-US" sz="2000" spc="-1" dirty="0">
-                <a:solidFill>
-                  <a:srgbClr val="000000"/>
-                </a:solidFill>
-                <a:latin typeface="Century Gothic"/>
-              </a:rPr>
-              <a:t>Display explanation mapping</a:t>
-            </a:r>
-          </a:p>
-          <a:p>
-            <a:pPr>
-              <a:lnSpc>
-                <a:spcPct val="100000"/>
-              </a:lnSpc>
-              <a:spcBef>
-                <a:spcPts val="400"/>
-              </a:spcBef>
-              <a:buClr>
-                <a:srgbClr val="0064C8"/>
-              </a:buClr>
-              <a:buFont typeface="Wingdings" panose="05000000000000000000" pitchFamily="2" charset="2"/>
-              <a:buChar char="§"/>
-            </a:pPr>
-            <a:endParaRPr lang="en-US" sz="2000" spc="-1" dirty="0">
-              <a:solidFill>
-                <a:srgbClr val="000000"/>
-              </a:solidFill>
-              <a:latin typeface="Century Gothic"/>
-            </a:endParaRPr>
-          </a:p>
-          <a:p>
-            <a:pPr>
-              <a:lnSpc>
-                <a:spcPct val="100000"/>
-              </a:lnSpc>
-              <a:spcBef>
-                <a:spcPts val="400"/>
-              </a:spcBef>
-              <a:buClr>
-                <a:srgbClr val="0064C8"/>
-              </a:buClr>
-              <a:buFont typeface="Wingdings" panose="05000000000000000000" pitchFamily="2" charset="2"/>
-              <a:buChar char="§"/>
-            </a:pPr>
-            <a:r>
-              <a:rPr lang="en-US" sz="2000" spc="-1" dirty="0">
-                <a:solidFill>
-                  <a:srgbClr val="000000"/>
-                </a:solidFill>
-                <a:latin typeface="Century Gothic"/>
-              </a:rPr>
-              <a:t>Rationalize explanations (LLM)</a:t>
-            </a:r>
-          </a:p>
-          <a:p>
-            <a:pPr>
-              <a:lnSpc>
-                <a:spcPct val="100000"/>
-              </a:lnSpc>
-              <a:spcBef>
-                <a:spcPts val="400"/>
-              </a:spcBef>
-              <a:buClr>
-                <a:srgbClr val="0064C8"/>
-              </a:buClr>
-              <a:buFont typeface="Wingdings" panose="05000000000000000000" pitchFamily="2" charset="2"/>
-              <a:buChar char="§"/>
-            </a:pPr>
-            <a:endParaRPr lang="en-US" sz="2000" spc="-1" dirty="0">
-              <a:solidFill>
-                <a:srgbClr val="000000"/>
-              </a:solidFill>
-              <a:latin typeface="Century Gothic"/>
-            </a:endParaRPr>
-          </a:p>
-          <a:p>
-            <a:pPr>
-              <a:lnSpc>
-                <a:spcPct val="100000"/>
-              </a:lnSpc>
-              <a:spcBef>
-                <a:spcPts val="400"/>
-              </a:spcBef>
-              <a:buClr>
-                <a:srgbClr val="0064C8"/>
-              </a:buClr>
-              <a:buFont typeface="Wingdings" panose="05000000000000000000" pitchFamily="2" charset="2"/>
-              <a:buChar char="§"/>
-            </a:pPr>
-            <a:endParaRPr lang="en-US" sz="1800" spc="-1" dirty="0">
-              <a:solidFill>
-                <a:srgbClr val="000000"/>
-              </a:solidFill>
-              <a:latin typeface="Century Gothic"/>
-            </a:endParaRPr>
-          </a:p>
-          <a:p>
-            <a:pPr marL="343080" indent="-343080">
+            <a:pPr marL="0" indent="0">
               <a:lnSpc>
                 <a:spcPct val="100000"/>
               </a:lnSpc>
@@ -14554,10 +14120,69 @@
               <a:buClr>
                 <a:srgbClr val="0064C8"/>
               </a:buClr>
-              <a:buFont typeface="Wingdings 2" charset="2"/>
-              <a:buChar char=""/>
+              <a:buNone/>
             </a:pPr>
-            <a:endParaRPr lang="en-US" sz="2000" b="1" spc="-1" dirty="0">
+            <a:r>
+              <a:rPr lang="en-US" sz="2000" spc="-1" dirty="0">
+                <a:solidFill>
+                  <a:srgbClr val="0064C8"/>
+                </a:solidFill>
+                <a:latin typeface="Century Gothic"/>
+              </a:rPr>
+              <a:t>Goal: </a:t>
+            </a:r>
+            <a:r>
+              <a:rPr lang="en-US" sz="2000" spc="-1" dirty="0">
+                <a:solidFill>
+                  <a:srgbClr val="000000"/>
+                </a:solidFill>
+                <a:latin typeface="Century Gothic"/>
+              </a:rPr>
+              <a:t>Showcase that the AI agent is able to use tools correctly to reproduce known results</a:t>
+            </a:r>
+          </a:p>
+          <a:p>
+            <a:pPr>
+              <a:lnSpc>
+                <a:spcPct val="100000"/>
+              </a:lnSpc>
+              <a:spcBef>
+                <a:spcPts val="400"/>
+              </a:spcBef>
+              <a:spcAft>
+                <a:spcPts val="601"/>
+              </a:spcAft>
+              <a:buClr>
+                <a:srgbClr val="0064C8"/>
+              </a:buClr>
+            </a:pPr>
+            <a:r>
+              <a:rPr lang="en-US" sz="2000" spc="-1" dirty="0">
+                <a:solidFill>
+                  <a:srgbClr val="000000"/>
+                </a:solidFill>
+                <a:latin typeface="Century Gothic"/>
+              </a:rPr>
+              <a:t>Can the agent derive verifiable, correct chemical insight from model explanations?</a:t>
+            </a:r>
+          </a:p>
+          <a:p>
+            <a:pPr marL="0" indent="0">
+              <a:lnSpc>
+                <a:spcPct val="100000"/>
+              </a:lnSpc>
+              <a:spcBef>
+                <a:spcPts val="400"/>
+              </a:spcBef>
+              <a:spcAft>
+                <a:spcPts val="601"/>
+              </a:spcAft>
+              <a:buClr>
+                <a:srgbClr val="0064C8"/>
+              </a:buClr>
+              <a:buNone/>
+            </a:pPr>
+            <a:endParaRPr lang="en-US" sz="2000" spc="-1" dirty="0">
               <a:solidFill>
                 <a:srgbClr val="000000"/>
               </a:solidFill>
@@ -14566,10 +14191,224 @@
           </a:p>
         </p:txBody>
       </p:sp>
+      <p:sp>
+        <p:nvSpPr>
+          <p:cNvPr id="10" name="Speech Bubble: Rectangle with Corners Rounded 9">
+            <a:extLst>
+              <a:ext uri="{FF2B5EF4-FFF2-40B4-BE49-F238E27FC236}">
+                <a16:creationId xmlns:a16="http://schemas.microsoft.com/office/drawing/2014/main" id="{218E8154-7E95-D4BE-E8AA-D3B029A12B17}"/>
+              </a:ext>
+            </a:extLst>
+          </p:cNvPr>
+          <p:cNvSpPr/>
+          <p:nvPr/>
+        </p:nvSpPr>
+        <p:spPr>
+          <a:xfrm>
+            <a:off x="2604811" y="3764035"/>
+            <a:ext cx="5807670" cy="1382845"/>
+          </a:xfrm>
+          <a:prstGeom prst="wedgeRoundRectCallout">
+            <a:avLst>
+              <a:gd name="adj1" fmla="val -55184"/>
+              <a:gd name="adj2" fmla="val 28620"/>
+              <a:gd name="adj3" fmla="val 16667"/>
+            </a:avLst>
+          </a:prstGeom>
+        </p:spPr>
+        <p:style>
+          <a:lnRef idx="2">
+            <a:schemeClr val="dk1"/>
+          </a:lnRef>
+          <a:fillRef idx="1">
+            <a:schemeClr val="lt1"/>
+          </a:fillRef>
+          <a:effectRef idx="0">
+            <a:schemeClr val="dk1"/>
+          </a:effectRef>
+          <a:fontRef idx="minor">
+            <a:schemeClr val="dk1"/>
+          </a:fontRef>
+        </p:style>
+        <p:txBody>
+          <a:bodyPr rtlCol="0" anchor="ctr"/>
+          <a:lstStyle/>
+          <a:p>
+            <a:pPr algn="just"/>
+            <a:r>
+              <a:rPr lang="en-US" sz="1200" dirty="0"/>
+              <a:t>You are running a reproducibility study for compound selectivity prediction. The goal is to train a Balanced Random Forest Classifier to distinguish PI3K-delta (</a:t>
+            </a:r>
+            <a:r>
+              <a:rPr lang="en-US" sz="1200" dirty="0" err="1"/>
+              <a:t>UniProt</a:t>
+            </a:r>
+            <a:r>
+              <a:rPr lang="en-US" sz="1200" dirty="0"/>
+              <a:t> O00329) vs PI3K-gamma (</a:t>
+            </a:r>
+            <a:r>
+              <a:rPr lang="en-US" sz="1200" dirty="0" err="1"/>
+              <a:t>UniProt</a:t>
+            </a:r>
+            <a:r>
+              <a:rPr lang="en-US" sz="1200" dirty="0"/>
+              <a:t> P48736) selective compounds, evaluate its performance, and identify recurrent molecular anchor fragments that drive the model's correct predictions for each selective class (class 1 &amp; 2) and discuss the chemical insight gained.</a:t>
+            </a:r>
+          </a:p>
+        </p:txBody>
+      </p:sp>
+      <p:grpSp>
+        <p:nvGrpSpPr>
+          <p:cNvPr id="11" name="Group 10">
+            <a:extLst>
+              <a:ext uri="{FF2B5EF4-FFF2-40B4-BE49-F238E27FC236}">
+                <a16:creationId xmlns:a16="http://schemas.microsoft.com/office/drawing/2014/main" id="{788479A3-3923-48AE-F836-EB227D56F8F3}"/>
+              </a:ext>
+            </a:extLst>
+          </p:cNvPr>
+          <p:cNvGrpSpPr/>
+          <p:nvPr/>
+        </p:nvGrpSpPr>
+        <p:grpSpPr>
+          <a:xfrm>
+            <a:off x="481031" y="3667833"/>
+            <a:ext cx="1774658" cy="2310063"/>
+            <a:chOff x="990492" y="2511372"/>
+            <a:chExt cx="1774658" cy="2310063"/>
+          </a:xfrm>
+        </p:grpSpPr>
+        <p:sp>
+          <p:nvSpPr>
+            <p:cNvPr id="12" name="Rectangle 11">
+              <a:extLst>
+                <a:ext uri="{FF2B5EF4-FFF2-40B4-BE49-F238E27FC236}">
+                  <a16:creationId xmlns:a16="http://schemas.microsoft.com/office/drawing/2014/main" id="{2D142D64-B397-2830-786D-0D3574B657AC}"/>
+                </a:ext>
+              </a:extLst>
+            </p:cNvPr>
+            <p:cNvSpPr/>
+            <p:nvPr/>
+          </p:nvSpPr>
+          <p:spPr>
+            <a:xfrm>
+              <a:off x="990492" y="2511372"/>
+              <a:ext cx="1774658" cy="2310063"/>
+            </a:xfrm>
+            <a:prstGeom prst="rect">
+              <a:avLst/>
+            </a:prstGeom>
+            <a:solidFill>
+              <a:schemeClr val="accent1">
+                <a:lumMod val="20000"/>
+                <a:lumOff val="80000"/>
+              </a:schemeClr>
+            </a:solidFill>
+            <a:ln>
+              <a:solidFill>
+                <a:schemeClr val="tx2">
+                  <a:lumMod val="25000"/>
+                  <a:lumOff val="75000"/>
+                </a:schemeClr>
+              </a:solidFill>
+            </a:ln>
+          </p:spPr>
+          <p:style>
+            <a:lnRef idx="2">
+              <a:schemeClr val="accent1">
+                <a:shade val="15000"/>
+              </a:schemeClr>
+            </a:lnRef>
+            <a:fillRef idx="1">
+              <a:schemeClr val="accent1"/>
+            </a:fillRef>
+            <a:effectRef idx="0">
+              <a:schemeClr val="accent1"/>
+            </a:effectRef>
+            <a:fontRef idx="minor">
+              <a:schemeClr val="lt1"/>
+            </a:fontRef>
+          </p:style>
+          <p:txBody>
+            <a:bodyPr rtlCol="0" anchor="ctr"/>
+            <a:lstStyle/>
+            <a:p>
+              <a:pPr algn="ctr"/>
+              <a:endParaRPr lang="en-US" dirty="0"/>
+            </a:p>
+          </p:txBody>
+        </p:sp>
+        <p:pic>
+          <p:nvPicPr>
+            <p:cNvPr id="13" name="Graphic 12" descr="Customer review with solid fill">
+              <a:extLst>
+                <a:ext uri="{FF2B5EF4-FFF2-40B4-BE49-F238E27FC236}">
+                  <a16:creationId xmlns:a16="http://schemas.microsoft.com/office/drawing/2014/main" id="{64E33793-8C2A-2656-B0ED-A696739E718A}"/>
+                </a:ext>
+              </a:extLst>
+            </p:cNvPr>
+            <p:cNvPicPr>
+              <a:picLocks noChangeAspect="1"/>
+            </p:cNvPicPr>
+            <p:nvPr/>
+          </p:nvPicPr>
+          <p:blipFill>
+            <a:blip r:embed="rId2">
+              <a:extLst>
+                <a:ext uri="{96DAC541-7B7A-43D3-8B79-37D633B846F1}">
+                  <asvg:svgBlip xmlns:asvg="http://schemas.microsoft.com/office/drawing/2016/SVG/main" r:embed="rId3"/>
+                </a:ext>
+              </a:extLst>
+            </a:blip>
+            <a:stretch>
+              <a:fillRect/>
+            </a:stretch>
+          </p:blipFill>
+          <p:spPr>
+            <a:xfrm>
+              <a:off x="1400027" y="3700649"/>
+              <a:ext cx="965534" cy="965534"/>
+            </a:xfrm>
+            <a:prstGeom prst="rect">
+              <a:avLst/>
+            </a:prstGeom>
+          </p:spPr>
+        </p:pic>
+        <p:pic>
+          <p:nvPicPr>
+            <p:cNvPr id="14" name="Picture 13">
+              <a:extLst>
+                <a:ext uri="{FF2B5EF4-FFF2-40B4-BE49-F238E27FC236}">
+                  <a16:creationId xmlns:a16="http://schemas.microsoft.com/office/drawing/2014/main" id="{1B081600-3BCF-355C-CB19-D7A38C9862A0}"/>
+                </a:ext>
+              </a:extLst>
+            </p:cNvPr>
+            <p:cNvPicPr>
+              <a:picLocks noChangeAspect="1"/>
+            </p:cNvPicPr>
+            <p:nvPr/>
+          </p:nvPicPr>
+          <p:blipFill>
+            <a:blip r:embed="rId4"/>
+            <a:stretch>
+              <a:fillRect/>
+            </a:stretch>
+          </p:blipFill>
+          <p:spPr>
+            <a:xfrm>
+              <a:off x="1126882" y="2607575"/>
+              <a:ext cx="1525117" cy="996871"/>
+            </a:xfrm>
+            <a:prstGeom prst="rect">
+              <a:avLst/>
+            </a:prstGeom>
+          </p:spPr>
+        </p:pic>
+      </p:grpSp>
     </p:spTree>
     <p:extLst>
       <p:ext uri="{BB962C8B-B14F-4D97-AF65-F5344CB8AC3E}">
-        <p14:creationId xmlns:p14="http://schemas.microsoft.com/office/powerpoint/2010/main" val="457486825"/>
+        <p14:creationId xmlns:p14="http://schemas.microsoft.com/office/powerpoint/2010/main" val="1131643504"/>
       </p:ext>
     </p:extLst>
   </p:cSld>
@@ -14650,16 +14489,7 @@
                 </a:solidFill>
                 <a:latin typeface="Century Gothic"/>
               </a:rPr>
-              <a:t>Exemplary answer output </a:t>
-            </a:r>
-            <a:r>
-              <a:rPr lang="en-US" sz="3200" b="0" strike="noStrike" spc="-1" dirty="0" err="1">
-                <a:solidFill>
-                  <a:srgbClr val="0064C8"/>
-                </a:solidFill>
-                <a:latin typeface="Century Gothic"/>
-              </a:rPr>
-              <a:t>MolAnchor</a:t>
+              <a:t>Prompt 1</a:t>
             </a:r>
             <a:endParaRPr lang="en-US" sz="3200" b="0" strike="noStrike" spc="-1" dirty="0">
               <a:solidFill>
@@ -14670,534 +14500,12 @@
           </a:p>
         </p:txBody>
       </p:sp>
-      <p:sp>
-        <p:nvSpPr>
-          <p:cNvPr id="165" name="PlaceHolder 3">
+      <p:pic>
+        <p:nvPicPr>
+          <p:cNvPr id="17" name="Picture 16">
             <a:extLst>
               <a:ext uri="{FF2B5EF4-FFF2-40B4-BE49-F238E27FC236}">
-                <a16:creationId xmlns:a16="http://schemas.microsoft.com/office/drawing/2014/main" id="{2EFBEA53-7B78-D9A1-93EF-9608A3193D27}"/>
-              </a:ext>
-            </a:extLst>
-          </p:cNvPr>
-          <p:cNvSpPr>
-            <a:spLocks noGrp="1"/>
-          </p:cNvSpPr>
-          <p:nvPr>
-            <p:ph type="sldNum"/>
-          </p:nvPr>
-        </p:nvSpPr>
-        <p:spPr>
-          <a:xfrm>
-            <a:off x="8376840" y="5692680"/>
-            <a:ext cx="384120" cy="364680"/>
-          </a:xfrm>
-          <a:prstGeom prst="rect">
-            <a:avLst/>
-          </a:prstGeom>
-          <a:noFill/>
-          <a:ln w="0">
-            <a:noFill/>
-          </a:ln>
-        </p:spPr>
-        <p:txBody>
-          <a:bodyPr anchor="ctr">
-            <a:noAutofit/>
-          </a:bodyPr>
-          <a:lstStyle/>
-          <a:p>
-            <a:pPr algn="r">
-              <a:lnSpc>
-                <a:spcPct val="100000"/>
-              </a:lnSpc>
-              <a:buNone/>
-            </a:pPr>
-            <a:fld id="{8BD7C522-1E12-40C3-B25E-5F0462E20B22}" type="slidenum">
-              <a:rPr lang="en-US" sz="1200" b="0" strike="noStrike" spc="-1">
-                <a:solidFill>
-                  <a:srgbClr val="8B8B8B"/>
-                </a:solidFill>
-                <a:latin typeface="Century Gothic"/>
-              </a:rPr>
-              <a:t>6</a:t>
-            </a:fld>
-            <a:endParaRPr lang="en-GB" sz="1200" b="0" strike="noStrike" spc="-1" dirty="0">
-              <a:latin typeface="Times New Roman"/>
-            </a:endParaRPr>
-          </a:p>
-        </p:txBody>
-      </p:sp>
-      <p:sp>
-        <p:nvSpPr>
-          <p:cNvPr id="7" name="PlaceHolder 2">
-            <a:extLst>
-              <a:ext uri="{FF2B5EF4-FFF2-40B4-BE49-F238E27FC236}">
-                <a16:creationId xmlns:a16="http://schemas.microsoft.com/office/drawing/2014/main" id="{66DE14D4-64D4-6D1F-DD92-BC16D674C58B}"/>
-              </a:ext>
-            </a:extLst>
-          </p:cNvPr>
-          <p:cNvSpPr txBox="1">
-            <a:spLocks/>
-          </p:cNvSpPr>
-          <p:nvPr/>
-        </p:nvSpPr>
-        <p:spPr>
-          <a:xfrm>
-            <a:off x="380880" y="1371598"/>
-            <a:ext cx="3556120" cy="4559301"/>
-          </a:xfrm>
-          <a:prstGeom prst="rect">
-            <a:avLst/>
-          </a:prstGeom>
-          <a:noFill/>
-          <a:ln w="0">
-            <a:noFill/>
-          </a:ln>
-        </p:spPr>
-        <p:txBody>
-          <a:bodyPr numCol="1" spcCol="0" anchor="t">
-            <a:noAutofit/>
-          </a:bodyPr>
-          <a:lstStyle>
-            <a:lvl1pPr marL="228600" indent="-228600" algn="l" defTabSz="914400" rtl="0" eaLnBrk="1" latinLnBrk="0" hangingPunct="1">
-              <a:lnSpc>
-                <a:spcPct val="90000"/>
-              </a:lnSpc>
-              <a:spcBef>
-                <a:spcPts val="1000"/>
-              </a:spcBef>
-              <a:buFont typeface="Arial" panose="020B0604020202020204" pitchFamily="34" charset="0"/>
-              <a:buChar char="•"/>
-              <a:defRPr sz="2800" kern="1200">
-                <a:solidFill>
-                  <a:schemeClr val="tx1"/>
-                </a:solidFill>
-                <a:latin typeface="+mn-lt"/>
-                <a:ea typeface="+mn-ea"/>
-                <a:cs typeface="+mn-cs"/>
-              </a:defRPr>
-            </a:lvl1pPr>
-            <a:lvl2pPr marL="685800" indent="-228600" algn="l" defTabSz="914400" rtl="0" eaLnBrk="1" latinLnBrk="0" hangingPunct="1">
-              <a:lnSpc>
-                <a:spcPct val="90000"/>
-              </a:lnSpc>
-              <a:spcBef>
-                <a:spcPts val="500"/>
-              </a:spcBef>
-              <a:buFont typeface="Arial" panose="020B0604020202020204" pitchFamily="34" charset="0"/>
-              <a:buChar char="•"/>
-              <a:defRPr sz="2400" kern="1200">
-                <a:solidFill>
-                  <a:schemeClr val="tx1"/>
-                </a:solidFill>
-                <a:latin typeface="+mn-lt"/>
-                <a:ea typeface="+mn-ea"/>
-                <a:cs typeface="+mn-cs"/>
-              </a:defRPr>
-            </a:lvl2pPr>
-            <a:lvl3pPr marL="1143000" indent="-228600" algn="l" defTabSz="914400" rtl="0" eaLnBrk="1" latinLnBrk="0" hangingPunct="1">
-              <a:lnSpc>
-                <a:spcPct val="90000"/>
-              </a:lnSpc>
-              <a:spcBef>
-                <a:spcPts val="500"/>
-              </a:spcBef>
-              <a:buFont typeface="Arial" panose="020B0604020202020204" pitchFamily="34" charset="0"/>
-              <a:buChar char="•"/>
-              <a:defRPr sz="2000" kern="1200">
-                <a:solidFill>
-                  <a:schemeClr val="tx1"/>
-                </a:solidFill>
-                <a:latin typeface="+mn-lt"/>
-                <a:ea typeface="+mn-ea"/>
-                <a:cs typeface="+mn-cs"/>
-              </a:defRPr>
-            </a:lvl3pPr>
-            <a:lvl4pPr marL="1600200" indent="-228600" algn="l" defTabSz="914400" rtl="0" eaLnBrk="1" latinLnBrk="0" hangingPunct="1">
-              <a:lnSpc>
-                <a:spcPct val="90000"/>
-              </a:lnSpc>
-              <a:spcBef>
-                <a:spcPts val="500"/>
-              </a:spcBef>
-              <a:buFont typeface="Arial" panose="020B0604020202020204" pitchFamily="34" charset="0"/>
-              <a:buChar char="•"/>
-              <a:defRPr sz="1800" kern="1200">
-                <a:solidFill>
-                  <a:schemeClr val="tx1"/>
-                </a:solidFill>
-                <a:latin typeface="+mn-lt"/>
-                <a:ea typeface="+mn-ea"/>
-                <a:cs typeface="+mn-cs"/>
-              </a:defRPr>
-            </a:lvl4pPr>
-            <a:lvl5pPr marL="2057400" indent="-228600" algn="l" defTabSz="914400" rtl="0" eaLnBrk="1" latinLnBrk="0" hangingPunct="1">
-              <a:lnSpc>
-                <a:spcPct val="90000"/>
-              </a:lnSpc>
-              <a:spcBef>
-                <a:spcPts val="500"/>
-              </a:spcBef>
-              <a:buFont typeface="Arial" panose="020B0604020202020204" pitchFamily="34" charset="0"/>
-              <a:buChar char="•"/>
-              <a:defRPr sz="1800" kern="1200">
-                <a:solidFill>
-                  <a:schemeClr val="tx1"/>
-                </a:solidFill>
-                <a:latin typeface="+mn-lt"/>
-                <a:ea typeface="+mn-ea"/>
-                <a:cs typeface="+mn-cs"/>
-              </a:defRPr>
-            </a:lvl5pPr>
-            <a:lvl6pPr marL="2514600" indent="-228600" algn="l" defTabSz="914400" rtl="0" eaLnBrk="1" latinLnBrk="0" hangingPunct="1">
-              <a:lnSpc>
-                <a:spcPct val="90000"/>
-              </a:lnSpc>
-              <a:spcBef>
-                <a:spcPts val="500"/>
-              </a:spcBef>
-              <a:buFont typeface="Arial" panose="020B0604020202020204" pitchFamily="34" charset="0"/>
-              <a:buChar char="•"/>
-              <a:defRPr sz="1800" kern="1200">
-                <a:solidFill>
-                  <a:schemeClr val="tx1"/>
-                </a:solidFill>
-                <a:latin typeface="+mn-lt"/>
-                <a:ea typeface="+mn-ea"/>
-                <a:cs typeface="+mn-cs"/>
-              </a:defRPr>
-            </a:lvl6pPr>
-            <a:lvl7pPr marL="2971800" indent="-228600" algn="l" defTabSz="914400" rtl="0" eaLnBrk="1" latinLnBrk="0" hangingPunct="1">
-              <a:lnSpc>
-                <a:spcPct val="90000"/>
-              </a:lnSpc>
-              <a:spcBef>
-                <a:spcPts val="500"/>
-              </a:spcBef>
-              <a:buFont typeface="Arial" panose="020B0604020202020204" pitchFamily="34" charset="0"/>
-              <a:buChar char="•"/>
-              <a:defRPr sz="1800" kern="1200">
-                <a:solidFill>
-                  <a:schemeClr val="tx1"/>
-                </a:solidFill>
-                <a:latin typeface="+mn-lt"/>
-                <a:ea typeface="+mn-ea"/>
-                <a:cs typeface="+mn-cs"/>
-              </a:defRPr>
-            </a:lvl7pPr>
-            <a:lvl8pPr marL="3429000" indent="-228600" algn="l" defTabSz="914400" rtl="0" eaLnBrk="1" latinLnBrk="0" hangingPunct="1">
-              <a:lnSpc>
-                <a:spcPct val="90000"/>
-              </a:lnSpc>
-              <a:spcBef>
-                <a:spcPts val="500"/>
-              </a:spcBef>
-              <a:buFont typeface="Arial" panose="020B0604020202020204" pitchFamily="34" charset="0"/>
-              <a:buChar char="•"/>
-              <a:defRPr sz="1800" kern="1200">
-                <a:solidFill>
-                  <a:schemeClr val="tx1"/>
-                </a:solidFill>
-                <a:latin typeface="+mn-lt"/>
-                <a:ea typeface="+mn-ea"/>
-                <a:cs typeface="+mn-cs"/>
-              </a:defRPr>
-            </a:lvl8pPr>
-            <a:lvl9pPr marL="3886200" indent="-228600" algn="l" defTabSz="914400" rtl="0" eaLnBrk="1" latinLnBrk="0" hangingPunct="1">
-              <a:lnSpc>
-                <a:spcPct val="90000"/>
-              </a:lnSpc>
-              <a:spcBef>
-                <a:spcPts val="500"/>
-              </a:spcBef>
-              <a:buFont typeface="Arial" panose="020B0604020202020204" pitchFamily="34" charset="0"/>
-              <a:buChar char="•"/>
-              <a:defRPr sz="1800" kern="1200">
-                <a:solidFill>
-                  <a:schemeClr val="tx1"/>
-                </a:solidFill>
-                <a:latin typeface="+mn-lt"/>
-                <a:ea typeface="+mn-ea"/>
-                <a:cs typeface="+mn-cs"/>
-              </a:defRPr>
-            </a:lvl9pPr>
-          </a:lstStyle>
-          <a:p>
-            <a:pPr>
-              <a:lnSpc>
-                <a:spcPct val="100000"/>
-              </a:lnSpc>
-              <a:spcBef>
-                <a:spcPts val="400"/>
-              </a:spcBef>
-              <a:buClr>
-                <a:srgbClr val="0064C8"/>
-              </a:buClr>
-              <a:buFont typeface="Wingdings" panose="05000000000000000000" pitchFamily="2" charset="2"/>
-              <a:buChar char="§"/>
-            </a:pPr>
-            <a:r>
-              <a:rPr lang="en-US" sz="2000" spc="-1" dirty="0">
-                <a:solidFill>
-                  <a:srgbClr val="000000"/>
-                </a:solidFill>
-                <a:latin typeface="Century Gothic"/>
-              </a:rPr>
-              <a:t>Ask the model to explain an ML prediction n for a given compound with </a:t>
-            </a:r>
-            <a:r>
-              <a:rPr lang="en-US" sz="2000" spc="-1" dirty="0" err="1">
-                <a:solidFill>
-                  <a:srgbClr val="000000"/>
-                </a:solidFill>
-                <a:latin typeface="Century Gothic"/>
-              </a:rPr>
-              <a:t>MolAnchor</a:t>
-            </a:r>
-            <a:endParaRPr lang="en-US" sz="2000" spc="-1" dirty="0">
-              <a:solidFill>
-                <a:srgbClr val="000000"/>
-              </a:solidFill>
-              <a:latin typeface="Century Gothic"/>
-            </a:endParaRPr>
-          </a:p>
-          <a:p>
-            <a:pPr>
-              <a:lnSpc>
-                <a:spcPct val="100000"/>
-              </a:lnSpc>
-              <a:spcBef>
-                <a:spcPts val="400"/>
-              </a:spcBef>
-              <a:buClr>
-                <a:srgbClr val="0064C8"/>
-              </a:buClr>
-              <a:buFont typeface="Wingdings" panose="05000000000000000000" pitchFamily="2" charset="2"/>
-              <a:buChar char="§"/>
-            </a:pPr>
-            <a:endParaRPr lang="en-US" sz="2000" spc="-1" dirty="0">
-              <a:solidFill>
-                <a:srgbClr val="000000"/>
-              </a:solidFill>
-              <a:latin typeface="Century Gothic"/>
-            </a:endParaRPr>
-          </a:p>
-          <a:p>
-            <a:pPr>
-              <a:lnSpc>
-                <a:spcPct val="100000"/>
-              </a:lnSpc>
-              <a:spcBef>
-                <a:spcPts val="400"/>
-              </a:spcBef>
-              <a:buClr>
-                <a:srgbClr val="0064C8"/>
-              </a:buClr>
-              <a:buFont typeface="Wingdings" panose="05000000000000000000" pitchFamily="2" charset="2"/>
-              <a:buChar char="§"/>
-            </a:pPr>
-            <a:r>
-              <a:rPr lang="en-US" sz="2000" spc="-1" dirty="0">
-                <a:solidFill>
-                  <a:srgbClr val="000000"/>
-                </a:solidFill>
-                <a:latin typeface="Century Gothic"/>
-              </a:rPr>
-              <a:t>Get explanation statistics (Anchor and substructure occurrence)</a:t>
-            </a:r>
-          </a:p>
-          <a:p>
-            <a:pPr>
-              <a:lnSpc>
-                <a:spcPct val="100000"/>
-              </a:lnSpc>
-              <a:spcBef>
-                <a:spcPts val="400"/>
-              </a:spcBef>
-              <a:buClr>
-                <a:srgbClr val="0064C8"/>
-              </a:buClr>
-              <a:buFont typeface="Wingdings" panose="05000000000000000000" pitchFamily="2" charset="2"/>
-              <a:buChar char="§"/>
-            </a:pPr>
-            <a:endParaRPr lang="en-US" sz="2000" spc="-1" dirty="0">
-              <a:solidFill>
-                <a:srgbClr val="000000"/>
-              </a:solidFill>
-              <a:latin typeface="Century Gothic"/>
-            </a:endParaRPr>
-          </a:p>
-          <a:p>
-            <a:pPr>
-              <a:lnSpc>
-                <a:spcPct val="100000"/>
-              </a:lnSpc>
-              <a:spcBef>
-                <a:spcPts val="400"/>
-              </a:spcBef>
-              <a:buClr>
-                <a:srgbClr val="0064C8"/>
-              </a:buClr>
-              <a:buFont typeface="Wingdings" panose="05000000000000000000" pitchFamily="2" charset="2"/>
-              <a:buChar char="§"/>
-            </a:pPr>
-            <a:r>
-              <a:rPr lang="en-US" sz="2000" spc="-1" dirty="0">
-                <a:solidFill>
-                  <a:srgbClr val="000000"/>
-                </a:solidFill>
-                <a:latin typeface="Century Gothic"/>
-              </a:rPr>
-              <a:t>Global explanations also available</a:t>
-            </a:r>
-          </a:p>
-          <a:p>
-            <a:pPr>
-              <a:lnSpc>
-                <a:spcPct val="100000"/>
-              </a:lnSpc>
-              <a:spcBef>
-                <a:spcPts val="400"/>
-              </a:spcBef>
-              <a:buClr>
-                <a:srgbClr val="0064C8"/>
-              </a:buClr>
-              <a:buFont typeface="Wingdings" panose="05000000000000000000" pitchFamily="2" charset="2"/>
-              <a:buChar char="§"/>
-            </a:pPr>
-            <a:endParaRPr lang="en-US" sz="2000" spc="-1" dirty="0">
-              <a:solidFill>
-                <a:srgbClr val="000000"/>
-              </a:solidFill>
-              <a:latin typeface="Century Gothic"/>
-            </a:endParaRPr>
-          </a:p>
-          <a:p>
-            <a:pPr>
-              <a:lnSpc>
-                <a:spcPct val="100000"/>
-              </a:lnSpc>
-              <a:spcBef>
-                <a:spcPts val="400"/>
-              </a:spcBef>
-              <a:buClr>
-                <a:srgbClr val="0064C8"/>
-              </a:buClr>
-              <a:buFont typeface="Wingdings" panose="05000000000000000000" pitchFamily="2" charset="2"/>
-              <a:buChar char="§"/>
-            </a:pPr>
-            <a:r>
-              <a:rPr lang="en-US" sz="2000" spc="-1" dirty="0">
-                <a:solidFill>
-                  <a:srgbClr val="000000"/>
-                </a:solidFill>
-                <a:latin typeface="Century Gothic"/>
-              </a:rPr>
-              <a:t>Rationalize explanations (LLM)</a:t>
-            </a:r>
-          </a:p>
-          <a:p>
-            <a:pPr>
-              <a:lnSpc>
-                <a:spcPct val="100000"/>
-              </a:lnSpc>
-              <a:spcBef>
-                <a:spcPts val="400"/>
-              </a:spcBef>
-              <a:buClr>
-                <a:srgbClr val="0064C8"/>
-              </a:buClr>
-              <a:buFont typeface="Wingdings" panose="05000000000000000000" pitchFamily="2" charset="2"/>
-              <a:buChar char="§"/>
-            </a:pPr>
-            <a:endParaRPr lang="en-US" sz="2000" spc="-1" dirty="0">
-              <a:solidFill>
-                <a:srgbClr val="000000"/>
-              </a:solidFill>
-              <a:latin typeface="Century Gothic"/>
-            </a:endParaRPr>
-          </a:p>
-          <a:p>
-            <a:pPr>
-              <a:lnSpc>
-                <a:spcPct val="100000"/>
-              </a:lnSpc>
-              <a:spcBef>
-                <a:spcPts val="400"/>
-              </a:spcBef>
-              <a:buClr>
-                <a:srgbClr val="0064C8"/>
-              </a:buClr>
-              <a:buFont typeface="Wingdings" panose="05000000000000000000" pitchFamily="2" charset="2"/>
-              <a:buChar char="§"/>
-            </a:pPr>
-            <a:endParaRPr lang="en-US" sz="1800" spc="-1" dirty="0">
-              <a:solidFill>
-                <a:srgbClr val="000000"/>
-              </a:solidFill>
-              <a:latin typeface="Century Gothic"/>
-            </a:endParaRPr>
-          </a:p>
-          <a:p>
-            <a:pPr marL="343080" indent="-343080">
-              <a:lnSpc>
-                <a:spcPct val="100000"/>
-              </a:lnSpc>
-              <a:spcBef>
-                <a:spcPts val="400"/>
-              </a:spcBef>
-              <a:spcAft>
-                <a:spcPts val="601"/>
-              </a:spcAft>
-              <a:buClr>
-                <a:srgbClr val="0064C8"/>
-              </a:buClr>
-              <a:buFont typeface="Wingdings 2" charset="2"/>
-              <a:buChar char=""/>
-            </a:pPr>
-            <a:endParaRPr lang="en-US" sz="2000" b="1" spc="-1" dirty="0">
-              <a:solidFill>
-                <a:srgbClr val="000000"/>
-              </a:solidFill>
-              <a:latin typeface="Century Gothic"/>
-            </a:endParaRPr>
-          </a:p>
-        </p:txBody>
-      </p:sp>
-      <p:pic>
-        <p:nvPicPr>
-          <p:cNvPr id="3" name="Picture 2">
-            <a:extLst>
-              <a:ext uri="{FF2B5EF4-FFF2-40B4-BE49-F238E27FC236}">
-                <a16:creationId xmlns:a16="http://schemas.microsoft.com/office/drawing/2014/main" id="{CABC6A26-9CF7-7B03-D767-F8B5CB557E1B}"/>
-              </a:ext>
-            </a:extLst>
-          </p:cNvPr>
-          <p:cNvPicPr>
-            <a:picLocks noChangeAspect="1"/>
-          </p:cNvPicPr>
-          <p:nvPr/>
-        </p:nvPicPr>
-        <p:blipFill>
-          <a:blip r:embed="rId2"/>
-          <a:srcRect l="-3811" t="-1266" r="-2705" b="-5248"/>
-          <a:stretch/>
-        </p:blipFill>
-        <p:spPr>
-          <a:xfrm>
-            <a:off x="4313911" y="1075604"/>
-            <a:ext cx="4307305" cy="4025986"/>
-          </a:xfrm>
-          <a:prstGeom prst="rect">
-            <a:avLst/>
-          </a:prstGeom>
-        </p:spPr>
-      </p:pic>
-      <p:pic>
-        <p:nvPicPr>
-          <p:cNvPr id="6" name="Picture 5">
-            <a:extLst>
-              <a:ext uri="{FF2B5EF4-FFF2-40B4-BE49-F238E27FC236}">
-                <a16:creationId xmlns:a16="http://schemas.microsoft.com/office/drawing/2014/main" id="{C0F84ACB-0B25-83EE-C843-9841A30F787F}"/>
+                <a16:creationId xmlns:a16="http://schemas.microsoft.com/office/drawing/2014/main" id="{67342E73-954A-CBBA-552E-E705A6E52973}"/>
               </a:ext>
             </a:extLst>
           </p:cNvPr>
@@ -15214,8 +14522,8 @@
         </p:blipFill>
         <p:spPr>
           <a:xfrm>
-            <a:off x="4464050" y="4862478"/>
-            <a:ext cx="4051300" cy="1083662"/>
+            <a:off x="380880" y="1423768"/>
+            <a:ext cx="8110330" cy="4687388"/>
           </a:xfrm>
           <a:prstGeom prst="rect">
             <a:avLst/>
@@ -15225,7 +14533,7 @@
     </p:spTree>
     <p:extLst>
       <p:ext uri="{BB962C8B-B14F-4D97-AF65-F5344CB8AC3E}">
-        <p14:creationId xmlns:p14="http://schemas.microsoft.com/office/powerpoint/2010/main" val="4267688927"/>
+        <p14:creationId xmlns:p14="http://schemas.microsoft.com/office/powerpoint/2010/main" val="1856476068"/>
       </p:ext>
     </p:extLst>
   </p:cSld>
@@ -15306,16 +14614,7 @@
                 </a:solidFill>
                 <a:latin typeface="Century Gothic"/>
               </a:rPr>
-              <a:t>Exemplary answer output </a:t>
-            </a:r>
-            <a:r>
-              <a:rPr lang="en-US" sz="3200" b="0" strike="noStrike" spc="-1" dirty="0" err="1">
-                <a:solidFill>
-                  <a:srgbClr val="0064C8"/>
-                </a:solidFill>
-                <a:latin typeface="Century Gothic"/>
-              </a:rPr>
-              <a:t>MolCE</a:t>
+              <a:t>Prompt 2</a:t>
             </a:r>
             <a:endParaRPr lang="en-US" sz="3200" b="0" strike="noStrike" spc="-1" dirty="0">
               <a:solidFill>
@@ -15328,66 +14627,10 @@
       </p:sp>
       <p:sp>
         <p:nvSpPr>
-          <p:cNvPr id="165" name="PlaceHolder 3">
+          <p:cNvPr id="2" name="PlaceHolder 2">
             <a:extLst>
               <a:ext uri="{FF2B5EF4-FFF2-40B4-BE49-F238E27FC236}">
-                <a16:creationId xmlns:a16="http://schemas.microsoft.com/office/drawing/2014/main" id="{2EFBEA53-7B78-D9A1-93EF-9608A3193D27}"/>
-              </a:ext>
-            </a:extLst>
-          </p:cNvPr>
-          <p:cNvSpPr>
-            <a:spLocks noGrp="1"/>
-          </p:cNvSpPr>
-          <p:nvPr>
-            <p:ph type="sldNum"/>
-          </p:nvPr>
-        </p:nvSpPr>
-        <p:spPr>
-          <a:xfrm>
-            <a:off x="8376840" y="5692680"/>
-            <a:ext cx="384120" cy="364680"/>
-          </a:xfrm>
-          <a:prstGeom prst="rect">
-            <a:avLst/>
-          </a:prstGeom>
-          <a:noFill/>
-          <a:ln w="0">
-            <a:noFill/>
-          </a:ln>
-        </p:spPr>
-        <p:txBody>
-          <a:bodyPr anchor="ctr">
-            <a:noAutofit/>
-          </a:bodyPr>
-          <a:lstStyle/>
-          <a:p>
-            <a:pPr algn="r">
-              <a:lnSpc>
-                <a:spcPct val="100000"/>
-              </a:lnSpc>
-              <a:buNone/>
-            </a:pPr>
-            <a:fld id="{8BD7C522-1E12-40C3-B25E-5F0462E20B22}" type="slidenum">
-              <a:rPr lang="en-US" sz="1200" b="0" strike="noStrike" spc="-1">
-                <a:solidFill>
-                  <a:srgbClr val="8B8B8B"/>
-                </a:solidFill>
-                <a:latin typeface="Century Gothic"/>
-              </a:rPr>
-              <a:t>7</a:t>
-            </a:fld>
-            <a:endParaRPr lang="en-GB" sz="1200" b="0" strike="noStrike" spc="-1" dirty="0">
-              <a:latin typeface="Times New Roman"/>
-            </a:endParaRPr>
-          </a:p>
-        </p:txBody>
-      </p:sp>
-      <p:sp>
-        <p:nvSpPr>
-          <p:cNvPr id="7" name="PlaceHolder 2">
-            <a:extLst>
-              <a:ext uri="{FF2B5EF4-FFF2-40B4-BE49-F238E27FC236}">
-                <a16:creationId xmlns:a16="http://schemas.microsoft.com/office/drawing/2014/main" id="{66DE14D4-64D4-6D1F-DD92-BC16D674C58B}"/>
+                <a16:creationId xmlns:a16="http://schemas.microsoft.com/office/drawing/2014/main" id="{9FA20452-FA65-AFDC-8768-AEF2985C28BC}"/>
               </a:ext>
             </a:extLst>
           </p:cNvPr>
@@ -15398,8 +14641,8 @@
         </p:nvSpPr>
         <p:spPr>
           <a:xfrm>
-            <a:off x="374530" y="1371598"/>
-            <a:ext cx="3556120" cy="4559301"/>
+            <a:off x="380880" y="1375729"/>
+            <a:ext cx="8380080" cy="1836598"/>
           </a:xfrm>
           <a:prstGeom prst="rect">
             <a:avLst/>
@@ -15578,208 +14821,7 @@
             </a:lvl9pPr>
           </a:lstStyle>
           <a:p>
-            <a:pPr>
-              <a:lnSpc>
-                <a:spcPct val="100000"/>
-              </a:lnSpc>
-              <a:spcBef>
-                <a:spcPts val="400"/>
-              </a:spcBef>
-              <a:buClr>
-                <a:srgbClr val="0064C8"/>
-              </a:buClr>
-              <a:buFont typeface="Wingdings" panose="05000000000000000000" pitchFamily="2" charset="2"/>
-              <a:buChar char="§"/>
-            </a:pPr>
-            <a:r>
-              <a:rPr lang="en-US" sz="2000" spc="-1" dirty="0">
-                <a:solidFill>
-                  <a:srgbClr val="000000"/>
-                </a:solidFill>
-                <a:latin typeface="Century Gothic"/>
-              </a:rPr>
-              <a:t>For instances: See both substituent and scaffold foils</a:t>
-            </a:r>
-          </a:p>
-          <a:p>
-            <a:pPr>
-              <a:lnSpc>
-                <a:spcPct val="100000"/>
-              </a:lnSpc>
-              <a:spcBef>
-                <a:spcPts val="400"/>
-              </a:spcBef>
-              <a:buClr>
-                <a:srgbClr val="0064C8"/>
-              </a:buClr>
-              <a:buFont typeface="Wingdings" panose="05000000000000000000" pitchFamily="2" charset="2"/>
-              <a:buChar char="§"/>
-            </a:pPr>
-            <a:endParaRPr lang="en-US" sz="2000" spc="-1" dirty="0">
-              <a:solidFill>
-                <a:srgbClr val="000000"/>
-              </a:solidFill>
-              <a:latin typeface="Century Gothic"/>
-            </a:endParaRPr>
-          </a:p>
-          <a:p>
-            <a:pPr>
-              <a:lnSpc>
-                <a:spcPct val="100000"/>
-              </a:lnSpc>
-              <a:spcBef>
-                <a:spcPts val="400"/>
-              </a:spcBef>
-              <a:buClr>
-                <a:srgbClr val="0064C8"/>
-              </a:buClr>
-              <a:buFont typeface="Wingdings" panose="05000000000000000000" pitchFamily="2" charset="2"/>
-              <a:buChar char="§"/>
-            </a:pPr>
-            <a:r>
-              <a:rPr lang="en-US" sz="2000" spc="-1" dirty="0">
-                <a:solidFill>
-                  <a:srgbClr val="000000"/>
-                </a:solidFill>
-                <a:latin typeface="Century Gothic"/>
-              </a:rPr>
-              <a:t>Get explanation statistics (occurrence, contrastive score)</a:t>
-            </a:r>
-          </a:p>
-          <a:p>
-            <a:pPr>
-              <a:lnSpc>
-                <a:spcPct val="100000"/>
-              </a:lnSpc>
-              <a:spcBef>
-                <a:spcPts val="400"/>
-              </a:spcBef>
-              <a:buClr>
-                <a:srgbClr val="0064C8"/>
-              </a:buClr>
-              <a:buFont typeface="Wingdings" panose="05000000000000000000" pitchFamily="2" charset="2"/>
-              <a:buChar char="§"/>
-            </a:pPr>
-            <a:endParaRPr lang="en-US" sz="2000" spc="-1" dirty="0">
-              <a:solidFill>
-                <a:srgbClr val="000000"/>
-              </a:solidFill>
-              <a:latin typeface="Century Gothic"/>
-            </a:endParaRPr>
-          </a:p>
-          <a:p>
-            <a:pPr>
-              <a:lnSpc>
-                <a:spcPct val="100000"/>
-              </a:lnSpc>
-              <a:spcBef>
-                <a:spcPts val="400"/>
-              </a:spcBef>
-              <a:buClr>
-                <a:srgbClr val="0064C8"/>
-              </a:buClr>
-              <a:buFont typeface="Wingdings" panose="05000000000000000000" pitchFamily="2" charset="2"/>
-              <a:buChar char="§"/>
-            </a:pPr>
-            <a:r>
-              <a:rPr lang="en-US" sz="2000" spc="-1" dirty="0">
-                <a:solidFill>
-                  <a:srgbClr val="000000"/>
-                </a:solidFill>
-                <a:latin typeface="Century Gothic"/>
-              </a:rPr>
-              <a:t>Global explanations also available</a:t>
-            </a:r>
-          </a:p>
-          <a:p>
-            <a:pPr>
-              <a:lnSpc>
-                <a:spcPct val="100000"/>
-              </a:lnSpc>
-              <a:spcBef>
-                <a:spcPts val="400"/>
-              </a:spcBef>
-              <a:buClr>
-                <a:srgbClr val="0064C8"/>
-              </a:buClr>
-              <a:buFont typeface="Wingdings" panose="05000000000000000000" pitchFamily="2" charset="2"/>
-              <a:buChar char="§"/>
-            </a:pPr>
-            <a:endParaRPr lang="en-US" sz="2000" spc="-1" dirty="0">
-              <a:solidFill>
-                <a:srgbClr val="000000"/>
-              </a:solidFill>
-              <a:latin typeface="Century Gothic"/>
-            </a:endParaRPr>
-          </a:p>
-          <a:p>
-            <a:pPr>
-              <a:lnSpc>
-                <a:spcPct val="100000"/>
-              </a:lnSpc>
-              <a:spcBef>
-                <a:spcPts val="400"/>
-              </a:spcBef>
-              <a:buClr>
-                <a:srgbClr val="0064C8"/>
-              </a:buClr>
-              <a:buFont typeface="Wingdings" panose="05000000000000000000" pitchFamily="2" charset="2"/>
-              <a:buChar char="§"/>
-            </a:pPr>
-            <a:r>
-              <a:rPr lang="en-US" sz="2000" spc="-1" dirty="0">
-                <a:solidFill>
-                  <a:srgbClr val="000000"/>
-                </a:solidFill>
-                <a:latin typeface="Century Gothic"/>
-              </a:rPr>
-              <a:t>Rationalize explanations (LLM)</a:t>
-            </a:r>
-          </a:p>
-          <a:p>
-            <a:pPr>
-              <a:lnSpc>
-                <a:spcPct val="100000"/>
-              </a:lnSpc>
-              <a:spcBef>
-                <a:spcPts val="400"/>
-              </a:spcBef>
-              <a:buClr>
-                <a:srgbClr val="0064C8"/>
-              </a:buClr>
-              <a:buFont typeface="Wingdings" panose="05000000000000000000" pitchFamily="2" charset="2"/>
-              <a:buChar char="§"/>
-            </a:pPr>
-            <a:endParaRPr lang="en-US" sz="2000" spc="-1" dirty="0">
-              <a:solidFill>
-                <a:srgbClr val="000000"/>
-              </a:solidFill>
-              <a:latin typeface="Century Gothic"/>
-            </a:endParaRPr>
-          </a:p>
-          <a:p>
-            <a:pPr>
-              <a:lnSpc>
-                <a:spcPct val="100000"/>
-              </a:lnSpc>
-              <a:spcBef>
-                <a:spcPts val="400"/>
-              </a:spcBef>
-              <a:buClr>
-                <a:srgbClr val="0064C8"/>
-              </a:buClr>
-              <a:buFont typeface="Wingdings" panose="05000000000000000000" pitchFamily="2" charset="2"/>
-              <a:buChar char="§"/>
-            </a:pPr>
-            <a:endParaRPr lang="en-US" sz="1800" spc="-1" dirty="0">
-              <a:solidFill>
-                <a:srgbClr val="000000"/>
-              </a:solidFill>
-              <a:latin typeface="Century Gothic"/>
-            </a:endParaRPr>
-          </a:p>
-          <a:p>
-            <a:pPr marL="343080" indent="-343080">
+            <a:pPr marL="0" indent="0">
               <a:lnSpc>
                 <a:spcPct val="100000"/>
               </a:lnSpc>
@@ -15792,10 +14834,69 @@
               <a:buClr>
                 <a:srgbClr val="0064C8"/>
               </a:buClr>
-              <a:buFont typeface="Wingdings 2" charset="2"/>
-              <a:buChar char=""/>
+              <a:buNone/>
             </a:pPr>
-            <a:endParaRPr lang="en-US" sz="2000" b="1" spc="-1" dirty="0">
+            <a:r>
+              <a:rPr lang="en-US" sz="2000" spc="-1" dirty="0">
+                <a:solidFill>
+                  <a:srgbClr val="0064C8"/>
+                </a:solidFill>
+                <a:latin typeface="Century Gothic"/>
+              </a:rPr>
+              <a:t>Goal: </a:t>
+            </a:r>
+            <a:r>
+              <a:rPr lang="en-US" sz="2000" spc="-1" dirty="0">
+                <a:solidFill>
+                  <a:srgbClr val="000000"/>
+                </a:solidFill>
+                <a:latin typeface="Century Gothic"/>
+              </a:rPr>
+              <a:t>Demonstrate the ability of the agent to provide chemically intuitive explanations for model predictions </a:t>
+            </a:r>
+          </a:p>
+          <a:p>
+            <a:pPr>
+              <a:lnSpc>
+                <a:spcPct val="100000"/>
+              </a:lnSpc>
+              <a:spcBef>
+                <a:spcPts val="400"/>
+              </a:spcBef>
+              <a:spcAft>
+                <a:spcPts val="601"/>
+              </a:spcAft>
+              <a:buClr>
+                <a:srgbClr val="0064C8"/>
+              </a:buClr>
+            </a:pPr>
+            <a:r>
+              <a:rPr lang="en-US" sz="2000" spc="-1" dirty="0">
+                <a:solidFill>
+                  <a:srgbClr val="000000"/>
+                </a:solidFill>
+                <a:latin typeface="Century Gothic"/>
+              </a:rPr>
+              <a:t>Can the agent correctly interpret and compare explanations derived from different XAI methods?</a:t>
+            </a:r>
+          </a:p>
+          <a:p>
+            <a:pPr marL="0" indent="0">
+              <a:lnSpc>
+                <a:spcPct val="100000"/>
+              </a:lnSpc>
+              <a:spcBef>
+                <a:spcPts val="400"/>
+              </a:spcBef>
+              <a:spcAft>
+                <a:spcPts val="601"/>
+              </a:spcAft>
+              <a:buClr>
+                <a:srgbClr val="0064C8"/>
+              </a:buClr>
+              <a:buNone/>
+            </a:pPr>
+            <a:endParaRPr lang="en-US" sz="2000" spc="-1" dirty="0">
               <a:solidFill>
                 <a:srgbClr val="000000"/>
               </a:solidFill>
@@ -15804,70 +14905,232 @@
           </a:p>
         </p:txBody>
       </p:sp>
-      <p:pic>
-        <p:nvPicPr>
-          <p:cNvPr id="4" name="Picture 3">
+      <p:sp>
+        <p:nvSpPr>
+          <p:cNvPr id="10" name="Speech Bubble: Rectangle with Corners Rounded 9">
             <a:extLst>
               <a:ext uri="{FF2B5EF4-FFF2-40B4-BE49-F238E27FC236}">
-                <a16:creationId xmlns:a16="http://schemas.microsoft.com/office/drawing/2014/main" id="{A6448BF6-C81C-6C8D-8F4B-2F0B75A53E81}"/>
+                <a16:creationId xmlns:a16="http://schemas.microsoft.com/office/drawing/2014/main" id="{218E8154-7E95-D4BE-E8AA-D3B029A12B17}"/>
               </a:ext>
             </a:extLst>
           </p:cNvPr>
-          <p:cNvPicPr>
-            <a:picLocks noChangeAspect="1"/>
-          </p:cNvPicPr>
+          <p:cNvSpPr/>
           <p:nvPr/>
-        </p:nvPicPr>
-        <p:blipFill>
-          <a:blip r:embed="rId2"/>
-          <a:stretch>
-            <a:fillRect/>
-          </a:stretch>
-        </p:blipFill>
+        </p:nvSpPr>
         <p:spPr>
           <a:xfrm>
-            <a:off x="4343622" y="990120"/>
-            <a:ext cx="4557038" cy="3008146"/>
+            <a:off x="2604811" y="3708378"/>
+            <a:ext cx="5799718" cy="1634901"/>
           </a:xfrm>
-          <a:prstGeom prst="rect">
-            <a:avLst/>
+          <a:prstGeom prst="wedgeRoundRectCallout">
+            <a:avLst>
+              <a:gd name="adj1" fmla="val -55595"/>
+              <a:gd name="adj2" fmla="val 23756"/>
+              <a:gd name="adj3" fmla="val 16667"/>
+            </a:avLst>
           </a:prstGeom>
         </p:spPr>
-      </p:pic>
-      <p:pic>
-        <p:nvPicPr>
-          <p:cNvPr id="8" name="Picture 7">
+        <p:style>
+          <a:lnRef idx="2">
+            <a:schemeClr val="dk1"/>
+          </a:lnRef>
+          <a:fillRef idx="1">
+            <a:schemeClr val="lt1"/>
+          </a:fillRef>
+          <a:effectRef idx="0">
+            <a:schemeClr val="dk1"/>
+          </a:effectRef>
+          <a:fontRef idx="minor">
+            <a:schemeClr val="dk1"/>
+          </a:fontRef>
+        </p:style>
+        <p:txBody>
+          <a:bodyPr rtlCol="0" anchor="ctr"/>
+          <a:lstStyle/>
+          <a:p>
+            <a:pPr algn="just"/>
+            <a:r>
+              <a:rPr lang="en-US" sz="1200" dirty="0"/>
+              <a:t>You are running an explainability benchmarking study for compound bioactivity prediction. The goal is to train a Deep Neural Network to distinguish compounds active against the D(2) dopamine receptor (</a:t>
+            </a:r>
+            <a:r>
+              <a:rPr lang="en-US" sz="1200" dirty="0" err="1"/>
+              <a:t>UniProt</a:t>
+            </a:r>
+            <a:r>
+              <a:rPr lang="en-US" sz="1200" dirty="0"/>
+              <a:t> P14416) from inactive compounds, evaluate its performance, and then directly compare two pairs of explainability methods on the same on the same correctly predicted active compound:  </a:t>
+            </a:r>
+            <a:r>
+              <a:rPr lang="en-US" sz="1200" dirty="0" err="1"/>
+              <a:t>Molanchor</a:t>
+            </a:r>
+            <a:r>
+              <a:rPr lang="en-US" sz="1200" dirty="0"/>
+              <a:t> vs SHAP and </a:t>
+            </a:r>
+            <a:r>
+              <a:rPr lang="en-US" sz="1200" dirty="0" err="1"/>
+              <a:t>MolCE</a:t>
+            </a:r>
+            <a:r>
+              <a:rPr lang="en-US" sz="1200" dirty="0"/>
+              <a:t> vs Counterfactuals. Summarize where the methods agree on the structural determinants of the predictions and where they disagree.</a:t>
+            </a:r>
+          </a:p>
+        </p:txBody>
+      </p:sp>
+      <p:grpSp>
+        <p:nvGrpSpPr>
+          <p:cNvPr id="11" name="Group 10">
             <a:extLst>
               <a:ext uri="{FF2B5EF4-FFF2-40B4-BE49-F238E27FC236}">
-                <a16:creationId xmlns:a16="http://schemas.microsoft.com/office/drawing/2014/main" id="{F267D0B5-80AA-A015-D6E0-17D1621B9965}"/>
+                <a16:creationId xmlns:a16="http://schemas.microsoft.com/office/drawing/2014/main" id="{788479A3-3923-48AE-F836-EB227D56F8F3}"/>
               </a:ext>
             </a:extLst>
           </p:cNvPr>
-          <p:cNvPicPr>
-            <a:picLocks noChangeAspect="1"/>
-          </p:cNvPicPr>
+          <p:cNvGrpSpPr/>
           <p:nvPr/>
-        </p:nvPicPr>
-        <p:blipFill>
-          <a:blip r:embed="rId3"/>
-          <a:stretch>
-            <a:fillRect/>
-          </a:stretch>
-        </p:blipFill>
-        <p:spPr>
+        </p:nvGrpSpPr>
+        <p:grpSpPr>
           <a:xfrm>
-            <a:off x="4343622" y="3998266"/>
-            <a:ext cx="4557038" cy="2149192"/>
+            <a:off x="481031" y="3667833"/>
+            <a:ext cx="1774658" cy="2310063"/>
+            <a:chOff x="990492" y="2511372"/>
+            <a:chExt cx="1774658" cy="2310063"/>
           </a:xfrm>
-          <a:prstGeom prst="rect">
-            <a:avLst/>
-          </a:prstGeom>
-        </p:spPr>
-      </p:pic>
+        </p:grpSpPr>
+        <p:sp>
+          <p:nvSpPr>
+            <p:cNvPr id="12" name="Rectangle 11">
+              <a:extLst>
+                <a:ext uri="{FF2B5EF4-FFF2-40B4-BE49-F238E27FC236}">
+                  <a16:creationId xmlns:a16="http://schemas.microsoft.com/office/drawing/2014/main" id="{2D142D64-B397-2830-786D-0D3574B657AC}"/>
+                </a:ext>
+              </a:extLst>
+            </p:cNvPr>
+            <p:cNvSpPr/>
+            <p:nvPr/>
+          </p:nvSpPr>
+          <p:spPr>
+            <a:xfrm>
+              <a:off x="990492" y="2511372"/>
+              <a:ext cx="1774658" cy="2310063"/>
+            </a:xfrm>
+            <a:prstGeom prst="rect">
+              <a:avLst/>
+            </a:prstGeom>
+            <a:solidFill>
+              <a:schemeClr val="accent1">
+                <a:lumMod val="20000"/>
+                <a:lumOff val="80000"/>
+              </a:schemeClr>
+            </a:solidFill>
+            <a:ln>
+              <a:solidFill>
+                <a:schemeClr val="tx2">
+                  <a:lumMod val="25000"/>
+                  <a:lumOff val="75000"/>
+                </a:schemeClr>
+              </a:solidFill>
+            </a:ln>
+          </p:spPr>
+          <p:style>
+            <a:lnRef idx="2">
+              <a:schemeClr val="accent1">
+                <a:shade val="15000"/>
+              </a:schemeClr>
+            </a:lnRef>
+            <a:fillRef idx="1">
+              <a:schemeClr val="accent1"/>
+            </a:fillRef>
+            <a:effectRef idx="0">
+              <a:schemeClr val="accent1"/>
+            </a:effectRef>
+            <a:fontRef idx="minor">
+              <a:schemeClr val="lt1"/>
+            </a:fontRef>
+          </p:style>
+          <p:txBody>
+            <a:bodyPr rtlCol="0" anchor="ctr"/>
+            <a:lstStyle/>
+            <a:p>
+              <a:pPr algn="ctr"/>
+              <a:endParaRPr lang="en-US" dirty="0"/>
+            </a:p>
+          </p:txBody>
+        </p:sp>
+        <p:pic>
+          <p:nvPicPr>
+            <p:cNvPr id="13" name="Graphic 12" descr="Customer review with solid fill">
+              <a:extLst>
+                <a:ext uri="{FF2B5EF4-FFF2-40B4-BE49-F238E27FC236}">
+                  <a16:creationId xmlns:a16="http://schemas.microsoft.com/office/drawing/2014/main" id="{64E33793-8C2A-2656-B0ED-A696739E718A}"/>
+                </a:ext>
+              </a:extLst>
+            </p:cNvPr>
+            <p:cNvPicPr>
+              <a:picLocks noChangeAspect="1"/>
+            </p:cNvPicPr>
+            <p:nvPr/>
+          </p:nvPicPr>
+          <p:blipFill>
+            <a:blip r:embed="rId2">
+              <a:extLst>
+                <a:ext uri="{96DAC541-7B7A-43D3-8B79-37D633B846F1}">
+                  <asvg:svgBlip xmlns:asvg="http://schemas.microsoft.com/office/drawing/2016/SVG/main" r:embed="rId3"/>
+                </a:ext>
+              </a:extLst>
+            </a:blip>
+            <a:stretch>
+              <a:fillRect/>
+            </a:stretch>
+          </p:blipFill>
+          <p:spPr>
+            <a:xfrm>
+              <a:off x="1400027" y="3700649"/>
+              <a:ext cx="965534" cy="965534"/>
+            </a:xfrm>
+            <a:prstGeom prst="rect">
+              <a:avLst/>
+            </a:prstGeom>
+          </p:spPr>
+        </p:pic>
+        <p:pic>
+          <p:nvPicPr>
+            <p:cNvPr id="14" name="Picture 13">
+              <a:extLst>
+                <a:ext uri="{FF2B5EF4-FFF2-40B4-BE49-F238E27FC236}">
+                  <a16:creationId xmlns:a16="http://schemas.microsoft.com/office/drawing/2014/main" id="{1B081600-3BCF-355C-CB19-D7A38C9862A0}"/>
+                </a:ext>
+              </a:extLst>
+            </p:cNvPr>
+            <p:cNvPicPr>
+              <a:picLocks noChangeAspect="1"/>
+            </p:cNvPicPr>
+            <p:nvPr/>
+          </p:nvPicPr>
+          <p:blipFill>
+            <a:blip r:embed="rId4"/>
+            <a:stretch>
+              <a:fillRect/>
+            </a:stretch>
+          </p:blipFill>
+          <p:spPr>
+            <a:xfrm>
+              <a:off x="1126882" y="2607575"/>
+              <a:ext cx="1525117" cy="996871"/>
+            </a:xfrm>
+            <a:prstGeom prst="rect">
+              <a:avLst/>
+            </a:prstGeom>
+          </p:spPr>
+        </p:pic>
+      </p:grpSp>
     </p:spTree>
     <p:extLst>
       <p:ext uri="{BB962C8B-B14F-4D97-AF65-F5344CB8AC3E}">
-        <p14:creationId xmlns:p14="http://schemas.microsoft.com/office/powerpoint/2010/main" val="755729670"/>
+        <p14:creationId xmlns:p14="http://schemas.microsoft.com/office/powerpoint/2010/main" val="3230935714"/>
       </p:ext>
     </p:extLst>
   </p:cSld>
@@ -15948,16 +15211,7 @@
                 </a:solidFill>
                 <a:latin typeface="Century Gothic"/>
               </a:rPr>
-              <a:t>Exemplary answer output </a:t>
-            </a:r>
-            <a:r>
-              <a:rPr lang="en-US" sz="3200" b="0" strike="noStrike" spc="-1" dirty="0" err="1">
-                <a:solidFill>
-                  <a:srgbClr val="0064C8"/>
-                </a:solidFill>
-                <a:latin typeface="Century Gothic"/>
-              </a:rPr>
-              <a:t>EdgeSHAPer</a:t>
+              <a:t>Prompt 2</a:t>
             </a:r>
             <a:endParaRPr lang="en-US" sz="3200" b="0" strike="noStrike" spc="-1" dirty="0">
               <a:solidFill>
@@ -15968,558 +15222,12 @@
           </a:p>
         </p:txBody>
       </p:sp>
-      <p:sp>
-        <p:nvSpPr>
-          <p:cNvPr id="165" name="PlaceHolder 3">
+      <p:pic>
+        <p:nvPicPr>
+          <p:cNvPr id="12" name="Picture 11">
             <a:extLst>
               <a:ext uri="{FF2B5EF4-FFF2-40B4-BE49-F238E27FC236}">
-                <a16:creationId xmlns:a16="http://schemas.microsoft.com/office/drawing/2014/main" id="{2EFBEA53-7B78-D9A1-93EF-9608A3193D27}"/>
-              </a:ext>
-            </a:extLst>
-          </p:cNvPr>
-          <p:cNvSpPr>
-            <a:spLocks noGrp="1"/>
-          </p:cNvSpPr>
-          <p:nvPr>
-            <p:ph type="sldNum"/>
-          </p:nvPr>
-        </p:nvSpPr>
-        <p:spPr>
-          <a:xfrm>
-            <a:off x="8376840" y="5692680"/>
-            <a:ext cx="384120" cy="364680"/>
-          </a:xfrm>
-          <a:prstGeom prst="rect">
-            <a:avLst/>
-          </a:prstGeom>
-          <a:noFill/>
-          <a:ln w="0">
-            <a:noFill/>
-          </a:ln>
-        </p:spPr>
-        <p:txBody>
-          <a:bodyPr anchor="ctr">
-            <a:noAutofit/>
-          </a:bodyPr>
-          <a:lstStyle/>
-          <a:p>
-            <a:pPr algn="r">
-              <a:lnSpc>
-                <a:spcPct val="100000"/>
-              </a:lnSpc>
-              <a:buNone/>
-            </a:pPr>
-            <a:fld id="{8BD7C522-1E12-40C3-B25E-5F0462E20B22}" type="slidenum">
-              <a:rPr lang="en-US" sz="1200" b="0" strike="noStrike" spc="-1">
-                <a:solidFill>
-                  <a:srgbClr val="8B8B8B"/>
-                </a:solidFill>
-                <a:latin typeface="Century Gothic"/>
-              </a:rPr>
-              <a:t>8</a:t>
-            </a:fld>
-            <a:endParaRPr lang="en-GB" sz="1200" b="0" strike="noStrike" spc="-1" dirty="0">
-              <a:latin typeface="Times New Roman"/>
-            </a:endParaRPr>
-          </a:p>
-        </p:txBody>
-      </p:sp>
-      <p:sp>
-        <p:nvSpPr>
-          <p:cNvPr id="7" name="PlaceHolder 2">
-            <a:extLst>
-              <a:ext uri="{FF2B5EF4-FFF2-40B4-BE49-F238E27FC236}">
-                <a16:creationId xmlns:a16="http://schemas.microsoft.com/office/drawing/2014/main" id="{66DE14D4-64D4-6D1F-DD92-BC16D674C58B}"/>
-              </a:ext>
-            </a:extLst>
-          </p:cNvPr>
-          <p:cNvSpPr txBox="1">
-            <a:spLocks/>
-          </p:cNvSpPr>
-          <p:nvPr/>
-        </p:nvSpPr>
-        <p:spPr>
-          <a:xfrm>
-            <a:off x="374529" y="1371598"/>
-            <a:ext cx="4251523" cy="4559301"/>
-          </a:xfrm>
-          <a:prstGeom prst="rect">
-            <a:avLst/>
-          </a:prstGeom>
-          <a:noFill/>
-          <a:ln w="0">
-            <a:noFill/>
-          </a:ln>
-        </p:spPr>
-        <p:txBody>
-          <a:bodyPr numCol="1" spcCol="0" anchor="t">
-            <a:noAutofit/>
-          </a:bodyPr>
-          <a:lstStyle>
-            <a:lvl1pPr marL="228600" indent="-228600" algn="l" defTabSz="914400" rtl="0" eaLnBrk="1" latinLnBrk="0" hangingPunct="1">
-              <a:lnSpc>
-                <a:spcPct val="90000"/>
-              </a:lnSpc>
-              <a:spcBef>
-                <a:spcPts val="1000"/>
-              </a:spcBef>
-              <a:buFont typeface="Arial" panose="020B0604020202020204" pitchFamily="34" charset="0"/>
-              <a:buChar char="•"/>
-              <a:defRPr sz="2800" kern="1200">
-                <a:solidFill>
-                  <a:schemeClr val="tx1"/>
-                </a:solidFill>
-                <a:latin typeface="+mn-lt"/>
-                <a:ea typeface="+mn-ea"/>
-                <a:cs typeface="+mn-cs"/>
-              </a:defRPr>
-            </a:lvl1pPr>
-            <a:lvl2pPr marL="685800" indent="-228600" algn="l" defTabSz="914400" rtl="0" eaLnBrk="1" latinLnBrk="0" hangingPunct="1">
-              <a:lnSpc>
-                <a:spcPct val="90000"/>
-              </a:lnSpc>
-              <a:spcBef>
-                <a:spcPts val="500"/>
-              </a:spcBef>
-              <a:buFont typeface="Arial" panose="020B0604020202020204" pitchFamily="34" charset="0"/>
-              <a:buChar char="•"/>
-              <a:defRPr sz="2400" kern="1200">
-                <a:solidFill>
-                  <a:schemeClr val="tx1"/>
-                </a:solidFill>
-                <a:latin typeface="+mn-lt"/>
-                <a:ea typeface="+mn-ea"/>
-                <a:cs typeface="+mn-cs"/>
-              </a:defRPr>
-            </a:lvl2pPr>
-            <a:lvl3pPr marL="1143000" indent="-228600" algn="l" defTabSz="914400" rtl="0" eaLnBrk="1" latinLnBrk="0" hangingPunct="1">
-              <a:lnSpc>
-                <a:spcPct val="90000"/>
-              </a:lnSpc>
-              <a:spcBef>
-                <a:spcPts val="500"/>
-              </a:spcBef>
-              <a:buFont typeface="Arial" panose="020B0604020202020204" pitchFamily="34" charset="0"/>
-              <a:buChar char="•"/>
-              <a:defRPr sz="2000" kern="1200">
-                <a:solidFill>
-                  <a:schemeClr val="tx1"/>
-                </a:solidFill>
-                <a:latin typeface="+mn-lt"/>
-                <a:ea typeface="+mn-ea"/>
-                <a:cs typeface="+mn-cs"/>
-              </a:defRPr>
-            </a:lvl3pPr>
-            <a:lvl4pPr marL="1600200" indent="-228600" algn="l" defTabSz="914400" rtl="0" eaLnBrk="1" latinLnBrk="0" hangingPunct="1">
-              <a:lnSpc>
-                <a:spcPct val="90000"/>
-              </a:lnSpc>
-              <a:spcBef>
-                <a:spcPts val="500"/>
-              </a:spcBef>
-              <a:buFont typeface="Arial" panose="020B0604020202020204" pitchFamily="34" charset="0"/>
-              <a:buChar char="•"/>
-              <a:defRPr sz="1800" kern="1200">
-                <a:solidFill>
-                  <a:schemeClr val="tx1"/>
-                </a:solidFill>
-                <a:latin typeface="+mn-lt"/>
-                <a:ea typeface="+mn-ea"/>
-                <a:cs typeface="+mn-cs"/>
-              </a:defRPr>
-            </a:lvl4pPr>
-            <a:lvl5pPr marL="2057400" indent="-228600" algn="l" defTabSz="914400" rtl="0" eaLnBrk="1" latinLnBrk="0" hangingPunct="1">
-              <a:lnSpc>
-                <a:spcPct val="90000"/>
-              </a:lnSpc>
-              <a:spcBef>
-                <a:spcPts val="500"/>
-              </a:spcBef>
-              <a:buFont typeface="Arial" panose="020B0604020202020204" pitchFamily="34" charset="0"/>
-              <a:buChar char="•"/>
-              <a:defRPr sz="1800" kern="1200">
-                <a:solidFill>
-                  <a:schemeClr val="tx1"/>
-                </a:solidFill>
-                <a:latin typeface="+mn-lt"/>
-                <a:ea typeface="+mn-ea"/>
-                <a:cs typeface="+mn-cs"/>
-              </a:defRPr>
-            </a:lvl5pPr>
-            <a:lvl6pPr marL="2514600" indent="-228600" algn="l" defTabSz="914400" rtl="0" eaLnBrk="1" latinLnBrk="0" hangingPunct="1">
-              <a:lnSpc>
-                <a:spcPct val="90000"/>
-              </a:lnSpc>
-              <a:spcBef>
-                <a:spcPts val="500"/>
-              </a:spcBef>
-              <a:buFont typeface="Arial" panose="020B0604020202020204" pitchFamily="34" charset="0"/>
-              <a:buChar char="•"/>
-              <a:defRPr sz="1800" kern="1200">
-                <a:solidFill>
-                  <a:schemeClr val="tx1"/>
-                </a:solidFill>
-                <a:latin typeface="+mn-lt"/>
-                <a:ea typeface="+mn-ea"/>
-                <a:cs typeface="+mn-cs"/>
-              </a:defRPr>
-            </a:lvl6pPr>
-            <a:lvl7pPr marL="2971800" indent="-228600" algn="l" defTabSz="914400" rtl="0" eaLnBrk="1" latinLnBrk="0" hangingPunct="1">
-              <a:lnSpc>
-                <a:spcPct val="90000"/>
-              </a:lnSpc>
-              <a:spcBef>
-                <a:spcPts val="500"/>
-              </a:spcBef>
-              <a:buFont typeface="Arial" panose="020B0604020202020204" pitchFamily="34" charset="0"/>
-              <a:buChar char="•"/>
-              <a:defRPr sz="1800" kern="1200">
-                <a:solidFill>
-                  <a:schemeClr val="tx1"/>
-                </a:solidFill>
-                <a:latin typeface="+mn-lt"/>
-                <a:ea typeface="+mn-ea"/>
-                <a:cs typeface="+mn-cs"/>
-              </a:defRPr>
-            </a:lvl7pPr>
-            <a:lvl8pPr marL="3429000" indent="-228600" algn="l" defTabSz="914400" rtl="0" eaLnBrk="1" latinLnBrk="0" hangingPunct="1">
-              <a:lnSpc>
-                <a:spcPct val="90000"/>
-              </a:lnSpc>
-              <a:spcBef>
-                <a:spcPts val="500"/>
-              </a:spcBef>
-              <a:buFont typeface="Arial" panose="020B0604020202020204" pitchFamily="34" charset="0"/>
-              <a:buChar char="•"/>
-              <a:defRPr sz="1800" kern="1200">
-                <a:solidFill>
-                  <a:schemeClr val="tx1"/>
-                </a:solidFill>
-                <a:latin typeface="+mn-lt"/>
-                <a:ea typeface="+mn-ea"/>
-                <a:cs typeface="+mn-cs"/>
-              </a:defRPr>
-            </a:lvl8pPr>
-            <a:lvl9pPr marL="3886200" indent="-228600" algn="l" defTabSz="914400" rtl="0" eaLnBrk="1" latinLnBrk="0" hangingPunct="1">
-              <a:lnSpc>
-                <a:spcPct val="90000"/>
-              </a:lnSpc>
-              <a:spcBef>
-                <a:spcPts val="500"/>
-              </a:spcBef>
-              <a:buFont typeface="Arial" panose="020B0604020202020204" pitchFamily="34" charset="0"/>
-              <a:buChar char="•"/>
-              <a:defRPr sz="1800" kern="1200">
-                <a:solidFill>
-                  <a:schemeClr val="tx1"/>
-                </a:solidFill>
-                <a:latin typeface="+mn-lt"/>
-                <a:ea typeface="+mn-ea"/>
-                <a:cs typeface="+mn-cs"/>
-              </a:defRPr>
-            </a:lvl9pPr>
-          </a:lstStyle>
-          <a:p>
-            <a:pPr>
-              <a:lnSpc>
-                <a:spcPct val="100000"/>
-              </a:lnSpc>
-              <a:spcBef>
-                <a:spcPts val="400"/>
-              </a:spcBef>
-              <a:buClr>
-                <a:srgbClr val="0064C8"/>
-              </a:buClr>
-              <a:buFont typeface="Wingdings" panose="05000000000000000000" pitchFamily="2" charset="2"/>
-              <a:buChar char="§"/>
-            </a:pPr>
-            <a:r>
-              <a:rPr lang="en-US" sz="2000" spc="-1" dirty="0">
-                <a:solidFill>
-                  <a:srgbClr val="000000"/>
-                </a:solidFill>
-                <a:latin typeface="Century Gothic"/>
-              </a:rPr>
-              <a:t>Prompt: Train a GNN model on a binary dataset and explain a correctly predicted active compound</a:t>
-            </a:r>
-          </a:p>
-          <a:p>
-            <a:pPr>
-              <a:lnSpc>
-                <a:spcPct val="100000"/>
-              </a:lnSpc>
-              <a:spcBef>
-                <a:spcPts val="400"/>
-              </a:spcBef>
-              <a:buClr>
-                <a:srgbClr val="0064C8"/>
-              </a:buClr>
-              <a:buFont typeface="Wingdings" panose="05000000000000000000" pitchFamily="2" charset="2"/>
-              <a:buChar char="§"/>
-            </a:pPr>
-            <a:endParaRPr lang="en-US" sz="2000" spc="-1" dirty="0">
-              <a:solidFill>
-                <a:srgbClr val="000000"/>
-              </a:solidFill>
-              <a:latin typeface="Century Gothic"/>
-            </a:endParaRPr>
-          </a:p>
-          <a:p>
-            <a:pPr>
-              <a:lnSpc>
-                <a:spcPct val="100000"/>
-              </a:lnSpc>
-              <a:spcBef>
-                <a:spcPts val="400"/>
-              </a:spcBef>
-              <a:buClr>
-                <a:srgbClr val="0064C8"/>
-              </a:buClr>
-              <a:buFont typeface="Wingdings" panose="05000000000000000000" pitchFamily="2" charset="2"/>
-              <a:buChar char="§"/>
-            </a:pPr>
-            <a:endParaRPr lang="en-US" sz="2000" spc="-1" dirty="0">
-              <a:solidFill>
-                <a:srgbClr val="000000"/>
-              </a:solidFill>
-              <a:latin typeface="Century Gothic"/>
-            </a:endParaRPr>
-          </a:p>
-          <a:p>
-            <a:pPr>
-              <a:lnSpc>
-                <a:spcPct val="100000"/>
-              </a:lnSpc>
-              <a:spcBef>
-                <a:spcPts val="400"/>
-              </a:spcBef>
-              <a:buClr>
-                <a:srgbClr val="0064C8"/>
-              </a:buClr>
-              <a:buFont typeface="Wingdings" panose="05000000000000000000" pitchFamily="2" charset="2"/>
-              <a:buChar char="§"/>
-            </a:pPr>
-            <a:r>
-              <a:rPr lang="en-US" sz="2000" spc="-1" dirty="0">
-                <a:solidFill>
-                  <a:srgbClr val="000000"/>
-                </a:solidFill>
-                <a:latin typeface="Century Gothic"/>
-              </a:rPr>
-              <a:t>LLM selects the architecture</a:t>
-            </a:r>
-          </a:p>
-          <a:p>
-            <a:pPr>
-              <a:lnSpc>
-                <a:spcPct val="100000"/>
-              </a:lnSpc>
-              <a:spcBef>
-                <a:spcPts val="400"/>
-              </a:spcBef>
-              <a:buClr>
-                <a:srgbClr val="0064C8"/>
-              </a:buClr>
-              <a:buFont typeface="Wingdings" panose="05000000000000000000" pitchFamily="2" charset="2"/>
-              <a:buChar char="§"/>
-            </a:pPr>
-            <a:endParaRPr lang="en-US" sz="2000" spc="-1" dirty="0">
-              <a:solidFill>
-                <a:srgbClr val="000000"/>
-              </a:solidFill>
-              <a:latin typeface="Century Gothic"/>
-            </a:endParaRPr>
-          </a:p>
-          <a:p>
-            <a:pPr>
-              <a:lnSpc>
-                <a:spcPct val="100000"/>
-              </a:lnSpc>
-              <a:spcBef>
-                <a:spcPts val="400"/>
-              </a:spcBef>
-              <a:buClr>
-                <a:srgbClr val="0064C8"/>
-              </a:buClr>
-              <a:buFont typeface="Wingdings" panose="05000000000000000000" pitchFamily="2" charset="2"/>
-              <a:buChar char="§"/>
-            </a:pPr>
-            <a:endParaRPr lang="en-US" sz="2000" spc="-1" dirty="0">
-              <a:solidFill>
-                <a:srgbClr val="000000"/>
-              </a:solidFill>
-              <a:latin typeface="Century Gothic"/>
-            </a:endParaRPr>
-          </a:p>
-          <a:p>
-            <a:pPr>
-              <a:lnSpc>
-                <a:spcPct val="100000"/>
-              </a:lnSpc>
-              <a:spcBef>
-                <a:spcPts val="400"/>
-              </a:spcBef>
-              <a:buClr>
-                <a:srgbClr val="0064C8"/>
-              </a:buClr>
-              <a:buFont typeface="Wingdings" panose="05000000000000000000" pitchFamily="2" charset="2"/>
-              <a:buChar char="§"/>
-            </a:pPr>
-            <a:r>
-              <a:rPr lang="en-US" sz="2000" spc="-1" dirty="0">
-                <a:solidFill>
-                  <a:srgbClr val="000000"/>
-                </a:solidFill>
-                <a:latin typeface="Century Gothic"/>
-              </a:rPr>
-              <a:t>Reports results</a:t>
-            </a:r>
-          </a:p>
-          <a:p>
-            <a:pPr>
-              <a:lnSpc>
-                <a:spcPct val="100000"/>
-              </a:lnSpc>
-              <a:spcBef>
-                <a:spcPts val="400"/>
-              </a:spcBef>
-              <a:buClr>
-                <a:srgbClr val="0064C8"/>
-              </a:buClr>
-              <a:buFont typeface="Wingdings" panose="05000000000000000000" pitchFamily="2" charset="2"/>
-              <a:buChar char="§"/>
-            </a:pPr>
-            <a:endParaRPr lang="en-US" sz="2000" spc="-1" dirty="0">
-              <a:solidFill>
-                <a:srgbClr val="000000"/>
-              </a:solidFill>
-              <a:latin typeface="Century Gothic"/>
-            </a:endParaRPr>
-          </a:p>
-          <a:p>
-            <a:pPr marL="0" indent="0">
-              <a:lnSpc>
-                <a:spcPct val="100000"/>
-              </a:lnSpc>
-              <a:spcBef>
-                <a:spcPts val="400"/>
-              </a:spcBef>
-              <a:buClr>
-                <a:srgbClr val="0064C8"/>
-              </a:buClr>
-              <a:buNone/>
-            </a:pPr>
-            <a:endParaRPr lang="en-US" sz="2000" spc="-1" dirty="0">
-              <a:solidFill>
-                <a:srgbClr val="000000"/>
-              </a:solidFill>
-              <a:latin typeface="Century Gothic"/>
-            </a:endParaRPr>
-          </a:p>
-          <a:p>
-            <a:pPr>
-              <a:lnSpc>
-                <a:spcPct val="100000"/>
-              </a:lnSpc>
-              <a:spcBef>
-                <a:spcPts val="400"/>
-              </a:spcBef>
-              <a:buClr>
-                <a:srgbClr val="0064C8"/>
-              </a:buClr>
-              <a:buFont typeface="Wingdings" panose="05000000000000000000" pitchFamily="2" charset="2"/>
-              <a:buChar char="§"/>
-            </a:pPr>
-            <a:endParaRPr lang="en-US" sz="2000" spc="-1" dirty="0">
-              <a:solidFill>
-                <a:srgbClr val="000000"/>
-              </a:solidFill>
-              <a:latin typeface="Century Gothic"/>
-            </a:endParaRPr>
-          </a:p>
-          <a:p>
-            <a:pPr>
-              <a:lnSpc>
-                <a:spcPct val="100000"/>
-              </a:lnSpc>
-              <a:spcBef>
-                <a:spcPts val="400"/>
-              </a:spcBef>
-              <a:buClr>
-                <a:srgbClr val="0064C8"/>
-              </a:buClr>
-              <a:buFont typeface="Wingdings" panose="05000000000000000000" pitchFamily="2" charset="2"/>
-              <a:buChar char="§"/>
-            </a:pPr>
-            <a:endParaRPr lang="en-US" sz="1800" spc="-1" dirty="0">
-              <a:solidFill>
-                <a:srgbClr val="000000"/>
-              </a:solidFill>
-              <a:latin typeface="Century Gothic"/>
-            </a:endParaRPr>
-          </a:p>
-          <a:p>
-            <a:pPr marL="343080" indent="-343080">
-              <a:lnSpc>
-                <a:spcPct val="100000"/>
-              </a:lnSpc>
-              <a:spcBef>
-                <a:spcPts val="400"/>
-              </a:spcBef>
-              <a:spcAft>
-                <a:spcPts val="601"/>
-              </a:spcAft>
-              <a:buClr>
-                <a:srgbClr val="0064C8"/>
-              </a:buClr>
-              <a:buFont typeface="Wingdings 2" charset="2"/>
-              <a:buChar char=""/>
-            </a:pPr>
-            <a:endParaRPr lang="en-US" sz="2000" b="1" spc="-1" dirty="0">
-              <a:solidFill>
-                <a:srgbClr val="000000"/>
-              </a:solidFill>
-              <a:latin typeface="Century Gothic"/>
-            </a:endParaRPr>
-          </a:p>
-        </p:txBody>
-      </p:sp>
-      <p:pic>
-        <p:nvPicPr>
-          <p:cNvPr id="3" name="Picture 2">
-            <a:extLst>
-              <a:ext uri="{FF2B5EF4-FFF2-40B4-BE49-F238E27FC236}">
-                <a16:creationId xmlns:a16="http://schemas.microsoft.com/office/drawing/2014/main" id="{9DA85E66-1EFD-47C3-862B-21979C1F5C6F}"/>
-              </a:ext>
-            </a:extLst>
-          </p:cNvPr>
-          <p:cNvPicPr>
-            <a:picLocks noChangeAspect="1"/>
-          </p:cNvPicPr>
-          <p:nvPr/>
-        </p:nvPicPr>
-        <p:blipFill>
-          <a:blip r:embed="rId2"/>
-          <a:stretch>
-            <a:fillRect/>
-          </a:stretch>
-        </p:blipFill>
-        <p:spPr>
-          <a:xfrm>
-            <a:off x="4875563" y="1174421"/>
-            <a:ext cx="3804481" cy="2612989"/>
-          </a:xfrm>
-          <a:prstGeom prst="rect">
-            <a:avLst/>
-          </a:prstGeom>
-        </p:spPr>
-      </p:pic>
-      <p:pic>
-        <p:nvPicPr>
-          <p:cNvPr id="6" name="Picture 5">
-            <a:extLst>
-              <a:ext uri="{FF2B5EF4-FFF2-40B4-BE49-F238E27FC236}">
-                <a16:creationId xmlns:a16="http://schemas.microsoft.com/office/drawing/2014/main" id="{CBEE4EBE-BE81-4F15-9C55-5A2351D36FE7}"/>
+                <a16:creationId xmlns:a16="http://schemas.microsoft.com/office/drawing/2014/main" id="{E40230FB-91FB-0DC9-7BD8-1BE8E2E79A66}"/>
               </a:ext>
             </a:extLst>
           </p:cNvPr>
@@ -16536,38 +15244,8 @@
         </p:blipFill>
         <p:spPr>
           <a:xfrm>
-            <a:off x="4875563" y="4610647"/>
-            <a:ext cx="3804480" cy="1131062"/>
-          </a:xfrm>
-          <a:prstGeom prst="rect">
-            <a:avLst/>
-          </a:prstGeom>
-        </p:spPr>
-      </p:pic>
-      <p:pic>
-        <p:nvPicPr>
-          <p:cNvPr id="10" name="Picture 9">
-            <a:extLst>
-              <a:ext uri="{FF2B5EF4-FFF2-40B4-BE49-F238E27FC236}">
-                <a16:creationId xmlns:a16="http://schemas.microsoft.com/office/drawing/2014/main" id="{AFB3B521-7DFA-48D0-AB2D-3890673F8FD3}"/>
-              </a:ext>
-            </a:extLst>
-          </p:cNvPr>
-          <p:cNvPicPr>
-            <a:picLocks noChangeAspect="1"/>
-          </p:cNvPicPr>
-          <p:nvPr/>
-        </p:nvPicPr>
-        <p:blipFill>
-          <a:blip r:embed="rId4"/>
-          <a:stretch>
-            <a:fillRect/>
-          </a:stretch>
-        </p:blipFill>
-        <p:spPr>
-          <a:xfrm>
-            <a:off x="4875563" y="3786896"/>
-            <a:ext cx="3804480" cy="833290"/>
+            <a:off x="380880" y="1192696"/>
+            <a:ext cx="8177259" cy="4495156"/>
           </a:xfrm>
           <a:prstGeom prst="rect">
             <a:avLst/>
@@ -16577,7 +15255,7 @@
     </p:spTree>
     <p:extLst>
       <p:ext uri="{BB962C8B-B14F-4D97-AF65-F5344CB8AC3E}">
-        <p14:creationId xmlns:p14="http://schemas.microsoft.com/office/powerpoint/2010/main" val="1512285611"/>
+        <p14:creationId xmlns:p14="http://schemas.microsoft.com/office/powerpoint/2010/main" val="497639913"/>
       </p:ext>
     </p:extLst>
   </p:cSld>
@@ -16658,16 +15336,7 @@
                 </a:solidFill>
                 <a:latin typeface="Century Gothic"/>
               </a:rPr>
-              <a:t>Exemplary answer output </a:t>
-            </a:r>
-            <a:r>
-              <a:rPr lang="en-US" sz="3200" b="0" strike="noStrike" spc="-1" dirty="0" err="1">
-                <a:solidFill>
-                  <a:srgbClr val="0064C8"/>
-                </a:solidFill>
-                <a:latin typeface="Century Gothic"/>
-              </a:rPr>
-              <a:t>EdgeSHAPer</a:t>
+              <a:t>Prompt 2</a:t>
             </a:r>
             <a:endParaRPr lang="en-US" sz="3200" b="0" strike="noStrike" spc="-1" dirty="0">
               <a:solidFill>
@@ -16678,543 +15347,12 @@
           </a:p>
         </p:txBody>
       </p:sp>
-      <p:sp>
-        <p:nvSpPr>
-          <p:cNvPr id="165" name="PlaceHolder 3">
+      <p:pic>
+        <p:nvPicPr>
+          <p:cNvPr id="18" name="Picture 17">
             <a:extLst>
               <a:ext uri="{FF2B5EF4-FFF2-40B4-BE49-F238E27FC236}">
-                <a16:creationId xmlns:a16="http://schemas.microsoft.com/office/drawing/2014/main" id="{2EFBEA53-7B78-D9A1-93EF-9608A3193D27}"/>
-              </a:ext>
-            </a:extLst>
-          </p:cNvPr>
-          <p:cNvSpPr>
-            <a:spLocks noGrp="1"/>
-          </p:cNvSpPr>
-          <p:nvPr>
-            <p:ph type="sldNum"/>
-          </p:nvPr>
-        </p:nvSpPr>
-        <p:spPr>
-          <a:xfrm>
-            <a:off x="8376840" y="5692680"/>
-            <a:ext cx="384120" cy="364680"/>
-          </a:xfrm>
-          <a:prstGeom prst="rect">
-            <a:avLst/>
-          </a:prstGeom>
-          <a:noFill/>
-          <a:ln w="0">
-            <a:noFill/>
-          </a:ln>
-        </p:spPr>
-        <p:txBody>
-          <a:bodyPr anchor="ctr">
-            <a:noAutofit/>
-          </a:bodyPr>
-          <a:lstStyle/>
-          <a:p>
-            <a:pPr algn="r">
-              <a:lnSpc>
-                <a:spcPct val="100000"/>
-              </a:lnSpc>
-              <a:buNone/>
-            </a:pPr>
-            <a:fld id="{8BD7C522-1E12-40C3-B25E-5F0462E20B22}" type="slidenum">
-              <a:rPr lang="en-US" sz="1200" b="0" strike="noStrike" spc="-1">
-                <a:solidFill>
-                  <a:srgbClr val="8B8B8B"/>
-                </a:solidFill>
-                <a:latin typeface="Century Gothic"/>
-              </a:rPr>
-              <a:t>9</a:t>
-            </a:fld>
-            <a:endParaRPr lang="en-GB" sz="1200" b="0" strike="noStrike" spc="-1" dirty="0">
-              <a:latin typeface="Times New Roman"/>
-            </a:endParaRPr>
-          </a:p>
-        </p:txBody>
-      </p:sp>
-      <p:sp>
-        <p:nvSpPr>
-          <p:cNvPr id="7" name="PlaceHolder 2">
-            <a:extLst>
-              <a:ext uri="{FF2B5EF4-FFF2-40B4-BE49-F238E27FC236}">
-                <a16:creationId xmlns:a16="http://schemas.microsoft.com/office/drawing/2014/main" id="{66DE14D4-64D4-6D1F-DD92-BC16D674C58B}"/>
-              </a:ext>
-            </a:extLst>
-          </p:cNvPr>
-          <p:cNvSpPr txBox="1">
-            <a:spLocks/>
-          </p:cNvSpPr>
-          <p:nvPr/>
-        </p:nvSpPr>
-        <p:spPr>
-          <a:xfrm>
-            <a:off x="374529" y="1371598"/>
-            <a:ext cx="4251523" cy="4559301"/>
-          </a:xfrm>
-          <a:prstGeom prst="rect">
-            <a:avLst/>
-          </a:prstGeom>
-          <a:noFill/>
-          <a:ln w="0">
-            <a:noFill/>
-          </a:ln>
-        </p:spPr>
-        <p:txBody>
-          <a:bodyPr numCol="1" spcCol="0" anchor="t">
-            <a:noAutofit/>
-          </a:bodyPr>
-          <a:lstStyle>
-            <a:lvl1pPr marL="228600" indent="-228600" algn="l" defTabSz="914400" rtl="0" eaLnBrk="1" latinLnBrk="0" hangingPunct="1">
-              <a:lnSpc>
-                <a:spcPct val="90000"/>
-              </a:lnSpc>
-              <a:spcBef>
-                <a:spcPts val="1000"/>
-              </a:spcBef>
-              <a:buFont typeface="Arial" panose="020B0604020202020204" pitchFamily="34" charset="0"/>
-              <a:buChar char="•"/>
-              <a:defRPr sz="2800" kern="1200">
-                <a:solidFill>
-                  <a:schemeClr val="tx1"/>
-                </a:solidFill>
-                <a:latin typeface="+mn-lt"/>
-                <a:ea typeface="+mn-ea"/>
-                <a:cs typeface="+mn-cs"/>
-              </a:defRPr>
-            </a:lvl1pPr>
-            <a:lvl2pPr marL="685800" indent="-228600" algn="l" defTabSz="914400" rtl="0" eaLnBrk="1" latinLnBrk="0" hangingPunct="1">
-              <a:lnSpc>
-                <a:spcPct val="90000"/>
-              </a:lnSpc>
-              <a:spcBef>
-                <a:spcPts val="500"/>
-              </a:spcBef>
-              <a:buFont typeface="Arial" panose="020B0604020202020204" pitchFamily="34" charset="0"/>
-              <a:buChar char="•"/>
-              <a:defRPr sz="2400" kern="1200">
-                <a:solidFill>
-                  <a:schemeClr val="tx1"/>
-                </a:solidFill>
-                <a:latin typeface="+mn-lt"/>
-                <a:ea typeface="+mn-ea"/>
-                <a:cs typeface="+mn-cs"/>
-              </a:defRPr>
-            </a:lvl2pPr>
-            <a:lvl3pPr marL="1143000" indent="-228600" algn="l" defTabSz="914400" rtl="0" eaLnBrk="1" latinLnBrk="0" hangingPunct="1">
-              <a:lnSpc>
-                <a:spcPct val="90000"/>
-              </a:lnSpc>
-              <a:spcBef>
-                <a:spcPts val="500"/>
-              </a:spcBef>
-              <a:buFont typeface="Arial" panose="020B0604020202020204" pitchFamily="34" charset="0"/>
-              <a:buChar char="•"/>
-              <a:defRPr sz="2000" kern="1200">
-                <a:solidFill>
-                  <a:schemeClr val="tx1"/>
-                </a:solidFill>
-                <a:latin typeface="+mn-lt"/>
-                <a:ea typeface="+mn-ea"/>
-                <a:cs typeface="+mn-cs"/>
-              </a:defRPr>
-            </a:lvl3pPr>
-            <a:lvl4pPr marL="1600200" indent="-228600" algn="l" defTabSz="914400" rtl="0" eaLnBrk="1" latinLnBrk="0" hangingPunct="1">
-              <a:lnSpc>
-                <a:spcPct val="90000"/>
-              </a:lnSpc>
-              <a:spcBef>
-                <a:spcPts val="500"/>
-              </a:spcBef>
-              <a:buFont typeface="Arial" panose="020B0604020202020204" pitchFamily="34" charset="0"/>
-              <a:buChar char="•"/>
-              <a:defRPr sz="1800" kern="1200">
-                <a:solidFill>
-                  <a:schemeClr val="tx1"/>
-                </a:solidFill>
-                <a:latin typeface="+mn-lt"/>
-                <a:ea typeface="+mn-ea"/>
-                <a:cs typeface="+mn-cs"/>
-              </a:defRPr>
-            </a:lvl4pPr>
-            <a:lvl5pPr marL="2057400" indent="-228600" algn="l" defTabSz="914400" rtl="0" eaLnBrk="1" latinLnBrk="0" hangingPunct="1">
-              <a:lnSpc>
-                <a:spcPct val="90000"/>
-              </a:lnSpc>
-              <a:spcBef>
-                <a:spcPts val="500"/>
-              </a:spcBef>
-              <a:buFont typeface="Arial" panose="020B0604020202020204" pitchFamily="34" charset="0"/>
-              <a:buChar char="•"/>
-              <a:defRPr sz="1800" kern="1200">
-                <a:solidFill>
-                  <a:schemeClr val="tx1"/>
-                </a:solidFill>
-                <a:latin typeface="+mn-lt"/>
-                <a:ea typeface="+mn-ea"/>
-                <a:cs typeface="+mn-cs"/>
-              </a:defRPr>
-            </a:lvl5pPr>
-            <a:lvl6pPr marL="2514600" indent="-228600" algn="l" defTabSz="914400" rtl="0" eaLnBrk="1" latinLnBrk="0" hangingPunct="1">
-              <a:lnSpc>
-                <a:spcPct val="90000"/>
-              </a:lnSpc>
-              <a:spcBef>
-                <a:spcPts val="500"/>
-              </a:spcBef>
-              <a:buFont typeface="Arial" panose="020B0604020202020204" pitchFamily="34" charset="0"/>
-              <a:buChar char="•"/>
-              <a:defRPr sz="1800" kern="1200">
-                <a:solidFill>
-                  <a:schemeClr val="tx1"/>
-                </a:solidFill>
-                <a:latin typeface="+mn-lt"/>
-                <a:ea typeface="+mn-ea"/>
-                <a:cs typeface="+mn-cs"/>
-              </a:defRPr>
-            </a:lvl6pPr>
-            <a:lvl7pPr marL="2971800" indent="-228600" algn="l" defTabSz="914400" rtl="0" eaLnBrk="1" latinLnBrk="0" hangingPunct="1">
-              <a:lnSpc>
-                <a:spcPct val="90000"/>
-              </a:lnSpc>
-              <a:spcBef>
-                <a:spcPts val="500"/>
-              </a:spcBef>
-              <a:buFont typeface="Arial" panose="020B0604020202020204" pitchFamily="34" charset="0"/>
-              <a:buChar char="•"/>
-              <a:defRPr sz="1800" kern="1200">
-                <a:solidFill>
-                  <a:schemeClr val="tx1"/>
-                </a:solidFill>
-                <a:latin typeface="+mn-lt"/>
-                <a:ea typeface="+mn-ea"/>
-                <a:cs typeface="+mn-cs"/>
-              </a:defRPr>
-            </a:lvl7pPr>
-            <a:lvl8pPr marL="3429000" indent="-228600" algn="l" defTabSz="914400" rtl="0" eaLnBrk="1" latinLnBrk="0" hangingPunct="1">
-              <a:lnSpc>
-                <a:spcPct val="90000"/>
-              </a:lnSpc>
-              <a:spcBef>
-                <a:spcPts val="500"/>
-              </a:spcBef>
-              <a:buFont typeface="Arial" panose="020B0604020202020204" pitchFamily="34" charset="0"/>
-              <a:buChar char="•"/>
-              <a:defRPr sz="1800" kern="1200">
-                <a:solidFill>
-                  <a:schemeClr val="tx1"/>
-                </a:solidFill>
-                <a:latin typeface="+mn-lt"/>
-                <a:ea typeface="+mn-ea"/>
-                <a:cs typeface="+mn-cs"/>
-              </a:defRPr>
-            </a:lvl8pPr>
-            <a:lvl9pPr marL="3886200" indent="-228600" algn="l" defTabSz="914400" rtl="0" eaLnBrk="1" latinLnBrk="0" hangingPunct="1">
-              <a:lnSpc>
-                <a:spcPct val="90000"/>
-              </a:lnSpc>
-              <a:spcBef>
-                <a:spcPts val="500"/>
-              </a:spcBef>
-              <a:buFont typeface="Arial" panose="020B0604020202020204" pitchFamily="34" charset="0"/>
-              <a:buChar char="•"/>
-              <a:defRPr sz="1800" kern="1200">
-                <a:solidFill>
-                  <a:schemeClr val="tx1"/>
-                </a:solidFill>
-                <a:latin typeface="+mn-lt"/>
-                <a:ea typeface="+mn-ea"/>
-                <a:cs typeface="+mn-cs"/>
-              </a:defRPr>
-            </a:lvl9pPr>
-          </a:lstStyle>
-          <a:p>
-            <a:pPr>
-              <a:lnSpc>
-                <a:spcPct val="100000"/>
-              </a:lnSpc>
-              <a:spcBef>
-                <a:spcPts val="400"/>
-              </a:spcBef>
-              <a:buClr>
-                <a:srgbClr val="0064C8"/>
-              </a:buClr>
-              <a:buFont typeface="Wingdings" panose="05000000000000000000" pitchFamily="2" charset="2"/>
-              <a:buChar char="§"/>
-            </a:pPr>
-            <a:r>
-              <a:rPr lang="en-US" sz="2000" spc="-1" dirty="0">
-                <a:solidFill>
-                  <a:srgbClr val="000000"/>
-                </a:solidFill>
-                <a:latin typeface="Century Gothic"/>
-              </a:rPr>
-              <a:t>Explanation with </a:t>
-            </a:r>
-            <a:r>
-              <a:rPr lang="en-US" sz="2000" spc="-1" dirty="0" err="1">
-                <a:solidFill>
-                  <a:srgbClr val="000000"/>
-                </a:solidFill>
-                <a:latin typeface="Century Gothic"/>
-              </a:rPr>
-              <a:t>EdgeSHAPer</a:t>
-            </a:r>
-            <a:endParaRPr lang="en-US" sz="2000" spc="-1" dirty="0">
-              <a:solidFill>
-                <a:srgbClr val="000000"/>
-              </a:solidFill>
-              <a:latin typeface="Century Gothic"/>
-            </a:endParaRPr>
-          </a:p>
-          <a:p>
-            <a:pPr>
-              <a:lnSpc>
-                <a:spcPct val="100000"/>
-              </a:lnSpc>
-              <a:spcBef>
-                <a:spcPts val="400"/>
-              </a:spcBef>
-              <a:buClr>
-                <a:srgbClr val="0064C8"/>
-              </a:buClr>
-              <a:buFont typeface="Wingdings" panose="05000000000000000000" pitchFamily="2" charset="2"/>
-              <a:buChar char="§"/>
-            </a:pPr>
-            <a:endParaRPr lang="en-US" sz="2000" spc="-1" dirty="0">
-              <a:solidFill>
-                <a:srgbClr val="000000"/>
-              </a:solidFill>
-              <a:latin typeface="Century Gothic"/>
-            </a:endParaRPr>
-          </a:p>
-          <a:p>
-            <a:pPr>
-              <a:lnSpc>
-                <a:spcPct val="100000"/>
-              </a:lnSpc>
-              <a:spcBef>
-                <a:spcPts val="400"/>
-              </a:spcBef>
-              <a:buClr>
-                <a:srgbClr val="0064C8"/>
-              </a:buClr>
-              <a:buFont typeface="Wingdings" panose="05000000000000000000" pitchFamily="2" charset="2"/>
-              <a:buChar char="§"/>
-            </a:pPr>
-            <a:endParaRPr lang="en-US" sz="2000" spc="-1" dirty="0">
-              <a:solidFill>
-                <a:srgbClr val="000000"/>
-              </a:solidFill>
-              <a:latin typeface="Century Gothic"/>
-            </a:endParaRPr>
-          </a:p>
-          <a:p>
-            <a:pPr>
-              <a:lnSpc>
-                <a:spcPct val="100000"/>
-              </a:lnSpc>
-              <a:spcBef>
-                <a:spcPts val="400"/>
-              </a:spcBef>
-              <a:buClr>
-                <a:srgbClr val="0064C8"/>
-              </a:buClr>
-              <a:buFont typeface="Wingdings" panose="05000000000000000000" pitchFamily="2" charset="2"/>
-              <a:buChar char="§"/>
-            </a:pPr>
-            <a:r>
-              <a:rPr lang="en-US" sz="2000" spc="-1" dirty="0">
-                <a:solidFill>
-                  <a:srgbClr val="000000"/>
-                </a:solidFill>
-                <a:latin typeface="Century Gothic"/>
-              </a:rPr>
-              <a:t>Visualization</a:t>
-            </a:r>
-          </a:p>
-          <a:p>
-            <a:pPr>
-              <a:lnSpc>
-                <a:spcPct val="100000"/>
-              </a:lnSpc>
-              <a:spcBef>
-                <a:spcPts val="400"/>
-              </a:spcBef>
-              <a:buClr>
-                <a:srgbClr val="0064C8"/>
-              </a:buClr>
-              <a:buFont typeface="Wingdings" panose="05000000000000000000" pitchFamily="2" charset="2"/>
-              <a:buChar char="§"/>
-            </a:pPr>
-            <a:endParaRPr lang="en-US" sz="2000" spc="-1" dirty="0">
-              <a:solidFill>
-                <a:srgbClr val="000000"/>
-              </a:solidFill>
-              <a:latin typeface="Century Gothic"/>
-            </a:endParaRPr>
-          </a:p>
-          <a:p>
-            <a:pPr>
-              <a:lnSpc>
-                <a:spcPct val="100000"/>
-              </a:lnSpc>
-              <a:spcBef>
-                <a:spcPts val="400"/>
-              </a:spcBef>
-              <a:buClr>
-                <a:srgbClr val="0064C8"/>
-              </a:buClr>
-              <a:buFont typeface="Wingdings" panose="05000000000000000000" pitchFamily="2" charset="2"/>
-              <a:buChar char="§"/>
-            </a:pPr>
-            <a:endParaRPr lang="en-US" sz="2000" spc="-1" dirty="0">
-              <a:solidFill>
-                <a:srgbClr val="000000"/>
-              </a:solidFill>
-              <a:latin typeface="Century Gothic"/>
-            </a:endParaRPr>
-          </a:p>
-          <a:p>
-            <a:pPr>
-              <a:lnSpc>
-                <a:spcPct val="100000"/>
-              </a:lnSpc>
-              <a:spcBef>
-                <a:spcPts val="400"/>
-              </a:spcBef>
-              <a:buClr>
-                <a:srgbClr val="0064C8"/>
-              </a:buClr>
-              <a:buFont typeface="Wingdings" panose="05000000000000000000" pitchFamily="2" charset="2"/>
-              <a:buChar char="§"/>
-            </a:pPr>
-            <a:r>
-              <a:rPr lang="en-US" sz="2000" b="1" spc="-1" dirty="0">
-                <a:solidFill>
-                  <a:srgbClr val="000000"/>
-                </a:solidFill>
-                <a:latin typeface="Century Gothic"/>
-              </a:rPr>
-              <a:t>Interpretation by LLM </a:t>
-            </a:r>
-          </a:p>
-          <a:p>
-            <a:pPr>
-              <a:lnSpc>
-                <a:spcPct val="100000"/>
-              </a:lnSpc>
-              <a:spcBef>
-                <a:spcPts val="400"/>
-              </a:spcBef>
-              <a:buClr>
-                <a:srgbClr val="0064C8"/>
-              </a:buClr>
-              <a:buFont typeface="Wingdings" panose="05000000000000000000" pitchFamily="2" charset="2"/>
-              <a:buChar char="§"/>
-            </a:pPr>
-            <a:endParaRPr lang="en-US" sz="2000" spc="-1" dirty="0">
-              <a:solidFill>
-                <a:srgbClr val="000000"/>
-              </a:solidFill>
-              <a:latin typeface="Century Gothic"/>
-            </a:endParaRPr>
-          </a:p>
-          <a:p>
-            <a:pPr marL="0" indent="0">
-              <a:lnSpc>
-                <a:spcPct val="100000"/>
-              </a:lnSpc>
-              <a:spcBef>
-                <a:spcPts val="400"/>
-              </a:spcBef>
-              <a:buClr>
-                <a:srgbClr val="0064C8"/>
-              </a:buClr>
-              <a:buNone/>
-            </a:pPr>
-            <a:endParaRPr lang="en-US" sz="2000" spc="-1" dirty="0">
-              <a:solidFill>
-                <a:srgbClr val="000000"/>
-              </a:solidFill>
-              <a:latin typeface="Century Gothic"/>
-            </a:endParaRPr>
-          </a:p>
-          <a:p>
-            <a:pPr>
-              <a:lnSpc>
-                <a:spcPct val="100000"/>
-              </a:lnSpc>
-              <a:spcBef>
-                <a:spcPts val="400"/>
-              </a:spcBef>
-              <a:buClr>
-                <a:srgbClr val="0064C8"/>
-              </a:buClr>
-              <a:buFont typeface="Wingdings" panose="05000000000000000000" pitchFamily="2" charset="2"/>
-              <a:buChar char="§"/>
-            </a:pPr>
-            <a:endParaRPr lang="en-US" sz="2000" spc="-1" dirty="0">
-              <a:solidFill>
-                <a:srgbClr val="000000"/>
-              </a:solidFill>
-              <a:latin typeface="Century Gothic"/>
-            </a:endParaRPr>
-          </a:p>
-          <a:p>
-            <a:pPr>
-              <a:lnSpc>
-                <a:spcPct val="100000"/>
-              </a:lnSpc>
-              <a:spcBef>
-                <a:spcPts val="400"/>
-              </a:spcBef>
-              <a:buClr>
-                <a:srgbClr val="0064C8"/>
-              </a:buClr>
-              <a:buFont typeface="Wingdings" panose="05000000000000000000" pitchFamily="2" charset="2"/>
-              <a:buChar char="§"/>
-            </a:pPr>
-            <a:endParaRPr lang="en-US" sz="1800" spc="-1" dirty="0">
-              <a:solidFill>
-                <a:srgbClr val="000000"/>
-              </a:solidFill>
-              <a:latin typeface="Century Gothic"/>
-            </a:endParaRPr>
-          </a:p>
-          <a:p>
-            <a:pPr marL="343080" indent="-343080">
-              <a:lnSpc>
-                <a:spcPct val="100000"/>
-              </a:lnSpc>
-              <a:spcBef>
-                <a:spcPts val="400"/>
-              </a:spcBef>
-              <a:spcAft>
-                <a:spcPts val="601"/>
-              </a:spcAft>
-              <a:buClr>
-                <a:srgbClr val="0064C8"/>
-              </a:buClr>
-              <a:buFont typeface="Wingdings 2" charset="2"/>
-              <a:buChar char=""/>
-            </a:pPr>
-            <a:endParaRPr lang="en-US" sz="2000" b="1" spc="-1" dirty="0">
-              <a:solidFill>
-                <a:srgbClr val="000000"/>
-              </a:solidFill>
-              <a:latin typeface="Century Gothic"/>
-            </a:endParaRPr>
-          </a:p>
-        </p:txBody>
-      </p:sp>
-      <p:pic>
-        <p:nvPicPr>
-          <p:cNvPr id="4" name="Graphic 3" descr="Warning with solid fill">
-            <a:extLst>
-              <a:ext uri="{FF2B5EF4-FFF2-40B4-BE49-F238E27FC236}">
-                <a16:creationId xmlns:a16="http://schemas.microsoft.com/office/drawing/2014/main" id="{E98D6943-8123-432E-B888-F72E412B7491}"/>
+                <a16:creationId xmlns:a16="http://schemas.microsoft.com/office/drawing/2014/main" id="{96A81ED6-143C-EB03-E019-D2947E0A8F2E}"/>
               </a:ext>
             </a:extLst>
           </p:cNvPr>
@@ -17224,83 +15362,15 @@
           <p:nvPr/>
         </p:nvPicPr>
         <p:blipFill>
-          <a:blip r:embed="rId2">
-            <a:extLst>
-              <a:ext uri="{28A0092B-C50C-407E-A947-70E740481C1C}">
-                <a14:useLocalDpi xmlns:a14="http://schemas.microsoft.com/office/drawing/2010/main" val="0"/>
-              </a:ext>
-              <a:ext uri="{96DAC541-7B7A-43D3-8B79-37D633B846F1}">
-                <asvg:svgBlip xmlns:asvg="http://schemas.microsoft.com/office/drawing/2016/SVG/main" r:embed="rId3"/>
-              </a:ext>
-            </a:extLst>
-          </a:blip>
+          <a:blip r:embed="rId3"/>
           <a:stretch>
             <a:fillRect/>
           </a:stretch>
         </p:blipFill>
         <p:spPr>
           <a:xfrm>
-            <a:off x="3452648" y="3342695"/>
-            <a:ext cx="657242" cy="657242"/>
-          </a:xfrm>
-          <a:prstGeom prst="rect">
-            <a:avLst/>
-          </a:prstGeom>
-        </p:spPr>
-      </p:pic>
-      <p:pic>
-        <p:nvPicPr>
-          <p:cNvPr id="8" name="Picture 7">
-            <a:extLst>
-              <a:ext uri="{FF2B5EF4-FFF2-40B4-BE49-F238E27FC236}">
-                <a16:creationId xmlns:a16="http://schemas.microsoft.com/office/drawing/2014/main" id="{5867E8F3-108A-471B-965A-75C4C333D304}"/>
-              </a:ext>
-            </a:extLst>
-          </p:cNvPr>
-          <p:cNvPicPr>
-            <a:picLocks noChangeAspect="1"/>
-          </p:cNvPicPr>
-          <p:nvPr/>
-        </p:nvPicPr>
-        <p:blipFill rotWithShape="1">
-          <a:blip r:embed="rId4"/>
-          <a:srcRect b="25455"/>
-          <a:stretch/>
-        </p:blipFill>
-        <p:spPr>
-          <a:xfrm>
-            <a:off x="4698409" y="1007015"/>
-            <a:ext cx="3927583" cy="2081278"/>
-          </a:xfrm>
-          <a:prstGeom prst="rect">
-            <a:avLst/>
-          </a:prstGeom>
-        </p:spPr>
-      </p:pic>
-      <p:pic>
-        <p:nvPicPr>
-          <p:cNvPr id="11" name="Picture 10">
-            <a:extLst>
-              <a:ext uri="{FF2B5EF4-FFF2-40B4-BE49-F238E27FC236}">
-                <a16:creationId xmlns:a16="http://schemas.microsoft.com/office/drawing/2014/main" id="{9C2944AD-320D-42C0-A96F-022974D408EA}"/>
-              </a:ext>
-            </a:extLst>
-          </p:cNvPr>
-          <p:cNvPicPr>
-            <a:picLocks noChangeAspect="1"/>
-          </p:cNvPicPr>
-          <p:nvPr/>
-        </p:nvPicPr>
-        <p:blipFill>
-          <a:blip r:embed="rId5"/>
-          <a:stretch>
-            <a:fillRect/>
-          </a:stretch>
-        </p:blipFill>
-        <p:spPr>
-          <a:xfrm>
-            <a:off x="4698409" y="3088293"/>
-            <a:ext cx="3927582" cy="3038243"/>
+            <a:off x="380880" y="1192696"/>
+            <a:ext cx="8169237" cy="4825788"/>
           </a:xfrm>
           <a:prstGeom prst="rect">
             <a:avLst/>
@@ -17310,7 +15380,7 @@
     </p:spTree>
     <p:extLst>
       <p:ext uri="{BB962C8B-B14F-4D97-AF65-F5344CB8AC3E}">
-        <p14:creationId xmlns:p14="http://schemas.microsoft.com/office/powerpoint/2010/main" val="44043232"/>
+        <p14:creationId xmlns:p14="http://schemas.microsoft.com/office/powerpoint/2010/main" val="1027898386"/>
       </p:ext>
     </p:extLst>
   </p:cSld>

--- a/slides/AI_Agent_Explainability.pptx
+++ b/slides/AI_Agent_Explainability.pptx
@@ -6,7 +6,7 @@
     <p:sldMasterId id="2147483661" r:id="rId2"/>
   </p:sldMasterIdLst>
   <p:notesMasterIdLst>
-    <p:notesMasterId r:id="rId16"/>
+    <p:notesMasterId r:id="rId18"/>
   </p:notesMasterIdLst>
   <p:sldIdLst>
     <p:sldId id="297" r:id="rId3"/>
@@ -16,12 +16,14 @@
     <p:sldId id="310" r:id="rId7"/>
     <p:sldId id="309" r:id="rId8"/>
     <p:sldId id="311" r:id="rId9"/>
-    <p:sldId id="312" r:id="rId10"/>
-    <p:sldId id="313" r:id="rId11"/>
-    <p:sldId id="314" r:id="rId12"/>
-    <p:sldId id="315" r:id="rId13"/>
-    <p:sldId id="316" r:id="rId14"/>
-    <p:sldId id="303" r:id="rId15"/>
+    <p:sldId id="317" r:id="rId10"/>
+    <p:sldId id="318" r:id="rId11"/>
+    <p:sldId id="312" r:id="rId12"/>
+    <p:sldId id="313" r:id="rId13"/>
+    <p:sldId id="314" r:id="rId14"/>
+    <p:sldId id="315" r:id="rId15"/>
+    <p:sldId id="316" r:id="rId16"/>
+    <p:sldId id="303" r:id="rId17"/>
   </p:sldIdLst>
   <p:sldSz cx="9144000" cy="6858000" type="screen4x3"/>
   <p:notesSz cx="7559675" cy="10691813"/>
@@ -130,45 +132,6 @@
 
 <file path=ppt/changesInfos/changesInfo1.xml><?xml version="1.0" encoding="utf-8"?>
 <pc:chgInfo xmlns:a="http://schemas.openxmlformats.org/drawingml/2006/main" xmlns:r="http://schemas.openxmlformats.org/officeDocument/2006/relationships" xmlns:ac="http://schemas.microsoft.com/office/drawing/2013/main/command" xmlns:pc="http://schemas.microsoft.com/office/powerpoint/2013/main/command">
-  <pc:docChgLst>
-    <pc:chgData name="Tiago Janela" userId="ee1a79fe-c79c-4f34-9602-7f6f2f0482b3" providerId="ADAL" clId="{67D2C233-DF3C-4C6D-9040-D7553E3BCB8A}"/>
-    <pc:docChg chg="delSld modSld">
-      <pc:chgData name="Tiago Janela" userId="ee1a79fe-c79c-4f34-9602-7f6f2f0482b3" providerId="ADAL" clId="{67D2C233-DF3C-4C6D-9040-D7553E3BCB8A}" dt="2026-03-16T14:03:02.466" v="54" actId="20577"/>
-      <pc:docMkLst>
-        <pc:docMk/>
-      </pc:docMkLst>
-      <pc:sldChg chg="modSp mod">
-        <pc:chgData name="Tiago Janela" userId="ee1a79fe-c79c-4f34-9602-7f6f2f0482b3" providerId="ADAL" clId="{67D2C233-DF3C-4C6D-9040-D7553E3BCB8A}" dt="2026-03-16T14:03:02.466" v="54" actId="20577"/>
-        <pc:sldMkLst>
-          <pc:docMk/>
-          <pc:sldMk cId="829672710" sldId="297"/>
-        </pc:sldMkLst>
-        <pc:spChg chg="mod">
-          <ac:chgData name="Tiago Janela" userId="ee1a79fe-c79c-4f34-9602-7f6f2f0482b3" providerId="ADAL" clId="{67D2C233-DF3C-4C6D-9040-D7553E3BCB8A}" dt="2026-03-16T14:03:02.466" v="54" actId="20577"/>
-          <ac:spMkLst>
-            <pc:docMk/>
-            <pc:sldMk cId="829672710" sldId="297"/>
-            <ac:spMk id="156" creationId="{00000000-0000-0000-0000-000000000000}"/>
-          </ac:spMkLst>
-        </pc:spChg>
-      </pc:sldChg>
-      <pc:sldChg chg="modSp mod">
-        <pc:chgData name="Tiago Janela" userId="ee1a79fe-c79c-4f34-9602-7f6f2f0482b3" providerId="ADAL" clId="{67D2C233-DF3C-4C6D-9040-D7553E3BCB8A}" dt="2026-03-16T14:02:34.148" v="0" actId="20577"/>
-        <pc:sldMkLst>
-          <pc:docMk/>
-          <pc:sldMk cId="721732568" sldId="298"/>
-        </pc:sldMkLst>
-        <pc:spChg chg="mod">
-          <ac:chgData name="Tiago Janela" userId="ee1a79fe-c79c-4f34-9602-7f6f2f0482b3" providerId="ADAL" clId="{67D2C233-DF3C-4C6D-9040-D7553E3BCB8A}" dt="2026-03-16T14:02:34.148" v="0" actId="20577"/>
-          <ac:spMkLst>
-            <pc:docMk/>
-            <pc:sldMk cId="721732568" sldId="298"/>
-            <ac:spMk id="2" creationId="{870990D0-7AC5-46BA-6FC4-274F8E0A3ABE}"/>
-          </ac:spMkLst>
-        </pc:spChg>
-      </pc:sldChg>
-    </pc:docChg>
-  </pc:docChgLst>
   <pc:docChgLst>
     <pc:chgData name="Tiago Janela" userId="ee1a79fe-c79c-4f34-9602-7f6f2f0482b3" providerId="ADAL" clId="{6BE67FA1-4A27-48B9-BA6A-E25A9786A9CC}"/>
     <pc:docChg chg="undo custSel addSld modSld sldOrd">
@@ -279,6 +242,1386 @@
     </pc:docChg>
   </pc:docChgLst>
   <pc:docChgLst>
+    <pc:chgData name="Tiago Janela" userId="ee1a79fe-c79c-4f34-9602-7f6f2f0482b3" providerId="ADAL" clId="{D59BA079-2D81-42B2-9E2D-198C5F90099E}"/>
+    <pc:docChg chg="undo custSel addSld modSld sldOrd">
+      <pc:chgData name="Tiago Janela" userId="ee1a79fe-c79c-4f34-9602-7f6f2f0482b3" providerId="ADAL" clId="{D59BA079-2D81-42B2-9E2D-198C5F90099E}" dt="2026-04-29T14:57:22.243" v="167"/>
+      <pc:docMkLst>
+        <pc:docMk/>
+      </pc:docMkLst>
+      <pc:sldChg chg="addSp delSp modSp mod">
+        <pc:chgData name="Tiago Janela" userId="ee1a79fe-c79c-4f34-9602-7f6f2f0482b3" providerId="ADAL" clId="{D59BA079-2D81-42B2-9E2D-198C5F90099E}" dt="2026-04-29T14:57:22.243" v="167"/>
+        <pc:sldMkLst>
+          <pc:docMk/>
+          <pc:sldMk cId="721732568" sldId="298"/>
+        </pc:sldMkLst>
+        <pc:picChg chg="add mod">
+          <ac:chgData name="Tiago Janela" userId="ee1a79fe-c79c-4f34-9602-7f6f2f0482b3" providerId="ADAL" clId="{D59BA079-2D81-42B2-9E2D-198C5F90099E}" dt="2026-04-29T14:57:22.243" v="167"/>
+          <ac:picMkLst>
+            <pc:docMk/>
+            <pc:sldMk cId="721732568" sldId="298"/>
+            <ac:picMk id="3" creationId="{C525295A-47E6-DB8C-78FD-5ACC25A8B445}"/>
+          </ac:picMkLst>
+        </pc:picChg>
+        <pc:picChg chg="del">
+          <ac:chgData name="Tiago Janela" userId="ee1a79fe-c79c-4f34-9602-7f6f2f0482b3" providerId="ADAL" clId="{D59BA079-2D81-42B2-9E2D-198C5F90099E}" dt="2026-04-29T14:57:21.959" v="166" actId="478"/>
+          <ac:picMkLst>
+            <pc:docMk/>
+            <pc:sldMk cId="721732568" sldId="298"/>
+            <ac:picMk id="4" creationId="{A9172708-06AB-AE7A-4BC0-05B1328EE700}"/>
+          </ac:picMkLst>
+        </pc:picChg>
+      </pc:sldChg>
+      <pc:sldChg chg="modSp mod">
+        <pc:chgData name="Tiago Janela" userId="ee1a79fe-c79c-4f34-9602-7f6f2f0482b3" providerId="ADAL" clId="{D59BA079-2D81-42B2-9E2D-198C5F90099E}" dt="2026-04-29T14:57:04.951" v="165" actId="20577"/>
+        <pc:sldMkLst>
+          <pc:docMk/>
+          <pc:sldMk cId="999010184" sldId="308"/>
+        </pc:sldMkLst>
+        <pc:spChg chg="mod">
+          <ac:chgData name="Tiago Janela" userId="ee1a79fe-c79c-4f34-9602-7f6f2f0482b3" providerId="ADAL" clId="{D59BA079-2D81-42B2-9E2D-198C5F90099E}" dt="2026-04-29T14:57:04.951" v="165" actId="20577"/>
+          <ac:spMkLst>
+            <pc:docMk/>
+            <pc:sldMk cId="999010184" sldId="308"/>
+            <ac:spMk id="2" creationId="{870990D0-7AC5-46BA-6FC4-274F8E0A3ABE}"/>
+          </ac:spMkLst>
+        </pc:spChg>
+      </pc:sldChg>
+      <pc:sldChg chg="mod modShow">
+        <pc:chgData name="Tiago Janela" userId="ee1a79fe-c79c-4f34-9602-7f6f2f0482b3" providerId="ADAL" clId="{D59BA079-2D81-42B2-9E2D-198C5F90099E}" dt="2026-04-29T14:47:27.062" v="156" actId="729"/>
+        <pc:sldMkLst>
+          <pc:docMk/>
+          <pc:sldMk cId="497639913" sldId="312"/>
+        </pc:sldMkLst>
+      </pc:sldChg>
+      <pc:sldChg chg="addSp delSp modSp add mod ord">
+        <pc:chgData name="Tiago Janela" userId="ee1a79fe-c79c-4f34-9602-7f6f2f0482b3" providerId="ADAL" clId="{D59BA079-2D81-42B2-9E2D-198C5F90099E}" dt="2026-04-29T14:47:28.386" v="158"/>
+        <pc:sldMkLst>
+          <pc:docMk/>
+          <pc:sldMk cId="3302856774" sldId="317"/>
+        </pc:sldMkLst>
+        <pc:spChg chg="add mod">
+          <ac:chgData name="Tiago Janela" userId="ee1a79fe-c79c-4f34-9602-7f6f2f0482b3" providerId="ADAL" clId="{D59BA079-2D81-42B2-9E2D-198C5F90099E}" dt="2026-04-29T14:39:49.159" v="28" actId="404"/>
+          <ac:spMkLst>
+            <pc:docMk/>
+            <pc:sldMk cId="3302856774" sldId="317"/>
+            <ac:spMk id="2" creationId="{9803C720-5E38-494F-5EED-73C1A8624CA2}"/>
+          </ac:spMkLst>
+        </pc:spChg>
+        <pc:spChg chg="mod">
+          <ac:chgData name="Tiago Janela" userId="ee1a79fe-c79c-4f34-9602-7f6f2f0482b3" providerId="ADAL" clId="{D59BA079-2D81-42B2-9E2D-198C5F90099E}" dt="2026-04-29T14:37:18.277" v="2"/>
+          <ac:spMkLst>
+            <pc:docMk/>
+            <pc:sldMk cId="3302856774" sldId="317"/>
+            <ac:spMk id="4" creationId="{29C55CA4-9FFE-F8C7-14D1-7771639D14E4}"/>
+          </ac:spMkLst>
+        </pc:spChg>
+        <pc:spChg chg="add mod">
+          <ac:chgData name="Tiago Janela" userId="ee1a79fe-c79c-4f34-9602-7f6f2f0482b3" providerId="ADAL" clId="{D59BA079-2D81-42B2-9E2D-198C5F90099E}" dt="2026-04-29T14:37:30.168" v="3" actId="164"/>
+          <ac:spMkLst>
+            <pc:docMk/>
+            <pc:sldMk cId="3302856774" sldId="317"/>
+            <ac:spMk id="7" creationId="{97128B13-4612-273D-93A3-BB4FE0ECD72E}"/>
+          </ac:spMkLst>
+        </pc:spChg>
+        <pc:spChg chg="add mod">
+          <ac:chgData name="Tiago Janela" userId="ee1a79fe-c79c-4f34-9602-7f6f2f0482b3" providerId="ADAL" clId="{D59BA079-2D81-42B2-9E2D-198C5F90099E}" dt="2026-04-29T14:39:51.630" v="29" actId="404"/>
+          <ac:spMkLst>
+            <pc:docMk/>
+            <pc:sldMk cId="3302856774" sldId="317"/>
+            <ac:spMk id="8" creationId="{BFA4F87D-A515-0617-5B19-E065DFAAA219}"/>
+          </ac:spMkLst>
+        </pc:spChg>
+        <pc:spChg chg="add mod">
+          <ac:chgData name="Tiago Janela" userId="ee1a79fe-c79c-4f34-9602-7f6f2f0482b3" providerId="ADAL" clId="{D59BA079-2D81-42B2-9E2D-198C5F90099E}" dt="2026-04-29T14:39:53.918" v="30" actId="404"/>
+          <ac:spMkLst>
+            <pc:docMk/>
+            <pc:sldMk cId="3302856774" sldId="317"/>
+            <ac:spMk id="9" creationId="{5B5E5C40-61E5-79E5-C05A-CA9180634650}"/>
+          </ac:spMkLst>
+        </pc:spChg>
+        <pc:spChg chg="add mod">
+          <ac:chgData name="Tiago Janela" userId="ee1a79fe-c79c-4f34-9602-7f6f2f0482b3" providerId="ADAL" clId="{D59BA079-2D81-42B2-9E2D-198C5F90099E}" dt="2026-04-29T14:37:30.168" v="3" actId="164"/>
+          <ac:spMkLst>
+            <pc:docMk/>
+            <pc:sldMk cId="3302856774" sldId="317"/>
+            <ac:spMk id="10" creationId="{A3301E51-4E33-A5C6-58D1-99F3B3249BC8}"/>
+          </ac:spMkLst>
+        </pc:spChg>
+        <pc:spChg chg="mod">
+          <ac:chgData name="Tiago Janela" userId="ee1a79fe-c79c-4f34-9602-7f6f2f0482b3" providerId="ADAL" clId="{D59BA079-2D81-42B2-9E2D-198C5F90099E}" dt="2026-04-29T14:37:57.832" v="16" actId="404"/>
+          <ac:spMkLst>
+            <pc:docMk/>
+            <pc:sldMk cId="3302856774" sldId="317"/>
+            <ac:spMk id="14" creationId="{52C02012-CF9D-7AF4-DB5E-4F719C94B012}"/>
+          </ac:spMkLst>
+        </pc:spChg>
+        <pc:spChg chg="mod">
+          <ac:chgData name="Tiago Janela" userId="ee1a79fe-c79c-4f34-9602-7f6f2f0482b3" providerId="ADAL" clId="{D59BA079-2D81-42B2-9E2D-198C5F90099E}" dt="2026-04-29T14:37:54.655" v="14" actId="404"/>
+          <ac:spMkLst>
+            <pc:docMk/>
+            <pc:sldMk cId="3302856774" sldId="317"/>
+            <ac:spMk id="17" creationId="{392DA2FC-B611-0481-11FA-589AFCCD6635}"/>
+          </ac:spMkLst>
+        </pc:spChg>
+        <pc:spChg chg="mod">
+          <ac:chgData name="Tiago Janela" userId="ee1a79fe-c79c-4f34-9602-7f6f2f0482b3" providerId="ADAL" clId="{D59BA079-2D81-42B2-9E2D-198C5F90099E}" dt="2026-04-29T14:42:14.331" v="134"/>
+          <ac:spMkLst>
+            <pc:docMk/>
+            <pc:sldMk cId="3302856774" sldId="317"/>
+            <ac:spMk id="22" creationId="{9CC3FB47-39F0-5B0D-9FE3-5C302988AB12}"/>
+          </ac:spMkLst>
+        </pc:spChg>
+        <pc:spChg chg="mod">
+          <ac:chgData name="Tiago Janela" userId="ee1a79fe-c79c-4f34-9602-7f6f2f0482b3" providerId="ADAL" clId="{D59BA079-2D81-42B2-9E2D-198C5F90099E}" dt="2026-04-29T14:42:14.331" v="134"/>
+          <ac:spMkLst>
+            <pc:docMk/>
+            <pc:sldMk cId="3302856774" sldId="317"/>
+            <ac:spMk id="24" creationId="{D4516D0B-2A98-E400-631F-146C1BCBCEC7}"/>
+          </ac:spMkLst>
+        </pc:spChg>
+        <pc:spChg chg="mod">
+          <ac:chgData name="Tiago Janela" userId="ee1a79fe-c79c-4f34-9602-7f6f2f0482b3" providerId="ADAL" clId="{D59BA079-2D81-42B2-9E2D-198C5F90099E}" dt="2026-04-29T14:42:14.331" v="134"/>
+          <ac:spMkLst>
+            <pc:docMk/>
+            <pc:sldMk cId="3302856774" sldId="317"/>
+            <ac:spMk id="27" creationId="{4BF8A661-D3F9-4D47-9A49-5561FB429D7F}"/>
+          </ac:spMkLst>
+        </pc:spChg>
+        <pc:spChg chg="mod">
+          <ac:chgData name="Tiago Janela" userId="ee1a79fe-c79c-4f34-9602-7f6f2f0482b3" providerId="ADAL" clId="{D59BA079-2D81-42B2-9E2D-198C5F90099E}" dt="2026-04-29T14:42:14.331" v="134"/>
+          <ac:spMkLst>
+            <pc:docMk/>
+            <pc:sldMk cId="3302856774" sldId="317"/>
+            <ac:spMk id="31" creationId="{44774A09-6C4B-273B-64E1-71CD435882F9}"/>
+          </ac:spMkLst>
+        </pc:spChg>
+        <pc:spChg chg="mod">
+          <ac:chgData name="Tiago Janela" userId="ee1a79fe-c79c-4f34-9602-7f6f2f0482b3" providerId="ADAL" clId="{D59BA079-2D81-42B2-9E2D-198C5F90099E}" dt="2026-04-29T14:42:14.331" v="134"/>
+          <ac:spMkLst>
+            <pc:docMk/>
+            <pc:sldMk cId="3302856774" sldId="317"/>
+            <ac:spMk id="33" creationId="{6622B3C1-0E2A-C553-0B73-EB0159100FA0}"/>
+          </ac:spMkLst>
+        </pc:spChg>
+        <pc:spChg chg="mod">
+          <ac:chgData name="Tiago Janela" userId="ee1a79fe-c79c-4f34-9602-7f6f2f0482b3" providerId="ADAL" clId="{D59BA079-2D81-42B2-9E2D-198C5F90099E}" dt="2026-04-29T14:42:14.331" v="134"/>
+          <ac:spMkLst>
+            <pc:docMk/>
+            <pc:sldMk cId="3302856774" sldId="317"/>
+            <ac:spMk id="36" creationId="{CA013FFA-B74D-DDEF-AD08-7B599268011E}"/>
+          </ac:spMkLst>
+        </pc:spChg>
+        <pc:spChg chg="mod">
+          <ac:chgData name="Tiago Janela" userId="ee1a79fe-c79c-4f34-9602-7f6f2f0482b3" providerId="ADAL" clId="{D59BA079-2D81-42B2-9E2D-198C5F90099E}" dt="2026-04-29T14:42:14.331" v="134"/>
+          <ac:spMkLst>
+            <pc:docMk/>
+            <pc:sldMk cId="3302856774" sldId="317"/>
+            <ac:spMk id="43" creationId="{E3A96CCB-CAB0-24CC-DA7A-8F66AABCC413}"/>
+          </ac:spMkLst>
+        </pc:spChg>
+        <pc:spChg chg="mod">
+          <ac:chgData name="Tiago Janela" userId="ee1a79fe-c79c-4f34-9602-7f6f2f0482b3" providerId="ADAL" clId="{D59BA079-2D81-42B2-9E2D-198C5F90099E}" dt="2026-04-29T14:42:14.331" v="134"/>
+          <ac:spMkLst>
+            <pc:docMk/>
+            <pc:sldMk cId="3302856774" sldId="317"/>
+            <ac:spMk id="48" creationId="{B76292A3-1097-26F8-291A-E16DB649542F}"/>
+          </ac:spMkLst>
+        </pc:spChg>
+        <pc:spChg chg="mod">
+          <ac:chgData name="Tiago Janela" userId="ee1a79fe-c79c-4f34-9602-7f6f2f0482b3" providerId="ADAL" clId="{D59BA079-2D81-42B2-9E2D-198C5F90099E}" dt="2026-04-29T14:42:57.418" v="138"/>
+          <ac:spMkLst>
+            <pc:docMk/>
+            <pc:sldMk cId="3302856774" sldId="317"/>
+            <ac:spMk id="52" creationId="{60CA6DF6-6A3C-EB5F-B0C1-931B63D4E833}"/>
+          </ac:spMkLst>
+        </pc:spChg>
+        <pc:spChg chg="mod">
+          <ac:chgData name="Tiago Janela" userId="ee1a79fe-c79c-4f34-9602-7f6f2f0482b3" providerId="ADAL" clId="{D59BA079-2D81-42B2-9E2D-198C5F90099E}" dt="2026-04-29T14:42:57.418" v="138"/>
+          <ac:spMkLst>
+            <pc:docMk/>
+            <pc:sldMk cId="3302856774" sldId="317"/>
+            <ac:spMk id="54" creationId="{31A4D069-120D-BD5C-8246-2FAD55A8EBC0}"/>
+          </ac:spMkLst>
+        </pc:spChg>
+        <pc:spChg chg="mod">
+          <ac:chgData name="Tiago Janela" userId="ee1a79fe-c79c-4f34-9602-7f6f2f0482b3" providerId="ADAL" clId="{D59BA079-2D81-42B2-9E2D-198C5F90099E}" dt="2026-04-29T14:42:57.418" v="138"/>
+          <ac:spMkLst>
+            <pc:docMk/>
+            <pc:sldMk cId="3302856774" sldId="317"/>
+            <ac:spMk id="57" creationId="{8A8C5BFC-C55D-6AB2-E369-A8B84D61F6E4}"/>
+          </ac:spMkLst>
+        </pc:spChg>
+        <pc:spChg chg="mod">
+          <ac:chgData name="Tiago Janela" userId="ee1a79fe-c79c-4f34-9602-7f6f2f0482b3" providerId="ADAL" clId="{D59BA079-2D81-42B2-9E2D-198C5F90099E}" dt="2026-04-29T14:42:57.418" v="138"/>
+          <ac:spMkLst>
+            <pc:docMk/>
+            <pc:sldMk cId="3302856774" sldId="317"/>
+            <ac:spMk id="61" creationId="{98352965-0265-CA6D-C6A6-29212BEA4C15}"/>
+          </ac:spMkLst>
+        </pc:spChg>
+        <pc:spChg chg="mod">
+          <ac:chgData name="Tiago Janela" userId="ee1a79fe-c79c-4f34-9602-7f6f2f0482b3" providerId="ADAL" clId="{D59BA079-2D81-42B2-9E2D-198C5F90099E}" dt="2026-04-29T14:42:57.418" v="138"/>
+          <ac:spMkLst>
+            <pc:docMk/>
+            <pc:sldMk cId="3302856774" sldId="317"/>
+            <ac:spMk id="63" creationId="{A392F33B-6C93-58AE-6C45-5B25938C50D8}"/>
+          </ac:spMkLst>
+        </pc:spChg>
+        <pc:spChg chg="mod">
+          <ac:chgData name="Tiago Janela" userId="ee1a79fe-c79c-4f34-9602-7f6f2f0482b3" providerId="ADAL" clId="{D59BA079-2D81-42B2-9E2D-198C5F90099E}" dt="2026-04-29T14:42:57.418" v="138"/>
+          <ac:spMkLst>
+            <pc:docMk/>
+            <pc:sldMk cId="3302856774" sldId="317"/>
+            <ac:spMk id="130" creationId="{A9AE43EA-80B3-40AE-568E-1635AA6D6A0C}"/>
+          </ac:spMkLst>
+        </pc:spChg>
+        <pc:spChg chg="mod">
+          <ac:chgData name="Tiago Janela" userId="ee1a79fe-c79c-4f34-9602-7f6f2f0482b3" providerId="ADAL" clId="{D59BA079-2D81-42B2-9E2D-198C5F90099E}" dt="2026-04-29T14:42:57.418" v="138"/>
+          <ac:spMkLst>
+            <pc:docMk/>
+            <pc:sldMk cId="3302856774" sldId="317"/>
+            <ac:spMk id="137" creationId="{697EABE1-46D8-0746-E245-58B587C3A93C}"/>
+          </ac:spMkLst>
+        </pc:spChg>
+        <pc:spChg chg="mod">
+          <ac:chgData name="Tiago Janela" userId="ee1a79fe-c79c-4f34-9602-7f6f2f0482b3" providerId="ADAL" clId="{D59BA079-2D81-42B2-9E2D-198C5F90099E}" dt="2026-04-29T14:42:57.418" v="138"/>
+          <ac:spMkLst>
+            <pc:docMk/>
+            <pc:sldMk cId="3302856774" sldId="317"/>
+            <ac:spMk id="142" creationId="{B652AC61-841B-D06B-43EB-A02027AE39AC}"/>
+          </ac:spMkLst>
+        </pc:spChg>
+        <pc:grpChg chg="add mod">
+          <ac:chgData name="Tiago Janela" userId="ee1a79fe-c79c-4f34-9602-7f6f2f0482b3" providerId="ADAL" clId="{D59BA079-2D81-42B2-9E2D-198C5F90099E}" dt="2026-04-29T14:37:30.168" v="3" actId="164"/>
+          <ac:grpSpMkLst>
+            <pc:docMk/>
+            <pc:sldMk cId="3302856774" sldId="317"/>
+            <ac:grpSpMk id="3" creationId="{98A01790-818B-0A8F-30E5-1112281C9B36}"/>
+          </ac:grpSpMkLst>
+        </pc:grpChg>
+        <pc:grpChg chg="add mod">
+          <ac:chgData name="Tiago Janela" userId="ee1a79fe-c79c-4f34-9602-7f6f2f0482b3" providerId="ADAL" clId="{D59BA079-2D81-42B2-9E2D-198C5F90099E}" dt="2026-04-29T14:37:30.168" v="3" actId="164"/>
+          <ac:grpSpMkLst>
+            <pc:docMk/>
+            <pc:sldMk cId="3302856774" sldId="317"/>
+            <ac:grpSpMk id="11" creationId="{40F85673-9AEE-ADD3-DCC6-1FAEC5F6565D}"/>
+          </ac:grpSpMkLst>
+        </pc:grpChg>
+        <pc:grpChg chg="add mod">
+          <ac:chgData name="Tiago Janela" userId="ee1a79fe-c79c-4f34-9602-7f6f2f0482b3" providerId="ADAL" clId="{D59BA079-2D81-42B2-9E2D-198C5F90099E}" dt="2026-04-29T14:37:30.168" v="3" actId="164"/>
+          <ac:grpSpMkLst>
+            <pc:docMk/>
+            <pc:sldMk cId="3302856774" sldId="317"/>
+            <ac:grpSpMk id="15" creationId="{2413F157-B8CA-D703-62EE-D4B833AB7125}"/>
+          </ac:grpSpMkLst>
+        </pc:grpChg>
+        <pc:grpChg chg="add del mod">
+          <ac:chgData name="Tiago Janela" userId="ee1a79fe-c79c-4f34-9602-7f6f2f0482b3" providerId="ADAL" clId="{D59BA079-2D81-42B2-9E2D-198C5F90099E}" dt="2026-04-29T14:43:11.891" v="143" actId="1036"/>
+          <ac:grpSpMkLst>
+            <pc:docMk/>
+            <pc:sldMk cId="3302856774" sldId="317"/>
+            <ac:grpSpMk id="20" creationId="{81A65B80-1110-F1AF-A893-8B82ECA10662}"/>
+          </ac:grpSpMkLst>
+        </pc:grpChg>
+        <pc:grpChg chg="add del mod">
+          <ac:chgData name="Tiago Janela" userId="ee1a79fe-c79c-4f34-9602-7f6f2f0482b3" providerId="ADAL" clId="{D59BA079-2D81-42B2-9E2D-198C5F90099E}" dt="2026-04-29T14:42:50.916" v="137" actId="478"/>
+          <ac:grpSpMkLst>
+            <pc:docMk/>
+            <pc:sldMk cId="3302856774" sldId="317"/>
+            <ac:grpSpMk id="21" creationId="{E76901E6-0AA2-A336-7D24-0C02B1DF5BE9}"/>
+          </ac:grpSpMkLst>
+        </pc:grpChg>
+        <pc:grpChg chg="mod">
+          <ac:chgData name="Tiago Janela" userId="ee1a79fe-c79c-4f34-9602-7f6f2f0482b3" providerId="ADAL" clId="{D59BA079-2D81-42B2-9E2D-198C5F90099E}" dt="2026-04-29T14:42:14.331" v="134"/>
+          <ac:grpSpMkLst>
+            <pc:docMk/>
+            <pc:sldMk cId="3302856774" sldId="317"/>
+            <ac:grpSpMk id="23" creationId="{9B222EA0-2467-6E91-A486-2373D1C9EE47}"/>
+          </ac:grpSpMkLst>
+        </pc:grpChg>
+        <pc:grpChg chg="mod">
+          <ac:chgData name="Tiago Janela" userId="ee1a79fe-c79c-4f34-9602-7f6f2f0482b3" providerId="ADAL" clId="{D59BA079-2D81-42B2-9E2D-198C5F90099E}" dt="2026-04-29T14:42:14.331" v="134"/>
+          <ac:grpSpMkLst>
+            <pc:docMk/>
+            <pc:sldMk cId="3302856774" sldId="317"/>
+            <ac:grpSpMk id="25" creationId="{4E9843BD-4512-2977-7CCC-61E40C412881}"/>
+          </ac:grpSpMkLst>
+        </pc:grpChg>
+        <pc:grpChg chg="mod">
+          <ac:chgData name="Tiago Janela" userId="ee1a79fe-c79c-4f34-9602-7f6f2f0482b3" providerId="ADAL" clId="{D59BA079-2D81-42B2-9E2D-198C5F90099E}" dt="2026-04-29T14:42:14.331" v="134"/>
+          <ac:grpSpMkLst>
+            <pc:docMk/>
+            <pc:sldMk cId="3302856774" sldId="317"/>
+            <ac:grpSpMk id="26" creationId="{BFAB994F-6FC4-00CE-F521-A4E3AD19D1B9}"/>
+          </ac:grpSpMkLst>
+        </pc:grpChg>
+        <pc:grpChg chg="mod">
+          <ac:chgData name="Tiago Janela" userId="ee1a79fe-c79c-4f34-9602-7f6f2f0482b3" providerId="ADAL" clId="{D59BA079-2D81-42B2-9E2D-198C5F90099E}" dt="2026-04-29T14:42:14.331" v="134"/>
+          <ac:grpSpMkLst>
+            <pc:docMk/>
+            <pc:sldMk cId="3302856774" sldId="317"/>
+            <ac:grpSpMk id="28" creationId="{6F0DCE0A-5641-FEB6-7594-1E91F7584750}"/>
+          </ac:grpSpMkLst>
+        </pc:grpChg>
+        <pc:grpChg chg="mod">
+          <ac:chgData name="Tiago Janela" userId="ee1a79fe-c79c-4f34-9602-7f6f2f0482b3" providerId="ADAL" clId="{D59BA079-2D81-42B2-9E2D-198C5F90099E}" dt="2026-04-29T14:42:14.331" v="134"/>
+          <ac:grpSpMkLst>
+            <pc:docMk/>
+            <pc:sldMk cId="3302856774" sldId="317"/>
+            <ac:grpSpMk id="29" creationId="{42387771-3D9F-24D8-0222-869AAC4FE230}"/>
+          </ac:grpSpMkLst>
+        </pc:grpChg>
+        <pc:grpChg chg="mod">
+          <ac:chgData name="Tiago Janela" userId="ee1a79fe-c79c-4f34-9602-7f6f2f0482b3" providerId="ADAL" clId="{D59BA079-2D81-42B2-9E2D-198C5F90099E}" dt="2026-04-29T14:42:14.331" v="134"/>
+          <ac:grpSpMkLst>
+            <pc:docMk/>
+            <pc:sldMk cId="3302856774" sldId="317"/>
+            <ac:grpSpMk id="34" creationId="{94A6386A-36AC-6D99-1B1A-D7A1B571D9E0}"/>
+          </ac:grpSpMkLst>
+        </pc:grpChg>
+        <pc:grpChg chg="mod">
+          <ac:chgData name="Tiago Janela" userId="ee1a79fe-c79c-4f34-9602-7f6f2f0482b3" providerId="ADAL" clId="{D59BA079-2D81-42B2-9E2D-198C5F90099E}" dt="2026-04-29T14:42:14.331" v="134"/>
+          <ac:grpSpMkLst>
+            <pc:docMk/>
+            <pc:sldMk cId="3302856774" sldId="317"/>
+            <ac:grpSpMk id="35" creationId="{B02AC1A3-27E6-6ABA-6C7B-50AC760E849C}"/>
+          </ac:grpSpMkLst>
+        </pc:grpChg>
+        <pc:grpChg chg="mod">
+          <ac:chgData name="Tiago Janela" userId="ee1a79fe-c79c-4f34-9602-7f6f2f0482b3" providerId="ADAL" clId="{D59BA079-2D81-42B2-9E2D-198C5F90099E}" dt="2026-04-29T14:42:14.331" v="134"/>
+          <ac:grpSpMkLst>
+            <pc:docMk/>
+            <pc:sldMk cId="3302856774" sldId="317"/>
+            <ac:grpSpMk id="41" creationId="{4E5A09CE-1CD6-D186-4A4D-58DA99ED176A}"/>
+          </ac:grpSpMkLst>
+        </pc:grpChg>
+        <pc:grpChg chg="mod">
+          <ac:chgData name="Tiago Janela" userId="ee1a79fe-c79c-4f34-9602-7f6f2f0482b3" providerId="ADAL" clId="{D59BA079-2D81-42B2-9E2D-198C5F90099E}" dt="2026-04-29T14:42:14.331" v="134"/>
+          <ac:grpSpMkLst>
+            <pc:docMk/>
+            <pc:sldMk cId="3302856774" sldId="317"/>
+            <ac:grpSpMk id="42" creationId="{F6CF8A19-29FE-85EA-6A0F-F0F0F244A9C3}"/>
+          </ac:grpSpMkLst>
+        </pc:grpChg>
+        <pc:grpChg chg="add del mod">
+          <ac:chgData name="Tiago Janela" userId="ee1a79fe-c79c-4f34-9602-7f6f2f0482b3" providerId="ADAL" clId="{D59BA079-2D81-42B2-9E2D-198C5F90099E}" dt="2026-04-29T14:43:00.950" v="139" actId="478"/>
+          <ac:grpSpMkLst>
+            <pc:docMk/>
+            <pc:sldMk cId="3302856774" sldId="317"/>
+            <ac:grpSpMk id="51" creationId="{42BD465A-122F-A8EC-9337-FEB1792B1BDF}"/>
+          </ac:grpSpMkLst>
+        </pc:grpChg>
+        <pc:grpChg chg="mod">
+          <ac:chgData name="Tiago Janela" userId="ee1a79fe-c79c-4f34-9602-7f6f2f0482b3" providerId="ADAL" clId="{D59BA079-2D81-42B2-9E2D-198C5F90099E}" dt="2026-04-29T14:42:57.418" v="138"/>
+          <ac:grpSpMkLst>
+            <pc:docMk/>
+            <pc:sldMk cId="3302856774" sldId="317"/>
+            <ac:grpSpMk id="53" creationId="{10DFA937-B03E-C395-932B-6931E43FAB28}"/>
+          </ac:grpSpMkLst>
+        </pc:grpChg>
+        <pc:grpChg chg="mod">
+          <ac:chgData name="Tiago Janela" userId="ee1a79fe-c79c-4f34-9602-7f6f2f0482b3" providerId="ADAL" clId="{D59BA079-2D81-42B2-9E2D-198C5F90099E}" dt="2026-04-29T14:42:57.418" v="138"/>
+          <ac:grpSpMkLst>
+            <pc:docMk/>
+            <pc:sldMk cId="3302856774" sldId="317"/>
+            <ac:grpSpMk id="55" creationId="{FBE245D5-B6B9-DC0C-CE09-9437236832FC}"/>
+          </ac:grpSpMkLst>
+        </pc:grpChg>
+        <pc:grpChg chg="mod">
+          <ac:chgData name="Tiago Janela" userId="ee1a79fe-c79c-4f34-9602-7f6f2f0482b3" providerId="ADAL" clId="{D59BA079-2D81-42B2-9E2D-198C5F90099E}" dt="2026-04-29T14:42:57.418" v="138"/>
+          <ac:grpSpMkLst>
+            <pc:docMk/>
+            <pc:sldMk cId="3302856774" sldId="317"/>
+            <ac:grpSpMk id="56" creationId="{5FEF2E16-74B4-316E-97A0-D3C78613EF1C}"/>
+          </ac:grpSpMkLst>
+        </pc:grpChg>
+        <pc:grpChg chg="mod">
+          <ac:chgData name="Tiago Janela" userId="ee1a79fe-c79c-4f34-9602-7f6f2f0482b3" providerId="ADAL" clId="{D59BA079-2D81-42B2-9E2D-198C5F90099E}" dt="2026-04-29T14:42:57.418" v="138"/>
+          <ac:grpSpMkLst>
+            <pc:docMk/>
+            <pc:sldMk cId="3302856774" sldId="317"/>
+            <ac:grpSpMk id="58" creationId="{AC6EF26A-1536-DB79-1625-187EA1E91A86}"/>
+          </ac:grpSpMkLst>
+        </pc:grpChg>
+        <pc:grpChg chg="mod">
+          <ac:chgData name="Tiago Janela" userId="ee1a79fe-c79c-4f34-9602-7f6f2f0482b3" providerId="ADAL" clId="{D59BA079-2D81-42B2-9E2D-198C5F90099E}" dt="2026-04-29T14:42:57.418" v="138"/>
+          <ac:grpSpMkLst>
+            <pc:docMk/>
+            <pc:sldMk cId="3302856774" sldId="317"/>
+            <ac:grpSpMk id="59" creationId="{CD6CFF60-9C4D-BE66-9802-569670A8A8B5}"/>
+          </ac:grpSpMkLst>
+        </pc:grpChg>
+        <pc:grpChg chg="mod">
+          <ac:chgData name="Tiago Janela" userId="ee1a79fe-c79c-4f34-9602-7f6f2f0482b3" providerId="ADAL" clId="{D59BA079-2D81-42B2-9E2D-198C5F90099E}" dt="2026-04-29T14:42:57.418" v="138"/>
+          <ac:grpSpMkLst>
+            <pc:docMk/>
+            <pc:sldMk cId="3302856774" sldId="317"/>
+            <ac:grpSpMk id="128" creationId="{5023F48A-74A8-8B3A-7CDE-822D6AF916AB}"/>
+          </ac:grpSpMkLst>
+        </pc:grpChg>
+        <pc:grpChg chg="mod">
+          <ac:chgData name="Tiago Janela" userId="ee1a79fe-c79c-4f34-9602-7f6f2f0482b3" providerId="ADAL" clId="{D59BA079-2D81-42B2-9E2D-198C5F90099E}" dt="2026-04-29T14:42:57.418" v="138"/>
+          <ac:grpSpMkLst>
+            <pc:docMk/>
+            <pc:sldMk cId="3302856774" sldId="317"/>
+            <ac:grpSpMk id="129" creationId="{6AE9F94F-0134-8D3E-564D-AF13DD06A9AA}"/>
+          </ac:grpSpMkLst>
+        </pc:grpChg>
+        <pc:grpChg chg="mod">
+          <ac:chgData name="Tiago Janela" userId="ee1a79fe-c79c-4f34-9602-7f6f2f0482b3" providerId="ADAL" clId="{D59BA079-2D81-42B2-9E2D-198C5F90099E}" dt="2026-04-29T14:42:57.418" v="138"/>
+          <ac:grpSpMkLst>
+            <pc:docMk/>
+            <pc:sldMk cId="3302856774" sldId="317"/>
+            <ac:grpSpMk id="135" creationId="{22DF0F80-4E5A-4C07-C819-A9FF2DA9A356}"/>
+          </ac:grpSpMkLst>
+        </pc:grpChg>
+        <pc:grpChg chg="mod">
+          <ac:chgData name="Tiago Janela" userId="ee1a79fe-c79c-4f34-9602-7f6f2f0482b3" providerId="ADAL" clId="{D59BA079-2D81-42B2-9E2D-198C5F90099E}" dt="2026-04-29T14:42:57.418" v="138"/>
+          <ac:grpSpMkLst>
+            <pc:docMk/>
+            <pc:sldMk cId="3302856774" sldId="317"/>
+            <ac:grpSpMk id="136" creationId="{25D4461D-AC2D-43D9-AA69-D94B5AEEFAF2}"/>
+          </ac:grpSpMkLst>
+        </pc:grpChg>
+        <pc:picChg chg="mod">
+          <ac:chgData name="Tiago Janela" userId="ee1a79fe-c79c-4f34-9602-7f6f2f0482b3" providerId="ADAL" clId="{D59BA079-2D81-42B2-9E2D-198C5F90099E}" dt="2026-04-29T14:37:18.277" v="2"/>
+          <ac:picMkLst>
+            <pc:docMk/>
+            <pc:sldMk cId="3302856774" sldId="317"/>
+            <ac:picMk id="5" creationId="{BC3098E3-543E-39F7-8A4E-3EA3BD9DACFE}"/>
+          </ac:picMkLst>
+        </pc:picChg>
+        <pc:picChg chg="mod">
+          <ac:chgData name="Tiago Janela" userId="ee1a79fe-c79c-4f34-9602-7f6f2f0482b3" providerId="ADAL" clId="{D59BA079-2D81-42B2-9E2D-198C5F90099E}" dt="2026-04-29T14:37:18.277" v="2"/>
+          <ac:picMkLst>
+            <pc:docMk/>
+            <pc:sldMk cId="3302856774" sldId="317"/>
+            <ac:picMk id="6" creationId="{A6C08A7B-D7B2-8D7E-7551-DA70599DDC7E}"/>
+          </ac:picMkLst>
+        </pc:picChg>
+        <pc:picChg chg="del">
+          <ac:chgData name="Tiago Janela" userId="ee1a79fe-c79c-4f34-9602-7f6f2f0482b3" providerId="ADAL" clId="{D59BA079-2D81-42B2-9E2D-198C5F90099E}" dt="2026-04-29T14:37:06.137" v="1" actId="478"/>
+          <ac:picMkLst>
+            <pc:docMk/>
+            <pc:sldMk cId="3302856774" sldId="317"/>
+            <ac:picMk id="12" creationId="{E40230FB-91FB-0DC9-7BD8-1BE8E2E79A66}"/>
+          </ac:picMkLst>
+        </pc:picChg>
+        <pc:picChg chg="add mod">
+          <ac:chgData name="Tiago Janela" userId="ee1a79fe-c79c-4f34-9602-7f6f2f0482b3" providerId="ADAL" clId="{D59BA079-2D81-42B2-9E2D-198C5F90099E}" dt="2026-04-29T14:37:30.168" v="3" actId="164"/>
+          <ac:picMkLst>
+            <pc:docMk/>
+            <pc:sldMk cId="3302856774" sldId="317"/>
+            <ac:picMk id="18" creationId="{B00FBE90-B9A0-71D7-78B9-0470979D39BB}"/>
+          </ac:picMkLst>
+        </pc:picChg>
+        <pc:picChg chg="add mod">
+          <ac:chgData name="Tiago Janela" userId="ee1a79fe-c79c-4f34-9602-7f6f2f0482b3" providerId="ADAL" clId="{D59BA079-2D81-42B2-9E2D-198C5F90099E}" dt="2026-04-29T14:37:30.168" v="3" actId="164"/>
+          <ac:picMkLst>
+            <pc:docMk/>
+            <pc:sldMk cId="3302856774" sldId="317"/>
+            <ac:picMk id="19" creationId="{8503AC68-78EB-31F3-DB36-6A64117ACE03}"/>
+          </ac:picMkLst>
+        </pc:picChg>
+        <pc:picChg chg="mod">
+          <ac:chgData name="Tiago Janela" userId="ee1a79fe-c79c-4f34-9602-7f6f2f0482b3" providerId="ADAL" clId="{D59BA079-2D81-42B2-9E2D-198C5F90099E}" dt="2026-04-29T14:42:14.331" v="134"/>
+          <ac:picMkLst>
+            <pc:docMk/>
+            <pc:sldMk cId="3302856774" sldId="317"/>
+            <ac:picMk id="37" creationId="{5A062627-B1F3-C462-7ADA-A705ABE7B6C9}"/>
+          </ac:picMkLst>
+        </pc:picChg>
+        <pc:picChg chg="mod">
+          <ac:chgData name="Tiago Janela" userId="ee1a79fe-c79c-4f34-9602-7f6f2f0482b3" providerId="ADAL" clId="{D59BA079-2D81-42B2-9E2D-198C5F90099E}" dt="2026-04-29T14:42:14.331" v="134"/>
+          <ac:picMkLst>
+            <pc:docMk/>
+            <pc:sldMk cId="3302856774" sldId="317"/>
+            <ac:picMk id="38" creationId="{79353257-7DC2-5C9B-EEB8-21904C964F3C}"/>
+          </ac:picMkLst>
+        </pc:picChg>
+        <pc:picChg chg="mod">
+          <ac:chgData name="Tiago Janela" userId="ee1a79fe-c79c-4f34-9602-7f6f2f0482b3" providerId="ADAL" clId="{D59BA079-2D81-42B2-9E2D-198C5F90099E}" dt="2026-04-29T14:42:14.331" v="134"/>
+          <ac:picMkLst>
+            <pc:docMk/>
+            <pc:sldMk cId="3302856774" sldId="317"/>
+            <ac:picMk id="39" creationId="{48AFFD95-0148-C55F-10A4-AD2331630B8C}"/>
+          </ac:picMkLst>
+        </pc:picChg>
+        <pc:picChg chg="mod">
+          <ac:chgData name="Tiago Janela" userId="ee1a79fe-c79c-4f34-9602-7f6f2f0482b3" providerId="ADAL" clId="{D59BA079-2D81-42B2-9E2D-198C5F90099E}" dt="2026-04-29T14:42:14.331" v="134"/>
+          <ac:picMkLst>
+            <pc:docMk/>
+            <pc:sldMk cId="3302856774" sldId="317"/>
+            <ac:picMk id="40" creationId="{05AC4806-6F86-A8B2-2E15-0EBAAD3ABE7B}"/>
+          </ac:picMkLst>
+        </pc:picChg>
+        <pc:picChg chg="mod">
+          <ac:chgData name="Tiago Janela" userId="ee1a79fe-c79c-4f34-9602-7f6f2f0482b3" providerId="ADAL" clId="{D59BA079-2D81-42B2-9E2D-198C5F90099E}" dt="2026-04-29T14:42:14.331" v="134"/>
+          <ac:picMkLst>
+            <pc:docMk/>
+            <pc:sldMk cId="3302856774" sldId="317"/>
+            <ac:picMk id="44" creationId="{729D28AB-18FE-2B67-0111-A7DB7B32B9CD}"/>
+          </ac:picMkLst>
+        </pc:picChg>
+        <pc:picChg chg="mod">
+          <ac:chgData name="Tiago Janela" userId="ee1a79fe-c79c-4f34-9602-7f6f2f0482b3" providerId="ADAL" clId="{D59BA079-2D81-42B2-9E2D-198C5F90099E}" dt="2026-04-29T14:42:14.331" v="134"/>
+          <ac:picMkLst>
+            <pc:docMk/>
+            <pc:sldMk cId="3302856774" sldId="317"/>
+            <ac:picMk id="45" creationId="{E10A6266-FE52-CC59-8FB1-FB3B6C6390E2}"/>
+          </ac:picMkLst>
+        </pc:picChg>
+        <pc:picChg chg="mod">
+          <ac:chgData name="Tiago Janela" userId="ee1a79fe-c79c-4f34-9602-7f6f2f0482b3" providerId="ADAL" clId="{D59BA079-2D81-42B2-9E2D-198C5F90099E}" dt="2026-04-29T14:42:14.331" v="134"/>
+          <ac:picMkLst>
+            <pc:docMk/>
+            <pc:sldMk cId="3302856774" sldId="317"/>
+            <ac:picMk id="46" creationId="{EE09EFDC-BBB3-FF5C-1B89-E9BE7CD3FD74}"/>
+          </ac:picMkLst>
+        </pc:picChg>
+        <pc:picChg chg="mod">
+          <ac:chgData name="Tiago Janela" userId="ee1a79fe-c79c-4f34-9602-7f6f2f0482b3" providerId="ADAL" clId="{D59BA079-2D81-42B2-9E2D-198C5F90099E}" dt="2026-04-29T14:42:14.331" v="134"/>
+          <ac:picMkLst>
+            <pc:docMk/>
+            <pc:sldMk cId="3302856774" sldId="317"/>
+            <ac:picMk id="47" creationId="{40CEBF56-5969-CEB0-9ABA-D55A18510E41}"/>
+          </ac:picMkLst>
+        </pc:picChg>
+        <pc:picChg chg="mod">
+          <ac:chgData name="Tiago Janela" userId="ee1a79fe-c79c-4f34-9602-7f6f2f0482b3" providerId="ADAL" clId="{D59BA079-2D81-42B2-9E2D-198C5F90099E}" dt="2026-04-29T14:42:14.331" v="134"/>
+          <ac:picMkLst>
+            <pc:docMk/>
+            <pc:sldMk cId="3302856774" sldId="317"/>
+            <ac:picMk id="49" creationId="{ACE533E9-FD22-5418-4406-30971C1189F3}"/>
+          </ac:picMkLst>
+        </pc:picChg>
+        <pc:picChg chg="mod">
+          <ac:chgData name="Tiago Janela" userId="ee1a79fe-c79c-4f34-9602-7f6f2f0482b3" providerId="ADAL" clId="{D59BA079-2D81-42B2-9E2D-198C5F90099E}" dt="2026-04-29T14:42:14.331" v="134"/>
+          <ac:picMkLst>
+            <pc:docMk/>
+            <pc:sldMk cId="3302856774" sldId="317"/>
+            <ac:picMk id="50" creationId="{86A59E1C-C71E-1F73-DFE8-35344EDC0E18}"/>
+          </ac:picMkLst>
+        </pc:picChg>
+        <pc:picChg chg="mod">
+          <ac:chgData name="Tiago Janela" userId="ee1a79fe-c79c-4f34-9602-7f6f2f0482b3" providerId="ADAL" clId="{D59BA079-2D81-42B2-9E2D-198C5F90099E}" dt="2026-04-29T14:42:57.418" v="138"/>
+          <ac:picMkLst>
+            <pc:docMk/>
+            <pc:sldMk cId="3302856774" sldId="317"/>
+            <ac:picMk id="131" creationId="{548E2493-2B00-8053-2961-3DB8BF281F8A}"/>
+          </ac:picMkLst>
+        </pc:picChg>
+        <pc:picChg chg="mod">
+          <ac:chgData name="Tiago Janela" userId="ee1a79fe-c79c-4f34-9602-7f6f2f0482b3" providerId="ADAL" clId="{D59BA079-2D81-42B2-9E2D-198C5F90099E}" dt="2026-04-29T14:42:57.418" v="138"/>
+          <ac:picMkLst>
+            <pc:docMk/>
+            <pc:sldMk cId="3302856774" sldId="317"/>
+            <ac:picMk id="132" creationId="{352C41BE-E6C8-EE00-56D8-58664D1003C9}"/>
+          </ac:picMkLst>
+        </pc:picChg>
+        <pc:picChg chg="mod">
+          <ac:chgData name="Tiago Janela" userId="ee1a79fe-c79c-4f34-9602-7f6f2f0482b3" providerId="ADAL" clId="{D59BA079-2D81-42B2-9E2D-198C5F90099E}" dt="2026-04-29T14:42:57.418" v="138"/>
+          <ac:picMkLst>
+            <pc:docMk/>
+            <pc:sldMk cId="3302856774" sldId="317"/>
+            <ac:picMk id="133" creationId="{26C4696E-7AE5-1D45-A539-5FB36DB93C67}"/>
+          </ac:picMkLst>
+        </pc:picChg>
+        <pc:picChg chg="mod">
+          <ac:chgData name="Tiago Janela" userId="ee1a79fe-c79c-4f34-9602-7f6f2f0482b3" providerId="ADAL" clId="{D59BA079-2D81-42B2-9E2D-198C5F90099E}" dt="2026-04-29T14:42:57.418" v="138"/>
+          <ac:picMkLst>
+            <pc:docMk/>
+            <pc:sldMk cId="3302856774" sldId="317"/>
+            <ac:picMk id="134" creationId="{B79D68F7-04EA-0BE9-53D3-FBE7BB88272D}"/>
+          </ac:picMkLst>
+        </pc:picChg>
+        <pc:picChg chg="mod">
+          <ac:chgData name="Tiago Janela" userId="ee1a79fe-c79c-4f34-9602-7f6f2f0482b3" providerId="ADAL" clId="{D59BA079-2D81-42B2-9E2D-198C5F90099E}" dt="2026-04-29T14:42:57.418" v="138"/>
+          <ac:picMkLst>
+            <pc:docMk/>
+            <pc:sldMk cId="3302856774" sldId="317"/>
+            <ac:picMk id="138" creationId="{15E7A7FC-F84F-3F84-7B69-556CB5BB8D4A}"/>
+          </ac:picMkLst>
+        </pc:picChg>
+        <pc:picChg chg="mod">
+          <ac:chgData name="Tiago Janela" userId="ee1a79fe-c79c-4f34-9602-7f6f2f0482b3" providerId="ADAL" clId="{D59BA079-2D81-42B2-9E2D-198C5F90099E}" dt="2026-04-29T14:42:57.418" v="138"/>
+          <ac:picMkLst>
+            <pc:docMk/>
+            <pc:sldMk cId="3302856774" sldId="317"/>
+            <ac:picMk id="139" creationId="{4577094C-3548-3D19-8E9B-03EE616373EE}"/>
+          </ac:picMkLst>
+        </pc:picChg>
+        <pc:picChg chg="mod">
+          <ac:chgData name="Tiago Janela" userId="ee1a79fe-c79c-4f34-9602-7f6f2f0482b3" providerId="ADAL" clId="{D59BA079-2D81-42B2-9E2D-198C5F90099E}" dt="2026-04-29T14:42:57.418" v="138"/>
+          <ac:picMkLst>
+            <pc:docMk/>
+            <pc:sldMk cId="3302856774" sldId="317"/>
+            <ac:picMk id="140" creationId="{69AF3AF4-DF25-CD3C-EE20-C34C06D80285}"/>
+          </ac:picMkLst>
+        </pc:picChg>
+        <pc:picChg chg="mod">
+          <ac:chgData name="Tiago Janela" userId="ee1a79fe-c79c-4f34-9602-7f6f2f0482b3" providerId="ADAL" clId="{D59BA079-2D81-42B2-9E2D-198C5F90099E}" dt="2026-04-29T14:42:57.418" v="138"/>
+          <ac:picMkLst>
+            <pc:docMk/>
+            <pc:sldMk cId="3302856774" sldId="317"/>
+            <ac:picMk id="141" creationId="{984FA4EB-2B6B-71D9-0BCE-6CE238247E34}"/>
+          </ac:picMkLst>
+        </pc:picChg>
+        <pc:picChg chg="mod">
+          <ac:chgData name="Tiago Janela" userId="ee1a79fe-c79c-4f34-9602-7f6f2f0482b3" providerId="ADAL" clId="{D59BA079-2D81-42B2-9E2D-198C5F90099E}" dt="2026-04-29T14:42:57.418" v="138"/>
+          <ac:picMkLst>
+            <pc:docMk/>
+            <pc:sldMk cId="3302856774" sldId="317"/>
+            <ac:picMk id="143" creationId="{5B2AAD25-27B9-BD60-6444-A51217E4BE2C}"/>
+          </ac:picMkLst>
+        </pc:picChg>
+        <pc:picChg chg="mod">
+          <ac:chgData name="Tiago Janela" userId="ee1a79fe-c79c-4f34-9602-7f6f2f0482b3" providerId="ADAL" clId="{D59BA079-2D81-42B2-9E2D-198C5F90099E}" dt="2026-04-29T14:42:57.418" v="138"/>
+          <ac:picMkLst>
+            <pc:docMk/>
+            <pc:sldMk cId="3302856774" sldId="317"/>
+            <ac:picMk id="144" creationId="{57D8D600-D195-B782-38BF-874E9B51B19C}"/>
+          </ac:picMkLst>
+        </pc:picChg>
+        <pc:cxnChg chg="mod">
+          <ac:chgData name="Tiago Janela" userId="ee1a79fe-c79c-4f34-9602-7f6f2f0482b3" providerId="ADAL" clId="{D59BA079-2D81-42B2-9E2D-198C5F90099E}" dt="2026-04-29T14:37:18.277" v="2"/>
+          <ac:cxnSpMkLst>
+            <pc:docMk/>
+            <pc:sldMk cId="3302856774" sldId="317"/>
+            <ac:cxnSpMk id="13" creationId="{D7F471AB-B13A-E0F6-8895-3D2EF3A9C1DF}"/>
+          </ac:cxnSpMkLst>
+        </pc:cxnChg>
+        <pc:cxnChg chg="mod">
+          <ac:chgData name="Tiago Janela" userId="ee1a79fe-c79c-4f34-9602-7f6f2f0482b3" providerId="ADAL" clId="{D59BA079-2D81-42B2-9E2D-198C5F90099E}" dt="2026-04-29T14:37:18.277" v="2"/>
+          <ac:cxnSpMkLst>
+            <pc:docMk/>
+            <pc:sldMk cId="3302856774" sldId="317"/>
+            <ac:cxnSpMk id="16" creationId="{E191783D-2D08-3AAC-2FF0-E2EC291F5384}"/>
+          </ac:cxnSpMkLst>
+        </pc:cxnChg>
+        <pc:cxnChg chg="mod">
+          <ac:chgData name="Tiago Janela" userId="ee1a79fe-c79c-4f34-9602-7f6f2f0482b3" providerId="ADAL" clId="{D59BA079-2D81-42B2-9E2D-198C5F90099E}" dt="2026-04-29T14:42:14.331" v="134"/>
+          <ac:cxnSpMkLst>
+            <pc:docMk/>
+            <pc:sldMk cId="3302856774" sldId="317"/>
+            <ac:cxnSpMk id="30" creationId="{65D80343-978C-867C-3E50-EB8FF1F7E265}"/>
+          </ac:cxnSpMkLst>
+        </pc:cxnChg>
+        <pc:cxnChg chg="mod">
+          <ac:chgData name="Tiago Janela" userId="ee1a79fe-c79c-4f34-9602-7f6f2f0482b3" providerId="ADAL" clId="{D59BA079-2D81-42B2-9E2D-198C5F90099E}" dt="2026-04-29T14:42:14.331" v="134"/>
+          <ac:cxnSpMkLst>
+            <pc:docMk/>
+            <pc:sldMk cId="3302856774" sldId="317"/>
+            <ac:cxnSpMk id="32" creationId="{F6765A01-FE27-3553-571D-FB9EE495DE11}"/>
+          </ac:cxnSpMkLst>
+        </pc:cxnChg>
+        <pc:cxnChg chg="mod">
+          <ac:chgData name="Tiago Janela" userId="ee1a79fe-c79c-4f34-9602-7f6f2f0482b3" providerId="ADAL" clId="{D59BA079-2D81-42B2-9E2D-198C5F90099E}" dt="2026-04-29T14:42:57.418" v="138"/>
+          <ac:cxnSpMkLst>
+            <pc:docMk/>
+            <pc:sldMk cId="3302856774" sldId="317"/>
+            <ac:cxnSpMk id="60" creationId="{28C09AA9-08C7-6E67-BCF9-29634E3479EE}"/>
+          </ac:cxnSpMkLst>
+        </pc:cxnChg>
+        <pc:cxnChg chg="mod">
+          <ac:chgData name="Tiago Janela" userId="ee1a79fe-c79c-4f34-9602-7f6f2f0482b3" providerId="ADAL" clId="{D59BA079-2D81-42B2-9E2D-198C5F90099E}" dt="2026-04-29T14:42:57.418" v="138"/>
+          <ac:cxnSpMkLst>
+            <pc:docMk/>
+            <pc:sldMk cId="3302856774" sldId="317"/>
+            <ac:cxnSpMk id="62" creationId="{82F0C898-A210-87B4-4E25-01F327E73B76}"/>
+          </ac:cxnSpMkLst>
+        </pc:cxnChg>
+      </pc:sldChg>
+      <pc:sldChg chg="addSp delSp modSp add mod ord">
+        <pc:chgData name="Tiago Janela" userId="ee1a79fe-c79c-4f34-9602-7f6f2f0482b3" providerId="ADAL" clId="{D59BA079-2D81-42B2-9E2D-198C5F90099E}" dt="2026-04-29T14:47:30.153" v="160"/>
+        <pc:sldMkLst>
+          <pc:docMk/>
+          <pc:sldMk cId="3463339464" sldId="318"/>
+        </pc:sldMkLst>
+        <pc:spChg chg="add mod">
+          <ac:chgData name="Tiago Janela" userId="ee1a79fe-c79c-4f34-9602-7f6f2f0482b3" providerId="ADAL" clId="{D59BA079-2D81-42B2-9E2D-198C5F90099E}" dt="2026-04-29T14:40:20.758" v="35" actId="404"/>
+          <ac:spMkLst>
+            <pc:docMk/>
+            <pc:sldMk cId="3463339464" sldId="318"/>
+            <ac:spMk id="12" creationId="{84F2BFB3-8FF2-554F-E79D-F8FED4C6DB14}"/>
+          </ac:spMkLst>
+        </pc:spChg>
+        <pc:spChg chg="mod">
+          <ac:chgData name="Tiago Janela" userId="ee1a79fe-c79c-4f34-9602-7f6f2f0482b3" providerId="ADAL" clId="{D59BA079-2D81-42B2-9E2D-198C5F90099E}" dt="2026-04-29T14:39:06.477" v="20"/>
+          <ac:spMkLst>
+            <pc:docMk/>
+            <pc:sldMk cId="3463339464" sldId="318"/>
+            <ac:spMk id="22" creationId="{6A221BB0-FFBC-E869-34CB-BC594E5B0490}"/>
+          </ac:spMkLst>
+        </pc:spChg>
+        <pc:spChg chg="add mod">
+          <ac:chgData name="Tiago Janela" userId="ee1a79fe-c79c-4f34-9602-7f6f2f0482b3" providerId="ADAL" clId="{D59BA079-2D81-42B2-9E2D-198C5F90099E}" dt="2026-04-29T14:39:08.519" v="21" actId="164"/>
+          <ac:spMkLst>
+            <pc:docMk/>
+            <pc:sldMk cId="3463339464" sldId="318"/>
+            <ac:spMk id="25" creationId="{8E792690-D447-952D-A5E7-853CC5FB33BB}"/>
+          </ac:spMkLst>
+        </pc:spChg>
+        <pc:spChg chg="mod">
+          <ac:chgData name="Tiago Janela" userId="ee1a79fe-c79c-4f34-9602-7f6f2f0482b3" providerId="ADAL" clId="{D59BA079-2D81-42B2-9E2D-198C5F90099E}" dt="2026-04-29T14:40:23.702" v="36" actId="404"/>
+          <ac:spMkLst>
+            <pc:docMk/>
+            <pc:sldMk cId="3463339464" sldId="318"/>
+            <ac:spMk id="29" creationId="{50EF08DE-650D-84D8-23E2-83CD379C9565}"/>
+          </ac:spMkLst>
+        </pc:spChg>
+        <pc:spChg chg="mod">
+          <ac:chgData name="Tiago Janela" userId="ee1a79fe-c79c-4f34-9602-7f6f2f0482b3" providerId="ADAL" clId="{D59BA079-2D81-42B2-9E2D-198C5F90099E}" dt="2026-04-29T14:40:26.534" v="37" actId="404"/>
+          <ac:spMkLst>
+            <pc:docMk/>
+            <pc:sldMk cId="3463339464" sldId="318"/>
+            <ac:spMk id="37" creationId="{A9B538AC-1716-FEE9-9303-C64FEB3A2571}"/>
+          </ac:spMkLst>
+        </pc:spChg>
+        <pc:spChg chg="add mod">
+          <ac:chgData name="Tiago Janela" userId="ee1a79fe-c79c-4f34-9602-7f6f2f0482b3" providerId="ADAL" clId="{D59BA079-2D81-42B2-9E2D-198C5F90099E}" dt="2026-04-29T14:39:08.519" v="21" actId="164"/>
+          <ac:spMkLst>
+            <pc:docMk/>
+            <pc:sldMk cId="3463339464" sldId="318"/>
+            <ac:spMk id="42" creationId="{666A450C-D0FA-4FC2-D779-9D8A47EBECE0}"/>
+          </ac:spMkLst>
+        </pc:spChg>
+        <pc:spChg chg="mod">
+          <ac:chgData name="Tiago Janela" userId="ee1a79fe-c79c-4f34-9602-7f6f2f0482b3" providerId="ADAL" clId="{D59BA079-2D81-42B2-9E2D-198C5F90099E}" dt="2026-04-29T14:40:39.373" v="41" actId="404"/>
+          <ac:spMkLst>
+            <pc:docMk/>
+            <pc:sldMk cId="3463339464" sldId="318"/>
+            <ac:spMk id="45" creationId="{092CB276-0083-7B65-2724-8B06427E812A}"/>
+          </ac:spMkLst>
+        </pc:spChg>
+        <pc:spChg chg="mod">
+          <ac:chgData name="Tiago Janela" userId="ee1a79fe-c79c-4f34-9602-7f6f2f0482b3" providerId="ADAL" clId="{D59BA079-2D81-42B2-9E2D-198C5F90099E}" dt="2026-04-29T14:40:43.670" v="43" actId="404"/>
+          <ac:spMkLst>
+            <pc:docMk/>
+            <pc:sldMk cId="3463339464" sldId="318"/>
+            <ac:spMk id="48" creationId="{89DB2597-89D3-3163-87C9-9AC4C1B4C236}"/>
+          </ac:spMkLst>
+        </pc:spChg>
+        <pc:spChg chg="mod">
+          <ac:chgData name="Tiago Janela" userId="ee1a79fe-c79c-4f34-9602-7f6f2f0482b3" providerId="ADAL" clId="{D59BA079-2D81-42B2-9E2D-198C5F90099E}" dt="2026-04-29T14:41:05.450" v="44"/>
+          <ac:spMkLst>
+            <pc:docMk/>
+            <pc:sldMk cId="3463339464" sldId="318"/>
+            <ac:spMk id="51" creationId="{28DD0ECA-8E37-B8B9-0418-38420611096E}"/>
+          </ac:spMkLst>
+        </pc:spChg>
+        <pc:spChg chg="mod">
+          <ac:chgData name="Tiago Janela" userId="ee1a79fe-c79c-4f34-9602-7f6f2f0482b3" providerId="ADAL" clId="{D59BA079-2D81-42B2-9E2D-198C5F90099E}" dt="2026-04-29T14:41:05.450" v="44"/>
+          <ac:spMkLst>
+            <pc:docMk/>
+            <pc:sldMk cId="3463339464" sldId="318"/>
+            <ac:spMk id="53" creationId="{68B48C07-97A0-A5E0-0196-8F9A0D2196A0}"/>
+          </ac:spMkLst>
+        </pc:spChg>
+        <pc:spChg chg="mod">
+          <ac:chgData name="Tiago Janela" userId="ee1a79fe-c79c-4f34-9602-7f6f2f0482b3" providerId="ADAL" clId="{D59BA079-2D81-42B2-9E2D-198C5F90099E}" dt="2026-04-29T14:41:05.450" v="44"/>
+          <ac:spMkLst>
+            <pc:docMk/>
+            <pc:sldMk cId="3463339464" sldId="318"/>
+            <ac:spMk id="54" creationId="{208860F7-EFE8-FE26-053D-F361E5EC7D7E}"/>
+          </ac:spMkLst>
+        </pc:spChg>
+        <pc:spChg chg="mod">
+          <ac:chgData name="Tiago Janela" userId="ee1a79fe-c79c-4f34-9602-7f6f2f0482b3" providerId="ADAL" clId="{D59BA079-2D81-42B2-9E2D-198C5F90099E}" dt="2026-04-29T14:41:05.450" v="44"/>
+          <ac:spMkLst>
+            <pc:docMk/>
+            <pc:sldMk cId="3463339464" sldId="318"/>
+            <ac:spMk id="55" creationId="{2103C611-4C9C-5D35-F98A-38EA5A46DAEE}"/>
+          </ac:spMkLst>
+        </pc:spChg>
+        <pc:spChg chg="mod">
+          <ac:chgData name="Tiago Janela" userId="ee1a79fe-c79c-4f34-9602-7f6f2f0482b3" providerId="ADAL" clId="{D59BA079-2D81-42B2-9E2D-198C5F90099E}" dt="2026-04-29T14:41:05.450" v="44"/>
+          <ac:spMkLst>
+            <pc:docMk/>
+            <pc:sldMk cId="3463339464" sldId="318"/>
+            <ac:spMk id="56" creationId="{90D266F1-FB12-E36F-173D-2B140D4BDCB1}"/>
+          </ac:spMkLst>
+        </pc:spChg>
+        <pc:spChg chg="mod">
+          <ac:chgData name="Tiago Janela" userId="ee1a79fe-c79c-4f34-9602-7f6f2f0482b3" providerId="ADAL" clId="{D59BA079-2D81-42B2-9E2D-198C5F90099E}" dt="2026-04-29T14:41:05.450" v="44"/>
+          <ac:spMkLst>
+            <pc:docMk/>
+            <pc:sldMk cId="3463339464" sldId="318"/>
+            <ac:spMk id="62" creationId="{9B20C80F-F64A-D047-2D22-BDE06D682B1D}"/>
+          </ac:spMkLst>
+        </pc:spChg>
+        <pc:spChg chg="mod">
+          <ac:chgData name="Tiago Janela" userId="ee1a79fe-c79c-4f34-9602-7f6f2f0482b3" providerId="ADAL" clId="{D59BA079-2D81-42B2-9E2D-198C5F90099E}" dt="2026-04-29T14:41:05.450" v="44"/>
+          <ac:spMkLst>
+            <pc:docMk/>
+            <pc:sldMk cId="3463339464" sldId="318"/>
+            <ac:spMk id="128" creationId="{06F0AD43-E1A7-F265-A6E7-B1C848095C75}"/>
+          </ac:spMkLst>
+        </pc:spChg>
+        <pc:spChg chg="mod">
+          <ac:chgData name="Tiago Janela" userId="ee1a79fe-c79c-4f34-9602-7f6f2f0482b3" providerId="ADAL" clId="{D59BA079-2D81-42B2-9E2D-198C5F90099E}" dt="2026-04-29T14:41:05.450" v="44"/>
+          <ac:spMkLst>
+            <pc:docMk/>
+            <pc:sldMk cId="3463339464" sldId="318"/>
+            <ac:spMk id="129" creationId="{34B7B117-4F98-E52D-CB56-DB4F6D143C5C}"/>
+          </ac:spMkLst>
+        </pc:spChg>
+        <pc:spChg chg="mod">
+          <ac:chgData name="Tiago Janela" userId="ee1a79fe-c79c-4f34-9602-7f6f2f0482b3" providerId="ADAL" clId="{D59BA079-2D81-42B2-9E2D-198C5F90099E}" dt="2026-04-29T14:41:35.971" v="129"/>
+          <ac:spMkLst>
+            <pc:docMk/>
+            <pc:sldMk cId="3463339464" sldId="318"/>
+            <ac:spMk id="133" creationId="{89106357-4BD4-E213-5F88-E69A238FD305}"/>
+          </ac:spMkLst>
+        </pc:spChg>
+        <pc:spChg chg="mod">
+          <ac:chgData name="Tiago Janela" userId="ee1a79fe-c79c-4f34-9602-7f6f2f0482b3" providerId="ADAL" clId="{D59BA079-2D81-42B2-9E2D-198C5F90099E}" dt="2026-04-29T14:41:35.971" v="129"/>
+          <ac:spMkLst>
+            <pc:docMk/>
+            <pc:sldMk cId="3463339464" sldId="318"/>
+            <ac:spMk id="135" creationId="{B829107F-5E5C-3E2A-9E4F-520B53D3BEDC}"/>
+          </ac:spMkLst>
+        </pc:spChg>
+        <pc:spChg chg="mod">
+          <ac:chgData name="Tiago Janela" userId="ee1a79fe-c79c-4f34-9602-7f6f2f0482b3" providerId="ADAL" clId="{D59BA079-2D81-42B2-9E2D-198C5F90099E}" dt="2026-04-29T14:41:35.971" v="129"/>
+          <ac:spMkLst>
+            <pc:docMk/>
+            <pc:sldMk cId="3463339464" sldId="318"/>
+            <ac:spMk id="136" creationId="{A4F65601-106E-8065-3458-BB8532110E46}"/>
+          </ac:spMkLst>
+        </pc:spChg>
+        <pc:spChg chg="mod">
+          <ac:chgData name="Tiago Janela" userId="ee1a79fe-c79c-4f34-9602-7f6f2f0482b3" providerId="ADAL" clId="{D59BA079-2D81-42B2-9E2D-198C5F90099E}" dt="2026-04-29T14:41:35.971" v="129"/>
+          <ac:spMkLst>
+            <pc:docMk/>
+            <pc:sldMk cId="3463339464" sldId="318"/>
+            <ac:spMk id="137" creationId="{77093375-B44E-C5DC-ACAB-C7C9B1A2DB3F}"/>
+          </ac:spMkLst>
+        </pc:spChg>
+        <pc:spChg chg="mod">
+          <ac:chgData name="Tiago Janela" userId="ee1a79fe-c79c-4f34-9602-7f6f2f0482b3" providerId="ADAL" clId="{D59BA079-2D81-42B2-9E2D-198C5F90099E}" dt="2026-04-29T14:41:35.971" v="129"/>
+          <ac:spMkLst>
+            <pc:docMk/>
+            <pc:sldMk cId="3463339464" sldId="318"/>
+            <ac:spMk id="138" creationId="{57B8DB79-D5DA-C9F8-4D80-37707F255543}"/>
+          </ac:spMkLst>
+        </pc:spChg>
+        <pc:spChg chg="mod">
+          <ac:chgData name="Tiago Janela" userId="ee1a79fe-c79c-4f34-9602-7f6f2f0482b3" providerId="ADAL" clId="{D59BA079-2D81-42B2-9E2D-198C5F90099E}" dt="2026-04-29T14:41:35.971" v="129"/>
+          <ac:spMkLst>
+            <pc:docMk/>
+            <pc:sldMk cId="3463339464" sldId="318"/>
+            <ac:spMk id="144" creationId="{BBFE61C1-30F9-7A9B-A5ED-945AB26263C7}"/>
+          </ac:spMkLst>
+        </pc:spChg>
+        <pc:spChg chg="mod">
+          <ac:chgData name="Tiago Janela" userId="ee1a79fe-c79c-4f34-9602-7f6f2f0482b3" providerId="ADAL" clId="{D59BA079-2D81-42B2-9E2D-198C5F90099E}" dt="2026-04-29T14:41:35.971" v="129"/>
+          <ac:spMkLst>
+            <pc:docMk/>
+            <pc:sldMk cId="3463339464" sldId="318"/>
+            <ac:spMk id="146" creationId="{8B4C8C75-2AC9-CCA5-FFEA-E8FFE77233AB}"/>
+          </ac:spMkLst>
+        </pc:spChg>
+        <pc:spChg chg="mod">
+          <ac:chgData name="Tiago Janela" userId="ee1a79fe-c79c-4f34-9602-7f6f2f0482b3" providerId="ADAL" clId="{D59BA079-2D81-42B2-9E2D-198C5F90099E}" dt="2026-04-29T14:41:35.971" v="129"/>
+          <ac:spMkLst>
+            <pc:docMk/>
+            <pc:sldMk cId="3463339464" sldId="318"/>
+            <ac:spMk id="147" creationId="{4F3F7314-C4FE-D90A-40CE-8AB2AF92E07D}"/>
+          </ac:spMkLst>
+        </pc:spChg>
+        <pc:spChg chg="mod">
+          <ac:chgData name="Tiago Janela" userId="ee1a79fe-c79c-4f34-9602-7f6f2f0482b3" providerId="ADAL" clId="{D59BA079-2D81-42B2-9E2D-198C5F90099E}" dt="2026-04-29T14:43:18.457" v="144"/>
+          <ac:spMkLst>
+            <pc:docMk/>
+            <pc:sldMk cId="3463339464" sldId="318"/>
+            <ac:spMk id="151" creationId="{642F2191-AE11-A105-A28D-1F95B6A96892}"/>
+          </ac:spMkLst>
+        </pc:spChg>
+        <pc:spChg chg="mod">
+          <ac:chgData name="Tiago Janela" userId="ee1a79fe-c79c-4f34-9602-7f6f2f0482b3" providerId="ADAL" clId="{D59BA079-2D81-42B2-9E2D-198C5F90099E}" dt="2026-04-29T14:43:18.457" v="144"/>
+          <ac:spMkLst>
+            <pc:docMk/>
+            <pc:sldMk cId="3463339464" sldId="318"/>
+            <ac:spMk id="153" creationId="{9FC20A8D-A898-3943-9340-FFE9261F04B4}"/>
+          </ac:spMkLst>
+        </pc:spChg>
+        <pc:spChg chg="mod">
+          <ac:chgData name="Tiago Janela" userId="ee1a79fe-c79c-4f34-9602-7f6f2f0482b3" providerId="ADAL" clId="{D59BA079-2D81-42B2-9E2D-198C5F90099E}" dt="2026-04-29T14:43:46.109" v="154" actId="1076"/>
+          <ac:spMkLst>
+            <pc:docMk/>
+            <pc:sldMk cId="3463339464" sldId="318"/>
+            <ac:spMk id="154" creationId="{B75BF1D5-19E8-2D4C-DD40-5E4F9B0D92FF}"/>
+          </ac:spMkLst>
+        </pc:spChg>
+        <pc:spChg chg="mod">
+          <ac:chgData name="Tiago Janela" userId="ee1a79fe-c79c-4f34-9602-7f6f2f0482b3" providerId="ADAL" clId="{D59BA079-2D81-42B2-9E2D-198C5F90099E}" dt="2026-04-29T14:43:18.457" v="144"/>
+          <ac:spMkLst>
+            <pc:docMk/>
+            <pc:sldMk cId="3463339464" sldId="318"/>
+            <ac:spMk id="155" creationId="{BD1FFE74-07FF-C306-4452-F1A48A611999}"/>
+          </ac:spMkLst>
+        </pc:spChg>
+        <pc:spChg chg="mod">
+          <ac:chgData name="Tiago Janela" userId="ee1a79fe-c79c-4f34-9602-7f6f2f0482b3" providerId="ADAL" clId="{D59BA079-2D81-42B2-9E2D-198C5F90099E}" dt="2026-04-29T14:43:18.457" v="144"/>
+          <ac:spMkLst>
+            <pc:docMk/>
+            <pc:sldMk cId="3463339464" sldId="318"/>
+            <ac:spMk id="156" creationId="{6F238688-2311-35BF-4F94-971FEF816E39}"/>
+          </ac:spMkLst>
+        </pc:spChg>
+        <pc:spChg chg="mod">
+          <ac:chgData name="Tiago Janela" userId="ee1a79fe-c79c-4f34-9602-7f6f2f0482b3" providerId="ADAL" clId="{D59BA079-2D81-42B2-9E2D-198C5F90099E}" dt="2026-04-29T14:43:18.457" v="144"/>
+          <ac:spMkLst>
+            <pc:docMk/>
+            <pc:sldMk cId="3463339464" sldId="318"/>
+            <ac:spMk id="162" creationId="{F5558767-FDAA-D45E-3AC5-CF6A5C3268C9}"/>
+          </ac:spMkLst>
+        </pc:spChg>
+        <pc:spChg chg="mod">
+          <ac:chgData name="Tiago Janela" userId="ee1a79fe-c79c-4f34-9602-7f6f2f0482b3" providerId="ADAL" clId="{D59BA079-2D81-42B2-9E2D-198C5F90099E}" dt="2026-04-29T14:43:18.457" v="144"/>
+          <ac:spMkLst>
+            <pc:docMk/>
+            <pc:sldMk cId="3463339464" sldId="318"/>
+            <ac:spMk id="165" creationId="{CD5729C5-8B36-552A-F410-B2D2ACFF52DB}"/>
+          </ac:spMkLst>
+        </pc:spChg>
+        <pc:spChg chg="mod">
+          <ac:chgData name="Tiago Janela" userId="ee1a79fe-c79c-4f34-9602-7f6f2f0482b3" providerId="ADAL" clId="{D59BA079-2D81-42B2-9E2D-198C5F90099E}" dt="2026-04-29T14:43:18.457" v="144"/>
+          <ac:spMkLst>
+            <pc:docMk/>
+            <pc:sldMk cId="3463339464" sldId="318"/>
+            <ac:spMk id="166" creationId="{6A57B814-ADB9-965C-78F4-9CFF2C476CA1}"/>
+          </ac:spMkLst>
+        </pc:spChg>
+        <pc:grpChg chg="del">
+          <ac:chgData name="Tiago Janela" userId="ee1a79fe-c79c-4f34-9602-7f6f2f0482b3" providerId="ADAL" clId="{D59BA079-2D81-42B2-9E2D-198C5F90099E}" dt="2026-04-29T14:38:45.095" v="19" actId="478"/>
+          <ac:grpSpMkLst>
+            <pc:docMk/>
+            <pc:sldMk cId="3463339464" sldId="318"/>
+            <ac:grpSpMk id="20" creationId="{81A65B80-1110-F1AF-A893-8B82ECA10662}"/>
+          </ac:grpSpMkLst>
+        </pc:grpChg>
+        <pc:grpChg chg="add mod">
+          <ac:chgData name="Tiago Janela" userId="ee1a79fe-c79c-4f34-9602-7f6f2f0482b3" providerId="ADAL" clId="{D59BA079-2D81-42B2-9E2D-198C5F90099E}" dt="2026-04-29T14:39:08.519" v="21" actId="164"/>
+          <ac:grpSpMkLst>
+            <pc:docMk/>
+            <pc:sldMk cId="3463339464" sldId="318"/>
+            <ac:grpSpMk id="21" creationId="{851E801A-07D0-EC46-EC69-B1E3BDC4A0EE}"/>
+          </ac:grpSpMkLst>
+        </pc:grpChg>
+        <pc:grpChg chg="add mod">
+          <ac:chgData name="Tiago Janela" userId="ee1a79fe-c79c-4f34-9602-7f6f2f0482b3" providerId="ADAL" clId="{D59BA079-2D81-42B2-9E2D-198C5F90099E}" dt="2026-04-29T14:39:08.519" v="21" actId="164"/>
+          <ac:grpSpMkLst>
+            <pc:docMk/>
+            <pc:sldMk cId="3463339464" sldId="318"/>
+            <ac:grpSpMk id="26" creationId="{9472E490-A369-C15A-DECA-AE1255870DC8}"/>
+          </ac:grpSpMkLst>
+        </pc:grpChg>
+        <pc:grpChg chg="mod">
+          <ac:chgData name="Tiago Janela" userId="ee1a79fe-c79c-4f34-9602-7f6f2f0482b3" providerId="ADAL" clId="{D59BA079-2D81-42B2-9E2D-198C5F90099E}" dt="2026-04-29T14:39:06.477" v="20"/>
+          <ac:grpSpMkLst>
+            <pc:docMk/>
+            <pc:sldMk cId="3463339464" sldId="318"/>
+            <ac:grpSpMk id="27" creationId="{C867F122-D459-E4D8-E91E-39D4FB20E8FB}"/>
+          </ac:grpSpMkLst>
+        </pc:grpChg>
+        <pc:grpChg chg="mod">
+          <ac:chgData name="Tiago Janela" userId="ee1a79fe-c79c-4f34-9602-7f6f2f0482b3" providerId="ADAL" clId="{D59BA079-2D81-42B2-9E2D-198C5F90099E}" dt="2026-04-29T14:39:06.477" v="20"/>
+          <ac:grpSpMkLst>
+            <pc:docMk/>
+            <pc:sldMk cId="3463339464" sldId="318"/>
+            <ac:grpSpMk id="28" creationId="{31D67220-A5A3-C982-ABAA-76BF27D3A610}"/>
+          </ac:grpSpMkLst>
+        </pc:grpChg>
+        <pc:grpChg chg="add mod">
+          <ac:chgData name="Tiago Janela" userId="ee1a79fe-c79c-4f34-9602-7f6f2f0482b3" providerId="ADAL" clId="{D59BA079-2D81-42B2-9E2D-198C5F90099E}" dt="2026-04-29T14:39:08.519" v="21" actId="164"/>
+          <ac:grpSpMkLst>
+            <pc:docMk/>
+            <pc:sldMk cId="3463339464" sldId="318"/>
+            <ac:grpSpMk id="34" creationId="{0D4F3181-F484-3C7A-63BE-FADB4F9C8C2E}"/>
+          </ac:grpSpMkLst>
+        </pc:grpChg>
+        <pc:grpChg chg="mod">
+          <ac:chgData name="Tiago Janela" userId="ee1a79fe-c79c-4f34-9602-7f6f2f0482b3" providerId="ADAL" clId="{D59BA079-2D81-42B2-9E2D-198C5F90099E}" dt="2026-04-29T14:39:06.477" v="20"/>
+          <ac:grpSpMkLst>
+            <pc:docMk/>
+            <pc:sldMk cId="3463339464" sldId="318"/>
+            <ac:grpSpMk id="35" creationId="{315A4BFF-0CA9-D528-2306-83671A721F96}"/>
+          </ac:grpSpMkLst>
+        </pc:grpChg>
+        <pc:grpChg chg="mod">
+          <ac:chgData name="Tiago Janela" userId="ee1a79fe-c79c-4f34-9602-7f6f2f0482b3" providerId="ADAL" clId="{D59BA079-2D81-42B2-9E2D-198C5F90099E}" dt="2026-04-29T14:39:06.477" v="20"/>
+          <ac:grpSpMkLst>
+            <pc:docMk/>
+            <pc:sldMk cId="3463339464" sldId="318"/>
+            <ac:grpSpMk id="36" creationId="{40F329E8-016F-7B2E-D6E4-F9F4E0BE7A34}"/>
+          </ac:grpSpMkLst>
+        </pc:grpChg>
+        <pc:grpChg chg="add mod">
+          <ac:chgData name="Tiago Janela" userId="ee1a79fe-c79c-4f34-9602-7f6f2f0482b3" providerId="ADAL" clId="{D59BA079-2D81-42B2-9E2D-198C5F90099E}" dt="2026-04-29T14:39:08.519" v="21" actId="164"/>
+          <ac:grpSpMkLst>
+            <pc:docMk/>
+            <pc:sldMk cId="3463339464" sldId="318"/>
+            <ac:grpSpMk id="43" creationId="{F82C89B3-047B-9A9D-4CE0-2F5ECB7C024A}"/>
+          </ac:grpSpMkLst>
+        </pc:grpChg>
+        <pc:grpChg chg="add mod">
+          <ac:chgData name="Tiago Janela" userId="ee1a79fe-c79c-4f34-9602-7f6f2f0482b3" providerId="ADAL" clId="{D59BA079-2D81-42B2-9E2D-198C5F90099E}" dt="2026-04-29T14:39:08.519" v="21" actId="164"/>
+          <ac:grpSpMkLst>
+            <pc:docMk/>
+            <pc:sldMk cId="3463339464" sldId="318"/>
+            <ac:grpSpMk id="46" creationId="{CD48E29D-F3CB-93DF-7120-8F34C9F5EB3C}"/>
+          </ac:grpSpMkLst>
+        </pc:grpChg>
+        <pc:grpChg chg="add mod ord">
+          <ac:chgData name="Tiago Janela" userId="ee1a79fe-c79c-4f34-9602-7f6f2f0482b3" providerId="ADAL" clId="{D59BA079-2D81-42B2-9E2D-198C5F90099E}" dt="2026-04-29T14:43:42.133" v="152" actId="167"/>
+          <ac:grpSpMkLst>
+            <pc:docMk/>
+            <pc:sldMk cId="3463339464" sldId="318"/>
+            <ac:grpSpMk id="49" creationId="{C31E6F76-4E7C-1639-9021-CCC76ADA5882}"/>
+          </ac:grpSpMkLst>
+        </pc:grpChg>
+        <pc:grpChg chg="add mod">
+          <ac:chgData name="Tiago Janela" userId="ee1a79fe-c79c-4f34-9602-7f6f2f0482b3" providerId="ADAL" clId="{D59BA079-2D81-42B2-9E2D-198C5F90099E}" dt="2026-04-29T14:41:05.450" v="44"/>
+          <ac:grpSpMkLst>
+            <pc:docMk/>
+            <pc:sldMk cId="3463339464" sldId="318"/>
+            <ac:grpSpMk id="50" creationId="{D57CAE1F-4C69-E55E-DD88-2C06EA9E4CC5}"/>
+          </ac:grpSpMkLst>
+        </pc:grpChg>
+        <pc:grpChg chg="mod">
+          <ac:chgData name="Tiago Janela" userId="ee1a79fe-c79c-4f34-9602-7f6f2f0482b3" providerId="ADAL" clId="{D59BA079-2D81-42B2-9E2D-198C5F90099E}" dt="2026-04-29T14:41:05.450" v="44"/>
+          <ac:grpSpMkLst>
+            <pc:docMk/>
+            <pc:sldMk cId="3463339464" sldId="318"/>
+            <ac:grpSpMk id="52" creationId="{64D5765C-B2EC-B5F9-4D64-418DF9E0721F}"/>
+          </ac:grpSpMkLst>
+        </pc:grpChg>
+        <pc:grpChg chg="mod">
+          <ac:chgData name="Tiago Janela" userId="ee1a79fe-c79c-4f34-9602-7f6f2f0482b3" providerId="ADAL" clId="{D59BA079-2D81-42B2-9E2D-198C5F90099E}" dt="2026-04-29T14:41:05.450" v="44"/>
+          <ac:grpSpMkLst>
+            <pc:docMk/>
+            <pc:sldMk cId="3463339464" sldId="318"/>
+            <ac:grpSpMk id="57" creationId="{91F3A9FD-192C-B5F3-BAD0-3527115F76D0}"/>
+          </ac:grpSpMkLst>
+        </pc:grpChg>
+        <pc:grpChg chg="mod">
+          <ac:chgData name="Tiago Janela" userId="ee1a79fe-c79c-4f34-9602-7f6f2f0482b3" providerId="ADAL" clId="{D59BA079-2D81-42B2-9E2D-198C5F90099E}" dt="2026-04-29T14:41:05.450" v="44"/>
+          <ac:grpSpMkLst>
+            <pc:docMk/>
+            <pc:sldMk cId="3463339464" sldId="318"/>
+            <ac:grpSpMk id="58" creationId="{FAFFF705-7A29-74F1-4F40-839BF442E1CA}"/>
+          </ac:grpSpMkLst>
+        </pc:grpChg>
+        <pc:grpChg chg="add del mod">
+          <ac:chgData name="Tiago Janela" userId="ee1a79fe-c79c-4f34-9602-7f6f2f0482b3" providerId="ADAL" clId="{D59BA079-2D81-42B2-9E2D-198C5F90099E}" dt="2026-04-29T14:42:06.188" v="132" actId="478"/>
+          <ac:grpSpMkLst>
+            <pc:docMk/>
+            <pc:sldMk cId="3463339464" sldId="318"/>
+            <ac:grpSpMk id="132" creationId="{7D679A1A-9811-6F80-6988-A652D18905E3}"/>
+          </ac:grpSpMkLst>
+        </pc:grpChg>
+        <pc:grpChg chg="mod">
+          <ac:chgData name="Tiago Janela" userId="ee1a79fe-c79c-4f34-9602-7f6f2f0482b3" providerId="ADAL" clId="{D59BA079-2D81-42B2-9E2D-198C5F90099E}" dt="2026-04-29T14:41:35.971" v="129"/>
+          <ac:grpSpMkLst>
+            <pc:docMk/>
+            <pc:sldMk cId="3463339464" sldId="318"/>
+            <ac:grpSpMk id="134" creationId="{51B65499-5373-FCE8-2856-3910277BE174}"/>
+          </ac:grpSpMkLst>
+        </pc:grpChg>
+        <pc:grpChg chg="mod">
+          <ac:chgData name="Tiago Janela" userId="ee1a79fe-c79c-4f34-9602-7f6f2f0482b3" providerId="ADAL" clId="{D59BA079-2D81-42B2-9E2D-198C5F90099E}" dt="2026-04-29T14:41:35.971" v="129"/>
+          <ac:grpSpMkLst>
+            <pc:docMk/>
+            <pc:sldMk cId="3463339464" sldId="318"/>
+            <ac:grpSpMk id="139" creationId="{191878A7-B36A-37F2-B0BF-A4620279843D}"/>
+          </ac:grpSpMkLst>
+        </pc:grpChg>
+        <pc:grpChg chg="mod">
+          <ac:chgData name="Tiago Janela" userId="ee1a79fe-c79c-4f34-9602-7f6f2f0482b3" providerId="ADAL" clId="{D59BA079-2D81-42B2-9E2D-198C5F90099E}" dt="2026-04-29T14:41:35.971" v="129"/>
+          <ac:grpSpMkLst>
+            <pc:docMk/>
+            <pc:sldMk cId="3463339464" sldId="318"/>
+            <ac:grpSpMk id="140" creationId="{D9AD3D22-66A3-A6A1-5BAB-BDEA94034AFD}"/>
+          </ac:grpSpMkLst>
+        </pc:grpChg>
+        <pc:grpChg chg="add del mod ord">
+          <ac:chgData name="Tiago Janela" userId="ee1a79fe-c79c-4f34-9602-7f6f2f0482b3" providerId="ADAL" clId="{D59BA079-2D81-42B2-9E2D-198C5F90099E}" dt="2026-04-29T14:43:51.811" v="155" actId="478"/>
+          <ac:grpSpMkLst>
+            <pc:docMk/>
+            <pc:sldMk cId="3463339464" sldId="318"/>
+            <ac:grpSpMk id="150" creationId="{0E889340-EEAD-529D-0667-5EC3D102D360}"/>
+          </ac:grpSpMkLst>
+        </pc:grpChg>
+        <pc:grpChg chg="mod">
+          <ac:chgData name="Tiago Janela" userId="ee1a79fe-c79c-4f34-9602-7f6f2f0482b3" providerId="ADAL" clId="{D59BA079-2D81-42B2-9E2D-198C5F90099E}" dt="2026-04-29T14:43:18.457" v="144"/>
+          <ac:grpSpMkLst>
+            <pc:docMk/>
+            <pc:sldMk cId="3463339464" sldId="318"/>
+            <ac:grpSpMk id="152" creationId="{0C8C51CC-EB9B-D489-F562-F672BF7EA67F}"/>
+          </ac:grpSpMkLst>
+        </pc:grpChg>
+        <pc:grpChg chg="mod">
+          <ac:chgData name="Tiago Janela" userId="ee1a79fe-c79c-4f34-9602-7f6f2f0482b3" providerId="ADAL" clId="{D59BA079-2D81-42B2-9E2D-198C5F90099E}" dt="2026-04-29T14:43:18.457" v="144"/>
+          <ac:grpSpMkLst>
+            <pc:docMk/>
+            <pc:sldMk cId="3463339464" sldId="318"/>
+            <ac:grpSpMk id="157" creationId="{6AD1BC14-680D-9A2F-3A7A-A5A523B365A3}"/>
+          </ac:grpSpMkLst>
+        </pc:grpChg>
+        <pc:grpChg chg="mod">
+          <ac:chgData name="Tiago Janela" userId="ee1a79fe-c79c-4f34-9602-7f6f2f0482b3" providerId="ADAL" clId="{D59BA079-2D81-42B2-9E2D-198C5F90099E}" dt="2026-04-29T14:43:18.457" v="144"/>
+          <ac:grpSpMkLst>
+            <pc:docMk/>
+            <pc:sldMk cId="3463339464" sldId="318"/>
+            <ac:grpSpMk id="158" creationId="{9FB94B2B-B250-2B0F-D8EA-4B7606C3EDD4}"/>
+          </ac:grpSpMkLst>
+        </pc:grpChg>
+        <pc:picChg chg="mod">
+          <ac:chgData name="Tiago Janela" userId="ee1a79fe-c79c-4f34-9602-7f6f2f0482b3" providerId="ADAL" clId="{D59BA079-2D81-42B2-9E2D-198C5F90099E}" dt="2026-04-29T14:39:06.477" v="20"/>
+          <ac:picMkLst>
+            <pc:docMk/>
+            <pc:sldMk cId="3463339464" sldId="318"/>
+            <ac:picMk id="23" creationId="{0FAB87FB-66B8-682E-AC05-EA6B56D8F4FB}"/>
+          </ac:picMkLst>
+        </pc:picChg>
+        <pc:picChg chg="mod">
+          <ac:chgData name="Tiago Janela" userId="ee1a79fe-c79c-4f34-9602-7f6f2f0482b3" providerId="ADAL" clId="{D59BA079-2D81-42B2-9E2D-198C5F90099E}" dt="2026-04-29T14:39:06.477" v="20"/>
+          <ac:picMkLst>
+            <pc:docMk/>
+            <pc:sldMk cId="3463339464" sldId="318"/>
+            <ac:picMk id="24" creationId="{5AFB6878-0F86-C45A-E83E-50BAC05BCEF5}"/>
+          </ac:picMkLst>
+        </pc:picChg>
+        <pc:picChg chg="mod">
+          <ac:chgData name="Tiago Janela" userId="ee1a79fe-c79c-4f34-9602-7f6f2f0482b3" providerId="ADAL" clId="{D59BA079-2D81-42B2-9E2D-198C5F90099E}" dt="2026-04-29T14:39:06.477" v="20"/>
+          <ac:picMkLst>
+            <pc:docMk/>
+            <pc:sldMk cId="3463339464" sldId="318"/>
+            <ac:picMk id="30" creationId="{31CDC5D0-80F4-CF34-180C-1E2C5181119A}"/>
+          </ac:picMkLst>
+        </pc:picChg>
+        <pc:picChg chg="mod">
+          <ac:chgData name="Tiago Janela" userId="ee1a79fe-c79c-4f34-9602-7f6f2f0482b3" providerId="ADAL" clId="{D59BA079-2D81-42B2-9E2D-198C5F90099E}" dt="2026-04-29T14:39:06.477" v="20"/>
+          <ac:picMkLst>
+            <pc:docMk/>
+            <pc:sldMk cId="3463339464" sldId="318"/>
+            <ac:picMk id="31" creationId="{CA091874-25E2-30DF-B764-40BAC98019C4}"/>
+          </ac:picMkLst>
+        </pc:picChg>
+        <pc:picChg chg="mod">
+          <ac:chgData name="Tiago Janela" userId="ee1a79fe-c79c-4f34-9602-7f6f2f0482b3" providerId="ADAL" clId="{D59BA079-2D81-42B2-9E2D-198C5F90099E}" dt="2026-04-29T14:39:06.477" v="20"/>
+          <ac:picMkLst>
+            <pc:docMk/>
+            <pc:sldMk cId="3463339464" sldId="318"/>
+            <ac:picMk id="32" creationId="{5A34DEF1-BD9B-CD6A-A8D2-7AFC0C5C49C9}"/>
+          </ac:picMkLst>
+        </pc:picChg>
+        <pc:picChg chg="mod">
+          <ac:chgData name="Tiago Janela" userId="ee1a79fe-c79c-4f34-9602-7f6f2f0482b3" providerId="ADAL" clId="{D59BA079-2D81-42B2-9E2D-198C5F90099E}" dt="2026-04-29T14:39:06.477" v="20"/>
+          <ac:picMkLst>
+            <pc:docMk/>
+            <pc:sldMk cId="3463339464" sldId="318"/>
+            <ac:picMk id="33" creationId="{C3C561D4-D6EB-0889-183B-97DE0B45487D}"/>
+          </ac:picMkLst>
+        </pc:picChg>
+        <pc:picChg chg="mod">
+          <ac:chgData name="Tiago Janela" userId="ee1a79fe-c79c-4f34-9602-7f6f2f0482b3" providerId="ADAL" clId="{D59BA079-2D81-42B2-9E2D-198C5F90099E}" dt="2026-04-29T14:39:06.477" v="20"/>
+          <ac:picMkLst>
+            <pc:docMk/>
+            <pc:sldMk cId="3463339464" sldId="318"/>
+            <ac:picMk id="38" creationId="{48ACB3B0-1845-ABC3-5228-376A5949FA79}"/>
+          </ac:picMkLst>
+        </pc:picChg>
+        <pc:picChg chg="mod">
+          <ac:chgData name="Tiago Janela" userId="ee1a79fe-c79c-4f34-9602-7f6f2f0482b3" providerId="ADAL" clId="{D59BA079-2D81-42B2-9E2D-198C5F90099E}" dt="2026-04-29T14:39:06.477" v="20"/>
+          <ac:picMkLst>
+            <pc:docMk/>
+            <pc:sldMk cId="3463339464" sldId="318"/>
+            <ac:picMk id="39" creationId="{5D7062A3-FA42-FF24-FF7D-4729F61DD8A5}"/>
+          </ac:picMkLst>
+        </pc:picChg>
+        <pc:picChg chg="mod">
+          <ac:chgData name="Tiago Janela" userId="ee1a79fe-c79c-4f34-9602-7f6f2f0482b3" providerId="ADAL" clId="{D59BA079-2D81-42B2-9E2D-198C5F90099E}" dt="2026-04-29T14:39:06.477" v="20"/>
+          <ac:picMkLst>
+            <pc:docMk/>
+            <pc:sldMk cId="3463339464" sldId="318"/>
+            <ac:picMk id="40" creationId="{13934202-8C49-5877-EAF5-D53028B5669E}"/>
+          </ac:picMkLst>
+        </pc:picChg>
+        <pc:picChg chg="mod">
+          <ac:chgData name="Tiago Janela" userId="ee1a79fe-c79c-4f34-9602-7f6f2f0482b3" providerId="ADAL" clId="{D59BA079-2D81-42B2-9E2D-198C5F90099E}" dt="2026-04-29T14:39:06.477" v="20"/>
+          <ac:picMkLst>
+            <pc:docMk/>
+            <pc:sldMk cId="3463339464" sldId="318"/>
+            <ac:picMk id="41" creationId="{14AFA39F-495B-AE1F-EE0F-FC1A7BA10F05}"/>
+          </ac:picMkLst>
+        </pc:picChg>
+        <pc:picChg chg="mod">
+          <ac:chgData name="Tiago Janela" userId="ee1a79fe-c79c-4f34-9602-7f6f2f0482b3" providerId="ADAL" clId="{D59BA079-2D81-42B2-9E2D-198C5F90099E}" dt="2026-04-29T14:41:05.450" v="44"/>
+          <ac:picMkLst>
+            <pc:docMk/>
+            <pc:sldMk cId="3463339464" sldId="318"/>
+            <ac:picMk id="59" creationId="{A7C8E1B6-A4B3-0BCF-4C26-6186EF9F59FC}"/>
+          </ac:picMkLst>
+        </pc:picChg>
+        <pc:picChg chg="mod">
+          <ac:chgData name="Tiago Janela" userId="ee1a79fe-c79c-4f34-9602-7f6f2f0482b3" providerId="ADAL" clId="{D59BA079-2D81-42B2-9E2D-198C5F90099E}" dt="2026-04-29T14:41:05.450" v="44"/>
+          <ac:picMkLst>
+            <pc:docMk/>
+            <pc:sldMk cId="3463339464" sldId="318"/>
+            <ac:picMk id="60" creationId="{9F70AD18-D8E1-8976-31FE-EA304180A270}"/>
+          </ac:picMkLst>
+        </pc:picChg>
+        <pc:picChg chg="mod">
+          <ac:chgData name="Tiago Janela" userId="ee1a79fe-c79c-4f34-9602-7f6f2f0482b3" providerId="ADAL" clId="{D59BA079-2D81-42B2-9E2D-198C5F90099E}" dt="2026-04-29T14:41:05.450" v="44"/>
+          <ac:picMkLst>
+            <pc:docMk/>
+            <pc:sldMk cId="3463339464" sldId="318"/>
+            <ac:picMk id="130" creationId="{8EC36DA4-D2FA-908D-744E-6BE08EC2741F}"/>
+          </ac:picMkLst>
+        </pc:picChg>
+        <pc:picChg chg="mod">
+          <ac:chgData name="Tiago Janela" userId="ee1a79fe-c79c-4f34-9602-7f6f2f0482b3" providerId="ADAL" clId="{D59BA079-2D81-42B2-9E2D-198C5F90099E}" dt="2026-04-29T14:41:05.450" v="44"/>
+          <ac:picMkLst>
+            <pc:docMk/>
+            <pc:sldMk cId="3463339464" sldId="318"/>
+            <ac:picMk id="131" creationId="{47FB0CB4-CD0C-2991-DB50-A8C57D1E8B0C}"/>
+          </ac:picMkLst>
+        </pc:picChg>
+        <pc:picChg chg="mod">
+          <ac:chgData name="Tiago Janela" userId="ee1a79fe-c79c-4f34-9602-7f6f2f0482b3" providerId="ADAL" clId="{D59BA079-2D81-42B2-9E2D-198C5F90099E}" dt="2026-04-29T14:41:35.971" v="129"/>
+          <ac:picMkLst>
+            <pc:docMk/>
+            <pc:sldMk cId="3463339464" sldId="318"/>
+            <ac:picMk id="141" creationId="{F4EFBF1D-95ED-A3F4-12D0-3C0D2F64959A}"/>
+          </ac:picMkLst>
+        </pc:picChg>
+        <pc:picChg chg="mod">
+          <ac:chgData name="Tiago Janela" userId="ee1a79fe-c79c-4f34-9602-7f6f2f0482b3" providerId="ADAL" clId="{D59BA079-2D81-42B2-9E2D-198C5F90099E}" dt="2026-04-29T14:41:35.971" v="129"/>
+          <ac:picMkLst>
+            <pc:docMk/>
+            <pc:sldMk cId="3463339464" sldId="318"/>
+            <ac:picMk id="142" creationId="{6B9ADBB7-EC72-A5FB-3287-F4C504614D51}"/>
+          </ac:picMkLst>
+        </pc:picChg>
+        <pc:picChg chg="mod">
+          <ac:chgData name="Tiago Janela" userId="ee1a79fe-c79c-4f34-9602-7f6f2f0482b3" providerId="ADAL" clId="{D59BA079-2D81-42B2-9E2D-198C5F90099E}" dt="2026-04-29T14:41:35.971" v="129"/>
+          <ac:picMkLst>
+            <pc:docMk/>
+            <pc:sldMk cId="3463339464" sldId="318"/>
+            <ac:picMk id="148" creationId="{8D6D62EA-8483-E0E7-6627-BBF48FE888C3}"/>
+          </ac:picMkLst>
+        </pc:picChg>
+        <pc:picChg chg="mod">
+          <ac:chgData name="Tiago Janela" userId="ee1a79fe-c79c-4f34-9602-7f6f2f0482b3" providerId="ADAL" clId="{D59BA079-2D81-42B2-9E2D-198C5F90099E}" dt="2026-04-29T14:41:35.971" v="129"/>
+          <ac:picMkLst>
+            <pc:docMk/>
+            <pc:sldMk cId="3463339464" sldId="318"/>
+            <ac:picMk id="149" creationId="{A4CD2FF9-44D8-CCD7-5C68-26A6C6065822}"/>
+          </ac:picMkLst>
+        </pc:picChg>
+        <pc:picChg chg="mod">
+          <ac:chgData name="Tiago Janela" userId="ee1a79fe-c79c-4f34-9602-7f6f2f0482b3" providerId="ADAL" clId="{D59BA079-2D81-42B2-9E2D-198C5F90099E}" dt="2026-04-29T14:43:18.457" v="144"/>
+          <ac:picMkLst>
+            <pc:docMk/>
+            <pc:sldMk cId="3463339464" sldId="318"/>
+            <ac:picMk id="159" creationId="{CD4358F0-D05E-D3C3-BA5B-D932178076D9}"/>
+          </ac:picMkLst>
+        </pc:picChg>
+        <pc:picChg chg="mod">
+          <ac:chgData name="Tiago Janela" userId="ee1a79fe-c79c-4f34-9602-7f6f2f0482b3" providerId="ADAL" clId="{D59BA079-2D81-42B2-9E2D-198C5F90099E}" dt="2026-04-29T14:43:18.457" v="144"/>
+          <ac:picMkLst>
+            <pc:docMk/>
+            <pc:sldMk cId="3463339464" sldId="318"/>
+            <ac:picMk id="160" creationId="{73C8AF2B-2691-7122-1A4E-6C9D94961867}"/>
+          </ac:picMkLst>
+        </pc:picChg>
+        <pc:picChg chg="mod">
+          <ac:chgData name="Tiago Janela" userId="ee1a79fe-c79c-4f34-9602-7f6f2f0482b3" providerId="ADAL" clId="{D59BA079-2D81-42B2-9E2D-198C5F90099E}" dt="2026-04-29T14:43:18.457" v="144"/>
+          <ac:picMkLst>
+            <pc:docMk/>
+            <pc:sldMk cId="3463339464" sldId="318"/>
+            <ac:picMk id="167" creationId="{B02D8D15-3F25-55BC-1A08-36302AD97557}"/>
+          </ac:picMkLst>
+        </pc:picChg>
+        <pc:picChg chg="mod">
+          <ac:chgData name="Tiago Janela" userId="ee1a79fe-c79c-4f34-9602-7f6f2f0482b3" providerId="ADAL" clId="{D59BA079-2D81-42B2-9E2D-198C5F90099E}" dt="2026-04-29T14:43:18.457" v="144"/>
+          <ac:picMkLst>
+            <pc:docMk/>
+            <pc:sldMk cId="3463339464" sldId="318"/>
+            <ac:picMk id="168" creationId="{04CEB11B-B6F1-FDD0-37A8-2EE7ABE5730D}"/>
+          </ac:picMkLst>
+        </pc:picChg>
+        <pc:cxnChg chg="mod">
+          <ac:chgData name="Tiago Janela" userId="ee1a79fe-c79c-4f34-9602-7f6f2f0482b3" providerId="ADAL" clId="{D59BA079-2D81-42B2-9E2D-198C5F90099E}" dt="2026-04-29T14:39:06.477" v="20"/>
+          <ac:cxnSpMkLst>
+            <pc:docMk/>
+            <pc:sldMk cId="3463339464" sldId="318"/>
+            <ac:cxnSpMk id="44" creationId="{7CA5671C-1E1D-11B4-C48F-3C328C72BA42}"/>
+          </ac:cxnSpMkLst>
+        </pc:cxnChg>
+        <pc:cxnChg chg="mod">
+          <ac:chgData name="Tiago Janela" userId="ee1a79fe-c79c-4f34-9602-7f6f2f0482b3" providerId="ADAL" clId="{D59BA079-2D81-42B2-9E2D-198C5F90099E}" dt="2026-04-29T14:39:06.477" v="20"/>
+          <ac:cxnSpMkLst>
+            <pc:docMk/>
+            <pc:sldMk cId="3463339464" sldId="318"/>
+            <ac:cxnSpMk id="47" creationId="{FB8D1494-CCA9-D25B-F957-26E4BF3049A5}"/>
+          </ac:cxnSpMkLst>
+        </pc:cxnChg>
+        <pc:cxnChg chg="mod">
+          <ac:chgData name="Tiago Janela" userId="ee1a79fe-c79c-4f34-9602-7f6f2f0482b3" providerId="ADAL" clId="{D59BA079-2D81-42B2-9E2D-198C5F90099E}" dt="2026-04-29T14:41:05.450" v="44"/>
+          <ac:cxnSpMkLst>
+            <pc:docMk/>
+            <pc:sldMk cId="3463339464" sldId="318"/>
+            <ac:cxnSpMk id="61" creationId="{08938A15-2979-EEF5-6991-05431F61F7F4}"/>
+          </ac:cxnSpMkLst>
+        </pc:cxnChg>
+        <pc:cxnChg chg="mod">
+          <ac:chgData name="Tiago Janela" userId="ee1a79fe-c79c-4f34-9602-7f6f2f0482b3" providerId="ADAL" clId="{D59BA079-2D81-42B2-9E2D-198C5F90099E}" dt="2026-04-29T14:41:05.450" v="44"/>
+          <ac:cxnSpMkLst>
+            <pc:docMk/>
+            <pc:sldMk cId="3463339464" sldId="318"/>
+            <ac:cxnSpMk id="63" creationId="{023AB4D1-06EE-3BE9-021F-711AEB51150A}"/>
+          </ac:cxnSpMkLst>
+        </pc:cxnChg>
+        <pc:cxnChg chg="mod">
+          <ac:chgData name="Tiago Janela" userId="ee1a79fe-c79c-4f34-9602-7f6f2f0482b3" providerId="ADAL" clId="{D59BA079-2D81-42B2-9E2D-198C5F90099E}" dt="2026-04-29T14:41:35.971" v="129"/>
+          <ac:cxnSpMkLst>
+            <pc:docMk/>
+            <pc:sldMk cId="3463339464" sldId="318"/>
+            <ac:cxnSpMk id="143" creationId="{654790C0-C0D3-2DDF-798E-09EA80122BAE}"/>
+          </ac:cxnSpMkLst>
+        </pc:cxnChg>
+        <pc:cxnChg chg="mod">
+          <ac:chgData name="Tiago Janela" userId="ee1a79fe-c79c-4f34-9602-7f6f2f0482b3" providerId="ADAL" clId="{D59BA079-2D81-42B2-9E2D-198C5F90099E}" dt="2026-04-29T14:41:35.971" v="129"/>
+          <ac:cxnSpMkLst>
+            <pc:docMk/>
+            <pc:sldMk cId="3463339464" sldId="318"/>
+            <ac:cxnSpMk id="145" creationId="{05D2589C-68B7-FD26-BF17-001ABF5A487D}"/>
+          </ac:cxnSpMkLst>
+        </pc:cxnChg>
+        <pc:cxnChg chg="mod">
+          <ac:chgData name="Tiago Janela" userId="ee1a79fe-c79c-4f34-9602-7f6f2f0482b3" providerId="ADAL" clId="{D59BA079-2D81-42B2-9E2D-198C5F90099E}" dt="2026-04-29T14:43:18.457" v="144"/>
+          <ac:cxnSpMkLst>
+            <pc:docMk/>
+            <pc:sldMk cId="3463339464" sldId="318"/>
+            <ac:cxnSpMk id="161" creationId="{718FF3FF-38E3-8534-3375-DE97E2E87C02}"/>
+          </ac:cxnSpMkLst>
+        </pc:cxnChg>
+        <pc:cxnChg chg="mod">
+          <ac:chgData name="Tiago Janela" userId="ee1a79fe-c79c-4f34-9602-7f6f2f0482b3" providerId="ADAL" clId="{D59BA079-2D81-42B2-9E2D-198C5F90099E}" dt="2026-04-29T14:43:18.457" v="144"/>
+          <ac:cxnSpMkLst>
+            <pc:docMk/>
+            <pc:sldMk cId="3463339464" sldId="318"/>
+            <ac:cxnSpMk id="164" creationId="{55BB8492-C6E7-A17E-F1E3-D4F852B87E2E}"/>
+          </ac:cxnSpMkLst>
+        </pc:cxnChg>
+      </pc:sldChg>
+    </pc:docChg>
+  </pc:docChgLst>
+  <pc:docChgLst>
     <pc:chgData name="Tiago Janela" userId="ee1a79fe-c79c-4f34-9602-7f6f2f0482b3" providerId="ADAL" clId="{A1A622BE-A8AD-47B7-8802-BAC61BCE5126}"/>
     <pc:docChg chg="undo custSel modSld">
       <pc:chgData name="Tiago Janela" userId="ee1a79fe-c79c-4f34-9602-7f6f2f0482b3" providerId="ADAL" clId="{A1A622BE-A8AD-47B7-8802-BAC61BCE5126}" dt="2026-04-02T12:40:40.607" v="50" actId="478"/>
@@ -299,6 +1642,45 @@
             <ac:graphicFrameMk id="4" creationId="{689F2044-8E26-DCF5-DE2D-9AD979C8C1EE}"/>
           </ac:graphicFrameMkLst>
         </pc:graphicFrameChg>
+      </pc:sldChg>
+    </pc:docChg>
+  </pc:docChgLst>
+  <pc:docChgLst>
+    <pc:chgData name="Tiago Janela" userId="ee1a79fe-c79c-4f34-9602-7f6f2f0482b3" providerId="ADAL" clId="{67D2C233-DF3C-4C6D-9040-D7553E3BCB8A}"/>
+    <pc:docChg chg="delSld modSld">
+      <pc:chgData name="Tiago Janela" userId="ee1a79fe-c79c-4f34-9602-7f6f2f0482b3" providerId="ADAL" clId="{67D2C233-DF3C-4C6D-9040-D7553E3BCB8A}" dt="2026-03-16T14:03:02.466" v="54" actId="20577"/>
+      <pc:docMkLst>
+        <pc:docMk/>
+      </pc:docMkLst>
+      <pc:sldChg chg="modSp mod">
+        <pc:chgData name="Tiago Janela" userId="ee1a79fe-c79c-4f34-9602-7f6f2f0482b3" providerId="ADAL" clId="{67D2C233-DF3C-4C6D-9040-D7553E3BCB8A}" dt="2026-03-16T14:03:02.466" v="54" actId="20577"/>
+        <pc:sldMkLst>
+          <pc:docMk/>
+          <pc:sldMk cId="829672710" sldId="297"/>
+        </pc:sldMkLst>
+        <pc:spChg chg="mod">
+          <ac:chgData name="Tiago Janela" userId="ee1a79fe-c79c-4f34-9602-7f6f2f0482b3" providerId="ADAL" clId="{67D2C233-DF3C-4C6D-9040-D7553E3BCB8A}" dt="2026-03-16T14:03:02.466" v="54" actId="20577"/>
+          <ac:spMkLst>
+            <pc:docMk/>
+            <pc:sldMk cId="829672710" sldId="297"/>
+            <ac:spMk id="156" creationId="{00000000-0000-0000-0000-000000000000}"/>
+          </ac:spMkLst>
+        </pc:spChg>
+      </pc:sldChg>
+      <pc:sldChg chg="modSp mod">
+        <pc:chgData name="Tiago Janela" userId="ee1a79fe-c79c-4f34-9602-7f6f2f0482b3" providerId="ADAL" clId="{67D2C233-DF3C-4C6D-9040-D7553E3BCB8A}" dt="2026-03-16T14:02:34.148" v="0" actId="20577"/>
+        <pc:sldMkLst>
+          <pc:docMk/>
+          <pc:sldMk cId="721732568" sldId="298"/>
+        </pc:sldMkLst>
+        <pc:spChg chg="mod">
+          <ac:chgData name="Tiago Janela" userId="ee1a79fe-c79c-4f34-9602-7f6f2f0482b3" providerId="ADAL" clId="{67D2C233-DF3C-4C6D-9040-D7553E3BCB8A}" dt="2026-03-16T14:02:34.148" v="0" actId="20577"/>
+          <ac:spMkLst>
+            <pc:docMk/>
+            <pc:sldMk cId="721732568" sldId="298"/>
+            <ac:spMk id="2" creationId="{870990D0-7AC5-46BA-6FC4-274F8E0A3ABE}"/>
+          </ac:spMkLst>
+        </pc:spChg>
       </pc:sldChg>
     </pc:docChg>
   </pc:docChgLst>
@@ -836,7 +2218,7 @@
     </p:spTree>
     <p:extLst>
       <p:ext uri="{BB962C8B-B14F-4D97-AF65-F5344CB8AC3E}">
-        <p14:creationId xmlns:p14="http://schemas.microsoft.com/office/powerpoint/2010/main" val="2203819319"/>
+        <p14:creationId xmlns:p14="http://schemas.microsoft.com/office/powerpoint/2010/main" val="1621614894"/>
       </p:ext>
     </p:extLst>
   </p:cSld>
@@ -912,6 +2294,174 @@
             <a:fld id="{90EBC085-3709-4EED-9401-54C6FC7AFFB6}" type="slidenum">
               <a:rPr lang="en-US" smtClean="0"/>
               <a:t>9</a:t>
+            </a:fld>
+            <a:endParaRPr lang="en-US"/>
+          </a:p>
+        </p:txBody>
+      </p:sp>
+    </p:spTree>
+    <p:extLst>
+      <p:ext uri="{BB962C8B-B14F-4D97-AF65-F5344CB8AC3E}">
+        <p14:creationId xmlns:p14="http://schemas.microsoft.com/office/powerpoint/2010/main" val="1896034854"/>
+      </p:ext>
+    </p:extLst>
+  </p:cSld>
+  <p:clrMapOvr>
+    <a:masterClrMapping/>
+  </p:clrMapOvr>
+</p:notes>
+</file>
+
+<file path=ppt/notesSlides/notesSlide4.xml><?xml version="1.0" encoding="utf-8"?>
+<p:notes xmlns:a="http://schemas.openxmlformats.org/drawingml/2006/main" xmlns:r="http://schemas.openxmlformats.org/officeDocument/2006/relationships" xmlns:p="http://schemas.openxmlformats.org/presentationml/2006/main">
+  <p:cSld>
+    <p:spTree>
+      <p:nvGrpSpPr>
+        <p:cNvPr id="1" name=""/>
+        <p:cNvGrpSpPr/>
+        <p:nvPr/>
+      </p:nvGrpSpPr>
+      <p:grpSpPr>
+        <a:xfrm>
+          <a:off x="0" y="0"/>
+          <a:ext cx="0" cy="0"/>
+          <a:chOff x="0" y="0"/>
+          <a:chExt cx="0" cy="0"/>
+        </a:xfrm>
+      </p:grpSpPr>
+      <p:sp>
+        <p:nvSpPr>
+          <p:cNvPr id="2" name="Slide Image Placeholder 1"/>
+          <p:cNvSpPr>
+            <a:spLocks noGrp="1" noRot="1" noChangeAspect="1"/>
+          </p:cNvSpPr>
+          <p:nvPr>
+            <p:ph type="sldImg"/>
+          </p:nvPr>
+        </p:nvSpPr>
+        <p:spPr/>
+      </p:sp>
+      <p:sp>
+        <p:nvSpPr>
+          <p:cNvPr id="3" name="Notes Placeholder 2"/>
+          <p:cNvSpPr>
+            <a:spLocks noGrp="1"/>
+          </p:cNvSpPr>
+          <p:nvPr>
+            <p:ph type="body" idx="1"/>
+          </p:nvPr>
+        </p:nvSpPr>
+        <p:spPr/>
+        <p:txBody>
+          <a:bodyPr/>
+          <a:lstStyle/>
+          <a:p>
+            <a:endParaRPr lang="en-US" dirty="0"/>
+          </a:p>
+        </p:txBody>
+      </p:sp>
+      <p:sp>
+        <p:nvSpPr>
+          <p:cNvPr id="4" name="Slide Number Placeholder 3"/>
+          <p:cNvSpPr>
+            <a:spLocks noGrp="1"/>
+          </p:cNvSpPr>
+          <p:nvPr>
+            <p:ph type="sldNum" sz="quarter" idx="5"/>
+          </p:nvPr>
+        </p:nvSpPr>
+        <p:spPr/>
+        <p:txBody>
+          <a:bodyPr/>
+          <a:lstStyle/>
+          <a:p>
+            <a:fld id="{90EBC085-3709-4EED-9401-54C6FC7AFFB6}" type="slidenum">
+              <a:rPr lang="en-US" smtClean="0"/>
+              <a:t>10</a:t>
+            </a:fld>
+            <a:endParaRPr lang="en-US"/>
+          </a:p>
+        </p:txBody>
+      </p:sp>
+    </p:spTree>
+    <p:extLst>
+      <p:ext uri="{BB962C8B-B14F-4D97-AF65-F5344CB8AC3E}">
+        <p14:creationId xmlns:p14="http://schemas.microsoft.com/office/powerpoint/2010/main" val="2203819319"/>
+      </p:ext>
+    </p:extLst>
+  </p:cSld>
+  <p:clrMapOvr>
+    <a:masterClrMapping/>
+  </p:clrMapOvr>
+</p:notes>
+</file>
+
+<file path=ppt/notesSlides/notesSlide5.xml><?xml version="1.0" encoding="utf-8"?>
+<p:notes xmlns:a="http://schemas.openxmlformats.org/drawingml/2006/main" xmlns:r="http://schemas.openxmlformats.org/officeDocument/2006/relationships" xmlns:p="http://schemas.openxmlformats.org/presentationml/2006/main">
+  <p:cSld>
+    <p:spTree>
+      <p:nvGrpSpPr>
+        <p:cNvPr id="1" name=""/>
+        <p:cNvGrpSpPr/>
+        <p:nvPr/>
+      </p:nvGrpSpPr>
+      <p:grpSpPr>
+        <a:xfrm>
+          <a:off x="0" y="0"/>
+          <a:ext cx="0" cy="0"/>
+          <a:chOff x="0" y="0"/>
+          <a:chExt cx="0" cy="0"/>
+        </a:xfrm>
+      </p:grpSpPr>
+      <p:sp>
+        <p:nvSpPr>
+          <p:cNvPr id="2" name="Slide Image Placeholder 1"/>
+          <p:cNvSpPr>
+            <a:spLocks noGrp="1" noRot="1" noChangeAspect="1"/>
+          </p:cNvSpPr>
+          <p:nvPr>
+            <p:ph type="sldImg"/>
+          </p:nvPr>
+        </p:nvSpPr>
+        <p:spPr/>
+      </p:sp>
+      <p:sp>
+        <p:nvSpPr>
+          <p:cNvPr id="3" name="Notes Placeholder 2"/>
+          <p:cNvSpPr>
+            <a:spLocks noGrp="1"/>
+          </p:cNvSpPr>
+          <p:nvPr>
+            <p:ph type="body" idx="1"/>
+          </p:nvPr>
+        </p:nvSpPr>
+        <p:spPr/>
+        <p:txBody>
+          <a:bodyPr/>
+          <a:lstStyle/>
+          <a:p>
+            <a:endParaRPr lang="en-US" dirty="0"/>
+          </a:p>
+        </p:txBody>
+      </p:sp>
+      <p:sp>
+        <p:nvSpPr>
+          <p:cNvPr id="4" name="Slide Number Placeholder 3"/>
+          <p:cNvSpPr>
+            <a:spLocks noGrp="1"/>
+          </p:cNvSpPr>
+          <p:nvPr>
+            <p:ph type="sldNum" sz="quarter" idx="5"/>
+          </p:nvPr>
+        </p:nvSpPr>
+        <p:spPr/>
+        <p:txBody>
+          <a:bodyPr/>
+          <a:lstStyle/>
+          <a:p>
+            <a:fld id="{90EBC085-3709-4EED-9401-54C6FC7AFFB6}" type="slidenum">
+              <a:rPr lang="en-US" smtClean="0"/>
+              <a:t>11</a:t>
             </a:fld>
             <a:endParaRPr lang="en-US"/>
           </a:p>
@@ -9957,6 +11507,256 @@
 </file>
 
 <file path=ppt/slides/slide10.xml><?xml version="1.0" encoding="utf-8"?>
+<p:sld xmlns:a="http://schemas.openxmlformats.org/drawingml/2006/main" xmlns:r="http://schemas.openxmlformats.org/officeDocument/2006/relationships" xmlns:p="http://schemas.openxmlformats.org/presentationml/2006/main" show="0">
+  <p:cSld>
+    <p:spTree>
+      <p:nvGrpSpPr>
+        <p:cNvPr id="1" name="">
+          <a:extLst>
+            <a:ext uri="{FF2B5EF4-FFF2-40B4-BE49-F238E27FC236}">
+              <a16:creationId xmlns:a16="http://schemas.microsoft.com/office/drawing/2014/main" id="{A6515F23-0912-A838-23CE-B8F00573A2DA}"/>
+            </a:ext>
+          </a:extLst>
+        </p:cNvPr>
+        <p:cNvGrpSpPr/>
+        <p:nvPr/>
+      </p:nvGrpSpPr>
+      <p:grpSpPr>
+        <a:xfrm>
+          <a:off x="0" y="0"/>
+          <a:ext cx="0" cy="0"/>
+          <a:chOff x="0" y="0"/>
+          <a:chExt cx="0" cy="0"/>
+        </a:xfrm>
+      </p:grpSpPr>
+      <p:sp>
+        <p:nvSpPr>
+          <p:cNvPr id="163" name="PlaceHolder 1">
+            <a:extLst>
+              <a:ext uri="{FF2B5EF4-FFF2-40B4-BE49-F238E27FC236}">
+                <a16:creationId xmlns:a16="http://schemas.microsoft.com/office/drawing/2014/main" id="{57944F4B-F502-E7CC-8790-8737702BC6AC}"/>
+              </a:ext>
+            </a:extLst>
+          </p:cNvPr>
+          <p:cNvSpPr>
+            <a:spLocks noGrp="1"/>
+          </p:cNvSpPr>
+          <p:nvPr>
+            <p:ph type="title"/>
+          </p:nvPr>
+        </p:nvSpPr>
+        <p:spPr>
+          <a:xfrm>
+            <a:off x="380880" y="228600"/>
+            <a:ext cx="8380080" cy="837720"/>
+          </a:xfrm>
+          <a:prstGeom prst="rect">
+            <a:avLst/>
+          </a:prstGeom>
+          <a:noFill/>
+          <a:ln w="0">
+            <a:noFill/>
+          </a:ln>
+        </p:spPr>
+        <p:txBody>
+          <a:bodyPr numCol="1" spcCol="0" anchor="ctr">
+            <a:noAutofit/>
+          </a:bodyPr>
+          <a:lstStyle/>
+          <a:p>
+            <a:pPr>
+              <a:lnSpc>
+                <a:spcPct val="100000"/>
+              </a:lnSpc>
+              <a:buNone/>
+            </a:pPr>
+            <a:r>
+              <a:rPr lang="en-US" sz="3200" b="0" strike="noStrike" spc="-1" dirty="0">
+                <a:solidFill>
+                  <a:srgbClr val="0064C8"/>
+                </a:solidFill>
+                <a:latin typeface="Century Gothic"/>
+              </a:rPr>
+              <a:t>Prompt 2</a:t>
+            </a:r>
+            <a:endParaRPr lang="en-US" sz="3200" b="0" strike="noStrike" spc="-1" dirty="0">
+              <a:solidFill>
+                <a:srgbClr val="000000"/>
+              </a:solidFill>
+              <a:latin typeface="Century Gothic"/>
+            </a:endParaRPr>
+          </a:p>
+        </p:txBody>
+      </p:sp>
+      <p:pic>
+        <p:nvPicPr>
+          <p:cNvPr id="12" name="Picture 11">
+            <a:extLst>
+              <a:ext uri="{FF2B5EF4-FFF2-40B4-BE49-F238E27FC236}">
+                <a16:creationId xmlns:a16="http://schemas.microsoft.com/office/drawing/2014/main" id="{E40230FB-91FB-0DC9-7BD8-1BE8E2E79A66}"/>
+              </a:ext>
+            </a:extLst>
+          </p:cNvPr>
+          <p:cNvPicPr>
+            <a:picLocks noChangeAspect="1"/>
+          </p:cNvPicPr>
+          <p:nvPr/>
+        </p:nvPicPr>
+        <p:blipFill>
+          <a:blip r:embed="rId3"/>
+          <a:stretch>
+            <a:fillRect/>
+          </a:stretch>
+        </p:blipFill>
+        <p:spPr>
+          <a:xfrm>
+            <a:off x="380880" y="1192696"/>
+            <a:ext cx="8177259" cy="4495156"/>
+          </a:xfrm>
+          <a:prstGeom prst="rect">
+            <a:avLst/>
+          </a:prstGeom>
+        </p:spPr>
+      </p:pic>
+    </p:spTree>
+    <p:extLst>
+      <p:ext uri="{BB962C8B-B14F-4D97-AF65-F5344CB8AC3E}">
+        <p14:creationId xmlns:p14="http://schemas.microsoft.com/office/powerpoint/2010/main" val="497639913"/>
+      </p:ext>
+    </p:extLst>
+  </p:cSld>
+  <p:clrMapOvr>
+    <a:masterClrMapping/>
+  </p:clrMapOvr>
+</p:sld>
+</file>
+
+<file path=ppt/slides/slide11.xml><?xml version="1.0" encoding="utf-8"?>
+<p:sld xmlns:a="http://schemas.openxmlformats.org/drawingml/2006/main" xmlns:r="http://schemas.openxmlformats.org/officeDocument/2006/relationships" xmlns:p="http://schemas.openxmlformats.org/presentationml/2006/main">
+  <p:cSld>
+    <p:spTree>
+      <p:nvGrpSpPr>
+        <p:cNvPr id="1" name="">
+          <a:extLst>
+            <a:ext uri="{FF2B5EF4-FFF2-40B4-BE49-F238E27FC236}">
+              <a16:creationId xmlns:a16="http://schemas.microsoft.com/office/drawing/2014/main" id="{A6515F23-0912-A838-23CE-B8F00573A2DA}"/>
+            </a:ext>
+          </a:extLst>
+        </p:cNvPr>
+        <p:cNvGrpSpPr/>
+        <p:nvPr/>
+      </p:nvGrpSpPr>
+      <p:grpSpPr>
+        <a:xfrm>
+          <a:off x="0" y="0"/>
+          <a:ext cx="0" cy="0"/>
+          <a:chOff x="0" y="0"/>
+          <a:chExt cx="0" cy="0"/>
+        </a:xfrm>
+      </p:grpSpPr>
+      <p:sp>
+        <p:nvSpPr>
+          <p:cNvPr id="163" name="PlaceHolder 1">
+            <a:extLst>
+              <a:ext uri="{FF2B5EF4-FFF2-40B4-BE49-F238E27FC236}">
+                <a16:creationId xmlns:a16="http://schemas.microsoft.com/office/drawing/2014/main" id="{57944F4B-F502-E7CC-8790-8737702BC6AC}"/>
+              </a:ext>
+            </a:extLst>
+          </p:cNvPr>
+          <p:cNvSpPr>
+            <a:spLocks noGrp="1"/>
+          </p:cNvSpPr>
+          <p:nvPr>
+            <p:ph type="title"/>
+          </p:nvPr>
+        </p:nvSpPr>
+        <p:spPr>
+          <a:xfrm>
+            <a:off x="380880" y="228600"/>
+            <a:ext cx="8380080" cy="837720"/>
+          </a:xfrm>
+          <a:prstGeom prst="rect">
+            <a:avLst/>
+          </a:prstGeom>
+          <a:noFill/>
+          <a:ln w="0">
+            <a:noFill/>
+          </a:ln>
+        </p:spPr>
+        <p:txBody>
+          <a:bodyPr numCol="1" spcCol="0" anchor="ctr">
+            <a:noAutofit/>
+          </a:bodyPr>
+          <a:lstStyle/>
+          <a:p>
+            <a:pPr>
+              <a:lnSpc>
+                <a:spcPct val="100000"/>
+              </a:lnSpc>
+              <a:buNone/>
+            </a:pPr>
+            <a:r>
+              <a:rPr lang="en-US" sz="3200" b="0" strike="noStrike" spc="-1" dirty="0">
+                <a:solidFill>
+                  <a:srgbClr val="0064C8"/>
+                </a:solidFill>
+                <a:latin typeface="Century Gothic"/>
+              </a:rPr>
+              <a:t>Prompt 2</a:t>
+            </a:r>
+            <a:endParaRPr lang="en-US" sz="3200" b="0" strike="noStrike" spc="-1" dirty="0">
+              <a:solidFill>
+                <a:srgbClr val="000000"/>
+              </a:solidFill>
+              <a:latin typeface="Century Gothic"/>
+            </a:endParaRPr>
+          </a:p>
+        </p:txBody>
+      </p:sp>
+      <p:pic>
+        <p:nvPicPr>
+          <p:cNvPr id="18" name="Picture 17">
+            <a:extLst>
+              <a:ext uri="{FF2B5EF4-FFF2-40B4-BE49-F238E27FC236}">
+                <a16:creationId xmlns:a16="http://schemas.microsoft.com/office/drawing/2014/main" id="{96A81ED6-143C-EB03-E019-D2947E0A8F2E}"/>
+              </a:ext>
+            </a:extLst>
+          </p:cNvPr>
+          <p:cNvPicPr>
+            <a:picLocks noChangeAspect="1"/>
+          </p:cNvPicPr>
+          <p:nvPr/>
+        </p:nvPicPr>
+        <p:blipFill>
+          <a:blip r:embed="rId3"/>
+          <a:stretch>
+            <a:fillRect/>
+          </a:stretch>
+        </p:blipFill>
+        <p:spPr>
+          <a:xfrm>
+            <a:off x="380880" y="1192696"/>
+            <a:ext cx="8169237" cy="4825788"/>
+          </a:xfrm>
+          <a:prstGeom prst="rect">
+            <a:avLst/>
+          </a:prstGeom>
+        </p:spPr>
+      </p:pic>
+    </p:spTree>
+    <p:extLst>
+      <p:ext uri="{BB962C8B-B14F-4D97-AF65-F5344CB8AC3E}">
+        <p14:creationId xmlns:p14="http://schemas.microsoft.com/office/powerpoint/2010/main" val="1027898386"/>
+      </p:ext>
+    </p:extLst>
+  </p:cSld>
+  <p:clrMapOvr>
+    <a:masterClrMapping/>
+  </p:clrMapOvr>
+</p:sld>
+</file>
+
+<file path=ppt/slides/slide12.xml><?xml version="1.0" encoding="utf-8"?>
 <p:sld xmlns:a="http://schemas.openxmlformats.org/drawingml/2006/main" xmlns:r="http://schemas.openxmlformats.org/officeDocument/2006/relationships" xmlns:p="http://schemas.openxmlformats.org/presentationml/2006/main">
   <p:cSld>
     <p:spTree>
@@ -10283,7 +12083,7 @@
 </p:sld>
 </file>
 
-<file path=ppt/slides/slide11.xml><?xml version="1.0" encoding="utf-8"?>
+<file path=ppt/slides/slide13.xml><?xml version="1.0" encoding="utf-8"?>
 <p:sld xmlns:a="http://schemas.openxmlformats.org/drawingml/2006/main" xmlns:r="http://schemas.openxmlformats.org/officeDocument/2006/relationships" xmlns:p="http://schemas.openxmlformats.org/presentationml/2006/main">
   <p:cSld>
     <p:spTree>
@@ -10413,7 +12213,7 @@
                 </a:solidFill>
                 <a:latin typeface="Century Gothic"/>
               </a:rPr>
-              <a:t>11</a:t>
+              <a:t>13</a:t>
             </a:fld>
             <a:endParaRPr lang="en-GB" sz="1200" b="0" strike="noStrike" spc="-1" dirty="0">
               <a:latin typeface="Times New Roman"/>
@@ -10843,7 +12643,7 @@
 </p:sld>
 </file>
 
-<file path=ppt/slides/slide12.xml><?xml version="1.0" encoding="utf-8"?>
+<file path=ppt/slides/slide14.xml><?xml version="1.0" encoding="utf-8"?>
 <p:sld xmlns:a="http://schemas.openxmlformats.org/drawingml/2006/main" xmlns:r="http://schemas.openxmlformats.org/officeDocument/2006/relationships" xmlns:p="http://schemas.openxmlformats.org/presentationml/2006/main">
   <p:cSld>
     <p:spTree>
@@ -10973,7 +12773,7 @@
                 </a:solidFill>
                 <a:latin typeface="Century Gothic"/>
               </a:rPr>
-              <a:t>12</a:t>
+              <a:t>14</a:t>
             </a:fld>
             <a:endParaRPr lang="en-GB" sz="1200" b="0" strike="noStrike" spc="-1" dirty="0">
               <a:latin typeface="Times New Roman"/>
@@ -11351,7 +13151,7 @@
 </p:sld>
 </file>
 
-<file path=ppt/slides/slide13.xml><?xml version="1.0" encoding="utf-8"?>
+<file path=ppt/slides/slide15.xml><?xml version="1.0" encoding="utf-8"?>
 <p:sld xmlns:a="http://schemas.openxmlformats.org/drawingml/2006/main" xmlns:r="http://schemas.openxmlformats.org/officeDocument/2006/relationships" xmlns:p="http://schemas.openxmlformats.org/presentationml/2006/main">
   <p:cSld>
     <p:spTree>
@@ -11481,7 +13281,7 @@
                 </a:solidFill>
                 <a:latin typeface="Century Gothic"/>
               </a:rPr>
-              <a:t>13</a:t>
+              <a:t>15</a:t>
             </a:fld>
             <a:endParaRPr lang="en-GB" sz="1200" b="0" strike="noStrike" spc="-1" dirty="0">
               <a:latin typeface="Times New Roman"/>
@@ -12276,10 +14076,10 @@
       </p:sp>
       <p:pic>
         <p:nvPicPr>
-          <p:cNvPr id="4" name="Picture 3">
+          <p:cNvPr id="3" name="Picture 2">
             <a:extLst>
               <a:ext uri="{FF2B5EF4-FFF2-40B4-BE49-F238E27FC236}">
-                <a16:creationId xmlns:a16="http://schemas.microsoft.com/office/drawing/2014/main" id="{A9172708-06AB-AE7A-4BC0-05B1328EE700}"/>
+                <a16:creationId xmlns:a16="http://schemas.microsoft.com/office/drawing/2014/main" id="{C525295A-47E6-DB8C-78FD-5ACC25A8B445}"/>
               </a:ext>
             </a:extLst>
           </p:cNvPr>
@@ -12301,8 +14101,8 @@
         </p:blipFill>
         <p:spPr>
           <a:xfrm>
-            <a:off x="666509" y="2127309"/>
-            <a:ext cx="7810981" cy="3354962"/>
+            <a:off x="992106" y="2982097"/>
+            <a:ext cx="7159787" cy="3075263"/>
           </a:xfrm>
           <a:prstGeom prst="rect">
             <a:avLst/>
@@ -12687,7 +14487,7 @@
                 </a:solidFill>
                 <a:latin typeface="Century Gothic"/>
               </a:rPr>
-              <a:t>Showcase the utility of Agentic AI combined with XAI:</a:t>
+              <a:t>Showcase the utility of Agentic AI combined with XAI</a:t>
             </a:r>
           </a:p>
           <a:p>
@@ -12704,9 +14504,11 @@
               <a:buClr>
                 <a:srgbClr val="0064C8"/>
               </a:buClr>
+              <a:buFont typeface="Wingdings" panose="05000000000000000000" pitchFamily="2" charset="2"/>
+              <a:buChar char="§"/>
             </a:pPr>
             <a:r>
-              <a:rPr lang="en-US" sz="2000" spc="-1" dirty="0">
+              <a:rPr lang="en-US" sz="1800" spc="-1" dirty="0">
                 <a:solidFill>
                   <a:srgbClr val="000000"/>
                 </a:solidFill>
@@ -12729,15 +14531,17 @@
               <a:buClr>
                 <a:srgbClr val="0064C8"/>
               </a:buClr>
+              <a:buFont typeface="Wingdings" panose="05000000000000000000" pitchFamily="2" charset="2"/>
+              <a:buChar char="§"/>
             </a:pPr>
             <a:r>
-              <a:rPr lang="en-US" sz="2000" spc="-1" dirty="0">
+              <a:rPr lang="en-US" sz="1800" spc="-1" dirty="0">
                 <a:solidFill>
                   <a:srgbClr val="000000"/>
                 </a:solidFill>
                 <a:latin typeface="Century Gothic"/>
               </a:rPr>
-              <a:t>Highlight where using agentic AI can be a advantage over running analysis manually</a:t>
+              <a:t>Highlight where using agentic AI can be an advantage over running analysis manually</a:t>
             </a:r>
           </a:p>
           <a:p>
@@ -15222,40 +17026,797 @@
           </a:p>
         </p:txBody>
       </p:sp>
-      <p:pic>
-        <p:nvPicPr>
-          <p:cNvPr id="12" name="Picture 11">
+      <p:grpSp>
+        <p:nvGrpSpPr>
+          <p:cNvPr id="20" name="Group 19">
             <a:extLst>
               <a:ext uri="{FF2B5EF4-FFF2-40B4-BE49-F238E27FC236}">
-                <a16:creationId xmlns:a16="http://schemas.microsoft.com/office/drawing/2014/main" id="{E40230FB-91FB-0DC9-7BD8-1BE8E2E79A66}"/>
+                <a16:creationId xmlns:a16="http://schemas.microsoft.com/office/drawing/2014/main" id="{81A65B80-1110-F1AF-A893-8B82ECA10662}"/>
               </a:ext>
             </a:extLst>
           </p:cNvPr>
-          <p:cNvPicPr>
-            <a:picLocks noChangeAspect="1"/>
-          </p:cNvPicPr>
+          <p:cNvGrpSpPr>
+            <a:grpSpLocks noChangeAspect="1"/>
+          </p:cNvGrpSpPr>
           <p:nvPr/>
-        </p:nvPicPr>
-        <p:blipFill>
-          <a:blip r:embed="rId3"/>
-          <a:stretch>
-            <a:fillRect/>
-          </a:stretch>
-        </p:blipFill>
-        <p:spPr>
+        </p:nvGrpSpPr>
+        <p:grpSpPr>
           <a:xfrm>
-            <a:off x="380880" y="1192696"/>
-            <a:ext cx="8177259" cy="4495156"/>
+            <a:off x="380879" y="1186718"/>
+            <a:ext cx="8171609" cy="4610073"/>
+            <a:chOff x="232995" y="406630"/>
+            <a:chExt cx="10956807" cy="6181362"/>
           </a:xfrm>
-          <a:prstGeom prst="rect">
-            <a:avLst/>
-          </a:prstGeom>
-        </p:spPr>
-      </p:pic>
+        </p:grpSpPr>
+        <p:sp>
+          <p:nvSpPr>
+            <p:cNvPr id="2" name="TextBox 1">
+              <a:extLst>
+                <a:ext uri="{FF2B5EF4-FFF2-40B4-BE49-F238E27FC236}">
+                  <a16:creationId xmlns:a16="http://schemas.microsoft.com/office/drawing/2014/main" id="{9803C720-5E38-494F-5EED-73C1A8624CA2}"/>
+                </a:ext>
+              </a:extLst>
+            </p:cNvPr>
+            <p:cNvSpPr txBox="1"/>
+            <p:nvPr/>
+          </p:nvSpPr>
+          <p:spPr>
+            <a:xfrm>
+              <a:off x="232995" y="4144987"/>
+              <a:ext cx="4168792" cy="2443005"/>
+            </a:xfrm>
+            <a:prstGeom prst="rect">
+              <a:avLst/>
+            </a:prstGeom>
+            <a:noFill/>
+          </p:spPr>
+          <p:txBody>
+            <a:bodyPr wrap="square">
+              <a:spAutoFit/>
+            </a:bodyPr>
+            <a:lstStyle/>
+            <a:p>
+              <a:pPr algn="just"/>
+              <a:r>
+                <a:rPr lang="en-US" sz="1400" b="1" dirty="0"/>
+                <a:t>Comparing XAI methods</a:t>
+              </a:r>
+            </a:p>
+            <a:p>
+              <a:pPr marL="171450" indent="-171450" algn="just">
+                <a:buFont typeface="Arial" panose="020B0604020202020204" pitchFamily="34" charset="0"/>
+                <a:buChar char="•"/>
+              </a:pPr>
+              <a:endParaRPr lang="en-US" sz="1200" b="1" dirty="0"/>
+            </a:p>
+            <a:p>
+              <a:pPr marL="171450" indent="-171450" algn="just">
+                <a:buFont typeface="Arial" panose="020B0604020202020204" pitchFamily="34" charset="0"/>
+                <a:buChar char="•"/>
+              </a:pPr>
+              <a:r>
+                <a:rPr lang="en-US" sz="800" b="1" dirty="0"/>
+                <a:t>Agreement: </a:t>
+              </a:r>
+              <a:r>
+                <a:rPr lang="en-US" sz="800" dirty="0"/>
+                <a:t>Both methods converge on the morpholine-like ring as the critical pharmacophore. </a:t>
+              </a:r>
+              <a:r>
+                <a:rPr lang="en-US" sz="800" dirty="0" err="1"/>
+                <a:t>MolAnchor</a:t>
+              </a:r>
+              <a:r>
+                <a:rPr lang="en-US" sz="800" dirty="0"/>
+                <a:t> identifies the ring as a cohesive unit, while SHAP confirms that the atoms comprising this ring are indeed the most influential.</a:t>
+              </a:r>
+            </a:p>
+            <a:p>
+              <a:pPr algn="just"/>
+              <a:endParaRPr lang="en-US" sz="800" dirty="0"/>
+            </a:p>
+            <a:p>
+              <a:pPr marL="171450" indent="-171450" algn="just">
+                <a:buFont typeface="Arial" panose="020B0604020202020204" pitchFamily="34" charset="0"/>
+                <a:buChar char="•"/>
+              </a:pPr>
+              <a:r>
+                <a:rPr lang="en-US" sz="800" b="1" dirty="0"/>
+                <a:t>Disagreement: </a:t>
+              </a:r>
+              <a:r>
+                <a:rPr lang="en-US" sz="800" dirty="0" err="1"/>
+                <a:t>MolAnchor</a:t>
+              </a:r>
+              <a:r>
+                <a:rPr lang="en-US" sz="800" dirty="0"/>
+                <a:t> focuses strictly on the highest-precision fragment, potentially downplaying the contribution of the aromatic substituents (benzyl/thiophene) that SHAP would assign non-zero values to. </a:t>
+              </a:r>
+              <a:r>
+                <a:rPr lang="en-US" sz="800" dirty="0" err="1"/>
+                <a:t>MolAnchor</a:t>
+              </a:r>
+              <a:r>
+                <a:rPr lang="en-US" sz="800" dirty="0"/>
+                <a:t> is more "binary" (is this fragment present?), while SHAP is more "continuous" (how much does each atom contribute?).</a:t>
+              </a:r>
+            </a:p>
+          </p:txBody>
+        </p:sp>
+        <p:grpSp>
+          <p:nvGrpSpPr>
+            <p:cNvPr id="3" name="Group 2">
+              <a:extLst>
+                <a:ext uri="{FF2B5EF4-FFF2-40B4-BE49-F238E27FC236}">
+                  <a16:creationId xmlns:a16="http://schemas.microsoft.com/office/drawing/2014/main" id="{98A01790-818B-0A8F-30E5-1112281C9B36}"/>
+                </a:ext>
+              </a:extLst>
+            </p:cNvPr>
+            <p:cNvGrpSpPr/>
+            <p:nvPr/>
+          </p:nvGrpSpPr>
+          <p:grpSpPr>
+            <a:xfrm>
+              <a:off x="232995" y="835775"/>
+              <a:ext cx="1774658" cy="2310063"/>
+              <a:chOff x="990492" y="2511372"/>
+              <a:chExt cx="1774658" cy="2310063"/>
+            </a:xfrm>
+          </p:grpSpPr>
+          <p:sp>
+            <p:nvSpPr>
+              <p:cNvPr id="4" name="Rectangle 3">
+                <a:extLst>
+                  <a:ext uri="{FF2B5EF4-FFF2-40B4-BE49-F238E27FC236}">
+                    <a16:creationId xmlns:a16="http://schemas.microsoft.com/office/drawing/2014/main" id="{29C55CA4-9FFE-F8C7-14D1-7771639D14E4}"/>
+                  </a:ext>
+                </a:extLst>
+              </p:cNvPr>
+              <p:cNvSpPr/>
+              <p:nvPr/>
+            </p:nvSpPr>
+            <p:spPr>
+              <a:xfrm>
+                <a:off x="990492" y="2511372"/>
+                <a:ext cx="1774658" cy="2310063"/>
+              </a:xfrm>
+              <a:prstGeom prst="rect">
+                <a:avLst/>
+              </a:prstGeom>
+              <a:solidFill>
+                <a:schemeClr val="accent1">
+                  <a:lumMod val="20000"/>
+                  <a:lumOff val="80000"/>
+                </a:schemeClr>
+              </a:solidFill>
+              <a:ln>
+                <a:solidFill>
+                  <a:schemeClr val="tx2">
+                    <a:lumMod val="25000"/>
+                    <a:lumOff val="75000"/>
+                  </a:schemeClr>
+                </a:solidFill>
+              </a:ln>
+            </p:spPr>
+            <p:style>
+              <a:lnRef idx="2">
+                <a:schemeClr val="accent1">
+                  <a:shade val="15000"/>
+                </a:schemeClr>
+              </a:lnRef>
+              <a:fillRef idx="1">
+                <a:schemeClr val="accent1"/>
+              </a:fillRef>
+              <a:effectRef idx="0">
+                <a:schemeClr val="accent1"/>
+              </a:effectRef>
+              <a:fontRef idx="minor">
+                <a:schemeClr val="lt1"/>
+              </a:fontRef>
+            </p:style>
+            <p:txBody>
+              <a:bodyPr rtlCol="0" anchor="ctr"/>
+              <a:lstStyle/>
+              <a:p>
+                <a:pPr algn="ctr"/>
+                <a:endParaRPr lang="en-US" dirty="0"/>
+              </a:p>
+            </p:txBody>
+          </p:sp>
+          <p:pic>
+            <p:nvPicPr>
+              <p:cNvPr id="5" name="Graphic 4" descr="Customer review with solid fill">
+                <a:extLst>
+                  <a:ext uri="{FF2B5EF4-FFF2-40B4-BE49-F238E27FC236}">
+                    <a16:creationId xmlns:a16="http://schemas.microsoft.com/office/drawing/2014/main" id="{BC3098E3-543E-39F7-8A4E-3EA3BD9DACFE}"/>
+                  </a:ext>
+                </a:extLst>
+              </p:cNvPr>
+              <p:cNvPicPr>
+                <a:picLocks noChangeAspect="1"/>
+              </p:cNvPicPr>
+              <p:nvPr/>
+            </p:nvPicPr>
+            <p:blipFill>
+              <a:blip r:embed="rId3">
+                <a:extLst>
+                  <a:ext uri="{96DAC541-7B7A-43D3-8B79-37D633B846F1}">
+                    <asvg:svgBlip xmlns:asvg="http://schemas.microsoft.com/office/drawing/2016/SVG/main" r:embed="rId4"/>
+                  </a:ext>
+                </a:extLst>
+              </a:blip>
+              <a:stretch>
+                <a:fillRect/>
+              </a:stretch>
+            </p:blipFill>
+            <p:spPr>
+              <a:xfrm>
+                <a:off x="1400027" y="3700649"/>
+                <a:ext cx="965534" cy="965534"/>
+              </a:xfrm>
+              <a:prstGeom prst="rect">
+                <a:avLst/>
+              </a:prstGeom>
+            </p:spPr>
+          </p:pic>
+          <p:pic>
+            <p:nvPicPr>
+              <p:cNvPr id="6" name="Picture 5">
+                <a:extLst>
+                  <a:ext uri="{FF2B5EF4-FFF2-40B4-BE49-F238E27FC236}">
+                    <a16:creationId xmlns:a16="http://schemas.microsoft.com/office/drawing/2014/main" id="{A6C08A7B-D7B2-8D7E-7551-DA70599DDC7E}"/>
+                  </a:ext>
+                </a:extLst>
+              </p:cNvPr>
+              <p:cNvPicPr>
+                <a:picLocks noChangeAspect="1"/>
+              </p:cNvPicPr>
+              <p:nvPr/>
+            </p:nvPicPr>
+            <p:blipFill>
+              <a:blip r:embed="rId5"/>
+              <a:stretch>
+                <a:fillRect/>
+              </a:stretch>
+            </p:blipFill>
+            <p:spPr>
+              <a:xfrm>
+                <a:off x="1126882" y="2607575"/>
+                <a:ext cx="1525117" cy="996871"/>
+              </a:xfrm>
+              <a:prstGeom prst="rect">
+                <a:avLst/>
+              </a:prstGeom>
+            </p:spPr>
+          </p:pic>
+        </p:grpSp>
+        <p:sp>
+          <p:nvSpPr>
+            <p:cNvPr id="7" name="Arrow: Right 6">
+              <a:extLst>
+                <a:ext uri="{FF2B5EF4-FFF2-40B4-BE49-F238E27FC236}">
+                  <a16:creationId xmlns:a16="http://schemas.microsoft.com/office/drawing/2014/main" id="{97128B13-4612-273D-93A3-BB4FE0ECD72E}"/>
+                </a:ext>
+              </a:extLst>
+            </p:cNvPr>
+            <p:cNvSpPr/>
+            <p:nvPr/>
+          </p:nvSpPr>
+          <p:spPr>
+            <a:xfrm>
+              <a:off x="2327498" y="1803354"/>
+              <a:ext cx="666746" cy="374904"/>
+            </a:xfrm>
+            <a:prstGeom prst="rightArrow">
+              <a:avLst/>
+            </a:prstGeom>
+          </p:spPr>
+          <p:style>
+            <a:lnRef idx="2">
+              <a:schemeClr val="accent1">
+                <a:shade val="15000"/>
+              </a:schemeClr>
+            </a:lnRef>
+            <a:fillRef idx="1">
+              <a:schemeClr val="accent1"/>
+            </a:fillRef>
+            <a:effectRef idx="0">
+              <a:schemeClr val="accent1"/>
+            </a:effectRef>
+            <a:fontRef idx="minor">
+              <a:schemeClr val="lt1"/>
+            </a:fontRef>
+          </p:style>
+          <p:txBody>
+            <a:bodyPr rtlCol="0" anchor="ctr"/>
+            <a:lstStyle/>
+            <a:p>
+              <a:pPr algn="ctr"/>
+              <a:endParaRPr lang="en-US"/>
+            </a:p>
+          </p:txBody>
+        </p:sp>
+        <p:sp>
+          <p:nvSpPr>
+            <p:cNvPr id="8" name="TextBox 7">
+              <a:extLst>
+                <a:ext uri="{FF2B5EF4-FFF2-40B4-BE49-F238E27FC236}">
+                  <a16:creationId xmlns:a16="http://schemas.microsoft.com/office/drawing/2014/main" id="{BFA4F87D-A515-0617-5B19-E065DFAAA219}"/>
+                </a:ext>
+              </a:extLst>
+            </p:cNvPr>
+            <p:cNvSpPr txBox="1"/>
+            <p:nvPr/>
+          </p:nvSpPr>
+          <p:spPr>
+            <a:xfrm>
+              <a:off x="4038832" y="406630"/>
+              <a:ext cx="2444839" cy="438472"/>
+            </a:xfrm>
+            <a:prstGeom prst="rect">
+              <a:avLst/>
+            </a:prstGeom>
+            <a:noFill/>
+          </p:spPr>
+          <p:txBody>
+            <a:bodyPr wrap="square" rtlCol="0">
+              <a:spAutoFit/>
+            </a:bodyPr>
+            <a:lstStyle/>
+            <a:p>
+              <a:pPr algn="ctr"/>
+              <a:r>
+                <a:rPr lang="en-US" sz="1600" b="1" dirty="0" err="1"/>
+                <a:t>MolAnchor</a:t>
+              </a:r>
+              <a:endParaRPr lang="de-DE" sz="1600" b="1" dirty="0"/>
+            </a:p>
+          </p:txBody>
+        </p:sp>
+        <p:sp>
+          <p:nvSpPr>
+            <p:cNvPr id="9" name="TextBox 8">
+              <a:extLst>
+                <a:ext uri="{FF2B5EF4-FFF2-40B4-BE49-F238E27FC236}">
+                  <a16:creationId xmlns:a16="http://schemas.microsoft.com/office/drawing/2014/main" id="{5B5E5C40-61E5-79E5-C05A-CA9180634650}"/>
+                </a:ext>
+              </a:extLst>
+            </p:cNvPr>
+            <p:cNvSpPr txBox="1"/>
+            <p:nvPr/>
+          </p:nvSpPr>
+          <p:spPr>
+            <a:xfrm>
+              <a:off x="8311383" y="406630"/>
+              <a:ext cx="2444839" cy="438472"/>
+            </a:xfrm>
+            <a:prstGeom prst="rect">
+              <a:avLst/>
+            </a:prstGeom>
+            <a:noFill/>
+          </p:spPr>
+          <p:txBody>
+            <a:bodyPr wrap="square" rtlCol="0">
+              <a:spAutoFit/>
+            </a:bodyPr>
+            <a:lstStyle/>
+            <a:p>
+              <a:pPr algn="ctr"/>
+              <a:r>
+                <a:rPr lang="en-US" sz="1600" b="1" dirty="0"/>
+                <a:t>SHAP</a:t>
+              </a:r>
+              <a:endParaRPr lang="de-DE" sz="1600" b="1" dirty="0"/>
+            </a:p>
+          </p:txBody>
+        </p:sp>
+        <p:sp>
+          <p:nvSpPr>
+            <p:cNvPr id="10" name="Arrow: Right 9">
+              <a:extLst>
+                <a:ext uri="{FF2B5EF4-FFF2-40B4-BE49-F238E27FC236}">
+                  <a16:creationId xmlns:a16="http://schemas.microsoft.com/office/drawing/2014/main" id="{A3301E51-4E33-A5C6-58D1-99F3B3249BC8}"/>
+                </a:ext>
+              </a:extLst>
+            </p:cNvPr>
+            <p:cNvSpPr/>
+            <p:nvPr/>
+          </p:nvSpPr>
+          <p:spPr>
+            <a:xfrm rot="5400000">
+              <a:off x="786951" y="3558887"/>
+              <a:ext cx="666746" cy="374904"/>
+            </a:xfrm>
+            <a:prstGeom prst="rightArrow">
+              <a:avLst/>
+            </a:prstGeom>
+          </p:spPr>
+          <p:style>
+            <a:lnRef idx="2">
+              <a:schemeClr val="accent1">
+                <a:shade val="15000"/>
+              </a:schemeClr>
+            </a:lnRef>
+            <a:fillRef idx="1">
+              <a:schemeClr val="accent1"/>
+            </a:fillRef>
+            <a:effectRef idx="0">
+              <a:schemeClr val="accent1"/>
+            </a:effectRef>
+            <a:fontRef idx="minor">
+              <a:schemeClr val="lt1"/>
+            </a:fontRef>
+          </p:style>
+          <p:txBody>
+            <a:bodyPr rtlCol="0" anchor="ctr"/>
+            <a:lstStyle/>
+            <a:p>
+              <a:pPr algn="ctr"/>
+              <a:endParaRPr lang="en-US"/>
+            </a:p>
+          </p:txBody>
+        </p:sp>
+        <p:grpSp>
+          <p:nvGrpSpPr>
+            <p:cNvPr id="11" name="Group 10">
+              <a:extLst>
+                <a:ext uri="{FF2B5EF4-FFF2-40B4-BE49-F238E27FC236}">
+                  <a16:creationId xmlns:a16="http://schemas.microsoft.com/office/drawing/2014/main" id="{40F85673-9AEE-ADD3-DCC6-1FAEC5F6565D}"/>
+                </a:ext>
+              </a:extLst>
+            </p:cNvPr>
+            <p:cNvGrpSpPr/>
+            <p:nvPr/>
+          </p:nvGrpSpPr>
+          <p:grpSpPr>
+            <a:xfrm>
+              <a:off x="4841173" y="4522527"/>
+              <a:ext cx="6165816" cy="573974"/>
+              <a:chOff x="4841173" y="4193969"/>
+              <a:chExt cx="6165816" cy="573974"/>
+            </a:xfrm>
+          </p:grpSpPr>
+          <p:cxnSp>
+            <p:nvCxnSpPr>
+              <p:cNvPr id="13" name="Straight Arrow Connector 12">
+                <a:extLst>
+                  <a:ext uri="{FF2B5EF4-FFF2-40B4-BE49-F238E27FC236}">
+                    <a16:creationId xmlns:a16="http://schemas.microsoft.com/office/drawing/2014/main" id="{D7F471AB-B13A-E0F6-8895-3D2EF3A9C1DF}"/>
+                  </a:ext>
+                </a:extLst>
+              </p:cNvPr>
+              <p:cNvCxnSpPr>
+                <a:cxnSpLocks/>
+              </p:cNvCxnSpPr>
+              <p:nvPr/>
+            </p:nvCxnSpPr>
+            <p:spPr>
+              <a:xfrm>
+                <a:off x="4841173" y="4480956"/>
+                <a:ext cx="1800000" cy="0"/>
+              </a:xfrm>
+              <a:prstGeom prst="straightConnector1">
+                <a:avLst/>
+              </a:prstGeom>
+              <a:ln>
+                <a:tailEnd type="triangle"/>
+              </a:ln>
+            </p:spPr>
+            <p:style>
+              <a:lnRef idx="2">
+                <a:schemeClr val="accent1"/>
+              </a:lnRef>
+              <a:fillRef idx="0">
+                <a:schemeClr val="accent1"/>
+              </a:fillRef>
+              <a:effectRef idx="1">
+                <a:schemeClr val="accent1"/>
+              </a:effectRef>
+              <a:fontRef idx="minor">
+                <a:schemeClr val="tx1"/>
+              </a:fontRef>
+            </p:style>
+          </p:cxnSp>
+          <p:sp>
+            <p:nvSpPr>
+              <p:cNvPr id="14" name="Rectangle: Rounded Corners 13">
+                <a:extLst>
+                  <a:ext uri="{FF2B5EF4-FFF2-40B4-BE49-F238E27FC236}">
+                    <a16:creationId xmlns:a16="http://schemas.microsoft.com/office/drawing/2014/main" id="{52C02012-CF9D-7AF4-DB5E-4F719C94B012}"/>
+                  </a:ext>
+                </a:extLst>
+              </p:cNvPr>
+              <p:cNvSpPr/>
+              <p:nvPr/>
+            </p:nvSpPr>
+            <p:spPr>
+              <a:xfrm>
+                <a:off x="7278137" y="4193969"/>
+                <a:ext cx="3728852" cy="573974"/>
+              </a:xfrm>
+              <a:prstGeom prst="roundRect">
+                <a:avLst/>
+              </a:prstGeom>
+              <a:solidFill>
+                <a:schemeClr val="bg1"/>
+              </a:solidFill>
+            </p:spPr>
+            <p:style>
+              <a:lnRef idx="2">
+                <a:schemeClr val="accent4">
+                  <a:shade val="15000"/>
+                </a:schemeClr>
+              </a:lnRef>
+              <a:fillRef idx="1">
+                <a:schemeClr val="accent4"/>
+              </a:fillRef>
+              <a:effectRef idx="0">
+                <a:schemeClr val="accent4"/>
+              </a:effectRef>
+              <a:fontRef idx="minor">
+                <a:schemeClr val="lt1"/>
+              </a:fontRef>
+            </p:style>
+            <p:txBody>
+              <a:bodyPr rtlCol="0" anchor="ctr"/>
+              <a:lstStyle/>
+              <a:p>
+                <a:pPr algn="ctr"/>
+                <a:r>
+                  <a:rPr lang="en-US" sz="1100" dirty="0">
+                    <a:solidFill>
+                      <a:schemeClr val="tx1"/>
+                    </a:solidFill>
+                  </a:rPr>
+                  <a:t>Morpholine-like ring as the critical pharmacophore </a:t>
+                </a:r>
+                <a:endParaRPr lang="de-DE" sz="1100" dirty="0">
+                  <a:solidFill>
+                    <a:schemeClr val="tx1"/>
+                  </a:solidFill>
+                </a:endParaRPr>
+              </a:p>
+            </p:txBody>
+          </p:sp>
+        </p:grpSp>
+        <p:grpSp>
+          <p:nvGrpSpPr>
+            <p:cNvPr id="15" name="Group 14">
+              <a:extLst>
+                <a:ext uri="{FF2B5EF4-FFF2-40B4-BE49-F238E27FC236}">
+                  <a16:creationId xmlns:a16="http://schemas.microsoft.com/office/drawing/2014/main" id="{2413F157-B8CA-D703-62EE-D4B833AB7125}"/>
+                </a:ext>
+              </a:extLst>
+            </p:cNvPr>
+            <p:cNvGrpSpPr/>
+            <p:nvPr/>
+          </p:nvGrpSpPr>
+          <p:grpSpPr>
+            <a:xfrm>
+              <a:off x="4841173" y="5396256"/>
+              <a:ext cx="6165816" cy="1111401"/>
+              <a:chOff x="4841173" y="5067698"/>
+              <a:chExt cx="6165816" cy="1111401"/>
+            </a:xfrm>
+          </p:grpSpPr>
+          <p:cxnSp>
+            <p:nvCxnSpPr>
+              <p:cNvPr id="16" name="Straight Arrow Connector 15">
+                <a:extLst>
+                  <a:ext uri="{FF2B5EF4-FFF2-40B4-BE49-F238E27FC236}">
+                    <a16:creationId xmlns:a16="http://schemas.microsoft.com/office/drawing/2014/main" id="{E191783D-2D08-3AAC-2FF0-E2EC291F5384}"/>
+                  </a:ext>
+                </a:extLst>
+              </p:cNvPr>
+              <p:cNvCxnSpPr>
+                <a:cxnSpLocks/>
+              </p:cNvCxnSpPr>
+              <p:nvPr/>
+            </p:nvCxnSpPr>
+            <p:spPr>
+              <a:xfrm>
+                <a:off x="4841173" y="5623398"/>
+                <a:ext cx="1800000" cy="0"/>
+              </a:xfrm>
+              <a:prstGeom prst="straightConnector1">
+                <a:avLst/>
+              </a:prstGeom>
+              <a:ln>
+                <a:tailEnd type="triangle"/>
+              </a:ln>
+            </p:spPr>
+            <p:style>
+              <a:lnRef idx="2">
+                <a:schemeClr val="accent1"/>
+              </a:lnRef>
+              <a:fillRef idx="0">
+                <a:schemeClr val="accent1"/>
+              </a:fillRef>
+              <a:effectRef idx="1">
+                <a:schemeClr val="accent1"/>
+              </a:effectRef>
+              <a:fontRef idx="minor">
+                <a:schemeClr val="tx1"/>
+              </a:fontRef>
+            </p:style>
+          </p:cxnSp>
+          <p:sp>
+            <p:nvSpPr>
+              <p:cNvPr id="17" name="Rectangle: Rounded Corners 16">
+                <a:extLst>
+                  <a:ext uri="{FF2B5EF4-FFF2-40B4-BE49-F238E27FC236}">
+                    <a16:creationId xmlns:a16="http://schemas.microsoft.com/office/drawing/2014/main" id="{392DA2FC-B611-0481-11FA-589AFCCD6635}"/>
+                  </a:ext>
+                </a:extLst>
+              </p:cNvPr>
+              <p:cNvSpPr/>
+              <p:nvPr/>
+            </p:nvSpPr>
+            <p:spPr>
+              <a:xfrm>
+                <a:off x="7278137" y="5067698"/>
+                <a:ext cx="3728852" cy="1111401"/>
+              </a:xfrm>
+              <a:prstGeom prst="roundRect">
+                <a:avLst/>
+              </a:prstGeom>
+              <a:solidFill>
+                <a:schemeClr val="bg1"/>
+              </a:solidFill>
+            </p:spPr>
+            <p:style>
+              <a:lnRef idx="2">
+                <a:schemeClr val="accent4">
+                  <a:shade val="15000"/>
+                </a:schemeClr>
+              </a:lnRef>
+              <a:fillRef idx="1">
+                <a:schemeClr val="accent4"/>
+              </a:fillRef>
+              <a:effectRef idx="0">
+                <a:schemeClr val="accent4"/>
+              </a:effectRef>
+              <a:fontRef idx="minor">
+                <a:schemeClr val="lt1"/>
+              </a:fontRef>
+            </p:style>
+            <p:txBody>
+              <a:bodyPr rtlCol="0" anchor="ctr"/>
+              <a:lstStyle/>
+              <a:p>
+                <a:r>
+                  <a:rPr lang="en-US" sz="1100" b="1" dirty="0" err="1">
+                    <a:solidFill>
+                      <a:schemeClr val="tx1"/>
+                    </a:solidFill>
+                  </a:rPr>
+                  <a:t>MolAnchor</a:t>
+                </a:r>
+                <a:r>
+                  <a:rPr lang="en-US" sz="1100" b="1" dirty="0">
+                    <a:solidFill>
+                      <a:schemeClr val="tx1"/>
+                    </a:solidFill>
+                  </a:rPr>
+                  <a:t> </a:t>
+                </a:r>
+                <a:r>
+                  <a:rPr lang="en-US" sz="1100" dirty="0">
+                    <a:solidFill>
+                      <a:schemeClr val="tx1"/>
+                    </a:solidFill>
+                  </a:rPr>
+                  <a:t>- focus on the highest-precision fragment</a:t>
+                </a:r>
+              </a:p>
+              <a:p>
+                <a:endParaRPr lang="en-US" sz="1100" dirty="0">
+                  <a:solidFill>
+                    <a:schemeClr val="tx1"/>
+                  </a:solidFill>
+                </a:endParaRPr>
+              </a:p>
+              <a:p>
+                <a:r>
+                  <a:rPr lang="en-US" sz="1100" b="1" dirty="0">
+                    <a:solidFill>
+                      <a:schemeClr val="tx1"/>
+                    </a:solidFill>
+                  </a:rPr>
+                  <a:t>SHAP</a:t>
+                </a:r>
+                <a:r>
+                  <a:rPr lang="en-US" sz="1100" dirty="0">
+                    <a:solidFill>
+                      <a:schemeClr val="tx1"/>
+                    </a:solidFill>
+                  </a:rPr>
+                  <a:t> – focus on atom contribution</a:t>
+                </a:r>
+                <a:endParaRPr lang="de-DE" sz="1100" dirty="0">
+                  <a:solidFill>
+                    <a:schemeClr val="tx1"/>
+                  </a:solidFill>
+                </a:endParaRPr>
+              </a:p>
+            </p:txBody>
+          </p:sp>
+        </p:grpSp>
+        <p:pic>
+          <p:nvPicPr>
+            <p:cNvPr id="18" name="Picture 17" descr="A molecule of a chemical structure&#10;&#10;AI-generated content may be incorrect.">
+              <a:extLst>
+                <a:ext uri="{FF2B5EF4-FFF2-40B4-BE49-F238E27FC236}">
+                  <a16:creationId xmlns:a16="http://schemas.microsoft.com/office/drawing/2014/main" id="{B00FBE90-B9A0-71D7-78B9-0470979D39BB}"/>
+                </a:ext>
+              </a:extLst>
+            </p:cNvPr>
+            <p:cNvPicPr>
+              <a:picLocks noChangeAspect="1"/>
+            </p:cNvPicPr>
+            <p:nvPr/>
+          </p:nvPicPr>
+          <p:blipFill>
+            <a:blip r:embed="rId6">
+              <a:extLst>
+                <a:ext uri="{28A0092B-C50C-407E-A947-70E740481C1C}">
+                  <a14:useLocalDpi xmlns:a14="http://schemas.microsoft.com/office/drawing/2010/main" val="0"/>
+                </a:ext>
+              </a:extLst>
+            </a:blip>
+            <a:srcRect l="4101" t="21936" r="4499" b="21811"/>
+            <a:stretch/>
+          </p:blipFill>
+          <p:spPr>
+            <a:xfrm>
+              <a:off x="3605250" y="1065529"/>
+              <a:ext cx="3312000" cy="2038388"/>
+            </a:xfrm>
+            <a:prstGeom prst="rect">
+              <a:avLst/>
+            </a:prstGeom>
+          </p:spPr>
+        </p:pic>
+        <p:pic>
+          <p:nvPicPr>
+            <p:cNvPr id="19" name="Picture 18" descr="A structure of a chemical formula&#10;&#10;AI-generated content may be incorrect.">
+              <a:extLst>
+                <a:ext uri="{FF2B5EF4-FFF2-40B4-BE49-F238E27FC236}">
+                  <a16:creationId xmlns:a16="http://schemas.microsoft.com/office/drawing/2014/main" id="{8503AC68-78EB-31F3-DB36-6A64117ACE03}"/>
+                </a:ext>
+              </a:extLst>
+            </p:cNvPr>
+            <p:cNvPicPr>
+              <a:picLocks noChangeAspect="1"/>
+            </p:cNvPicPr>
+            <p:nvPr/>
+          </p:nvPicPr>
+          <p:blipFill>
+            <a:blip r:embed="rId7">
+              <a:extLst>
+                <a:ext uri="{28A0092B-C50C-407E-A947-70E740481C1C}">
+                  <a14:useLocalDpi xmlns:a14="http://schemas.microsoft.com/office/drawing/2010/main" val="0"/>
+                </a:ext>
+              </a:extLst>
+            </a:blip>
+            <a:srcRect l="11528" t="25207" r="11064" b="25192"/>
+            <a:stretch/>
+          </p:blipFill>
+          <p:spPr>
+            <a:xfrm>
+              <a:off x="7877802" y="1023609"/>
+              <a:ext cx="3312000" cy="2122229"/>
+            </a:xfrm>
+            <a:prstGeom prst="rect">
+              <a:avLst/>
+            </a:prstGeom>
+          </p:spPr>
+        </p:pic>
+      </p:grpSp>
     </p:spTree>
     <p:extLst>
       <p:ext uri="{BB962C8B-B14F-4D97-AF65-F5344CB8AC3E}">
-        <p14:creationId xmlns:p14="http://schemas.microsoft.com/office/powerpoint/2010/main" val="497639913"/>
+        <p14:creationId xmlns:p14="http://schemas.microsoft.com/office/powerpoint/2010/main" val="3302856774"/>
       </p:ext>
     </p:extLst>
   </p:cSld>
@@ -15288,6 +17849,1138 @@
           <a:chExt cx="0" cy="0"/>
         </a:xfrm>
       </p:grpSpPr>
+      <p:grpSp>
+        <p:nvGrpSpPr>
+          <p:cNvPr id="49" name="Group 48">
+            <a:extLst>
+              <a:ext uri="{FF2B5EF4-FFF2-40B4-BE49-F238E27FC236}">
+                <a16:creationId xmlns:a16="http://schemas.microsoft.com/office/drawing/2014/main" id="{C31E6F76-4E7C-1639-9021-CCC76ADA5882}"/>
+              </a:ext>
+            </a:extLst>
+          </p:cNvPr>
+          <p:cNvGrpSpPr>
+            <a:grpSpLocks noChangeAspect="1"/>
+          </p:cNvGrpSpPr>
+          <p:nvPr/>
+        </p:nvGrpSpPr>
+        <p:grpSpPr>
+          <a:xfrm>
+            <a:off x="380879" y="1191667"/>
+            <a:ext cx="8601794" cy="4693209"/>
+            <a:chOff x="232995" y="406630"/>
+            <a:chExt cx="11549227" cy="6301353"/>
+          </a:xfrm>
+        </p:grpSpPr>
+        <p:sp>
+          <p:nvSpPr>
+            <p:cNvPr id="12" name="TextBox 11">
+              <a:extLst>
+                <a:ext uri="{FF2B5EF4-FFF2-40B4-BE49-F238E27FC236}">
+                  <a16:creationId xmlns:a16="http://schemas.microsoft.com/office/drawing/2014/main" id="{84F2BFB3-8FF2-554F-E79D-F8FED4C6DB14}"/>
+                </a:ext>
+              </a:extLst>
+            </p:cNvPr>
+            <p:cNvSpPr txBox="1"/>
+            <p:nvPr/>
+          </p:nvSpPr>
+          <p:spPr>
+            <a:xfrm>
+              <a:off x="232995" y="4144987"/>
+              <a:ext cx="4168792" cy="2562996"/>
+            </a:xfrm>
+            <a:prstGeom prst="rect">
+              <a:avLst/>
+            </a:prstGeom>
+            <a:noFill/>
+          </p:spPr>
+          <p:txBody>
+            <a:bodyPr wrap="square">
+              <a:spAutoFit/>
+            </a:bodyPr>
+            <a:lstStyle/>
+            <a:p>
+              <a:pPr algn="just"/>
+              <a:r>
+                <a:rPr lang="en-US" sz="1400" b="1" dirty="0"/>
+                <a:t>Comparing XAI methods</a:t>
+              </a:r>
+            </a:p>
+            <a:p>
+              <a:pPr marL="171450" indent="-171450" algn="just">
+                <a:buFont typeface="Arial" panose="020B0604020202020204" pitchFamily="34" charset="0"/>
+                <a:buChar char="•"/>
+              </a:pPr>
+              <a:endParaRPr lang="en-US" sz="1200" b="1" dirty="0"/>
+            </a:p>
+            <a:p>
+              <a:pPr marL="171450" indent="-171450" algn="just">
+                <a:buFont typeface="Arial" panose="020B0604020202020204" pitchFamily="34" charset="0"/>
+                <a:buChar char="•"/>
+              </a:pPr>
+              <a:r>
+                <a:rPr lang="en-US" sz="800" b="1" dirty="0"/>
+                <a:t>Agreement: </a:t>
+              </a:r>
+              <a:r>
+                <a:rPr lang="en-US" sz="800" dirty="0"/>
+                <a:t>Both methods highlight that modifications to the R-groups attached to the morpholine ring are the most sensitive levers for changing bioactivity.</a:t>
+              </a:r>
+            </a:p>
+            <a:p>
+              <a:pPr algn="just"/>
+              <a:endParaRPr lang="en-US" sz="800" b="1" dirty="0"/>
+            </a:p>
+            <a:p>
+              <a:pPr marL="171450" indent="-171450" algn="just">
+                <a:buFont typeface="Arial" panose="020B0604020202020204" pitchFamily="34" charset="0"/>
+                <a:buChar char="•"/>
+              </a:pPr>
+              <a:r>
+                <a:rPr lang="en-US" sz="800" b="1" dirty="0"/>
+                <a:t>Disagreement: </a:t>
+              </a:r>
+              <a:r>
+                <a:rPr lang="en-US" sz="800" dirty="0" err="1"/>
+                <a:t>MolCE</a:t>
+              </a:r>
+              <a:r>
+                <a:rPr lang="en-US" sz="800" dirty="0"/>
+                <a:t> provides a theoretical contrastive feature (a specific R-group that is "anti-activating"). Counterfactuals provides concrete examples of inactive molecules. </a:t>
+              </a:r>
+              <a:r>
+                <a:rPr lang="en-US" sz="800" dirty="0" err="1"/>
+                <a:t>MolCE</a:t>
+              </a:r>
+              <a:r>
+                <a:rPr lang="en-US" sz="800" dirty="0"/>
+                <a:t> might suggest an R-group not present in the immediate neighborhood of the query, whereas Counterfactuals are constrained by the available library of R-groups for substitution.</a:t>
+              </a:r>
+            </a:p>
+          </p:txBody>
+        </p:sp>
+        <p:grpSp>
+          <p:nvGrpSpPr>
+            <p:cNvPr id="21" name="Group 20">
+              <a:extLst>
+                <a:ext uri="{FF2B5EF4-FFF2-40B4-BE49-F238E27FC236}">
+                  <a16:creationId xmlns:a16="http://schemas.microsoft.com/office/drawing/2014/main" id="{851E801A-07D0-EC46-EC69-B1E3BDC4A0EE}"/>
+                </a:ext>
+              </a:extLst>
+            </p:cNvPr>
+            <p:cNvGrpSpPr/>
+            <p:nvPr/>
+          </p:nvGrpSpPr>
+          <p:grpSpPr>
+            <a:xfrm>
+              <a:off x="232995" y="835775"/>
+              <a:ext cx="1774658" cy="2310063"/>
+              <a:chOff x="990492" y="2511372"/>
+              <a:chExt cx="1774658" cy="2310063"/>
+            </a:xfrm>
+          </p:grpSpPr>
+          <p:sp>
+            <p:nvSpPr>
+              <p:cNvPr id="22" name="Rectangle 21">
+                <a:extLst>
+                  <a:ext uri="{FF2B5EF4-FFF2-40B4-BE49-F238E27FC236}">
+                    <a16:creationId xmlns:a16="http://schemas.microsoft.com/office/drawing/2014/main" id="{6A221BB0-FFBC-E869-34CB-BC594E5B0490}"/>
+                  </a:ext>
+                </a:extLst>
+              </p:cNvPr>
+              <p:cNvSpPr/>
+              <p:nvPr/>
+            </p:nvSpPr>
+            <p:spPr>
+              <a:xfrm>
+                <a:off x="990492" y="2511372"/>
+                <a:ext cx="1774658" cy="2310063"/>
+              </a:xfrm>
+              <a:prstGeom prst="rect">
+                <a:avLst/>
+              </a:prstGeom>
+              <a:solidFill>
+                <a:schemeClr val="accent1">
+                  <a:lumMod val="20000"/>
+                  <a:lumOff val="80000"/>
+                </a:schemeClr>
+              </a:solidFill>
+              <a:ln>
+                <a:solidFill>
+                  <a:schemeClr val="tx2">
+                    <a:lumMod val="25000"/>
+                    <a:lumOff val="75000"/>
+                  </a:schemeClr>
+                </a:solidFill>
+              </a:ln>
+            </p:spPr>
+            <p:style>
+              <a:lnRef idx="2">
+                <a:schemeClr val="accent1">
+                  <a:shade val="15000"/>
+                </a:schemeClr>
+              </a:lnRef>
+              <a:fillRef idx="1">
+                <a:schemeClr val="accent1"/>
+              </a:fillRef>
+              <a:effectRef idx="0">
+                <a:schemeClr val="accent1"/>
+              </a:effectRef>
+              <a:fontRef idx="minor">
+                <a:schemeClr val="lt1"/>
+              </a:fontRef>
+            </p:style>
+            <p:txBody>
+              <a:bodyPr rtlCol="0" anchor="ctr"/>
+              <a:lstStyle/>
+              <a:p>
+                <a:pPr algn="ctr"/>
+                <a:endParaRPr lang="en-US" dirty="0"/>
+              </a:p>
+            </p:txBody>
+          </p:sp>
+          <p:pic>
+            <p:nvPicPr>
+              <p:cNvPr id="23" name="Graphic 22" descr="Customer review with solid fill">
+                <a:extLst>
+                  <a:ext uri="{FF2B5EF4-FFF2-40B4-BE49-F238E27FC236}">
+                    <a16:creationId xmlns:a16="http://schemas.microsoft.com/office/drawing/2014/main" id="{0FAB87FB-66B8-682E-AC05-EA6B56D8F4FB}"/>
+                  </a:ext>
+                </a:extLst>
+              </p:cNvPr>
+              <p:cNvPicPr>
+                <a:picLocks noChangeAspect="1"/>
+              </p:cNvPicPr>
+              <p:nvPr/>
+            </p:nvPicPr>
+            <p:blipFill>
+              <a:blip r:embed="rId3">
+                <a:extLst>
+                  <a:ext uri="{96DAC541-7B7A-43D3-8B79-37D633B846F1}">
+                    <asvg:svgBlip xmlns:asvg="http://schemas.microsoft.com/office/drawing/2016/SVG/main" r:embed="rId4"/>
+                  </a:ext>
+                </a:extLst>
+              </a:blip>
+              <a:stretch>
+                <a:fillRect/>
+              </a:stretch>
+            </p:blipFill>
+            <p:spPr>
+              <a:xfrm>
+                <a:off x="1400027" y="3700649"/>
+                <a:ext cx="965534" cy="965534"/>
+              </a:xfrm>
+              <a:prstGeom prst="rect">
+                <a:avLst/>
+              </a:prstGeom>
+            </p:spPr>
+          </p:pic>
+          <p:pic>
+            <p:nvPicPr>
+              <p:cNvPr id="24" name="Picture 23">
+                <a:extLst>
+                  <a:ext uri="{FF2B5EF4-FFF2-40B4-BE49-F238E27FC236}">
+                    <a16:creationId xmlns:a16="http://schemas.microsoft.com/office/drawing/2014/main" id="{5AFB6878-0F86-C45A-E83E-50BAC05BCEF5}"/>
+                  </a:ext>
+                </a:extLst>
+              </p:cNvPr>
+              <p:cNvPicPr>
+                <a:picLocks noChangeAspect="1"/>
+              </p:cNvPicPr>
+              <p:nvPr/>
+            </p:nvPicPr>
+            <p:blipFill>
+              <a:blip r:embed="rId5"/>
+              <a:stretch>
+                <a:fillRect/>
+              </a:stretch>
+            </p:blipFill>
+            <p:spPr>
+              <a:xfrm>
+                <a:off x="1126882" y="2607575"/>
+                <a:ext cx="1525117" cy="996871"/>
+              </a:xfrm>
+              <a:prstGeom prst="rect">
+                <a:avLst/>
+              </a:prstGeom>
+            </p:spPr>
+          </p:pic>
+        </p:grpSp>
+        <p:sp>
+          <p:nvSpPr>
+            <p:cNvPr id="25" name="Arrow: Right 24">
+              <a:extLst>
+                <a:ext uri="{FF2B5EF4-FFF2-40B4-BE49-F238E27FC236}">
+                  <a16:creationId xmlns:a16="http://schemas.microsoft.com/office/drawing/2014/main" id="{8E792690-D447-952D-A5E7-853CC5FB33BB}"/>
+                </a:ext>
+              </a:extLst>
+            </p:cNvPr>
+            <p:cNvSpPr/>
+            <p:nvPr/>
+          </p:nvSpPr>
+          <p:spPr>
+            <a:xfrm>
+              <a:off x="2327498" y="1803354"/>
+              <a:ext cx="666746" cy="374904"/>
+            </a:xfrm>
+            <a:prstGeom prst="rightArrow">
+              <a:avLst/>
+            </a:prstGeom>
+          </p:spPr>
+          <p:style>
+            <a:lnRef idx="2">
+              <a:schemeClr val="accent1">
+                <a:shade val="15000"/>
+              </a:schemeClr>
+            </a:lnRef>
+            <a:fillRef idx="1">
+              <a:schemeClr val="accent1"/>
+            </a:fillRef>
+            <a:effectRef idx="0">
+              <a:schemeClr val="accent1"/>
+            </a:effectRef>
+            <a:fontRef idx="minor">
+              <a:schemeClr val="lt1"/>
+            </a:fontRef>
+          </p:style>
+          <p:txBody>
+            <a:bodyPr rtlCol="0" anchor="ctr"/>
+            <a:lstStyle/>
+            <a:p>
+              <a:pPr algn="ctr"/>
+              <a:endParaRPr lang="en-US"/>
+            </a:p>
+          </p:txBody>
+        </p:sp>
+        <p:grpSp>
+          <p:nvGrpSpPr>
+            <p:cNvPr id="26" name="Group 25">
+              <a:extLst>
+                <a:ext uri="{FF2B5EF4-FFF2-40B4-BE49-F238E27FC236}">
+                  <a16:creationId xmlns:a16="http://schemas.microsoft.com/office/drawing/2014/main" id="{9472E490-A369-C15A-DECA-AE1255870DC8}"/>
+                </a:ext>
+              </a:extLst>
+            </p:cNvPr>
+            <p:cNvGrpSpPr/>
+            <p:nvPr/>
+          </p:nvGrpSpPr>
+          <p:grpSpPr>
+            <a:xfrm>
+              <a:off x="3100852" y="406630"/>
+              <a:ext cx="4177285" cy="3044438"/>
+              <a:chOff x="2837001" y="180836"/>
+              <a:chExt cx="4177285" cy="3044438"/>
+            </a:xfrm>
+          </p:grpSpPr>
+          <p:grpSp>
+            <p:nvGrpSpPr>
+              <p:cNvPr id="27" name="Group 26">
+                <a:extLst>
+                  <a:ext uri="{FF2B5EF4-FFF2-40B4-BE49-F238E27FC236}">
+                    <a16:creationId xmlns:a16="http://schemas.microsoft.com/office/drawing/2014/main" id="{C867F122-D459-E4D8-E91E-39D4FB20E8FB}"/>
+                  </a:ext>
+                </a:extLst>
+              </p:cNvPr>
+              <p:cNvGrpSpPr>
+                <a:grpSpLocks noChangeAspect="1"/>
+              </p:cNvGrpSpPr>
+              <p:nvPr/>
+            </p:nvGrpSpPr>
+            <p:grpSpPr>
+              <a:xfrm>
+                <a:off x="2837001" y="756337"/>
+                <a:ext cx="2160399" cy="2468937"/>
+                <a:chOff x="3436044" y="2054607"/>
+                <a:chExt cx="2487556" cy="2842817"/>
+              </a:xfrm>
+            </p:grpSpPr>
+            <p:pic>
+              <p:nvPicPr>
+                <p:cNvPr id="32" name="Picture 31" descr="A screenshot of a graph&#10;&#10;AI-generated content may be incorrect.">
+                  <a:extLst>
+                    <a:ext uri="{FF2B5EF4-FFF2-40B4-BE49-F238E27FC236}">
+                      <a16:creationId xmlns:a16="http://schemas.microsoft.com/office/drawing/2014/main" id="{5A34DEF1-BD9B-CD6A-A8D2-7AFC0C5C49C9}"/>
+                    </a:ext>
+                  </a:extLst>
+                </p:cNvPr>
+                <p:cNvPicPr>
+                  <a:picLocks noChangeAspect="1"/>
+                </p:cNvPicPr>
+                <p:nvPr/>
+              </p:nvPicPr>
+              <p:blipFill>
+                <a:blip r:embed="rId6">
+                  <a:extLst>
+                    <a:ext uri="{28A0092B-C50C-407E-A947-70E740481C1C}">
+                      <a14:useLocalDpi xmlns:a14="http://schemas.microsoft.com/office/drawing/2010/main" val="0"/>
+                    </a:ext>
+                  </a:extLst>
+                </a:blip>
+                <a:srcRect l="31035" t="24006" r="53731" b="44988"/>
+                <a:stretch/>
+              </p:blipFill>
+              <p:spPr>
+                <a:xfrm>
+                  <a:off x="3436044" y="2054607"/>
+                  <a:ext cx="2222549" cy="2392796"/>
+                </a:xfrm>
+                <a:prstGeom prst="rect">
+                  <a:avLst/>
+                </a:prstGeom>
+              </p:spPr>
+            </p:pic>
+            <p:pic>
+              <p:nvPicPr>
+                <p:cNvPr id="33" name="Picture 32" descr="A screenshot of a graph&#10;&#10;AI-generated content may be incorrect.">
+                  <a:extLst>
+                    <a:ext uri="{FF2B5EF4-FFF2-40B4-BE49-F238E27FC236}">
+                      <a16:creationId xmlns:a16="http://schemas.microsoft.com/office/drawing/2014/main" id="{C3C561D4-D6EB-0889-183B-97DE0B45487D}"/>
+                    </a:ext>
+                  </a:extLst>
+                </p:cNvPr>
+                <p:cNvPicPr>
+                  <a:picLocks noChangeAspect="1"/>
+                </p:cNvPicPr>
+                <p:nvPr/>
+              </p:nvPicPr>
+              <p:blipFill>
+                <a:blip r:embed="rId6">
+                  <a:extLst>
+                    <a:ext uri="{28A0092B-C50C-407E-A947-70E740481C1C}">
+                      <a14:useLocalDpi xmlns:a14="http://schemas.microsoft.com/office/drawing/2010/main" val="0"/>
+                    </a:ext>
+                  </a:extLst>
+                </a:blip>
+                <a:srcRect l="31170" t="17838" r="53596" b="76213"/>
+                <a:stretch/>
+              </p:blipFill>
+              <p:spPr>
+                <a:xfrm>
+                  <a:off x="3701051" y="4438366"/>
+                  <a:ext cx="2222549" cy="459058"/>
+                </a:xfrm>
+                <a:prstGeom prst="rect">
+                  <a:avLst/>
+                </a:prstGeom>
+              </p:spPr>
+            </p:pic>
+          </p:grpSp>
+          <p:grpSp>
+            <p:nvGrpSpPr>
+              <p:cNvPr id="28" name="Group 27">
+                <a:extLst>
+                  <a:ext uri="{FF2B5EF4-FFF2-40B4-BE49-F238E27FC236}">
+                    <a16:creationId xmlns:a16="http://schemas.microsoft.com/office/drawing/2014/main" id="{31D67220-A5A3-C982-ABAA-76BF27D3A610}"/>
+                  </a:ext>
+                </a:extLst>
+              </p:cNvPr>
+              <p:cNvGrpSpPr>
+                <a:grpSpLocks noChangeAspect="1"/>
+              </p:cNvGrpSpPr>
+              <p:nvPr/>
+            </p:nvGrpSpPr>
+            <p:grpSpPr>
+              <a:xfrm>
+                <a:off x="5025516" y="794440"/>
+                <a:ext cx="1988770" cy="2392732"/>
+                <a:chOff x="5620740" y="1990807"/>
+                <a:chExt cx="2369090" cy="2850303"/>
+              </a:xfrm>
+            </p:grpSpPr>
+            <p:pic>
+              <p:nvPicPr>
+                <p:cNvPr id="30" name="Picture 29" descr="A screenshot of a graph&#10;&#10;AI-generated content may be incorrect.">
+                  <a:extLst>
+                    <a:ext uri="{FF2B5EF4-FFF2-40B4-BE49-F238E27FC236}">
+                      <a16:creationId xmlns:a16="http://schemas.microsoft.com/office/drawing/2014/main" id="{31CDC5D0-80F4-CF34-180C-1E2C5181119A}"/>
+                    </a:ext>
+                  </a:extLst>
+                </p:cNvPr>
+                <p:cNvPicPr>
+                  <a:picLocks noChangeAspect="1"/>
+                </p:cNvPicPr>
+                <p:nvPr/>
+              </p:nvPicPr>
+              <p:blipFill>
+                <a:blip r:embed="rId6">
+                  <a:extLst>
+                    <a:ext uri="{28A0092B-C50C-407E-A947-70E740481C1C}">
+                      <a14:useLocalDpi xmlns:a14="http://schemas.microsoft.com/office/drawing/2010/main" val="0"/>
+                    </a:ext>
+                  </a:extLst>
+                </a:blip>
+                <a:srcRect l="56362" t="23416" r="29209" b="43925"/>
+                <a:stretch/>
+              </p:blipFill>
+              <p:spPr>
+                <a:xfrm>
+                  <a:off x="5620740" y="1990807"/>
+                  <a:ext cx="2105025" cy="2520397"/>
+                </a:xfrm>
+                <a:prstGeom prst="rect">
+                  <a:avLst/>
+                </a:prstGeom>
+              </p:spPr>
+            </p:pic>
+            <p:pic>
+              <p:nvPicPr>
+                <p:cNvPr id="31" name="Picture 30" descr="A screenshot of a graph&#10;&#10;AI-generated content may be incorrect.">
+                  <a:extLst>
+                    <a:ext uri="{FF2B5EF4-FFF2-40B4-BE49-F238E27FC236}">
+                      <a16:creationId xmlns:a16="http://schemas.microsoft.com/office/drawing/2014/main" id="{CA091874-25E2-30DF-B764-40BAC98019C4}"/>
+                    </a:ext>
+                  </a:extLst>
+                </p:cNvPr>
+                <p:cNvPicPr>
+                  <a:picLocks noChangeAspect="1"/>
+                </p:cNvPicPr>
+                <p:nvPr/>
+              </p:nvPicPr>
+              <p:blipFill>
+                <a:blip r:embed="rId6">
+                  <a:extLst>
+                    <a:ext uri="{28A0092B-C50C-407E-A947-70E740481C1C}">
+                      <a14:useLocalDpi xmlns:a14="http://schemas.microsoft.com/office/drawing/2010/main" val="0"/>
+                    </a:ext>
+                  </a:extLst>
+                </a:blip>
+                <a:srcRect l="56362" t="18606" r="29209" b="76905"/>
+                <a:stretch/>
+              </p:blipFill>
+              <p:spPr>
+                <a:xfrm>
+                  <a:off x="5884805" y="4494680"/>
+                  <a:ext cx="2105025" cy="346430"/>
+                </a:xfrm>
+                <a:prstGeom prst="rect">
+                  <a:avLst/>
+                </a:prstGeom>
+              </p:spPr>
+            </p:pic>
+          </p:grpSp>
+          <p:sp>
+            <p:nvSpPr>
+              <p:cNvPr id="29" name="TextBox 28">
+                <a:extLst>
+                  <a:ext uri="{FF2B5EF4-FFF2-40B4-BE49-F238E27FC236}">
+                    <a16:creationId xmlns:a16="http://schemas.microsoft.com/office/drawing/2014/main" id="{50EF08DE-650D-84D8-23E2-83CD379C9565}"/>
+                  </a:ext>
+                </a:extLst>
+              </p:cNvPr>
+              <p:cNvSpPr txBox="1"/>
+              <p:nvPr/>
+            </p:nvSpPr>
+            <p:spPr>
+              <a:xfrm>
+                <a:off x="3774980" y="180836"/>
+                <a:ext cx="2444839" cy="462179"/>
+              </a:xfrm>
+              <a:prstGeom prst="rect">
+                <a:avLst/>
+              </a:prstGeom>
+              <a:noFill/>
+            </p:spPr>
+            <p:txBody>
+              <a:bodyPr wrap="square" rtlCol="0">
+                <a:spAutoFit/>
+              </a:bodyPr>
+              <a:lstStyle/>
+              <a:p>
+                <a:pPr algn="ctr"/>
+                <a:r>
+                  <a:rPr lang="en-US" sz="1600" b="1" dirty="0"/>
+                  <a:t>Counterfactuals</a:t>
+                </a:r>
+                <a:endParaRPr lang="de-DE" sz="1600" b="1" dirty="0"/>
+              </a:p>
+            </p:txBody>
+          </p:sp>
+        </p:grpSp>
+        <p:grpSp>
+          <p:nvGrpSpPr>
+            <p:cNvPr id="34" name="Group 33">
+              <a:extLst>
+                <a:ext uri="{FF2B5EF4-FFF2-40B4-BE49-F238E27FC236}">
+                  <a16:creationId xmlns:a16="http://schemas.microsoft.com/office/drawing/2014/main" id="{0D4F3181-F484-3C7A-63BE-FADB4F9C8C2E}"/>
+                </a:ext>
+              </a:extLst>
+            </p:cNvPr>
+            <p:cNvGrpSpPr/>
+            <p:nvPr/>
+          </p:nvGrpSpPr>
+          <p:grpSpPr>
+            <a:xfrm>
+              <a:off x="7476422" y="406630"/>
+              <a:ext cx="4305800" cy="2445525"/>
+              <a:chOff x="7484339" y="181744"/>
+              <a:chExt cx="4305800" cy="2445525"/>
+            </a:xfrm>
+          </p:grpSpPr>
+          <p:grpSp>
+            <p:nvGrpSpPr>
+              <p:cNvPr id="35" name="Group 34">
+                <a:extLst>
+                  <a:ext uri="{FF2B5EF4-FFF2-40B4-BE49-F238E27FC236}">
+                    <a16:creationId xmlns:a16="http://schemas.microsoft.com/office/drawing/2014/main" id="{315A4BFF-0CA9-D528-2306-83671A721F96}"/>
+                  </a:ext>
+                </a:extLst>
+              </p:cNvPr>
+              <p:cNvGrpSpPr>
+                <a:grpSpLocks noChangeAspect="1"/>
+              </p:cNvGrpSpPr>
+              <p:nvPr/>
+            </p:nvGrpSpPr>
+            <p:grpSpPr>
+              <a:xfrm>
+                <a:off x="7484339" y="1329135"/>
+                <a:ext cx="2052000" cy="1269160"/>
+                <a:chOff x="7955797" y="1713756"/>
+                <a:chExt cx="2885092" cy="1784427"/>
+              </a:xfrm>
+            </p:grpSpPr>
+            <p:pic>
+              <p:nvPicPr>
+                <p:cNvPr id="40" name="Picture 39" descr="A black and red chemical structure&#10;&#10;AI-generated content may be incorrect.">
+                  <a:extLst>
+                    <a:ext uri="{FF2B5EF4-FFF2-40B4-BE49-F238E27FC236}">
+                      <a16:creationId xmlns:a16="http://schemas.microsoft.com/office/drawing/2014/main" id="{13934202-8C49-5877-EAF5-D53028B5669E}"/>
+                    </a:ext>
+                  </a:extLst>
+                </p:cNvPr>
+                <p:cNvPicPr>
+                  <a:picLocks noChangeAspect="1"/>
+                </p:cNvPicPr>
+                <p:nvPr/>
+              </p:nvPicPr>
+              <p:blipFill>
+                <a:blip r:embed="rId7">
+                  <a:extLst>
+                    <a:ext uri="{28A0092B-C50C-407E-A947-70E740481C1C}">
+                      <a14:useLocalDpi xmlns:a14="http://schemas.microsoft.com/office/drawing/2010/main" val="0"/>
+                    </a:ext>
+                  </a:extLst>
+                </a:blip>
+                <a:srcRect l="26131" t="13384" r="50592" b="35527"/>
+                <a:stretch/>
+              </p:blipFill>
+              <p:spPr>
+                <a:xfrm>
+                  <a:off x="7955797" y="1713756"/>
+                  <a:ext cx="2885092" cy="1385205"/>
+                </a:xfrm>
+                <a:prstGeom prst="rect">
+                  <a:avLst/>
+                </a:prstGeom>
+              </p:spPr>
+            </p:pic>
+            <p:pic>
+              <p:nvPicPr>
+                <p:cNvPr id="41" name="Picture 40" descr="A black and red chemical structure&#10;&#10;AI-generated content may be incorrect.">
+                  <a:extLst>
+                    <a:ext uri="{FF2B5EF4-FFF2-40B4-BE49-F238E27FC236}">
+                      <a16:creationId xmlns:a16="http://schemas.microsoft.com/office/drawing/2014/main" id="{14AFA39F-495B-AE1F-EE0F-FC1A7BA10F05}"/>
+                    </a:ext>
+                  </a:extLst>
+                </p:cNvPr>
+                <p:cNvPicPr>
+                  <a:picLocks noChangeAspect="1"/>
+                </p:cNvPicPr>
+                <p:nvPr/>
+              </p:nvPicPr>
+              <p:blipFill>
+                <a:blip r:embed="rId7">
+                  <a:extLst>
+                    <a:ext uri="{28A0092B-C50C-407E-A947-70E740481C1C}">
+                      <a14:useLocalDpi xmlns:a14="http://schemas.microsoft.com/office/drawing/2010/main" val="0"/>
+                    </a:ext>
+                  </a:extLst>
+                </a:blip>
+                <a:srcRect l="34138" t="87643" r="59329" b="4628"/>
+                <a:stretch/>
+              </p:blipFill>
+              <p:spPr>
+                <a:xfrm>
+                  <a:off x="8883993" y="3231955"/>
+                  <a:ext cx="1028700" cy="266228"/>
+                </a:xfrm>
+                <a:prstGeom prst="rect">
+                  <a:avLst/>
+                </a:prstGeom>
+              </p:spPr>
+            </p:pic>
+          </p:grpSp>
+          <p:grpSp>
+            <p:nvGrpSpPr>
+              <p:cNvPr id="36" name="Group 35">
+                <a:extLst>
+                  <a:ext uri="{FF2B5EF4-FFF2-40B4-BE49-F238E27FC236}">
+                    <a16:creationId xmlns:a16="http://schemas.microsoft.com/office/drawing/2014/main" id="{40F329E8-016F-7B2E-D6E4-F9F4E0BE7A34}"/>
+                  </a:ext>
+                </a:extLst>
+              </p:cNvPr>
+              <p:cNvGrpSpPr>
+                <a:grpSpLocks noChangeAspect="1"/>
+              </p:cNvGrpSpPr>
+              <p:nvPr/>
+            </p:nvGrpSpPr>
+            <p:grpSpPr>
+              <a:xfrm>
+                <a:off x="9738139" y="1397550"/>
+                <a:ext cx="2052000" cy="1229719"/>
+                <a:chOff x="7951035" y="3350221"/>
+                <a:chExt cx="2894617" cy="1734681"/>
+              </a:xfrm>
+            </p:grpSpPr>
+            <p:pic>
+              <p:nvPicPr>
+                <p:cNvPr id="38" name="Picture 37" descr="A black and red chemical structure&#10;&#10;AI-generated content may be incorrect.">
+                  <a:extLst>
+                    <a:ext uri="{FF2B5EF4-FFF2-40B4-BE49-F238E27FC236}">
+                      <a16:creationId xmlns:a16="http://schemas.microsoft.com/office/drawing/2014/main" id="{48ACB3B0-1845-ABC3-5228-376A5949FA79}"/>
+                    </a:ext>
+                  </a:extLst>
+                </p:cNvPr>
+                <p:cNvPicPr>
+                  <a:picLocks noChangeAspect="1"/>
+                </p:cNvPicPr>
+                <p:nvPr/>
+              </p:nvPicPr>
+              <p:blipFill>
+                <a:blip r:embed="rId7">
+                  <a:extLst>
+                    <a:ext uri="{28A0092B-C50C-407E-A947-70E740481C1C}">
+                      <a14:useLocalDpi xmlns:a14="http://schemas.microsoft.com/office/drawing/2010/main" val="0"/>
+                    </a:ext>
+                  </a:extLst>
+                </a:blip>
+                <a:srcRect l="51184" t="14586" r="25463" b="34325"/>
+                <a:stretch/>
+              </p:blipFill>
+              <p:spPr>
+                <a:xfrm>
+                  <a:off x="7951035" y="3350221"/>
+                  <a:ext cx="2894617" cy="1385206"/>
+                </a:xfrm>
+                <a:prstGeom prst="rect">
+                  <a:avLst/>
+                </a:prstGeom>
+              </p:spPr>
+            </p:pic>
+            <p:pic>
+              <p:nvPicPr>
+                <p:cNvPr id="39" name="Picture 38" descr="A black and red chemical structure&#10;&#10;AI-generated content may be incorrect.">
+                  <a:extLst>
+                    <a:ext uri="{FF2B5EF4-FFF2-40B4-BE49-F238E27FC236}">
+                      <a16:creationId xmlns:a16="http://schemas.microsoft.com/office/drawing/2014/main" id="{5D7062A3-FA42-FF24-FF7D-4729F61DD8A5}"/>
+                    </a:ext>
+                  </a:extLst>
+                </p:cNvPr>
+                <p:cNvPicPr>
+                  <a:picLocks noChangeAspect="1"/>
+                </p:cNvPicPr>
+                <p:nvPr/>
+              </p:nvPicPr>
+              <p:blipFill>
+                <a:blip r:embed="rId7">
+                  <a:extLst>
+                    <a:ext uri="{28A0092B-C50C-407E-A947-70E740481C1C}">
+                      <a14:useLocalDpi xmlns:a14="http://schemas.microsoft.com/office/drawing/2010/main" val="0"/>
+                    </a:ext>
+                  </a:extLst>
+                </a:blip>
+                <a:srcRect l="59497" t="85098" r="34125" b="3309"/>
+                <a:stretch/>
+              </p:blipFill>
+              <p:spPr>
+                <a:xfrm>
+                  <a:off x="8926807" y="4709945"/>
+                  <a:ext cx="943073" cy="374957"/>
+                </a:xfrm>
+                <a:prstGeom prst="rect">
+                  <a:avLst/>
+                </a:prstGeom>
+              </p:spPr>
+            </p:pic>
+          </p:grpSp>
+          <p:sp>
+            <p:nvSpPr>
+              <p:cNvPr id="37" name="TextBox 36">
+                <a:extLst>
+                  <a:ext uri="{FF2B5EF4-FFF2-40B4-BE49-F238E27FC236}">
+                    <a16:creationId xmlns:a16="http://schemas.microsoft.com/office/drawing/2014/main" id="{A9B538AC-1716-FEE9-9303-C64FEB3A2571}"/>
+                  </a:ext>
+                </a:extLst>
+              </p:cNvPr>
+              <p:cNvSpPr txBox="1"/>
+              <p:nvPr/>
+            </p:nvSpPr>
+            <p:spPr>
+              <a:xfrm>
+                <a:off x="8319300" y="181744"/>
+                <a:ext cx="2444839" cy="462179"/>
+              </a:xfrm>
+              <a:prstGeom prst="rect">
+                <a:avLst/>
+              </a:prstGeom>
+              <a:noFill/>
+            </p:spPr>
+            <p:txBody>
+              <a:bodyPr wrap="square" rtlCol="0">
+                <a:spAutoFit/>
+              </a:bodyPr>
+              <a:lstStyle/>
+              <a:p>
+                <a:pPr algn="ctr"/>
+                <a:r>
+                  <a:rPr lang="en-US" sz="1600" b="1" dirty="0" err="1"/>
+                  <a:t>MolCE</a:t>
+                </a:r>
+                <a:endParaRPr lang="de-DE" sz="1600" b="1" dirty="0"/>
+              </a:p>
+            </p:txBody>
+          </p:sp>
+        </p:grpSp>
+        <p:sp>
+          <p:nvSpPr>
+            <p:cNvPr id="42" name="Arrow: Right 41">
+              <a:extLst>
+                <a:ext uri="{FF2B5EF4-FFF2-40B4-BE49-F238E27FC236}">
+                  <a16:creationId xmlns:a16="http://schemas.microsoft.com/office/drawing/2014/main" id="{666A450C-D0FA-4FC2-D779-9D8A47EBECE0}"/>
+                </a:ext>
+              </a:extLst>
+            </p:cNvPr>
+            <p:cNvSpPr/>
+            <p:nvPr/>
+          </p:nvSpPr>
+          <p:spPr>
+            <a:xfrm rot="5400000">
+              <a:off x="786951" y="3558887"/>
+              <a:ext cx="666746" cy="374904"/>
+            </a:xfrm>
+            <a:prstGeom prst="rightArrow">
+              <a:avLst/>
+            </a:prstGeom>
+          </p:spPr>
+          <p:style>
+            <a:lnRef idx="2">
+              <a:schemeClr val="accent1">
+                <a:shade val="15000"/>
+              </a:schemeClr>
+            </a:lnRef>
+            <a:fillRef idx="1">
+              <a:schemeClr val="accent1"/>
+            </a:fillRef>
+            <a:effectRef idx="0">
+              <a:schemeClr val="accent1"/>
+            </a:effectRef>
+            <a:fontRef idx="minor">
+              <a:schemeClr val="lt1"/>
+            </a:fontRef>
+          </p:style>
+          <p:txBody>
+            <a:bodyPr rtlCol="0" anchor="ctr"/>
+            <a:lstStyle/>
+            <a:p>
+              <a:pPr algn="ctr"/>
+              <a:endParaRPr lang="en-US"/>
+            </a:p>
+          </p:txBody>
+        </p:sp>
+        <p:grpSp>
+          <p:nvGrpSpPr>
+            <p:cNvPr id="43" name="Group 42">
+              <a:extLst>
+                <a:ext uri="{FF2B5EF4-FFF2-40B4-BE49-F238E27FC236}">
+                  <a16:creationId xmlns:a16="http://schemas.microsoft.com/office/drawing/2014/main" id="{F82C89B3-047B-9A9D-4CE0-2F5ECB7C024A}"/>
+                </a:ext>
+              </a:extLst>
+            </p:cNvPr>
+            <p:cNvGrpSpPr/>
+            <p:nvPr/>
+          </p:nvGrpSpPr>
+          <p:grpSpPr>
+            <a:xfrm>
+              <a:off x="4841173" y="4522527"/>
+              <a:ext cx="6165816" cy="573974"/>
+              <a:chOff x="4841173" y="4193969"/>
+              <a:chExt cx="6165816" cy="573974"/>
+            </a:xfrm>
+          </p:grpSpPr>
+          <p:cxnSp>
+            <p:nvCxnSpPr>
+              <p:cNvPr id="44" name="Straight Arrow Connector 43">
+                <a:extLst>
+                  <a:ext uri="{FF2B5EF4-FFF2-40B4-BE49-F238E27FC236}">
+                    <a16:creationId xmlns:a16="http://schemas.microsoft.com/office/drawing/2014/main" id="{7CA5671C-1E1D-11B4-C48F-3C328C72BA42}"/>
+                  </a:ext>
+                </a:extLst>
+              </p:cNvPr>
+              <p:cNvCxnSpPr>
+                <a:cxnSpLocks/>
+              </p:cNvCxnSpPr>
+              <p:nvPr/>
+            </p:nvCxnSpPr>
+            <p:spPr>
+              <a:xfrm>
+                <a:off x="4841173" y="4480956"/>
+                <a:ext cx="1800000" cy="0"/>
+              </a:xfrm>
+              <a:prstGeom prst="straightConnector1">
+                <a:avLst/>
+              </a:prstGeom>
+              <a:ln>
+                <a:tailEnd type="triangle"/>
+              </a:ln>
+            </p:spPr>
+            <p:style>
+              <a:lnRef idx="2">
+                <a:schemeClr val="accent1"/>
+              </a:lnRef>
+              <a:fillRef idx="0">
+                <a:schemeClr val="accent1"/>
+              </a:fillRef>
+              <a:effectRef idx="1">
+                <a:schemeClr val="accent1"/>
+              </a:effectRef>
+              <a:fontRef idx="minor">
+                <a:schemeClr val="tx1"/>
+              </a:fontRef>
+            </p:style>
+          </p:cxnSp>
+          <p:sp>
+            <p:nvSpPr>
+              <p:cNvPr id="45" name="Rectangle: Rounded Corners 44">
+                <a:extLst>
+                  <a:ext uri="{FF2B5EF4-FFF2-40B4-BE49-F238E27FC236}">
+                    <a16:creationId xmlns:a16="http://schemas.microsoft.com/office/drawing/2014/main" id="{092CB276-0083-7B65-2724-8B06427E812A}"/>
+                  </a:ext>
+                </a:extLst>
+              </p:cNvPr>
+              <p:cNvSpPr/>
+              <p:nvPr/>
+            </p:nvSpPr>
+            <p:spPr>
+              <a:xfrm>
+                <a:off x="7278137" y="4193969"/>
+                <a:ext cx="3728852" cy="573974"/>
+              </a:xfrm>
+              <a:prstGeom prst="roundRect">
+                <a:avLst/>
+              </a:prstGeom>
+              <a:solidFill>
+                <a:schemeClr val="bg1"/>
+              </a:solidFill>
+            </p:spPr>
+            <p:style>
+              <a:lnRef idx="2">
+                <a:schemeClr val="accent4">
+                  <a:shade val="15000"/>
+                </a:schemeClr>
+              </a:lnRef>
+              <a:fillRef idx="1">
+                <a:schemeClr val="accent4"/>
+              </a:fillRef>
+              <a:effectRef idx="0">
+                <a:schemeClr val="accent4"/>
+              </a:effectRef>
+              <a:fontRef idx="minor">
+                <a:schemeClr val="lt1"/>
+              </a:fontRef>
+            </p:style>
+            <p:txBody>
+              <a:bodyPr rtlCol="0" anchor="ctr"/>
+              <a:lstStyle/>
+              <a:p>
+                <a:pPr algn="ctr"/>
+                <a:r>
+                  <a:rPr lang="en-US" sz="1100" dirty="0">
+                    <a:solidFill>
+                      <a:schemeClr val="tx1"/>
+                    </a:solidFill>
+                  </a:rPr>
+                  <a:t>R-groups attached to the morpholine ring </a:t>
+                </a:r>
+                <a:endParaRPr lang="de-DE" sz="1100" dirty="0">
+                  <a:solidFill>
+                    <a:schemeClr val="tx1"/>
+                  </a:solidFill>
+                </a:endParaRPr>
+              </a:p>
+            </p:txBody>
+          </p:sp>
+        </p:grpSp>
+        <p:grpSp>
+          <p:nvGrpSpPr>
+            <p:cNvPr id="46" name="Group 45">
+              <a:extLst>
+                <a:ext uri="{FF2B5EF4-FFF2-40B4-BE49-F238E27FC236}">
+                  <a16:creationId xmlns:a16="http://schemas.microsoft.com/office/drawing/2014/main" id="{CD48E29D-F3CB-93DF-7120-8F34C9F5EB3C}"/>
+                </a:ext>
+              </a:extLst>
+            </p:cNvPr>
+            <p:cNvGrpSpPr/>
+            <p:nvPr/>
+          </p:nvGrpSpPr>
+          <p:grpSpPr>
+            <a:xfrm>
+              <a:off x="4841173" y="5396256"/>
+              <a:ext cx="6165816" cy="1111401"/>
+              <a:chOff x="4841173" y="5067698"/>
+              <a:chExt cx="6165816" cy="1111401"/>
+            </a:xfrm>
+          </p:grpSpPr>
+          <p:cxnSp>
+            <p:nvCxnSpPr>
+              <p:cNvPr id="47" name="Straight Arrow Connector 46">
+                <a:extLst>
+                  <a:ext uri="{FF2B5EF4-FFF2-40B4-BE49-F238E27FC236}">
+                    <a16:creationId xmlns:a16="http://schemas.microsoft.com/office/drawing/2014/main" id="{FB8D1494-CCA9-D25B-F957-26E4BF3049A5}"/>
+                  </a:ext>
+                </a:extLst>
+              </p:cNvPr>
+              <p:cNvCxnSpPr>
+                <a:cxnSpLocks/>
+              </p:cNvCxnSpPr>
+              <p:nvPr/>
+            </p:nvCxnSpPr>
+            <p:spPr>
+              <a:xfrm>
+                <a:off x="4841173" y="5623398"/>
+                <a:ext cx="1800000" cy="0"/>
+              </a:xfrm>
+              <a:prstGeom prst="straightConnector1">
+                <a:avLst/>
+              </a:prstGeom>
+              <a:ln>
+                <a:tailEnd type="triangle"/>
+              </a:ln>
+            </p:spPr>
+            <p:style>
+              <a:lnRef idx="2">
+                <a:schemeClr val="accent1"/>
+              </a:lnRef>
+              <a:fillRef idx="0">
+                <a:schemeClr val="accent1"/>
+              </a:fillRef>
+              <a:effectRef idx="1">
+                <a:schemeClr val="accent1"/>
+              </a:effectRef>
+              <a:fontRef idx="minor">
+                <a:schemeClr val="tx1"/>
+              </a:fontRef>
+            </p:style>
+          </p:cxnSp>
+          <p:sp>
+            <p:nvSpPr>
+              <p:cNvPr id="48" name="Rectangle: Rounded Corners 47">
+                <a:extLst>
+                  <a:ext uri="{FF2B5EF4-FFF2-40B4-BE49-F238E27FC236}">
+                    <a16:creationId xmlns:a16="http://schemas.microsoft.com/office/drawing/2014/main" id="{89DB2597-89D3-3163-87C9-9AC4C1B4C236}"/>
+                  </a:ext>
+                </a:extLst>
+              </p:cNvPr>
+              <p:cNvSpPr/>
+              <p:nvPr/>
+            </p:nvSpPr>
+            <p:spPr>
+              <a:xfrm>
+                <a:off x="7278137" y="5067698"/>
+                <a:ext cx="3728852" cy="1111401"/>
+              </a:xfrm>
+              <a:prstGeom prst="roundRect">
+                <a:avLst/>
+              </a:prstGeom>
+              <a:solidFill>
+                <a:schemeClr val="bg1"/>
+              </a:solidFill>
+            </p:spPr>
+            <p:style>
+              <a:lnRef idx="2">
+                <a:schemeClr val="accent4">
+                  <a:shade val="15000"/>
+                </a:schemeClr>
+              </a:lnRef>
+              <a:fillRef idx="1">
+                <a:schemeClr val="accent4"/>
+              </a:fillRef>
+              <a:effectRef idx="0">
+                <a:schemeClr val="accent4"/>
+              </a:effectRef>
+              <a:fontRef idx="minor">
+                <a:schemeClr val="lt1"/>
+              </a:fontRef>
+            </p:style>
+            <p:txBody>
+              <a:bodyPr rtlCol="0" anchor="ctr"/>
+              <a:lstStyle/>
+              <a:p>
+                <a:endParaRPr lang="en-US" sz="1400" dirty="0">
+                  <a:solidFill>
+                    <a:schemeClr val="tx1"/>
+                  </a:solidFill>
+                </a:endParaRPr>
+              </a:p>
+              <a:p>
+                <a:r>
+                  <a:rPr lang="en-US" sz="1100" b="1" dirty="0" err="1">
+                    <a:solidFill>
+                      <a:schemeClr val="tx1"/>
+                    </a:solidFill>
+                  </a:rPr>
+                  <a:t>MolCE</a:t>
+                </a:r>
+                <a:r>
+                  <a:rPr lang="en-US" sz="1100" dirty="0">
+                    <a:solidFill>
+                      <a:schemeClr val="tx1"/>
+                    </a:solidFill>
+                  </a:rPr>
+                  <a:t> - R-group that is “anti-activating”</a:t>
+                </a:r>
+              </a:p>
+              <a:p>
+                <a:endParaRPr lang="en-US" sz="1100" dirty="0">
+                  <a:solidFill>
+                    <a:schemeClr val="tx1"/>
+                  </a:solidFill>
+                </a:endParaRPr>
+              </a:p>
+              <a:p>
+                <a:r>
+                  <a:rPr lang="en-US" sz="1100" b="1" dirty="0">
+                    <a:solidFill>
+                      <a:schemeClr val="tx1"/>
+                    </a:solidFill>
+                  </a:rPr>
+                  <a:t>Counterfactuals</a:t>
+                </a:r>
+                <a:r>
+                  <a:rPr lang="en-US" sz="1100" dirty="0">
+                    <a:solidFill>
+                      <a:schemeClr val="tx1"/>
+                    </a:solidFill>
+                  </a:rPr>
+                  <a:t> - concrete examples of inactive molecules</a:t>
+                </a:r>
+              </a:p>
+              <a:p>
+                <a:r>
+                  <a:rPr lang="en-US" sz="1400" dirty="0">
+                    <a:solidFill>
+                      <a:schemeClr val="tx1"/>
+                    </a:solidFill>
+                  </a:rPr>
+                  <a:t>   </a:t>
+                </a:r>
+                <a:endParaRPr lang="de-DE" sz="1400" dirty="0">
+                  <a:solidFill>
+                    <a:schemeClr val="tx1"/>
+                  </a:solidFill>
+                </a:endParaRPr>
+              </a:p>
+            </p:txBody>
+          </p:sp>
+        </p:grpSp>
+      </p:grpSp>
       <p:sp>
         <p:nvSpPr>
           <p:cNvPr id="163" name="PlaceHolder 1">
@@ -15347,40 +19040,10 @@
           </a:p>
         </p:txBody>
       </p:sp>
-      <p:pic>
-        <p:nvPicPr>
-          <p:cNvPr id="18" name="Picture 17">
-            <a:extLst>
-              <a:ext uri="{FF2B5EF4-FFF2-40B4-BE49-F238E27FC236}">
-                <a16:creationId xmlns:a16="http://schemas.microsoft.com/office/drawing/2014/main" id="{96A81ED6-143C-EB03-E019-D2947E0A8F2E}"/>
-              </a:ext>
-            </a:extLst>
-          </p:cNvPr>
-          <p:cNvPicPr>
-            <a:picLocks noChangeAspect="1"/>
-          </p:cNvPicPr>
-          <p:nvPr/>
-        </p:nvPicPr>
-        <p:blipFill>
-          <a:blip r:embed="rId3"/>
-          <a:stretch>
-            <a:fillRect/>
-          </a:stretch>
-        </p:blipFill>
-        <p:spPr>
-          <a:xfrm>
-            <a:off x="380880" y="1192696"/>
-            <a:ext cx="8169237" cy="4825788"/>
-          </a:xfrm>
-          <a:prstGeom prst="rect">
-            <a:avLst/>
-          </a:prstGeom>
-        </p:spPr>
-      </p:pic>
     </p:spTree>
     <p:extLst>
       <p:ext uri="{BB962C8B-B14F-4D97-AF65-F5344CB8AC3E}">
-        <p14:creationId xmlns:p14="http://schemas.microsoft.com/office/powerpoint/2010/main" val="1027898386"/>
+        <p14:creationId xmlns:p14="http://schemas.microsoft.com/office/powerpoint/2010/main" val="3463339464"/>
       </p:ext>
     </p:extLst>
   </p:cSld>

--- a/slides/AI_Agent_Explainability.pptx
+++ b/slides/AI_Agent_Explainability.pptx
@@ -6,7 +6,7 @@
     <p:sldMasterId id="2147483661" r:id="rId2"/>
   </p:sldMasterIdLst>
   <p:notesMasterIdLst>
-    <p:notesMasterId r:id="rId24"/>
+    <p:notesMasterId r:id="rId29"/>
   </p:notesMasterIdLst>
   <p:sldIdLst>
     <p:sldId id="297" r:id="rId3"/>
@@ -26,10 +26,15 @@
     <p:sldId id="326" r:id="rId17"/>
     <p:sldId id="328" r:id="rId18"/>
     <p:sldId id="329" r:id="rId19"/>
-    <p:sldId id="315" r:id="rId20"/>
-    <p:sldId id="316" r:id="rId21"/>
-    <p:sldId id="303" r:id="rId22"/>
-    <p:sldId id="330" r:id="rId23"/>
+    <p:sldId id="320" r:id="rId20"/>
+    <p:sldId id="331" r:id="rId21"/>
+    <p:sldId id="332" r:id="rId22"/>
+    <p:sldId id="334" r:id="rId23"/>
+    <p:sldId id="335" r:id="rId24"/>
+    <p:sldId id="315" r:id="rId25"/>
+    <p:sldId id="316" r:id="rId26"/>
+    <p:sldId id="303" r:id="rId27"/>
+    <p:sldId id="330" r:id="rId28"/>
   </p:sldIdLst>
   <p:sldSz cx="9144000" cy="6858000" type="screen4x3"/>
   <p:notesSz cx="7559675" cy="10691813"/>
@@ -2194,7 +2199,175 @@
           <a:bodyPr/>
           <a:lstStyle/>
           <a:p>
-            <a:endParaRPr lang="de-DE" dirty="0"/>
+            <a:endParaRPr lang="en-US" dirty="0"/>
+          </a:p>
+        </p:txBody>
+      </p:sp>
+      <p:sp>
+        <p:nvSpPr>
+          <p:cNvPr id="4" name="Slide Number Placeholder 3"/>
+          <p:cNvSpPr>
+            <a:spLocks noGrp="1"/>
+          </p:cNvSpPr>
+          <p:nvPr>
+            <p:ph type="sldNum" sz="quarter" idx="5"/>
+          </p:nvPr>
+        </p:nvSpPr>
+        <p:spPr/>
+        <p:txBody>
+          <a:bodyPr/>
+          <a:lstStyle/>
+          <a:p>
+            <a:fld id="{90EBC085-3709-4EED-9401-54C6FC7AFFB6}" type="slidenum">
+              <a:rPr lang="en-US" smtClean="0"/>
+              <a:t>19</a:t>
+            </a:fld>
+            <a:endParaRPr lang="en-US"/>
+          </a:p>
+        </p:txBody>
+      </p:sp>
+    </p:spTree>
+    <p:extLst>
+      <p:ext uri="{BB962C8B-B14F-4D97-AF65-F5344CB8AC3E}">
+        <p14:creationId xmlns:p14="http://schemas.microsoft.com/office/powerpoint/2010/main" val="1478445165"/>
+      </p:ext>
+    </p:extLst>
+  </p:cSld>
+  <p:clrMapOvr>
+    <a:masterClrMapping/>
+  </p:clrMapOvr>
+</p:notes>
+</file>
+
+<file path=ppt/notesSlides/notesSlide11.xml><?xml version="1.0" encoding="utf-8"?>
+<p:notes xmlns:a="http://schemas.openxmlformats.org/drawingml/2006/main" xmlns:r="http://schemas.openxmlformats.org/officeDocument/2006/relationships" xmlns:p="http://schemas.openxmlformats.org/presentationml/2006/main">
+  <p:cSld>
+    <p:spTree>
+      <p:nvGrpSpPr>
+        <p:cNvPr id="1" name=""/>
+        <p:cNvGrpSpPr/>
+        <p:nvPr/>
+      </p:nvGrpSpPr>
+      <p:grpSpPr>
+        <a:xfrm>
+          <a:off x="0" y="0"/>
+          <a:ext cx="0" cy="0"/>
+          <a:chOff x="0" y="0"/>
+          <a:chExt cx="0" cy="0"/>
+        </a:xfrm>
+      </p:grpSpPr>
+      <p:sp>
+        <p:nvSpPr>
+          <p:cNvPr id="2" name="Slide Image Placeholder 1"/>
+          <p:cNvSpPr>
+            <a:spLocks noGrp="1" noRot="1" noChangeAspect="1"/>
+          </p:cNvSpPr>
+          <p:nvPr>
+            <p:ph type="sldImg"/>
+          </p:nvPr>
+        </p:nvSpPr>
+        <p:spPr/>
+      </p:sp>
+      <p:sp>
+        <p:nvSpPr>
+          <p:cNvPr id="3" name="Notes Placeholder 2"/>
+          <p:cNvSpPr>
+            <a:spLocks noGrp="1"/>
+          </p:cNvSpPr>
+          <p:nvPr>
+            <p:ph type="body" idx="1"/>
+          </p:nvPr>
+        </p:nvSpPr>
+        <p:spPr/>
+        <p:txBody>
+          <a:bodyPr/>
+          <a:lstStyle/>
+          <a:p>
+            <a:endParaRPr lang="en-US" dirty="0"/>
+          </a:p>
+        </p:txBody>
+      </p:sp>
+      <p:sp>
+        <p:nvSpPr>
+          <p:cNvPr id="4" name="Slide Number Placeholder 3"/>
+          <p:cNvSpPr>
+            <a:spLocks noGrp="1"/>
+          </p:cNvSpPr>
+          <p:nvPr>
+            <p:ph type="sldNum" sz="quarter" idx="5"/>
+          </p:nvPr>
+        </p:nvSpPr>
+        <p:spPr/>
+        <p:txBody>
+          <a:bodyPr/>
+          <a:lstStyle/>
+          <a:p>
+            <a:fld id="{90EBC085-3709-4EED-9401-54C6FC7AFFB6}" type="slidenum">
+              <a:rPr lang="en-US" smtClean="0"/>
+              <a:t>20</a:t>
+            </a:fld>
+            <a:endParaRPr lang="en-US"/>
+          </a:p>
+        </p:txBody>
+      </p:sp>
+    </p:spTree>
+    <p:extLst>
+      <p:ext uri="{BB962C8B-B14F-4D97-AF65-F5344CB8AC3E}">
+        <p14:creationId xmlns:p14="http://schemas.microsoft.com/office/powerpoint/2010/main" val="244219471"/>
+      </p:ext>
+    </p:extLst>
+  </p:cSld>
+  <p:clrMapOvr>
+    <a:masterClrMapping/>
+  </p:clrMapOvr>
+</p:notes>
+</file>
+
+<file path=ppt/notesSlides/notesSlide12.xml><?xml version="1.0" encoding="utf-8"?>
+<p:notes xmlns:a="http://schemas.openxmlformats.org/drawingml/2006/main" xmlns:r="http://schemas.openxmlformats.org/officeDocument/2006/relationships" xmlns:p="http://schemas.openxmlformats.org/presentationml/2006/main">
+  <p:cSld>
+    <p:spTree>
+      <p:nvGrpSpPr>
+        <p:cNvPr id="1" name=""/>
+        <p:cNvGrpSpPr/>
+        <p:nvPr/>
+      </p:nvGrpSpPr>
+      <p:grpSpPr>
+        <a:xfrm>
+          <a:off x="0" y="0"/>
+          <a:ext cx="0" cy="0"/>
+          <a:chOff x="0" y="0"/>
+          <a:chExt cx="0" cy="0"/>
+        </a:xfrm>
+      </p:grpSpPr>
+      <p:sp>
+        <p:nvSpPr>
+          <p:cNvPr id="2" name="Slide Image Placeholder 1"/>
+          <p:cNvSpPr>
+            <a:spLocks noGrp="1" noRot="1" noChangeAspect="1"/>
+          </p:cNvSpPr>
+          <p:nvPr>
+            <p:ph type="sldImg"/>
+          </p:nvPr>
+        </p:nvSpPr>
+        <p:spPr/>
+      </p:sp>
+      <p:sp>
+        <p:nvSpPr>
+          <p:cNvPr id="3" name="Notes Placeholder 2"/>
+          <p:cNvSpPr>
+            <a:spLocks noGrp="1"/>
+          </p:cNvSpPr>
+          <p:nvPr>
+            <p:ph type="body" idx="1"/>
+          </p:nvPr>
+        </p:nvSpPr>
+        <p:spPr/>
+        <p:txBody>
+          <a:bodyPr/>
+          <a:lstStyle/>
+          <a:p>
+            <a:endParaRPr lang="en-US" dirty="0"/>
           </a:p>
         </p:txBody>
       </p:sp>
@@ -2224,7 +2397,91 @@
     </p:spTree>
     <p:extLst>
       <p:ext uri="{BB962C8B-B14F-4D97-AF65-F5344CB8AC3E}">
-        <p14:creationId xmlns:p14="http://schemas.microsoft.com/office/powerpoint/2010/main" val="3499484907"/>
+        <p14:creationId xmlns:p14="http://schemas.microsoft.com/office/powerpoint/2010/main" val="452253066"/>
+      </p:ext>
+    </p:extLst>
+  </p:cSld>
+  <p:clrMapOvr>
+    <a:masterClrMapping/>
+  </p:clrMapOvr>
+</p:notes>
+</file>
+
+<file path=ppt/notesSlides/notesSlide13.xml><?xml version="1.0" encoding="utf-8"?>
+<p:notes xmlns:a="http://schemas.openxmlformats.org/drawingml/2006/main" xmlns:r="http://schemas.openxmlformats.org/officeDocument/2006/relationships" xmlns:p="http://schemas.openxmlformats.org/presentationml/2006/main">
+  <p:cSld>
+    <p:spTree>
+      <p:nvGrpSpPr>
+        <p:cNvPr id="1" name=""/>
+        <p:cNvGrpSpPr/>
+        <p:nvPr/>
+      </p:nvGrpSpPr>
+      <p:grpSpPr>
+        <a:xfrm>
+          <a:off x="0" y="0"/>
+          <a:ext cx="0" cy="0"/>
+          <a:chOff x="0" y="0"/>
+          <a:chExt cx="0" cy="0"/>
+        </a:xfrm>
+      </p:grpSpPr>
+      <p:sp>
+        <p:nvSpPr>
+          <p:cNvPr id="2" name="Slide Image Placeholder 1"/>
+          <p:cNvSpPr>
+            <a:spLocks noGrp="1" noRot="1" noChangeAspect="1"/>
+          </p:cNvSpPr>
+          <p:nvPr>
+            <p:ph type="sldImg"/>
+          </p:nvPr>
+        </p:nvSpPr>
+        <p:spPr/>
+      </p:sp>
+      <p:sp>
+        <p:nvSpPr>
+          <p:cNvPr id="3" name="Notes Placeholder 2"/>
+          <p:cNvSpPr>
+            <a:spLocks noGrp="1"/>
+          </p:cNvSpPr>
+          <p:nvPr>
+            <p:ph type="body" idx="1"/>
+          </p:nvPr>
+        </p:nvSpPr>
+        <p:spPr/>
+        <p:txBody>
+          <a:bodyPr/>
+          <a:lstStyle/>
+          <a:p>
+            <a:endParaRPr lang="en-US" dirty="0"/>
+          </a:p>
+        </p:txBody>
+      </p:sp>
+      <p:sp>
+        <p:nvSpPr>
+          <p:cNvPr id="4" name="Slide Number Placeholder 3"/>
+          <p:cNvSpPr>
+            <a:spLocks noGrp="1"/>
+          </p:cNvSpPr>
+          <p:nvPr>
+            <p:ph type="sldNum" sz="quarter" idx="5"/>
+          </p:nvPr>
+        </p:nvSpPr>
+        <p:spPr/>
+        <p:txBody>
+          <a:bodyPr/>
+          <a:lstStyle/>
+          <a:p>
+            <a:fld id="{90EBC085-3709-4EED-9401-54C6FC7AFFB6}" type="slidenum">
+              <a:rPr lang="en-US" smtClean="0"/>
+              <a:t>22</a:t>
+            </a:fld>
+            <a:endParaRPr lang="en-US"/>
+          </a:p>
+        </p:txBody>
+      </p:sp>
+    </p:spTree>
+    <p:extLst>
+      <p:ext uri="{BB962C8B-B14F-4D97-AF65-F5344CB8AC3E}">
+        <p14:creationId xmlns:p14="http://schemas.microsoft.com/office/powerpoint/2010/main" val="2339777295"/>
       </p:ext>
     </p:extLst>
   </p:cSld>
@@ -19869,10 +20126,10 @@
         </p:nvGrpSpPr>
         <p:grpSpPr>
           <a:xfrm>
-            <a:off x="105358" y="813663"/>
-            <a:ext cx="6438833" cy="2682883"/>
+            <a:off x="187189" y="1166036"/>
+            <a:ext cx="6438833" cy="2867565"/>
             <a:chOff x="-27063" y="372216"/>
-            <a:chExt cx="8645121" cy="3602183"/>
+            <a:chExt cx="8645121" cy="3850146"/>
           </a:xfrm>
         </p:grpSpPr>
         <p:grpSp>
@@ -19889,9 +20146,9 @@
           </p:nvGrpSpPr>
           <p:grpSpPr>
             <a:xfrm>
-              <a:off x="-27063" y="1664337"/>
+              <a:off x="-27063" y="1912300"/>
               <a:ext cx="1774658" cy="2310062"/>
-              <a:chOff x="730434" y="3339934"/>
+              <a:chOff x="730434" y="3587897"/>
               <a:chExt cx="1774658" cy="2310062"/>
             </a:xfrm>
           </p:grpSpPr>
@@ -19909,7 +20166,7 @@
             </p:nvSpPr>
             <p:spPr>
               <a:xfrm>
-                <a:off x="730434" y="3339934"/>
+                <a:off x="730434" y="3587897"/>
                 <a:ext cx="1774658" cy="2310062"/>
               </a:xfrm>
               <a:prstGeom prst="rect">
@@ -19983,8 +20240,8 @@
             </p:blipFill>
             <p:spPr>
               <a:xfrm>
-                <a:off x="1139968" y="4529209"/>
-                <a:ext cx="965535" cy="965533"/>
+                <a:off x="1139968" y="4777174"/>
+                <a:ext cx="965534" cy="965533"/>
               </a:xfrm>
               <a:prstGeom prst="rect">
                 <a:avLst/>
@@ -20013,8 +20270,8 @@
             </p:blipFill>
             <p:spPr>
               <a:xfrm>
-                <a:off x="866823" y="3436136"/>
-                <a:ext cx="1525116" cy="996870"/>
+                <a:off x="866823" y="3684100"/>
+                <a:ext cx="1525116" cy="996871"/>
               </a:xfrm>
               <a:prstGeom prst="rect">
                 <a:avLst/>
@@ -20036,7 +20293,7 @@
           </p:nvSpPr>
           <p:spPr>
             <a:xfrm>
-              <a:off x="2003245" y="2629477"/>
+              <a:off x="2051097" y="2879879"/>
               <a:ext cx="666746" cy="374904"/>
             </a:xfrm>
             <a:prstGeom prst="rightArrow">
@@ -20188,8 +20445,8 @@
         </p:nvSpPr>
         <p:spPr>
           <a:xfrm>
-            <a:off x="2304514" y="1353557"/>
-            <a:ext cx="3559018" cy="2400657"/>
+            <a:off x="2547681" y="1614972"/>
+            <a:ext cx="3220644" cy="2169825"/>
           </a:xfrm>
           <a:prstGeom prst="rect">
             <a:avLst/>
@@ -20207,7 +20464,7 @@
               <a:buAutoNum type="arabicPeriod"/>
             </a:pPr>
             <a:r>
-              <a:rPr lang="en-US" sz="1000" b="1" dirty="0"/>
+              <a:rPr lang="en-US" sz="900" b="1" dirty="0"/>
               <a:t>The GNN Model Learned Meaningful Chemical Patterns</a:t>
             </a:r>
           </a:p>
@@ -20216,7 +20473,7 @@
               <a:buFont typeface="+mj-lt"/>
               <a:buAutoNum type="arabicPeriod"/>
             </a:pPr>
-            <a:endParaRPr lang="en-US" sz="1000" b="1" dirty="0"/>
+            <a:endParaRPr lang="en-US" sz="900" b="1" dirty="0"/>
           </a:p>
           <a:p>
             <a:pPr marL="685800" lvl="1" indent="-228600" algn="just">
@@ -20224,7 +20481,7 @@
               <a:buChar char="•"/>
             </a:pPr>
             <a:r>
-              <a:rPr lang="en-US" sz="1000" dirty="0"/>
+              <a:rPr lang="en-US" sz="900" dirty="0"/>
               <a:t>The model correctly identifies piperazine-based scaffolds as activity-promoting</a:t>
             </a:r>
           </a:p>
@@ -20234,7 +20491,7 @@
               <a:buChar char="•"/>
             </a:pPr>
             <a:r>
-              <a:rPr lang="en-US" sz="1000" dirty="0"/>
+              <a:rPr lang="en-US" sz="900" dirty="0"/>
               <a:t>Simple alkyl-aryl systems are associated with inactivity</a:t>
             </a:r>
           </a:p>
@@ -20244,7 +20501,7 @@
               <a:buChar char="•"/>
             </a:pPr>
             <a:r>
-              <a:rPr lang="en-US" sz="1000" dirty="0"/>
+              <a:rPr lang="en-US" sz="900" dirty="0"/>
               <a:t>This aligns with medicinal chemistry principles</a:t>
             </a:r>
           </a:p>
@@ -20253,7 +20510,7 @@
               <a:buFont typeface="Arial" panose="020B0604020202020204" pitchFamily="34" charset="0"/>
               <a:buChar char="•"/>
             </a:pPr>
-            <a:endParaRPr lang="en-US" sz="1000" b="1" dirty="0"/>
+            <a:endParaRPr lang="en-US" sz="900" b="1" dirty="0"/>
           </a:p>
           <a:p>
             <a:pPr marL="228600" indent="-228600" algn="just">
@@ -20261,7 +20518,7 @@
               <a:buAutoNum type="arabicPeriod"/>
             </a:pPr>
             <a:r>
-              <a:rPr lang="en-US" sz="1000" b="1" dirty="0"/>
+              <a:rPr lang="en-US" sz="900" b="1" dirty="0"/>
               <a:t>Active Compound Relies on Multiple Features</a:t>
             </a:r>
           </a:p>
@@ -20270,7 +20527,7 @@
               <a:buFont typeface="Arial" panose="020B0604020202020204" pitchFamily="34" charset="0"/>
               <a:buChar char="•"/>
             </a:pPr>
-            <a:endParaRPr lang="en-US" sz="1000" b="1" dirty="0"/>
+            <a:endParaRPr lang="en-US" sz="900" b="1" dirty="0"/>
           </a:p>
           <a:p>
             <a:pPr marL="685800" lvl="1" indent="-228600" algn="just">
@@ -20278,7 +20535,7 @@
               <a:buChar char="•"/>
             </a:pPr>
             <a:r>
-              <a:rPr lang="en-US" sz="1000" dirty="0"/>
+              <a:rPr lang="en-US" sz="900" dirty="0"/>
               <a:t>SHAP values are distributed across the piperazine ring, linker, and aromatic systems</a:t>
             </a:r>
           </a:p>
@@ -20288,10 +20545,10 @@
               <a:buChar char="•"/>
             </a:pPr>
             <a:r>
-              <a:rPr lang="en-US" sz="1000" dirty="0"/>
+              <a:rPr lang="en-US" sz="900" dirty="0"/>
               <a:t>This suggests the model learned a complex, multi-factor decision boundary</a:t>
             </a:r>
-            <a:endParaRPr lang="en-US" sz="1000" i="0" dirty="0">
+            <a:endParaRPr lang="en-US" sz="900" i="0" dirty="0">
               <a:effectLst/>
             </a:endParaRPr>
           </a:p>
@@ -20311,8 +20568,8 @@
         </p:nvSpPr>
         <p:spPr>
           <a:xfrm>
-            <a:off x="5863532" y="1371473"/>
-            <a:ext cx="3175110" cy="2246769"/>
+            <a:off x="5847270" y="1632888"/>
+            <a:ext cx="3175110" cy="1615827"/>
           </a:xfrm>
           <a:prstGeom prst="rect">
             <a:avLst/>
@@ -20330,7 +20587,7 @@
               <a:buAutoNum type="arabicPeriod" startAt="3"/>
             </a:pPr>
             <a:r>
-              <a:rPr lang="en-US" sz="1000" b="1" dirty="0"/>
+              <a:rPr lang="en-US" sz="900" b="1" dirty="0"/>
               <a:t>Inactive Compound Has Dominant Single Feature</a:t>
             </a:r>
           </a:p>
@@ -20339,7 +20596,7 @@
               <a:buFont typeface="+mj-lt"/>
               <a:buAutoNum type="arabicPeriod" startAt="3"/>
             </a:pPr>
-            <a:endParaRPr lang="en-US" sz="1000" dirty="0"/>
+            <a:endParaRPr lang="en-US" sz="900" dirty="0"/>
           </a:p>
           <a:p>
             <a:pPr marL="685800" lvl="1" indent="-228600" algn="just">
@@ -20347,7 +20604,7 @@
               <a:buChar char="•"/>
             </a:pPr>
             <a:r>
-              <a:rPr lang="en-US" sz="1000" dirty="0"/>
+              <a:rPr lang="en-US" sz="900" dirty="0"/>
               <a:t>One bond (methyl-phenyl) contributes 50%+ of the total SHAP</a:t>
             </a:r>
           </a:p>
@@ -20357,7 +20614,7 @@
               <a:buChar char="•"/>
             </a:pPr>
             <a:r>
-              <a:rPr lang="en-US" sz="1000" dirty="0"/>
+              <a:rPr lang="en-US" sz="900" dirty="0"/>
               <a:t>This suggests simpler, more localized decision logic</a:t>
             </a:r>
           </a:p>
@@ -20366,7 +20623,7 @@
               <a:buFont typeface="Arial" panose="020B0604020202020204" pitchFamily="34" charset="0"/>
               <a:buChar char="•"/>
             </a:pPr>
-            <a:endParaRPr lang="en-US" sz="1000" dirty="0"/>
+            <a:endParaRPr lang="en-US" sz="900" dirty="0"/>
           </a:p>
           <a:p>
             <a:pPr marL="228600" indent="-228600" algn="just">
@@ -20374,10 +20631,10 @@
               <a:buAutoNum type="arabicPeriod" startAt="3"/>
             </a:pPr>
             <a:r>
-              <a:rPr lang="en-US" sz="1000" b="1" dirty="0"/>
+              <a:rPr lang="en-US" sz="900" b="1" dirty="0"/>
               <a:t>Model Trustworthiness</a:t>
             </a:r>
-            <a:endParaRPr lang="en-US" sz="1000" dirty="0"/>
+            <a:endParaRPr lang="en-US" sz="900" dirty="0"/>
           </a:p>
           <a:p>
             <a:pPr marL="685800" lvl="1" indent="-228600" algn="just">
@@ -20385,7 +20642,7 @@
               <a:buChar char="•"/>
             </a:pPr>
             <a:r>
-              <a:rPr lang="en-US" sz="1000" dirty="0"/>
+              <a:rPr lang="en-US" sz="900" dirty="0"/>
               <a:t>Active compound: Trustworthiness = 0.903</a:t>
             </a:r>
           </a:p>
@@ -20395,7 +20652,7 @@
               <a:buChar char="•"/>
             </a:pPr>
             <a:r>
-              <a:rPr lang="en-US" sz="1000" dirty="0"/>
+              <a:rPr lang="en-US" sz="900" dirty="0"/>
               <a:t>Inactive compound: Trustworthiness = 0.960</a:t>
             </a:r>
           </a:p>
@@ -20405,10 +20662,10 @@
               <a:buChar char="•"/>
             </a:pPr>
             <a:r>
-              <a:rPr lang="en-US" sz="1000" dirty="0"/>
+              <a:rPr lang="en-US" sz="900" dirty="0"/>
               <a:t>Both explanations are highly reliable</a:t>
             </a:r>
-            <a:endParaRPr lang="en-US" sz="1000" i="0" dirty="0">
+            <a:endParaRPr lang="en-US" sz="900" i="0" dirty="0">
               <a:effectLst/>
             </a:endParaRPr>
           </a:p>
@@ -20429,7 +20686,7 @@
         <p:spPr>
           <a:xfrm>
             <a:off x="2619726" y="4353136"/>
-            <a:ext cx="6297198" cy="1631216"/>
+            <a:ext cx="6297198" cy="1477328"/>
           </a:xfrm>
           <a:prstGeom prst="rect">
             <a:avLst/>
@@ -20447,13 +20704,13 @@
               <a:buAutoNum type="arabicPeriod"/>
             </a:pPr>
             <a:r>
-              <a:rPr lang="en-US" sz="1000" b="1" i="0" dirty="0">
+              <a:rPr lang="en-US" sz="900" b="1" i="0" dirty="0">
                 <a:effectLst/>
               </a:rPr>
               <a:t>GNN Model Performance</a:t>
             </a:r>
             <a:r>
-              <a:rPr lang="en-US" sz="1000" b="0" i="0" dirty="0">
+              <a:rPr lang="en-US" sz="900" b="0" i="0" dirty="0">
                 <a:effectLst/>
               </a:rPr>
               <a:t>: Excellent (95.21% test accuracy)</a:t>
@@ -20464,7 +20721,7 @@
               <a:buFont typeface="+mj-lt"/>
               <a:buAutoNum type="arabicPeriod"/>
             </a:pPr>
-            <a:endParaRPr lang="en-US" sz="1000" b="0" i="0" dirty="0">
+            <a:endParaRPr lang="en-US" sz="900" b="0" i="0" dirty="0">
               <a:effectLst/>
             </a:endParaRPr>
           </a:p>
@@ -20474,19 +20731,19 @@
               <a:buAutoNum type="arabicPeriod"/>
             </a:pPr>
             <a:r>
-              <a:rPr lang="en-US" sz="1000" b="1" i="0" dirty="0" err="1">
+              <a:rPr lang="en-US" sz="900" b="1" i="0" dirty="0" err="1">
                 <a:effectLst/>
               </a:rPr>
               <a:t>EdgeSHAPer</a:t>
             </a:r>
             <a:r>
-              <a:rPr lang="en-US" sz="1000" b="1" i="0" dirty="0">
+              <a:rPr lang="en-US" sz="900" b="1" i="0" dirty="0">
                 <a:effectLst/>
               </a:rPr>
               <a:t> Explanations</a:t>
             </a:r>
             <a:r>
-              <a:rPr lang="en-US" sz="1000" b="0" i="0" dirty="0">
+              <a:rPr lang="en-US" sz="900" b="0" i="0" dirty="0">
                 <a:effectLst/>
               </a:rPr>
               <a:t>: Highly reliable (trustworthiness &gt; 0.90)</a:t>
@@ -20497,7 +20754,7 @@
               <a:buFont typeface="+mj-lt"/>
               <a:buAutoNum type="arabicPeriod"/>
             </a:pPr>
-            <a:endParaRPr lang="en-US" sz="1000" b="0" i="0" dirty="0">
+            <a:endParaRPr lang="en-US" sz="900" b="0" i="0" dirty="0">
               <a:effectLst/>
             </a:endParaRPr>
           </a:p>
@@ -20507,17 +20764,17 @@
               <a:buAutoNum type="arabicPeriod"/>
             </a:pPr>
             <a:r>
-              <a:rPr lang="en-US" sz="1000" b="1" dirty="0"/>
+              <a:rPr lang="en-US" sz="900" b="1" dirty="0"/>
               <a:t>C</a:t>
             </a:r>
             <a:r>
-              <a:rPr lang="en-US" sz="1000" b="1" i="0" dirty="0">
+              <a:rPr lang="en-US" sz="900" b="1" i="0" dirty="0">
                 <a:effectLst/>
               </a:rPr>
               <a:t>hemical Interpretability</a:t>
             </a:r>
             <a:r>
-              <a:rPr lang="en-US" sz="1000" b="0" i="0" dirty="0">
+              <a:rPr lang="en-US" sz="900" b="0" i="0" dirty="0">
                 <a:effectLst/>
               </a:rPr>
               <a:t>: The model learned meaningful structure-activity relationships</a:t>
@@ -20528,7 +20785,7 @@
               <a:buFont typeface="+mj-lt"/>
               <a:buAutoNum type="arabicPeriod"/>
             </a:pPr>
-            <a:endParaRPr lang="en-US" sz="1000" b="0" i="0" dirty="0">
+            <a:endParaRPr lang="en-US" sz="900" b="0" i="0" dirty="0">
               <a:effectLst/>
             </a:endParaRPr>
           </a:p>
@@ -20538,13 +20795,13 @@
               <a:buAutoNum type="arabicPeriod"/>
             </a:pPr>
             <a:r>
-              <a:rPr lang="en-US" sz="1000" b="1" i="0" dirty="0">
+              <a:rPr lang="en-US" sz="900" b="1" i="0" dirty="0">
                 <a:effectLst/>
               </a:rPr>
               <a:t>Actionable Insights</a:t>
             </a:r>
             <a:r>
-              <a:rPr lang="en-US" sz="1000" b="0" i="0" dirty="0">
+              <a:rPr lang="en-US" sz="900" b="0" i="0" dirty="0">
                 <a:effectLst/>
               </a:rPr>
               <a:t>:</a:t>
@@ -20556,7 +20813,7 @@
               <a:buChar char="•"/>
             </a:pPr>
             <a:r>
-              <a:rPr lang="en-US" sz="1000" b="0" i="0" dirty="0">
+              <a:rPr lang="en-US" sz="900" b="0" i="0" dirty="0">
                 <a:effectLst/>
               </a:rPr>
               <a:t>Piperazine-based scaffolds with halogenated aromatic rings are favorable</a:t>
@@ -20568,7 +20825,7 @@
               <a:buChar char="•"/>
             </a:pPr>
             <a:r>
-              <a:rPr lang="en-US" sz="1000" b="0" i="0" dirty="0">
+              <a:rPr lang="en-US" sz="900" b="0" i="0" dirty="0">
                 <a:effectLst/>
               </a:rPr>
               <a:t>Multiple balanced features contribute to activity (not just one dominant feature)</a:t>
@@ -20580,7 +20837,7 @@
               <a:buChar char="•"/>
             </a:pPr>
             <a:r>
-              <a:rPr lang="en-US" sz="1000" b="0" i="0" dirty="0">
+              <a:rPr lang="en-US" sz="900" b="0" i="0" dirty="0">
                 <a:effectLst/>
               </a:rPr>
               <a:t>Simple alkyl-aryl systems are less likely to be active</a:t>
@@ -20709,7 +20966,7 @@
                 </a:solidFill>
                 <a:latin typeface="Century Gothic"/>
               </a:rPr>
-              <a:t>Conclusion</a:t>
+              <a:t>Prompt 4</a:t>
             </a:r>
             <a:endParaRPr lang="en-US" sz="3200" b="0" strike="noStrike" spc="-1" dirty="0">
               <a:solidFill>
@@ -20722,66 +20979,10 @@
       </p:sp>
       <p:sp>
         <p:nvSpPr>
-          <p:cNvPr id="165" name="PlaceHolder 3">
-            <a:extLst>
-              <a:ext uri="{FF2B5EF4-FFF2-40B4-BE49-F238E27FC236}">
-                <a16:creationId xmlns:a16="http://schemas.microsoft.com/office/drawing/2014/main" id="{2EFBEA53-7B78-D9A1-93EF-9608A3193D27}"/>
-              </a:ext>
-            </a:extLst>
-          </p:cNvPr>
-          <p:cNvSpPr>
-            <a:spLocks noGrp="1"/>
-          </p:cNvSpPr>
-          <p:nvPr>
-            <p:ph type="sldNum"/>
-          </p:nvPr>
-        </p:nvSpPr>
-        <p:spPr>
-          <a:xfrm>
-            <a:off x="8376840" y="5692680"/>
-            <a:ext cx="384120" cy="364680"/>
-          </a:xfrm>
-          <a:prstGeom prst="rect">
-            <a:avLst/>
-          </a:prstGeom>
-          <a:noFill/>
-          <a:ln w="0">
-            <a:noFill/>
-          </a:ln>
-        </p:spPr>
-        <p:txBody>
-          <a:bodyPr anchor="ctr">
-            <a:noAutofit/>
-          </a:bodyPr>
-          <a:lstStyle/>
-          <a:p>
-            <a:pPr algn="r">
-              <a:lnSpc>
-                <a:spcPct val="100000"/>
-              </a:lnSpc>
-              <a:buNone/>
-            </a:pPr>
-            <a:fld id="{8BD7C522-1E12-40C3-B25E-5F0462E20B22}" type="slidenum">
-              <a:rPr lang="en-US" sz="1200" b="0" strike="noStrike" spc="-1">
-                <a:solidFill>
-                  <a:srgbClr val="8B8B8B"/>
-                </a:solidFill>
-                <a:latin typeface="Century Gothic"/>
-              </a:rPr>
-              <a:t>18</a:t>
-            </a:fld>
-            <a:endParaRPr lang="en-GB" sz="1200" b="0" strike="noStrike" spc="-1" dirty="0">
-              <a:latin typeface="Times New Roman"/>
-            </a:endParaRPr>
-          </a:p>
-        </p:txBody>
-      </p:sp>
-      <p:sp>
-        <p:nvSpPr>
           <p:cNvPr id="2" name="PlaceHolder 2">
             <a:extLst>
               <a:ext uri="{FF2B5EF4-FFF2-40B4-BE49-F238E27FC236}">
-                <a16:creationId xmlns:a16="http://schemas.microsoft.com/office/drawing/2014/main" id="{870990D0-7AC5-46BA-6FC4-274F8E0A3ABE}"/>
+                <a16:creationId xmlns:a16="http://schemas.microsoft.com/office/drawing/2014/main" id="{9FA20452-FA65-AFDC-8768-AEF2985C28BC}"/>
               </a:ext>
             </a:extLst>
           </p:cNvPr>
@@ -20793,7 +20994,7 @@
         <p:spPr>
           <a:xfrm>
             <a:off x="380880" y="1375729"/>
-            <a:ext cx="8380080" cy="4468480"/>
+            <a:ext cx="8380080" cy="1836598"/>
           </a:xfrm>
           <a:prstGeom prst="rect">
             <a:avLst/>
@@ -20994,7 +21195,7 @@
                 </a:solidFill>
                 <a:latin typeface="Century Gothic"/>
               </a:rPr>
-              <a:t>Aim: </a:t>
+              <a:t>Goal: </a:t>
             </a:r>
             <a:r>
               <a:rPr lang="en-US" sz="2000" spc="-1" dirty="0">
@@ -21003,7 +21204,7 @@
                 </a:solidFill>
                 <a:latin typeface="Century Gothic"/>
               </a:rPr>
-              <a:t>Design an agentic AI framework for interpretable AI applied to QSAR tasks 	</a:t>
+              <a:t>Demonstrate the ability of the agent to analyze and compare the different learning characteristics of graph-based  models</a:t>
             </a:r>
           </a:p>
           <a:p>
@@ -21014,6 +21215,9 @@
               <a:spcBef>
                 <a:spcPts val="400"/>
               </a:spcBef>
+              <a:spcAft>
+                <a:spcPts val="601"/>
+              </a:spcAft>
               <a:buClr>
                 <a:srgbClr val="0064C8"/>
               </a:buClr>
@@ -21025,152 +21229,8 @@
                 </a:solidFill>
                 <a:latin typeface="Century Gothic"/>
               </a:rPr>
-              <a:t>The framework allows for the building of interpretable AI without coding experience</a:t>
+              <a:t>Can the agent correctly compare and interpret explanations of different GNN models on the same compound?</a:t>
             </a:r>
-          </a:p>
-          <a:p>
-            <a:pPr>
-              <a:lnSpc>
-                <a:spcPct val="100000"/>
-              </a:lnSpc>
-              <a:spcBef>
-                <a:spcPts val="400"/>
-              </a:spcBef>
-              <a:buClr>
-                <a:srgbClr val="0064C8"/>
-              </a:buClr>
-            </a:pPr>
-            <a:r>
-              <a:rPr lang="en-US" sz="2000" spc="-1" dirty="0" err="1">
-                <a:solidFill>
-                  <a:srgbClr val="000000"/>
-                </a:solidFill>
-                <a:latin typeface="Century Gothic"/>
-              </a:rPr>
-              <a:t>ChemicHAL</a:t>
-            </a:r>
-            <a:r>
-              <a:rPr lang="en-US" sz="2000" spc="-1" dirty="0">
-                <a:solidFill>
-                  <a:srgbClr val="000000"/>
-                </a:solidFill>
-                <a:latin typeface="Century Gothic"/>
-              </a:rPr>
-              <a:t> was able to correctly choose tools and reproduce known results</a:t>
-            </a:r>
-          </a:p>
-          <a:p>
-            <a:pPr>
-              <a:lnSpc>
-                <a:spcPct val="100000"/>
-              </a:lnSpc>
-              <a:spcBef>
-                <a:spcPts val="400"/>
-              </a:spcBef>
-              <a:buClr>
-                <a:srgbClr val="0064C8"/>
-              </a:buClr>
-            </a:pPr>
-            <a:r>
-              <a:rPr lang="en-US" sz="2000" spc="-1" dirty="0">
-                <a:solidFill>
-                  <a:srgbClr val="000000"/>
-                </a:solidFill>
-                <a:latin typeface="Century Gothic"/>
-              </a:rPr>
-              <a:t>The system was effective in comparing different models and analyzing their learning characteristics</a:t>
-            </a:r>
-          </a:p>
-          <a:p>
-            <a:pPr>
-              <a:lnSpc>
-                <a:spcPct val="100000"/>
-              </a:lnSpc>
-              <a:spcBef>
-                <a:spcPts val="400"/>
-              </a:spcBef>
-              <a:buClr>
-                <a:srgbClr val="0064C8"/>
-              </a:buClr>
-            </a:pPr>
-            <a:r>
-              <a:rPr lang="en-US" sz="2000" spc="-1" dirty="0">
-                <a:solidFill>
-                  <a:srgbClr val="000000"/>
-                </a:solidFill>
-                <a:latin typeface="Century Gothic"/>
-              </a:rPr>
-              <a:t>The agent provided chemical interpretation for explanations and proposed “actionable insights”</a:t>
-            </a:r>
-          </a:p>
-          <a:p>
-            <a:pPr>
-              <a:lnSpc>
-                <a:spcPct val="100000"/>
-              </a:lnSpc>
-              <a:spcBef>
-                <a:spcPts val="400"/>
-              </a:spcBef>
-              <a:buClr>
-                <a:srgbClr val="0064C8"/>
-              </a:buClr>
-            </a:pPr>
-            <a:r>
-              <a:rPr lang="en-US" sz="2000" spc="-1" dirty="0">
-                <a:solidFill>
-                  <a:srgbClr val="000000"/>
-                </a:solidFill>
-                <a:latin typeface="Century Gothic"/>
-              </a:rPr>
-              <a:t>Important: interpretation of the results should be considered </a:t>
-            </a:r>
-            <a:r>
-              <a:rPr lang="en-US" sz="2000" b="1" spc="-1" dirty="0">
-                <a:solidFill>
-                  <a:srgbClr val="000000"/>
-                </a:solidFill>
-                <a:latin typeface="Century Gothic"/>
-              </a:rPr>
-              <a:t>with caution</a:t>
-            </a:r>
-          </a:p>
-          <a:p>
-            <a:pPr>
-              <a:lnSpc>
-                <a:spcPct val="100000"/>
-              </a:lnSpc>
-              <a:spcBef>
-                <a:spcPts val="400"/>
-              </a:spcBef>
-              <a:buClr>
-                <a:srgbClr val="0064C8"/>
-              </a:buClr>
-            </a:pPr>
-            <a:endParaRPr lang="en-US" sz="2000" spc="-1" dirty="0">
-              <a:solidFill>
-                <a:srgbClr val="000000"/>
-              </a:solidFill>
-              <a:latin typeface="Century Gothic"/>
-            </a:endParaRPr>
-          </a:p>
-          <a:p>
-            <a:pPr>
-              <a:lnSpc>
-                <a:spcPct val="100000"/>
-              </a:lnSpc>
-              <a:spcBef>
-                <a:spcPts val="400"/>
-              </a:spcBef>
-              <a:buClr>
-                <a:srgbClr val="0064C8"/>
-              </a:buClr>
-            </a:pPr>
-            <a:endParaRPr lang="en-US" sz="2000" spc="-1" dirty="0">
-              <a:solidFill>
-                <a:srgbClr val="000000"/>
-              </a:solidFill>
-              <a:latin typeface="Century Gothic"/>
-            </a:endParaRPr>
           </a:p>
           <a:p>
             <a:pPr marL="0" indent="0">
@@ -21188,7 +21248,7 @@
               </a:buClr>
               <a:buNone/>
             </a:pPr>
-            <a:endParaRPr lang="en-US" sz="2000" b="1" spc="-1" dirty="0">
+            <a:endParaRPr lang="en-US" sz="2000" spc="-1" dirty="0">
               <a:solidFill>
                 <a:srgbClr val="000000"/>
               </a:solidFill>
@@ -21197,10 +21257,226 @@
           </a:p>
         </p:txBody>
       </p:sp>
+      <p:sp>
+        <p:nvSpPr>
+          <p:cNvPr id="10" name="Speech Bubble: Rectangle with Corners Rounded 9">
+            <a:extLst>
+              <a:ext uri="{FF2B5EF4-FFF2-40B4-BE49-F238E27FC236}">
+                <a16:creationId xmlns:a16="http://schemas.microsoft.com/office/drawing/2014/main" id="{218E8154-7E95-D4BE-E8AA-D3B029A12B17}"/>
+              </a:ext>
+            </a:extLst>
+          </p:cNvPr>
+          <p:cNvSpPr/>
+          <p:nvPr/>
+        </p:nvSpPr>
+        <p:spPr>
+          <a:xfrm>
+            <a:off x="2665224" y="3920086"/>
+            <a:ext cx="5124797" cy="1264517"/>
+          </a:xfrm>
+          <a:prstGeom prst="wedgeRoundRectCallout">
+            <a:avLst>
+              <a:gd name="adj1" fmla="val -55595"/>
+              <a:gd name="adj2" fmla="val 23756"/>
+              <a:gd name="adj3" fmla="val 16667"/>
+            </a:avLst>
+          </a:prstGeom>
+        </p:spPr>
+        <p:style>
+          <a:lnRef idx="2">
+            <a:schemeClr val="dk1"/>
+          </a:lnRef>
+          <a:fillRef idx="1">
+            <a:schemeClr val="lt1"/>
+          </a:fillRef>
+          <a:effectRef idx="0">
+            <a:schemeClr val="dk1"/>
+          </a:effectRef>
+          <a:fontRef idx="minor">
+            <a:schemeClr val="dk1"/>
+          </a:fontRef>
+        </p:style>
+        <p:txBody>
+          <a:bodyPr rtlCol="0" anchor="ctr"/>
+          <a:lstStyle/>
+          <a:p>
+            <a:pPr algn="just"/>
+            <a:r>
+              <a:rPr lang="en-US" sz="1200" b="0" i="0" dirty="0">
+                <a:effectLst/>
+                <a:latin typeface="ui-sans-serif"/>
+              </a:rPr>
+              <a:t>Train two different GNN models on a compound activity prediction dataset and compare their performances. Select a compound from the test set correctly predicted as active by both models. Explain the predictions using </a:t>
+            </a:r>
+            <a:r>
+              <a:rPr lang="en-US" sz="1200" b="0" i="0" dirty="0" err="1">
+                <a:effectLst/>
+                <a:latin typeface="ui-sans-serif"/>
+              </a:rPr>
+              <a:t>EdgeSHAPer</a:t>
+            </a:r>
+            <a:r>
+              <a:rPr lang="en-US" sz="1200" b="0" i="0" dirty="0">
+                <a:effectLst/>
+                <a:latin typeface="ui-sans-serif"/>
+              </a:rPr>
+              <a:t> and highlight the differences between the learning characteristics of the models showing relevant visualizations.</a:t>
+            </a:r>
+            <a:endParaRPr lang="en-US" sz="1200" dirty="0"/>
+          </a:p>
+        </p:txBody>
+      </p:sp>
+      <p:grpSp>
+        <p:nvGrpSpPr>
+          <p:cNvPr id="11" name="Group 10">
+            <a:extLst>
+              <a:ext uri="{FF2B5EF4-FFF2-40B4-BE49-F238E27FC236}">
+                <a16:creationId xmlns:a16="http://schemas.microsoft.com/office/drawing/2014/main" id="{788479A3-3923-48AE-F836-EB227D56F8F3}"/>
+              </a:ext>
+            </a:extLst>
+          </p:cNvPr>
+          <p:cNvGrpSpPr/>
+          <p:nvPr/>
+        </p:nvGrpSpPr>
+        <p:grpSpPr>
+          <a:xfrm>
+            <a:off x="481031" y="3667833"/>
+            <a:ext cx="1774658" cy="2310063"/>
+            <a:chOff x="990492" y="2511372"/>
+            <a:chExt cx="1774658" cy="2310063"/>
+          </a:xfrm>
+        </p:grpSpPr>
+        <p:sp>
+          <p:nvSpPr>
+            <p:cNvPr id="12" name="Rectangle 11">
+              <a:extLst>
+                <a:ext uri="{FF2B5EF4-FFF2-40B4-BE49-F238E27FC236}">
+                  <a16:creationId xmlns:a16="http://schemas.microsoft.com/office/drawing/2014/main" id="{2D142D64-B397-2830-786D-0D3574B657AC}"/>
+                </a:ext>
+              </a:extLst>
+            </p:cNvPr>
+            <p:cNvSpPr/>
+            <p:nvPr/>
+          </p:nvSpPr>
+          <p:spPr>
+            <a:xfrm>
+              <a:off x="990492" y="2511372"/>
+              <a:ext cx="1774658" cy="2310063"/>
+            </a:xfrm>
+            <a:prstGeom prst="rect">
+              <a:avLst/>
+            </a:prstGeom>
+            <a:solidFill>
+              <a:schemeClr val="accent1">
+                <a:lumMod val="20000"/>
+                <a:lumOff val="80000"/>
+              </a:schemeClr>
+            </a:solidFill>
+            <a:ln>
+              <a:solidFill>
+                <a:schemeClr val="tx2">
+                  <a:lumMod val="25000"/>
+                  <a:lumOff val="75000"/>
+                </a:schemeClr>
+              </a:solidFill>
+            </a:ln>
+          </p:spPr>
+          <p:style>
+            <a:lnRef idx="2">
+              <a:schemeClr val="accent1">
+                <a:shade val="15000"/>
+              </a:schemeClr>
+            </a:lnRef>
+            <a:fillRef idx="1">
+              <a:schemeClr val="accent1"/>
+            </a:fillRef>
+            <a:effectRef idx="0">
+              <a:schemeClr val="accent1"/>
+            </a:effectRef>
+            <a:fontRef idx="minor">
+              <a:schemeClr val="lt1"/>
+            </a:fontRef>
+          </p:style>
+          <p:txBody>
+            <a:bodyPr rtlCol="0" anchor="ctr"/>
+            <a:lstStyle/>
+            <a:p>
+              <a:pPr algn="ctr"/>
+              <a:endParaRPr lang="en-US" dirty="0"/>
+            </a:p>
+          </p:txBody>
+        </p:sp>
+        <p:pic>
+          <p:nvPicPr>
+            <p:cNvPr id="13" name="Graphic 12" descr="Customer review with solid fill">
+              <a:extLst>
+                <a:ext uri="{FF2B5EF4-FFF2-40B4-BE49-F238E27FC236}">
+                  <a16:creationId xmlns:a16="http://schemas.microsoft.com/office/drawing/2014/main" id="{64E33793-8C2A-2656-B0ED-A696739E718A}"/>
+                </a:ext>
+              </a:extLst>
+            </p:cNvPr>
+            <p:cNvPicPr>
+              <a:picLocks noChangeAspect="1"/>
+            </p:cNvPicPr>
+            <p:nvPr/>
+          </p:nvPicPr>
+          <p:blipFill>
+            <a:blip r:embed="rId2">
+              <a:extLst>
+                <a:ext uri="{96DAC541-7B7A-43D3-8B79-37D633B846F1}">
+                  <asvg:svgBlip xmlns:asvg="http://schemas.microsoft.com/office/drawing/2016/SVG/main" r:embed="rId3"/>
+                </a:ext>
+              </a:extLst>
+            </a:blip>
+            <a:stretch>
+              <a:fillRect/>
+            </a:stretch>
+          </p:blipFill>
+          <p:spPr>
+            <a:xfrm>
+              <a:off x="1400027" y="3700649"/>
+              <a:ext cx="965534" cy="965534"/>
+            </a:xfrm>
+            <a:prstGeom prst="rect">
+              <a:avLst/>
+            </a:prstGeom>
+          </p:spPr>
+        </p:pic>
+        <p:pic>
+          <p:nvPicPr>
+            <p:cNvPr id="14" name="Picture 13">
+              <a:extLst>
+                <a:ext uri="{FF2B5EF4-FFF2-40B4-BE49-F238E27FC236}">
+                  <a16:creationId xmlns:a16="http://schemas.microsoft.com/office/drawing/2014/main" id="{1B081600-3BCF-355C-CB19-D7A38C9862A0}"/>
+                </a:ext>
+              </a:extLst>
+            </p:cNvPr>
+            <p:cNvPicPr>
+              <a:picLocks noChangeAspect="1"/>
+            </p:cNvPicPr>
+            <p:nvPr/>
+          </p:nvPicPr>
+          <p:blipFill>
+            <a:blip r:embed="rId4"/>
+            <a:stretch>
+              <a:fillRect/>
+            </a:stretch>
+          </p:blipFill>
+          <p:spPr>
+            <a:xfrm>
+              <a:off x="1126882" y="2607575"/>
+              <a:ext cx="1525117" cy="996871"/>
+            </a:xfrm>
+            <a:prstGeom prst="rect">
+              <a:avLst/>
+            </a:prstGeom>
+          </p:spPr>
+        </p:pic>
+      </p:grpSp>
     </p:spTree>
     <p:extLst>
       <p:ext uri="{BB962C8B-B14F-4D97-AF65-F5344CB8AC3E}">
-        <p14:creationId xmlns:p14="http://schemas.microsoft.com/office/powerpoint/2010/main" val="975240416"/>
+        <p14:creationId xmlns:p14="http://schemas.microsoft.com/office/powerpoint/2010/main" val="1863241207"/>
       </p:ext>
     </p:extLst>
   </p:cSld>
@@ -21281,7 +21557,7 @@
                 </a:solidFill>
                 <a:latin typeface="Century Gothic"/>
               </a:rPr>
-              <a:t>Future perspective</a:t>
+              <a:t>Prompt 4</a:t>
             </a:r>
             <a:endParaRPr lang="en-US" sz="3200" b="0" strike="noStrike" spc="-1" dirty="0">
               <a:solidFill>
@@ -21292,432 +21568,1394 @@
           </a:p>
         </p:txBody>
       </p:sp>
-      <p:sp>
-        <p:nvSpPr>
-          <p:cNvPr id="165" name="PlaceHolder 3">
+      <p:grpSp>
+        <p:nvGrpSpPr>
+          <p:cNvPr id="20" name="Group 19">
             <a:extLst>
               <a:ext uri="{FF2B5EF4-FFF2-40B4-BE49-F238E27FC236}">
-                <a16:creationId xmlns:a16="http://schemas.microsoft.com/office/drawing/2014/main" id="{2EFBEA53-7B78-D9A1-93EF-9608A3193D27}"/>
+                <a16:creationId xmlns:a16="http://schemas.microsoft.com/office/drawing/2014/main" id="{81A65B80-1110-F1AF-A893-8B82ECA10662}"/>
               </a:ext>
             </a:extLst>
           </p:cNvPr>
-          <p:cNvSpPr>
-            <a:spLocks noGrp="1"/>
-          </p:cNvSpPr>
-          <p:nvPr>
-            <p:ph type="sldNum"/>
-          </p:nvPr>
+          <p:cNvGrpSpPr>
+            <a:grpSpLocks noChangeAspect="1"/>
+          </p:cNvGrpSpPr>
+          <p:nvPr/>
+        </p:nvGrpSpPr>
+        <p:grpSpPr>
+          <a:xfrm>
+            <a:off x="290791" y="857877"/>
+            <a:ext cx="7317198" cy="3011903"/>
+            <a:chOff x="232995" y="412647"/>
+            <a:chExt cx="9811179" cy="4038476"/>
+          </a:xfrm>
+        </p:grpSpPr>
+        <p:sp>
+          <p:nvSpPr>
+            <p:cNvPr id="2" name="TextBox 1">
+              <a:extLst>
+                <a:ext uri="{FF2B5EF4-FFF2-40B4-BE49-F238E27FC236}">
+                  <a16:creationId xmlns:a16="http://schemas.microsoft.com/office/drawing/2014/main" id="{9803C720-5E38-494F-5EED-73C1A8624CA2}"/>
+                </a:ext>
+              </a:extLst>
+            </p:cNvPr>
+            <p:cNvSpPr txBox="1"/>
+            <p:nvPr/>
+          </p:nvSpPr>
+          <p:spPr>
+            <a:xfrm>
+              <a:off x="232995" y="4079712"/>
+              <a:ext cx="9811179" cy="371411"/>
+            </a:xfrm>
+            <a:prstGeom prst="rect">
+              <a:avLst/>
+            </a:prstGeom>
+            <a:noFill/>
+          </p:spPr>
+          <p:txBody>
+            <a:bodyPr wrap="square">
+              <a:spAutoFit/>
+            </a:bodyPr>
+            <a:lstStyle/>
+            <a:p>
+              <a:pPr algn="ctr"/>
+              <a:endParaRPr lang="en-US" sz="1200" b="1" dirty="0"/>
+            </a:p>
+          </p:txBody>
+        </p:sp>
+        <p:grpSp>
+          <p:nvGrpSpPr>
+            <p:cNvPr id="3" name="Group 2">
+              <a:extLst>
+                <a:ext uri="{FF2B5EF4-FFF2-40B4-BE49-F238E27FC236}">
+                  <a16:creationId xmlns:a16="http://schemas.microsoft.com/office/drawing/2014/main" id="{98A01790-818B-0A8F-30E5-1112281C9B36}"/>
+                </a:ext>
+              </a:extLst>
+            </p:cNvPr>
+            <p:cNvGrpSpPr/>
+            <p:nvPr/>
+          </p:nvGrpSpPr>
+          <p:grpSpPr>
+            <a:xfrm>
+              <a:off x="232995" y="835775"/>
+              <a:ext cx="1774658" cy="2310063"/>
+              <a:chOff x="990492" y="2511372"/>
+              <a:chExt cx="1774658" cy="2310063"/>
+            </a:xfrm>
+          </p:grpSpPr>
+          <p:sp>
+            <p:nvSpPr>
+              <p:cNvPr id="4" name="Rectangle 3">
+                <a:extLst>
+                  <a:ext uri="{FF2B5EF4-FFF2-40B4-BE49-F238E27FC236}">
+                    <a16:creationId xmlns:a16="http://schemas.microsoft.com/office/drawing/2014/main" id="{29C55CA4-9FFE-F8C7-14D1-7771639D14E4}"/>
+                  </a:ext>
+                </a:extLst>
+              </p:cNvPr>
+              <p:cNvSpPr/>
+              <p:nvPr/>
+            </p:nvSpPr>
+            <p:spPr>
+              <a:xfrm>
+                <a:off x="990492" y="2511372"/>
+                <a:ext cx="1774658" cy="2310063"/>
+              </a:xfrm>
+              <a:prstGeom prst="rect">
+                <a:avLst/>
+              </a:prstGeom>
+              <a:solidFill>
+                <a:schemeClr val="accent1">
+                  <a:lumMod val="20000"/>
+                  <a:lumOff val="80000"/>
+                </a:schemeClr>
+              </a:solidFill>
+              <a:ln>
+                <a:solidFill>
+                  <a:schemeClr val="tx2">
+                    <a:lumMod val="25000"/>
+                    <a:lumOff val="75000"/>
+                  </a:schemeClr>
+                </a:solidFill>
+              </a:ln>
+            </p:spPr>
+            <p:style>
+              <a:lnRef idx="2">
+                <a:schemeClr val="accent1">
+                  <a:shade val="15000"/>
+                </a:schemeClr>
+              </a:lnRef>
+              <a:fillRef idx="1">
+                <a:schemeClr val="accent1"/>
+              </a:fillRef>
+              <a:effectRef idx="0">
+                <a:schemeClr val="accent1"/>
+              </a:effectRef>
+              <a:fontRef idx="minor">
+                <a:schemeClr val="lt1"/>
+              </a:fontRef>
+            </p:style>
+            <p:txBody>
+              <a:bodyPr rtlCol="0" anchor="ctr"/>
+              <a:lstStyle/>
+              <a:p>
+                <a:pPr algn="ctr"/>
+                <a:endParaRPr lang="en-US" dirty="0"/>
+              </a:p>
+            </p:txBody>
+          </p:sp>
+          <p:pic>
+            <p:nvPicPr>
+              <p:cNvPr id="5" name="Graphic 4" descr="Customer review with solid fill">
+                <a:extLst>
+                  <a:ext uri="{FF2B5EF4-FFF2-40B4-BE49-F238E27FC236}">
+                    <a16:creationId xmlns:a16="http://schemas.microsoft.com/office/drawing/2014/main" id="{BC3098E3-543E-39F7-8A4E-3EA3BD9DACFE}"/>
+                  </a:ext>
+                </a:extLst>
+              </p:cNvPr>
+              <p:cNvPicPr>
+                <a:picLocks noChangeAspect="1"/>
+              </p:cNvPicPr>
+              <p:nvPr/>
+            </p:nvPicPr>
+            <p:blipFill>
+              <a:blip r:embed="rId3">
+                <a:extLst>
+                  <a:ext uri="{96DAC541-7B7A-43D3-8B79-37D633B846F1}">
+                    <asvg:svgBlip xmlns:asvg="http://schemas.microsoft.com/office/drawing/2016/SVG/main" r:embed="rId4"/>
+                  </a:ext>
+                </a:extLst>
+              </a:blip>
+              <a:stretch>
+                <a:fillRect/>
+              </a:stretch>
+            </p:blipFill>
+            <p:spPr>
+              <a:xfrm>
+                <a:off x="1400027" y="3700649"/>
+                <a:ext cx="965534" cy="965534"/>
+              </a:xfrm>
+              <a:prstGeom prst="rect">
+                <a:avLst/>
+              </a:prstGeom>
+            </p:spPr>
+          </p:pic>
+          <p:pic>
+            <p:nvPicPr>
+              <p:cNvPr id="6" name="Picture 5">
+                <a:extLst>
+                  <a:ext uri="{FF2B5EF4-FFF2-40B4-BE49-F238E27FC236}">
+                    <a16:creationId xmlns:a16="http://schemas.microsoft.com/office/drawing/2014/main" id="{A6C08A7B-D7B2-8D7E-7551-DA70599DDC7E}"/>
+                  </a:ext>
+                </a:extLst>
+              </p:cNvPr>
+              <p:cNvPicPr>
+                <a:picLocks noChangeAspect="1"/>
+              </p:cNvPicPr>
+              <p:nvPr/>
+            </p:nvPicPr>
+            <p:blipFill>
+              <a:blip r:embed="rId5"/>
+              <a:stretch>
+                <a:fillRect/>
+              </a:stretch>
+            </p:blipFill>
+            <p:spPr>
+              <a:xfrm>
+                <a:off x="1126882" y="2607575"/>
+                <a:ext cx="1525117" cy="996871"/>
+              </a:xfrm>
+              <a:prstGeom prst="rect">
+                <a:avLst/>
+              </a:prstGeom>
+            </p:spPr>
+          </p:pic>
+        </p:grpSp>
+        <p:sp>
+          <p:nvSpPr>
+            <p:cNvPr id="7" name="Arrow: Right 6">
+              <a:extLst>
+                <a:ext uri="{FF2B5EF4-FFF2-40B4-BE49-F238E27FC236}">
+                  <a16:creationId xmlns:a16="http://schemas.microsoft.com/office/drawing/2014/main" id="{97128B13-4612-273D-93A3-BB4FE0ECD72E}"/>
+                </a:ext>
+              </a:extLst>
+            </p:cNvPr>
+            <p:cNvSpPr/>
+            <p:nvPr/>
+          </p:nvSpPr>
+          <p:spPr>
+            <a:xfrm>
+              <a:off x="2327498" y="1803354"/>
+              <a:ext cx="666746" cy="374904"/>
+            </a:xfrm>
+            <a:prstGeom prst="rightArrow">
+              <a:avLst/>
+            </a:prstGeom>
+          </p:spPr>
+          <p:style>
+            <a:lnRef idx="2">
+              <a:schemeClr val="accent1">
+                <a:shade val="15000"/>
+              </a:schemeClr>
+            </a:lnRef>
+            <a:fillRef idx="1">
+              <a:schemeClr val="accent1"/>
+            </a:fillRef>
+            <a:effectRef idx="0">
+              <a:schemeClr val="accent1"/>
+            </a:effectRef>
+            <a:fontRef idx="minor">
+              <a:schemeClr val="lt1"/>
+            </a:fontRef>
+          </p:style>
+          <p:txBody>
+            <a:bodyPr rtlCol="0" anchor="ctr"/>
+            <a:lstStyle/>
+            <a:p>
+              <a:pPr algn="ctr"/>
+              <a:endParaRPr lang="en-US"/>
+            </a:p>
+          </p:txBody>
+        </p:sp>
+        <p:sp>
+          <p:nvSpPr>
+            <p:cNvPr id="8" name="TextBox 7">
+              <a:extLst>
+                <a:ext uri="{FF2B5EF4-FFF2-40B4-BE49-F238E27FC236}">
+                  <a16:creationId xmlns:a16="http://schemas.microsoft.com/office/drawing/2014/main" id="{BFA4F87D-A515-0617-5B19-E065DFAAA219}"/>
+                </a:ext>
+              </a:extLst>
+            </p:cNvPr>
+            <p:cNvSpPr txBox="1"/>
+            <p:nvPr/>
+          </p:nvSpPr>
+          <p:spPr>
+            <a:xfrm>
+              <a:off x="6338068" y="412647"/>
+              <a:ext cx="2444839" cy="453946"/>
+            </a:xfrm>
+            <a:prstGeom prst="rect">
+              <a:avLst/>
+            </a:prstGeom>
+            <a:noFill/>
+          </p:spPr>
+          <p:txBody>
+            <a:bodyPr wrap="square" rtlCol="0">
+              <a:spAutoFit/>
+            </a:bodyPr>
+            <a:lstStyle/>
+            <a:p>
+              <a:pPr algn="ctr"/>
+              <a:r>
+                <a:rPr lang="en-US" sz="1600" b="1" dirty="0"/>
+                <a:t>GCN vs GAT</a:t>
+              </a:r>
+              <a:endParaRPr lang="de-DE" sz="1600" b="1" dirty="0"/>
+            </a:p>
+          </p:txBody>
+        </p:sp>
+        <p:sp>
+          <p:nvSpPr>
+            <p:cNvPr id="10" name="Arrow: Right 9">
+              <a:extLst>
+                <a:ext uri="{FF2B5EF4-FFF2-40B4-BE49-F238E27FC236}">
+                  <a16:creationId xmlns:a16="http://schemas.microsoft.com/office/drawing/2014/main" id="{A3301E51-4E33-A5C6-58D1-99F3B3249BC8}"/>
+                </a:ext>
+              </a:extLst>
+            </p:cNvPr>
+            <p:cNvSpPr/>
+            <p:nvPr/>
+          </p:nvSpPr>
+          <p:spPr>
+            <a:xfrm rot="5400000">
+              <a:off x="786951" y="3558887"/>
+              <a:ext cx="666746" cy="374904"/>
+            </a:xfrm>
+            <a:prstGeom prst="rightArrow">
+              <a:avLst/>
+            </a:prstGeom>
+          </p:spPr>
+          <p:style>
+            <a:lnRef idx="2">
+              <a:schemeClr val="accent1">
+                <a:shade val="15000"/>
+              </a:schemeClr>
+            </a:lnRef>
+            <a:fillRef idx="1">
+              <a:schemeClr val="accent1"/>
+            </a:fillRef>
+            <a:effectRef idx="0">
+              <a:schemeClr val="accent1"/>
+            </a:effectRef>
+            <a:fontRef idx="minor">
+              <a:schemeClr val="lt1"/>
+            </a:fontRef>
+          </p:style>
+          <p:txBody>
+            <a:bodyPr rtlCol="0" anchor="ctr"/>
+            <a:lstStyle/>
+            <a:p>
+              <a:pPr algn="ctr"/>
+              <a:endParaRPr lang="en-US"/>
+            </a:p>
+          </p:txBody>
+        </p:sp>
+      </p:grpSp>
+      <p:sp>
+        <p:nvSpPr>
+          <p:cNvPr id="28" name="TextBox 27">
+            <a:extLst>
+              <a:ext uri="{FF2B5EF4-FFF2-40B4-BE49-F238E27FC236}">
+                <a16:creationId xmlns:a16="http://schemas.microsoft.com/office/drawing/2014/main" id="{61609AF1-C869-43C4-A801-DADCFAA97D78}"/>
+              </a:ext>
+            </a:extLst>
+          </p:cNvPr>
+          <p:cNvSpPr txBox="1"/>
+          <p:nvPr/>
         </p:nvSpPr>
         <p:spPr>
           <a:xfrm>
-            <a:off x="8376840" y="5692680"/>
-            <a:ext cx="384120" cy="364680"/>
+            <a:off x="1110455" y="6367558"/>
+            <a:ext cx="1823366" cy="338554"/>
           </a:xfrm>
           <a:prstGeom prst="rect">
             <a:avLst/>
           </a:prstGeom>
           <a:noFill/>
-          <a:ln w="0">
-            <a:noFill/>
-          </a:ln>
         </p:spPr>
         <p:txBody>
-          <a:bodyPr anchor="ctr">
-            <a:noAutofit/>
+          <a:bodyPr wrap="square" rtlCol="0">
+            <a:spAutoFit/>
           </a:bodyPr>
           <a:lstStyle/>
           <a:p>
-            <a:pPr algn="r">
-              <a:lnSpc>
-                <a:spcPct val="100000"/>
-              </a:lnSpc>
-              <a:buNone/>
-            </a:pPr>
-            <a:fld id="{8BD7C522-1E12-40C3-B25E-5F0462E20B22}" type="slidenum">
-              <a:rPr lang="en-US" sz="1200" b="0" strike="noStrike" spc="-1">
-                <a:solidFill>
-                  <a:srgbClr val="8B8B8B"/>
-                </a:solidFill>
-                <a:latin typeface="Century Gothic"/>
-              </a:rPr>
-              <a:t>19</a:t>
-            </a:fld>
-            <a:endParaRPr lang="en-GB" sz="1200" b="0" strike="noStrike" spc="-1" dirty="0">
-              <a:latin typeface="Times New Roman"/>
-            </a:endParaRPr>
+            <a:pPr algn="ctr"/>
+            <a:r>
+              <a:rPr lang="en-US" sz="1600" b="1" dirty="0"/>
+              <a:t>GCN</a:t>
+            </a:r>
+            <a:endParaRPr lang="de-DE" sz="1600" b="1" dirty="0"/>
           </a:p>
         </p:txBody>
       </p:sp>
       <p:sp>
         <p:nvSpPr>
-          <p:cNvPr id="2" name="PlaceHolder 2">
+          <p:cNvPr id="29" name="TextBox 28">
             <a:extLst>
               <a:ext uri="{FF2B5EF4-FFF2-40B4-BE49-F238E27FC236}">
-                <a16:creationId xmlns:a16="http://schemas.microsoft.com/office/drawing/2014/main" id="{870990D0-7AC5-46BA-6FC4-274F8E0A3ABE}"/>
+                <a16:creationId xmlns:a16="http://schemas.microsoft.com/office/drawing/2014/main" id="{FBCF2756-B344-4B47-A8E8-C0E356215CFB}"/>
               </a:ext>
             </a:extLst>
           </p:cNvPr>
-          <p:cNvSpPr txBox="1">
-            <a:spLocks/>
-          </p:cNvSpPr>
+          <p:cNvSpPr txBox="1"/>
           <p:nvPr/>
         </p:nvSpPr>
         <p:spPr>
           <a:xfrm>
-            <a:off x="380880" y="1375729"/>
-            <a:ext cx="8380080" cy="4468480"/>
+            <a:off x="380880" y="3758675"/>
+            <a:ext cx="3205030" cy="338554"/>
           </a:xfrm>
           <a:prstGeom prst="rect">
             <a:avLst/>
           </a:prstGeom>
           <a:noFill/>
-          <a:ln w="0">
-            <a:noFill/>
-          </a:ln>
         </p:spPr>
         <p:txBody>
-          <a:bodyPr numCol="1" spcCol="0" anchor="t">
-            <a:noAutofit/>
+          <a:bodyPr wrap="square" rtlCol="0">
+            <a:spAutoFit/>
           </a:bodyPr>
-          <a:lstStyle>
-            <a:lvl1pPr marL="228600" indent="-228600" algn="l" defTabSz="914400" rtl="0" eaLnBrk="1" latinLnBrk="0" hangingPunct="1">
-              <a:lnSpc>
-                <a:spcPct val="90000"/>
-              </a:lnSpc>
-              <a:spcBef>
-                <a:spcPts val="1000"/>
-              </a:spcBef>
-              <a:buFont typeface="Arial" panose="020B0604020202020204" pitchFamily="34" charset="0"/>
-              <a:buChar char="•"/>
-              <a:defRPr sz="2800" kern="1200">
-                <a:solidFill>
-                  <a:schemeClr val="tx1"/>
-                </a:solidFill>
-                <a:latin typeface="+mn-lt"/>
-                <a:ea typeface="+mn-ea"/>
-                <a:cs typeface="+mn-cs"/>
-              </a:defRPr>
-            </a:lvl1pPr>
-            <a:lvl2pPr marL="685800" indent="-228600" algn="l" defTabSz="914400" rtl="0" eaLnBrk="1" latinLnBrk="0" hangingPunct="1">
-              <a:lnSpc>
-                <a:spcPct val="90000"/>
-              </a:lnSpc>
-              <a:spcBef>
-                <a:spcPts val="500"/>
-              </a:spcBef>
-              <a:buFont typeface="Arial" panose="020B0604020202020204" pitchFamily="34" charset="0"/>
-              <a:buChar char="•"/>
-              <a:defRPr sz="2400" kern="1200">
-                <a:solidFill>
-                  <a:schemeClr val="tx1"/>
-                </a:solidFill>
-                <a:latin typeface="+mn-lt"/>
-                <a:ea typeface="+mn-ea"/>
-                <a:cs typeface="+mn-cs"/>
-              </a:defRPr>
-            </a:lvl2pPr>
-            <a:lvl3pPr marL="1143000" indent="-228600" algn="l" defTabSz="914400" rtl="0" eaLnBrk="1" latinLnBrk="0" hangingPunct="1">
-              <a:lnSpc>
-                <a:spcPct val="90000"/>
-              </a:lnSpc>
-              <a:spcBef>
-                <a:spcPts val="500"/>
-              </a:spcBef>
-              <a:buFont typeface="Arial" panose="020B0604020202020204" pitchFamily="34" charset="0"/>
-              <a:buChar char="•"/>
-              <a:defRPr sz="2000" kern="1200">
-                <a:solidFill>
-                  <a:schemeClr val="tx1"/>
-                </a:solidFill>
-                <a:latin typeface="+mn-lt"/>
-                <a:ea typeface="+mn-ea"/>
-                <a:cs typeface="+mn-cs"/>
-              </a:defRPr>
-            </a:lvl3pPr>
-            <a:lvl4pPr marL="1600200" indent="-228600" algn="l" defTabSz="914400" rtl="0" eaLnBrk="1" latinLnBrk="0" hangingPunct="1">
-              <a:lnSpc>
-                <a:spcPct val="90000"/>
-              </a:lnSpc>
-              <a:spcBef>
-                <a:spcPts val="500"/>
-              </a:spcBef>
-              <a:buFont typeface="Arial" panose="020B0604020202020204" pitchFamily="34" charset="0"/>
-              <a:buChar char="•"/>
-              <a:defRPr sz="1800" kern="1200">
-                <a:solidFill>
-                  <a:schemeClr val="tx1"/>
-                </a:solidFill>
-                <a:latin typeface="+mn-lt"/>
-                <a:ea typeface="+mn-ea"/>
-                <a:cs typeface="+mn-cs"/>
-              </a:defRPr>
-            </a:lvl4pPr>
-            <a:lvl5pPr marL="2057400" indent="-228600" algn="l" defTabSz="914400" rtl="0" eaLnBrk="1" latinLnBrk="0" hangingPunct="1">
-              <a:lnSpc>
-                <a:spcPct val="90000"/>
-              </a:lnSpc>
-              <a:spcBef>
-                <a:spcPts val="500"/>
-              </a:spcBef>
-              <a:buFont typeface="Arial" panose="020B0604020202020204" pitchFamily="34" charset="0"/>
-              <a:buChar char="•"/>
-              <a:defRPr sz="1800" kern="1200">
-                <a:solidFill>
-                  <a:schemeClr val="tx1"/>
-                </a:solidFill>
-                <a:latin typeface="+mn-lt"/>
-                <a:ea typeface="+mn-ea"/>
-                <a:cs typeface="+mn-cs"/>
-              </a:defRPr>
-            </a:lvl5pPr>
-            <a:lvl6pPr marL="2514600" indent="-228600" algn="l" defTabSz="914400" rtl="0" eaLnBrk="1" latinLnBrk="0" hangingPunct="1">
-              <a:lnSpc>
-                <a:spcPct val="90000"/>
-              </a:lnSpc>
-              <a:spcBef>
-                <a:spcPts val="500"/>
-              </a:spcBef>
-              <a:buFont typeface="Arial" panose="020B0604020202020204" pitchFamily="34" charset="0"/>
-              <a:buChar char="•"/>
-              <a:defRPr sz="1800" kern="1200">
-                <a:solidFill>
-                  <a:schemeClr val="tx1"/>
-                </a:solidFill>
-                <a:latin typeface="+mn-lt"/>
-                <a:ea typeface="+mn-ea"/>
-                <a:cs typeface="+mn-cs"/>
-              </a:defRPr>
-            </a:lvl6pPr>
-            <a:lvl7pPr marL="2971800" indent="-228600" algn="l" defTabSz="914400" rtl="0" eaLnBrk="1" latinLnBrk="0" hangingPunct="1">
-              <a:lnSpc>
-                <a:spcPct val="90000"/>
-              </a:lnSpc>
-              <a:spcBef>
-                <a:spcPts val="500"/>
-              </a:spcBef>
-              <a:buFont typeface="Arial" panose="020B0604020202020204" pitchFamily="34" charset="0"/>
-              <a:buChar char="•"/>
-              <a:defRPr sz="1800" kern="1200">
-                <a:solidFill>
-                  <a:schemeClr val="tx1"/>
-                </a:solidFill>
-                <a:latin typeface="+mn-lt"/>
-                <a:ea typeface="+mn-ea"/>
-                <a:cs typeface="+mn-cs"/>
-              </a:defRPr>
-            </a:lvl7pPr>
-            <a:lvl8pPr marL="3429000" indent="-228600" algn="l" defTabSz="914400" rtl="0" eaLnBrk="1" latinLnBrk="0" hangingPunct="1">
-              <a:lnSpc>
-                <a:spcPct val="90000"/>
-              </a:lnSpc>
-              <a:spcBef>
-                <a:spcPts val="500"/>
-              </a:spcBef>
-              <a:buFont typeface="Arial" panose="020B0604020202020204" pitchFamily="34" charset="0"/>
-              <a:buChar char="•"/>
-              <a:defRPr sz="1800" kern="1200">
-                <a:solidFill>
-                  <a:schemeClr val="tx1"/>
-                </a:solidFill>
-                <a:latin typeface="+mn-lt"/>
-                <a:ea typeface="+mn-ea"/>
-                <a:cs typeface="+mn-cs"/>
-              </a:defRPr>
-            </a:lvl8pPr>
-            <a:lvl9pPr marL="3886200" indent="-228600" algn="l" defTabSz="914400" rtl="0" eaLnBrk="1" latinLnBrk="0" hangingPunct="1">
-              <a:lnSpc>
-                <a:spcPct val="90000"/>
-              </a:lnSpc>
-              <a:spcBef>
-                <a:spcPts val="500"/>
-              </a:spcBef>
-              <a:buFont typeface="Arial" panose="020B0604020202020204" pitchFamily="34" charset="0"/>
-              <a:buChar char="•"/>
-              <a:defRPr sz="1800" kern="1200">
-                <a:solidFill>
-                  <a:schemeClr val="tx1"/>
-                </a:solidFill>
-                <a:latin typeface="+mn-lt"/>
-                <a:ea typeface="+mn-ea"/>
-                <a:cs typeface="+mn-cs"/>
-              </a:defRPr>
-            </a:lvl9pPr>
-          </a:lstStyle>
+          <a:lstStyle/>
           <a:p>
-            <a:pPr>
-              <a:lnSpc>
-                <a:spcPct val="100000"/>
-              </a:lnSpc>
-              <a:spcBef>
-                <a:spcPts val="400"/>
-              </a:spcBef>
-              <a:buClr>
-                <a:srgbClr val="0064C8"/>
-              </a:buClr>
-            </a:pPr>
             <a:r>
-              <a:rPr lang="en-US" sz="2000" spc="-1" dirty="0">
-                <a:solidFill>
-                  <a:srgbClr val="000000"/>
-                </a:solidFill>
-                <a:latin typeface="Century Gothic"/>
-              </a:rPr>
-              <a:t>Make an “organization repository” available for the whole lab to ease the </a:t>
+              <a:rPr lang="en-US" sz="1600" b="1" dirty="0"/>
+              <a:t>Compound selected for XAI</a:t>
             </a:r>
-            <a:r>
-              <a:rPr lang="en-US" sz="2000" b="1" spc="-1" dirty="0">
-                <a:solidFill>
-                  <a:srgbClr val="000000"/>
-                </a:solidFill>
-                <a:latin typeface="Century Gothic"/>
-              </a:rPr>
-              <a:t>integration of new components</a:t>
-            </a:r>
-          </a:p>
-          <a:p>
-            <a:pPr>
-              <a:lnSpc>
-                <a:spcPct val="100000"/>
-              </a:lnSpc>
-              <a:spcBef>
-                <a:spcPts val="400"/>
-              </a:spcBef>
-              <a:buClr>
-                <a:srgbClr val="0064C8"/>
-              </a:buClr>
-            </a:pPr>
-            <a:r>
-              <a:rPr lang="en-US" sz="2000" spc="-1" dirty="0">
-                <a:solidFill>
-                  <a:srgbClr val="000000"/>
-                </a:solidFill>
-                <a:latin typeface="Century Gothic"/>
-              </a:rPr>
-              <a:t>Create a guide for lab members for the implementation of AI agents</a:t>
-            </a:r>
-          </a:p>
-          <a:p>
-            <a:pPr marL="0" indent="0">
-              <a:lnSpc>
-                <a:spcPct val="100000"/>
-              </a:lnSpc>
-              <a:spcBef>
-                <a:spcPts val="400"/>
-              </a:spcBef>
-              <a:buClr>
-                <a:srgbClr val="0064C8"/>
-              </a:buClr>
-              <a:buNone/>
-            </a:pPr>
-            <a:endParaRPr lang="en-US" sz="2000" spc="-1" dirty="0">
-              <a:solidFill>
-                <a:srgbClr val="000000"/>
-              </a:solidFill>
-              <a:latin typeface="Century Gothic"/>
-            </a:endParaRPr>
-          </a:p>
-          <a:p>
-            <a:pPr>
-              <a:lnSpc>
-                <a:spcPct val="100000"/>
-              </a:lnSpc>
-              <a:spcBef>
-                <a:spcPts val="400"/>
-              </a:spcBef>
-              <a:buClr>
-                <a:srgbClr val="0064C8"/>
-              </a:buClr>
-            </a:pPr>
-            <a:endParaRPr lang="en-US" sz="2000" spc="-1" dirty="0">
-              <a:solidFill>
-                <a:srgbClr val="000000"/>
-              </a:solidFill>
-              <a:latin typeface="Century Gothic"/>
-            </a:endParaRPr>
-          </a:p>
-          <a:p>
-            <a:pPr>
-              <a:lnSpc>
-                <a:spcPct val="100000"/>
-              </a:lnSpc>
-              <a:spcBef>
-                <a:spcPts val="400"/>
-              </a:spcBef>
-              <a:buClr>
-                <a:srgbClr val="0064C8"/>
-              </a:buClr>
-            </a:pPr>
-            <a:endParaRPr lang="en-US" sz="2000" spc="-1" dirty="0">
-              <a:solidFill>
-                <a:srgbClr val="000000"/>
-              </a:solidFill>
-              <a:latin typeface="Century Gothic"/>
-            </a:endParaRPr>
-          </a:p>
-          <a:p>
-            <a:pPr marL="0" indent="0">
-              <a:lnSpc>
-                <a:spcPct val="100000"/>
-              </a:lnSpc>
-              <a:spcBef>
-                <a:spcPts val="400"/>
-              </a:spcBef>
-              <a:spcAft>
-                <a:spcPts val="601"/>
-              </a:spcAft>
-              <a:buClr>
-                <a:srgbClr val="0064C8"/>
-              </a:buClr>
-              <a:buNone/>
-            </a:pPr>
-            <a:endParaRPr lang="en-US" sz="2000" b="1" spc="-1" dirty="0">
-              <a:solidFill>
-                <a:srgbClr val="000000"/>
-              </a:solidFill>
-              <a:latin typeface="Century Gothic"/>
-            </a:endParaRPr>
+            <a:endParaRPr lang="de-DE" sz="1600" b="1" dirty="0"/>
           </a:p>
         </p:txBody>
       </p:sp>
-      <p:pic>
-        <p:nvPicPr>
-          <p:cNvPr id="4" name="Picture 3">
+      <p:graphicFrame>
+        <p:nvGraphicFramePr>
+          <p:cNvPr id="11" name="Table 10">
             <a:extLst>
               <a:ext uri="{FF2B5EF4-FFF2-40B4-BE49-F238E27FC236}">
-                <a16:creationId xmlns:a16="http://schemas.microsoft.com/office/drawing/2014/main" id="{A9172708-06AB-AE7A-4BC0-05B1328EE700}"/>
+                <a16:creationId xmlns:a16="http://schemas.microsoft.com/office/drawing/2014/main" id="{EDFFBEE0-5146-4655-A5DE-8BF02E53C369}"/>
               </a:ext>
             </a:extLst>
           </p:cNvPr>
-          <p:cNvPicPr>
-            <a:picLocks noChangeAspect="1"/>
-          </p:cNvPicPr>
-          <p:nvPr/>
-        </p:nvPicPr>
-        <p:blipFill>
-          <a:blip r:embed="rId2" cstate="print">
+          <p:cNvGraphicFramePr>
+            <a:graphicFrameLocks noGrp="1"/>
+          </p:cNvGraphicFramePr>
+          <p:nvPr>
+            <p:extLst>
+              <p:ext uri="{D42A27DB-BD31-4B8C-83A1-F6EECF244321}">
+                <p14:modId xmlns:p14="http://schemas.microsoft.com/office/powerpoint/2010/main" val="3801418681"/>
+              </p:ext>
+            </p:extLst>
+          </p:nvPr>
+        </p:nvGraphicFramePr>
+        <p:xfrm>
+          <a:off x="3216996" y="1340440"/>
+          <a:ext cx="5240368" cy="1054165"/>
+        </p:xfrm>
+        <a:graphic>
+          <a:graphicData uri="http://schemas.openxmlformats.org/drawingml/2006/table">
+            <a:tbl>
+              <a:tblPr/>
+              <a:tblGrid>
+                <a:gridCol w="1310092">
+                  <a:extLst>
+                    <a:ext uri="{9D8B030D-6E8A-4147-A177-3AD203B41FA5}">
+                      <a16:colId xmlns:a16="http://schemas.microsoft.com/office/drawing/2014/main" val="1098995200"/>
+                    </a:ext>
+                  </a:extLst>
+                </a:gridCol>
+                <a:gridCol w="1310092">
+                  <a:extLst>
+                    <a:ext uri="{9D8B030D-6E8A-4147-A177-3AD203B41FA5}">
+                      <a16:colId xmlns:a16="http://schemas.microsoft.com/office/drawing/2014/main" val="818371029"/>
+                    </a:ext>
+                  </a:extLst>
+                </a:gridCol>
+                <a:gridCol w="1310092">
+                  <a:extLst>
+                    <a:ext uri="{9D8B030D-6E8A-4147-A177-3AD203B41FA5}">
+                      <a16:colId xmlns:a16="http://schemas.microsoft.com/office/drawing/2014/main" val="3817285525"/>
+                    </a:ext>
+                  </a:extLst>
+                </a:gridCol>
+                <a:gridCol w="1310092">
+                  <a:extLst>
+                    <a:ext uri="{9D8B030D-6E8A-4147-A177-3AD203B41FA5}">
+                      <a16:colId xmlns:a16="http://schemas.microsoft.com/office/drawing/2014/main" val="1826563497"/>
+                    </a:ext>
+                  </a:extLst>
+                </a:gridCol>
+              </a:tblGrid>
+              <a:tr h="220436">
+                <a:tc>
+                  <a:txBody>
+                    <a:bodyPr/>
+                    <a:lstStyle/>
+                    <a:p>
+                      <a:pPr algn="l" latinLnBrk="0"/>
+                      <a:r>
+                        <a:rPr lang="de-DE" sz="1000" b="1" dirty="0" err="1">
+                          <a:effectLst/>
+                        </a:rPr>
+                        <a:t>Metric</a:t>
+                      </a:r>
+                      <a:endParaRPr lang="de-DE" sz="1000" b="1" dirty="0">
+                        <a:effectLst/>
+                      </a:endParaRPr>
+                    </a:p>
+                  </a:txBody>
+                  <a:tcPr marL="83004" marR="83004" marT="41502" marB="41502" anchor="ctr">
+                    <a:lnL w="12700" cap="flat" cmpd="sng" algn="ctr">
+                      <a:solidFill>
+                        <a:schemeClr val="tx1"/>
+                      </a:solidFill>
+                      <a:prstDash val="solid"/>
+                      <a:round/>
+                      <a:headEnd type="none" w="med" len="med"/>
+                      <a:tailEnd type="none" w="med" len="med"/>
+                    </a:lnL>
+                    <a:lnR w="12700" cap="flat" cmpd="sng" algn="ctr">
+                      <a:solidFill>
+                        <a:schemeClr val="tx1"/>
+                      </a:solidFill>
+                      <a:prstDash val="solid"/>
+                      <a:round/>
+                      <a:headEnd type="none" w="med" len="med"/>
+                      <a:tailEnd type="none" w="med" len="med"/>
+                    </a:lnR>
+                    <a:lnT w="12700" cap="flat" cmpd="sng" algn="ctr">
+                      <a:solidFill>
+                        <a:schemeClr val="tx1"/>
+                      </a:solidFill>
+                      <a:prstDash val="solid"/>
+                      <a:round/>
+                      <a:headEnd type="none" w="med" len="med"/>
+                      <a:tailEnd type="none" w="med" len="med"/>
+                    </a:lnT>
+                    <a:lnB w="12700" cap="flat" cmpd="sng" algn="ctr">
+                      <a:solidFill>
+                        <a:schemeClr val="tx1"/>
+                      </a:solidFill>
+                      <a:prstDash val="solid"/>
+                      <a:round/>
+                      <a:headEnd type="none" w="med" len="med"/>
+                      <a:tailEnd type="none" w="med" len="med"/>
+                    </a:lnB>
+                    <a:lnTlToBr w="12700" cmpd="sng">
+                      <a:noFill/>
+                      <a:prstDash val="solid"/>
+                    </a:lnTlToBr>
+                    <a:lnBlToTr w="12700" cmpd="sng">
+                      <a:noFill/>
+                      <a:prstDash val="solid"/>
+                    </a:lnBlToTr>
+                    <a:solidFill>
+                      <a:schemeClr val="bg1"/>
+                    </a:solidFill>
+                  </a:tcPr>
+                </a:tc>
+                <a:tc>
+                  <a:txBody>
+                    <a:bodyPr/>
+                    <a:lstStyle/>
+                    <a:p>
+                      <a:pPr algn="l" latinLnBrk="0"/>
+                      <a:r>
+                        <a:rPr lang="de-DE" sz="1000" b="1">
+                          <a:effectLst/>
+                        </a:rPr>
+                        <a:t>GCN</a:t>
+                      </a:r>
+                    </a:p>
+                  </a:txBody>
+                  <a:tcPr marL="83004" marR="83004" marT="41502" marB="41502" anchor="ctr">
+                    <a:lnL w="12700" cap="flat" cmpd="sng" algn="ctr">
+                      <a:solidFill>
+                        <a:schemeClr val="tx1"/>
+                      </a:solidFill>
+                      <a:prstDash val="solid"/>
+                      <a:round/>
+                      <a:headEnd type="none" w="med" len="med"/>
+                      <a:tailEnd type="none" w="med" len="med"/>
+                    </a:lnL>
+                    <a:lnR w="12700" cap="flat" cmpd="sng" algn="ctr">
+                      <a:solidFill>
+                        <a:schemeClr val="tx1"/>
+                      </a:solidFill>
+                      <a:prstDash val="solid"/>
+                      <a:round/>
+                      <a:headEnd type="none" w="med" len="med"/>
+                      <a:tailEnd type="none" w="med" len="med"/>
+                    </a:lnR>
+                    <a:lnT w="12700" cap="flat" cmpd="sng" algn="ctr">
+                      <a:solidFill>
+                        <a:schemeClr val="tx1"/>
+                      </a:solidFill>
+                      <a:prstDash val="solid"/>
+                      <a:round/>
+                      <a:headEnd type="none" w="med" len="med"/>
+                      <a:tailEnd type="none" w="med" len="med"/>
+                    </a:lnT>
+                    <a:lnB w="12700" cap="flat" cmpd="sng" algn="ctr">
+                      <a:solidFill>
+                        <a:schemeClr val="tx1"/>
+                      </a:solidFill>
+                      <a:prstDash val="solid"/>
+                      <a:round/>
+                      <a:headEnd type="none" w="med" len="med"/>
+                      <a:tailEnd type="none" w="med" len="med"/>
+                    </a:lnB>
+                    <a:lnTlToBr w="12700" cmpd="sng">
+                      <a:noFill/>
+                      <a:prstDash val="solid"/>
+                    </a:lnTlToBr>
+                    <a:lnBlToTr w="12700" cmpd="sng">
+                      <a:noFill/>
+                      <a:prstDash val="solid"/>
+                    </a:lnBlToTr>
+                    <a:solidFill>
+                      <a:schemeClr val="bg1"/>
+                    </a:solidFill>
+                  </a:tcPr>
+                </a:tc>
+                <a:tc>
+                  <a:txBody>
+                    <a:bodyPr/>
+                    <a:lstStyle/>
+                    <a:p>
+                      <a:pPr algn="l" latinLnBrk="0"/>
+                      <a:r>
+                        <a:rPr lang="de-DE" sz="1000" b="1">
+                          <a:effectLst/>
+                        </a:rPr>
+                        <a:t>GAT</a:t>
+                      </a:r>
+                    </a:p>
+                  </a:txBody>
+                  <a:tcPr marL="83004" marR="83004" marT="41502" marB="41502" anchor="ctr">
+                    <a:lnL w="12700" cap="flat" cmpd="sng" algn="ctr">
+                      <a:solidFill>
+                        <a:schemeClr val="tx1"/>
+                      </a:solidFill>
+                      <a:prstDash val="solid"/>
+                      <a:round/>
+                      <a:headEnd type="none" w="med" len="med"/>
+                      <a:tailEnd type="none" w="med" len="med"/>
+                    </a:lnL>
+                    <a:lnR w="12700" cap="flat" cmpd="sng" algn="ctr">
+                      <a:solidFill>
+                        <a:schemeClr val="tx1"/>
+                      </a:solidFill>
+                      <a:prstDash val="solid"/>
+                      <a:round/>
+                      <a:headEnd type="none" w="med" len="med"/>
+                      <a:tailEnd type="none" w="med" len="med"/>
+                    </a:lnR>
+                    <a:lnT w="12700" cap="flat" cmpd="sng" algn="ctr">
+                      <a:solidFill>
+                        <a:schemeClr val="tx1"/>
+                      </a:solidFill>
+                      <a:prstDash val="solid"/>
+                      <a:round/>
+                      <a:headEnd type="none" w="med" len="med"/>
+                      <a:tailEnd type="none" w="med" len="med"/>
+                    </a:lnT>
+                    <a:lnB w="12700" cap="flat" cmpd="sng" algn="ctr">
+                      <a:solidFill>
+                        <a:schemeClr val="tx1"/>
+                      </a:solidFill>
+                      <a:prstDash val="solid"/>
+                      <a:round/>
+                      <a:headEnd type="none" w="med" len="med"/>
+                      <a:tailEnd type="none" w="med" len="med"/>
+                    </a:lnB>
+                    <a:lnTlToBr w="12700" cmpd="sng">
+                      <a:noFill/>
+                      <a:prstDash val="solid"/>
+                    </a:lnTlToBr>
+                    <a:lnBlToTr w="12700" cmpd="sng">
+                      <a:noFill/>
+                      <a:prstDash val="solid"/>
+                    </a:lnBlToTr>
+                    <a:solidFill>
+                      <a:schemeClr val="bg1"/>
+                    </a:solidFill>
+                  </a:tcPr>
+                </a:tc>
+                <a:tc>
+                  <a:txBody>
+                    <a:bodyPr/>
+                    <a:lstStyle/>
+                    <a:p>
+                      <a:pPr algn="l" latinLnBrk="0"/>
+                      <a:r>
+                        <a:rPr lang="de-DE" sz="1000" b="1">
+                          <a:effectLst/>
+                        </a:rPr>
+                        <a:t>Winner</a:t>
+                      </a:r>
+                    </a:p>
+                  </a:txBody>
+                  <a:tcPr marL="83004" marR="83004" marT="41502" marB="41502" anchor="ctr">
+                    <a:lnL w="12700" cap="flat" cmpd="sng" algn="ctr">
+                      <a:solidFill>
+                        <a:schemeClr val="tx1"/>
+                      </a:solidFill>
+                      <a:prstDash val="solid"/>
+                      <a:round/>
+                      <a:headEnd type="none" w="med" len="med"/>
+                      <a:tailEnd type="none" w="med" len="med"/>
+                    </a:lnL>
+                    <a:lnR w="12700" cap="flat" cmpd="sng" algn="ctr">
+                      <a:solidFill>
+                        <a:schemeClr val="tx1"/>
+                      </a:solidFill>
+                      <a:prstDash val="solid"/>
+                      <a:round/>
+                      <a:headEnd type="none" w="med" len="med"/>
+                      <a:tailEnd type="none" w="med" len="med"/>
+                    </a:lnR>
+                    <a:lnT w="12700" cap="flat" cmpd="sng" algn="ctr">
+                      <a:solidFill>
+                        <a:schemeClr val="tx1"/>
+                      </a:solidFill>
+                      <a:prstDash val="solid"/>
+                      <a:round/>
+                      <a:headEnd type="none" w="med" len="med"/>
+                      <a:tailEnd type="none" w="med" len="med"/>
+                    </a:lnT>
+                    <a:lnB w="12700" cap="flat" cmpd="sng" algn="ctr">
+                      <a:solidFill>
+                        <a:schemeClr val="tx1"/>
+                      </a:solidFill>
+                      <a:prstDash val="solid"/>
+                      <a:round/>
+                      <a:headEnd type="none" w="med" len="med"/>
+                      <a:tailEnd type="none" w="med" len="med"/>
+                    </a:lnB>
+                    <a:lnTlToBr w="12700" cmpd="sng">
+                      <a:noFill/>
+                      <a:prstDash val="solid"/>
+                    </a:lnTlToBr>
+                    <a:lnBlToTr w="12700" cmpd="sng">
+                      <a:noFill/>
+                      <a:prstDash val="solid"/>
+                    </a:lnBlToTr>
+                    <a:solidFill>
+                      <a:schemeClr val="bg1"/>
+                    </a:solidFill>
+                  </a:tcPr>
+                </a:tc>
+                <a:extLst>
+                  <a:ext uri="{0D108BD9-81ED-4DB2-BD59-A6C34878D82A}">
+                    <a16:rowId xmlns:a16="http://schemas.microsoft.com/office/drawing/2014/main" val="184085305"/>
+                  </a:ext>
+                </a:extLst>
+              </a:tr>
+              <a:tr h="503853">
+                <a:tc>
+                  <a:txBody>
+                    <a:bodyPr/>
+                    <a:lstStyle/>
+                    <a:p>
+                      <a:pPr algn="l" fontAlgn="t" latinLnBrk="0"/>
+                      <a:r>
+                        <a:rPr lang="de-DE" sz="1000" b="1">
+                          <a:effectLst/>
+                        </a:rPr>
+                        <a:t>Best Validation Accuracy</a:t>
+                      </a:r>
+                      <a:endParaRPr lang="de-DE" sz="1000">
+                        <a:effectLst/>
+                      </a:endParaRPr>
+                    </a:p>
+                  </a:txBody>
+                  <a:tcPr marL="83004" marR="83004" marT="41502" marB="41502">
+                    <a:lnL w="12700" cap="flat" cmpd="sng" algn="ctr">
+                      <a:solidFill>
+                        <a:schemeClr val="tx1"/>
+                      </a:solidFill>
+                      <a:prstDash val="solid"/>
+                      <a:round/>
+                      <a:headEnd type="none" w="med" len="med"/>
+                      <a:tailEnd type="none" w="med" len="med"/>
+                    </a:lnL>
+                    <a:lnR w="12700" cap="flat" cmpd="sng" algn="ctr">
+                      <a:solidFill>
+                        <a:schemeClr val="tx1"/>
+                      </a:solidFill>
+                      <a:prstDash val="solid"/>
+                      <a:round/>
+                      <a:headEnd type="none" w="med" len="med"/>
+                      <a:tailEnd type="none" w="med" len="med"/>
+                    </a:lnR>
+                    <a:lnT w="12700" cap="flat" cmpd="sng" algn="ctr">
+                      <a:solidFill>
+                        <a:schemeClr val="tx1"/>
+                      </a:solidFill>
+                      <a:prstDash val="solid"/>
+                      <a:round/>
+                      <a:headEnd type="none" w="med" len="med"/>
+                      <a:tailEnd type="none" w="med" len="med"/>
+                    </a:lnT>
+                    <a:lnB w="12700" cap="flat" cmpd="sng" algn="ctr">
+                      <a:solidFill>
+                        <a:schemeClr val="tx1"/>
+                      </a:solidFill>
+                      <a:prstDash val="solid"/>
+                      <a:round/>
+                      <a:headEnd type="none" w="med" len="med"/>
+                      <a:tailEnd type="none" w="med" len="med"/>
+                    </a:lnB>
+                    <a:lnTlToBr w="12700" cmpd="sng">
+                      <a:noFill/>
+                      <a:prstDash val="solid"/>
+                    </a:lnTlToBr>
+                    <a:lnBlToTr w="12700" cmpd="sng">
+                      <a:noFill/>
+                      <a:prstDash val="solid"/>
+                    </a:lnBlToTr>
+                    <a:solidFill>
+                      <a:schemeClr val="bg1"/>
+                    </a:solidFill>
+                  </a:tcPr>
+                </a:tc>
+                <a:tc>
+                  <a:txBody>
+                    <a:bodyPr/>
+                    <a:lstStyle/>
+                    <a:p>
+                      <a:pPr algn="l" fontAlgn="t" latinLnBrk="0"/>
+                      <a:r>
+                        <a:rPr lang="de-DE" sz="1000" dirty="0">
+                          <a:effectLst/>
+                        </a:rPr>
+                        <a:t>94.54%</a:t>
+                      </a:r>
+                    </a:p>
+                  </a:txBody>
+                  <a:tcPr marL="83004" marR="83004" marT="41502" marB="41502">
+                    <a:lnL w="12700" cap="flat" cmpd="sng" algn="ctr">
+                      <a:solidFill>
+                        <a:schemeClr val="tx1"/>
+                      </a:solidFill>
+                      <a:prstDash val="solid"/>
+                      <a:round/>
+                      <a:headEnd type="none" w="med" len="med"/>
+                      <a:tailEnd type="none" w="med" len="med"/>
+                    </a:lnL>
+                    <a:lnR w="12700" cap="flat" cmpd="sng" algn="ctr">
+                      <a:solidFill>
+                        <a:schemeClr val="tx1"/>
+                      </a:solidFill>
+                      <a:prstDash val="solid"/>
+                      <a:round/>
+                      <a:headEnd type="none" w="med" len="med"/>
+                      <a:tailEnd type="none" w="med" len="med"/>
+                    </a:lnR>
+                    <a:lnT w="12700" cap="flat" cmpd="sng" algn="ctr">
+                      <a:solidFill>
+                        <a:schemeClr val="tx1"/>
+                      </a:solidFill>
+                      <a:prstDash val="solid"/>
+                      <a:round/>
+                      <a:headEnd type="none" w="med" len="med"/>
+                      <a:tailEnd type="none" w="med" len="med"/>
+                    </a:lnT>
+                    <a:lnB w="12700" cap="flat" cmpd="sng" algn="ctr">
+                      <a:solidFill>
+                        <a:schemeClr val="tx1"/>
+                      </a:solidFill>
+                      <a:prstDash val="solid"/>
+                      <a:round/>
+                      <a:headEnd type="none" w="med" len="med"/>
+                      <a:tailEnd type="none" w="med" len="med"/>
+                    </a:lnB>
+                    <a:lnTlToBr w="12700" cmpd="sng">
+                      <a:noFill/>
+                      <a:prstDash val="solid"/>
+                    </a:lnTlToBr>
+                    <a:lnBlToTr w="12700" cmpd="sng">
+                      <a:noFill/>
+                      <a:prstDash val="solid"/>
+                    </a:lnBlToTr>
+                    <a:solidFill>
+                      <a:schemeClr val="bg1"/>
+                    </a:solidFill>
+                  </a:tcPr>
+                </a:tc>
+                <a:tc>
+                  <a:txBody>
+                    <a:bodyPr/>
+                    <a:lstStyle/>
+                    <a:p>
+                      <a:pPr algn="l" fontAlgn="t" latinLnBrk="0"/>
+                      <a:r>
+                        <a:rPr lang="de-DE" sz="1000">
+                          <a:effectLst/>
+                        </a:rPr>
+                        <a:t>95.06%</a:t>
+                      </a:r>
+                    </a:p>
+                  </a:txBody>
+                  <a:tcPr marL="83004" marR="83004" marT="41502" marB="41502">
+                    <a:lnL w="12700" cap="flat" cmpd="sng" algn="ctr">
+                      <a:solidFill>
+                        <a:schemeClr val="tx1"/>
+                      </a:solidFill>
+                      <a:prstDash val="solid"/>
+                      <a:round/>
+                      <a:headEnd type="none" w="med" len="med"/>
+                      <a:tailEnd type="none" w="med" len="med"/>
+                    </a:lnL>
+                    <a:lnR w="12700" cap="flat" cmpd="sng" algn="ctr">
+                      <a:solidFill>
+                        <a:schemeClr val="tx1"/>
+                      </a:solidFill>
+                      <a:prstDash val="solid"/>
+                      <a:round/>
+                      <a:headEnd type="none" w="med" len="med"/>
+                      <a:tailEnd type="none" w="med" len="med"/>
+                    </a:lnR>
+                    <a:lnT w="12700" cap="flat" cmpd="sng" algn="ctr">
+                      <a:solidFill>
+                        <a:schemeClr val="tx1"/>
+                      </a:solidFill>
+                      <a:prstDash val="solid"/>
+                      <a:round/>
+                      <a:headEnd type="none" w="med" len="med"/>
+                      <a:tailEnd type="none" w="med" len="med"/>
+                    </a:lnT>
+                    <a:lnB w="12700" cap="flat" cmpd="sng" algn="ctr">
+                      <a:solidFill>
+                        <a:schemeClr val="tx1"/>
+                      </a:solidFill>
+                      <a:prstDash val="solid"/>
+                      <a:round/>
+                      <a:headEnd type="none" w="med" len="med"/>
+                      <a:tailEnd type="none" w="med" len="med"/>
+                    </a:lnB>
+                    <a:lnTlToBr w="12700" cmpd="sng">
+                      <a:noFill/>
+                      <a:prstDash val="solid"/>
+                    </a:lnTlToBr>
+                    <a:lnBlToTr w="12700" cmpd="sng">
+                      <a:noFill/>
+                      <a:prstDash val="solid"/>
+                    </a:lnBlToTr>
+                    <a:solidFill>
+                      <a:schemeClr val="bg1"/>
+                    </a:solidFill>
+                  </a:tcPr>
+                </a:tc>
+                <a:tc>
+                  <a:txBody>
+                    <a:bodyPr/>
+                    <a:lstStyle/>
+                    <a:p>
+                      <a:pPr algn="l" fontAlgn="t" latinLnBrk="0"/>
+                      <a:r>
+                        <a:rPr lang="de-DE" sz="1000" dirty="0">
+                          <a:effectLst/>
+                        </a:rPr>
+                        <a:t>🏆 GAT</a:t>
+                      </a:r>
+                    </a:p>
+                  </a:txBody>
+                  <a:tcPr marL="83004" marR="83004" marT="41502" marB="41502">
+                    <a:lnL w="12700" cap="flat" cmpd="sng" algn="ctr">
+                      <a:solidFill>
+                        <a:schemeClr val="tx1"/>
+                      </a:solidFill>
+                      <a:prstDash val="solid"/>
+                      <a:round/>
+                      <a:headEnd type="none" w="med" len="med"/>
+                      <a:tailEnd type="none" w="med" len="med"/>
+                    </a:lnL>
+                    <a:lnR w="12700" cap="flat" cmpd="sng" algn="ctr">
+                      <a:solidFill>
+                        <a:schemeClr val="tx1"/>
+                      </a:solidFill>
+                      <a:prstDash val="solid"/>
+                      <a:round/>
+                      <a:headEnd type="none" w="med" len="med"/>
+                      <a:tailEnd type="none" w="med" len="med"/>
+                    </a:lnR>
+                    <a:lnT w="12700" cap="flat" cmpd="sng" algn="ctr">
+                      <a:solidFill>
+                        <a:schemeClr val="tx1"/>
+                      </a:solidFill>
+                      <a:prstDash val="solid"/>
+                      <a:round/>
+                      <a:headEnd type="none" w="med" len="med"/>
+                      <a:tailEnd type="none" w="med" len="med"/>
+                    </a:lnT>
+                    <a:lnB w="12700" cap="flat" cmpd="sng" algn="ctr">
+                      <a:solidFill>
+                        <a:schemeClr val="tx1"/>
+                      </a:solidFill>
+                      <a:prstDash val="solid"/>
+                      <a:round/>
+                      <a:headEnd type="none" w="med" len="med"/>
+                      <a:tailEnd type="none" w="med" len="med"/>
+                    </a:lnB>
+                    <a:lnTlToBr w="12700" cmpd="sng">
+                      <a:noFill/>
+                      <a:prstDash val="solid"/>
+                    </a:lnTlToBr>
+                    <a:lnBlToTr w="12700" cmpd="sng">
+                      <a:noFill/>
+                      <a:prstDash val="solid"/>
+                    </a:lnBlToTr>
+                    <a:solidFill>
+                      <a:schemeClr val="bg1"/>
+                    </a:solidFill>
+                  </a:tcPr>
+                </a:tc>
+                <a:extLst>
+                  <a:ext uri="{0D108BD9-81ED-4DB2-BD59-A6C34878D82A}">
+                    <a16:rowId xmlns:a16="http://schemas.microsoft.com/office/drawing/2014/main" val="394382672"/>
+                  </a:ext>
+                </a:extLst>
+              </a:tr>
+              <a:tr h="314908">
+                <a:tc>
+                  <a:txBody>
+                    <a:bodyPr/>
+                    <a:lstStyle/>
+                    <a:p>
+                      <a:pPr algn="l" fontAlgn="t" latinLnBrk="0"/>
+                      <a:r>
+                        <a:rPr lang="de-DE" sz="1000" b="1">
+                          <a:effectLst/>
+                        </a:rPr>
+                        <a:t>Test Accuracy</a:t>
+                      </a:r>
+                      <a:endParaRPr lang="de-DE" sz="1000">
+                        <a:effectLst/>
+                      </a:endParaRPr>
+                    </a:p>
+                  </a:txBody>
+                  <a:tcPr marL="83004" marR="83004" marT="41502" marB="41502">
+                    <a:lnL w="12700" cap="flat" cmpd="sng" algn="ctr">
+                      <a:solidFill>
+                        <a:schemeClr val="tx1"/>
+                      </a:solidFill>
+                      <a:prstDash val="solid"/>
+                      <a:round/>
+                      <a:headEnd type="none" w="med" len="med"/>
+                      <a:tailEnd type="none" w="med" len="med"/>
+                    </a:lnL>
+                    <a:lnR w="12700" cap="flat" cmpd="sng" algn="ctr">
+                      <a:solidFill>
+                        <a:schemeClr val="tx1"/>
+                      </a:solidFill>
+                      <a:prstDash val="solid"/>
+                      <a:round/>
+                      <a:headEnd type="none" w="med" len="med"/>
+                      <a:tailEnd type="none" w="med" len="med"/>
+                    </a:lnR>
+                    <a:lnT w="12700" cap="flat" cmpd="sng" algn="ctr">
+                      <a:solidFill>
+                        <a:schemeClr val="tx1"/>
+                      </a:solidFill>
+                      <a:prstDash val="solid"/>
+                      <a:round/>
+                      <a:headEnd type="none" w="med" len="med"/>
+                      <a:tailEnd type="none" w="med" len="med"/>
+                    </a:lnT>
+                    <a:lnB w="12700" cap="flat" cmpd="sng" algn="ctr">
+                      <a:solidFill>
+                        <a:schemeClr val="tx1"/>
+                      </a:solidFill>
+                      <a:prstDash val="solid"/>
+                      <a:round/>
+                      <a:headEnd type="none" w="med" len="med"/>
+                      <a:tailEnd type="none" w="med" len="med"/>
+                    </a:lnB>
+                    <a:lnTlToBr w="12700" cmpd="sng">
+                      <a:noFill/>
+                      <a:prstDash val="solid"/>
+                    </a:lnTlToBr>
+                    <a:lnBlToTr w="12700" cmpd="sng">
+                      <a:noFill/>
+                      <a:prstDash val="solid"/>
+                    </a:lnBlToTr>
+                    <a:solidFill>
+                      <a:schemeClr val="bg1"/>
+                    </a:solidFill>
+                  </a:tcPr>
+                </a:tc>
+                <a:tc>
+                  <a:txBody>
+                    <a:bodyPr/>
+                    <a:lstStyle/>
+                    <a:p>
+                      <a:pPr algn="l" fontAlgn="t" latinLnBrk="0"/>
+                      <a:r>
+                        <a:rPr lang="de-DE" sz="1000" dirty="0">
+                          <a:effectLst/>
+                        </a:rPr>
+                        <a:t>93.89%</a:t>
+                      </a:r>
+                    </a:p>
+                  </a:txBody>
+                  <a:tcPr marL="83004" marR="83004" marT="41502" marB="41502">
+                    <a:lnL w="12700" cap="flat" cmpd="sng" algn="ctr">
+                      <a:solidFill>
+                        <a:schemeClr val="tx1"/>
+                      </a:solidFill>
+                      <a:prstDash val="solid"/>
+                      <a:round/>
+                      <a:headEnd type="none" w="med" len="med"/>
+                      <a:tailEnd type="none" w="med" len="med"/>
+                    </a:lnL>
+                    <a:lnR w="12700" cap="flat" cmpd="sng" algn="ctr">
+                      <a:solidFill>
+                        <a:schemeClr val="tx1"/>
+                      </a:solidFill>
+                      <a:prstDash val="solid"/>
+                      <a:round/>
+                      <a:headEnd type="none" w="med" len="med"/>
+                      <a:tailEnd type="none" w="med" len="med"/>
+                    </a:lnR>
+                    <a:lnT w="12700" cap="flat" cmpd="sng" algn="ctr">
+                      <a:solidFill>
+                        <a:schemeClr val="tx1"/>
+                      </a:solidFill>
+                      <a:prstDash val="solid"/>
+                      <a:round/>
+                      <a:headEnd type="none" w="med" len="med"/>
+                      <a:tailEnd type="none" w="med" len="med"/>
+                    </a:lnT>
+                    <a:lnB w="12700" cap="flat" cmpd="sng" algn="ctr">
+                      <a:solidFill>
+                        <a:schemeClr val="tx1"/>
+                      </a:solidFill>
+                      <a:prstDash val="solid"/>
+                      <a:round/>
+                      <a:headEnd type="none" w="med" len="med"/>
+                      <a:tailEnd type="none" w="med" len="med"/>
+                    </a:lnB>
+                    <a:lnTlToBr w="12700" cmpd="sng">
+                      <a:noFill/>
+                      <a:prstDash val="solid"/>
+                    </a:lnTlToBr>
+                    <a:lnBlToTr w="12700" cmpd="sng">
+                      <a:noFill/>
+                      <a:prstDash val="solid"/>
+                    </a:lnBlToTr>
+                    <a:solidFill>
+                      <a:schemeClr val="bg1"/>
+                    </a:solidFill>
+                  </a:tcPr>
+                </a:tc>
+                <a:tc>
+                  <a:txBody>
+                    <a:bodyPr/>
+                    <a:lstStyle/>
+                    <a:p>
+                      <a:pPr algn="l" fontAlgn="t" latinLnBrk="0"/>
+                      <a:r>
+                        <a:rPr lang="de-DE" sz="1000">
+                          <a:effectLst/>
+                        </a:rPr>
+                        <a:t>95.57%</a:t>
+                      </a:r>
+                    </a:p>
+                  </a:txBody>
+                  <a:tcPr marL="83004" marR="83004" marT="41502" marB="41502">
+                    <a:lnL w="12700" cap="flat" cmpd="sng" algn="ctr">
+                      <a:solidFill>
+                        <a:schemeClr val="tx1"/>
+                      </a:solidFill>
+                      <a:prstDash val="solid"/>
+                      <a:round/>
+                      <a:headEnd type="none" w="med" len="med"/>
+                      <a:tailEnd type="none" w="med" len="med"/>
+                    </a:lnL>
+                    <a:lnR w="12700" cap="flat" cmpd="sng" algn="ctr">
+                      <a:solidFill>
+                        <a:schemeClr val="tx1"/>
+                      </a:solidFill>
+                      <a:prstDash val="solid"/>
+                      <a:round/>
+                      <a:headEnd type="none" w="med" len="med"/>
+                      <a:tailEnd type="none" w="med" len="med"/>
+                    </a:lnR>
+                    <a:lnT w="12700" cap="flat" cmpd="sng" algn="ctr">
+                      <a:solidFill>
+                        <a:schemeClr val="tx1"/>
+                      </a:solidFill>
+                      <a:prstDash val="solid"/>
+                      <a:round/>
+                      <a:headEnd type="none" w="med" len="med"/>
+                      <a:tailEnd type="none" w="med" len="med"/>
+                    </a:lnT>
+                    <a:lnB w="12700" cap="flat" cmpd="sng" algn="ctr">
+                      <a:solidFill>
+                        <a:schemeClr val="tx1"/>
+                      </a:solidFill>
+                      <a:prstDash val="solid"/>
+                      <a:round/>
+                      <a:headEnd type="none" w="med" len="med"/>
+                      <a:tailEnd type="none" w="med" len="med"/>
+                    </a:lnB>
+                    <a:lnTlToBr w="12700" cmpd="sng">
+                      <a:noFill/>
+                      <a:prstDash val="solid"/>
+                    </a:lnTlToBr>
+                    <a:lnBlToTr w="12700" cmpd="sng">
+                      <a:noFill/>
+                      <a:prstDash val="solid"/>
+                    </a:lnBlToTr>
+                    <a:solidFill>
+                      <a:schemeClr val="bg1"/>
+                    </a:solidFill>
+                  </a:tcPr>
+                </a:tc>
+                <a:tc>
+                  <a:txBody>
+                    <a:bodyPr/>
+                    <a:lstStyle/>
+                    <a:p>
+                      <a:pPr algn="l" fontAlgn="t" latinLnBrk="0"/>
+                      <a:r>
+                        <a:rPr lang="de-DE" sz="1000" dirty="0">
+                          <a:effectLst/>
+                        </a:rPr>
+                        <a:t>🏆 GAT</a:t>
+                      </a:r>
+                    </a:p>
+                  </a:txBody>
+                  <a:tcPr marL="83004" marR="83004" marT="41502" marB="41502">
+                    <a:lnL w="12700" cap="flat" cmpd="sng" algn="ctr">
+                      <a:solidFill>
+                        <a:schemeClr val="tx1"/>
+                      </a:solidFill>
+                      <a:prstDash val="solid"/>
+                      <a:round/>
+                      <a:headEnd type="none" w="med" len="med"/>
+                      <a:tailEnd type="none" w="med" len="med"/>
+                    </a:lnL>
+                    <a:lnR w="12700" cap="flat" cmpd="sng" algn="ctr">
+                      <a:solidFill>
+                        <a:schemeClr val="tx1"/>
+                      </a:solidFill>
+                      <a:prstDash val="solid"/>
+                      <a:round/>
+                      <a:headEnd type="none" w="med" len="med"/>
+                      <a:tailEnd type="none" w="med" len="med"/>
+                    </a:lnR>
+                    <a:lnT w="12700" cap="flat" cmpd="sng" algn="ctr">
+                      <a:solidFill>
+                        <a:schemeClr val="tx1"/>
+                      </a:solidFill>
+                      <a:prstDash val="solid"/>
+                      <a:round/>
+                      <a:headEnd type="none" w="med" len="med"/>
+                      <a:tailEnd type="none" w="med" len="med"/>
+                    </a:lnT>
+                    <a:lnB w="12700" cap="flat" cmpd="sng" algn="ctr">
+                      <a:solidFill>
+                        <a:schemeClr val="tx1"/>
+                      </a:solidFill>
+                      <a:prstDash val="solid"/>
+                      <a:round/>
+                      <a:headEnd type="none" w="med" len="med"/>
+                      <a:tailEnd type="none" w="med" len="med"/>
+                    </a:lnB>
+                    <a:lnTlToBr w="12700" cmpd="sng">
+                      <a:noFill/>
+                      <a:prstDash val="solid"/>
+                    </a:lnTlToBr>
+                    <a:lnBlToTr w="12700" cmpd="sng">
+                      <a:noFill/>
+                      <a:prstDash val="solid"/>
+                    </a:lnBlToTr>
+                    <a:solidFill>
+                      <a:schemeClr val="bg1"/>
+                    </a:solidFill>
+                  </a:tcPr>
+                </a:tc>
+                <a:extLst>
+                  <a:ext uri="{0D108BD9-81ED-4DB2-BD59-A6C34878D82A}">
+                    <a16:rowId xmlns:a16="http://schemas.microsoft.com/office/drawing/2014/main" val="141235525"/>
+                  </a:ext>
+                </a:extLst>
+              </a:tr>
+            </a:tbl>
+          </a:graphicData>
+        </a:graphic>
+      </p:graphicFrame>
+      <p:sp>
+        <p:nvSpPr>
+          <p:cNvPr id="21" name="TextBox 20">
             <a:extLst>
-              <a:ext uri="{28A0092B-C50C-407E-A947-70E740481C1C}">
-                <a14:useLocalDpi xmlns:a14="http://schemas.microsoft.com/office/drawing/2010/main" val="0"/>
+              <a:ext uri="{FF2B5EF4-FFF2-40B4-BE49-F238E27FC236}">
+                <a16:creationId xmlns:a16="http://schemas.microsoft.com/office/drawing/2014/main" id="{DE733898-820F-4456-823E-05ECD33E9336}"/>
               </a:ext>
             </a:extLst>
-          </a:blip>
-          <a:srcRect/>
-          <a:stretch/>
-        </p:blipFill>
+          </p:cNvPr>
+          <p:cNvSpPr txBox="1"/>
+          <p:nvPr/>
+        </p:nvSpPr>
         <p:spPr>
           <a:xfrm>
-            <a:off x="982609" y="2941982"/>
-            <a:ext cx="7176621" cy="3082493"/>
+            <a:off x="392511" y="4445002"/>
+            <a:ext cx="4572000" cy="938719"/>
           </a:xfrm>
           <a:prstGeom prst="rect">
             <a:avLst/>
           </a:prstGeom>
+          <a:noFill/>
         </p:spPr>
-      </p:pic>
+        <p:txBody>
+          <a:bodyPr wrap="square">
+            <a:spAutoFit/>
+          </a:bodyPr>
+          <a:lstStyle/>
+          <a:p>
+            <a:pPr marL="171450" indent="-171450" algn="l">
+              <a:buFont typeface="Arial" panose="020B0604020202020204" pitchFamily="34" charset="0"/>
+              <a:buChar char="•"/>
+            </a:pPr>
+            <a:r>
+              <a:rPr lang="en-US" sz="1100" b="1" i="0" dirty="0">
+                <a:effectLst/>
+              </a:rPr>
+              <a:t>SMILES: </a:t>
+            </a:r>
+            <a:r>
+              <a:rPr lang="en-US" sz="1100" i="0" dirty="0">
+                <a:effectLst/>
+              </a:rPr>
+              <a:t>COc1ccccc1N1CCN(Cc2cc(CN(C)C)c3cccccc2-3)CC1</a:t>
+            </a:r>
+          </a:p>
+          <a:p>
+            <a:pPr marL="171450" indent="-171450" algn="l">
+              <a:buFont typeface="Arial" panose="020B0604020202020204" pitchFamily="34" charset="0"/>
+              <a:buChar char="•"/>
+            </a:pPr>
+            <a:r>
+              <a:rPr lang="en-US" sz="1100" b="1" i="0" dirty="0">
+                <a:effectLst/>
+              </a:rPr>
+              <a:t>True Label</a:t>
+            </a:r>
+            <a:r>
+              <a:rPr lang="en-US" sz="1100" b="0" i="0" dirty="0">
+                <a:effectLst/>
+              </a:rPr>
+              <a:t>: Active (Class 1) ✅</a:t>
+            </a:r>
+          </a:p>
+          <a:p>
+            <a:pPr marL="171450" indent="-171450" algn="l">
+              <a:buFont typeface="Arial" panose="020B0604020202020204" pitchFamily="34" charset="0"/>
+              <a:buChar char="•"/>
+            </a:pPr>
+            <a:r>
+              <a:rPr lang="en-US" sz="1100" b="1" i="0" dirty="0">
+                <a:effectLst/>
+              </a:rPr>
+              <a:t>Predicted by Both Models</a:t>
+            </a:r>
+            <a:r>
+              <a:rPr lang="en-US" sz="1100" b="0" i="0" dirty="0">
+                <a:effectLst/>
+              </a:rPr>
+              <a:t>: Active (Class 1) ✅</a:t>
+            </a:r>
+          </a:p>
+          <a:p>
+            <a:pPr marL="171450" indent="-171450" algn="l">
+              <a:buFont typeface="Arial" panose="020B0604020202020204" pitchFamily="34" charset="0"/>
+              <a:buChar char="•"/>
+            </a:pPr>
+            <a:r>
+              <a:rPr lang="en-US" sz="1100" b="1" i="0" dirty="0">
+                <a:effectLst/>
+              </a:rPr>
+              <a:t>GCN Confidence</a:t>
+            </a:r>
+            <a:r>
+              <a:rPr lang="en-US" sz="1100" b="0" i="0" dirty="0">
+                <a:effectLst/>
+              </a:rPr>
+              <a:t>: 99.96%</a:t>
+            </a:r>
+          </a:p>
+          <a:p>
+            <a:pPr marL="171450" indent="-171450" algn="l">
+              <a:buFont typeface="Arial" panose="020B0604020202020204" pitchFamily="34" charset="0"/>
+              <a:buChar char="•"/>
+            </a:pPr>
+            <a:r>
+              <a:rPr lang="en-US" sz="1100" b="1" i="0" dirty="0">
+                <a:effectLst/>
+              </a:rPr>
+              <a:t>GAT Confidence</a:t>
+            </a:r>
+            <a:r>
+              <a:rPr lang="en-US" sz="1100" b="0" i="0" dirty="0">
+                <a:effectLst/>
+              </a:rPr>
+              <a:t>: 99.99%</a:t>
+            </a:r>
+          </a:p>
+        </p:txBody>
+      </p:sp>
     </p:spTree>
     <p:extLst>
       <p:ext uri="{BB962C8B-B14F-4D97-AF65-F5344CB8AC3E}">
-        <p14:creationId xmlns:p14="http://schemas.microsoft.com/office/powerpoint/2010/main" val="754724518"/>
+        <p14:creationId xmlns:p14="http://schemas.microsoft.com/office/powerpoint/2010/main" val="3566053499"/>
       </p:ext>
     </p:extLst>
   </p:cSld>
@@ -22174,6 +23412,3581 @@
           <a:chExt cx="0" cy="0"/>
         </a:xfrm>
       </p:grpSpPr>
+      <p:grpSp>
+        <p:nvGrpSpPr>
+          <p:cNvPr id="49" name="Group 48">
+            <a:extLst>
+              <a:ext uri="{FF2B5EF4-FFF2-40B4-BE49-F238E27FC236}">
+                <a16:creationId xmlns:a16="http://schemas.microsoft.com/office/drawing/2014/main" id="{C31E6F76-4E7C-1639-9021-CCC76ADA5882}"/>
+              </a:ext>
+            </a:extLst>
+          </p:cNvPr>
+          <p:cNvGrpSpPr>
+            <a:grpSpLocks noChangeAspect="1"/>
+          </p:cNvGrpSpPr>
+          <p:nvPr/>
+        </p:nvGrpSpPr>
+        <p:grpSpPr>
+          <a:xfrm>
+            <a:off x="380879" y="1191667"/>
+            <a:ext cx="7926020" cy="2624728"/>
+            <a:chOff x="232995" y="406630"/>
+            <a:chExt cx="10641897" cy="3524100"/>
+          </a:xfrm>
+        </p:grpSpPr>
+        <p:grpSp>
+          <p:nvGrpSpPr>
+            <p:cNvPr id="21" name="Group 20">
+              <a:extLst>
+                <a:ext uri="{FF2B5EF4-FFF2-40B4-BE49-F238E27FC236}">
+                  <a16:creationId xmlns:a16="http://schemas.microsoft.com/office/drawing/2014/main" id="{851E801A-07D0-EC46-EC69-B1E3BDC4A0EE}"/>
+                </a:ext>
+              </a:extLst>
+            </p:cNvPr>
+            <p:cNvGrpSpPr/>
+            <p:nvPr/>
+          </p:nvGrpSpPr>
+          <p:grpSpPr>
+            <a:xfrm>
+              <a:off x="232995" y="835775"/>
+              <a:ext cx="1774658" cy="2310063"/>
+              <a:chOff x="990492" y="2511372"/>
+              <a:chExt cx="1774658" cy="2310063"/>
+            </a:xfrm>
+          </p:grpSpPr>
+          <p:sp>
+            <p:nvSpPr>
+              <p:cNvPr id="22" name="Rectangle 21">
+                <a:extLst>
+                  <a:ext uri="{FF2B5EF4-FFF2-40B4-BE49-F238E27FC236}">
+                    <a16:creationId xmlns:a16="http://schemas.microsoft.com/office/drawing/2014/main" id="{6A221BB0-FFBC-E869-34CB-BC594E5B0490}"/>
+                  </a:ext>
+                </a:extLst>
+              </p:cNvPr>
+              <p:cNvSpPr/>
+              <p:nvPr/>
+            </p:nvSpPr>
+            <p:spPr>
+              <a:xfrm>
+                <a:off x="990492" y="2511372"/>
+                <a:ext cx="1774658" cy="2310063"/>
+              </a:xfrm>
+              <a:prstGeom prst="rect">
+                <a:avLst/>
+              </a:prstGeom>
+              <a:solidFill>
+                <a:schemeClr val="accent1">
+                  <a:lumMod val="20000"/>
+                  <a:lumOff val="80000"/>
+                </a:schemeClr>
+              </a:solidFill>
+              <a:ln>
+                <a:solidFill>
+                  <a:schemeClr val="tx2">
+                    <a:lumMod val="25000"/>
+                    <a:lumOff val="75000"/>
+                  </a:schemeClr>
+                </a:solidFill>
+              </a:ln>
+            </p:spPr>
+            <p:style>
+              <a:lnRef idx="2">
+                <a:schemeClr val="accent1">
+                  <a:shade val="15000"/>
+                </a:schemeClr>
+              </a:lnRef>
+              <a:fillRef idx="1">
+                <a:schemeClr val="accent1"/>
+              </a:fillRef>
+              <a:effectRef idx="0">
+                <a:schemeClr val="accent1"/>
+              </a:effectRef>
+              <a:fontRef idx="minor">
+                <a:schemeClr val="lt1"/>
+              </a:fontRef>
+            </p:style>
+            <p:txBody>
+              <a:bodyPr rtlCol="0" anchor="ctr"/>
+              <a:lstStyle/>
+              <a:p>
+                <a:pPr algn="ctr"/>
+                <a:endParaRPr lang="en-US" dirty="0"/>
+              </a:p>
+            </p:txBody>
+          </p:sp>
+          <p:pic>
+            <p:nvPicPr>
+              <p:cNvPr id="23" name="Graphic 22" descr="Customer review with solid fill">
+                <a:extLst>
+                  <a:ext uri="{FF2B5EF4-FFF2-40B4-BE49-F238E27FC236}">
+                    <a16:creationId xmlns:a16="http://schemas.microsoft.com/office/drawing/2014/main" id="{0FAB87FB-66B8-682E-AC05-EA6B56D8F4FB}"/>
+                  </a:ext>
+                </a:extLst>
+              </p:cNvPr>
+              <p:cNvPicPr>
+                <a:picLocks noChangeAspect="1"/>
+              </p:cNvPicPr>
+              <p:nvPr/>
+            </p:nvPicPr>
+            <p:blipFill>
+              <a:blip r:embed="rId3">
+                <a:extLst>
+                  <a:ext uri="{96DAC541-7B7A-43D3-8B79-37D633B846F1}">
+                    <asvg:svgBlip xmlns:asvg="http://schemas.microsoft.com/office/drawing/2016/SVG/main" r:embed="rId4"/>
+                  </a:ext>
+                </a:extLst>
+              </a:blip>
+              <a:stretch>
+                <a:fillRect/>
+              </a:stretch>
+            </p:blipFill>
+            <p:spPr>
+              <a:xfrm>
+                <a:off x="1400027" y="3700649"/>
+                <a:ext cx="965534" cy="965534"/>
+              </a:xfrm>
+              <a:prstGeom prst="rect">
+                <a:avLst/>
+              </a:prstGeom>
+            </p:spPr>
+          </p:pic>
+          <p:pic>
+            <p:nvPicPr>
+              <p:cNvPr id="24" name="Picture 23">
+                <a:extLst>
+                  <a:ext uri="{FF2B5EF4-FFF2-40B4-BE49-F238E27FC236}">
+                    <a16:creationId xmlns:a16="http://schemas.microsoft.com/office/drawing/2014/main" id="{5AFB6878-0F86-C45A-E83E-50BAC05BCEF5}"/>
+                  </a:ext>
+                </a:extLst>
+              </p:cNvPr>
+              <p:cNvPicPr>
+                <a:picLocks noChangeAspect="1"/>
+              </p:cNvPicPr>
+              <p:nvPr/>
+            </p:nvPicPr>
+            <p:blipFill>
+              <a:blip r:embed="rId5"/>
+              <a:stretch>
+                <a:fillRect/>
+              </a:stretch>
+            </p:blipFill>
+            <p:spPr>
+              <a:xfrm>
+                <a:off x="1126882" y="2607575"/>
+                <a:ext cx="1525117" cy="996871"/>
+              </a:xfrm>
+              <a:prstGeom prst="rect">
+                <a:avLst/>
+              </a:prstGeom>
+            </p:spPr>
+          </p:pic>
+        </p:grpSp>
+        <p:sp>
+          <p:nvSpPr>
+            <p:cNvPr id="25" name="Arrow: Right 24">
+              <a:extLst>
+                <a:ext uri="{FF2B5EF4-FFF2-40B4-BE49-F238E27FC236}">
+                  <a16:creationId xmlns:a16="http://schemas.microsoft.com/office/drawing/2014/main" id="{8E792690-D447-952D-A5E7-853CC5FB33BB}"/>
+                </a:ext>
+              </a:extLst>
+            </p:cNvPr>
+            <p:cNvSpPr/>
+            <p:nvPr/>
+          </p:nvSpPr>
+          <p:spPr>
+            <a:xfrm>
+              <a:off x="2327498" y="1803354"/>
+              <a:ext cx="666746" cy="374904"/>
+            </a:xfrm>
+            <a:prstGeom prst="rightArrow">
+              <a:avLst/>
+            </a:prstGeom>
+          </p:spPr>
+          <p:style>
+            <a:lnRef idx="2">
+              <a:schemeClr val="accent1">
+                <a:shade val="15000"/>
+              </a:schemeClr>
+            </a:lnRef>
+            <a:fillRef idx="1">
+              <a:schemeClr val="accent1"/>
+            </a:fillRef>
+            <a:effectRef idx="0">
+              <a:schemeClr val="accent1"/>
+            </a:effectRef>
+            <a:fontRef idx="minor">
+              <a:schemeClr val="lt1"/>
+            </a:fontRef>
+          </p:style>
+          <p:txBody>
+            <a:bodyPr rtlCol="0" anchor="ctr"/>
+            <a:lstStyle/>
+            <a:p>
+              <a:pPr algn="ctr"/>
+              <a:endParaRPr lang="en-US"/>
+            </a:p>
+          </p:txBody>
+        </p:sp>
+        <p:sp>
+          <p:nvSpPr>
+            <p:cNvPr id="29" name="TextBox 28">
+              <a:extLst>
+                <a:ext uri="{FF2B5EF4-FFF2-40B4-BE49-F238E27FC236}">
+                  <a16:creationId xmlns:a16="http://schemas.microsoft.com/office/drawing/2014/main" id="{50EF08DE-650D-84D8-23E2-83CD379C9565}"/>
+                </a:ext>
+              </a:extLst>
+            </p:cNvPr>
+            <p:cNvSpPr txBox="1"/>
+            <p:nvPr/>
+          </p:nvSpPr>
+          <p:spPr>
+            <a:xfrm>
+              <a:off x="4038832" y="406630"/>
+              <a:ext cx="2855576" cy="454561"/>
+            </a:xfrm>
+            <a:prstGeom prst="rect">
+              <a:avLst/>
+            </a:prstGeom>
+            <a:noFill/>
+          </p:spPr>
+          <p:txBody>
+            <a:bodyPr wrap="square" rtlCol="0">
+              <a:spAutoFit/>
+            </a:bodyPr>
+            <a:lstStyle/>
+            <a:p>
+              <a:pPr algn="ctr"/>
+              <a:r>
+                <a:rPr lang="en-US" sz="1600" b="1" dirty="0"/>
+                <a:t>GCN</a:t>
+              </a:r>
+              <a:endParaRPr lang="de-DE" sz="1600" b="1" dirty="0"/>
+            </a:p>
+          </p:txBody>
+        </p:sp>
+        <p:sp>
+          <p:nvSpPr>
+            <p:cNvPr id="37" name="TextBox 36">
+              <a:extLst>
+                <a:ext uri="{FF2B5EF4-FFF2-40B4-BE49-F238E27FC236}">
+                  <a16:creationId xmlns:a16="http://schemas.microsoft.com/office/drawing/2014/main" id="{A9B538AC-1716-FEE9-9303-C64FEB3A2571}"/>
+                </a:ext>
+              </a:extLst>
+            </p:cNvPr>
+            <p:cNvSpPr txBox="1"/>
+            <p:nvPr/>
+          </p:nvSpPr>
+          <p:spPr>
+            <a:xfrm>
+              <a:off x="8019317" y="406630"/>
+              <a:ext cx="2855575" cy="454561"/>
+            </a:xfrm>
+            <a:prstGeom prst="rect">
+              <a:avLst/>
+            </a:prstGeom>
+            <a:noFill/>
+          </p:spPr>
+          <p:txBody>
+            <a:bodyPr wrap="square" rtlCol="0">
+              <a:spAutoFit/>
+            </a:bodyPr>
+            <a:lstStyle/>
+            <a:p>
+              <a:pPr algn="ctr"/>
+              <a:r>
+                <a:rPr lang="en-US" sz="1600" b="1" dirty="0"/>
+                <a:t>GAT</a:t>
+              </a:r>
+              <a:endParaRPr lang="de-DE" sz="1600" b="1" dirty="0"/>
+            </a:p>
+          </p:txBody>
+        </p:sp>
+        <p:sp>
+          <p:nvSpPr>
+            <p:cNvPr id="42" name="Arrow: Right 41">
+              <a:extLst>
+                <a:ext uri="{FF2B5EF4-FFF2-40B4-BE49-F238E27FC236}">
+                  <a16:creationId xmlns:a16="http://schemas.microsoft.com/office/drawing/2014/main" id="{666A450C-D0FA-4FC2-D779-9D8A47EBECE0}"/>
+                </a:ext>
+              </a:extLst>
+            </p:cNvPr>
+            <p:cNvSpPr/>
+            <p:nvPr/>
+          </p:nvSpPr>
+          <p:spPr>
+            <a:xfrm rot="2598933">
+              <a:off x="2289720" y="3555826"/>
+              <a:ext cx="666746" cy="374904"/>
+            </a:xfrm>
+            <a:prstGeom prst="rightArrow">
+              <a:avLst/>
+            </a:prstGeom>
+          </p:spPr>
+          <p:style>
+            <a:lnRef idx="2">
+              <a:schemeClr val="accent1">
+                <a:shade val="15000"/>
+              </a:schemeClr>
+            </a:lnRef>
+            <a:fillRef idx="1">
+              <a:schemeClr val="accent1"/>
+            </a:fillRef>
+            <a:effectRef idx="0">
+              <a:schemeClr val="accent1"/>
+            </a:effectRef>
+            <a:fontRef idx="minor">
+              <a:schemeClr val="lt1"/>
+            </a:fontRef>
+          </p:style>
+          <p:txBody>
+            <a:bodyPr rtlCol="0" anchor="ctr"/>
+            <a:lstStyle/>
+            <a:p>
+              <a:pPr algn="ctr"/>
+              <a:endParaRPr lang="en-US" dirty="0"/>
+            </a:p>
+          </p:txBody>
+        </p:sp>
+      </p:grpSp>
+      <p:sp>
+        <p:nvSpPr>
+          <p:cNvPr id="163" name="PlaceHolder 1">
+            <a:extLst>
+              <a:ext uri="{FF2B5EF4-FFF2-40B4-BE49-F238E27FC236}">
+                <a16:creationId xmlns:a16="http://schemas.microsoft.com/office/drawing/2014/main" id="{57944F4B-F502-E7CC-8790-8737702BC6AC}"/>
+              </a:ext>
+            </a:extLst>
+          </p:cNvPr>
+          <p:cNvSpPr>
+            <a:spLocks noGrp="1"/>
+          </p:cNvSpPr>
+          <p:nvPr>
+            <p:ph type="title"/>
+          </p:nvPr>
+        </p:nvSpPr>
+        <p:spPr>
+          <a:xfrm>
+            <a:off x="380880" y="228600"/>
+            <a:ext cx="8380080" cy="837720"/>
+          </a:xfrm>
+          <a:prstGeom prst="rect">
+            <a:avLst/>
+          </a:prstGeom>
+          <a:noFill/>
+          <a:ln w="0">
+            <a:noFill/>
+          </a:ln>
+        </p:spPr>
+        <p:txBody>
+          <a:bodyPr numCol="1" spcCol="0" anchor="ctr">
+            <a:noAutofit/>
+          </a:bodyPr>
+          <a:lstStyle/>
+          <a:p>
+            <a:pPr>
+              <a:lnSpc>
+                <a:spcPct val="100000"/>
+              </a:lnSpc>
+              <a:buNone/>
+            </a:pPr>
+            <a:r>
+              <a:rPr lang="en-US" sz="3200" b="0" strike="noStrike" spc="-1" dirty="0">
+                <a:solidFill>
+                  <a:srgbClr val="0064C8"/>
+                </a:solidFill>
+                <a:latin typeface="Century Gothic"/>
+              </a:rPr>
+              <a:t>Prompt </a:t>
+            </a:r>
+            <a:r>
+              <a:rPr lang="en-US" sz="3200" spc="-1" dirty="0">
+                <a:solidFill>
+                  <a:srgbClr val="0064C8"/>
+                </a:solidFill>
+                <a:latin typeface="Century Gothic"/>
+              </a:rPr>
+              <a:t>4</a:t>
+            </a:r>
+            <a:endParaRPr lang="en-US" sz="3200" b="0" strike="noStrike" spc="-1" dirty="0">
+              <a:solidFill>
+                <a:srgbClr val="000000"/>
+              </a:solidFill>
+              <a:latin typeface="Century Gothic"/>
+            </a:endParaRPr>
+          </a:p>
+        </p:txBody>
+      </p:sp>
+      <p:pic>
+        <p:nvPicPr>
+          <p:cNvPr id="4" name="Picture 3">
+            <a:extLst>
+              <a:ext uri="{FF2B5EF4-FFF2-40B4-BE49-F238E27FC236}">
+                <a16:creationId xmlns:a16="http://schemas.microsoft.com/office/drawing/2014/main" id="{2B6FC3F7-8023-4F1A-80C4-78814837030C}"/>
+              </a:ext>
+            </a:extLst>
+          </p:cNvPr>
+          <p:cNvPicPr>
+            <a:picLocks noChangeAspect="1"/>
+          </p:cNvPicPr>
+          <p:nvPr/>
+        </p:nvPicPr>
+        <p:blipFill rotWithShape="1">
+          <a:blip r:embed="rId6"/>
+          <a:srcRect l="12757" t="8229" r="10218" b="12776"/>
+          <a:stretch/>
+        </p:blipFill>
+        <p:spPr>
+          <a:xfrm>
+            <a:off x="3126534" y="1707534"/>
+            <a:ext cx="2649606" cy="1528543"/>
+          </a:xfrm>
+          <a:prstGeom prst="rect">
+            <a:avLst/>
+          </a:prstGeom>
+        </p:spPr>
+      </p:pic>
+      <p:pic>
+        <p:nvPicPr>
+          <p:cNvPr id="7" name="Picture 6">
+            <a:extLst>
+              <a:ext uri="{FF2B5EF4-FFF2-40B4-BE49-F238E27FC236}">
+                <a16:creationId xmlns:a16="http://schemas.microsoft.com/office/drawing/2014/main" id="{84E291A9-37A2-4845-AADE-EA756DB24E25}"/>
+              </a:ext>
+            </a:extLst>
+          </p:cNvPr>
+          <p:cNvPicPr>
+            <a:picLocks noChangeAspect="1"/>
+          </p:cNvPicPr>
+          <p:nvPr/>
+        </p:nvPicPr>
+        <p:blipFill rotWithShape="1">
+          <a:blip r:embed="rId7"/>
+          <a:srcRect l="13677" t="11105" r="10217" b="13350"/>
+          <a:stretch/>
+        </p:blipFill>
+        <p:spPr>
+          <a:xfrm>
+            <a:off x="5927416" y="1720100"/>
+            <a:ext cx="2833544" cy="1582127"/>
+          </a:xfrm>
+          <a:prstGeom prst="rect">
+            <a:avLst/>
+          </a:prstGeom>
+        </p:spPr>
+      </p:pic>
+      <p:sp>
+        <p:nvSpPr>
+          <p:cNvPr id="20" name="TextBox 19">
+            <a:extLst>
+              <a:ext uri="{FF2B5EF4-FFF2-40B4-BE49-F238E27FC236}">
+                <a16:creationId xmlns:a16="http://schemas.microsoft.com/office/drawing/2014/main" id="{01841CB4-C14F-4C4D-9FCA-104EFC611466}"/>
+              </a:ext>
+            </a:extLst>
+          </p:cNvPr>
+          <p:cNvSpPr txBox="1"/>
+          <p:nvPr/>
+        </p:nvSpPr>
+        <p:spPr>
+          <a:xfrm>
+            <a:off x="2819999" y="3435324"/>
+            <a:ext cx="5912281" cy="338554"/>
+          </a:xfrm>
+          <a:prstGeom prst="rect">
+            <a:avLst/>
+          </a:prstGeom>
+          <a:noFill/>
+        </p:spPr>
+        <p:txBody>
+          <a:bodyPr wrap="square" rtlCol="0">
+            <a:spAutoFit/>
+          </a:bodyPr>
+          <a:lstStyle/>
+          <a:p>
+            <a:pPr algn="ctr"/>
+            <a:r>
+              <a:rPr lang="en-US" sz="1600" b="1" dirty="0"/>
+              <a:t>Key Differences in Learning Characteristics</a:t>
+            </a:r>
+            <a:endParaRPr lang="de-DE" sz="1600" b="1" dirty="0"/>
+          </a:p>
+        </p:txBody>
+      </p:sp>
+      <p:sp>
+        <p:nvSpPr>
+          <p:cNvPr id="26" name="TextBox 25">
+            <a:extLst>
+              <a:ext uri="{FF2B5EF4-FFF2-40B4-BE49-F238E27FC236}">
+                <a16:creationId xmlns:a16="http://schemas.microsoft.com/office/drawing/2014/main" id="{31AF5DDE-C52A-4B6D-A9BF-07A0043EA48E}"/>
+              </a:ext>
+            </a:extLst>
+          </p:cNvPr>
+          <p:cNvSpPr txBox="1"/>
+          <p:nvPr/>
+        </p:nvSpPr>
+        <p:spPr>
+          <a:xfrm>
+            <a:off x="2635095" y="3913448"/>
+            <a:ext cx="3128884" cy="2123658"/>
+          </a:xfrm>
+          <a:prstGeom prst="rect">
+            <a:avLst/>
+          </a:prstGeom>
+          <a:noFill/>
+        </p:spPr>
+        <p:txBody>
+          <a:bodyPr wrap="square">
+            <a:spAutoFit/>
+          </a:bodyPr>
+          <a:lstStyle/>
+          <a:p>
+            <a:pPr algn="l"/>
+            <a:r>
+              <a:rPr lang="en-US" sz="1200" b="1" i="0" dirty="0">
+                <a:effectLst/>
+              </a:rPr>
+              <a:t> GCN: Fragment-Driven Learning</a:t>
+            </a:r>
+          </a:p>
+          <a:p>
+            <a:pPr algn="l"/>
+            <a:endParaRPr lang="en-US" sz="1200" b="1" i="0" dirty="0">
+              <a:effectLst/>
+            </a:endParaRPr>
+          </a:p>
+          <a:p>
+            <a:pPr marL="171450" indent="-171450" algn="l">
+              <a:buFont typeface="Arial" panose="020B0604020202020204" pitchFamily="34" charset="0"/>
+              <a:buChar char="•"/>
+            </a:pPr>
+            <a:r>
+              <a:rPr lang="en-US" sz="1200" b="1" i="0" dirty="0">
+                <a:effectLst/>
+              </a:rPr>
+              <a:t>Top contributors</a:t>
+            </a:r>
+            <a:r>
+              <a:rPr lang="en-US" sz="1200" b="0" i="0" dirty="0">
+                <a:effectLst/>
+              </a:rPr>
+              <a:t>: Aromatic ring bonds (</a:t>
+            </a:r>
+            <a:r>
+              <a:rPr lang="en-US" sz="1200" b="0" i="0" dirty="0" err="1">
+                <a:effectLst/>
+              </a:rPr>
+              <a:t>cC</a:t>
+            </a:r>
+            <a:r>
+              <a:rPr lang="en-US" sz="1200" b="0" i="0" dirty="0">
+                <a:effectLst/>
+              </a:rPr>
+              <a:t>) and N-C single bonds</a:t>
+            </a:r>
+          </a:p>
+          <a:p>
+            <a:pPr marL="171450" indent="-171450" algn="l">
+              <a:buFont typeface="Arial" panose="020B0604020202020204" pitchFamily="34" charset="0"/>
+              <a:buChar char="•"/>
+            </a:pPr>
+            <a:r>
+              <a:rPr lang="en-US" sz="1200" b="1" i="0" dirty="0">
+                <a:effectLst/>
+              </a:rPr>
+              <a:t>Learning pattern</a:t>
+            </a:r>
+            <a:r>
+              <a:rPr lang="en-US" sz="1200" b="0" i="0" dirty="0">
+                <a:effectLst/>
+              </a:rPr>
+              <a:t>: Focuses on </a:t>
+            </a:r>
+            <a:r>
+              <a:rPr lang="en-US" sz="1200" b="1" i="0" dirty="0">
+                <a:effectLst/>
+              </a:rPr>
+              <a:t>local atomic environments</a:t>
+            </a:r>
+            <a:r>
+              <a:rPr lang="en-US" sz="1200" b="0" i="0" dirty="0">
+                <a:effectLst/>
+              </a:rPr>
+              <a:t> and </a:t>
+            </a:r>
+            <a:r>
+              <a:rPr lang="en-US" sz="1200" b="1" i="0" dirty="0">
+                <a:effectLst/>
+              </a:rPr>
+              <a:t>bond types</a:t>
+            </a:r>
+            <a:endParaRPr lang="en-US" sz="1200" b="0" i="0" dirty="0">
+              <a:effectLst/>
+            </a:endParaRPr>
+          </a:p>
+          <a:p>
+            <a:pPr marL="171450" indent="-171450" algn="l">
+              <a:buFont typeface="Arial" panose="020B0604020202020204" pitchFamily="34" charset="0"/>
+              <a:buChar char="•"/>
+            </a:pPr>
+            <a:r>
+              <a:rPr lang="en-US" sz="1200" b="1" i="0" dirty="0">
+                <a:effectLst/>
+              </a:rPr>
+              <a:t>Mechanism</a:t>
+            </a:r>
+            <a:r>
+              <a:rPr lang="en-US" sz="1200" b="0" i="0" dirty="0">
+                <a:effectLst/>
+              </a:rPr>
+              <a:t>: Message passing treats all neighbors equally → learns </a:t>
+            </a:r>
+            <a:r>
+              <a:rPr lang="en-US" sz="1200" b="1" i="0" dirty="0">
+                <a:effectLst/>
+              </a:rPr>
+              <a:t>structural motifs</a:t>
+            </a:r>
+            <a:endParaRPr lang="en-US" sz="1200" b="0" i="0" dirty="0">
+              <a:effectLst/>
+            </a:endParaRPr>
+          </a:p>
+          <a:p>
+            <a:pPr marL="171450" indent="-171450" algn="l">
+              <a:buFont typeface="Arial" panose="020B0604020202020204" pitchFamily="34" charset="0"/>
+              <a:buChar char="•"/>
+            </a:pPr>
+            <a:r>
+              <a:rPr lang="en-US" sz="1200" b="1" i="0" dirty="0">
+                <a:effectLst/>
+              </a:rPr>
+              <a:t>Top bonds</a:t>
+            </a:r>
+            <a:r>
+              <a:rPr lang="en-US" sz="1200" b="0" i="0" dirty="0">
+                <a:effectLst/>
+              </a:rPr>
+              <a:t>: Bonds connecting aromatic rings to alkyl chains</a:t>
+            </a:r>
+          </a:p>
+        </p:txBody>
+      </p:sp>
+      <p:sp>
+        <p:nvSpPr>
+          <p:cNvPr id="27" name="TextBox 26">
+            <a:extLst>
+              <a:ext uri="{FF2B5EF4-FFF2-40B4-BE49-F238E27FC236}">
+                <a16:creationId xmlns:a16="http://schemas.microsoft.com/office/drawing/2014/main" id="{7A28ACA2-759C-42E3-8D83-A517AC66D9FE}"/>
+              </a:ext>
+            </a:extLst>
+          </p:cNvPr>
+          <p:cNvSpPr txBox="1"/>
+          <p:nvPr/>
+        </p:nvSpPr>
+        <p:spPr>
+          <a:xfrm>
+            <a:off x="5763978" y="3889856"/>
+            <a:ext cx="3217861" cy="2147250"/>
+          </a:xfrm>
+          <a:prstGeom prst="rect">
+            <a:avLst/>
+          </a:prstGeom>
+          <a:noFill/>
+        </p:spPr>
+        <p:txBody>
+          <a:bodyPr wrap="square">
+            <a:spAutoFit/>
+          </a:bodyPr>
+          <a:lstStyle/>
+          <a:p>
+            <a:pPr algn="l"/>
+            <a:r>
+              <a:rPr lang="en-US" sz="1200" b="1" i="0" dirty="0">
+                <a:effectLst/>
+              </a:rPr>
+              <a:t>GAT: Context-Aware Learning</a:t>
+            </a:r>
+          </a:p>
+          <a:p>
+            <a:pPr algn="l"/>
+            <a:endParaRPr lang="en-US" sz="1200" b="1" i="0" dirty="0">
+              <a:effectLst/>
+            </a:endParaRPr>
+          </a:p>
+          <a:p>
+            <a:pPr marL="171450" indent="-171450" algn="l">
+              <a:buFont typeface="Arial" panose="020B0604020202020204" pitchFamily="34" charset="0"/>
+              <a:buChar char="•"/>
+            </a:pPr>
+            <a:r>
+              <a:rPr lang="en-US" sz="1200" b="1" i="0" dirty="0">
+                <a:effectLst/>
+              </a:rPr>
+              <a:t>Top contributors</a:t>
+            </a:r>
+            <a:r>
+              <a:rPr lang="en-US" sz="1200" b="0" i="0" dirty="0">
+                <a:effectLst/>
+              </a:rPr>
+              <a:t>: Piperazine backbone (NCCN) and aliphatic C-C bonds</a:t>
+            </a:r>
+          </a:p>
+          <a:p>
+            <a:pPr marL="171450" indent="-171450" algn="l">
+              <a:buFont typeface="Arial" panose="020B0604020202020204" pitchFamily="34" charset="0"/>
+              <a:buChar char="•"/>
+            </a:pPr>
+            <a:r>
+              <a:rPr lang="en-US" sz="1200" b="1" i="0" dirty="0">
+                <a:effectLst/>
+              </a:rPr>
+              <a:t>Learning pattern</a:t>
+            </a:r>
+            <a:r>
+              <a:rPr lang="en-US" sz="1200" b="0" i="0" dirty="0">
+                <a:effectLst/>
+              </a:rPr>
+              <a:t>: Focuses on </a:t>
+            </a:r>
+            <a:r>
+              <a:rPr lang="en-US" sz="1200" b="1" i="0" dirty="0">
+                <a:effectLst/>
+              </a:rPr>
+              <a:t>molecular backbone</a:t>
+            </a:r>
+            <a:r>
+              <a:rPr lang="en-US" sz="1200" b="0" i="0" dirty="0">
+                <a:effectLst/>
+              </a:rPr>
+              <a:t> and </a:t>
+            </a:r>
+            <a:r>
+              <a:rPr lang="en-US" sz="1200" b="1" i="0" dirty="0">
+                <a:effectLst/>
+              </a:rPr>
+              <a:t>connectivity patterns</a:t>
+            </a:r>
+            <a:endParaRPr lang="en-US" sz="1200" b="0" i="0" dirty="0">
+              <a:effectLst/>
+            </a:endParaRPr>
+          </a:p>
+          <a:p>
+            <a:pPr marL="171450" indent="-171450" algn="l">
+              <a:buFont typeface="Arial" panose="020B0604020202020204" pitchFamily="34" charset="0"/>
+              <a:buChar char="•"/>
+            </a:pPr>
+            <a:r>
+              <a:rPr lang="en-US" sz="1200" b="1" i="0" dirty="0">
+                <a:effectLst/>
+              </a:rPr>
+              <a:t>Mechanism</a:t>
+            </a:r>
+            <a:r>
+              <a:rPr lang="en-US" sz="1200" b="0" i="0" dirty="0">
+                <a:effectLst/>
+              </a:rPr>
+              <a:t>: Attention weights allow GAT to </a:t>
+            </a:r>
+            <a:r>
+              <a:rPr lang="en-US" sz="1200" b="1" i="0" dirty="0">
+                <a:effectLst/>
+              </a:rPr>
+              <a:t>dynamically weight</a:t>
+            </a:r>
+            <a:r>
+              <a:rPr lang="en-US" sz="1200" b="0" i="0" dirty="0">
+                <a:effectLst/>
+              </a:rPr>
+              <a:t> important neighbors</a:t>
+            </a:r>
+          </a:p>
+          <a:p>
+            <a:pPr marL="171450" indent="-171450" algn="l">
+              <a:buFont typeface="Arial" panose="020B0604020202020204" pitchFamily="34" charset="0"/>
+              <a:buChar char="•"/>
+            </a:pPr>
+            <a:r>
+              <a:rPr lang="en-US" sz="1200" b="1" i="0" dirty="0">
+                <a:effectLst/>
+              </a:rPr>
+              <a:t>Top bonds</a:t>
+            </a:r>
+            <a:r>
+              <a:rPr lang="en-US" sz="1200" b="0" i="0" dirty="0">
+                <a:effectLst/>
+              </a:rPr>
+              <a:t>: Bonds within the piperazine ring system</a:t>
+            </a:r>
+          </a:p>
+        </p:txBody>
+      </p:sp>
+    </p:spTree>
+    <p:extLst>
+      <p:ext uri="{BB962C8B-B14F-4D97-AF65-F5344CB8AC3E}">
+        <p14:creationId xmlns:p14="http://schemas.microsoft.com/office/powerpoint/2010/main" val="2810728679"/>
+      </p:ext>
+    </p:extLst>
+  </p:cSld>
+  <p:clrMapOvr>
+    <a:masterClrMapping/>
+  </p:clrMapOvr>
+</p:sld>
+</file>
+
+<file path=ppt/slides/slide21.xml><?xml version="1.0" encoding="utf-8"?>
+<p:sld xmlns:a="http://schemas.openxmlformats.org/drawingml/2006/main" xmlns:r="http://schemas.openxmlformats.org/officeDocument/2006/relationships" xmlns:p="http://schemas.openxmlformats.org/presentationml/2006/main">
+  <p:cSld>
+    <p:spTree>
+      <p:nvGrpSpPr>
+        <p:cNvPr id="1" name="">
+          <a:extLst>
+            <a:ext uri="{FF2B5EF4-FFF2-40B4-BE49-F238E27FC236}">
+              <a16:creationId xmlns:a16="http://schemas.microsoft.com/office/drawing/2014/main" id="{A6515F23-0912-A838-23CE-B8F00573A2DA}"/>
+            </a:ext>
+          </a:extLst>
+        </p:cNvPr>
+        <p:cNvGrpSpPr/>
+        <p:nvPr/>
+      </p:nvGrpSpPr>
+      <p:grpSpPr>
+        <a:xfrm>
+          <a:off x="0" y="0"/>
+          <a:ext cx="0" cy="0"/>
+          <a:chOff x="0" y="0"/>
+          <a:chExt cx="0" cy="0"/>
+        </a:xfrm>
+      </p:grpSpPr>
+      <p:grpSp>
+        <p:nvGrpSpPr>
+          <p:cNvPr id="49" name="Group 48">
+            <a:extLst>
+              <a:ext uri="{FF2B5EF4-FFF2-40B4-BE49-F238E27FC236}">
+                <a16:creationId xmlns:a16="http://schemas.microsoft.com/office/drawing/2014/main" id="{C31E6F76-4E7C-1639-9021-CCC76ADA5882}"/>
+              </a:ext>
+            </a:extLst>
+          </p:cNvPr>
+          <p:cNvGrpSpPr>
+            <a:grpSpLocks noChangeAspect="1"/>
+          </p:cNvGrpSpPr>
+          <p:nvPr/>
+        </p:nvGrpSpPr>
+        <p:grpSpPr>
+          <a:xfrm>
+            <a:off x="380879" y="1191667"/>
+            <a:ext cx="7926020" cy="2624728"/>
+            <a:chOff x="232995" y="406630"/>
+            <a:chExt cx="10641897" cy="3524100"/>
+          </a:xfrm>
+        </p:grpSpPr>
+        <p:grpSp>
+          <p:nvGrpSpPr>
+            <p:cNvPr id="21" name="Group 20">
+              <a:extLst>
+                <a:ext uri="{FF2B5EF4-FFF2-40B4-BE49-F238E27FC236}">
+                  <a16:creationId xmlns:a16="http://schemas.microsoft.com/office/drawing/2014/main" id="{851E801A-07D0-EC46-EC69-B1E3BDC4A0EE}"/>
+                </a:ext>
+              </a:extLst>
+            </p:cNvPr>
+            <p:cNvGrpSpPr/>
+            <p:nvPr/>
+          </p:nvGrpSpPr>
+          <p:grpSpPr>
+            <a:xfrm>
+              <a:off x="232995" y="835775"/>
+              <a:ext cx="1774658" cy="2310063"/>
+              <a:chOff x="990492" y="2511372"/>
+              <a:chExt cx="1774658" cy="2310063"/>
+            </a:xfrm>
+          </p:grpSpPr>
+          <p:sp>
+            <p:nvSpPr>
+              <p:cNvPr id="22" name="Rectangle 21">
+                <a:extLst>
+                  <a:ext uri="{FF2B5EF4-FFF2-40B4-BE49-F238E27FC236}">
+                    <a16:creationId xmlns:a16="http://schemas.microsoft.com/office/drawing/2014/main" id="{6A221BB0-FFBC-E869-34CB-BC594E5B0490}"/>
+                  </a:ext>
+                </a:extLst>
+              </p:cNvPr>
+              <p:cNvSpPr/>
+              <p:nvPr/>
+            </p:nvSpPr>
+            <p:spPr>
+              <a:xfrm>
+                <a:off x="990492" y="2511372"/>
+                <a:ext cx="1774658" cy="2310063"/>
+              </a:xfrm>
+              <a:prstGeom prst="rect">
+                <a:avLst/>
+              </a:prstGeom>
+              <a:solidFill>
+                <a:schemeClr val="accent1">
+                  <a:lumMod val="20000"/>
+                  <a:lumOff val="80000"/>
+                </a:schemeClr>
+              </a:solidFill>
+              <a:ln>
+                <a:solidFill>
+                  <a:schemeClr val="tx2">
+                    <a:lumMod val="25000"/>
+                    <a:lumOff val="75000"/>
+                  </a:schemeClr>
+                </a:solidFill>
+              </a:ln>
+            </p:spPr>
+            <p:style>
+              <a:lnRef idx="2">
+                <a:schemeClr val="accent1">
+                  <a:shade val="15000"/>
+                </a:schemeClr>
+              </a:lnRef>
+              <a:fillRef idx="1">
+                <a:schemeClr val="accent1"/>
+              </a:fillRef>
+              <a:effectRef idx="0">
+                <a:schemeClr val="accent1"/>
+              </a:effectRef>
+              <a:fontRef idx="minor">
+                <a:schemeClr val="lt1"/>
+              </a:fontRef>
+            </p:style>
+            <p:txBody>
+              <a:bodyPr rtlCol="0" anchor="ctr"/>
+              <a:lstStyle/>
+              <a:p>
+                <a:pPr algn="ctr"/>
+                <a:endParaRPr lang="en-US" dirty="0"/>
+              </a:p>
+            </p:txBody>
+          </p:sp>
+          <p:pic>
+            <p:nvPicPr>
+              <p:cNvPr id="23" name="Graphic 22" descr="Customer review with solid fill">
+                <a:extLst>
+                  <a:ext uri="{FF2B5EF4-FFF2-40B4-BE49-F238E27FC236}">
+                    <a16:creationId xmlns:a16="http://schemas.microsoft.com/office/drawing/2014/main" id="{0FAB87FB-66B8-682E-AC05-EA6B56D8F4FB}"/>
+                  </a:ext>
+                </a:extLst>
+              </p:cNvPr>
+              <p:cNvPicPr>
+                <a:picLocks noChangeAspect="1"/>
+              </p:cNvPicPr>
+              <p:nvPr/>
+            </p:nvPicPr>
+            <p:blipFill>
+              <a:blip r:embed="rId3">
+                <a:extLst>
+                  <a:ext uri="{96DAC541-7B7A-43D3-8B79-37D633B846F1}">
+                    <asvg:svgBlip xmlns:asvg="http://schemas.microsoft.com/office/drawing/2016/SVG/main" r:embed="rId4"/>
+                  </a:ext>
+                </a:extLst>
+              </a:blip>
+              <a:stretch>
+                <a:fillRect/>
+              </a:stretch>
+            </p:blipFill>
+            <p:spPr>
+              <a:xfrm>
+                <a:off x="1400027" y="3700649"/>
+                <a:ext cx="965534" cy="965534"/>
+              </a:xfrm>
+              <a:prstGeom prst="rect">
+                <a:avLst/>
+              </a:prstGeom>
+            </p:spPr>
+          </p:pic>
+          <p:pic>
+            <p:nvPicPr>
+              <p:cNvPr id="24" name="Picture 23">
+                <a:extLst>
+                  <a:ext uri="{FF2B5EF4-FFF2-40B4-BE49-F238E27FC236}">
+                    <a16:creationId xmlns:a16="http://schemas.microsoft.com/office/drawing/2014/main" id="{5AFB6878-0F86-C45A-E83E-50BAC05BCEF5}"/>
+                  </a:ext>
+                </a:extLst>
+              </p:cNvPr>
+              <p:cNvPicPr>
+                <a:picLocks noChangeAspect="1"/>
+              </p:cNvPicPr>
+              <p:nvPr/>
+            </p:nvPicPr>
+            <p:blipFill>
+              <a:blip r:embed="rId5"/>
+              <a:stretch>
+                <a:fillRect/>
+              </a:stretch>
+            </p:blipFill>
+            <p:spPr>
+              <a:xfrm>
+                <a:off x="1126882" y="2607575"/>
+                <a:ext cx="1525117" cy="996871"/>
+              </a:xfrm>
+              <a:prstGeom prst="rect">
+                <a:avLst/>
+              </a:prstGeom>
+            </p:spPr>
+          </p:pic>
+        </p:grpSp>
+        <p:sp>
+          <p:nvSpPr>
+            <p:cNvPr id="25" name="Arrow: Right 24">
+              <a:extLst>
+                <a:ext uri="{FF2B5EF4-FFF2-40B4-BE49-F238E27FC236}">
+                  <a16:creationId xmlns:a16="http://schemas.microsoft.com/office/drawing/2014/main" id="{8E792690-D447-952D-A5E7-853CC5FB33BB}"/>
+                </a:ext>
+              </a:extLst>
+            </p:cNvPr>
+            <p:cNvSpPr/>
+            <p:nvPr/>
+          </p:nvSpPr>
+          <p:spPr>
+            <a:xfrm>
+              <a:off x="2327498" y="1803354"/>
+              <a:ext cx="666746" cy="374904"/>
+            </a:xfrm>
+            <a:prstGeom prst="rightArrow">
+              <a:avLst/>
+            </a:prstGeom>
+          </p:spPr>
+          <p:style>
+            <a:lnRef idx="2">
+              <a:schemeClr val="accent1">
+                <a:shade val="15000"/>
+              </a:schemeClr>
+            </a:lnRef>
+            <a:fillRef idx="1">
+              <a:schemeClr val="accent1"/>
+            </a:fillRef>
+            <a:effectRef idx="0">
+              <a:schemeClr val="accent1"/>
+            </a:effectRef>
+            <a:fontRef idx="minor">
+              <a:schemeClr val="lt1"/>
+            </a:fontRef>
+          </p:style>
+          <p:txBody>
+            <a:bodyPr rtlCol="0" anchor="ctr"/>
+            <a:lstStyle/>
+            <a:p>
+              <a:pPr algn="ctr"/>
+              <a:endParaRPr lang="en-US"/>
+            </a:p>
+          </p:txBody>
+        </p:sp>
+        <p:sp>
+          <p:nvSpPr>
+            <p:cNvPr id="29" name="TextBox 28">
+              <a:extLst>
+                <a:ext uri="{FF2B5EF4-FFF2-40B4-BE49-F238E27FC236}">
+                  <a16:creationId xmlns:a16="http://schemas.microsoft.com/office/drawing/2014/main" id="{50EF08DE-650D-84D8-23E2-83CD379C9565}"/>
+                </a:ext>
+              </a:extLst>
+            </p:cNvPr>
+            <p:cNvSpPr txBox="1"/>
+            <p:nvPr/>
+          </p:nvSpPr>
+          <p:spPr>
+            <a:xfrm>
+              <a:off x="4038832" y="406630"/>
+              <a:ext cx="2855576" cy="454561"/>
+            </a:xfrm>
+            <a:prstGeom prst="rect">
+              <a:avLst/>
+            </a:prstGeom>
+            <a:noFill/>
+          </p:spPr>
+          <p:txBody>
+            <a:bodyPr wrap="square" rtlCol="0">
+              <a:spAutoFit/>
+            </a:bodyPr>
+            <a:lstStyle/>
+            <a:p>
+              <a:pPr algn="ctr"/>
+              <a:r>
+                <a:rPr lang="en-US" sz="1600" b="1" dirty="0"/>
+                <a:t>GCN</a:t>
+              </a:r>
+              <a:endParaRPr lang="de-DE" sz="1600" b="1" dirty="0"/>
+            </a:p>
+          </p:txBody>
+        </p:sp>
+        <p:sp>
+          <p:nvSpPr>
+            <p:cNvPr id="37" name="TextBox 36">
+              <a:extLst>
+                <a:ext uri="{FF2B5EF4-FFF2-40B4-BE49-F238E27FC236}">
+                  <a16:creationId xmlns:a16="http://schemas.microsoft.com/office/drawing/2014/main" id="{A9B538AC-1716-FEE9-9303-C64FEB3A2571}"/>
+                </a:ext>
+              </a:extLst>
+            </p:cNvPr>
+            <p:cNvSpPr txBox="1"/>
+            <p:nvPr/>
+          </p:nvSpPr>
+          <p:spPr>
+            <a:xfrm>
+              <a:off x="8019317" y="406630"/>
+              <a:ext cx="2855575" cy="454561"/>
+            </a:xfrm>
+            <a:prstGeom prst="rect">
+              <a:avLst/>
+            </a:prstGeom>
+            <a:noFill/>
+          </p:spPr>
+          <p:txBody>
+            <a:bodyPr wrap="square" rtlCol="0">
+              <a:spAutoFit/>
+            </a:bodyPr>
+            <a:lstStyle/>
+            <a:p>
+              <a:pPr algn="ctr"/>
+              <a:r>
+                <a:rPr lang="en-US" sz="1600" b="1" dirty="0"/>
+                <a:t>GAT</a:t>
+              </a:r>
+              <a:endParaRPr lang="de-DE" sz="1600" b="1" dirty="0"/>
+            </a:p>
+          </p:txBody>
+        </p:sp>
+        <p:sp>
+          <p:nvSpPr>
+            <p:cNvPr id="42" name="Arrow: Right 41">
+              <a:extLst>
+                <a:ext uri="{FF2B5EF4-FFF2-40B4-BE49-F238E27FC236}">
+                  <a16:creationId xmlns:a16="http://schemas.microsoft.com/office/drawing/2014/main" id="{666A450C-D0FA-4FC2-D779-9D8A47EBECE0}"/>
+                </a:ext>
+              </a:extLst>
+            </p:cNvPr>
+            <p:cNvSpPr/>
+            <p:nvPr/>
+          </p:nvSpPr>
+          <p:spPr>
+            <a:xfrm rot="2598933">
+              <a:off x="2289720" y="3555826"/>
+              <a:ext cx="666746" cy="374904"/>
+            </a:xfrm>
+            <a:prstGeom prst="rightArrow">
+              <a:avLst/>
+            </a:prstGeom>
+          </p:spPr>
+          <p:style>
+            <a:lnRef idx="2">
+              <a:schemeClr val="accent1">
+                <a:shade val="15000"/>
+              </a:schemeClr>
+            </a:lnRef>
+            <a:fillRef idx="1">
+              <a:schemeClr val="accent1"/>
+            </a:fillRef>
+            <a:effectRef idx="0">
+              <a:schemeClr val="accent1"/>
+            </a:effectRef>
+            <a:fontRef idx="minor">
+              <a:schemeClr val="lt1"/>
+            </a:fontRef>
+          </p:style>
+          <p:txBody>
+            <a:bodyPr rtlCol="0" anchor="ctr"/>
+            <a:lstStyle/>
+            <a:p>
+              <a:pPr algn="ctr"/>
+              <a:endParaRPr lang="en-US" dirty="0"/>
+            </a:p>
+          </p:txBody>
+        </p:sp>
+      </p:grpSp>
+      <p:sp>
+        <p:nvSpPr>
+          <p:cNvPr id="163" name="PlaceHolder 1">
+            <a:extLst>
+              <a:ext uri="{FF2B5EF4-FFF2-40B4-BE49-F238E27FC236}">
+                <a16:creationId xmlns:a16="http://schemas.microsoft.com/office/drawing/2014/main" id="{57944F4B-F502-E7CC-8790-8737702BC6AC}"/>
+              </a:ext>
+            </a:extLst>
+          </p:cNvPr>
+          <p:cNvSpPr>
+            <a:spLocks noGrp="1"/>
+          </p:cNvSpPr>
+          <p:nvPr>
+            <p:ph type="title"/>
+          </p:nvPr>
+        </p:nvSpPr>
+        <p:spPr>
+          <a:xfrm>
+            <a:off x="380880" y="228600"/>
+            <a:ext cx="8380080" cy="837720"/>
+          </a:xfrm>
+          <a:prstGeom prst="rect">
+            <a:avLst/>
+          </a:prstGeom>
+          <a:noFill/>
+          <a:ln w="0">
+            <a:noFill/>
+          </a:ln>
+        </p:spPr>
+        <p:txBody>
+          <a:bodyPr numCol="1" spcCol="0" anchor="ctr">
+            <a:noAutofit/>
+          </a:bodyPr>
+          <a:lstStyle/>
+          <a:p>
+            <a:pPr>
+              <a:lnSpc>
+                <a:spcPct val="100000"/>
+              </a:lnSpc>
+              <a:buNone/>
+            </a:pPr>
+            <a:r>
+              <a:rPr lang="en-US" sz="3200" b="0" strike="noStrike" spc="-1" dirty="0">
+                <a:solidFill>
+                  <a:srgbClr val="0064C8"/>
+                </a:solidFill>
+                <a:latin typeface="Century Gothic"/>
+              </a:rPr>
+              <a:t>Prompt </a:t>
+            </a:r>
+            <a:r>
+              <a:rPr lang="en-US" sz="3200" spc="-1" dirty="0">
+                <a:solidFill>
+                  <a:srgbClr val="0064C8"/>
+                </a:solidFill>
+                <a:latin typeface="Century Gothic"/>
+              </a:rPr>
+              <a:t>4</a:t>
+            </a:r>
+            <a:endParaRPr lang="en-US" sz="3200" b="0" strike="noStrike" spc="-1" dirty="0">
+              <a:solidFill>
+                <a:srgbClr val="000000"/>
+              </a:solidFill>
+              <a:latin typeface="Century Gothic"/>
+            </a:endParaRPr>
+          </a:p>
+        </p:txBody>
+      </p:sp>
+      <p:pic>
+        <p:nvPicPr>
+          <p:cNvPr id="4" name="Picture 3">
+            <a:extLst>
+              <a:ext uri="{FF2B5EF4-FFF2-40B4-BE49-F238E27FC236}">
+                <a16:creationId xmlns:a16="http://schemas.microsoft.com/office/drawing/2014/main" id="{2B6FC3F7-8023-4F1A-80C4-78814837030C}"/>
+              </a:ext>
+            </a:extLst>
+          </p:cNvPr>
+          <p:cNvPicPr>
+            <a:picLocks noChangeAspect="1"/>
+          </p:cNvPicPr>
+          <p:nvPr/>
+        </p:nvPicPr>
+        <p:blipFill rotWithShape="1">
+          <a:blip r:embed="rId6"/>
+          <a:srcRect l="12757" t="8229" r="10218" b="12776"/>
+          <a:stretch/>
+        </p:blipFill>
+        <p:spPr>
+          <a:xfrm>
+            <a:off x="3126534" y="1707534"/>
+            <a:ext cx="2649606" cy="1528543"/>
+          </a:xfrm>
+          <a:prstGeom prst="rect">
+            <a:avLst/>
+          </a:prstGeom>
+        </p:spPr>
+      </p:pic>
+      <p:pic>
+        <p:nvPicPr>
+          <p:cNvPr id="7" name="Picture 6">
+            <a:extLst>
+              <a:ext uri="{FF2B5EF4-FFF2-40B4-BE49-F238E27FC236}">
+                <a16:creationId xmlns:a16="http://schemas.microsoft.com/office/drawing/2014/main" id="{84E291A9-37A2-4845-AADE-EA756DB24E25}"/>
+              </a:ext>
+            </a:extLst>
+          </p:cNvPr>
+          <p:cNvPicPr>
+            <a:picLocks noChangeAspect="1"/>
+          </p:cNvPicPr>
+          <p:nvPr/>
+        </p:nvPicPr>
+        <p:blipFill rotWithShape="1">
+          <a:blip r:embed="rId7"/>
+          <a:srcRect l="13677" t="11105" r="10217" b="13350"/>
+          <a:stretch/>
+        </p:blipFill>
+        <p:spPr>
+          <a:xfrm>
+            <a:off x="5927416" y="1720100"/>
+            <a:ext cx="2833544" cy="1582127"/>
+          </a:xfrm>
+          <a:prstGeom prst="rect">
+            <a:avLst/>
+          </a:prstGeom>
+        </p:spPr>
+      </p:pic>
+      <p:sp>
+        <p:nvSpPr>
+          <p:cNvPr id="20" name="TextBox 19">
+            <a:extLst>
+              <a:ext uri="{FF2B5EF4-FFF2-40B4-BE49-F238E27FC236}">
+                <a16:creationId xmlns:a16="http://schemas.microsoft.com/office/drawing/2014/main" id="{01841CB4-C14F-4C4D-9FCA-104EFC611466}"/>
+              </a:ext>
+            </a:extLst>
+          </p:cNvPr>
+          <p:cNvSpPr txBox="1"/>
+          <p:nvPr/>
+        </p:nvSpPr>
+        <p:spPr>
+          <a:xfrm>
+            <a:off x="2819999" y="3435324"/>
+            <a:ext cx="5912281" cy="338554"/>
+          </a:xfrm>
+          <a:prstGeom prst="rect">
+            <a:avLst/>
+          </a:prstGeom>
+          <a:noFill/>
+        </p:spPr>
+        <p:txBody>
+          <a:bodyPr wrap="square" rtlCol="0">
+            <a:spAutoFit/>
+          </a:bodyPr>
+          <a:lstStyle/>
+          <a:p>
+            <a:pPr algn="ctr"/>
+            <a:r>
+              <a:rPr lang="en-US" sz="1600" b="1" dirty="0"/>
+              <a:t>Interpretation of learning patterns</a:t>
+            </a:r>
+            <a:endParaRPr lang="de-DE" sz="1600" b="1" dirty="0"/>
+          </a:p>
+        </p:txBody>
+      </p:sp>
+      <p:sp>
+        <p:nvSpPr>
+          <p:cNvPr id="26" name="TextBox 25">
+            <a:extLst>
+              <a:ext uri="{FF2B5EF4-FFF2-40B4-BE49-F238E27FC236}">
+                <a16:creationId xmlns:a16="http://schemas.microsoft.com/office/drawing/2014/main" id="{31AF5DDE-C52A-4B6D-A9BF-07A0043EA48E}"/>
+              </a:ext>
+            </a:extLst>
+          </p:cNvPr>
+          <p:cNvSpPr txBox="1"/>
+          <p:nvPr/>
+        </p:nvSpPr>
+        <p:spPr>
+          <a:xfrm>
+            <a:off x="2793723" y="3913448"/>
+            <a:ext cx="2970255" cy="1938992"/>
+          </a:xfrm>
+          <a:prstGeom prst="rect">
+            <a:avLst/>
+          </a:prstGeom>
+          <a:noFill/>
+        </p:spPr>
+        <p:txBody>
+          <a:bodyPr wrap="square">
+            <a:spAutoFit/>
+          </a:bodyPr>
+          <a:lstStyle/>
+          <a:p>
+            <a:pPr algn="l"/>
+            <a:r>
+              <a:rPr lang="en-US" sz="1200" b="1" i="0" dirty="0">
+                <a:effectLst/>
+              </a:rPr>
+              <a:t>GCN</a:t>
+            </a:r>
+            <a:r>
+              <a:rPr lang="en-US" sz="1200" b="0" i="0" dirty="0">
+                <a:effectLst/>
+              </a:rPr>
+              <a:t> identifies </a:t>
+            </a:r>
+            <a:r>
+              <a:rPr lang="en-US" sz="1200" b="1" i="0" dirty="0">
+                <a:effectLst/>
+              </a:rPr>
+              <a:t>aromatic-alkyl connections</a:t>
+            </a:r>
+            <a:r>
+              <a:rPr lang="en-US" sz="1200" b="0" i="0" dirty="0">
+                <a:effectLst/>
+              </a:rPr>
+              <a:t> as most important. This suggests GCN has learned that:</a:t>
+            </a:r>
+          </a:p>
+          <a:p>
+            <a:pPr algn="l"/>
+            <a:endParaRPr lang="en-US" sz="1200" b="0" i="0" dirty="0">
+              <a:effectLst/>
+            </a:endParaRPr>
+          </a:p>
+          <a:p>
+            <a:pPr marL="171450" indent="-171450" algn="l">
+              <a:buFont typeface="Arial" panose="020B0604020202020204" pitchFamily="34" charset="0"/>
+              <a:buChar char="•"/>
+            </a:pPr>
+            <a:r>
+              <a:rPr lang="en-US" sz="1200" b="0" i="0" dirty="0">
+                <a:effectLst/>
+              </a:rPr>
+              <a:t>The link between aromatic rings and aliphatic chains is critical for activity</a:t>
+            </a:r>
+          </a:p>
+          <a:p>
+            <a:pPr marL="171450" indent="-171450" algn="l">
+              <a:buFont typeface="Arial" panose="020B0604020202020204" pitchFamily="34" charset="0"/>
+              <a:buChar char="•"/>
+            </a:pPr>
+            <a:r>
+              <a:rPr lang="en-US" sz="1200" b="0" i="0" dirty="0">
+                <a:effectLst/>
+              </a:rPr>
+              <a:t>Bond polarity and hybridization changes drive predictions</a:t>
+            </a:r>
+          </a:p>
+          <a:p>
+            <a:pPr marL="171450" indent="-171450" algn="l">
+              <a:buFont typeface="Arial" panose="020B0604020202020204" pitchFamily="34" charset="0"/>
+              <a:buChar char="•"/>
+            </a:pPr>
+            <a:r>
+              <a:rPr lang="en-US" sz="1200" b="0" i="0" dirty="0">
+                <a:effectLst/>
+              </a:rPr>
+              <a:t>GCN learns local structural features more effectively</a:t>
+            </a:r>
+          </a:p>
+        </p:txBody>
+      </p:sp>
+      <p:sp>
+        <p:nvSpPr>
+          <p:cNvPr id="27" name="TextBox 26">
+            <a:extLst>
+              <a:ext uri="{FF2B5EF4-FFF2-40B4-BE49-F238E27FC236}">
+                <a16:creationId xmlns:a16="http://schemas.microsoft.com/office/drawing/2014/main" id="{7A28ACA2-759C-42E3-8D83-A517AC66D9FE}"/>
+              </a:ext>
+            </a:extLst>
+          </p:cNvPr>
+          <p:cNvSpPr txBox="1"/>
+          <p:nvPr/>
+        </p:nvSpPr>
+        <p:spPr>
+          <a:xfrm>
+            <a:off x="5763979" y="3889856"/>
+            <a:ext cx="3064712" cy="1938992"/>
+          </a:xfrm>
+          <a:prstGeom prst="rect">
+            <a:avLst/>
+          </a:prstGeom>
+          <a:noFill/>
+        </p:spPr>
+        <p:txBody>
+          <a:bodyPr wrap="square">
+            <a:spAutoFit/>
+          </a:bodyPr>
+          <a:lstStyle/>
+          <a:p>
+            <a:pPr algn="l"/>
+            <a:r>
+              <a:rPr lang="en-US" sz="1200" b="1" i="0" dirty="0">
+                <a:effectLst/>
+              </a:rPr>
+              <a:t>GAT</a:t>
+            </a:r>
+            <a:r>
+              <a:rPr lang="en-US" sz="1200" b="0" i="0" dirty="0">
+                <a:effectLst/>
+              </a:rPr>
+              <a:t> identifies the </a:t>
+            </a:r>
+            <a:r>
+              <a:rPr lang="en-US" sz="1200" b="1" i="0" dirty="0">
+                <a:effectLst/>
+              </a:rPr>
+              <a:t>piperazine backbone as most important</a:t>
+            </a:r>
+            <a:r>
+              <a:rPr lang="en-US" sz="1200" b="0" i="0" dirty="0">
+                <a:effectLst/>
+              </a:rPr>
+              <a:t>. This suggests GAT has learned that:</a:t>
+            </a:r>
+          </a:p>
+          <a:p>
+            <a:pPr algn="l"/>
+            <a:endParaRPr lang="en-US" sz="1200" b="0" i="0" dirty="0">
+              <a:effectLst/>
+            </a:endParaRPr>
+          </a:p>
+          <a:p>
+            <a:pPr marL="171450" indent="-171450" algn="l">
+              <a:buFont typeface="Arial" panose="020B0604020202020204" pitchFamily="34" charset="0"/>
+              <a:buChar char="•"/>
+            </a:pPr>
+            <a:r>
+              <a:rPr lang="en-US" sz="1200" b="0" i="0" dirty="0">
+                <a:effectLst/>
+              </a:rPr>
+              <a:t>The central scaffold connectivity is key to activity prediction</a:t>
+            </a:r>
+          </a:p>
+          <a:p>
+            <a:pPr marL="171450" indent="-171450" algn="l">
+              <a:buFont typeface="Arial" panose="020B0604020202020204" pitchFamily="34" charset="0"/>
+              <a:buChar char="•"/>
+            </a:pPr>
+            <a:r>
+              <a:rPr lang="en-US" sz="1200" b="0" i="0" dirty="0">
+                <a:effectLst/>
+              </a:rPr>
+              <a:t>Molecular topology and ring systems are weighted more heavily</a:t>
+            </a:r>
+          </a:p>
+          <a:p>
+            <a:pPr marL="171450" indent="-171450" algn="l">
+              <a:buFont typeface="Arial" panose="020B0604020202020204" pitchFamily="34" charset="0"/>
+              <a:buChar char="•"/>
+            </a:pPr>
+            <a:r>
+              <a:rPr lang="en-US" sz="1200" b="0" i="0" dirty="0">
+                <a:effectLst/>
+              </a:rPr>
+              <a:t>GAT learns global structural patterns through attention</a:t>
+            </a:r>
+          </a:p>
+        </p:txBody>
+      </p:sp>
+    </p:spTree>
+    <p:extLst>
+      <p:ext uri="{BB962C8B-B14F-4D97-AF65-F5344CB8AC3E}">
+        <p14:creationId xmlns:p14="http://schemas.microsoft.com/office/powerpoint/2010/main" val="3716739817"/>
+      </p:ext>
+    </p:extLst>
+  </p:cSld>
+  <p:clrMapOvr>
+    <a:masterClrMapping/>
+  </p:clrMapOvr>
+</p:sld>
+</file>
+
+<file path=ppt/slides/slide22.xml><?xml version="1.0" encoding="utf-8"?>
+<p:sld xmlns:a="http://schemas.openxmlformats.org/drawingml/2006/main" xmlns:r="http://schemas.openxmlformats.org/officeDocument/2006/relationships" xmlns:p="http://schemas.openxmlformats.org/presentationml/2006/main">
+  <p:cSld>
+    <p:spTree>
+      <p:nvGrpSpPr>
+        <p:cNvPr id="1" name="">
+          <a:extLst>
+            <a:ext uri="{FF2B5EF4-FFF2-40B4-BE49-F238E27FC236}">
+              <a16:creationId xmlns:a16="http://schemas.microsoft.com/office/drawing/2014/main" id="{A6515F23-0912-A838-23CE-B8F00573A2DA}"/>
+            </a:ext>
+          </a:extLst>
+        </p:cNvPr>
+        <p:cNvGrpSpPr/>
+        <p:nvPr/>
+      </p:nvGrpSpPr>
+      <p:grpSpPr>
+        <a:xfrm>
+          <a:off x="0" y="0"/>
+          <a:ext cx="0" cy="0"/>
+          <a:chOff x="0" y="0"/>
+          <a:chExt cx="0" cy="0"/>
+        </a:xfrm>
+      </p:grpSpPr>
+      <p:grpSp>
+        <p:nvGrpSpPr>
+          <p:cNvPr id="49" name="Group 48">
+            <a:extLst>
+              <a:ext uri="{FF2B5EF4-FFF2-40B4-BE49-F238E27FC236}">
+                <a16:creationId xmlns:a16="http://schemas.microsoft.com/office/drawing/2014/main" id="{C31E6F76-4E7C-1639-9021-CCC76ADA5882}"/>
+              </a:ext>
+            </a:extLst>
+          </p:cNvPr>
+          <p:cNvGrpSpPr>
+            <a:grpSpLocks noChangeAspect="1"/>
+          </p:cNvGrpSpPr>
+          <p:nvPr/>
+        </p:nvGrpSpPr>
+        <p:grpSpPr>
+          <a:xfrm>
+            <a:off x="380880" y="1198799"/>
+            <a:ext cx="7926020" cy="2040145"/>
+            <a:chOff x="232995" y="406630"/>
+            <a:chExt cx="10641897" cy="2739208"/>
+          </a:xfrm>
+        </p:grpSpPr>
+        <p:grpSp>
+          <p:nvGrpSpPr>
+            <p:cNvPr id="21" name="Group 20">
+              <a:extLst>
+                <a:ext uri="{FF2B5EF4-FFF2-40B4-BE49-F238E27FC236}">
+                  <a16:creationId xmlns:a16="http://schemas.microsoft.com/office/drawing/2014/main" id="{851E801A-07D0-EC46-EC69-B1E3BDC4A0EE}"/>
+                </a:ext>
+              </a:extLst>
+            </p:cNvPr>
+            <p:cNvGrpSpPr/>
+            <p:nvPr/>
+          </p:nvGrpSpPr>
+          <p:grpSpPr>
+            <a:xfrm>
+              <a:off x="232995" y="835775"/>
+              <a:ext cx="1774658" cy="2310063"/>
+              <a:chOff x="990492" y="2511372"/>
+              <a:chExt cx="1774658" cy="2310063"/>
+            </a:xfrm>
+          </p:grpSpPr>
+          <p:sp>
+            <p:nvSpPr>
+              <p:cNvPr id="22" name="Rectangle 21">
+                <a:extLst>
+                  <a:ext uri="{FF2B5EF4-FFF2-40B4-BE49-F238E27FC236}">
+                    <a16:creationId xmlns:a16="http://schemas.microsoft.com/office/drawing/2014/main" id="{6A221BB0-FFBC-E869-34CB-BC594E5B0490}"/>
+                  </a:ext>
+                </a:extLst>
+              </p:cNvPr>
+              <p:cNvSpPr/>
+              <p:nvPr/>
+            </p:nvSpPr>
+            <p:spPr>
+              <a:xfrm>
+                <a:off x="990492" y="2511372"/>
+                <a:ext cx="1774658" cy="2310063"/>
+              </a:xfrm>
+              <a:prstGeom prst="rect">
+                <a:avLst/>
+              </a:prstGeom>
+              <a:solidFill>
+                <a:schemeClr val="accent1">
+                  <a:lumMod val="20000"/>
+                  <a:lumOff val="80000"/>
+                </a:schemeClr>
+              </a:solidFill>
+              <a:ln>
+                <a:solidFill>
+                  <a:schemeClr val="tx2">
+                    <a:lumMod val="25000"/>
+                    <a:lumOff val="75000"/>
+                  </a:schemeClr>
+                </a:solidFill>
+              </a:ln>
+            </p:spPr>
+            <p:style>
+              <a:lnRef idx="2">
+                <a:schemeClr val="accent1">
+                  <a:shade val="15000"/>
+                </a:schemeClr>
+              </a:lnRef>
+              <a:fillRef idx="1">
+                <a:schemeClr val="accent1"/>
+              </a:fillRef>
+              <a:effectRef idx="0">
+                <a:schemeClr val="accent1"/>
+              </a:effectRef>
+              <a:fontRef idx="minor">
+                <a:schemeClr val="lt1"/>
+              </a:fontRef>
+            </p:style>
+            <p:txBody>
+              <a:bodyPr rtlCol="0" anchor="ctr"/>
+              <a:lstStyle/>
+              <a:p>
+                <a:pPr algn="ctr"/>
+                <a:endParaRPr lang="en-US" dirty="0"/>
+              </a:p>
+            </p:txBody>
+          </p:sp>
+          <p:pic>
+            <p:nvPicPr>
+              <p:cNvPr id="23" name="Graphic 22" descr="Customer review with solid fill">
+                <a:extLst>
+                  <a:ext uri="{FF2B5EF4-FFF2-40B4-BE49-F238E27FC236}">
+                    <a16:creationId xmlns:a16="http://schemas.microsoft.com/office/drawing/2014/main" id="{0FAB87FB-66B8-682E-AC05-EA6B56D8F4FB}"/>
+                  </a:ext>
+                </a:extLst>
+              </p:cNvPr>
+              <p:cNvPicPr>
+                <a:picLocks noChangeAspect="1"/>
+              </p:cNvPicPr>
+              <p:nvPr/>
+            </p:nvPicPr>
+            <p:blipFill>
+              <a:blip r:embed="rId3">
+                <a:extLst>
+                  <a:ext uri="{96DAC541-7B7A-43D3-8B79-37D633B846F1}">
+                    <asvg:svgBlip xmlns:asvg="http://schemas.microsoft.com/office/drawing/2016/SVG/main" r:embed="rId4"/>
+                  </a:ext>
+                </a:extLst>
+              </a:blip>
+              <a:stretch>
+                <a:fillRect/>
+              </a:stretch>
+            </p:blipFill>
+            <p:spPr>
+              <a:xfrm>
+                <a:off x="1400027" y="3700649"/>
+                <a:ext cx="965534" cy="965534"/>
+              </a:xfrm>
+              <a:prstGeom prst="rect">
+                <a:avLst/>
+              </a:prstGeom>
+            </p:spPr>
+          </p:pic>
+          <p:pic>
+            <p:nvPicPr>
+              <p:cNvPr id="24" name="Picture 23">
+                <a:extLst>
+                  <a:ext uri="{FF2B5EF4-FFF2-40B4-BE49-F238E27FC236}">
+                    <a16:creationId xmlns:a16="http://schemas.microsoft.com/office/drawing/2014/main" id="{5AFB6878-0F86-C45A-E83E-50BAC05BCEF5}"/>
+                  </a:ext>
+                </a:extLst>
+              </p:cNvPr>
+              <p:cNvPicPr>
+                <a:picLocks noChangeAspect="1"/>
+              </p:cNvPicPr>
+              <p:nvPr/>
+            </p:nvPicPr>
+            <p:blipFill>
+              <a:blip r:embed="rId5"/>
+              <a:stretch>
+                <a:fillRect/>
+              </a:stretch>
+            </p:blipFill>
+            <p:spPr>
+              <a:xfrm>
+                <a:off x="1126882" y="2607575"/>
+                <a:ext cx="1525117" cy="996871"/>
+              </a:xfrm>
+              <a:prstGeom prst="rect">
+                <a:avLst/>
+              </a:prstGeom>
+            </p:spPr>
+          </p:pic>
+        </p:grpSp>
+        <p:sp>
+          <p:nvSpPr>
+            <p:cNvPr id="25" name="Arrow: Right 24">
+              <a:extLst>
+                <a:ext uri="{FF2B5EF4-FFF2-40B4-BE49-F238E27FC236}">
+                  <a16:creationId xmlns:a16="http://schemas.microsoft.com/office/drawing/2014/main" id="{8E792690-D447-952D-A5E7-853CC5FB33BB}"/>
+                </a:ext>
+              </a:extLst>
+            </p:cNvPr>
+            <p:cNvSpPr/>
+            <p:nvPr/>
+          </p:nvSpPr>
+          <p:spPr>
+            <a:xfrm>
+              <a:off x="2327498" y="1803354"/>
+              <a:ext cx="666746" cy="374904"/>
+            </a:xfrm>
+            <a:prstGeom prst="rightArrow">
+              <a:avLst/>
+            </a:prstGeom>
+          </p:spPr>
+          <p:style>
+            <a:lnRef idx="2">
+              <a:schemeClr val="accent1">
+                <a:shade val="15000"/>
+              </a:schemeClr>
+            </a:lnRef>
+            <a:fillRef idx="1">
+              <a:schemeClr val="accent1"/>
+            </a:fillRef>
+            <a:effectRef idx="0">
+              <a:schemeClr val="accent1"/>
+            </a:effectRef>
+            <a:fontRef idx="minor">
+              <a:schemeClr val="lt1"/>
+            </a:fontRef>
+          </p:style>
+          <p:txBody>
+            <a:bodyPr rtlCol="0" anchor="ctr"/>
+            <a:lstStyle/>
+            <a:p>
+              <a:pPr algn="ctr"/>
+              <a:endParaRPr lang="en-US"/>
+            </a:p>
+          </p:txBody>
+        </p:sp>
+        <p:sp>
+          <p:nvSpPr>
+            <p:cNvPr id="29" name="TextBox 28">
+              <a:extLst>
+                <a:ext uri="{FF2B5EF4-FFF2-40B4-BE49-F238E27FC236}">
+                  <a16:creationId xmlns:a16="http://schemas.microsoft.com/office/drawing/2014/main" id="{50EF08DE-650D-84D8-23E2-83CD379C9565}"/>
+                </a:ext>
+              </a:extLst>
+            </p:cNvPr>
+            <p:cNvSpPr txBox="1"/>
+            <p:nvPr/>
+          </p:nvSpPr>
+          <p:spPr>
+            <a:xfrm>
+              <a:off x="4038832" y="406630"/>
+              <a:ext cx="2855576" cy="454561"/>
+            </a:xfrm>
+            <a:prstGeom prst="rect">
+              <a:avLst/>
+            </a:prstGeom>
+            <a:noFill/>
+          </p:spPr>
+          <p:txBody>
+            <a:bodyPr wrap="square" rtlCol="0">
+              <a:spAutoFit/>
+            </a:bodyPr>
+            <a:lstStyle/>
+            <a:p>
+              <a:pPr algn="ctr"/>
+              <a:endParaRPr lang="de-DE" sz="1600" b="1" dirty="0"/>
+            </a:p>
+          </p:txBody>
+        </p:sp>
+        <p:sp>
+          <p:nvSpPr>
+            <p:cNvPr id="37" name="TextBox 36">
+              <a:extLst>
+                <a:ext uri="{FF2B5EF4-FFF2-40B4-BE49-F238E27FC236}">
+                  <a16:creationId xmlns:a16="http://schemas.microsoft.com/office/drawing/2014/main" id="{A9B538AC-1716-FEE9-9303-C64FEB3A2571}"/>
+                </a:ext>
+              </a:extLst>
+            </p:cNvPr>
+            <p:cNvSpPr txBox="1"/>
+            <p:nvPr/>
+          </p:nvSpPr>
+          <p:spPr>
+            <a:xfrm>
+              <a:off x="8019317" y="406630"/>
+              <a:ext cx="2855575" cy="454561"/>
+            </a:xfrm>
+            <a:prstGeom prst="rect">
+              <a:avLst/>
+            </a:prstGeom>
+            <a:noFill/>
+          </p:spPr>
+          <p:txBody>
+            <a:bodyPr wrap="square" rtlCol="0">
+              <a:spAutoFit/>
+            </a:bodyPr>
+            <a:lstStyle/>
+            <a:p>
+              <a:pPr algn="ctr"/>
+              <a:endParaRPr lang="de-DE" sz="1600" b="1" dirty="0"/>
+            </a:p>
+          </p:txBody>
+        </p:sp>
+      </p:grpSp>
+      <p:sp>
+        <p:nvSpPr>
+          <p:cNvPr id="163" name="PlaceHolder 1">
+            <a:extLst>
+              <a:ext uri="{FF2B5EF4-FFF2-40B4-BE49-F238E27FC236}">
+                <a16:creationId xmlns:a16="http://schemas.microsoft.com/office/drawing/2014/main" id="{57944F4B-F502-E7CC-8790-8737702BC6AC}"/>
+              </a:ext>
+            </a:extLst>
+          </p:cNvPr>
+          <p:cNvSpPr>
+            <a:spLocks noGrp="1"/>
+          </p:cNvSpPr>
+          <p:nvPr>
+            <p:ph type="title"/>
+          </p:nvPr>
+        </p:nvSpPr>
+        <p:spPr>
+          <a:xfrm>
+            <a:off x="380880" y="228600"/>
+            <a:ext cx="8380080" cy="837720"/>
+          </a:xfrm>
+          <a:prstGeom prst="rect">
+            <a:avLst/>
+          </a:prstGeom>
+          <a:noFill/>
+          <a:ln w="0">
+            <a:noFill/>
+          </a:ln>
+        </p:spPr>
+        <p:txBody>
+          <a:bodyPr numCol="1" spcCol="0" anchor="ctr">
+            <a:noAutofit/>
+          </a:bodyPr>
+          <a:lstStyle/>
+          <a:p>
+            <a:pPr>
+              <a:lnSpc>
+                <a:spcPct val="100000"/>
+              </a:lnSpc>
+              <a:buNone/>
+            </a:pPr>
+            <a:r>
+              <a:rPr lang="en-US" sz="3200" b="0" strike="noStrike" spc="-1" dirty="0">
+                <a:solidFill>
+                  <a:srgbClr val="0064C8"/>
+                </a:solidFill>
+                <a:latin typeface="Century Gothic"/>
+              </a:rPr>
+              <a:t>Prompt </a:t>
+            </a:r>
+            <a:r>
+              <a:rPr lang="en-US" sz="3200" spc="-1" dirty="0">
+                <a:solidFill>
+                  <a:srgbClr val="0064C8"/>
+                </a:solidFill>
+                <a:latin typeface="Century Gothic"/>
+              </a:rPr>
+              <a:t>4</a:t>
+            </a:r>
+            <a:endParaRPr lang="en-US" sz="3200" b="0" strike="noStrike" spc="-1" dirty="0">
+              <a:solidFill>
+                <a:srgbClr val="000000"/>
+              </a:solidFill>
+              <a:latin typeface="Century Gothic"/>
+            </a:endParaRPr>
+          </a:p>
+        </p:txBody>
+      </p:sp>
+      <p:grpSp>
+        <p:nvGrpSpPr>
+          <p:cNvPr id="51" name="Group 50">
+            <a:extLst>
+              <a:ext uri="{FF2B5EF4-FFF2-40B4-BE49-F238E27FC236}">
+                <a16:creationId xmlns:a16="http://schemas.microsoft.com/office/drawing/2014/main" id="{CC1AA76D-C750-48EF-91FA-B53742F2085C}"/>
+              </a:ext>
+            </a:extLst>
+          </p:cNvPr>
+          <p:cNvGrpSpPr>
+            <a:grpSpLocks noChangeAspect="1"/>
+          </p:cNvGrpSpPr>
+          <p:nvPr/>
+        </p:nvGrpSpPr>
+        <p:grpSpPr>
+          <a:xfrm>
+            <a:off x="380879" y="1191667"/>
+            <a:ext cx="7926020" cy="2682815"/>
+            <a:chOff x="232995" y="406630"/>
+            <a:chExt cx="10641897" cy="3602091"/>
+          </a:xfrm>
+        </p:grpSpPr>
+        <p:grpSp>
+          <p:nvGrpSpPr>
+            <p:cNvPr id="52" name="Group 51">
+              <a:extLst>
+                <a:ext uri="{FF2B5EF4-FFF2-40B4-BE49-F238E27FC236}">
+                  <a16:creationId xmlns:a16="http://schemas.microsoft.com/office/drawing/2014/main" id="{ADD38902-20B6-4BCF-8101-D94D33B9115C}"/>
+                </a:ext>
+              </a:extLst>
+            </p:cNvPr>
+            <p:cNvGrpSpPr/>
+            <p:nvPr/>
+          </p:nvGrpSpPr>
+          <p:grpSpPr>
+            <a:xfrm>
+              <a:off x="232995" y="835775"/>
+              <a:ext cx="1774658" cy="2310063"/>
+              <a:chOff x="990492" y="2511372"/>
+              <a:chExt cx="1774658" cy="2310063"/>
+            </a:xfrm>
+          </p:grpSpPr>
+          <p:sp>
+            <p:nvSpPr>
+              <p:cNvPr id="57" name="Rectangle 56">
+                <a:extLst>
+                  <a:ext uri="{FF2B5EF4-FFF2-40B4-BE49-F238E27FC236}">
+                    <a16:creationId xmlns:a16="http://schemas.microsoft.com/office/drawing/2014/main" id="{BC9299D2-90B6-4F15-A02F-0A6123C627FF}"/>
+                  </a:ext>
+                </a:extLst>
+              </p:cNvPr>
+              <p:cNvSpPr/>
+              <p:nvPr/>
+            </p:nvSpPr>
+            <p:spPr>
+              <a:xfrm>
+                <a:off x="990492" y="2511372"/>
+                <a:ext cx="1774658" cy="2310063"/>
+              </a:xfrm>
+              <a:prstGeom prst="rect">
+                <a:avLst/>
+              </a:prstGeom>
+              <a:solidFill>
+                <a:schemeClr val="accent1">
+                  <a:lumMod val="20000"/>
+                  <a:lumOff val="80000"/>
+                </a:schemeClr>
+              </a:solidFill>
+              <a:ln>
+                <a:solidFill>
+                  <a:schemeClr val="tx2">
+                    <a:lumMod val="25000"/>
+                    <a:lumOff val="75000"/>
+                  </a:schemeClr>
+                </a:solidFill>
+              </a:ln>
+            </p:spPr>
+            <p:style>
+              <a:lnRef idx="2">
+                <a:schemeClr val="accent1">
+                  <a:shade val="15000"/>
+                </a:schemeClr>
+              </a:lnRef>
+              <a:fillRef idx="1">
+                <a:schemeClr val="accent1"/>
+              </a:fillRef>
+              <a:effectRef idx="0">
+                <a:schemeClr val="accent1"/>
+              </a:effectRef>
+              <a:fontRef idx="minor">
+                <a:schemeClr val="lt1"/>
+              </a:fontRef>
+            </p:style>
+            <p:txBody>
+              <a:bodyPr rtlCol="0" anchor="ctr"/>
+              <a:lstStyle/>
+              <a:p>
+                <a:pPr algn="ctr"/>
+                <a:endParaRPr lang="en-US" dirty="0"/>
+              </a:p>
+            </p:txBody>
+          </p:sp>
+          <p:pic>
+            <p:nvPicPr>
+              <p:cNvPr id="58" name="Graphic 57" descr="Customer review with solid fill">
+                <a:extLst>
+                  <a:ext uri="{FF2B5EF4-FFF2-40B4-BE49-F238E27FC236}">
+                    <a16:creationId xmlns:a16="http://schemas.microsoft.com/office/drawing/2014/main" id="{073BA483-5FB7-4DE9-9778-C24DEE4EC82D}"/>
+                  </a:ext>
+                </a:extLst>
+              </p:cNvPr>
+              <p:cNvPicPr>
+                <a:picLocks noChangeAspect="1"/>
+              </p:cNvPicPr>
+              <p:nvPr/>
+            </p:nvPicPr>
+            <p:blipFill>
+              <a:blip r:embed="rId3">
+                <a:extLst>
+                  <a:ext uri="{96DAC541-7B7A-43D3-8B79-37D633B846F1}">
+                    <asvg:svgBlip xmlns:asvg="http://schemas.microsoft.com/office/drawing/2016/SVG/main" r:embed="rId4"/>
+                  </a:ext>
+                </a:extLst>
+              </a:blip>
+              <a:stretch>
+                <a:fillRect/>
+              </a:stretch>
+            </p:blipFill>
+            <p:spPr>
+              <a:xfrm>
+                <a:off x="1400027" y="3700649"/>
+                <a:ext cx="965534" cy="965534"/>
+              </a:xfrm>
+              <a:prstGeom prst="rect">
+                <a:avLst/>
+              </a:prstGeom>
+            </p:spPr>
+          </p:pic>
+          <p:pic>
+            <p:nvPicPr>
+              <p:cNvPr id="59" name="Picture 58">
+                <a:extLst>
+                  <a:ext uri="{FF2B5EF4-FFF2-40B4-BE49-F238E27FC236}">
+                    <a16:creationId xmlns:a16="http://schemas.microsoft.com/office/drawing/2014/main" id="{DE46D1F3-C4C4-4358-9086-C74E15E0E7C1}"/>
+                  </a:ext>
+                </a:extLst>
+              </p:cNvPr>
+              <p:cNvPicPr>
+                <a:picLocks noChangeAspect="1"/>
+              </p:cNvPicPr>
+              <p:nvPr/>
+            </p:nvPicPr>
+            <p:blipFill>
+              <a:blip r:embed="rId5"/>
+              <a:stretch>
+                <a:fillRect/>
+              </a:stretch>
+            </p:blipFill>
+            <p:spPr>
+              <a:xfrm>
+                <a:off x="1126882" y="2607575"/>
+                <a:ext cx="1525117" cy="996871"/>
+              </a:xfrm>
+              <a:prstGeom prst="rect">
+                <a:avLst/>
+              </a:prstGeom>
+            </p:spPr>
+          </p:pic>
+        </p:grpSp>
+        <p:sp>
+          <p:nvSpPr>
+            <p:cNvPr id="53" name="Arrow: Right 52">
+              <a:extLst>
+                <a:ext uri="{FF2B5EF4-FFF2-40B4-BE49-F238E27FC236}">
+                  <a16:creationId xmlns:a16="http://schemas.microsoft.com/office/drawing/2014/main" id="{30203F87-23CF-4F27-9ED8-858FD5C8BAB5}"/>
+                </a:ext>
+              </a:extLst>
+            </p:cNvPr>
+            <p:cNvSpPr/>
+            <p:nvPr/>
+          </p:nvSpPr>
+          <p:spPr>
+            <a:xfrm>
+              <a:off x="2327498" y="1803354"/>
+              <a:ext cx="666746" cy="374904"/>
+            </a:xfrm>
+            <a:prstGeom prst="rightArrow">
+              <a:avLst/>
+            </a:prstGeom>
+          </p:spPr>
+          <p:style>
+            <a:lnRef idx="2">
+              <a:schemeClr val="accent1">
+                <a:shade val="15000"/>
+              </a:schemeClr>
+            </a:lnRef>
+            <a:fillRef idx="1">
+              <a:schemeClr val="accent1"/>
+            </a:fillRef>
+            <a:effectRef idx="0">
+              <a:schemeClr val="accent1"/>
+            </a:effectRef>
+            <a:fontRef idx="minor">
+              <a:schemeClr val="lt1"/>
+            </a:fontRef>
+          </p:style>
+          <p:txBody>
+            <a:bodyPr rtlCol="0" anchor="ctr"/>
+            <a:lstStyle/>
+            <a:p>
+              <a:pPr algn="ctr"/>
+              <a:endParaRPr lang="en-US"/>
+            </a:p>
+          </p:txBody>
+        </p:sp>
+        <p:sp>
+          <p:nvSpPr>
+            <p:cNvPr id="54" name="TextBox 53">
+              <a:extLst>
+                <a:ext uri="{FF2B5EF4-FFF2-40B4-BE49-F238E27FC236}">
+                  <a16:creationId xmlns:a16="http://schemas.microsoft.com/office/drawing/2014/main" id="{94937509-898F-450F-9596-9686594F7DA8}"/>
+                </a:ext>
+              </a:extLst>
+            </p:cNvPr>
+            <p:cNvSpPr txBox="1"/>
+            <p:nvPr/>
+          </p:nvSpPr>
+          <p:spPr>
+            <a:xfrm>
+              <a:off x="4038832" y="406630"/>
+              <a:ext cx="2855576" cy="454561"/>
+            </a:xfrm>
+            <a:prstGeom prst="rect">
+              <a:avLst/>
+            </a:prstGeom>
+            <a:noFill/>
+          </p:spPr>
+          <p:txBody>
+            <a:bodyPr wrap="square" rtlCol="0">
+              <a:spAutoFit/>
+            </a:bodyPr>
+            <a:lstStyle/>
+            <a:p>
+              <a:pPr algn="ctr"/>
+              <a:r>
+                <a:rPr lang="en-US" sz="1600" b="1" dirty="0"/>
+                <a:t>GCN</a:t>
+              </a:r>
+              <a:endParaRPr lang="de-DE" sz="1600" b="1" dirty="0"/>
+            </a:p>
+          </p:txBody>
+        </p:sp>
+        <p:sp>
+          <p:nvSpPr>
+            <p:cNvPr id="55" name="TextBox 54">
+              <a:extLst>
+                <a:ext uri="{FF2B5EF4-FFF2-40B4-BE49-F238E27FC236}">
+                  <a16:creationId xmlns:a16="http://schemas.microsoft.com/office/drawing/2014/main" id="{0FC6AAC7-E13F-47C8-9C73-B83D4169B6C3}"/>
+                </a:ext>
+              </a:extLst>
+            </p:cNvPr>
+            <p:cNvSpPr txBox="1"/>
+            <p:nvPr/>
+          </p:nvSpPr>
+          <p:spPr>
+            <a:xfrm>
+              <a:off x="8019317" y="406630"/>
+              <a:ext cx="2855575" cy="454561"/>
+            </a:xfrm>
+            <a:prstGeom prst="rect">
+              <a:avLst/>
+            </a:prstGeom>
+            <a:noFill/>
+          </p:spPr>
+          <p:txBody>
+            <a:bodyPr wrap="square" rtlCol="0">
+              <a:spAutoFit/>
+            </a:bodyPr>
+            <a:lstStyle/>
+            <a:p>
+              <a:pPr algn="ctr"/>
+              <a:r>
+                <a:rPr lang="en-US" sz="1600" b="1" dirty="0"/>
+                <a:t>GAT</a:t>
+              </a:r>
+              <a:endParaRPr lang="de-DE" sz="1600" b="1" dirty="0"/>
+            </a:p>
+          </p:txBody>
+        </p:sp>
+        <p:sp>
+          <p:nvSpPr>
+            <p:cNvPr id="56" name="Arrow: Right 55">
+              <a:extLst>
+                <a:ext uri="{FF2B5EF4-FFF2-40B4-BE49-F238E27FC236}">
+                  <a16:creationId xmlns:a16="http://schemas.microsoft.com/office/drawing/2014/main" id="{6321ECED-EDEA-4C85-9583-EDC4FAD35057}"/>
+                </a:ext>
+              </a:extLst>
+            </p:cNvPr>
+            <p:cNvSpPr/>
+            <p:nvPr/>
+          </p:nvSpPr>
+          <p:spPr>
+            <a:xfrm rot="5400000">
+              <a:off x="798569" y="3487896"/>
+              <a:ext cx="666746" cy="374904"/>
+            </a:xfrm>
+            <a:prstGeom prst="rightArrow">
+              <a:avLst/>
+            </a:prstGeom>
+          </p:spPr>
+          <p:style>
+            <a:lnRef idx="2">
+              <a:schemeClr val="accent1">
+                <a:shade val="15000"/>
+              </a:schemeClr>
+            </a:lnRef>
+            <a:fillRef idx="1">
+              <a:schemeClr val="accent1"/>
+            </a:fillRef>
+            <a:effectRef idx="0">
+              <a:schemeClr val="accent1"/>
+            </a:effectRef>
+            <a:fontRef idx="minor">
+              <a:schemeClr val="lt1"/>
+            </a:fontRef>
+          </p:style>
+          <p:txBody>
+            <a:bodyPr rtlCol="0" anchor="ctr"/>
+            <a:lstStyle/>
+            <a:p>
+              <a:pPr algn="ctr"/>
+              <a:endParaRPr lang="en-US"/>
+            </a:p>
+          </p:txBody>
+        </p:sp>
+      </p:grpSp>
+      <p:sp>
+        <p:nvSpPr>
+          <p:cNvPr id="60" name="TextBox 59">
+            <a:extLst>
+              <a:ext uri="{FF2B5EF4-FFF2-40B4-BE49-F238E27FC236}">
+                <a16:creationId xmlns:a16="http://schemas.microsoft.com/office/drawing/2014/main" id="{543C76E0-DAAA-492F-BA6E-687D6B295DC2}"/>
+              </a:ext>
+            </a:extLst>
+          </p:cNvPr>
+          <p:cNvSpPr txBox="1"/>
+          <p:nvPr/>
+        </p:nvSpPr>
+        <p:spPr>
+          <a:xfrm>
+            <a:off x="482461" y="3969415"/>
+            <a:ext cx="3949638" cy="338554"/>
+          </a:xfrm>
+          <a:prstGeom prst="rect">
+            <a:avLst/>
+          </a:prstGeom>
+          <a:noFill/>
+        </p:spPr>
+        <p:txBody>
+          <a:bodyPr wrap="square" rtlCol="0">
+            <a:spAutoFit/>
+          </a:bodyPr>
+          <a:lstStyle/>
+          <a:p>
+            <a:r>
+              <a:rPr lang="en-US" sz="1600" b="1" dirty="0"/>
+              <a:t>Conclusion</a:t>
+            </a:r>
+            <a:endParaRPr lang="de-DE" sz="1600" b="1" dirty="0"/>
+          </a:p>
+        </p:txBody>
+      </p:sp>
+      <p:sp>
+        <p:nvSpPr>
+          <p:cNvPr id="61" name="TextBox 60">
+            <a:extLst>
+              <a:ext uri="{FF2B5EF4-FFF2-40B4-BE49-F238E27FC236}">
+                <a16:creationId xmlns:a16="http://schemas.microsoft.com/office/drawing/2014/main" id="{9767668A-54AF-40AC-B5A4-2A353350EE2E}"/>
+              </a:ext>
+            </a:extLst>
+          </p:cNvPr>
+          <p:cNvSpPr txBox="1"/>
+          <p:nvPr/>
+        </p:nvSpPr>
+        <p:spPr>
+          <a:xfrm>
+            <a:off x="482461" y="4317931"/>
+            <a:ext cx="8148034" cy="830997"/>
+          </a:xfrm>
+          <a:prstGeom prst="rect">
+            <a:avLst/>
+          </a:prstGeom>
+          <a:noFill/>
+        </p:spPr>
+        <p:txBody>
+          <a:bodyPr wrap="square">
+            <a:spAutoFit/>
+          </a:bodyPr>
+          <a:lstStyle/>
+          <a:p>
+            <a:r>
+              <a:rPr lang="en-US" sz="1200" b="0" i="0" dirty="0">
+                <a:effectLst/>
+              </a:rPr>
+              <a:t>While both models correctly predict this compound as active, </a:t>
+            </a:r>
+            <a:r>
+              <a:rPr lang="en-US" sz="1200" b="1" i="0" dirty="0">
+                <a:effectLst/>
+              </a:rPr>
+              <a:t>GAT demonstrates superior performance</a:t>
+            </a:r>
+            <a:r>
+              <a:rPr lang="en-US" sz="1200" b="0" i="0" dirty="0">
+                <a:effectLst/>
+              </a:rPr>
+              <a:t> and learns more sophisticated molecular representations through its attention mechanism. GAT's focus on the piperazine backbone suggests it captures </a:t>
+            </a:r>
+            <a:r>
+              <a:rPr lang="en-US" sz="1200" b="1" i="0" dirty="0">
+                <a:effectLst/>
+              </a:rPr>
+              <a:t>pharmacophore-relevant features</a:t>
+            </a:r>
+            <a:r>
+              <a:rPr lang="en-US" sz="1200" b="0" i="0" dirty="0">
+                <a:effectLst/>
+              </a:rPr>
+              <a:t> more effectively than GCN's fragment-based approach.</a:t>
+            </a:r>
+            <a:endParaRPr lang="de-DE" sz="1200" dirty="0"/>
+          </a:p>
+        </p:txBody>
+      </p:sp>
+      <p:pic>
+        <p:nvPicPr>
+          <p:cNvPr id="62" name="Picture 61">
+            <a:extLst>
+              <a:ext uri="{FF2B5EF4-FFF2-40B4-BE49-F238E27FC236}">
+                <a16:creationId xmlns:a16="http://schemas.microsoft.com/office/drawing/2014/main" id="{FD9BA923-0A0D-496E-B5E3-37862AF11367}"/>
+              </a:ext>
+            </a:extLst>
+          </p:cNvPr>
+          <p:cNvPicPr>
+            <a:picLocks noChangeAspect="1"/>
+          </p:cNvPicPr>
+          <p:nvPr/>
+        </p:nvPicPr>
+        <p:blipFill rotWithShape="1">
+          <a:blip r:embed="rId6"/>
+          <a:srcRect l="12757" t="8229" r="10218" b="12776"/>
+          <a:stretch/>
+        </p:blipFill>
+        <p:spPr>
+          <a:xfrm>
+            <a:off x="3126534" y="1707534"/>
+            <a:ext cx="2649606" cy="1528543"/>
+          </a:xfrm>
+          <a:prstGeom prst="rect">
+            <a:avLst/>
+          </a:prstGeom>
+        </p:spPr>
+      </p:pic>
+      <p:pic>
+        <p:nvPicPr>
+          <p:cNvPr id="63" name="Picture 62">
+            <a:extLst>
+              <a:ext uri="{FF2B5EF4-FFF2-40B4-BE49-F238E27FC236}">
+                <a16:creationId xmlns:a16="http://schemas.microsoft.com/office/drawing/2014/main" id="{132EE792-E031-4B62-A040-2F1AB742541A}"/>
+              </a:ext>
+            </a:extLst>
+          </p:cNvPr>
+          <p:cNvPicPr>
+            <a:picLocks noChangeAspect="1"/>
+          </p:cNvPicPr>
+          <p:nvPr/>
+        </p:nvPicPr>
+        <p:blipFill rotWithShape="1">
+          <a:blip r:embed="rId7"/>
+          <a:srcRect l="13677" t="11105" r="10217" b="13350"/>
+          <a:stretch/>
+        </p:blipFill>
+        <p:spPr>
+          <a:xfrm>
+            <a:off x="5927416" y="1720100"/>
+            <a:ext cx="2833544" cy="1582127"/>
+          </a:xfrm>
+          <a:prstGeom prst="rect">
+            <a:avLst/>
+          </a:prstGeom>
+        </p:spPr>
+      </p:pic>
+      <p:sp>
+        <p:nvSpPr>
+          <p:cNvPr id="64" name="TextBox 63">
+            <a:extLst>
+              <a:ext uri="{FF2B5EF4-FFF2-40B4-BE49-F238E27FC236}">
+                <a16:creationId xmlns:a16="http://schemas.microsoft.com/office/drawing/2014/main" id="{796D7F20-3E62-4DC7-B9AE-BE93AFDFAEFB}"/>
+              </a:ext>
+            </a:extLst>
+          </p:cNvPr>
+          <p:cNvSpPr txBox="1"/>
+          <p:nvPr/>
+        </p:nvSpPr>
+        <p:spPr>
+          <a:xfrm>
+            <a:off x="482461" y="5353316"/>
+            <a:ext cx="8148034" cy="461665"/>
+          </a:xfrm>
+          <a:prstGeom prst="rect">
+            <a:avLst/>
+          </a:prstGeom>
+          <a:noFill/>
+        </p:spPr>
+        <p:txBody>
+          <a:bodyPr wrap="square">
+            <a:spAutoFit/>
+          </a:bodyPr>
+          <a:lstStyle/>
+          <a:p>
+            <a:r>
+              <a:rPr lang="en-US" sz="1200" b="1" i="0" dirty="0">
+                <a:effectLst/>
+              </a:rPr>
+              <a:t>Note</a:t>
+            </a:r>
+            <a:r>
+              <a:rPr lang="en-US" sz="1200" b="0" i="0" dirty="0">
+                <a:effectLst/>
+              </a:rPr>
+              <a:t>: the agent focused on the differences, overinterpreting the results. It is clear that the models learned similar patterns (with different top bonds and magnitudes), but the agent did not mention any similarity between them.</a:t>
+            </a:r>
+            <a:endParaRPr lang="de-DE" sz="1200" dirty="0"/>
+          </a:p>
+        </p:txBody>
+      </p:sp>
+    </p:spTree>
+    <p:extLst>
+      <p:ext uri="{BB962C8B-B14F-4D97-AF65-F5344CB8AC3E}">
+        <p14:creationId xmlns:p14="http://schemas.microsoft.com/office/powerpoint/2010/main" val="997677161"/>
+      </p:ext>
+    </p:extLst>
+  </p:cSld>
+  <p:clrMapOvr>
+    <a:masterClrMapping/>
+  </p:clrMapOvr>
+</p:sld>
+</file>
+
+<file path=ppt/slides/slide23.xml><?xml version="1.0" encoding="utf-8"?>
+<p:sld xmlns:a="http://schemas.openxmlformats.org/drawingml/2006/main" xmlns:r="http://schemas.openxmlformats.org/officeDocument/2006/relationships" xmlns:p="http://schemas.openxmlformats.org/presentationml/2006/main">
+  <p:cSld>
+    <p:spTree>
+      <p:nvGrpSpPr>
+        <p:cNvPr id="1" name="">
+          <a:extLst>
+            <a:ext uri="{FF2B5EF4-FFF2-40B4-BE49-F238E27FC236}">
+              <a16:creationId xmlns:a16="http://schemas.microsoft.com/office/drawing/2014/main" id="{A6515F23-0912-A838-23CE-B8F00573A2DA}"/>
+            </a:ext>
+          </a:extLst>
+        </p:cNvPr>
+        <p:cNvGrpSpPr/>
+        <p:nvPr/>
+      </p:nvGrpSpPr>
+      <p:grpSpPr>
+        <a:xfrm>
+          <a:off x="0" y="0"/>
+          <a:ext cx="0" cy="0"/>
+          <a:chOff x="0" y="0"/>
+          <a:chExt cx="0" cy="0"/>
+        </a:xfrm>
+      </p:grpSpPr>
+      <p:sp>
+        <p:nvSpPr>
+          <p:cNvPr id="163" name="PlaceHolder 1">
+            <a:extLst>
+              <a:ext uri="{FF2B5EF4-FFF2-40B4-BE49-F238E27FC236}">
+                <a16:creationId xmlns:a16="http://schemas.microsoft.com/office/drawing/2014/main" id="{57944F4B-F502-E7CC-8790-8737702BC6AC}"/>
+              </a:ext>
+            </a:extLst>
+          </p:cNvPr>
+          <p:cNvSpPr>
+            <a:spLocks noGrp="1"/>
+          </p:cNvSpPr>
+          <p:nvPr>
+            <p:ph type="title"/>
+          </p:nvPr>
+        </p:nvSpPr>
+        <p:spPr>
+          <a:xfrm>
+            <a:off x="380880" y="228600"/>
+            <a:ext cx="8380080" cy="837720"/>
+          </a:xfrm>
+          <a:prstGeom prst="rect">
+            <a:avLst/>
+          </a:prstGeom>
+          <a:noFill/>
+          <a:ln w="0">
+            <a:noFill/>
+          </a:ln>
+        </p:spPr>
+        <p:txBody>
+          <a:bodyPr numCol="1" spcCol="0" anchor="ctr">
+            <a:noAutofit/>
+          </a:bodyPr>
+          <a:lstStyle/>
+          <a:p>
+            <a:pPr>
+              <a:lnSpc>
+                <a:spcPct val="100000"/>
+              </a:lnSpc>
+              <a:buNone/>
+            </a:pPr>
+            <a:r>
+              <a:rPr lang="en-US" sz="3200" b="0" strike="noStrike" spc="-1" dirty="0">
+                <a:solidFill>
+                  <a:srgbClr val="0064C8"/>
+                </a:solidFill>
+                <a:latin typeface="Century Gothic"/>
+              </a:rPr>
+              <a:t>Conclusion</a:t>
+            </a:r>
+            <a:endParaRPr lang="en-US" sz="3200" b="0" strike="noStrike" spc="-1" dirty="0">
+              <a:solidFill>
+                <a:srgbClr val="000000"/>
+              </a:solidFill>
+              <a:latin typeface="Century Gothic"/>
+            </a:endParaRPr>
+          </a:p>
+        </p:txBody>
+      </p:sp>
+      <p:sp>
+        <p:nvSpPr>
+          <p:cNvPr id="165" name="PlaceHolder 3">
+            <a:extLst>
+              <a:ext uri="{FF2B5EF4-FFF2-40B4-BE49-F238E27FC236}">
+                <a16:creationId xmlns:a16="http://schemas.microsoft.com/office/drawing/2014/main" id="{2EFBEA53-7B78-D9A1-93EF-9608A3193D27}"/>
+              </a:ext>
+            </a:extLst>
+          </p:cNvPr>
+          <p:cNvSpPr>
+            <a:spLocks noGrp="1"/>
+          </p:cNvSpPr>
+          <p:nvPr>
+            <p:ph type="sldNum"/>
+          </p:nvPr>
+        </p:nvSpPr>
+        <p:spPr>
+          <a:xfrm>
+            <a:off x="8376840" y="5692680"/>
+            <a:ext cx="384120" cy="364680"/>
+          </a:xfrm>
+          <a:prstGeom prst="rect">
+            <a:avLst/>
+          </a:prstGeom>
+          <a:noFill/>
+          <a:ln w="0">
+            <a:noFill/>
+          </a:ln>
+        </p:spPr>
+        <p:txBody>
+          <a:bodyPr anchor="ctr">
+            <a:noAutofit/>
+          </a:bodyPr>
+          <a:lstStyle/>
+          <a:p>
+            <a:pPr algn="r">
+              <a:lnSpc>
+                <a:spcPct val="100000"/>
+              </a:lnSpc>
+              <a:buNone/>
+            </a:pPr>
+            <a:fld id="{8BD7C522-1E12-40C3-B25E-5F0462E20B22}" type="slidenum">
+              <a:rPr lang="en-US" sz="1200" b="0" strike="noStrike" spc="-1">
+                <a:solidFill>
+                  <a:srgbClr val="8B8B8B"/>
+                </a:solidFill>
+                <a:latin typeface="Century Gothic"/>
+              </a:rPr>
+              <a:t>23</a:t>
+            </a:fld>
+            <a:endParaRPr lang="en-GB" sz="1200" b="0" strike="noStrike" spc="-1" dirty="0">
+              <a:latin typeface="Times New Roman"/>
+            </a:endParaRPr>
+          </a:p>
+        </p:txBody>
+      </p:sp>
+      <p:sp>
+        <p:nvSpPr>
+          <p:cNvPr id="2" name="PlaceHolder 2">
+            <a:extLst>
+              <a:ext uri="{FF2B5EF4-FFF2-40B4-BE49-F238E27FC236}">
+                <a16:creationId xmlns:a16="http://schemas.microsoft.com/office/drawing/2014/main" id="{870990D0-7AC5-46BA-6FC4-274F8E0A3ABE}"/>
+              </a:ext>
+            </a:extLst>
+          </p:cNvPr>
+          <p:cNvSpPr txBox="1">
+            <a:spLocks/>
+          </p:cNvSpPr>
+          <p:nvPr/>
+        </p:nvSpPr>
+        <p:spPr>
+          <a:xfrm>
+            <a:off x="380880" y="1375729"/>
+            <a:ext cx="8380080" cy="4468480"/>
+          </a:xfrm>
+          <a:prstGeom prst="rect">
+            <a:avLst/>
+          </a:prstGeom>
+          <a:noFill/>
+          <a:ln w="0">
+            <a:noFill/>
+          </a:ln>
+        </p:spPr>
+        <p:txBody>
+          <a:bodyPr numCol="1" spcCol="0" anchor="t">
+            <a:noAutofit/>
+          </a:bodyPr>
+          <a:lstStyle>
+            <a:lvl1pPr marL="228600" indent="-228600" algn="l" defTabSz="914400" rtl="0" eaLnBrk="1" latinLnBrk="0" hangingPunct="1">
+              <a:lnSpc>
+                <a:spcPct val="90000"/>
+              </a:lnSpc>
+              <a:spcBef>
+                <a:spcPts val="1000"/>
+              </a:spcBef>
+              <a:buFont typeface="Arial" panose="020B0604020202020204" pitchFamily="34" charset="0"/>
+              <a:buChar char="•"/>
+              <a:defRPr sz="2800" kern="1200">
+                <a:solidFill>
+                  <a:schemeClr val="tx1"/>
+                </a:solidFill>
+                <a:latin typeface="+mn-lt"/>
+                <a:ea typeface="+mn-ea"/>
+                <a:cs typeface="+mn-cs"/>
+              </a:defRPr>
+            </a:lvl1pPr>
+            <a:lvl2pPr marL="685800" indent="-228600" algn="l" defTabSz="914400" rtl="0" eaLnBrk="1" latinLnBrk="0" hangingPunct="1">
+              <a:lnSpc>
+                <a:spcPct val="90000"/>
+              </a:lnSpc>
+              <a:spcBef>
+                <a:spcPts val="500"/>
+              </a:spcBef>
+              <a:buFont typeface="Arial" panose="020B0604020202020204" pitchFamily="34" charset="0"/>
+              <a:buChar char="•"/>
+              <a:defRPr sz="2400" kern="1200">
+                <a:solidFill>
+                  <a:schemeClr val="tx1"/>
+                </a:solidFill>
+                <a:latin typeface="+mn-lt"/>
+                <a:ea typeface="+mn-ea"/>
+                <a:cs typeface="+mn-cs"/>
+              </a:defRPr>
+            </a:lvl2pPr>
+            <a:lvl3pPr marL="1143000" indent="-228600" algn="l" defTabSz="914400" rtl="0" eaLnBrk="1" latinLnBrk="0" hangingPunct="1">
+              <a:lnSpc>
+                <a:spcPct val="90000"/>
+              </a:lnSpc>
+              <a:spcBef>
+                <a:spcPts val="500"/>
+              </a:spcBef>
+              <a:buFont typeface="Arial" panose="020B0604020202020204" pitchFamily="34" charset="0"/>
+              <a:buChar char="•"/>
+              <a:defRPr sz="2000" kern="1200">
+                <a:solidFill>
+                  <a:schemeClr val="tx1"/>
+                </a:solidFill>
+                <a:latin typeface="+mn-lt"/>
+                <a:ea typeface="+mn-ea"/>
+                <a:cs typeface="+mn-cs"/>
+              </a:defRPr>
+            </a:lvl3pPr>
+            <a:lvl4pPr marL="1600200" indent="-228600" algn="l" defTabSz="914400" rtl="0" eaLnBrk="1" latinLnBrk="0" hangingPunct="1">
+              <a:lnSpc>
+                <a:spcPct val="90000"/>
+              </a:lnSpc>
+              <a:spcBef>
+                <a:spcPts val="500"/>
+              </a:spcBef>
+              <a:buFont typeface="Arial" panose="020B0604020202020204" pitchFamily="34" charset="0"/>
+              <a:buChar char="•"/>
+              <a:defRPr sz="1800" kern="1200">
+                <a:solidFill>
+                  <a:schemeClr val="tx1"/>
+                </a:solidFill>
+                <a:latin typeface="+mn-lt"/>
+                <a:ea typeface="+mn-ea"/>
+                <a:cs typeface="+mn-cs"/>
+              </a:defRPr>
+            </a:lvl4pPr>
+            <a:lvl5pPr marL="2057400" indent="-228600" algn="l" defTabSz="914400" rtl="0" eaLnBrk="1" latinLnBrk="0" hangingPunct="1">
+              <a:lnSpc>
+                <a:spcPct val="90000"/>
+              </a:lnSpc>
+              <a:spcBef>
+                <a:spcPts val="500"/>
+              </a:spcBef>
+              <a:buFont typeface="Arial" panose="020B0604020202020204" pitchFamily="34" charset="0"/>
+              <a:buChar char="•"/>
+              <a:defRPr sz="1800" kern="1200">
+                <a:solidFill>
+                  <a:schemeClr val="tx1"/>
+                </a:solidFill>
+                <a:latin typeface="+mn-lt"/>
+                <a:ea typeface="+mn-ea"/>
+                <a:cs typeface="+mn-cs"/>
+              </a:defRPr>
+            </a:lvl5pPr>
+            <a:lvl6pPr marL="2514600" indent="-228600" algn="l" defTabSz="914400" rtl="0" eaLnBrk="1" latinLnBrk="0" hangingPunct="1">
+              <a:lnSpc>
+                <a:spcPct val="90000"/>
+              </a:lnSpc>
+              <a:spcBef>
+                <a:spcPts val="500"/>
+              </a:spcBef>
+              <a:buFont typeface="Arial" panose="020B0604020202020204" pitchFamily="34" charset="0"/>
+              <a:buChar char="•"/>
+              <a:defRPr sz="1800" kern="1200">
+                <a:solidFill>
+                  <a:schemeClr val="tx1"/>
+                </a:solidFill>
+                <a:latin typeface="+mn-lt"/>
+                <a:ea typeface="+mn-ea"/>
+                <a:cs typeface="+mn-cs"/>
+              </a:defRPr>
+            </a:lvl6pPr>
+            <a:lvl7pPr marL="2971800" indent="-228600" algn="l" defTabSz="914400" rtl="0" eaLnBrk="1" latinLnBrk="0" hangingPunct="1">
+              <a:lnSpc>
+                <a:spcPct val="90000"/>
+              </a:lnSpc>
+              <a:spcBef>
+                <a:spcPts val="500"/>
+              </a:spcBef>
+              <a:buFont typeface="Arial" panose="020B0604020202020204" pitchFamily="34" charset="0"/>
+              <a:buChar char="•"/>
+              <a:defRPr sz="1800" kern="1200">
+                <a:solidFill>
+                  <a:schemeClr val="tx1"/>
+                </a:solidFill>
+                <a:latin typeface="+mn-lt"/>
+                <a:ea typeface="+mn-ea"/>
+                <a:cs typeface="+mn-cs"/>
+              </a:defRPr>
+            </a:lvl7pPr>
+            <a:lvl8pPr marL="3429000" indent="-228600" algn="l" defTabSz="914400" rtl="0" eaLnBrk="1" latinLnBrk="0" hangingPunct="1">
+              <a:lnSpc>
+                <a:spcPct val="90000"/>
+              </a:lnSpc>
+              <a:spcBef>
+                <a:spcPts val="500"/>
+              </a:spcBef>
+              <a:buFont typeface="Arial" panose="020B0604020202020204" pitchFamily="34" charset="0"/>
+              <a:buChar char="•"/>
+              <a:defRPr sz="1800" kern="1200">
+                <a:solidFill>
+                  <a:schemeClr val="tx1"/>
+                </a:solidFill>
+                <a:latin typeface="+mn-lt"/>
+                <a:ea typeface="+mn-ea"/>
+                <a:cs typeface="+mn-cs"/>
+              </a:defRPr>
+            </a:lvl8pPr>
+            <a:lvl9pPr marL="3886200" indent="-228600" algn="l" defTabSz="914400" rtl="0" eaLnBrk="1" latinLnBrk="0" hangingPunct="1">
+              <a:lnSpc>
+                <a:spcPct val="90000"/>
+              </a:lnSpc>
+              <a:spcBef>
+                <a:spcPts val="500"/>
+              </a:spcBef>
+              <a:buFont typeface="Arial" panose="020B0604020202020204" pitchFamily="34" charset="0"/>
+              <a:buChar char="•"/>
+              <a:defRPr sz="1800" kern="1200">
+                <a:solidFill>
+                  <a:schemeClr val="tx1"/>
+                </a:solidFill>
+                <a:latin typeface="+mn-lt"/>
+                <a:ea typeface="+mn-ea"/>
+                <a:cs typeface="+mn-cs"/>
+              </a:defRPr>
+            </a:lvl9pPr>
+          </a:lstStyle>
+          <a:p>
+            <a:pPr marL="0" indent="0">
+              <a:lnSpc>
+                <a:spcPct val="100000"/>
+              </a:lnSpc>
+              <a:spcBef>
+                <a:spcPts val="400"/>
+              </a:spcBef>
+              <a:spcAft>
+                <a:spcPts val="601"/>
+              </a:spcAft>
+              <a:buClr>
+                <a:srgbClr val="0064C8"/>
+              </a:buClr>
+              <a:buNone/>
+            </a:pPr>
+            <a:r>
+              <a:rPr lang="en-US" sz="2000" spc="-1" dirty="0">
+                <a:solidFill>
+                  <a:srgbClr val="0064C8"/>
+                </a:solidFill>
+                <a:latin typeface="Century Gothic"/>
+              </a:rPr>
+              <a:t>Aim: </a:t>
+            </a:r>
+            <a:r>
+              <a:rPr lang="en-US" sz="2000" spc="-1" dirty="0">
+                <a:solidFill>
+                  <a:srgbClr val="000000"/>
+                </a:solidFill>
+                <a:latin typeface="Century Gothic"/>
+              </a:rPr>
+              <a:t>Design an agentic AI framework for interpretable AI applied to QSAR tasks 	</a:t>
+            </a:r>
+          </a:p>
+          <a:p>
+            <a:pPr>
+              <a:lnSpc>
+                <a:spcPct val="100000"/>
+              </a:lnSpc>
+              <a:spcBef>
+                <a:spcPts val="400"/>
+              </a:spcBef>
+              <a:buClr>
+                <a:srgbClr val="0064C8"/>
+              </a:buClr>
+            </a:pPr>
+            <a:r>
+              <a:rPr lang="en-US" sz="2000" spc="-1" dirty="0">
+                <a:solidFill>
+                  <a:srgbClr val="000000"/>
+                </a:solidFill>
+                <a:latin typeface="Century Gothic"/>
+              </a:rPr>
+              <a:t>The framework allows for the building of interpretable AI without coding experience</a:t>
+            </a:r>
+          </a:p>
+          <a:p>
+            <a:pPr>
+              <a:lnSpc>
+                <a:spcPct val="100000"/>
+              </a:lnSpc>
+              <a:spcBef>
+                <a:spcPts val="400"/>
+              </a:spcBef>
+              <a:buClr>
+                <a:srgbClr val="0064C8"/>
+              </a:buClr>
+            </a:pPr>
+            <a:r>
+              <a:rPr lang="en-US" sz="2000" spc="-1" dirty="0" err="1">
+                <a:solidFill>
+                  <a:srgbClr val="000000"/>
+                </a:solidFill>
+                <a:latin typeface="Century Gothic"/>
+              </a:rPr>
+              <a:t>ChemicHAL</a:t>
+            </a:r>
+            <a:r>
+              <a:rPr lang="en-US" sz="2000" spc="-1" dirty="0">
+                <a:solidFill>
+                  <a:srgbClr val="000000"/>
+                </a:solidFill>
+                <a:latin typeface="Century Gothic"/>
+              </a:rPr>
+              <a:t> was able to correctly choose tools and reproduce known results</a:t>
+            </a:r>
+          </a:p>
+          <a:p>
+            <a:pPr>
+              <a:lnSpc>
+                <a:spcPct val="100000"/>
+              </a:lnSpc>
+              <a:spcBef>
+                <a:spcPts val="400"/>
+              </a:spcBef>
+              <a:buClr>
+                <a:srgbClr val="0064C8"/>
+              </a:buClr>
+            </a:pPr>
+            <a:r>
+              <a:rPr lang="en-US" sz="2000" spc="-1" dirty="0">
+                <a:solidFill>
+                  <a:srgbClr val="000000"/>
+                </a:solidFill>
+                <a:latin typeface="Century Gothic"/>
+              </a:rPr>
+              <a:t>The system was effective in comparing different models and analyzing their learning characteristics</a:t>
+            </a:r>
+          </a:p>
+          <a:p>
+            <a:pPr>
+              <a:lnSpc>
+                <a:spcPct val="100000"/>
+              </a:lnSpc>
+              <a:spcBef>
+                <a:spcPts val="400"/>
+              </a:spcBef>
+              <a:buClr>
+                <a:srgbClr val="0064C8"/>
+              </a:buClr>
+            </a:pPr>
+            <a:r>
+              <a:rPr lang="en-US" sz="2000" spc="-1" dirty="0">
+                <a:solidFill>
+                  <a:srgbClr val="000000"/>
+                </a:solidFill>
+                <a:latin typeface="Century Gothic"/>
+              </a:rPr>
+              <a:t>The agent provided chemical interpretation for explanations and proposed “actionable insights”</a:t>
+            </a:r>
+          </a:p>
+          <a:p>
+            <a:pPr>
+              <a:lnSpc>
+                <a:spcPct val="100000"/>
+              </a:lnSpc>
+              <a:spcBef>
+                <a:spcPts val="400"/>
+              </a:spcBef>
+              <a:buClr>
+                <a:srgbClr val="0064C8"/>
+              </a:buClr>
+            </a:pPr>
+            <a:r>
+              <a:rPr lang="en-US" sz="2000" spc="-1" dirty="0">
+                <a:solidFill>
+                  <a:srgbClr val="000000"/>
+                </a:solidFill>
+                <a:latin typeface="Century Gothic"/>
+              </a:rPr>
+              <a:t>Note: interpretation of the results should be considered with caution</a:t>
+            </a:r>
+          </a:p>
+          <a:p>
+            <a:pPr>
+              <a:lnSpc>
+                <a:spcPct val="100000"/>
+              </a:lnSpc>
+              <a:spcBef>
+                <a:spcPts val="400"/>
+              </a:spcBef>
+              <a:buClr>
+                <a:srgbClr val="0064C8"/>
+              </a:buClr>
+            </a:pPr>
+            <a:endParaRPr lang="en-US" sz="2000" spc="-1" dirty="0">
+              <a:solidFill>
+                <a:srgbClr val="000000"/>
+              </a:solidFill>
+              <a:latin typeface="Century Gothic"/>
+            </a:endParaRPr>
+          </a:p>
+          <a:p>
+            <a:pPr>
+              <a:lnSpc>
+                <a:spcPct val="100000"/>
+              </a:lnSpc>
+              <a:spcBef>
+                <a:spcPts val="400"/>
+              </a:spcBef>
+              <a:buClr>
+                <a:srgbClr val="0064C8"/>
+              </a:buClr>
+            </a:pPr>
+            <a:endParaRPr lang="en-US" sz="2000" spc="-1" dirty="0">
+              <a:solidFill>
+                <a:srgbClr val="000000"/>
+              </a:solidFill>
+              <a:latin typeface="Century Gothic"/>
+            </a:endParaRPr>
+          </a:p>
+          <a:p>
+            <a:pPr marL="0" indent="0">
+              <a:lnSpc>
+                <a:spcPct val="100000"/>
+              </a:lnSpc>
+              <a:spcBef>
+                <a:spcPts val="400"/>
+              </a:spcBef>
+              <a:spcAft>
+                <a:spcPts val="601"/>
+              </a:spcAft>
+              <a:buClr>
+                <a:srgbClr val="0064C8"/>
+              </a:buClr>
+              <a:buNone/>
+            </a:pPr>
+            <a:endParaRPr lang="en-US" sz="2000" b="1" spc="-1" dirty="0">
+              <a:solidFill>
+                <a:srgbClr val="000000"/>
+              </a:solidFill>
+              <a:latin typeface="Century Gothic"/>
+            </a:endParaRPr>
+          </a:p>
+        </p:txBody>
+      </p:sp>
+    </p:spTree>
+    <p:extLst>
+      <p:ext uri="{BB962C8B-B14F-4D97-AF65-F5344CB8AC3E}">
+        <p14:creationId xmlns:p14="http://schemas.microsoft.com/office/powerpoint/2010/main" val="975240416"/>
+      </p:ext>
+    </p:extLst>
+  </p:cSld>
+  <p:clrMapOvr>
+    <a:masterClrMapping/>
+  </p:clrMapOvr>
+</p:sld>
+</file>
+
+<file path=ppt/slides/slide24.xml><?xml version="1.0" encoding="utf-8"?>
+<p:sld xmlns:a="http://schemas.openxmlformats.org/drawingml/2006/main" xmlns:r="http://schemas.openxmlformats.org/officeDocument/2006/relationships" xmlns:p="http://schemas.openxmlformats.org/presentationml/2006/main">
+  <p:cSld>
+    <p:spTree>
+      <p:nvGrpSpPr>
+        <p:cNvPr id="1" name="">
+          <a:extLst>
+            <a:ext uri="{FF2B5EF4-FFF2-40B4-BE49-F238E27FC236}">
+              <a16:creationId xmlns:a16="http://schemas.microsoft.com/office/drawing/2014/main" id="{A6515F23-0912-A838-23CE-B8F00573A2DA}"/>
+            </a:ext>
+          </a:extLst>
+        </p:cNvPr>
+        <p:cNvGrpSpPr/>
+        <p:nvPr/>
+      </p:nvGrpSpPr>
+      <p:grpSpPr>
+        <a:xfrm>
+          <a:off x="0" y="0"/>
+          <a:ext cx="0" cy="0"/>
+          <a:chOff x="0" y="0"/>
+          <a:chExt cx="0" cy="0"/>
+        </a:xfrm>
+      </p:grpSpPr>
+      <p:sp>
+        <p:nvSpPr>
+          <p:cNvPr id="163" name="PlaceHolder 1">
+            <a:extLst>
+              <a:ext uri="{FF2B5EF4-FFF2-40B4-BE49-F238E27FC236}">
+                <a16:creationId xmlns:a16="http://schemas.microsoft.com/office/drawing/2014/main" id="{57944F4B-F502-E7CC-8790-8737702BC6AC}"/>
+              </a:ext>
+            </a:extLst>
+          </p:cNvPr>
+          <p:cNvSpPr>
+            <a:spLocks noGrp="1"/>
+          </p:cNvSpPr>
+          <p:nvPr>
+            <p:ph type="title"/>
+          </p:nvPr>
+        </p:nvSpPr>
+        <p:spPr>
+          <a:xfrm>
+            <a:off x="380880" y="228600"/>
+            <a:ext cx="8380080" cy="837720"/>
+          </a:xfrm>
+          <a:prstGeom prst="rect">
+            <a:avLst/>
+          </a:prstGeom>
+          <a:noFill/>
+          <a:ln w="0">
+            <a:noFill/>
+          </a:ln>
+        </p:spPr>
+        <p:txBody>
+          <a:bodyPr numCol="1" spcCol="0" anchor="ctr">
+            <a:noAutofit/>
+          </a:bodyPr>
+          <a:lstStyle/>
+          <a:p>
+            <a:pPr>
+              <a:lnSpc>
+                <a:spcPct val="100000"/>
+              </a:lnSpc>
+              <a:buNone/>
+            </a:pPr>
+            <a:r>
+              <a:rPr lang="en-US" sz="3200" b="0" strike="noStrike" spc="-1" dirty="0">
+                <a:solidFill>
+                  <a:srgbClr val="0064C8"/>
+                </a:solidFill>
+                <a:latin typeface="Century Gothic"/>
+              </a:rPr>
+              <a:t>Future perspective</a:t>
+            </a:r>
+            <a:endParaRPr lang="en-US" sz="3200" b="0" strike="noStrike" spc="-1" dirty="0">
+              <a:solidFill>
+                <a:srgbClr val="000000"/>
+              </a:solidFill>
+              <a:latin typeface="Century Gothic"/>
+            </a:endParaRPr>
+          </a:p>
+        </p:txBody>
+      </p:sp>
+      <p:sp>
+        <p:nvSpPr>
+          <p:cNvPr id="165" name="PlaceHolder 3">
+            <a:extLst>
+              <a:ext uri="{FF2B5EF4-FFF2-40B4-BE49-F238E27FC236}">
+                <a16:creationId xmlns:a16="http://schemas.microsoft.com/office/drawing/2014/main" id="{2EFBEA53-7B78-D9A1-93EF-9608A3193D27}"/>
+              </a:ext>
+            </a:extLst>
+          </p:cNvPr>
+          <p:cNvSpPr>
+            <a:spLocks noGrp="1"/>
+          </p:cNvSpPr>
+          <p:nvPr>
+            <p:ph type="sldNum"/>
+          </p:nvPr>
+        </p:nvSpPr>
+        <p:spPr>
+          <a:xfrm>
+            <a:off x="8376840" y="5692680"/>
+            <a:ext cx="384120" cy="364680"/>
+          </a:xfrm>
+          <a:prstGeom prst="rect">
+            <a:avLst/>
+          </a:prstGeom>
+          <a:noFill/>
+          <a:ln w="0">
+            <a:noFill/>
+          </a:ln>
+        </p:spPr>
+        <p:txBody>
+          <a:bodyPr anchor="ctr">
+            <a:noAutofit/>
+          </a:bodyPr>
+          <a:lstStyle/>
+          <a:p>
+            <a:pPr algn="r">
+              <a:lnSpc>
+                <a:spcPct val="100000"/>
+              </a:lnSpc>
+              <a:buNone/>
+            </a:pPr>
+            <a:fld id="{8BD7C522-1E12-40C3-B25E-5F0462E20B22}" type="slidenum">
+              <a:rPr lang="en-US" sz="1200" b="0" strike="noStrike" spc="-1">
+                <a:solidFill>
+                  <a:srgbClr val="8B8B8B"/>
+                </a:solidFill>
+                <a:latin typeface="Century Gothic"/>
+              </a:rPr>
+              <a:t>24</a:t>
+            </a:fld>
+            <a:endParaRPr lang="en-GB" sz="1200" b="0" strike="noStrike" spc="-1" dirty="0">
+              <a:latin typeface="Times New Roman"/>
+            </a:endParaRPr>
+          </a:p>
+        </p:txBody>
+      </p:sp>
+      <p:sp>
+        <p:nvSpPr>
+          <p:cNvPr id="2" name="PlaceHolder 2">
+            <a:extLst>
+              <a:ext uri="{FF2B5EF4-FFF2-40B4-BE49-F238E27FC236}">
+                <a16:creationId xmlns:a16="http://schemas.microsoft.com/office/drawing/2014/main" id="{870990D0-7AC5-46BA-6FC4-274F8E0A3ABE}"/>
+              </a:ext>
+            </a:extLst>
+          </p:cNvPr>
+          <p:cNvSpPr txBox="1">
+            <a:spLocks/>
+          </p:cNvSpPr>
+          <p:nvPr/>
+        </p:nvSpPr>
+        <p:spPr>
+          <a:xfrm>
+            <a:off x="380880" y="1375729"/>
+            <a:ext cx="8380080" cy="4468480"/>
+          </a:xfrm>
+          <a:prstGeom prst="rect">
+            <a:avLst/>
+          </a:prstGeom>
+          <a:noFill/>
+          <a:ln w="0">
+            <a:noFill/>
+          </a:ln>
+        </p:spPr>
+        <p:txBody>
+          <a:bodyPr numCol="1" spcCol="0" anchor="t">
+            <a:noAutofit/>
+          </a:bodyPr>
+          <a:lstStyle>
+            <a:lvl1pPr marL="228600" indent="-228600" algn="l" defTabSz="914400" rtl="0" eaLnBrk="1" latinLnBrk="0" hangingPunct="1">
+              <a:lnSpc>
+                <a:spcPct val="90000"/>
+              </a:lnSpc>
+              <a:spcBef>
+                <a:spcPts val="1000"/>
+              </a:spcBef>
+              <a:buFont typeface="Arial" panose="020B0604020202020204" pitchFamily="34" charset="0"/>
+              <a:buChar char="•"/>
+              <a:defRPr sz="2800" kern="1200">
+                <a:solidFill>
+                  <a:schemeClr val="tx1"/>
+                </a:solidFill>
+                <a:latin typeface="+mn-lt"/>
+                <a:ea typeface="+mn-ea"/>
+                <a:cs typeface="+mn-cs"/>
+              </a:defRPr>
+            </a:lvl1pPr>
+            <a:lvl2pPr marL="685800" indent="-228600" algn="l" defTabSz="914400" rtl="0" eaLnBrk="1" latinLnBrk="0" hangingPunct="1">
+              <a:lnSpc>
+                <a:spcPct val="90000"/>
+              </a:lnSpc>
+              <a:spcBef>
+                <a:spcPts val="500"/>
+              </a:spcBef>
+              <a:buFont typeface="Arial" panose="020B0604020202020204" pitchFamily="34" charset="0"/>
+              <a:buChar char="•"/>
+              <a:defRPr sz="2400" kern="1200">
+                <a:solidFill>
+                  <a:schemeClr val="tx1"/>
+                </a:solidFill>
+                <a:latin typeface="+mn-lt"/>
+                <a:ea typeface="+mn-ea"/>
+                <a:cs typeface="+mn-cs"/>
+              </a:defRPr>
+            </a:lvl2pPr>
+            <a:lvl3pPr marL="1143000" indent="-228600" algn="l" defTabSz="914400" rtl="0" eaLnBrk="1" latinLnBrk="0" hangingPunct="1">
+              <a:lnSpc>
+                <a:spcPct val="90000"/>
+              </a:lnSpc>
+              <a:spcBef>
+                <a:spcPts val="500"/>
+              </a:spcBef>
+              <a:buFont typeface="Arial" panose="020B0604020202020204" pitchFamily="34" charset="0"/>
+              <a:buChar char="•"/>
+              <a:defRPr sz="2000" kern="1200">
+                <a:solidFill>
+                  <a:schemeClr val="tx1"/>
+                </a:solidFill>
+                <a:latin typeface="+mn-lt"/>
+                <a:ea typeface="+mn-ea"/>
+                <a:cs typeface="+mn-cs"/>
+              </a:defRPr>
+            </a:lvl3pPr>
+            <a:lvl4pPr marL="1600200" indent="-228600" algn="l" defTabSz="914400" rtl="0" eaLnBrk="1" latinLnBrk="0" hangingPunct="1">
+              <a:lnSpc>
+                <a:spcPct val="90000"/>
+              </a:lnSpc>
+              <a:spcBef>
+                <a:spcPts val="500"/>
+              </a:spcBef>
+              <a:buFont typeface="Arial" panose="020B0604020202020204" pitchFamily="34" charset="0"/>
+              <a:buChar char="•"/>
+              <a:defRPr sz="1800" kern="1200">
+                <a:solidFill>
+                  <a:schemeClr val="tx1"/>
+                </a:solidFill>
+                <a:latin typeface="+mn-lt"/>
+                <a:ea typeface="+mn-ea"/>
+                <a:cs typeface="+mn-cs"/>
+              </a:defRPr>
+            </a:lvl4pPr>
+            <a:lvl5pPr marL="2057400" indent="-228600" algn="l" defTabSz="914400" rtl="0" eaLnBrk="1" latinLnBrk="0" hangingPunct="1">
+              <a:lnSpc>
+                <a:spcPct val="90000"/>
+              </a:lnSpc>
+              <a:spcBef>
+                <a:spcPts val="500"/>
+              </a:spcBef>
+              <a:buFont typeface="Arial" panose="020B0604020202020204" pitchFamily="34" charset="0"/>
+              <a:buChar char="•"/>
+              <a:defRPr sz="1800" kern="1200">
+                <a:solidFill>
+                  <a:schemeClr val="tx1"/>
+                </a:solidFill>
+                <a:latin typeface="+mn-lt"/>
+                <a:ea typeface="+mn-ea"/>
+                <a:cs typeface="+mn-cs"/>
+              </a:defRPr>
+            </a:lvl5pPr>
+            <a:lvl6pPr marL="2514600" indent="-228600" algn="l" defTabSz="914400" rtl="0" eaLnBrk="1" latinLnBrk="0" hangingPunct="1">
+              <a:lnSpc>
+                <a:spcPct val="90000"/>
+              </a:lnSpc>
+              <a:spcBef>
+                <a:spcPts val="500"/>
+              </a:spcBef>
+              <a:buFont typeface="Arial" panose="020B0604020202020204" pitchFamily="34" charset="0"/>
+              <a:buChar char="•"/>
+              <a:defRPr sz="1800" kern="1200">
+                <a:solidFill>
+                  <a:schemeClr val="tx1"/>
+                </a:solidFill>
+                <a:latin typeface="+mn-lt"/>
+                <a:ea typeface="+mn-ea"/>
+                <a:cs typeface="+mn-cs"/>
+              </a:defRPr>
+            </a:lvl6pPr>
+            <a:lvl7pPr marL="2971800" indent="-228600" algn="l" defTabSz="914400" rtl="0" eaLnBrk="1" latinLnBrk="0" hangingPunct="1">
+              <a:lnSpc>
+                <a:spcPct val="90000"/>
+              </a:lnSpc>
+              <a:spcBef>
+                <a:spcPts val="500"/>
+              </a:spcBef>
+              <a:buFont typeface="Arial" panose="020B0604020202020204" pitchFamily="34" charset="0"/>
+              <a:buChar char="•"/>
+              <a:defRPr sz="1800" kern="1200">
+                <a:solidFill>
+                  <a:schemeClr val="tx1"/>
+                </a:solidFill>
+                <a:latin typeface="+mn-lt"/>
+                <a:ea typeface="+mn-ea"/>
+                <a:cs typeface="+mn-cs"/>
+              </a:defRPr>
+            </a:lvl7pPr>
+            <a:lvl8pPr marL="3429000" indent="-228600" algn="l" defTabSz="914400" rtl="0" eaLnBrk="1" latinLnBrk="0" hangingPunct="1">
+              <a:lnSpc>
+                <a:spcPct val="90000"/>
+              </a:lnSpc>
+              <a:spcBef>
+                <a:spcPts val="500"/>
+              </a:spcBef>
+              <a:buFont typeface="Arial" panose="020B0604020202020204" pitchFamily="34" charset="0"/>
+              <a:buChar char="•"/>
+              <a:defRPr sz="1800" kern="1200">
+                <a:solidFill>
+                  <a:schemeClr val="tx1"/>
+                </a:solidFill>
+                <a:latin typeface="+mn-lt"/>
+                <a:ea typeface="+mn-ea"/>
+                <a:cs typeface="+mn-cs"/>
+              </a:defRPr>
+            </a:lvl8pPr>
+            <a:lvl9pPr marL="3886200" indent="-228600" algn="l" defTabSz="914400" rtl="0" eaLnBrk="1" latinLnBrk="0" hangingPunct="1">
+              <a:lnSpc>
+                <a:spcPct val="90000"/>
+              </a:lnSpc>
+              <a:spcBef>
+                <a:spcPts val="500"/>
+              </a:spcBef>
+              <a:buFont typeface="Arial" panose="020B0604020202020204" pitchFamily="34" charset="0"/>
+              <a:buChar char="•"/>
+              <a:defRPr sz="1800" kern="1200">
+                <a:solidFill>
+                  <a:schemeClr val="tx1"/>
+                </a:solidFill>
+                <a:latin typeface="+mn-lt"/>
+                <a:ea typeface="+mn-ea"/>
+                <a:cs typeface="+mn-cs"/>
+              </a:defRPr>
+            </a:lvl9pPr>
+          </a:lstStyle>
+          <a:p>
+            <a:pPr>
+              <a:lnSpc>
+                <a:spcPct val="100000"/>
+              </a:lnSpc>
+              <a:spcBef>
+                <a:spcPts val="400"/>
+              </a:spcBef>
+              <a:buClr>
+                <a:srgbClr val="0064C8"/>
+              </a:buClr>
+            </a:pPr>
+            <a:r>
+              <a:rPr lang="en-US" sz="2000" spc="-1" dirty="0">
+                <a:solidFill>
+                  <a:srgbClr val="000000"/>
+                </a:solidFill>
+                <a:latin typeface="Century Gothic"/>
+              </a:rPr>
+              <a:t>Make an “organization repository” available for the whole lab to ease the </a:t>
+            </a:r>
+            <a:r>
+              <a:rPr lang="en-US" sz="2000" b="1" spc="-1" dirty="0">
+                <a:solidFill>
+                  <a:srgbClr val="000000"/>
+                </a:solidFill>
+                <a:latin typeface="Century Gothic"/>
+              </a:rPr>
+              <a:t>integration of new components</a:t>
+            </a:r>
+          </a:p>
+          <a:p>
+            <a:pPr>
+              <a:lnSpc>
+                <a:spcPct val="100000"/>
+              </a:lnSpc>
+              <a:spcBef>
+                <a:spcPts val="400"/>
+              </a:spcBef>
+              <a:buClr>
+                <a:srgbClr val="0064C8"/>
+              </a:buClr>
+            </a:pPr>
+            <a:r>
+              <a:rPr lang="en-US" sz="2000" spc="-1" dirty="0">
+                <a:solidFill>
+                  <a:srgbClr val="000000"/>
+                </a:solidFill>
+                <a:latin typeface="Century Gothic"/>
+              </a:rPr>
+              <a:t>Create a guide for lab members for the implementation of AI agents</a:t>
+            </a:r>
+          </a:p>
+          <a:p>
+            <a:pPr marL="0" indent="0">
+              <a:lnSpc>
+                <a:spcPct val="100000"/>
+              </a:lnSpc>
+              <a:spcBef>
+                <a:spcPts val="400"/>
+              </a:spcBef>
+              <a:buClr>
+                <a:srgbClr val="0064C8"/>
+              </a:buClr>
+              <a:buNone/>
+            </a:pPr>
+            <a:endParaRPr lang="en-US" sz="2000" spc="-1" dirty="0">
+              <a:solidFill>
+                <a:srgbClr val="000000"/>
+              </a:solidFill>
+              <a:latin typeface="Century Gothic"/>
+            </a:endParaRPr>
+          </a:p>
+          <a:p>
+            <a:pPr>
+              <a:lnSpc>
+                <a:spcPct val="100000"/>
+              </a:lnSpc>
+              <a:spcBef>
+                <a:spcPts val="400"/>
+              </a:spcBef>
+              <a:buClr>
+                <a:srgbClr val="0064C8"/>
+              </a:buClr>
+            </a:pPr>
+            <a:endParaRPr lang="en-US" sz="2000" spc="-1" dirty="0">
+              <a:solidFill>
+                <a:srgbClr val="000000"/>
+              </a:solidFill>
+              <a:latin typeface="Century Gothic"/>
+            </a:endParaRPr>
+          </a:p>
+          <a:p>
+            <a:pPr>
+              <a:lnSpc>
+                <a:spcPct val="100000"/>
+              </a:lnSpc>
+              <a:spcBef>
+                <a:spcPts val="400"/>
+              </a:spcBef>
+              <a:buClr>
+                <a:srgbClr val="0064C8"/>
+              </a:buClr>
+            </a:pPr>
+            <a:endParaRPr lang="en-US" sz="2000" spc="-1" dirty="0">
+              <a:solidFill>
+                <a:srgbClr val="000000"/>
+              </a:solidFill>
+              <a:latin typeface="Century Gothic"/>
+            </a:endParaRPr>
+          </a:p>
+          <a:p>
+            <a:pPr marL="0" indent="0">
+              <a:lnSpc>
+                <a:spcPct val="100000"/>
+              </a:lnSpc>
+              <a:spcBef>
+                <a:spcPts val="400"/>
+              </a:spcBef>
+              <a:spcAft>
+                <a:spcPts val="601"/>
+              </a:spcAft>
+              <a:buClr>
+                <a:srgbClr val="0064C8"/>
+              </a:buClr>
+              <a:buNone/>
+            </a:pPr>
+            <a:endParaRPr lang="en-US" sz="2000" b="1" spc="-1" dirty="0">
+              <a:solidFill>
+                <a:srgbClr val="000000"/>
+              </a:solidFill>
+              <a:latin typeface="Century Gothic"/>
+            </a:endParaRPr>
+          </a:p>
+        </p:txBody>
+      </p:sp>
+      <p:pic>
+        <p:nvPicPr>
+          <p:cNvPr id="4" name="Picture 3">
+            <a:extLst>
+              <a:ext uri="{FF2B5EF4-FFF2-40B4-BE49-F238E27FC236}">
+                <a16:creationId xmlns:a16="http://schemas.microsoft.com/office/drawing/2014/main" id="{A9172708-06AB-AE7A-4BC0-05B1328EE700}"/>
+              </a:ext>
+            </a:extLst>
+          </p:cNvPr>
+          <p:cNvPicPr>
+            <a:picLocks noChangeAspect="1"/>
+          </p:cNvPicPr>
+          <p:nvPr/>
+        </p:nvPicPr>
+        <p:blipFill>
+          <a:blip r:embed="rId2" cstate="print">
+            <a:extLst>
+              <a:ext uri="{28A0092B-C50C-407E-A947-70E740481C1C}">
+                <a14:useLocalDpi xmlns:a14="http://schemas.microsoft.com/office/drawing/2010/main" val="0"/>
+              </a:ext>
+            </a:extLst>
+          </a:blip>
+          <a:srcRect/>
+          <a:stretch/>
+        </p:blipFill>
+        <p:spPr>
+          <a:xfrm>
+            <a:off x="982609" y="2941982"/>
+            <a:ext cx="7176621" cy="3082493"/>
+          </a:xfrm>
+          <a:prstGeom prst="rect">
+            <a:avLst/>
+          </a:prstGeom>
+        </p:spPr>
+      </p:pic>
+    </p:spTree>
+    <p:extLst>
+      <p:ext uri="{BB962C8B-B14F-4D97-AF65-F5344CB8AC3E}">
+        <p14:creationId xmlns:p14="http://schemas.microsoft.com/office/powerpoint/2010/main" val="754724518"/>
+      </p:ext>
+    </p:extLst>
+  </p:cSld>
+  <p:clrMapOvr>
+    <a:masterClrMapping/>
+  </p:clrMapOvr>
+</p:sld>
+</file>
+
+<file path=ppt/slides/slide25.xml><?xml version="1.0" encoding="utf-8"?>
+<p:sld xmlns:a="http://schemas.openxmlformats.org/drawingml/2006/main" xmlns:r="http://schemas.openxmlformats.org/officeDocument/2006/relationships" xmlns:p="http://schemas.openxmlformats.org/presentationml/2006/main">
+  <p:cSld>
+    <p:spTree>
+      <p:nvGrpSpPr>
+        <p:cNvPr id="1" name="">
+          <a:extLst>
+            <a:ext uri="{FF2B5EF4-FFF2-40B4-BE49-F238E27FC236}">
+              <a16:creationId xmlns:a16="http://schemas.microsoft.com/office/drawing/2014/main" id="{A6515F23-0912-A838-23CE-B8F00573A2DA}"/>
+            </a:ext>
+          </a:extLst>
+        </p:cNvPr>
+        <p:cNvGrpSpPr/>
+        <p:nvPr/>
+      </p:nvGrpSpPr>
+      <p:grpSpPr>
+        <a:xfrm>
+          <a:off x="0" y="0"/>
+          <a:ext cx="0" cy="0"/>
+          <a:chOff x="0" y="0"/>
+          <a:chExt cx="0" cy="0"/>
+        </a:xfrm>
+      </p:grpSpPr>
       <p:sp>
         <p:nvSpPr>
           <p:cNvPr id="163" name="PlaceHolder 1">
@@ -22281,7 +27094,7 @@
                 </a:solidFill>
                 <a:latin typeface="Century Gothic"/>
               </a:rPr>
-              <a:t>20</a:t>
+              <a:t>25</a:t>
             </a:fld>
             <a:endParaRPr lang="en-GB" sz="1200" b="0" strike="noStrike" spc="-1" dirty="0">
               <a:latin typeface="Times New Roman"/>
@@ -22719,7 +27532,7 @@
 </p:sld>
 </file>
 
-<file path=ppt/slides/slide21.xml><?xml version="1.0" encoding="utf-8"?>
+<file path=ppt/slides/slide26.xml><?xml version="1.0" encoding="utf-8"?>
 <p:sld xmlns:a="http://schemas.openxmlformats.org/drawingml/2006/main" xmlns:r="http://schemas.openxmlformats.org/officeDocument/2006/relationships" xmlns:p="http://schemas.openxmlformats.org/presentationml/2006/main">
   <p:cSld>
     <p:spTree>
@@ -22760,8 +27573,8 @@
         </p:nvSpPr>
         <p:spPr>
           <a:xfrm>
-            <a:off x="887373" y="2324288"/>
-            <a:ext cx="7189076" cy="2022490"/>
+            <a:off x="3331282" y="2703891"/>
+            <a:ext cx="2362321" cy="837720"/>
           </a:xfrm>
           <a:prstGeom prst="rect">
             <a:avLst/>
@@ -22791,23 +27604,6 @@
                 <a:latin typeface="Century Gothic"/>
               </a:rPr>
               <a:t>LIVE DEMO</a:t>
-            </a:r>
-            <a:br>
-              <a:rPr lang="en-US" sz="3200" b="0" strike="noStrike" spc="-1" dirty="0">
-                <a:solidFill>
-                  <a:srgbClr val="0064C8"/>
-                </a:solidFill>
-                <a:latin typeface="Century Gothic"/>
-              </a:rPr>
-            </a:br>
-            <a:r>
-              <a:rPr lang="en-US" sz="3200" b="0" strike="noStrike" spc="-1" dirty="0">
-                <a:solidFill>
-                  <a:srgbClr val="0064C8"/>
-                </a:solidFill>
-                <a:latin typeface="Century Gothic"/>
-              </a:rPr>
-              <a:t>this is an idea, but it would be cool to show a simple example like “train and explain this”</a:t>
             </a:r>
             <a:endParaRPr lang="en-US" sz="3200" b="0" strike="noStrike" spc="-1" dirty="0">
               <a:solidFill>
@@ -22866,7 +27662,7 @@
                 </a:solidFill>
                 <a:latin typeface="Century Gothic"/>
               </a:rPr>
-              <a:t>21</a:t>
+              <a:t>26</a:t>
             </a:fld>
             <a:endParaRPr lang="en-GB" sz="1200" b="0" strike="noStrike" spc="-1" dirty="0">
               <a:latin typeface="Times New Roman"/>

--- a/slides/AI_Agent_Explainability.pptx
+++ b/slides/AI_Agent_Explainability.pptx
@@ -145,6 +145,45 @@
 <file path=ppt/changesInfos/changesInfo1.xml><?xml version="1.0" encoding="utf-8"?>
 <pc:chgInfo xmlns:a="http://schemas.openxmlformats.org/drawingml/2006/main" xmlns:r="http://schemas.openxmlformats.org/officeDocument/2006/relationships" xmlns:ac="http://schemas.microsoft.com/office/drawing/2013/main/command" xmlns:pc="http://schemas.microsoft.com/office/powerpoint/2013/main/command">
   <pc:docChgLst>
+    <pc:chgData name="Tiago Janela" userId="ee1a79fe-c79c-4f34-9602-7f6f2f0482b3" providerId="ADAL" clId="{67D2C233-DF3C-4C6D-9040-D7553E3BCB8A}"/>
+    <pc:docChg chg="delSld modSld">
+      <pc:chgData name="Tiago Janela" userId="ee1a79fe-c79c-4f34-9602-7f6f2f0482b3" providerId="ADAL" clId="{67D2C233-DF3C-4C6D-9040-D7553E3BCB8A}" dt="2026-03-16T14:03:02.466" v="54" actId="20577"/>
+      <pc:docMkLst>
+        <pc:docMk/>
+      </pc:docMkLst>
+      <pc:sldChg chg="modSp mod">
+        <pc:chgData name="Tiago Janela" userId="ee1a79fe-c79c-4f34-9602-7f6f2f0482b3" providerId="ADAL" clId="{67D2C233-DF3C-4C6D-9040-D7553E3BCB8A}" dt="2026-03-16T14:03:02.466" v="54" actId="20577"/>
+        <pc:sldMkLst>
+          <pc:docMk/>
+          <pc:sldMk cId="829672710" sldId="297"/>
+        </pc:sldMkLst>
+        <pc:spChg chg="mod">
+          <ac:chgData name="Tiago Janela" userId="ee1a79fe-c79c-4f34-9602-7f6f2f0482b3" providerId="ADAL" clId="{67D2C233-DF3C-4C6D-9040-D7553E3BCB8A}" dt="2026-03-16T14:03:02.466" v="54" actId="20577"/>
+          <ac:spMkLst>
+            <pc:docMk/>
+            <pc:sldMk cId="829672710" sldId="297"/>
+            <ac:spMk id="156" creationId="{00000000-0000-0000-0000-000000000000}"/>
+          </ac:spMkLst>
+        </pc:spChg>
+      </pc:sldChg>
+      <pc:sldChg chg="modSp mod">
+        <pc:chgData name="Tiago Janela" userId="ee1a79fe-c79c-4f34-9602-7f6f2f0482b3" providerId="ADAL" clId="{67D2C233-DF3C-4C6D-9040-D7553E3BCB8A}" dt="2026-03-16T14:02:34.148" v="0" actId="20577"/>
+        <pc:sldMkLst>
+          <pc:docMk/>
+          <pc:sldMk cId="721732568" sldId="298"/>
+        </pc:sldMkLst>
+        <pc:spChg chg="mod">
+          <ac:chgData name="Tiago Janela" userId="ee1a79fe-c79c-4f34-9602-7f6f2f0482b3" providerId="ADAL" clId="{67D2C233-DF3C-4C6D-9040-D7553E3BCB8A}" dt="2026-03-16T14:02:34.148" v="0" actId="20577"/>
+          <ac:spMkLst>
+            <pc:docMk/>
+            <pc:sldMk cId="721732568" sldId="298"/>
+            <ac:spMk id="2" creationId="{870990D0-7AC5-46BA-6FC4-274F8E0A3ABE}"/>
+          </ac:spMkLst>
+        </pc:spChg>
+      </pc:sldChg>
+    </pc:docChg>
+  </pc:docChgLst>
+  <pc:docChgLst>
     <pc:chgData name="Tiago Janela" userId="ee1a79fe-c79c-4f34-9602-7f6f2f0482b3" providerId="ADAL" clId="{6BE67FA1-4A27-48B9-BA6A-E25A9786A9CC}"/>
     <pc:docChg chg="undo custSel addSld modSld sldOrd">
       <pc:chgData name="Tiago Janela" userId="ee1a79fe-c79c-4f34-9602-7f6f2f0482b3" providerId="ADAL" clId="{6BE67FA1-4A27-48B9-BA6A-E25A9786A9CC}" dt="2026-03-20T13:52:23.099" v="1063" actId="20577"/>
@@ -250,6 +289,30 @@
             <ac:picMk id="6" creationId="{D3BA145D-265C-C0B1-7C0E-2EE32552E491}"/>
           </ac:picMkLst>
         </pc:picChg>
+      </pc:sldChg>
+    </pc:docChg>
+  </pc:docChgLst>
+  <pc:docChgLst>
+    <pc:chgData name="Tiago Janela" userId="ee1a79fe-c79c-4f34-9602-7f6f2f0482b3" providerId="ADAL" clId="{A1A622BE-A8AD-47B7-8802-BAC61BCE5126}"/>
+    <pc:docChg chg="undo custSel modSld">
+      <pc:chgData name="Tiago Janela" userId="ee1a79fe-c79c-4f34-9602-7f6f2f0482b3" providerId="ADAL" clId="{A1A622BE-A8AD-47B7-8802-BAC61BCE5126}" dt="2026-04-02T12:40:40.607" v="50" actId="478"/>
+      <pc:docMkLst>
+        <pc:docMk/>
+      </pc:docMkLst>
+      <pc:sldChg chg="addSp delSp modSp mod">
+        <pc:chgData name="Tiago Janela" userId="ee1a79fe-c79c-4f34-9602-7f6f2f0482b3" providerId="ADAL" clId="{A1A622BE-A8AD-47B7-8802-BAC61BCE5126}" dt="2026-04-02T12:40:40.607" v="50" actId="478"/>
+        <pc:sldMkLst>
+          <pc:docMk/>
+          <pc:sldMk cId="1707478755" sldId="299"/>
+        </pc:sldMkLst>
+        <pc:graphicFrameChg chg="add del modGraphic">
+          <ac:chgData name="Tiago Janela" userId="ee1a79fe-c79c-4f34-9602-7f6f2f0482b3" providerId="ADAL" clId="{A1A622BE-A8AD-47B7-8802-BAC61BCE5126}" dt="2026-04-02T12:40:40.607" v="50" actId="478"/>
+          <ac:graphicFrameMkLst>
+            <pc:docMk/>
+            <pc:sldMk cId="1707478755" sldId="299"/>
+            <ac:graphicFrameMk id="4" creationId="{689F2044-8E26-DCF5-DE2D-9AD979C8C1EE}"/>
+          </ac:graphicFrameMkLst>
+        </pc:graphicFrameChg>
       </pc:sldChg>
     </pc:docChg>
   </pc:docChgLst>
@@ -1835,69 +1898,6 @@
             <ac:cxnSpMk id="11" creationId="{800D65FB-8069-2F90-2859-B2A57A9BB2C4}"/>
           </ac:cxnSpMkLst>
         </pc:cxnChg>
-      </pc:sldChg>
-    </pc:docChg>
-  </pc:docChgLst>
-  <pc:docChgLst>
-    <pc:chgData name="Tiago Janela" userId="ee1a79fe-c79c-4f34-9602-7f6f2f0482b3" providerId="ADAL" clId="{A1A622BE-A8AD-47B7-8802-BAC61BCE5126}"/>
-    <pc:docChg chg="undo custSel modSld">
-      <pc:chgData name="Tiago Janela" userId="ee1a79fe-c79c-4f34-9602-7f6f2f0482b3" providerId="ADAL" clId="{A1A622BE-A8AD-47B7-8802-BAC61BCE5126}" dt="2026-04-02T12:40:40.607" v="50" actId="478"/>
-      <pc:docMkLst>
-        <pc:docMk/>
-      </pc:docMkLst>
-      <pc:sldChg chg="addSp delSp modSp mod">
-        <pc:chgData name="Tiago Janela" userId="ee1a79fe-c79c-4f34-9602-7f6f2f0482b3" providerId="ADAL" clId="{A1A622BE-A8AD-47B7-8802-BAC61BCE5126}" dt="2026-04-02T12:40:40.607" v="50" actId="478"/>
-        <pc:sldMkLst>
-          <pc:docMk/>
-          <pc:sldMk cId="1707478755" sldId="299"/>
-        </pc:sldMkLst>
-        <pc:graphicFrameChg chg="add del modGraphic">
-          <ac:chgData name="Tiago Janela" userId="ee1a79fe-c79c-4f34-9602-7f6f2f0482b3" providerId="ADAL" clId="{A1A622BE-A8AD-47B7-8802-BAC61BCE5126}" dt="2026-04-02T12:40:40.607" v="50" actId="478"/>
-          <ac:graphicFrameMkLst>
-            <pc:docMk/>
-            <pc:sldMk cId="1707478755" sldId="299"/>
-            <ac:graphicFrameMk id="4" creationId="{689F2044-8E26-DCF5-DE2D-9AD979C8C1EE}"/>
-          </ac:graphicFrameMkLst>
-        </pc:graphicFrameChg>
-      </pc:sldChg>
-    </pc:docChg>
-  </pc:docChgLst>
-  <pc:docChgLst>
-    <pc:chgData name="Tiago Janela" userId="ee1a79fe-c79c-4f34-9602-7f6f2f0482b3" providerId="ADAL" clId="{67D2C233-DF3C-4C6D-9040-D7553E3BCB8A}"/>
-    <pc:docChg chg="delSld modSld">
-      <pc:chgData name="Tiago Janela" userId="ee1a79fe-c79c-4f34-9602-7f6f2f0482b3" providerId="ADAL" clId="{67D2C233-DF3C-4C6D-9040-D7553E3BCB8A}" dt="2026-03-16T14:03:02.466" v="54" actId="20577"/>
-      <pc:docMkLst>
-        <pc:docMk/>
-      </pc:docMkLst>
-      <pc:sldChg chg="modSp mod">
-        <pc:chgData name="Tiago Janela" userId="ee1a79fe-c79c-4f34-9602-7f6f2f0482b3" providerId="ADAL" clId="{67D2C233-DF3C-4C6D-9040-D7553E3BCB8A}" dt="2026-03-16T14:03:02.466" v="54" actId="20577"/>
-        <pc:sldMkLst>
-          <pc:docMk/>
-          <pc:sldMk cId="829672710" sldId="297"/>
-        </pc:sldMkLst>
-        <pc:spChg chg="mod">
-          <ac:chgData name="Tiago Janela" userId="ee1a79fe-c79c-4f34-9602-7f6f2f0482b3" providerId="ADAL" clId="{67D2C233-DF3C-4C6D-9040-D7553E3BCB8A}" dt="2026-03-16T14:03:02.466" v="54" actId="20577"/>
-          <ac:spMkLst>
-            <pc:docMk/>
-            <pc:sldMk cId="829672710" sldId="297"/>
-            <ac:spMk id="156" creationId="{00000000-0000-0000-0000-000000000000}"/>
-          </ac:spMkLst>
-        </pc:spChg>
-      </pc:sldChg>
-      <pc:sldChg chg="modSp mod">
-        <pc:chgData name="Tiago Janela" userId="ee1a79fe-c79c-4f34-9602-7f6f2f0482b3" providerId="ADAL" clId="{67D2C233-DF3C-4C6D-9040-D7553E3BCB8A}" dt="2026-03-16T14:02:34.148" v="0" actId="20577"/>
-        <pc:sldMkLst>
-          <pc:docMk/>
-          <pc:sldMk cId="721732568" sldId="298"/>
-        </pc:sldMkLst>
-        <pc:spChg chg="mod">
-          <ac:chgData name="Tiago Janela" userId="ee1a79fe-c79c-4f34-9602-7f6f2f0482b3" providerId="ADAL" clId="{67D2C233-DF3C-4C6D-9040-D7553E3BCB8A}" dt="2026-03-16T14:02:34.148" v="0" actId="20577"/>
-          <ac:spMkLst>
-            <pc:docMk/>
-            <pc:sldMk cId="721732568" sldId="298"/>
-            <ac:spMk id="2" creationId="{870990D0-7AC5-46BA-6FC4-274F8E0A3ABE}"/>
-          </ac:spMkLst>
-        </pc:spChg>
       </pc:sldChg>
     </pc:docChg>
   </pc:docChgLst>
@@ -13146,9 +13146,9 @@
         <p:grpSpPr>
           <a:xfrm>
             <a:off x="380879" y="1191667"/>
-            <a:ext cx="8601794" cy="4349000"/>
+            <a:ext cx="8767517" cy="4349000"/>
             <a:chOff x="232995" y="406630"/>
-            <a:chExt cx="11549227" cy="5839199"/>
+            <a:chExt cx="11771735" cy="5839199"/>
           </a:xfrm>
         </p:grpSpPr>
         <p:sp>
@@ -13203,7 +13203,31 @@
               </a:r>
               <a:r>
                 <a:rPr lang="en-US" sz="1000" dirty="0"/>
-                <a:t>Both methods highlight that modifications to the R-groups attached to the morpholine ring are the most sensitive levers for changing bioactivity.</a:t>
+                <a:t>Both methods highlight that modifications to the </a:t>
+              </a:r>
+              <a:r>
+                <a:rPr lang="en-US" sz="1000" b="1" dirty="0"/>
+                <a:t>R-groups attached to the morpholine ring </a:t>
+              </a:r>
+              <a:r>
+                <a:rPr lang="en-US" sz="1000" dirty="0"/>
+                <a:t>are the </a:t>
+              </a:r>
+              <a:r>
+                <a:rPr lang="en-US" sz="1000" b="1" dirty="0"/>
+                <a:t>most sensitive </a:t>
+              </a:r>
+              <a:r>
+                <a:rPr lang="en-US" sz="1000" dirty="0"/>
+                <a:t>levers for changing </a:t>
+              </a:r>
+              <a:r>
+                <a:rPr lang="en-US" sz="1000" b="1" dirty="0"/>
+                <a:t>bioactivity</a:t>
+              </a:r>
+              <a:r>
+                <a:rPr lang="en-US" sz="1000" dirty="0"/>
+                <a:t>.</a:t>
               </a:r>
             </a:p>
             <a:p>
@@ -13228,7 +13252,23 @@
               </a:r>
               <a:r>
                 <a:rPr lang="en-US" sz="1000" dirty="0"/>
-                <a:t> provides a theoretical contrastive feature (a specific R-group that is "anti-activating"). Counterfactuals provides concrete examples of inactive molecules. </a:t>
+                <a:t> provides a </a:t>
+              </a:r>
+              <a:r>
+                <a:rPr lang="en-US" sz="1000" b="1" dirty="0"/>
+                <a:t>theoretical contrastive feature </a:t>
+              </a:r>
+              <a:r>
+                <a:rPr lang="en-US" sz="1000" dirty="0"/>
+                <a:t>(a specific R-group that is "anti-activating"). Counterfactuals provides </a:t>
+              </a:r>
+              <a:r>
+                <a:rPr lang="en-US" sz="1000" b="1" dirty="0"/>
+                <a:t>concrete examples of inactive molecules</a:t>
+              </a:r>
+              <a:r>
+                <a:rPr lang="en-US" sz="1000" dirty="0"/>
+                <a:t>. </a:t>
               </a:r>
               <a:r>
                 <a:rPr lang="en-US" sz="1000" dirty="0" err="1"/>
@@ -13449,197 +13489,81 @@
           <p:grpSpPr>
             <a:xfrm>
               <a:off x="3100852" y="406630"/>
-              <a:ext cx="4177285" cy="3044438"/>
+              <a:ext cx="4147226" cy="2958817"/>
               <a:chOff x="2837001" y="180836"/>
-              <a:chExt cx="4177285" cy="3044438"/>
+              <a:chExt cx="4147226" cy="2958817"/>
             </a:xfrm>
           </p:grpSpPr>
-          <p:grpSp>
-            <p:nvGrpSpPr>
-              <p:cNvPr id="27" name="Group 26">
+          <p:pic>
+            <p:nvPicPr>
+              <p:cNvPr id="32" name="Picture 31" descr="A screenshot of a graph&#10;&#10;AI-generated content may be incorrect.">
                 <a:extLst>
                   <a:ext uri="{FF2B5EF4-FFF2-40B4-BE49-F238E27FC236}">
-                    <a16:creationId xmlns:a16="http://schemas.microsoft.com/office/drawing/2014/main" id="{C867F122-D459-E4D8-E91E-39D4FB20E8FB}"/>
+                    <a16:creationId xmlns:a16="http://schemas.microsoft.com/office/drawing/2014/main" id="{5A34DEF1-BD9B-CD6A-A8D2-7AFC0C5C49C9}"/>
                   </a:ext>
                 </a:extLst>
               </p:cNvPr>
-              <p:cNvGrpSpPr>
-                <a:grpSpLocks noChangeAspect="1"/>
-              </p:cNvGrpSpPr>
+              <p:cNvPicPr>
+                <a:picLocks noChangeAspect="1"/>
+              </p:cNvPicPr>
               <p:nvPr/>
-            </p:nvGrpSpPr>
-            <p:grpSpPr>
+            </p:nvPicPr>
+            <p:blipFill>
+              <a:blip r:embed="rId6">
+                <a:extLst>
+                  <a:ext uri="{28A0092B-C50C-407E-A947-70E740481C1C}">
+                    <a14:useLocalDpi xmlns:a14="http://schemas.microsoft.com/office/drawing/2010/main" val="0"/>
+                  </a:ext>
+                </a:extLst>
+              </a:blip>
+              <a:srcRect l="31035" t="24006" r="53731" b="44988"/>
+              <a:stretch/>
+            </p:blipFill>
+            <p:spPr>
               <a:xfrm>
                 <a:off x="2837001" y="756337"/>
-                <a:ext cx="2160399" cy="2468937"/>
-                <a:chOff x="3436044" y="2054607"/>
-                <a:chExt cx="2487556" cy="2842817"/>
+                <a:ext cx="2139552" cy="2303440"/>
               </a:xfrm>
-            </p:grpSpPr>
-            <p:pic>
-              <p:nvPicPr>
-                <p:cNvPr id="32" name="Picture 31" descr="A screenshot of a graph&#10;&#10;AI-generated content may be incorrect.">
-                  <a:extLst>
-                    <a:ext uri="{FF2B5EF4-FFF2-40B4-BE49-F238E27FC236}">
-                      <a16:creationId xmlns:a16="http://schemas.microsoft.com/office/drawing/2014/main" id="{5A34DEF1-BD9B-CD6A-A8D2-7AFC0C5C49C9}"/>
-                    </a:ext>
-                  </a:extLst>
-                </p:cNvPr>
-                <p:cNvPicPr>
-                  <a:picLocks noChangeAspect="1"/>
-                </p:cNvPicPr>
-                <p:nvPr/>
-              </p:nvPicPr>
-              <p:blipFill>
-                <a:blip r:embed="rId6">
-                  <a:extLst>
-                    <a:ext uri="{28A0092B-C50C-407E-A947-70E740481C1C}">
-                      <a14:useLocalDpi xmlns:a14="http://schemas.microsoft.com/office/drawing/2010/main" val="0"/>
-                    </a:ext>
-                  </a:extLst>
-                </a:blip>
-                <a:srcRect l="31035" t="24006" r="53731" b="44988"/>
-                <a:stretch/>
-              </p:blipFill>
-              <p:spPr>
-                <a:xfrm>
-                  <a:off x="3436044" y="2054607"/>
-                  <a:ext cx="2222549" cy="2392796"/>
-                </a:xfrm>
-                <a:prstGeom prst="rect">
-                  <a:avLst/>
-                </a:prstGeom>
-              </p:spPr>
-            </p:pic>
-            <p:pic>
-              <p:nvPicPr>
-                <p:cNvPr id="33" name="Picture 32" descr="A screenshot of a graph&#10;&#10;AI-generated content may be incorrect.">
-                  <a:extLst>
-                    <a:ext uri="{FF2B5EF4-FFF2-40B4-BE49-F238E27FC236}">
-                      <a16:creationId xmlns:a16="http://schemas.microsoft.com/office/drawing/2014/main" id="{C3C561D4-D6EB-0889-183B-97DE0B45487D}"/>
-                    </a:ext>
-                  </a:extLst>
-                </p:cNvPr>
-                <p:cNvPicPr>
-                  <a:picLocks noChangeAspect="1"/>
-                </p:cNvPicPr>
-                <p:nvPr/>
-              </p:nvPicPr>
-              <p:blipFill>
-                <a:blip r:embed="rId6">
-                  <a:extLst>
-                    <a:ext uri="{28A0092B-C50C-407E-A947-70E740481C1C}">
-                      <a14:useLocalDpi xmlns:a14="http://schemas.microsoft.com/office/drawing/2010/main" val="0"/>
-                    </a:ext>
-                  </a:extLst>
-                </a:blip>
-                <a:srcRect l="31170" t="17838" r="53596" b="76213"/>
-                <a:stretch/>
-              </p:blipFill>
-              <p:spPr>
-                <a:xfrm>
-                  <a:off x="3701051" y="4438366"/>
-                  <a:ext cx="2222549" cy="459058"/>
-                </a:xfrm>
-                <a:prstGeom prst="rect">
-                  <a:avLst/>
-                </a:prstGeom>
-              </p:spPr>
-            </p:pic>
-          </p:grpSp>
-          <p:grpSp>
-            <p:nvGrpSpPr>
-              <p:cNvPr id="28" name="Group 27">
+              <a:prstGeom prst="rect">
+                <a:avLst/>
+              </a:prstGeom>
+            </p:spPr>
+          </p:pic>
+          <p:pic>
+            <p:nvPicPr>
+              <p:cNvPr id="30" name="Picture 29" descr="A screenshot of a graph&#10;&#10;AI-generated content may be incorrect.">
                 <a:extLst>
                   <a:ext uri="{FF2B5EF4-FFF2-40B4-BE49-F238E27FC236}">
-                    <a16:creationId xmlns:a16="http://schemas.microsoft.com/office/drawing/2014/main" id="{31D67220-A5A3-C982-ABAA-76BF27D3A610}"/>
+                    <a16:creationId xmlns:a16="http://schemas.microsoft.com/office/drawing/2014/main" id="{31CDC5D0-80F4-CF34-180C-1E2C5181119A}"/>
                   </a:ext>
                 </a:extLst>
               </p:cNvPr>
-              <p:cNvGrpSpPr>
-                <a:grpSpLocks noChangeAspect="1"/>
-              </p:cNvGrpSpPr>
+              <p:cNvPicPr>
+                <a:picLocks noChangeAspect="1"/>
+              </p:cNvPicPr>
               <p:nvPr/>
-            </p:nvGrpSpPr>
-            <p:grpSpPr>
+            </p:nvPicPr>
+            <p:blipFill>
+              <a:blip r:embed="rId6">
+                <a:extLst>
+                  <a:ext uri="{28A0092B-C50C-407E-A947-70E740481C1C}">
+                    <a14:useLocalDpi xmlns:a14="http://schemas.microsoft.com/office/drawing/2010/main" val="0"/>
+                  </a:ext>
+                </a:extLst>
+              </a:blip>
+              <a:srcRect l="56362" t="23416" r="29209" b="43925"/>
+              <a:stretch/>
+            </p:blipFill>
+            <p:spPr>
               <a:xfrm>
-                <a:off x="5025516" y="794440"/>
-                <a:ext cx="1988770" cy="2392732"/>
-                <a:chOff x="5620740" y="1990807"/>
-                <a:chExt cx="2369090" cy="2850303"/>
+                <a:off x="5025515" y="794441"/>
+                <a:ext cx="1958712" cy="2345212"/>
               </a:xfrm>
-            </p:grpSpPr>
-            <p:pic>
-              <p:nvPicPr>
-                <p:cNvPr id="30" name="Picture 29" descr="A screenshot of a graph&#10;&#10;AI-generated content may be incorrect.">
-                  <a:extLst>
-                    <a:ext uri="{FF2B5EF4-FFF2-40B4-BE49-F238E27FC236}">
-                      <a16:creationId xmlns:a16="http://schemas.microsoft.com/office/drawing/2014/main" id="{31CDC5D0-80F4-CF34-180C-1E2C5181119A}"/>
-                    </a:ext>
-                  </a:extLst>
-                </p:cNvPr>
-                <p:cNvPicPr>
-                  <a:picLocks noChangeAspect="1"/>
-                </p:cNvPicPr>
-                <p:nvPr/>
-              </p:nvPicPr>
-              <p:blipFill>
-                <a:blip r:embed="rId6">
-                  <a:extLst>
-                    <a:ext uri="{28A0092B-C50C-407E-A947-70E740481C1C}">
-                      <a14:useLocalDpi xmlns:a14="http://schemas.microsoft.com/office/drawing/2010/main" val="0"/>
-                    </a:ext>
-                  </a:extLst>
-                </a:blip>
-                <a:srcRect l="56362" t="23416" r="29209" b="43925"/>
-                <a:stretch/>
-              </p:blipFill>
-              <p:spPr>
-                <a:xfrm>
-                  <a:off x="5620740" y="1990807"/>
-                  <a:ext cx="2105025" cy="2520397"/>
-                </a:xfrm>
-                <a:prstGeom prst="rect">
-                  <a:avLst/>
-                </a:prstGeom>
-              </p:spPr>
-            </p:pic>
-            <p:pic>
-              <p:nvPicPr>
-                <p:cNvPr id="31" name="Picture 30" descr="A screenshot of a graph&#10;&#10;AI-generated content may be incorrect.">
-                  <a:extLst>
-                    <a:ext uri="{FF2B5EF4-FFF2-40B4-BE49-F238E27FC236}">
-                      <a16:creationId xmlns:a16="http://schemas.microsoft.com/office/drawing/2014/main" id="{CA091874-25E2-30DF-B764-40BAC98019C4}"/>
-                    </a:ext>
-                  </a:extLst>
-                </p:cNvPr>
-                <p:cNvPicPr>
-                  <a:picLocks noChangeAspect="1"/>
-                </p:cNvPicPr>
-                <p:nvPr/>
-              </p:nvPicPr>
-              <p:blipFill>
-                <a:blip r:embed="rId6">
-                  <a:extLst>
-                    <a:ext uri="{28A0092B-C50C-407E-A947-70E740481C1C}">
-                      <a14:useLocalDpi xmlns:a14="http://schemas.microsoft.com/office/drawing/2010/main" val="0"/>
-                    </a:ext>
-                  </a:extLst>
-                </a:blip>
-                <a:srcRect l="56362" t="18606" r="29209" b="76905"/>
-                <a:stretch/>
-              </p:blipFill>
-              <p:spPr>
-                <a:xfrm>
-                  <a:off x="5884805" y="4494680"/>
-                  <a:ext cx="2105025" cy="346430"/>
-                </a:xfrm>
-                <a:prstGeom prst="rect">
-                  <a:avLst/>
-                </a:prstGeom>
-              </p:spPr>
-            </p:pic>
-          </p:grpSp>
+              <a:prstGeom prst="rect">
+                <a:avLst/>
+              </a:prstGeom>
+            </p:spPr>
+          </p:pic>
           <p:sp>
             <p:nvSpPr>
               <p:cNvPr id="29" name="TextBox 28">
@@ -13692,198 +13616,82 @@
           </p:nvGrpSpPr>
           <p:grpSpPr>
             <a:xfrm>
-              <a:off x="7476422" y="406630"/>
-              <a:ext cx="4305800" cy="2445525"/>
-              <a:chOff x="7484339" y="181744"/>
-              <a:chExt cx="4305800" cy="2445525"/>
+              <a:off x="7444397" y="406630"/>
+              <a:ext cx="4560333" cy="2304261"/>
+              <a:chOff x="7452314" y="181744"/>
+              <a:chExt cx="4560333" cy="2304261"/>
             </a:xfrm>
           </p:grpSpPr>
-          <p:grpSp>
-            <p:nvGrpSpPr>
-              <p:cNvPr id="35" name="Group 34">
+          <p:pic>
+            <p:nvPicPr>
+              <p:cNvPr id="40" name="Picture 39" descr="A black and red chemical structure&#10;&#10;AI-generated content may be incorrect.">
                 <a:extLst>
                   <a:ext uri="{FF2B5EF4-FFF2-40B4-BE49-F238E27FC236}">
-                    <a16:creationId xmlns:a16="http://schemas.microsoft.com/office/drawing/2014/main" id="{315A4BFF-0CA9-D528-2306-83671A721F96}"/>
+                    <a16:creationId xmlns:a16="http://schemas.microsoft.com/office/drawing/2014/main" id="{13934202-8C49-5877-EAF5-D53028B5669E}"/>
                   </a:ext>
                 </a:extLst>
               </p:cNvPr>
-              <p:cNvGrpSpPr>
-                <a:grpSpLocks noChangeAspect="1"/>
-              </p:cNvGrpSpPr>
+              <p:cNvPicPr>
+                <a:picLocks noChangeAspect="1"/>
+              </p:cNvPicPr>
               <p:nvPr/>
-            </p:nvGrpSpPr>
-            <p:grpSpPr>
+            </p:nvPicPr>
+            <p:blipFill>
+              <a:blip r:embed="rId7" cstate="print">
+                <a:extLst>
+                  <a:ext uri="{28A0092B-C50C-407E-A947-70E740481C1C}">
+                    <a14:useLocalDpi xmlns:a14="http://schemas.microsoft.com/office/drawing/2010/main" val="0"/>
+                  </a:ext>
+                </a:extLst>
+              </a:blip>
+              <a:srcRect l="26131" t="13384" r="50592" b="35527"/>
+              <a:stretch/>
+            </p:blipFill>
+            <p:spPr>
               <a:xfrm>
-                <a:off x="7484339" y="1329135"/>
-                <a:ext cx="2052000" cy="1269160"/>
-                <a:chOff x="7955797" y="1713756"/>
-                <a:chExt cx="2885092" cy="1784427"/>
+                <a:off x="7452314" y="1329135"/>
+                <a:ext cx="2274509" cy="1092048"/>
               </a:xfrm>
-            </p:grpSpPr>
-            <p:pic>
-              <p:nvPicPr>
-                <p:cNvPr id="40" name="Picture 39" descr="A black and red chemical structure&#10;&#10;AI-generated content may be incorrect.">
-                  <a:extLst>
-                    <a:ext uri="{FF2B5EF4-FFF2-40B4-BE49-F238E27FC236}">
-                      <a16:creationId xmlns:a16="http://schemas.microsoft.com/office/drawing/2014/main" id="{13934202-8C49-5877-EAF5-D53028B5669E}"/>
-                    </a:ext>
-                  </a:extLst>
-                </p:cNvPr>
-                <p:cNvPicPr>
-                  <a:picLocks noChangeAspect="1"/>
-                </p:cNvPicPr>
-                <p:nvPr/>
-              </p:nvPicPr>
-              <p:blipFill>
-                <a:blip r:embed="rId7" cstate="print">
-                  <a:extLst>
-                    <a:ext uri="{28A0092B-C50C-407E-A947-70E740481C1C}">
-                      <a14:useLocalDpi xmlns:a14="http://schemas.microsoft.com/office/drawing/2010/main" val="0"/>
-                    </a:ext>
-                  </a:extLst>
-                </a:blip>
-                <a:srcRect l="26131" t="13384" r="50592" b="35527"/>
-                <a:stretch/>
-              </p:blipFill>
-              <p:spPr>
-                <a:xfrm>
-                  <a:off x="7955797" y="1713756"/>
-                  <a:ext cx="2885092" cy="1385205"/>
-                </a:xfrm>
-                <a:prstGeom prst="rect">
-                  <a:avLst/>
-                </a:prstGeom>
-              </p:spPr>
-            </p:pic>
-            <p:pic>
-              <p:nvPicPr>
-                <p:cNvPr id="41" name="Picture 40" descr="A black and red chemical structure&#10;&#10;AI-generated content may be incorrect.">
-                  <a:extLst>
-                    <a:ext uri="{FF2B5EF4-FFF2-40B4-BE49-F238E27FC236}">
-                      <a16:creationId xmlns:a16="http://schemas.microsoft.com/office/drawing/2014/main" id="{14AFA39F-495B-AE1F-EE0F-FC1A7BA10F05}"/>
-                    </a:ext>
-                  </a:extLst>
-                </p:cNvPr>
-                <p:cNvPicPr>
-                  <a:picLocks noChangeAspect="1"/>
-                </p:cNvPicPr>
-                <p:nvPr/>
-              </p:nvPicPr>
-              <p:blipFill>
-                <a:blip r:embed="rId7">
-                  <a:extLst>
-                    <a:ext uri="{28A0092B-C50C-407E-A947-70E740481C1C}">
-                      <a14:useLocalDpi xmlns:a14="http://schemas.microsoft.com/office/drawing/2010/main" val="0"/>
-                    </a:ext>
-                  </a:extLst>
-                </a:blip>
-                <a:srcRect l="34138" t="87643" r="59329" b="4628"/>
-                <a:stretch/>
-              </p:blipFill>
-              <p:spPr>
-                <a:xfrm>
-                  <a:off x="8883993" y="3231955"/>
-                  <a:ext cx="1028700" cy="266228"/>
-                </a:xfrm>
-                <a:prstGeom prst="rect">
-                  <a:avLst/>
-                </a:prstGeom>
-              </p:spPr>
-            </p:pic>
-          </p:grpSp>
-          <p:grpSp>
-            <p:nvGrpSpPr>
-              <p:cNvPr id="36" name="Group 35">
+              <a:prstGeom prst="rect">
+                <a:avLst/>
+              </a:prstGeom>
+            </p:spPr>
+          </p:pic>
+          <p:pic>
+            <p:nvPicPr>
+              <p:cNvPr id="38" name="Picture 37" descr="A black and red chemical structure&#10;&#10;AI-generated content may be incorrect.">
                 <a:extLst>
                   <a:ext uri="{FF2B5EF4-FFF2-40B4-BE49-F238E27FC236}">
-                    <a16:creationId xmlns:a16="http://schemas.microsoft.com/office/drawing/2014/main" id="{40F329E8-016F-7B2E-D6E4-F9F4E0BE7A34}"/>
+                    <a16:creationId xmlns:a16="http://schemas.microsoft.com/office/drawing/2014/main" id="{48ACB3B0-1845-ABC3-5228-376A5949FA79}"/>
                   </a:ext>
                 </a:extLst>
               </p:cNvPr>
-              <p:cNvGrpSpPr>
-                <a:grpSpLocks noChangeAspect="1"/>
-              </p:cNvGrpSpPr>
+              <p:cNvPicPr>
+                <a:picLocks noChangeAspect="1"/>
+              </p:cNvPicPr>
               <p:nvPr/>
-            </p:nvGrpSpPr>
-            <p:grpSpPr>
+            </p:nvPicPr>
+            <p:blipFill>
+              <a:blip r:embed="rId7" cstate="print">
+                <a:extLst>
+                  <a:ext uri="{28A0092B-C50C-407E-A947-70E740481C1C}">
+                    <a14:useLocalDpi xmlns:a14="http://schemas.microsoft.com/office/drawing/2010/main" val="0"/>
+                  </a:ext>
+                </a:extLst>
+              </a:blip>
+              <a:srcRect l="51184" t="14586" r="25463" b="34325"/>
+              <a:stretch/>
+            </p:blipFill>
+            <p:spPr>
               <a:xfrm>
                 <a:off x="9738139" y="1397550"/>
-                <a:ext cx="2052000" cy="1229719"/>
-                <a:chOff x="7951035" y="3350221"/>
-                <a:chExt cx="2894617" cy="1734681"/>
+                <a:ext cx="2274508" cy="1088455"/>
               </a:xfrm>
-            </p:grpSpPr>
-            <p:pic>
-              <p:nvPicPr>
-                <p:cNvPr id="38" name="Picture 37" descr="A black and red chemical structure&#10;&#10;AI-generated content may be incorrect.">
-                  <a:extLst>
-                    <a:ext uri="{FF2B5EF4-FFF2-40B4-BE49-F238E27FC236}">
-                      <a16:creationId xmlns:a16="http://schemas.microsoft.com/office/drawing/2014/main" id="{48ACB3B0-1845-ABC3-5228-376A5949FA79}"/>
-                    </a:ext>
-                  </a:extLst>
-                </p:cNvPr>
-                <p:cNvPicPr>
-                  <a:picLocks noChangeAspect="1"/>
-                </p:cNvPicPr>
-                <p:nvPr/>
-              </p:nvPicPr>
-              <p:blipFill>
-                <a:blip r:embed="rId7" cstate="print">
-                  <a:extLst>
-                    <a:ext uri="{28A0092B-C50C-407E-A947-70E740481C1C}">
-                      <a14:useLocalDpi xmlns:a14="http://schemas.microsoft.com/office/drawing/2010/main" val="0"/>
-                    </a:ext>
-                  </a:extLst>
-                </a:blip>
-                <a:srcRect l="51184" t="14586" r="25463" b="34325"/>
-                <a:stretch/>
-              </p:blipFill>
-              <p:spPr>
-                <a:xfrm>
-                  <a:off x="7951035" y="3350221"/>
-                  <a:ext cx="2894617" cy="1385206"/>
-                </a:xfrm>
-                <a:prstGeom prst="rect">
-                  <a:avLst/>
-                </a:prstGeom>
-              </p:spPr>
-            </p:pic>
-            <p:pic>
-              <p:nvPicPr>
-                <p:cNvPr id="39" name="Picture 38" descr="A black and red chemical structure&#10;&#10;AI-generated content may be incorrect.">
-                  <a:extLst>
-                    <a:ext uri="{FF2B5EF4-FFF2-40B4-BE49-F238E27FC236}">
-                      <a16:creationId xmlns:a16="http://schemas.microsoft.com/office/drawing/2014/main" id="{5D7062A3-FA42-FF24-FF7D-4729F61DD8A5}"/>
-                    </a:ext>
-                  </a:extLst>
-                </p:cNvPr>
-                <p:cNvPicPr>
-                  <a:picLocks noChangeAspect="1"/>
-                </p:cNvPicPr>
-                <p:nvPr/>
-              </p:nvPicPr>
-              <p:blipFill>
-                <a:blip r:embed="rId7">
-                  <a:extLst>
-                    <a:ext uri="{28A0092B-C50C-407E-A947-70E740481C1C}">
-                      <a14:useLocalDpi xmlns:a14="http://schemas.microsoft.com/office/drawing/2010/main" val="0"/>
-                    </a:ext>
-                  </a:extLst>
-                </a:blip>
-                <a:srcRect l="59497" t="85098" r="34125" b="3309"/>
-                <a:stretch/>
-              </p:blipFill>
-              <p:spPr>
-                <a:xfrm>
-                  <a:off x="8926807" y="4709945"/>
-                  <a:ext cx="943073" cy="374957"/>
-                </a:xfrm>
-                <a:prstGeom prst="rect">
-                  <a:avLst/>
-                </a:prstGeom>
-              </p:spPr>
-            </p:pic>
-          </p:grpSp>
+              <a:prstGeom prst="rect">
+                <a:avLst/>
+              </a:prstGeom>
+            </p:spPr>
+          </p:pic>
           <p:sp>
             <p:nvSpPr>
               <p:cNvPr id="37" name="TextBox 36">
@@ -14025,6 +13833,320 @@
               </a:solidFill>
               <a:latin typeface="Century Gothic"/>
             </a:endParaRPr>
+          </a:p>
+        </p:txBody>
+      </p:sp>
+      <p:sp>
+        <p:nvSpPr>
+          <p:cNvPr id="6" name="TextBox 5">
+            <a:extLst>
+              <a:ext uri="{FF2B5EF4-FFF2-40B4-BE49-F238E27FC236}">
+                <a16:creationId xmlns:a16="http://schemas.microsoft.com/office/drawing/2014/main" id="{15287AC3-7F0E-0B38-9378-106BACD22702}"/>
+              </a:ext>
+            </a:extLst>
+          </p:cNvPr>
+          <p:cNvSpPr txBox="1"/>
+          <p:nvPr/>
+        </p:nvSpPr>
+        <p:spPr>
+          <a:xfrm>
+            <a:off x="2197518" y="3355198"/>
+            <a:ext cx="2232171" cy="369332"/>
+          </a:xfrm>
+          <a:prstGeom prst="rect">
+            <a:avLst/>
+          </a:prstGeom>
+          <a:noFill/>
+        </p:spPr>
+        <p:txBody>
+          <a:bodyPr wrap="square" rtlCol="0">
+            <a:spAutoFit/>
+          </a:bodyPr>
+          <a:lstStyle/>
+          <a:p>
+            <a:pPr algn="ctr"/>
+            <a:r>
+              <a:rPr lang="en-US" sz="900" b="1" i="0" dirty="0">
+                <a:solidFill>
+                  <a:srgbClr val="0F0F0F"/>
+                </a:solidFill>
+                <a:effectLst/>
+                <a:latin typeface="ui-sans-serif"/>
+              </a:rPr>
+              <a:t>CF #1 (substituent)</a:t>
+            </a:r>
+          </a:p>
+          <a:p>
+            <a:pPr algn="ctr"/>
+            <a:r>
+              <a:rPr lang="en-US" sz="900" b="1" i="0" dirty="0">
+                <a:solidFill>
+                  <a:srgbClr val="0F0F0F"/>
+                </a:solidFill>
+                <a:effectLst/>
+                <a:latin typeface="ui-sans-serif"/>
+              </a:rPr>
+              <a:t>Predicted class: 0 | Similarity: 0.68</a:t>
+            </a:r>
+          </a:p>
+        </p:txBody>
+      </p:sp>
+      <p:sp>
+        <p:nvSpPr>
+          <p:cNvPr id="7" name="TextBox 6">
+            <a:extLst>
+              <a:ext uri="{FF2B5EF4-FFF2-40B4-BE49-F238E27FC236}">
+                <a16:creationId xmlns:a16="http://schemas.microsoft.com/office/drawing/2014/main" id="{841EB23C-A43D-DDA5-6AC6-03E6D94EA00D}"/>
+              </a:ext>
+            </a:extLst>
+          </p:cNvPr>
+          <p:cNvSpPr txBox="1"/>
+          <p:nvPr/>
+        </p:nvSpPr>
+        <p:spPr>
+          <a:xfrm>
+            <a:off x="5482822" y="3000598"/>
+            <a:ext cx="2232171" cy="369332"/>
+          </a:xfrm>
+          <a:prstGeom prst="rect">
+            <a:avLst/>
+          </a:prstGeom>
+          <a:noFill/>
+        </p:spPr>
+        <p:txBody>
+          <a:bodyPr wrap="square" rtlCol="0">
+            <a:spAutoFit/>
+          </a:bodyPr>
+          <a:lstStyle/>
+          <a:p>
+            <a:pPr algn="ctr"/>
+            <a:r>
+              <a:rPr lang="en-US" sz="900" b="1" i="0" dirty="0">
+                <a:solidFill>
+                  <a:srgbClr val="0F0F0F"/>
+                </a:solidFill>
+                <a:effectLst/>
+                <a:latin typeface="ui-sans-serif"/>
+              </a:rPr>
+              <a:t>Rank 1 |</a:t>
+            </a:r>
+            <a:r>
+              <a:rPr lang="en-US" sz="900" i="0" dirty="0">
+                <a:solidFill>
+                  <a:srgbClr val="0F0F0F"/>
+                </a:solidFill>
+                <a:effectLst/>
+                <a:latin typeface="ui-sans-serif"/>
+              </a:rPr>
+              <a:t> </a:t>
+            </a:r>
+            <a:r>
+              <a:rPr lang="en-US" sz="900" b="1" dirty="0">
+                <a:solidFill>
+                  <a:srgbClr val="0F0F0F"/>
+                </a:solidFill>
+                <a:latin typeface="ui-sans-serif"/>
+              </a:rPr>
+              <a:t>S</a:t>
+            </a:r>
+            <a:r>
+              <a:rPr lang="en-US" sz="900" b="1" i="0" dirty="0">
+                <a:solidFill>
+                  <a:srgbClr val="0F0F0F"/>
+                </a:solidFill>
+                <a:effectLst/>
+                <a:latin typeface="ui-sans-serif"/>
+              </a:rPr>
+              <a:t>ite 1</a:t>
+            </a:r>
+          </a:p>
+          <a:p>
+            <a:pPr algn="ctr"/>
+            <a:r>
+              <a:rPr lang="en-US" sz="900" b="1" dirty="0">
+                <a:solidFill>
+                  <a:srgbClr val="0F0F0F"/>
+                </a:solidFill>
+                <a:latin typeface="ui-sans-serif"/>
+              </a:rPr>
+              <a:t>Contrast=1.000</a:t>
+            </a:r>
+          </a:p>
+        </p:txBody>
+      </p:sp>
+      <p:sp>
+        <p:nvSpPr>
+          <p:cNvPr id="8" name="TextBox 7">
+            <a:extLst>
+              <a:ext uri="{FF2B5EF4-FFF2-40B4-BE49-F238E27FC236}">
+                <a16:creationId xmlns:a16="http://schemas.microsoft.com/office/drawing/2014/main" id="{150DA1B1-02DE-4F73-AF01-3E3EDD2F27A3}"/>
+              </a:ext>
+            </a:extLst>
+          </p:cNvPr>
+          <p:cNvSpPr txBox="1"/>
+          <p:nvPr/>
+        </p:nvSpPr>
+        <p:spPr>
+          <a:xfrm>
+            <a:off x="3917852" y="3353775"/>
+            <a:ext cx="2232171" cy="369332"/>
+          </a:xfrm>
+          <a:prstGeom prst="rect">
+            <a:avLst/>
+          </a:prstGeom>
+          <a:noFill/>
+        </p:spPr>
+        <p:txBody>
+          <a:bodyPr wrap="square" rtlCol="0">
+            <a:spAutoFit/>
+          </a:bodyPr>
+          <a:lstStyle/>
+          <a:p>
+            <a:pPr algn="ctr"/>
+            <a:r>
+              <a:rPr lang="en-US" sz="900" b="1" i="0" dirty="0">
+                <a:solidFill>
+                  <a:srgbClr val="0F0F0F"/>
+                </a:solidFill>
+                <a:effectLst/>
+                <a:latin typeface="ui-sans-serif"/>
+              </a:rPr>
+              <a:t>CF #</a:t>
+            </a:r>
+            <a:r>
+              <a:rPr lang="en-US" sz="900" b="1" dirty="0">
+                <a:solidFill>
+                  <a:srgbClr val="0F0F0F"/>
+                </a:solidFill>
+                <a:latin typeface="ui-sans-serif"/>
+              </a:rPr>
+              <a:t>2</a:t>
+            </a:r>
+            <a:r>
+              <a:rPr lang="en-US" sz="900" b="1" i="0" dirty="0">
+                <a:solidFill>
+                  <a:srgbClr val="0F0F0F"/>
+                </a:solidFill>
+                <a:effectLst/>
+                <a:latin typeface="ui-sans-serif"/>
+              </a:rPr>
+              <a:t> (substituent)</a:t>
+            </a:r>
+          </a:p>
+          <a:p>
+            <a:pPr algn="ctr"/>
+            <a:r>
+              <a:rPr lang="en-US" sz="900" b="1" i="0" dirty="0">
+                <a:solidFill>
+                  <a:srgbClr val="0F0F0F"/>
+                </a:solidFill>
+                <a:effectLst/>
+                <a:latin typeface="ui-sans-serif"/>
+              </a:rPr>
+              <a:t>Predicted class: 0 | Similarity: 0.68</a:t>
+            </a:r>
+          </a:p>
+        </p:txBody>
+      </p:sp>
+      <p:sp>
+        <p:nvSpPr>
+          <p:cNvPr id="9" name="TextBox 8">
+            <a:extLst>
+              <a:ext uri="{FF2B5EF4-FFF2-40B4-BE49-F238E27FC236}">
+                <a16:creationId xmlns:a16="http://schemas.microsoft.com/office/drawing/2014/main" id="{0F0130AB-996C-A630-430B-39DF8AF93E0F}"/>
+              </a:ext>
+            </a:extLst>
+          </p:cNvPr>
+          <p:cNvSpPr txBox="1"/>
+          <p:nvPr/>
+        </p:nvSpPr>
+        <p:spPr>
+          <a:xfrm>
+            <a:off x="7185290" y="3000598"/>
+            <a:ext cx="2232171" cy="369332"/>
+          </a:xfrm>
+          <a:prstGeom prst="rect">
+            <a:avLst/>
+          </a:prstGeom>
+          <a:noFill/>
+        </p:spPr>
+        <p:txBody>
+          <a:bodyPr wrap="square" rtlCol="0">
+            <a:spAutoFit/>
+          </a:bodyPr>
+          <a:lstStyle/>
+          <a:p>
+            <a:pPr algn="ctr"/>
+            <a:r>
+              <a:rPr lang="en-US" sz="900" b="1" i="0" dirty="0">
+                <a:solidFill>
+                  <a:srgbClr val="0F0F0F"/>
+                </a:solidFill>
+                <a:effectLst/>
+                <a:latin typeface="ui-sans-serif"/>
+              </a:rPr>
+              <a:t>Rank </a:t>
+            </a:r>
+            <a:r>
+              <a:rPr lang="en-US" sz="900" b="1" dirty="0">
+                <a:solidFill>
+                  <a:srgbClr val="0F0F0F"/>
+                </a:solidFill>
+                <a:latin typeface="ui-sans-serif"/>
+              </a:rPr>
+              <a:t>2</a:t>
+            </a:r>
+            <a:r>
+              <a:rPr lang="en-US" sz="900" b="1" i="0" dirty="0">
+                <a:solidFill>
+                  <a:srgbClr val="0F0F0F"/>
+                </a:solidFill>
+                <a:effectLst/>
+                <a:latin typeface="ui-sans-serif"/>
+              </a:rPr>
+              <a:t> |</a:t>
+            </a:r>
+            <a:r>
+              <a:rPr lang="en-US" sz="900" i="0" dirty="0">
+                <a:solidFill>
+                  <a:srgbClr val="0F0F0F"/>
+                </a:solidFill>
+                <a:effectLst/>
+                <a:latin typeface="ui-sans-serif"/>
+              </a:rPr>
+              <a:t> </a:t>
+            </a:r>
+            <a:r>
+              <a:rPr lang="en-US" sz="900" b="1" dirty="0">
+                <a:solidFill>
+                  <a:srgbClr val="0F0F0F"/>
+                </a:solidFill>
+                <a:latin typeface="ui-sans-serif"/>
+              </a:rPr>
+              <a:t>S</a:t>
+            </a:r>
+            <a:r>
+              <a:rPr lang="en-US" sz="900" b="1" i="0" dirty="0">
+                <a:solidFill>
+                  <a:srgbClr val="0F0F0F"/>
+                </a:solidFill>
+                <a:effectLst/>
+                <a:latin typeface="ui-sans-serif"/>
+              </a:rPr>
+              <a:t>ite 1</a:t>
+            </a:r>
+          </a:p>
+          <a:p>
+            <a:pPr algn="ctr"/>
+            <a:r>
+              <a:rPr lang="en-US" sz="900" b="1" dirty="0">
+                <a:solidFill>
+                  <a:srgbClr val="0F0F0F"/>
+                </a:solidFill>
+                <a:latin typeface="ui-sans-serif"/>
+              </a:rPr>
+              <a:t>Contrast=1.000</a:t>
+            </a:r>
           </a:p>
         </p:txBody>
       </p:sp>
@@ -14350,7 +14472,7 @@
                 </a:solidFill>
                 <a:latin typeface="Century Gothic"/>
               </a:rPr>
-              <a:t>Demonstrate the ability of the agent to investigate learning characteristics of distinct ML methods </a:t>
+              <a:t>Display the capacity of the agent to compare and interpret explanations for different predictions</a:t>
             </a:r>
           </a:p>
           <a:p>
@@ -15132,7 +15254,7 @@
         <p:spPr>
           <a:xfrm>
             <a:off x="380879" y="3927356"/>
-            <a:ext cx="4304372" cy="2031325"/>
+            <a:ext cx="4350147" cy="2154436"/>
           </a:xfrm>
           <a:prstGeom prst="rect">
             <a:avLst/>
@@ -15180,7 +15302,7 @@
             </a:r>
           </a:p>
           <a:p>
-            <a:pPr marL="742950" lvl="1" indent="-285750" algn="l">
+            <a:pPr marL="628650" lvl="1" indent="-171450">
               <a:buFont typeface="Arial" panose="020B0604020202020204" pitchFamily="34" charset="0"/>
               <a:buChar char="•"/>
             </a:pPr>
@@ -15278,7 +15400,19 @@
               <a:rPr lang="en-US" sz="800" b="0" i="0" dirty="0">
                 <a:effectLst/>
               </a:rPr>
-              <a:t>The presence of two chlorine atoms on the phenyl ring contributes positively</a:t>
+              <a:t>The presence of </a:t>
+            </a:r>
+            <a:r>
+              <a:rPr lang="en-US" sz="800" b="1" i="0" dirty="0">
+                <a:effectLst/>
+              </a:rPr>
+              <a:t>two chlorine</a:t>
+            </a:r>
+            <a:r>
+              <a:rPr lang="en-US" sz="800" b="0" i="0" dirty="0">
+                <a:effectLst/>
+              </a:rPr>
+              <a:t> atoms on the phenyl ring contributes positively</a:t>
             </a:r>
           </a:p>
           <a:p>
@@ -15320,10 +15454,16 @@
               <a:buChar char="•"/>
             </a:pPr>
             <a:r>
+              <a:rPr lang="en-US" sz="800" b="1" i="0" dirty="0">
+                <a:effectLst/>
+              </a:rPr>
+              <a:t>The C-C bonds in the alkene linker </a:t>
+            </a:r>
+            <a:r>
               <a:rPr lang="en-US" sz="800" b="0" i="0" dirty="0">
                 <a:effectLst/>
               </a:rPr>
-              <a:t>The C-C bonds in the alkene linker (φ = 0.089, 0.070) contribute positively</a:t>
+              <a:t>(φ = 0.089, 0.070) contribute positively</a:t>
             </a:r>
           </a:p>
           <a:p>
@@ -15335,7 +15475,25 @@
               <a:rPr lang="en-US" sz="800" b="0" i="0" dirty="0">
                 <a:effectLst/>
               </a:rPr>
-              <a:t>This flexible linker allows optimal positioning of pharmacophores</a:t>
+              <a:t>This flexible </a:t>
+            </a:r>
+            <a:r>
+              <a:rPr lang="en-US" sz="800" b="1" i="0" dirty="0">
+                <a:effectLst/>
+              </a:rPr>
+              <a:t>linker</a:t>
+            </a:r>
+            <a:r>
+              <a:rPr lang="en-US" sz="800" b="0" i="0" dirty="0">
+                <a:effectLst/>
+              </a:rPr>
+              <a:t> allows optimal positioning of </a:t>
+            </a:r>
+            <a:r>
+              <a:rPr lang="en-US" sz="800" b="1" i="0" dirty="0">
+                <a:effectLst/>
+              </a:rPr>
+              <a:t>pharmacophores</a:t>
             </a:r>
           </a:p>
         </p:txBody>
@@ -15411,7 +15569,31 @@
               <a:rPr lang="en-US" sz="800" i="0" dirty="0">
                 <a:effectLst/>
               </a:rPr>
-              <a:t>The C-C bond between methyl and phenyl has an extremely high SHAP value</a:t>
+              <a:t>The</a:t>
+            </a:r>
+            <a:r>
+              <a:rPr lang="en-US" sz="800" b="1" i="0" dirty="0">
+                <a:effectLst/>
+              </a:rPr>
+              <a:t> C-C bond between methyl and phenyl </a:t>
+            </a:r>
+            <a:r>
+              <a:rPr lang="en-US" sz="800" i="0" dirty="0">
+                <a:effectLst/>
+              </a:rPr>
+              <a:t>has an extremely </a:t>
+            </a:r>
+            <a:r>
+              <a:rPr lang="en-US" sz="800" b="1" i="0" dirty="0">
+                <a:effectLst/>
+              </a:rPr>
+              <a:t>high</a:t>
+            </a:r>
+            <a:r>
+              <a:rPr lang="en-US" sz="800" i="0" dirty="0">
+                <a:effectLst/>
+              </a:rPr>
+              <a:t> SHAP value</a:t>
             </a:r>
           </a:p>
           <a:p>
@@ -15423,7 +15605,19 @@
               <a:rPr lang="en-US" sz="800" i="0" dirty="0">
                 <a:effectLst/>
               </a:rPr>
-              <a:t>This suggests the model associates simple alkyl-phenyl systems with inactivity</a:t>
+              <a:t>This suggests the model associates </a:t>
+            </a:r>
+            <a:r>
+              <a:rPr lang="en-US" sz="800" b="1" i="0" dirty="0">
+                <a:effectLst/>
+              </a:rPr>
+              <a:t>simple alkyl-phenyl systems </a:t>
+            </a:r>
+            <a:r>
+              <a:rPr lang="en-US" sz="800" i="0" dirty="0">
+                <a:effectLst/>
+              </a:rPr>
+              <a:t>with inactivity</a:t>
             </a:r>
           </a:p>
           <a:p>
@@ -15432,10 +15626,28 @@
               <a:buChar char="•"/>
             </a:pPr>
             <a:r>
+              <a:rPr lang="en-US" sz="800" b="1" i="0" dirty="0">
+                <a:effectLst/>
+              </a:rPr>
+              <a:t>Lack</a:t>
+            </a:r>
+            <a:r>
               <a:rPr lang="en-US" sz="800" i="0" dirty="0">
                 <a:effectLst/>
               </a:rPr>
-              <a:t>Lack of complex pharmacophore reduces activity likelihood</a:t>
+              <a:t> of </a:t>
+            </a:r>
+            <a:r>
+              <a:rPr lang="en-US" sz="800" b="1" i="0" dirty="0">
+                <a:effectLst/>
+              </a:rPr>
+              <a:t>complex pharmacophore </a:t>
+            </a:r>
+            <a:r>
+              <a:rPr lang="en-US" sz="800" i="0" dirty="0">
+                <a:effectLst/>
+              </a:rPr>
+              <a:t>reduces activity likelihood</a:t>
             </a:r>
           </a:p>
           <a:p>
@@ -15459,7 +15671,31 @@
               <a:rPr lang="en-US" sz="800" i="0" dirty="0">
                 <a:effectLst/>
               </a:rPr>
-              <a:t>The S-N bond (φ = 0.013) and S=O bonds (φ = 0.003) have low positive contributions</a:t>
+              <a:t>The </a:t>
+            </a:r>
+            <a:r>
+              <a:rPr lang="en-US" sz="800" b="1" i="0" dirty="0">
+                <a:effectLst/>
+              </a:rPr>
+              <a:t>S-N bond </a:t>
+            </a:r>
+            <a:r>
+              <a:rPr lang="en-US" sz="800" i="0" dirty="0">
+                <a:effectLst/>
+              </a:rPr>
+              <a:t>(φ = 0.013) </a:t>
+            </a:r>
+            <a:r>
+              <a:rPr lang="en-US" sz="800" b="1" i="0" dirty="0">
+                <a:effectLst/>
+              </a:rPr>
+              <a:t>and S=O </a:t>
+            </a:r>
+            <a:r>
+              <a:rPr lang="en-US" sz="800" i="0" dirty="0">
+                <a:effectLst/>
+              </a:rPr>
+              <a:t>bonds (φ = 0.003) have low positive contributions</a:t>
             </a:r>
           </a:p>
           <a:p>
@@ -15468,10 +15704,40 @@
               <a:buChar char="•"/>
             </a:pPr>
             <a:r>
+              <a:rPr lang="en-US" sz="800" b="1" i="0" dirty="0">
+                <a:effectLst/>
+              </a:rPr>
+              <a:t>Sulfonamides</a:t>
+            </a:r>
+            <a:r>
               <a:rPr lang="en-US" sz="800" i="0" dirty="0">
                 <a:effectLst/>
               </a:rPr>
-              <a:t>Sulfonamides in this context may not contribute to the target activity</a:t>
+              <a:t> in this context may </a:t>
+            </a:r>
+            <a:r>
+              <a:rPr lang="en-US" sz="800" b="1" i="0" dirty="0">
+                <a:effectLst/>
+              </a:rPr>
+              <a:t>not</a:t>
+            </a:r>
+            <a:r>
+              <a:rPr lang="en-US" sz="800" i="0" dirty="0">
+                <a:effectLst/>
+              </a:rPr>
+              <a:t> </a:t>
+            </a:r>
+            <a:r>
+              <a:rPr lang="en-US" sz="800" b="1" i="0" dirty="0">
+                <a:effectLst/>
+              </a:rPr>
+              <a:t>contribute</a:t>
+            </a:r>
+            <a:r>
+              <a:rPr lang="en-US" sz="800" i="0" dirty="0">
+                <a:effectLst/>
+              </a:rPr>
+              <a:t> to the target activity</a:t>
             </a:r>
           </a:p>
           <a:p>
@@ -15495,7 +15761,19 @@
               <a:rPr lang="en-US" sz="800" i="0" dirty="0">
                 <a:effectLst/>
               </a:rPr>
-              <a:t>The bicyclic terpenoid structure with hydroxyl group shows minimal SHAP contribution</a:t>
+              <a:t>The </a:t>
+            </a:r>
+            <a:r>
+              <a:rPr lang="en-US" sz="800" b="1" i="0" dirty="0">
+                <a:effectLst/>
+              </a:rPr>
+              <a:t>bicyclic terpenoid structure </a:t>
+            </a:r>
+            <a:r>
+              <a:rPr lang="en-US" sz="800" i="0" dirty="0">
+                <a:effectLst/>
+              </a:rPr>
+              <a:t>with hydroxyl group shows minimal SHAP contribution</a:t>
             </a:r>
           </a:p>
           <a:p>
@@ -15504,10 +15782,28 @@
               <a:buChar char="•"/>
             </a:pPr>
             <a:r>
+              <a:rPr lang="en-US" sz="800" b="1" i="0" dirty="0">
+                <a:effectLst/>
+              </a:rPr>
+              <a:t>Complex 3D </a:t>
+            </a:r>
+            <a:r>
               <a:rPr lang="en-US" sz="800" i="0" dirty="0">
                 <a:effectLst/>
               </a:rPr>
-              <a:t>Complex 3D structure may not align with target binding site</a:t>
+              <a:t>structure may </a:t>
+            </a:r>
+            <a:r>
+              <a:rPr lang="en-US" sz="800" b="1" i="0" dirty="0">
+                <a:effectLst/>
+              </a:rPr>
+              <a:t>not align </a:t>
+            </a:r>
+            <a:r>
+              <a:rPr lang="en-US" sz="800" i="0" dirty="0">
+                <a:effectLst/>
+              </a:rPr>
+              <a:t>with target binding site</a:t>
             </a:r>
           </a:p>
         </p:txBody>
@@ -18852,7 +19148,7 @@
                 </a:solidFill>
                 <a:latin typeface="Century Gothic"/>
               </a:rPr>
-              <a:t>Demonstrate the ability of the agent to analyze and compare the different learning characteristics of graph-based  models</a:t>
+              <a:t>Determine whether agent is capable of analyzing and comparing the learning characteristics of distinct ML-models</a:t>
             </a:r>
           </a:p>
           <a:p>
@@ -23686,7 +23982,7 @@
         </p:nvSpPr>
         <p:spPr>
           <a:xfrm>
-            <a:off x="380880" y="1375729"/>
+            <a:off x="380880" y="1328023"/>
             <a:ext cx="8380080" cy="4468480"/>
           </a:xfrm>
           <a:prstGeom prst="rect">
@@ -23906,14 +24202,16 @@
                 <a:spcPct val="100000"/>
               </a:lnSpc>
               <a:spcBef>
-                <a:spcPts val="400"/>
+                <a:spcPts val="200"/>
               </a:spcBef>
               <a:buClr>
                 <a:srgbClr val="0064C8"/>
               </a:buClr>
+              <a:buFont typeface="Wingdings" panose="05000000000000000000" pitchFamily="2" charset="2"/>
+              <a:buChar char="§"/>
             </a:pPr>
             <a:r>
-              <a:rPr lang="en-US" sz="2000" spc="-1" dirty="0">
+              <a:rPr lang="en-US" sz="1800" spc="-1" dirty="0">
                 <a:solidFill>
                   <a:srgbClr val="000000"/>
                 </a:solidFill>
@@ -23923,19 +24221,41 @@
             </a:r>
           </a:p>
           <a:p>
+            <a:pPr marL="0" indent="0">
+              <a:lnSpc>
+                <a:spcPct val="100000"/>
+              </a:lnSpc>
+              <a:spcBef>
+                <a:spcPts val="200"/>
+              </a:spcBef>
+              <a:buClr>
+                <a:srgbClr val="0064C8"/>
+              </a:buClr>
+              <a:buNone/>
+            </a:pPr>
+            <a:endParaRPr lang="en-US" sz="1800" spc="-1" dirty="0">
+              <a:solidFill>
+                <a:srgbClr val="000000"/>
+              </a:solidFill>
+              <a:latin typeface="Century Gothic"/>
+            </a:endParaRPr>
+          </a:p>
+          <a:p>
             <a:pPr>
               <a:lnSpc>
                 <a:spcPct val="100000"/>
               </a:lnSpc>
               <a:spcBef>
-                <a:spcPts val="400"/>
+                <a:spcPts val="200"/>
               </a:spcBef>
               <a:buClr>
                 <a:srgbClr val="0064C8"/>
               </a:buClr>
+              <a:buFont typeface="Wingdings" panose="05000000000000000000" pitchFamily="2" charset="2"/>
+              <a:buChar char="§"/>
             </a:pPr>
             <a:r>
-              <a:rPr lang="en-US" sz="2000" spc="-1" dirty="0" err="1">
+              <a:rPr lang="en-US" sz="1800" spc="-1" dirty="0" err="1">
                 <a:solidFill>
                   <a:srgbClr val="000000"/>
                 </a:solidFill>
@@ -23944,7 +24264,7 @@
               <a:t>ChemicHAL</a:t>
             </a:r>
             <a:r>
-              <a:rPr lang="en-US" sz="2000" spc="-1" dirty="0">
+              <a:rPr lang="en-US" sz="1800" spc="-1" dirty="0">
                 <a:solidFill>
                   <a:srgbClr val="000000"/>
                 </a:solidFill>
@@ -23954,19 +24274,41 @@
             </a:r>
           </a:p>
           <a:p>
+            <a:pPr marL="0" indent="0">
+              <a:lnSpc>
+                <a:spcPct val="100000"/>
+              </a:lnSpc>
+              <a:spcBef>
+                <a:spcPts val="200"/>
+              </a:spcBef>
+              <a:buClr>
+                <a:srgbClr val="0064C8"/>
+              </a:buClr>
+              <a:buNone/>
+            </a:pPr>
+            <a:endParaRPr lang="en-US" sz="1800" spc="-1" dirty="0">
+              <a:solidFill>
+                <a:srgbClr val="000000"/>
+              </a:solidFill>
+              <a:latin typeface="Century Gothic"/>
+            </a:endParaRPr>
+          </a:p>
+          <a:p>
             <a:pPr>
               <a:lnSpc>
                 <a:spcPct val="100000"/>
               </a:lnSpc>
               <a:spcBef>
-                <a:spcPts val="400"/>
+                <a:spcPts val="200"/>
               </a:spcBef>
               <a:buClr>
                 <a:srgbClr val="0064C8"/>
               </a:buClr>
+              <a:buFont typeface="Wingdings" panose="05000000000000000000" pitchFamily="2" charset="2"/>
+              <a:buChar char="§"/>
             </a:pPr>
             <a:r>
-              <a:rPr lang="en-US" sz="2000" spc="-1" dirty="0">
+              <a:rPr lang="en-US" sz="1800" spc="-1" dirty="0">
                 <a:solidFill>
                   <a:srgbClr val="000000"/>
                 </a:solidFill>
@@ -23981,14 +24323,37 @@
                 <a:spcPct val="100000"/>
               </a:lnSpc>
               <a:spcBef>
-                <a:spcPts val="400"/>
+                <a:spcPts val="200"/>
               </a:spcBef>
               <a:buClr>
                 <a:srgbClr val="0064C8"/>
               </a:buClr>
+              <a:buFont typeface="Wingdings" panose="05000000000000000000" pitchFamily="2" charset="2"/>
+              <a:buChar char="§"/>
+            </a:pPr>
+            <a:endParaRPr lang="en-US" sz="1800" spc="-1" dirty="0">
+              <a:solidFill>
+                <a:srgbClr val="000000"/>
+              </a:solidFill>
+              <a:latin typeface="Century Gothic"/>
+            </a:endParaRPr>
+          </a:p>
+          <a:p>
+            <a:pPr>
+              <a:lnSpc>
+                <a:spcPct val="100000"/>
+              </a:lnSpc>
+              <a:spcBef>
+                <a:spcPts val="200"/>
+              </a:spcBef>
+              <a:buClr>
+                <a:srgbClr val="0064C8"/>
+              </a:buClr>
+              <a:buFont typeface="Wingdings" panose="05000000000000000000" pitchFamily="2" charset="2"/>
+              <a:buChar char="§"/>
             </a:pPr>
             <a:r>
-              <a:rPr lang="en-US" sz="2000" spc="-1" dirty="0">
+              <a:rPr lang="en-US" sz="1800" spc="-1" dirty="0">
                 <a:solidFill>
                   <a:srgbClr val="000000"/>
                 </a:solidFill>
@@ -24003,14 +24368,37 @@
                 <a:spcPct val="100000"/>
               </a:lnSpc>
               <a:spcBef>
-                <a:spcPts val="400"/>
+                <a:spcPts val="200"/>
               </a:spcBef>
               <a:buClr>
                 <a:srgbClr val="0064C8"/>
               </a:buClr>
+              <a:buFont typeface="Wingdings" panose="05000000000000000000" pitchFamily="2" charset="2"/>
+              <a:buChar char="§"/>
+            </a:pPr>
+            <a:endParaRPr lang="en-US" sz="1800" spc="-1" dirty="0">
+              <a:solidFill>
+                <a:srgbClr val="000000"/>
+              </a:solidFill>
+              <a:latin typeface="Century Gothic"/>
+            </a:endParaRPr>
+          </a:p>
+          <a:p>
+            <a:pPr>
+              <a:lnSpc>
+                <a:spcPct val="100000"/>
+              </a:lnSpc>
+              <a:spcBef>
+                <a:spcPts val="200"/>
+              </a:spcBef>
+              <a:buClr>
+                <a:srgbClr val="0064C8"/>
+              </a:buClr>
+              <a:buFont typeface="Wingdings" panose="05000000000000000000" pitchFamily="2" charset="2"/>
+              <a:buChar char="§"/>
             </a:pPr>
             <a:r>
-              <a:rPr lang="en-US" sz="2000" spc="-1" dirty="0">
+              <a:rPr lang="en-US" sz="1800" spc="-1" dirty="0">
                 <a:solidFill>
                   <a:srgbClr val="000000"/>
                 </a:solidFill>
@@ -24766,8 +25154,8 @@
         </p:nvSpPr>
         <p:spPr>
           <a:xfrm>
-            <a:off x="380880" y="1371598"/>
-            <a:ext cx="8109070" cy="4559301"/>
+            <a:off x="380879" y="1371598"/>
+            <a:ext cx="8246285" cy="4559301"/>
           </a:xfrm>
           <a:prstGeom prst="rect">
             <a:avLst/>
@@ -25015,6 +25403,51 @@
             </a:r>
           </a:p>
           <a:p>
+            <a:pPr>
+              <a:lnSpc>
+                <a:spcPct val="100000"/>
+              </a:lnSpc>
+              <a:spcBef>
+                <a:spcPts val="400"/>
+              </a:spcBef>
+              <a:buClr>
+                <a:srgbClr val="0064C8"/>
+              </a:buClr>
+              <a:buFont typeface="Wingdings" panose="05000000000000000000" pitchFamily="2" charset="2"/>
+              <a:buChar char="§"/>
+            </a:pPr>
+            <a:endParaRPr lang="en-US" sz="2000" spc="-1" dirty="0">
+              <a:solidFill>
+                <a:srgbClr val="000000"/>
+              </a:solidFill>
+              <a:latin typeface="Century Gothic"/>
+            </a:endParaRPr>
+          </a:p>
+          <a:p>
+            <a:pPr>
+              <a:lnSpc>
+                <a:spcPct val="100000"/>
+              </a:lnSpc>
+              <a:spcBef>
+                <a:spcPts val="400"/>
+              </a:spcBef>
+              <a:buClr>
+                <a:srgbClr val="0064C8"/>
+              </a:buClr>
+              <a:buFont typeface="Wingdings" panose="05000000000000000000" pitchFamily="2" charset="2"/>
+              <a:buChar char="§"/>
+            </a:pPr>
+            <a:r>
+              <a:rPr lang="en-US" sz="2000" spc="-1" dirty="0">
+                <a:solidFill>
+                  <a:srgbClr val="000000"/>
+                </a:solidFill>
+                <a:latin typeface="Century Gothic"/>
+              </a:rPr>
+              <a:t>Use the system prompt to nudge the LLM to desirable responses</a:t>
+            </a:r>
+          </a:p>
+          <a:p>
             <a:pPr marL="0" indent="0">
               <a:lnSpc>
                 <a:spcPct val="100000"/>
@@ -25057,6 +25490,129 @@
               </a:rPr>
               <a:t>Proper design of docstrings and documentation is essential</a:t>
             </a:r>
+          </a:p>
+          <a:p>
+            <a:pPr>
+              <a:lnSpc>
+                <a:spcPct val="100000"/>
+              </a:lnSpc>
+              <a:spcBef>
+                <a:spcPts val="400"/>
+              </a:spcBef>
+              <a:buClr>
+                <a:srgbClr val="0064C8"/>
+              </a:buClr>
+              <a:buFont typeface="Wingdings" panose="05000000000000000000" pitchFamily="2" charset="2"/>
+              <a:buChar char="§"/>
+            </a:pPr>
+            <a:endParaRPr lang="en-US" sz="2000" spc="-1" dirty="0">
+              <a:solidFill>
+                <a:srgbClr val="000000"/>
+              </a:solidFill>
+              <a:latin typeface="Century Gothic"/>
+            </a:endParaRPr>
+          </a:p>
+          <a:p>
+            <a:pPr>
+              <a:lnSpc>
+                <a:spcPct val="100000"/>
+              </a:lnSpc>
+              <a:spcBef>
+                <a:spcPts val="400"/>
+              </a:spcBef>
+              <a:buClr>
+                <a:srgbClr val="0064C8"/>
+              </a:buClr>
+              <a:buFont typeface="Wingdings" panose="05000000000000000000" pitchFamily="2" charset="2"/>
+              <a:buChar char="§"/>
+            </a:pPr>
+            <a:r>
+              <a:rPr lang="en-US" sz="2000" spc="-1" dirty="0">
+                <a:solidFill>
+                  <a:srgbClr val="000000"/>
+                </a:solidFill>
+                <a:latin typeface="Century Gothic"/>
+              </a:rPr>
+              <a:t>Using code assistants (</a:t>
+            </a:r>
+            <a:r>
+              <a:rPr lang="en-US" sz="2000" spc="-1" dirty="0" err="1">
+                <a:solidFill>
+                  <a:srgbClr val="000000"/>
+                </a:solidFill>
+                <a:latin typeface="Century Gothic"/>
+              </a:rPr>
+              <a:t>eg.</a:t>
+            </a:r>
+            <a:r>
+              <a:rPr lang="en-US" sz="2000" spc="-1" dirty="0">
+                <a:solidFill>
+                  <a:srgbClr val="000000"/>
+                </a:solidFill>
+                <a:latin typeface="Century Gothic"/>
+              </a:rPr>
+              <a:t> Claude code, </a:t>
+            </a:r>
+            <a:r>
+              <a:rPr lang="en-US" sz="2000" spc="-1" dirty="0" err="1">
+                <a:solidFill>
+                  <a:srgbClr val="000000"/>
+                </a:solidFill>
+                <a:latin typeface="Century Gothic"/>
+              </a:rPr>
+              <a:t>Github</a:t>
+            </a:r>
+            <a:r>
+              <a:rPr lang="en-US" sz="2000" spc="-1" dirty="0">
+                <a:solidFill>
+                  <a:srgbClr val="000000"/>
+                </a:solidFill>
+                <a:latin typeface="Century Gothic"/>
+              </a:rPr>
+              <a:t> CoPilot) makes the large repositories manageable</a:t>
+            </a:r>
+          </a:p>
+          <a:p>
+            <a:pPr>
+              <a:lnSpc>
+                <a:spcPct val="100000"/>
+              </a:lnSpc>
+              <a:spcBef>
+                <a:spcPts val="400"/>
+              </a:spcBef>
+              <a:buClr>
+                <a:srgbClr val="0064C8"/>
+              </a:buClr>
+              <a:buFont typeface="Wingdings" panose="05000000000000000000" pitchFamily="2" charset="2"/>
+              <a:buChar char="§"/>
+            </a:pPr>
+            <a:endParaRPr lang="en-US" sz="2000" spc="-1" dirty="0">
+              <a:solidFill>
+                <a:srgbClr val="000000"/>
+              </a:solidFill>
+              <a:latin typeface="Century Gothic"/>
+            </a:endParaRPr>
+          </a:p>
+          <a:p>
+            <a:pPr>
+              <a:lnSpc>
+                <a:spcPct val="100000"/>
+              </a:lnSpc>
+              <a:spcBef>
+                <a:spcPts val="400"/>
+              </a:spcBef>
+              <a:buClr>
+                <a:srgbClr val="0064C8"/>
+              </a:buClr>
+              <a:buFont typeface="Wingdings" panose="05000000000000000000" pitchFamily="2" charset="2"/>
+              <a:buChar char="§"/>
+            </a:pPr>
+            <a:endParaRPr lang="en-US" sz="2000" spc="-1" dirty="0">
+              <a:solidFill>
+                <a:srgbClr val="000000"/>
+              </a:solidFill>
+              <a:latin typeface="Century Gothic"/>
+            </a:endParaRPr>
           </a:p>
           <a:p>
             <a:pPr>
@@ -30044,9 +30600,9 @@
               <a:buNone/>
             </a:pPr>
             <a:r>
-              <a:rPr lang="en-US" sz="1800" b="1" spc="-1" dirty="0">
+              <a:rPr lang="en-US" sz="1800" spc="-1" dirty="0">
                 <a:solidFill>
-                  <a:srgbClr val="000000"/>
+                  <a:srgbClr val="0064C8"/>
                 </a:solidFill>
                 <a:latin typeface="Century Gothic"/>
               </a:rPr>
@@ -30064,6 +30620,8 @@
               <a:buClr>
                 <a:srgbClr val="0064C8"/>
               </a:buClr>
+              <a:buFont typeface="Wingdings" panose="05000000000000000000" pitchFamily="2" charset="2"/>
+              <a:buChar char="§"/>
             </a:pPr>
             <a:r>
               <a:rPr lang="en-US" sz="1400" spc="-1" dirty="0">
@@ -30075,18 +30633,18 @@
               <a:t>LM Studio + Open Source LLM  (</a:t>
             </a:r>
             <a:r>
-              <a:rPr lang="en-US" sz="1400" b="1" spc="-1" dirty="0" err="1">
+              <a:rPr lang="en-US" sz="1400" spc="-1" dirty="0" err="1">
                 <a:solidFill>
-                  <a:srgbClr val="000000"/>
+                  <a:srgbClr val="0064C8"/>
                 </a:solidFill>
                 <a:latin typeface="Century Gothic"/>
               </a:rPr>
               <a:t>Qwen</a:t>
             </a:r>
             <a:r>
-              <a:rPr lang="en-US" sz="1400" b="1" spc="-1" dirty="0">
+              <a:rPr lang="en-US" sz="1400" spc="-1" dirty="0">
                 <a:solidFill>
-                  <a:srgbClr val="000000"/>
+                  <a:srgbClr val="0064C8"/>
                 </a:solidFill>
                 <a:latin typeface="Century Gothic"/>
               </a:rPr>
@@ -30116,9 +30674,9 @@
               <a:buNone/>
             </a:pPr>
             <a:r>
-              <a:rPr lang="en-US" sz="1800" b="1" spc="-1" dirty="0">
+              <a:rPr lang="en-US" sz="1800" spc="-1" dirty="0">
                 <a:solidFill>
-                  <a:srgbClr val="000000"/>
+                  <a:srgbClr val="0064C8"/>
                 </a:solidFill>
                 <a:latin typeface="Century Gothic"/>
               </a:rPr>
@@ -30136,6 +30694,8 @@
               <a:buClr>
                 <a:srgbClr val="0064C8"/>
               </a:buClr>
+              <a:buFont typeface="Wingdings" panose="05000000000000000000" pitchFamily="2" charset="2"/>
+              <a:buChar char="§"/>
             </a:pPr>
             <a:r>
               <a:rPr lang="en-US" sz="1400" spc="-1" dirty="0">
@@ -30158,6 +30718,8 @@
               <a:buClr>
                 <a:srgbClr val="0064C8"/>
               </a:buClr>
+              <a:buFont typeface="Wingdings" panose="05000000000000000000" pitchFamily="2" charset="2"/>
+              <a:buChar char="§"/>
             </a:pPr>
             <a:r>
               <a:rPr lang="en-US" sz="1400" spc="-1" dirty="0">
@@ -30183,9 +30745,9 @@
               <a:buNone/>
             </a:pPr>
             <a:r>
-              <a:rPr lang="en-US" sz="1800" b="1" spc="-1" dirty="0">
+              <a:rPr lang="en-US" sz="1800" spc="-1" dirty="0">
                 <a:solidFill>
-                  <a:srgbClr val="000000"/>
+                  <a:srgbClr val="0064C8"/>
                 </a:solidFill>
                 <a:latin typeface="Century Gothic"/>
               </a:rPr>
@@ -30203,6 +30765,8 @@
               <a:buClr>
                 <a:srgbClr val="0064C8"/>
               </a:buClr>
+              <a:buFont typeface="Wingdings" panose="05000000000000000000" pitchFamily="2" charset="2"/>
+              <a:buChar char="§"/>
             </a:pPr>
             <a:r>
               <a:rPr lang="en-US" sz="1400" spc="-1" dirty="0">
@@ -30225,6 +30789,8 @@
               <a:buClr>
                 <a:srgbClr val="0064C8"/>
               </a:buClr>
+              <a:buFont typeface="Wingdings" panose="05000000000000000000" pitchFamily="2" charset="2"/>
+              <a:buChar char="§"/>
             </a:pPr>
             <a:r>
               <a:rPr lang="en-US" sz="1400" spc="-1" dirty="0">
@@ -30250,9 +30816,9 @@
               <a:buNone/>
             </a:pPr>
             <a:r>
-              <a:rPr lang="en-US" sz="1800" b="1" spc="-1" dirty="0">
+              <a:rPr lang="en-US" sz="1800" spc="-1" dirty="0">
                 <a:solidFill>
-                  <a:srgbClr val="000000"/>
+                  <a:srgbClr val="0064C8"/>
                 </a:solidFill>
                 <a:latin typeface="Century Gothic"/>
               </a:rPr>
@@ -30270,6 +30836,8 @@
               <a:buClr>
                 <a:srgbClr val="0064C8"/>
               </a:buClr>
+              <a:buFont typeface="Wingdings" panose="05000000000000000000" pitchFamily="2" charset="2"/>
+              <a:buChar char="§"/>
             </a:pPr>
             <a:r>
               <a:rPr lang="en-US" sz="1400" spc="-1" dirty="0">
@@ -30292,6 +30860,8 @@
               <a:buClr>
                 <a:srgbClr val="0064C8"/>
               </a:buClr>
+              <a:buFont typeface="Wingdings" panose="05000000000000000000" pitchFamily="2" charset="2"/>
+              <a:buChar char="§"/>
             </a:pPr>
             <a:r>
               <a:rPr lang="en-US" sz="1400" spc="-1" dirty="0">
@@ -30317,18 +30887,18 @@
               <a:buNone/>
             </a:pPr>
             <a:r>
-              <a:rPr lang="en-US" sz="1800" b="1" spc="-1" dirty="0" err="1">
+              <a:rPr lang="en-US" sz="1800" spc="-1" dirty="0" err="1">
                 <a:solidFill>
-                  <a:srgbClr val="000000"/>
+                  <a:srgbClr val="0064C8"/>
                 </a:solidFill>
                 <a:latin typeface="Century Gothic"/>
               </a:rPr>
               <a:t>Explainability</a:t>
             </a:r>
             <a:r>
-              <a:rPr lang="en-US" sz="1800" b="1" spc="-1" dirty="0">
+              <a:rPr lang="en-US" sz="1800" spc="-1" dirty="0">
                 <a:solidFill>
-                  <a:srgbClr val="000000"/>
+                  <a:srgbClr val="0064C8"/>
                 </a:solidFill>
                 <a:latin typeface="Century Gothic"/>
               </a:rPr>
@@ -30346,6 +30916,8 @@
               <a:buClr>
                 <a:srgbClr val="0064C8"/>
               </a:buClr>
+              <a:buFont typeface="Wingdings" panose="05000000000000000000" pitchFamily="2" charset="2"/>
+              <a:buChar char="§"/>
             </a:pPr>
             <a:r>
               <a:rPr lang="en-US" sz="1400" spc="-1" dirty="0">
@@ -30386,6 +30958,8 @@
               <a:buClr>
                 <a:srgbClr val="0064C8"/>
               </a:buClr>
+              <a:buFont typeface="Wingdings" panose="05000000000000000000" pitchFamily="2" charset="2"/>
+              <a:buChar char="§"/>
             </a:pPr>
             <a:r>
               <a:rPr lang="en-US" sz="1400" spc="-1" dirty="0" err="1">
@@ -30414,6 +30988,8 @@
               <a:buClr>
                 <a:srgbClr val="0064C8"/>
               </a:buClr>
+              <a:buFont typeface="Wingdings" panose="05000000000000000000" pitchFamily="2" charset="2"/>
+              <a:buChar char="§"/>
             </a:pPr>
             <a:r>
               <a:rPr lang="en-US" sz="1400" spc="-1" dirty="0">
@@ -30868,8 +31444,8 @@
         </p:nvSpPr>
         <p:spPr>
           <a:xfrm>
-            <a:off x="380879" y="1355697"/>
-            <a:ext cx="5248644" cy="4643307"/>
+            <a:off x="380878" y="1355697"/>
+            <a:ext cx="7920283" cy="4643307"/>
           </a:xfrm>
           <a:prstGeom prst="rect">
             <a:avLst/>
@@ -31062,20 +31638,32 @@
               <a:buChar char="§"/>
             </a:pPr>
             <a:r>
+              <a:rPr lang="en-US" sz="1800" spc="-1" dirty="0">
+                <a:solidFill>
+                  <a:srgbClr val="0064C8"/>
+                </a:solidFill>
+                <a:latin typeface="Century Gothic"/>
+              </a:rPr>
+              <a:t>Prompt 1</a:t>
+            </a:r>
+            <a:r>
               <a:rPr lang="en-US" sz="1800" b="1" spc="-1" dirty="0">
+                <a:solidFill>
+                  <a:srgbClr val="0064C8"/>
+                </a:solidFill>
+                <a:latin typeface="Century Gothic"/>
+              </a:rPr>
+              <a:t>: </a:t>
+            </a:r>
+            <a:r>
+              <a:rPr lang="en-US" sz="1800" spc="-1" dirty="0">
                 <a:solidFill>
                   <a:srgbClr val="000000"/>
                 </a:solidFill>
                 <a:latin typeface="Century Gothic"/>
               </a:rPr>
-              <a:t>Prompt 1 </a:t>
+              <a:t>Showcase that the AI agent is able to use tools to reproduce known results and correctly put them into the chemical context</a:t>
             </a:r>
-            <a:endParaRPr lang="en-US" sz="1400" b="1" spc="-1" dirty="0">
-              <a:solidFill>
-                <a:srgbClr val="000000"/>
-              </a:solidFill>
-              <a:latin typeface="Century Gothic"/>
-            </a:endParaRPr>
           </a:p>
           <a:p>
             <a:pPr lvl="1">
@@ -31113,14 +31701,29 @@
               <a:buChar char="§"/>
             </a:pPr>
             <a:r>
-              <a:rPr lang="en-US" sz="1800" b="1" spc="-1" dirty="0">
+              <a:rPr lang="en-US" sz="1800" spc="-1" dirty="0">
+                <a:solidFill>
+                  <a:srgbClr val="0064C8"/>
+                </a:solidFill>
+                <a:latin typeface="Century Gothic"/>
+              </a:rPr>
+              <a:t>Prompt 2: </a:t>
+            </a:r>
+            <a:r>
+              <a:rPr lang="en-US" sz="1800" spc="-1" dirty="0">
                 <a:solidFill>
                   <a:srgbClr val="000000"/>
                 </a:solidFill>
                 <a:latin typeface="Century Gothic"/>
               </a:rPr>
-              <a:t>Prompt 2 </a:t>
+              <a:t>Demonstrate the ability of the agent to provide and compare explanations derived from different XAI methods</a:t>
             </a:r>
+            <a:endParaRPr lang="en-US" sz="1800" b="1" spc="-1" dirty="0">
+              <a:solidFill>
+                <a:srgbClr val="000000"/>
+              </a:solidFill>
+              <a:latin typeface="Century Gothic"/>
+            </a:endParaRPr>
           </a:p>
           <a:p>
             <a:pPr>
@@ -31158,14 +31761,134 @@
               <a:buChar char="§"/>
             </a:pPr>
             <a:r>
-              <a:rPr lang="en-US" sz="1800" b="1" spc="-1" dirty="0">
+              <a:rPr lang="en-US" sz="1800" spc="-1" dirty="0">
+                <a:solidFill>
+                  <a:srgbClr val="0064C8"/>
+                </a:solidFill>
+                <a:latin typeface="Century Gothic"/>
+              </a:rPr>
+              <a:t>Prompt 3: </a:t>
+            </a:r>
+            <a:r>
+              <a:rPr lang="en-US" sz="1800" spc="-1" dirty="0">
                 <a:solidFill>
                   <a:srgbClr val="000000"/>
                 </a:solidFill>
                 <a:latin typeface="Century Gothic"/>
               </a:rPr>
-              <a:t>Prompt 3</a:t>
+              <a:t>Display the capacity of the agent to compare and interpret explanations for different predictions</a:t>
             </a:r>
+          </a:p>
+          <a:p>
+            <a:pPr>
+              <a:lnSpc>
+                <a:spcPct val="100000"/>
+              </a:lnSpc>
+              <a:spcBef>
+                <a:spcPts val="400"/>
+              </a:spcBef>
+              <a:buClr>
+                <a:srgbClr val="0064C8"/>
+              </a:buClr>
+              <a:buFont typeface="Wingdings" panose="05000000000000000000" pitchFamily="2" charset="2"/>
+              <a:buChar char="§"/>
+            </a:pPr>
+            <a:endParaRPr lang="en-US" sz="1800" spc="-1" dirty="0">
+              <a:solidFill>
+                <a:srgbClr val="000000"/>
+              </a:solidFill>
+              <a:latin typeface="Century Gothic"/>
+            </a:endParaRPr>
+          </a:p>
+          <a:p>
+            <a:pPr>
+              <a:lnSpc>
+                <a:spcPct val="100000"/>
+              </a:lnSpc>
+              <a:spcBef>
+                <a:spcPts val="400"/>
+              </a:spcBef>
+              <a:buClr>
+                <a:srgbClr val="0064C8"/>
+              </a:buClr>
+              <a:buFont typeface="Wingdings" panose="05000000000000000000" pitchFamily="2" charset="2"/>
+              <a:buChar char="§"/>
+            </a:pPr>
+            <a:r>
+              <a:rPr lang="en-US" sz="1800" spc="-1" dirty="0">
+                <a:solidFill>
+                  <a:srgbClr val="0064C8"/>
+                </a:solidFill>
+                <a:latin typeface="Century Gothic"/>
+              </a:rPr>
+              <a:t>Prompt 4: </a:t>
+            </a:r>
+            <a:r>
+              <a:rPr lang="en-US" sz="1800" spc="-1" dirty="0">
+                <a:solidFill>
+                  <a:srgbClr val="000000"/>
+                </a:solidFill>
+                <a:latin typeface="Century Gothic"/>
+              </a:rPr>
+              <a:t>Determine whether agent is capable of analyzing and comparing the learning characteristics of distinct ML-models</a:t>
+            </a:r>
+          </a:p>
+          <a:p>
+            <a:pPr>
+              <a:lnSpc>
+                <a:spcPct val="100000"/>
+              </a:lnSpc>
+              <a:spcBef>
+                <a:spcPts val="400"/>
+              </a:spcBef>
+              <a:buClr>
+                <a:srgbClr val="0064C8"/>
+              </a:buClr>
+              <a:buFont typeface="Wingdings" panose="05000000000000000000" pitchFamily="2" charset="2"/>
+              <a:buChar char="§"/>
+            </a:pPr>
+            <a:endParaRPr lang="en-US" sz="1800" spc="-1" dirty="0">
+              <a:solidFill>
+                <a:srgbClr val="000000"/>
+              </a:solidFill>
+              <a:latin typeface="Century Gothic"/>
+            </a:endParaRPr>
+          </a:p>
+          <a:p>
+            <a:pPr>
+              <a:lnSpc>
+                <a:spcPct val="100000"/>
+              </a:lnSpc>
+              <a:spcBef>
+                <a:spcPts val="400"/>
+              </a:spcBef>
+              <a:buClr>
+                <a:srgbClr val="0064C8"/>
+              </a:buClr>
+              <a:buFont typeface="Wingdings" panose="05000000000000000000" pitchFamily="2" charset="2"/>
+              <a:buChar char="§"/>
+            </a:pPr>
+            <a:endParaRPr lang="en-US" sz="1800" spc="-1" dirty="0">
+              <a:solidFill>
+                <a:srgbClr val="000000"/>
+              </a:solidFill>
+              <a:latin typeface="Century Gothic"/>
+            </a:endParaRPr>
+          </a:p>
+          <a:p>
+            <a:pPr>
+              <a:lnSpc>
+                <a:spcPct val="100000"/>
+              </a:lnSpc>
+              <a:spcBef>
+                <a:spcPts val="400"/>
+              </a:spcBef>
+              <a:buClr>
+                <a:srgbClr val="0064C8"/>
+              </a:buClr>
+              <a:buFont typeface="Wingdings" panose="05000000000000000000" pitchFamily="2" charset="2"/>
+              <a:buChar char="§"/>
+            </a:pPr>
             <a:endParaRPr lang="en-US" sz="1400" spc="-1" dirty="0">
               <a:solidFill>
                 <a:srgbClr val="000000"/>
@@ -31582,7 +32305,7 @@
                 </a:solidFill>
                 <a:latin typeface="Century Gothic"/>
               </a:rPr>
-              <a:t>Showcase that the AI agent is able to use tools correctly to reproduce known results</a:t>
+              <a:t>Showcase that the AI agent is able to use tools to reproduce known results and correctly put them into the chemical context</a:t>
             </a:r>
           </a:p>
           <a:p>
@@ -31607,7 +32330,7 @@
                 </a:solidFill>
                 <a:latin typeface="Century Gothic"/>
               </a:rPr>
-              <a:t>Can the agent derive verifiable, correct chemical insight from model explanations?</a:t>
+              <a:t>Can the reproduce the Anchor PI3K-study and provide correct chemical insight from model explanations?</a:t>
             </a:r>
           </a:p>
           <a:p>
@@ -32964,7 +33687,7 @@
                 </a:solidFill>
                 <a:latin typeface="Century Gothic"/>
               </a:rPr>
-              <a:t>Demonstrate the ability of the agent to provide chemically intuitive explanations for model predictions </a:t>
+              <a:t>Demonstrate the ability of the agent to provide and compare explanations derived from different XAI methods</a:t>
             </a:r>
           </a:p>
           <a:p>
@@ -32989,7 +33712,75 @@
                 </a:solidFill>
                 <a:latin typeface="Century Gothic"/>
               </a:rPr>
-              <a:t>Can the agent correctly interpret and compare explanations derived from different XAI methods?</a:t>
+              <a:t>Can the agent correctly interpret and compare explanations:</a:t>
+            </a:r>
+          </a:p>
+          <a:p>
+            <a:pPr lvl="1">
+              <a:lnSpc>
+                <a:spcPct val="100000"/>
+              </a:lnSpc>
+              <a:spcBef>
+                <a:spcPts val="400"/>
+              </a:spcBef>
+              <a:spcAft>
+                <a:spcPts val="601"/>
+              </a:spcAft>
+              <a:buClr>
+                <a:srgbClr val="0064C8"/>
+              </a:buClr>
+            </a:pPr>
+            <a:r>
+              <a:rPr lang="en-US" sz="1600" spc="-1" dirty="0" err="1">
+                <a:solidFill>
+                  <a:srgbClr val="000000"/>
+                </a:solidFill>
+                <a:latin typeface="Century Gothic"/>
+              </a:rPr>
+              <a:t>MolAnchor</a:t>
+            </a:r>
+            <a:r>
+              <a:rPr lang="en-US" sz="1600" spc="-1" dirty="0">
+                <a:solidFill>
+                  <a:srgbClr val="000000"/>
+                </a:solidFill>
+                <a:latin typeface="Century Gothic"/>
+              </a:rPr>
+              <a:t> vs SHAP </a:t>
+            </a:r>
+          </a:p>
+          <a:p>
+            <a:pPr lvl="1">
+              <a:lnSpc>
+                <a:spcPct val="100000"/>
+              </a:lnSpc>
+              <a:spcBef>
+                <a:spcPts val="400"/>
+              </a:spcBef>
+              <a:spcAft>
+                <a:spcPts val="601"/>
+              </a:spcAft>
+              <a:buClr>
+                <a:srgbClr val="0064C8"/>
+              </a:buClr>
+            </a:pPr>
+            <a:r>
+              <a:rPr lang="en-US" sz="1600" spc="-1" dirty="0" err="1">
+                <a:solidFill>
+                  <a:srgbClr val="000000"/>
+                </a:solidFill>
+                <a:latin typeface="Century Gothic"/>
+              </a:rPr>
+              <a:t>MolCE</a:t>
+            </a:r>
+            <a:r>
+              <a:rPr lang="en-US" sz="1600" spc="-1" dirty="0">
+                <a:solidFill>
+                  <a:srgbClr val="000000"/>
+                </a:solidFill>
+                <a:latin typeface="Century Gothic"/>
+              </a:rPr>
+              <a:t> vs Counterfactuals?</a:t>
             </a:r>
           </a:p>
           <a:p>

--- a/slides/AI_Agent_Explainability.pptx
+++ b/slides/AI_Agent_Explainability.pptx
@@ -24,18 +24,18 @@
     <p:sldId id="324" r:id="rId15"/>
     <p:sldId id="344" r:id="rId16"/>
     <p:sldId id="345" r:id="rId17"/>
-    <p:sldId id="320" r:id="rId18"/>
-    <p:sldId id="331" r:id="rId19"/>
-    <p:sldId id="332" r:id="rId20"/>
-    <p:sldId id="335" r:id="rId21"/>
-    <p:sldId id="341" r:id="rId22"/>
-    <p:sldId id="316" r:id="rId23"/>
-    <p:sldId id="303" r:id="rId24"/>
-    <p:sldId id="339" r:id="rId25"/>
-    <p:sldId id="326" r:id="rId26"/>
-    <p:sldId id="346" r:id="rId27"/>
-    <p:sldId id="329" r:id="rId28"/>
-    <p:sldId id="328" r:id="rId29"/>
+    <p:sldId id="328" r:id="rId18"/>
+    <p:sldId id="320" r:id="rId19"/>
+    <p:sldId id="331" r:id="rId20"/>
+    <p:sldId id="332" r:id="rId21"/>
+    <p:sldId id="335" r:id="rId22"/>
+    <p:sldId id="341" r:id="rId23"/>
+    <p:sldId id="316" r:id="rId24"/>
+    <p:sldId id="303" r:id="rId25"/>
+    <p:sldId id="339" r:id="rId26"/>
+    <p:sldId id="326" r:id="rId27"/>
+    <p:sldId id="346" r:id="rId28"/>
+    <p:sldId id="329" r:id="rId29"/>
     <p:sldId id="338" r:id="rId30"/>
     <p:sldId id="330" r:id="rId31"/>
     <p:sldId id="315" r:id="rId32"/>
@@ -151,45 +151,6 @@
 <file path=ppt/changesInfos/changesInfo1.xml><?xml version="1.0" encoding="utf-8"?>
 <pc:chgInfo xmlns:a="http://schemas.openxmlformats.org/drawingml/2006/main" xmlns:r="http://schemas.openxmlformats.org/officeDocument/2006/relationships" xmlns:ac="http://schemas.microsoft.com/office/drawing/2013/main/command" xmlns:pc="http://schemas.microsoft.com/office/powerpoint/2013/main/command">
   <pc:docChgLst>
-    <pc:chgData name="Tiago Janela" userId="ee1a79fe-c79c-4f34-9602-7f6f2f0482b3" providerId="ADAL" clId="{67D2C233-DF3C-4C6D-9040-D7553E3BCB8A}"/>
-    <pc:docChg chg="delSld modSld">
-      <pc:chgData name="Tiago Janela" userId="ee1a79fe-c79c-4f34-9602-7f6f2f0482b3" providerId="ADAL" clId="{67D2C233-DF3C-4C6D-9040-D7553E3BCB8A}" dt="2026-03-16T14:03:02.466" v="54" actId="20577"/>
-      <pc:docMkLst>
-        <pc:docMk/>
-      </pc:docMkLst>
-      <pc:sldChg chg="modSp mod">
-        <pc:chgData name="Tiago Janela" userId="ee1a79fe-c79c-4f34-9602-7f6f2f0482b3" providerId="ADAL" clId="{67D2C233-DF3C-4C6D-9040-D7553E3BCB8A}" dt="2026-03-16T14:03:02.466" v="54" actId="20577"/>
-        <pc:sldMkLst>
-          <pc:docMk/>
-          <pc:sldMk cId="829672710" sldId="297"/>
-        </pc:sldMkLst>
-        <pc:spChg chg="mod">
-          <ac:chgData name="Tiago Janela" userId="ee1a79fe-c79c-4f34-9602-7f6f2f0482b3" providerId="ADAL" clId="{67D2C233-DF3C-4C6D-9040-D7553E3BCB8A}" dt="2026-03-16T14:03:02.466" v="54" actId="20577"/>
-          <ac:spMkLst>
-            <pc:docMk/>
-            <pc:sldMk cId="829672710" sldId="297"/>
-            <ac:spMk id="156" creationId="{00000000-0000-0000-0000-000000000000}"/>
-          </ac:spMkLst>
-        </pc:spChg>
-      </pc:sldChg>
-      <pc:sldChg chg="modSp mod">
-        <pc:chgData name="Tiago Janela" userId="ee1a79fe-c79c-4f34-9602-7f6f2f0482b3" providerId="ADAL" clId="{67D2C233-DF3C-4C6D-9040-D7553E3BCB8A}" dt="2026-03-16T14:02:34.148" v="0" actId="20577"/>
-        <pc:sldMkLst>
-          <pc:docMk/>
-          <pc:sldMk cId="721732568" sldId="298"/>
-        </pc:sldMkLst>
-        <pc:spChg chg="mod">
-          <ac:chgData name="Tiago Janela" userId="ee1a79fe-c79c-4f34-9602-7f6f2f0482b3" providerId="ADAL" clId="{67D2C233-DF3C-4C6D-9040-D7553E3BCB8A}" dt="2026-03-16T14:02:34.148" v="0" actId="20577"/>
-          <ac:spMkLst>
-            <pc:docMk/>
-            <pc:sldMk cId="721732568" sldId="298"/>
-            <ac:spMk id="2" creationId="{870990D0-7AC5-46BA-6FC4-274F8E0A3ABE}"/>
-          </ac:spMkLst>
-        </pc:spChg>
-      </pc:sldChg>
-    </pc:docChg>
-  </pc:docChgLst>
-  <pc:docChgLst>
     <pc:chgData name="Tiago Janela" userId="ee1a79fe-c79c-4f34-9602-7f6f2f0482b3" providerId="ADAL" clId="{6BE67FA1-4A27-48B9-BA6A-E25A9786A9CC}"/>
     <pc:docChg chg="undo custSel addSld modSld sldOrd">
       <pc:chgData name="Tiago Janela" userId="ee1a79fe-c79c-4f34-9602-7f6f2f0482b3" providerId="ADAL" clId="{6BE67FA1-4A27-48B9-BA6A-E25A9786A9CC}" dt="2026-03-20T13:52:23.099" v="1063" actId="20577"/>
@@ -299,33 +260,9 @@
     </pc:docChg>
   </pc:docChgLst>
   <pc:docChgLst>
-    <pc:chgData name="Tiago Janela" userId="ee1a79fe-c79c-4f34-9602-7f6f2f0482b3" providerId="ADAL" clId="{A1A622BE-A8AD-47B7-8802-BAC61BCE5126}"/>
-    <pc:docChg chg="undo custSel modSld">
-      <pc:chgData name="Tiago Janela" userId="ee1a79fe-c79c-4f34-9602-7f6f2f0482b3" providerId="ADAL" clId="{A1A622BE-A8AD-47B7-8802-BAC61BCE5126}" dt="2026-04-02T12:40:40.607" v="50" actId="478"/>
-      <pc:docMkLst>
-        <pc:docMk/>
-      </pc:docMkLst>
-      <pc:sldChg chg="addSp delSp modSp mod">
-        <pc:chgData name="Tiago Janela" userId="ee1a79fe-c79c-4f34-9602-7f6f2f0482b3" providerId="ADAL" clId="{A1A622BE-A8AD-47B7-8802-BAC61BCE5126}" dt="2026-04-02T12:40:40.607" v="50" actId="478"/>
-        <pc:sldMkLst>
-          <pc:docMk/>
-          <pc:sldMk cId="1707478755" sldId="299"/>
-        </pc:sldMkLst>
-        <pc:graphicFrameChg chg="add del modGraphic">
-          <ac:chgData name="Tiago Janela" userId="ee1a79fe-c79c-4f34-9602-7f6f2f0482b3" providerId="ADAL" clId="{A1A622BE-A8AD-47B7-8802-BAC61BCE5126}" dt="2026-04-02T12:40:40.607" v="50" actId="478"/>
-          <ac:graphicFrameMkLst>
-            <pc:docMk/>
-            <pc:sldMk cId="1707478755" sldId="299"/>
-            <ac:graphicFrameMk id="4" creationId="{689F2044-8E26-DCF5-DE2D-9AD979C8C1EE}"/>
-          </ac:graphicFrameMkLst>
-        </pc:graphicFrameChg>
-      </pc:sldChg>
-    </pc:docChg>
-  </pc:docChgLst>
-  <pc:docChgLst>
     <pc:chgData name="Tiago Janela" userId="ee1a79fe-c79c-4f34-9602-7f6f2f0482b3" providerId="ADAL" clId="{D59BA079-2D81-42B2-9E2D-198C5F90099E}"/>
     <pc:docChg chg="undo custSel addSld delSld modSld sldOrd">
-      <pc:chgData name="Tiago Janela" userId="ee1a79fe-c79c-4f34-9602-7f6f2f0482b3" providerId="ADAL" clId="{D59BA079-2D81-42B2-9E2D-198C5F90099E}" dt="2026-05-06T10:37:22.554" v="1747" actId="47"/>
+      <pc:chgData name="Tiago Janela" userId="ee1a79fe-c79c-4f34-9602-7f6f2f0482b3" providerId="ADAL" clId="{D59BA079-2D81-42B2-9E2D-198C5F90099E}" dt="2026-05-07T08:11:01.075" v="1775" actId="1076"/>
       <pc:docMkLst>
         <pc:docMk/>
       </pc:docMkLst>
@@ -1920,12 +1857,108 @@
           </ac:picMkLst>
         </pc:picChg>
       </pc:sldChg>
-      <pc:sldChg chg="modSp mod ord modShow">
-        <pc:chgData name="Tiago Janela" userId="ee1a79fe-c79c-4f34-9602-7f6f2f0482b3" providerId="ADAL" clId="{D59BA079-2D81-42B2-9E2D-198C5F90099E}" dt="2026-05-05T13:48:30.307" v="736"/>
+      <pc:sldChg chg="addSp delSp modSp mod ord modShow">
+        <pc:chgData name="Tiago Janela" userId="ee1a79fe-c79c-4f34-9602-7f6f2f0482b3" providerId="ADAL" clId="{D59BA079-2D81-42B2-9E2D-198C5F90099E}" dt="2026-05-07T08:11:01.075" v="1775" actId="1076"/>
         <pc:sldMkLst>
           <pc:docMk/>
           <pc:sldMk cId="3779158166" sldId="328"/>
         </pc:sldMkLst>
+        <pc:spChg chg="add mod">
+          <ac:chgData name="Tiago Janela" userId="ee1a79fe-c79c-4f34-9602-7f6f2f0482b3" providerId="ADAL" clId="{D59BA079-2D81-42B2-9E2D-198C5F90099E}" dt="2026-05-07T08:10:08.481" v="1760"/>
+          <ac:spMkLst>
+            <pc:docMk/>
+            <pc:sldMk cId="3779158166" sldId="328"/>
+            <ac:spMk id="2" creationId="{95E8C4EE-94AB-272E-75DE-4F67F437051E}"/>
+          </ac:spMkLst>
+        </pc:spChg>
+        <pc:spChg chg="mod">
+          <ac:chgData name="Tiago Janela" userId="ee1a79fe-c79c-4f34-9602-7f6f2f0482b3" providerId="ADAL" clId="{D59BA079-2D81-42B2-9E2D-198C5F90099E}" dt="2026-05-07T08:10:17.968" v="1763"/>
+          <ac:spMkLst>
+            <pc:docMk/>
+            <pc:sldMk cId="3779158166" sldId="328"/>
+            <ac:spMk id="7" creationId="{E4213966-0D01-06E1-94C5-F6F95DC868B6}"/>
+          </ac:spMkLst>
+        </pc:spChg>
+        <pc:spChg chg="add del mod">
+          <ac:chgData name="Tiago Janela" userId="ee1a79fe-c79c-4f34-9602-7f6f2f0482b3" providerId="ADAL" clId="{D59BA079-2D81-42B2-9E2D-198C5F90099E}" dt="2026-05-07T08:10:01.934" v="1758" actId="165"/>
+          <ac:spMkLst>
+            <pc:docMk/>
+            <pc:sldMk cId="3779158166" sldId="328"/>
+            <ac:spMk id="22" creationId="{6A221BB0-FFBC-E869-34CB-BC594E5B0490}"/>
+          </ac:spMkLst>
+        </pc:spChg>
+        <pc:spChg chg="del">
+          <ac:chgData name="Tiago Janela" userId="ee1a79fe-c79c-4f34-9602-7f6f2f0482b3" providerId="ADAL" clId="{D59BA079-2D81-42B2-9E2D-198C5F90099E}" dt="2026-05-07T08:09:56.716" v="1757" actId="478"/>
+          <ac:spMkLst>
+            <pc:docMk/>
+            <pc:sldMk cId="3779158166" sldId="328"/>
+            <ac:spMk id="25" creationId="{8E792690-D447-952D-A5E7-853CC5FB33BB}"/>
+          </ac:spMkLst>
+        </pc:spChg>
+        <pc:spChg chg="mod topLvl">
+          <ac:chgData name="Tiago Janela" userId="ee1a79fe-c79c-4f34-9602-7f6f2f0482b3" providerId="ADAL" clId="{D59BA079-2D81-42B2-9E2D-198C5F90099E}" dt="2026-05-07T08:10:51.269" v="1774" actId="164"/>
+          <ac:spMkLst>
+            <pc:docMk/>
+            <pc:sldMk cId="3779158166" sldId="328"/>
+            <ac:spMk id="29" creationId="{50EF08DE-650D-84D8-23E2-83CD379C9565}"/>
+          </ac:spMkLst>
+        </pc:spChg>
+        <pc:spChg chg="mod topLvl">
+          <ac:chgData name="Tiago Janela" userId="ee1a79fe-c79c-4f34-9602-7f6f2f0482b3" providerId="ADAL" clId="{D59BA079-2D81-42B2-9E2D-198C5F90099E}" dt="2026-05-07T08:10:51.269" v="1774" actId="164"/>
+          <ac:spMkLst>
+            <pc:docMk/>
+            <pc:sldMk cId="3779158166" sldId="328"/>
+            <ac:spMk id="37" creationId="{A9B538AC-1716-FEE9-9303-C64FEB3A2571}"/>
+          </ac:spMkLst>
+        </pc:spChg>
+        <pc:spChg chg="mod topLvl">
+          <ac:chgData name="Tiago Janela" userId="ee1a79fe-c79c-4f34-9602-7f6f2f0482b3" providerId="ADAL" clId="{D59BA079-2D81-42B2-9E2D-198C5F90099E}" dt="2026-05-07T08:10:01.934" v="1758" actId="165"/>
+          <ac:spMkLst>
+            <pc:docMk/>
+            <pc:sldMk cId="3779158166" sldId="328"/>
+            <ac:spMk id="42" creationId="{666A450C-D0FA-4FC2-D779-9D8A47EBECE0}"/>
+          </ac:spMkLst>
+        </pc:spChg>
+        <pc:spChg chg="mod">
+          <ac:chgData name="Tiago Janela" userId="ee1a79fe-c79c-4f34-9602-7f6f2f0482b3" providerId="ADAL" clId="{D59BA079-2D81-42B2-9E2D-198C5F90099E}" dt="2026-05-07T08:10:35.900" v="1771" actId="1076"/>
+          <ac:spMkLst>
+            <pc:docMk/>
+            <pc:sldMk cId="3779158166" sldId="328"/>
+            <ac:spMk id="163" creationId="{57944F4B-F502-E7CC-8790-8737702BC6AC}"/>
+          </ac:spMkLst>
+        </pc:spChg>
+        <pc:grpChg chg="add mod">
+          <ac:chgData name="Tiago Janela" userId="ee1a79fe-c79c-4f34-9602-7f6f2f0482b3" providerId="ADAL" clId="{D59BA079-2D81-42B2-9E2D-198C5F90099E}" dt="2026-05-07T08:10:22.788" v="1764" actId="1076"/>
+          <ac:grpSpMkLst>
+            <pc:docMk/>
+            <pc:sldMk cId="3779158166" sldId="328"/>
+            <ac:grpSpMk id="4" creationId="{A2A206DE-ED6D-9661-53EF-57A36E7DD177}"/>
+          </ac:grpSpMkLst>
+        </pc:grpChg>
+        <pc:grpChg chg="add mod">
+          <ac:chgData name="Tiago Janela" userId="ee1a79fe-c79c-4f34-9602-7f6f2f0482b3" providerId="ADAL" clId="{D59BA079-2D81-42B2-9E2D-198C5F90099E}" dt="2026-05-07T08:11:01.075" v="1775" actId="1076"/>
+          <ac:grpSpMkLst>
+            <pc:docMk/>
+            <pc:sldMk cId="3779158166" sldId="328"/>
+            <ac:grpSpMk id="10" creationId="{FF8FBB9D-B2F5-6FE4-C05D-A4E2E4FE0028}"/>
+          </ac:grpSpMkLst>
+        </pc:grpChg>
+        <pc:grpChg chg="del mod topLvl">
+          <ac:chgData name="Tiago Janela" userId="ee1a79fe-c79c-4f34-9602-7f6f2f0482b3" providerId="ADAL" clId="{D59BA079-2D81-42B2-9E2D-198C5F90099E}" dt="2026-05-07T08:10:07.517" v="1759" actId="478"/>
+          <ac:grpSpMkLst>
+            <pc:docMk/>
+            <pc:sldMk cId="3779158166" sldId="328"/>
+            <ac:grpSpMk id="21" creationId="{851E801A-07D0-EC46-EC69-B1E3BDC4A0EE}"/>
+          </ac:grpSpMkLst>
+        </pc:grpChg>
+        <pc:grpChg chg="del">
+          <ac:chgData name="Tiago Janela" userId="ee1a79fe-c79c-4f34-9602-7f6f2f0482b3" providerId="ADAL" clId="{D59BA079-2D81-42B2-9E2D-198C5F90099E}" dt="2026-05-07T08:10:01.934" v="1758" actId="165"/>
+          <ac:grpSpMkLst>
+            <pc:docMk/>
+            <pc:sldMk cId="3779158166" sldId="328"/>
+            <ac:grpSpMk id="49" creationId="{C31E6F76-4E7C-1639-9021-CCC76ADA5882}"/>
+          </ac:grpSpMkLst>
+        </pc:grpChg>
         <pc:graphicFrameChg chg="modGraphic">
           <ac:chgData name="Tiago Janela" userId="ee1a79fe-c79c-4f34-9602-7f6f2f0482b3" providerId="ADAL" clId="{D59BA079-2D81-42B2-9E2D-198C5F90099E}" dt="2026-05-04T09:13:30.516" v="477" actId="2062"/>
           <ac:graphicFrameMkLst>
@@ -1934,6 +1967,54 @@
             <ac:graphicFrameMk id="6" creationId="{345F29B8-8023-4EF0-AFA3-5E9CFB608765}"/>
           </ac:graphicFrameMkLst>
         </pc:graphicFrameChg>
+        <pc:picChg chg="mod">
+          <ac:chgData name="Tiago Janela" userId="ee1a79fe-c79c-4f34-9602-7f6f2f0482b3" providerId="ADAL" clId="{D59BA079-2D81-42B2-9E2D-198C5F90099E}" dt="2026-05-07T08:10:51.269" v="1774" actId="164"/>
+          <ac:picMkLst>
+            <pc:docMk/>
+            <pc:sldMk cId="3779158166" sldId="328"/>
+            <ac:picMk id="3" creationId="{DDBAFE8B-CBB0-4161-AC30-9E26A3A7D934}"/>
+          </ac:picMkLst>
+        </pc:picChg>
+        <pc:picChg chg="mod">
+          <ac:chgData name="Tiago Janela" userId="ee1a79fe-c79c-4f34-9602-7f6f2f0482b3" providerId="ADAL" clId="{D59BA079-2D81-42B2-9E2D-198C5F90099E}" dt="2026-05-07T08:10:51.269" v="1774" actId="164"/>
+          <ac:picMkLst>
+            <pc:docMk/>
+            <pc:sldMk cId="3779158166" sldId="328"/>
+            <ac:picMk id="5" creationId="{61399038-507A-42DF-8F43-F758B7EB7F76}"/>
+          </ac:picMkLst>
+        </pc:picChg>
+        <pc:picChg chg="mod">
+          <ac:chgData name="Tiago Janela" userId="ee1a79fe-c79c-4f34-9602-7f6f2f0482b3" providerId="ADAL" clId="{D59BA079-2D81-42B2-9E2D-198C5F90099E}" dt="2026-05-07T08:10:17.968" v="1763"/>
+          <ac:picMkLst>
+            <pc:docMk/>
+            <pc:sldMk cId="3779158166" sldId="328"/>
+            <ac:picMk id="8" creationId="{C227361F-FE61-5B84-B7F7-3B238BDFB358}"/>
+          </ac:picMkLst>
+        </pc:picChg>
+        <pc:picChg chg="mod">
+          <ac:chgData name="Tiago Janela" userId="ee1a79fe-c79c-4f34-9602-7f6f2f0482b3" providerId="ADAL" clId="{D59BA079-2D81-42B2-9E2D-198C5F90099E}" dt="2026-05-07T08:10:17.968" v="1763"/>
+          <ac:picMkLst>
+            <pc:docMk/>
+            <pc:sldMk cId="3779158166" sldId="328"/>
+            <ac:picMk id="9" creationId="{9E4CCA29-0171-4C26-0786-216C913B3C44}"/>
+          </ac:picMkLst>
+        </pc:picChg>
+        <pc:picChg chg="mod">
+          <ac:chgData name="Tiago Janela" userId="ee1a79fe-c79c-4f34-9602-7f6f2f0482b3" providerId="ADAL" clId="{D59BA079-2D81-42B2-9E2D-198C5F90099E}" dt="2026-05-07T08:10:01.934" v="1758" actId="165"/>
+          <ac:picMkLst>
+            <pc:docMk/>
+            <pc:sldMk cId="3779158166" sldId="328"/>
+            <ac:picMk id="23" creationId="{0FAB87FB-66B8-682E-AC05-EA6B56D8F4FB}"/>
+          </ac:picMkLst>
+        </pc:picChg>
+        <pc:picChg chg="mod">
+          <ac:chgData name="Tiago Janela" userId="ee1a79fe-c79c-4f34-9602-7f6f2f0482b3" providerId="ADAL" clId="{D59BA079-2D81-42B2-9E2D-198C5F90099E}" dt="2026-05-07T08:10:01.934" v="1758" actId="165"/>
+          <ac:picMkLst>
+            <pc:docMk/>
+            <pc:sldMk cId="3779158166" sldId="328"/>
+            <ac:picMk id="24" creationId="{5AFB6878-0F86-C45A-E83E-50BAC05BCEF5}"/>
+          </ac:picMkLst>
+        </pc:picChg>
       </pc:sldChg>
       <pc:sldChg chg="modSp mod ord modShow">
         <pc:chgData name="Tiago Janela" userId="ee1a79fe-c79c-4f34-9602-7f6f2f0482b3" providerId="ADAL" clId="{D59BA079-2D81-42B2-9E2D-198C5F90099E}" dt="2026-05-05T13:48:30.307" v="736"/>
@@ -2848,7 +2929,7 @@
         </pc:picChg>
       </pc:sldChg>
       <pc:sldChg chg="addSp delSp modSp add mod">
-        <pc:chgData name="Tiago Janela" userId="ee1a79fe-c79c-4f34-9602-7f6f2f0482b3" providerId="ADAL" clId="{D59BA079-2D81-42B2-9E2D-198C5F90099E}" dt="2026-05-06T10:20:48.501" v="1680" actId="1076"/>
+        <pc:chgData name="Tiago Janela" userId="ee1a79fe-c79c-4f34-9602-7f6f2f0482b3" providerId="ADAL" clId="{D59BA079-2D81-42B2-9E2D-198C5F90099E}" dt="2026-05-07T08:10:14.719" v="1762"/>
         <pc:sldMkLst>
           <pc:docMk/>
           <pc:sldMk cId="1778208754" sldId="345"/>
@@ -2869,6 +2950,14 @@
             <ac:spMk id="5" creationId="{0966F418-389B-3DE0-2DB8-DCD52D2966D4}"/>
           </ac:spMkLst>
         </pc:spChg>
+        <pc:spChg chg="add mod">
+          <ac:chgData name="Tiago Janela" userId="ee1a79fe-c79c-4f34-9602-7f6f2f0482b3" providerId="ADAL" clId="{D59BA079-2D81-42B2-9E2D-198C5F90099E}" dt="2026-05-07T08:10:14.719" v="1762"/>
+          <ac:spMkLst>
+            <pc:docMk/>
+            <pc:sldMk cId="1778208754" sldId="345"/>
+            <ac:spMk id="6" creationId="{FEB24F01-6589-CB6E-B880-2E81933D7A13}"/>
+          </ac:spMkLst>
+        </pc:spChg>
         <pc:spChg chg="del">
           <ac:chgData name="Tiago Janela" userId="ee1a79fe-c79c-4f34-9602-7f6f2f0482b3" providerId="ADAL" clId="{D59BA079-2D81-42B2-9E2D-198C5F90099E}" dt="2026-05-06T07:49:51.226" v="1160" actId="478"/>
           <ac:spMkLst>
@@ -2885,12 +2974,28 @@
             <ac:spMk id="9" creationId="{BD0ED0A6-6E67-1235-3A14-5224423BB05F}"/>
           </ac:spMkLst>
         </pc:spChg>
+        <pc:spChg chg="mod">
+          <ac:chgData name="Tiago Janela" userId="ee1a79fe-c79c-4f34-9602-7f6f2f0482b3" providerId="ADAL" clId="{D59BA079-2D81-42B2-9E2D-198C5F90099E}" dt="2026-05-07T08:10:14.348" v="1761" actId="164"/>
+          <ac:spMkLst>
+            <pc:docMk/>
+            <pc:sldMk cId="1778208754" sldId="345"/>
+            <ac:spMk id="10" creationId="{AE37AA34-7138-EC42-1A14-6C807152AC02}"/>
+          </ac:spMkLst>
+        </pc:spChg>
         <pc:grpChg chg="add mod">
           <ac:chgData name="Tiago Janela" userId="ee1a79fe-c79c-4f34-9602-7f6f2f0482b3" providerId="ADAL" clId="{D59BA079-2D81-42B2-9E2D-198C5F90099E}" dt="2026-05-06T07:49:36.283" v="1156" actId="1076"/>
           <ac:grpSpMkLst>
             <pc:docMk/>
             <pc:sldMk cId="1778208754" sldId="345"/>
             <ac:grpSpMk id="2" creationId="{14CBD34C-FCBA-71F3-EBFC-305619AA32A9}"/>
+          </ac:grpSpMkLst>
+        </pc:grpChg>
+        <pc:grpChg chg="add mod">
+          <ac:chgData name="Tiago Janela" userId="ee1a79fe-c79c-4f34-9602-7f6f2f0482b3" providerId="ADAL" clId="{D59BA079-2D81-42B2-9E2D-198C5F90099E}" dt="2026-05-07T08:10:14.348" v="1761" actId="164"/>
+          <ac:grpSpMkLst>
+            <pc:docMk/>
+            <pc:sldMk cId="1778208754" sldId="345"/>
+            <ac:grpSpMk id="3" creationId="{192320F7-D550-7487-5338-B925B0B58B48}"/>
           </ac:grpSpMkLst>
         </pc:grpChg>
         <pc:grpChg chg="del">
@@ -2917,12 +3022,28 @@
             <ac:picMk id="10" creationId="{B1ABCECB-0B28-8C01-A1A3-34ACD666904F}"/>
           </ac:picMkLst>
         </pc:picChg>
+        <pc:picChg chg="mod">
+          <ac:chgData name="Tiago Janela" userId="ee1a79fe-c79c-4f34-9602-7f6f2f0482b3" providerId="ADAL" clId="{D59BA079-2D81-42B2-9E2D-198C5F90099E}" dt="2026-05-07T08:10:14.348" v="1761" actId="164"/>
+          <ac:picMkLst>
+            <pc:docMk/>
+            <pc:sldMk cId="1778208754" sldId="345"/>
+            <ac:picMk id="11" creationId="{8CB85F61-54D1-66ED-6C35-184AECE9ED3E}"/>
+          </ac:picMkLst>
+        </pc:picChg>
         <pc:picChg chg="add del mod">
           <ac:chgData name="Tiago Janela" userId="ee1a79fe-c79c-4f34-9602-7f6f2f0482b3" providerId="ADAL" clId="{D59BA079-2D81-42B2-9E2D-198C5F90099E}" dt="2026-05-06T10:20:48.501" v="1680" actId="1076"/>
           <ac:picMkLst>
             <pc:docMk/>
             <pc:sldMk cId="1778208754" sldId="345"/>
             <ac:picMk id="12" creationId="{E5C1888B-18DC-9173-AA54-2F8A390BD04F}"/>
+          </ac:picMkLst>
+        </pc:picChg>
+        <pc:picChg chg="mod">
+          <ac:chgData name="Tiago Janela" userId="ee1a79fe-c79c-4f34-9602-7f6f2f0482b3" providerId="ADAL" clId="{D59BA079-2D81-42B2-9E2D-198C5F90099E}" dt="2026-05-07T08:10:14.348" v="1761" actId="164"/>
+          <ac:picMkLst>
+            <pc:docMk/>
+            <pc:sldMk cId="1778208754" sldId="345"/>
+            <ac:picMk id="13" creationId="{A950904C-0A31-817E-63DB-B514142D7635}"/>
           </ac:picMkLst>
         </pc:picChg>
         <pc:picChg chg="add mod">
@@ -3275,6 +3396,69 @@
     </pc:docChg>
   </pc:docChgLst>
   <pc:docChgLst>
+    <pc:chgData name="Tiago Janela" userId="ee1a79fe-c79c-4f34-9602-7f6f2f0482b3" providerId="ADAL" clId="{A1A622BE-A8AD-47B7-8802-BAC61BCE5126}"/>
+    <pc:docChg chg="undo custSel modSld">
+      <pc:chgData name="Tiago Janela" userId="ee1a79fe-c79c-4f34-9602-7f6f2f0482b3" providerId="ADAL" clId="{A1A622BE-A8AD-47B7-8802-BAC61BCE5126}" dt="2026-04-02T12:40:40.607" v="50" actId="478"/>
+      <pc:docMkLst>
+        <pc:docMk/>
+      </pc:docMkLst>
+      <pc:sldChg chg="addSp delSp modSp mod">
+        <pc:chgData name="Tiago Janela" userId="ee1a79fe-c79c-4f34-9602-7f6f2f0482b3" providerId="ADAL" clId="{A1A622BE-A8AD-47B7-8802-BAC61BCE5126}" dt="2026-04-02T12:40:40.607" v="50" actId="478"/>
+        <pc:sldMkLst>
+          <pc:docMk/>
+          <pc:sldMk cId="1707478755" sldId="299"/>
+        </pc:sldMkLst>
+        <pc:graphicFrameChg chg="add del modGraphic">
+          <ac:chgData name="Tiago Janela" userId="ee1a79fe-c79c-4f34-9602-7f6f2f0482b3" providerId="ADAL" clId="{A1A622BE-A8AD-47B7-8802-BAC61BCE5126}" dt="2026-04-02T12:40:40.607" v="50" actId="478"/>
+          <ac:graphicFrameMkLst>
+            <pc:docMk/>
+            <pc:sldMk cId="1707478755" sldId="299"/>
+            <ac:graphicFrameMk id="4" creationId="{689F2044-8E26-DCF5-DE2D-9AD979C8C1EE}"/>
+          </ac:graphicFrameMkLst>
+        </pc:graphicFrameChg>
+      </pc:sldChg>
+    </pc:docChg>
+  </pc:docChgLst>
+  <pc:docChgLst>
+    <pc:chgData name="Tiago Janela" userId="ee1a79fe-c79c-4f34-9602-7f6f2f0482b3" providerId="ADAL" clId="{67D2C233-DF3C-4C6D-9040-D7553E3BCB8A}"/>
+    <pc:docChg chg="delSld modSld">
+      <pc:chgData name="Tiago Janela" userId="ee1a79fe-c79c-4f34-9602-7f6f2f0482b3" providerId="ADAL" clId="{67D2C233-DF3C-4C6D-9040-D7553E3BCB8A}" dt="2026-03-16T14:03:02.466" v="54" actId="20577"/>
+      <pc:docMkLst>
+        <pc:docMk/>
+      </pc:docMkLst>
+      <pc:sldChg chg="modSp mod">
+        <pc:chgData name="Tiago Janela" userId="ee1a79fe-c79c-4f34-9602-7f6f2f0482b3" providerId="ADAL" clId="{67D2C233-DF3C-4C6D-9040-D7553E3BCB8A}" dt="2026-03-16T14:03:02.466" v="54" actId="20577"/>
+        <pc:sldMkLst>
+          <pc:docMk/>
+          <pc:sldMk cId="829672710" sldId="297"/>
+        </pc:sldMkLst>
+        <pc:spChg chg="mod">
+          <ac:chgData name="Tiago Janela" userId="ee1a79fe-c79c-4f34-9602-7f6f2f0482b3" providerId="ADAL" clId="{67D2C233-DF3C-4C6D-9040-D7553E3BCB8A}" dt="2026-03-16T14:03:02.466" v="54" actId="20577"/>
+          <ac:spMkLst>
+            <pc:docMk/>
+            <pc:sldMk cId="829672710" sldId="297"/>
+            <ac:spMk id="156" creationId="{00000000-0000-0000-0000-000000000000}"/>
+          </ac:spMkLst>
+        </pc:spChg>
+      </pc:sldChg>
+      <pc:sldChg chg="modSp mod">
+        <pc:chgData name="Tiago Janela" userId="ee1a79fe-c79c-4f34-9602-7f6f2f0482b3" providerId="ADAL" clId="{67D2C233-DF3C-4C6D-9040-D7553E3BCB8A}" dt="2026-03-16T14:02:34.148" v="0" actId="20577"/>
+        <pc:sldMkLst>
+          <pc:docMk/>
+          <pc:sldMk cId="721732568" sldId="298"/>
+        </pc:sldMkLst>
+        <pc:spChg chg="mod">
+          <ac:chgData name="Tiago Janela" userId="ee1a79fe-c79c-4f34-9602-7f6f2f0482b3" providerId="ADAL" clId="{67D2C233-DF3C-4C6D-9040-D7553E3BCB8A}" dt="2026-03-16T14:02:34.148" v="0" actId="20577"/>
+          <ac:spMkLst>
+            <pc:docMk/>
+            <pc:sldMk cId="721732568" sldId="298"/>
+            <ac:spMk id="2" creationId="{870990D0-7AC5-46BA-6FC4-274F8E0A3ABE}"/>
+          </ac:spMkLst>
+        </pc:spChg>
+      </pc:sldChg>
+    </pc:docChg>
+  </pc:docChgLst>
+  <pc:docChgLst>
     <pc:chgData name="Tiago Janela" userId="ee1a79fe-c79c-4f34-9602-7f6f2f0482b3" providerId="ADAL" clId="{97693404-9C1B-400A-95DF-A7B72570E7A0}"/>
     <pc:docChg chg="undo custSel addSld delSld modSld sldOrd">
       <pc:chgData name="Tiago Janela" userId="ee1a79fe-c79c-4f34-9602-7f6f2f0482b3" providerId="ADAL" clId="{97693404-9C1B-400A-95DF-A7B72570E7A0}" dt="2026-03-09T10:33:25.226" v="5259" actId="20577"/>
@@ -3383,7 +3567,7 @@
           <a:p>
             <a:fld id="{83EC3DE1-3765-45C5-94E7-BC41A6E38B2C}" type="datetimeFigureOut">
               <a:rPr lang="en-US" smtClean="0"/>
-              <a:t>5/6/2026</a:t>
+              <a:t>5/7/2026</a:t>
             </a:fld>
             <a:endParaRPr lang="en-US"/>
           </a:p>
@@ -3778,7 +3962,10 @@
           <a:bodyPr/>
           <a:lstStyle/>
           <a:p>
-            <a:endParaRPr lang="en-US" dirty="0"/>
+            <a:r>
+              <a:rPr lang="en-US" dirty="0"/>
+              <a:t>Control -&gt; without difference </a:t>
+            </a:r>
           </a:p>
         </p:txBody>
       </p:sp>
@@ -3799,7 +3986,7 @@
           <a:p>
             <a:fld id="{90EBC085-3709-4EED-9401-54C6FC7AFFB6}" type="slidenum">
               <a:rPr lang="en-US" smtClean="0"/>
-              <a:t>23</a:t>
+              <a:t>20</a:t>
             </a:fld>
             <a:endParaRPr lang="en-US"/>
           </a:p>
@@ -3808,7 +3995,7 @@
     </p:spTree>
     <p:extLst>
       <p:ext uri="{BB962C8B-B14F-4D97-AF65-F5344CB8AC3E}">
-        <p14:creationId xmlns:p14="http://schemas.microsoft.com/office/powerpoint/2010/main" val="4150792975"/>
+        <p14:creationId xmlns:p14="http://schemas.microsoft.com/office/powerpoint/2010/main" val="2339777295"/>
       </p:ext>
     </p:extLst>
   </p:cSld>
@@ -3892,7 +4079,7 @@
     </p:spTree>
     <p:extLst>
       <p:ext uri="{BB962C8B-B14F-4D97-AF65-F5344CB8AC3E}">
-        <p14:creationId xmlns:p14="http://schemas.microsoft.com/office/powerpoint/2010/main" val="465627318"/>
+        <p14:creationId xmlns:p14="http://schemas.microsoft.com/office/powerpoint/2010/main" val="4150792975"/>
       </p:ext>
     </p:extLst>
   </p:cSld>
@@ -3976,7 +4163,7 @@
     </p:spTree>
     <p:extLst>
       <p:ext uri="{BB962C8B-B14F-4D97-AF65-F5344CB8AC3E}">
-        <p14:creationId xmlns:p14="http://schemas.microsoft.com/office/powerpoint/2010/main" val="2810362549"/>
+        <p14:creationId xmlns:p14="http://schemas.microsoft.com/office/powerpoint/2010/main" val="465627318"/>
       </p:ext>
     </p:extLst>
   </p:cSld>
@@ -4060,7 +4247,7 @@
     </p:spTree>
     <p:extLst>
       <p:ext uri="{BB962C8B-B14F-4D97-AF65-F5344CB8AC3E}">
-        <p14:creationId xmlns:p14="http://schemas.microsoft.com/office/powerpoint/2010/main" val="1270597718"/>
+        <p14:creationId xmlns:p14="http://schemas.microsoft.com/office/powerpoint/2010/main" val="2810362549"/>
       </p:ext>
     </p:extLst>
   </p:cSld>
@@ -4144,7 +4331,7 @@
     </p:spTree>
     <p:extLst>
       <p:ext uri="{BB962C8B-B14F-4D97-AF65-F5344CB8AC3E}">
-        <p14:creationId xmlns:p14="http://schemas.microsoft.com/office/powerpoint/2010/main" val="2271441871"/>
+        <p14:creationId xmlns:p14="http://schemas.microsoft.com/office/powerpoint/2010/main" val="1270597718"/>
       </p:ext>
     </p:extLst>
   </p:cSld>
@@ -4975,7 +5162,7 @@
           <a:p>
             <a:fld id="{90EBC085-3709-4EED-9401-54C6FC7AFFB6}" type="slidenum">
               <a:rPr lang="en-US" smtClean="0"/>
-              <a:t>17</a:t>
+              <a:t>16</a:t>
             </a:fld>
             <a:endParaRPr lang="en-US"/>
           </a:p>
@@ -4984,7 +5171,7 @@
     </p:spTree>
     <p:extLst>
       <p:ext uri="{BB962C8B-B14F-4D97-AF65-F5344CB8AC3E}">
-        <p14:creationId xmlns:p14="http://schemas.microsoft.com/office/powerpoint/2010/main" val="1478445165"/>
+        <p14:creationId xmlns:p14="http://schemas.microsoft.com/office/powerpoint/2010/main" val="2271441871"/>
       </p:ext>
     </p:extLst>
   </p:cSld>
@@ -5068,7 +5255,7 @@
     </p:spTree>
     <p:extLst>
       <p:ext uri="{BB962C8B-B14F-4D97-AF65-F5344CB8AC3E}">
-        <p14:creationId xmlns:p14="http://schemas.microsoft.com/office/powerpoint/2010/main" val="244219471"/>
+        <p14:creationId xmlns:p14="http://schemas.microsoft.com/office/powerpoint/2010/main" val="1478445165"/>
       </p:ext>
     </p:extLst>
   </p:cSld>
@@ -5122,10 +5309,7 @@
           <a:bodyPr/>
           <a:lstStyle/>
           <a:p>
-            <a:r>
-              <a:rPr lang="en-US" dirty="0"/>
-              <a:t>Control -&gt; without difference </a:t>
-            </a:r>
+            <a:endParaRPr lang="en-US" dirty="0"/>
           </a:p>
         </p:txBody>
       </p:sp>
@@ -5155,7 +5339,7 @@
     </p:spTree>
     <p:extLst>
       <p:ext uri="{BB962C8B-B14F-4D97-AF65-F5344CB8AC3E}">
-        <p14:creationId xmlns:p14="http://schemas.microsoft.com/office/powerpoint/2010/main" val="2339777295"/>
+        <p14:creationId xmlns:p14="http://schemas.microsoft.com/office/powerpoint/2010/main" val="244219471"/>
       </p:ext>
     </p:extLst>
   </p:cSld>
@@ -19925,148 +20109,169 @@
           </a:prstGeom>
         </p:spPr>
       </p:pic>
-      <p:sp>
-        <p:nvSpPr>
-          <p:cNvPr id="10" name="Rectangle 9">
+      <p:grpSp>
+        <p:nvGrpSpPr>
+          <p:cNvPr id="3" name="Group 2">
             <a:extLst>
               <a:ext uri="{FF2B5EF4-FFF2-40B4-BE49-F238E27FC236}">
-                <a16:creationId xmlns:a16="http://schemas.microsoft.com/office/drawing/2014/main" id="{AE37AA34-7138-EC42-1A14-6C807152AC02}"/>
+                <a16:creationId xmlns:a16="http://schemas.microsoft.com/office/drawing/2014/main" id="{192320F7-D550-7487-5338-B925B0B58B48}"/>
               </a:ext>
             </a:extLst>
           </p:cNvPr>
-          <p:cNvSpPr/>
+          <p:cNvGrpSpPr/>
           <p:nvPr/>
-        </p:nvSpPr>
-        <p:spPr>
+        </p:nvGrpSpPr>
+        <p:grpSpPr>
           <a:xfrm>
             <a:off x="223305" y="3843276"/>
             <a:ext cx="1366041" cy="1979176"/>
+            <a:chOff x="223305" y="3843276"/>
+            <a:chExt cx="1366041" cy="1979176"/>
           </a:xfrm>
-          <a:prstGeom prst="rect">
-            <a:avLst/>
-          </a:prstGeom>
-          <a:solidFill>
-            <a:srgbClr val="156082">
-              <a:lumMod val="20000"/>
-              <a:lumOff val="80000"/>
-            </a:srgbClr>
-          </a:solidFill>
-          <a:ln w="19050" cap="flat" cmpd="sng" algn="ctr">
+        </p:grpSpPr>
+        <p:sp>
+          <p:nvSpPr>
+            <p:cNvPr id="10" name="Rectangle 9">
+              <a:extLst>
+                <a:ext uri="{FF2B5EF4-FFF2-40B4-BE49-F238E27FC236}">
+                  <a16:creationId xmlns:a16="http://schemas.microsoft.com/office/drawing/2014/main" id="{AE37AA34-7138-EC42-1A14-6C807152AC02}"/>
+                </a:ext>
+              </a:extLst>
+            </p:cNvPr>
+            <p:cNvSpPr/>
+            <p:nvPr/>
+          </p:nvSpPr>
+          <p:spPr>
+            <a:xfrm>
+              <a:off x="223305" y="3843276"/>
+              <a:ext cx="1366041" cy="1979176"/>
+            </a:xfrm>
+            <a:prstGeom prst="rect">
+              <a:avLst/>
+            </a:prstGeom>
             <a:solidFill>
-              <a:srgbClr val="0E2841">
-                <a:lumMod val="25000"/>
-                <a:lumOff val="75000"/>
+              <a:srgbClr val="156082">
+                <a:lumMod val="20000"/>
+                <a:lumOff val="80000"/>
               </a:srgbClr>
             </a:solidFill>
-            <a:prstDash val="solid"/>
-            <a:miter lim="800000"/>
-          </a:ln>
-          <a:effectLst/>
-        </p:spPr>
-        <p:txBody>
-          <a:bodyPr rtlCol="0" anchor="ctr"/>
-          <a:lstStyle/>
-          <a:p>
-            <a:pPr marL="0" marR="0" lvl="0" indent="0" algn="ctr" defTabSz="914400" eaLnBrk="1" fontAlgn="auto" latinLnBrk="0" hangingPunct="1">
-              <a:lnSpc>
-                <a:spcPct val="100000"/>
-              </a:lnSpc>
-              <a:spcBef>
-                <a:spcPts val="0"/>
-              </a:spcBef>
-              <a:spcAft>
-                <a:spcPts val="0"/>
-              </a:spcAft>
-              <a:buClrTx/>
-              <a:buSzTx/>
-              <a:buFontTx/>
-              <a:buNone/>
-              <a:tabLst/>
-              <a:defRPr/>
-            </a:pPr>
-            <a:endParaRPr kumimoji="0" lang="en-US" sz="1800" b="0" i="0" u="none" strike="noStrike" kern="0" cap="none" spc="0" normalizeH="0" baseline="0" noProof="0" dirty="0">
-              <a:ln>
-                <a:noFill/>
-              </a:ln>
+            <a:ln w="19050" cap="flat" cmpd="sng" algn="ctr">
               <a:solidFill>
-                <a:prstClr val="white"/>
+                <a:srgbClr val="0E2841">
+                  <a:lumMod val="25000"/>
+                  <a:lumOff val="75000"/>
+                </a:srgbClr>
               </a:solidFill>
-              <a:effectLst/>
-              <a:uLnTx/>
-              <a:uFillTx/>
-              <a:latin typeface="Aptos" panose="02110004020202020204"/>
-              <a:ea typeface="+mn-ea"/>
-              <a:cs typeface="+mn-cs"/>
-            </a:endParaRPr>
-          </a:p>
-        </p:txBody>
-      </p:sp>
-      <p:pic>
-        <p:nvPicPr>
-          <p:cNvPr id="11" name="Graphic 10" descr="Customer review with solid fill">
-            <a:extLst>
-              <a:ext uri="{FF2B5EF4-FFF2-40B4-BE49-F238E27FC236}">
-                <a16:creationId xmlns:a16="http://schemas.microsoft.com/office/drawing/2014/main" id="{8CB85F61-54D1-66ED-6C35-184AECE9ED3E}"/>
-              </a:ext>
-            </a:extLst>
-          </p:cNvPr>
-          <p:cNvPicPr>
-            <a:picLocks noChangeAspect="1"/>
-          </p:cNvPicPr>
-          <p:nvPr/>
-        </p:nvPicPr>
-        <p:blipFill>
-          <a:blip r:embed="rId8">
-            <a:extLst>
-              <a:ext uri="{96DAC541-7B7A-43D3-8B79-37D633B846F1}">
-                <asvg:svgBlip xmlns:asvg="http://schemas.microsoft.com/office/drawing/2016/SVG/main" r:embed="rId9"/>
-              </a:ext>
-            </a:extLst>
-          </a:blip>
-          <a:stretch>
-            <a:fillRect/>
-          </a:stretch>
-        </p:blipFill>
-        <p:spPr>
-          <a:xfrm>
-            <a:off x="492708" y="4936096"/>
-            <a:ext cx="827234" cy="827234"/>
-          </a:xfrm>
-          <a:prstGeom prst="rect">
-            <a:avLst/>
-          </a:prstGeom>
-        </p:spPr>
-      </p:pic>
-      <p:pic>
-        <p:nvPicPr>
-          <p:cNvPr id="13" name="Picture 12">
-            <a:extLst>
-              <a:ext uri="{FF2B5EF4-FFF2-40B4-BE49-F238E27FC236}">
-                <a16:creationId xmlns:a16="http://schemas.microsoft.com/office/drawing/2014/main" id="{A950904C-0A31-817E-63DB-B514142D7635}"/>
-              </a:ext>
-            </a:extLst>
-          </p:cNvPr>
-          <p:cNvPicPr>
-            <a:picLocks noChangeAspect="1"/>
-          </p:cNvPicPr>
-          <p:nvPr/>
-        </p:nvPicPr>
-        <p:blipFill>
-          <a:blip r:embed="rId10"/>
-          <a:stretch>
-            <a:fillRect/>
-          </a:stretch>
-        </p:blipFill>
-        <p:spPr>
-          <a:xfrm>
-            <a:off x="323946" y="3943981"/>
-            <a:ext cx="1164759" cy="761328"/>
-          </a:xfrm>
-          <a:prstGeom prst="rect">
-            <a:avLst/>
-          </a:prstGeom>
-        </p:spPr>
-      </p:pic>
+              <a:prstDash val="solid"/>
+              <a:miter lim="800000"/>
+            </a:ln>
+            <a:effectLst/>
+          </p:spPr>
+          <p:txBody>
+            <a:bodyPr rtlCol="0" anchor="ctr"/>
+            <a:lstStyle/>
+            <a:p>
+              <a:pPr marL="0" marR="0" lvl="0" indent="0" algn="ctr" defTabSz="914400" eaLnBrk="1" fontAlgn="auto" latinLnBrk="0" hangingPunct="1">
+                <a:lnSpc>
+                  <a:spcPct val="100000"/>
+                </a:lnSpc>
+                <a:spcBef>
+                  <a:spcPts val="0"/>
+                </a:spcBef>
+                <a:spcAft>
+                  <a:spcPts val="0"/>
+                </a:spcAft>
+                <a:buClrTx/>
+                <a:buSzTx/>
+                <a:buFontTx/>
+                <a:buNone/>
+                <a:tabLst/>
+                <a:defRPr/>
+              </a:pPr>
+              <a:endParaRPr kumimoji="0" lang="en-US" sz="1800" b="0" i="0" u="none" strike="noStrike" kern="0" cap="none" spc="0" normalizeH="0" baseline="0" noProof="0" dirty="0">
+                <a:ln>
+                  <a:noFill/>
+                </a:ln>
+                <a:solidFill>
+                  <a:prstClr val="white"/>
+                </a:solidFill>
+                <a:effectLst/>
+                <a:uLnTx/>
+                <a:uFillTx/>
+                <a:latin typeface="Aptos" panose="02110004020202020204"/>
+                <a:ea typeface="+mn-ea"/>
+                <a:cs typeface="+mn-cs"/>
+              </a:endParaRPr>
+            </a:p>
+          </p:txBody>
+        </p:sp>
+        <p:pic>
+          <p:nvPicPr>
+            <p:cNvPr id="11" name="Graphic 10" descr="Customer review with solid fill">
+              <a:extLst>
+                <a:ext uri="{FF2B5EF4-FFF2-40B4-BE49-F238E27FC236}">
+                  <a16:creationId xmlns:a16="http://schemas.microsoft.com/office/drawing/2014/main" id="{8CB85F61-54D1-66ED-6C35-184AECE9ED3E}"/>
+                </a:ext>
+              </a:extLst>
+            </p:cNvPr>
+            <p:cNvPicPr>
+              <a:picLocks noChangeAspect="1"/>
+            </p:cNvPicPr>
+            <p:nvPr/>
+          </p:nvPicPr>
+          <p:blipFill>
+            <a:blip r:embed="rId8">
+              <a:extLst>
+                <a:ext uri="{96DAC541-7B7A-43D3-8B79-37D633B846F1}">
+                  <asvg:svgBlip xmlns:asvg="http://schemas.microsoft.com/office/drawing/2016/SVG/main" r:embed="rId9"/>
+                </a:ext>
+              </a:extLst>
+            </a:blip>
+            <a:stretch>
+              <a:fillRect/>
+            </a:stretch>
+          </p:blipFill>
+          <p:spPr>
+            <a:xfrm>
+              <a:off x="492708" y="4936096"/>
+              <a:ext cx="827234" cy="827234"/>
+            </a:xfrm>
+            <a:prstGeom prst="rect">
+              <a:avLst/>
+            </a:prstGeom>
+          </p:spPr>
+        </p:pic>
+        <p:pic>
+          <p:nvPicPr>
+            <p:cNvPr id="13" name="Picture 12">
+              <a:extLst>
+                <a:ext uri="{FF2B5EF4-FFF2-40B4-BE49-F238E27FC236}">
+                  <a16:creationId xmlns:a16="http://schemas.microsoft.com/office/drawing/2014/main" id="{A950904C-0A31-817E-63DB-B514142D7635}"/>
+                </a:ext>
+              </a:extLst>
+            </p:cNvPr>
+            <p:cNvPicPr>
+              <a:picLocks noChangeAspect="1"/>
+            </p:cNvPicPr>
+            <p:nvPr/>
+          </p:nvPicPr>
+          <p:blipFill>
+            <a:blip r:embed="rId10"/>
+            <a:stretch>
+              <a:fillRect/>
+            </a:stretch>
+          </p:blipFill>
+          <p:spPr>
+            <a:xfrm>
+              <a:off x="323946" y="3943981"/>
+              <a:ext cx="1164759" cy="761328"/>
+            </a:xfrm>
+            <a:prstGeom prst="rect">
+              <a:avLst/>
+            </a:prstGeom>
+          </p:spPr>
+        </p:pic>
+      </p:grpSp>
     </p:spTree>
     <p:extLst>
       <p:ext uri="{BB962C8B-B14F-4D97-AF65-F5344CB8AC3E}">
@@ -20081,6 +20286,2184 @@
 </file>
 
 <file path=ppt/slides/slide16.xml><?xml version="1.0" encoding="utf-8"?>
+<p:sld xmlns:a="http://schemas.openxmlformats.org/drawingml/2006/main" xmlns:r="http://schemas.openxmlformats.org/officeDocument/2006/relationships" xmlns:p="http://schemas.openxmlformats.org/presentationml/2006/main">
+  <p:cSld>
+    <p:spTree>
+      <p:nvGrpSpPr>
+        <p:cNvPr id="1" name="">
+          <a:extLst>
+            <a:ext uri="{FF2B5EF4-FFF2-40B4-BE49-F238E27FC236}">
+              <a16:creationId xmlns:a16="http://schemas.microsoft.com/office/drawing/2014/main" id="{A6515F23-0912-A838-23CE-B8F00573A2DA}"/>
+            </a:ext>
+          </a:extLst>
+        </p:cNvPr>
+        <p:cNvGrpSpPr/>
+        <p:nvPr/>
+      </p:nvGrpSpPr>
+      <p:grpSpPr>
+        <a:xfrm>
+          <a:off x="0" y="0"/>
+          <a:ext cx="0" cy="0"/>
+          <a:chOff x="0" y="0"/>
+          <a:chExt cx="0" cy="0"/>
+        </a:xfrm>
+      </p:grpSpPr>
+      <p:sp>
+        <p:nvSpPr>
+          <p:cNvPr id="42" name="Arrow: Right 41">
+            <a:extLst>
+              <a:ext uri="{FF2B5EF4-FFF2-40B4-BE49-F238E27FC236}">
+                <a16:creationId xmlns:a16="http://schemas.microsoft.com/office/drawing/2014/main" id="{666A450C-D0FA-4FC2-D779-9D8A47EBECE0}"/>
+              </a:ext>
+            </a:extLst>
+          </p:cNvPr>
+          <p:cNvSpPr/>
+          <p:nvPr/>
+        </p:nvSpPr>
+        <p:spPr>
+          <a:xfrm rot="5400000">
+            <a:off x="802115" y="3486575"/>
+            <a:ext cx="496588" cy="279226"/>
+          </a:xfrm>
+          <a:prstGeom prst="rightArrow">
+            <a:avLst/>
+          </a:prstGeom>
+        </p:spPr>
+        <p:style>
+          <a:lnRef idx="2">
+            <a:schemeClr val="accent1">
+              <a:shade val="15000"/>
+            </a:schemeClr>
+          </a:lnRef>
+          <a:fillRef idx="1">
+            <a:schemeClr val="accent1"/>
+          </a:fillRef>
+          <a:effectRef idx="0">
+            <a:schemeClr val="accent1"/>
+          </a:effectRef>
+          <a:fontRef idx="minor">
+            <a:schemeClr val="lt1"/>
+          </a:fontRef>
+        </p:style>
+        <p:txBody>
+          <a:bodyPr rtlCol="0" anchor="ctr"/>
+          <a:lstStyle/>
+          <a:p>
+            <a:pPr algn="ctr"/>
+            <a:endParaRPr lang="en-US"/>
+          </a:p>
+        </p:txBody>
+      </p:sp>
+      <p:sp>
+        <p:nvSpPr>
+          <p:cNvPr id="163" name="PlaceHolder 1">
+            <a:extLst>
+              <a:ext uri="{FF2B5EF4-FFF2-40B4-BE49-F238E27FC236}">
+                <a16:creationId xmlns:a16="http://schemas.microsoft.com/office/drawing/2014/main" id="{57944F4B-F502-E7CC-8790-8737702BC6AC}"/>
+              </a:ext>
+            </a:extLst>
+          </p:cNvPr>
+          <p:cNvSpPr>
+            <a:spLocks noGrp="1"/>
+          </p:cNvSpPr>
+          <p:nvPr>
+            <p:ph type="title"/>
+          </p:nvPr>
+        </p:nvSpPr>
+        <p:spPr>
+          <a:xfrm>
+            <a:off x="380880" y="228600"/>
+            <a:ext cx="8380080" cy="837720"/>
+          </a:xfrm>
+          <a:prstGeom prst="rect">
+            <a:avLst/>
+          </a:prstGeom>
+          <a:noFill/>
+          <a:ln w="0">
+            <a:noFill/>
+          </a:ln>
+        </p:spPr>
+        <p:txBody>
+          <a:bodyPr numCol="1" spcCol="0" anchor="ctr">
+            <a:noAutofit/>
+          </a:bodyPr>
+          <a:lstStyle/>
+          <a:p>
+            <a:pPr>
+              <a:lnSpc>
+                <a:spcPct val="100000"/>
+              </a:lnSpc>
+              <a:buNone/>
+            </a:pPr>
+            <a:r>
+              <a:rPr lang="en-US" sz="3200" b="0" strike="noStrike" spc="-1" dirty="0">
+                <a:solidFill>
+                  <a:srgbClr val="0064C8"/>
+                </a:solidFill>
+                <a:latin typeface="Century Gothic"/>
+              </a:rPr>
+              <a:t>Prompt </a:t>
+            </a:r>
+            <a:r>
+              <a:rPr lang="en-US" sz="3200" spc="-1" dirty="0">
+                <a:solidFill>
+                  <a:srgbClr val="0064C8"/>
+                </a:solidFill>
+                <a:latin typeface="Century Gothic"/>
+              </a:rPr>
+              <a:t>3</a:t>
+            </a:r>
+            <a:endParaRPr lang="en-US" sz="3200" b="0" strike="noStrike" spc="-1" dirty="0">
+              <a:solidFill>
+                <a:srgbClr val="000000"/>
+              </a:solidFill>
+              <a:latin typeface="Century Gothic"/>
+            </a:endParaRPr>
+          </a:p>
+        </p:txBody>
+      </p:sp>
+      <p:grpSp>
+        <p:nvGrpSpPr>
+          <p:cNvPr id="10" name="Group 9">
+            <a:extLst>
+              <a:ext uri="{FF2B5EF4-FFF2-40B4-BE49-F238E27FC236}">
+                <a16:creationId xmlns:a16="http://schemas.microsoft.com/office/drawing/2014/main" id="{FF8FBB9D-B2F5-6FE4-C05D-A4E2E4FE0028}"/>
+              </a:ext>
+            </a:extLst>
+          </p:cNvPr>
+          <p:cNvGrpSpPr/>
+          <p:nvPr/>
+        </p:nvGrpSpPr>
+        <p:grpSpPr>
+          <a:xfrm>
+            <a:off x="2681070" y="1297065"/>
+            <a:ext cx="5396048" cy="2127528"/>
+            <a:chOff x="2962101" y="1191667"/>
+            <a:chExt cx="5396048" cy="2127528"/>
+          </a:xfrm>
+        </p:grpSpPr>
+        <p:sp>
+          <p:nvSpPr>
+            <p:cNvPr id="29" name="TextBox 28">
+              <a:extLst>
+                <a:ext uri="{FF2B5EF4-FFF2-40B4-BE49-F238E27FC236}">
+                  <a16:creationId xmlns:a16="http://schemas.microsoft.com/office/drawing/2014/main" id="{50EF08DE-650D-84D8-23E2-83CD379C9565}"/>
+                </a:ext>
+              </a:extLst>
+            </p:cNvPr>
+            <p:cNvSpPr txBox="1"/>
+            <p:nvPr/>
+          </p:nvSpPr>
+          <p:spPr>
+            <a:xfrm>
+              <a:off x="3215443" y="1191667"/>
+              <a:ext cx="2126816" cy="338554"/>
+            </a:xfrm>
+            <a:prstGeom prst="rect">
+              <a:avLst/>
+            </a:prstGeom>
+            <a:noFill/>
+          </p:spPr>
+          <p:txBody>
+            <a:bodyPr wrap="square" rtlCol="0">
+              <a:spAutoFit/>
+            </a:bodyPr>
+            <a:lstStyle/>
+            <a:p>
+              <a:pPr algn="ctr"/>
+              <a:r>
+                <a:rPr lang="en-US" sz="1600" b="1" dirty="0"/>
+                <a:t>Active compound </a:t>
+              </a:r>
+              <a:endParaRPr lang="de-DE" sz="1600" b="1" dirty="0"/>
+            </a:p>
+          </p:txBody>
+        </p:sp>
+        <p:sp>
+          <p:nvSpPr>
+            <p:cNvPr id="37" name="TextBox 36">
+              <a:extLst>
+                <a:ext uri="{FF2B5EF4-FFF2-40B4-BE49-F238E27FC236}">
+                  <a16:creationId xmlns:a16="http://schemas.microsoft.com/office/drawing/2014/main" id="{A9B538AC-1716-FEE9-9303-C64FEB3A2571}"/>
+                </a:ext>
+              </a:extLst>
+            </p:cNvPr>
+            <p:cNvSpPr txBox="1"/>
+            <p:nvPr/>
+          </p:nvSpPr>
+          <p:spPr>
+            <a:xfrm>
+              <a:off x="6180084" y="1191667"/>
+              <a:ext cx="2126815" cy="338554"/>
+            </a:xfrm>
+            <a:prstGeom prst="rect">
+              <a:avLst/>
+            </a:prstGeom>
+            <a:noFill/>
+          </p:spPr>
+          <p:txBody>
+            <a:bodyPr wrap="square" rtlCol="0">
+              <a:spAutoFit/>
+            </a:bodyPr>
+            <a:lstStyle/>
+            <a:p>
+              <a:pPr algn="ctr"/>
+              <a:r>
+                <a:rPr lang="en-US" sz="1600" b="1" dirty="0"/>
+                <a:t>Inactive compound</a:t>
+              </a:r>
+              <a:endParaRPr lang="de-DE" sz="1600" b="1" dirty="0"/>
+            </a:p>
+          </p:txBody>
+        </p:sp>
+        <p:pic>
+          <p:nvPicPr>
+            <p:cNvPr id="3" name="Picture 2">
+              <a:extLst>
+                <a:ext uri="{FF2B5EF4-FFF2-40B4-BE49-F238E27FC236}">
+                  <a16:creationId xmlns:a16="http://schemas.microsoft.com/office/drawing/2014/main" id="{DDBAFE8B-CBB0-4161-AC30-9E26A3A7D934}"/>
+                </a:ext>
+              </a:extLst>
+            </p:cNvPr>
+            <p:cNvPicPr>
+              <a:picLocks noChangeAspect="1"/>
+            </p:cNvPicPr>
+            <p:nvPr/>
+          </p:nvPicPr>
+          <p:blipFill rotWithShape="1">
+            <a:blip r:embed="rId3"/>
+            <a:srcRect l="14178" t="23063" r="12404" b="17553"/>
+            <a:stretch/>
+          </p:blipFill>
+          <p:spPr>
+            <a:xfrm>
+              <a:off x="2962101" y="1944295"/>
+              <a:ext cx="2633499" cy="1198178"/>
+            </a:xfrm>
+            <a:prstGeom prst="rect">
+              <a:avLst/>
+            </a:prstGeom>
+          </p:spPr>
+        </p:pic>
+        <p:pic>
+          <p:nvPicPr>
+            <p:cNvPr id="5" name="Picture 4">
+              <a:extLst>
+                <a:ext uri="{FF2B5EF4-FFF2-40B4-BE49-F238E27FC236}">
+                  <a16:creationId xmlns:a16="http://schemas.microsoft.com/office/drawing/2014/main" id="{61399038-507A-42DF-8F43-F758B7EB7F76}"/>
+                </a:ext>
+              </a:extLst>
+            </p:cNvPr>
+            <p:cNvPicPr>
+              <a:picLocks noChangeAspect="1"/>
+            </p:cNvPicPr>
+            <p:nvPr/>
+          </p:nvPicPr>
+          <p:blipFill rotWithShape="1">
+            <a:blip r:embed="rId4"/>
+            <a:srcRect l="21987" t="10910" r="18256" b="12719"/>
+            <a:stretch/>
+          </p:blipFill>
+          <p:spPr>
+            <a:xfrm>
+              <a:off x="6128833" y="1716539"/>
+              <a:ext cx="2229316" cy="1602656"/>
+            </a:xfrm>
+            <a:prstGeom prst="rect">
+              <a:avLst/>
+            </a:prstGeom>
+          </p:spPr>
+        </p:pic>
+      </p:grpSp>
+      <p:sp>
+        <p:nvSpPr>
+          <p:cNvPr id="18" name="TextBox 17">
+            <a:extLst>
+              <a:ext uri="{FF2B5EF4-FFF2-40B4-BE49-F238E27FC236}">
+                <a16:creationId xmlns:a16="http://schemas.microsoft.com/office/drawing/2014/main" id="{79BF95DF-B15D-464F-BA81-E8132ED854B4}"/>
+              </a:ext>
+            </a:extLst>
+          </p:cNvPr>
+          <p:cNvSpPr txBox="1"/>
+          <p:nvPr/>
+        </p:nvSpPr>
+        <p:spPr>
+          <a:xfrm>
+            <a:off x="482461" y="3969415"/>
+            <a:ext cx="3949638" cy="338554"/>
+          </a:xfrm>
+          <a:prstGeom prst="rect">
+            <a:avLst/>
+          </a:prstGeom>
+          <a:noFill/>
+        </p:spPr>
+        <p:txBody>
+          <a:bodyPr wrap="square" rtlCol="0">
+            <a:spAutoFit/>
+          </a:bodyPr>
+          <a:lstStyle/>
+          <a:p>
+            <a:r>
+              <a:rPr lang="en-US" sz="1600" b="1" dirty="0"/>
+              <a:t>Comparative analysis</a:t>
+            </a:r>
+            <a:endParaRPr lang="de-DE" sz="1600" b="1" dirty="0"/>
+          </a:p>
+        </p:txBody>
+      </p:sp>
+      <p:graphicFrame>
+        <p:nvGraphicFramePr>
+          <p:cNvPr id="6" name="Table 5">
+            <a:extLst>
+              <a:ext uri="{FF2B5EF4-FFF2-40B4-BE49-F238E27FC236}">
+                <a16:creationId xmlns:a16="http://schemas.microsoft.com/office/drawing/2014/main" id="{345F29B8-8023-4EF0-AFA3-5E9CFB608765}"/>
+              </a:ext>
+            </a:extLst>
+          </p:cNvPr>
+          <p:cNvGraphicFramePr>
+            <a:graphicFrameLocks noGrp="1"/>
+          </p:cNvGraphicFramePr>
+          <p:nvPr>
+            <p:extLst>
+              <p:ext uri="{D42A27DB-BD31-4B8C-83A1-F6EECF244321}">
+                <p14:modId xmlns:p14="http://schemas.microsoft.com/office/powerpoint/2010/main" val="4007032321"/>
+              </p:ext>
+            </p:extLst>
+          </p:nvPr>
+        </p:nvGraphicFramePr>
+        <p:xfrm>
+          <a:off x="785661" y="4388593"/>
+          <a:ext cx="7394388" cy="1606378"/>
+        </p:xfrm>
+        <a:graphic>
+          <a:graphicData uri="http://schemas.openxmlformats.org/drawingml/2006/table">
+            <a:tbl>
+              <a:tblPr/>
+              <a:tblGrid>
+                <a:gridCol w="1848597">
+                  <a:extLst>
+                    <a:ext uri="{9D8B030D-6E8A-4147-A177-3AD203B41FA5}">
+                      <a16:colId xmlns:a16="http://schemas.microsoft.com/office/drawing/2014/main" val="679015658"/>
+                    </a:ext>
+                  </a:extLst>
+                </a:gridCol>
+                <a:gridCol w="1848597">
+                  <a:extLst>
+                    <a:ext uri="{9D8B030D-6E8A-4147-A177-3AD203B41FA5}">
+                      <a16:colId xmlns:a16="http://schemas.microsoft.com/office/drawing/2014/main" val="3123122154"/>
+                    </a:ext>
+                  </a:extLst>
+                </a:gridCol>
+                <a:gridCol w="1848597">
+                  <a:extLst>
+                    <a:ext uri="{9D8B030D-6E8A-4147-A177-3AD203B41FA5}">
+                      <a16:colId xmlns:a16="http://schemas.microsoft.com/office/drawing/2014/main" val="2309407858"/>
+                    </a:ext>
+                  </a:extLst>
+                </a:gridCol>
+                <a:gridCol w="1848597">
+                  <a:extLst>
+                    <a:ext uri="{9D8B030D-6E8A-4147-A177-3AD203B41FA5}">
+                      <a16:colId xmlns:a16="http://schemas.microsoft.com/office/drawing/2014/main" val="1088390279"/>
+                    </a:ext>
+                  </a:extLst>
+                </a:gridCol>
+              </a:tblGrid>
+              <a:tr h="143053">
+                <a:tc>
+                  <a:txBody>
+                    <a:bodyPr/>
+                    <a:lstStyle/>
+                    <a:p>
+                      <a:pPr algn="ctr" latinLnBrk="0"/>
+                      <a:r>
+                        <a:rPr lang="de-DE" sz="900" b="1">
+                          <a:effectLst/>
+                        </a:rPr>
+                        <a:t>Aspect</a:t>
+                      </a:r>
+                    </a:p>
+                  </a:txBody>
+                  <a:tcPr marL="36890" marR="36890" marT="18445" marB="18445" anchor="ctr">
+                    <a:lnL w="12700" cap="flat" cmpd="sng" algn="ctr">
+                      <a:solidFill>
+                        <a:schemeClr val="tx1"/>
+                      </a:solidFill>
+                      <a:prstDash val="solid"/>
+                      <a:round/>
+                      <a:headEnd type="none" w="med" len="med"/>
+                      <a:tailEnd type="none" w="med" len="med"/>
+                    </a:lnL>
+                    <a:lnR w="12700" cap="flat" cmpd="sng" algn="ctr">
+                      <a:noFill/>
+                      <a:prstDash val="solid"/>
+                      <a:round/>
+                      <a:headEnd type="none" w="med" len="med"/>
+                      <a:tailEnd type="none" w="med" len="med"/>
+                    </a:lnR>
+                    <a:lnT w="12700" cap="flat" cmpd="sng" algn="ctr">
+                      <a:solidFill>
+                        <a:schemeClr val="tx1"/>
+                      </a:solidFill>
+                      <a:prstDash val="solid"/>
+                      <a:round/>
+                      <a:headEnd type="none" w="med" len="med"/>
+                      <a:tailEnd type="none" w="med" len="med"/>
+                    </a:lnT>
+                    <a:lnB w="12700" cap="flat" cmpd="sng" algn="ctr">
+                      <a:solidFill>
+                        <a:schemeClr val="tx1"/>
+                      </a:solidFill>
+                      <a:prstDash val="solid"/>
+                      <a:round/>
+                      <a:headEnd type="none" w="med" len="med"/>
+                      <a:tailEnd type="none" w="med" len="med"/>
+                    </a:lnB>
+                    <a:lnTlToBr w="12700" cmpd="sng">
+                      <a:noFill/>
+                      <a:prstDash val="solid"/>
+                    </a:lnTlToBr>
+                    <a:lnBlToTr w="12700" cmpd="sng">
+                      <a:noFill/>
+                      <a:prstDash val="solid"/>
+                    </a:lnBlToTr>
+                    <a:solidFill>
+                      <a:schemeClr val="bg1"/>
+                    </a:solidFill>
+                  </a:tcPr>
+                </a:tc>
+                <a:tc>
+                  <a:txBody>
+                    <a:bodyPr/>
+                    <a:lstStyle/>
+                    <a:p>
+                      <a:pPr algn="ctr" latinLnBrk="0"/>
+                      <a:r>
+                        <a:rPr lang="de-DE" sz="900" b="1" dirty="0" err="1">
+                          <a:effectLst/>
+                        </a:rPr>
+                        <a:t>Active</a:t>
+                      </a:r>
+                      <a:r>
+                        <a:rPr lang="de-DE" sz="900" b="1" dirty="0">
+                          <a:effectLst/>
+                        </a:rPr>
+                        <a:t> Compound</a:t>
+                      </a:r>
+                    </a:p>
+                  </a:txBody>
+                  <a:tcPr marL="36890" marR="36890" marT="18445" marB="18445" anchor="ctr">
+                    <a:lnL w="12700" cap="flat" cmpd="sng" algn="ctr">
+                      <a:noFill/>
+                      <a:prstDash val="solid"/>
+                      <a:round/>
+                      <a:headEnd type="none" w="med" len="med"/>
+                      <a:tailEnd type="none" w="med" len="med"/>
+                    </a:lnL>
+                    <a:lnR w="12700" cap="flat" cmpd="sng" algn="ctr">
+                      <a:noFill/>
+                      <a:prstDash val="solid"/>
+                      <a:round/>
+                      <a:headEnd type="none" w="med" len="med"/>
+                      <a:tailEnd type="none" w="med" len="med"/>
+                    </a:lnR>
+                    <a:lnT w="12700" cap="flat" cmpd="sng" algn="ctr">
+                      <a:solidFill>
+                        <a:schemeClr val="tx1"/>
+                      </a:solidFill>
+                      <a:prstDash val="solid"/>
+                      <a:round/>
+                      <a:headEnd type="none" w="med" len="med"/>
+                      <a:tailEnd type="none" w="med" len="med"/>
+                    </a:lnT>
+                    <a:lnB w="12700" cap="flat" cmpd="sng" algn="ctr">
+                      <a:solidFill>
+                        <a:schemeClr val="tx1"/>
+                      </a:solidFill>
+                      <a:prstDash val="solid"/>
+                      <a:round/>
+                      <a:headEnd type="none" w="med" len="med"/>
+                      <a:tailEnd type="none" w="med" len="med"/>
+                    </a:lnB>
+                    <a:lnTlToBr w="12700" cmpd="sng">
+                      <a:noFill/>
+                      <a:prstDash val="solid"/>
+                    </a:lnTlToBr>
+                    <a:lnBlToTr w="12700" cmpd="sng">
+                      <a:noFill/>
+                      <a:prstDash val="solid"/>
+                    </a:lnBlToTr>
+                    <a:solidFill>
+                      <a:schemeClr val="bg1"/>
+                    </a:solidFill>
+                  </a:tcPr>
+                </a:tc>
+                <a:tc>
+                  <a:txBody>
+                    <a:bodyPr/>
+                    <a:lstStyle/>
+                    <a:p>
+                      <a:pPr algn="ctr" latinLnBrk="0"/>
+                      <a:r>
+                        <a:rPr lang="de-DE" sz="900" b="1">
+                          <a:effectLst/>
+                        </a:rPr>
+                        <a:t>Inactive Compound</a:t>
+                      </a:r>
+                    </a:p>
+                  </a:txBody>
+                  <a:tcPr marL="36890" marR="36890" marT="18445" marB="18445" anchor="ctr">
+                    <a:lnL w="12700" cap="flat" cmpd="sng" algn="ctr">
+                      <a:noFill/>
+                      <a:prstDash val="solid"/>
+                      <a:round/>
+                      <a:headEnd type="none" w="med" len="med"/>
+                      <a:tailEnd type="none" w="med" len="med"/>
+                    </a:lnL>
+                    <a:lnR w="12700" cap="flat" cmpd="sng" algn="ctr">
+                      <a:noFill/>
+                      <a:prstDash val="solid"/>
+                      <a:round/>
+                      <a:headEnd type="none" w="med" len="med"/>
+                      <a:tailEnd type="none" w="med" len="med"/>
+                    </a:lnR>
+                    <a:lnT w="12700" cap="flat" cmpd="sng" algn="ctr">
+                      <a:solidFill>
+                        <a:schemeClr val="tx1"/>
+                      </a:solidFill>
+                      <a:prstDash val="solid"/>
+                      <a:round/>
+                      <a:headEnd type="none" w="med" len="med"/>
+                      <a:tailEnd type="none" w="med" len="med"/>
+                    </a:lnT>
+                    <a:lnB w="12700" cap="flat" cmpd="sng" algn="ctr">
+                      <a:solidFill>
+                        <a:schemeClr val="tx1"/>
+                      </a:solidFill>
+                      <a:prstDash val="solid"/>
+                      <a:round/>
+                      <a:headEnd type="none" w="med" len="med"/>
+                      <a:tailEnd type="none" w="med" len="med"/>
+                    </a:lnB>
+                    <a:lnTlToBr w="12700" cmpd="sng">
+                      <a:noFill/>
+                      <a:prstDash val="solid"/>
+                    </a:lnTlToBr>
+                    <a:lnBlToTr w="12700" cmpd="sng">
+                      <a:noFill/>
+                      <a:prstDash val="solid"/>
+                    </a:lnBlToTr>
+                    <a:solidFill>
+                      <a:schemeClr val="bg1"/>
+                    </a:solidFill>
+                  </a:tcPr>
+                </a:tc>
+                <a:tc>
+                  <a:txBody>
+                    <a:bodyPr/>
+                    <a:lstStyle/>
+                    <a:p>
+                      <a:pPr algn="ctr" latinLnBrk="0"/>
+                      <a:r>
+                        <a:rPr lang="de-DE" sz="900" b="1">
+                          <a:effectLst/>
+                        </a:rPr>
+                        <a:t>Interpretation</a:t>
+                      </a:r>
+                    </a:p>
+                  </a:txBody>
+                  <a:tcPr marL="36890" marR="36890" marT="18445" marB="18445" anchor="ctr">
+                    <a:lnL w="12700" cap="flat" cmpd="sng" algn="ctr">
+                      <a:noFill/>
+                      <a:prstDash val="solid"/>
+                      <a:round/>
+                      <a:headEnd type="none" w="med" len="med"/>
+                      <a:tailEnd type="none" w="med" len="med"/>
+                    </a:lnL>
+                    <a:lnR w="12700" cap="flat" cmpd="sng" algn="ctr">
+                      <a:solidFill>
+                        <a:schemeClr val="tx1"/>
+                      </a:solidFill>
+                      <a:prstDash val="solid"/>
+                      <a:round/>
+                      <a:headEnd type="none" w="med" len="med"/>
+                      <a:tailEnd type="none" w="med" len="med"/>
+                    </a:lnR>
+                    <a:lnT w="12700" cap="flat" cmpd="sng" algn="ctr">
+                      <a:solidFill>
+                        <a:schemeClr val="tx1"/>
+                      </a:solidFill>
+                      <a:prstDash val="solid"/>
+                      <a:round/>
+                      <a:headEnd type="none" w="med" len="med"/>
+                      <a:tailEnd type="none" w="med" len="med"/>
+                    </a:lnT>
+                    <a:lnB w="12700" cap="flat" cmpd="sng" algn="ctr">
+                      <a:solidFill>
+                        <a:schemeClr val="tx1"/>
+                      </a:solidFill>
+                      <a:prstDash val="solid"/>
+                      <a:round/>
+                      <a:headEnd type="none" w="med" len="med"/>
+                      <a:tailEnd type="none" w="med" len="med"/>
+                    </a:lnB>
+                    <a:lnTlToBr w="12700" cmpd="sng">
+                      <a:noFill/>
+                      <a:prstDash val="solid"/>
+                    </a:lnTlToBr>
+                    <a:lnBlToTr w="12700" cmpd="sng">
+                      <a:noFill/>
+                      <a:prstDash val="solid"/>
+                    </a:lnBlToTr>
+                    <a:solidFill>
+                      <a:schemeClr val="bg1"/>
+                    </a:solidFill>
+                  </a:tcPr>
+                </a:tc>
+                <a:extLst>
+                  <a:ext uri="{0D108BD9-81ED-4DB2-BD59-A6C34878D82A}">
+                    <a16:rowId xmlns:a16="http://schemas.microsoft.com/office/drawing/2014/main" val="3121341623"/>
+                  </a:ext>
+                </a:extLst>
+              </a:tr>
+              <a:tr h="249349">
+                <a:tc>
+                  <a:txBody>
+                    <a:bodyPr/>
+                    <a:lstStyle/>
+                    <a:p>
+                      <a:pPr algn="ctr" fontAlgn="t" latinLnBrk="0"/>
+                      <a:r>
+                        <a:rPr lang="de-DE" sz="900" b="1" dirty="0">
+                          <a:effectLst/>
+                        </a:rPr>
+                        <a:t>Dominant SHAP</a:t>
+                      </a:r>
+                      <a:endParaRPr lang="de-DE" sz="900" dirty="0">
+                        <a:effectLst/>
+                      </a:endParaRPr>
+                    </a:p>
+                  </a:txBody>
+                  <a:tcPr marL="36890" marR="36890" marT="18445" marB="18445" anchor="ctr">
+                    <a:lnL w="12700" cap="flat" cmpd="sng" algn="ctr">
+                      <a:solidFill>
+                        <a:schemeClr val="tx1"/>
+                      </a:solidFill>
+                      <a:prstDash val="solid"/>
+                      <a:round/>
+                      <a:headEnd type="none" w="med" len="med"/>
+                      <a:tailEnd type="none" w="med" len="med"/>
+                    </a:lnL>
+                    <a:lnR w="12700" cap="flat" cmpd="sng" algn="ctr">
+                      <a:noFill/>
+                      <a:prstDash val="solid"/>
+                      <a:round/>
+                      <a:headEnd type="none" w="med" len="med"/>
+                      <a:tailEnd type="none" w="med" len="med"/>
+                    </a:lnR>
+                    <a:lnT w="12700" cap="flat" cmpd="sng" algn="ctr">
+                      <a:solidFill>
+                        <a:schemeClr val="tx1"/>
+                      </a:solidFill>
+                      <a:prstDash val="solid"/>
+                      <a:round/>
+                      <a:headEnd type="none" w="med" len="med"/>
+                      <a:tailEnd type="none" w="med" len="med"/>
+                    </a:lnT>
+                    <a:lnB w="12700" cap="flat" cmpd="sng" algn="ctr">
+                      <a:solidFill>
+                        <a:schemeClr val="tx1"/>
+                      </a:solidFill>
+                      <a:prstDash val="solid"/>
+                      <a:round/>
+                      <a:headEnd type="none" w="med" len="med"/>
+                      <a:tailEnd type="none" w="med" len="med"/>
+                    </a:lnB>
+                    <a:lnTlToBr w="12700" cmpd="sng">
+                      <a:noFill/>
+                      <a:prstDash val="solid"/>
+                    </a:lnTlToBr>
+                    <a:lnBlToTr w="12700" cmpd="sng">
+                      <a:noFill/>
+                      <a:prstDash val="solid"/>
+                    </a:lnBlToTr>
+                    <a:solidFill>
+                      <a:schemeClr val="bg1"/>
+                    </a:solidFill>
+                  </a:tcPr>
+                </a:tc>
+                <a:tc>
+                  <a:txBody>
+                    <a:bodyPr/>
+                    <a:lstStyle/>
+                    <a:p>
+                      <a:pPr algn="ctr" fontAlgn="t" latinLnBrk="0"/>
+                      <a:r>
+                        <a:rPr lang="de-DE" sz="900">
+                          <a:effectLst/>
+                        </a:rPr>
+                        <a:t>0.116 (piperazine)</a:t>
+                      </a:r>
+                    </a:p>
+                  </a:txBody>
+                  <a:tcPr marL="36890" marR="36890" marT="18445" marB="18445" anchor="ctr">
+                    <a:lnL w="12700" cap="flat" cmpd="sng" algn="ctr">
+                      <a:noFill/>
+                      <a:prstDash val="solid"/>
+                      <a:round/>
+                      <a:headEnd type="none" w="med" len="med"/>
+                      <a:tailEnd type="none" w="med" len="med"/>
+                    </a:lnL>
+                    <a:lnR w="12700" cap="flat" cmpd="sng" algn="ctr">
+                      <a:noFill/>
+                      <a:prstDash val="solid"/>
+                      <a:round/>
+                      <a:headEnd type="none" w="med" len="med"/>
+                      <a:tailEnd type="none" w="med" len="med"/>
+                    </a:lnR>
+                    <a:lnT w="12700" cap="flat" cmpd="sng" algn="ctr">
+                      <a:solidFill>
+                        <a:schemeClr val="tx1"/>
+                      </a:solidFill>
+                      <a:prstDash val="solid"/>
+                      <a:round/>
+                      <a:headEnd type="none" w="med" len="med"/>
+                      <a:tailEnd type="none" w="med" len="med"/>
+                    </a:lnT>
+                    <a:lnB w="12700" cap="flat" cmpd="sng" algn="ctr">
+                      <a:solidFill>
+                        <a:schemeClr val="tx1"/>
+                      </a:solidFill>
+                      <a:prstDash val="solid"/>
+                      <a:round/>
+                      <a:headEnd type="none" w="med" len="med"/>
+                      <a:tailEnd type="none" w="med" len="med"/>
+                    </a:lnB>
+                    <a:lnTlToBr w="12700" cmpd="sng">
+                      <a:noFill/>
+                      <a:prstDash val="solid"/>
+                    </a:lnTlToBr>
+                    <a:lnBlToTr w="12700" cmpd="sng">
+                      <a:noFill/>
+                      <a:prstDash val="solid"/>
+                    </a:lnBlToTr>
+                    <a:solidFill>
+                      <a:schemeClr val="bg1"/>
+                    </a:solidFill>
+                  </a:tcPr>
+                </a:tc>
+                <a:tc>
+                  <a:txBody>
+                    <a:bodyPr/>
+                    <a:lstStyle/>
+                    <a:p>
+                      <a:pPr algn="ctr" fontAlgn="t" latinLnBrk="0"/>
+                      <a:r>
+                        <a:rPr lang="de-DE" sz="900" dirty="0">
+                          <a:effectLst/>
+                        </a:rPr>
+                        <a:t>0.283 (methyl-phenyl)</a:t>
+                      </a:r>
+                    </a:p>
+                  </a:txBody>
+                  <a:tcPr marL="36890" marR="36890" marT="18445" marB="18445" anchor="ctr">
+                    <a:lnL w="12700" cap="flat" cmpd="sng" algn="ctr">
+                      <a:noFill/>
+                      <a:prstDash val="solid"/>
+                      <a:round/>
+                      <a:headEnd type="none" w="med" len="med"/>
+                      <a:tailEnd type="none" w="med" len="med"/>
+                    </a:lnL>
+                    <a:lnR w="12700" cap="flat" cmpd="sng" algn="ctr">
+                      <a:noFill/>
+                      <a:prstDash val="solid"/>
+                      <a:round/>
+                      <a:headEnd type="none" w="med" len="med"/>
+                      <a:tailEnd type="none" w="med" len="med"/>
+                    </a:lnR>
+                    <a:lnT w="12700" cap="flat" cmpd="sng" algn="ctr">
+                      <a:solidFill>
+                        <a:schemeClr val="tx1"/>
+                      </a:solidFill>
+                      <a:prstDash val="solid"/>
+                      <a:round/>
+                      <a:headEnd type="none" w="med" len="med"/>
+                      <a:tailEnd type="none" w="med" len="med"/>
+                    </a:lnT>
+                    <a:lnB w="12700" cap="flat" cmpd="sng" algn="ctr">
+                      <a:solidFill>
+                        <a:schemeClr val="tx1"/>
+                      </a:solidFill>
+                      <a:prstDash val="solid"/>
+                      <a:round/>
+                      <a:headEnd type="none" w="med" len="med"/>
+                      <a:tailEnd type="none" w="med" len="med"/>
+                    </a:lnB>
+                    <a:lnTlToBr w="12700" cmpd="sng">
+                      <a:noFill/>
+                      <a:prstDash val="solid"/>
+                    </a:lnTlToBr>
+                    <a:lnBlToTr w="12700" cmpd="sng">
+                      <a:noFill/>
+                      <a:prstDash val="solid"/>
+                    </a:lnBlToTr>
+                    <a:solidFill>
+                      <a:schemeClr val="bg1"/>
+                    </a:solidFill>
+                  </a:tcPr>
+                </a:tc>
+                <a:tc>
+                  <a:txBody>
+                    <a:bodyPr/>
+                    <a:lstStyle/>
+                    <a:p>
+                      <a:pPr algn="ctr" fontAlgn="t" latinLnBrk="0"/>
+                      <a:r>
+                        <a:rPr lang="en-US" sz="900" dirty="0">
+                          <a:effectLst/>
+                        </a:rPr>
+                        <a:t>Inactive has more extreme values</a:t>
+                      </a:r>
+                    </a:p>
+                  </a:txBody>
+                  <a:tcPr marL="36890" marR="36890" marT="18445" marB="18445" anchor="ctr">
+                    <a:lnL w="12700" cap="flat" cmpd="sng" algn="ctr">
+                      <a:noFill/>
+                      <a:prstDash val="solid"/>
+                      <a:round/>
+                      <a:headEnd type="none" w="med" len="med"/>
+                      <a:tailEnd type="none" w="med" len="med"/>
+                    </a:lnL>
+                    <a:lnR w="12700" cap="flat" cmpd="sng" algn="ctr">
+                      <a:solidFill>
+                        <a:schemeClr val="tx1"/>
+                      </a:solidFill>
+                      <a:prstDash val="solid"/>
+                      <a:round/>
+                      <a:headEnd type="none" w="med" len="med"/>
+                      <a:tailEnd type="none" w="med" len="med"/>
+                    </a:lnR>
+                    <a:lnT w="12700" cap="flat" cmpd="sng" algn="ctr">
+                      <a:solidFill>
+                        <a:schemeClr val="tx1"/>
+                      </a:solidFill>
+                      <a:prstDash val="solid"/>
+                      <a:round/>
+                      <a:headEnd type="none" w="med" len="med"/>
+                      <a:tailEnd type="none" w="med" len="med"/>
+                    </a:lnT>
+                    <a:lnB w="12700" cap="flat" cmpd="sng" algn="ctr">
+                      <a:solidFill>
+                        <a:schemeClr val="tx1"/>
+                      </a:solidFill>
+                      <a:prstDash val="solid"/>
+                      <a:round/>
+                      <a:headEnd type="none" w="med" len="med"/>
+                      <a:tailEnd type="none" w="med" len="med"/>
+                    </a:lnB>
+                    <a:lnTlToBr w="12700" cmpd="sng">
+                      <a:noFill/>
+                      <a:prstDash val="solid"/>
+                    </a:lnTlToBr>
+                    <a:lnBlToTr w="12700" cmpd="sng">
+                      <a:noFill/>
+                      <a:prstDash val="solid"/>
+                    </a:lnBlToTr>
+                    <a:solidFill>
+                      <a:schemeClr val="bg1"/>
+                    </a:solidFill>
+                  </a:tcPr>
+                </a:tc>
+                <a:extLst>
+                  <a:ext uri="{0D108BD9-81ED-4DB2-BD59-A6C34878D82A}">
+                    <a16:rowId xmlns:a16="http://schemas.microsoft.com/office/drawing/2014/main" val="271566910"/>
+                  </a:ext>
+                </a:extLst>
+              </a:tr>
+              <a:tr h="301124">
+                <a:tc>
+                  <a:txBody>
+                    <a:bodyPr/>
+                    <a:lstStyle/>
+                    <a:p>
+                      <a:pPr algn="ctr" fontAlgn="t" latinLnBrk="0"/>
+                      <a:r>
+                        <a:rPr lang="de-DE" sz="900" b="1">
+                          <a:effectLst/>
+                        </a:rPr>
+                        <a:t>SHAP Distribution</a:t>
+                      </a:r>
+                      <a:endParaRPr lang="de-DE" sz="900">
+                        <a:effectLst/>
+                      </a:endParaRPr>
+                    </a:p>
+                  </a:txBody>
+                  <a:tcPr marL="36890" marR="36890" marT="18445" marB="18445" anchor="ctr">
+                    <a:lnL w="12700" cap="flat" cmpd="sng" algn="ctr">
+                      <a:solidFill>
+                        <a:schemeClr val="tx1"/>
+                      </a:solidFill>
+                      <a:prstDash val="solid"/>
+                      <a:round/>
+                      <a:headEnd type="none" w="med" len="med"/>
+                      <a:tailEnd type="none" w="med" len="med"/>
+                    </a:lnL>
+                    <a:lnR w="12700" cap="flat" cmpd="sng" algn="ctr">
+                      <a:noFill/>
+                      <a:prstDash val="solid"/>
+                      <a:round/>
+                      <a:headEnd type="none" w="med" len="med"/>
+                      <a:tailEnd type="none" w="med" len="med"/>
+                    </a:lnR>
+                    <a:lnT w="12700" cap="flat" cmpd="sng" algn="ctr">
+                      <a:solidFill>
+                        <a:schemeClr val="tx1"/>
+                      </a:solidFill>
+                      <a:prstDash val="solid"/>
+                      <a:round/>
+                      <a:headEnd type="none" w="med" len="med"/>
+                      <a:tailEnd type="none" w="med" len="med"/>
+                    </a:lnT>
+                    <a:lnB w="12700" cap="flat" cmpd="sng" algn="ctr">
+                      <a:solidFill>
+                        <a:schemeClr val="tx1"/>
+                      </a:solidFill>
+                      <a:prstDash val="solid"/>
+                      <a:round/>
+                      <a:headEnd type="none" w="med" len="med"/>
+                      <a:tailEnd type="none" w="med" len="med"/>
+                    </a:lnB>
+                    <a:lnTlToBr w="12700" cmpd="sng">
+                      <a:noFill/>
+                      <a:prstDash val="solid"/>
+                    </a:lnTlToBr>
+                    <a:lnBlToTr w="12700" cmpd="sng">
+                      <a:noFill/>
+                      <a:prstDash val="solid"/>
+                    </a:lnBlToTr>
+                    <a:solidFill>
+                      <a:schemeClr val="bg1"/>
+                    </a:solidFill>
+                  </a:tcPr>
+                </a:tc>
+                <a:tc>
+                  <a:txBody>
+                    <a:bodyPr/>
+                    <a:lstStyle/>
+                    <a:p>
+                      <a:pPr algn="ctr" fontAlgn="t" latinLnBrk="0"/>
+                      <a:r>
+                        <a:rPr lang="de-DE" sz="900">
+                          <a:effectLst/>
+                        </a:rPr>
+                        <a:t>More uniform (0.045-0.116)</a:t>
+                      </a:r>
+                    </a:p>
+                  </a:txBody>
+                  <a:tcPr marL="36890" marR="36890" marT="18445" marB="18445" anchor="ctr">
+                    <a:lnL w="12700" cap="flat" cmpd="sng" algn="ctr">
+                      <a:noFill/>
+                      <a:prstDash val="solid"/>
+                      <a:round/>
+                      <a:headEnd type="none" w="med" len="med"/>
+                      <a:tailEnd type="none" w="med" len="med"/>
+                    </a:lnL>
+                    <a:lnR w="12700" cap="flat" cmpd="sng" algn="ctr">
+                      <a:noFill/>
+                      <a:prstDash val="solid"/>
+                      <a:round/>
+                      <a:headEnd type="none" w="med" len="med"/>
+                      <a:tailEnd type="none" w="med" len="med"/>
+                    </a:lnR>
+                    <a:lnT w="12700" cap="flat" cmpd="sng" algn="ctr">
+                      <a:solidFill>
+                        <a:schemeClr val="tx1"/>
+                      </a:solidFill>
+                      <a:prstDash val="solid"/>
+                      <a:round/>
+                      <a:headEnd type="none" w="med" len="med"/>
+                      <a:tailEnd type="none" w="med" len="med"/>
+                    </a:lnT>
+                    <a:lnB w="12700" cap="flat" cmpd="sng" algn="ctr">
+                      <a:solidFill>
+                        <a:schemeClr val="tx1"/>
+                      </a:solidFill>
+                      <a:prstDash val="solid"/>
+                      <a:round/>
+                      <a:headEnd type="none" w="med" len="med"/>
+                      <a:tailEnd type="none" w="med" len="med"/>
+                    </a:lnB>
+                    <a:lnTlToBr w="12700" cmpd="sng">
+                      <a:noFill/>
+                      <a:prstDash val="solid"/>
+                    </a:lnTlToBr>
+                    <a:lnBlToTr w="12700" cmpd="sng">
+                      <a:noFill/>
+                      <a:prstDash val="solid"/>
+                    </a:lnBlToTr>
+                    <a:solidFill>
+                      <a:schemeClr val="bg1"/>
+                    </a:solidFill>
+                  </a:tcPr>
+                </a:tc>
+                <a:tc>
+                  <a:txBody>
+                    <a:bodyPr/>
+                    <a:lstStyle/>
+                    <a:p>
+                      <a:pPr algn="ctr" fontAlgn="t" latinLnBrk="0"/>
+                      <a:r>
+                        <a:rPr lang="de-DE" sz="900" dirty="0">
+                          <a:effectLst/>
+                        </a:rPr>
+                        <a:t>More </a:t>
+                      </a:r>
+                      <a:r>
+                        <a:rPr lang="de-DE" sz="900" dirty="0" err="1">
+                          <a:effectLst/>
+                        </a:rPr>
+                        <a:t>skewed</a:t>
+                      </a:r>
+                      <a:r>
+                        <a:rPr lang="de-DE" sz="900" dirty="0">
+                          <a:effectLst/>
+                        </a:rPr>
+                        <a:t> (0.003-0.283)</a:t>
+                      </a:r>
+                    </a:p>
+                  </a:txBody>
+                  <a:tcPr marL="36890" marR="36890" marT="18445" marB="18445" anchor="ctr">
+                    <a:lnL w="12700" cap="flat" cmpd="sng" algn="ctr">
+                      <a:noFill/>
+                      <a:prstDash val="solid"/>
+                      <a:round/>
+                      <a:headEnd type="none" w="med" len="med"/>
+                      <a:tailEnd type="none" w="med" len="med"/>
+                    </a:lnL>
+                    <a:lnR w="12700" cap="flat" cmpd="sng" algn="ctr">
+                      <a:noFill/>
+                      <a:prstDash val="solid"/>
+                      <a:round/>
+                      <a:headEnd type="none" w="med" len="med"/>
+                      <a:tailEnd type="none" w="med" len="med"/>
+                    </a:lnR>
+                    <a:lnT w="12700" cap="flat" cmpd="sng" algn="ctr">
+                      <a:solidFill>
+                        <a:schemeClr val="tx1"/>
+                      </a:solidFill>
+                      <a:prstDash val="solid"/>
+                      <a:round/>
+                      <a:headEnd type="none" w="med" len="med"/>
+                      <a:tailEnd type="none" w="med" len="med"/>
+                    </a:lnT>
+                    <a:lnB w="12700" cap="flat" cmpd="sng" algn="ctr">
+                      <a:solidFill>
+                        <a:schemeClr val="tx1"/>
+                      </a:solidFill>
+                      <a:prstDash val="solid"/>
+                      <a:round/>
+                      <a:headEnd type="none" w="med" len="med"/>
+                      <a:tailEnd type="none" w="med" len="med"/>
+                    </a:lnB>
+                    <a:lnTlToBr w="12700" cmpd="sng">
+                      <a:noFill/>
+                      <a:prstDash val="solid"/>
+                    </a:lnTlToBr>
+                    <a:lnBlToTr w="12700" cmpd="sng">
+                      <a:noFill/>
+                      <a:prstDash val="solid"/>
+                    </a:lnBlToTr>
+                    <a:solidFill>
+                      <a:schemeClr val="bg1"/>
+                    </a:solidFill>
+                  </a:tcPr>
+                </a:tc>
+                <a:tc>
+                  <a:txBody>
+                    <a:bodyPr/>
+                    <a:lstStyle/>
+                    <a:p>
+                      <a:pPr algn="ctr" fontAlgn="t" latinLnBrk="0"/>
+                      <a:r>
+                        <a:rPr lang="de-DE" sz="900">
+                          <a:effectLst/>
+                        </a:rPr>
+                        <a:t>Active compound relies on multiple features</a:t>
+                      </a:r>
+                    </a:p>
+                  </a:txBody>
+                  <a:tcPr marL="36890" marR="36890" marT="18445" marB="18445" anchor="ctr">
+                    <a:lnL w="12700" cap="flat" cmpd="sng" algn="ctr">
+                      <a:noFill/>
+                      <a:prstDash val="solid"/>
+                      <a:round/>
+                      <a:headEnd type="none" w="med" len="med"/>
+                      <a:tailEnd type="none" w="med" len="med"/>
+                    </a:lnL>
+                    <a:lnR w="12700" cap="flat" cmpd="sng" algn="ctr">
+                      <a:solidFill>
+                        <a:schemeClr val="tx1"/>
+                      </a:solidFill>
+                      <a:prstDash val="solid"/>
+                      <a:round/>
+                      <a:headEnd type="none" w="med" len="med"/>
+                      <a:tailEnd type="none" w="med" len="med"/>
+                    </a:lnR>
+                    <a:lnT w="12700" cap="flat" cmpd="sng" algn="ctr">
+                      <a:solidFill>
+                        <a:schemeClr val="tx1"/>
+                      </a:solidFill>
+                      <a:prstDash val="solid"/>
+                      <a:round/>
+                      <a:headEnd type="none" w="med" len="med"/>
+                      <a:tailEnd type="none" w="med" len="med"/>
+                    </a:lnT>
+                    <a:lnB w="12700" cap="flat" cmpd="sng" algn="ctr">
+                      <a:solidFill>
+                        <a:schemeClr val="tx1"/>
+                      </a:solidFill>
+                      <a:prstDash val="solid"/>
+                      <a:round/>
+                      <a:headEnd type="none" w="med" len="med"/>
+                      <a:tailEnd type="none" w="med" len="med"/>
+                    </a:lnB>
+                    <a:lnTlToBr w="12700" cmpd="sng">
+                      <a:noFill/>
+                      <a:prstDash val="solid"/>
+                    </a:lnTlToBr>
+                    <a:lnBlToTr w="12700" cmpd="sng">
+                      <a:noFill/>
+                      <a:prstDash val="solid"/>
+                    </a:lnBlToTr>
+                    <a:solidFill>
+                      <a:schemeClr val="bg1"/>
+                    </a:solidFill>
+                  </a:tcPr>
+                </a:tc>
+                <a:extLst>
+                  <a:ext uri="{0D108BD9-81ED-4DB2-BD59-A6C34878D82A}">
+                    <a16:rowId xmlns:a16="http://schemas.microsoft.com/office/drawing/2014/main" val="1121413249"/>
+                  </a:ext>
+                </a:extLst>
+              </a:tr>
+              <a:tr h="249349">
+                <a:tc>
+                  <a:txBody>
+                    <a:bodyPr/>
+                    <a:lstStyle/>
+                    <a:p>
+                      <a:pPr algn="ctr" fontAlgn="t" latinLnBrk="0"/>
+                      <a:r>
+                        <a:rPr lang="de-DE" sz="900" b="1">
+                          <a:effectLst/>
+                        </a:rPr>
+                        <a:t>Key Pharmacophore</a:t>
+                      </a:r>
+                      <a:endParaRPr lang="de-DE" sz="900">
+                        <a:effectLst/>
+                      </a:endParaRPr>
+                    </a:p>
+                  </a:txBody>
+                  <a:tcPr marL="36890" marR="36890" marT="18445" marB="18445" anchor="ctr">
+                    <a:lnL w="12700" cap="flat" cmpd="sng" algn="ctr">
+                      <a:solidFill>
+                        <a:schemeClr val="tx1"/>
+                      </a:solidFill>
+                      <a:prstDash val="solid"/>
+                      <a:round/>
+                      <a:headEnd type="none" w="med" len="med"/>
+                      <a:tailEnd type="none" w="med" len="med"/>
+                    </a:lnL>
+                    <a:lnR w="12700" cap="flat" cmpd="sng" algn="ctr">
+                      <a:noFill/>
+                      <a:prstDash val="solid"/>
+                      <a:round/>
+                      <a:headEnd type="none" w="med" len="med"/>
+                      <a:tailEnd type="none" w="med" len="med"/>
+                    </a:lnR>
+                    <a:lnT w="12700" cap="flat" cmpd="sng" algn="ctr">
+                      <a:solidFill>
+                        <a:schemeClr val="tx1"/>
+                      </a:solidFill>
+                      <a:prstDash val="solid"/>
+                      <a:round/>
+                      <a:headEnd type="none" w="med" len="med"/>
+                      <a:tailEnd type="none" w="med" len="med"/>
+                    </a:lnT>
+                    <a:lnB w="12700" cap="flat" cmpd="sng" algn="ctr">
+                      <a:solidFill>
+                        <a:schemeClr val="tx1"/>
+                      </a:solidFill>
+                      <a:prstDash val="solid"/>
+                      <a:round/>
+                      <a:headEnd type="none" w="med" len="med"/>
+                      <a:tailEnd type="none" w="med" len="med"/>
+                    </a:lnB>
+                    <a:lnTlToBr w="12700" cmpd="sng">
+                      <a:noFill/>
+                      <a:prstDash val="solid"/>
+                    </a:lnTlToBr>
+                    <a:lnBlToTr w="12700" cmpd="sng">
+                      <a:noFill/>
+                      <a:prstDash val="solid"/>
+                    </a:lnBlToTr>
+                    <a:solidFill>
+                      <a:schemeClr val="bg1"/>
+                    </a:solidFill>
+                  </a:tcPr>
+                </a:tc>
+                <a:tc>
+                  <a:txBody>
+                    <a:bodyPr/>
+                    <a:lstStyle/>
+                    <a:p>
+                      <a:pPr algn="ctr" fontAlgn="t" latinLnBrk="0"/>
+                      <a:r>
+                        <a:rPr lang="de-DE" sz="900" dirty="0" err="1">
+                          <a:effectLst/>
+                        </a:rPr>
+                        <a:t>Piperazine</a:t>
+                      </a:r>
+                      <a:r>
+                        <a:rPr lang="de-DE" sz="900" dirty="0">
+                          <a:effectLst/>
+                        </a:rPr>
+                        <a:t> + </a:t>
+                      </a:r>
+                      <a:r>
+                        <a:rPr lang="de-DE" sz="900" dirty="0" err="1">
+                          <a:effectLst/>
+                        </a:rPr>
+                        <a:t>halogenated</a:t>
+                      </a:r>
+                      <a:r>
+                        <a:rPr lang="de-DE" sz="900" dirty="0">
+                          <a:effectLst/>
+                        </a:rPr>
+                        <a:t> </a:t>
+                      </a:r>
+                      <a:r>
+                        <a:rPr lang="de-DE" sz="900" dirty="0" err="1">
+                          <a:effectLst/>
+                        </a:rPr>
+                        <a:t>aryl</a:t>
+                      </a:r>
+                      <a:endParaRPr lang="de-DE" sz="900" dirty="0">
+                        <a:effectLst/>
+                      </a:endParaRPr>
+                    </a:p>
+                  </a:txBody>
+                  <a:tcPr marL="36890" marR="36890" marT="18445" marB="18445" anchor="ctr">
+                    <a:lnL w="12700" cap="flat" cmpd="sng" algn="ctr">
+                      <a:noFill/>
+                      <a:prstDash val="solid"/>
+                      <a:round/>
+                      <a:headEnd type="none" w="med" len="med"/>
+                      <a:tailEnd type="none" w="med" len="med"/>
+                    </a:lnL>
+                    <a:lnR w="12700" cap="flat" cmpd="sng" algn="ctr">
+                      <a:noFill/>
+                      <a:prstDash val="solid"/>
+                      <a:round/>
+                      <a:headEnd type="none" w="med" len="med"/>
+                      <a:tailEnd type="none" w="med" len="med"/>
+                    </a:lnR>
+                    <a:lnT w="12700" cap="flat" cmpd="sng" algn="ctr">
+                      <a:solidFill>
+                        <a:schemeClr val="tx1"/>
+                      </a:solidFill>
+                      <a:prstDash val="solid"/>
+                      <a:round/>
+                      <a:headEnd type="none" w="med" len="med"/>
+                      <a:tailEnd type="none" w="med" len="med"/>
+                    </a:lnT>
+                    <a:lnB w="12700" cap="flat" cmpd="sng" algn="ctr">
+                      <a:solidFill>
+                        <a:schemeClr val="tx1"/>
+                      </a:solidFill>
+                      <a:prstDash val="solid"/>
+                      <a:round/>
+                      <a:headEnd type="none" w="med" len="med"/>
+                      <a:tailEnd type="none" w="med" len="med"/>
+                    </a:lnB>
+                    <a:lnTlToBr w="12700" cmpd="sng">
+                      <a:noFill/>
+                      <a:prstDash val="solid"/>
+                    </a:lnTlToBr>
+                    <a:lnBlToTr w="12700" cmpd="sng">
+                      <a:noFill/>
+                      <a:prstDash val="solid"/>
+                    </a:lnBlToTr>
+                    <a:solidFill>
+                      <a:schemeClr val="bg1"/>
+                    </a:solidFill>
+                  </a:tcPr>
+                </a:tc>
+                <a:tc>
+                  <a:txBody>
+                    <a:bodyPr/>
+                    <a:lstStyle/>
+                    <a:p>
+                      <a:pPr algn="ctr" fontAlgn="t" latinLnBrk="0"/>
+                      <a:r>
+                        <a:rPr lang="de-DE" sz="900" dirty="0">
+                          <a:effectLst/>
+                        </a:rPr>
+                        <a:t>Simple alkyl-aryl</a:t>
+                      </a:r>
+                    </a:p>
+                  </a:txBody>
+                  <a:tcPr marL="36890" marR="36890" marT="18445" marB="18445" anchor="ctr">
+                    <a:lnL w="12700" cap="flat" cmpd="sng" algn="ctr">
+                      <a:noFill/>
+                      <a:prstDash val="solid"/>
+                      <a:round/>
+                      <a:headEnd type="none" w="med" len="med"/>
+                      <a:tailEnd type="none" w="med" len="med"/>
+                    </a:lnL>
+                    <a:lnR w="12700" cap="flat" cmpd="sng" algn="ctr">
+                      <a:noFill/>
+                      <a:prstDash val="solid"/>
+                      <a:round/>
+                      <a:headEnd type="none" w="med" len="med"/>
+                      <a:tailEnd type="none" w="med" len="med"/>
+                    </a:lnR>
+                    <a:lnT w="12700" cap="flat" cmpd="sng" algn="ctr">
+                      <a:solidFill>
+                        <a:schemeClr val="tx1"/>
+                      </a:solidFill>
+                      <a:prstDash val="solid"/>
+                      <a:round/>
+                      <a:headEnd type="none" w="med" len="med"/>
+                      <a:tailEnd type="none" w="med" len="med"/>
+                    </a:lnT>
+                    <a:lnB w="12700" cap="flat" cmpd="sng" algn="ctr">
+                      <a:solidFill>
+                        <a:schemeClr val="tx1"/>
+                      </a:solidFill>
+                      <a:prstDash val="solid"/>
+                      <a:round/>
+                      <a:headEnd type="none" w="med" len="med"/>
+                      <a:tailEnd type="none" w="med" len="med"/>
+                    </a:lnB>
+                    <a:lnTlToBr w="12700" cmpd="sng">
+                      <a:noFill/>
+                      <a:prstDash val="solid"/>
+                    </a:lnTlToBr>
+                    <a:lnBlToTr w="12700" cmpd="sng">
+                      <a:noFill/>
+                      <a:prstDash val="solid"/>
+                    </a:lnBlToTr>
+                    <a:solidFill>
+                      <a:schemeClr val="bg1"/>
+                    </a:solidFill>
+                  </a:tcPr>
+                </a:tc>
+                <a:tc>
+                  <a:txBody>
+                    <a:bodyPr/>
+                    <a:lstStyle/>
+                    <a:p>
+                      <a:pPr algn="ctr" fontAlgn="t" latinLnBrk="0"/>
+                      <a:r>
+                        <a:rPr lang="de-DE" sz="900">
+                          <a:effectLst/>
+                        </a:rPr>
+                        <a:t>Active has recognized pharmacophore</a:t>
+                      </a:r>
+                    </a:p>
+                  </a:txBody>
+                  <a:tcPr marL="36890" marR="36890" marT="18445" marB="18445" anchor="ctr">
+                    <a:lnL w="12700" cap="flat" cmpd="sng" algn="ctr">
+                      <a:noFill/>
+                      <a:prstDash val="solid"/>
+                      <a:round/>
+                      <a:headEnd type="none" w="med" len="med"/>
+                      <a:tailEnd type="none" w="med" len="med"/>
+                    </a:lnL>
+                    <a:lnR w="12700" cap="flat" cmpd="sng" algn="ctr">
+                      <a:solidFill>
+                        <a:schemeClr val="tx1"/>
+                      </a:solidFill>
+                      <a:prstDash val="solid"/>
+                      <a:round/>
+                      <a:headEnd type="none" w="med" len="med"/>
+                      <a:tailEnd type="none" w="med" len="med"/>
+                    </a:lnR>
+                    <a:lnT w="12700" cap="flat" cmpd="sng" algn="ctr">
+                      <a:solidFill>
+                        <a:schemeClr val="tx1"/>
+                      </a:solidFill>
+                      <a:prstDash val="solid"/>
+                      <a:round/>
+                      <a:headEnd type="none" w="med" len="med"/>
+                      <a:tailEnd type="none" w="med" len="med"/>
+                    </a:lnT>
+                    <a:lnB w="12700" cap="flat" cmpd="sng" algn="ctr">
+                      <a:solidFill>
+                        <a:schemeClr val="tx1"/>
+                      </a:solidFill>
+                      <a:prstDash val="solid"/>
+                      <a:round/>
+                      <a:headEnd type="none" w="med" len="med"/>
+                      <a:tailEnd type="none" w="med" len="med"/>
+                    </a:lnB>
+                    <a:lnTlToBr w="12700" cmpd="sng">
+                      <a:noFill/>
+                      <a:prstDash val="solid"/>
+                    </a:lnTlToBr>
+                    <a:lnBlToTr w="12700" cmpd="sng">
+                      <a:noFill/>
+                      <a:prstDash val="solid"/>
+                    </a:lnBlToTr>
+                    <a:solidFill>
+                      <a:schemeClr val="bg1"/>
+                    </a:solidFill>
+                  </a:tcPr>
+                </a:tc>
+                <a:extLst>
+                  <a:ext uri="{0D108BD9-81ED-4DB2-BD59-A6C34878D82A}">
+                    <a16:rowId xmlns:a16="http://schemas.microsoft.com/office/drawing/2014/main" val="2866350255"/>
+                  </a:ext>
+                </a:extLst>
+              </a:tr>
+              <a:tr h="249349">
+                <a:tc>
+                  <a:txBody>
+                    <a:bodyPr/>
+                    <a:lstStyle/>
+                    <a:p>
+                      <a:pPr algn="ctr" fontAlgn="t" latinLnBrk="0"/>
+                      <a:r>
+                        <a:rPr lang="de-DE" sz="900" b="1">
+                          <a:effectLst/>
+                        </a:rPr>
+                        <a:t>Molecular Complexity</a:t>
+                      </a:r>
+                      <a:endParaRPr lang="de-DE" sz="900">
+                        <a:effectLst/>
+                      </a:endParaRPr>
+                    </a:p>
+                  </a:txBody>
+                  <a:tcPr marL="36890" marR="36890" marT="18445" marB="18445" anchor="ctr">
+                    <a:lnL w="12700" cap="flat" cmpd="sng" algn="ctr">
+                      <a:solidFill>
+                        <a:schemeClr val="tx1"/>
+                      </a:solidFill>
+                      <a:prstDash val="solid"/>
+                      <a:round/>
+                      <a:headEnd type="none" w="med" len="med"/>
+                      <a:tailEnd type="none" w="med" len="med"/>
+                    </a:lnL>
+                    <a:lnR w="12700" cap="flat" cmpd="sng" algn="ctr">
+                      <a:noFill/>
+                      <a:prstDash val="solid"/>
+                      <a:round/>
+                      <a:headEnd type="none" w="med" len="med"/>
+                      <a:tailEnd type="none" w="med" len="med"/>
+                    </a:lnR>
+                    <a:lnT w="12700" cap="flat" cmpd="sng" algn="ctr">
+                      <a:solidFill>
+                        <a:schemeClr val="tx1"/>
+                      </a:solidFill>
+                      <a:prstDash val="solid"/>
+                      <a:round/>
+                      <a:headEnd type="none" w="med" len="med"/>
+                      <a:tailEnd type="none" w="med" len="med"/>
+                    </a:lnT>
+                    <a:lnB w="12700" cap="flat" cmpd="sng" algn="ctr">
+                      <a:solidFill>
+                        <a:schemeClr val="tx1"/>
+                      </a:solidFill>
+                      <a:prstDash val="solid"/>
+                      <a:round/>
+                      <a:headEnd type="none" w="med" len="med"/>
+                      <a:tailEnd type="none" w="med" len="med"/>
+                    </a:lnB>
+                    <a:lnTlToBr w="12700" cmpd="sng">
+                      <a:noFill/>
+                      <a:prstDash val="solid"/>
+                    </a:lnTlToBr>
+                    <a:lnBlToTr w="12700" cmpd="sng">
+                      <a:noFill/>
+                      <a:prstDash val="solid"/>
+                    </a:lnBlToTr>
+                    <a:solidFill>
+                      <a:schemeClr val="bg1"/>
+                    </a:solidFill>
+                  </a:tcPr>
+                </a:tc>
+                <a:tc>
+                  <a:txBody>
+                    <a:bodyPr/>
+                    <a:lstStyle/>
+                    <a:p>
+                      <a:pPr algn="ctr" fontAlgn="t" latinLnBrk="0"/>
+                      <a:r>
+                        <a:rPr lang="en-US" sz="900">
+                          <a:effectLst/>
+                        </a:rPr>
+                        <a:t>Moderate (12 heavy atoms in core)</a:t>
+                      </a:r>
+                    </a:p>
+                  </a:txBody>
+                  <a:tcPr marL="36890" marR="36890" marT="18445" marB="18445" anchor="ctr">
+                    <a:lnL w="12700" cap="flat" cmpd="sng" algn="ctr">
+                      <a:noFill/>
+                      <a:prstDash val="solid"/>
+                      <a:round/>
+                      <a:headEnd type="none" w="med" len="med"/>
+                      <a:tailEnd type="none" w="med" len="med"/>
+                    </a:lnL>
+                    <a:lnR w="12700" cap="flat" cmpd="sng" algn="ctr">
+                      <a:noFill/>
+                      <a:prstDash val="solid"/>
+                      <a:round/>
+                      <a:headEnd type="none" w="med" len="med"/>
+                      <a:tailEnd type="none" w="med" len="med"/>
+                    </a:lnR>
+                    <a:lnT w="12700" cap="flat" cmpd="sng" algn="ctr">
+                      <a:solidFill>
+                        <a:schemeClr val="tx1"/>
+                      </a:solidFill>
+                      <a:prstDash val="solid"/>
+                      <a:round/>
+                      <a:headEnd type="none" w="med" len="med"/>
+                      <a:tailEnd type="none" w="med" len="med"/>
+                    </a:lnT>
+                    <a:lnB w="12700" cap="flat" cmpd="sng" algn="ctr">
+                      <a:solidFill>
+                        <a:schemeClr val="tx1"/>
+                      </a:solidFill>
+                      <a:prstDash val="solid"/>
+                      <a:round/>
+                      <a:headEnd type="none" w="med" len="med"/>
+                      <a:tailEnd type="none" w="med" len="med"/>
+                    </a:lnB>
+                    <a:lnTlToBr w="12700" cmpd="sng">
+                      <a:noFill/>
+                      <a:prstDash val="solid"/>
+                    </a:lnTlToBr>
+                    <a:lnBlToTr w="12700" cmpd="sng">
+                      <a:noFill/>
+                      <a:prstDash val="solid"/>
+                    </a:lnBlToTr>
+                    <a:solidFill>
+                      <a:schemeClr val="bg1"/>
+                    </a:solidFill>
+                  </a:tcPr>
+                </a:tc>
+                <a:tc>
+                  <a:txBody>
+                    <a:bodyPr/>
+                    <a:lstStyle/>
+                    <a:p>
+                      <a:pPr algn="ctr" fontAlgn="t" latinLnBrk="0"/>
+                      <a:r>
+                        <a:rPr lang="de-DE" sz="900">
+                          <a:effectLst/>
+                        </a:rPr>
+                        <a:t>High (30 heavy atoms)</a:t>
+                      </a:r>
+                    </a:p>
+                  </a:txBody>
+                  <a:tcPr marL="36890" marR="36890" marT="18445" marB="18445" anchor="ctr">
+                    <a:lnL w="12700" cap="flat" cmpd="sng" algn="ctr">
+                      <a:noFill/>
+                      <a:prstDash val="solid"/>
+                      <a:round/>
+                      <a:headEnd type="none" w="med" len="med"/>
+                      <a:tailEnd type="none" w="med" len="med"/>
+                    </a:lnL>
+                    <a:lnR w="12700" cap="flat" cmpd="sng" algn="ctr">
+                      <a:noFill/>
+                      <a:prstDash val="solid"/>
+                      <a:round/>
+                      <a:headEnd type="none" w="med" len="med"/>
+                      <a:tailEnd type="none" w="med" len="med"/>
+                    </a:lnR>
+                    <a:lnT w="12700" cap="flat" cmpd="sng" algn="ctr">
+                      <a:solidFill>
+                        <a:schemeClr val="tx1"/>
+                      </a:solidFill>
+                      <a:prstDash val="solid"/>
+                      <a:round/>
+                      <a:headEnd type="none" w="med" len="med"/>
+                      <a:tailEnd type="none" w="med" len="med"/>
+                    </a:lnT>
+                    <a:lnB w="12700" cap="flat" cmpd="sng" algn="ctr">
+                      <a:solidFill>
+                        <a:schemeClr val="tx1"/>
+                      </a:solidFill>
+                      <a:prstDash val="solid"/>
+                      <a:round/>
+                      <a:headEnd type="none" w="med" len="med"/>
+                      <a:tailEnd type="none" w="med" len="med"/>
+                    </a:lnB>
+                    <a:lnTlToBr w="12700" cmpd="sng">
+                      <a:noFill/>
+                      <a:prstDash val="solid"/>
+                    </a:lnTlToBr>
+                    <a:lnBlToTr w="12700" cmpd="sng">
+                      <a:noFill/>
+                      <a:prstDash val="solid"/>
+                    </a:lnBlToTr>
+                    <a:solidFill>
+                      <a:schemeClr val="bg1"/>
+                    </a:solidFill>
+                  </a:tcPr>
+                </a:tc>
+                <a:tc>
+                  <a:txBody>
+                    <a:bodyPr/>
+                    <a:lstStyle/>
+                    <a:p>
+                      <a:pPr algn="ctr" fontAlgn="t" latinLnBrk="0"/>
+                      <a:r>
+                        <a:rPr lang="de-DE" sz="900">
+                          <a:effectLst/>
+                        </a:rPr>
+                        <a:t>Active has optimal complexity</a:t>
+                      </a:r>
+                    </a:p>
+                  </a:txBody>
+                  <a:tcPr marL="36890" marR="36890" marT="18445" marB="18445" anchor="ctr">
+                    <a:lnL w="12700" cap="flat" cmpd="sng" algn="ctr">
+                      <a:noFill/>
+                      <a:prstDash val="solid"/>
+                      <a:round/>
+                      <a:headEnd type="none" w="med" len="med"/>
+                      <a:tailEnd type="none" w="med" len="med"/>
+                    </a:lnL>
+                    <a:lnR w="12700" cap="flat" cmpd="sng" algn="ctr">
+                      <a:solidFill>
+                        <a:schemeClr val="tx1"/>
+                      </a:solidFill>
+                      <a:prstDash val="solid"/>
+                      <a:round/>
+                      <a:headEnd type="none" w="med" len="med"/>
+                      <a:tailEnd type="none" w="med" len="med"/>
+                    </a:lnR>
+                    <a:lnT w="12700" cap="flat" cmpd="sng" algn="ctr">
+                      <a:solidFill>
+                        <a:schemeClr val="tx1"/>
+                      </a:solidFill>
+                      <a:prstDash val="solid"/>
+                      <a:round/>
+                      <a:headEnd type="none" w="med" len="med"/>
+                      <a:tailEnd type="none" w="med" len="med"/>
+                    </a:lnT>
+                    <a:lnB w="12700" cap="flat" cmpd="sng" algn="ctr">
+                      <a:solidFill>
+                        <a:schemeClr val="tx1"/>
+                      </a:solidFill>
+                      <a:prstDash val="solid"/>
+                      <a:round/>
+                      <a:headEnd type="none" w="med" len="med"/>
+                      <a:tailEnd type="none" w="med" len="med"/>
+                    </a:lnB>
+                    <a:lnTlToBr w="12700" cmpd="sng">
+                      <a:noFill/>
+                      <a:prstDash val="solid"/>
+                    </a:lnTlToBr>
+                    <a:lnBlToTr w="12700" cmpd="sng">
+                      <a:noFill/>
+                      <a:prstDash val="solid"/>
+                    </a:lnBlToTr>
+                    <a:solidFill>
+                      <a:schemeClr val="bg1"/>
+                    </a:solidFill>
+                  </a:tcPr>
+                </a:tc>
+                <a:extLst>
+                  <a:ext uri="{0D108BD9-81ED-4DB2-BD59-A6C34878D82A}">
+                    <a16:rowId xmlns:a16="http://schemas.microsoft.com/office/drawing/2014/main" val="924069180"/>
+                  </a:ext>
+                </a:extLst>
+              </a:tr>
+              <a:tr h="249349">
+                <a:tc>
+                  <a:txBody>
+                    <a:bodyPr/>
+                    <a:lstStyle/>
+                    <a:p>
+                      <a:pPr algn="ctr" fontAlgn="t" latinLnBrk="0"/>
+                      <a:r>
+                        <a:rPr lang="de-DE" sz="900" b="1">
+                          <a:effectLst/>
+                        </a:rPr>
+                        <a:t>Feature Contribution</a:t>
+                      </a:r>
+                      <a:endParaRPr lang="de-DE" sz="900">
+                        <a:effectLst/>
+                      </a:endParaRPr>
+                    </a:p>
+                  </a:txBody>
+                  <a:tcPr marL="36890" marR="36890" marT="18445" marB="18445" anchor="ctr">
+                    <a:lnL w="12700" cap="flat" cmpd="sng" algn="ctr">
+                      <a:solidFill>
+                        <a:schemeClr val="tx1"/>
+                      </a:solidFill>
+                      <a:prstDash val="solid"/>
+                      <a:round/>
+                      <a:headEnd type="none" w="med" len="med"/>
+                      <a:tailEnd type="none" w="med" len="med"/>
+                    </a:lnL>
+                    <a:lnR w="12700" cap="flat" cmpd="sng" algn="ctr">
+                      <a:noFill/>
+                      <a:prstDash val="solid"/>
+                      <a:round/>
+                      <a:headEnd type="none" w="med" len="med"/>
+                      <a:tailEnd type="none" w="med" len="med"/>
+                    </a:lnR>
+                    <a:lnT w="12700" cap="flat" cmpd="sng" algn="ctr">
+                      <a:solidFill>
+                        <a:schemeClr val="tx1"/>
+                      </a:solidFill>
+                      <a:prstDash val="solid"/>
+                      <a:round/>
+                      <a:headEnd type="none" w="med" len="med"/>
+                      <a:tailEnd type="none" w="med" len="med"/>
+                    </a:lnT>
+                    <a:lnB w="12700" cap="flat" cmpd="sng" algn="ctr">
+                      <a:solidFill>
+                        <a:schemeClr val="tx1"/>
+                      </a:solidFill>
+                      <a:prstDash val="solid"/>
+                      <a:round/>
+                      <a:headEnd type="none" w="med" len="med"/>
+                      <a:tailEnd type="none" w="med" len="med"/>
+                    </a:lnB>
+                    <a:lnTlToBr w="12700" cmpd="sng">
+                      <a:noFill/>
+                      <a:prstDash val="solid"/>
+                    </a:lnTlToBr>
+                    <a:lnBlToTr w="12700" cmpd="sng">
+                      <a:noFill/>
+                      <a:prstDash val="solid"/>
+                    </a:lnBlToTr>
+                    <a:solidFill>
+                      <a:schemeClr val="bg1"/>
+                    </a:solidFill>
+                  </a:tcPr>
+                </a:tc>
+                <a:tc>
+                  <a:txBody>
+                    <a:bodyPr/>
+                    <a:lstStyle/>
+                    <a:p>
+                      <a:pPr algn="ctr" fontAlgn="t" latinLnBrk="0"/>
+                      <a:r>
+                        <a:rPr lang="de-DE" sz="900" dirty="0">
+                          <a:effectLst/>
+                        </a:rPr>
+                        <a:t>Distributed </a:t>
+                      </a:r>
+                      <a:r>
+                        <a:rPr lang="de-DE" sz="900" dirty="0" err="1">
+                          <a:effectLst/>
+                        </a:rPr>
+                        <a:t>across</a:t>
+                      </a:r>
+                      <a:r>
+                        <a:rPr lang="de-DE" sz="900" dirty="0">
+                          <a:effectLst/>
+                        </a:rPr>
+                        <a:t> </a:t>
+                      </a:r>
+                      <a:r>
+                        <a:rPr lang="de-DE" sz="900" dirty="0" err="1">
+                          <a:effectLst/>
+                        </a:rPr>
+                        <a:t>scaffold</a:t>
+                      </a:r>
+                      <a:endParaRPr lang="de-DE" sz="900" dirty="0">
+                        <a:effectLst/>
+                      </a:endParaRPr>
+                    </a:p>
+                  </a:txBody>
+                  <a:tcPr marL="36890" marR="36890" marT="18445" marB="18445" anchor="ctr">
+                    <a:lnL w="12700" cap="flat" cmpd="sng" algn="ctr">
+                      <a:noFill/>
+                      <a:prstDash val="solid"/>
+                      <a:round/>
+                      <a:headEnd type="none" w="med" len="med"/>
+                      <a:tailEnd type="none" w="med" len="med"/>
+                    </a:lnL>
+                    <a:lnR w="12700" cap="flat" cmpd="sng" algn="ctr">
+                      <a:noFill/>
+                      <a:prstDash val="solid"/>
+                      <a:round/>
+                      <a:headEnd type="none" w="med" len="med"/>
+                      <a:tailEnd type="none" w="med" len="med"/>
+                    </a:lnR>
+                    <a:lnT w="12700" cap="flat" cmpd="sng" algn="ctr">
+                      <a:solidFill>
+                        <a:schemeClr val="tx1"/>
+                      </a:solidFill>
+                      <a:prstDash val="solid"/>
+                      <a:round/>
+                      <a:headEnd type="none" w="med" len="med"/>
+                      <a:tailEnd type="none" w="med" len="med"/>
+                    </a:lnT>
+                    <a:lnB w="12700" cap="flat" cmpd="sng" algn="ctr">
+                      <a:solidFill>
+                        <a:schemeClr val="tx1"/>
+                      </a:solidFill>
+                      <a:prstDash val="solid"/>
+                      <a:round/>
+                      <a:headEnd type="none" w="med" len="med"/>
+                      <a:tailEnd type="none" w="med" len="med"/>
+                    </a:lnB>
+                    <a:lnTlToBr w="12700" cmpd="sng">
+                      <a:noFill/>
+                      <a:prstDash val="solid"/>
+                    </a:lnTlToBr>
+                    <a:lnBlToTr w="12700" cmpd="sng">
+                      <a:noFill/>
+                      <a:prstDash val="solid"/>
+                    </a:lnBlToTr>
+                    <a:solidFill>
+                      <a:schemeClr val="bg1"/>
+                    </a:solidFill>
+                  </a:tcPr>
+                </a:tc>
+                <a:tc>
+                  <a:txBody>
+                    <a:bodyPr/>
+                    <a:lstStyle/>
+                    <a:p>
+                      <a:pPr algn="ctr" fontAlgn="t" latinLnBrk="0"/>
+                      <a:r>
+                        <a:rPr lang="de-DE" sz="900" dirty="0" err="1">
+                          <a:effectLst/>
+                        </a:rPr>
+                        <a:t>Concentrated</a:t>
+                      </a:r>
+                      <a:r>
+                        <a:rPr lang="de-DE" sz="900" dirty="0">
+                          <a:effectLst/>
+                        </a:rPr>
+                        <a:t> in </a:t>
+                      </a:r>
+                      <a:r>
+                        <a:rPr lang="de-DE" sz="900" dirty="0" err="1">
+                          <a:effectLst/>
+                        </a:rPr>
+                        <a:t>one</a:t>
+                      </a:r>
+                      <a:r>
+                        <a:rPr lang="de-DE" sz="900" dirty="0">
+                          <a:effectLst/>
+                        </a:rPr>
+                        <a:t> </a:t>
+                      </a:r>
+                      <a:r>
+                        <a:rPr lang="de-DE" sz="900" dirty="0" err="1">
+                          <a:effectLst/>
+                        </a:rPr>
+                        <a:t>bond</a:t>
+                      </a:r>
+                      <a:endParaRPr lang="de-DE" sz="900" dirty="0">
+                        <a:effectLst/>
+                      </a:endParaRPr>
+                    </a:p>
+                  </a:txBody>
+                  <a:tcPr marL="36890" marR="36890" marT="18445" marB="18445" anchor="ctr">
+                    <a:lnL w="12700" cap="flat" cmpd="sng" algn="ctr">
+                      <a:noFill/>
+                      <a:prstDash val="solid"/>
+                      <a:round/>
+                      <a:headEnd type="none" w="med" len="med"/>
+                      <a:tailEnd type="none" w="med" len="med"/>
+                    </a:lnL>
+                    <a:lnR w="12700" cap="flat" cmpd="sng" algn="ctr">
+                      <a:noFill/>
+                      <a:prstDash val="solid"/>
+                      <a:round/>
+                      <a:headEnd type="none" w="med" len="med"/>
+                      <a:tailEnd type="none" w="med" len="med"/>
+                    </a:lnR>
+                    <a:lnT w="12700" cap="flat" cmpd="sng" algn="ctr">
+                      <a:solidFill>
+                        <a:schemeClr val="tx1"/>
+                      </a:solidFill>
+                      <a:prstDash val="solid"/>
+                      <a:round/>
+                      <a:headEnd type="none" w="med" len="med"/>
+                      <a:tailEnd type="none" w="med" len="med"/>
+                    </a:lnT>
+                    <a:lnB w="12700" cap="flat" cmpd="sng" algn="ctr">
+                      <a:solidFill>
+                        <a:schemeClr val="tx1"/>
+                      </a:solidFill>
+                      <a:prstDash val="solid"/>
+                      <a:round/>
+                      <a:headEnd type="none" w="med" len="med"/>
+                      <a:tailEnd type="none" w="med" len="med"/>
+                    </a:lnB>
+                    <a:lnTlToBr w="12700" cmpd="sng">
+                      <a:noFill/>
+                      <a:prstDash val="solid"/>
+                    </a:lnTlToBr>
+                    <a:lnBlToTr w="12700" cmpd="sng">
+                      <a:noFill/>
+                      <a:prstDash val="solid"/>
+                    </a:lnBlToTr>
+                    <a:solidFill>
+                      <a:schemeClr val="bg1"/>
+                    </a:solidFill>
+                  </a:tcPr>
+                </a:tc>
+                <a:tc>
+                  <a:txBody>
+                    <a:bodyPr/>
+                    <a:lstStyle/>
+                    <a:p>
+                      <a:pPr algn="ctr" fontAlgn="t" latinLnBrk="0"/>
+                      <a:r>
+                        <a:rPr lang="en-US" sz="900" dirty="0">
+                          <a:effectLst/>
+                        </a:rPr>
+                        <a:t>Active uses more balanced features</a:t>
+                      </a:r>
+                    </a:p>
+                  </a:txBody>
+                  <a:tcPr marL="36890" marR="36890" marT="18445" marB="18445" anchor="ctr">
+                    <a:lnL w="12700" cap="flat" cmpd="sng" algn="ctr">
+                      <a:noFill/>
+                      <a:prstDash val="solid"/>
+                      <a:round/>
+                      <a:headEnd type="none" w="med" len="med"/>
+                      <a:tailEnd type="none" w="med" len="med"/>
+                    </a:lnL>
+                    <a:lnR w="12700" cap="flat" cmpd="sng" algn="ctr">
+                      <a:solidFill>
+                        <a:schemeClr val="tx1"/>
+                      </a:solidFill>
+                      <a:prstDash val="solid"/>
+                      <a:round/>
+                      <a:headEnd type="none" w="med" len="med"/>
+                      <a:tailEnd type="none" w="med" len="med"/>
+                    </a:lnR>
+                    <a:lnT w="12700" cap="flat" cmpd="sng" algn="ctr">
+                      <a:solidFill>
+                        <a:schemeClr val="tx1"/>
+                      </a:solidFill>
+                      <a:prstDash val="solid"/>
+                      <a:round/>
+                      <a:headEnd type="none" w="med" len="med"/>
+                      <a:tailEnd type="none" w="med" len="med"/>
+                    </a:lnT>
+                    <a:lnB w="12700" cap="flat" cmpd="sng" algn="ctr">
+                      <a:solidFill>
+                        <a:schemeClr val="tx1"/>
+                      </a:solidFill>
+                      <a:prstDash val="solid"/>
+                      <a:round/>
+                      <a:headEnd type="none" w="med" len="med"/>
+                      <a:tailEnd type="none" w="med" len="med"/>
+                    </a:lnB>
+                    <a:lnTlToBr w="12700" cmpd="sng">
+                      <a:noFill/>
+                      <a:prstDash val="solid"/>
+                    </a:lnTlToBr>
+                    <a:lnBlToTr w="12700" cmpd="sng">
+                      <a:noFill/>
+                      <a:prstDash val="solid"/>
+                    </a:lnBlToTr>
+                    <a:solidFill>
+                      <a:schemeClr val="bg1"/>
+                    </a:solidFill>
+                  </a:tcPr>
+                </a:tc>
+                <a:extLst>
+                  <a:ext uri="{0D108BD9-81ED-4DB2-BD59-A6C34878D82A}">
+                    <a16:rowId xmlns:a16="http://schemas.microsoft.com/office/drawing/2014/main" val="1126296687"/>
+                  </a:ext>
+                </a:extLst>
+              </a:tr>
+            </a:tbl>
+          </a:graphicData>
+        </a:graphic>
+      </p:graphicFrame>
+      <p:grpSp>
+        <p:nvGrpSpPr>
+          <p:cNvPr id="4" name="Group 3">
+            <a:extLst>
+              <a:ext uri="{FF2B5EF4-FFF2-40B4-BE49-F238E27FC236}">
+                <a16:creationId xmlns:a16="http://schemas.microsoft.com/office/drawing/2014/main" id="{A2A206DE-ED6D-9661-53EF-57A36E7DD177}"/>
+              </a:ext>
+            </a:extLst>
+          </p:cNvPr>
+          <p:cNvGrpSpPr/>
+          <p:nvPr/>
+        </p:nvGrpSpPr>
+        <p:grpSpPr>
+          <a:xfrm>
+            <a:off x="367388" y="1222419"/>
+            <a:ext cx="1366041" cy="1979176"/>
+            <a:chOff x="223305" y="3843276"/>
+            <a:chExt cx="1366041" cy="1979176"/>
+          </a:xfrm>
+        </p:grpSpPr>
+        <p:sp>
+          <p:nvSpPr>
+            <p:cNvPr id="7" name="Rectangle 6">
+              <a:extLst>
+                <a:ext uri="{FF2B5EF4-FFF2-40B4-BE49-F238E27FC236}">
+                  <a16:creationId xmlns:a16="http://schemas.microsoft.com/office/drawing/2014/main" id="{E4213966-0D01-06E1-94C5-F6F95DC868B6}"/>
+                </a:ext>
+              </a:extLst>
+            </p:cNvPr>
+            <p:cNvSpPr/>
+            <p:nvPr/>
+          </p:nvSpPr>
+          <p:spPr>
+            <a:xfrm>
+              <a:off x="223305" y="3843276"/>
+              <a:ext cx="1366041" cy="1979176"/>
+            </a:xfrm>
+            <a:prstGeom prst="rect">
+              <a:avLst/>
+            </a:prstGeom>
+            <a:solidFill>
+              <a:srgbClr val="156082">
+                <a:lumMod val="20000"/>
+                <a:lumOff val="80000"/>
+              </a:srgbClr>
+            </a:solidFill>
+            <a:ln w="19050" cap="flat" cmpd="sng" algn="ctr">
+              <a:solidFill>
+                <a:srgbClr val="0E2841">
+                  <a:lumMod val="25000"/>
+                  <a:lumOff val="75000"/>
+                </a:srgbClr>
+              </a:solidFill>
+              <a:prstDash val="solid"/>
+              <a:miter lim="800000"/>
+            </a:ln>
+            <a:effectLst/>
+          </p:spPr>
+          <p:txBody>
+            <a:bodyPr rtlCol="0" anchor="ctr"/>
+            <a:lstStyle/>
+            <a:p>
+              <a:pPr marL="0" marR="0" lvl="0" indent="0" algn="ctr" defTabSz="914400" eaLnBrk="1" fontAlgn="auto" latinLnBrk="0" hangingPunct="1">
+                <a:lnSpc>
+                  <a:spcPct val="100000"/>
+                </a:lnSpc>
+                <a:spcBef>
+                  <a:spcPts val="0"/>
+                </a:spcBef>
+                <a:spcAft>
+                  <a:spcPts val="0"/>
+                </a:spcAft>
+                <a:buClrTx/>
+                <a:buSzTx/>
+                <a:buFontTx/>
+                <a:buNone/>
+                <a:tabLst/>
+                <a:defRPr/>
+              </a:pPr>
+              <a:endParaRPr kumimoji="0" lang="en-US" sz="1800" b="0" i="0" u="none" strike="noStrike" kern="0" cap="none" spc="0" normalizeH="0" baseline="0" noProof="0" dirty="0">
+                <a:ln>
+                  <a:noFill/>
+                </a:ln>
+                <a:solidFill>
+                  <a:prstClr val="white"/>
+                </a:solidFill>
+                <a:effectLst/>
+                <a:uLnTx/>
+                <a:uFillTx/>
+                <a:latin typeface="Aptos" panose="02110004020202020204"/>
+                <a:ea typeface="+mn-ea"/>
+                <a:cs typeface="+mn-cs"/>
+              </a:endParaRPr>
+            </a:p>
+          </p:txBody>
+        </p:sp>
+        <p:pic>
+          <p:nvPicPr>
+            <p:cNvPr id="8" name="Graphic 7" descr="Customer review with solid fill">
+              <a:extLst>
+                <a:ext uri="{FF2B5EF4-FFF2-40B4-BE49-F238E27FC236}">
+                  <a16:creationId xmlns:a16="http://schemas.microsoft.com/office/drawing/2014/main" id="{C227361F-FE61-5B84-B7F7-3B238BDFB358}"/>
+                </a:ext>
+              </a:extLst>
+            </p:cNvPr>
+            <p:cNvPicPr>
+              <a:picLocks noChangeAspect="1"/>
+            </p:cNvPicPr>
+            <p:nvPr/>
+          </p:nvPicPr>
+          <p:blipFill>
+            <a:blip r:embed="rId5">
+              <a:extLst>
+                <a:ext uri="{96DAC541-7B7A-43D3-8B79-37D633B846F1}">
+                  <asvg:svgBlip xmlns:asvg="http://schemas.microsoft.com/office/drawing/2016/SVG/main" r:embed="rId6"/>
+                </a:ext>
+              </a:extLst>
+            </a:blip>
+            <a:stretch>
+              <a:fillRect/>
+            </a:stretch>
+          </p:blipFill>
+          <p:spPr>
+            <a:xfrm>
+              <a:off x="492708" y="4936096"/>
+              <a:ext cx="827234" cy="827234"/>
+            </a:xfrm>
+            <a:prstGeom prst="rect">
+              <a:avLst/>
+            </a:prstGeom>
+          </p:spPr>
+        </p:pic>
+        <p:pic>
+          <p:nvPicPr>
+            <p:cNvPr id="9" name="Picture 8">
+              <a:extLst>
+                <a:ext uri="{FF2B5EF4-FFF2-40B4-BE49-F238E27FC236}">
+                  <a16:creationId xmlns:a16="http://schemas.microsoft.com/office/drawing/2014/main" id="{9E4CCA29-0171-4C26-0786-216C913B3C44}"/>
+                </a:ext>
+              </a:extLst>
+            </p:cNvPr>
+            <p:cNvPicPr>
+              <a:picLocks noChangeAspect="1"/>
+            </p:cNvPicPr>
+            <p:nvPr/>
+          </p:nvPicPr>
+          <p:blipFill>
+            <a:blip r:embed="rId7"/>
+            <a:stretch>
+              <a:fillRect/>
+            </a:stretch>
+          </p:blipFill>
+          <p:spPr>
+            <a:xfrm>
+              <a:off x="323946" y="3943981"/>
+              <a:ext cx="1164759" cy="761328"/>
+            </a:xfrm>
+            <a:prstGeom prst="rect">
+              <a:avLst/>
+            </a:prstGeom>
+          </p:spPr>
+        </p:pic>
+      </p:grpSp>
+    </p:spTree>
+    <p:extLst>
+      <p:ext uri="{BB962C8B-B14F-4D97-AF65-F5344CB8AC3E}">
+        <p14:creationId xmlns:p14="http://schemas.microsoft.com/office/powerpoint/2010/main" val="3779158166"/>
+      </p:ext>
+    </p:extLst>
+  </p:cSld>
+  <p:clrMapOvr>
+    <a:masterClrMapping/>
+  </p:clrMapOvr>
+</p:sld>
+</file>
+
+<file path=ppt/slides/slide17.xml><?xml version="1.0" encoding="utf-8"?>
 <p:sld xmlns:a="http://schemas.openxmlformats.org/drawingml/2006/main" xmlns:r="http://schemas.openxmlformats.org/officeDocument/2006/relationships" xmlns:p="http://schemas.openxmlformats.org/presentationml/2006/main">
   <p:cSld>
     <p:spTree>
@@ -20668,7 +23051,7 @@
 </p:sld>
 </file>
 
-<file path=ppt/slides/slide17.xml><?xml version="1.0" encoding="utf-8"?>
+<file path=ppt/slides/slide18.xml><?xml version="1.0" encoding="utf-8"?>
 <p:sld xmlns:a="http://schemas.openxmlformats.org/drawingml/2006/main" xmlns:r="http://schemas.openxmlformats.org/officeDocument/2006/relationships" xmlns:p="http://schemas.openxmlformats.org/presentationml/2006/main">
   <p:cSld>
     <p:spTree>
@@ -22169,7 +24552,7 @@
 </p:sld>
 </file>
 
-<file path=ppt/slides/slide18.xml><?xml version="1.0" encoding="utf-8"?>
+<file path=ppt/slides/slide19.xml><?xml version="1.0" encoding="utf-8"?>
 <p:sld xmlns:a="http://schemas.openxmlformats.org/drawingml/2006/main" xmlns:r="http://schemas.openxmlformats.org/officeDocument/2006/relationships" xmlns:p="http://schemas.openxmlformats.org/presentationml/2006/main">
   <p:cSld>
     <p:spTree>
@@ -23274,756 +25657,6 @@
     <p:extLst>
       <p:ext uri="{BB962C8B-B14F-4D97-AF65-F5344CB8AC3E}">
         <p14:creationId xmlns:p14="http://schemas.microsoft.com/office/powerpoint/2010/main" val="2810728679"/>
-      </p:ext>
-    </p:extLst>
-  </p:cSld>
-  <p:clrMapOvr>
-    <a:masterClrMapping/>
-  </p:clrMapOvr>
-</p:sld>
-</file>
-
-<file path=ppt/slides/slide19.xml><?xml version="1.0" encoding="utf-8"?>
-<p:sld xmlns:a="http://schemas.openxmlformats.org/drawingml/2006/main" xmlns:r="http://schemas.openxmlformats.org/officeDocument/2006/relationships" xmlns:p="http://schemas.openxmlformats.org/presentationml/2006/main">
-  <p:cSld>
-    <p:spTree>
-      <p:nvGrpSpPr>
-        <p:cNvPr id="1" name="">
-          <a:extLst>
-            <a:ext uri="{FF2B5EF4-FFF2-40B4-BE49-F238E27FC236}">
-              <a16:creationId xmlns:a16="http://schemas.microsoft.com/office/drawing/2014/main" id="{A6515F23-0912-A838-23CE-B8F00573A2DA}"/>
-            </a:ext>
-          </a:extLst>
-        </p:cNvPr>
-        <p:cNvGrpSpPr/>
-        <p:nvPr/>
-      </p:nvGrpSpPr>
-      <p:grpSpPr>
-        <a:xfrm>
-          <a:off x="0" y="0"/>
-          <a:ext cx="0" cy="0"/>
-          <a:chOff x="0" y="0"/>
-          <a:chExt cx="0" cy="0"/>
-        </a:xfrm>
-      </p:grpSpPr>
-      <p:sp>
-        <p:nvSpPr>
-          <p:cNvPr id="29" name="TextBox 28">
-            <a:extLst>
-              <a:ext uri="{FF2B5EF4-FFF2-40B4-BE49-F238E27FC236}">
-                <a16:creationId xmlns:a16="http://schemas.microsoft.com/office/drawing/2014/main" id="{50EF08DE-650D-84D8-23E2-83CD379C9565}"/>
-              </a:ext>
-            </a:extLst>
-          </p:cNvPr>
-          <p:cNvSpPr txBox="1"/>
-          <p:nvPr/>
-        </p:nvSpPr>
-        <p:spPr>
-          <a:xfrm>
-            <a:off x="3215444" y="1198799"/>
-            <a:ext cx="2126816" cy="338554"/>
-          </a:xfrm>
-          <a:prstGeom prst="rect">
-            <a:avLst/>
-          </a:prstGeom>
-          <a:noFill/>
-        </p:spPr>
-        <p:txBody>
-          <a:bodyPr wrap="square" rtlCol="0">
-            <a:spAutoFit/>
-          </a:bodyPr>
-          <a:lstStyle/>
-          <a:p>
-            <a:pPr algn="ctr"/>
-            <a:endParaRPr lang="de-DE" sz="1600" b="1" dirty="0"/>
-          </a:p>
-        </p:txBody>
-      </p:sp>
-      <p:sp>
-        <p:nvSpPr>
-          <p:cNvPr id="37" name="TextBox 36">
-            <a:extLst>
-              <a:ext uri="{FF2B5EF4-FFF2-40B4-BE49-F238E27FC236}">
-                <a16:creationId xmlns:a16="http://schemas.microsoft.com/office/drawing/2014/main" id="{A9B538AC-1716-FEE9-9303-C64FEB3A2571}"/>
-              </a:ext>
-            </a:extLst>
-          </p:cNvPr>
-          <p:cNvSpPr txBox="1"/>
-          <p:nvPr/>
-        </p:nvSpPr>
-        <p:spPr>
-          <a:xfrm>
-            <a:off x="6180085" y="1198799"/>
-            <a:ext cx="2126815" cy="338554"/>
-          </a:xfrm>
-          <a:prstGeom prst="rect">
-            <a:avLst/>
-          </a:prstGeom>
-          <a:noFill/>
-        </p:spPr>
-        <p:txBody>
-          <a:bodyPr wrap="square" rtlCol="0">
-            <a:spAutoFit/>
-          </a:bodyPr>
-          <a:lstStyle/>
-          <a:p>
-            <a:pPr algn="ctr"/>
-            <a:endParaRPr lang="de-DE" sz="1600" b="1" dirty="0"/>
-          </a:p>
-        </p:txBody>
-      </p:sp>
-      <p:sp>
-        <p:nvSpPr>
-          <p:cNvPr id="163" name="PlaceHolder 1">
-            <a:extLst>
-              <a:ext uri="{FF2B5EF4-FFF2-40B4-BE49-F238E27FC236}">
-                <a16:creationId xmlns:a16="http://schemas.microsoft.com/office/drawing/2014/main" id="{57944F4B-F502-E7CC-8790-8737702BC6AC}"/>
-              </a:ext>
-            </a:extLst>
-          </p:cNvPr>
-          <p:cNvSpPr>
-            <a:spLocks noGrp="1"/>
-          </p:cNvSpPr>
-          <p:nvPr>
-            <p:ph type="title"/>
-          </p:nvPr>
-        </p:nvSpPr>
-        <p:spPr>
-          <a:xfrm>
-            <a:off x="380880" y="228600"/>
-            <a:ext cx="8380080" cy="837720"/>
-          </a:xfrm>
-          <a:prstGeom prst="rect">
-            <a:avLst/>
-          </a:prstGeom>
-          <a:noFill/>
-          <a:ln w="0">
-            <a:noFill/>
-          </a:ln>
-        </p:spPr>
-        <p:txBody>
-          <a:bodyPr numCol="1" spcCol="0" anchor="ctr">
-            <a:noAutofit/>
-          </a:bodyPr>
-          <a:lstStyle/>
-          <a:p>
-            <a:pPr>
-              <a:lnSpc>
-                <a:spcPct val="100000"/>
-              </a:lnSpc>
-              <a:buNone/>
-            </a:pPr>
-            <a:r>
-              <a:rPr lang="en-US" sz="3200" b="0" strike="noStrike" spc="-1" dirty="0">
-                <a:solidFill>
-                  <a:srgbClr val="0064C8"/>
-                </a:solidFill>
-                <a:latin typeface="Century Gothic"/>
-              </a:rPr>
-              <a:t>Prompt </a:t>
-            </a:r>
-            <a:r>
-              <a:rPr lang="en-US" sz="3200" spc="-1" dirty="0">
-                <a:solidFill>
-                  <a:srgbClr val="0064C8"/>
-                </a:solidFill>
-                <a:latin typeface="Century Gothic"/>
-              </a:rPr>
-              <a:t>4</a:t>
-            </a:r>
-            <a:endParaRPr lang="en-US" sz="3200" b="0" strike="noStrike" spc="-1" dirty="0">
-              <a:solidFill>
-                <a:srgbClr val="000000"/>
-              </a:solidFill>
-              <a:latin typeface="Century Gothic"/>
-            </a:endParaRPr>
-          </a:p>
-        </p:txBody>
-      </p:sp>
-      <p:sp>
-        <p:nvSpPr>
-          <p:cNvPr id="54" name="TextBox 53">
-            <a:extLst>
-              <a:ext uri="{FF2B5EF4-FFF2-40B4-BE49-F238E27FC236}">
-                <a16:creationId xmlns:a16="http://schemas.microsoft.com/office/drawing/2014/main" id="{94937509-898F-450F-9596-9686594F7DA8}"/>
-              </a:ext>
-            </a:extLst>
-          </p:cNvPr>
-          <p:cNvSpPr txBox="1"/>
-          <p:nvPr/>
-        </p:nvSpPr>
-        <p:spPr>
-          <a:xfrm>
-            <a:off x="3215443" y="1191667"/>
-            <a:ext cx="2126816" cy="338554"/>
-          </a:xfrm>
-          <a:prstGeom prst="rect">
-            <a:avLst/>
-          </a:prstGeom>
-          <a:noFill/>
-        </p:spPr>
-        <p:txBody>
-          <a:bodyPr wrap="square" rtlCol="0">
-            <a:spAutoFit/>
-          </a:bodyPr>
-          <a:lstStyle/>
-          <a:p>
-            <a:pPr algn="ctr"/>
-            <a:r>
-              <a:rPr lang="en-US" sz="1600" b="1" dirty="0"/>
-              <a:t>GCN</a:t>
-            </a:r>
-            <a:endParaRPr lang="de-DE" sz="1600" b="1" dirty="0"/>
-          </a:p>
-        </p:txBody>
-      </p:sp>
-      <p:sp>
-        <p:nvSpPr>
-          <p:cNvPr id="55" name="TextBox 54">
-            <a:extLst>
-              <a:ext uri="{FF2B5EF4-FFF2-40B4-BE49-F238E27FC236}">
-                <a16:creationId xmlns:a16="http://schemas.microsoft.com/office/drawing/2014/main" id="{0FC6AAC7-E13F-47C8-9C73-B83D4169B6C3}"/>
-              </a:ext>
-            </a:extLst>
-          </p:cNvPr>
-          <p:cNvSpPr txBox="1"/>
-          <p:nvPr/>
-        </p:nvSpPr>
-        <p:spPr>
-          <a:xfrm>
-            <a:off x="6180084" y="1191667"/>
-            <a:ext cx="2126815" cy="338554"/>
-          </a:xfrm>
-          <a:prstGeom prst="rect">
-            <a:avLst/>
-          </a:prstGeom>
-          <a:noFill/>
-        </p:spPr>
-        <p:txBody>
-          <a:bodyPr wrap="square" rtlCol="0">
-            <a:spAutoFit/>
-          </a:bodyPr>
-          <a:lstStyle/>
-          <a:p>
-            <a:pPr algn="ctr"/>
-            <a:r>
-              <a:rPr lang="en-US" sz="1600" b="1" dirty="0"/>
-              <a:t>GAT</a:t>
-            </a:r>
-            <a:endParaRPr lang="de-DE" sz="1600" b="1" dirty="0"/>
-          </a:p>
-        </p:txBody>
-      </p:sp>
-      <p:sp>
-        <p:nvSpPr>
-          <p:cNvPr id="60" name="TextBox 59">
-            <a:extLst>
-              <a:ext uri="{FF2B5EF4-FFF2-40B4-BE49-F238E27FC236}">
-                <a16:creationId xmlns:a16="http://schemas.microsoft.com/office/drawing/2014/main" id="{543C76E0-DAAA-492F-BA6E-687D6B295DC2}"/>
-              </a:ext>
-            </a:extLst>
-          </p:cNvPr>
-          <p:cNvSpPr txBox="1"/>
-          <p:nvPr/>
-        </p:nvSpPr>
-        <p:spPr>
-          <a:xfrm>
-            <a:off x="482461" y="3969415"/>
-            <a:ext cx="3949638" cy="338554"/>
-          </a:xfrm>
-          <a:prstGeom prst="rect">
-            <a:avLst/>
-          </a:prstGeom>
-          <a:noFill/>
-        </p:spPr>
-        <p:txBody>
-          <a:bodyPr wrap="square" rtlCol="0">
-            <a:spAutoFit/>
-          </a:bodyPr>
-          <a:lstStyle/>
-          <a:p>
-            <a:r>
-              <a:rPr lang="en-US" sz="1600" b="1" dirty="0"/>
-              <a:t>Conclusion</a:t>
-            </a:r>
-            <a:endParaRPr lang="de-DE" sz="1600" b="1" dirty="0"/>
-          </a:p>
-        </p:txBody>
-      </p:sp>
-      <p:sp>
-        <p:nvSpPr>
-          <p:cNvPr id="61" name="TextBox 60">
-            <a:extLst>
-              <a:ext uri="{FF2B5EF4-FFF2-40B4-BE49-F238E27FC236}">
-                <a16:creationId xmlns:a16="http://schemas.microsoft.com/office/drawing/2014/main" id="{9767668A-54AF-40AC-B5A4-2A353350EE2E}"/>
-              </a:ext>
-            </a:extLst>
-          </p:cNvPr>
-          <p:cNvSpPr txBox="1"/>
-          <p:nvPr/>
-        </p:nvSpPr>
-        <p:spPr>
-          <a:xfrm>
-            <a:off x="482461" y="4317931"/>
-            <a:ext cx="8148034" cy="830997"/>
-          </a:xfrm>
-          <a:prstGeom prst="rect">
-            <a:avLst/>
-          </a:prstGeom>
-          <a:noFill/>
-        </p:spPr>
-        <p:txBody>
-          <a:bodyPr wrap="square">
-            <a:spAutoFit/>
-          </a:bodyPr>
-          <a:lstStyle/>
-          <a:p>
-            <a:r>
-              <a:rPr lang="en-US" sz="1200" b="0" i="0" dirty="0">
-                <a:effectLst/>
-              </a:rPr>
-              <a:t>While both models correctly predict this compound as active, </a:t>
-            </a:r>
-            <a:r>
-              <a:rPr lang="en-US" sz="1200" b="1" i="0" dirty="0">
-                <a:effectLst/>
-              </a:rPr>
-              <a:t>GAT demonstrates superior performance</a:t>
-            </a:r>
-            <a:r>
-              <a:rPr lang="en-US" sz="1200" b="0" i="0" dirty="0">
-                <a:effectLst/>
-              </a:rPr>
-              <a:t> and learns more sophisticated molecular representations through its attention mechanism. GAT's focus on the piperazine backbone suggests it captures </a:t>
-            </a:r>
-            <a:r>
-              <a:rPr lang="en-US" sz="1200" b="1" i="0" dirty="0">
-                <a:effectLst/>
-              </a:rPr>
-              <a:t>pharmacophore-relevant features</a:t>
-            </a:r>
-            <a:r>
-              <a:rPr lang="en-US" sz="1200" b="0" i="0" dirty="0">
-                <a:effectLst/>
-              </a:rPr>
-              <a:t> more effectively than GCN's fragment-based approach.</a:t>
-            </a:r>
-            <a:endParaRPr lang="de-DE" sz="1200" dirty="0"/>
-          </a:p>
-        </p:txBody>
-      </p:sp>
-      <p:pic>
-        <p:nvPicPr>
-          <p:cNvPr id="62" name="Picture 61">
-            <a:extLst>
-              <a:ext uri="{FF2B5EF4-FFF2-40B4-BE49-F238E27FC236}">
-                <a16:creationId xmlns:a16="http://schemas.microsoft.com/office/drawing/2014/main" id="{FD9BA923-0A0D-496E-B5E3-37862AF11367}"/>
-              </a:ext>
-            </a:extLst>
-          </p:cNvPr>
-          <p:cNvPicPr>
-            <a:picLocks noChangeAspect="1"/>
-          </p:cNvPicPr>
-          <p:nvPr/>
-        </p:nvPicPr>
-        <p:blipFill rotWithShape="1">
-          <a:blip r:embed="rId3"/>
-          <a:srcRect l="12757" t="8229" r="10218" b="12776"/>
-          <a:stretch/>
-        </p:blipFill>
-        <p:spPr>
-          <a:xfrm>
-            <a:off x="3126534" y="1707534"/>
-            <a:ext cx="2649606" cy="1528543"/>
-          </a:xfrm>
-          <a:prstGeom prst="rect">
-            <a:avLst/>
-          </a:prstGeom>
-        </p:spPr>
-      </p:pic>
-      <p:pic>
-        <p:nvPicPr>
-          <p:cNvPr id="63" name="Picture 62">
-            <a:extLst>
-              <a:ext uri="{FF2B5EF4-FFF2-40B4-BE49-F238E27FC236}">
-                <a16:creationId xmlns:a16="http://schemas.microsoft.com/office/drawing/2014/main" id="{132EE792-E031-4B62-A040-2F1AB742541A}"/>
-              </a:ext>
-            </a:extLst>
-          </p:cNvPr>
-          <p:cNvPicPr>
-            <a:picLocks noChangeAspect="1"/>
-          </p:cNvPicPr>
-          <p:nvPr/>
-        </p:nvPicPr>
-        <p:blipFill rotWithShape="1">
-          <a:blip r:embed="rId4"/>
-          <a:srcRect l="13677" t="11105" r="10217" b="13350"/>
-          <a:stretch/>
-        </p:blipFill>
-        <p:spPr>
-          <a:xfrm>
-            <a:off x="5927416" y="1720100"/>
-            <a:ext cx="2833544" cy="1582127"/>
-          </a:xfrm>
-          <a:prstGeom prst="rect">
-            <a:avLst/>
-          </a:prstGeom>
-        </p:spPr>
-      </p:pic>
-      <p:sp>
-        <p:nvSpPr>
-          <p:cNvPr id="64" name="TextBox 63">
-            <a:extLst>
-              <a:ext uri="{FF2B5EF4-FFF2-40B4-BE49-F238E27FC236}">
-                <a16:creationId xmlns:a16="http://schemas.microsoft.com/office/drawing/2014/main" id="{796D7F20-3E62-4DC7-B9AE-BE93AFDFAEFB}"/>
-              </a:ext>
-            </a:extLst>
-          </p:cNvPr>
-          <p:cNvSpPr txBox="1"/>
-          <p:nvPr/>
-        </p:nvSpPr>
-        <p:spPr>
-          <a:xfrm>
-            <a:off x="910795" y="5353316"/>
-            <a:ext cx="7719699" cy="646331"/>
-          </a:xfrm>
-          <a:prstGeom prst="rect">
-            <a:avLst/>
-          </a:prstGeom>
-          <a:noFill/>
-        </p:spPr>
-        <p:txBody>
-          <a:bodyPr wrap="square">
-            <a:spAutoFit/>
-          </a:bodyPr>
-          <a:lstStyle/>
-          <a:p>
-            <a:r>
-              <a:rPr lang="en-US" sz="1200" b="1" i="0" dirty="0">
-                <a:effectLst/>
-              </a:rPr>
-              <a:t>Note</a:t>
-            </a:r>
-            <a:r>
-              <a:rPr lang="en-US" sz="1200" b="0" i="0" dirty="0">
-                <a:effectLst/>
-              </a:rPr>
-              <a:t>: the agent focused on the differences, overinterpreting the results. It is clear that the models learned similar patterns (with different top bonds and magnitudes), but the agent did not mention any similarity between them.</a:t>
-            </a:r>
-            <a:endParaRPr lang="de-DE" sz="1200" dirty="0"/>
-          </a:p>
-        </p:txBody>
-      </p:sp>
-      <p:pic>
-        <p:nvPicPr>
-          <p:cNvPr id="3" name="Graphic 2" descr="Question mark with solid fill">
-            <a:extLst>
-              <a:ext uri="{FF2B5EF4-FFF2-40B4-BE49-F238E27FC236}">
-                <a16:creationId xmlns:a16="http://schemas.microsoft.com/office/drawing/2014/main" id="{B33A209D-3182-7189-3424-2E0DC3A62557}"/>
-              </a:ext>
-            </a:extLst>
-          </p:cNvPr>
-          <p:cNvPicPr>
-            <a:picLocks noChangeAspect="1"/>
-          </p:cNvPicPr>
-          <p:nvPr/>
-        </p:nvPicPr>
-        <p:blipFill>
-          <a:blip r:embed="rId5">
-            <a:extLst>
-              <a:ext uri="{96DAC541-7B7A-43D3-8B79-37D633B846F1}">
-                <asvg:svgBlip xmlns:asvg="http://schemas.microsoft.com/office/drawing/2016/SVG/main" r:embed="rId6"/>
-              </a:ext>
-            </a:extLst>
-          </a:blip>
-          <a:stretch>
-            <a:fillRect/>
-          </a:stretch>
-        </p:blipFill>
-        <p:spPr>
-          <a:xfrm>
-            <a:off x="8443453" y="4333185"/>
-            <a:ext cx="635013" cy="635013"/>
-          </a:xfrm>
-          <a:prstGeom prst="rect">
-            <a:avLst/>
-          </a:prstGeom>
-        </p:spPr>
-      </p:pic>
-      <p:pic>
-        <p:nvPicPr>
-          <p:cNvPr id="5" name="Graphic 4" descr="Warning with solid fill">
-            <a:extLst>
-              <a:ext uri="{FF2B5EF4-FFF2-40B4-BE49-F238E27FC236}">
-                <a16:creationId xmlns:a16="http://schemas.microsoft.com/office/drawing/2014/main" id="{9419031D-EA28-7F26-8092-8C420B4E0C42}"/>
-              </a:ext>
-            </a:extLst>
-          </p:cNvPr>
-          <p:cNvPicPr>
-            <a:picLocks noChangeAspect="1"/>
-          </p:cNvPicPr>
-          <p:nvPr/>
-        </p:nvPicPr>
-        <p:blipFill>
-          <a:blip r:embed="rId7">
-            <a:extLst>
-              <a:ext uri="{96DAC541-7B7A-43D3-8B79-37D633B846F1}">
-                <asvg:svgBlip xmlns:asvg="http://schemas.microsoft.com/office/drawing/2016/SVG/main" r:embed="rId8"/>
-              </a:ext>
-            </a:extLst>
-          </a:blip>
-          <a:stretch>
-            <a:fillRect/>
-          </a:stretch>
-        </p:blipFill>
-        <p:spPr>
-          <a:xfrm>
-            <a:off x="402795" y="5422481"/>
-            <a:ext cx="508000" cy="508000"/>
-          </a:xfrm>
-          <a:prstGeom prst="rect">
-            <a:avLst/>
-          </a:prstGeom>
-        </p:spPr>
-      </p:pic>
-      <p:sp>
-        <p:nvSpPr>
-          <p:cNvPr id="9" name="Arrow: Right 8">
-            <a:extLst>
-              <a:ext uri="{FF2B5EF4-FFF2-40B4-BE49-F238E27FC236}">
-                <a16:creationId xmlns:a16="http://schemas.microsoft.com/office/drawing/2014/main" id="{CF77B8D4-4A8B-4F6C-5746-9D7E810207BE}"/>
-              </a:ext>
-            </a:extLst>
-          </p:cNvPr>
-          <p:cNvSpPr/>
-          <p:nvPr/>
-        </p:nvSpPr>
-        <p:spPr>
-          <a:xfrm>
-            <a:off x="2016548" y="1961339"/>
-            <a:ext cx="497261" cy="279604"/>
-          </a:xfrm>
-          <a:prstGeom prst="rightArrow">
-            <a:avLst/>
-          </a:prstGeom>
-        </p:spPr>
-        <p:style>
-          <a:lnRef idx="2">
-            <a:schemeClr val="accent1">
-              <a:shade val="15000"/>
-            </a:schemeClr>
-          </a:lnRef>
-          <a:fillRef idx="1">
-            <a:schemeClr val="accent1"/>
-          </a:fillRef>
-          <a:effectRef idx="0">
-            <a:schemeClr val="accent1"/>
-          </a:effectRef>
-          <a:fontRef idx="minor">
-            <a:schemeClr val="lt1"/>
-          </a:fontRef>
-        </p:style>
-        <p:txBody>
-          <a:bodyPr rtlCol="0" anchor="ctr"/>
-          <a:lstStyle/>
-          <a:p>
-            <a:pPr algn="ctr"/>
-            <a:endParaRPr lang="en-US"/>
-          </a:p>
-        </p:txBody>
-      </p:sp>
-      <p:sp>
-        <p:nvSpPr>
-          <p:cNvPr id="10" name="Arrow: Right 9">
-            <a:extLst>
-              <a:ext uri="{FF2B5EF4-FFF2-40B4-BE49-F238E27FC236}">
-                <a16:creationId xmlns:a16="http://schemas.microsoft.com/office/drawing/2014/main" id="{6F80CAC6-FED8-F0E9-836A-74DE589DF73F}"/>
-              </a:ext>
-            </a:extLst>
-          </p:cNvPr>
-          <p:cNvSpPr/>
-          <p:nvPr/>
-        </p:nvSpPr>
-        <p:spPr>
-          <a:xfrm rot="5400000">
-            <a:off x="721940" y="3366893"/>
-            <a:ext cx="497260" cy="279604"/>
-          </a:xfrm>
-          <a:prstGeom prst="rightArrow">
-            <a:avLst/>
-          </a:prstGeom>
-        </p:spPr>
-        <p:style>
-          <a:lnRef idx="2">
-            <a:schemeClr val="accent1">
-              <a:shade val="15000"/>
-            </a:schemeClr>
-          </a:lnRef>
-          <a:fillRef idx="1">
-            <a:schemeClr val="accent1"/>
-          </a:fillRef>
-          <a:effectRef idx="0">
-            <a:schemeClr val="accent1"/>
-          </a:effectRef>
-          <a:fontRef idx="minor">
-            <a:schemeClr val="lt1"/>
-          </a:fontRef>
-        </p:style>
-        <p:txBody>
-          <a:bodyPr rtlCol="0" anchor="ctr"/>
-          <a:lstStyle/>
-          <a:p>
-            <a:pPr algn="ctr"/>
-            <a:endParaRPr lang="en-US"/>
-          </a:p>
-        </p:txBody>
-      </p:sp>
-      <p:sp>
-        <p:nvSpPr>
-          <p:cNvPr id="11" name="Rectangle 10">
-            <a:extLst>
-              <a:ext uri="{FF2B5EF4-FFF2-40B4-BE49-F238E27FC236}">
-                <a16:creationId xmlns:a16="http://schemas.microsoft.com/office/drawing/2014/main" id="{A45F100B-EAA8-B54E-7902-7CDC0E8FC435}"/>
-              </a:ext>
-            </a:extLst>
-          </p:cNvPr>
-          <p:cNvSpPr/>
-          <p:nvPr/>
-        </p:nvSpPr>
-        <p:spPr>
-          <a:xfrm>
-            <a:off x="382679" y="1398191"/>
-            <a:ext cx="1175784" cy="1639986"/>
-          </a:xfrm>
-          <a:prstGeom prst="rect">
-            <a:avLst/>
-          </a:prstGeom>
-          <a:solidFill>
-            <a:srgbClr val="156082">
-              <a:lumMod val="20000"/>
-              <a:lumOff val="80000"/>
-            </a:srgbClr>
-          </a:solidFill>
-          <a:ln w="19050" cap="flat" cmpd="sng" algn="ctr">
-            <a:solidFill>
-              <a:srgbClr val="0E2841">
-                <a:lumMod val="25000"/>
-                <a:lumOff val="75000"/>
-              </a:srgbClr>
-            </a:solidFill>
-            <a:prstDash val="solid"/>
-            <a:miter lim="800000"/>
-          </a:ln>
-          <a:effectLst/>
-        </p:spPr>
-        <p:txBody>
-          <a:bodyPr rtlCol="0" anchor="ctr"/>
-          <a:lstStyle/>
-          <a:p>
-            <a:pPr marL="0" marR="0" lvl="0" indent="0" algn="ctr" defTabSz="914400" eaLnBrk="1" fontAlgn="auto" latinLnBrk="0" hangingPunct="1">
-              <a:lnSpc>
-                <a:spcPct val="100000"/>
-              </a:lnSpc>
-              <a:spcBef>
-                <a:spcPts val="0"/>
-              </a:spcBef>
-              <a:spcAft>
-                <a:spcPts val="0"/>
-              </a:spcAft>
-              <a:buClrTx/>
-              <a:buSzTx/>
-              <a:buFontTx/>
-              <a:buNone/>
-              <a:tabLst/>
-              <a:defRPr/>
-            </a:pPr>
-            <a:endParaRPr kumimoji="0" lang="en-US" sz="1800" b="0" i="0" u="none" strike="noStrike" kern="0" cap="none" spc="0" normalizeH="0" baseline="0" noProof="0" dirty="0">
-              <a:ln>
-                <a:noFill/>
-              </a:ln>
-              <a:solidFill>
-                <a:prstClr val="white"/>
-              </a:solidFill>
-              <a:effectLst/>
-              <a:uLnTx/>
-              <a:uFillTx/>
-              <a:latin typeface="Aptos" panose="02110004020202020204"/>
-              <a:ea typeface="+mn-ea"/>
-              <a:cs typeface="+mn-cs"/>
-            </a:endParaRPr>
-          </a:p>
-        </p:txBody>
-      </p:sp>
-      <p:pic>
-        <p:nvPicPr>
-          <p:cNvPr id="12" name="Graphic 11" descr="Customer review with solid fill">
-            <a:extLst>
-              <a:ext uri="{FF2B5EF4-FFF2-40B4-BE49-F238E27FC236}">
-                <a16:creationId xmlns:a16="http://schemas.microsoft.com/office/drawing/2014/main" id="{2C468004-1E79-3449-66DF-35C2A9C8BC51}"/>
-              </a:ext>
-            </a:extLst>
-          </p:cNvPr>
-          <p:cNvPicPr>
-            <a:picLocks noChangeAspect="1"/>
-          </p:cNvPicPr>
-          <p:nvPr/>
-        </p:nvPicPr>
-        <p:blipFill>
-          <a:blip r:embed="rId9">
-            <a:extLst>
-              <a:ext uri="{96DAC541-7B7A-43D3-8B79-37D633B846F1}">
-                <asvg:svgBlip xmlns:asvg="http://schemas.microsoft.com/office/drawing/2016/SVG/main" r:embed="rId10"/>
-              </a:ext>
-            </a:extLst>
-          </a:blip>
-          <a:stretch>
-            <a:fillRect/>
-          </a:stretch>
-        </p:blipFill>
-        <p:spPr>
-          <a:xfrm>
-            <a:off x="614561" y="2267035"/>
-            <a:ext cx="712020" cy="712020"/>
-          </a:xfrm>
-          <a:prstGeom prst="rect">
-            <a:avLst/>
-          </a:prstGeom>
-        </p:spPr>
-      </p:pic>
-      <p:pic>
-        <p:nvPicPr>
-          <p:cNvPr id="13" name="Picture 12">
-            <a:extLst>
-              <a:ext uri="{FF2B5EF4-FFF2-40B4-BE49-F238E27FC236}">
-                <a16:creationId xmlns:a16="http://schemas.microsoft.com/office/drawing/2014/main" id="{C9E3E49C-1723-5EBD-1C65-48683268F9DB}"/>
-              </a:ext>
-            </a:extLst>
-          </p:cNvPr>
-          <p:cNvPicPr>
-            <a:picLocks noChangeAspect="1"/>
-          </p:cNvPicPr>
-          <p:nvPr/>
-        </p:nvPicPr>
-        <p:blipFill>
-          <a:blip r:embed="rId11"/>
-          <a:stretch>
-            <a:fillRect/>
-          </a:stretch>
-        </p:blipFill>
-        <p:spPr>
-          <a:xfrm>
-            <a:off x="496610" y="1481546"/>
-            <a:ext cx="947921" cy="619595"/>
-          </a:xfrm>
-          <a:prstGeom prst="rect">
-            <a:avLst/>
-          </a:prstGeom>
-        </p:spPr>
-      </p:pic>
-    </p:spTree>
-    <p:extLst>
-      <p:ext uri="{BB962C8B-B14F-4D97-AF65-F5344CB8AC3E}">
-        <p14:creationId xmlns:p14="http://schemas.microsoft.com/office/powerpoint/2010/main" val="997677161"/>
       </p:ext>
     </p:extLst>
   </p:cSld>
@@ -24910,6 +26543,756 @@
       </p:grpSpPr>
       <p:sp>
         <p:nvSpPr>
+          <p:cNvPr id="29" name="TextBox 28">
+            <a:extLst>
+              <a:ext uri="{FF2B5EF4-FFF2-40B4-BE49-F238E27FC236}">
+                <a16:creationId xmlns:a16="http://schemas.microsoft.com/office/drawing/2014/main" id="{50EF08DE-650D-84D8-23E2-83CD379C9565}"/>
+              </a:ext>
+            </a:extLst>
+          </p:cNvPr>
+          <p:cNvSpPr txBox="1"/>
+          <p:nvPr/>
+        </p:nvSpPr>
+        <p:spPr>
+          <a:xfrm>
+            <a:off x="3215444" y="1198799"/>
+            <a:ext cx="2126816" cy="338554"/>
+          </a:xfrm>
+          <a:prstGeom prst="rect">
+            <a:avLst/>
+          </a:prstGeom>
+          <a:noFill/>
+        </p:spPr>
+        <p:txBody>
+          <a:bodyPr wrap="square" rtlCol="0">
+            <a:spAutoFit/>
+          </a:bodyPr>
+          <a:lstStyle/>
+          <a:p>
+            <a:pPr algn="ctr"/>
+            <a:endParaRPr lang="de-DE" sz="1600" b="1" dirty="0"/>
+          </a:p>
+        </p:txBody>
+      </p:sp>
+      <p:sp>
+        <p:nvSpPr>
+          <p:cNvPr id="37" name="TextBox 36">
+            <a:extLst>
+              <a:ext uri="{FF2B5EF4-FFF2-40B4-BE49-F238E27FC236}">
+                <a16:creationId xmlns:a16="http://schemas.microsoft.com/office/drawing/2014/main" id="{A9B538AC-1716-FEE9-9303-C64FEB3A2571}"/>
+              </a:ext>
+            </a:extLst>
+          </p:cNvPr>
+          <p:cNvSpPr txBox="1"/>
+          <p:nvPr/>
+        </p:nvSpPr>
+        <p:spPr>
+          <a:xfrm>
+            <a:off x="6180085" y="1198799"/>
+            <a:ext cx="2126815" cy="338554"/>
+          </a:xfrm>
+          <a:prstGeom prst="rect">
+            <a:avLst/>
+          </a:prstGeom>
+          <a:noFill/>
+        </p:spPr>
+        <p:txBody>
+          <a:bodyPr wrap="square" rtlCol="0">
+            <a:spAutoFit/>
+          </a:bodyPr>
+          <a:lstStyle/>
+          <a:p>
+            <a:pPr algn="ctr"/>
+            <a:endParaRPr lang="de-DE" sz="1600" b="1" dirty="0"/>
+          </a:p>
+        </p:txBody>
+      </p:sp>
+      <p:sp>
+        <p:nvSpPr>
+          <p:cNvPr id="163" name="PlaceHolder 1">
+            <a:extLst>
+              <a:ext uri="{FF2B5EF4-FFF2-40B4-BE49-F238E27FC236}">
+                <a16:creationId xmlns:a16="http://schemas.microsoft.com/office/drawing/2014/main" id="{57944F4B-F502-E7CC-8790-8737702BC6AC}"/>
+              </a:ext>
+            </a:extLst>
+          </p:cNvPr>
+          <p:cNvSpPr>
+            <a:spLocks noGrp="1"/>
+          </p:cNvSpPr>
+          <p:nvPr>
+            <p:ph type="title"/>
+          </p:nvPr>
+        </p:nvSpPr>
+        <p:spPr>
+          <a:xfrm>
+            <a:off x="380880" y="228600"/>
+            <a:ext cx="8380080" cy="837720"/>
+          </a:xfrm>
+          <a:prstGeom prst="rect">
+            <a:avLst/>
+          </a:prstGeom>
+          <a:noFill/>
+          <a:ln w="0">
+            <a:noFill/>
+          </a:ln>
+        </p:spPr>
+        <p:txBody>
+          <a:bodyPr numCol="1" spcCol="0" anchor="ctr">
+            <a:noAutofit/>
+          </a:bodyPr>
+          <a:lstStyle/>
+          <a:p>
+            <a:pPr>
+              <a:lnSpc>
+                <a:spcPct val="100000"/>
+              </a:lnSpc>
+              <a:buNone/>
+            </a:pPr>
+            <a:r>
+              <a:rPr lang="en-US" sz="3200" b="0" strike="noStrike" spc="-1" dirty="0">
+                <a:solidFill>
+                  <a:srgbClr val="0064C8"/>
+                </a:solidFill>
+                <a:latin typeface="Century Gothic"/>
+              </a:rPr>
+              <a:t>Prompt </a:t>
+            </a:r>
+            <a:r>
+              <a:rPr lang="en-US" sz="3200" spc="-1" dirty="0">
+                <a:solidFill>
+                  <a:srgbClr val="0064C8"/>
+                </a:solidFill>
+                <a:latin typeface="Century Gothic"/>
+              </a:rPr>
+              <a:t>4</a:t>
+            </a:r>
+            <a:endParaRPr lang="en-US" sz="3200" b="0" strike="noStrike" spc="-1" dirty="0">
+              <a:solidFill>
+                <a:srgbClr val="000000"/>
+              </a:solidFill>
+              <a:latin typeface="Century Gothic"/>
+            </a:endParaRPr>
+          </a:p>
+        </p:txBody>
+      </p:sp>
+      <p:sp>
+        <p:nvSpPr>
+          <p:cNvPr id="54" name="TextBox 53">
+            <a:extLst>
+              <a:ext uri="{FF2B5EF4-FFF2-40B4-BE49-F238E27FC236}">
+                <a16:creationId xmlns:a16="http://schemas.microsoft.com/office/drawing/2014/main" id="{94937509-898F-450F-9596-9686594F7DA8}"/>
+              </a:ext>
+            </a:extLst>
+          </p:cNvPr>
+          <p:cNvSpPr txBox="1"/>
+          <p:nvPr/>
+        </p:nvSpPr>
+        <p:spPr>
+          <a:xfrm>
+            <a:off x="3215443" y="1191667"/>
+            <a:ext cx="2126816" cy="338554"/>
+          </a:xfrm>
+          <a:prstGeom prst="rect">
+            <a:avLst/>
+          </a:prstGeom>
+          <a:noFill/>
+        </p:spPr>
+        <p:txBody>
+          <a:bodyPr wrap="square" rtlCol="0">
+            <a:spAutoFit/>
+          </a:bodyPr>
+          <a:lstStyle/>
+          <a:p>
+            <a:pPr algn="ctr"/>
+            <a:r>
+              <a:rPr lang="en-US" sz="1600" b="1" dirty="0"/>
+              <a:t>GCN</a:t>
+            </a:r>
+            <a:endParaRPr lang="de-DE" sz="1600" b="1" dirty="0"/>
+          </a:p>
+        </p:txBody>
+      </p:sp>
+      <p:sp>
+        <p:nvSpPr>
+          <p:cNvPr id="55" name="TextBox 54">
+            <a:extLst>
+              <a:ext uri="{FF2B5EF4-FFF2-40B4-BE49-F238E27FC236}">
+                <a16:creationId xmlns:a16="http://schemas.microsoft.com/office/drawing/2014/main" id="{0FC6AAC7-E13F-47C8-9C73-B83D4169B6C3}"/>
+              </a:ext>
+            </a:extLst>
+          </p:cNvPr>
+          <p:cNvSpPr txBox="1"/>
+          <p:nvPr/>
+        </p:nvSpPr>
+        <p:spPr>
+          <a:xfrm>
+            <a:off x="6180084" y="1191667"/>
+            <a:ext cx="2126815" cy="338554"/>
+          </a:xfrm>
+          <a:prstGeom prst="rect">
+            <a:avLst/>
+          </a:prstGeom>
+          <a:noFill/>
+        </p:spPr>
+        <p:txBody>
+          <a:bodyPr wrap="square" rtlCol="0">
+            <a:spAutoFit/>
+          </a:bodyPr>
+          <a:lstStyle/>
+          <a:p>
+            <a:pPr algn="ctr"/>
+            <a:r>
+              <a:rPr lang="en-US" sz="1600" b="1" dirty="0"/>
+              <a:t>GAT</a:t>
+            </a:r>
+            <a:endParaRPr lang="de-DE" sz="1600" b="1" dirty="0"/>
+          </a:p>
+        </p:txBody>
+      </p:sp>
+      <p:sp>
+        <p:nvSpPr>
+          <p:cNvPr id="60" name="TextBox 59">
+            <a:extLst>
+              <a:ext uri="{FF2B5EF4-FFF2-40B4-BE49-F238E27FC236}">
+                <a16:creationId xmlns:a16="http://schemas.microsoft.com/office/drawing/2014/main" id="{543C76E0-DAAA-492F-BA6E-687D6B295DC2}"/>
+              </a:ext>
+            </a:extLst>
+          </p:cNvPr>
+          <p:cNvSpPr txBox="1"/>
+          <p:nvPr/>
+        </p:nvSpPr>
+        <p:spPr>
+          <a:xfrm>
+            <a:off x="482461" y="3969415"/>
+            <a:ext cx="3949638" cy="338554"/>
+          </a:xfrm>
+          <a:prstGeom prst="rect">
+            <a:avLst/>
+          </a:prstGeom>
+          <a:noFill/>
+        </p:spPr>
+        <p:txBody>
+          <a:bodyPr wrap="square" rtlCol="0">
+            <a:spAutoFit/>
+          </a:bodyPr>
+          <a:lstStyle/>
+          <a:p>
+            <a:r>
+              <a:rPr lang="en-US" sz="1600" b="1" dirty="0"/>
+              <a:t>Conclusion</a:t>
+            </a:r>
+            <a:endParaRPr lang="de-DE" sz="1600" b="1" dirty="0"/>
+          </a:p>
+        </p:txBody>
+      </p:sp>
+      <p:sp>
+        <p:nvSpPr>
+          <p:cNvPr id="61" name="TextBox 60">
+            <a:extLst>
+              <a:ext uri="{FF2B5EF4-FFF2-40B4-BE49-F238E27FC236}">
+                <a16:creationId xmlns:a16="http://schemas.microsoft.com/office/drawing/2014/main" id="{9767668A-54AF-40AC-B5A4-2A353350EE2E}"/>
+              </a:ext>
+            </a:extLst>
+          </p:cNvPr>
+          <p:cNvSpPr txBox="1"/>
+          <p:nvPr/>
+        </p:nvSpPr>
+        <p:spPr>
+          <a:xfrm>
+            <a:off x="482461" y="4317931"/>
+            <a:ext cx="8148034" cy="830997"/>
+          </a:xfrm>
+          <a:prstGeom prst="rect">
+            <a:avLst/>
+          </a:prstGeom>
+          <a:noFill/>
+        </p:spPr>
+        <p:txBody>
+          <a:bodyPr wrap="square">
+            <a:spAutoFit/>
+          </a:bodyPr>
+          <a:lstStyle/>
+          <a:p>
+            <a:r>
+              <a:rPr lang="en-US" sz="1200" b="0" i="0" dirty="0">
+                <a:effectLst/>
+              </a:rPr>
+              <a:t>While both models correctly predict this compound as active, </a:t>
+            </a:r>
+            <a:r>
+              <a:rPr lang="en-US" sz="1200" b="1" i="0" dirty="0">
+                <a:effectLst/>
+              </a:rPr>
+              <a:t>GAT demonstrates superior performance</a:t>
+            </a:r>
+            <a:r>
+              <a:rPr lang="en-US" sz="1200" b="0" i="0" dirty="0">
+                <a:effectLst/>
+              </a:rPr>
+              <a:t> and learns more sophisticated molecular representations through its attention mechanism. GAT's focus on the piperazine backbone suggests it captures </a:t>
+            </a:r>
+            <a:r>
+              <a:rPr lang="en-US" sz="1200" b="1" i="0" dirty="0">
+                <a:effectLst/>
+              </a:rPr>
+              <a:t>pharmacophore-relevant features</a:t>
+            </a:r>
+            <a:r>
+              <a:rPr lang="en-US" sz="1200" b="0" i="0" dirty="0">
+                <a:effectLst/>
+              </a:rPr>
+              <a:t> more effectively than GCN's fragment-based approach.</a:t>
+            </a:r>
+            <a:endParaRPr lang="de-DE" sz="1200" dirty="0"/>
+          </a:p>
+        </p:txBody>
+      </p:sp>
+      <p:pic>
+        <p:nvPicPr>
+          <p:cNvPr id="62" name="Picture 61">
+            <a:extLst>
+              <a:ext uri="{FF2B5EF4-FFF2-40B4-BE49-F238E27FC236}">
+                <a16:creationId xmlns:a16="http://schemas.microsoft.com/office/drawing/2014/main" id="{FD9BA923-0A0D-496E-B5E3-37862AF11367}"/>
+              </a:ext>
+            </a:extLst>
+          </p:cNvPr>
+          <p:cNvPicPr>
+            <a:picLocks noChangeAspect="1"/>
+          </p:cNvPicPr>
+          <p:nvPr/>
+        </p:nvPicPr>
+        <p:blipFill rotWithShape="1">
+          <a:blip r:embed="rId3"/>
+          <a:srcRect l="12757" t="8229" r="10218" b="12776"/>
+          <a:stretch/>
+        </p:blipFill>
+        <p:spPr>
+          <a:xfrm>
+            <a:off x="3126534" y="1707534"/>
+            <a:ext cx="2649606" cy="1528543"/>
+          </a:xfrm>
+          <a:prstGeom prst="rect">
+            <a:avLst/>
+          </a:prstGeom>
+        </p:spPr>
+      </p:pic>
+      <p:pic>
+        <p:nvPicPr>
+          <p:cNvPr id="63" name="Picture 62">
+            <a:extLst>
+              <a:ext uri="{FF2B5EF4-FFF2-40B4-BE49-F238E27FC236}">
+                <a16:creationId xmlns:a16="http://schemas.microsoft.com/office/drawing/2014/main" id="{132EE792-E031-4B62-A040-2F1AB742541A}"/>
+              </a:ext>
+            </a:extLst>
+          </p:cNvPr>
+          <p:cNvPicPr>
+            <a:picLocks noChangeAspect="1"/>
+          </p:cNvPicPr>
+          <p:nvPr/>
+        </p:nvPicPr>
+        <p:blipFill rotWithShape="1">
+          <a:blip r:embed="rId4"/>
+          <a:srcRect l="13677" t="11105" r="10217" b="13350"/>
+          <a:stretch/>
+        </p:blipFill>
+        <p:spPr>
+          <a:xfrm>
+            <a:off x="5927416" y="1720100"/>
+            <a:ext cx="2833544" cy="1582127"/>
+          </a:xfrm>
+          <a:prstGeom prst="rect">
+            <a:avLst/>
+          </a:prstGeom>
+        </p:spPr>
+      </p:pic>
+      <p:sp>
+        <p:nvSpPr>
+          <p:cNvPr id="64" name="TextBox 63">
+            <a:extLst>
+              <a:ext uri="{FF2B5EF4-FFF2-40B4-BE49-F238E27FC236}">
+                <a16:creationId xmlns:a16="http://schemas.microsoft.com/office/drawing/2014/main" id="{796D7F20-3E62-4DC7-B9AE-BE93AFDFAEFB}"/>
+              </a:ext>
+            </a:extLst>
+          </p:cNvPr>
+          <p:cNvSpPr txBox="1"/>
+          <p:nvPr/>
+        </p:nvSpPr>
+        <p:spPr>
+          <a:xfrm>
+            <a:off x="910795" y="5353316"/>
+            <a:ext cx="7719699" cy="646331"/>
+          </a:xfrm>
+          <a:prstGeom prst="rect">
+            <a:avLst/>
+          </a:prstGeom>
+          <a:noFill/>
+        </p:spPr>
+        <p:txBody>
+          <a:bodyPr wrap="square">
+            <a:spAutoFit/>
+          </a:bodyPr>
+          <a:lstStyle/>
+          <a:p>
+            <a:r>
+              <a:rPr lang="en-US" sz="1200" b="1" i="0" dirty="0">
+                <a:effectLst/>
+              </a:rPr>
+              <a:t>Note</a:t>
+            </a:r>
+            <a:r>
+              <a:rPr lang="en-US" sz="1200" b="0" i="0" dirty="0">
+                <a:effectLst/>
+              </a:rPr>
+              <a:t>: the agent focused on the differences, overinterpreting the results. It is clear that the models learned similar patterns (with different top bonds and magnitudes), but the agent did not mention any similarity between them.</a:t>
+            </a:r>
+            <a:endParaRPr lang="de-DE" sz="1200" dirty="0"/>
+          </a:p>
+        </p:txBody>
+      </p:sp>
+      <p:pic>
+        <p:nvPicPr>
+          <p:cNvPr id="3" name="Graphic 2" descr="Question mark with solid fill">
+            <a:extLst>
+              <a:ext uri="{FF2B5EF4-FFF2-40B4-BE49-F238E27FC236}">
+                <a16:creationId xmlns:a16="http://schemas.microsoft.com/office/drawing/2014/main" id="{B33A209D-3182-7189-3424-2E0DC3A62557}"/>
+              </a:ext>
+            </a:extLst>
+          </p:cNvPr>
+          <p:cNvPicPr>
+            <a:picLocks noChangeAspect="1"/>
+          </p:cNvPicPr>
+          <p:nvPr/>
+        </p:nvPicPr>
+        <p:blipFill>
+          <a:blip r:embed="rId5">
+            <a:extLst>
+              <a:ext uri="{96DAC541-7B7A-43D3-8B79-37D633B846F1}">
+                <asvg:svgBlip xmlns:asvg="http://schemas.microsoft.com/office/drawing/2016/SVG/main" r:embed="rId6"/>
+              </a:ext>
+            </a:extLst>
+          </a:blip>
+          <a:stretch>
+            <a:fillRect/>
+          </a:stretch>
+        </p:blipFill>
+        <p:spPr>
+          <a:xfrm>
+            <a:off x="8443453" y="4333185"/>
+            <a:ext cx="635013" cy="635013"/>
+          </a:xfrm>
+          <a:prstGeom prst="rect">
+            <a:avLst/>
+          </a:prstGeom>
+        </p:spPr>
+      </p:pic>
+      <p:pic>
+        <p:nvPicPr>
+          <p:cNvPr id="5" name="Graphic 4" descr="Warning with solid fill">
+            <a:extLst>
+              <a:ext uri="{FF2B5EF4-FFF2-40B4-BE49-F238E27FC236}">
+                <a16:creationId xmlns:a16="http://schemas.microsoft.com/office/drawing/2014/main" id="{9419031D-EA28-7F26-8092-8C420B4E0C42}"/>
+              </a:ext>
+            </a:extLst>
+          </p:cNvPr>
+          <p:cNvPicPr>
+            <a:picLocks noChangeAspect="1"/>
+          </p:cNvPicPr>
+          <p:nvPr/>
+        </p:nvPicPr>
+        <p:blipFill>
+          <a:blip r:embed="rId7">
+            <a:extLst>
+              <a:ext uri="{96DAC541-7B7A-43D3-8B79-37D633B846F1}">
+                <asvg:svgBlip xmlns:asvg="http://schemas.microsoft.com/office/drawing/2016/SVG/main" r:embed="rId8"/>
+              </a:ext>
+            </a:extLst>
+          </a:blip>
+          <a:stretch>
+            <a:fillRect/>
+          </a:stretch>
+        </p:blipFill>
+        <p:spPr>
+          <a:xfrm>
+            <a:off x="402795" y="5422481"/>
+            <a:ext cx="508000" cy="508000"/>
+          </a:xfrm>
+          <a:prstGeom prst="rect">
+            <a:avLst/>
+          </a:prstGeom>
+        </p:spPr>
+      </p:pic>
+      <p:sp>
+        <p:nvSpPr>
+          <p:cNvPr id="9" name="Arrow: Right 8">
+            <a:extLst>
+              <a:ext uri="{FF2B5EF4-FFF2-40B4-BE49-F238E27FC236}">
+                <a16:creationId xmlns:a16="http://schemas.microsoft.com/office/drawing/2014/main" id="{CF77B8D4-4A8B-4F6C-5746-9D7E810207BE}"/>
+              </a:ext>
+            </a:extLst>
+          </p:cNvPr>
+          <p:cNvSpPr/>
+          <p:nvPr/>
+        </p:nvSpPr>
+        <p:spPr>
+          <a:xfrm>
+            <a:off x="2016548" y="1961339"/>
+            <a:ext cx="497261" cy="279604"/>
+          </a:xfrm>
+          <a:prstGeom prst="rightArrow">
+            <a:avLst/>
+          </a:prstGeom>
+        </p:spPr>
+        <p:style>
+          <a:lnRef idx="2">
+            <a:schemeClr val="accent1">
+              <a:shade val="15000"/>
+            </a:schemeClr>
+          </a:lnRef>
+          <a:fillRef idx="1">
+            <a:schemeClr val="accent1"/>
+          </a:fillRef>
+          <a:effectRef idx="0">
+            <a:schemeClr val="accent1"/>
+          </a:effectRef>
+          <a:fontRef idx="minor">
+            <a:schemeClr val="lt1"/>
+          </a:fontRef>
+        </p:style>
+        <p:txBody>
+          <a:bodyPr rtlCol="0" anchor="ctr"/>
+          <a:lstStyle/>
+          <a:p>
+            <a:pPr algn="ctr"/>
+            <a:endParaRPr lang="en-US"/>
+          </a:p>
+        </p:txBody>
+      </p:sp>
+      <p:sp>
+        <p:nvSpPr>
+          <p:cNvPr id="10" name="Arrow: Right 9">
+            <a:extLst>
+              <a:ext uri="{FF2B5EF4-FFF2-40B4-BE49-F238E27FC236}">
+                <a16:creationId xmlns:a16="http://schemas.microsoft.com/office/drawing/2014/main" id="{6F80CAC6-FED8-F0E9-836A-74DE589DF73F}"/>
+              </a:ext>
+            </a:extLst>
+          </p:cNvPr>
+          <p:cNvSpPr/>
+          <p:nvPr/>
+        </p:nvSpPr>
+        <p:spPr>
+          <a:xfrm rot="5400000">
+            <a:off x="721940" y="3366893"/>
+            <a:ext cx="497260" cy="279604"/>
+          </a:xfrm>
+          <a:prstGeom prst="rightArrow">
+            <a:avLst/>
+          </a:prstGeom>
+        </p:spPr>
+        <p:style>
+          <a:lnRef idx="2">
+            <a:schemeClr val="accent1">
+              <a:shade val="15000"/>
+            </a:schemeClr>
+          </a:lnRef>
+          <a:fillRef idx="1">
+            <a:schemeClr val="accent1"/>
+          </a:fillRef>
+          <a:effectRef idx="0">
+            <a:schemeClr val="accent1"/>
+          </a:effectRef>
+          <a:fontRef idx="minor">
+            <a:schemeClr val="lt1"/>
+          </a:fontRef>
+        </p:style>
+        <p:txBody>
+          <a:bodyPr rtlCol="0" anchor="ctr"/>
+          <a:lstStyle/>
+          <a:p>
+            <a:pPr algn="ctr"/>
+            <a:endParaRPr lang="en-US"/>
+          </a:p>
+        </p:txBody>
+      </p:sp>
+      <p:sp>
+        <p:nvSpPr>
+          <p:cNvPr id="11" name="Rectangle 10">
+            <a:extLst>
+              <a:ext uri="{FF2B5EF4-FFF2-40B4-BE49-F238E27FC236}">
+                <a16:creationId xmlns:a16="http://schemas.microsoft.com/office/drawing/2014/main" id="{A45F100B-EAA8-B54E-7902-7CDC0E8FC435}"/>
+              </a:ext>
+            </a:extLst>
+          </p:cNvPr>
+          <p:cNvSpPr/>
+          <p:nvPr/>
+        </p:nvSpPr>
+        <p:spPr>
+          <a:xfrm>
+            <a:off x="382679" y="1398191"/>
+            <a:ext cx="1175784" cy="1639986"/>
+          </a:xfrm>
+          <a:prstGeom prst="rect">
+            <a:avLst/>
+          </a:prstGeom>
+          <a:solidFill>
+            <a:srgbClr val="156082">
+              <a:lumMod val="20000"/>
+              <a:lumOff val="80000"/>
+            </a:srgbClr>
+          </a:solidFill>
+          <a:ln w="19050" cap="flat" cmpd="sng" algn="ctr">
+            <a:solidFill>
+              <a:srgbClr val="0E2841">
+                <a:lumMod val="25000"/>
+                <a:lumOff val="75000"/>
+              </a:srgbClr>
+            </a:solidFill>
+            <a:prstDash val="solid"/>
+            <a:miter lim="800000"/>
+          </a:ln>
+          <a:effectLst/>
+        </p:spPr>
+        <p:txBody>
+          <a:bodyPr rtlCol="0" anchor="ctr"/>
+          <a:lstStyle/>
+          <a:p>
+            <a:pPr marL="0" marR="0" lvl="0" indent="0" algn="ctr" defTabSz="914400" eaLnBrk="1" fontAlgn="auto" latinLnBrk="0" hangingPunct="1">
+              <a:lnSpc>
+                <a:spcPct val="100000"/>
+              </a:lnSpc>
+              <a:spcBef>
+                <a:spcPts val="0"/>
+              </a:spcBef>
+              <a:spcAft>
+                <a:spcPts val="0"/>
+              </a:spcAft>
+              <a:buClrTx/>
+              <a:buSzTx/>
+              <a:buFontTx/>
+              <a:buNone/>
+              <a:tabLst/>
+              <a:defRPr/>
+            </a:pPr>
+            <a:endParaRPr kumimoji="0" lang="en-US" sz="1800" b="0" i="0" u="none" strike="noStrike" kern="0" cap="none" spc="0" normalizeH="0" baseline="0" noProof="0" dirty="0">
+              <a:ln>
+                <a:noFill/>
+              </a:ln>
+              <a:solidFill>
+                <a:prstClr val="white"/>
+              </a:solidFill>
+              <a:effectLst/>
+              <a:uLnTx/>
+              <a:uFillTx/>
+              <a:latin typeface="Aptos" panose="02110004020202020204"/>
+              <a:ea typeface="+mn-ea"/>
+              <a:cs typeface="+mn-cs"/>
+            </a:endParaRPr>
+          </a:p>
+        </p:txBody>
+      </p:sp>
+      <p:pic>
+        <p:nvPicPr>
+          <p:cNvPr id="12" name="Graphic 11" descr="Customer review with solid fill">
+            <a:extLst>
+              <a:ext uri="{FF2B5EF4-FFF2-40B4-BE49-F238E27FC236}">
+                <a16:creationId xmlns:a16="http://schemas.microsoft.com/office/drawing/2014/main" id="{2C468004-1E79-3449-66DF-35C2A9C8BC51}"/>
+              </a:ext>
+            </a:extLst>
+          </p:cNvPr>
+          <p:cNvPicPr>
+            <a:picLocks noChangeAspect="1"/>
+          </p:cNvPicPr>
+          <p:nvPr/>
+        </p:nvPicPr>
+        <p:blipFill>
+          <a:blip r:embed="rId9">
+            <a:extLst>
+              <a:ext uri="{96DAC541-7B7A-43D3-8B79-37D633B846F1}">
+                <asvg:svgBlip xmlns:asvg="http://schemas.microsoft.com/office/drawing/2016/SVG/main" r:embed="rId10"/>
+              </a:ext>
+            </a:extLst>
+          </a:blip>
+          <a:stretch>
+            <a:fillRect/>
+          </a:stretch>
+        </p:blipFill>
+        <p:spPr>
+          <a:xfrm>
+            <a:off x="614561" y="2267035"/>
+            <a:ext cx="712020" cy="712020"/>
+          </a:xfrm>
+          <a:prstGeom prst="rect">
+            <a:avLst/>
+          </a:prstGeom>
+        </p:spPr>
+      </p:pic>
+      <p:pic>
+        <p:nvPicPr>
+          <p:cNvPr id="13" name="Picture 12">
+            <a:extLst>
+              <a:ext uri="{FF2B5EF4-FFF2-40B4-BE49-F238E27FC236}">
+                <a16:creationId xmlns:a16="http://schemas.microsoft.com/office/drawing/2014/main" id="{C9E3E49C-1723-5EBD-1C65-48683268F9DB}"/>
+              </a:ext>
+            </a:extLst>
+          </p:cNvPr>
+          <p:cNvPicPr>
+            <a:picLocks noChangeAspect="1"/>
+          </p:cNvPicPr>
+          <p:nvPr/>
+        </p:nvPicPr>
+        <p:blipFill>
+          <a:blip r:embed="rId11"/>
+          <a:stretch>
+            <a:fillRect/>
+          </a:stretch>
+        </p:blipFill>
+        <p:spPr>
+          <a:xfrm>
+            <a:off x="496610" y="1481546"/>
+            <a:ext cx="947921" cy="619595"/>
+          </a:xfrm>
+          <a:prstGeom prst="rect">
+            <a:avLst/>
+          </a:prstGeom>
+        </p:spPr>
+      </p:pic>
+    </p:spTree>
+    <p:extLst>
+      <p:ext uri="{BB962C8B-B14F-4D97-AF65-F5344CB8AC3E}">
+        <p14:creationId xmlns:p14="http://schemas.microsoft.com/office/powerpoint/2010/main" val="997677161"/>
+      </p:ext>
+    </p:extLst>
+  </p:cSld>
+  <p:clrMapOvr>
+    <a:masterClrMapping/>
+  </p:clrMapOvr>
+</p:sld>
+</file>
+
+<file path=ppt/slides/slide21.xml><?xml version="1.0" encoding="utf-8"?>
+<p:sld xmlns:a="http://schemas.openxmlformats.org/drawingml/2006/main" xmlns:r="http://schemas.openxmlformats.org/officeDocument/2006/relationships" xmlns:p="http://schemas.openxmlformats.org/presentationml/2006/main">
+  <p:cSld>
+    <p:spTree>
+      <p:nvGrpSpPr>
+        <p:cNvPr id="1" name="">
+          <a:extLst>
+            <a:ext uri="{FF2B5EF4-FFF2-40B4-BE49-F238E27FC236}">
+              <a16:creationId xmlns:a16="http://schemas.microsoft.com/office/drawing/2014/main" id="{A6515F23-0912-A838-23CE-B8F00573A2DA}"/>
+            </a:ext>
+          </a:extLst>
+        </p:cNvPr>
+        <p:cNvGrpSpPr/>
+        <p:nvPr/>
+      </p:nvGrpSpPr>
+      <p:grpSpPr>
+        <a:xfrm>
+          <a:off x="0" y="0"/>
+          <a:ext cx="0" cy="0"/>
+          <a:chOff x="0" y="0"/>
+          <a:chExt cx="0" cy="0"/>
+        </a:xfrm>
+      </p:grpSpPr>
+      <p:sp>
+        <p:nvSpPr>
           <p:cNvPr id="163" name="PlaceHolder 1">
             <a:extLst>
               <a:ext uri="{FF2B5EF4-FFF2-40B4-BE49-F238E27FC236}">
@@ -25524,7 +27907,7 @@
 </p:sld>
 </file>
 
-<file path=ppt/slides/slide21.xml><?xml version="1.0" encoding="utf-8"?>
+<file path=ppt/slides/slide22.xml><?xml version="1.0" encoding="utf-8"?>
 <p:sld xmlns:a="http://schemas.openxmlformats.org/drawingml/2006/main" xmlns:r="http://schemas.openxmlformats.org/officeDocument/2006/relationships" xmlns:p="http://schemas.openxmlformats.org/presentationml/2006/main">
   <p:cSld>
     <p:spTree>
@@ -25989,7 +28372,7 @@
 </p:sld>
 </file>
 
-<file path=ppt/slides/slide22.xml><?xml version="1.0" encoding="utf-8"?>
+<file path=ppt/slides/slide23.xml><?xml version="1.0" encoding="utf-8"?>
 <p:sld xmlns:a="http://schemas.openxmlformats.org/drawingml/2006/main" xmlns:r="http://schemas.openxmlformats.org/officeDocument/2006/relationships" xmlns:p="http://schemas.openxmlformats.org/presentationml/2006/main">
   <p:cSld>
     <p:spTree>
@@ -26669,7 +29052,7 @@
 </p:sld>
 </file>
 
-<file path=ppt/slides/slide23.xml><?xml version="1.0" encoding="utf-8"?>
+<file path=ppt/slides/slide24.xml><?xml version="1.0" encoding="utf-8"?>
 <p:sld xmlns:a="http://schemas.openxmlformats.org/drawingml/2006/main" xmlns:r="http://schemas.openxmlformats.org/officeDocument/2006/relationships" xmlns:p="http://schemas.openxmlformats.org/presentationml/2006/main" show="0">
   <p:cSld>
     <p:spTree>
@@ -27322,7 +29705,7 @@
 </p:sld>
 </file>
 
-<file path=ppt/slides/slide24.xml><?xml version="1.0" encoding="utf-8"?>
+<file path=ppt/slides/slide25.xml><?xml version="1.0" encoding="utf-8"?>
 <p:sld xmlns:a="http://schemas.openxmlformats.org/drawingml/2006/main" xmlns:r="http://schemas.openxmlformats.org/officeDocument/2006/relationships" xmlns:p="http://schemas.openxmlformats.org/presentationml/2006/main" show="0">
   <p:cSld>
     <p:spTree>
@@ -28258,7 +30641,7 @@
 </p:sld>
 </file>
 
-<file path=ppt/slides/slide25.xml><?xml version="1.0" encoding="utf-8"?>
+<file path=ppt/slides/slide26.xml><?xml version="1.0" encoding="utf-8"?>
 <p:sld xmlns:a="http://schemas.openxmlformats.org/drawingml/2006/main" xmlns:r="http://schemas.openxmlformats.org/officeDocument/2006/relationships" xmlns:p="http://schemas.openxmlformats.org/presentationml/2006/main" show="0">
   <p:cSld>
     <p:spTree>
@@ -29273,7 +31656,7 @@
 </p:sld>
 </file>
 
-<file path=ppt/slides/slide26.xml><?xml version="1.0" encoding="utf-8"?>
+<file path=ppt/slides/slide27.xml><?xml version="1.0" encoding="utf-8"?>
 <p:sld xmlns:a="http://schemas.openxmlformats.org/drawingml/2006/main" xmlns:r="http://schemas.openxmlformats.org/officeDocument/2006/relationships" xmlns:p="http://schemas.openxmlformats.org/presentationml/2006/main" show="0">
   <p:cSld>
     <p:spTree>
@@ -30072,2216 +32455,6 @@
     <p:extLst>
       <p:ext uri="{BB962C8B-B14F-4D97-AF65-F5344CB8AC3E}">
         <p14:creationId xmlns:p14="http://schemas.microsoft.com/office/powerpoint/2010/main" val="3426096625"/>
-      </p:ext>
-    </p:extLst>
-  </p:cSld>
-  <p:clrMapOvr>
-    <a:masterClrMapping/>
-  </p:clrMapOvr>
-</p:sld>
-</file>
-
-<file path=ppt/slides/slide27.xml><?xml version="1.0" encoding="utf-8"?>
-<p:sld xmlns:a="http://schemas.openxmlformats.org/drawingml/2006/main" xmlns:r="http://schemas.openxmlformats.org/officeDocument/2006/relationships" xmlns:p="http://schemas.openxmlformats.org/presentationml/2006/main" show="0">
-  <p:cSld>
-    <p:spTree>
-      <p:nvGrpSpPr>
-        <p:cNvPr id="1" name="">
-          <a:extLst>
-            <a:ext uri="{FF2B5EF4-FFF2-40B4-BE49-F238E27FC236}">
-              <a16:creationId xmlns:a16="http://schemas.microsoft.com/office/drawing/2014/main" id="{A6515F23-0912-A838-23CE-B8F00573A2DA}"/>
-            </a:ext>
-          </a:extLst>
-        </p:cNvPr>
-        <p:cNvGrpSpPr/>
-        <p:nvPr/>
-      </p:nvGrpSpPr>
-      <p:grpSpPr>
-        <a:xfrm>
-          <a:off x="0" y="0"/>
-          <a:ext cx="0" cy="0"/>
-          <a:chOff x="0" y="0"/>
-          <a:chExt cx="0" cy="0"/>
-        </a:xfrm>
-      </p:grpSpPr>
-      <p:grpSp>
-        <p:nvGrpSpPr>
-          <p:cNvPr id="49" name="Group 48">
-            <a:extLst>
-              <a:ext uri="{FF2B5EF4-FFF2-40B4-BE49-F238E27FC236}">
-                <a16:creationId xmlns:a16="http://schemas.microsoft.com/office/drawing/2014/main" id="{C31E6F76-4E7C-1639-9021-CCC76ADA5882}"/>
-              </a:ext>
-            </a:extLst>
-          </p:cNvPr>
-          <p:cNvGrpSpPr>
-            <a:grpSpLocks noChangeAspect="1"/>
-          </p:cNvGrpSpPr>
-          <p:nvPr/>
-        </p:nvGrpSpPr>
-        <p:grpSpPr>
-          <a:xfrm>
-            <a:off x="380879" y="1191667"/>
-            <a:ext cx="7926020" cy="2682815"/>
-            <a:chOff x="232995" y="406630"/>
-            <a:chExt cx="10641897" cy="3602091"/>
-          </a:xfrm>
-        </p:grpSpPr>
-        <p:grpSp>
-          <p:nvGrpSpPr>
-            <p:cNvPr id="21" name="Group 20">
-              <a:extLst>
-                <a:ext uri="{FF2B5EF4-FFF2-40B4-BE49-F238E27FC236}">
-                  <a16:creationId xmlns:a16="http://schemas.microsoft.com/office/drawing/2014/main" id="{851E801A-07D0-EC46-EC69-B1E3BDC4A0EE}"/>
-                </a:ext>
-              </a:extLst>
-            </p:cNvPr>
-            <p:cNvGrpSpPr/>
-            <p:nvPr/>
-          </p:nvGrpSpPr>
-          <p:grpSpPr>
-            <a:xfrm>
-              <a:off x="232995" y="835775"/>
-              <a:ext cx="1774658" cy="2310063"/>
-              <a:chOff x="990492" y="2511372"/>
-              <a:chExt cx="1774658" cy="2310063"/>
-            </a:xfrm>
-          </p:grpSpPr>
-          <p:sp>
-            <p:nvSpPr>
-              <p:cNvPr id="22" name="Rectangle 21">
-                <a:extLst>
-                  <a:ext uri="{FF2B5EF4-FFF2-40B4-BE49-F238E27FC236}">
-                    <a16:creationId xmlns:a16="http://schemas.microsoft.com/office/drawing/2014/main" id="{6A221BB0-FFBC-E869-34CB-BC594E5B0490}"/>
-                  </a:ext>
-                </a:extLst>
-              </p:cNvPr>
-              <p:cNvSpPr/>
-              <p:nvPr/>
-            </p:nvSpPr>
-            <p:spPr>
-              <a:xfrm>
-                <a:off x="990492" y="2511372"/>
-                <a:ext cx="1774658" cy="2310063"/>
-              </a:xfrm>
-              <a:prstGeom prst="rect">
-                <a:avLst/>
-              </a:prstGeom>
-              <a:solidFill>
-                <a:schemeClr val="accent1">
-                  <a:lumMod val="20000"/>
-                  <a:lumOff val="80000"/>
-                </a:schemeClr>
-              </a:solidFill>
-              <a:ln>
-                <a:solidFill>
-                  <a:schemeClr val="tx2">
-                    <a:lumMod val="25000"/>
-                    <a:lumOff val="75000"/>
-                  </a:schemeClr>
-                </a:solidFill>
-              </a:ln>
-            </p:spPr>
-            <p:style>
-              <a:lnRef idx="2">
-                <a:schemeClr val="accent1">
-                  <a:shade val="15000"/>
-                </a:schemeClr>
-              </a:lnRef>
-              <a:fillRef idx="1">
-                <a:schemeClr val="accent1"/>
-              </a:fillRef>
-              <a:effectRef idx="0">
-                <a:schemeClr val="accent1"/>
-              </a:effectRef>
-              <a:fontRef idx="minor">
-                <a:schemeClr val="lt1"/>
-              </a:fontRef>
-            </p:style>
-            <p:txBody>
-              <a:bodyPr rtlCol="0" anchor="ctr"/>
-              <a:lstStyle/>
-              <a:p>
-                <a:pPr algn="ctr"/>
-                <a:endParaRPr lang="en-US" dirty="0"/>
-              </a:p>
-            </p:txBody>
-          </p:sp>
-          <p:pic>
-            <p:nvPicPr>
-              <p:cNvPr id="23" name="Graphic 22" descr="Customer review with solid fill">
-                <a:extLst>
-                  <a:ext uri="{FF2B5EF4-FFF2-40B4-BE49-F238E27FC236}">
-                    <a16:creationId xmlns:a16="http://schemas.microsoft.com/office/drawing/2014/main" id="{0FAB87FB-66B8-682E-AC05-EA6B56D8F4FB}"/>
-                  </a:ext>
-                </a:extLst>
-              </p:cNvPr>
-              <p:cNvPicPr>
-                <a:picLocks noChangeAspect="1"/>
-              </p:cNvPicPr>
-              <p:nvPr/>
-            </p:nvPicPr>
-            <p:blipFill>
-              <a:blip r:embed="rId3">
-                <a:extLst>
-                  <a:ext uri="{96DAC541-7B7A-43D3-8B79-37D633B846F1}">
-                    <asvg:svgBlip xmlns:asvg="http://schemas.microsoft.com/office/drawing/2016/SVG/main" r:embed="rId4"/>
-                  </a:ext>
-                </a:extLst>
-              </a:blip>
-              <a:stretch>
-                <a:fillRect/>
-              </a:stretch>
-            </p:blipFill>
-            <p:spPr>
-              <a:xfrm>
-                <a:off x="1400027" y="3700649"/>
-                <a:ext cx="965534" cy="965534"/>
-              </a:xfrm>
-              <a:prstGeom prst="rect">
-                <a:avLst/>
-              </a:prstGeom>
-            </p:spPr>
-          </p:pic>
-          <p:pic>
-            <p:nvPicPr>
-              <p:cNvPr id="24" name="Picture 23">
-                <a:extLst>
-                  <a:ext uri="{FF2B5EF4-FFF2-40B4-BE49-F238E27FC236}">
-                    <a16:creationId xmlns:a16="http://schemas.microsoft.com/office/drawing/2014/main" id="{5AFB6878-0F86-C45A-E83E-50BAC05BCEF5}"/>
-                  </a:ext>
-                </a:extLst>
-              </p:cNvPr>
-              <p:cNvPicPr>
-                <a:picLocks noChangeAspect="1"/>
-              </p:cNvPicPr>
-              <p:nvPr/>
-            </p:nvPicPr>
-            <p:blipFill>
-              <a:blip r:embed="rId5"/>
-              <a:stretch>
-                <a:fillRect/>
-              </a:stretch>
-            </p:blipFill>
-            <p:spPr>
-              <a:xfrm>
-                <a:off x="1126882" y="2607575"/>
-                <a:ext cx="1525117" cy="996871"/>
-              </a:xfrm>
-              <a:prstGeom prst="rect">
-                <a:avLst/>
-              </a:prstGeom>
-            </p:spPr>
-          </p:pic>
-        </p:grpSp>
-        <p:sp>
-          <p:nvSpPr>
-            <p:cNvPr id="25" name="Arrow: Right 24">
-              <a:extLst>
-                <a:ext uri="{FF2B5EF4-FFF2-40B4-BE49-F238E27FC236}">
-                  <a16:creationId xmlns:a16="http://schemas.microsoft.com/office/drawing/2014/main" id="{8E792690-D447-952D-A5E7-853CC5FB33BB}"/>
-                </a:ext>
-              </a:extLst>
-            </p:cNvPr>
-            <p:cNvSpPr/>
-            <p:nvPr/>
-          </p:nvSpPr>
-          <p:spPr>
-            <a:xfrm>
-              <a:off x="2327498" y="1803354"/>
-              <a:ext cx="666746" cy="374904"/>
-            </a:xfrm>
-            <a:prstGeom prst="rightArrow">
-              <a:avLst/>
-            </a:prstGeom>
-          </p:spPr>
-          <p:style>
-            <a:lnRef idx="2">
-              <a:schemeClr val="accent1">
-                <a:shade val="15000"/>
-              </a:schemeClr>
-            </a:lnRef>
-            <a:fillRef idx="1">
-              <a:schemeClr val="accent1"/>
-            </a:fillRef>
-            <a:effectRef idx="0">
-              <a:schemeClr val="accent1"/>
-            </a:effectRef>
-            <a:fontRef idx="minor">
-              <a:schemeClr val="lt1"/>
-            </a:fontRef>
-          </p:style>
-          <p:txBody>
-            <a:bodyPr rtlCol="0" anchor="ctr"/>
-            <a:lstStyle/>
-            <a:p>
-              <a:pPr algn="ctr"/>
-              <a:endParaRPr lang="en-US"/>
-            </a:p>
-          </p:txBody>
-        </p:sp>
-        <p:sp>
-          <p:nvSpPr>
-            <p:cNvPr id="29" name="TextBox 28">
-              <a:extLst>
-                <a:ext uri="{FF2B5EF4-FFF2-40B4-BE49-F238E27FC236}">
-                  <a16:creationId xmlns:a16="http://schemas.microsoft.com/office/drawing/2014/main" id="{50EF08DE-650D-84D8-23E2-83CD379C9565}"/>
-                </a:ext>
-              </a:extLst>
-            </p:cNvPr>
-            <p:cNvSpPr txBox="1"/>
-            <p:nvPr/>
-          </p:nvSpPr>
-          <p:spPr>
-            <a:xfrm>
-              <a:off x="4038832" y="406630"/>
-              <a:ext cx="2855576" cy="454561"/>
-            </a:xfrm>
-            <a:prstGeom prst="rect">
-              <a:avLst/>
-            </a:prstGeom>
-            <a:noFill/>
-          </p:spPr>
-          <p:txBody>
-            <a:bodyPr wrap="square" rtlCol="0">
-              <a:spAutoFit/>
-            </a:bodyPr>
-            <a:lstStyle/>
-            <a:p>
-              <a:pPr algn="ctr"/>
-              <a:r>
-                <a:rPr lang="en-US" sz="1600" b="1" dirty="0"/>
-                <a:t>Active compound </a:t>
-              </a:r>
-              <a:endParaRPr lang="de-DE" sz="1600" b="1" dirty="0"/>
-            </a:p>
-          </p:txBody>
-        </p:sp>
-        <p:sp>
-          <p:nvSpPr>
-            <p:cNvPr id="37" name="TextBox 36">
-              <a:extLst>
-                <a:ext uri="{FF2B5EF4-FFF2-40B4-BE49-F238E27FC236}">
-                  <a16:creationId xmlns:a16="http://schemas.microsoft.com/office/drawing/2014/main" id="{A9B538AC-1716-FEE9-9303-C64FEB3A2571}"/>
-                </a:ext>
-              </a:extLst>
-            </p:cNvPr>
-            <p:cNvSpPr txBox="1"/>
-            <p:nvPr/>
-          </p:nvSpPr>
-          <p:spPr>
-            <a:xfrm>
-              <a:off x="8019317" y="406630"/>
-              <a:ext cx="2855575" cy="454561"/>
-            </a:xfrm>
-            <a:prstGeom prst="rect">
-              <a:avLst/>
-            </a:prstGeom>
-            <a:noFill/>
-          </p:spPr>
-          <p:txBody>
-            <a:bodyPr wrap="square" rtlCol="0">
-              <a:spAutoFit/>
-            </a:bodyPr>
-            <a:lstStyle/>
-            <a:p>
-              <a:pPr algn="ctr"/>
-              <a:r>
-                <a:rPr lang="en-US" sz="1600" b="1" dirty="0"/>
-                <a:t>Inactive compound</a:t>
-              </a:r>
-              <a:endParaRPr lang="de-DE" sz="1600" b="1" dirty="0"/>
-            </a:p>
-          </p:txBody>
-        </p:sp>
-        <p:sp>
-          <p:nvSpPr>
-            <p:cNvPr id="42" name="Arrow: Right 41">
-              <a:extLst>
-                <a:ext uri="{FF2B5EF4-FFF2-40B4-BE49-F238E27FC236}">
-                  <a16:creationId xmlns:a16="http://schemas.microsoft.com/office/drawing/2014/main" id="{666A450C-D0FA-4FC2-D779-9D8A47EBECE0}"/>
-                </a:ext>
-              </a:extLst>
-            </p:cNvPr>
-            <p:cNvSpPr/>
-            <p:nvPr/>
-          </p:nvSpPr>
-          <p:spPr>
-            <a:xfrm rot="5400000">
-              <a:off x="798569" y="3487896"/>
-              <a:ext cx="666746" cy="374904"/>
-            </a:xfrm>
-            <a:prstGeom prst="rightArrow">
-              <a:avLst/>
-            </a:prstGeom>
-          </p:spPr>
-          <p:style>
-            <a:lnRef idx="2">
-              <a:schemeClr val="accent1">
-                <a:shade val="15000"/>
-              </a:schemeClr>
-            </a:lnRef>
-            <a:fillRef idx="1">
-              <a:schemeClr val="accent1"/>
-            </a:fillRef>
-            <a:effectRef idx="0">
-              <a:schemeClr val="accent1"/>
-            </a:effectRef>
-            <a:fontRef idx="minor">
-              <a:schemeClr val="lt1"/>
-            </a:fontRef>
-          </p:style>
-          <p:txBody>
-            <a:bodyPr rtlCol="0" anchor="ctr"/>
-            <a:lstStyle/>
-            <a:p>
-              <a:pPr algn="ctr"/>
-              <a:endParaRPr lang="en-US"/>
-            </a:p>
-          </p:txBody>
-        </p:sp>
-      </p:grpSp>
-      <p:sp>
-        <p:nvSpPr>
-          <p:cNvPr id="163" name="PlaceHolder 1">
-            <a:extLst>
-              <a:ext uri="{FF2B5EF4-FFF2-40B4-BE49-F238E27FC236}">
-                <a16:creationId xmlns:a16="http://schemas.microsoft.com/office/drawing/2014/main" id="{57944F4B-F502-E7CC-8790-8737702BC6AC}"/>
-              </a:ext>
-            </a:extLst>
-          </p:cNvPr>
-          <p:cNvSpPr>
-            <a:spLocks noGrp="1"/>
-          </p:cNvSpPr>
-          <p:nvPr>
-            <p:ph type="title"/>
-          </p:nvPr>
-        </p:nvSpPr>
-        <p:spPr>
-          <a:xfrm>
-            <a:off x="380880" y="228600"/>
-            <a:ext cx="8380080" cy="837720"/>
-          </a:xfrm>
-          <a:prstGeom prst="rect">
-            <a:avLst/>
-          </a:prstGeom>
-          <a:noFill/>
-          <a:ln w="0">
-            <a:noFill/>
-          </a:ln>
-        </p:spPr>
-        <p:txBody>
-          <a:bodyPr numCol="1" spcCol="0" anchor="ctr">
-            <a:noAutofit/>
-          </a:bodyPr>
-          <a:lstStyle/>
-          <a:p>
-            <a:pPr>
-              <a:lnSpc>
-                <a:spcPct val="100000"/>
-              </a:lnSpc>
-              <a:buNone/>
-            </a:pPr>
-            <a:r>
-              <a:rPr lang="en-US" sz="3200" b="0" strike="noStrike" spc="-1" dirty="0">
-                <a:solidFill>
-                  <a:srgbClr val="0064C8"/>
-                </a:solidFill>
-                <a:latin typeface="Century Gothic"/>
-              </a:rPr>
-              <a:t>Prompt </a:t>
-            </a:r>
-            <a:r>
-              <a:rPr lang="en-US" sz="3200" spc="-1" dirty="0">
-                <a:solidFill>
-                  <a:srgbClr val="0064C8"/>
-                </a:solidFill>
-                <a:latin typeface="Century Gothic"/>
-              </a:rPr>
-              <a:t>3</a:t>
-            </a:r>
-            <a:endParaRPr lang="en-US" sz="3200" b="0" strike="noStrike" spc="-1" dirty="0">
-              <a:solidFill>
-                <a:srgbClr val="000000"/>
-              </a:solidFill>
-              <a:latin typeface="Century Gothic"/>
-            </a:endParaRPr>
-          </a:p>
-        </p:txBody>
-      </p:sp>
-      <p:pic>
-        <p:nvPicPr>
-          <p:cNvPr id="3" name="Picture 2">
-            <a:extLst>
-              <a:ext uri="{FF2B5EF4-FFF2-40B4-BE49-F238E27FC236}">
-                <a16:creationId xmlns:a16="http://schemas.microsoft.com/office/drawing/2014/main" id="{DDBAFE8B-CBB0-4161-AC30-9E26A3A7D934}"/>
-              </a:ext>
-            </a:extLst>
-          </p:cNvPr>
-          <p:cNvPicPr>
-            <a:picLocks noChangeAspect="1"/>
-          </p:cNvPicPr>
-          <p:nvPr/>
-        </p:nvPicPr>
-        <p:blipFill rotWithShape="1">
-          <a:blip r:embed="rId6"/>
-          <a:srcRect l="14178" t="23063" r="12404" b="17553"/>
-          <a:stretch/>
-        </p:blipFill>
-        <p:spPr>
-          <a:xfrm>
-            <a:off x="3132741" y="2003417"/>
-            <a:ext cx="2633499" cy="1198178"/>
-          </a:xfrm>
-          <a:prstGeom prst="rect">
-            <a:avLst/>
-          </a:prstGeom>
-        </p:spPr>
-      </p:pic>
-      <p:pic>
-        <p:nvPicPr>
-          <p:cNvPr id="5" name="Picture 4">
-            <a:extLst>
-              <a:ext uri="{FF2B5EF4-FFF2-40B4-BE49-F238E27FC236}">
-                <a16:creationId xmlns:a16="http://schemas.microsoft.com/office/drawing/2014/main" id="{61399038-507A-42DF-8F43-F758B7EB7F76}"/>
-              </a:ext>
-            </a:extLst>
-          </p:cNvPr>
-          <p:cNvPicPr>
-            <a:picLocks noChangeAspect="1"/>
-          </p:cNvPicPr>
-          <p:nvPr/>
-        </p:nvPicPr>
-        <p:blipFill rotWithShape="1">
-          <a:blip r:embed="rId7"/>
-          <a:srcRect l="21987" t="10910" r="18256" b="12719"/>
-          <a:stretch/>
-        </p:blipFill>
-        <p:spPr>
-          <a:xfrm>
-            <a:off x="6128833" y="1741550"/>
-            <a:ext cx="2229316" cy="1602656"/>
-          </a:xfrm>
-          <a:prstGeom prst="rect">
-            <a:avLst/>
-          </a:prstGeom>
-        </p:spPr>
-      </p:pic>
-      <p:sp>
-        <p:nvSpPr>
-          <p:cNvPr id="18" name="TextBox 17">
-            <a:extLst>
-              <a:ext uri="{FF2B5EF4-FFF2-40B4-BE49-F238E27FC236}">
-                <a16:creationId xmlns:a16="http://schemas.microsoft.com/office/drawing/2014/main" id="{79BF95DF-B15D-464F-BA81-E8132ED854B4}"/>
-              </a:ext>
-            </a:extLst>
-          </p:cNvPr>
-          <p:cNvSpPr txBox="1"/>
-          <p:nvPr/>
-        </p:nvSpPr>
-        <p:spPr>
-          <a:xfrm>
-            <a:off x="482461" y="3969415"/>
-            <a:ext cx="3949638" cy="338554"/>
-          </a:xfrm>
-          <a:prstGeom prst="rect">
-            <a:avLst/>
-          </a:prstGeom>
-          <a:noFill/>
-        </p:spPr>
-        <p:txBody>
-          <a:bodyPr wrap="square" rtlCol="0">
-            <a:spAutoFit/>
-          </a:bodyPr>
-          <a:lstStyle/>
-          <a:p>
-            <a:r>
-              <a:rPr lang="en-US" sz="1600" b="1" dirty="0"/>
-              <a:t>Comparative analysis</a:t>
-            </a:r>
-            <a:endParaRPr lang="de-DE" sz="1600" b="1" dirty="0"/>
-          </a:p>
-        </p:txBody>
-      </p:sp>
-      <p:graphicFrame>
-        <p:nvGraphicFramePr>
-          <p:cNvPr id="6" name="Table 5">
-            <a:extLst>
-              <a:ext uri="{FF2B5EF4-FFF2-40B4-BE49-F238E27FC236}">
-                <a16:creationId xmlns:a16="http://schemas.microsoft.com/office/drawing/2014/main" id="{345F29B8-8023-4EF0-AFA3-5E9CFB608765}"/>
-              </a:ext>
-            </a:extLst>
-          </p:cNvPr>
-          <p:cNvGraphicFramePr>
-            <a:graphicFrameLocks noGrp="1"/>
-          </p:cNvGraphicFramePr>
-          <p:nvPr>
-            <p:extLst>
-              <p:ext uri="{D42A27DB-BD31-4B8C-83A1-F6EECF244321}">
-                <p14:modId xmlns:p14="http://schemas.microsoft.com/office/powerpoint/2010/main" val="4007032321"/>
-              </p:ext>
-            </p:extLst>
-          </p:nvPr>
-        </p:nvGraphicFramePr>
-        <p:xfrm>
-          <a:off x="785661" y="4388593"/>
-          <a:ext cx="7394388" cy="1606378"/>
-        </p:xfrm>
-        <a:graphic>
-          <a:graphicData uri="http://schemas.openxmlformats.org/drawingml/2006/table">
-            <a:tbl>
-              <a:tblPr/>
-              <a:tblGrid>
-                <a:gridCol w="1848597">
-                  <a:extLst>
-                    <a:ext uri="{9D8B030D-6E8A-4147-A177-3AD203B41FA5}">
-                      <a16:colId xmlns:a16="http://schemas.microsoft.com/office/drawing/2014/main" val="679015658"/>
-                    </a:ext>
-                  </a:extLst>
-                </a:gridCol>
-                <a:gridCol w="1848597">
-                  <a:extLst>
-                    <a:ext uri="{9D8B030D-6E8A-4147-A177-3AD203B41FA5}">
-                      <a16:colId xmlns:a16="http://schemas.microsoft.com/office/drawing/2014/main" val="3123122154"/>
-                    </a:ext>
-                  </a:extLst>
-                </a:gridCol>
-                <a:gridCol w="1848597">
-                  <a:extLst>
-                    <a:ext uri="{9D8B030D-6E8A-4147-A177-3AD203B41FA5}">
-                      <a16:colId xmlns:a16="http://schemas.microsoft.com/office/drawing/2014/main" val="2309407858"/>
-                    </a:ext>
-                  </a:extLst>
-                </a:gridCol>
-                <a:gridCol w="1848597">
-                  <a:extLst>
-                    <a:ext uri="{9D8B030D-6E8A-4147-A177-3AD203B41FA5}">
-                      <a16:colId xmlns:a16="http://schemas.microsoft.com/office/drawing/2014/main" val="1088390279"/>
-                    </a:ext>
-                  </a:extLst>
-                </a:gridCol>
-              </a:tblGrid>
-              <a:tr h="143053">
-                <a:tc>
-                  <a:txBody>
-                    <a:bodyPr/>
-                    <a:lstStyle/>
-                    <a:p>
-                      <a:pPr algn="ctr" latinLnBrk="0"/>
-                      <a:r>
-                        <a:rPr lang="de-DE" sz="900" b="1">
-                          <a:effectLst/>
-                        </a:rPr>
-                        <a:t>Aspect</a:t>
-                      </a:r>
-                    </a:p>
-                  </a:txBody>
-                  <a:tcPr marL="36890" marR="36890" marT="18445" marB="18445" anchor="ctr">
-                    <a:lnL w="12700" cap="flat" cmpd="sng" algn="ctr">
-                      <a:solidFill>
-                        <a:schemeClr val="tx1"/>
-                      </a:solidFill>
-                      <a:prstDash val="solid"/>
-                      <a:round/>
-                      <a:headEnd type="none" w="med" len="med"/>
-                      <a:tailEnd type="none" w="med" len="med"/>
-                    </a:lnL>
-                    <a:lnR w="12700" cap="flat" cmpd="sng" algn="ctr">
-                      <a:noFill/>
-                      <a:prstDash val="solid"/>
-                      <a:round/>
-                      <a:headEnd type="none" w="med" len="med"/>
-                      <a:tailEnd type="none" w="med" len="med"/>
-                    </a:lnR>
-                    <a:lnT w="12700" cap="flat" cmpd="sng" algn="ctr">
-                      <a:solidFill>
-                        <a:schemeClr val="tx1"/>
-                      </a:solidFill>
-                      <a:prstDash val="solid"/>
-                      <a:round/>
-                      <a:headEnd type="none" w="med" len="med"/>
-                      <a:tailEnd type="none" w="med" len="med"/>
-                    </a:lnT>
-                    <a:lnB w="12700" cap="flat" cmpd="sng" algn="ctr">
-                      <a:solidFill>
-                        <a:schemeClr val="tx1"/>
-                      </a:solidFill>
-                      <a:prstDash val="solid"/>
-                      <a:round/>
-                      <a:headEnd type="none" w="med" len="med"/>
-                      <a:tailEnd type="none" w="med" len="med"/>
-                    </a:lnB>
-                    <a:lnTlToBr w="12700" cmpd="sng">
-                      <a:noFill/>
-                      <a:prstDash val="solid"/>
-                    </a:lnTlToBr>
-                    <a:lnBlToTr w="12700" cmpd="sng">
-                      <a:noFill/>
-                      <a:prstDash val="solid"/>
-                    </a:lnBlToTr>
-                    <a:solidFill>
-                      <a:schemeClr val="bg1"/>
-                    </a:solidFill>
-                  </a:tcPr>
-                </a:tc>
-                <a:tc>
-                  <a:txBody>
-                    <a:bodyPr/>
-                    <a:lstStyle/>
-                    <a:p>
-                      <a:pPr algn="ctr" latinLnBrk="0"/>
-                      <a:r>
-                        <a:rPr lang="de-DE" sz="900" b="1" dirty="0" err="1">
-                          <a:effectLst/>
-                        </a:rPr>
-                        <a:t>Active</a:t>
-                      </a:r>
-                      <a:r>
-                        <a:rPr lang="de-DE" sz="900" b="1" dirty="0">
-                          <a:effectLst/>
-                        </a:rPr>
-                        <a:t> Compound</a:t>
-                      </a:r>
-                    </a:p>
-                  </a:txBody>
-                  <a:tcPr marL="36890" marR="36890" marT="18445" marB="18445" anchor="ctr">
-                    <a:lnL w="12700" cap="flat" cmpd="sng" algn="ctr">
-                      <a:noFill/>
-                      <a:prstDash val="solid"/>
-                      <a:round/>
-                      <a:headEnd type="none" w="med" len="med"/>
-                      <a:tailEnd type="none" w="med" len="med"/>
-                    </a:lnL>
-                    <a:lnR w="12700" cap="flat" cmpd="sng" algn="ctr">
-                      <a:noFill/>
-                      <a:prstDash val="solid"/>
-                      <a:round/>
-                      <a:headEnd type="none" w="med" len="med"/>
-                      <a:tailEnd type="none" w="med" len="med"/>
-                    </a:lnR>
-                    <a:lnT w="12700" cap="flat" cmpd="sng" algn="ctr">
-                      <a:solidFill>
-                        <a:schemeClr val="tx1"/>
-                      </a:solidFill>
-                      <a:prstDash val="solid"/>
-                      <a:round/>
-                      <a:headEnd type="none" w="med" len="med"/>
-                      <a:tailEnd type="none" w="med" len="med"/>
-                    </a:lnT>
-                    <a:lnB w="12700" cap="flat" cmpd="sng" algn="ctr">
-                      <a:solidFill>
-                        <a:schemeClr val="tx1"/>
-                      </a:solidFill>
-                      <a:prstDash val="solid"/>
-                      <a:round/>
-                      <a:headEnd type="none" w="med" len="med"/>
-                      <a:tailEnd type="none" w="med" len="med"/>
-                    </a:lnB>
-                    <a:lnTlToBr w="12700" cmpd="sng">
-                      <a:noFill/>
-                      <a:prstDash val="solid"/>
-                    </a:lnTlToBr>
-                    <a:lnBlToTr w="12700" cmpd="sng">
-                      <a:noFill/>
-                      <a:prstDash val="solid"/>
-                    </a:lnBlToTr>
-                    <a:solidFill>
-                      <a:schemeClr val="bg1"/>
-                    </a:solidFill>
-                  </a:tcPr>
-                </a:tc>
-                <a:tc>
-                  <a:txBody>
-                    <a:bodyPr/>
-                    <a:lstStyle/>
-                    <a:p>
-                      <a:pPr algn="ctr" latinLnBrk="0"/>
-                      <a:r>
-                        <a:rPr lang="de-DE" sz="900" b="1">
-                          <a:effectLst/>
-                        </a:rPr>
-                        <a:t>Inactive Compound</a:t>
-                      </a:r>
-                    </a:p>
-                  </a:txBody>
-                  <a:tcPr marL="36890" marR="36890" marT="18445" marB="18445" anchor="ctr">
-                    <a:lnL w="12700" cap="flat" cmpd="sng" algn="ctr">
-                      <a:noFill/>
-                      <a:prstDash val="solid"/>
-                      <a:round/>
-                      <a:headEnd type="none" w="med" len="med"/>
-                      <a:tailEnd type="none" w="med" len="med"/>
-                    </a:lnL>
-                    <a:lnR w="12700" cap="flat" cmpd="sng" algn="ctr">
-                      <a:noFill/>
-                      <a:prstDash val="solid"/>
-                      <a:round/>
-                      <a:headEnd type="none" w="med" len="med"/>
-                      <a:tailEnd type="none" w="med" len="med"/>
-                    </a:lnR>
-                    <a:lnT w="12700" cap="flat" cmpd="sng" algn="ctr">
-                      <a:solidFill>
-                        <a:schemeClr val="tx1"/>
-                      </a:solidFill>
-                      <a:prstDash val="solid"/>
-                      <a:round/>
-                      <a:headEnd type="none" w="med" len="med"/>
-                      <a:tailEnd type="none" w="med" len="med"/>
-                    </a:lnT>
-                    <a:lnB w="12700" cap="flat" cmpd="sng" algn="ctr">
-                      <a:solidFill>
-                        <a:schemeClr val="tx1"/>
-                      </a:solidFill>
-                      <a:prstDash val="solid"/>
-                      <a:round/>
-                      <a:headEnd type="none" w="med" len="med"/>
-                      <a:tailEnd type="none" w="med" len="med"/>
-                    </a:lnB>
-                    <a:lnTlToBr w="12700" cmpd="sng">
-                      <a:noFill/>
-                      <a:prstDash val="solid"/>
-                    </a:lnTlToBr>
-                    <a:lnBlToTr w="12700" cmpd="sng">
-                      <a:noFill/>
-                      <a:prstDash val="solid"/>
-                    </a:lnBlToTr>
-                    <a:solidFill>
-                      <a:schemeClr val="bg1"/>
-                    </a:solidFill>
-                  </a:tcPr>
-                </a:tc>
-                <a:tc>
-                  <a:txBody>
-                    <a:bodyPr/>
-                    <a:lstStyle/>
-                    <a:p>
-                      <a:pPr algn="ctr" latinLnBrk="0"/>
-                      <a:r>
-                        <a:rPr lang="de-DE" sz="900" b="1">
-                          <a:effectLst/>
-                        </a:rPr>
-                        <a:t>Interpretation</a:t>
-                      </a:r>
-                    </a:p>
-                  </a:txBody>
-                  <a:tcPr marL="36890" marR="36890" marT="18445" marB="18445" anchor="ctr">
-                    <a:lnL w="12700" cap="flat" cmpd="sng" algn="ctr">
-                      <a:noFill/>
-                      <a:prstDash val="solid"/>
-                      <a:round/>
-                      <a:headEnd type="none" w="med" len="med"/>
-                      <a:tailEnd type="none" w="med" len="med"/>
-                    </a:lnL>
-                    <a:lnR w="12700" cap="flat" cmpd="sng" algn="ctr">
-                      <a:solidFill>
-                        <a:schemeClr val="tx1"/>
-                      </a:solidFill>
-                      <a:prstDash val="solid"/>
-                      <a:round/>
-                      <a:headEnd type="none" w="med" len="med"/>
-                      <a:tailEnd type="none" w="med" len="med"/>
-                    </a:lnR>
-                    <a:lnT w="12700" cap="flat" cmpd="sng" algn="ctr">
-                      <a:solidFill>
-                        <a:schemeClr val="tx1"/>
-                      </a:solidFill>
-                      <a:prstDash val="solid"/>
-                      <a:round/>
-                      <a:headEnd type="none" w="med" len="med"/>
-                      <a:tailEnd type="none" w="med" len="med"/>
-                    </a:lnT>
-                    <a:lnB w="12700" cap="flat" cmpd="sng" algn="ctr">
-                      <a:solidFill>
-                        <a:schemeClr val="tx1"/>
-                      </a:solidFill>
-                      <a:prstDash val="solid"/>
-                      <a:round/>
-                      <a:headEnd type="none" w="med" len="med"/>
-                      <a:tailEnd type="none" w="med" len="med"/>
-                    </a:lnB>
-                    <a:lnTlToBr w="12700" cmpd="sng">
-                      <a:noFill/>
-                      <a:prstDash val="solid"/>
-                    </a:lnTlToBr>
-                    <a:lnBlToTr w="12700" cmpd="sng">
-                      <a:noFill/>
-                      <a:prstDash val="solid"/>
-                    </a:lnBlToTr>
-                    <a:solidFill>
-                      <a:schemeClr val="bg1"/>
-                    </a:solidFill>
-                  </a:tcPr>
-                </a:tc>
-                <a:extLst>
-                  <a:ext uri="{0D108BD9-81ED-4DB2-BD59-A6C34878D82A}">
-                    <a16:rowId xmlns:a16="http://schemas.microsoft.com/office/drawing/2014/main" val="3121341623"/>
-                  </a:ext>
-                </a:extLst>
-              </a:tr>
-              <a:tr h="249349">
-                <a:tc>
-                  <a:txBody>
-                    <a:bodyPr/>
-                    <a:lstStyle/>
-                    <a:p>
-                      <a:pPr algn="ctr" fontAlgn="t" latinLnBrk="0"/>
-                      <a:r>
-                        <a:rPr lang="de-DE" sz="900" b="1" dirty="0">
-                          <a:effectLst/>
-                        </a:rPr>
-                        <a:t>Dominant SHAP</a:t>
-                      </a:r>
-                      <a:endParaRPr lang="de-DE" sz="900" dirty="0">
-                        <a:effectLst/>
-                      </a:endParaRPr>
-                    </a:p>
-                  </a:txBody>
-                  <a:tcPr marL="36890" marR="36890" marT="18445" marB="18445" anchor="ctr">
-                    <a:lnL w="12700" cap="flat" cmpd="sng" algn="ctr">
-                      <a:solidFill>
-                        <a:schemeClr val="tx1"/>
-                      </a:solidFill>
-                      <a:prstDash val="solid"/>
-                      <a:round/>
-                      <a:headEnd type="none" w="med" len="med"/>
-                      <a:tailEnd type="none" w="med" len="med"/>
-                    </a:lnL>
-                    <a:lnR w="12700" cap="flat" cmpd="sng" algn="ctr">
-                      <a:noFill/>
-                      <a:prstDash val="solid"/>
-                      <a:round/>
-                      <a:headEnd type="none" w="med" len="med"/>
-                      <a:tailEnd type="none" w="med" len="med"/>
-                    </a:lnR>
-                    <a:lnT w="12700" cap="flat" cmpd="sng" algn="ctr">
-                      <a:solidFill>
-                        <a:schemeClr val="tx1"/>
-                      </a:solidFill>
-                      <a:prstDash val="solid"/>
-                      <a:round/>
-                      <a:headEnd type="none" w="med" len="med"/>
-                      <a:tailEnd type="none" w="med" len="med"/>
-                    </a:lnT>
-                    <a:lnB w="12700" cap="flat" cmpd="sng" algn="ctr">
-                      <a:solidFill>
-                        <a:schemeClr val="tx1"/>
-                      </a:solidFill>
-                      <a:prstDash val="solid"/>
-                      <a:round/>
-                      <a:headEnd type="none" w="med" len="med"/>
-                      <a:tailEnd type="none" w="med" len="med"/>
-                    </a:lnB>
-                    <a:lnTlToBr w="12700" cmpd="sng">
-                      <a:noFill/>
-                      <a:prstDash val="solid"/>
-                    </a:lnTlToBr>
-                    <a:lnBlToTr w="12700" cmpd="sng">
-                      <a:noFill/>
-                      <a:prstDash val="solid"/>
-                    </a:lnBlToTr>
-                    <a:solidFill>
-                      <a:schemeClr val="bg1"/>
-                    </a:solidFill>
-                  </a:tcPr>
-                </a:tc>
-                <a:tc>
-                  <a:txBody>
-                    <a:bodyPr/>
-                    <a:lstStyle/>
-                    <a:p>
-                      <a:pPr algn="ctr" fontAlgn="t" latinLnBrk="0"/>
-                      <a:r>
-                        <a:rPr lang="de-DE" sz="900">
-                          <a:effectLst/>
-                        </a:rPr>
-                        <a:t>0.116 (piperazine)</a:t>
-                      </a:r>
-                    </a:p>
-                  </a:txBody>
-                  <a:tcPr marL="36890" marR="36890" marT="18445" marB="18445" anchor="ctr">
-                    <a:lnL w="12700" cap="flat" cmpd="sng" algn="ctr">
-                      <a:noFill/>
-                      <a:prstDash val="solid"/>
-                      <a:round/>
-                      <a:headEnd type="none" w="med" len="med"/>
-                      <a:tailEnd type="none" w="med" len="med"/>
-                    </a:lnL>
-                    <a:lnR w="12700" cap="flat" cmpd="sng" algn="ctr">
-                      <a:noFill/>
-                      <a:prstDash val="solid"/>
-                      <a:round/>
-                      <a:headEnd type="none" w="med" len="med"/>
-                      <a:tailEnd type="none" w="med" len="med"/>
-                    </a:lnR>
-                    <a:lnT w="12700" cap="flat" cmpd="sng" algn="ctr">
-                      <a:solidFill>
-                        <a:schemeClr val="tx1"/>
-                      </a:solidFill>
-                      <a:prstDash val="solid"/>
-                      <a:round/>
-                      <a:headEnd type="none" w="med" len="med"/>
-                      <a:tailEnd type="none" w="med" len="med"/>
-                    </a:lnT>
-                    <a:lnB w="12700" cap="flat" cmpd="sng" algn="ctr">
-                      <a:solidFill>
-                        <a:schemeClr val="tx1"/>
-                      </a:solidFill>
-                      <a:prstDash val="solid"/>
-                      <a:round/>
-                      <a:headEnd type="none" w="med" len="med"/>
-                      <a:tailEnd type="none" w="med" len="med"/>
-                    </a:lnB>
-                    <a:lnTlToBr w="12700" cmpd="sng">
-                      <a:noFill/>
-                      <a:prstDash val="solid"/>
-                    </a:lnTlToBr>
-                    <a:lnBlToTr w="12700" cmpd="sng">
-                      <a:noFill/>
-                      <a:prstDash val="solid"/>
-                    </a:lnBlToTr>
-                    <a:solidFill>
-                      <a:schemeClr val="bg1"/>
-                    </a:solidFill>
-                  </a:tcPr>
-                </a:tc>
-                <a:tc>
-                  <a:txBody>
-                    <a:bodyPr/>
-                    <a:lstStyle/>
-                    <a:p>
-                      <a:pPr algn="ctr" fontAlgn="t" latinLnBrk="0"/>
-                      <a:r>
-                        <a:rPr lang="de-DE" sz="900" dirty="0">
-                          <a:effectLst/>
-                        </a:rPr>
-                        <a:t>0.283 (methyl-phenyl)</a:t>
-                      </a:r>
-                    </a:p>
-                  </a:txBody>
-                  <a:tcPr marL="36890" marR="36890" marT="18445" marB="18445" anchor="ctr">
-                    <a:lnL w="12700" cap="flat" cmpd="sng" algn="ctr">
-                      <a:noFill/>
-                      <a:prstDash val="solid"/>
-                      <a:round/>
-                      <a:headEnd type="none" w="med" len="med"/>
-                      <a:tailEnd type="none" w="med" len="med"/>
-                    </a:lnL>
-                    <a:lnR w="12700" cap="flat" cmpd="sng" algn="ctr">
-                      <a:noFill/>
-                      <a:prstDash val="solid"/>
-                      <a:round/>
-                      <a:headEnd type="none" w="med" len="med"/>
-                      <a:tailEnd type="none" w="med" len="med"/>
-                    </a:lnR>
-                    <a:lnT w="12700" cap="flat" cmpd="sng" algn="ctr">
-                      <a:solidFill>
-                        <a:schemeClr val="tx1"/>
-                      </a:solidFill>
-                      <a:prstDash val="solid"/>
-                      <a:round/>
-                      <a:headEnd type="none" w="med" len="med"/>
-                      <a:tailEnd type="none" w="med" len="med"/>
-                    </a:lnT>
-                    <a:lnB w="12700" cap="flat" cmpd="sng" algn="ctr">
-                      <a:solidFill>
-                        <a:schemeClr val="tx1"/>
-                      </a:solidFill>
-                      <a:prstDash val="solid"/>
-                      <a:round/>
-                      <a:headEnd type="none" w="med" len="med"/>
-                      <a:tailEnd type="none" w="med" len="med"/>
-                    </a:lnB>
-                    <a:lnTlToBr w="12700" cmpd="sng">
-                      <a:noFill/>
-                      <a:prstDash val="solid"/>
-                    </a:lnTlToBr>
-                    <a:lnBlToTr w="12700" cmpd="sng">
-                      <a:noFill/>
-                      <a:prstDash val="solid"/>
-                    </a:lnBlToTr>
-                    <a:solidFill>
-                      <a:schemeClr val="bg1"/>
-                    </a:solidFill>
-                  </a:tcPr>
-                </a:tc>
-                <a:tc>
-                  <a:txBody>
-                    <a:bodyPr/>
-                    <a:lstStyle/>
-                    <a:p>
-                      <a:pPr algn="ctr" fontAlgn="t" latinLnBrk="0"/>
-                      <a:r>
-                        <a:rPr lang="en-US" sz="900" dirty="0">
-                          <a:effectLst/>
-                        </a:rPr>
-                        <a:t>Inactive has more extreme values</a:t>
-                      </a:r>
-                    </a:p>
-                  </a:txBody>
-                  <a:tcPr marL="36890" marR="36890" marT="18445" marB="18445" anchor="ctr">
-                    <a:lnL w="12700" cap="flat" cmpd="sng" algn="ctr">
-                      <a:noFill/>
-                      <a:prstDash val="solid"/>
-                      <a:round/>
-                      <a:headEnd type="none" w="med" len="med"/>
-                      <a:tailEnd type="none" w="med" len="med"/>
-                    </a:lnL>
-                    <a:lnR w="12700" cap="flat" cmpd="sng" algn="ctr">
-                      <a:solidFill>
-                        <a:schemeClr val="tx1"/>
-                      </a:solidFill>
-                      <a:prstDash val="solid"/>
-                      <a:round/>
-                      <a:headEnd type="none" w="med" len="med"/>
-                      <a:tailEnd type="none" w="med" len="med"/>
-                    </a:lnR>
-                    <a:lnT w="12700" cap="flat" cmpd="sng" algn="ctr">
-                      <a:solidFill>
-                        <a:schemeClr val="tx1"/>
-                      </a:solidFill>
-                      <a:prstDash val="solid"/>
-                      <a:round/>
-                      <a:headEnd type="none" w="med" len="med"/>
-                      <a:tailEnd type="none" w="med" len="med"/>
-                    </a:lnT>
-                    <a:lnB w="12700" cap="flat" cmpd="sng" algn="ctr">
-                      <a:solidFill>
-                        <a:schemeClr val="tx1"/>
-                      </a:solidFill>
-                      <a:prstDash val="solid"/>
-                      <a:round/>
-                      <a:headEnd type="none" w="med" len="med"/>
-                      <a:tailEnd type="none" w="med" len="med"/>
-                    </a:lnB>
-                    <a:lnTlToBr w="12700" cmpd="sng">
-                      <a:noFill/>
-                      <a:prstDash val="solid"/>
-                    </a:lnTlToBr>
-                    <a:lnBlToTr w="12700" cmpd="sng">
-                      <a:noFill/>
-                      <a:prstDash val="solid"/>
-                    </a:lnBlToTr>
-                    <a:solidFill>
-                      <a:schemeClr val="bg1"/>
-                    </a:solidFill>
-                  </a:tcPr>
-                </a:tc>
-                <a:extLst>
-                  <a:ext uri="{0D108BD9-81ED-4DB2-BD59-A6C34878D82A}">
-                    <a16:rowId xmlns:a16="http://schemas.microsoft.com/office/drawing/2014/main" val="271566910"/>
-                  </a:ext>
-                </a:extLst>
-              </a:tr>
-              <a:tr h="301124">
-                <a:tc>
-                  <a:txBody>
-                    <a:bodyPr/>
-                    <a:lstStyle/>
-                    <a:p>
-                      <a:pPr algn="ctr" fontAlgn="t" latinLnBrk="0"/>
-                      <a:r>
-                        <a:rPr lang="de-DE" sz="900" b="1">
-                          <a:effectLst/>
-                        </a:rPr>
-                        <a:t>SHAP Distribution</a:t>
-                      </a:r>
-                      <a:endParaRPr lang="de-DE" sz="900">
-                        <a:effectLst/>
-                      </a:endParaRPr>
-                    </a:p>
-                  </a:txBody>
-                  <a:tcPr marL="36890" marR="36890" marT="18445" marB="18445" anchor="ctr">
-                    <a:lnL w="12700" cap="flat" cmpd="sng" algn="ctr">
-                      <a:solidFill>
-                        <a:schemeClr val="tx1"/>
-                      </a:solidFill>
-                      <a:prstDash val="solid"/>
-                      <a:round/>
-                      <a:headEnd type="none" w="med" len="med"/>
-                      <a:tailEnd type="none" w="med" len="med"/>
-                    </a:lnL>
-                    <a:lnR w="12700" cap="flat" cmpd="sng" algn="ctr">
-                      <a:noFill/>
-                      <a:prstDash val="solid"/>
-                      <a:round/>
-                      <a:headEnd type="none" w="med" len="med"/>
-                      <a:tailEnd type="none" w="med" len="med"/>
-                    </a:lnR>
-                    <a:lnT w="12700" cap="flat" cmpd="sng" algn="ctr">
-                      <a:solidFill>
-                        <a:schemeClr val="tx1"/>
-                      </a:solidFill>
-                      <a:prstDash val="solid"/>
-                      <a:round/>
-                      <a:headEnd type="none" w="med" len="med"/>
-                      <a:tailEnd type="none" w="med" len="med"/>
-                    </a:lnT>
-                    <a:lnB w="12700" cap="flat" cmpd="sng" algn="ctr">
-                      <a:solidFill>
-                        <a:schemeClr val="tx1"/>
-                      </a:solidFill>
-                      <a:prstDash val="solid"/>
-                      <a:round/>
-                      <a:headEnd type="none" w="med" len="med"/>
-                      <a:tailEnd type="none" w="med" len="med"/>
-                    </a:lnB>
-                    <a:lnTlToBr w="12700" cmpd="sng">
-                      <a:noFill/>
-                      <a:prstDash val="solid"/>
-                    </a:lnTlToBr>
-                    <a:lnBlToTr w="12700" cmpd="sng">
-                      <a:noFill/>
-                      <a:prstDash val="solid"/>
-                    </a:lnBlToTr>
-                    <a:solidFill>
-                      <a:schemeClr val="bg1"/>
-                    </a:solidFill>
-                  </a:tcPr>
-                </a:tc>
-                <a:tc>
-                  <a:txBody>
-                    <a:bodyPr/>
-                    <a:lstStyle/>
-                    <a:p>
-                      <a:pPr algn="ctr" fontAlgn="t" latinLnBrk="0"/>
-                      <a:r>
-                        <a:rPr lang="de-DE" sz="900">
-                          <a:effectLst/>
-                        </a:rPr>
-                        <a:t>More uniform (0.045-0.116)</a:t>
-                      </a:r>
-                    </a:p>
-                  </a:txBody>
-                  <a:tcPr marL="36890" marR="36890" marT="18445" marB="18445" anchor="ctr">
-                    <a:lnL w="12700" cap="flat" cmpd="sng" algn="ctr">
-                      <a:noFill/>
-                      <a:prstDash val="solid"/>
-                      <a:round/>
-                      <a:headEnd type="none" w="med" len="med"/>
-                      <a:tailEnd type="none" w="med" len="med"/>
-                    </a:lnL>
-                    <a:lnR w="12700" cap="flat" cmpd="sng" algn="ctr">
-                      <a:noFill/>
-                      <a:prstDash val="solid"/>
-                      <a:round/>
-                      <a:headEnd type="none" w="med" len="med"/>
-                      <a:tailEnd type="none" w="med" len="med"/>
-                    </a:lnR>
-                    <a:lnT w="12700" cap="flat" cmpd="sng" algn="ctr">
-                      <a:solidFill>
-                        <a:schemeClr val="tx1"/>
-                      </a:solidFill>
-                      <a:prstDash val="solid"/>
-                      <a:round/>
-                      <a:headEnd type="none" w="med" len="med"/>
-                      <a:tailEnd type="none" w="med" len="med"/>
-                    </a:lnT>
-                    <a:lnB w="12700" cap="flat" cmpd="sng" algn="ctr">
-                      <a:solidFill>
-                        <a:schemeClr val="tx1"/>
-                      </a:solidFill>
-                      <a:prstDash val="solid"/>
-                      <a:round/>
-                      <a:headEnd type="none" w="med" len="med"/>
-                      <a:tailEnd type="none" w="med" len="med"/>
-                    </a:lnB>
-                    <a:lnTlToBr w="12700" cmpd="sng">
-                      <a:noFill/>
-                      <a:prstDash val="solid"/>
-                    </a:lnTlToBr>
-                    <a:lnBlToTr w="12700" cmpd="sng">
-                      <a:noFill/>
-                      <a:prstDash val="solid"/>
-                    </a:lnBlToTr>
-                    <a:solidFill>
-                      <a:schemeClr val="bg1"/>
-                    </a:solidFill>
-                  </a:tcPr>
-                </a:tc>
-                <a:tc>
-                  <a:txBody>
-                    <a:bodyPr/>
-                    <a:lstStyle/>
-                    <a:p>
-                      <a:pPr algn="ctr" fontAlgn="t" latinLnBrk="0"/>
-                      <a:r>
-                        <a:rPr lang="de-DE" sz="900" dirty="0">
-                          <a:effectLst/>
-                        </a:rPr>
-                        <a:t>More </a:t>
-                      </a:r>
-                      <a:r>
-                        <a:rPr lang="de-DE" sz="900" dirty="0" err="1">
-                          <a:effectLst/>
-                        </a:rPr>
-                        <a:t>skewed</a:t>
-                      </a:r>
-                      <a:r>
-                        <a:rPr lang="de-DE" sz="900" dirty="0">
-                          <a:effectLst/>
-                        </a:rPr>
-                        <a:t> (0.003-0.283)</a:t>
-                      </a:r>
-                    </a:p>
-                  </a:txBody>
-                  <a:tcPr marL="36890" marR="36890" marT="18445" marB="18445" anchor="ctr">
-                    <a:lnL w="12700" cap="flat" cmpd="sng" algn="ctr">
-                      <a:noFill/>
-                      <a:prstDash val="solid"/>
-                      <a:round/>
-                      <a:headEnd type="none" w="med" len="med"/>
-                      <a:tailEnd type="none" w="med" len="med"/>
-                    </a:lnL>
-                    <a:lnR w="12700" cap="flat" cmpd="sng" algn="ctr">
-                      <a:noFill/>
-                      <a:prstDash val="solid"/>
-                      <a:round/>
-                      <a:headEnd type="none" w="med" len="med"/>
-                      <a:tailEnd type="none" w="med" len="med"/>
-                    </a:lnR>
-                    <a:lnT w="12700" cap="flat" cmpd="sng" algn="ctr">
-                      <a:solidFill>
-                        <a:schemeClr val="tx1"/>
-                      </a:solidFill>
-                      <a:prstDash val="solid"/>
-                      <a:round/>
-                      <a:headEnd type="none" w="med" len="med"/>
-                      <a:tailEnd type="none" w="med" len="med"/>
-                    </a:lnT>
-                    <a:lnB w="12700" cap="flat" cmpd="sng" algn="ctr">
-                      <a:solidFill>
-                        <a:schemeClr val="tx1"/>
-                      </a:solidFill>
-                      <a:prstDash val="solid"/>
-                      <a:round/>
-                      <a:headEnd type="none" w="med" len="med"/>
-                      <a:tailEnd type="none" w="med" len="med"/>
-                    </a:lnB>
-                    <a:lnTlToBr w="12700" cmpd="sng">
-                      <a:noFill/>
-                      <a:prstDash val="solid"/>
-                    </a:lnTlToBr>
-                    <a:lnBlToTr w="12700" cmpd="sng">
-                      <a:noFill/>
-                      <a:prstDash val="solid"/>
-                    </a:lnBlToTr>
-                    <a:solidFill>
-                      <a:schemeClr val="bg1"/>
-                    </a:solidFill>
-                  </a:tcPr>
-                </a:tc>
-                <a:tc>
-                  <a:txBody>
-                    <a:bodyPr/>
-                    <a:lstStyle/>
-                    <a:p>
-                      <a:pPr algn="ctr" fontAlgn="t" latinLnBrk="0"/>
-                      <a:r>
-                        <a:rPr lang="de-DE" sz="900">
-                          <a:effectLst/>
-                        </a:rPr>
-                        <a:t>Active compound relies on multiple features</a:t>
-                      </a:r>
-                    </a:p>
-                  </a:txBody>
-                  <a:tcPr marL="36890" marR="36890" marT="18445" marB="18445" anchor="ctr">
-                    <a:lnL w="12700" cap="flat" cmpd="sng" algn="ctr">
-                      <a:noFill/>
-                      <a:prstDash val="solid"/>
-                      <a:round/>
-                      <a:headEnd type="none" w="med" len="med"/>
-                      <a:tailEnd type="none" w="med" len="med"/>
-                    </a:lnL>
-                    <a:lnR w="12700" cap="flat" cmpd="sng" algn="ctr">
-                      <a:solidFill>
-                        <a:schemeClr val="tx1"/>
-                      </a:solidFill>
-                      <a:prstDash val="solid"/>
-                      <a:round/>
-                      <a:headEnd type="none" w="med" len="med"/>
-                      <a:tailEnd type="none" w="med" len="med"/>
-                    </a:lnR>
-                    <a:lnT w="12700" cap="flat" cmpd="sng" algn="ctr">
-                      <a:solidFill>
-                        <a:schemeClr val="tx1"/>
-                      </a:solidFill>
-                      <a:prstDash val="solid"/>
-                      <a:round/>
-                      <a:headEnd type="none" w="med" len="med"/>
-                      <a:tailEnd type="none" w="med" len="med"/>
-                    </a:lnT>
-                    <a:lnB w="12700" cap="flat" cmpd="sng" algn="ctr">
-                      <a:solidFill>
-                        <a:schemeClr val="tx1"/>
-                      </a:solidFill>
-                      <a:prstDash val="solid"/>
-                      <a:round/>
-                      <a:headEnd type="none" w="med" len="med"/>
-                      <a:tailEnd type="none" w="med" len="med"/>
-                    </a:lnB>
-                    <a:lnTlToBr w="12700" cmpd="sng">
-                      <a:noFill/>
-                      <a:prstDash val="solid"/>
-                    </a:lnTlToBr>
-                    <a:lnBlToTr w="12700" cmpd="sng">
-                      <a:noFill/>
-                      <a:prstDash val="solid"/>
-                    </a:lnBlToTr>
-                    <a:solidFill>
-                      <a:schemeClr val="bg1"/>
-                    </a:solidFill>
-                  </a:tcPr>
-                </a:tc>
-                <a:extLst>
-                  <a:ext uri="{0D108BD9-81ED-4DB2-BD59-A6C34878D82A}">
-                    <a16:rowId xmlns:a16="http://schemas.microsoft.com/office/drawing/2014/main" val="1121413249"/>
-                  </a:ext>
-                </a:extLst>
-              </a:tr>
-              <a:tr h="249349">
-                <a:tc>
-                  <a:txBody>
-                    <a:bodyPr/>
-                    <a:lstStyle/>
-                    <a:p>
-                      <a:pPr algn="ctr" fontAlgn="t" latinLnBrk="0"/>
-                      <a:r>
-                        <a:rPr lang="de-DE" sz="900" b="1">
-                          <a:effectLst/>
-                        </a:rPr>
-                        <a:t>Key Pharmacophore</a:t>
-                      </a:r>
-                      <a:endParaRPr lang="de-DE" sz="900">
-                        <a:effectLst/>
-                      </a:endParaRPr>
-                    </a:p>
-                  </a:txBody>
-                  <a:tcPr marL="36890" marR="36890" marT="18445" marB="18445" anchor="ctr">
-                    <a:lnL w="12700" cap="flat" cmpd="sng" algn="ctr">
-                      <a:solidFill>
-                        <a:schemeClr val="tx1"/>
-                      </a:solidFill>
-                      <a:prstDash val="solid"/>
-                      <a:round/>
-                      <a:headEnd type="none" w="med" len="med"/>
-                      <a:tailEnd type="none" w="med" len="med"/>
-                    </a:lnL>
-                    <a:lnR w="12700" cap="flat" cmpd="sng" algn="ctr">
-                      <a:noFill/>
-                      <a:prstDash val="solid"/>
-                      <a:round/>
-                      <a:headEnd type="none" w="med" len="med"/>
-                      <a:tailEnd type="none" w="med" len="med"/>
-                    </a:lnR>
-                    <a:lnT w="12700" cap="flat" cmpd="sng" algn="ctr">
-                      <a:solidFill>
-                        <a:schemeClr val="tx1"/>
-                      </a:solidFill>
-                      <a:prstDash val="solid"/>
-                      <a:round/>
-                      <a:headEnd type="none" w="med" len="med"/>
-                      <a:tailEnd type="none" w="med" len="med"/>
-                    </a:lnT>
-                    <a:lnB w="12700" cap="flat" cmpd="sng" algn="ctr">
-                      <a:solidFill>
-                        <a:schemeClr val="tx1"/>
-                      </a:solidFill>
-                      <a:prstDash val="solid"/>
-                      <a:round/>
-                      <a:headEnd type="none" w="med" len="med"/>
-                      <a:tailEnd type="none" w="med" len="med"/>
-                    </a:lnB>
-                    <a:lnTlToBr w="12700" cmpd="sng">
-                      <a:noFill/>
-                      <a:prstDash val="solid"/>
-                    </a:lnTlToBr>
-                    <a:lnBlToTr w="12700" cmpd="sng">
-                      <a:noFill/>
-                      <a:prstDash val="solid"/>
-                    </a:lnBlToTr>
-                    <a:solidFill>
-                      <a:schemeClr val="bg1"/>
-                    </a:solidFill>
-                  </a:tcPr>
-                </a:tc>
-                <a:tc>
-                  <a:txBody>
-                    <a:bodyPr/>
-                    <a:lstStyle/>
-                    <a:p>
-                      <a:pPr algn="ctr" fontAlgn="t" latinLnBrk="0"/>
-                      <a:r>
-                        <a:rPr lang="de-DE" sz="900" dirty="0" err="1">
-                          <a:effectLst/>
-                        </a:rPr>
-                        <a:t>Piperazine</a:t>
-                      </a:r>
-                      <a:r>
-                        <a:rPr lang="de-DE" sz="900" dirty="0">
-                          <a:effectLst/>
-                        </a:rPr>
-                        <a:t> + </a:t>
-                      </a:r>
-                      <a:r>
-                        <a:rPr lang="de-DE" sz="900" dirty="0" err="1">
-                          <a:effectLst/>
-                        </a:rPr>
-                        <a:t>halogenated</a:t>
-                      </a:r>
-                      <a:r>
-                        <a:rPr lang="de-DE" sz="900" dirty="0">
-                          <a:effectLst/>
-                        </a:rPr>
-                        <a:t> </a:t>
-                      </a:r>
-                      <a:r>
-                        <a:rPr lang="de-DE" sz="900" dirty="0" err="1">
-                          <a:effectLst/>
-                        </a:rPr>
-                        <a:t>aryl</a:t>
-                      </a:r>
-                      <a:endParaRPr lang="de-DE" sz="900" dirty="0">
-                        <a:effectLst/>
-                      </a:endParaRPr>
-                    </a:p>
-                  </a:txBody>
-                  <a:tcPr marL="36890" marR="36890" marT="18445" marB="18445" anchor="ctr">
-                    <a:lnL w="12700" cap="flat" cmpd="sng" algn="ctr">
-                      <a:noFill/>
-                      <a:prstDash val="solid"/>
-                      <a:round/>
-                      <a:headEnd type="none" w="med" len="med"/>
-                      <a:tailEnd type="none" w="med" len="med"/>
-                    </a:lnL>
-                    <a:lnR w="12700" cap="flat" cmpd="sng" algn="ctr">
-                      <a:noFill/>
-                      <a:prstDash val="solid"/>
-                      <a:round/>
-                      <a:headEnd type="none" w="med" len="med"/>
-                      <a:tailEnd type="none" w="med" len="med"/>
-                    </a:lnR>
-                    <a:lnT w="12700" cap="flat" cmpd="sng" algn="ctr">
-                      <a:solidFill>
-                        <a:schemeClr val="tx1"/>
-                      </a:solidFill>
-                      <a:prstDash val="solid"/>
-                      <a:round/>
-                      <a:headEnd type="none" w="med" len="med"/>
-                      <a:tailEnd type="none" w="med" len="med"/>
-                    </a:lnT>
-                    <a:lnB w="12700" cap="flat" cmpd="sng" algn="ctr">
-                      <a:solidFill>
-                        <a:schemeClr val="tx1"/>
-                      </a:solidFill>
-                      <a:prstDash val="solid"/>
-                      <a:round/>
-                      <a:headEnd type="none" w="med" len="med"/>
-                      <a:tailEnd type="none" w="med" len="med"/>
-                    </a:lnB>
-                    <a:lnTlToBr w="12700" cmpd="sng">
-                      <a:noFill/>
-                      <a:prstDash val="solid"/>
-                    </a:lnTlToBr>
-                    <a:lnBlToTr w="12700" cmpd="sng">
-                      <a:noFill/>
-                      <a:prstDash val="solid"/>
-                    </a:lnBlToTr>
-                    <a:solidFill>
-                      <a:schemeClr val="bg1"/>
-                    </a:solidFill>
-                  </a:tcPr>
-                </a:tc>
-                <a:tc>
-                  <a:txBody>
-                    <a:bodyPr/>
-                    <a:lstStyle/>
-                    <a:p>
-                      <a:pPr algn="ctr" fontAlgn="t" latinLnBrk="0"/>
-                      <a:r>
-                        <a:rPr lang="de-DE" sz="900">
-                          <a:effectLst/>
-                        </a:rPr>
-                        <a:t>Simple alkyl-aryl</a:t>
-                      </a:r>
-                    </a:p>
-                  </a:txBody>
-                  <a:tcPr marL="36890" marR="36890" marT="18445" marB="18445" anchor="ctr">
-                    <a:lnL w="12700" cap="flat" cmpd="sng" algn="ctr">
-                      <a:noFill/>
-                      <a:prstDash val="solid"/>
-                      <a:round/>
-                      <a:headEnd type="none" w="med" len="med"/>
-                      <a:tailEnd type="none" w="med" len="med"/>
-                    </a:lnL>
-                    <a:lnR w="12700" cap="flat" cmpd="sng" algn="ctr">
-                      <a:noFill/>
-                      <a:prstDash val="solid"/>
-                      <a:round/>
-                      <a:headEnd type="none" w="med" len="med"/>
-                      <a:tailEnd type="none" w="med" len="med"/>
-                    </a:lnR>
-                    <a:lnT w="12700" cap="flat" cmpd="sng" algn="ctr">
-                      <a:solidFill>
-                        <a:schemeClr val="tx1"/>
-                      </a:solidFill>
-                      <a:prstDash val="solid"/>
-                      <a:round/>
-                      <a:headEnd type="none" w="med" len="med"/>
-                      <a:tailEnd type="none" w="med" len="med"/>
-                    </a:lnT>
-                    <a:lnB w="12700" cap="flat" cmpd="sng" algn="ctr">
-                      <a:solidFill>
-                        <a:schemeClr val="tx1"/>
-                      </a:solidFill>
-                      <a:prstDash val="solid"/>
-                      <a:round/>
-                      <a:headEnd type="none" w="med" len="med"/>
-                      <a:tailEnd type="none" w="med" len="med"/>
-                    </a:lnB>
-                    <a:lnTlToBr w="12700" cmpd="sng">
-                      <a:noFill/>
-                      <a:prstDash val="solid"/>
-                    </a:lnTlToBr>
-                    <a:lnBlToTr w="12700" cmpd="sng">
-                      <a:noFill/>
-                      <a:prstDash val="solid"/>
-                    </a:lnBlToTr>
-                    <a:solidFill>
-                      <a:schemeClr val="bg1"/>
-                    </a:solidFill>
-                  </a:tcPr>
-                </a:tc>
-                <a:tc>
-                  <a:txBody>
-                    <a:bodyPr/>
-                    <a:lstStyle/>
-                    <a:p>
-                      <a:pPr algn="ctr" fontAlgn="t" latinLnBrk="0"/>
-                      <a:r>
-                        <a:rPr lang="de-DE" sz="900">
-                          <a:effectLst/>
-                        </a:rPr>
-                        <a:t>Active has recognized pharmacophore</a:t>
-                      </a:r>
-                    </a:p>
-                  </a:txBody>
-                  <a:tcPr marL="36890" marR="36890" marT="18445" marB="18445" anchor="ctr">
-                    <a:lnL w="12700" cap="flat" cmpd="sng" algn="ctr">
-                      <a:noFill/>
-                      <a:prstDash val="solid"/>
-                      <a:round/>
-                      <a:headEnd type="none" w="med" len="med"/>
-                      <a:tailEnd type="none" w="med" len="med"/>
-                    </a:lnL>
-                    <a:lnR w="12700" cap="flat" cmpd="sng" algn="ctr">
-                      <a:solidFill>
-                        <a:schemeClr val="tx1"/>
-                      </a:solidFill>
-                      <a:prstDash val="solid"/>
-                      <a:round/>
-                      <a:headEnd type="none" w="med" len="med"/>
-                      <a:tailEnd type="none" w="med" len="med"/>
-                    </a:lnR>
-                    <a:lnT w="12700" cap="flat" cmpd="sng" algn="ctr">
-                      <a:solidFill>
-                        <a:schemeClr val="tx1"/>
-                      </a:solidFill>
-                      <a:prstDash val="solid"/>
-                      <a:round/>
-                      <a:headEnd type="none" w="med" len="med"/>
-                      <a:tailEnd type="none" w="med" len="med"/>
-                    </a:lnT>
-                    <a:lnB w="12700" cap="flat" cmpd="sng" algn="ctr">
-                      <a:solidFill>
-                        <a:schemeClr val="tx1"/>
-                      </a:solidFill>
-                      <a:prstDash val="solid"/>
-                      <a:round/>
-                      <a:headEnd type="none" w="med" len="med"/>
-                      <a:tailEnd type="none" w="med" len="med"/>
-                    </a:lnB>
-                    <a:lnTlToBr w="12700" cmpd="sng">
-                      <a:noFill/>
-                      <a:prstDash val="solid"/>
-                    </a:lnTlToBr>
-                    <a:lnBlToTr w="12700" cmpd="sng">
-                      <a:noFill/>
-                      <a:prstDash val="solid"/>
-                    </a:lnBlToTr>
-                    <a:solidFill>
-                      <a:schemeClr val="bg1"/>
-                    </a:solidFill>
-                  </a:tcPr>
-                </a:tc>
-                <a:extLst>
-                  <a:ext uri="{0D108BD9-81ED-4DB2-BD59-A6C34878D82A}">
-                    <a16:rowId xmlns:a16="http://schemas.microsoft.com/office/drawing/2014/main" val="2866350255"/>
-                  </a:ext>
-                </a:extLst>
-              </a:tr>
-              <a:tr h="249349">
-                <a:tc>
-                  <a:txBody>
-                    <a:bodyPr/>
-                    <a:lstStyle/>
-                    <a:p>
-                      <a:pPr algn="ctr" fontAlgn="t" latinLnBrk="0"/>
-                      <a:r>
-                        <a:rPr lang="de-DE" sz="900" b="1">
-                          <a:effectLst/>
-                        </a:rPr>
-                        <a:t>Molecular Complexity</a:t>
-                      </a:r>
-                      <a:endParaRPr lang="de-DE" sz="900">
-                        <a:effectLst/>
-                      </a:endParaRPr>
-                    </a:p>
-                  </a:txBody>
-                  <a:tcPr marL="36890" marR="36890" marT="18445" marB="18445" anchor="ctr">
-                    <a:lnL w="12700" cap="flat" cmpd="sng" algn="ctr">
-                      <a:solidFill>
-                        <a:schemeClr val="tx1"/>
-                      </a:solidFill>
-                      <a:prstDash val="solid"/>
-                      <a:round/>
-                      <a:headEnd type="none" w="med" len="med"/>
-                      <a:tailEnd type="none" w="med" len="med"/>
-                    </a:lnL>
-                    <a:lnR w="12700" cap="flat" cmpd="sng" algn="ctr">
-                      <a:noFill/>
-                      <a:prstDash val="solid"/>
-                      <a:round/>
-                      <a:headEnd type="none" w="med" len="med"/>
-                      <a:tailEnd type="none" w="med" len="med"/>
-                    </a:lnR>
-                    <a:lnT w="12700" cap="flat" cmpd="sng" algn="ctr">
-                      <a:solidFill>
-                        <a:schemeClr val="tx1"/>
-                      </a:solidFill>
-                      <a:prstDash val="solid"/>
-                      <a:round/>
-                      <a:headEnd type="none" w="med" len="med"/>
-                      <a:tailEnd type="none" w="med" len="med"/>
-                    </a:lnT>
-                    <a:lnB w="12700" cap="flat" cmpd="sng" algn="ctr">
-                      <a:solidFill>
-                        <a:schemeClr val="tx1"/>
-                      </a:solidFill>
-                      <a:prstDash val="solid"/>
-                      <a:round/>
-                      <a:headEnd type="none" w="med" len="med"/>
-                      <a:tailEnd type="none" w="med" len="med"/>
-                    </a:lnB>
-                    <a:lnTlToBr w="12700" cmpd="sng">
-                      <a:noFill/>
-                      <a:prstDash val="solid"/>
-                    </a:lnTlToBr>
-                    <a:lnBlToTr w="12700" cmpd="sng">
-                      <a:noFill/>
-                      <a:prstDash val="solid"/>
-                    </a:lnBlToTr>
-                    <a:solidFill>
-                      <a:schemeClr val="bg1"/>
-                    </a:solidFill>
-                  </a:tcPr>
-                </a:tc>
-                <a:tc>
-                  <a:txBody>
-                    <a:bodyPr/>
-                    <a:lstStyle/>
-                    <a:p>
-                      <a:pPr algn="ctr" fontAlgn="t" latinLnBrk="0"/>
-                      <a:r>
-                        <a:rPr lang="en-US" sz="900">
-                          <a:effectLst/>
-                        </a:rPr>
-                        <a:t>Moderate (12 heavy atoms in core)</a:t>
-                      </a:r>
-                    </a:p>
-                  </a:txBody>
-                  <a:tcPr marL="36890" marR="36890" marT="18445" marB="18445" anchor="ctr">
-                    <a:lnL w="12700" cap="flat" cmpd="sng" algn="ctr">
-                      <a:noFill/>
-                      <a:prstDash val="solid"/>
-                      <a:round/>
-                      <a:headEnd type="none" w="med" len="med"/>
-                      <a:tailEnd type="none" w="med" len="med"/>
-                    </a:lnL>
-                    <a:lnR w="12700" cap="flat" cmpd="sng" algn="ctr">
-                      <a:noFill/>
-                      <a:prstDash val="solid"/>
-                      <a:round/>
-                      <a:headEnd type="none" w="med" len="med"/>
-                      <a:tailEnd type="none" w="med" len="med"/>
-                    </a:lnR>
-                    <a:lnT w="12700" cap="flat" cmpd="sng" algn="ctr">
-                      <a:solidFill>
-                        <a:schemeClr val="tx1"/>
-                      </a:solidFill>
-                      <a:prstDash val="solid"/>
-                      <a:round/>
-                      <a:headEnd type="none" w="med" len="med"/>
-                      <a:tailEnd type="none" w="med" len="med"/>
-                    </a:lnT>
-                    <a:lnB w="12700" cap="flat" cmpd="sng" algn="ctr">
-                      <a:solidFill>
-                        <a:schemeClr val="tx1"/>
-                      </a:solidFill>
-                      <a:prstDash val="solid"/>
-                      <a:round/>
-                      <a:headEnd type="none" w="med" len="med"/>
-                      <a:tailEnd type="none" w="med" len="med"/>
-                    </a:lnB>
-                    <a:lnTlToBr w="12700" cmpd="sng">
-                      <a:noFill/>
-                      <a:prstDash val="solid"/>
-                    </a:lnTlToBr>
-                    <a:lnBlToTr w="12700" cmpd="sng">
-                      <a:noFill/>
-                      <a:prstDash val="solid"/>
-                    </a:lnBlToTr>
-                    <a:solidFill>
-                      <a:schemeClr val="bg1"/>
-                    </a:solidFill>
-                  </a:tcPr>
-                </a:tc>
-                <a:tc>
-                  <a:txBody>
-                    <a:bodyPr/>
-                    <a:lstStyle/>
-                    <a:p>
-                      <a:pPr algn="ctr" fontAlgn="t" latinLnBrk="0"/>
-                      <a:r>
-                        <a:rPr lang="de-DE" sz="900">
-                          <a:effectLst/>
-                        </a:rPr>
-                        <a:t>High (30 heavy atoms)</a:t>
-                      </a:r>
-                    </a:p>
-                  </a:txBody>
-                  <a:tcPr marL="36890" marR="36890" marT="18445" marB="18445" anchor="ctr">
-                    <a:lnL w="12700" cap="flat" cmpd="sng" algn="ctr">
-                      <a:noFill/>
-                      <a:prstDash val="solid"/>
-                      <a:round/>
-                      <a:headEnd type="none" w="med" len="med"/>
-                      <a:tailEnd type="none" w="med" len="med"/>
-                    </a:lnL>
-                    <a:lnR w="12700" cap="flat" cmpd="sng" algn="ctr">
-                      <a:noFill/>
-                      <a:prstDash val="solid"/>
-                      <a:round/>
-                      <a:headEnd type="none" w="med" len="med"/>
-                      <a:tailEnd type="none" w="med" len="med"/>
-                    </a:lnR>
-                    <a:lnT w="12700" cap="flat" cmpd="sng" algn="ctr">
-                      <a:solidFill>
-                        <a:schemeClr val="tx1"/>
-                      </a:solidFill>
-                      <a:prstDash val="solid"/>
-                      <a:round/>
-                      <a:headEnd type="none" w="med" len="med"/>
-                      <a:tailEnd type="none" w="med" len="med"/>
-                    </a:lnT>
-                    <a:lnB w="12700" cap="flat" cmpd="sng" algn="ctr">
-                      <a:solidFill>
-                        <a:schemeClr val="tx1"/>
-                      </a:solidFill>
-                      <a:prstDash val="solid"/>
-                      <a:round/>
-                      <a:headEnd type="none" w="med" len="med"/>
-                      <a:tailEnd type="none" w="med" len="med"/>
-                    </a:lnB>
-                    <a:lnTlToBr w="12700" cmpd="sng">
-                      <a:noFill/>
-                      <a:prstDash val="solid"/>
-                    </a:lnTlToBr>
-                    <a:lnBlToTr w="12700" cmpd="sng">
-                      <a:noFill/>
-                      <a:prstDash val="solid"/>
-                    </a:lnBlToTr>
-                    <a:solidFill>
-                      <a:schemeClr val="bg1"/>
-                    </a:solidFill>
-                  </a:tcPr>
-                </a:tc>
-                <a:tc>
-                  <a:txBody>
-                    <a:bodyPr/>
-                    <a:lstStyle/>
-                    <a:p>
-                      <a:pPr algn="ctr" fontAlgn="t" latinLnBrk="0"/>
-                      <a:r>
-                        <a:rPr lang="de-DE" sz="900">
-                          <a:effectLst/>
-                        </a:rPr>
-                        <a:t>Active has optimal complexity</a:t>
-                      </a:r>
-                    </a:p>
-                  </a:txBody>
-                  <a:tcPr marL="36890" marR="36890" marT="18445" marB="18445" anchor="ctr">
-                    <a:lnL w="12700" cap="flat" cmpd="sng" algn="ctr">
-                      <a:noFill/>
-                      <a:prstDash val="solid"/>
-                      <a:round/>
-                      <a:headEnd type="none" w="med" len="med"/>
-                      <a:tailEnd type="none" w="med" len="med"/>
-                    </a:lnL>
-                    <a:lnR w="12700" cap="flat" cmpd="sng" algn="ctr">
-                      <a:solidFill>
-                        <a:schemeClr val="tx1"/>
-                      </a:solidFill>
-                      <a:prstDash val="solid"/>
-                      <a:round/>
-                      <a:headEnd type="none" w="med" len="med"/>
-                      <a:tailEnd type="none" w="med" len="med"/>
-                    </a:lnR>
-                    <a:lnT w="12700" cap="flat" cmpd="sng" algn="ctr">
-                      <a:solidFill>
-                        <a:schemeClr val="tx1"/>
-                      </a:solidFill>
-                      <a:prstDash val="solid"/>
-                      <a:round/>
-                      <a:headEnd type="none" w="med" len="med"/>
-                      <a:tailEnd type="none" w="med" len="med"/>
-                    </a:lnT>
-                    <a:lnB w="12700" cap="flat" cmpd="sng" algn="ctr">
-                      <a:solidFill>
-                        <a:schemeClr val="tx1"/>
-                      </a:solidFill>
-                      <a:prstDash val="solid"/>
-                      <a:round/>
-                      <a:headEnd type="none" w="med" len="med"/>
-                      <a:tailEnd type="none" w="med" len="med"/>
-                    </a:lnB>
-                    <a:lnTlToBr w="12700" cmpd="sng">
-                      <a:noFill/>
-                      <a:prstDash val="solid"/>
-                    </a:lnTlToBr>
-                    <a:lnBlToTr w="12700" cmpd="sng">
-                      <a:noFill/>
-                      <a:prstDash val="solid"/>
-                    </a:lnBlToTr>
-                    <a:solidFill>
-                      <a:schemeClr val="bg1"/>
-                    </a:solidFill>
-                  </a:tcPr>
-                </a:tc>
-                <a:extLst>
-                  <a:ext uri="{0D108BD9-81ED-4DB2-BD59-A6C34878D82A}">
-                    <a16:rowId xmlns:a16="http://schemas.microsoft.com/office/drawing/2014/main" val="924069180"/>
-                  </a:ext>
-                </a:extLst>
-              </a:tr>
-              <a:tr h="249349">
-                <a:tc>
-                  <a:txBody>
-                    <a:bodyPr/>
-                    <a:lstStyle/>
-                    <a:p>
-                      <a:pPr algn="ctr" fontAlgn="t" latinLnBrk="0"/>
-                      <a:r>
-                        <a:rPr lang="de-DE" sz="900" b="1">
-                          <a:effectLst/>
-                        </a:rPr>
-                        <a:t>Feature Contribution</a:t>
-                      </a:r>
-                      <a:endParaRPr lang="de-DE" sz="900">
-                        <a:effectLst/>
-                      </a:endParaRPr>
-                    </a:p>
-                  </a:txBody>
-                  <a:tcPr marL="36890" marR="36890" marT="18445" marB="18445" anchor="ctr">
-                    <a:lnL w="12700" cap="flat" cmpd="sng" algn="ctr">
-                      <a:solidFill>
-                        <a:schemeClr val="tx1"/>
-                      </a:solidFill>
-                      <a:prstDash val="solid"/>
-                      <a:round/>
-                      <a:headEnd type="none" w="med" len="med"/>
-                      <a:tailEnd type="none" w="med" len="med"/>
-                    </a:lnL>
-                    <a:lnR w="12700" cap="flat" cmpd="sng" algn="ctr">
-                      <a:noFill/>
-                      <a:prstDash val="solid"/>
-                      <a:round/>
-                      <a:headEnd type="none" w="med" len="med"/>
-                      <a:tailEnd type="none" w="med" len="med"/>
-                    </a:lnR>
-                    <a:lnT w="12700" cap="flat" cmpd="sng" algn="ctr">
-                      <a:solidFill>
-                        <a:schemeClr val="tx1"/>
-                      </a:solidFill>
-                      <a:prstDash val="solid"/>
-                      <a:round/>
-                      <a:headEnd type="none" w="med" len="med"/>
-                      <a:tailEnd type="none" w="med" len="med"/>
-                    </a:lnT>
-                    <a:lnB w="12700" cap="flat" cmpd="sng" algn="ctr">
-                      <a:solidFill>
-                        <a:schemeClr val="tx1"/>
-                      </a:solidFill>
-                      <a:prstDash val="solid"/>
-                      <a:round/>
-                      <a:headEnd type="none" w="med" len="med"/>
-                      <a:tailEnd type="none" w="med" len="med"/>
-                    </a:lnB>
-                    <a:lnTlToBr w="12700" cmpd="sng">
-                      <a:noFill/>
-                      <a:prstDash val="solid"/>
-                    </a:lnTlToBr>
-                    <a:lnBlToTr w="12700" cmpd="sng">
-                      <a:noFill/>
-                      <a:prstDash val="solid"/>
-                    </a:lnBlToTr>
-                    <a:solidFill>
-                      <a:schemeClr val="bg1"/>
-                    </a:solidFill>
-                  </a:tcPr>
-                </a:tc>
-                <a:tc>
-                  <a:txBody>
-                    <a:bodyPr/>
-                    <a:lstStyle/>
-                    <a:p>
-                      <a:pPr algn="ctr" fontAlgn="t" latinLnBrk="0"/>
-                      <a:r>
-                        <a:rPr lang="de-DE" sz="900" dirty="0">
-                          <a:effectLst/>
-                        </a:rPr>
-                        <a:t>Distributed </a:t>
-                      </a:r>
-                      <a:r>
-                        <a:rPr lang="de-DE" sz="900" dirty="0" err="1">
-                          <a:effectLst/>
-                        </a:rPr>
-                        <a:t>across</a:t>
-                      </a:r>
-                      <a:r>
-                        <a:rPr lang="de-DE" sz="900" dirty="0">
-                          <a:effectLst/>
-                        </a:rPr>
-                        <a:t> </a:t>
-                      </a:r>
-                      <a:r>
-                        <a:rPr lang="de-DE" sz="900" dirty="0" err="1">
-                          <a:effectLst/>
-                        </a:rPr>
-                        <a:t>scaffold</a:t>
-                      </a:r>
-                      <a:endParaRPr lang="de-DE" sz="900" dirty="0">
-                        <a:effectLst/>
-                      </a:endParaRPr>
-                    </a:p>
-                  </a:txBody>
-                  <a:tcPr marL="36890" marR="36890" marT="18445" marB="18445" anchor="ctr">
-                    <a:lnL w="12700" cap="flat" cmpd="sng" algn="ctr">
-                      <a:noFill/>
-                      <a:prstDash val="solid"/>
-                      <a:round/>
-                      <a:headEnd type="none" w="med" len="med"/>
-                      <a:tailEnd type="none" w="med" len="med"/>
-                    </a:lnL>
-                    <a:lnR w="12700" cap="flat" cmpd="sng" algn="ctr">
-                      <a:noFill/>
-                      <a:prstDash val="solid"/>
-                      <a:round/>
-                      <a:headEnd type="none" w="med" len="med"/>
-                      <a:tailEnd type="none" w="med" len="med"/>
-                    </a:lnR>
-                    <a:lnT w="12700" cap="flat" cmpd="sng" algn="ctr">
-                      <a:solidFill>
-                        <a:schemeClr val="tx1"/>
-                      </a:solidFill>
-                      <a:prstDash val="solid"/>
-                      <a:round/>
-                      <a:headEnd type="none" w="med" len="med"/>
-                      <a:tailEnd type="none" w="med" len="med"/>
-                    </a:lnT>
-                    <a:lnB w="12700" cap="flat" cmpd="sng" algn="ctr">
-                      <a:solidFill>
-                        <a:schemeClr val="tx1"/>
-                      </a:solidFill>
-                      <a:prstDash val="solid"/>
-                      <a:round/>
-                      <a:headEnd type="none" w="med" len="med"/>
-                      <a:tailEnd type="none" w="med" len="med"/>
-                    </a:lnB>
-                    <a:lnTlToBr w="12700" cmpd="sng">
-                      <a:noFill/>
-                      <a:prstDash val="solid"/>
-                    </a:lnTlToBr>
-                    <a:lnBlToTr w="12700" cmpd="sng">
-                      <a:noFill/>
-                      <a:prstDash val="solid"/>
-                    </a:lnBlToTr>
-                    <a:solidFill>
-                      <a:schemeClr val="bg1"/>
-                    </a:solidFill>
-                  </a:tcPr>
-                </a:tc>
-                <a:tc>
-                  <a:txBody>
-                    <a:bodyPr/>
-                    <a:lstStyle/>
-                    <a:p>
-                      <a:pPr algn="ctr" fontAlgn="t" latinLnBrk="0"/>
-                      <a:r>
-                        <a:rPr lang="de-DE" sz="900" dirty="0" err="1">
-                          <a:effectLst/>
-                        </a:rPr>
-                        <a:t>Concentrated</a:t>
-                      </a:r>
-                      <a:r>
-                        <a:rPr lang="de-DE" sz="900" dirty="0">
-                          <a:effectLst/>
-                        </a:rPr>
-                        <a:t> in </a:t>
-                      </a:r>
-                      <a:r>
-                        <a:rPr lang="de-DE" sz="900" dirty="0" err="1">
-                          <a:effectLst/>
-                        </a:rPr>
-                        <a:t>one</a:t>
-                      </a:r>
-                      <a:r>
-                        <a:rPr lang="de-DE" sz="900" dirty="0">
-                          <a:effectLst/>
-                        </a:rPr>
-                        <a:t> </a:t>
-                      </a:r>
-                      <a:r>
-                        <a:rPr lang="de-DE" sz="900" dirty="0" err="1">
-                          <a:effectLst/>
-                        </a:rPr>
-                        <a:t>bond</a:t>
-                      </a:r>
-                      <a:endParaRPr lang="de-DE" sz="900" dirty="0">
-                        <a:effectLst/>
-                      </a:endParaRPr>
-                    </a:p>
-                  </a:txBody>
-                  <a:tcPr marL="36890" marR="36890" marT="18445" marB="18445" anchor="ctr">
-                    <a:lnL w="12700" cap="flat" cmpd="sng" algn="ctr">
-                      <a:noFill/>
-                      <a:prstDash val="solid"/>
-                      <a:round/>
-                      <a:headEnd type="none" w="med" len="med"/>
-                      <a:tailEnd type="none" w="med" len="med"/>
-                    </a:lnL>
-                    <a:lnR w="12700" cap="flat" cmpd="sng" algn="ctr">
-                      <a:noFill/>
-                      <a:prstDash val="solid"/>
-                      <a:round/>
-                      <a:headEnd type="none" w="med" len="med"/>
-                      <a:tailEnd type="none" w="med" len="med"/>
-                    </a:lnR>
-                    <a:lnT w="12700" cap="flat" cmpd="sng" algn="ctr">
-                      <a:solidFill>
-                        <a:schemeClr val="tx1"/>
-                      </a:solidFill>
-                      <a:prstDash val="solid"/>
-                      <a:round/>
-                      <a:headEnd type="none" w="med" len="med"/>
-                      <a:tailEnd type="none" w="med" len="med"/>
-                    </a:lnT>
-                    <a:lnB w="12700" cap="flat" cmpd="sng" algn="ctr">
-                      <a:solidFill>
-                        <a:schemeClr val="tx1"/>
-                      </a:solidFill>
-                      <a:prstDash val="solid"/>
-                      <a:round/>
-                      <a:headEnd type="none" w="med" len="med"/>
-                      <a:tailEnd type="none" w="med" len="med"/>
-                    </a:lnB>
-                    <a:lnTlToBr w="12700" cmpd="sng">
-                      <a:noFill/>
-                      <a:prstDash val="solid"/>
-                    </a:lnTlToBr>
-                    <a:lnBlToTr w="12700" cmpd="sng">
-                      <a:noFill/>
-                      <a:prstDash val="solid"/>
-                    </a:lnBlToTr>
-                    <a:solidFill>
-                      <a:schemeClr val="bg1"/>
-                    </a:solidFill>
-                  </a:tcPr>
-                </a:tc>
-                <a:tc>
-                  <a:txBody>
-                    <a:bodyPr/>
-                    <a:lstStyle/>
-                    <a:p>
-                      <a:pPr algn="ctr" fontAlgn="t" latinLnBrk="0"/>
-                      <a:r>
-                        <a:rPr lang="en-US" sz="900" dirty="0">
-                          <a:effectLst/>
-                        </a:rPr>
-                        <a:t>Active uses more balanced features</a:t>
-                      </a:r>
-                    </a:p>
-                  </a:txBody>
-                  <a:tcPr marL="36890" marR="36890" marT="18445" marB="18445" anchor="ctr">
-                    <a:lnL w="12700" cap="flat" cmpd="sng" algn="ctr">
-                      <a:noFill/>
-                      <a:prstDash val="solid"/>
-                      <a:round/>
-                      <a:headEnd type="none" w="med" len="med"/>
-                      <a:tailEnd type="none" w="med" len="med"/>
-                    </a:lnL>
-                    <a:lnR w="12700" cap="flat" cmpd="sng" algn="ctr">
-                      <a:solidFill>
-                        <a:schemeClr val="tx1"/>
-                      </a:solidFill>
-                      <a:prstDash val="solid"/>
-                      <a:round/>
-                      <a:headEnd type="none" w="med" len="med"/>
-                      <a:tailEnd type="none" w="med" len="med"/>
-                    </a:lnR>
-                    <a:lnT w="12700" cap="flat" cmpd="sng" algn="ctr">
-                      <a:solidFill>
-                        <a:schemeClr val="tx1"/>
-                      </a:solidFill>
-                      <a:prstDash val="solid"/>
-                      <a:round/>
-                      <a:headEnd type="none" w="med" len="med"/>
-                      <a:tailEnd type="none" w="med" len="med"/>
-                    </a:lnT>
-                    <a:lnB w="12700" cap="flat" cmpd="sng" algn="ctr">
-                      <a:solidFill>
-                        <a:schemeClr val="tx1"/>
-                      </a:solidFill>
-                      <a:prstDash val="solid"/>
-                      <a:round/>
-                      <a:headEnd type="none" w="med" len="med"/>
-                      <a:tailEnd type="none" w="med" len="med"/>
-                    </a:lnB>
-                    <a:lnTlToBr w="12700" cmpd="sng">
-                      <a:noFill/>
-                      <a:prstDash val="solid"/>
-                    </a:lnTlToBr>
-                    <a:lnBlToTr w="12700" cmpd="sng">
-                      <a:noFill/>
-                      <a:prstDash val="solid"/>
-                    </a:lnBlToTr>
-                    <a:solidFill>
-                      <a:schemeClr val="bg1"/>
-                    </a:solidFill>
-                  </a:tcPr>
-                </a:tc>
-                <a:extLst>
-                  <a:ext uri="{0D108BD9-81ED-4DB2-BD59-A6C34878D82A}">
-                    <a16:rowId xmlns:a16="http://schemas.microsoft.com/office/drawing/2014/main" val="1126296687"/>
-                  </a:ext>
-                </a:extLst>
-              </a:tr>
-            </a:tbl>
-          </a:graphicData>
-        </a:graphic>
-      </p:graphicFrame>
-    </p:spTree>
-    <p:extLst>
-      <p:ext uri="{BB962C8B-B14F-4D97-AF65-F5344CB8AC3E}">
-        <p14:creationId xmlns:p14="http://schemas.microsoft.com/office/powerpoint/2010/main" val="3779158166"/>
       </p:ext>
     </p:extLst>
   </p:cSld>

--- a/slides/AI_Agent_Explainability.pptx
+++ b/slides/AI_Agent_Explainability.pptx
@@ -151,6 +151,45 @@
 <file path=ppt/changesInfos/changesInfo1.xml><?xml version="1.0" encoding="utf-8"?>
 <pc:chgInfo xmlns:a="http://schemas.openxmlformats.org/drawingml/2006/main" xmlns:r="http://schemas.openxmlformats.org/officeDocument/2006/relationships" xmlns:ac="http://schemas.microsoft.com/office/drawing/2013/main/command" xmlns:pc="http://schemas.microsoft.com/office/powerpoint/2013/main/command">
   <pc:docChgLst>
+    <pc:chgData name="Tiago Janela" userId="ee1a79fe-c79c-4f34-9602-7f6f2f0482b3" providerId="ADAL" clId="{67D2C233-DF3C-4C6D-9040-D7553E3BCB8A}"/>
+    <pc:docChg chg="delSld modSld">
+      <pc:chgData name="Tiago Janela" userId="ee1a79fe-c79c-4f34-9602-7f6f2f0482b3" providerId="ADAL" clId="{67D2C233-DF3C-4C6D-9040-D7553E3BCB8A}" dt="2026-03-16T14:03:02.466" v="54" actId="20577"/>
+      <pc:docMkLst>
+        <pc:docMk/>
+      </pc:docMkLst>
+      <pc:sldChg chg="modSp mod">
+        <pc:chgData name="Tiago Janela" userId="ee1a79fe-c79c-4f34-9602-7f6f2f0482b3" providerId="ADAL" clId="{67D2C233-DF3C-4C6D-9040-D7553E3BCB8A}" dt="2026-03-16T14:03:02.466" v="54" actId="20577"/>
+        <pc:sldMkLst>
+          <pc:docMk/>
+          <pc:sldMk cId="829672710" sldId="297"/>
+        </pc:sldMkLst>
+        <pc:spChg chg="mod">
+          <ac:chgData name="Tiago Janela" userId="ee1a79fe-c79c-4f34-9602-7f6f2f0482b3" providerId="ADAL" clId="{67D2C233-DF3C-4C6D-9040-D7553E3BCB8A}" dt="2026-03-16T14:03:02.466" v="54" actId="20577"/>
+          <ac:spMkLst>
+            <pc:docMk/>
+            <pc:sldMk cId="829672710" sldId="297"/>
+            <ac:spMk id="156" creationId="{00000000-0000-0000-0000-000000000000}"/>
+          </ac:spMkLst>
+        </pc:spChg>
+      </pc:sldChg>
+      <pc:sldChg chg="modSp mod">
+        <pc:chgData name="Tiago Janela" userId="ee1a79fe-c79c-4f34-9602-7f6f2f0482b3" providerId="ADAL" clId="{67D2C233-DF3C-4C6D-9040-D7553E3BCB8A}" dt="2026-03-16T14:02:34.148" v="0" actId="20577"/>
+        <pc:sldMkLst>
+          <pc:docMk/>
+          <pc:sldMk cId="721732568" sldId="298"/>
+        </pc:sldMkLst>
+        <pc:spChg chg="mod">
+          <ac:chgData name="Tiago Janela" userId="ee1a79fe-c79c-4f34-9602-7f6f2f0482b3" providerId="ADAL" clId="{67D2C233-DF3C-4C6D-9040-D7553E3BCB8A}" dt="2026-03-16T14:02:34.148" v="0" actId="20577"/>
+          <ac:spMkLst>
+            <pc:docMk/>
+            <pc:sldMk cId="721732568" sldId="298"/>
+            <ac:spMk id="2" creationId="{870990D0-7AC5-46BA-6FC4-274F8E0A3ABE}"/>
+          </ac:spMkLst>
+        </pc:spChg>
+      </pc:sldChg>
+    </pc:docChg>
+  </pc:docChgLst>
+  <pc:docChgLst>
     <pc:chgData name="Tiago Janela" userId="ee1a79fe-c79c-4f34-9602-7f6f2f0482b3" providerId="ADAL" clId="{6BE67FA1-4A27-48B9-BA6A-E25A9786A9CC}"/>
     <pc:docChg chg="undo custSel addSld modSld sldOrd">
       <pc:chgData name="Tiago Janela" userId="ee1a79fe-c79c-4f34-9602-7f6f2f0482b3" providerId="ADAL" clId="{6BE67FA1-4A27-48B9-BA6A-E25A9786A9CC}" dt="2026-03-20T13:52:23.099" v="1063" actId="20577"/>
@@ -256,6 +295,30 @@
             <ac:picMk id="6" creationId="{D3BA145D-265C-C0B1-7C0E-2EE32552E491}"/>
           </ac:picMkLst>
         </pc:picChg>
+      </pc:sldChg>
+    </pc:docChg>
+  </pc:docChgLst>
+  <pc:docChgLst>
+    <pc:chgData name="Tiago Janela" userId="ee1a79fe-c79c-4f34-9602-7f6f2f0482b3" providerId="ADAL" clId="{A1A622BE-A8AD-47B7-8802-BAC61BCE5126}"/>
+    <pc:docChg chg="undo custSel modSld">
+      <pc:chgData name="Tiago Janela" userId="ee1a79fe-c79c-4f34-9602-7f6f2f0482b3" providerId="ADAL" clId="{A1A622BE-A8AD-47B7-8802-BAC61BCE5126}" dt="2026-04-02T12:40:40.607" v="50" actId="478"/>
+      <pc:docMkLst>
+        <pc:docMk/>
+      </pc:docMkLst>
+      <pc:sldChg chg="addSp delSp modSp mod">
+        <pc:chgData name="Tiago Janela" userId="ee1a79fe-c79c-4f34-9602-7f6f2f0482b3" providerId="ADAL" clId="{A1A622BE-A8AD-47B7-8802-BAC61BCE5126}" dt="2026-04-02T12:40:40.607" v="50" actId="478"/>
+        <pc:sldMkLst>
+          <pc:docMk/>
+          <pc:sldMk cId="1707478755" sldId="299"/>
+        </pc:sldMkLst>
+        <pc:graphicFrameChg chg="add del modGraphic">
+          <ac:chgData name="Tiago Janela" userId="ee1a79fe-c79c-4f34-9602-7f6f2f0482b3" providerId="ADAL" clId="{A1A622BE-A8AD-47B7-8802-BAC61BCE5126}" dt="2026-04-02T12:40:40.607" v="50" actId="478"/>
+          <ac:graphicFrameMkLst>
+            <pc:docMk/>
+            <pc:sldMk cId="1707478755" sldId="299"/>
+            <ac:graphicFrameMk id="4" creationId="{689F2044-8E26-DCF5-DE2D-9AD979C8C1EE}"/>
+          </ac:graphicFrameMkLst>
+        </pc:graphicFrameChg>
       </pc:sldChg>
     </pc:docChg>
   </pc:docChgLst>
@@ -3396,69 +3459,6 @@
     </pc:docChg>
   </pc:docChgLst>
   <pc:docChgLst>
-    <pc:chgData name="Tiago Janela" userId="ee1a79fe-c79c-4f34-9602-7f6f2f0482b3" providerId="ADAL" clId="{A1A622BE-A8AD-47B7-8802-BAC61BCE5126}"/>
-    <pc:docChg chg="undo custSel modSld">
-      <pc:chgData name="Tiago Janela" userId="ee1a79fe-c79c-4f34-9602-7f6f2f0482b3" providerId="ADAL" clId="{A1A622BE-A8AD-47B7-8802-BAC61BCE5126}" dt="2026-04-02T12:40:40.607" v="50" actId="478"/>
-      <pc:docMkLst>
-        <pc:docMk/>
-      </pc:docMkLst>
-      <pc:sldChg chg="addSp delSp modSp mod">
-        <pc:chgData name="Tiago Janela" userId="ee1a79fe-c79c-4f34-9602-7f6f2f0482b3" providerId="ADAL" clId="{A1A622BE-A8AD-47B7-8802-BAC61BCE5126}" dt="2026-04-02T12:40:40.607" v="50" actId="478"/>
-        <pc:sldMkLst>
-          <pc:docMk/>
-          <pc:sldMk cId="1707478755" sldId="299"/>
-        </pc:sldMkLst>
-        <pc:graphicFrameChg chg="add del modGraphic">
-          <ac:chgData name="Tiago Janela" userId="ee1a79fe-c79c-4f34-9602-7f6f2f0482b3" providerId="ADAL" clId="{A1A622BE-A8AD-47B7-8802-BAC61BCE5126}" dt="2026-04-02T12:40:40.607" v="50" actId="478"/>
-          <ac:graphicFrameMkLst>
-            <pc:docMk/>
-            <pc:sldMk cId="1707478755" sldId="299"/>
-            <ac:graphicFrameMk id="4" creationId="{689F2044-8E26-DCF5-DE2D-9AD979C8C1EE}"/>
-          </ac:graphicFrameMkLst>
-        </pc:graphicFrameChg>
-      </pc:sldChg>
-    </pc:docChg>
-  </pc:docChgLst>
-  <pc:docChgLst>
-    <pc:chgData name="Tiago Janela" userId="ee1a79fe-c79c-4f34-9602-7f6f2f0482b3" providerId="ADAL" clId="{67D2C233-DF3C-4C6D-9040-D7553E3BCB8A}"/>
-    <pc:docChg chg="delSld modSld">
-      <pc:chgData name="Tiago Janela" userId="ee1a79fe-c79c-4f34-9602-7f6f2f0482b3" providerId="ADAL" clId="{67D2C233-DF3C-4C6D-9040-D7553E3BCB8A}" dt="2026-03-16T14:03:02.466" v="54" actId="20577"/>
-      <pc:docMkLst>
-        <pc:docMk/>
-      </pc:docMkLst>
-      <pc:sldChg chg="modSp mod">
-        <pc:chgData name="Tiago Janela" userId="ee1a79fe-c79c-4f34-9602-7f6f2f0482b3" providerId="ADAL" clId="{67D2C233-DF3C-4C6D-9040-D7553E3BCB8A}" dt="2026-03-16T14:03:02.466" v="54" actId="20577"/>
-        <pc:sldMkLst>
-          <pc:docMk/>
-          <pc:sldMk cId="829672710" sldId="297"/>
-        </pc:sldMkLst>
-        <pc:spChg chg="mod">
-          <ac:chgData name="Tiago Janela" userId="ee1a79fe-c79c-4f34-9602-7f6f2f0482b3" providerId="ADAL" clId="{67D2C233-DF3C-4C6D-9040-D7553E3BCB8A}" dt="2026-03-16T14:03:02.466" v="54" actId="20577"/>
-          <ac:spMkLst>
-            <pc:docMk/>
-            <pc:sldMk cId="829672710" sldId="297"/>
-            <ac:spMk id="156" creationId="{00000000-0000-0000-0000-000000000000}"/>
-          </ac:spMkLst>
-        </pc:spChg>
-      </pc:sldChg>
-      <pc:sldChg chg="modSp mod">
-        <pc:chgData name="Tiago Janela" userId="ee1a79fe-c79c-4f34-9602-7f6f2f0482b3" providerId="ADAL" clId="{67D2C233-DF3C-4C6D-9040-D7553E3BCB8A}" dt="2026-03-16T14:02:34.148" v="0" actId="20577"/>
-        <pc:sldMkLst>
-          <pc:docMk/>
-          <pc:sldMk cId="721732568" sldId="298"/>
-        </pc:sldMkLst>
-        <pc:spChg chg="mod">
-          <ac:chgData name="Tiago Janela" userId="ee1a79fe-c79c-4f34-9602-7f6f2f0482b3" providerId="ADAL" clId="{67D2C233-DF3C-4C6D-9040-D7553E3BCB8A}" dt="2026-03-16T14:02:34.148" v="0" actId="20577"/>
-          <ac:spMkLst>
-            <pc:docMk/>
-            <pc:sldMk cId="721732568" sldId="298"/>
-            <ac:spMk id="2" creationId="{870990D0-7AC5-46BA-6FC4-274F8E0A3ABE}"/>
-          </ac:spMkLst>
-        </pc:spChg>
-      </pc:sldChg>
-    </pc:docChg>
-  </pc:docChgLst>
-  <pc:docChgLst>
     <pc:chgData name="Tiago Janela" userId="ee1a79fe-c79c-4f34-9602-7f6f2f0482b3" providerId="ADAL" clId="{97693404-9C1B-400A-95DF-A7B72570E7A0}"/>
     <pc:docChg chg="undo custSel addSld delSld modSld sldOrd">
       <pc:chgData name="Tiago Janela" userId="ee1a79fe-c79c-4f34-9602-7f6f2f0482b3" providerId="ADAL" clId="{97693404-9C1B-400A-95DF-A7B72570E7A0}" dt="2026-03-09T10:33:25.226" v="5259" actId="20577"/>
@@ -3567,7 +3567,7 @@
           <a:p>
             <a:fld id="{83EC3DE1-3765-45C5-94E7-BC41A6E38B2C}" type="datetimeFigureOut">
               <a:rPr lang="en-US" smtClean="0"/>
-              <a:t>5/7/2026</a:t>
+              <a:t>5/28/2026</a:t>
             </a:fld>
             <a:endParaRPr lang="en-US"/>
           </a:p>
@@ -15841,19 +15841,7 @@
               <a:rPr lang="en-US" sz="2000" spc="-1" dirty="0">
                 <a:latin typeface="Century Gothic"/>
               </a:rPr>
-              <a:t>Correctly describes </a:t>
-            </a:r>
-            <a:r>
-              <a:rPr lang="en-US" sz="2000" spc="-1" dirty="0" err="1">
-                <a:latin typeface="Century Gothic"/>
-              </a:rPr>
-              <a:t>ulitity</a:t>
-            </a:r>
-            <a:r>
-              <a:rPr lang="en-US" sz="2000" spc="-1" dirty="0">
-                <a:latin typeface="Century Gothic"/>
-              </a:rPr>
-              <a:t> of </a:t>
+              <a:t>Correctly describes utility of </a:t>
             </a:r>
             <a:r>
               <a:rPr lang="en-US" sz="2000" spc="-1" dirty="0" err="1">
@@ -17164,19 +17152,7 @@
               <a:rPr lang="en-US" sz="2000" spc="-1" dirty="0">
                 <a:latin typeface="Century Gothic"/>
               </a:rPr>
-              <a:t>Correctly describes </a:t>
-            </a:r>
-            <a:r>
-              <a:rPr lang="en-US" sz="2000" spc="-1" dirty="0" err="1">
-                <a:latin typeface="Century Gothic"/>
-              </a:rPr>
-              <a:t>ulitity</a:t>
-            </a:r>
-            <a:r>
-              <a:rPr lang="en-US" sz="2000" spc="-1" dirty="0">
-                <a:latin typeface="Century Gothic"/>
-              </a:rPr>
-              <a:t> of </a:t>
+              <a:t>Correctly describes utility of </a:t>
             </a:r>
             <a:r>
               <a:rPr lang="en-US" sz="2000" spc="-1" dirty="0" err="1">
